--- a/Fiches de personnage.pptx
+++ b/Fiches de personnage.pptx
@@ -139,7 +139,7 @@
       </p:grpSpPr>
       <p:sp>
         <p:nvSpPr>
-          <p:cNvPr id="168830954" name="Espace réservé d'en-tête 1"/>
+          <p:cNvPr id="1611358675" name="Espace réservé d'en-tête 1"/>
           <p:cNvSpPr>
             <a:spLocks noGrp="1"/>
           </p:cNvSpPr>
@@ -173,7 +173,7 @@
       </p:sp>
       <p:sp>
         <p:nvSpPr>
-          <p:cNvPr id="979733396" name="Espace réservé pour la date 2"/>
+          <p:cNvPr id="1240382449" name="Espace réservé pour la date 2"/>
           <p:cNvSpPr>
             <a:spLocks noGrp="1"/>
           </p:cNvSpPr>
@@ -211,7 +211,7 @@
       </p:sp>
       <p:sp>
         <p:nvSpPr>
-          <p:cNvPr id="292985014" name="Espace réservé pour l'image de la diapositive 3"/>
+          <p:cNvPr id="667959810" name="Espace réservé pour l'image de la diapositive 3"/>
           <p:cNvSpPr>
             <a:spLocks noChangeAspect="1" noGrp="1" noRot="1"/>
           </p:cNvSpPr>
@@ -247,7 +247,7 @@
       </p:sp>
       <p:sp>
         <p:nvSpPr>
-          <p:cNvPr id="1867040131" name="Remarques Espace réservé 4"/>
+          <p:cNvPr id="1593558528" name="Remarques Espace réservé 4"/>
           <p:cNvSpPr>
             <a:spLocks noGrp="1"/>
           </p:cNvSpPr>
@@ -321,7 +321,7 @@
       </p:sp>
       <p:sp>
         <p:nvSpPr>
-          <p:cNvPr id="1227810071" name="Espace réservé du pied de page 5"/>
+          <p:cNvPr id="665141574" name="Espace réservé du pied de page 5"/>
           <p:cNvSpPr>
             <a:spLocks noGrp="1"/>
           </p:cNvSpPr>
@@ -355,7 +355,7 @@
       </p:sp>
       <p:sp>
         <p:nvSpPr>
-          <p:cNvPr id="159436781" name="Espace réservé du numéro de diapositive 6"/>
+          <p:cNvPr id="843821831" name="Espace réservé du numéro de diapositive 6"/>
           <p:cNvSpPr>
             <a:spLocks noGrp="1"/>
           </p:cNvSpPr>
@@ -508,7 +508,7 @@
       </p:grpSpPr>
       <p:sp>
         <p:nvSpPr>
-          <p:cNvPr id="2026348996" name="Espace réservé pour l'image de la diapositive 1"/>
+          <p:cNvPr id="1268711428" name="Espace réservé pour l'image de la diapositive 1"/>
           <p:cNvSpPr>
             <a:spLocks noChangeAspect="1" noGrp="1" noRot="1"/>
           </p:cNvSpPr>
@@ -525,7 +525,7 @@
       </p:sp>
       <p:sp>
         <p:nvSpPr>
-          <p:cNvPr id="40227706" name="Remarques Espace réservé 2"/>
+          <p:cNvPr id="2060843894" name="Remarques Espace réservé 2"/>
           <p:cNvSpPr>
             <a:spLocks noGrp="1"/>
           </p:cNvSpPr>
@@ -550,7 +550,7 @@
       </p:sp>
       <p:sp>
         <p:nvSpPr>
-          <p:cNvPr id="291236771" name="Espace réservé pour le numéro de diapositive 3"/>
+          <p:cNvPr id="1883535122" name="Espace réservé pour le numéro de diapositive 3"/>
           <p:cNvSpPr>
             <a:spLocks noGrp="1"/>
           </p:cNvSpPr>
@@ -601,7 +601,7 @@
       </p:grpSpPr>
       <p:sp>
         <p:nvSpPr>
-          <p:cNvPr id="1573429760" name="Espace réservé pour l'image de la diapositive 1"/>
+          <p:cNvPr id="1747710818" name="Espace réservé pour l'image de la diapositive 1"/>
           <p:cNvSpPr>
             <a:spLocks noChangeAspect="1" noGrp="1" noRot="1"/>
           </p:cNvSpPr>
@@ -618,7 +618,7 @@
       </p:sp>
       <p:sp>
         <p:nvSpPr>
-          <p:cNvPr id="2118528062" name="Remarques Espace réservé 2"/>
+          <p:cNvPr id="523858642" name="Remarques Espace réservé 2"/>
           <p:cNvSpPr>
             <a:spLocks noGrp="1"/>
           </p:cNvSpPr>
@@ -643,7 +643,7 @@
       </p:sp>
       <p:sp>
         <p:nvSpPr>
-          <p:cNvPr id="1352129496" name="Espace réservé pour le numéro de diapositive 3"/>
+          <p:cNvPr id="1308948042" name="Espace réservé pour le numéro de diapositive 3"/>
           <p:cNvSpPr>
             <a:spLocks noGrp="1"/>
           </p:cNvSpPr>
@@ -694,7 +694,7 @@
       </p:grpSpPr>
       <p:sp>
         <p:nvSpPr>
-          <p:cNvPr id="1136342378" name="Espace réservé pour l'image de la diapositive 1"/>
+          <p:cNvPr id="1986630324" name="Espace réservé pour l'image de la diapositive 1"/>
           <p:cNvSpPr>
             <a:spLocks noChangeAspect="1" noGrp="1" noRot="1"/>
           </p:cNvSpPr>
@@ -711,7 +711,7 @@
       </p:sp>
       <p:sp>
         <p:nvSpPr>
-          <p:cNvPr id="584463660" name="Remarques Espace réservé 2"/>
+          <p:cNvPr id="121451290" name="Remarques Espace réservé 2"/>
           <p:cNvSpPr>
             <a:spLocks noGrp="1"/>
           </p:cNvSpPr>
@@ -736,7 +736,7 @@
       </p:sp>
       <p:sp>
         <p:nvSpPr>
-          <p:cNvPr id="506661757" name="Espace réservé pour le numéro de diapositive 3"/>
+          <p:cNvPr id="969248097" name="Espace réservé pour le numéro de diapositive 3"/>
           <p:cNvSpPr>
             <a:spLocks noGrp="1"/>
           </p:cNvSpPr>
@@ -787,7 +787,7 @@
       </p:grpSpPr>
       <p:sp>
         <p:nvSpPr>
-          <p:cNvPr id="722051918" name="Espace réservé pour l'image de la diapositive 1"/>
+          <p:cNvPr id="1358662438" name="Espace réservé pour l'image de la diapositive 1"/>
           <p:cNvSpPr>
             <a:spLocks noChangeAspect="1" noGrp="1" noRot="1"/>
           </p:cNvSpPr>
@@ -804,7 +804,7 @@
       </p:sp>
       <p:sp>
         <p:nvSpPr>
-          <p:cNvPr id="1091299151" name="Remarques Espace réservé 2"/>
+          <p:cNvPr id="2002215001" name="Remarques Espace réservé 2"/>
           <p:cNvSpPr>
             <a:spLocks noGrp="1"/>
           </p:cNvSpPr>
@@ -829,7 +829,7 @@
       </p:sp>
       <p:sp>
         <p:nvSpPr>
-          <p:cNvPr id="947275112" name="Espace réservé pour le numéro de diapositive 3"/>
+          <p:cNvPr id="77751685" name="Espace réservé pour le numéro de diapositive 3"/>
           <p:cNvSpPr>
             <a:spLocks noGrp="1"/>
           </p:cNvSpPr>
@@ -880,7 +880,7 @@
       </p:grpSpPr>
       <p:sp>
         <p:nvSpPr>
-          <p:cNvPr id="656950076" name="Espace réservé pour l'image de la diapositive 1"/>
+          <p:cNvPr id="1853815852" name="Espace réservé pour l'image de la diapositive 1"/>
           <p:cNvSpPr>
             <a:spLocks noChangeAspect="1" noGrp="1" noRot="1"/>
           </p:cNvSpPr>
@@ -897,7 +897,7 @@
       </p:sp>
       <p:sp>
         <p:nvSpPr>
-          <p:cNvPr id="929002874" name="Remarques Espace réservé 2"/>
+          <p:cNvPr id="705382824" name="Remarques Espace réservé 2"/>
           <p:cNvSpPr>
             <a:spLocks noGrp="1"/>
           </p:cNvSpPr>
@@ -922,7 +922,7 @@
       </p:sp>
       <p:sp>
         <p:nvSpPr>
-          <p:cNvPr id="302669541" name="Espace réservé pour le numéro de diapositive 3"/>
+          <p:cNvPr id="303638658" name="Espace réservé pour le numéro de diapositive 3"/>
           <p:cNvSpPr>
             <a:spLocks noGrp="1"/>
           </p:cNvSpPr>
@@ -973,7 +973,7 @@
       </p:grpSpPr>
       <p:sp>
         <p:nvSpPr>
-          <p:cNvPr id="1205344949" name="Espace réservé pour l'image de la diapositive 1"/>
+          <p:cNvPr id="1293322011" name="Espace réservé pour l'image de la diapositive 1"/>
           <p:cNvSpPr>
             <a:spLocks noChangeAspect="1" noGrp="1" noRot="1"/>
           </p:cNvSpPr>
@@ -990,7 +990,7 @@
       </p:sp>
       <p:sp>
         <p:nvSpPr>
-          <p:cNvPr id="1837332270" name="Remarques Espace réservé 2"/>
+          <p:cNvPr id="361492803" name="Remarques Espace réservé 2"/>
           <p:cNvSpPr>
             <a:spLocks noGrp="1"/>
           </p:cNvSpPr>
@@ -1015,7 +1015,7 @@
       </p:sp>
       <p:sp>
         <p:nvSpPr>
-          <p:cNvPr id="1695346583" name="Espace réservé pour le numéro de diapositive 3"/>
+          <p:cNvPr id="233407976" name="Espace réservé pour le numéro de diapositive 3"/>
           <p:cNvSpPr>
             <a:spLocks noGrp="1"/>
           </p:cNvSpPr>
@@ -1066,7 +1066,7 @@
       </p:grpSpPr>
       <p:sp>
         <p:nvSpPr>
-          <p:cNvPr id="370790221" name="Titre 1"/>
+          <p:cNvPr id="397627824" name="Titre 1"/>
           <p:cNvSpPr>
             <a:spLocks noGrp="1"/>
           </p:cNvSpPr>
@@ -1101,7 +1101,7 @@
       </p:sp>
       <p:sp>
         <p:nvSpPr>
-          <p:cNvPr id="1580731151" name="Sous-titre 2"/>
+          <p:cNvPr id="432473864" name="Sous-titre 2"/>
           <p:cNvSpPr>
             <a:spLocks noGrp="1"/>
           </p:cNvSpPr>
@@ -1169,7 +1169,7 @@
       </p:sp>
       <p:sp>
         <p:nvSpPr>
-          <p:cNvPr id="1847793634" name="Espace réservé de la date 3"/>
+          <p:cNvPr id="26122471" name="Espace réservé de la date 3"/>
           <p:cNvSpPr>
             <a:spLocks noGrp="1"/>
           </p:cNvSpPr>
@@ -1195,7 +1195,7 @@
       </p:sp>
       <p:sp>
         <p:nvSpPr>
-          <p:cNvPr id="932944441" name="Espace réservé du pied de page 4"/>
+          <p:cNvPr id="1489028079" name="Espace réservé du pied de page 4"/>
           <p:cNvSpPr>
             <a:spLocks noGrp="1"/>
           </p:cNvSpPr>
@@ -1217,7 +1217,7 @@
       </p:sp>
       <p:sp>
         <p:nvSpPr>
-          <p:cNvPr id="1308269131" name="Espace réservé du numéro de diapositive 5"/>
+          <p:cNvPr id="1739665035" name="Espace réservé du numéro de diapositive 5"/>
           <p:cNvSpPr>
             <a:spLocks noGrp="1"/>
           </p:cNvSpPr>
@@ -1268,7 +1268,7 @@
       </p:grpSpPr>
       <p:sp>
         <p:nvSpPr>
-          <p:cNvPr id="595599084" name="Titre 1"/>
+          <p:cNvPr id="1994062324" name="Titre 1"/>
           <p:cNvSpPr>
             <a:spLocks noGrp="1"/>
           </p:cNvSpPr>
@@ -1294,7 +1294,7 @@
       </p:sp>
       <p:sp>
         <p:nvSpPr>
-          <p:cNvPr id="866096469" name="Espace réservé du texte vertical 2"/>
+          <p:cNvPr id="1699437713" name="Espace réservé du texte vertical 2"/>
           <p:cNvSpPr>
             <a:spLocks noGrp="1"/>
           </p:cNvSpPr>
@@ -1360,7 +1360,7 @@
       </p:sp>
       <p:sp>
         <p:nvSpPr>
-          <p:cNvPr id="347774922" name="Espace réservé de la date 3"/>
+          <p:cNvPr id="76321254" name="Espace réservé de la date 3"/>
           <p:cNvSpPr>
             <a:spLocks noGrp="1"/>
           </p:cNvSpPr>
@@ -1386,7 +1386,7 @@
       </p:sp>
       <p:sp>
         <p:nvSpPr>
-          <p:cNvPr id="896772494" name="Espace réservé du pied de page 4"/>
+          <p:cNvPr id="294903855" name="Espace réservé du pied de page 4"/>
           <p:cNvSpPr>
             <a:spLocks noGrp="1"/>
           </p:cNvSpPr>
@@ -1408,7 +1408,7 @@
       </p:sp>
       <p:sp>
         <p:nvSpPr>
-          <p:cNvPr id="805147555" name="Espace réservé du numéro de diapositive 5"/>
+          <p:cNvPr id="816700703" name="Espace réservé du numéro de diapositive 5"/>
           <p:cNvSpPr>
             <a:spLocks noGrp="1"/>
           </p:cNvSpPr>
@@ -1459,7 +1459,7 @@
       </p:grpSpPr>
       <p:sp>
         <p:nvSpPr>
-          <p:cNvPr id="1945508175" name="Titre vertical 1"/>
+          <p:cNvPr id="1887916060" name="Titre vertical 1"/>
           <p:cNvSpPr>
             <a:spLocks noGrp="1"/>
           </p:cNvSpPr>
@@ -1490,7 +1490,7 @@
       </p:sp>
       <p:sp>
         <p:nvSpPr>
-          <p:cNvPr id="472409684" name="Espace réservé du texte vertical 2"/>
+          <p:cNvPr id="53840027" name="Espace réservé du texte vertical 2"/>
           <p:cNvSpPr>
             <a:spLocks noGrp="1"/>
           </p:cNvSpPr>
@@ -1561,7 +1561,7 @@
       </p:sp>
       <p:sp>
         <p:nvSpPr>
-          <p:cNvPr id="1358794721" name="Espace réservé de la date 3"/>
+          <p:cNvPr id="623373832" name="Espace réservé de la date 3"/>
           <p:cNvSpPr>
             <a:spLocks noGrp="1"/>
           </p:cNvSpPr>
@@ -1587,7 +1587,7 @@
       </p:sp>
       <p:sp>
         <p:nvSpPr>
-          <p:cNvPr id="1065454365" name="Espace réservé du pied de page 4"/>
+          <p:cNvPr id="969183609" name="Espace réservé du pied de page 4"/>
           <p:cNvSpPr>
             <a:spLocks noGrp="1"/>
           </p:cNvSpPr>
@@ -1609,7 +1609,7 @@
       </p:sp>
       <p:sp>
         <p:nvSpPr>
-          <p:cNvPr id="598967131" name="Espace réservé du numéro de diapositive 5"/>
+          <p:cNvPr id="1981971593" name="Espace réservé du numéro de diapositive 5"/>
           <p:cNvSpPr>
             <a:spLocks noGrp="1"/>
           </p:cNvSpPr>
@@ -1660,7 +1660,7 @@
       </p:grpSpPr>
       <p:sp>
         <p:nvSpPr>
-          <p:cNvPr id="877953226" name="Titre 1"/>
+          <p:cNvPr id="269779818" name="Titre 1"/>
           <p:cNvSpPr>
             <a:spLocks noGrp="1"/>
           </p:cNvSpPr>
@@ -1686,7 +1686,7 @@
       </p:sp>
       <p:sp>
         <p:nvSpPr>
-          <p:cNvPr id="486224054" name="Espace réservé du contenu 2"/>
+          <p:cNvPr id="1585078409" name="Espace réservé du contenu 2"/>
           <p:cNvSpPr>
             <a:spLocks noGrp="1"/>
           </p:cNvSpPr>
@@ -1752,7 +1752,7 @@
       </p:sp>
       <p:sp>
         <p:nvSpPr>
-          <p:cNvPr id="1611709947" name="Espace réservé de la date 3"/>
+          <p:cNvPr id="1409133184" name="Espace réservé de la date 3"/>
           <p:cNvSpPr>
             <a:spLocks noGrp="1"/>
           </p:cNvSpPr>
@@ -1778,7 +1778,7 @@
       </p:sp>
       <p:sp>
         <p:nvSpPr>
-          <p:cNvPr id="218913692" name="Espace réservé du pied de page 4"/>
+          <p:cNvPr id="1902430346" name="Espace réservé du pied de page 4"/>
           <p:cNvSpPr>
             <a:spLocks noGrp="1"/>
           </p:cNvSpPr>
@@ -1800,7 +1800,7 @@
       </p:sp>
       <p:sp>
         <p:nvSpPr>
-          <p:cNvPr id="1516044610" name="Espace réservé du numéro de diapositive 5"/>
+          <p:cNvPr id="1841249364" name="Espace réservé du numéro de diapositive 5"/>
           <p:cNvSpPr>
             <a:spLocks noGrp="1"/>
           </p:cNvSpPr>
@@ -1851,7 +1851,7 @@
       </p:grpSpPr>
       <p:sp>
         <p:nvSpPr>
-          <p:cNvPr id="789157959" name="Titre 1"/>
+          <p:cNvPr id="255293468" name="Titre 1"/>
           <p:cNvSpPr>
             <a:spLocks noGrp="1"/>
           </p:cNvSpPr>
@@ -1886,7 +1886,7 @@
       </p:sp>
       <p:sp>
         <p:nvSpPr>
-          <p:cNvPr id="1211146478" name="Espace réservé du texte 2"/>
+          <p:cNvPr id="823732900" name="Espace réservé du texte 2"/>
           <p:cNvSpPr>
             <a:spLocks noGrp="1"/>
           </p:cNvSpPr>
@@ -2008,7 +2008,7 @@
       </p:sp>
       <p:sp>
         <p:nvSpPr>
-          <p:cNvPr id="1599104575" name="Espace réservé de la date 3"/>
+          <p:cNvPr id="612039061" name="Espace réservé de la date 3"/>
           <p:cNvSpPr>
             <a:spLocks noGrp="1"/>
           </p:cNvSpPr>
@@ -2034,7 +2034,7 @@
       </p:sp>
       <p:sp>
         <p:nvSpPr>
-          <p:cNvPr id="626891417" name="Espace réservé du pied de page 4"/>
+          <p:cNvPr id="2052912761" name="Espace réservé du pied de page 4"/>
           <p:cNvSpPr>
             <a:spLocks noGrp="1"/>
           </p:cNvSpPr>
@@ -2056,7 +2056,7 @@
       </p:sp>
       <p:sp>
         <p:nvSpPr>
-          <p:cNvPr id="510547770" name="Espace réservé du numéro de diapositive 5"/>
+          <p:cNvPr id="1099331517" name="Espace réservé du numéro de diapositive 5"/>
           <p:cNvSpPr>
             <a:spLocks noGrp="1"/>
           </p:cNvSpPr>
@@ -2107,7 +2107,7 @@
       </p:grpSpPr>
       <p:sp>
         <p:nvSpPr>
-          <p:cNvPr id="599315974" name="Titre 1"/>
+          <p:cNvPr id="1554738430" name="Titre 1"/>
           <p:cNvSpPr>
             <a:spLocks noGrp="1"/>
           </p:cNvSpPr>
@@ -2133,7 +2133,7 @@
       </p:sp>
       <p:sp>
         <p:nvSpPr>
-          <p:cNvPr id="88636220" name="Espace réservé du contenu 2"/>
+          <p:cNvPr id="1545808891" name="Espace réservé du contenu 2"/>
           <p:cNvSpPr>
             <a:spLocks noGrp="1"/>
           </p:cNvSpPr>
@@ -2204,7 +2204,7 @@
       </p:sp>
       <p:sp>
         <p:nvSpPr>
-          <p:cNvPr id="270065431" name="Espace réservé du contenu 3"/>
+          <p:cNvPr id="637593554" name="Espace réservé du contenu 3"/>
           <p:cNvSpPr>
             <a:spLocks noGrp="1"/>
           </p:cNvSpPr>
@@ -2275,7 +2275,7 @@
       </p:sp>
       <p:sp>
         <p:nvSpPr>
-          <p:cNvPr id="1081696617" name="Espace réservé de la date 4"/>
+          <p:cNvPr id="1835011879" name="Espace réservé de la date 4"/>
           <p:cNvSpPr>
             <a:spLocks noGrp="1"/>
           </p:cNvSpPr>
@@ -2301,7 +2301,7 @@
       </p:sp>
       <p:sp>
         <p:nvSpPr>
-          <p:cNvPr id="134646577" name="Espace réservé du pied de page 5"/>
+          <p:cNvPr id="63346054" name="Espace réservé du pied de page 5"/>
           <p:cNvSpPr>
             <a:spLocks noGrp="1"/>
           </p:cNvSpPr>
@@ -2323,7 +2323,7 @@
       </p:sp>
       <p:sp>
         <p:nvSpPr>
-          <p:cNvPr id="1473915968" name="Espace réservé du numéro de diapositive 6"/>
+          <p:cNvPr id="1666921592" name="Espace réservé du numéro de diapositive 6"/>
           <p:cNvSpPr>
             <a:spLocks noGrp="1"/>
           </p:cNvSpPr>
@@ -2374,7 +2374,7 @@
       </p:grpSpPr>
       <p:sp>
         <p:nvSpPr>
-          <p:cNvPr id="1645051731" name="Titre 1"/>
+          <p:cNvPr id="1217655911" name="Titre 1"/>
           <p:cNvSpPr>
             <a:spLocks noGrp="1"/>
           </p:cNvSpPr>
@@ -2405,7 +2405,7 @@
       </p:sp>
       <p:sp>
         <p:nvSpPr>
-          <p:cNvPr id="161272174" name="Espace réservé du texte 2"/>
+          <p:cNvPr id="421216160" name="Espace réservé du texte 2"/>
           <p:cNvSpPr>
             <a:spLocks noGrp="1"/>
           </p:cNvSpPr>
@@ -2473,7 +2473,7 @@
       </p:sp>
       <p:sp>
         <p:nvSpPr>
-          <p:cNvPr id="737677334" name="Espace réservé du contenu 3"/>
+          <p:cNvPr id="892616038" name="Espace réservé du contenu 3"/>
           <p:cNvSpPr>
             <a:spLocks noGrp="1"/>
           </p:cNvSpPr>
@@ -2544,7 +2544,7 @@
       </p:sp>
       <p:sp>
         <p:nvSpPr>
-          <p:cNvPr id="820178908" name="Espace réservé du texte 4"/>
+          <p:cNvPr id="312426320" name="Espace réservé du texte 4"/>
           <p:cNvSpPr>
             <a:spLocks noGrp="1"/>
           </p:cNvSpPr>
@@ -2612,7 +2612,7 @@
       </p:sp>
       <p:sp>
         <p:nvSpPr>
-          <p:cNvPr id="182474056" name="Espace réservé du contenu 5"/>
+          <p:cNvPr id="1648287029" name="Espace réservé du contenu 5"/>
           <p:cNvSpPr>
             <a:spLocks noGrp="1"/>
           </p:cNvSpPr>
@@ -2683,7 +2683,7 @@
       </p:sp>
       <p:sp>
         <p:nvSpPr>
-          <p:cNvPr id="248650016" name="Espace réservé de la date 6"/>
+          <p:cNvPr id="637209990" name="Espace réservé de la date 6"/>
           <p:cNvSpPr>
             <a:spLocks noGrp="1"/>
           </p:cNvSpPr>
@@ -2709,7 +2709,7 @@
       </p:sp>
       <p:sp>
         <p:nvSpPr>
-          <p:cNvPr id="310096188" name="Espace réservé du pied de page 7"/>
+          <p:cNvPr id="1767563238" name="Espace réservé du pied de page 7"/>
           <p:cNvSpPr>
             <a:spLocks noGrp="1"/>
           </p:cNvSpPr>
@@ -2731,7 +2731,7 @@
       </p:sp>
       <p:sp>
         <p:nvSpPr>
-          <p:cNvPr id="1302552534" name="Espace réservé du numéro de diapositive 8"/>
+          <p:cNvPr id="1574037131" name="Espace réservé du numéro de diapositive 8"/>
           <p:cNvSpPr>
             <a:spLocks noGrp="1"/>
           </p:cNvSpPr>
@@ -2782,7 +2782,7 @@
       </p:grpSpPr>
       <p:sp>
         <p:nvSpPr>
-          <p:cNvPr id="2080974295" name="Titre 1"/>
+          <p:cNvPr id="2086633297" name="Titre 1"/>
           <p:cNvSpPr>
             <a:spLocks noGrp="1"/>
           </p:cNvSpPr>
@@ -2808,7 +2808,7 @@
       </p:sp>
       <p:sp>
         <p:nvSpPr>
-          <p:cNvPr id="2096345036" name="Espace réservé de la date 2"/>
+          <p:cNvPr id="718554466" name="Espace réservé de la date 2"/>
           <p:cNvSpPr>
             <a:spLocks noGrp="1"/>
           </p:cNvSpPr>
@@ -2834,7 +2834,7 @@
       </p:sp>
       <p:sp>
         <p:nvSpPr>
-          <p:cNvPr id="963731914" name="Espace réservé du pied de page 3"/>
+          <p:cNvPr id="1784414072" name="Espace réservé du pied de page 3"/>
           <p:cNvSpPr>
             <a:spLocks noGrp="1"/>
           </p:cNvSpPr>
@@ -2856,7 +2856,7 @@
       </p:sp>
       <p:sp>
         <p:nvSpPr>
-          <p:cNvPr id="1110669216" name="Espace réservé du numéro de diapositive 4"/>
+          <p:cNvPr id="457959889" name="Espace réservé du numéro de diapositive 4"/>
           <p:cNvSpPr>
             <a:spLocks noGrp="1"/>
           </p:cNvSpPr>
@@ -2907,7 +2907,7 @@
       </p:grpSpPr>
       <p:sp>
         <p:nvSpPr>
-          <p:cNvPr id="308694160" name="Espace réservé de la date 1"/>
+          <p:cNvPr id="1429490631" name="Espace réservé de la date 1"/>
           <p:cNvSpPr>
             <a:spLocks noGrp="1"/>
           </p:cNvSpPr>
@@ -2933,7 +2933,7 @@
       </p:sp>
       <p:sp>
         <p:nvSpPr>
-          <p:cNvPr id="973235574" name="Espace réservé du pied de page 2"/>
+          <p:cNvPr id="1142310027" name="Espace réservé du pied de page 2"/>
           <p:cNvSpPr>
             <a:spLocks noGrp="1"/>
           </p:cNvSpPr>
@@ -2955,7 +2955,7 @@
       </p:sp>
       <p:sp>
         <p:nvSpPr>
-          <p:cNvPr id="1505335896" name="Espace réservé du numéro de diapositive 3"/>
+          <p:cNvPr id="1905965208" name="Espace réservé du numéro de diapositive 3"/>
           <p:cNvSpPr>
             <a:spLocks noGrp="1"/>
           </p:cNvSpPr>
@@ -3006,7 +3006,7 @@
       </p:grpSpPr>
       <p:sp>
         <p:nvSpPr>
-          <p:cNvPr id="868705570" name="Titre 1"/>
+          <p:cNvPr id="530124427" name="Titre 1"/>
           <p:cNvSpPr>
             <a:spLocks noGrp="1"/>
           </p:cNvSpPr>
@@ -3041,7 +3041,7 @@
       </p:sp>
       <p:sp>
         <p:nvSpPr>
-          <p:cNvPr id="1356919772" name="Espace réservé du contenu 2"/>
+          <p:cNvPr id="1079620068" name="Espace réservé du contenu 2"/>
           <p:cNvSpPr>
             <a:spLocks noGrp="1"/>
           </p:cNvSpPr>
@@ -3140,7 +3140,7 @@
       </p:sp>
       <p:sp>
         <p:nvSpPr>
-          <p:cNvPr id="1234536223" name="Espace réservé du texte 3"/>
+          <p:cNvPr id="987977252" name="Espace réservé du texte 3"/>
           <p:cNvSpPr>
             <a:spLocks noGrp="1"/>
           </p:cNvSpPr>
@@ -3208,7 +3208,7 @@
       </p:sp>
       <p:sp>
         <p:nvSpPr>
-          <p:cNvPr id="1013911922" name="Espace réservé de la date 4"/>
+          <p:cNvPr id="1192949401" name="Espace réservé de la date 4"/>
           <p:cNvSpPr>
             <a:spLocks noGrp="1"/>
           </p:cNvSpPr>
@@ -3234,7 +3234,7 @@
       </p:sp>
       <p:sp>
         <p:nvSpPr>
-          <p:cNvPr id="1808688091" name="Espace réservé du pied de page 5"/>
+          <p:cNvPr id="1336890737" name="Espace réservé du pied de page 5"/>
           <p:cNvSpPr>
             <a:spLocks noGrp="1"/>
           </p:cNvSpPr>
@@ -3256,7 +3256,7 @@
       </p:sp>
       <p:sp>
         <p:nvSpPr>
-          <p:cNvPr id="1314620185" name="Espace réservé du numéro de diapositive 6"/>
+          <p:cNvPr id="1391088589" name="Espace réservé du numéro de diapositive 6"/>
           <p:cNvSpPr>
             <a:spLocks noGrp="1"/>
           </p:cNvSpPr>
@@ -3307,7 +3307,7 @@
       </p:grpSpPr>
       <p:sp>
         <p:nvSpPr>
-          <p:cNvPr id="65115020" name="Titre 1"/>
+          <p:cNvPr id="324812677" name="Titre 1"/>
           <p:cNvSpPr>
             <a:spLocks noGrp="1"/>
           </p:cNvSpPr>
@@ -3342,7 +3342,7 @@
       </p:sp>
       <p:sp>
         <p:nvSpPr>
-          <p:cNvPr id="476742528" name="Espace réservé pour une image 2"/>
+          <p:cNvPr id="1709797285" name="Espace réservé pour une image 2"/>
           <p:cNvSpPr>
             <a:spLocks noChangeAspect="1" noGrp="1"/>
           </p:cNvSpPr>
@@ -3410,7 +3410,7 @@
       </p:sp>
       <p:sp>
         <p:nvSpPr>
-          <p:cNvPr id="1843678034" name="Espace réservé du texte 3"/>
+          <p:cNvPr id="552715498" name="Espace réservé du texte 3"/>
           <p:cNvSpPr>
             <a:spLocks noGrp="1"/>
           </p:cNvSpPr>
@@ -3478,7 +3478,7 @@
       </p:sp>
       <p:sp>
         <p:nvSpPr>
-          <p:cNvPr id="338805009" name="Espace réservé de la date 4"/>
+          <p:cNvPr id="1830581162" name="Espace réservé de la date 4"/>
           <p:cNvSpPr>
             <a:spLocks noGrp="1"/>
           </p:cNvSpPr>
@@ -3504,7 +3504,7 @@
       </p:sp>
       <p:sp>
         <p:nvSpPr>
-          <p:cNvPr id="1536493453" name="Espace réservé du pied de page 5"/>
+          <p:cNvPr id="517159030" name="Espace réservé du pied de page 5"/>
           <p:cNvSpPr>
             <a:spLocks noGrp="1"/>
           </p:cNvSpPr>
@@ -3526,7 +3526,7 @@
       </p:sp>
       <p:sp>
         <p:nvSpPr>
-          <p:cNvPr id="1805163053" name="Espace réservé du numéro de diapositive 6"/>
+          <p:cNvPr id="1407039072" name="Espace réservé du numéro de diapositive 6"/>
           <p:cNvSpPr>
             <a:spLocks noGrp="1"/>
           </p:cNvSpPr>
@@ -3582,7 +3582,7 @@
       </p:grpSpPr>
       <p:sp>
         <p:nvSpPr>
-          <p:cNvPr id="1484172164" name="Espace réservé du titre 1"/>
+          <p:cNvPr id="197515573" name="Espace réservé du titre 1"/>
           <p:cNvSpPr>
             <a:spLocks noGrp="1"/>
           </p:cNvSpPr>
@@ -3618,7 +3618,7 @@
       </p:sp>
       <p:sp>
         <p:nvSpPr>
-          <p:cNvPr id="1315168385" name="Espace réservé du texte 2"/>
+          <p:cNvPr id="1299968799" name="Espace réservé du texte 2"/>
           <p:cNvSpPr>
             <a:spLocks noGrp="1"/>
           </p:cNvSpPr>
@@ -3694,7 +3694,7 @@
       </p:sp>
       <p:sp>
         <p:nvSpPr>
-          <p:cNvPr id="1010811813" name="Espace réservé de la date 3"/>
+          <p:cNvPr id="2010982522" name="Espace réservé de la date 3"/>
           <p:cNvSpPr>
             <a:spLocks noGrp="1"/>
           </p:cNvSpPr>
@@ -3738,7 +3738,7 @@
       </p:sp>
       <p:sp>
         <p:nvSpPr>
-          <p:cNvPr id="1527873603" name="Espace réservé du pied de page 4"/>
+          <p:cNvPr id="1694396963" name="Espace réservé du pied de page 4"/>
           <p:cNvSpPr>
             <a:spLocks noGrp="1"/>
           </p:cNvSpPr>
@@ -3778,7 +3778,7 @@
       </p:sp>
       <p:sp>
         <p:nvSpPr>
-          <p:cNvPr id="783964780" name="Espace réservé du numéro de diapositive 5"/>
+          <p:cNvPr id="140061182" name="Espace réservé du numéro de diapositive 5"/>
           <p:cNvSpPr>
             <a:spLocks noGrp="1"/>
           </p:cNvSpPr>
@@ -4138,7 +4138,7 @@
       </p:grpSpPr>
       <p:cxnSp>
         <p:nvCxnSpPr>
-          <p:cNvPr id="50352109" name="Connecteur droit 1568760680"/>
+          <p:cNvPr id="1698705869" name="Connecteur droit 1568760680"/>
           <p:cNvCxnSpPr/>
           <p:nvPr/>
         </p:nvCxnSpPr>
@@ -4180,7 +4180,7 @@
       </p:cxnSp>
       <p:sp>
         <p:nvSpPr>
-          <p:cNvPr id="1786828417" name="ZoneTexte 1868728971"/>
+          <p:cNvPr id="28337013" name="ZoneTexte 1868728971"/>
           <p:cNvSpPr txBox="1"/>
           <p:nvPr/>
         </p:nvSpPr>
@@ -4220,7 +4220,7 @@
       </p:sp>
       <p:cxnSp>
         <p:nvCxnSpPr>
-          <p:cNvPr id="516229808" name="Connecteur droit 806540798"/>
+          <p:cNvPr id="2081625841" name="Connecteur droit 806540798"/>
           <p:cNvCxnSpPr/>
           <p:nvPr/>
         </p:nvCxnSpPr>
@@ -4262,7 +4262,7 @@
       </p:cxnSp>
       <p:sp>
         <p:nvSpPr>
-          <p:cNvPr id="1007231936" name="ZoneTexte 406616703"/>
+          <p:cNvPr id="2040415593" name="ZoneTexte 406616703"/>
           <p:cNvSpPr txBox="1"/>
           <p:nvPr/>
         </p:nvSpPr>
@@ -4302,7 +4302,7 @@
       </p:sp>
       <p:cxnSp>
         <p:nvCxnSpPr>
-          <p:cNvPr id="2088186298" name="Connecteur droit 858914340"/>
+          <p:cNvPr id="636692284" name="Connecteur droit 858914340"/>
           <p:cNvCxnSpPr/>
           <p:nvPr/>
         </p:nvCxnSpPr>
@@ -4344,7 +4344,7 @@
       </p:cxnSp>
       <p:sp>
         <p:nvSpPr>
-          <p:cNvPr id="1803002644" name="ZoneTexte 2018177722"/>
+          <p:cNvPr id="907007067" name="ZoneTexte 2018177722"/>
           <p:cNvSpPr txBox="1"/>
           <p:nvPr/>
         </p:nvSpPr>
@@ -4391,7 +4391,7 @@
       </p:sp>
       <p:sp>
         <p:nvSpPr>
-          <p:cNvPr id="816613689" name="ZoneTexte 519900862"/>
+          <p:cNvPr id="1761899865" name="ZoneTexte 519900862"/>
           <p:cNvSpPr txBox="1"/>
           <p:nvPr/>
         </p:nvSpPr>
@@ -4653,7 +4653,7 @@
       </p:sp>
       <p:sp>
         <p:nvSpPr>
-          <p:cNvPr id="1733073880" name="Rectangle : avec coins arrondis en haut 838565229"/>
+          <p:cNvPr id="1266663453" name="Rectangle : avec coins arrondis en haut 838565229"/>
           <p:cNvSpPr/>
           <p:nvPr/>
         </p:nvSpPr>
@@ -4699,7 +4699,7 @@
       </p:sp>
       <p:sp>
         <p:nvSpPr>
-          <p:cNvPr id="1151015164" name="ZoneTexte 448541368"/>
+          <p:cNvPr id="439958440" name="ZoneTexte 448541368"/>
           <p:cNvSpPr txBox="1"/>
           <p:nvPr/>
         </p:nvSpPr>
@@ -4780,7 +4780,7 @@
       </p:sp>
       <p:sp>
         <p:nvSpPr>
-          <p:cNvPr id="1524904675" name="Rectangle : avec coins arrondis en haut 1165584529"/>
+          <p:cNvPr id="275896270" name="Rectangle : avec coins arrondis en haut 1165584529"/>
           <p:cNvSpPr/>
           <p:nvPr/>
         </p:nvSpPr>
@@ -4826,7 +4826,7 @@
       </p:sp>
       <p:sp>
         <p:nvSpPr>
-          <p:cNvPr id="710059288" name="Flèche : pentagone 1880610112"/>
+          <p:cNvPr id="632419660" name="Flèche : pentagone 1880610112"/>
           <p:cNvSpPr/>
           <p:nvPr/>
         </p:nvSpPr>
@@ -4871,7 +4871,7 @@
       </p:sp>
       <p:sp>
         <p:nvSpPr>
-          <p:cNvPr id="564564278" name="Flèche : pentagone 446859139"/>
+          <p:cNvPr id="1644077214" name="Flèche : pentagone 446859139"/>
           <p:cNvSpPr/>
           <p:nvPr/>
         </p:nvSpPr>
@@ -4916,7 +4916,7 @@
       </p:sp>
       <p:sp>
         <p:nvSpPr>
-          <p:cNvPr id="10027812" name="Flèche : pentagone 2055848356"/>
+          <p:cNvPr id="847448197" name="Flèche : pentagone 2055848356"/>
           <p:cNvSpPr/>
           <p:nvPr/>
         </p:nvSpPr>
@@ -4961,7 +4961,7 @@
       </p:sp>
       <p:sp>
         <p:nvSpPr>
-          <p:cNvPr id="625065647" name="Flèche : pentagone 1980093981"/>
+          <p:cNvPr id="1616837821" name="Flèche : pentagone 1980093981"/>
           <p:cNvSpPr/>
           <p:nvPr/>
         </p:nvSpPr>
@@ -5006,7 +5006,7 @@
       </p:sp>
       <p:sp>
         <p:nvSpPr>
-          <p:cNvPr id="1618933822" name="Flèche : pentagone 905284374"/>
+          <p:cNvPr id="241495292" name="Flèche : pentagone 905284374"/>
           <p:cNvSpPr/>
           <p:nvPr/>
         </p:nvSpPr>
@@ -5051,7 +5051,7 @@
       </p:sp>
       <p:sp>
         <p:nvSpPr>
-          <p:cNvPr id="1330367369" name="Flèche : pentagone 913945823"/>
+          <p:cNvPr id="1896093120" name="Flèche : pentagone 913945823"/>
           <p:cNvSpPr/>
           <p:nvPr/>
         </p:nvSpPr>
@@ -5096,7 +5096,7 @@
       </p:sp>
       <p:sp>
         <p:nvSpPr>
-          <p:cNvPr id="1676416415" name="Flèche : pentagone 1742787193"/>
+          <p:cNvPr id="624246195" name="Flèche : pentagone 1742787193"/>
           <p:cNvSpPr/>
           <p:nvPr/>
         </p:nvSpPr>
@@ -5141,7 +5141,7 @@
       </p:sp>
       <p:sp>
         <p:nvSpPr>
-          <p:cNvPr id="1675208244" name="Flèche : pentagone 458968316"/>
+          <p:cNvPr id="1921466258" name="Flèche : pentagone 458968316"/>
           <p:cNvSpPr/>
           <p:nvPr/>
         </p:nvSpPr>
@@ -5186,7 +5186,7 @@
       </p:sp>
       <p:sp>
         <p:nvSpPr>
-          <p:cNvPr id="805150289" name="Flèche : pentagone 272560485"/>
+          <p:cNvPr id="1207944305" name="Flèche : pentagone 272560485"/>
           <p:cNvSpPr/>
           <p:nvPr/>
         </p:nvSpPr>
@@ -5231,7 +5231,7 @@
       </p:sp>
       <p:sp>
         <p:nvSpPr>
-          <p:cNvPr id="985865456" name="Flèche : pentagone 1112398132"/>
+          <p:cNvPr id="1105346462" name="Flèche : pentagone 1112398132"/>
           <p:cNvSpPr/>
           <p:nvPr/>
         </p:nvSpPr>
@@ -5276,7 +5276,7 @@
       </p:sp>
       <p:sp>
         <p:nvSpPr>
-          <p:cNvPr id="1994819700" name="ZoneTexte 880464430"/>
+          <p:cNvPr id="1065999461" name="ZoneTexte 880464430"/>
           <p:cNvSpPr txBox="1"/>
           <p:nvPr/>
         </p:nvSpPr>
@@ -5457,7 +5457,7 @@
       </p:sp>
       <p:sp>
         <p:nvSpPr>
-          <p:cNvPr id="1152846218" name="ZoneTexte 1302587497"/>
+          <p:cNvPr id="2114156579" name="ZoneTexte 1302587497"/>
           <p:cNvSpPr txBox="1"/>
           <p:nvPr/>
         </p:nvSpPr>
@@ -5755,7 +5755,7 @@
       </p:sp>
       <p:cxnSp>
         <p:nvCxnSpPr>
-          <p:cNvPr id="1711815303" name="Connecteur droit 342798987"/>
+          <p:cNvPr id="695908690" name="Connecteur droit 342798987"/>
           <p:cNvCxnSpPr/>
           <p:nvPr/>
         </p:nvCxnSpPr>
@@ -5797,7 +5797,7 @@
       </p:cxnSp>
       <p:sp>
         <p:nvSpPr>
-          <p:cNvPr id="1325045439" name="ZoneTexte 966486802"/>
+          <p:cNvPr id="1061527602" name="ZoneTexte 966486802"/>
           <p:cNvSpPr txBox="1"/>
           <p:nvPr/>
         </p:nvSpPr>
@@ -5837,7 +5837,7 @@
       </p:sp>
       <p:sp>
         <p:nvSpPr>
-          <p:cNvPr id="834158271" name="Rectangle 38344096"/>
+          <p:cNvPr id="122371821" name="Rectangle 38344096"/>
           <p:cNvSpPr/>
           <p:nvPr/>
         </p:nvSpPr>
@@ -5877,7 +5877,7 @@
       </p:sp>
       <p:sp>
         <p:nvSpPr>
-          <p:cNvPr id="1747119054" name="Rectangle 954364527"/>
+          <p:cNvPr id="1249569217" name="Rectangle 954364527"/>
           <p:cNvSpPr/>
           <p:nvPr/>
         </p:nvSpPr>
@@ -5917,14 +5917,14 @@
       </p:sp>
       <p:sp>
         <p:nvSpPr>
-          <p:cNvPr id="814473223" name="ZoneTexte 1527388901"/>
+          <p:cNvPr id="1116069817" name="ZoneTexte 1527388901"/>
           <p:cNvSpPr txBox="1"/>
           <p:nvPr/>
         </p:nvSpPr>
         <p:spPr bwMode="auto">
           <a:xfrm flipH="0" flipV="0">
             <a:off x="4625442" y="2419866"/>
-            <a:ext cx="2263573" cy="2664763"/>
+            <a:ext cx="2270772" cy="2459023"/>
           </a:xfrm>
           <a:prstGeom prst="rect">
             <a:avLst/>
@@ -5991,7 +5991,7 @@
               <a:defRPr/>
             </a:pPr>
             <a:r>
-              <a:rPr lang="fr-FR" sz="1200" b="0" i="0" u="none" strike="noStrike" cap="none" spc="0">
+              <a:rPr lang="fr-FR" sz="1000" b="0" i="0" u="none" strike="noStrike" cap="none" spc="0">
                 <a:solidFill>
                   <a:schemeClr val="bg2">
                     <a:lumMod val="90000"/>
@@ -6004,7 +6004,7 @@
               <a:t>_____</a:t>
             </a:r>
             <a:r>
-              <a:rPr lang="fr-FR" sz="1100" b="0" i="0" u="none" strike="noStrike" cap="none" spc="0">
+              <a:rPr lang="fr-FR" sz="1000" b="0" i="0" u="none" strike="noStrike" cap="none" spc="0">
                 <a:solidFill>
                   <a:schemeClr val="bg2">
                     <a:lumMod val="90000"/>
@@ -6017,7 +6017,7 @@
               <a:t>_______________________________________________________________________________________________________________________________________________________</a:t>
             </a:r>
             <a:r>
-              <a:rPr lang="fr-FR" sz="1200" b="0" i="0" u="none" strike="noStrike" cap="none" spc="0">
+              <a:rPr lang="fr-FR" sz="1000" b="0" i="0" u="none" strike="noStrike" cap="none" spc="0">
                 <a:solidFill>
                   <a:schemeClr val="bg2">
                     <a:lumMod val="90000"/>
@@ -6027,7 +6027,7 @@
                 <a:ea typeface="Arial"/>
                 <a:cs typeface="Arial"/>
               </a:rPr>
-              <a:t>________________________</a:t>
+              <a:t>__________________________________________</a:t>
             </a:r>
             <a:endParaRPr lang="fr-FR" sz="1200" b="0" i="0" u="none" strike="noStrike" cap="none" spc="0">
               <a:solidFill>
@@ -6139,7 +6139,7 @@
       </p:sp>
       <p:sp>
         <p:nvSpPr>
-          <p:cNvPr id="1238325071" name="ZoneTexte 1440859034"/>
+          <p:cNvPr id="565311126" name="ZoneTexte 1440859034"/>
           <p:cNvSpPr txBox="1"/>
           <p:nvPr/>
         </p:nvSpPr>
@@ -6178,7 +6178,7 @@
       </p:sp>
       <p:sp>
         <p:nvSpPr>
-          <p:cNvPr id="663553260" name="ZoneTexte 1456688891"/>
+          <p:cNvPr id="131825395" name="ZoneTexte 1456688891"/>
           <p:cNvSpPr txBox="1"/>
           <p:nvPr/>
         </p:nvSpPr>
@@ -6217,7 +6217,7 @@
       </p:sp>
       <p:sp>
         <p:nvSpPr>
-          <p:cNvPr id="1459024062" name="ZoneTexte 801380349"/>
+          <p:cNvPr id="1946556811" name="ZoneTexte 801380349"/>
           <p:cNvSpPr txBox="1"/>
           <p:nvPr/>
         </p:nvSpPr>
@@ -6262,7 +6262,7 @@
       </p:sp>
       <p:sp>
         <p:nvSpPr>
-          <p:cNvPr id="828370027" name="ZoneTexte 382516906"/>
+          <p:cNvPr id="1318845674" name="ZoneTexte 382516906"/>
           <p:cNvSpPr txBox="1"/>
           <p:nvPr/>
         </p:nvSpPr>
@@ -6307,7 +6307,7 @@
       </p:sp>
       <p:cxnSp>
         <p:nvCxnSpPr>
-          <p:cNvPr id="839876123" name="Connecteur droit 858914340"/>
+          <p:cNvPr id="425247506" name="Connecteur droit 858914340"/>
           <p:cNvCxnSpPr/>
           <p:nvPr/>
         </p:nvCxnSpPr>
@@ -6349,7 +6349,7 @@
       </p:cxnSp>
       <p:sp>
         <p:nvSpPr>
-          <p:cNvPr id="72230216" name="ZoneTexte 2018177722"/>
+          <p:cNvPr id="785365420" name="ZoneTexte 2018177722"/>
           <p:cNvSpPr txBox="1"/>
           <p:nvPr/>
         </p:nvSpPr>
@@ -6396,7 +6396,7 @@
       </p:sp>
       <p:sp>
         <p:nvSpPr>
-          <p:cNvPr id="130407243" name=""/>
+          <p:cNvPr id="1184105151" name=""/>
           <p:cNvSpPr txBox="1"/>
           <p:nvPr/>
         </p:nvSpPr>
@@ -6498,13 +6498,13 @@
       </p:sp>
       <p:cxnSp>
         <p:nvCxnSpPr>
-          <p:cNvPr id="1198668996" name="Connecteur droit 858914340"/>
+          <p:cNvPr id="592550263" name="Connecteur droit 858914340"/>
           <p:cNvCxnSpPr/>
           <p:nvPr/>
         </p:nvCxnSpPr>
         <p:spPr bwMode="auto">
           <a:xfrm flipH="0" flipV="1">
-            <a:off x="4547592" y="5222211"/>
+            <a:off x="4547592" y="5005733"/>
             <a:ext cx="2320902" cy="0"/>
           </a:xfrm>
           <a:prstGeom prst="line">
@@ -6540,13 +6540,13 @@
       </p:cxnSp>
       <p:sp>
         <p:nvSpPr>
-          <p:cNvPr id="792783563" name="ZoneTexte 2018177722"/>
+          <p:cNvPr id="1074500844" name="ZoneTexte 2018177722"/>
           <p:cNvSpPr txBox="1"/>
           <p:nvPr/>
         </p:nvSpPr>
         <p:spPr bwMode="auto">
           <a:xfrm flipH="0" flipV="0">
-            <a:off x="4601547" y="5039150"/>
+            <a:off x="4601547" y="4822672"/>
             <a:ext cx="1812636" cy="366118"/>
           </a:xfrm>
           <a:prstGeom prst="rect">
@@ -6587,14 +6587,14 @@
       </p:sp>
       <p:sp>
         <p:nvSpPr>
-          <p:cNvPr id="546026108" name=""/>
+          <p:cNvPr id="626949169" name=""/>
           <p:cNvSpPr txBox="1"/>
           <p:nvPr/>
         </p:nvSpPr>
         <p:spPr bwMode="auto">
           <a:xfrm rot="0" flipH="0" flipV="0">
-            <a:off x="4625443" y="5355740"/>
-            <a:ext cx="2258168" cy="1097640"/>
+            <a:off x="4625442" y="5139262"/>
+            <a:ext cx="2274007" cy="1234800"/>
           </a:xfrm>
           <a:prstGeom prst="rect">
             <a:avLst/>
@@ -6613,7 +6613,7 @@
               <a:defRPr/>
             </a:pPr>
             <a:r>
-              <a:rPr lang="fr-FR" sz="1100" b="0" i="0" u="none" strike="noStrike" cap="none" spc="0">
+              <a:rPr lang="fr-FR" sz="1000" b="0" i="0" u="none" strike="noStrike" cap="none" spc="0">
                 <a:solidFill>
                   <a:schemeClr val="bg2">
                     <a:lumMod val="90000"/>
@@ -6626,7 +6626,7 @@
               <a:t>_____________________________________________________________</a:t>
             </a:r>
             <a:r>
-              <a:rPr lang="fr-FR" sz="1100" b="0" i="0" u="none" strike="noStrike" cap="none" spc="0">
+              <a:rPr lang="fr-FR" sz="1000" b="0" i="0" u="none" strike="noStrike" cap="none" spc="0">
                 <a:solidFill>
                   <a:schemeClr val="bg2">
                     <a:lumMod val="90000"/>
@@ -6636,7 +6636,7 @@
                 <a:ea typeface="Arial"/>
                 <a:cs typeface="Arial"/>
               </a:rPr>
-              <a:t>___________________________________________</a:t>
+              <a:t>____________________________________________________________________________________</a:t>
             </a:r>
             <a:endParaRPr lang="fr-FR" sz="800" b="0" i="0" u="none" strike="noStrike" cap="none" spc="0">
               <a:solidFill>
@@ -6652,7 +6652,7 @@
       </p:sp>
       <p:sp>
         <p:nvSpPr>
-          <p:cNvPr id="1436637873" name="ZoneTexte 2021443538"/>
+          <p:cNvPr id="354736839" name="ZoneTexte 2021443538"/>
           <p:cNvSpPr txBox="1"/>
           <p:nvPr/>
         </p:nvSpPr>
@@ -6736,7 +6736,7 @@
       </p:sp>
       <p:sp>
         <p:nvSpPr>
-          <p:cNvPr id="1675276634" name="ZoneTexte 1075280509"/>
+          <p:cNvPr id="1277734930" name="ZoneTexte 1075280509"/>
           <p:cNvSpPr txBox="1"/>
           <p:nvPr/>
         </p:nvSpPr>
@@ -6820,7 +6820,7 @@
       </p:sp>
       <p:sp>
         <p:nvSpPr>
-          <p:cNvPr id="1223822143" name="ZoneTexte 824413856"/>
+          <p:cNvPr id="586680948" name="ZoneTexte 824413856"/>
           <p:cNvSpPr txBox="1"/>
           <p:nvPr/>
         </p:nvSpPr>
@@ -6904,7 +6904,7 @@
       </p:sp>
       <p:sp>
         <p:nvSpPr>
-          <p:cNvPr id="1222006826" name="ZoneTexte 1036656844"/>
+          <p:cNvPr id="1073203504" name="ZoneTexte 1036656844"/>
           <p:cNvSpPr txBox="1"/>
           <p:nvPr/>
         </p:nvSpPr>
@@ -6988,7 +6988,7 @@
       </p:sp>
       <p:sp>
         <p:nvSpPr>
-          <p:cNvPr id="907717977" name="ZoneTexte 226284734"/>
+          <p:cNvPr id="335834709" name="ZoneTexte 226284734"/>
           <p:cNvSpPr txBox="1"/>
           <p:nvPr/>
         </p:nvSpPr>
@@ -7072,7 +7072,7 @@
       </p:sp>
       <p:sp>
         <p:nvSpPr>
-          <p:cNvPr id="1616807671" name="ZoneTexte 162158187"/>
+          <p:cNvPr id="193271611" name="ZoneTexte 162158187"/>
           <p:cNvSpPr txBox="1"/>
           <p:nvPr/>
         </p:nvSpPr>
@@ -7136,7 +7136,7 @@
       </p:sp>
       <p:sp>
         <p:nvSpPr>
-          <p:cNvPr id="1856900626" name="ZoneTexte 1063440096"/>
+          <p:cNvPr id="1599448330" name="ZoneTexte 1063440096"/>
           <p:cNvSpPr txBox="1"/>
           <p:nvPr/>
         </p:nvSpPr>
@@ -7220,7 +7220,7 @@
       </p:sp>
       <p:sp>
         <p:nvSpPr>
-          <p:cNvPr id="968746255" name="ZoneTexte 1564072661"/>
+          <p:cNvPr id="1165849644" name="ZoneTexte 1564072661"/>
           <p:cNvSpPr txBox="1"/>
           <p:nvPr/>
         </p:nvSpPr>
@@ -7304,7 +7304,7 @@
       </p:sp>
       <p:sp>
         <p:nvSpPr>
-          <p:cNvPr id="139127251" name="ZoneTexte 2102805411"/>
+          <p:cNvPr id="698615207" name="ZoneTexte 2102805411"/>
           <p:cNvSpPr txBox="1"/>
           <p:nvPr/>
         </p:nvSpPr>
@@ -7388,7 +7388,7 @@
       </p:sp>
       <p:sp>
         <p:nvSpPr>
-          <p:cNvPr id="1255399831" name="ZoneTexte 1094420572"/>
+          <p:cNvPr id="166596224" name="ZoneTexte 1094420572"/>
           <p:cNvSpPr txBox="1"/>
           <p:nvPr/>
         </p:nvSpPr>
@@ -7472,7 +7472,7 @@
       </p:sp>
       <p:sp>
         <p:nvSpPr>
-          <p:cNvPr id="500595052" name="ZoneTexte 1337742717"/>
+          <p:cNvPr id="193554374" name="ZoneTexte 1337742717"/>
           <p:cNvSpPr txBox="1"/>
           <p:nvPr/>
         </p:nvSpPr>
@@ -7536,7 +7536,7 @@
       </p:sp>
       <p:sp>
         <p:nvSpPr>
-          <p:cNvPr id="997549457" name="ZoneTexte 1188730172"/>
+          <p:cNvPr id="133059098" name="ZoneTexte 1188730172"/>
           <p:cNvSpPr txBox="1"/>
           <p:nvPr/>
         </p:nvSpPr>
@@ -7600,7 +7600,7 @@
       </p:sp>
       <p:sp>
         <p:nvSpPr>
-          <p:cNvPr id="2100803356" name="Rectangle : avec coins arrondis en haut 1452601499"/>
+          <p:cNvPr id="1061056040" name="Rectangle : avec coins arrondis en haut 1452601499"/>
           <p:cNvSpPr/>
           <p:nvPr/>
         </p:nvSpPr>
@@ -7646,7 +7646,7 @@
       </p:sp>
       <p:sp>
         <p:nvSpPr>
-          <p:cNvPr id="461476637" name="Rectangle : avec coins arrondis en haut 1782110635"/>
+          <p:cNvPr id="1004998566" name="Rectangle : avec coins arrondis en haut 1782110635"/>
           <p:cNvSpPr/>
           <p:nvPr/>
         </p:nvSpPr>
@@ -7692,7 +7692,7 @@
       </p:sp>
       <p:sp>
         <p:nvSpPr>
-          <p:cNvPr id="928446110" name="Rectangle : avec coins arrondis en haut 945118596"/>
+          <p:cNvPr id="180953818" name="Rectangle : avec coins arrondis en haut 945118596"/>
           <p:cNvSpPr/>
           <p:nvPr/>
         </p:nvSpPr>
@@ -7738,7 +7738,7 @@
       </p:sp>
       <p:sp>
         <p:nvSpPr>
-          <p:cNvPr id="2066510226" name="Rectangle : avec coins arrondis en haut 500951796"/>
+          <p:cNvPr id="776319477" name="Rectangle : avec coins arrondis en haut 500951796"/>
           <p:cNvSpPr/>
           <p:nvPr/>
         </p:nvSpPr>
@@ -7784,7 +7784,7 @@
       </p:sp>
       <p:sp>
         <p:nvSpPr>
-          <p:cNvPr id="623090602" name="Rectangle : avec coins arrondis en haut 203047490"/>
+          <p:cNvPr id="1836182541" name="Rectangle : avec coins arrondis en haut 203047490"/>
           <p:cNvSpPr/>
           <p:nvPr/>
         </p:nvSpPr>
@@ -7830,7 +7830,7 @@
       </p:sp>
       <p:sp>
         <p:nvSpPr>
-          <p:cNvPr id="1505882138" name="Rectangle : avec coins arrondis en haut 818083012"/>
+          <p:cNvPr id="113375833" name="Rectangle : avec coins arrondis en haut 818083012"/>
           <p:cNvSpPr/>
           <p:nvPr/>
         </p:nvSpPr>
@@ -7876,7 +7876,7 @@
       </p:sp>
       <p:sp>
         <p:nvSpPr>
-          <p:cNvPr id="196371329" name="Rectangle : avec coins arrondis en haut 310539005"/>
+          <p:cNvPr id="1135094285" name="Rectangle : avec coins arrondis en haut 310539005"/>
           <p:cNvSpPr/>
           <p:nvPr/>
         </p:nvSpPr>
@@ -7922,7 +7922,7 @@
       </p:sp>
       <p:sp>
         <p:nvSpPr>
-          <p:cNvPr id="1321713062" name="Rectangle : avec coins arrondis en haut 844307487"/>
+          <p:cNvPr id="2067199302" name="Rectangle : avec coins arrondis en haut 844307487"/>
           <p:cNvSpPr/>
           <p:nvPr/>
         </p:nvSpPr>
@@ -7968,7 +7968,7 @@
       </p:sp>
       <p:sp>
         <p:nvSpPr>
-          <p:cNvPr id="1502678773" name="Rectangle : avec coins arrondis en haut 1616510051"/>
+          <p:cNvPr id="1614090443" name="Rectangle : avec coins arrondis en haut 1616510051"/>
           <p:cNvSpPr/>
           <p:nvPr/>
         </p:nvSpPr>
@@ -8014,7 +8014,7 @@
       </p:sp>
       <p:sp>
         <p:nvSpPr>
-          <p:cNvPr id="2139661467" name="Rectangle : avec coins arrondis en haut 1451691637"/>
+          <p:cNvPr id="901450307" name="Rectangle : avec coins arrondis en haut 1451691637"/>
           <p:cNvSpPr/>
           <p:nvPr/>
         </p:nvSpPr>
@@ -8060,7 +8060,7 @@
       </p:sp>
       <p:sp>
         <p:nvSpPr>
-          <p:cNvPr id="1138994874" name="Rectangle : avec coins arrondis en haut 260383743"/>
+          <p:cNvPr id="233635976" name="Rectangle : avec coins arrondis en haut 260383743"/>
           <p:cNvSpPr/>
           <p:nvPr/>
         </p:nvSpPr>
@@ -8106,7 +8106,7 @@
       </p:sp>
       <p:sp>
         <p:nvSpPr>
-          <p:cNvPr id="1526124411" name="Rectangle : avec coins arrondis en haut 1280344391"/>
+          <p:cNvPr id="1668235145" name="Rectangle : avec coins arrondis en haut 1280344391"/>
           <p:cNvSpPr/>
           <p:nvPr/>
         </p:nvSpPr>
@@ -8152,7 +8152,7 @@
       </p:sp>
       <p:sp>
         <p:nvSpPr>
-          <p:cNvPr id="1652355709" name=""/>
+          <p:cNvPr id="165450000" name=""/>
           <p:cNvSpPr txBox="1"/>
           <p:nvPr/>
         </p:nvSpPr>
@@ -8276,7 +8276,7 @@
       </p:sp>
       <p:sp>
         <p:nvSpPr>
-          <p:cNvPr id="1038570608" name="ZoneTexte 1440859034"/>
+          <p:cNvPr id="1031215241" name="ZoneTexte 1440859034"/>
           <p:cNvSpPr txBox="1"/>
           <p:nvPr/>
         </p:nvSpPr>
@@ -8318,7 +8318,7 @@
       </p:sp>
       <p:sp>
         <p:nvSpPr>
-          <p:cNvPr id="1712463061" name="ZoneTexte 1440859034"/>
+          <p:cNvPr id="367980181" name="ZoneTexte 1440859034"/>
           <p:cNvSpPr txBox="1"/>
           <p:nvPr/>
         </p:nvSpPr>
@@ -8357,7 +8357,7 @@
       </p:sp>
       <p:cxnSp>
         <p:nvCxnSpPr>
-          <p:cNvPr id="382843289" name=""/>
+          <p:cNvPr id="2124358932" name=""/>
           <p:cNvCxnSpPr/>
           <p:nvPr/>
         </p:nvCxnSpPr>
@@ -8396,7 +8396,7 @@
       </p:cxnSp>
       <p:sp>
         <p:nvSpPr>
-          <p:cNvPr id="1094974357" name=""/>
+          <p:cNvPr id="1898968160" name=""/>
           <p:cNvSpPr txBox="1"/>
           <p:nvPr/>
         </p:nvSpPr>
@@ -8650,7 +8650,7 @@
       </p:sp>
       <p:sp>
         <p:nvSpPr>
-          <p:cNvPr id="1100296546" name=""/>
+          <p:cNvPr id="70540445" name=""/>
           <p:cNvSpPr txBox="1"/>
           <p:nvPr/>
         </p:nvSpPr>
@@ -8904,7 +8904,7 @@
       </p:sp>
       <p:sp>
         <p:nvSpPr>
-          <p:cNvPr id="2069024663" name="Rectangle 954364527"/>
+          <p:cNvPr id="616150190" name="Rectangle 954364527"/>
           <p:cNvSpPr/>
           <p:nvPr/>
         </p:nvSpPr>
@@ -8944,7 +8944,7 @@
       </p:sp>
       <p:sp>
         <p:nvSpPr>
-          <p:cNvPr id="1074502018" name="ZoneTexte 1527388901"/>
+          <p:cNvPr id="478845728" name="ZoneTexte 1527388901"/>
           <p:cNvSpPr txBox="1"/>
           <p:nvPr/>
         </p:nvSpPr>
@@ -9104,7 +9104,7 @@
       </p:sp>
       <p:sp>
         <p:nvSpPr>
-          <p:cNvPr id="489753438" name="Rectangle 38344096"/>
+          <p:cNvPr id="1424157348" name="Rectangle 38344096"/>
           <p:cNvSpPr/>
           <p:nvPr/>
         </p:nvSpPr>
@@ -9144,14 +9144,14 @@
       </p:sp>
       <p:sp>
         <p:nvSpPr>
-          <p:cNvPr id="1740270644" name=""/>
+          <p:cNvPr id="1322013839" name=""/>
           <p:cNvSpPr/>
           <p:nvPr/>
         </p:nvSpPr>
         <p:spPr bwMode="auto">
           <a:xfrm>
-            <a:off x="2830163" y="22347"/>
-            <a:ext cx="4022971" cy="427079"/>
+            <a:off x="3283148" y="22347"/>
+            <a:ext cx="3571425" cy="427079"/>
           </a:xfrm>
           <a:prstGeom prst="rect">
             <a:avLst/>
@@ -9175,9 +9175,9 @@
                 <a:solidFill>
                   <a:srgbClr val="BFBFBF"/>
                 </a:solidFill>
-                <a:latin typeface="Lucida Handwriting"/>
-                <a:ea typeface="Lucida Handwriting"/>
-                <a:cs typeface="Lucida Handwriting"/>
+                <a:latin typeface="Georgia"/>
+                <a:ea typeface="Georgia"/>
+                <a:cs typeface="Georgia"/>
               </a:rPr>
               <a:t>Les </a:t>
             </a:r>
@@ -9186,9 +9186,9 @@
                 <a:solidFill>
                   <a:srgbClr val="BFBFBF"/>
                 </a:solidFill>
-                <a:latin typeface="Lucida Handwriting"/>
-                <a:ea typeface="Lucida Handwriting"/>
-                <a:cs typeface="Lucida Handwriting"/>
+                <a:latin typeface="Georgia"/>
+                <a:ea typeface="Georgia"/>
+                <a:cs typeface="Georgia"/>
               </a:rPr>
               <a:t>monstres </a:t>
             </a:r>
@@ -9197,9 +9197,9 @@
                 <a:solidFill>
                   <a:srgbClr val="BFBFBF"/>
                 </a:solidFill>
-                <a:latin typeface="Lucida Handwriting"/>
-                <a:ea typeface="Lucida Handwriting"/>
-                <a:cs typeface="Lucida Handwriting"/>
+                <a:latin typeface="Georgia"/>
+                <a:ea typeface="Georgia"/>
+                <a:cs typeface="Georgia"/>
               </a:rPr>
               <a:t>que nous sommes</a:t>
             </a:r>
@@ -9207,11 +9207,148 @@
               <a:solidFill>
                 <a:srgbClr val="BFBFBF"/>
               </a:solidFill>
-              <a:latin typeface="Lucida Handwriting"/>
-              <a:cs typeface="Lucida Handwriting"/>
+              <a:latin typeface="Georgia"/>
+              <a:cs typeface="Georgia"/>
             </a:endParaRPr>
           </a:p>
         </p:txBody>
+      </p:sp>
+      <p:sp>
+        <p:nvSpPr>
+          <p:cNvPr id="378699035" name="Rectangle : avec coins arrondis en haut 1280344391"/>
+          <p:cNvSpPr/>
+          <p:nvPr/>
+        </p:nvSpPr>
+        <p:spPr bwMode="auto">
+          <a:xfrm rot="5399976" flipH="0" flipV="0">
+            <a:off x="6206578" y="5735789"/>
+            <a:ext cx="347293" cy="763654"/>
+          </a:xfrm>
+          <a:prstGeom prst="flowChartAlternateProcess">
+            <a:avLst/>
+          </a:prstGeom>
+          <a:solidFill>
+            <a:schemeClr val="bg1"/>
+          </a:solidFill>
+          <a:ln w="12699" cap="flat" cmpd="sng" algn="ctr">
+            <a:noFill/>
+            <a:prstDash val="solid"/>
+            <a:miter lim="800000"/>
+          </a:ln>
+        </p:spPr>
+        <p:style>
+          <a:lnRef idx="2">
+            <a:schemeClr val="accent1">
+              <a:shade val="50000"/>
+            </a:schemeClr>
+          </a:lnRef>
+          <a:fillRef idx="1">
+            <a:schemeClr val="accent1"/>
+          </a:fillRef>
+          <a:effectRef idx="0">
+            <a:schemeClr val="accent1"/>
+          </a:effectRef>
+          <a:fontRef idx="minor">
+            <a:schemeClr val="lt1"/>
+          </a:fontRef>
+        </p:style>
+      </p:sp>
+      <p:sp>
+        <p:nvSpPr>
+          <p:cNvPr id="703780170" name=""/>
+          <p:cNvSpPr txBox="1"/>
+          <p:nvPr/>
+        </p:nvSpPr>
+        <p:spPr bwMode="auto">
+          <a:xfrm rot="0" flipH="0" flipV="0">
+            <a:off x="5929571" y="6273937"/>
+            <a:ext cx="938259" cy="213719"/>
+          </a:xfrm>
+          <a:prstGeom prst="rect">
+            <a:avLst/>
+          </a:prstGeom>
+          <a:noFill/>
+        </p:spPr>
+        <p:txBody>
+          <a:bodyPr vertOverflow="overflow" horzOverflow="overflow" vert="horz" wrap="square" lIns="91440" tIns="45720" rIns="91440" bIns="45720" numCol="1" spcCol="0" rtlCol="0" fromWordArt="0" anchor="t" anchorCtr="0" forceAA="0" upright="0" compatLnSpc="0">
+            <a:spAutoFit/>
+          </a:bodyPr>
+          <a:p>
+            <a:pPr algn="r">
+              <a:lnSpc>
+                <a:spcPct val="100000"/>
+              </a:lnSpc>
+              <a:defRPr/>
+            </a:pPr>
+            <a:r>
+              <a:rPr lang="fr-FR" sz="800" b="0" i="0" u="none" strike="noStrike" cap="none" spc="0">
+                <a:solidFill>
+                  <a:schemeClr val="tx1">
+                    <a:lumMod val="50000"/>
+                    <a:lumOff val="50000"/>
+                  </a:schemeClr>
+                </a:solidFill>
+                <a:latin typeface="Arial"/>
+                <a:ea typeface="Arial"/>
+                <a:cs typeface="Arial"/>
+              </a:rPr>
+              <a:t>Malus général</a:t>
+            </a:r>
+            <a:endParaRPr sz="800">
+              <a:solidFill>
+                <a:schemeClr val="tx1">
+                  <a:lumMod val="50000"/>
+                  <a:lumOff val="50000"/>
+                </a:schemeClr>
+              </a:solidFill>
+            </a:endParaRPr>
+          </a:p>
+        </p:txBody>
+      </p:sp>
+      <p:sp>
+        <p:nvSpPr>
+          <p:cNvPr id="1336731654" name="Rectangle : avec coins arrondis en haut 1280344391"/>
+          <p:cNvSpPr/>
+          <p:nvPr/>
+        </p:nvSpPr>
+        <p:spPr bwMode="auto">
+          <a:xfrm rot="5399976" flipH="0" flipV="0">
+            <a:off x="6284808" y="5782977"/>
+            <a:ext cx="347294" cy="669268"/>
+          </a:xfrm>
+          <a:prstGeom prst="flowChartAlternateProcess">
+            <a:avLst/>
+          </a:prstGeom>
+          <a:solidFill>
+            <a:schemeClr val="bg1"/>
+          </a:solidFill>
+          <a:ln w="12699" cap="flat" cmpd="sng" algn="ctr">
+            <a:solidFill>
+              <a:schemeClr val="tx1">
+                <a:lumMod val="50196"/>
+                <a:lumOff val="49804"/>
+              </a:schemeClr>
+            </a:solidFill>
+            <a:prstDash val="solid"/>
+            <a:miter lim="800000"/>
+          </a:ln>
+        </p:spPr>
+        <p:style>
+          <a:lnRef idx="2">
+            <a:schemeClr val="accent1">
+              <a:shade val="50000"/>
+            </a:schemeClr>
+          </a:lnRef>
+          <a:fillRef idx="1">
+            <a:schemeClr val="accent1"/>
+          </a:fillRef>
+          <a:effectRef idx="0">
+            <a:schemeClr val="accent1"/>
+          </a:effectRef>
+          <a:fontRef idx="minor">
+            <a:schemeClr val="lt1"/>
+          </a:fontRef>
+        </p:style>
       </p:sp>
     </p:spTree>
   </p:cSld>
@@ -9248,7 +9385,7 @@
       </p:grpSpPr>
       <p:cxnSp>
         <p:nvCxnSpPr>
-          <p:cNvPr id="923136479" name="Connecteur droit 1568760680"/>
+          <p:cNvPr id="1495198741" name="Connecteur droit 1568760680"/>
           <p:cNvCxnSpPr/>
           <p:nvPr/>
         </p:nvCxnSpPr>
@@ -9290,7 +9427,7 @@
       </p:cxnSp>
       <p:sp>
         <p:nvSpPr>
-          <p:cNvPr id="113911509" name="ZoneTexte 1868728971"/>
+          <p:cNvPr id="1349150799" name="ZoneTexte 1868728971"/>
           <p:cNvSpPr txBox="1"/>
           <p:nvPr/>
         </p:nvSpPr>
@@ -9330,7 +9467,7 @@
       </p:sp>
       <p:cxnSp>
         <p:nvCxnSpPr>
-          <p:cNvPr id="1635427582" name="Connecteur droit 806540798"/>
+          <p:cNvPr id="711577057" name="Connecteur droit 806540798"/>
           <p:cNvCxnSpPr/>
           <p:nvPr/>
         </p:nvCxnSpPr>
@@ -9372,7 +9509,7 @@
       </p:cxnSp>
       <p:sp>
         <p:nvSpPr>
-          <p:cNvPr id="146246448" name="ZoneTexte 406616703"/>
+          <p:cNvPr id="1596220690" name="ZoneTexte 406616703"/>
           <p:cNvSpPr txBox="1"/>
           <p:nvPr/>
         </p:nvSpPr>
@@ -9412,7 +9549,7 @@
       </p:sp>
       <p:sp>
         <p:nvSpPr>
-          <p:cNvPr id="1632454234" name="ZoneTexte 1302587497"/>
+          <p:cNvPr id="606952284" name="ZoneTexte 1302587497"/>
           <p:cNvSpPr txBox="1"/>
           <p:nvPr/>
         </p:nvSpPr>
@@ -9616,7 +9753,7 @@
       </p:sp>
       <p:sp>
         <p:nvSpPr>
-          <p:cNvPr id="1192643125" name="Rectangle 38344096"/>
+          <p:cNvPr id="1325192880" name="Rectangle 38344096"/>
           <p:cNvSpPr/>
           <p:nvPr/>
         </p:nvSpPr>
@@ -9656,7 +9793,7 @@
       </p:sp>
       <p:sp>
         <p:nvSpPr>
-          <p:cNvPr id="1403932048" name="ZoneTexte 1075280509"/>
+          <p:cNvPr id="1963863651" name="ZoneTexte 1075280509"/>
           <p:cNvSpPr txBox="1"/>
           <p:nvPr/>
         </p:nvSpPr>
@@ -9729,7 +9866,7 @@
       </p:sp>
       <p:sp>
         <p:nvSpPr>
-          <p:cNvPr id="673488286" name="ZoneTexte 226284734"/>
+          <p:cNvPr id="1897417077" name="ZoneTexte 226284734"/>
           <p:cNvSpPr txBox="1"/>
           <p:nvPr/>
         </p:nvSpPr>
@@ -9802,7 +9939,7 @@
       </p:sp>
       <p:sp>
         <p:nvSpPr>
-          <p:cNvPr id="850147729" name="ZoneTexte 162158187"/>
+          <p:cNvPr id="518187120" name="ZoneTexte 162158187"/>
           <p:cNvSpPr txBox="1"/>
           <p:nvPr/>
         </p:nvSpPr>
@@ -9852,7 +9989,7 @@
       </p:sp>
       <p:sp>
         <p:nvSpPr>
-          <p:cNvPr id="1536785911" name="Rectangle : avec coins arrondis en haut 1452601499"/>
+          <p:cNvPr id="1300451174" name="Rectangle : avec coins arrondis en haut 1452601499"/>
           <p:cNvSpPr/>
           <p:nvPr/>
         </p:nvSpPr>
@@ -9895,7 +10032,7 @@
       </p:sp>
       <p:sp>
         <p:nvSpPr>
-          <p:cNvPr id="1058829290" name="Rectangle : avec coins arrondis en haut 1782110635"/>
+          <p:cNvPr id="320039045" name="Rectangle : avec coins arrondis en haut 1782110635"/>
           <p:cNvSpPr/>
           <p:nvPr/>
         </p:nvSpPr>
@@ -9941,7 +10078,7 @@
       </p:sp>
       <p:sp>
         <p:nvSpPr>
-          <p:cNvPr id="216642084" name="Rectangle : avec coins arrondis en haut 945118596"/>
+          <p:cNvPr id="1150044843" name="Rectangle : avec coins arrondis en haut 945118596"/>
           <p:cNvSpPr/>
           <p:nvPr/>
         </p:nvSpPr>
@@ -9987,7 +10124,7 @@
       </p:sp>
       <p:sp>
         <p:nvSpPr>
-          <p:cNvPr id="1118933436" name=""/>
+          <p:cNvPr id="548880500" name=""/>
           <p:cNvSpPr/>
           <p:nvPr/>
         </p:nvSpPr>
@@ -10029,7 +10166,7 @@
       </p:sp>
       <p:sp>
         <p:nvSpPr>
-          <p:cNvPr id="49020951" name=""/>
+          <p:cNvPr id="428571705" name=""/>
           <p:cNvSpPr txBox="1"/>
           <p:nvPr/>
         </p:nvSpPr>
@@ -10069,7 +10206,7 @@
       </p:sp>
       <p:sp>
         <p:nvSpPr>
-          <p:cNvPr id="1498297038" name=""/>
+          <p:cNvPr id="1787299839" name=""/>
           <p:cNvSpPr txBox="1"/>
           <p:nvPr/>
         </p:nvSpPr>
@@ -10123,7 +10260,7 @@
       </p:sp>
       <p:sp>
         <p:nvSpPr>
-          <p:cNvPr id="1957423090" name=""/>
+          <p:cNvPr id="1952419862" name=""/>
           <p:cNvSpPr txBox="1"/>
           <p:nvPr/>
         </p:nvSpPr>
@@ -10398,7 +10535,7 @@
       </p:sp>
       <p:sp>
         <p:nvSpPr>
-          <p:cNvPr id="1476977989" name=""/>
+          <p:cNvPr id="357727098" name=""/>
           <p:cNvSpPr txBox="1"/>
           <p:nvPr/>
         </p:nvSpPr>
@@ -10452,7 +10589,7 @@
       </p:sp>
       <p:sp>
         <p:nvSpPr>
-          <p:cNvPr id="1416310963" name=""/>
+          <p:cNvPr id="1637634706" name=""/>
           <p:cNvSpPr txBox="1"/>
           <p:nvPr/>
         </p:nvSpPr>
@@ -10734,7 +10871,7 @@
       </p:sp>
       <p:sp>
         <p:nvSpPr>
-          <p:cNvPr id="1644079513" name=""/>
+          <p:cNvPr id="705359297" name=""/>
           <p:cNvSpPr txBox="1"/>
           <p:nvPr/>
         </p:nvSpPr>
@@ -10788,7 +10925,7 @@
       </p:sp>
       <p:sp>
         <p:nvSpPr>
-          <p:cNvPr id="1413139895" name=""/>
+          <p:cNvPr id="1695699767" name=""/>
           <p:cNvSpPr txBox="1"/>
           <p:nvPr/>
         </p:nvSpPr>
@@ -11070,7 +11207,7 @@
       </p:sp>
       <p:sp>
         <p:nvSpPr>
-          <p:cNvPr id="664492917" name=""/>
+          <p:cNvPr id="2038738291" name=""/>
           <p:cNvSpPr txBox="1"/>
           <p:nvPr/>
         </p:nvSpPr>
@@ -11124,7 +11261,7 @@
       </p:sp>
       <p:sp>
         <p:nvSpPr>
-          <p:cNvPr id="1048134696" name=""/>
+          <p:cNvPr id="1119915422" name=""/>
           <p:cNvSpPr txBox="1"/>
           <p:nvPr/>
         </p:nvSpPr>
@@ -11406,7 +11543,7 @@
       </p:sp>
       <p:sp>
         <p:nvSpPr>
-          <p:cNvPr id="658742116" name=""/>
+          <p:cNvPr id="1008705680" name=""/>
           <p:cNvSpPr txBox="1"/>
           <p:nvPr/>
         </p:nvSpPr>
@@ -11460,7 +11597,7 @@
       </p:sp>
       <p:sp>
         <p:nvSpPr>
-          <p:cNvPr id="640467725" name=""/>
+          <p:cNvPr id="1471156066" name=""/>
           <p:cNvSpPr txBox="1"/>
           <p:nvPr/>
         </p:nvSpPr>
@@ -11742,7 +11879,7 @@
       </p:sp>
       <p:sp>
         <p:nvSpPr>
-          <p:cNvPr id="1056971619" name=""/>
+          <p:cNvPr id="1195408470" name=""/>
           <p:cNvSpPr txBox="1"/>
           <p:nvPr/>
         </p:nvSpPr>
@@ -11796,7 +11933,7 @@
       </p:sp>
       <p:sp>
         <p:nvSpPr>
-          <p:cNvPr id="64184574" name=""/>
+          <p:cNvPr id="1487670368" name=""/>
           <p:cNvSpPr txBox="1"/>
           <p:nvPr/>
         </p:nvSpPr>
@@ -12078,7 +12215,7 @@
       </p:sp>
       <p:cxnSp>
         <p:nvCxnSpPr>
-          <p:cNvPr id="1088800815" name="Connecteur droit 858914340"/>
+          <p:cNvPr id="437358281" name="Connecteur droit 858914340"/>
           <p:cNvCxnSpPr/>
           <p:nvPr/>
         </p:nvCxnSpPr>
@@ -12120,7 +12257,7 @@
       </p:cxnSp>
       <p:sp>
         <p:nvSpPr>
-          <p:cNvPr id="1555087238" name="ZoneTexte 2018177722"/>
+          <p:cNvPr id="863299699" name="ZoneTexte 2018177722"/>
           <p:cNvSpPr txBox="1"/>
           <p:nvPr/>
         </p:nvSpPr>
@@ -12167,7 +12304,7 @@
       </p:sp>
       <p:sp>
         <p:nvSpPr>
-          <p:cNvPr id="1784573767" name=""/>
+          <p:cNvPr id="1460303681" name=""/>
           <p:cNvSpPr txBox="1"/>
           <p:nvPr/>
         </p:nvSpPr>
@@ -12221,7 +12358,7 @@
       </p:sp>
       <p:sp>
         <p:nvSpPr>
-          <p:cNvPr id="188000811" name=""/>
+          <p:cNvPr id="566966238" name=""/>
           <p:cNvSpPr txBox="1"/>
           <p:nvPr/>
         </p:nvSpPr>
@@ -12503,7 +12640,7 @@
       </p:sp>
       <p:sp>
         <p:nvSpPr>
-          <p:cNvPr id="569882263" name=""/>
+          <p:cNvPr id="536122460" name=""/>
           <p:cNvSpPr txBox="1"/>
           <p:nvPr/>
         </p:nvSpPr>
@@ -12557,7 +12694,7 @@
       </p:sp>
       <p:sp>
         <p:nvSpPr>
-          <p:cNvPr id="1785531239" name=""/>
+          <p:cNvPr id="2109916114" name=""/>
           <p:cNvSpPr txBox="1"/>
           <p:nvPr/>
         </p:nvSpPr>
@@ -12839,7 +12976,7 @@
       </p:sp>
       <p:sp>
         <p:nvSpPr>
-          <p:cNvPr id="1319472650" name=""/>
+          <p:cNvPr id="869377948" name=""/>
           <p:cNvSpPr txBox="1"/>
           <p:nvPr/>
         </p:nvSpPr>
@@ -12893,7 +13030,7 @@
       </p:sp>
       <p:sp>
         <p:nvSpPr>
-          <p:cNvPr id="882314279" name=""/>
+          <p:cNvPr id="654885350" name=""/>
           <p:cNvSpPr txBox="1"/>
           <p:nvPr/>
         </p:nvSpPr>
@@ -13175,7 +13312,7 @@
       </p:sp>
       <p:sp>
         <p:nvSpPr>
-          <p:cNvPr id="1558947077" name=""/>
+          <p:cNvPr id="293051565" name=""/>
           <p:cNvSpPr txBox="1"/>
           <p:nvPr/>
         </p:nvSpPr>
@@ -13229,7 +13366,7 @@
       </p:sp>
       <p:sp>
         <p:nvSpPr>
-          <p:cNvPr id="253053502" name=""/>
+          <p:cNvPr id="954150901" name=""/>
           <p:cNvSpPr txBox="1"/>
           <p:nvPr/>
         </p:nvSpPr>
@@ -13511,7 +13648,7 @@
       </p:sp>
       <p:sp>
         <p:nvSpPr>
-          <p:cNvPr id="1900877781" name=""/>
+          <p:cNvPr id="1952135643" name=""/>
           <p:cNvSpPr txBox="1"/>
           <p:nvPr/>
         </p:nvSpPr>
@@ -13565,7 +13702,7 @@
       </p:sp>
       <p:sp>
         <p:nvSpPr>
-          <p:cNvPr id="1104170444" name=""/>
+          <p:cNvPr id="1815402774" name=""/>
           <p:cNvSpPr txBox="1"/>
           <p:nvPr/>
         </p:nvSpPr>
@@ -13847,7 +13984,7 @@
       </p:sp>
       <p:sp>
         <p:nvSpPr>
-          <p:cNvPr id="398604977" name=""/>
+          <p:cNvPr id="1709673422" name=""/>
           <p:cNvSpPr txBox="1"/>
           <p:nvPr/>
         </p:nvSpPr>
@@ -13901,7 +14038,7 @@
       </p:sp>
       <p:sp>
         <p:nvSpPr>
-          <p:cNvPr id="1075986109" name=""/>
+          <p:cNvPr id="2059001425" name=""/>
           <p:cNvSpPr txBox="1"/>
           <p:nvPr/>
         </p:nvSpPr>
@@ -14183,7 +14320,7 @@
       </p:sp>
       <p:sp>
         <p:nvSpPr>
-          <p:cNvPr id="246310921" name="Rectangle : avec coins arrondis en haut 945118596"/>
+          <p:cNvPr id="963694932" name="Rectangle : avec coins arrondis en haut 945118596"/>
           <p:cNvSpPr/>
           <p:nvPr/>
         </p:nvSpPr>
@@ -14228,7 +14365,7 @@
       </p:sp>
       <p:sp>
         <p:nvSpPr>
-          <p:cNvPr id="1666935096" name="Rectangle : avec coins arrondis en haut 945118596"/>
+          <p:cNvPr id="1820134422" name="Rectangle : avec coins arrondis en haut 945118596"/>
           <p:cNvSpPr/>
           <p:nvPr/>
         </p:nvSpPr>
@@ -14273,7 +14410,7 @@
       </p:sp>
       <p:sp>
         <p:nvSpPr>
-          <p:cNvPr id="1445534314" name="Rectangle : avec coins arrondis en haut 945118596"/>
+          <p:cNvPr id="499427996" name="Rectangle : avec coins arrondis en haut 945118596"/>
           <p:cNvSpPr/>
           <p:nvPr/>
         </p:nvSpPr>
@@ -14318,7 +14455,7 @@
       </p:sp>
       <p:sp>
         <p:nvSpPr>
-          <p:cNvPr id="1146269875" name="Rectangle : avec coins arrondis en haut 945118596"/>
+          <p:cNvPr id="1839055595" name="Rectangle : avec coins arrondis en haut 945118596"/>
           <p:cNvSpPr/>
           <p:nvPr/>
         </p:nvSpPr>
@@ -14363,7 +14500,7 @@
       </p:sp>
       <p:sp>
         <p:nvSpPr>
-          <p:cNvPr id="1110285098" name="Rectangle : avec coins arrondis en haut 945118596"/>
+          <p:cNvPr id="1704612633" name="Rectangle : avec coins arrondis en haut 945118596"/>
           <p:cNvSpPr/>
           <p:nvPr/>
         </p:nvSpPr>
@@ -14408,7 +14545,7 @@
       </p:sp>
       <p:sp>
         <p:nvSpPr>
-          <p:cNvPr id="530130590" name="Rectangle : avec coins arrondis en haut 945118596"/>
+          <p:cNvPr id="1052009888" name="Rectangle : avec coins arrondis en haut 945118596"/>
           <p:cNvSpPr/>
           <p:nvPr/>
         </p:nvSpPr>
@@ -14453,7 +14590,7 @@
       </p:sp>
       <p:sp>
         <p:nvSpPr>
-          <p:cNvPr id="1167216411" name="Rectangle : avec coins arrondis en haut 945118596"/>
+          <p:cNvPr id="341380598" name="Rectangle : avec coins arrondis en haut 945118596"/>
           <p:cNvSpPr/>
           <p:nvPr/>
         </p:nvSpPr>
@@ -14498,7 +14635,7 @@
       </p:sp>
       <p:sp>
         <p:nvSpPr>
-          <p:cNvPr id="127481085" name="Rectangle : avec coins arrondis en haut 945118596"/>
+          <p:cNvPr id="113019211" name="Rectangle : avec coins arrondis en haut 945118596"/>
           <p:cNvSpPr/>
           <p:nvPr/>
         </p:nvSpPr>
@@ -14543,7 +14680,7 @@
       </p:sp>
       <p:sp>
         <p:nvSpPr>
-          <p:cNvPr id="182227936" name="Rectangle : avec coins arrondis en haut 945118596"/>
+          <p:cNvPr id="1746204969" name="Rectangle : avec coins arrondis en haut 945118596"/>
           <p:cNvSpPr/>
           <p:nvPr/>
         </p:nvSpPr>
@@ -14588,7 +14725,7 @@
       </p:sp>
       <p:sp>
         <p:nvSpPr>
-          <p:cNvPr id="2144445522" name="Rectangle : avec coins arrondis en haut 945118596"/>
+          <p:cNvPr id="447665219" name="Rectangle : avec coins arrondis en haut 945118596"/>
           <p:cNvSpPr/>
           <p:nvPr/>
         </p:nvSpPr>
@@ -14633,7 +14770,7 @@
       </p:sp>
       <p:sp>
         <p:nvSpPr>
-          <p:cNvPr id="1836646625" name="Rectangle : avec coins arrondis en haut 945118596"/>
+          <p:cNvPr id="1547929648" name="Rectangle : avec coins arrondis en haut 945118596"/>
           <p:cNvSpPr/>
           <p:nvPr/>
         </p:nvSpPr>
@@ -14678,7 +14815,7 @@
       </p:sp>
       <p:sp>
         <p:nvSpPr>
-          <p:cNvPr id="1198227428" name="Rectangle : avec coins arrondis en haut 945118596"/>
+          <p:cNvPr id="551998153" name="Rectangle : avec coins arrondis en haut 945118596"/>
           <p:cNvSpPr/>
           <p:nvPr/>
         </p:nvSpPr>
@@ -14723,7 +14860,7 @@
       </p:sp>
       <p:sp>
         <p:nvSpPr>
-          <p:cNvPr id="976854222" name="Rectangle : avec coins arrondis en haut 945118596"/>
+          <p:cNvPr id="560212785" name="Rectangle : avec coins arrondis en haut 945118596"/>
           <p:cNvSpPr/>
           <p:nvPr/>
         </p:nvSpPr>
@@ -14768,7 +14905,7 @@
       </p:sp>
       <p:sp>
         <p:nvSpPr>
-          <p:cNvPr id="727716383" name="Rectangle : avec coins arrondis en haut 945118596"/>
+          <p:cNvPr id="1943615409" name="Rectangle : avec coins arrondis en haut 945118596"/>
           <p:cNvSpPr/>
           <p:nvPr/>
         </p:nvSpPr>
@@ -14813,7 +14950,7 @@
       </p:sp>
       <p:sp>
         <p:nvSpPr>
-          <p:cNvPr id="945570223" name="Rectangle : avec coins arrondis en haut 945118596"/>
+          <p:cNvPr id="1328999252" name="Rectangle : avec coins arrondis en haut 945118596"/>
           <p:cNvSpPr/>
           <p:nvPr/>
         </p:nvSpPr>
@@ -14858,7 +14995,7 @@
       </p:sp>
       <p:sp>
         <p:nvSpPr>
-          <p:cNvPr id="1874390965" name="Rectangle : avec coins arrondis en haut 945118596"/>
+          <p:cNvPr id="1282042744" name="Rectangle : avec coins arrondis en haut 945118596"/>
           <p:cNvSpPr/>
           <p:nvPr/>
         </p:nvSpPr>
@@ -14903,7 +15040,7 @@
       </p:sp>
       <p:sp>
         <p:nvSpPr>
-          <p:cNvPr id="1113720617" name="Rectangle : avec coins arrondis en haut 945118596"/>
+          <p:cNvPr id="2056797416" name="Rectangle : avec coins arrondis en haut 945118596"/>
           <p:cNvSpPr/>
           <p:nvPr/>
         </p:nvSpPr>
@@ -14948,7 +15085,7 @@
       </p:sp>
       <p:sp>
         <p:nvSpPr>
-          <p:cNvPr id="856661584" name="Rectangle : avec coins arrondis en haut 945118596"/>
+          <p:cNvPr id="1342408395" name="Rectangle : avec coins arrondis en haut 945118596"/>
           <p:cNvSpPr/>
           <p:nvPr/>
         </p:nvSpPr>
@@ -14993,7 +15130,7 @@
       </p:sp>
       <p:sp>
         <p:nvSpPr>
-          <p:cNvPr id="351769393" name="Rectangle : avec coins arrondis en haut 945118596"/>
+          <p:cNvPr id="1154577200" name="Rectangle : avec coins arrondis en haut 945118596"/>
           <p:cNvSpPr/>
           <p:nvPr/>
         </p:nvSpPr>
@@ -15038,7 +15175,7 @@
       </p:sp>
       <p:sp>
         <p:nvSpPr>
-          <p:cNvPr id="1847808100" name="Rectangle : avec coins arrondis en haut 945118596"/>
+          <p:cNvPr id="687648818" name="Rectangle : avec coins arrondis en haut 945118596"/>
           <p:cNvSpPr/>
           <p:nvPr/>
         </p:nvSpPr>
@@ -15083,7 +15220,7 @@
       </p:sp>
       <p:sp>
         <p:nvSpPr>
-          <p:cNvPr id="1001738685" name="Rectangle : avec coins arrondis en haut 945118596"/>
+          <p:cNvPr id="1626360547" name="Rectangle : avec coins arrondis en haut 945118596"/>
           <p:cNvSpPr/>
           <p:nvPr/>
         </p:nvSpPr>
@@ -15128,7 +15265,7 @@
       </p:sp>
       <p:sp>
         <p:nvSpPr>
-          <p:cNvPr id="1459520166" name="Rectangle : avec coins arrondis en haut 945118596"/>
+          <p:cNvPr id="1299500934" name="Rectangle : avec coins arrondis en haut 945118596"/>
           <p:cNvSpPr/>
           <p:nvPr/>
         </p:nvSpPr>
@@ -15173,7 +15310,7 @@
       </p:sp>
       <p:sp>
         <p:nvSpPr>
-          <p:cNvPr id="573853179" name="Rectangle : avec coins arrondis en haut 945118596"/>
+          <p:cNvPr id="752610719" name="Rectangle : avec coins arrondis en haut 945118596"/>
           <p:cNvSpPr/>
           <p:nvPr/>
         </p:nvSpPr>
@@ -15218,7 +15355,7 @@
       </p:sp>
       <p:sp>
         <p:nvSpPr>
-          <p:cNvPr id="324953123" name="Rectangle : avec coins arrondis en haut 945118596"/>
+          <p:cNvPr id="2140528162" name="Rectangle : avec coins arrondis en haut 945118596"/>
           <p:cNvSpPr/>
           <p:nvPr/>
         </p:nvSpPr>
@@ -15263,7 +15400,7 @@
       </p:sp>
       <p:sp>
         <p:nvSpPr>
-          <p:cNvPr id="62365584" name="Rectangle : avec coins arrondis en haut 945118596"/>
+          <p:cNvPr id="1110027314" name="Rectangle : avec coins arrondis en haut 945118596"/>
           <p:cNvSpPr/>
           <p:nvPr/>
         </p:nvSpPr>
@@ -15308,7 +15445,7 @@
       </p:sp>
       <p:sp>
         <p:nvSpPr>
-          <p:cNvPr id="1047689678" name="Rectangle : avec coins arrondis en haut 945118596"/>
+          <p:cNvPr id="1608867624" name="Rectangle : avec coins arrondis en haut 945118596"/>
           <p:cNvSpPr/>
           <p:nvPr/>
         </p:nvSpPr>
@@ -15353,7 +15490,7 @@
       </p:sp>
       <p:sp>
         <p:nvSpPr>
-          <p:cNvPr id="2082596123" name="Rectangle : avec coins arrondis en haut 945118596"/>
+          <p:cNvPr id="823145108" name="Rectangle : avec coins arrondis en haut 945118596"/>
           <p:cNvSpPr/>
           <p:nvPr/>
         </p:nvSpPr>
@@ -15398,7 +15535,7 @@
       </p:sp>
       <p:sp>
         <p:nvSpPr>
-          <p:cNvPr id="1510152698" name="Rectangle : avec coins arrondis en haut 945118596"/>
+          <p:cNvPr id="1775692638" name="Rectangle : avec coins arrondis en haut 945118596"/>
           <p:cNvSpPr/>
           <p:nvPr/>
         </p:nvSpPr>
@@ -15443,7 +15580,7 @@
       </p:sp>
       <p:sp>
         <p:nvSpPr>
-          <p:cNvPr id="743692487" name="Rectangle : avec coins arrondis en haut 945118596"/>
+          <p:cNvPr id="713539788" name="Rectangle : avec coins arrondis en haut 945118596"/>
           <p:cNvSpPr/>
           <p:nvPr/>
         </p:nvSpPr>
@@ -15488,7 +15625,7 @@
       </p:sp>
       <p:sp>
         <p:nvSpPr>
-          <p:cNvPr id="682282530" name="Rectangle : avec coins arrondis en haut 945118596"/>
+          <p:cNvPr id="523701139" name="Rectangle : avec coins arrondis en haut 945118596"/>
           <p:cNvSpPr/>
           <p:nvPr/>
         </p:nvSpPr>
@@ -15533,7 +15670,7 @@
       </p:sp>
       <p:sp>
         <p:nvSpPr>
-          <p:cNvPr id="270571987" name="Rectangle : avec coins arrondis en haut 945118596"/>
+          <p:cNvPr id="267247256" name="Rectangle : avec coins arrondis en haut 945118596"/>
           <p:cNvSpPr/>
           <p:nvPr/>
         </p:nvSpPr>
@@ -15578,7 +15715,7 @@
       </p:sp>
       <p:sp>
         <p:nvSpPr>
-          <p:cNvPr id="1344777773" name="Rectangle : avec coins arrondis en haut 945118596"/>
+          <p:cNvPr id="1994110178" name="Rectangle : avec coins arrondis en haut 945118596"/>
           <p:cNvSpPr/>
           <p:nvPr/>
         </p:nvSpPr>
@@ -15623,7 +15760,7 @@
       </p:sp>
       <p:sp>
         <p:nvSpPr>
-          <p:cNvPr id="236777180" name="Rectangle : avec coins arrondis en haut 945118596"/>
+          <p:cNvPr id="1942242685" name="Rectangle : avec coins arrondis en haut 945118596"/>
           <p:cNvSpPr/>
           <p:nvPr/>
         </p:nvSpPr>
@@ -15668,7 +15805,7 @@
       </p:sp>
       <p:sp>
         <p:nvSpPr>
-          <p:cNvPr id="414969023" name="Rectangle : avec coins arrondis en haut 945118596"/>
+          <p:cNvPr id="2004012313" name="Rectangle : avec coins arrondis en haut 945118596"/>
           <p:cNvSpPr/>
           <p:nvPr/>
         </p:nvSpPr>
@@ -15713,7 +15850,7 @@
       </p:sp>
       <p:sp>
         <p:nvSpPr>
-          <p:cNvPr id="1487329303" name="Rectangle : avec coins arrondis en haut 945118596"/>
+          <p:cNvPr id="1055626124" name="Rectangle : avec coins arrondis en haut 945118596"/>
           <p:cNvSpPr/>
           <p:nvPr/>
         </p:nvSpPr>
@@ -15758,7 +15895,7 @@
       </p:sp>
       <p:sp>
         <p:nvSpPr>
-          <p:cNvPr id="1083545579" name="Rectangle : avec coins arrondis en haut 945118596"/>
+          <p:cNvPr id="1778023802" name="Rectangle : avec coins arrondis en haut 945118596"/>
           <p:cNvSpPr/>
           <p:nvPr/>
         </p:nvSpPr>
@@ -15803,14 +15940,14 @@
       </p:sp>
       <p:sp>
         <p:nvSpPr>
-          <p:cNvPr id="216017655" name=""/>
+          <p:cNvPr id="191500413" name=""/>
           <p:cNvSpPr txBox="1"/>
           <p:nvPr/>
         </p:nvSpPr>
         <p:spPr bwMode="auto">
           <a:xfrm rot="0" flipH="0" flipV="0">
-            <a:off x="3728504" y="9519490"/>
-            <a:ext cx="3140354" cy="213719"/>
+            <a:off x="1559522" y="9519489"/>
+            <a:ext cx="5324095" cy="228960"/>
           </a:xfrm>
           <a:prstGeom prst="rect">
             <a:avLst/>
@@ -15818,7 +15955,7 @@
           <a:noFill/>
         </p:spPr>
         <p:txBody>
-          <a:bodyPr vertOverflow="overflow" horzOverflow="overflow" vert="horz" wrap="none" lIns="91440" tIns="45720" rIns="91440" bIns="45720" numCol="1" spcCol="0" rtlCol="0" fromWordArt="0" anchor="t" anchorCtr="0" forceAA="0" upright="0" compatLnSpc="0">
+          <a:bodyPr vertOverflow="overflow" horzOverflow="overflow" vert="horz" wrap="square" lIns="91440" tIns="45720" rIns="91440" bIns="45720" numCol="1" spcCol="0" rtlCol="0" fromWordArt="0" anchor="t" anchorCtr="0" forceAA="0" upright="0" compatLnSpc="0">
             <a:spAutoFit/>
           </a:bodyPr>
           <a:p>
@@ -15835,7 +15972,7 @@
               <a:defRPr/>
             </a:pPr>
             <a:r>
-              <a:rPr lang="fr-FR" sz="800" b="0" i="0" u="none" strike="noStrike" cap="none" spc="0">
+              <a:rPr lang="fr-FR" sz="900" b="0" i="0" u="none" strike="noStrike" cap="none" spc="0">
                 <a:solidFill>
                   <a:srgbClr val="808080"/>
                 </a:solidFill>
@@ -15846,7 +15983,7 @@
               <a:t>Légende : </a:t>
             </a:r>
             <a:r>
-              <a:rPr lang="fr-FR" sz="800" b="1" i="0" u="none" strike="noStrike" cap="none" spc="0">
+              <a:rPr lang="fr-FR" sz="900" b="1" i="0" u="none" strike="noStrike" cap="none" spc="0">
                 <a:solidFill>
                   <a:srgbClr val="808080"/>
                 </a:solidFill>
@@ -15857,7 +15994,7 @@
               <a:t>?</a:t>
             </a:r>
             <a:r>
-              <a:rPr lang="fr-FR" sz="800" b="0" i="0" u="none" strike="noStrike" cap="none" spc="0">
+              <a:rPr lang="fr-FR" sz="900" b="0" i="0" u="none" strike="noStrike" cap="none" spc="0">
                 <a:solidFill>
                   <a:srgbClr val="808080"/>
                 </a:solidFill>
@@ -15868,7 +16005,7 @@
               <a:t> relation non évaluée, </a:t>
             </a:r>
             <a:r>
-              <a:rPr lang="fr-FR" sz="800" b="1" i="0" u="none" strike="noStrike" cap="none" spc="0">
+              <a:rPr lang="fr-FR" sz="900" b="1" i="0" u="none" strike="noStrike" cap="none" spc="0">
                 <a:solidFill>
                   <a:srgbClr val="808080"/>
                 </a:solidFill>
@@ -15876,10 +16013,10 @@
                 <a:ea typeface="Arial"/>
                 <a:cs typeface="Arial"/>
               </a:rPr>
-              <a:t>-</a:t>
-            </a:r>
-            <a:r>
-              <a:rPr lang="fr-FR" sz="800" b="0" i="0" u="none" strike="noStrike" cap="none" spc="0">
+              <a:t>E</a:t>
+            </a:r>
+            <a:r>
+              <a:rPr lang="fr-FR" sz="900" b="0" i="0" u="none" strike="noStrike" cap="none" spc="0">
                 <a:solidFill>
                   <a:srgbClr val="808080"/>
                 </a:solidFill>
@@ -15887,10 +16024,32 @@
                 <a:ea typeface="Arial"/>
                 <a:cs typeface="Arial"/>
               </a:rPr>
+              <a:t> affinité non évaluée, </a:t>
+            </a:r>
+            <a:r>
+              <a:rPr lang="fr-FR" sz="900" b="1" i="0" u="none" strike="noStrike" cap="none" spc="0">
+                <a:solidFill>
+                  <a:srgbClr val="808080"/>
+                </a:solidFill>
+                <a:latin typeface="Arial"/>
+                <a:ea typeface="Arial"/>
+                <a:cs typeface="Arial"/>
+              </a:rPr>
+              <a:t>N</a:t>
+            </a:r>
+            <a:r>
+              <a:rPr lang="fr-FR" sz="900" b="0" i="0" u="none" strike="noStrike" cap="none" spc="0">
+                <a:solidFill>
+                  <a:srgbClr val="808080"/>
+                </a:solidFill>
+                <a:latin typeface="Arial"/>
+                <a:ea typeface="Arial"/>
+                <a:cs typeface="Arial"/>
+              </a:rPr>
               <a:t> pas d’affinité, </a:t>
             </a:r>
             <a:r>
-              <a:rPr lang="fr-FR" sz="800" b="1" i="0" u="none" strike="noStrike" cap="none" spc="0">
+              <a:rPr lang="fr-FR" sz="900" b="1" i="0" u="none" strike="noStrike" cap="none" spc="0">
                 <a:solidFill>
                   <a:srgbClr val="808080"/>
                 </a:solidFill>
@@ -15898,10 +16057,10 @@
                 <a:ea typeface="Arial"/>
                 <a:cs typeface="Arial"/>
               </a:rPr>
-              <a:t>+</a:t>
-            </a:r>
-            <a:r>
-              <a:rPr lang="fr-FR" sz="800" b="0" i="0" u="none" strike="noStrike" cap="none" spc="0">
+              <a:t>O</a:t>
+            </a:r>
+            <a:r>
+              <a:rPr lang="fr-FR" sz="900" b="0" i="0" u="none" strike="noStrike" cap="none" spc="0">
                 <a:solidFill>
                   <a:srgbClr val="808080"/>
                 </a:solidFill>
@@ -15911,7 +16070,7 @@
               </a:rPr>
               <a:t> affinité avérée</a:t>
             </a:r>
-            <a:endParaRPr sz="800">
+            <a:endParaRPr sz="900">
               <a:solidFill>
                 <a:srgbClr val="7F7F7F"/>
               </a:solidFill>
@@ -15921,14 +16080,14 @@
       </p:sp>
       <p:sp>
         <p:nvSpPr>
-          <p:cNvPr id="145202678" name=""/>
+          <p:cNvPr id="645268490" name=""/>
           <p:cNvSpPr/>
           <p:nvPr/>
         </p:nvSpPr>
         <p:spPr bwMode="auto">
           <a:xfrm>
-            <a:off x="2830522" y="22347"/>
-            <a:ext cx="4022971" cy="427079"/>
+            <a:off x="3282427" y="22347"/>
+            <a:ext cx="3571425" cy="427079"/>
           </a:xfrm>
           <a:prstGeom prst="rect">
             <a:avLst/>
@@ -15952,9 +16111,9 @@
                 <a:solidFill>
                   <a:srgbClr val="BFBFBF"/>
                 </a:solidFill>
-                <a:latin typeface="Lucida Handwriting"/>
-                <a:ea typeface="Lucida Handwriting"/>
-                <a:cs typeface="Lucida Handwriting"/>
+                <a:latin typeface="Georgia"/>
+                <a:ea typeface="Georgia"/>
+                <a:cs typeface="Georgia"/>
               </a:rPr>
               <a:t>Les </a:t>
             </a:r>
@@ -15963,9 +16122,9 @@
                 <a:solidFill>
                   <a:srgbClr val="BFBFBF"/>
                 </a:solidFill>
-                <a:latin typeface="Lucida Handwriting"/>
-                <a:ea typeface="Lucida Handwriting"/>
-                <a:cs typeface="Lucida Handwriting"/>
+                <a:latin typeface="Georgia"/>
+                <a:ea typeface="Georgia"/>
+                <a:cs typeface="Georgia"/>
               </a:rPr>
               <a:t>monstres </a:t>
             </a:r>
@@ -15974,9 +16133,9 @@
                 <a:solidFill>
                   <a:srgbClr val="BFBFBF"/>
                 </a:solidFill>
-                <a:latin typeface="Lucida Handwriting"/>
-                <a:ea typeface="Lucida Handwriting"/>
-                <a:cs typeface="Lucida Handwriting"/>
+                <a:latin typeface="Georgia"/>
+                <a:ea typeface="Georgia"/>
+                <a:cs typeface="Georgia"/>
               </a:rPr>
               <a:t>que nous sommes</a:t>
             </a:r>
@@ -15984,8 +16143,8 @@
               <a:solidFill>
                 <a:srgbClr val="BFBFBF"/>
               </a:solidFill>
-              <a:latin typeface="Lucida Handwriting"/>
-              <a:cs typeface="Lucida Handwriting"/>
+              <a:latin typeface="Georgia"/>
+              <a:cs typeface="Georgia"/>
             </a:endParaRPr>
           </a:p>
         </p:txBody>
@@ -16025,7 +16184,7 @@
       </p:grpSpPr>
       <p:cxnSp>
         <p:nvCxnSpPr>
-          <p:cNvPr id="1593687641" name="Connecteur droit 266926011"/>
+          <p:cNvPr id="926035859" name="Connecteur droit 266926011"/>
           <p:cNvCxnSpPr/>
           <p:nvPr/>
         </p:nvCxnSpPr>
@@ -16067,7 +16226,7 @@
       </p:cxnSp>
       <p:sp>
         <p:nvSpPr>
-          <p:cNvPr id="632212863" name="ZoneTexte 1043763612"/>
+          <p:cNvPr id="1188281402" name="ZoneTexte 1043763612"/>
           <p:cNvSpPr txBox="1"/>
           <p:nvPr/>
         </p:nvSpPr>
@@ -16107,7 +16266,7 @@
       </p:sp>
       <p:cxnSp>
         <p:nvCxnSpPr>
-          <p:cNvPr id="1693442553" name="Connecteur droit 1586327141"/>
+          <p:cNvPr id="2070340276" name="Connecteur droit 1586327141"/>
           <p:cNvCxnSpPr/>
           <p:nvPr/>
         </p:nvCxnSpPr>
@@ -16150,7 +16309,7 @@
       </p:cxnSp>
       <p:sp>
         <p:nvSpPr>
-          <p:cNvPr id="782160696" name="ZoneTexte 1691387439"/>
+          <p:cNvPr id="1008900434" name="ZoneTexte 1691387439"/>
           <p:cNvSpPr txBox="1"/>
           <p:nvPr/>
         </p:nvSpPr>
@@ -16190,7 +16349,7 @@
       </p:sp>
       <p:cxnSp>
         <p:nvCxnSpPr>
-          <p:cNvPr id="16921945" name="Connecteur droit 1743707585"/>
+          <p:cNvPr id="1399250618" name="Connecteur droit 1743707585"/>
           <p:cNvCxnSpPr/>
           <p:nvPr/>
         </p:nvCxnSpPr>
@@ -16233,7 +16392,7 @@
       </p:cxnSp>
       <p:sp>
         <p:nvSpPr>
-          <p:cNvPr id="112651592" name="ZoneTexte 1503300725"/>
+          <p:cNvPr id="895826915" name="ZoneTexte 1503300725"/>
           <p:cNvSpPr txBox="1"/>
           <p:nvPr/>
         </p:nvSpPr>
@@ -16315,7 +16474,7 @@
       </p:sp>
       <p:sp>
         <p:nvSpPr>
-          <p:cNvPr id="1534527464" name="Rectangle : avec coins arrondis en haut 1151560973"/>
+          <p:cNvPr id="889581108" name="Rectangle : avec coins arrondis en haut 1151560973"/>
           <p:cNvSpPr/>
           <p:nvPr/>
         </p:nvSpPr>
@@ -16361,7 +16520,7 @@
       </p:sp>
       <p:sp>
         <p:nvSpPr>
-          <p:cNvPr id="1572448272" name="Flèche : pentagone 1610574377"/>
+          <p:cNvPr id="480822676" name="Flèche : pentagone 1610574377"/>
           <p:cNvSpPr/>
           <p:nvPr/>
         </p:nvSpPr>
@@ -16406,7 +16565,7 @@
       </p:sp>
       <p:sp>
         <p:nvSpPr>
-          <p:cNvPr id="147372979" name="Flèche : pentagone 463861063"/>
+          <p:cNvPr id="26171126" name="Flèche : pentagone 463861063"/>
           <p:cNvSpPr/>
           <p:nvPr/>
         </p:nvSpPr>
@@ -16451,7 +16610,7 @@
       </p:sp>
       <p:sp>
         <p:nvSpPr>
-          <p:cNvPr id="1595932103" name="Flèche : pentagone 272004907"/>
+          <p:cNvPr id="321001182" name="Flèche : pentagone 272004907"/>
           <p:cNvSpPr/>
           <p:nvPr/>
         </p:nvSpPr>
@@ -16496,7 +16655,7 @@
       </p:sp>
       <p:sp>
         <p:nvSpPr>
-          <p:cNvPr id="1970912174" name="Flèche : pentagone 28174069"/>
+          <p:cNvPr id="2045511231" name="Flèche : pentagone 28174069"/>
           <p:cNvSpPr/>
           <p:nvPr/>
         </p:nvSpPr>
@@ -16541,7 +16700,7 @@
       </p:sp>
       <p:sp>
         <p:nvSpPr>
-          <p:cNvPr id="1882858307" name="Flèche : pentagone 978127220"/>
+          <p:cNvPr id="291334355" name="Flèche : pentagone 978127220"/>
           <p:cNvSpPr/>
           <p:nvPr/>
         </p:nvSpPr>
@@ -16586,14 +16745,14 @@
       </p:sp>
       <p:sp>
         <p:nvSpPr>
-          <p:cNvPr id="1724656575" name="ZoneTexte 1693594013"/>
+          <p:cNvPr id="432767563" name="ZoneTexte 1693594013"/>
           <p:cNvSpPr txBox="1"/>
           <p:nvPr/>
         </p:nvSpPr>
         <p:spPr bwMode="auto">
           <a:xfrm flipH="0" flipV="0">
-            <a:off x="3252186" y="6489753"/>
-            <a:ext cx="3626024" cy="3139799"/>
+            <a:off x="3252186" y="6489752"/>
+            <a:ext cx="3631783" cy="3139799"/>
           </a:xfrm>
           <a:prstGeom prst="rect">
             <a:avLst/>
@@ -16918,7 +17077,7 @@
                   </a:schemeClr>
                 </a:solidFill>
               </a:rPr>
-              <a:t>Tant que vous n’avez pas coché les 3 cases de rage, vous effacez une case de rage à chaque nouvelle séance.</a:t>
+              <a:t>Tant que vous n’avez pas coché les 3 cases de rage, vous effacez une case de rage à chaque nouveau scénario.</a:t>
             </a:r>
             <a:endParaRPr/>
           </a:p>
@@ -16926,7 +17085,7 @@
       </p:sp>
       <p:sp>
         <p:nvSpPr>
-          <p:cNvPr id="1342411138" name="ZoneTexte 1975797288"/>
+          <p:cNvPr id="2000943375" name="ZoneTexte 1975797288"/>
           <p:cNvSpPr txBox="1"/>
           <p:nvPr/>
         </p:nvSpPr>
@@ -16966,7 +17125,7 @@
       </p:sp>
       <p:sp>
         <p:nvSpPr>
-          <p:cNvPr id="123147750" name="ZoneTexte 2064865984"/>
+          <p:cNvPr id="326990214" name="ZoneTexte 2064865984"/>
           <p:cNvSpPr txBox="1"/>
           <p:nvPr/>
         </p:nvSpPr>
@@ -17231,7 +17390,7 @@
       </p:sp>
       <p:sp>
         <p:nvSpPr>
-          <p:cNvPr id="1026801026" name="ZoneTexte 1387173154"/>
+          <p:cNvPr id="974122850" name="ZoneTexte 1387173154"/>
           <p:cNvSpPr txBox="1"/>
           <p:nvPr/>
         </p:nvSpPr>
@@ -17555,7 +17714,7 @@
       </p:sp>
       <p:sp>
         <p:nvSpPr>
-          <p:cNvPr id="120075166" name="ZoneTexte 523755832"/>
+          <p:cNvPr id="1253688080" name="ZoneTexte 523755832"/>
           <p:cNvSpPr txBox="1"/>
           <p:nvPr/>
         </p:nvSpPr>
@@ -17968,7 +18127,7 @@
       </p:sp>
       <p:cxnSp>
         <p:nvCxnSpPr>
-          <p:cNvPr id="1685665631" name="Connecteur droit 2085669542"/>
+          <p:cNvPr id="2010859947" name="Connecteur droit 2085669542"/>
           <p:cNvCxnSpPr/>
           <p:nvPr/>
         </p:nvCxnSpPr>
@@ -18011,7 +18170,7 @@
       </p:cxnSp>
       <p:sp>
         <p:nvSpPr>
-          <p:cNvPr id="1059060190" name="ZoneTexte 34398067"/>
+          <p:cNvPr id="33045609" name="ZoneTexte 34398067"/>
           <p:cNvSpPr txBox="1"/>
           <p:nvPr/>
         </p:nvSpPr>
@@ -18065,7 +18224,7 @@
       </p:sp>
       <p:sp>
         <p:nvSpPr>
-          <p:cNvPr id="229962702" name="ZoneTexte 273581705"/>
+          <p:cNvPr id="209695120" name="ZoneTexte 273581705"/>
           <p:cNvSpPr txBox="1"/>
           <p:nvPr/>
         </p:nvSpPr>
@@ -18363,7 +18522,7 @@
       </p:sp>
       <p:sp>
         <p:nvSpPr>
-          <p:cNvPr id="970528561" name="ZoneTexte 1727393832"/>
+          <p:cNvPr id="1763932118" name="ZoneTexte 1727393832"/>
           <p:cNvSpPr txBox="1"/>
           <p:nvPr/>
         </p:nvSpPr>
@@ -18405,7 +18564,7 @@
       </p:sp>
       <p:sp>
         <p:nvSpPr>
-          <p:cNvPr id="1811827477" name="ZoneTexte 504516740"/>
+          <p:cNvPr id="1392106363" name="ZoneTexte 504516740"/>
           <p:cNvSpPr txBox="1"/>
           <p:nvPr/>
         </p:nvSpPr>
@@ -18447,7 +18606,7 @@
       </p:sp>
       <p:sp>
         <p:nvSpPr>
-          <p:cNvPr id="1861654119" name="ZoneTexte 1"/>
+          <p:cNvPr id="1837644029" name="ZoneTexte 1"/>
           <p:cNvSpPr txBox="1"/>
           <p:nvPr/>
         </p:nvSpPr>
@@ -19910,7 +20069,7 @@
       </p:sp>
       <p:sp>
         <p:nvSpPr>
-          <p:cNvPr id="1861816688" name="ZoneTexte 2"/>
+          <p:cNvPr id="295098980" name="ZoneTexte 2"/>
           <p:cNvSpPr txBox="1"/>
           <p:nvPr/>
         </p:nvSpPr>
@@ -20448,7 +20607,7 @@
       </p:sp>
       <p:sp>
         <p:nvSpPr>
-          <p:cNvPr id="1568668503" name=""/>
+          <p:cNvPr id="56077749" name=""/>
           <p:cNvSpPr/>
           <p:nvPr/>
         </p:nvSpPr>
@@ -20488,7 +20647,7 @@
       </p:sp>
       <p:sp>
         <p:nvSpPr>
-          <p:cNvPr id="978199709" name="Rectangle : avec coins arrondis en haut 1151560973"/>
+          <p:cNvPr id="1287575133" name="Rectangle : avec coins arrondis en haut 1151560973"/>
           <p:cNvSpPr/>
           <p:nvPr/>
         </p:nvSpPr>
@@ -20536,7 +20695,7 @@
       </p:sp>
       <p:sp>
         <p:nvSpPr>
-          <p:cNvPr id="220491577" name=""/>
+          <p:cNvPr id="800112403" name=""/>
           <p:cNvSpPr/>
           <p:nvPr/>
         </p:nvSpPr>
@@ -20576,7 +20735,7 @@
       </p:sp>
       <p:sp>
         <p:nvSpPr>
-          <p:cNvPr id="1680326953" name="Rectangle : avec coins arrondis en haut 1151560973"/>
+          <p:cNvPr id="1901057988" name="Rectangle : avec coins arrondis en haut 1151560973"/>
           <p:cNvSpPr/>
           <p:nvPr/>
         </p:nvSpPr>
@@ -20624,7 +20783,7 @@
       </p:sp>
       <p:sp>
         <p:nvSpPr>
-          <p:cNvPr id="1432654577" name=""/>
+          <p:cNvPr id="1643391412" name=""/>
           <p:cNvSpPr/>
           <p:nvPr/>
         </p:nvSpPr>
@@ -20664,7 +20823,7 @@
       </p:sp>
       <p:sp>
         <p:nvSpPr>
-          <p:cNvPr id="190743632" name="Rectangle : avec coins arrondis en haut 1151560973"/>
+          <p:cNvPr id="1298203162" name="Rectangle : avec coins arrondis en haut 1151560973"/>
           <p:cNvSpPr/>
           <p:nvPr/>
         </p:nvSpPr>
@@ -20712,7 +20871,7 @@
       </p:sp>
       <p:sp>
         <p:nvSpPr>
-          <p:cNvPr id="2129617461" name=""/>
+          <p:cNvPr id="302612337" name=""/>
           <p:cNvSpPr txBox="1"/>
           <p:nvPr/>
         </p:nvSpPr>
@@ -20777,7 +20936,7 @@
       </p:sp>
       <p:sp>
         <p:nvSpPr>
-          <p:cNvPr id="937688368" name=""/>
+          <p:cNvPr id="1412134831" name=""/>
           <p:cNvSpPr txBox="1"/>
           <p:nvPr/>
         </p:nvSpPr>
@@ -20906,14 +21065,14 @@
       </p:sp>
       <p:sp>
         <p:nvSpPr>
-          <p:cNvPr id="1515923287" name=""/>
+          <p:cNvPr id="208851825" name=""/>
           <p:cNvSpPr/>
           <p:nvPr/>
         </p:nvSpPr>
         <p:spPr bwMode="auto">
           <a:xfrm>
-            <a:off x="2830522" y="22347"/>
-            <a:ext cx="4022971" cy="427079"/>
+            <a:off x="3282427" y="22347"/>
+            <a:ext cx="3571425" cy="427079"/>
           </a:xfrm>
           <a:prstGeom prst="rect">
             <a:avLst/>
@@ -20937,9 +21096,9 @@
                 <a:solidFill>
                   <a:srgbClr val="BFBFBF"/>
                 </a:solidFill>
-                <a:latin typeface="Lucida Handwriting"/>
-                <a:ea typeface="Lucida Handwriting"/>
-                <a:cs typeface="Lucida Handwriting"/>
+                <a:latin typeface="Georgia"/>
+                <a:ea typeface="Georgia"/>
+                <a:cs typeface="Georgia"/>
               </a:rPr>
               <a:t>Les </a:t>
             </a:r>
@@ -20948,9 +21107,9 @@
                 <a:solidFill>
                   <a:srgbClr val="BFBFBF"/>
                 </a:solidFill>
-                <a:latin typeface="Lucida Handwriting"/>
-                <a:ea typeface="Lucida Handwriting"/>
-                <a:cs typeface="Lucida Handwriting"/>
+                <a:latin typeface="Georgia"/>
+                <a:ea typeface="Georgia"/>
+                <a:cs typeface="Georgia"/>
               </a:rPr>
               <a:t>monstres </a:t>
             </a:r>
@@ -20959,9 +21118,9 @@
                 <a:solidFill>
                   <a:srgbClr val="BFBFBF"/>
                 </a:solidFill>
-                <a:latin typeface="Lucida Handwriting"/>
-                <a:ea typeface="Lucida Handwriting"/>
-                <a:cs typeface="Lucida Handwriting"/>
+                <a:latin typeface="Georgia"/>
+                <a:ea typeface="Georgia"/>
+                <a:cs typeface="Georgia"/>
               </a:rPr>
               <a:t>que nous sommes</a:t>
             </a:r>
@@ -20969,15 +21128,15 @@
               <a:solidFill>
                 <a:srgbClr val="BFBFBF"/>
               </a:solidFill>
-              <a:latin typeface="Lucida Handwriting"/>
-              <a:cs typeface="Lucida Handwriting"/>
+              <a:latin typeface="Georgia"/>
+              <a:cs typeface="Georgia"/>
             </a:endParaRPr>
           </a:p>
         </p:txBody>
       </p:sp>
       <p:sp>
         <p:nvSpPr>
-          <p:cNvPr id="67385416" name="Flèche : pentagone 1610574377"/>
+          <p:cNvPr id="1993831857" name="Flèche : pentagone 1610574377"/>
           <p:cNvSpPr/>
           <p:nvPr/>
         </p:nvSpPr>
@@ -21022,7 +21181,7 @@
       </p:sp>
       <p:sp>
         <p:nvSpPr>
-          <p:cNvPr id="6449178" name="Flèche : pentagone 463861063"/>
+          <p:cNvPr id="1003156859" name="Flèche : pentagone 463861063"/>
           <p:cNvSpPr/>
           <p:nvPr/>
         </p:nvSpPr>
@@ -21067,7 +21226,7 @@
       </p:sp>
       <p:sp>
         <p:nvSpPr>
-          <p:cNvPr id="417032212" name="Flèche : pentagone 272004907"/>
+          <p:cNvPr id="108460869" name="Flèche : pentagone 272004907"/>
           <p:cNvSpPr/>
           <p:nvPr/>
         </p:nvSpPr>
@@ -21145,7 +21304,7 @@
       </p:grpSpPr>
       <p:cxnSp>
         <p:nvCxnSpPr>
-          <p:cNvPr id="574699640" name="Connecteur droit 1942366049"/>
+          <p:cNvPr id="1930117157" name="Connecteur droit 1942366049"/>
           <p:cNvCxnSpPr/>
           <p:nvPr/>
         </p:nvCxnSpPr>
@@ -21188,7 +21347,7 @@
       </p:cxnSp>
       <p:sp>
         <p:nvSpPr>
-          <p:cNvPr id="1856192141" name="ZoneTexte 483029020"/>
+          <p:cNvPr id="1692864507" name="ZoneTexte 483029020"/>
           <p:cNvSpPr txBox="1"/>
           <p:nvPr/>
         </p:nvSpPr>
@@ -21228,7 +21387,7 @@
       </p:sp>
       <p:cxnSp>
         <p:nvCxnSpPr>
-          <p:cNvPr id="1495375940" name="Connecteur droit 626166318"/>
+          <p:cNvPr id="1152125160" name="Connecteur droit 626166318"/>
           <p:cNvCxnSpPr/>
           <p:nvPr/>
         </p:nvCxnSpPr>
@@ -21271,7 +21430,7 @@
       </p:cxnSp>
       <p:sp>
         <p:nvSpPr>
-          <p:cNvPr id="849293715" name="ZoneTexte 2021489157"/>
+          <p:cNvPr id="1121905586" name="ZoneTexte 2021489157"/>
           <p:cNvSpPr txBox="1"/>
           <p:nvPr/>
         </p:nvSpPr>
@@ -21311,7 +21470,7 @@
       </p:sp>
       <p:cxnSp>
         <p:nvCxnSpPr>
-          <p:cNvPr id="1496591950" name="Connecteur droit 1991074862"/>
+          <p:cNvPr id="127188159" name="Connecteur droit 1991074862"/>
           <p:cNvCxnSpPr/>
           <p:nvPr/>
         </p:nvCxnSpPr>
@@ -21354,7 +21513,7 @@
       </p:cxnSp>
       <p:sp>
         <p:nvSpPr>
-          <p:cNvPr id="798748995" name="ZoneTexte 1094835336"/>
+          <p:cNvPr id="1996640304" name="ZoneTexte 1094835336"/>
           <p:cNvSpPr txBox="1"/>
           <p:nvPr/>
         </p:nvSpPr>
@@ -21436,7 +21595,7 @@
       </p:sp>
       <p:sp>
         <p:nvSpPr>
-          <p:cNvPr id="1091835504" name="Rectangle : avec coins arrondis en haut 1574209032"/>
+          <p:cNvPr id="1675486382" name="Rectangle : avec coins arrondis en haut 1574209032"/>
           <p:cNvSpPr/>
           <p:nvPr/>
         </p:nvSpPr>
@@ -21482,7 +21641,7 @@
       </p:sp>
       <p:sp>
         <p:nvSpPr>
-          <p:cNvPr id="1620780229" name="Flèche : pentagone 521086653"/>
+          <p:cNvPr id="1799429533" name="Flèche : pentagone 521086653"/>
           <p:cNvSpPr/>
           <p:nvPr/>
         </p:nvSpPr>
@@ -21527,7 +21686,7 @@
       </p:sp>
       <p:sp>
         <p:nvSpPr>
-          <p:cNvPr id="157306405" name="Flèche : pentagone 1507310733"/>
+          <p:cNvPr id="531761510" name="Flèche : pentagone 1507310733"/>
           <p:cNvSpPr/>
           <p:nvPr/>
         </p:nvSpPr>
@@ -21572,7 +21731,7 @@
       </p:sp>
       <p:sp>
         <p:nvSpPr>
-          <p:cNvPr id="595924624" name="Flèche : pentagone 732388424"/>
+          <p:cNvPr id="1357119551" name="Flèche : pentagone 732388424"/>
           <p:cNvSpPr/>
           <p:nvPr/>
         </p:nvSpPr>
@@ -21617,7 +21776,7 @@
       </p:sp>
       <p:sp>
         <p:nvSpPr>
-          <p:cNvPr id="93009201" name="Flèche : pentagone 326874465"/>
+          <p:cNvPr id="59144260" name="Flèche : pentagone 326874465"/>
           <p:cNvSpPr/>
           <p:nvPr/>
         </p:nvSpPr>
@@ -21662,7 +21821,7 @@
       </p:sp>
       <p:sp>
         <p:nvSpPr>
-          <p:cNvPr id="1064705802" name="Flèche : pentagone 2090650957"/>
+          <p:cNvPr id="1099195000" name="Flèche : pentagone 2090650957"/>
           <p:cNvSpPr/>
           <p:nvPr/>
         </p:nvSpPr>
@@ -21707,7 +21866,7 @@
       </p:sp>
       <p:sp>
         <p:nvSpPr>
-          <p:cNvPr id="389262242" name="ZoneTexte 1374103996"/>
+          <p:cNvPr id="1004726542" name="ZoneTexte 1374103996"/>
           <p:cNvSpPr txBox="1"/>
           <p:nvPr/>
         </p:nvSpPr>
@@ -21977,7 +22136,7 @@
       </p:sp>
       <p:sp>
         <p:nvSpPr>
-          <p:cNvPr id="1061865458" name="ZoneTexte 1748705365"/>
+          <p:cNvPr id="1300774968" name="ZoneTexte 1748705365"/>
           <p:cNvSpPr txBox="1"/>
           <p:nvPr/>
         </p:nvSpPr>
@@ -22017,7 +22176,7 @@
       </p:sp>
       <p:cxnSp>
         <p:nvCxnSpPr>
-          <p:cNvPr id="30926708" name="Connecteur droit 1556830908"/>
+          <p:cNvPr id="1291332280" name="Connecteur droit 1556830908"/>
           <p:cNvCxnSpPr/>
           <p:nvPr/>
         </p:nvCxnSpPr>
@@ -22060,7 +22219,7 @@
       </p:cxnSp>
       <p:sp>
         <p:nvSpPr>
-          <p:cNvPr id="1364139037" name="ZoneTexte 409639257"/>
+          <p:cNvPr id="95737089" name="ZoneTexte 409639257"/>
           <p:cNvSpPr txBox="1"/>
           <p:nvPr/>
         </p:nvSpPr>
@@ -22110,7 +22269,7 @@
       </p:sp>
       <p:sp>
         <p:nvSpPr>
-          <p:cNvPr id="1194262435" name="ZoneTexte 1168472887"/>
+          <p:cNvPr id="1290851665" name="ZoneTexte 1168472887"/>
           <p:cNvSpPr txBox="1"/>
           <p:nvPr/>
         </p:nvSpPr>
@@ -22203,7 +22362,7 @@
       </p:sp>
       <p:sp>
         <p:nvSpPr>
-          <p:cNvPr id="651205592" name="ZoneTexte 114796530"/>
+          <p:cNvPr id="1626245656" name="ZoneTexte 114796530"/>
           <p:cNvSpPr txBox="1"/>
           <p:nvPr/>
         </p:nvSpPr>
@@ -22299,7 +22458,7 @@
       </p:sp>
       <p:sp>
         <p:nvSpPr>
-          <p:cNvPr id="1877911262" name="ZoneTexte 1085068195"/>
+          <p:cNvPr id="898887083" name="ZoneTexte 1085068195"/>
           <p:cNvSpPr txBox="1"/>
           <p:nvPr/>
         </p:nvSpPr>
@@ -23368,7 +23527,7 @@
       </p:sp>
       <p:sp>
         <p:nvSpPr>
-          <p:cNvPr id="50457086" name="Étoile : 5 branches 278736380"/>
+          <p:cNvPr id="454249278" name="Étoile : 5 branches 278736380"/>
           <p:cNvSpPr/>
           <p:nvPr/>
         </p:nvSpPr>
@@ -23415,7 +23574,7 @@
       </p:sp>
       <p:sp>
         <p:nvSpPr>
-          <p:cNvPr id="2027720430" name="Étoile : 5 branches 1495350449"/>
+          <p:cNvPr id="2048715432" name="Étoile : 5 branches 1495350449"/>
           <p:cNvSpPr/>
           <p:nvPr/>
         </p:nvSpPr>
@@ -23462,7 +23621,7 @@
       </p:sp>
       <p:sp>
         <p:nvSpPr>
-          <p:cNvPr id="1553777930" name="Étoile : 5 branches 79046386"/>
+          <p:cNvPr id="323707013" name="Étoile : 5 branches 79046386"/>
           <p:cNvSpPr/>
           <p:nvPr/>
         </p:nvSpPr>
@@ -23509,7 +23668,7 @@
       </p:sp>
       <p:sp>
         <p:nvSpPr>
-          <p:cNvPr id="860285885" name="Étoile : 5 branches 749256076"/>
+          <p:cNvPr id="43907786" name="Étoile : 5 branches 749256076"/>
           <p:cNvSpPr/>
           <p:nvPr/>
         </p:nvSpPr>
@@ -23556,7 +23715,7 @@
       </p:sp>
       <p:sp>
         <p:nvSpPr>
-          <p:cNvPr id="1966212431" name="Étoile : 5 branches 411245083"/>
+          <p:cNvPr id="1791590896" name="Étoile : 5 branches 411245083"/>
           <p:cNvSpPr/>
           <p:nvPr/>
         </p:nvSpPr>
@@ -23603,7 +23762,7 @@
       </p:sp>
       <p:sp>
         <p:nvSpPr>
-          <p:cNvPr id="748765925" name="ZoneTexte 496444952"/>
+          <p:cNvPr id="1644948581" name="ZoneTexte 496444952"/>
           <p:cNvSpPr txBox="1"/>
           <p:nvPr/>
         </p:nvSpPr>
@@ -23645,7 +23804,7 @@
       </p:sp>
       <p:sp>
         <p:nvSpPr>
-          <p:cNvPr id="440210516" name="ZoneTexte 474433989"/>
+          <p:cNvPr id="4988398" name="ZoneTexte 474433989"/>
           <p:cNvSpPr txBox="1"/>
           <p:nvPr/>
         </p:nvSpPr>
@@ -23687,13 +23846,13 @@
       </p:sp>
       <p:sp>
         <p:nvSpPr>
-          <p:cNvPr id="867474058" name="ZoneTexte 1"/>
+          <p:cNvPr id="943224465" name="ZoneTexte 1"/>
           <p:cNvSpPr txBox="1"/>
           <p:nvPr/>
         </p:nvSpPr>
         <p:spPr bwMode="auto">
           <a:xfrm flipH="0" flipV="0">
-            <a:off x="1214" y="480141"/>
+            <a:off x="1214" y="480140"/>
             <a:ext cx="3428505" cy="1600559"/>
           </a:xfrm>
           <a:prstGeom prst="rect">
@@ -23788,7 +23947,7 @@
       </p:sp>
       <p:sp>
         <p:nvSpPr>
-          <p:cNvPr id="868109542" name="ZoneTexte 2"/>
+          <p:cNvPr id="896888783" name="ZoneTexte 2"/>
           <p:cNvSpPr txBox="1"/>
           <p:nvPr/>
         </p:nvSpPr>
@@ -23906,14 +24065,14 @@
       </p:sp>
       <p:sp>
         <p:nvSpPr>
-          <p:cNvPr id="686086481" name=""/>
+          <p:cNvPr id="127872251" name=""/>
           <p:cNvSpPr/>
           <p:nvPr/>
         </p:nvSpPr>
         <p:spPr bwMode="auto">
           <a:xfrm>
-            <a:off x="2830522" y="22347"/>
-            <a:ext cx="4022971" cy="427079"/>
+            <a:off x="3282427" y="22347"/>
+            <a:ext cx="3571425" cy="427079"/>
           </a:xfrm>
           <a:prstGeom prst="rect">
             <a:avLst/>
@@ -23937,9 +24096,9 @@
                 <a:solidFill>
                   <a:srgbClr val="BFBFBF"/>
                 </a:solidFill>
-                <a:latin typeface="Lucida Handwriting"/>
-                <a:ea typeface="Lucida Handwriting"/>
-                <a:cs typeface="Lucida Handwriting"/>
+                <a:latin typeface="Georgia"/>
+                <a:ea typeface="Georgia"/>
+                <a:cs typeface="Georgia"/>
               </a:rPr>
               <a:t>Les </a:t>
             </a:r>
@@ -23948,9 +24107,9 @@
                 <a:solidFill>
                   <a:srgbClr val="BFBFBF"/>
                 </a:solidFill>
-                <a:latin typeface="Lucida Handwriting"/>
-                <a:ea typeface="Lucida Handwriting"/>
-                <a:cs typeface="Lucida Handwriting"/>
+                <a:latin typeface="Georgia"/>
+                <a:ea typeface="Georgia"/>
+                <a:cs typeface="Georgia"/>
               </a:rPr>
               <a:t>monstres </a:t>
             </a:r>
@@ -23959,9 +24118,9 @@
                 <a:solidFill>
                   <a:srgbClr val="BFBFBF"/>
                 </a:solidFill>
-                <a:latin typeface="Lucida Handwriting"/>
-                <a:ea typeface="Lucida Handwriting"/>
-                <a:cs typeface="Lucida Handwriting"/>
+                <a:latin typeface="Georgia"/>
+                <a:ea typeface="Georgia"/>
+                <a:cs typeface="Georgia"/>
               </a:rPr>
               <a:t>que nous sommes</a:t>
             </a:r>
@@ -23969,15 +24128,15 @@
               <a:solidFill>
                 <a:srgbClr val="BFBFBF"/>
               </a:solidFill>
-              <a:latin typeface="Lucida Handwriting"/>
-              <a:cs typeface="Lucida Handwriting"/>
+              <a:latin typeface="Georgia"/>
+              <a:cs typeface="Georgia"/>
             </a:endParaRPr>
           </a:p>
         </p:txBody>
       </p:sp>
       <p:sp>
         <p:nvSpPr>
-          <p:cNvPr id="1967075630" name="Flèche : pentagone 1507310733"/>
+          <p:cNvPr id="370569456" name="Flèche : pentagone 1507310733"/>
           <p:cNvSpPr/>
           <p:nvPr/>
         </p:nvSpPr>
@@ -24022,7 +24181,7 @@
       </p:sp>
       <p:sp>
         <p:nvSpPr>
-          <p:cNvPr id="933131050" name="Flèche : pentagone 732388424"/>
+          <p:cNvPr id="1281445552" name="Flèche : pentagone 732388424"/>
           <p:cNvSpPr/>
           <p:nvPr/>
         </p:nvSpPr>
@@ -24067,7 +24226,7 @@
       </p:sp>
       <p:sp>
         <p:nvSpPr>
-          <p:cNvPr id="1140472355" name="Flèche : pentagone 326874465"/>
+          <p:cNvPr id="564431501" name="Flèche : pentagone 326874465"/>
           <p:cNvSpPr/>
           <p:nvPr/>
         </p:nvSpPr>
@@ -24145,7 +24304,7 @@
       </p:grpSpPr>
       <p:sp>
         <p:nvSpPr>
-          <p:cNvPr id="1599488551" name="ZoneTexte 273581705"/>
+          <p:cNvPr id="338557265" name="ZoneTexte 273581705"/>
           <p:cNvSpPr txBox="1"/>
           <p:nvPr/>
         </p:nvSpPr>
@@ -24443,7 +24602,7 @@
       </p:sp>
       <p:cxnSp>
         <p:nvCxnSpPr>
-          <p:cNvPr id="1330122555" name="Connecteur droit 1094832104"/>
+          <p:cNvPr id="860955104" name="Connecteur droit 1094832104"/>
           <p:cNvCxnSpPr/>
           <p:nvPr/>
         </p:nvCxnSpPr>
@@ -24486,7 +24645,7 @@
       </p:cxnSp>
       <p:sp>
         <p:nvSpPr>
-          <p:cNvPr id="1439941448" name="ZoneTexte 2078543737"/>
+          <p:cNvPr id="278615352" name="ZoneTexte 2078543737"/>
           <p:cNvSpPr txBox="1"/>
           <p:nvPr/>
         </p:nvSpPr>
@@ -24526,7 +24685,7 @@
       </p:sp>
       <p:cxnSp>
         <p:nvCxnSpPr>
-          <p:cNvPr id="1937403147" name="Connecteur droit 853743145"/>
+          <p:cNvPr id="1689554118" name="Connecteur droit 853743145"/>
           <p:cNvCxnSpPr/>
           <p:nvPr/>
         </p:nvCxnSpPr>
@@ -24569,7 +24728,7 @@
       </p:cxnSp>
       <p:sp>
         <p:nvSpPr>
-          <p:cNvPr id="245499574" name="ZoneTexte 1473119298"/>
+          <p:cNvPr id="1387254224" name="ZoneTexte 1473119298"/>
           <p:cNvSpPr txBox="1"/>
           <p:nvPr/>
         </p:nvSpPr>
@@ -24609,7 +24768,7 @@
       </p:sp>
       <p:cxnSp>
         <p:nvCxnSpPr>
-          <p:cNvPr id="22594568" name="Connecteur droit 1727809509"/>
+          <p:cNvPr id="1820003465" name="Connecteur droit 1727809509"/>
           <p:cNvCxnSpPr/>
           <p:nvPr/>
         </p:nvCxnSpPr>
@@ -24652,7 +24811,7 @@
       </p:cxnSp>
       <p:sp>
         <p:nvSpPr>
-          <p:cNvPr id="804560559" name="ZoneTexte 759238070"/>
+          <p:cNvPr id="489893340" name="ZoneTexte 759238070"/>
           <p:cNvSpPr txBox="1"/>
           <p:nvPr/>
         </p:nvSpPr>
@@ -24727,7 +24886,7 @@
       </p:sp>
       <p:sp>
         <p:nvSpPr>
-          <p:cNvPr id="1853957565" name="Rectangle : avec coins arrondis en haut 965147191"/>
+          <p:cNvPr id="1938179848" name="Rectangle : avec coins arrondis en haut 965147191"/>
           <p:cNvSpPr/>
           <p:nvPr/>
         </p:nvSpPr>
@@ -24773,7 +24932,7 @@
       </p:sp>
       <p:sp>
         <p:nvSpPr>
-          <p:cNvPr id="2020525636" name="Flèche : pentagone 2070329900"/>
+          <p:cNvPr id="1343092989" name="Flèche : pentagone 2070329900"/>
           <p:cNvSpPr/>
           <p:nvPr/>
         </p:nvSpPr>
@@ -24818,7 +24977,7 @@
       </p:sp>
       <p:sp>
         <p:nvSpPr>
-          <p:cNvPr id="2105932128" name="Flèche : pentagone 1325137089"/>
+          <p:cNvPr id="39890933" name="Flèche : pentagone 1325137089"/>
           <p:cNvSpPr/>
           <p:nvPr/>
         </p:nvSpPr>
@@ -24863,7 +25022,7 @@
       </p:sp>
       <p:sp>
         <p:nvSpPr>
-          <p:cNvPr id="432044501" name="Flèche : pentagone 295922856"/>
+          <p:cNvPr id="1278945118" name="Flèche : pentagone 295922856"/>
           <p:cNvSpPr/>
           <p:nvPr/>
         </p:nvSpPr>
@@ -24908,7 +25067,7 @@
       </p:sp>
       <p:sp>
         <p:nvSpPr>
-          <p:cNvPr id="1556931334" name="Flèche : pentagone 1961547672"/>
+          <p:cNvPr id="66573738" name="Flèche : pentagone 1961547672"/>
           <p:cNvSpPr/>
           <p:nvPr/>
         </p:nvSpPr>
@@ -24953,7 +25112,7 @@
       </p:sp>
       <p:sp>
         <p:nvSpPr>
-          <p:cNvPr id="1000870622" name="Flèche : pentagone 1305647833"/>
+          <p:cNvPr id="325037801" name="Flèche : pentagone 1305647833"/>
           <p:cNvSpPr/>
           <p:nvPr/>
         </p:nvSpPr>
@@ -24998,7 +25157,7 @@
       </p:sp>
       <p:sp>
         <p:nvSpPr>
-          <p:cNvPr id="215109858" name="ZoneTexte 545814566"/>
+          <p:cNvPr id="1603302215" name="ZoneTexte 545814566"/>
           <p:cNvSpPr txBox="1"/>
           <p:nvPr/>
         </p:nvSpPr>
@@ -25285,7 +25444,7 @@
       </p:sp>
       <p:sp>
         <p:nvSpPr>
-          <p:cNvPr id="154392969" name="ZoneTexte 671978155"/>
+          <p:cNvPr id="420206869" name="ZoneTexte 671978155"/>
           <p:cNvSpPr txBox="1"/>
           <p:nvPr/>
         </p:nvSpPr>
@@ -25325,7 +25484,7 @@
       </p:sp>
       <p:cxnSp>
         <p:nvCxnSpPr>
-          <p:cNvPr id="1862386274" name="Connecteur droit 637589304"/>
+          <p:cNvPr id="309701677" name="Connecteur droit 637589304"/>
           <p:cNvCxnSpPr/>
           <p:nvPr/>
         </p:nvCxnSpPr>
@@ -25368,7 +25527,7 @@
       </p:cxnSp>
       <p:sp>
         <p:nvSpPr>
-          <p:cNvPr id="1573492405" name="ZoneTexte 172075623"/>
+          <p:cNvPr id="1756656578" name="ZoneTexte 172075623"/>
           <p:cNvSpPr txBox="1"/>
           <p:nvPr/>
         </p:nvSpPr>
@@ -25418,7 +25577,7 @@
       </p:sp>
       <p:sp>
         <p:nvSpPr>
-          <p:cNvPr id="1965872683" name="ZoneTexte 1642812764"/>
+          <p:cNvPr id="379253916" name="ZoneTexte 1642812764"/>
           <p:cNvSpPr txBox="1"/>
           <p:nvPr/>
         </p:nvSpPr>
@@ -25585,7 +25744,7 @@
       </p:sp>
       <p:sp>
         <p:nvSpPr>
-          <p:cNvPr id="432584300" name="Étoile : 7 branches 1681961038"/>
+          <p:cNvPr id="1561430651" name="Étoile : 7 branches 1681961038"/>
           <p:cNvSpPr/>
           <p:nvPr/>
         </p:nvSpPr>
@@ -25632,7 +25791,7 @@
       </p:sp>
       <p:sp>
         <p:nvSpPr>
-          <p:cNvPr id="975261370" name="Étoile : 7 branches 1476951547"/>
+          <p:cNvPr id="1159399997" name="Étoile : 7 branches 1476951547"/>
           <p:cNvSpPr/>
           <p:nvPr/>
         </p:nvSpPr>
@@ -25679,7 +25838,7 @@
       </p:sp>
       <p:sp>
         <p:nvSpPr>
-          <p:cNvPr id="560659680" name="Étoile : 7 branches 1520826925"/>
+          <p:cNvPr id="1250777368" name="Étoile : 7 branches 1520826925"/>
           <p:cNvSpPr/>
           <p:nvPr/>
         </p:nvSpPr>
@@ -25726,7 +25885,7 @@
       </p:sp>
       <p:sp>
         <p:nvSpPr>
-          <p:cNvPr id="1052237667" name="ZoneTexte 1219899073"/>
+          <p:cNvPr id="973494828" name="ZoneTexte 1219899073"/>
           <p:cNvSpPr txBox="1"/>
           <p:nvPr/>
         </p:nvSpPr>
@@ -25766,7 +25925,7 @@
       </p:sp>
       <p:sp>
         <p:nvSpPr>
-          <p:cNvPr id="1974684540" name="ZoneTexte 1283574123"/>
+          <p:cNvPr id="1373559962" name="ZoneTexte 1283574123"/>
           <p:cNvSpPr txBox="1"/>
           <p:nvPr/>
         </p:nvSpPr>
@@ -26967,7 +27126,7 @@
       </p:sp>
       <p:sp>
         <p:nvSpPr>
-          <p:cNvPr id="1604069884" name="ZoneTexte 790352176"/>
+          <p:cNvPr id="674620411" name="ZoneTexte 790352176"/>
           <p:cNvSpPr txBox="1"/>
           <p:nvPr/>
         </p:nvSpPr>
@@ -27009,7 +27168,7 @@
       </p:sp>
       <p:sp>
         <p:nvSpPr>
-          <p:cNvPr id="1193936498" name="ZoneTexte 2025740189"/>
+          <p:cNvPr id="1622843193" name="ZoneTexte 2025740189"/>
           <p:cNvSpPr txBox="1"/>
           <p:nvPr/>
         </p:nvSpPr>
@@ -27066,7 +27225,7 @@
       </p:sp>
       <p:sp>
         <p:nvSpPr>
-          <p:cNvPr id="585984675" name=""/>
+          <p:cNvPr id="1160001099" name=""/>
           <p:cNvSpPr/>
           <p:nvPr/>
         </p:nvSpPr>
@@ -27106,7 +27265,7 @@
       </p:sp>
       <p:sp>
         <p:nvSpPr>
-          <p:cNvPr id="668424313" name="Rectangle : avec coins arrondis en haut 1151560973"/>
+          <p:cNvPr id="1127935324" name="Rectangle : avec coins arrondis en haut 1151560973"/>
           <p:cNvSpPr/>
           <p:nvPr/>
         </p:nvSpPr>
@@ -27154,7 +27313,7 @@
       </p:sp>
       <p:sp>
         <p:nvSpPr>
-          <p:cNvPr id="1899284587" name=""/>
+          <p:cNvPr id="844477837" name=""/>
           <p:cNvSpPr/>
           <p:nvPr/>
         </p:nvSpPr>
@@ -27194,7 +27353,7 @@
       </p:sp>
       <p:sp>
         <p:nvSpPr>
-          <p:cNvPr id="1067364728" name="Rectangle : avec coins arrondis en haut 1151560973"/>
+          <p:cNvPr id="942035025" name="Rectangle : avec coins arrondis en haut 1151560973"/>
           <p:cNvSpPr/>
           <p:nvPr/>
         </p:nvSpPr>
@@ -27242,7 +27401,7 @@
       </p:sp>
       <p:sp>
         <p:nvSpPr>
-          <p:cNvPr id="2058640978" name=""/>
+          <p:cNvPr id="1821760319" name=""/>
           <p:cNvSpPr/>
           <p:nvPr/>
         </p:nvSpPr>
@@ -27282,7 +27441,7 @@
       </p:sp>
       <p:sp>
         <p:nvSpPr>
-          <p:cNvPr id="1907861635" name="Rectangle : avec coins arrondis en haut 1151560973"/>
+          <p:cNvPr id="587756820" name="Rectangle : avec coins arrondis en haut 1151560973"/>
           <p:cNvSpPr/>
           <p:nvPr/>
         </p:nvSpPr>
@@ -27330,7 +27489,7 @@
       </p:sp>
       <p:sp>
         <p:nvSpPr>
-          <p:cNvPr id="7750984" name=""/>
+          <p:cNvPr id="1135161286" name=""/>
           <p:cNvSpPr txBox="1"/>
           <p:nvPr/>
         </p:nvSpPr>
@@ -27458,7 +27617,7 @@
       </p:sp>
       <p:sp>
         <p:nvSpPr>
-          <p:cNvPr id="1056432714" name=""/>
+          <p:cNvPr id="1359565222" name=""/>
           <p:cNvSpPr txBox="1"/>
           <p:nvPr/>
         </p:nvSpPr>
@@ -27581,14 +27740,14 @@
       </p:sp>
       <p:sp>
         <p:nvSpPr>
-          <p:cNvPr id="1114055452" name=""/>
+          <p:cNvPr id="225187300" name=""/>
           <p:cNvSpPr/>
           <p:nvPr/>
         </p:nvSpPr>
         <p:spPr bwMode="auto">
           <a:xfrm>
-            <a:off x="2830522" y="22347"/>
-            <a:ext cx="4022971" cy="427079"/>
+            <a:off x="3282427" y="22347"/>
+            <a:ext cx="3571425" cy="427079"/>
           </a:xfrm>
           <a:prstGeom prst="rect">
             <a:avLst/>
@@ -27612,9 +27771,9 @@
                 <a:solidFill>
                   <a:srgbClr val="BFBFBF"/>
                 </a:solidFill>
-                <a:latin typeface="Lucida Handwriting"/>
-                <a:ea typeface="Lucida Handwriting"/>
-                <a:cs typeface="Lucida Handwriting"/>
+                <a:latin typeface="Georgia"/>
+                <a:ea typeface="Georgia"/>
+                <a:cs typeface="Georgia"/>
               </a:rPr>
               <a:t>Les </a:t>
             </a:r>
@@ -27623,9 +27782,9 @@
                 <a:solidFill>
                   <a:srgbClr val="BFBFBF"/>
                 </a:solidFill>
-                <a:latin typeface="Lucida Handwriting"/>
-                <a:ea typeface="Lucida Handwriting"/>
-                <a:cs typeface="Lucida Handwriting"/>
+                <a:latin typeface="Georgia"/>
+                <a:ea typeface="Georgia"/>
+                <a:cs typeface="Georgia"/>
               </a:rPr>
               <a:t>monstres </a:t>
             </a:r>
@@ -27634,9 +27793,9 @@
                 <a:solidFill>
                   <a:srgbClr val="BFBFBF"/>
                 </a:solidFill>
-                <a:latin typeface="Lucida Handwriting"/>
-                <a:ea typeface="Lucida Handwriting"/>
-                <a:cs typeface="Lucida Handwriting"/>
+                <a:latin typeface="Georgia"/>
+                <a:ea typeface="Georgia"/>
+                <a:cs typeface="Georgia"/>
               </a:rPr>
               <a:t>que nous sommes</a:t>
             </a:r>
@@ -27644,15 +27803,15 @@
               <a:solidFill>
                 <a:srgbClr val="BFBFBF"/>
               </a:solidFill>
-              <a:latin typeface="Lucida Handwriting"/>
-              <a:cs typeface="Lucida Handwriting"/>
+              <a:latin typeface="Georgia"/>
+              <a:cs typeface="Georgia"/>
             </a:endParaRPr>
           </a:p>
         </p:txBody>
       </p:sp>
       <p:sp>
         <p:nvSpPr>
-          <p:cNvPr id="969209059" name="Flèche : pentagone 1325137089"/>
+          <p:cNvPr id="228052257" name="Flèche : pentagone 1325137089"/>
           <p:cNvSpPr/>
           <p:nvPr/>
         </p:nvSpPr>
@@ -27697,7 +27856,7 @@
       </p:sp>
       <p:sp>
         <p:nvSpPr>
-          <p:cNvPr id="643727741" name="Flèche : pentagone 295922856"/>
+          <p:cNvPr id="1829521132" name="Flèche : pentagone 295922856"/>
           <p:cNvSpPr/>
           <p:nvPr/>
         </p:nvSpPr>
@@ -27742,7 +27901,7 @@
       </p:sp>
       <p:sp>
         <p:nvSpPr>
-          <p:cNvPr id="732565557" name="Flèche : pentagone 1961547672"/>
+          <p:cNvPr id="1092854386" name="Flèche : pentagone 1961547672"/>
           <p:cNvSpPr/>
           <p:nvPr/>
         </p:nvSpPr>
@@ -27820,7 +27979,7 @@
       </p:grpSpPr>
       <p:cxnSp>
         <p:nvCxnSpPr>
-          <p:cNvPr id="1276187397" name="Connecteur droit 266926011"/>
+          <p:cNvPr id="60228205" name="Connecteur droit 266926011"/>
           <p:cNvCxnSpPr/>
           <p:nvPr/>
         </p:nvCxnSpPr>
@@ -27863,14 +28022,14 @@
       </p:cxnSp>
       <p:sp>
         <p:nvSpPr>
-          <p:cNvPr id="358900160" name="ZoneTexte 1043763612"/>
+          <p:cNvPr id="304785611" name="ZoneTexte 1043763612"/>
           <p:cNvSpPr txBox="1"/>
           <p:nvPr/>
         </p:nvSpPr>
         <p:spPr bwMode="auto">
           <a:xfrm>
-            <a:off x="972" y="178887"/>
-            <a:ext cx="4770447" cy="366119"/>
+            <a:off x="972" y="178886"/>
+            <a:ext cx="4774766" cy="366119"/>
           </a:xfrm>
           <a:prstGeom prst="rect">
             <a:avLst/>
@@ -27895,7 +28054,7 @@
                   </a:schemeClr>
                 </a:solidFill>
               </a:rPr>
-              <a:t>Malédiction du Leshy</a:t>
+              <a:t>Le courroux du Leshy</a:t>
             </a:r>
             <a:endParaRPr/>
           </a:p>
@@ -27903,7 +28062,7 @@
       </p:sp>
       <p:cxnSp>
         <p:nvCxnSpPr>
-          <p:cNvPr id="1382852890" name="Connecteur droit 1586327141"/>
+          <p:cNvPr id="8083936" name="Connecteur droit 1586327141"/>
           <p:cNvCxnSpPr/>
           <p:nvPr/>
         </p:nvCxnSpPr>
@@ -27946,7 +28105,7 @@
       </p:cxnSp>
       <p:sp>
         <p:nvSpPr>
-          <p:cNvPr id="732772526" name="ZoneTexte 1691387439"/>
+          <p:cNvPr id="1487299049" name="ZoneTexte 1691387439"/>
           <p:cNvSpPr txBox="1"/>
           <p:nvPr/>
         </p:nvSpPr>
@@ -27986,7 +28145,7 @@
       </p:sp>
       <p:cxnSp>
         <p:nvCxnSpPr>
-          <p:cNvPr id="680062198" name="Connecteur droit 1743707585"/>
+          <p:cNvPr id="1936878976" name="Connecteur droit 1743707585"/>
           <p:cNvCxnSpPr/>
           <p:nvPr/>
         </p:nvCxnSpPr>
@@ -28029,7 +28188,7 @@
       </p:cxnSp>
       <p:sp>
         <p:nvSpPr>
-          <p:cNvPr id="2105189334" name="ZoneTexte 1503300725"/>
+          <p:cNvPr id="2021937381" name="ZoneTexte 1503300725"/>
           <p:cNvSpPr txBox="1"/>
           <p:nvPr/>
         </p:nvSpPr>
@@ -28111,7 +28270,7 @@
       </p:sp>
       <p:sp>
         <p:nvSpPr>
-          <p:cNvPr id="489861055" name="Rectangle : avec coins arrondis en haut 1151560973"/>
+          <p:cNvPr id="1093785518" name="Rectangle : avec coins arrondis en haut 1151560973"/>
           <p:cNvSpPr/>
           <p:nvPr/>
         </p:nvSpPr>
@@ -28157,7 +28316,7 @@
       </p:sp>
       <p:sp>
         <p:nvSpPr>
-          <p:cNvPr id="2125521684" name="Flèche : pentagone 1610574377"/>
+          <p:cNvPr id="1172695244" name="Flèche : pentagone 1610574377"/>
           <p:cNvSpPr/>
           <p:nvPr/>
         </p:nvSpPr>
@@ -28202,7 +28361,7 @@
       </p:sp>
       <p:sp>
         <p:nvSpPr>
-          <p:cNvPr id="1256297385" name="Flèche : pentagone 463861063"/>
+          <p:cNvPr id="1150681918" name="Flèche : pentagone 463861063"/>
           <p:cNvSpPr/>
           <p:nvPr/>
         </p:nvSpPr>
@@ -28247,7 +28406,7 @@
       </p:sp>
       <p:sp>
         <p:nvSpPr>
-          <p:cNvPr id="368123546" name="Flèche : pentagone 272004907"/>
+          <p:cNvPr id="629015378" name="Flèche : pentagone 272004907"/>
           <p:cNvSpPr/>
           <p:nvPr/>
         </p:nvSpPr>
@@ -28292,7 +28451,7 @@
       </p:sp>
       <p:sp>
         <p:nvSpPr>
-          <p:cNvPr id="37217333" name="Flèche : pentagone 28174069"/>
+          <p:cNvPr id="1822063522" name="Flèche : pentagone 28174069"/>
           <p:cNvSpPr/>
           <p:nvPr/>
         </p:nvSpPr>
@@ -28337,7 +28496,7 @@
       </p:sp>
       <p:sp>
         <p:nvSpPr>
-          <p:cNvPr id="556804184" name="Flèche : pentagone 978127220"/>
+          <p:cNvPr id="655383730" name="Flèche : pentagone 978127220"/>
           <p:cNvSpPr/>
           <p:nvPr/>
         </p:nvSpPr>
@@ -28382,14 +28541,14 @@
       </p:sp>
       <p:sp>
         <p:nvSpPr>
-          <p:cNvPr id="1377625413" name="ZoneTexte 1693594013"/>
+          <p:cNvPr id="588934611" name="ZoneTexte 1693594013"/>
           <p:cNvSpPr txBox="1"/>
           <p:nvPr/>
         </p:nvSpPr>
         <p:spPr bwMode="auto">
           <a:xfrm flipH="0" flipV="0">
-            <a:off x="3252181" y="6924482"/>
-            <a:ext cx="3631070" cy="2530199"/>
+            <a:off x="3252180" y="6924481"/>
+            <a:ext cx="3606711" cy="2774039"/>
           </a:xfrm>
           <a:prstGeom prst="rect">
             <a:avLst/>
@@ -28669,7 +28828,21 @@
                 <a:ea typeface="+mn-ea"/>
                 <a:cs typeface="+mn-cs"/>
               </a:rPr>
-              <a:t>Lorsque la nouvelle lune apparaît dans le ciel pour la première fois lors de sa nuit de pleine lune, cochez une case de colère.</a:t>
+              <a:t>Lorsque la nouvelle lune apparaît dans le ciel pour la première fois lors du cycle lunaire, cochez la première case de colère si elle ne l’était pas.</a:t>
+            </a:r>
+            <a:r>
+              <a:rPr lang="fr-FR" sz="800" b="0" i="0" u="none" strike="noStrike" cap="none" spc="0">
+                <a:solidFill>
+                  <a:schemeClr val="tx1">
+                    <a:lumMod val="50000"/>
+                    <a:lumOff val="50000"/>
+                  </a:schemeClr>
+                </a:solidFill>
+                <a:latin typeface="Arial"/>
+                <a:ea typeface="Arial"/>
+                <a:cs typeface="Arial"/>
+              </a:rPr>
+              <a:t>Tant que vous n’avez pas coché les 3 cases de colère, vous effacez une case de colère au début d’un nouveau scénario.</a:t>
             </a:r>
             <a:endParaRPr lang="fr-FR" sz="800" b="0" i="0" u="none" strike="noStrike" cap="none" spc="0">
               <a:solidFill>
@@ -28687,7 +28860,7 @@
       </p:sp>
       <p:sp>
         <p:nvSpPr>
-          <p:cNvPr id="1856127745" name="ZoneTexte 1975797288"/>
+          <p:cNvPr id="1718798792" name="ZoneTexte 1975797288"/>
           <p:cNvSpPr txBox="1"/>
           <p:nvPr/>
         </p:nvSpPr>
@@ -28727,7 +28900,7 @@
       </p:sp>
       <p:sp>
         <p:nvSpPr>
-          <p:cNvPr id="1544502241" name="ZoneTexte 2064865984"/>
+          <p:cNvPr id="2146375711" name="ZoneTexte 2064865984"/>
           <p:cNvSpPr txBox="1"/>
           <p:nvPr/>
         </p:nvSpPr>
@@ -28949,7 +29122,7 @@
       </p:sp>
       <p:sp>
         <p:nvSpPr>
-          <p:cNvPr id="1248127017" name="ZoneTexte 1387173154"/>
+          <p:cNvPr id="1645898548" name="ZoneTexte 1387173154"/>
           <p:cNvSpPr txBox="1"/>
           <p:nvPr/>
         </p:nvSpPr>
@@ -29201,7 +29374,7 @@
       </p:sp>
       <p:sp>
         <p:nvSpPr>
-          <p:cNvPr id="1322882741" name="ZoneTexte 523755832"/>
+          <p:cNvPr id="59146147" name="ZoneTexte 523755832"/>
           <p:cNvSpPr txBox="1"/>
           <p:nvPr/>
         </p:nvSpPr>
@@ -29461,7 +29634,7 @@
       </p:sp>
       <p:cxnSp>
         <p:nvCxnSpPr>
-          <p:cNvPr id="451843977" name="Connecteur droit 2085669542"/>
+          <p:cNvPr id="1197266022" name="Connecteur droit 2085669542"/>
           <p:cNvCxnSpPr/>
           <p:nvPr/>
         </p:nvCxnSpPr>
@@ -29504,7 +29677,7 @@
       </p:cxnSp>
       <p:sp>
         <p:nvSpPr>
-          <p:cNvPr id="2034194727" name="ZoneTexte 34398067"/>
+          <p:cNvPr id="383085134" name="ZoneTexte 34398067"/>
           <p:cNvSpPr txBox="1"/>
           <p:nvPr/>
         </p:nvSpPr>
@@ -29558,7 +29731,7 @@
       </p:sp>
       <p:sp>
         <p:nvSpPr>
-          <p:cNvPr id="206548728" name="ZoneTexte 273581705"/>
+          <p:cNvPr id="1465492017" name="ZoneTexte 273581705"/>
           <p:cNvSpPr txBox="1"/>
           <p:nvPr/>
         </p:nvSpPr>
@@ -29856,7 +30029,7 @@
       </p:sp>
       <p:sp>
         <p:nvSpPr>
-          <p:cNvPr id="2064335944" name="ZoneTexte 1727393832"/>
+          <p:cNvPr id="1654734318" name="ZoneTexte 1727393832"/>
           <p:cNvSpPr txBox="1"/>
           <p:nvPr/>
         </p:nvSpPr>
@@ -29898,7 +30071,7 @@
       </p:sp>
       <p:sp>
         <p:nvSpPr>
-          <p:cNvPr id="1513699899" name="ZoneTexte 504516740"/>
+          <p:cNvPr id="920145413" name="ZoneTexte 504516740"/>
           <p:cNvSpPr txBox="1"/>
           <p:nvPr/>
         </p:nvSpPr>
@@ -29940,14 +30113,14 @@
       </p:sp>
       <p:sp>
         <p:nvSpPr>
-          <p:cNvPr id="85747671" name="ZoneTexte 1"/>
+          <p:cNvPr id="671335736" name="ZoneTexte 1"/>
           <p:cNvSpPr txBox="1"/>
           <p:nvPr/>
         </p:nvSpPr>
         <p:spPr bwMode="auto">
           <a:xfrm flipH="0" flipV="0">
-            <a:off x="3449954" y="531375"/>
-            <a:ext cx="3420702" cy="1600559"/>
+            <a:off x="3449953" y="531374"/>
+            <a:ext cx="3424661" cy="1768199"/>
           </a:xfrm>
           <a:prstGeom prst="rect">
             <a:avLst/>
@@ -29965,136 +30138,100 @@
               <a:defRPr/>
             </a:pPr>
             <a:r>
-              <a:rPr lang="fr-FR" sz="900" b="0" i="0" u="none" strike="noStrike" cap="none" spc="0">
-                <a:solidFill>
-                  <a:schemeClr val="tx1">
-                    <a:lumMod val="50000"/>
-                    <a:lumOff val="50000"/>
-                  </a:schemeClr>
-                </a:solidFill>
-                <a:latin typeface="Arial"/>
-                <a:ea typeface="Arial"/>
-                <a:cs typeface="Arial"/>
-              </a:rPr>
-              <a:t>Sous toutes ses formes, le leshy s'avère être plus résistant qu'un humain ordinaire. Il possède une affinité profonde avec la faune et la flore qui l'entoure, ressentant les blessures de celles-ci comme les siennes.</a:t>
-            </a:r>
-            <a:endParaRPr lang="fr-FR" sz="900" b="0" i="0" u="none" strike="noStrike" cap="none" spc="0">
+              <a:rPr lang="fr-FR" sz="1000" b="0" i="0" u="none" strike="noStrike" cap="none" spc="0">
+                <a:solidFill>
+                  <a:schemeClr val="tx1">
+                    <a:lumMod val="50000"/>
+                    <a:lumOff val="50000"/>
+                  </a:schemeClr>
+                </a:solidFill>
+                <a:latin typeface="Arial"/>
+                <a:ea typeface="Arial"/>
+                <a:cs typeface="Arial"/>
+              </a:rPr>
+              <a:t>Si vous n'y prenez pas garde, vous pourriez vous transformer en greffé, une créature de chair et de bois évoquant un cauchemar issu de la nature sauvage en quête de vengeance. </a:t>
+            </a:r>
+            <a:r>
+              <a:rPr lang="fr-FR" sz="1000" b="0" i="0" u="none" strike="noStrike" cap="none" spc="0">
+                <a:solidFill>
+                  <a:schemeClr val="tx1">
+                    <a:lumMod val="50000"/>
+                    <a:lumOff val="50000"/>
+                  </a:schemeClr>
+                </a:solidFill>
+                <a:latin typeface="Arial"/>
+                <a:ea typeface="Arial"/>
+                <a:cs typeface="Arial"/>
+              </a:rPr>
+              <a:t>Vous avez cependant appris à utiliser la forme transitoire, qui au moins vous garantit de garder votre lucidité. </a:t>
+            </a:r>
+            <a:endParaRPr lang="fr-FR" sz="1000" b="0" i="0" u="none" strike="noStrike" cap="none" spc="0">
               <a:solidFill>
                 <a:schemeClr val="tx1">
                   <a:lumMod val="50000"/>
                   <a:lumOff val="50000"/>
                 </a:schemeClr>
               </a:solidFill>
-              <a:latin typeface="Arial"/>
-              <a:cs typeface="Arial"/>
+              <a:latin typeface="Times New Roman"/>
+              <a:cs typeface="Times New Roman"/>
             </a:endParaRPr>
           </a:p>
           <a:p>
             <a:pPr>
               <a:defRPr/>
             </a:pPr>
-            <a:endParaRPr lang="fr-FR" sz="900" b="0" i="0" u="none" strike="noStrike" cap="none" spc="0">
+            <a:endParaRPr lang="fr-FR" sz="1000" b="0" i="0" u="none" strike="noStrike" cap="none" spc="0">
               <a:solidFill>
                 <a:schemeClr val="tx1">
                   <a:lumMod val="50000"/>
                   <a:lumOff val="50000"/>
                 </a:schemeClr>
               </a:solidFill>
-              <a:latin typeface="Arial"/>
-              <a:cs typeface="Arial"/>
+              <a:latin typeface="Times New Roman"/>
+              <a:cs typeface="Times New Roman"/>
             </a:endParaRPr>
           </a:p>
           <a:p>
-            <a:pPr marL="0" marR="0" indent="0" algn="l">
-              <a:lnSpc>
-                <a:spcPct val="100000"/>
-              </a:lnSpc>
-              <a:spcBef>
-                <a:spcPts val="0"/>
-              </a:spcBef>
-              <a:spcAft>
-                <a:spcPts val="0"/>
-              </a:spcAft>
-              <a:defRPr/>
-            </a:pPr>
-            <a:r>
-              <a:rPr lang="fr-FR" sz="900" b="0" i="0" u="none" strike="noStrike" cap="none" spc="0">
-                <a:solidFill>
-                  <a:schemeClr val="tx1">
-                    <a:lumMod val="50000"/>
-                    <a:lumOff val="50000"/>
-                  </a:schemeClr>
-                </a:solidFill>
-                <a:latin typeface="Arial"/>
-                <a:ea typeface="Arial"/>
-                <a:cs typeface="Arial"/>
-              </a:rPr>
-              <a:t>Les animaux ne craignent pas le leshy. Ils le reconnaissent même comme une sorte de gardien. Certains peuvent même chercher à l'approcher ou à rechercher sa présence. </a:t>
-            </a:r>
-            <a:br>
-              <a:rPr lang="fr-FR" sz="900" b="0" i="0" u="none" strike="noStrike" cap="none" spc="0">
-                <a:solidFill>
-                  <a:schemeClr val="tx1">
-                    <a:lumMod val="50000"/>
-                    <a:lumOff val="50000"/>
-                  </a:schemeClr>
-                </a:solidFill>
-                <a:latin typeface="Arial"/>
-                <a:ea typeface="Arial"/>
-                <a:cs typeface="Arial"/>
-              </a:rPr>
-            </a:br>
-            <a:br>
-              <a:rPr lang="fr-FR" sz="900" b="0" i="0" u="none" strike="noStrike" cap="none" spc="0">
-                <a:solidFill>
-                  <a:schemeClr val="tx1">
-                    <a:lumMod val="50000"/>
-                    <a:lumOff val="50000"/>
-                  </a:schemeClr>
-                </a:solidFill>
-                <a:latin typeface="Arial"/>
-                <a:ea typeface="Arial"/>
-                <a:cs typeface="Arial"/>
-              </a:rPr>
-            </a:br>
-            <a:r>
-              <a:rPr lang="fr-FR" sz="900" b="0" i="0" u="none" strike="noStrike" cap="none" spc="0">
-                <a:solidFill>
-                  <a:schemeClr val="tx1">
-                    <a:lumMod val="50000"/>
-                    <a:lumOff val="50000"/>
-                  </a:schemeClr>
-                </a:solidFill>
-                <a:latin typeface="Arial"/>
-                <a:ea typeface="Arial"/>
-                <a:cs typeface="Arial"/>
-              </a:rPr>
-              <a:t>Une aura de calme semble émaner du Leshy, mais elle peut se briser si la nature est malmenée en sa présence.</a:t>
-            </a:r>
-            <a:endParaRPr lang="en-US" sz="900" b="0" i="0" u="none" strike="noStrike" cap="none" spc="0">
+            <a:pPr>
+              <a:defRPr/>
+            </a:pPr>
+            <a:r>
+              <a:rPr lang="fr-FR" sz="1000" b="0" i="0" u="none" strike="noStrike" cap="none" spc="0">
+                <a:solidFill>
+                  <a:schemeClr val="tx1">
+                    <a:lumMod val="50000"/>
+                    <a:lumOff val="50000"/>
+                  </a:schemeClr>
+                </a:solidFill>
+                <a:latin typeface="Arial"/>
+                <a:ea typeface="Arial"/>
+                <a:cs typeface="Arial"/>
+              </a:rPr>
+              <a:t>Les animaux ne vous craignent plus et vous considèrent même comme une forme de gardien. Vous êtes cependant devenu extrêmement susceptible au feu et vous éloignez de toute flamme dès que possible.</a:t>
+            </a:r>
+            <a:endParaRPr lang="fr-FR" sz="1000" b="0" i="0" u="none" strike="noStrike" cap="none" spc="0">
               <a:solidFill>
                 <a:schemeClr val="tx1">
                   <a:lumMod val="50000"/>
                   <a:lumOff val="50000"/>
                 </a:schemeClr>
               </a:solidFill>
-              <a:latin typeface="Arial"/>
-              <a:ea typeface="Arial"/>
-              <a:cs typeface="Arial"/>
+              <a:latin typeface="Times New Roman"/>
+              <a:cs typeface="Times New Roman"/>
             </a:endParaRPr>
           </a:p>
         </p:txBody>
       </p:sp>
       <p:sp>
         <p:nvSpPr>
-          <p:cNvPr id="1524509773" name="ZoneTexte 2"/>
+          <p:cNvPr id="1904817542" name="ZoneTexte 2"/>
           <p:cNvSpPr txBox="1"/>
           <p:nvPr/>
         </p:nvSpPr>
         <p:spPr bwMode="auto">
           <a:xfrm>
-            <a:off x="-5166" y="533754"/>
-            <a:ext cx="3441037" cy="1600559"/>
+            <a:off x="-5165" y="533754"/>
+            <a:ext cx="3443555" cy="1615799"/>
           </a:xfrm>
           <a:prstGeom prst="rect">
             <a:avLst/>
@@ -30112,70 +30249,66 @@
               <a:defRPr/>
             </a:pPr>
             <a:r>
-              <a:rPr lang="fr-FR" sz="900" b="0" i="0" u="none" strike="noStrike" cap="none" spc="0">
-                <a:solidFill>
-                  <a:schemeClr val="tx1">
-                    <a:lumMod val="50000"/>
-                    <a:lumOff val="50000"/>
-                  </a:schemeClr>
-                </a:solidFill>
-                <a:latin typeface="Arial"/>
-                <a:ea typeface="Arial"/>
-                <a:cs typeface="Arial"/>
-              </a:rPr>
-              <a:t>Un leshy ne naît pas par morsure, ni par rituel sanglant. Il est choisi, ou plutôt il est greffé à un esprit protecteur de la nature ancien et puissant. A un moment de grande vulnérabilité ou de mort certaine, si l'esprit originel du Leshy juge la personne digne, il s'y enracine faisant de son hôte une terre fertile où faire pousser son esprit.</a:t>
-            </a:r>
-            <a:endParaRPr lang="fr-FR" sz="900" b="0" i="0" u="none" strike="noStrike" cap="none" spc="0">
-              <a:solidFill>
-                <a:schemeClr val="tx1">
-                  <a:lumMod val="50000"/>
-                  <a:lumOff val="50000"/>
-                </a:schemeClr>
-              </a:solidFill>
-              <a:latin typeface="Arial"/>
-              <a:cs typeface="Arial"/>
-            </a:endParaRPr>
-          </a:p>
-          <a:p>
-            <a:pPr>
-              <a:defRPr/>
-            </a:pPr>
-            <a:endParaRPr lang="fr-FR" sz="900" b="0" i="0" u="none" strike="noStrike" cap="none" spc="0">
-              <a:solidFill>
-                <a:schemeClr val="tx1">
-                  <a:lumMod val="50000"/>
-                  <a:lumOff val="50000"/>
-                </a:schemeClr>
-              </a:solidFill>
-              <a:latin typeface="Arial"/>
-              <a:cs typeface="Arial"/>
-            </a:endParaRPr>
-          </a:p>
-          <a:p>
-            <a:pPr>
-              <a:defRPr/>
-            </a:pPr>
-            <a:r>
-              <a:rPr lang="fr-FR" sz="900" b="0" i="0" u="none" strike="noStrike" cap="none" spc="0">
-                <a:solidFill>
-                  <a:schemeClr val="tx1">
-                    <a:lumMod val="50000"/>
-                    <a:lumOff val="50000"/>
-                  </a:schemeClr>
-                </a:solidFill>
-                <a:latin typeface="Arial"/>
-                <a:ea typeface="Arial"/>
-                <a:cs typeface="Arial"/>
-              </a:rPr>
-              <a:t>Le leshy possède trois formes sous lesquelles il peut évoluer, avec leur lot d'avantages et d'inconvénients : la forme humaine, la forme transitoire et la forme du greffé, véritable monstre végétal aux bois de cerfs.</a:t>
-            </a:r>
-            <a:endParaRPr sz="1600"/>
+              <a:rPr lang="fr-FR" sz="1000" b="0" i="0" u="none" strike="noStrike" cap="none" spc="0">
+                <a:solidFill>
+                  <a:schemeClr val="tx1">
+                    <a:lumMod val="50000"/>
+                    <a:lumOff val="50000"/>
+                  </a:schemeClr>
+                </a:solidFill>
+                <a:latin typeface="Arial"/>
+                <a:ea typeface="Arial"/>
+                <a:cs typeface="Arial"/>
+              </a:rPr>
+              <a:t>Vous auriez du mourir lors de cet accident dans la forêt, mais quelque chose vous a choisi. Un esprit protecteur aussi ancien que la forêt elle-même s'est greffé à vous, faisant vibrer votre cœur au rythme de la nature, de sa pulsation que vous ressentez maintenant comme un second cœur. </a:t>
+            </a:r>
+            <a:br>
+              <a:rPr lang="fr-FR" sz="1000" b="0" i="0" u="none" strike="noStrike" cap="none" spc="0">
+                <a:solidFill>
+                  <a:schemeClr val="tx1">
+                    <a:lumMod val="50000"/>
+                    <a:lumOff val="50000"/>
+                  </a:schemeClr>
+                </a:solidFill>
+                <a:latin typeface="Arial"/>
+                <a:ea typeface="Arial"/>
+                <a:cs typeface="Arial"/>
+              </a:rPr>
+            </a:br>
+            <a:br>
+              <a:rPr lang="fr-FR" sz="1000" b="0" i="0" u="none" strike="noStrike" cap="none" spc="0">
+                <a:solidFill>
+                  <a:schemeClr val="tx1">
+                    <a:lumMod val="50000"/>
+                    <a:lumOff val="50000"/>
+                  </a:schemeClr>
+                </a:solidFill>
+                <a:latin typeface="Arial"/>
+                <a:ea typeface="Arial"/>
+                <a:cs typeface="Arial"/>
+              </a:rPr>
+            </a:br>
+            <a:r>
+              <a:rPr lang="fr-FR" sz="1000" b="0" i="0" u="none" strike="noStrike" cap="none" spc="0">
+                <a:solidFill>
+                  <a:schemeClr val="tx1">
+                    <a:lumMod val="50000"/>
+                    <a:lumOff val="50000"/>
+                  </a:schemeClr>
+                </a:solidFill>
+                <a:latin typeface="Arial"/>
+                <a:ea typeface="Arial"/>
+                <a:cs typeface="Arial"/>
+              </a:rPr>
+              <a:t>Vous avez régénéré de vos blessures à une vitesse improbable et ressentez depuis lors les blessures infligées à la nature sauvage de manière viscérale. </a:t>
+            </a:r>
+            <a:endParaRPr sz="1800"/>
           </a:p>
         </p:txBody>
       </p:sp>
       <p:sp>
         <p:nvSpPr>
-          <p:cNvPr id="99244185" name=""/>
+          <p:cNvPr id="784112344" name=""/>
           <p:cNvSpPr/>
           <p:nvPr/>
         </p:nvSpPr>
@@ -30215,7 +30348,7 @@
       </p:sp>
       <p:sp>
         <p:nvSpPr>
-          <p:cNvPr id="404251329" name="Rectangle : avec coins arrondis en haut 1151560973"/>
+          <p:cNvPr id="1732358526" name="Rectangle : avec coins arrondis en haut 1151560973"/>
           <p:cNvSpPr/>
           <p:nvPr/>
         </p:nvSpPr>
@@ -30263,7 +30396,7 @@
       </p:sp>
       <p:sp>
         <p:nvSpPr>
-          <p:cNvPr id="1005316917" name=""/>
+          <p:cNvPr id="973586410" name=""/>
           <p:cNvSpPr/>
           <p:nvPr/>
         </p:nvSpPr>
@@ -30303,7 +30436,7 @@
       </p:sp>
       <p:sp>
         <p:nvSpPr>
-          <p:cNvPr id="823562055" name="Rectangle : avec coins arrondis en haut 1151560973"/>
+          <p:cNvPr id="1653858463" name="Rectangle : avec coins arrondis en haut 1151560973"/>
           <p:cNvSpPr/>
           <p:nvPr/>
         </p:nvSpPr>
@@ -30351,7 +30484,7 @@
       </p:sp>
       <p:sp>
         <p:nvSpPr>
-          <p:cNvPr id="1835529532" name=""/>
+          <p:cNvPr id="1402974251" name=""/>
           <p:cNvSpPr/>
           <p:nvPr/>
         </p:nvSpPr>
@@ -30391,7 +30524,7 @@
       </p:sp>
       <p:sp>
         <p:nvSpPr>
-          <p:cNvPr id="156713581" name="Rectangle : avec coins arrondis en haut 1151560973"/>
+          <p:cNvPr id="1625940873" name="Rectangle : avec coins arrondis en haut 1151560973"/>
           <p:cNvSpPr/>
           <p:nvPr/>
         </p:nvSpPr>
@@ -30439,7 +30572,7 @@
       </p:sp>
       <p:sp>
         <p:nvSpPr>
-          <p:cNvPr id="1947610096" name=""/>
+          <p:cNvPr id="1766012830" name=""/>
           <p:cNvSpPr txBox="1"/>
           <p:nvPr/>
         </p:nvSpPr>
@@ -30490,7 +30623,7 @@
       </p:sp>
       <p:sp>
         <p:nvSpPr>
-          <p:cNvPr id="2056485993" name=""/>
+          <p:cNvPr id="1086572158" name=""/>
           <p:cNvSpPr txBox="1"/>
           <p:nvPr/>
         </p:nvSpPr>
@@ -30588,14 +30721,14 @@
       </p:sp>
       <p:sp>
         <p:nvSpPr>
-          <p:cNvPr id="956856698" name=""/>
+          <p:cNvPr id="971199127" name=""/>
           <p:cNvSpPr/>
           <p:nvPr/>
         </p:nvSpPr>
         <p:spPr bwMode="auto">
           <a:xfrm>
-            <a:off x="2830522" y="22347"/>
-            <a:ext cx="4022971" cy="427079"/>
+            <a:off x="3282427" y="22347"/>
+            <a:ext cx="3571425" cy="427079"/>
           </a:xfrm>
           <a:prstGeom prst="rect">
             <a:avLst/>
@@ -30619,9 +30752,9 @@
                 <a:solidFill>
                   <a:srgbClr val="BFBFBF"/>
                 </a:solidFill>
-                <a:latin typeface="Lucida Handwriting"/>
-                <a:ea typeface="Lucida Handwriting"/>
-                <a:cs typeface="Lucida Handwriting"/>
+                <a:latin typeface="Georgia"/>
+                <a:ea typeface="Georgia"/>
+                <a:cs typeface="Georgia"/>
               </a:rPr>
               <a:t>Les </a:t>
             </a:r>
@@ -30630,9 +30763,9 @@
                 <a:solidFill>
                   <a:srgbClr val="BFBFBF"/>
                 </a:solidFill>
-                <a:latin typeface="Lucida Handwriting"/>
-                <a:ea typeface="Lucida Handwriting"/>
-                <a:cs typeface="Lucida Handwriting"/>
+                <a:latin typeface="Georgia"/>
+                <a:ea typeface="Georgia"/>
+                <a:cs typeface="Georgia"/>
               </a:rPr>
               <a:t>monstres </a:t>
             </a:r>
@@ -30641,9 +30774,9 @@
                 <a:solidFill>
                   <a:srgbClr val="BFBFBF"/>
                 </a:solidFill>
-                <a:latin typeface="Lucida Handwriting"/>
-                <a:ea typeface="Lucida Handwriting"/>
-                <a:cs typeface="Lucida Handwriting"/>
+                <a:latin typeface="Georgia"/>
+                <a:ea typeface="Georgia"/>
+                <a:cs typeface="Georgia"/>
               </a:rPr>
               <a:t>que nous sommes</a:t>
             </a:r>
@@ -30651,15 +30784,15 @@
               <a:solidFill>
                 <a:srgbClr val="BFBFBF"/>
               </a:solidFill>
-              <a:latin typeface="Lucida Handwriting"/>
-              <a:cs typeface="Lucida Handwriting"/>
+              <a:latin typeface="Georgia"/>
+              <a:cs typeface="Georgia"/>
             </a:endParaRPr>
           </a:p>
         </p:txBody>
       </p:sp>
       <p:sp>
         <p:nvSpPr>
-          <p:cNvPr id="672155773" name="Flèche : pentagone 463861063"/>
+          <p:cNvPr id="1948177701" name="Flèche : pentagone 463861063"/>
           <p:cNvSpPr/>
           <p:nvPr/>
         </p:nvSpPr>
@@ -30704,7 +30837,7 @@
       </p:sp>
       <p:sp>
         <p:nvSpPr>
-          <p:cNvPr id="2137010583" name="Flèche : pentagone 272004907"/>
+          <p:cNvPr id="1929644663" name="Flèche : pentagone 272004907"/>
           <p:cNvSpPr/>
           <p:nvPr/>
         </p:nvSpPr>
@@ -30749,7 +30882,7 @@
       </p:sp>
       <p:sp>
         <p:nvSpPr>
-          <p:cNvPr id="452614894" name="Flèche : pentagone 28174069"/>
+          <p:cNvPr id="1648692772" name="Flèche : pentagone 28174069"/>
           <p:cNvSpPr/>
           <p:nvPr/>
         </p:nvSpPr>

--- a/Fiches de personnage.pptx
+++ b/Fiches de personnage.pptx
@@ -139,7 +139,7 @@
       </p:grpSpPr>
       <p:sp>
         <p:nvSpPr>
-          <p:cNvPr id="307165466" name="Espace réservé d'en-tête 1"/>
+          <p:cNvPr id="1529747902" name="Espace réservé d'en-tête 1"/>
           <p:cNvSpPr>
             <a:spLocks noGrp="1"/>
           </p:cNvSpPr>
@@ -173,7 +173,7 @@
       </p:sp>
       <p:sp>
         <p:nvSpPr>
-          <p:cNvPr id="1832211336" name="Espace réservé pour la date 2"/>
+          <p:cNvPr id="968081335" name="Espace réservé pour la date 2"/>
           <p:cNvSpPr>
             <a:spLocks noGrp="1"/>
           </p:cNvSpPr>
@@ -211,7 +211,7 @@
       </p:sp>
       <p:sp>
         <p:nvSpPr>
-          <p:cNvPr id="1216402054" name="Espace réservé pour l'image de la diapositive 3"/>
+          <p:cNvPr id="1034437800" name="Espace réservé pour l'image de la diapositive 3"/>
           <p:cNvSpPr>
             <a:spLocks noChangeAspect="1" noGrp="1" noRot="1"/>
           </p:cNvSpPr>
@@ -247,7 +247,7 @@
       </p:sp>
       <p:sp>
         <p:nvSpPr>
-          <p:cNvPr id="372675105" name="Remarques Espace réservé 4"/>
+          <p:cNvPr id="1976613701" name="Remarques Espace réservé 4"/>
           <p:cNvSpPr>
             <a:spLocks noGrp="1"/>
           </p:cNvSpPr>
@@ -321,7 +321,7 @@
       </p:sp>
       <p:sp>
         <p:nvSpPr>
-          <p:cNvPr id="1338801265" name="Espace réservé du pied de page 5"/>
+          <p:cNvPr id="472572187" name="Espace réservé du pied de page 5"/>
           <p:cNvSpPr>
             <a:spLocks noGrp="1"/>
           </p:cNvSpPr>
@@ -355,7 +355,7 @@
       </p:sp>
       <p:sp>
         <p:nvSpPr>
-          <p:cNvPr id="863948494" name="Espace réservé du numéro de diapositive 6"/>
+          <p:cNvPr id="417874596" name="Espace réservé du numéro de diapositive 6"/>
           <p:cNvSpPr>
             <a:spLocks noGrp="1"/>
           </p:cNvSpPr>
@@ -508,7 +508,7 @@
       </p:grpSpPr>
       <p:sp>
         <p:nvSpPr>
-          <p:cNvPr id="1020713178" name="Espace réservé pour l'image de la diapositive 1"/>
+          <p:cNvPr id="1063037489" name="Espace réservé pour l'image de la diapositive 1"/>
           <p:cNvSpPr>
             <a:spLocks noChangeAspect="1" noGrp="1" noRot="1"/>
           </p:cNvSpPr>
@@ -525,7 +525,7 @@
       </p:sp>
       <p:sp>
         <p:nvSpPr>
-          <p:cNvPr id="80374201" name="Remarques Espace réservé 2"/>
+          <p:cNvPr id="1059771242" name="Remarques Espace réservé 2"/>
           <p:cNvSpPr>
             <a:spLocks noGrp="1"/>
           </p:cNvSpPr>
@@ -550,7 +550,7 @@
       </p:sp>
       <p:sp>
         <p:nvSpPr>
-          <p:cNvPr id="1671916755" name="Espace réservé pour le numéro de diapositive 3"/>
+          <p:cNvPr id="588984945" name="Espace réservé pour le numéro de diapositive 3"/>
           <p:cNvSpPr>
             <a:spLocks noGrp="1"/>
           </p:cNvSpPr>
@@ -601,7 +601,7 @@
       </p:grpSpPr>
       <p:sp>
         <p:nvSpPr>
-          <p:cNvPr id="2121065090" name="Espace réservé pour l'image de la diapositive 1"/>
+          <p:cNvPr id="163563648" name="Espace réservé pour l'image de la diapositive 1"/>
           <p:cNvSpPr>
             <a:spLocks noChangeAspect="1" noGrp="1" noRot="1"/>
           </p:cNvSpPr>
@@ -618,7 +618,7 @@
       </p:sp>
       <p:sp>
         <p:nvSpPr>
-          <p:cNvPr id="1970644124" name="Remarques Espace réservé 2"/>
+          <p:cNvPr id="1315418167" name="Remarques Espace réservé 2"/>
           <p:cNvSpPr>
             <a:spLocks noGrp="1"/>
           </p:cNvSpPr>
@@ -643,7 +643,7 @@
       </p:sp>
       <p:sp>
         <p:nvSpPr>
-          <p:cNvPr id="556062222" name="Espace réservé pour le numéro de diapositive 3"/>
+          <p:cNvPr id="1721776628" name="Espace réservé pour le numéro de diapositive 3"/>
           <p:cNvSpPr>
             <a:spLocks noGrp="1"/>
           </p:cNvSpPr>
@@ -694,7 +694,7 @@
       </p:grpSpPr>
       <p:sp>
         <p:nvSpPr>
-          <p:cNvPr id="1505843910" name="Espace réservé pour l'image de la diapositive 1"/>
+          <p:cNvPr id="808583563" name="Espace réservé pour l'image de la diapositive 1"/>
           <p:cNvSpPr>
             <a:spLocks noChangeAspect="1" noGrp="1" noRot="1"/>
           </p:cNvSpPr>
@@ -711,7 +711,7 @@
       </p:sp>
       <p:sp>
         <p:nvSpPr>
-          <p:cNvPr id="920689289" name="Remarques Espace réservé 2"/>
+          <p:cNvPr id="1907003640" name="Remarques Espace réservé 2"/>
           <p:cNvSpPr>
             <a:spLocks noGrp="1"/>
           </p:cNvSpPr>
@@ -736,7 +736,7 @@
       </p:sp>
       <p:sp>
         <p:nvSpPr>
-          <p:cNvPr id="1999992784" name="Espace réservé pour le numéro de diapositive 3"/>
+          <p:cNvPr id="178019968" name="Espace réservé pour le numéro de diapositive 3"/>
           <p:cNvSpPr>
             <a:spLocks noGrp="1"/>
           </p:cNvSpPr>
@@ -787,7 +787,7 @@
       </p:grpSpPr>
       <p:sp>
         <p:nvSpPr>
-          <p:cNvPr id="2022063198" name="Espace réservé pour l'image de la diapositive 1"/>
+          <p:cNvPr id="1745428485" name="Espace réservé pour l'image de la diapositive 1"/>
           <p:cNvSpPr>
             <a:spLocks noChangeAspect="1" noGrp="1" noRot="1"/>
           </p:cNvSpPr>
@@ -804,7 +804,7 @@
       </p:sp>
       <p:sp>
         <p:nvSpPr>
-          <p:cNvPr id="1970351248" name="Remarques Espace réservé 2"/>
+          <p:cNvPr id="1006072800" name="Remarques Espace réservé 2"/>
           <p:cNvSpPr>
             <a:spLocks noGrp="1"/>
           </p:cNvSpPr>
@@ -829,7 +829,7 @@
       </p:sp>
       <p:sp>
         <p:nvSpPr>
-          <p:cNvPr id="801653472" name="Espace réservé pour le numéro de diapositive 3"/>
+          <p:cNvPr id="1642902547" name="Espace réservé pour le numéro de diapositive 3"/>
           <p:cNvSpPr>
             <a:spLocks noGrp="1"/>
           </p:cNvSpPr>
@@ -880,7 +880,7 @@
       </p:grpSpPr>
       <p:sp>
         <p:nvSpPr>
-          <p:cNvPr id="1983303275" name="Espace réservé pour l'image de la diapositive 1"/>
+          <p:cNvPr id="2132959290" name="Espace réservé pour l'image de la diapositive 1"/>
           <p:cNvSpPr>
             <a:spLocks noChangeAspect="1" noGrp="1" noRot="1"/>
           </p:cNvSpPr>
@@ -897,7 +897,7 @@
       </p:sp>
       <p:sp>
         <p:nvSpPr>
-          <p:cNvPr id="1220022219" name="Remarques Espace réservé 2"/>
+          <p:cNvPr id="670783461" name="Remarques Espace réservé 2"/>
           <p:cNvSpPr>
             <a:spLocks noGrp="1"/>
           </p:cNvSpPr>
@@ -922,7 +922,7 @@
       </p:sp>
       <p:sp>
         <p:nvSpPr>
-          <p:cNvPr id="476468152" name="Espace réservé pour le numéro de diapositive 3"/>
+          <p:cNvPr id="956585887" name="Espace réservé pour le numéro de diapositive 3"/>
           <p:cNvSpPr>
             <a:spLocks noGrp="1"/>
           </p:cNvSpPr>
@@ -973,7 +973,7 @@
       </p:grpSpPr>
       <p:sp>
         <p:nvSpPr>
-          <p:cNvPr id="1745744557" name="Espace réservé pour l'image de la diapositive 1"/>
+          <p:cNvPr id="1334745541" name="Espace réservé pour l'image de la diapositive 1"/>
           <p:cNvSpPr>
             <a:spLocks noChangeAspect="1" noGrp="1" noRot="1"/>
           </p:cNvSpPr>
@@ -990,7 +990,7 @@
       </p:sp>
       <p:sp>
         <p:nvSpPr>
-          <p:cNvPr id="387218353" name="Remarques Espace réservé 2"/>
+          <p:cNvPr id="1084438644" name="Remarques Espace réservé 2"/>
           <p:cNvSpPr>
             <a:spLocks noGrp="1"/>
           </p:cNvSpPr>
@@ -1015,7 +1015,7 @@
       </p:sp>
       <p:sp>
         <p:nvSpPr>
-          <p:cNvPr id="477756055" name="Espace réservé pour le numéro de diapositive 3"/>
+          <p:cNvPr id="294104809" name="Espace réservé pour le numéro de diapositive 3"/>
           <p:cNvSpPr>
             <a:spLocks noGrp="1"/>
           </p:cNvSpPr>
@@ -1066,7 +1066,7 @@
       </p:grpSpPr>
       <p:sp>
         <p:nvSpPr>
-          <p:cNvPr id="100069598" name="Titre 1"/>
+          <p:cNvPr id="1713261139" name="Titre 1"/>
           <p:cNvSpPr>
             <a:spLocks noGrp="1"/>
           </p:cNvSpPr>
@@ -1101,7 +1101,7 @@
       </p:sp>
       <p:sp>
         <p:nvSpPr>
-          <p:cNvPr id="1770348489" name="Sous-titre 2"/>
+          <p:cNvPr id="1539660409" name="Sous-titre 2"/>
           <p:cNvSpPr>
             <a:spLocks noGrp="1"/>
           </p:cNvSpPr>
@@ -1169,7 +1169,7 @@
       </p:sp>
       <p:sp>
         <p:nvSpPr>
-          <p:cNvPr id="238371012" name="Espace réservé de la date 3"/>
+          <p:cNvPr id="1332239399" name="Espace réservé de la date 3"/>
           <p:cNvSpPr>
             <a:spLocks noGrp="1"/>
           </p:cNvSpPr>
@@ -1195,7 +1195,7 @@
       </p:sp>
       <p:sp>
         <p:nvSpPr>
-          <p:cNvPr id="1474221995" name="Espace réservé du pied de page 4"/>
+          <p:cNvPr id="970597369" name="Espace réservé du pied de page 4"/>
           <p:cNvSpPr>
             <a:spLocks noGrp="1"/>
           </p:cNvSpPr>
@@ -1217,7 +1217,7 @@
       </p:sp>
       <p:sp>
         <p:nvSpPr>
-          <p:cNvPr id="651055608" name="Espace réservé du numéro de diapositive 5"/>
+          <p:cNvPr id="300693141" name="Espace réservé du numéro de diapositive 5"/>
           <p:cNvSpPr>
             <a:spLocks noGrp="1"/>
           </p:cNvSpPr>
@@ -1268,7 +1268,7 @@
       </p:grpSpPr>
       <p:sp>
         <p:nvSpPr>
-          <p:cNvPr id="889909677" name="Titre 1"/>
+          <p:cNvPr id="1177594058" name="Titre 1"/>
           <p:cNvSpPr>
             <a:spLocks noGrp="1"/>
           </p:cNvSpPr>
@@ -1294,7 +1294,7 @@
       </p:sp>
       <p:sp>
         <p:nvSpPr>
-          <p:cNvPr id="530336760" name="Espace réservé du texte vertical 2"/>
+          <p:cNvPr id="1817407221" name="Espace réservé du texte vertical 2"/>
           <p:cNvSpPr>
             <a:spLocks noGrp="1"/>
           </p:cNvSpPr>
@@ -1360,7 +1360,7 @@
       </p:sp>
       <p:sp>
         <p:nvSpPr>
-          <p:cNvPr id="712837872" name="Espace réservé de la date 3"/>
+          <p:cNvPr id="809987668" name="Espace réservé de la date 3"/>
           <p:cNvSpPr>
             <a:spLocks noGrp="1"/>
           </p:cNvSpPr>
@@ -1386,7 +1386,7 @@
       </p:sp>
       <p:sp>
         <p:nvSpPr>
-          <p:cNvPr id="307982431" name="Espace réservé du pied de page 4"/>
+          <p:cNvPr id="634002153" name="Espace réservé du pied de page 4"/>
           <p:cNvSpPr>
             <a:spLocks noGrp="1"/>
           </p:cNvSpPr>
@@ -1408,7 +1408,7 @@
       </p:sp>
       <p:sp>
         <p:nvSpPr>
-          <p:cNvPr id="1948397158" name="Espace réservé du numéro de diapositive 5"/>
+          <p:cNvPr id="1279978862" name="Espace réservé du numéro de diapositive 5"/>
           <p:cNvSpPr>
             <a:spLocks noGrp="1"/>
           </p:cNvSpPr>
@@ -1459,7 +1459,7 @@
       </p:grpSpPr>
       <p:sp>
         <p:nvSpPr>
-          <p:cNvPr id="1088193243" name="Titre vertical 1"/>
+          <p:cNvPr id="1665978983" name="Titre vertical 1"/>
           <p:cNvSpPr>
             <a:spLocks noGrp="1"/>
           </p:cNvSpPr>
@@ -1490,7 +1490,7 @@
       </p:sp>
       <p:sp>
         <p:nvSpPr>
-          <p:cNvPr id="656290635" name="Espace réservé du texte vertical 2"/>
+          <p:cNvPr id="725266333" name="Espace réservé du texte vertical 2"/>
           <p:cNvSpPr>
             <a:spLocks noGrp="1"/>
           </p:cNvSpPr>
@@ -1561,7 +1561,7 @@
       </p:sp>
       <p:sp>
         <p:nvSpPr>
-          <p:cNvPr id="1002374286" name="Espace réservé de la date 3"/>
+          <p:cNvPr id="109790626" name="Espace réservé de la date 3"/>
           <p:cNvSpPr>
             <a:spLocks noGrp="1"/>
           </p:cNvSpPr>
@@ -1587,7 +1587,7 @@
       </p:sp>
       <p:sp>
         <p:nvSpPr>
-          <p:cNvPr id="670728835" name="Espace réservé du pied de page 4"/>
+          <p:cNvPr id="230881722" name="Espace réservé du pied de page 4"/>
           <p:cNvSpPr>
             <a:spLocks noGrp="1"/>
           </p:cNvSpPr>
@@ -1609,7 +1609,7 @@
       </p:sp>
       <p:sp>
         <p:nvSpPr>
-          <p:cNvPr id="1747738303" name="Espace réservé du numéro de diapositive 5"/>
+          <p:cNvPr id="1991142719" name="Espace réservé du numéro de diapositive 5"/>
           <p:cNvSpPr>
             <a:spLocks noGrp="1"/>
           </p:cNvSpPr>
@@ -1660,7 +1660,7 @@
       </p:grpSpPr>
       <p:sp>
         <p:nvSpPr>
-          <p:cNvPr id="1895142569" name="Titre 1"/>
+          <p:cNvPr id="1126227538" name="Titre 1"/>
           <p:cNvSpPr>
             <a:spLocks noGrp="1"/>
           </p:cNvSpPr>
@@ -1686,7 +1686,7 @@
       </p:sp>
       <p:sp>
         <p:nvSpPr>
-          <p:cNvPr id="339504378" name="Espace réservé du contenu 2"/>
+          <p:cNvPr id="1304445886" name="Espace réservé du contenu 2"/>
           <p:cNvSpPr>
             <a:spLocks noGrp="1"/>
           </p:cNvSpPr>
@@ -1752,7 +1752,7 @@
       </p:sp>
       <p:sp>
         <p:nvSpPr>
-          <p:cNvPr id="1089478001" name="Espace réservé de la date 3"/>
+          <p:cNvPr id="1546160638" name="Espace réservé de la date 3"/>
           <p:cNvSpPr>
             <a:spLocks noGrp="1"/>
           </p:cNvSpPr>
@@ -1778,7 +1778,7 @@
       </p:sp>
       <p:sp>
         <p:nvSpPr>
-          <p:cNvPr id="335735822" name="Espace réservé du pied de page 4"/>
+          <p:cNvPr id="1366955425" name="Espace réservé du pied de page 4"/>
           <p:cNvSpPr>
             <a:spLocks noGrp="1"/>
           </p:cNvSpPr>
@@ -1800,7 +1800,7 @@
       </p:sp>
       <p:sp>
         <p:nvSpPr>
-          <p:cNvPr id="1558133893" name="Espace réservé du numéro de diapositive 5"/>
+          <p:cNvPr id="55699249" name="Espace réservé du numéro de diapositive 5"/>
           <p:cNvSpPr>
             <a:spLocks noGrp="1"/>
           </p:cNvSpPr>
@@ -1851,7 +1851,7 @@
       </p:grpSpPr>
       <p:sp>
         <p:nvSpPr>
-          <p:cNvPr id="763716482" name="Titre 1"/>
+          <p:cNvPr id="2033089145" name="Titre 1"/>
           <p:cNvSpPr>
             <a:spLocks noGrp="1"/>
           </p:cNvSpPr>
@@ -1886,7 +1886,7 @@
       </p:sp>
       <p:sp>
         <p:nvSpPr>
-          <p:cNvPr id="1356324228" name="Espace réservé du texte 2"/>
+          <p:cNvPr id="249584431" name="Espace réservé du texte 2"/>
           <p:cNvSpPr>
             <a:spLocks noGrp="1"/>
           </p:cNvSpPr>
@@ -2008,7 +2008,7 @@
       </p:sp>
       <p:sp>
         <p:nvSpPr>
-          <p:cNvPr id="1596969571" name="Espace réservé de la date 3"/>
+          <p:cNvPr id="2118011931" name="Espace réservé de la date 3"/>
           <p:cNvSpPr>
             <a:spLocks noGrp="1"/>
           </p:cNvSpPr>
@@ -2034,7 +2034,7 @@
       </p:sp>
       <p:sp>
         <p:nvSpPr>
-          <p:cNvPr id="1813795576" name="Espace réservé du pied de page 4"/>
+          <p:cNvPr id="1008190948" name="Espace réservé du pied de page 4"/>
           <p:cNvSpPr>
             <a:spLocks noGrp="1"/>
           </p:cNvSpPr>
@@ -2056,7 +2056,7 @@
       </p:sp>
       <p:sp>
         <p:nvSpPr>
-          <p:cNvPr id="311896601" name="Espace réservé du numéro de diapositive 5"/>
+          <p:cNvPr id="753514709" name="Espace réservé du numéro de diapositive 5"/>
           <p:cNvSpPr>
             <a:spLocks noGrp="1"/>
           </p:cNvSpPr>
@@ -2107,7 +2107,7 @@
       </p:grpSpPr>
       <p:sp>
         <p:nvSpPr>
-          <p:cNvPr id="1178437168" name="Titre 1"/>
+          <p:cNvPr id="2115848321" name="Titre 1"/>
           <p:cNvSpPr>
             <a:spLocks noGrp="1"/>
           </p:cNvSpPr>
@@ -2133,7 +2133,7 @@
       </p:sp>
       <p:sp>
         <p:nvSpPr>
-          <p:cNvPr id="1771262621" name="Espace réservé du contenu 2"/>
+          <p:cNvPr id="2098540698" name="Espace réservé du contenu 2"/>
           <p:cNvSpPr>
             <a:spLocks noGrp="1"/>
           </p:cNvSpPr>
@@ -2204,7 +2204,7 @@
       </p:sp>
       <p:sp>
         <p:nvSpPr>
-          <p:cNvPr id="1946111311" name="Espace réservé du contenu 3"/>
+          <p:cNvPr id="1540818967" name="Espace réservé du contenu 3"/>
           <p:cNvSpPr>
             <a:spLocks noGrp="1"/>
           </p:cNvSpPr>
@@ -2275,7 +2275,7 @@
       </p:sp>
       <p:sp>
         <p:nvSpPr>
-          <p:cNvPr id="785317847" name="Espace réservé de la date 4"/>
+          <p:cNvPr id="1881401899" name="Espace réservé de la date 4"/>
           <p:cNvSpPr>
             <a:spLocks noGrp="1"/>
           </p:cNvSpPr>
@@ -2301,7 +2301,7 @@
       </p:sp>
       <p:sp>
         <p:nvSpPr>
-          <p:cNvPr id="376847212" name="Espace réservé du pied de page 5"/>
+          <p:cNvPr id="663723077" name="Espace réservé du pied de page 5"/>
           <p:cNvSpPr>
             <a:spLocks noGrp="1"/>
           </p:cNvSpPr>
@@ -2323,7 +2323,7 @@
       </p:sp>
       <p:sp>
         <p:nvSpPr>
-          <p:cNvPr id="2137429535" name="Espace réservé du numéro de diapositive 6"/>
+          <p:cNvPr id="2091203750" name="Espace réservé du numéro de diapositive 6"/>
           <p:cNvSpPr>
             <a:spLocks noGrp="1"/>
           </p:cNvSpPr>
@@ -2374,7 +2374,7 @@
       </p:grpSpPr>
       <p:sp>
         <p:nvSpPr>
-          <p:cNvPr id="1835981285" name="Titre 1"/>
+          <p:cNvPr id="670921614" name="Titre 1"/>
           <p:cNvSpPr>
             <a:spLocks noGrp="1"/>
           </p:cNvSpPr>
@@ -2405,7 +2405,7 @@
       </p:sp>
       <p:sp>
         <p:nvSpPr>
-          <p:cNvPr id="563651210" name="Espace réservé du texte 2"/>
+          <p:cNvPr id="1210370524" name="Espace réservé du texte 2"/>
           <p:cNvSpPr>
             <a:spLocks noGrp="1"/>
           </p:cNvSpPr>
@@ -2473,7 +2473,7 @@
       </p:sp>
       <p:sp>
         <p:nvSpPr>
-          <p:cNvPr id="673783751" name="Espace réservé du contenu 3"/>
+          <p:cNvPr id="1899952155" name="Espace réservé du contenu 3"/>
           <p:cNvSpPr>
             <a:spLocks noGrp="1"/>
           </p:cNvSpPr>
@@ -2544,7 +2544,7 @@
       </p:sp>
       <p:sp>
         <p:nvSpPr>
-          <p:cNvPr id="868134026" name="Espace réservé du texte 4"/>
+          <p:cNvPr id="289848083" name="Espace réservé du texte 4"/>
           <p:cNvSpPr>
             <a:spLocks noGrp="1"/>
           </p:cNvSpPr>
@@ -2612,7 +2612,7 @@
       </p:sp>
       <p:sp>
         <p:nvSpPr>
-          <p:cNvPr id="585501536" name="Espace réservé du contenu 5"/>
+          <p:cNvPr id="593061409" name="Espace réservé du contenu 5"/>
           <p:cNvSpPr>
             <a:spLocks noGrp="1"/>
           </p:cNvSpPr>
@@ -2683,7 +2683,7 @@
       </p:sp>
       <p:sp>
         <p:nvSpPr>
-          <p:cNvPr id="122018464" name="Espace réservé de la date 6"/>
+          <p:cNvPr id="1161099622" name="Espace réservé de la date 6"/>
           <p:cNvSpPr>
             <a:spLocks noGrp="1"/>
           </p:cNvSpPr>
@@ -2709,7 +2709,7 @@
       </p:sp>
       <p:sp>
         <p:nvSpPr>
-          <p:cNvPr id="5088666" name="Espace réservé du pied de page 7"/>
+          <p:cNvPr id="75967631" name="Espace réservé du pied de page 7"/>
           <p:cNvSpPr>
             <a:spLocks noGrp="1"/>
           </p:cNvSpPr>
@@ -2731,7 +2731,7 @@
       </p:sp>
       <p:sp>
         <p:nvSpPr>
-          <p:cNvPr id="2114865113" name="Espace réservé du numéro de diapositive 8"/>
+          <p:cNvPr id="1945033947" name="Espace réservé du numéro de diapositive 8"/>
           <p:cNvSpPr>
             <a:spLocks noGrp="1"/>
           </p:cNvSpPr>
@@ -2782,7 +2782,7 @@
       </p:grpSpPr>
       <p:sp>
         <p:nvSpPr>
-          <p:cNvPr id="112613835" name="Titre 1"/>
+          <p:cNvPr id="1387182870" name="Titre 1"/>
           <p:cNvSpPr>
             <a:spLocks noGrp="1"/>
           </p:cNvSpPr>
@@ -2808,7 +2808,7 @@
       </p:sp>
       <p:sp>
         <p:nvSpPr>
-          <p:cNvPr id="1954012508" name="Espace réservé de la date 2"/>
+          <p:cNvPr id="1751577412" name="Espace réservé de la date 2"/>
           <p:cNvSpPr>
             <a:spLocks noGrp="1"/>
           </p:cNvSpPr>
@@ -2834,7 +2834,7 @@
       </p:sp>
       <p:sp>
         <p:nvSpPr>
-          <p:cNvPr id="1861395639" name="Espace réservé du pied de page 3"/>
+          <p:cNvPr id="2078304716" name="Espace réservé du pied de page 3"/>
           <p:cNvSpPr>
             <a:spLocks noGrp="1"/>
           </p:cNvSpPr>
@@ -2856,7 +2856,7 @@
       </p:sp>
       <p:sp>
         <p:nvSpPr>
-          <p:cNvPr id="1536441176" name="Espace réservé du numéro de diapositive 4"/>
+          <p:cNvPr id="628792968" name="Espace réservé du numéro de diapositive 4"/>
           <p:cNvSpPr>
             <a:spLocks noGrp="1"/>
           </p:cNvSpPr>
@@ -2907,7 +2907,7 @@
       </p:grpSpPr>
       <p:sp>
         <p:nvSpPr>
-          <p:cNvPr id="1085780931" name="Espace réservé de la date 1"/>
+          <p:cNvPr id="295439632" name="Espace réservé de la date 1"/>
           <p:cNvSpPr>
             <a:spLocks noGrp="1"/>
           </p:cNvSpPr>
@@ -2933,7 +2933,7 @@
       </p:sp>
       <p:sp>
         <p:nvSpPr>
-          <p:cNvPr id="556989458" name="Espace réservé du pied de page 2"/>
+          <p:cNvPr id="1763293912" name="Espace réservé du pied de page 2"/>
           <p:cNvSpPr>
             <a:spLocks noGrp="1"/>
           </p:cNvSpPr>
@@ -2955,7 +2955,7 @@
       </p:sp>
       <p:sp>
         <p:nvSpPr>
-          <p:cNvPr id="1386877204" name="Espace réservé du numéro de diapositive 3"/>
+          <p:cNvPr id="1772389998" name="Espace réservé du numéro de diapositive 3"/>
           <p:cNvSpPr>
             <a:spLocks noGrp="1"/>
           </p:cNvSpPr>
@@ -3006,7 +3006,7 @@
       </p:grpSpPr>
       <p:sp>
         <p:nvSpPr>
-          <p:cNvPr id="1873437260" name="Titre 1"/>
+          <p:cNvPr id="734229751" name="Titre 1"/>
           <p:cNvSpPr>
             <a:spLocks noGrp="1"/>
           </p:cNvSpPr>
@@ -3041,7 +3041,7 @@
       </p:sp>
       <p:sp>
         <p:nvSpPr>
-          <p:cNvPr id="1432788435" name="Espace réservé du contenu 2"/>
+          <p:cNvPr id="1722997747" name="Espace réservé du contenu 2"/>
           <p:cNvSpPr>
             <a:spLocks noGrp="1"/>
           </p:cNvSpPr>
@@ -3140,7 +3140,7 @@
       </p:sp>
       <p:sp>
         <p:nvSpPr>
-          <p:cNvPr id="1783913250" name="Espace réservé du texte 3"/>
+          <p:cNvPr id="912405373" name="Espace réservé du texte 3"/>
           <p:cNvSpPr>
             <a:spLocks noGrp="1"/>
           </p:cNvSpPr>
@@ -3208,7 +3208,7 @@
       </p:sp>
       <p:sp>
         <p:nvSpPr>
-          <p:cNvPr id="1646325026" name="Espace réservé de la date 4"/>
+          <p:cNvPr id="1532483066" name="Espace réservé de la date 4"/>
           <p:cNvSpPr>
             <a:spLocks noGrp="1"/>
           </p:cNvSpPr>
@@ -3234,7 +3234,7 @@
       </p:sp>
       <p:sp>
         <p:nvSpPr>
-          <p:cNvPr id="1137858466" name="Espace réservé du pied de page 5"/>
+          <p:cNvPr id="181529441" name="Espace réservé du pied de page 5"/>
           <p:cNvSpPr>
             <a:spLocks noGrp="1"/>
           </p:cNvSpPr>
@@ -3256,7 +3256,7 @@
       </p:sp>
       <p:sp>
         <p:nvSpPr>
-          <p:cNvPr id="1494272631" name="Espace réservé du numéro de diapositive 6"/>
+          <p:cNvPr id="1990196536" name="Espace réservé du numéro de diapositive 6"/>
           <p:cNvSpPr>
             <a:spLocks noGrp="1"/>
           </p:cNvSpPr>
@@ -3307,7 +3307,7 @@
       </p:grpSpPr>
       <p:sp>
         <p:nvSpPr>
-          <p:cNvPr id="1132098517" name="Titre 1"/>
+          <p:cNvPr id="650888267" name="Titre 1"/>
           <p:cNvSpPr>
             <a:spLocks noGrp="1"/>
           </p:cNvSpPr>
@@ -3342,7 +3342,7 @@
       </p:sp>
       <p:sp>
         <p:nvSpPr>
-          <p:cNvPr id="1079600893" name="Espace réservé pour une image 2"/>
+          <p:cNvPr id="291073266" name="Espace réservé pour une image 2"/>
           <p:cNvSpPr>
             <a:spLocks noChangeAspect="1" noGrp="1"/>
           </p:cNvSpPr>
@@ -3410,7 +3410,7 @@
       </p:sp>
       <p:sp>
         <p:nvSpPr>
-          <p:cNvPr id="1498205863" name="Espace réservé du texte 3"/>
+          <p:cNvPr id="629335436" name="Espace réservé du texte 3"/>
           <p:cNvSpPr>
             <a:spLocks noGrp="1"/>
           </p:cNvSpPr>
@@ -3478,7 +3478,7 @@
       </p:sp>
       <p:sp>
         <p:nvSpPr>
-          <p:cNvPr id="1835317432" name="Espace réservé de la date 4"/>
+          <p:cNvPr id="220135532" name="Espace réservé de la date 4"/>
           <p:cNvSpPr>
             <a:spLocks noGrp="1"/>
           </p:cNvSpPr>
@@ -3504,7 +3504,7 @@
       </p:sp>
       <p:sp>
         <p:nvSpPr>
-          <p:cNvPr id="1754152356" name="Espace réservé du pied de page 5"/>
+          <p:cNvPr id="1493081883" name="Espace réservé du pied de page 5"/>
           <p:cNvSpPr>
             <a:spLocks noGrp="1"/>
           </p:cNvSpPr>
@@ -3526,7 +3526,7 @@
       </p:sp>
       <p:sp>
         <p:nvSpPr>
-          <p:cNvPr id="786454199" name="Espace réservé du numéro de diapositive 6"/>
+          <p:cNvPr id="2115468867" name="Espace réservé du numéro de diapositive 6"/>
           <p:cNvSpPr>
             <a:spLocks noGrp="1"/>
           </p:cNvSpPr>
@@ -3582,7 +3582,7 @@
       </p:grpSpPr>
       <p:sp>
         <p:nvSpPr>
-          <p:cNvPr id="1110823470" name="Espace réservé du titre 1"/>
+          <p:cNvPr id="1251679794" name="Espace réservé du titre 1"/>
           <p:cNvSpPr>
             <a:spLocks noGrp="1"/>
           </p:cNvSpPr>
@@ -3618,7 +3618,7 @@
       </p:sp>
       <p:sp>
         <p:nvSpPr>
-          <p:cNvPr id="1059163083" name="Espace réservé du texte 2"/>
+          <p:cNvPr id="998371677" name="Espace réservé du texte 2"/>
           <p:cNvSpPr>
             <a:spLocks noGrp="1"/>
           </p:cNvSpPr>
@@ -3694,7 +3694,7 @@
       </p:sp>
       <p:sp>
         <p:nvSpPr>
-          <p:cNvPr id="445899774" name="Espace réservé de la date 3"/>
+          <p:cNvPr id="1690006027" name="Espace réservé de la date 3"/>
           <p:cNvSpPr>
             <a:spLocks noGrp="1"/>
           </p:cNvSpPr>
@@ -3738,7 +3738,7 @@
       </p:sp>
       <p:sp>
         <p:nvSpPr>
-          <p:cNvPr id="1940730025" name="Espace réservé du pied de page 4"/>
+          <p:cNvPr id="206252069" name="Espace réservé du pied de page 4"/>
           <p:cNvSpPr>
             <a:spLocks noGrp="1"/>
           </p:cNvSpPr>
@@ -3778,7 +3778,7 @@
       </p:sp>
       <p:sp>
         <p:nvSpPr>
-          <p:cNvPr id="362083186" name="Espace réservé du numéro de diapositive 5"/>
+          <p:cNvPr id="1732464920" name="Espace réservé du numéro de diapositive 5"/>
           <p:cNvSpPr>
             <a:spLocks noGrp="1"/>
           </p:cNvSpPr>
@@ -4138,7 +4138,7 @@
       </p:grpSpPr>
       <p:cxnSp>
         <p:nvCxnSpPr>
-          <p:cNvPr id="11138148" name="Connecteur droit 1568760680"/>
+          <p:cNvPr id="326755166" name="Connecteur droit 1568760680"/>
           <p:cNvCxnSpPr/>
           <p:nvPr/>
         </p:nvCxnSpPr>
@@ -4180,7 +4180,7 @@
       </p:cxnSp>
       <p:sp>
         <p:nvSpPr>
-          <p:cNvPr id="1456454994" name="ZoneTexte 1868728971"/>
+          <p:cNvPr id="327096227" name="ZoneTexte 1868728971"/>
           <p:cNvSpPr txBox="1"/>
           <p:nvPr/>
         </p:nvSpPr>
@@ -4220,7 +4220,7 @@
       </p:sp>
       <p:cxnSp>
         <p:nvCxnSpPr>
-          <p:cNvPr id="978183594" name="Connecteur droit 806540798"/>
+          <p:cNvPr id="326489437" name="Connecteur droit 806540798"/>
           <p:cNvCxnSpPr/>
           <p:nvPr/>
         </p:nvCxnSpPr>
@@ -4262,7 +4262,7 @@
       </p:cxnSp>
       <p:sp>
         <p:nvSpPr>
-          <p:cNvPr id="1883638502" name="ZoneTexte 406616703"/>
+          <p:cNvPr id="1508666195" name="ZoneTexte 406616703"/>
           <p:cNvSpPr txBox="1"/>
           <p:nvPr/>
         </p:nvSpPr>
@@ -4302,7 +4302,7 @@
       </p:sp>
       <p:cxnSp>
         <p:nvCxnSpPr>
-          <p:cNvPr id="195352411" name="Connecteur droit 858914340"/>
+          <p:cNvPr id="1378018976" name="Connecteur droit 858914340"/>
           <p:cNvCxnSpPr/>
           <p:nvPr/>
         </p:nvCxnSpPr>
@@ -4344,7 +4344,7 @@
       </p:cxnSp>
       <p:sp>
         <p:nvSpPr>
-          <p:cNvPr id="421975819" name="ZoneTexte 2018177722"/>
+          <p:cNvPr id="1210505139" name="ZoneTexte 2018177722"/>
           <p:cNvSpPr txBox="1"/>
           <p:nvPr/>
         </p:nvSpPr>
@@ -4391,7 +4391,7 @@
       </p:sp>
       <p:sp>
         <p:nvSpPr>
-          <p:cNvPr id="1842875970" name="ZoneTexte 519900862"/>
+          <p:cNvPr id="368995461" name="ZoneTexte 519900862"/>
           <p:cNvSpPr txBox="1"/>
           <p:nvPr/>
         </p:nvSpPr>
@@ -4653,7 +4653,7 @@
       </p:sp>
       <p:sp>
         <p:nvSpPr>
-          <p:cNvPr id="1662641925" name="Rectangle : avec coins arrondis en haut 838565229"/>
+          <p:cNvPr id="939903895" name="Rectangle : avec coins arrondis en haut 838565229"/>
           <p:cNvSpPr/>
           <p:nvPr/>
         </p:nvSpPr>
@@ -4699,7 +4699,7 @@
       </p:sp>
       <p:sp>
         <p:nvSpPr>
-          <p:cNvPr id="199756122" name="ZoneTexte 448541368"/>
+          <p:cNvPr id="1208937042" name="ZoneTexte 448541368"/>
           <p:cNvSpPr txBox="1"/>
           <p:nvPr/>
         </p:nvSpPr>
@@ -4780,7 +4780,7 @@
       </p:sp>
       <p:sp>
         <p:nvSpPr>
-          <p:cNvPr id="340811994" name="Rectangle : avec coins arrondis en haut 1165584529"/>
+          <p:cNvPr id="278079090" name="Rectangle : avec coins arrondis en haut 1165584529"/>
           <p:cNvSpPr/>
           <p:nvPr/>
         </p:nvSpPr>
@@ -4826,7 +4826,7 @@
       </p:sp>
       <p:sp>
         <p:nvSpPr>
-          <p:cNvPr id="1991107597" name="Flèche : pentagone 1880610112"/>
+          <p:cNvPr id="209534049" name="Flèche : pentagone 1880610112"/>
           <p:cNvSpPr/>
           <p:nvPr/>
         </p:nvSpPr>
@@ -4871,7 +4871,7 @@
       </p:sp>
       <p:sp>
         <p:nvSpPr>
-          <p:cNvPr id="245461757" name="Flèche : pentagone 446859139"/>
+          <p:cNvPr id="530328058" name="Flèche : pentagone 446859139"/>
           <p:cNvSpPr/>
           <p:nvPr/>
         </p:nvSpPr>
@@ -4916,7 +4916,7 @@
       </p:sp>
       <p:sp>
         <p:nvSpPr>
-          <p:cNvPr id="480488941" name="Flèche : pentagone 2055848356"/>
+          <p:cNvPr id="1275593855" name="Flèche : pentagone 2055848356"/>
           <p:cNvSpPr/>
           <p:nvPr/>
         </p:nvSpPr>
@@ -4961,7 +4961,7 @@
       </p:sp>
       <p:sp>
         <p:nvSpPr>
-          <p:cNvPr id="1597811080" name="Flèche : pentagone 1980093981"/>
+          <p:cNvPr id="532000997" name="Flèche : pentagone 1980093981"/>
           <p:cNvSpPr/>
           <p:nvPr/>
         </p:nvSpPr>
@@ -5006,7 +5006,7 @@
       </p:sp>
       <p:sp>
         <p:nvSpPr>
-          <p:cNvPr id="1838982144" name="Flèche : pentagone 905284374"/>
+          <p:cNvPr id="280149540" name="Flèche : pentagone 905284374"/>
           <p:cNvSpPr/>
           <p:nvPr/>
         </p:nvSpPr>
@@ -5051,7 +5051,7 @@
       </p:sp>
       <p:sp>
         <p:nvSpPr>
-          <p:cNvPr id="683119808" name="ZoneTexte 880464430"/>
+          <p:cNvPr id="348950233" name="ZoneTexte 880464430"/>
           <p:cNvSpPr txBox="1"/>
           <p:nvPr/>
         </p:nvSpPr>
@@ -5232,7 +5232,7 @@
       </p:sp>
       <p:sp>
         <p:nvSpPr>
-          <p:cNvPr id="1024001761" name="ZoneTexte 1302587497"/>
+          <p:cNvPr id="1631389451" name="ZoneTexte 1302587497"/>
           <p:cNvSpPr txBox="1"/>
           <p:nvPr/>
         </p:nvSpPr>
@@ -5530,7 +5530,7 @@
       </p:sp>
       <p:cxnSp>
         <p:nvCxnSpPr>
-          <p:cNvPr id="1953173045" name="Connecteur droit 342798987"/>
+          <p:cNvPr id="1231553012" name="Connecteur droit 342798987"/>
           <p:cNvCxnSpPr/>
           <p:nvPr/>
         </p:nvCxnSpPr>
@@ -5572,7 +5572,7 @@
       </p:cxnSp>
       <p:sp>
         <p:nvSpPr>
-          <p:cNvPr id="307011051" name="ZoneTexte 966486802"/>
+          <p:cNvPr id="400014314" name="ZoneTexte 966486802"/>
           <p:cNvSpPr txBox="1"/>
           <p:nvPr/>
         </p:nvSpPr>
@@ -5612,7 +5612,7 @@
       </p:sp>
       <p:sp>
         <p:nvSpPr>
-          <p:cNvPr id="175349972" name="Rectangle 38344096"/>
+          <p:cNvPr id="1425222587" name="Rectangle 38344096"/>
           <p:cNvSpPr/>
           <p:nvPr/>
         </p:nvSpPr>
@@ -5652,7 +5652,7 @@
       </p:sp>
       <p:sp>
         <p:nvSpPr>
-          <p:cNvPr id="915433835" name="Rectangle 954364527"/>
+          <p:cNvPr id="572675846" name="Rectangle 954364527"/>
           <p:cNvSpPr/>
           <p:nvPr/>
         </p:nvSpPr>
@@ -5692,7 +5692,7 @@
       </p:sp>
       <p:sp>
         <p:nvSpPr>
-          <p:cNvPr id="1679330305" name="ZoneTexte 1527388901"/>
+          <p:cNvPr id="307332978" name="ZoneTexte 1527388901"/>
           <p:cNvSpPr txBox="1"/>
           <p:nvPr/>
         </p:nvSpPr>
@@ -5914,7 +5914,7 @@
       </p:sp>
       <p:sp>
         <p:nvSpPr>
-          <p:cNvPr id="158713603" name="ZoneTexte 1440859034"/>
+          <p:cNvPr id="840280760" name="ZoneTexte 1440859034"/>
           <p:cNvSpPr txBox="1"/>
           <p:nvPr/>
         </p:nvSpPr>
@@ -5965,7 +5965,7 @@
       </p:sp>
       <p:cxnSp>
         <p:nvCxnSpPr>
-          <p:cNvPr id="171899455" name="Connecteur droit 858914340"/>
+          <p:cNvPr id="565996585" name="Connecteur droit 858914340"/>
           <p:cNvCxnSpPr/>
           <p:nvPr/>
         </p:nvCxnSpPr>
@@ -6007,7 +6007,7 @@
       </p:cxnSp>
       <p:sp>
         <p:nvSpPr>
-          <p:cNvPr id="1714298949" name="ZoneTexte 2018177722"/>
+          <p:cNvPr id="431505618" name="ZoneTexte 2018177722"/>
           <p:cNvSpPr txBox="1"/>
           <p:nvPr/>
         </p:nvSpPr>
@@ -6054,7 +6054,7 @@
       </p:sp>
       <p:sp>
         <p:nvSpPr>
-          <p:cNvPr id="309243345" name=""/>
+          <p:cNvPr id="2087407717" name=""/>
           <p:cNvSpPr txBox="1"/>
           <p:nvPr/>
         </p:nvSpPr>
@@ -6156,7 +6156,7 @@
       </p:sp>
       <p:cxnSp>
         <p:nvCxnSpPr>
-          <p:cNvPr id="1222913317" name="Connecteur droit 858914340"/>
+          <p:cNvPr id="650387508" name="Connecteur droit 858914340"/>
           <p:cNvCxnSpPr/>
           <p:nvPr/>
         </p:nvCxnSpPr>
@@ -6198,7 +6198,7 @@
       </p:cxnSp>
       <p:sp>
         <p:nvSpPr>
-          <p:cNvPr id="2038928940" name="ZoneTexte 2018177722"/>
+          <p:cNvPr id="1525447510" name="ZoneTexte 2018177722"/>
           <p:cNvSpPr txBox="1"/>
           <p:nvPr/>
         </p:nvSpPr>
@@ -6256,7 +6256,7 @@
       </p:sp>
       <p:sp>
         <p:nvSpPr>
-          <p:cNvPr id="1885531182" name=""/>
+          <p:cNvPr id="1120277642" name=""/>
           <p:cNvSpPr txBox="1"/>
           <p:nvPr/>
         </p:nvSpPr>
@@ -6564,7 +6564,7 @@
       </p:sp>
       <p:sp>
         <p:nvSpPr>
-          <p:cNvPr id="1263167873" name="ZoneTexte 2021443538"/>
+          <p:cNvPr id="1464651655" name="ZoneTexte 2021443538"/>
           <p:cNvSpPr txBox="1"/>
           <p:nvPr/>
         </p:nvSpPr>
@@ -6648,7 +6648,7 @@
       </p:sp>
       <p:sp>
         <p:nvSpPr>
-          <p:cNvPr id="943489403" name="ZoneTexte 1075280509"/>
+          <p:cNvPr id="2105541748" name="ZoneTexte 1075280509"/>
           <p:cNvSpPr txBox="1"/>
           <p:nvPr/>
         </p:nvSpPr>
@@ -6732,7 +6732,7 @@
       </p:sp>
       <p:sp>
         <p:nvSpPr>
-          <p:cNvPr id="529008478" name="ZoneTexte 824413856"/>
+          <p:cNvPr id="666648485" name="ZoneTexte 824413856"/>
           <p:cNvSpPr txBox="1"/>
           <p:nvPr/>
         </p:nvSpPr>
@@ -6816,7 +6816,7 @@
       </p:sp>
       <p:sp>
         <p:nvSpPr>
-          <p:cNvPr id="1397380084" name="ZoneTexte 1036656844"/>
+          <p:cNvPr id="1050756335" name="ZoneTexte 1036656844"/>
           <p:cNvSpPr txBox="1"/>
           <p:nvPr/>
         </p:nvSpPr>
@@ -6900,7 +6900,7 @@
       </p:sp>
       <p:sp>
         <p:nvSpPr>
-          <p:cNvPr id="839687474" name="ZoneTexte 226284734"/>
+          <p:cNvPr id="1505439446" name="ZoneTexte 226284734"/>
           <p:cNvSpPr txBox="1"/>
           <p:nvPr/>
         </p:nvSpPr>
@@ -6984,7 +6984,7 @@
       </p:sp>
       <p:sp>
         <p:nvSpPr>
-          <p:cNvPr id="1357527218" name="ZoneTexte 162158187"/>
+          <p:cNvPr id="236986378" name="ZoneTexte 162158187"/>
           <p:cNvSpPr txBox="1"/>
           <p:nvPr/>
         </p:nvSpPr>
@@ -7048,7 +7048,7 @@
       </p:sp>
       <p:sp>
         <p:nvSpPr>
-          <p:cNvPr id="1437586853" name="ZoneTexte 1063440096"/>
+          <p:cNvPr id="157562523" name="ZoneTexte 1063440096"/>
           <p:cNvSpPr txBox="1"/>
           <p:nvPr/>
         </p:nvSpPr>
@@ -7132,7 +7132,7 @@
       </p:sp>
       <p:sp>
         <p:nvSpPr>
-          <p:cNvPr id="1494680239" name="ZoneTexte 1564072661"/>
+          <p:cNvPr id="483505165" name="ZoneTexte 1564072661"/>
           <p:cNvSpPr txBox="1"/>
           <p:nvPr/>
         </p:nvSpPr>
@@ -7216,7 +7216,7 @@
       </p:sp>
       <p:sp>
         <p:nvSpPr>
-          <p:cNvPr id="980574017" name="ZoneTexte 2102805411"/>
+          <p:cNvPr id="1633195837" name="ZoneTexte 2102805411"/>
           <p:cNvSpPr txBox="1"/>
           <p:nvPr/>
         </p:nvSpPr>
@@ -7300,7 +7300,7 @@
       </p:sp>
       <p:sp>
         <p:nvSpPr>
-          <p:cNvPr id="2439235" name="ZoneTexte 1094420572"/>
+          <p:cNvPr id="205776909" name="ZoneTexte 1094420572"/>
           <p:cNvSpPr txBox="1"/>
           <p:nvPr/>
         </p:nvSpPr>
@@ -7384,7 +7384,7 @@
       </p:sp>
       <p:sp>
         <p:nvSpPr>
-          <p:cNvPr id="1223928604" name="ZoneTexte 1337742717"/>
+          <p:cNvPr id="395662421" name="ZoneTexte 1337742717"/>
           <p:cNvSpPr txBox="1"/>
           <p:nvPr/>
         </p:nvSpPr>
@@ -7448,7 +7448,7 @@
       </p:sp>
       <p:sp>
         <p:nvSpPr>
-          <p:cNvPr id="1233805135" name="ZoneTexte 1188730172"/>
+          <p:cNvPr id="1418402273" name="ZoneTexte 1188730172"/>
           <p:cNvSpPr txBox="1"/>
           <p:nvPr/>
         </p:nvSpPr>
@@ -7512,7 +7512,7 @@
       </p:sp>
       <p:sp>
         <p:nvSpPr>
-          <p:cNvPr id="696322922" name="Rectangle : avec coins arrondis en haut 1452601499"/>
+          <p:cNvPr id="1387829570" name="Rectangle : avec coins arrondis en haut 1452601499"/>
           <p:cNvSpPr/>
           <p:nvPr/>
         </p:nvSpPr>
@@ -7558,7 +7558,7 @@
       </p:sp>
       <p:sp>
         <p:nvSpPr>
-          <p:cNvPr id="15835667" name="Rectangle : avec coins arrondis en haut 1782110635"/>
+          <p:cNvPr id="1663620339" name="Rectangle : avec coins arrondis en haut 1782110635"/>
           <p:cNvSpPr/>
           <p:nvPr/>
         </p:nvSpPr>
@@ -7604,7 +7604,7 @@
       </p:sp>
       <p:sp>
         <p:nvSpPr>
-          <p:cNvPr id="456984404" name="Rectangle : avec coins arrondis en haut 945118596"/>
+          <p:cNvPr id="777880148" name="Rectangle : avec coins arrondis en haut 945118596"/>
           <p:cNvSpPr/>
           <p:nvPr/>
         </p:nvSpPr>
@@ -7650,7 +7650,7 @@
       </p:sp>
       <p:sp>
         <p:nvSpPr>
-          <p:cNvPr id="594475181" name="Rectangle : avec coins arrondis en haut 500951796"/>
+          <p:cNvPr id="852017424" name="Rectangle : avec coins arrondis en haut 500951796"/>
           <p:cNvSpPr/>
           <p:nvPr/>
         </p:nvSpPr>
@@ -7696,7 +7696,7 @@
       </p:sp>
       <p:sp>
         <p:nvSpPr>
-          <p:cNvPr id="476034441" name="Rectangle : avec coins arrondis en haut 203047490"/>
+          <p:cNvPr id="1931207641" name="Rectangle : avec coins arrondis en haut 203047490"/>
           <p:cNvSpPr/>
           <p:nvPr/>
         </p:nvSpPr>
@@ -7742,7 +7742,7 @@
       </p:sp>
       <p:sp>
         <p:nvSpPr>
-          <p:cNvPr id="1900049112" name="Rectangle : avec coins arrondis en haut 818083012"/>
+          <p:cNvPr id="1525194779" name="Rectangle : avec coins arrondis en haut 818083012"/>
           <p:cNvSpPr/>
           <p:nvPr/>
         </p:nvSpPr>
@@ -7788,7 +7788,7 @@
       </p:sp>
       <p:sp>
         <p:nvSpPr>
-          <p:cNvPr id="1825913145" name="Rectangle : avec coins arrondis en haut 310539005"/>
+          <p:cNvPr id="749041578" name="Rectangle : avec coins arrondis en haut 310539005"/>
           <p:cNvSpPr/>
           <p:nvPr/>
         </p:nvSpPr>
@@ -7834,7 +7834,7 @@
       </p:sp>
       <p:sp>
         <p:nvSpPr>
-          <p:cNvPr id="1782390054" name="Rectangle : avec coins arrondis en haut 844307487"/>
+          <p:cNvPr id="1149877792" name="Rectangle : avec coins arrondis en haut 844307487"/>
           <p:cNvSpPr/>
           <p:nvPr/>
         </p:nvSpPr>
@@ -7880,7 +7880,7 @@
       </p:sp>
       <p:sp>
         <p:nvSpPr>
-          <p:cNvPr id="1253828637" name="Rectangle : avec coins arrondis en haut 1616510051"/>
+          <p:cNvPr id="804795253" name="Rectangle : avec coins arrondis en haut 1616510051"/>
           <p:cNvSpPr/>
           <p:nvPr/>
         </p:nvSpPr>
@@ -7926,7 +7926,7 @@
       </p:sp>
       <p:sp>
         <p:nvSpPr>
-          <p:cNvPr id="1335461062" name="Rectangle : avec coins arrondis en haut 1451691637"/>
+          <p:cNvPr id="1721071030" name="Rectangle : avec coins arrondis en haut 1451691637"/>
           <p:cNvSpPr/>
           <p:nvPr/>
         </p:nvSpPr>
@@ -7972,7 +7972,7 @@
       </p:sp>
       <p:sp>
         <p:nvSpPr>
-          <p:cNvPr id="1262738579" name="Rectangle : avec coins arrondis en haut 260383743"/>
+          <p:cNvPr id="1812871095" name="Rectangle : avec coins arrondis en haut 260383743"/>
           <p:cNvSpPr/>
           <p:nvPr/>
         </p:nvSpPr>
@@ -8018,7 +8018,7 @@
       </p:sp>
       <p:sp>
         <p:nvSpPr>
-          <p:cNvPr id="2101174281" name="Rectangle : avec coins arrondis en haut 1280344391"/>
+          <p:cNvPr id="240314604" name="Rectangle : avec coins arrondis en haut 1280344391"/>
           <p:cNvSpPr/>
           <p:nvPr/>
         </p:nvSpPr>
@@ -8064,7 +8064,7 @@
       </p:sp>
       <p:sp>
         <p:nvSpPr>
-          <p:cNvPr id="1987414675" name=""/>
+          <p:cNvPr id="1680524393" name=""/>
           <p:cNvSpPr txBox="1"/>
           <p:nvPr/>
         </p:nvSpPr>
@@ -8188,7 +8188,7 @@
       </p:sp>
       <p:sp>
         <p:nvSpPr>
-          <p:cNvPr id="1771847032" name="ZoneTexte 1440859034"/>
+          <p:cNvPr id="1736558263" name="ZoneTexte 1440859034"/>
           <p:cNvSpPr txBox="1"/>
           <p:nvPr/>
         </p:nvSpPr>
@@ -8230,7 +8230,7 @@
       </p:sp>
       <p:sp>
         <p:nvSpPr>
-          <p:cNvPr id="833799663" name="ZoneTexte 1440859034"/>
+          <p:cNvPr id="1282742848" name="ZoneTexte 1440859034"/>
           <p:cNvSpPr txBox="1"/>
           <p:nvPr/>
         </p:nvSpPr>
@@ -8269,7 +8269,7 @@
       </p:sp>
       <p:cxnSp>
         <p:nvCxnSpPr>
-          <p:cNvPr id="1546778484" name=""/>
+          <p:cNvPr id="1109749774" name=""/>
           <p:cNvCxnSpPr/>
           <p:nvPr/>
         </p:nvCxnSpPr>
@@ -8308,7 +8308,7 @@
       </p:cxnSp>
       <p:sp>
         <p:nvSpPr>
-          <p:cNvPr id="1841531731" name=""/>
+          <p:cNvPr id="2008912901" name=""/>
           <p:cNvSpPr txBox="1"/>
           <p:nvPr/>
         </p:nvSpPr>
@@ -8472,7 +8472,7 @@
       </p:sp>
       <p:sp>
         <p:nvSpPr>
-          <p:cNvPr id="1511741860" name="Rectangle 954364527"/>
+          <p:cNvPr id="302082494" name="Rectangle 954364527"/>
           <p:cNvSpPr/>
           <p:nvPr/>
         </p:nvSpPr>
@@ -8512,14 +8512,14 @@
       </p:sp>
       <p:sp>
         <p:nvSpPr>
-          <p:cNvPr id="1770068019" name="ZoneTexte 1527388901"/>
+          <p:cNvPr id="1575045288" name="ZoneTexte 1527388901"/>
           <p:cNvSpPr txBox="1"/>
           <p:nvPr/>
         </p:nvSpPr>
         <p:spPr bwMode="auto">
           <a:xfrm flipH="0" flipV="0">
-            <a:off x="4211021" y="563517"/>
-            <a:ext cx="2647791" cy="1463400"/>
+            <a:off x="4211020" y="563517"/>
+            <a:ext cx="2661831" cy="1463400"/>
           </a:xfrm>
           <a:prstGeom prst="rect">
             <a:avLst/>
@@ -8553,7 +8553,7 @@
                 <a:ea typeface="Arial"/>
                 <a:cs typeface="Arial"/>
               </a:rPr>
-              <a:t>Famille</a:t>
+              <a:t>Description</a:t>
             </a:r>
             <a:r>
               <a:rPr lang="fr-FR" sz="1000" b="0" i="0" u="none" strike="noStrike" cap="none" spc="0">
@@ -8591,7 +8591,7 @@
                 <a:ea typeface="Arial"/>
                 <a:cs typeface="Arial"/>
               </a:rPr>
-              <a:t> ___________________________</a:t>
+              <a:t> ________________________</a:t>
             </a:r>
             <a:br>
               <a:rPr lang="fr-FR" sz="1000" b="0" i="0" u="none" strike="noStrike" cap="none" spc="0">
@@ -8629,7 +8629,7 @@
                 <a:ea typeface="Arial"/>
                 <a:cs typeface="Arial"/>
               </a:rPr>
-              <a:t>____________________________________________________________________________________________________________________________________________</a:t>
+              <a:t>___________________________________________________________________________________________________________________________________</a:t>
             </a:r>
             <a:r>
               <a:rPr lang="fr-FR" sz="1000" b="0" i="0" u="none" strike="noStrike" cap="none" spc="0">
@@ -8655,7 +8655,7 @@
                 <a:ea typeface="Arial"/>
                 <a:cs typeface="Arial"/>
               </a:rPr>
-              <a:t>_______________</a:t>
+              <a:t>_____________________________</a:t>
             </a:r>
             <a:endParaRPr lang="fr-FR" sz="1200" b="0" i="0" u="none" strike="noStrike" cap="none" spc="0">
               <a:solidFill>
@@ -8672,7 +8672,7 @@
       </p:sp>
       <p:sp>
         <p:nvSpPr>
-          <p:cNvPr id="1648483621" name="Rectangle 38344096"/>
+          <p:cNvPr id="1664863639" name="Rectangle 38344096"/>
           <p:cNvSpPr/>
           <p:nvPr/>
         </p:nvSpPr>
@@ -8712,7 +8712,7 @@
       </p:sp>
       <p:sp>
         <p:nvSpPr>
-          <p:cNvPr id="1621433458" name=""/>
+          <p:cNvPr id="2087607335" name=""/>
           <p:cNvSpPr/>
           <p:nvPr/>
         </p:nvSpPr>
@@ -8783,7 +8783,7 @@
       </p:sp>
       <p:sp>
         <p:nvSpPr>
-          <p:cNvPr id="918596271" name="Flèche : pentagone 2055848356"/>
+          <p:cNvPr id="710073523" name="Flèche : pentagone 2055848356"/>
           <p:cNvSpPr/>
           <p:nvPr/>
         </p:nvSpPr>
@@ -8828,7 +8828,7 @@
       </p:sp>
       <p:sp>
         <p:nvSpPr>
-          <p:cNvPr id="2006625193" name="Flèche : pentagone 1980093981"/>
+          <p:cNvPr id="1561523880" name="Flèche : pentagone 1980093981"/>
           <p:cNvSpPr/>
           <p:nvPr/>
         </p:nvSpPr>
@@ -8873,7 +8873,7 @@
       </p:sp>
       <p:sp>
         <p:nvSpPr>
-          <p:cNvPr id="1283357712" name="Flèche : pentagone 905284374"/>
+          <p:cNvPr id="2131580251" name="Flèche : pentagone 905284374"/>
           <p:cNvSpPr/>
           <p:nvPr/>
         </p:nvSpPr>
@@ -8918,7 +8918,7 @@
       </p:sp>
       <p:sp>
         <p:nvSpPr>
-          <p:cNvPr id="1826790152" name="ZoneTexte 1440859034"/>
+          <p:cNvPr id="376457569" name="ZoneTexte 1440859034"/>
           <p:cNvSpPr txBox="1"/>
           <p:nvPr/>
         </p:nvSpPr>
@@ -8957,7 +8957,7 @@
       </p:sp>
       <p:sp>
         <p:nvSpPr>
-          <p:cNvPr id="919384225" name="Flèche : pentagone 1880610112"/>
+          <p:cNvPr id="549150966" name="Flèche : pentagone 1880610112"/>
           <p:cNvSpPr/>
           <p:nvPr/>
         </p:nvSpPr>
@@ -9002,7 +9002,7 @@
       </p:sp>
       <p:sp>
         <p:nvSpPr>
-          <p:cNvPr id="1484101489" name="Flèche : pentagone 446859139"/>
+          <p:cNvPr id="1293793439" name="Flèche : pentagone 446859139"/>
           <p:cNvSpPr/>
           <p:nvPr/>
         </p:nvSpPr>
@@ -9047,7 +9047,7 @@
       </p:sp>
       <p:sp>
         <p:nvSpPr>
-          <p:cNvPr id="1169537267" name="Flèche : pentagone 2055848356"/>
+          <p:cNvPr id="729174657" name="Flèche : pentagone 2055848356"/>
           <p:cNvSpPr/>
           <p:nvPr/>
         </p:nvSpPr>
@@ -9092,7 +9092,7 @@
       </p:sp>
       <p:sp>
         <p:nvSpPr>
-          <p:cNvPr id="1556302913" name="Flèche : pentagone 1980093981"/>
+          <p:cNvPr id="412715580" name="Flèche : pentagone 1980093981"/>
           <p:cNvSpPr/>
           <p:nvPr/>
         </p:nvSpPr>
@@ -9137,7 +9137,7 @@
       </p:sp>
       <p:sp>
         <p:nvSpPr>
-          <p:cNvPr id="1647564183" name="Flèche : pentagone 905284374"/>
+          <p:cNvPr id="586734789" name="Flèche : pentagone 905284374"/>
           <p:cNvSpPr/>
           <p:nvPr/>
         </p:nvSpPr>
@@ -9182,7 +9182,7 @@
       </p:sp>
       <p:sp>
         <p:nvSpPr>
-          <p:cNvPr id="647055102" name="ZoneTexte 1440859034"/>
+          <p:cNvPr id="2129701540" name="ZoneTexte 1440859034"/>
           <p:cNvSpPr txBox="1"/>
           <p:nvPr/>
         </p:nvSpPr>
@@ -9221,7 +9221,7 @@
       </p:sp>
       <p:sp>
         <p:nvSpPr>
-          <p:cNvPr id="1131998188" name="Flèche : pentagone 2055848356"/>
+          <p:cNvPr id="252799845" name="Flèche : pentagone 2055848356"/>
           <p:cNvSpPr/>
           <p:nvPr/>
         </p:nvSpPr>
@@ -9266,7 +9266,7 @@
       </p:sp>
       <p:sp>
         <p:nvSpPr>
-          <p:cNvPr id="792020103" name="Flèche : pentagone 1980093981"/>
+          <p:cNvPr id="2114788804" name="Flèche : pentagone 1980093981"/>
           <p:cNvSpPr/>
           <p:nvPr/>
         </p:nvSpPr>
@@ -9311,7 +9311,7 @@
       </p:sp>
       <p:sp>
         <p:nvSpPr>
-          <p:cNvPr id="1274355136" name="Flèche : pentagone 905284374"/>
+          <p:cNvPr id="1594626648" name="Flèche : pentagone 905284374"/>
           <p:cNvSpPr/>
           <p:nvPr/>
         </p:nvSpPr>
@@ -9356,7 +9356,7 @@
       </p:sp>
       <p:sp>
         <p:nvSpPr>
-          <p:cNvPr id="1702861551" name="ZoneTexte 1440859034"/>
+          <p:cNvPr id="879529534" name="ZoneTexte 1440859034"/>
           <p:cNvSpPr txBox="1"/>
           <p:nvPr/>
         </p:nvSpPr>
@@ -9395,7 +9395,7 @@
       </p:sp>
       <p:sp>
         <p:nvSpPr>
-          <p:cNvPr id="547872299" name=""/>
+          <p:cNvPr id="1781873730" name=""/>
           <p:cNvSpPr txBox="1"/>
           <p:nvPr/>
         </p:nvSpPr>
@@ -9559,7 +9559,7 @@
       </p:sp>
       <p:sp>
         <p:nvSpPr>
-          <p:cNvPr id="98109983" name=""/>
+          <p:cNvPr id="97868813" name=""/>
           <p:cNvSpPr txBox="1"/>
           <p:nvPr/>
         </p:nvSpPr>
@@ -9723,7 +9723,7 @@
       </p:sp>
       <p:sp>
         <p:nvSpPr>
-          <p:cNvPr id="2022483070" name=""/>
+          <p:cNvPr id="349841803" name=""/>
           <p:cNvSpPr txBox="1"/>
           <p:nvPr/>
         </p:nvSpPr>
@@ -9920,7 +9920,7 @@
       </p:grpSpPr>
       <p:sp>
         <p:nvSpPr>
-          <p:cNvPr id="765823137" name=""/>
+          <p:cNvPr id="745459347" name=""/>
           <p:cNvSpPr/>
           <p:nvPr/>
         </p:nvSpPr>
@@ -9963,7 +9963,7 @@
       </p:sp>
       <p:sp>
         <p:nvSpPr>
-          <p:cNvPr id="733926686" name=""/>
+          <p:cNvPr id="672758515" name=""/>
           <p:cNvSpPr txBox="1"/>
           <p:nvPr/>
         </p:nvSpPr>
@@ -10029,7 +10029,7 @@
       </p:sp>
       <p:cxnSp>
         <p:nvCxnSpPr>
-          <p:cNvPr id="1716083046" name="Connecteur droit 1568760680"/>
+          <p:cNvPr id="1899523897" name="Connecteur droit 1568760680"/>
           <p:cNvCxnSpPr/>
           <p:nvPr/>
         </p:nvCxnSpPr>
@@ -10071,7 +10071,7 @@
       </p:cxnSp>
       <p:sp>
         <p:nvSpPr>
-          <p:cNvPr id="1736165615" name="ZoneTexte 1868728971"/>
+          <p:cNvPr id="351017717" name="ZoneTexte 1868728971"/>
           <p:cNvSpPr txBox="1"/>
           <p:nvPr/>
         </p:nvSpPr>
@@ -10111,7 +10111,7 @@
       </p:sp>
       <p:cxnSp>
         <p:nvCxnSpPr>
-          <p:cNvPr id="508272746" name="Connecteur droit 806540798"/>
+          <p:cNvPr id="1525835065" name="Connecteur droit 806540798"/>
           <p:cNvCxnSpPr/>
           <p:nvPr/>
         </p:nvCxnSpPr>
@@ -10153,7 +10153,7 @@
       </p:cxnSp>
       <p:sp>
         <p:nvSpPr>
-          <p:cNvPr id="341296339" name="ZoneTexte 406616703"/>
+          <p:cNvPr id="809570207" name="ZoneTexte 406616703"/>
           <p:cNvSpPr txBox="1"/>
           <p:nvPr/>
         </p:nvSpPr>
@@ -10193,7 +10193,7 @@
       </p:sp>
       <p:sp>
         <p:nvSpPr>
-          <p:cNvPr id="92368441" name="ZoneTexte 1302587497"/>
+          <p:cNvPr id="416149107" name="ZoneTexte 1302587497"/>
           <p:cNvSpPr txBox="1"/>
           <p:nvPr/>
         </p:nvSpPr>
@@ -10397,7 +10397,7 @@
       </p:sp>
       <p:sp>
         <p:nvSpPr>
-          <p:cNvPr id="1882574711" name="Rectangle 38344096"/>
+          <p:cNvPr id="831548298" name="Rectangle 38344096"/>
           <p:cNvSpPr/>
           <p:nvPr/>
         </p:nvSpPr>
@@ -10437,7 +10437,7 @@
       </p:sp>
       <p:sp>
         <p:nvSpPr>
-          <p:cNvPr id="368200353" name="ZoneTexte 1075280509"/>
+          <p:cNvPr id="1639296341" name="ZoneTexte 1075280509"/>
           <p:cNvSpPr txBox="1"/>
           <p:nvPr/>
         </p:nvSpPr>
@@ -10510,7 +10510,7 @@
       </p:sp>
       <p:sp>
         <p:nvSpPr>
-          <p:cNvPr id="1231509945" name="ZoneTexte 226284734"/>
+          <p:cNvPr id="1367129143" name="ZoneTexte 226284734"/>
           <p:cNvSpPr txBox="1"/>
           <p:nvPr/>
         </p:nvSpPr>
@@ -10583,7 +10583,7 @@
       </p:sp>
       <p:sp>
         <p:nvSpPr>
-          <p:cNvPr id="112280064" name="ZoneTexte 162158187"/>
+          <p:cNvPr id="1448862591" name="ZoneTexte 162158187"/>
           <p:cNvSpPr txBox="1"/>
           <p:nvPr/>
         </p:nvSpPr>
@@ -10633,7 +10633,7 @@
       </p:sp>
       <p:sp>
         <p:nvSpPr>
-          <p:cNvPr id="1681977049" name="Rectangle : avec coins arrondis en haut 1452601499"/>
+          <p:cNvPr id="462678969" name="Rectangle : avec coins arrondis en haut 1452601499"/>
           <p:cNvSpPr/>
           <p:nvPr/>
         </p:nvSpPr>
@@ -10676,7 +10676,7 @@
       </p:sp>
       <p:sp>
         <p:nvSpPr>
-          <p:cNvPr id="679382646" name="Rectangle : avec coins arrondis en haut 1782110635"/>
+          <p:cNvPr id="1049181245" name="Rectangle : avec coins arrondis en haut 1782110635"/>
           <p:cNvSpPr/>
           <p:nvPr/>
         </p:nvSpPr>
@@ -10722,7 +10722,7 @@
       </p:sp>
       <p:sp>
         <p:nvSpPr>
-          <p:cNvPr id="990505206" name="Rectangle : avec coins arrondis en haut 945118596"/>
+          <p:cNvPr id="483781736" name="Rectangle : avec coins arrondis en haut 945118596"/>
           <p:cNvSpPr/>
           <p:nvPr/>
         </p:nvSpPr>
@@ -10768,7 +10768,7 @@
       </p:sp>
       <p:sp>
         <p:nvSpPr>
-          <p:cNvPr id="1036317823" name=""/>
+          <p:cNvPr id="488272194" name=""/>
           <p:cNvSpPr/>
           <p:nvPr/>
         </p:nvSpPr>
@@ -10810,7 +10810,7 @@
       </p:sp>
       <p:sp>
         <p:nvSpPr>
-          <p:cNvPr id="1835092931" name=""/>
+          <p:cNvPr id="757050716" name=""/>
           <p:cNvSpPr txBox="1"/>
           <p:nvPr/>
         </p:nvSpPr>
@@ -10850,7 +10850,7 @@
       </p:sp>
       <p:sp>
         <p:nvSpPr>
-          <p:cNvPr id="1702721262" name=""/>
+          <p:cNvPr id="34923930" name=""/>
           <p:cNvSpPr/>
           <p:nvPr/>
         </p:nvSpPr>
@@ -10921,7 +10921,7 @@
       </p:sp>
       <p:sp>
         <p:nvSpPr>
-          <p:cNvPr id="1055369819" name=""/>
+          <p:cNvPr id="1074806287" name=""/>
           <p:cNvSpPr txBox="1"/>
           <p:nvPr/>
         </p:nvSpPr>
@@ -10958,7 +10958,7 @@
       </p:sp>
       <p:sp>
         <p:nvSpPr>
-          <p:cNvPr id="1713152666" name=""/>
+          <p:cNvPr id="987266329" name=""/>
           <p:cNvSpPr txBox="1"/>
           <p:nvPr/>
         </p:nvSpPr>
@@ -11192,7 +11192,7 @@
       </p:sp>
       <p:sp>
         <p:nvSpPr>
-          <p:cNvPr id="1800214381" name=""/>
+          <p:cNvPr id="1753943238" name=""/>
           <p:cNvSpPr txBox="1"/>
           <p:nvPr/>
         </p:nvSpPr>
@@ -11471,7 +11471,7 @@
       </p:sp>
       <p:sp>
         <p:nvSpPr>
-          <p:cNvPr id="1291377294" name=""/>
+          <p:cNvPr id="1870179182" name=""/>
           <p:cNvSpPr txBox="1"/>
           <p:nvPr/>
         </p:nvSpPr>
@@ -11862,7 +11862,7 @@
       </p:sp>
       <p:sp>
         <p:nvSpPr>
-          <p:cNvPr id="1669090233" name=""/>
+          <p:cNvPr id="2001836314" name=""/>
           <p:cNvSpPr txBox="1"/>
           <p:nvPr/>
         </p:nvSpPr>
@@ -12253,7 +12253,7 @@
       </p:sp>
       <p:sp>
         <p:nvSpPr>
-          <p:cNvPr id="1224306216" name=""/>
+          <p:cNvPr id="1273344706" name=""/>
           <p:cNvSpPr txBox="1"/>
           <p:nvPr/>
         </p:nvSpPr>
@@ -12644,7 +12644,7 @@
       </p:sp>
       <p:sp>
         <p:nvSpPr>
-          <p:cNvPr id="104760916" name=""/>
+          <p:cNvPr id="1606519231" name=""/>
           <p:cNvSpPr txBox="1"/>
           <p:nvPr/>
         </p:nvSpPr>
@@ -13035,7 +13035,7 @@
       </p:sp>
       <p:sp>
         <p:nvSpPr>
-          <p:cNvPr id="602085158" name=""/>
+          <p:cNvPr id="1804265967" name=""/>
           <p:cNvSpPr txBox="1"/>
           <p:nvPr/>
         </p:nvSpPr>
@@ -13426,7 +13426,7 @@
       </p:sp>
       <p:sp>
         <p:nvSpPr>
-          <p:cNvPr id="5615192" name=""/>
+          <p:cNvPr id="1005744922" name=""/>
           <p:cNvSpPr txBox="1"/>
           <p:nvPr/>
         </p:nvSpPr>
@@ -13817,7 +13817,7 @@
       </p:sp>
       <p:sp>
         <p:nvSpPr>
-          <p:cNvPr id="1549551152" name=""/>
+          <p:cNvPr id="147437140" name=""/>
           <p:cNvSpPr txBox="1"/>
           <p:nvPr/>
         </p:nvSpPr>
@@ -14208,7 +14208,7 @@
       </p:sp>
       <p:sp>
         <p:nvSpPr>
-          <p:cNvPr id="812538803" name=""/>
+          <p:cNvPr id="960400657" name=""/>
           <p:cNvSpPr txBox="1"/>
           <p:nvPr/>
         </p:nvSpPr>
@@ -14599,7 +14599,7 @@
       </p:sp>
       <p:sp>
         <p:nvSpPr>
-          <p:cNvPr id="550666284" name=""/>
+          <p:cNvPr id="1632680430" name=""/>
           <p:cNvSpPr txBox="1"/>
           <p:nvPr/>
         </p:nvSpPr>
@@ -14990,7 +14990,7 @@
       </p:sp>
       <p:sp>
         <p:nvSpPr>
-          <p:cNvPr id="232403865" name=""/>
+          <p:cNvPr id="868709823" name=""/>
           <p:cNvSpPr txBox="1"/>
           <p:nvPr/>
         </p:nvSpPr>
@@ -15381,7 +15381,7 @@
       </p:sp>
       <p:sp>
         <p:nvSpPr>
-          <p:cNvPr id="1170378524" name=""/>
+          <p:cNvPr id="923259890" name=""/>
           <p:cNvSpPr txBox="1"/>
           <p:nvPr/>
         </p:nvSpPr>
@@ -15772,7 +15772,7 @@
       </p:sp>
       <p:sp>
         <p:nvSpPr>
-          <p:cNvPr id="905107901" name=""/>
+          <p:cNvPr id="49310510" name=""/>
           <p:cNvSpPr txBox="1"/>
           <p:nvPr/>
         </p:nvSpPr>
@@ -16163,7 +16163,7 @@
       </p:sp>
       <p:sp>
         <p:nvSpPr>
-          <p:cNvPr id="347069759" name=""/>
+          <p:cNvPr id="1387986339" name=""/>
           <p:cNvSpPr txBox="1"/>
           <p:nvPr/>
         </p:nvSpPr>
@@ -16554,7 +16554,7 @@
       </p:sp>
       <p:sp>
         <p:nvSpPr>
-          <p:cNvPr id="30812023" name=""/>
+          <p:cNvPr id="489404281" name=""/>
           <p:cNvSpPr txBox="1"/>
           <p:nvPr/>
         </p:nvSpPr>
@@ -16945,7 +16945,7 @@
       </p:sp>
       <p:sp>
         <p:nvSpPr>
-          <p:cNvPr id="1376435141" name=""/>
+          <p:cNvPr id="1746874062" name=""/>
           <p:cNvSpPr txBox="1"/>
           <p:nvPr/>
         </p:nvSpPr>
@@ -17098,6 +17098,154 @@
               <a:t> permet de réduire la valeur d’hostilité, s’il existe une affinité en amitié.</a:t>
             </a:r>
             <a:endParaRPr/>
+          </a:p>
+        </p:txBody>
+      </p:sp>
+      <p:cxnSp>
+        <p:nvCxnSpPr>
+          <p:cNvPr id="239527333" name="Connecteur droit 806540798"/>
+          <p:cNvCxnSpPr/>
+          <p:nvPr/>
+        </p:nvCxnSpPr>
+        <p:spPr bwMode="auto">
+          <a:xfrm flipV="1">
+            <a:off x="2559" y="8270789"/>
+            <a:ext cx="6924672" cy="0"/>
+          </a:xfrm>
+          <a:prstGeom prst="line">
+            <a:avLst/>
+          </a:prstGeom>
+          <a:ln w="76199" cap="flat" cmpd="sng" algn="ctr">
+            <a:solidFill>
+              <a:schemeClr val="bg1">
+                <a:lumMod val="74901"/>
+                <a:alpha val="99999"/>
+              </a:schemeClr>
+            </a:solidFill>
+            <a:prstDash val="solid"/>
+            <a:miter lim="800000"/>
+          </a:ln>
+        </p:spPr>
+        <p:style>
+          <a:lnRef idx="1">
+            <a:schemeClr val="accent1">
+              <a:shade val="50000"/>
+            </a:schemeClr>
+          </a:lnRef>
+          <a:fillRef idx="0">
+            <a:schemeClr val="accent1"/>
+          </a:fillRef>
+          <a:effectRef idx="0">
+            <a:schemeClr val="accent1"/>
+          </a:effectRef>
+          <a:fontRef idx="minor">
+            <a:schemeClr val="tx1"/>
+          </a:fontRef>
+        </p:style>
+      </p:cxnSp>
+      <p:sp>
+        <p:nvSpPr>
+          <p:cNvPr id="295113412" name="ZoneTexte 406616703"/>
+          <p:cNvSpPr txBox="1"/>
+          <p:nvPr/>
+        </p:nvSpPr>
+        <p:spPr bwMode="auto">
+          <a:xfrm flipH="0" flipV="0">
+            <a:off x="47485" y="8087728"/>
+            <a:ext cx="3374659" cy="366119"/>
+          </a:xfrm>
+          <a:prstGeom prst="rect">
+            <a:avLst/>
+          </a:prstGeom>
+          <a:noFill/>
+        </p:spPr>
+        <p:txBody>
+          <a:bodyPr vertOverflow="overflow" horzOverflow="overflow" vert="horz" wrap="square" lIns="91440" tIns="45720" rIns="91440" bIns="45720" numCol="1" spcCol="0" rtlCol="0" fromWordArt="0" anchor="t" anchorCtr="0" forceAA="0" compatLnSpc="0">
+            <a:spAutoFit/>
+          </a:bodyPr>
+          <a:lstStyle/>
+          <a:p>
+            <a:pPr algn="l">
+              <a:defRPr/>
+            </a:pPr>
+            <a:r>
+              <a:rPr sz="1800" b="0">
+                <a:solidFill>
+                  <a:schemeClr val="tx1">
+                    <a:lumMod val="75000"/>
+                    <a:lumOff val="25000"/>
+                  </a:schemeClr>
+                </a:solidFill>
+              </a:rPr>
+              <a:t>Cadre familial</a:t>
+            </a:r>
+            <a:endParaRPr/>
+          </a:p>
+        </p:txBody>
+      </p:sp>
+      <p:sp>
+        <p:nvSpPr>
+          <p:cNvPr id="1008767577" name=""/>
+          <p:cNvSpPr txBox="1"/>
+          <p:nvPr/>
+        </p:nvSpPr>
+        <p:spPr bwMode="auto">
+          <a:xfrm rot="0" flipH="0" flipV="0">
+            <a:off x="58495" y="8374473"/>
+            <a:ext cx="6719196" cy="1463400"/>
+          </a:xfrm>
+          <a:prstGeom prst="rect">
+            <a:avLst/>
+          </a:prstGeom>
+          <a:noFill/>
+        </p:spPr>
+        <p:txBody>
+          <a:bodyPr vertOverflow="overflow" horzOverflow="overflow" vert="horz" wrap="square" lIns="91440" tIns="45720" rIns="91440" bIns="45720" numCol="1" spcCol="0" rtlCol="0" fromWordArt="0" anchor="t" anchorCtr="0" forceAA="0" upright="0" compatLnSpc="0">
+            <a:spAutoFit/>
+          </a:bodyPr>
+          <a:p>
+            <a:pPr algn="l">
+              <a:lnSpc>
+                <a:spcPct val="150000"/>
+              </a:lnSpc>
+              <a:defRPr/>
+            </a:pPr>
+            <a:r>
+              <a:rPr lang="fr-FR" sz="1200" b="0" i="0" u="none" strike="noStrike" cap="none" spc="0">
+                <a:solidFill>
+                  <a:schemeClr val="bg2">
+                    <a:lumMod val="90000"/>
+                  </a:schemeClr>
+                </a:solidFill>
+                <a:latin typeface="Arial"/>
+                <a:ea typeface="Arial"/>
+                <a:cs typeface="Arial"/>
+              </a:rPr>
+              <a:t>_____________________________________________________________</a:t>
+            </a:r>
+            <a:r>
+              <a:rPr lang="fr-FR" sz="1200" b="0" i="0" u="none" strike="noStrike" cap="none" spc="0">
+                <a:solidFill>
+                  <a:schemeClr val="bg2">
+                    <a:lumMod val="90000"/>
+                  </a:schemeClr>
+                </a:solidFill>
+                <a:latin typeface="Arial"/>
+                <a:ea typeface="Arial"/>
+                <a:cs typeface="Arial"/>
+              </a:rPr>
+              <a:t>____________________________________________________________________________________________________________________________________________________________________________________________________________________________________________________________________________________________________________________________________</a:t>
+            </a:r>
+            <a:endParaRPr sz="1200" b="0" i="0" u="none" strike="noStrike" cap="none" spc="0">
+              <a:solidFill>
+                <a:schemeClr val="bg2">
+                  <a:lumMod val="90000"/>
+                </a:schemeClr>
+              </a:solidFill>
+              <a:latin typeface="Arial"/>
+              <a:ea typeface="Arial"/>
+              <a:cs typeface="Arial"/>
+            </a:endParaRPr>
           </a:p>
         </p:txBody>
       </p:sp>
@@ -17136,7 +17284,7 @@
       </p:grpSpPr>
       <p:cxnSp>
         <p:nvCxnSpPr>
-          <p:cNvPr id="390625883" name="Connecteur droit 266926011"/>
+          <p:cNvPr id="1600989133" name="Connecteur droit 266926011"/>
           <p:cNvCxnSpPr/>
           <p:nvPr/>
         </p:nvCxnSpPr>
@@ -17178,7 +17326,7 @@
       </p:cxnSp>
       <p:sp>
         <p:nvSpPr>
-          <p:cNvPr id="50106674" name="ZoneTexte 1043763612"/>
+          <p:cNvPr id="412049831" name="ZoneTexte 1043763612"/>
           <p:cNvSpPr txBox="1"/>
           <p:nvPr/>
         </p:nvSpPr>
@@ -17218,7 +17366,7 @@
       </p:sp>
       <p:cxnSp>
         <p:nvCxnSpPr>
-          <p:cNvPr id="937358110" name="Connecteur droit 1586327141"/>
+          <p:cNvPr id="1923723912" name="Connecteur droit 1586327141"/>
           <p:cNvCxnSpPr/>
           <p:nvPr/>
         </p:nvCxnSpPr>
@@ -17261,7 +17409,7 @@
       </p:cxnSp>
       <p:sp>
         <p:nvSpPr>
-          <p:cNvPr id="1352745079" name="ZoneTexte 1691387439"/>
+          <p:cNvPr id="596191006" name="ZoneTexte 1691387439"/>
           <p:cNvSpPr txBox="1"/>
           <p:nvPr/>
         </p:nvSpPr>
@@ -17301,7 +17449,7 @@
       </p:sp>
       <p:cxnSp>
         <p:nvCxnSpPr>
-          <p:cNvPr id="1903968949" name="Connecteur droit 1743707585"/>
+          <p:cNvPr id="716979864" name="Connecteur droit 1743707585"/>
           <p:cNvCxnSpPr/>
           <p:nvPr/>
         </p:nvCxnSpPr>
@@ -17344,7 +17492,7 @@
       </p:cxnSp>
       <p:sp>
         <p:nvSpPr>
-          <p:cNvPr id="1888165697" name="ZoneTexte 1503300725"/>
+          <p:cNvPr id="1789531004" name="ZoneTexte 1503300725"/>
           <p:cNvSpPr txBox="1"/>
           <p:nvPr/>
         </p:nvSpPr>
@@ -17426,7 +17574,7 @@
       </p:sp>
       <p:sp>
         <p:nvSpPr>
-          <p:cNvPr id="1593228026" name="Rectangle : avec coins arrondis en haut 1151560973"/>
+          <p:cNvPr id="1213771974" name="Rectangle : avec coins arrondis en haut 1151560973"/>
           <p:cNvSpPr/>
           <p:nvPr/>
         </p:nvSpPr>
@@ -17472,7 +17620,7 @@
       </p:sp>
       <p:sp>
         <p:nvSpPr>
-          <p:cNvPr id="1516016677" name="Flèche : pentagone 1610574377"/>
+          <p:cNvPr id="1572621845" name="Flèche : pentagone 1610574377"/>
           <p:cNvSpPr/>
           <p:nvPr/>
         </p:nvSpPr>
@@ -17517,7 +17665,7 @@
       </p:sp>
       <p:sp>
         <p:nvSpPr>
-          <p:cNvPr id="2015225214" name="Flèche : pentagone 463861063"/>
+          <p:cNvPr id="51520171" name="Flèche : pentagone 463861063"/>
           <p:cNvSpPr/>
           <p:nvPr/>
         </p:nvSpPr>
@@ -17562,7 +17710,7 @@
       </p:sp>
       <p:sp>
         <p:nvSpPr>
-          <p:cNvPr id="1580974093" name="Flèche : pentagone 272004907"/>
+          <p:cNvPr id="1462614581" name="Flèche : pentagone 272004907"/>
           <p:cNvSpPr/>
           <p:nvPr/>
         </p:nvSpPr>
@@ -17607,7 +17755,7 @@
       </p:sp>
       <p:sp>
         <p:nvSpPr>
-          <p:cNvPr id="112264916" name="Flèche : pentagone 28174069"/>
+          <p:cNvPr id="1333871741" name="Flèche : pentagone 28174069"/>
           <p:cNvSpPr/>
           <p:nvPr/>
         </p:nvSpPr>
@@ -17652,7 +17800,7 @@
       </p:sp>
       <p:sp>
         <p:nvSpPr>
-          <p:cNvPr id="1343983074" name="Flèche : pentagone 978127220"/>
+          <p:cNvPr id="1872155" name="Flèche : pentagone 978127220"/>
           <p:cNvSpPr/>
           <p:nvPr/>
         </p:nvSpPr>
@@ -17697,7 +17845,7 @@
       </p:sp>
       <p:sp>
         <p:nvSpPr>
-          <p:cNvPr id="1741671596" name="ZoneTexte 1693594013"/>
+          <p:cNvPr id="927392393" name="ZoneTexte 1693594013"/>
           <p:cNvSpPr txBox="1"/>
           <p:nvPr/>
         </p:nvSpPr>
@@ -18026,7 +18174,7 @@
       </p:sp>
       <p:sp>
         <p:nvSpPr>
-          <p:cNvPr id="499297223" name="ZoneTexte 1975797288"/>
+          <p:cNvPr id="547078835" name="ZoneTexte 1975797288"/>
           <p:cNvSpPr txBox="1"/>
           <p:nvPr/>
         </p:nvSpPr>
@@ -18066,7 +18214,7 @@
       </p:sp>
       <p:sp>
         <p:nvSpPr>
-          <p:cNvPr id="536933130" name="ZoneTexte 2064865984"/>
+          <p:cNvPr id="1845168150" name="ZoneTexte 2064865984"/>
           <p:cNvSpPr txBox="1"/>
           <p:nvPr/>
         </p:nvSpPr>
@@ -18331,7 +18479,7 @@
       </p:sp>
       <p:sp>
         <p:nvSpPr>
-          <p:cNvPr id="53427495" name="ZoneTexte 1387173154"/>
+          <p:cNvPr id="730661819" name="ZoneTexte 1387173154"/>
           <p:cNvSpPr txBox="1"/>
           <p:nvPr/>
         </p:nvSpPr>
@@ -18655,7 +18803,7 @@
       </p:sp>
       <p:sp>
         <p:nvSpPr>
-          <p:cNvPr id="878711213" name="ZoneTexte 523755832"/>
+          <p:cNvPr id="1044739637" name="ZoneTexte 523755832"/>
           <p:cNvSpPr txBox="1"/>
           <p:nvPr/>
         </p:nvSpPr>
@@ -19068,7 +19216,7 @@
       </p:sp>
       <p:cxnSp>
         <p:nvCxnSpPr>
-          <p:cNvPr id="1886212738" name="Connecteur droit 2085669542"/>
+          <p:cNvPr id="621172540" name="Connecteur droit 2085669542"/>
           <p:cNvCxnSpPr/>
           <p:nvPr/>
         </p:nvCxnSpPr>
@@ -19111,7 +19259,7 @@
       </p:cxnSp>
       <p:sp>
         <p:nvSpPr>
-          <p:cNvPr id="545087177" name="ZoneTexte 34398067"/>
+          <p:cNvPr id="1042636605" name="ZoneTexte 34398067"/>
           <p:cNvSpPr txBox="1"/>
           <p:nvPr/>
         </p:nvSpPr>
@@ -19165,7 +19313,7 @@
       </p:sp>
       <p:sp>
         <p:nvSpPr>
-          <p:cNvPr id="424787730" name="ZoneTexte 273581705"/>
+          <p:cNvPr id="1029583738" name="ZoneTexte 273581705"/>
           <p:cNvSpPr txBox="1"/>
           <p:nvPr/>
         </p:nvSpPr>
@@ -19463,7 +19611,7 @@
       </p:sp>
       <p:sp>
         <p:nvSpPr>
-          <p:cNvPr id="2063165263" name="ZoneTexte 1727393832"/>
+          <p:cNvPr id="1428185201" name="ZoneTexte 1727393832"/>
           <p:cNvSpPr txBox="1"/>
           <p:nvPr/>
         </p:nvSpPr>
@@ -19505,7 +19653,7 @@
       </p:sp>
       <p:sp>
         <p:nvSpPr>
-          <p:cNvPr id="1526858433" name="ZoneTexte 504516740"/>
+          <p:cNvPr id="834982786" name="ZoneTexte 504516740"/>
           <p:cNvSpPr txBox="1"/>
           <p:nvPr/>
         </p:nvSpPr>
@@ -19547,7 +19695,7 @@
       </p:sp>
       <p:sp>
         <p:nvSpPr>
-          <p:cNvPr id="862610322" name="ZoneTexte 1"/>
+          <p:cNvPr id="166140385" name="ZoneTexte 1"/>
           <p:cNvSpPr txBox="1"/>
           <p:nvPr/>
         </p:nvSpPr>
@@ -21010,7 +21158,7 @@
       </p:sp>
       <p:sp>
         <p:nvSpPr>
-          <p:cNvPr id="1993181979" name="ZoneTexte 2"/>
+          <p:cNvPr id="2134778671" name="ZoneTexte 2"/>
           <p:cNvSpPr txBox="1"/>
           <p:nvPr/>
         </p:nvSpPr>
@@ -21548,7 +21696,7 @@
       </p:sp>
       <p:sp>
         <p:nvSpPr>
-          <p:cNvPr id="1383403756" name=""/>
+          <p:cNvPr id="753438764" name=""/>
           <p:cNvSpPr/>
           <p:nvPr/>
         </p:nvSpPr>
@@ -21588,7 +21736,7 @@
       </p:sp>
       <p:sp>
         <p:nvSpPr>
-          <p:cNvPr id="1521795398" name="Rectangle : avec coins arrondis en haut 1151560973"/>
+          <p:cNvPr id="969115684" name="Rectangle : avec coins arrondis en haut 1151560973"/>
           <p:cNvSpPr/>
           <p:nvPr/>
         </p:nvSpPr>
@@ -21636,7 +21784,7 @@
       </p:sp>
       <p:sp>
         <p:nvSpPr>
-          <p:cNvPr id="2016689328" name=""/>
+          <p:cNvPr id="598367499" name=""/>
           <p:cNvSpPr/>
           <p:nvPr/>
         </p:nvSpPr>
@@ -21676,7 +21824,7 @@
       </p:sp>
       <p:sp>
         <p:nvSpPr>
-          <p:cNvPr id="457541994" name="Rectangle : avec coins arrondis en haut 1151560973"/>
+          <p:cNvPr id="914848757" name="Rectangle : avec coins arrondis en haut 1151560973"/>
           <p:cNvSpPr/>
           <p:nvPr/>
         </p:nvSpPr>
@@ -21724,7 +21872,7 @@
       </p:sp>
       <p:sp>
         <p:nvSpPr>
-          <p:cNvPr id="315764685" name=""/>
+          <p:cNvPr id="504333857" name=""/>
           <p:cNvSpPr/>
           <p:nvPr/>
         </p:nvSpPr>
@@ -21764,7 +21912,7 @@
       </p:sp>
       <p:sp>
         <p:nvSpPr>
-          <p:cNvPr id="95926410" name="Rectangle : avec coins arrondis en haut 1151560973"/>
+          <p:cNvPr id="674466153" name="Rectangle : avec coins arrondis en haut 1151560973"/>
           <p:cNvSpPr/>
           <p:nvPr/>
         </p:nvSpPr>
@@ -21812,7 +21960,7 @@
       </p:sp>
       <p:sp>
         <p:nvSpPr>
-          <p:cNvPr id="540881942" name=""/>
+          <p:cNvPr id="2098064800" name=""/>
           <p:cNvSpPr txBox="1"/>
           <p:nvPr/>
         </p:nvSpPr>
@@ -21877,7 +22025,7 @@
       </p:sp>
       <p:sp>
         <p:nvSpPr>
-          <p:cNvPr id="683833473" name=""/>
+          <p:cNvPr id="628801010" name=""/>
           <p:cNvSpPr txBox="1"/>
           <p:nvPr/>
         </p:nvSpPr>
@@ -22006,7 +22154,7 @@
       </p:sp>
       <p:sp>
         <p:nvSpPr>
-          <p:cNvPr id="1114201301" name=""/>
+          <p:cNvPr id="1578886863" name=""/>
           <p:cNvSpPr/>
           <p:nvPr/>
         </p:nvSpPr>
@@ -22077,7 +22225,7 @@
       </p:sp>
       <p:sp>
         <p:nvSpPr>
-          <p:cNvPr id="1095252034" name="Flèche : pentagone 1610574377"/>
+          <p:cNvPr id="1984545742" name="Flèche : pentagone 1610574377"/>
           <p:cNvSpPr/>
           <p:nvPr/>
         </p:nvSpPr>
@@ -22122,7 +22270,7 @@
       </p:sp>
       <p:sp>
         <p:nvSpPr>
-          <p:cNvPr id="805199772" name="Flèche : pentagone 463861063"/>
+          <p:cNvPr id="754765507" name="Flèche : pentagone 463861063"/>
           <p:cNvSpPr/>
           <p:nvPr/>
         </p:nvSpPr>
@@ -22167,7 +22315,7 @@
       </p:sp>
       <p:sp>
         <p:nvSpPr>
-          <p:cNvPr id="792197231" name="Flèche : pentagone 272004907"/>
+          <p:cNvPr id="964357191" name="Flèche : pentagone 272004907"/>
           <p:cNvSpPr/>
           <p:nvPr/>
         </p:nvSpPr>
@@ -22245,7 +22393,7 @@
       </p:grpSpPr>
       <p:cxnSp>
         <p:nvCxnSpPr>
-          <p:cNvPr id="1541796583" name="Connecteur droit 1942366049"/>
+          <p:cNvPr id="1742463505" name="Connecteur droit 1942366049"/>
           <p:cNvCxnSpPr/>
           <p:nvPr/>
         </p:nvCxnSpPr>
@@ -22288,7 +22436,7 @@
       </p:cxnSp>
       <p:sp>
         <p:nvSpPr>
-          <p:cNvPr id="760560455" name="ZoneTexte 483029020"/>
+          <p:cNvPr id="1557048780" name="ZoneTexte 483029020"/>
           <p:cNvSpPr txBox="1"/>
           <p:nvPr/>
         </p:nvSpPr>
@@ -22328,7 +22476,7 @@
       </p:sp>
       <p:cxnSp>
         <p:nvCxnSpPr>
-          <p:cNvPr id="1671278484" name="Connecteur droit 626166318"/>
+          <p:cNvPr id="2053469001" name="Connecteur droit 626166318"/>
           <p:cNvCxnSpPr/>
           <p:nvPr/>
         </p:nvCxnSpPr>
@@ -22371,7 +22519,7 @@
       </p:cxnSp>
       <p:sp>
         <p:nvSpPr>
-          <p:cNvPr id="463465163" name="ZoneTexte 2021489157"/>
+          <p:cNvPr id="669103801" name="ZoneTexte 2021489157"/>
           <p:cNvSpPr txBox="1"/>
           <p:nvPr/>
         </p:nvSpPr>
@@ -22411,7 +22559,7 @@
       </p:sp>
       <p:cxnSp>
         <p:nvCxnSpPr>
-          <p:cNvPr id="1573700279" name="Connecteur droit 1991074862"/>
+          <p:cNvPr id="1561230533" name="Connecteur droit 1991074862"/>
           <p:cNvCxnSpPr/>
           <p:nvPr/>
         </p:nvCxnSpPr>
@@ -22454,7 +22602,7 @@
       </p:cxnSp>
       <p:sp>
         <p:nvSpPr>
-          <p:cNvPr id="44125049" name="ZoneTexte 1094835336"/>
+          <p:cNvPr id="94257899" name="ZoneTexte 1094835336"/>
           <p:cNvSpPr txBox="1"/>
           <p:nvPr/>
         </p:nvSpPr>
@@ -22536,7 +22684,7 @@
       </p:sp>
       <p:sp>
         <p:nvSpPr>
-          <p:cNvPr id="1629285904" name="Rectangle : avec coins arrondis en haut 1574209032"/>
+          <p:cNvPr id="685551990" name="Rectangle : avec coins arrondis en haut 1574209032"/>
           <p:cNvSpPr/>
           <p:nvPr/>
         </p:nvSpPr>
@@ -22582,7 +22730,7 @@
       </p:sp>
       <p:sp>
         <p:nvSpPr>
-          <p:cNvPr id="561081870" name="Flèche : pentagone 521086653"/>
+          <p:cNvPr id="635760807" name="Flèche : pentagone 521086653"/>
           <p:cNvSpPr/>
           <p:nvPr/>
         </p:nvSpPr>
@@ -22627,7 +22775,7 @@
       </p:sp>
       <p:sp>
         <p:nvSpPr>
-          <p:cNvPr id="159991843" name="Flèche : pentagone 1507310733"/>
+          <p:cNvPr id="929621295" name="Flèche : pentagone 1507310733"/>
           <p:cNvSpPr/>
           <p:nvPr/>
         </p:nvSpPr>
@@ -22672,7 +22820,7 @@
       </p:sp>
       <p:sp>
         <p:nvSpPr>
-          <p:cNvPr id="1272431223" name="Flèche : pentagone 732388424"/>
+          <p:cNvPr id="1348246851" name="Flèche : pentagone 732388424"/>
           <p:cNvSpPr/>
           <p:nvPr/>
         </p:nvSpPr>
@@ -22717,7 +22865,7 @@
       </p:sp>
       <p:sp>
         <p:nvSpPr>
-          <p:cNvPr id="1544707663" name="Flèche : pentagone 326874465"/>
+          <p:cNvPr id="583252090" name="Flèche : pentagone 326874465"/>
           <p:cNvSpPr/>
           <p:nvPr/>
         </p:nvSpPr>
@@ -22762,7 +22910,7 @@
       </p:sp>
       <p:sp>
         <p:nvSpPr>
-          <p:cNvPr id="1070979869" name="Flèche : pentagone 2090650957"/>
+          <p:cNvPr id="258780548" name="Flèche : pentagone 2090650957"/>
           <p:cNvSpPr/>
           <p:nvPr/>
         </p:nvSpPr>
@@ -22807,7 +22955,7 @@
       </p:sp>
       <p:sp>
         <p:nvSpPr>
-          <p:cNvPr id="1787041140" name="ZoneTexte 1374103996"/>
+          <p:cNvPr id="89609568" name="ZoneTexte 1374103996"/>
           <p:cNvSpPr txBox="1"/>
           <p:nvPr/>
         </p:nvSpPr>
@@ -23066,7 +23214,7 @@
       </p:sp>
       <p:sp>
         <p:nvSpPr>
-          <p:cNvPr id="401685005" name="ZoneTexte 1748705365"/>
+          <p:cNvPr id="947659776" name="ZoneTexte 1748705365"/>
           <p:cNvSpPr txBox="1"/>
           <p:nvPr/>
         </p:nvSpPr>
@@ -23106,7 +23254,7 @@
       </p:sp>
       <p:cxnSp>
         <p:nvCxnSpPr>
-          <p:cNvPr id="370861796" name="Connecteur droit 1556830908"/>
+          <p:cNvPr id="1296438100" name="Connecteur droit 1556830908"/>
           <p:cNvCxnSpPr/>
           <p:nvPr/>
         </p:nvCxnSpPr>
@@ -23149,7 +23297,7 @@
       </p:cxnSp>
       <p:sp>
         <p:nvSpPr>
-          <p:cNvPr id="260524039" name="ZoneTexte 409639257"/>
+          <p:cNvPr id="901739321" name="ZoneTexte 409639257"/>
           <p:cNvSpPr txBox="1"/>
           <p:nvPr/>
         </p:nvSpPr>
@@ -23199,7 +23347,7 @@
       </p:sp>
       <p:sp>
         <p:nvSpPr>
-          <p:cNvPr id="2069979651" name="ZoneTexte 1168472887"/>
+          <p:cNvPr id="34027076" name="ZoneTexte 1168472887"/>
           <p:cNvSpPr txBox="1"/>
           <p:nvPr/>
         </p:nvSpPr>
@@ -23292,7 +23440,7 @@
       </p:sp>
       <p:sp>
         <p:nvSpPr>
-          <p:cNvPr id="1482227043" name="ZoneTexte 114796530"/>
+          <p:cNvPr id="159131467" name="ZoneTexte 114796530"/>
           <p:cNvSpPr txBox="1"/>
           <p:nvPr/>
         </p:nvSpPr>
@@ -23388,7 +23536,7 @@
       </p:sp>
       <p:sp>
         <p:nvSpPr>
-          <p:cNvPr id="1153838506" name="ZoneTexte 1085068195"/>
+          <p:cNvPr id="958480831" name="ZoneTexte 1085068195"/>
           <p:cNvSpPr txBox="1"/>
           <p:nvPr/>
         </p:nvSpPr>
@@ -24457,7 +24605,7 @@
       </p:sp>
       <p:sp>
         <p:nvSpPr>
-          <p:cNvPr id="855656399" name="Étoile : 5 branches 278736380"/>
+          <p:cNvPr id="488375420" name="Étoile : 5 branches 278736380"/>
           <p:cNvSpPr/>
           <p:nvPr/>
         </p:nvSpPr>
@@ -24504,7 +24652,7 @@
       </p:sp>
       <p:sp>
         <p:nvSpPr>
-          <p:cNvPr id="2028791582" name="Étoile : 5 branches 1495350449"/>
+          <p:cNvPr id="2117532121" name="Étoile : 5 branches 1495350449"/>
           <p:cNvSpPr/>
           <p:nvPr/>
         </p:nvSpPr>
@@ -24551,7 +24699,7 @@
       </p:sp>
       <p:sp>
         <p:nvSpPr>
-          <p:cNvPr id="558384607" name="Étoile : 5 branches 79046386"/>
+          <p:cNvPr id="207000212" name="Étoile : 5 branches 79046386"/>
           <p:cNvSpPr/>
           <p:nvPr/>
         </p:nvSpPr>
@@ -24598,7 +24746,7 @@
       </p:sp>
       <p:sp>
         <p:nvSpPr>
-          <p:cNvPr id="1203122007" name="Étoile : 5 branches 749256076"/>
+          <p:cNvPr id="353991529" name="Étoile : 5 branches 749256076"/>
           <p:cNvSpPr/>
           <p:nvPr/>
         </p:nvSpPr>
@@ -24645,7 +24793,7 @@
       </p:sp>
       <p:sp>
         <p:nvSpPr>
-          <p:cNvPr id="383359590" name="Étoile : 5 branches 411245083"/>
+          <p:cNvPr id="933789582" name="Étoile : 5 branches 411245083"/>
           <p:cNvSpPr/>
           <p:nvPr/>
         </p:nvSpPr>
@@ -24692,7 +24840,7 @@
       </p:sp>
       <p:sp>
         <p:nvSpPr>
-          <p:cNvPr id="937877401" name="ZoneTexte 496444952"/>
+          <p:cNvPr id="745286510" name="ZoneTexte 496444952"/>
           <p:cNvSpPr txBox="1"/>
           <p:nvPr/>
         </p:nvSpPr>
@@ -24734,7 +24882,7 @@
       </p:sp>
       <p:sp>
         <p:nvSpPr>
-          <p:cNvPr id="1199439451" name="ZoneTexte 474433989"/>
+          <p:cNvPr id="2010644920" name="ZoneTexte 474433989"/>
           <p:cNvSpPr txBox="1"/>
           <p:nvPr/>
         </p:nvSpPr>
@@ -24776,7 +24924,7 @@
       </p:sp>
       <p:sp>
         <p:nvSpPr>
-          <p:cNvPr id="462109264" name="ZoneTexte 1"/>
+          <p:cNvPr id="1019756186" name="ZoneTexte 1"/>
           <p:cNvSpPr txBox="1"/>
           <p:nvPr/>
         </p:nvSpPr>
@@ -24877,7 +25025,7 @@
       </p:sp>
       <p:sp>
         <p:nvSpPr>
-          <p:cNvPr id="1087587840" name="ZoneTexte 2"/>
+          <p:cNvPr id="132057614" name="ZoneTexte 2"/>
           <p:cNvSpPr txBox="1"/>
           <p:nvPr/>
         </p:nvSpPr>
@@ -24995,7 +25143,7 @@
       </p:sp>
       <p:sp>
         <p:nvSpPr>
-          <p:cNvPr id="1311086889" name=""/>
+          <p:cNvPr id="181230651" name=""/>
           <p:cNvSpPr/>
           <p:nvPr/>
         </p:nvSpPr>
@@ -25066,7 +25214,7 @@
       </p:sp>
       <p:sp>
         <p:nvSpPr>
-          <p:cNvPr id="825616915" name="Flèche : pentagone 1507310733"/>
+          <p:cNvPr id="985212677" name="Flèche : pentagone 1507310733"/>
           <p:cNvSpPr/>
           <p:nvPr/>
         </p:nvSpPr>
@@ -25111,7 +25259,7 @@
       </p:sp>
       <p:sp>
         <p:nvSpPr>
-          <p:cNvPr id="581813290" name="Flèche : pentagone 732388424"/>
+          <p:cNvPr id="1251454401" name="Flèche : pentagone 732388424"/>
           <p:cNvSpPr/>
           <p:nvPr/>
         </p:nvSpPr>
@@ -25156,7 +25304,7 @@
       </p:sp>
       <p:sp>
         <p:nvSpPr>
-          <p:cNvPr id="252370176" name="Flèche : pentagone 326874465"/>
+          <p:cNvPr id="2104308723" name="Flèche : pentagone 326874465"/>
           <p:cNvSpPr/>
           <p:nvPr/>
         </p:nvSpPr>
@@ -25234,7 +25382,7 @@
       </p:grpSpPr>
       <p:sp>
         <p:nvSpPr>
-          <p:cNvPr id="599568505" name="ZoneTexte 273581705"/>
+          <p:cNvPr id="1737656215" name="ZoneTexte 273581705"/>
           <p:cNvSpPr txBox="1"/>
           <p:nvPr/>
         </p:nvSpPr>
@@ -25532,7 +25680,7 @@
       </p:sp>
       <p:cxnSp>
         <p:nvCxnSpPr>
-          <p:cNvPr id="440985093" name="Connecteur droit 1094832104"/>
+          <p:cNvPr id="141811882" name="Connecteur droit 1094832104"/>
           <p:cNvCxnSpPr/>
           <p:nvPr/>
         </p:nvCxnSpPr>
@@ -25575,7 +25723,7 @@
       </p:cxnSp>
       <p:sp>
         <p:nvSpPr>
-          <p:cNvPr id="737486975" name="ZoneTexte 2078543737"/>
+          <p:cNvPr id="1318327925" name="ZoneTexte 2078543737"/>
           <p:cNvSpPr txBox="1"/>
           <p:nvPr/>
         </p:nvSpPr>
@@ -25615,7 +25763,7 @@
       </p:sp>
       <p:cxnSp>
         <p:nvCxnSpPr>
-          <p:cNvPr id="1632907007" name="Connecteur droit 853743145"/>
+          <p:cNvPr id="1537400784" name="Connecteur droit 853743145"/>
           <p:cNvCxnSpPr/>
           <p:nvPr/>
         </p:nvCxnSpPr>
@@ -25658,7 +25806,7 @@
       </p:cxnSp>
       <p:sp>
         <p:nvSpPr>
-          <p:cNvPr id="1146016565" name="ZoneTexte 1473119298"/>
+          <p:cNvPr id="481399474" name="ZoneTexte 1473119298"/>
           <p:cNvSpPr txBox="1"/>
           <p:nvPr/>
         </p:nvSpPr>
@@ -25698,7 +25846,7 @@
       </p:sp>
       <p:cxnSp>
         <p:nvCxnSpPr>
-          <p:cNvPr id="436107681" name="Connecteur droit 1727809509"/>
+          <p:cNvPr id="1104708042" name="Connecteur droit 1727809509"/>
           <p:cNvCxnSpPr/>
           <p:nvPr/>
         </p:nvCxnSpPr>
@@ -25741,7 +25889,7 @@
       </p:cxnSp>
       <p:sp>
         <p:nvSpPr>
-          <p:cNvPr id="1787645766" name="ZoneTexte 759238070"/>
+          <p:cNvPr id="807548801" name="ZoneTexte 759238070"/>
           <p:cNvSpPr txBox="1"/>
           <p:nvPr/>
         </p:nvSpPr>
@@ -25816,7 +25964,7 @@
       </p:sp>
       <p:sp>
         <p:nvSpPr>
-          <p:cNvPr id="36729169" name="Rectangle : avec coins arrondis en haut 965147191"/>
+          <p:cNvPr id="891721616" name="Rectangle : avec coins arrondis en haut 965147191"/>
           <p:cNvSpPr/>
           <p:nvPr/>
         </p:nvSpPr>
@@ -25862,7 +26010,7 @@
       </p:sp>
       <p:sp>
         <p:nvSpPr>
-          <p:cNvPr id="1098103240" name="Flèche : pentagone 2070329900"/>
+          <p:cNvPr id="300305852" name="Flèche : pentagone 2070329900"/>
           <p:cNvSpPr/>
           <p:nvPr/>
         </p:nvSpPr>
@@ -25907,7 +26055,7 @@
       </p:sp>
       <p:sp>
         <p:nvSpPr>
-          <p:cNvPr id="1752528683" name="Flèche : pentagone 1325137089"/>
+          <p:cNvPr id="530817302" name="Flèche : pentagone 1325137089"/>
           <p:cNvSpPr/>
           <p:nvPr/>
         </p:nvSpPr>
@@ -25952,7 +26100,7 @@
       </p:sp>
       <p:sp>
         <p:nvSpPr>
-          <p:cNvPr id="1518720218" name="Flèche : pentagone 295922856"/>
+          <p:cNvPr id="157554016" name="Flèche : pentagone 295922856"/>
           <p:cNvSpPr/>
           <p:nvPr/>
         </p:nvSpPr>
@@ -25997,7 +26145,7 @@
       </p:sp>
       <p:sp>
         <p:nvSpPr>
-          <p:cNvPr id="1774159542" name="Flèche : pentagone 1961547672"/>
+          <p:cNvPr id="468663145" name="Flèche : pentagone 1961547672"/>
           <p:cNvSpPr/>
           <p:nvPr/>
         </p:nvSpPr>
@@ -26042,7 +26190,7 @@
       </p:sp>
       <p:sp>
         <p:nvSpPr>
-          <p:cNvPr id="116660171" name="Flèche : pentagone 1305647833"/>
+          <p:cNvPr id="1757842054" name="Flèche : pentagone 1305647833"/>
           <p:cNvSpPr/>
           <p:nvPr/>
         </p:nvSpPr>
@@ -26087,7 +26235,7 @@
       </p:sp>
       <p:sp>
         <p:nvSpPr>
-          <p:cNvPr id="481011522" name="ZoneTexte 545814566"/>
+          <p:cNvPr id="1845677323" name="ZoneTexte 545814566"/>
           <p:cNvSpPr txBox="1"/>
           <p:nvPr/>
         </p:nvSpPr>
@@ -26346,7 +26494,7 @@
       </p:sp>
       <p:sp>
         <p:nvSpPr>
-          <p:cNvPr id="1955935550" name="ZoneTexte 671978155"/>
+          <p:cNvPr id="1383650577" name="ZoneTexte 671978155"/>
           <p:cNvSpPr txBox="1"/>
           <p:nvPr/>
         </p:nvSpPr>
@@ -26386,7 +26534,7 @@
       </p:sp>
       <p:cxnSp>
         <p:nvCxnSpPr>
-          <p:cNvPr id="961298383" name="Connecteur droit 637589304"/>
+          <p:cNvPr id="2084553449" name="Connecteur droit 637589304"/>
           <p:cNvCxnSpPr/>
           <p:nvPr/>
         </p:nvCxnSpPr>
@@ -26429,7 +26577,7 @@
       </p:cxnSp>
       <p:sp>
         <p:nvSpPr>
-          <p:cNvPr id="1960659310" name="ZoneTexte 172075623"/>
+          <p:cNvPr id="462780862" name="ZoneTexte 172075623"/>
           <p:cNvSpPr txBox="1"/>
           <p:nvPr/>
         </p:nvSpPr>
@@ -26479,7 +26627,7 @@
       </p:sp>
       <p:sp>
         <p:nvSpPr>
-          <p:cNvPr id="1823865276" name="ZoneTexte 1642812764"/>
+          <p:cNvPr id="855960890" name="ZoneTexte 1642812764"/>
           <p:cNvSpPr txBox="1"/>
           <p:nvPr/>
         </p:nvSpPr>
@@ -26646,7 +26794,7 @@
       </p:sp>
       <p:sp>
         <p:nvSpPr>
-          <p:cNvPr id="1350400579" name="Étoile : 7 branches 1681961038"/>
+          <p:cNvPr id="1918775273" name="Étoile : 7 branches 1681961038"/>
           <p:cNvSpPr/>
           <p:nvPr/>
         </p:nvSpPr>
@@ -26693,7 +26841,7 @@
       </p:sp>
       <p:sp>
         <p:nvSpPr>
-          <p:cNvPr id="1996951421" name="Étoile : 7 branches 1476951547"/>
+          <p:cNvPr id="1509379024" name="Étoile : 7 branches 1476951547"/>
           <p:cNvSpPr/>
           <p:nvPr/>
         </p:nvSpPr>
@@ -26740,7 +26888,7 @@
       </p:sp>
       <p:sp>
         <p:nvSpPr>
-          <p:cNvPr id="2042873193" name="Étoile : 7 branches 1520826925"/>
+          <p:cNvPr id="5602541" name="Étoile : 7 branches 1520826925"/>
           <p:cNvSpPr/>
           <p:nvPr/>
         </p:nvSpPr>
@@ -26787,7 +26935,7 @@
       </p:sp>
       <p:sp>
         <p:nvSpPr>
-          <p:cNvPr id="1053299772" name="ZoneTexte 1219899073"/>
+          <p:cNvPr id="965845103" name="ZoneTexte 1219899073"/>
           <p:cNvSpPr txBox="1"/>
           <p:nvPr/>
         </p:nvSpPr>
@@ -26827,7 +26975,7 @@
       </p:sp>
       <p:sp>
         <p:nvSpPr>
-          <p:cNvPr id="1048065591" name="ZoneTexte 1283574123"/>
+          <p:cNvPr id="2067924350" name="ZoneTexte 1283574123"/>
           <p:cNvSpPr txBox="1"/>
           <p:nvPr/>
         </p:nvSpPr>
@@ -28028,7 +28176,7 @@
       </p:sp>
       <p:sp>
         <p:nvSpPr>
-          <p:cNvPr id="310338923" name="ZoneTexte 790352176"/>
+          <p:cNvPr id="858510756" name="ZoneTexte 790352176"/>
           <p:cNvSpPr txBox="1"/>
           <p:nvPr/>
         </p:nvSpPr>
@@ -28070,7 +28218,7 @@
       </p:sp>
       <p:sp>
         <p:nvSpPr>
-          <p:cNvPr id="269952487" name="ZoneTexte 2025740189"/>
+          <p:cNvPr id="1999354727" name="ZoneTexte 2025740189"/>
           <p:cNvSpPr txBox="1"/>
           <p:nvPr/>
         </p:nvSpPr>
@@ -28127,7 +28275,7 @@
       </p:sp>
       <p:sp>
         <p:nvSpPr>
-          <p:cNvPr id="410274678" name=""/>
+          <p:cNvPr id="1922153905" name=""/>
           <p:cNvSpPr/>
           <p:nvPr/>
         </p:nvSpPr>
@@ -28167,7 +28315,7 @@
       </p:sp>
       <p:sp>
         <p:nvSpPr>
-          <p:cNvPr id="1082200668" name="Rectangle : avec coins arrondis en haut 1151560973"/>
+          <p:cNvPr id="1540923843" name="Rectangle : avec coins arrondis en haut 1151560973"/>
           <p:cNvSpPr/>
           <p:nvPr/>
         </p:nvSpPr>
@@ -28215,7 +28363,7 @@
       </p:sp>
       <p:sp>
         <p:nvSpPr>
-          <p:cNvPr id="1352069843" name=""/>
+          <p:cNvPr id="2129997791" name=""/>
           <p:cNvSpPr/>
           <p:nvPr/>
         </p:nvSpPr>
@@ -28255,7 +28403,7 @@
       </p:sp>
       <p:sp>
         <p:nvSpPr>
-          <p:cNvPr id="101294349" name="Rectangle : avec coins arrondis en haut 1151560973"/>
+          <p:cNvPr id="463302282" name="Rectangle : avec coins arrondis en haut 1151560973"/>
           <p:cNvSpPr/>
           <p:nvPr/>
         </p:nvSpPr>
@@ -28303,7 +28451,7 @@
       </p:sp>
       <p:sp>
         <p:nvSpPr>
-          <p:cNvPr id="2093727288" name=""/>
+          <p:cNvPr id="1294978337" name=""/>
           <p:cNvSpPr/>
           <p:nvPr/>
         </p:nvSpPr>
@@ -28343,7 +28491,7 @@
       </p:sp>
       <p:sp>
         <p:nvSpPr>
-          <p:cNvPr id="889115964" name="Rectangle : avec coins arrondis en haut 1151560973"/>
+          <p:cNvPr id="126226562" name="Rectangle : avec coins arrondis en haut 1151560973"/>
           <p:cNvSpPr/>
           <p:nvPr/>
         </p:nvSpPr>
@@ -28391,7 +28539,7 @@
       </p:sp>
       <p:sp>
         <p:nvSpPr>
-          <p:cNvPr id="2036985894" name=""/>
+          <p:cNvPr id="814788179" name=""/>
           <p:cNvSpPr txBox="1"/>
           <p:nvPr/>
         </p:nvSpPr>
@@ -28519,7 +28667,7 @@
       </p:sp>
       <p:sp>
         <p:nvSpPr>
-          <p:cNvPr id="1690276901" name=""/>
+          <p:cNvPr id="1304926536" name=""/>
           <p:cNvSpPr txBox="1"/>
           <p:nvPr/>
         </p:nvSpPr>
@@ -28642,7 +28790,7 @@
       </p:sp>
       <p:sp>
         <p:nvSpPr>
-          <p:cNvPr id="2073088079" name=""/>
+          <p:cNvPr id="275828204" name=""/>
           <p:cNvSpPr/>
           <p:nvPr/>
         </p:nvSpPr>
@@ -28713,7 +28861,7 @@
       </p:sp>
       <p:sp>
         <p:nvSpPr>
-          <p:cNvPr id="1061454317" name="Flèche : pentagone 1325137089"/>
+          <p:cNvPr id="218729275" name="Flèche : pentagone 1325137089"/>
           <p:cNvSpPr/>
           <p:nvPr/>
         </p:nvSpPr>
@@ -28758,7 +28906,7 @@
       </p:sp>
       <p:sp>
         <p:nvSpPr>
-          <p:cNvPr id="538194929" name="Flèche : pentagone 295922856"/>
+          <p:cNvPr id="2146293530" name="Flèche : pentagone 295922856"/>
           <p:cNvSpPr/>
           <p:nvPr/>
         </p:nvSpPr>
@@ -28803,7 +28951,7 @@
       </p:sp>
       <p:sp>
         <p:nvSpPr>
-          <p:cNvPr id="1023391610" name="Flèche : pentagone 1961547672"/>
+          <p:cNvPr id="1467605960" name="Flèche : pentagone 1961547672"/>
           <p:cNvSpPr/>
           <p:nvPr/>
         </p:nvSpPr>
@@ -28881,7 +29029,7 @@
       </p:grpSpPr>
       <p:cxnSp>
         <p:nvCxnSpPr>
-          <p:cNvPr id="1129627479" name="Connecteur droit 266926011"/>
+          <p:cNvPr id="372593439" name="Connecteur droit 266926011"/>
           <p:cNvCxnSpPr/>
           <p:nvPr/>
         </p:nvCxnSpPr>
@@ -28924,7 +29072,7 @@
       </p:cxnSp>
       <p:sp>
         <p:nvSpPr>
-          <p:cNvPr id="1264473315" name="ZoneTexte 1043763612"/>
+          <p:cNvPr id="1261509871" name="ZoneTexte 1043763612"/>
           <p:cNvSpPr txBox="1"/>
           <p:nvPr/>
         </p:nvSpPr>
@@ -28964,7 +29112,7 @@
       </p:sp>
       <p:cxnSp>
         <p:nvCxnSpPr>
-          <p:cNvPr id="52578698" name="Connecteur droit 1586327141"/>
+          <p:cNvPr id="1691631037" name="Connecteur droit 1586327141"/>
           <p:cNvCxnSpPr/>
           <p:nvPr/>
         </p:nvCxnSpPr>
@@ -29007,7 +29155,7 @@
       </p:cxnSp>
       <p:sp>
         <p:nvSpPr>
-          <p:cNvPr id="1412573388" name="ZoneTexte 1691387439"/>
+          <p:cNvPr id="1786795457" name="ZoneTexte 1691387439"/>
           <p:cNvSpPr txBox="1"/>
           <p:nvPr/>
         </p:nvSpPr>
@@ -29047,7 +29195,7 @@
       </p:sp>
       <p:cxnSp>
         <p:nvCxnSpPr>
-          <p:cNvPr id="1799709838" name="Connecteur droit 1743707585"/>
+          <p:cNvPr id="77291934" name="Connecteur droit 1743707585"/>
           <p:cNvCxnSpPr/>
           <p:nvPr/>
         </p:nvCxnSpPr>
@@ -29090,7 +29238,7 @@
       </p:cxnSp>
       <p:sp>
         <p:nvSpPr>
-          <p:cNvPr id="48111521" name="ZoneTexte 1503300725"/>
+          <p:cNvPr id="216101182" name="ZoneTexte 1503300725"/>
           <p:cNvSpPr txBox="1"/>
           <p:nvPr/>
         </p:nvSpPr>
@@ -29172,7 +29320,7 @@
       </p:sp>
       <p:sp>
         <p:nvSpPr>
-          <p:cNvPr id="1646216133" name="Rectangle : avec coins arrondis en haut 1151560973"/>
+          <p:cNvPr id="994911220" name="Rectangle : avec coins arrondis en haut 1151560973"/>
           <p:cNvSpPr/>
           <p:nvPr/>
         </p:nvSpPr>
@@ -29218,7 +29366,7 @@
       </p:sp>
       <p:sp>
         <p:nvSpPr>
-          <p:cNvPr id="1634177707" name="Flèche : pentagone 1610574377"/>
+          <p:cNvPr id="1699393702" name="Flèche : pentagone 1610574377"/>
           <p:cNvSpPr/>
           <p:nvPr/>
         </p:nvSpPr>
@@ -29263,7 +29411,7 @@
       </p:sp>
       <p:sp>
         <p:nvSpPr>
-          <p:cNvPr id="1127802855" name="Flèche : pentagone 463861063"/>
+          <p:cNvPr id="1456207560" name="Flèche : pentagone 463861063"/>
           <p:cNvSpPr/>
           <p:nvPr/>
         </p:nvSpPr>
@@ -29308,7 +29456,7 @@
       </p:sp>
       <p:sp>
         <p:nvSpPr>
-          <p:cNvPr id="1152509174" name="Flèche : pentagone 272004907"/>
+          <p:cNvPr id="1565342904" name="Flèche : pentagone 272004907"/>
           <p:cNvSpPr/>
           <p:nvPr/>
         </p:nvSpPr>
@@ -29353,7 +29501,7 @@
       </p:sp>
       <p:sp>
         <p:nvSpPr>
-          <p:cNvPr id="467632387" name="Flèche : pentagone 28174069"/>
+          <p:cNvPr id="488719081" name="Flèche : pentagone 28174069"/>
           <p:cNvSpPr/>
           <p:nvPr/>
         </p:nvSpPr>
@@ -29398,7 +29546,7 @@
       </p:sp>
       <p:sp>
         <p:nvSpPr>
-          <p:cNvPr id="1212968048" name="Flèche : pentagone 978127220"/>
+          <p:cNvPr id="1987891677" name="Flèche : pentagone 978127220"/>
           <p:cNvSpPr/>
           <p:nvPr/>
         </p:nvSpPr>
@@ -29443,7 +29591,7 @@
       </p:sp>
       <p:sp>
         <p:nvSpPr>
-          <p:cNvPr id="1113144007" name="ZoneTexte 1693594013"/>
+          <p:cNvPr id="1118752679" name="ZoneTexte 1693594013"/>
           <p:cNvSpPr txBox="1"/>
           <p:nvPr/>
         </p:nvSpPr>
@@ -29751,7 +29899,7 @@
       </p:sp>
       <p:sp>
         <p:nvSpPr>
-          <p:cNvPr id="1120328882" name="ZoneTexte 1975797288"/>
+          <p:cNvPr id="2129063552" name="ZoneTexte 1975797288"/>
           <p:cNvSpPr txBox="1"/>
           <p:nvPr/>
         </p:nvSpPr>
@@ -29791,7 +29939,7 @@
       </p:sp>
       <p:sp>
         <p:nvSpPr>
-          <p:cNvPr id="1158104206" name="ZoneTexte 2064865984"/>
+          <p:cNvPr id="1662747902" name="ZoneTexte 2064865984"/>
           <p:cNvSpPr txBox="1"/>
           <p:nvPr/>
         </p:nvSpPr>
@@ -30013,7 +30161,7 @@
       </p:sp>
       <p:sp>
         <p:nvSpPr>
-          <p:cNvPr id="1285622737" name="ZoneTexte 1387173154"/>
+          <p:cNvPr id="439082528" name="ZoneTexte 1387173154"/>
           <p:cNvSpPr txBox="1"/>
           <p:nvPr/>
         </p:nvSpPr>
@@ -30265,7 +30413,7 @@
       </p:sp>
       <p:sp>
         <p:nvSpPr>
-          <p:cNvPr id="165350295" name="ZoneTexte 523755832"/>
+          <p:cNvPr id="918816779" name="ZoneTexte 523755832"/>
           <p:cNvSpPr txBox="1"/>
           <p:nvPr/>
         </p:nvSpPr>
@@ -30525,7 +30673,7 @@
       </p:sp>
       <p:cxnSp>
         <p:nvCxnSpPr>
-          <p:cNvPr id="1690672750" name="Connecteur droit 2085669542"/>
+          <p:cNvPr id="1938851022" name="Connecteur droit 2085669542"/>
           <p:cNvCxnSpPr/>
           <p:nvPr/>
         </p:nvCxnSpPr>
@@ -30568,7 +30716,7 @@
       </p:cxnSp>
       <p:sp>
         <p:nvSpPr>
-          <p:cNvPr id="882393525" name="ZoneTexte 34398067"/>
+          <p:cNvPr id="279115784" name="ZoneTexte 34398067"/>
           <p:cNvSpPr txBox="1"/>
           <p:nvPr/>
         </p:nvSpPr>
@@ -30622,7 +30770,7 @@
       </p:sp>
       <p:sp>
         <p:nvSpPr>
-          <p:cNvPr id="1264078342" name="ZoneTexte 273581705"/>
+          <p:cNvPr id="1237608305" name="ZoneTexte 273581705"/>
           <p:cNvSpPr txBox="1"/>
           <p:nvPr/>
         </p:nvSpPr>
@@ -30920,7 +31068,7 @@
       </p:sp>
       <p:sp>
         <p:nvSpPr>
-          <p:cNvPr id="1044766466" name="ZoneTexte 1727393832"/>
+          <p:cNvPr id="1785675454" name="ZoneTexte 1727393832"/>
           <p:cNvSpPr txBox="1"/>
           <p:nvPr/>
         </p:nvSpPr>
@@ -30962,7 +31110,7 @@
       </p:sp>
       <p:sp>
         <p:nvSpPr>
-          <p:cNvPr id="2049850875" name="ZoneTexte 504516740"/>
+          <p:cNvPr id="920641115" name="ZoneTexte 504516740"/>
           <p:cNvSpPr txBox="1"/>
           <p:nvPr/>
         </p:nvSpPr>
@@ -31004,7 +31152,7 @@
       </p:sp>
       <p:sp>
         <p:nvSpPr>
-          <p:cNvPr id="280196558" name="ZoneTexte 1"/>
+          <p:cNvPr id="1877173734" name="ZoneTexte 1"/>
           <p:cNvSpPr txBox="1"/>
           <p:nvPr/>
         </p:nvSpPr>
@@ -31115,7 +31263,7 @@
       </p:sp>
       <p:sp>
         <p:nvSpPr>
-          <p:cNvPr id="508626964" name="ZoneTexte 2"/>
+          <p:cNvPr id="761438865" name="ZoneTexte 2"/>
           <p:cNvSpPr txBox="1"/>
           <p:nvPr/>
         </p:nvSpPr>
@@ -31199,7 +31347,7 @@
       </p:sp>
       <p:sp>
         <p:nvSpPr>
-          <p:cNvPr id="417057499" name=""/>
+          <p:cNvPr id="764860075" name=""/>
           <p:cNvSpPr/>
           <p:nvPr/>
         </p:nvSpPr>
@@ -31239,7 +31387,7 @@
       </p:sp>
       <p:sp>
         <p:nvSpPr>
-          <p:cNvPr id="1253593139" name="Rectangle : avec coins arrondis en haut 1151560973"/>
+          <p:cNvPr id="656690697" name="Rectangle : avec coins arrondis en haut 1151560973"/>
           <p:cNvSpPr/>
           <p:nvPr/>
         </p:nvSpPr>
@@ -31287,7 +31435,7 @@
       </p:sp>
       <p:sp>
         <p:nvSpPr>
-          <p:cNvPr id="650696091" name=""/>
+          <p:cNvPr id="362355717" name=""/>
           <p:cNvSpPr/>
           <p:nvPr/>
         </p:nvSpPr>
@@ -31327,7 +31475,7 @@
       </p:sp>
       <p:sp>
         <p:nvSpPr>
-          <p:cNvPr id="1212555888" name="Rectangle : avec coins arrondis en haut 1151560973"/>
+          <p:cNvPr id="1459948749" name="Rectangle : avec coins arrondis en haut 1151560973"/>
           <p:cNvSpPr/>
           <p:nvPr/>
         </p:nvSpPr>
@@ -31375,7 +31523,7 @@
       </p:sp>
       <p:sp>
         <p:nvSpPr>
-          <p:cNvPr id="1331803120" name=""/>
+          <p:cNvPr id="365134688" name=""/>
           <p:cNvSpPr/>
           <p:nvPr/>
         </p:nvSpPr>
@@ -31415,7 +31563,7 @@
       </p:sp>
       <p:sp>
         <p:nvSpPr>
-          <p:cNvPr id="1833442849" name="Rectangle : avec coins arrondis en haut 1151560973"/>
+          <p:cNvPr id="1006322393" name="Rectangle : avec coins arrondis en haut 1151560973"/>
           <p:cNvSpPr/>
           <p:nvPr/>
         </p:nvSpPr>
@@ -31463,7 +31611,7 @@
       </p:sp>
       <p:sp>
         <p:nvSpPr>
-          <p:cNvPr id="586954316" name=""/>
+          <p:cNvPr id="1174257072" name=""/>
           <p:cNvSpPr txBox="1"/>
           <p:nvPr/>
         </p:nvSpPr>
@@ -31514,7 +31662,7 @@
       </p:sp>
       <p:sp>
         <p:nvSpPr>
-          <p:cNvPr id="379215538" name=""/>
+          <p:cNvPr id="1253339981" name=""/>
           <p:cNvSpPr txBox="1"/>
           <p:nvPr/>
         </p:nvSpPr>
@@ -31612,7 +31760,7 @@
       </p:sp>
       <p:sp>
         <p:nvSpPr>
-          <p:cNvPr id="911302775" name=""/>
+          <p:cNvPr id="2132614629" name=""/>
           <p:cNvSpPr/>
           <p:nvPr/>
         </p:nvSpPr>
@@ -31683,7 +31831,7 @@
       </p:sp>
       <p:sp>
         <p:nvSpPr>
-          <p:cNvPr id="17026304" name="Flèche : pentagone 463861063"/>
+          <p:cNvPr id="163178995" name="Flèche : pentagone 463861063"/>
           <p:cNvSpPr/>
           <p:nvPr/>
         </p:nvSpPr>
@@ -31728,7 +31876,7 @@
       </p:sp>
       <p:sp>
         <p:nvSpPr>
-          <p:cNvPr id="1673677473" name="Flèche : pentagone 272004907"/>
+          <p:cNvPr id="173525636" name="Flèche : pentagone 272004907"/>
           <p:cNvSpPr/>
           <p:nvPr/>
         </p:nvSpPr>
@@ -31773,7 +31921,7 @@
       </p:sp>
       <p:sp>
         <p:nvSpPr>
-          <p:cNvPr id="1257508862" name="Flèche : pentagone 28174069"/>
+          <p:cNvPr id="433865073" name="Flèche : pentagone 28174069"/>
           <p:cNvSpPr/>
           <p:nvPr/>
         </p:nvSpPr>

--- a/Fiches de personnage.pptx
+++ b/Fiches de personnage.pptx
@@ -139,7 +139,7 @@
       </p:grpSpPr>
       <p:sp>
         <p:nvSpPr>
-          <p:cNvPr id="1529747902" name="Espace réservé d'en-tête 1"/>
+          <p:cNvPr id="265206087" name="Espace réservé d'en-tête 1"/>
           <p:cNvSpPr>
             <a:spLocks noGrp="1"/>
           </p:cNvSpPr>
@@ -173,7 +173,7 @@
       </p:sp>
       <p:sp>
         <p:nvSpPr>
-          <p:cNvPr id="968081335" name="Espace réservé pour la date 2"/>
+          <p:cNvPr id="163832913" name="Espace réservé pour la date 2"/>
           <p:cNvSpPr>
             <a:spLocks noGrp="1"/>
           </p:cNvSpPr>
@@ -211,7 +211,7 @@
       </p:sp>
       <p:sp>
         <p:nvSpPr>
-          <p:cNvPr id="1034437800" name="Espace réservé pour l'image de la diapositive 3"/>
+          <p:cNvPr id="1602158739" name="Espace réservé pour l'image de la diapositive 3"/>
           <p:cNvSpPr>
             <a:spLocks noChangeAspect="1" noGrp="1" noRot="1"/>
           </p:cNvSpPr>
@@ -247,7 +247,7 @@
       </p:sp>
       <p:sp>
         <p:nvSpPr>
-          <p:cNvPr id="1976613701" name="Remarques Espace réservé 4"/>
+          <p:cNvPr id="625020305" name="Remarques Espace réservé 4"/>
           <p:cNvSpPr>
             <a:spLocks noGrp="1"/>
           </p:cNvSpPr>
@@ -321,7 +321,7 @@
       </p:sp>
       <p:sp>
         <p:nvSpPr>
-          <p:cNvPr id="472572187" name="Espace réservé du pied de page 5"/>
+          <p:cNvPr id="1091809748" name="Espace réservé du pied de page 5"/>
           <p:cNvSpPr>
             <a:spLocks noGrp="1"/>
           </p:cNvSpPr>
@@ -355,7 +355,7 @@
       </p:sp>
       <p:sp>
         <p:nvSpPr>
-          <p:cNvPr id="417874596" name="Espace réservé du numéro de diapositive 6"/>
+          <p:cNvPr id="1023180098" name="Espace réservé du numéro de diapositive 6"/>
           <p:cNvSpPr>
             <a:spLocks noGrp="1"/>
           </p:cNvSpPr>
@@ -508,7 +508,7 @@
       </p:grpSpPr>
       <p:sp>
         <p:nvSpPr>
-          <p:cNvPr id="1063037489" name="Espace réservé pour l'image de la diapositive 1"/>
+          <p:cNvPr id="1009675305" name="Espace réservé pour l'image de la diapositive 1"/>
           <p:cNvSpPr>
             <a:spLocks noChangeAspect="1" noGrp="1" noRot="1"/>
           </p:cNvSpPr>
@@ -525,7 +525,7 @@
       </p:sp>
       <p:sp>
         <p:nvSpPr>
-          <p:cNvPr id="1059771242" name="Remarques Espace réservé 2"/>
+          <p:cNvPr id="26594776" name="Remarques Espace réservé 2"/>
           <p:cNvSpPr>
             <a:spLocks noGrp="1"/>
           </p:cNvSpPr>
@@ -550,7 +550,7 @@
       </p:sp>
       <p:sp>
         <p:nvSpPr>
-          <p:cNvPr id="588984945" name="Espace réservé pour le numéro de diapositive 3"/>
+          <p:cNvPr id="844921682" name="Espace réservé pour le numéro de diapositive 3"/>
           <p:cNvSpPr>
             <a:spLocks noGrp="1"/>
           </p:cNvSpPr>
@@ -601,7 +601,7 @@
       </p:grpSpPr>
       <p:sp>
         <p:nvSpPr>
-          <p:cNvPr id="163563648" name="Espace réservé pour l'image de la diapositive 1"/>
+          <p:cNvPr id="893874148" name="Espace réservé pour l'image de la diapositive 1"/>
           <p:cNvSpPr>
             <a:spLocks noChangeAspect="1" noGrp="1" noRot="1"/>
           </p:cNvSpPr>
@@ -618,7 +618,7 @@
       </p:sp>
       <p:sp>
         <p:nvSpPr>
-          <p:cNvPr id="1315418167" name="Remarques Espace réservé 2"/>
+          <p:cNvPr id="1793647825" name="Remarques Espace réservé 2"/>
           <p:cNvSpPr>
             <a:spLocks noGrp="1"/>
           </p:cNvSpPr>
@@ -643,7 +643,7 @@
       </p:sp>
       <p:sp>
         <p:nvSpPr>
-          <p:cNvPr id="1721776628" name="Espace réservé pour le numéro de diapositive 3"/>
+          <p:cNvPr id="1517492237" name="Espace réservé pour le numéro de diapositive 3"/>
           <p:cNvSpPr>
             <a:spLocks noGrp="1"/>
           </p:cNvSpPr>
@@ -694,7 +694,7 @@
       </p:grpSpPr>
       <p:sp>
         <p:nvSpPr>
-          <p:cNvPr id="808583563" name="Espace réservé pour l'image de la diapositive 1"/>
+          <p:cNvPr id="504723110" name="Espace réservé pour l'image de la diapositive 1"/>
           <p:cNvSpPr>
             <a:spLocks noChangeAspect="1" noGrp="1" noRot="1"/>
           </p:cNvSpPr>
@@ -711,7 +711,7 @@
       </p:sp>
       <p:sp>
         <p:nvSpPr>
-          <p:cNvPr id="1907003640" name="Remarques Espace réservé 2"/>
+          <p:cNvPr id="881538948" name="Remarques Espace réservé 2"/>
           <p:cNvSpPr>
             <a:spLocks noGrp="1"/>
           </p:cNvSpPr>
@@ -736,7 +736,7 @@
       </p:sp>
       <p:sp>
         <p:nvSpPr>
-          <p:cNvPr id="178019968" name="Espace réservé pour le numéro de diapositive 3"/>
+          <p:cNvPr id="845704875" name="Espace réservé pour le numéro de diapositive 3"/>
           <p:cNvSpPr>
             <a:spLocks noGrp="1"/>
           </p:cNvSpPr>
@@ -787,7 +787,7 @@
       </p:grpSpPr>
       <p:sp>
         <p:nvSpPr>
-          <p:cNvPr id="1745428485" name="Espace réservé pour l'image de la diapositive 1"/>
+          <p:cNvPr id="1540438073" name="Espace réservé pour l'image de la diapositive 1"/>
           <p:cNvSpPr>
             <a:spLocks noChangeAspect="1" noGrp="1" noRot="1"/>
           </p:cNvSpPr>
@@ -804,7 +804,7 @@
       </p:sp>
       <p:sp>
         <p:nvSpPr>
-          <p:cNvPr id="1006072800" name="Remarques Espace réservé 2"/>
+          <p:cNvPr id="1445557676" name="Remarques Espace réservé 2"/>
           <p:cNvSpPr>
             <a:spLocks noGrp="1"/>
           </p:cNvSpPr>
@@ -829,7 +829,7 @@
       </p:sp>
       <p:sp>
         <p:nvSpPr>
-          <p:cNvPr id="1642902547" name="Espace réservé pour le numéro de diapositive 3"/>
+          <p:cNvPr id="492396329" name="Espace réservé pour le numéro de diapositive 3"/>
           <p:cNvSpPr>
             <a:spLocks noGrp="1"/>
           </p:cNvSpPr>
@@ -880,7 +880,7 @@
       </p:grpSpPr>
       <p:sp>
         <p:nvSpPr>
-          <p:cNvPr id="2132959290" name="Espace réservé pour l'image de la diapositive 1"/>
+          <p:cNvPr id="1394215680" name="Espace réservé pour l'image de la diapositive 1"/>
           <p:cNvSpPr>
             <a:spLocks noChangeAspect="1" noGrp="1" noRot="1"/>
           </p:cNvSpPr>
@@ -897,7 +897,7 @@
       </p:sp>
       <p:sp>
         <p:nvSpPr>
-          <p:cNvPr id="670783461" name="Remarques Espace réservé 2"/>
+          <p:cNvPr id="871493879" name="Remarques Espace réservé 2"/>
           <p:cNvSpPr>
             <a:spLocks noGrp="1"/>
           </p:cNvSpPr>
@@ -922,7 +922,7 @@
       </p:sp>
       <p:sp>
         <p:nvSpPr>
-          <p:cNvPr id="956585887" name="Espace réservé pour le numéro de diapositive 3"/>
+          <p:cNvPr id="2048849980" name="Espace réservé pour le numéro de diapositive 3"/>
           <p:cNvSpPr>
             <a:spLocks noGrp="1"/>
           </p:cNvSpPr>
@@ -973,7 +973,7 @@
       </p:grpSpPr>
       <p:sp>
         <p:nvSpPr>
-          <p:cNvPr id="1334745541" name="Espace réservé pour l'image de la diapositive 1"/>
+          <p:cNvPr id="204793652" name="Espace réservé pour l'image de la diapositive 1"/>
           <p:cNvSpPr>
             <a:spLocks noChangeAspect="1" noGrp="1" noRot="1"/>
           </p:cNvSpPr>
@@ -990,7 +990,7 @@
       </p:sp>
       <p:sp>
         <p:nvSpPr>
-          <p:cNvPr id="1084438644" name="Remarques Espace réservé 2"/>
+          <p:cNvPr id="219605830" name="Remarques Espace réservé 2"/>
           <p:cNvSpPr>
             <a:spLocks noGrp="1"/>
           </p:cNvSpPr>
@@ -1015,7 +1015,7 @@
       </p:sp>
       <p:sp>
         <p:nvSpPr>
-          <p:cNvPr id="294104809" name="Espace réservé pour le numéro de diapositive 3"/>
+          <p:cNvPr id="1557253955" name="Espace réservé pour le numéro de diapositive 3"/>
           <p:cNvSpPr>
             <a:spLocks noGrp="1"/>
           </p:cNvSpPr>
@@ -1066,7 +1066,7 @@
       </p:grpSpPr>
       <p:sp>
         <p:nvSpPr>
-          <p:cNvPr id="1713261139" name="Titre 1"/>
+          <p:cNvPr id="1671822722" name="Titre 1"/>
           <p:cNvSpPr>
             <a:spLocks noGrp="1"/>
           </p:cNvSpPr>
@@ -1101,7 +1101,7 @@
       </p:sp>
       <p:sp>
         <p:nvSpPr>
-          <p:cNvPr id="1539660409" name="Sous-titre 2"/>
+          <p:cNvPr id="16260441" name="Sous-titre 2"/>
           <p:cNvSpPr>
             <a:spLocks noGrp="1"/>
           </p:cNvSpPr>
@@ -1169,7 +1169,7 @@
       </p:sp>
       <p:sp>
         <p:nvSpPr>
-          <p:cNvPr id="1332239399" name="Espace réservé de la date 3"/>
+          <p:cNvPr id="258858501" name="Espace réservé de la date 3"/>
           <p:cNvSpPr>
             <a:spLocks noGrp="1"/>
           </p:cNvSpPr>
@@ -1195,7 +1195,7 @@
       </p:sp>
       <p:sp>
         <p:nvSpPr>
-          <p:cNvPr id="970597369" name="Espace réservé du pied de page 4"/>
+          <p:cNvPr id="1190737723" name="Espace réservé du pied de page 4"/>
           <p:cNvSpPr>
             <a:spLocks noGrp="1"/>
           </p:cNvSpPr>
@@ -1217,7 +1217,7 @@
       </p:sp>
       <p:sp>
         <p:nvSpPr>
-          <p:cNvPr id="300693141" name="Espace réservé du numéro de diapositive 5"/>
+          <p:cNvPr id="589231571" name="Espace réservé du numéro de diapositive 5"/>
           <p:cNvSpPr>
             <a:spLocks noGrp="1"/>
           </p:cNvSpPr>
@@ -1268,7 +1268,7 @@
       </p:grpSpPr>
       <p:sp>
         <p:nvSpPr>
-          <p:cNvPr id="1177594058" name="Titre 1"/>
+          <p:cNvPr id="1622189294" name="Titre 1"/>
           <p:cNvSpPr>
             <a:spLocks noGrp="1"/>
           </p:cNvSpPr>
@@ -1294,7 +1294,7 @@
       </p:sp>
       <p:sp>
         <p:nvSpPr>
-          <p:cNvPr id="1817407221" name="Espace réservé du texte vertical 2"/>
+          <p:cNvPr id="2013143805" name="Espace réservé du texte vertical 2"/>
           <p:cNvSpPr>
             <a:spLocks noGrp="1"/>
           </p:cNvSpPr>
@@ -1360,7 +1360,7 @@
       </p:sp>
       <p:sp>
         <p:nvSpPr>
-          <p:cNvPr id="809987668" name="Espace réservé de la date 3"/>
+          <p:cNvPr id="297595612" name="Espace réservé de la date 3"/>
           <p:cNvSpPr>
             <a:spLocks noGrp="1"/>
           </p:cNvSpPr>
@@ -1386,7 +1386,7 @@
       </p:sp>
       <p:sp>
         <p:nvSpPr>
-          <p:cNvPr id="634002153" name="Espace réservé du pied de page 4"/>
+          <p:cNvPr id="814702391" name="Espace réservé du pied de page 4"/>
           <p:cNvSpPr>
             <a:spLocks noGrp="1"/>
           </p:cNvSpPr>
@@ -1408,7 +1408,7 @@
       </p:sp>
       <p:sp>
         <p:nvSpPr>
-          <p:cNvPr id="1279978862" name="Espace réservé du numéro de diapositive 5"/>
+          <p:cNvPr id="1389562612" name="Espace réservé du numéro de diapositive 5"/>
           <p:cNvSpPr>
             <a:spLocks noGrp="1"/>
           </p:cNvSpPr>
@@ -1459,7 +1459,7 @@
       </p:grpSpPr>
       <p:sp>
         <p:nvSpPr>
-          <p:cNvPr id="1665978983" name="Titre vertical 1"/>
+          <p:cNvPr id="387003085" name="Titre vertical 1"/>
           <p:cNvSpPr>
             <a:spLocks noGrp="1"/>
           </p:cNvSpPr>
@@ -1490,7 +1490,7 @@
       </p:sp>
       <p:sp>
         <p:nvSpPr>
-          <p:cNvPr id="725266333" name="Espace réservé du texte vertical 2"/>
+          <p:cNvPr id="1095314429" name="Espace réservé du texte vertical 2"/>
           <p:cNvSpPr>
             <a:spLocks noGrp="1"/>
           </p:cNvSpPr>
@@ -1561,7 +1561,7 @@
       </p:sp>
       <p:sp>
         <p:nvSpPr>
-          <p:cNvPr id="109790626" name="Espace réservé de la date 3"/>
+          <p:cNvPr id="1948580107" name="Espace réservé de la date 3"/>
           <p:cNvSpPr>
             <a:spLocks noGrp="1"/>
           </p:cNvSpPr>
@@ -1587,7 +1587,7 @@
       </p:sp>
       <p:sp>
         <p:nvSpPr>
-          <p:cNvPr id="230881722" name="Espace réservé du pied de page 4"/>
+          <p:cNvPr id="620166189" name="Espace réservé du pied de page 4"/>
           <p:cNvSpPr>
             <a:spLocks noGrp="1"/>
           </p:cNvSpPr>
@@ -1609,7 +1609,7 @@
       </p:sp>
       <p:sp>
         <p:nvSpPr>
-          <p:cNvPr id="1991142719" name="Espace réservé du numéro de diapositive 5"/>
+          <p:cNvPr id="1967482095" name="Espace réservé du numéro de diapositive 5"/>
           <p:cNvSpPr>
             <a:spLocks noGrp="1"/>
           </p:cNvSpPr>
@@ -1660,7 +1660,7 @@
       </p:grpSpPr>
       <p:sp>
         <p:nvSpPr>
-          <p:cNvPr id="1126227538" name="Titre 1"/>
+          <p:cNvPr id="613231721" name="Titre 1"/>
           <p:cNvSpPr>
             <a:spLocks noGrp="1"/>
           </p:cNvSpPr>
@@ -1686,7 +1686,7 @@
       </p:sp>
       <p:sp>
         <p:nvSpPr>
-          <p:cNvPr id="1304445886" name="Espace réservé du contenu 2"/>
+          <p:cNvPr id="1528007959" name="Espace réservé du contenu 2"/>
           <p:cNvSpPr>
             <a:spLocks noGrp="1"/>
           </p:cNvSpPr>
@@ -1752,7 +1752,7 @@
       </p:sp>
       <p:sp>
         <p:nvSpPr>
-          <p:cNvPr id="1546160638" name="Espace réservé de la date 3"/>
+          <p:cNvPr id="535366378" name="Espace réservé de la date 3"/>
           <p:cNvSpPr>
             <a:spLocks noGrp="1"/>
           </p:cNvSpPr>
@@ -1778,7 +1778,7 @@
       </p:sp>
       <p:sp>
         <p:nvSpPr>
-          <p:cNvPr id="1366955425" name="Espace réservé du pied de page 4"/>
+          <p:cNvPr id="1115086580" name="Espace réservé du pied de page 4"/>
           <p:cNvSpPr>
             <a:spLocks noGrp="1"/>
           </p:cNvSpPr>
@@ -1800,7 +1800,7 @@
       </p:sp>
       <p:sp>
         <p:nvSpPr>
-          <p:cNvPr id="55699249" name="Espace réservé du numéro de diapositive 5"/>
+          <p:cNvPr id="1251821726" name="Espace réservé du numéro de diapositive 5"/>
           <p:cNvSpPr>
             <a:spLocks noGrp="1"/>
           </p:cNvSpPr>
@@ -1851,7 +1851,7 @@
       </p:grpSpPr>
       <p:sp>
         <p:nvSpPr>
-          <p:cNvPr id="2033089145" name="Titre 1"/>
+          <p:cNvPr id="1561261570" name="Titre 1"/>
           <p:cNvSpPr>
             <a:spLocks noGrp="1"/>
           </p:cNvSpPr>
@@ -1886,7 +1886,7 @@
       </p:sp>
       <p:sp>
         <p:nvSpPr>
-          <p:cNvPr id="249584431" name="Espace réservé du texte 2"/>
+          <p:cNvPr id="1495685575" name="Espace réservé du texte 2"/>
           <p:cNvSpPr>
             <a:spLocks noGrp="1"/>
           </p:cNvSpPr>
@@ -2008,7 +2008,7 @@
       </p:sp>
       <p:sp>
         <p:nvSpPr>
-          <p:cNvPr id="2118011931" name="Espace réservé de la date 3"/>
+          <p:cNvPr id="1101620109" name="Espace réservé de la date 3"/>
           <p:cNvSpPr>
             <a:spLocks noGrp="1"/>
           </p:cNvSpPr>
@@ -2034,7 +2034,7 @@
       </p:sp>
       <p:sp>
         <p:nvSpPr>
-          <p:cNvPr id="1008190948" name="Espace réservé du pied de page 4"/>
+          <p:cNvPr id="1465449754" name="Espace réservé du pied de page 4"/>
           <p:cNvSpPr>
             <a:spLocks noGrp="1"/>
           </p:cNvSpPr>
@@ -2056,7 +2056,7 @@
       </p:sp>
       <p:sp>
         <p:nvSpPr>
-          <p:cNvPr id="753514709" name="Espace réservé du numéro de diapositive 5"/>
+          <p:cNvPr id="888133361" name="Espace réservé du numéro de diapositive 5"/>
           <p:cNvSpPr>
             <a:spLocks noGrp="1"/>
           </p:cNvSpPr>
@@ -2107,7 +2107,7 @@
       </p:grpSpPr>
       <p:sp>
         <p:nvSpPr>
-          <p:cNvPr id="2115848321" name="Titre 1"/>
+          <p:cNvPr id="175669684" name="Titre 1"/>
           <p:cNvSpPr>
             <a:spLocks noGrp="1"/>
           </p:cNvSpPr>
@@ -2133,7 +2133,7 @@
       </p:sp>
       <p:sp>
         <p:nvSpPr>
-          <p:cNvPr id="2098540698" name="Espace réservé du contenu 2"/>
+          <p:cNvPr id="275853902" name="Espace réservé du contenu 2"/>
           <p:cNvSpPr>
             <a:spLocks noGrp="1"/>
           </p:cNvSpPr>
@@ -2204,7 +2204,7 @@
       </p:sp>
       <p:sp>
         <p:nvSpPr>
-          <p:cNvPr id="1540818967" name="Espace réservé du contenu 3"/>
+          <p:cNvPr id="711741940" name="Espace réservé du contenu 3"/>
           <p:cNvSpPr>
             <a:spLocks noGrp="1"/>
           </p:cNvSpPr>
@@ -2275,7 +2275,7 @@
       </p:sp>
       <p:sp>
         <p:nvSpPr>
-          <p:cNvPr id="1881401899" name="Espace réservé de la date 4"/>
+          <p:cNvPr id="1774454442" name="Espace réservé de la date 4"/>
           <p:cNvSpPr>
             <a:spLocks noGrp="1"/>
           </p:cNvSpPr>
@@ -2301,7 +2301,7 @@
       </p:sp>
       <p:sp>
         <p:nvSpPr>
-          <p:cNvPr id="663723077" name="Espace réservé du pied de page 5"/>
+          <p:cNvPr id="131227308" name="Espace réservé du pied de page 5"/>
           <p:cNvSpPr>
             <a:spLocks noGrp="1"/>
           </p:cNvSpPr>
@@ -2323,7 +2323,7 @@
       </p:sp>
       <p:sp>
         <p:nvSpPr>
-          <p:cNvPr id="2091203750" name="Espace réservé du numéro de diapositive 6"/>
+          <p:cNvPr id="1371119021" name="Espace réservé du numéro de diapositive 6"/>
           <p:cNvSpPr>
             <a:spLocks noGrp="1"/>
           </p:cNvSpPr>
@@ -2374,7 +2374,7 @@
       </p:grpSpPr>
       <p:sp>
         <p:nvSpPr>
-          <p:cNvPr id="670921614" name="Titre 1"/>
+          <p:cNvPr id="1348707153" name="Titre 1"/>
           <p:cNvSpPr>
             <a:spLocks noGrp="1"/>
           </p:cNvSpPr>
@@ -2405,7 +2405,7 @@
       </p:sp>
       <p:sp>
         <p:nvSpPr>
-          <p:cNvPr id="1210370524" name="Espace réservé du texte 2"/>
+          <p:cNvPr id="1704303569" name="Espace réservé du texte 2"/>
           <p:cNvSpPr>
             <a:spLocks noGrp="1"/>
           </p:cNvSpPr>
@@ -2473,7 +2473,7 @@
       </p:sp>
       <p:sp>
         <p:nvSpPr>
-          <p:cNvPr id="1899952155" name="Espace réservé du contenu 3"/>
+          <p:cNvPr id="99380269" name="Espace réservé du contenu 3"/>
           <p:cNvSpPr>
             <a:spLocks noGrp="1"/>
           </p:cNvSpPr>
@@ -2544,7 +2544,7 @@
       </p:sp>
       <p:sp>
         <p:nvSpPr>
-          <p:cNvPr id="289848083" name="Espace réservé du texte 4"/>
+          <p:cNvPr id="1151550294" name="Espace réservé du texte 4"/>
           <p:cNvSpPr>
             <a:spLocks noGrp="1"/>
           </p:cNvSpPr>
@@ -2612,7 +2612,7 @@
       </p:sp>
       <p:sp>
         <p:nvSpPr>
-          <p:cNvPr id="593061409" name="Espace réservé du contenu 5"/>
+          <p:cNvPr id="579729756" name="Espace réservé du contenu 5"/>
           <p:cNvSpPr>
             <a:spLocks noGrp="1"/>
           </p:cNvSpPr>
@@ -2683,7 +2683,7 @@
       </p:sp>
       <p:sp>
         <p:nvSpPr>
-          <p:cNvPr id="1161099622" name="Espace réservé de la date 6"/>
+          <p:cNvPr id="932128150" name="Espace réservé de la date 6"/>
           <p:cNvSpPr>
             <a:spLocks noGrp="1"/>
           </p:cNvSpPr>
@@ -2709,7 +2709,7 @@
       </p:sp>
       <p:sp>
         <p:nvSpPr>
-          <p:cNvPr id="75967631" name="Espace réservé du pied de page 7"/>
+          <p:cNvPr id="916722548" name="Espace réservé du pied de page 7"/>
           <p:cNvSpPr>
             <a:spLocks noGrp="1"/>
           </p:cNvSpPr>
@@ -2731,7 +2731,7 @@
       </p:sp>
       <p:sp>
         <p:nvSpPr>
-          <p:cNvPr id="1945033947" name="Espace réservé du numéro de diapositive 8"/>
+          <p:cNvPr id="564363487" name="Espace réservé du numéro de diapositive 8"/>
           <p:cNvSpPr>
             <a:spLocks noGrp="1"/>
           </p:cNvSpPr>
@@ -2782,7 +2782,7 @@
       </p:grpSpPr>
       <p:sp>
         <p:nvSpPr>
-          <p:cNvPr id="1387182870" name="Titre 1"/>
+          <p:cNvPr id="767477844" name="Titre 1"/>
           <p:cNvSpPr>
             <a:spLocks noGrp="1"/>
           </p:cNvSpPr>
@@ -2808,7 +2808,7 @@
       </p:sp>
       <p:sp>
         <p:nvSpPr>
-          <p:cNvPr id="1751577412" name="Espace réservé de la date 2"/>
+          <p:cNvPr id="1106676256" name="Espace réservé de la date 2"/>
           <p:cNvSpPr>
             <a:spLocks noGrp="1"/>
           </p:cNvSpPr>
@@ -2834,7 +2834,7 @@
       </p:sp>
       <p:sp>
         <p:nvSpPr>
-          <p:cNvPr id="2078304716" name="Espace réservé du pied de page 3"/>
+          <p:cNvPr id="985897514" name="Espace réservé du pied de page 3"/>
           <p:cNvSpPr>
             <a:spLocks noGrp="1"/>
           </p:cNvSpPr>
@@ -2856,7 +2856,7 @@
       </p:sp>
       <p:sp>
         <p:nvSpPr>
-          <p:cNvPr id="628792968" name="Espace réservé du numéro de diapositive 4"/>
+          <p:cNvPr id="1228011893" name="Espace réservé du numéro de diapositive 4"/>
           <p:cNvSpPr>
             <a:spLocks noGrp="1"/>
           </p:cNvSpPr>
@@ -2907,7 +2907,7 @@
       </p:grpSpPr>
       <p:sp>
         <p:nvSpPr>
-          <p:cNvPr id="295439632" name="Espace réservé de la date 1"/>
+          <p:cNvPr id="1892623325" name="Espace réservé de la date 1"/>
           <p:cNvSpPr>
             <a:spLocks noGrp="1"/>
           </p:cNvSpPr>
@@ -2933,7 +2933,7 @@
       </p:sp>
       <p:sp>
         <p:nvSpPr>
-          <p:cNvPr id="1763293912" name="Espace réservé du pied de page 2"/>
+          <p:cNvPr id="825536378" name="Espace réservé du pied de page 2"/>
           <p:cNvSpPr>
             <a:spLocks noGrp="1"/>
           </p:cNvSpPr>
@@ -2955,7 +2955,7 @@
       </p:sp>
       <p:sp>
         <p:nvSpPr>
-          <p:cNvPr id="1772389998" name="Espace réservé du numéro de diapositive 3"/>
+          <p:cNvPr id="584786259" name="Espace réservé du numéro de diapositive 3"/>
           <p:cNvSpPr>
             <a:spLocks noGrp="1"/>
           </p:cNvSpPr>
@@ -3006,7 +3006,7 @@
       </p:grpSpPr>
       <p:sp>
         <p:nvSpPr>
-          <p:cNvPr id="734229751" name="Titre 1"/>
+          <p:cNvPr id="13348717" name="Titre 1"/>
           <p:cNvSpPr>
             <a:spLocks noGrp="1"/>
           </p:cNvSpPr>
@@ -3041,7 +3041,7 @@
       </p:sp>
       <p:sp>
         <p:nvSpPr>
-          <p:cNvPr id="1722997747" name="Espace réservé du contenu 2"/>
+          <p:cNvPr id="20836871" name="Espace réservé du contenu 2"/>
           <p:cNvSpPr>
             <a:spLocks noGrp="1"/>
           </p:cNvSpPr>
@@ -3140,7 +3140,7 @@
       </p:sp>
       <p:sp>
         <p:nvSpPr>
-          <p:cNvPr id="912405373" name="Espace réservé du texte 3"/>
+          <p:cNvPr id="1163623035" name="Espace réservé du texte 3"/>
           <p:cNvSpPr>
             <a:spLocks noGrp="1"/>
           </p:cNvSpPr>
@@ -3208,7 +3208,7 @@
       </p:sp>
       <p:sp>
         <p:nvSpPr>
-          <p:cNvPr id="1532483066" name="Espace réservé de la date 4"/>
+          <p:cNvPr id="1433571980" name="Espace réservé de la date 4"/>
           <p:cNvSpPr>
             <a:spLocks noGrp="1"/>
           </p:cNvSpPr>
@@ -3234,7 +3234,7 @@
       </p:sp>
       <p:sp>
         <p:nvSpPr>
-          <p:cNvPr id="181529441" name="Espace réservé du pied de page 5"/>
+          <p:cNvPr id="2125251971" name="Espace réservé du pied de page 5"/>
           <p:cNvSpPr>
             <a:spLocks noGrp="1"/>
           </p:cNvSpPr>
@@ -3256,7 +3256,7 @@
       </p:sp>
       <p:sp>
         <p:nvSpPr>
-          <p:cNvPr id="1990196536" name="Espace réservé du numéro de diapositive 6"/>
+          <p:cNvPr id="1089404012" name="Espace réservé du numéro de diapositive 6"/>
           <p:cNvSpPr>
             <a:spLocks noGrp="1"/>
           </p:cNvSpPr>
@@ -3307,7 +3307,7 @@
       </p:grpSpPr>
       <p:sp>
         <p:nvSpPr>
-          <p:cNvPr id="650888267" name="Titre 1"/>
+          <p:cNvPr id="945704420" name="Titre 1"/>
           <p:cNvSpPr>
             <a:spLocks noGrp="1"/>
           </p:cNvSpPr>
@@ -3342,7 +3342,7 @@
       </p:sp>
       <p:sp>
         <p:nvSpPr>
-          <p:cNvPr id="291073266" name="Espace réservé pour une image 2"/>
+          <p:cNvPr id="906052916" name="Espace réservé pour une image 2"/>
           <p:cNvSpPr>
             <a:spLocks noChangeAspect="1" noGrp="1"/>
           </p:cNvSpPr>
@@ -3410,7 +3410,7 @@
       </p:sp>
       <p:sp>
         <p:nvSpPr>
-          <p:cNvPr id="629335436" name="Espace réservé du texte 3"/>
+          <p:cNvPr id="4321236" name="Espace réservé du texte 3"/>
           <p:cNvSpPr>
             <a:spLocks noGrp="1"/>
           </p:cNvSpPr>
@@ -3478,7 +3478,7 @@
       </p:sp>
       <p:sp>
         <p:nvSpPr>
-          <p:cNvPr id="220135532" name="Espace réservé de la date 4"/>
+          <p:cNvPr id="1273131335" name="Espace réservé de la date 4"/>
           <p:cNvSpPr>
             <a:spLocks noGrp="1"/>
           </p:cNvSpPr>
@@ -3504,7 +3504,7 @@
       </p:sp>
       <p:sp>
         <p:nvSpPr>
-          <p:cNvPr id="1493081883" name="Espace réservé du pied de page 5"/>
+          <p:cNvPr id="264732149" name="Espace réservé du pied de page 5"/>
           <p:cNvSpPr>
             <a:spLocks noGrp="1"/>
           </p:cNvSpPr>
@@ -3526,7 +3526,7 @@
       </p:sp>
       <p:sp>
         <p:nvSpPr>
-          <p:cNvPr id="2115468867" name="Espace réservé du numéro de diapositive 6"/>
+          <p:cNvPr id="693442155" name="Espace réservé du numéro de diapositive 6"/>
           <p:cNvSpPr>
             <a:spLocks noGrp="1"/>
           </p:cNvSpPr>
@@ -3582,7 +3582,7 @@
       </p:grpSpPr>
       <p:sp>
         <p:nvSpPr>
-          <p:cNvPr id="1251679794" name="Espace réservé du titre 1"/>
+          <p:cNvPr id="346127240" name="Espace réservé du titre 1"/>
           <p:cNvSpPr>
             <a:spLocks noGrp="1"/>
           </p:cNvSpPr>
@@ -3618,7 +3618,7 @@
       </p:sp>
       <p:sp>
         <p:nvSpPr>
-          <p:cNvPr id="998371677" name="Espace réservé du texte 2"/>
+          <p:cNvPr id="1704175126" name="Espace réservé du texte 2"/>
           <p:cNvSpPr>
             <a:spLocks noGrp="1"/>
           </p:cNvSpPr>
@@ -3694,7 +3694,7 @@
       </p:sp>
       <p:sp>
         <p:nvSpPr>
-          <p:cNvPr id="1690006027" name="Espace réservé de la date 3"/>
+          <p:cNvPr id="2065871367" name="Espace réservé de la date 3"/>
           <p:cNvSpPr>
             <a:spLocks noGrp="1"/>
           </p:cNvSpPr>
@@ -3738,7 +3738,7 @@
       </p:sp>
       <p:sp>
         <p:nvSpPr>
-          <p:cNvPr id="206252069" name="Espace réservé du pied de page 4"/>
+          <p:cNvPr id="1190398729" name="Espace réservé du pied de page 4"/>
           <p:cNvSpPr>
             <a:spLocks noGrp="1"/>
           </p:cNvSpPr>
@@ -3778,7 +3778,7 @@
       </p:sp>
       <p:sp>
         <p:nvSpPr>
-          <p:cNvPr id="1732464920" name="Espace réservé du numéro de diapositive 5"/>
+          <p:cNvPr id="2066248205" name="Espace réservé du numéro de diapositive 5"/>
           <p:cNvSpPr>
             <a:spLocks noGrp="1"/>
           </p:cNvSpPr>
@@ -4138,7 +4138,7 @@
       </p:grpSpPr>
       <p:cxnSp>
         <p:nvCxnSpPr>
-          <p:cNvPr id="326755166" name="Connecteur droit 1568760680"/>
+          <p:cNvPr id="1855900895" name="Connecteur droit 1568760680"/>
           <p:cNvCxnSpPr/>
           <p:nvPr/>
         </p:nvCxnSpPr>
@@ -4180,7 +4180,7 @@
       </p:cxnSp>
       <p:sp>
         <p:nvSpPr>
-          <p:cNvPr id="327096227" name="ZoneTexte 1868728971"/>
+          <p:cNvPr id="671349321" name="ZoneTexte 1868728971"/>
           <p:cNvSpPr txBox="1"/>
           <p:nvPr/>
         </p:nvSpPr>
@@ -4220,13 +4220,13 @@
       </p:sp>
       <p:cxnSp>
         <p:nvCxnSpPr>
-          <p:cNvPr id="326489437" name="Connecteur droit 806540798"/>
+          <p:cNvPr id="305246240" name="Connecteur droit 806540798"/>
           <p:cNvCxnSpPr/>
           <p:nvPr/>
         </p:nvCxnSpPr>
         <p:spPr bwMode="auto">
           <a:xfrm flipV="1">
-            <a:off x="972" y="2197396"/>
+            <a:off x="972" y="2110804"/>
             <a:ext cx="6924672" cy="0"/>
           </a:xfrm>
           <a:prstGeom prst="line">
@@ -4262,13 +4262,13 @@
       </p:cxnSp>
       <p:sp>
         <p:nvSpPr>
-          <p:cNvPr id="1508666195" name="ZoneTexte 406616703"/>
+          <p:cNvPr id="1919376985" name="ZoneTexte 406616703"/>
           <p:cNvSpPr txBox="1"/>
           <p:nvPr/>
         </p:nvSpPr>
         <p:spPr bwMode="auto">
           <a:xfrm flipH="0" flipV="0">
-            <a:off x="45901" y="2014335"/>
+            <a:off x="45900" y="1927743"/>
             <a:ext cx="3360981" cy="366119"/>
           </a:xfrm>
           <a:prstGeom prst="rect">
@@ -4302,7 +4302,7 @@
       </p:sp>
       <p:cxnSp>
         <p:nvCxnSpPr>
-          <p:cNvPr id="1378018976" name="Connecteur droit 858914340"/>
+          <p:cNvPr id="699142866" name="Connecteur droit 858914340"/>
           <p:cNvCxnSpPr/>
           <p:nvPr/>
         </p:nvCxnSpPr>
@@ -4344,7 +4344,7 @@
       </p:cxnSp>
       <p:sp>
         <p:nvSpPr>
-          <p:cNvPr id="1210505139" name="ZoneTexte 2018177722"/>
+          <p:cNvPr id="1555229522" name="ZoneTexte 2018177722"/>
           <p:cNvSpPr txBox="1"/>
           <p:nvPr/>
         </p:nvSpPr>
@@ -4391,7 +4391,7 @@
       </p:sp>
       <p:sp>
         <p:nvSpPr>
-          <p:cNvPr id="368995461" name="ZoneTexte 519900862"/>
+          <p:cNvPr id="1072696093" name="ZoneTexte 519900862"/>
           <p:cNvSpPr txBox="1"/>
           <p:nvPr/>
         </p:nvSpPr>
@@ -4653,7 +4653,7 @@
       </p:sp>
       <p:sp>
         <p:nvSpPr>
-          <p:cNvPr id="939903895" name="Rectangle : avec coins arrondis en haut 838565229"/>
+          <p:cNvPr id="1532268438" name="Rectangle : avec coins arrondis en haut 838565229"/>
           <p:cNvSpPr/>
           <p:nvPr/>
         </p:nvSpPr>
@@ -4699,7 +4699,7 @@
       </p:sp>
       <p:sp>
         <p:nvSpPr>
-          <p:cNvPr id="1208937042" name="ZoneTexte 448541368"/>
+          <p:cNvPr id="1203038589" name="ZoneTexte 448541368"/>
           <p:cNvSpPr txBox="1"/>
           <p:nvPr/>
         </p:nvSpPr>
@@ -4780,7 +4780,7 @@
       </p:sp>
       <p:sp>
         <p:nvSpPr>
-          <p:cNvPr id="278079090" name="Rectangle : avec coins arrondis en haut 1165584529"/>
+          <p:cNvPr id="173366445" name="Rectangle : avec coins arrondis en haut 1165584529"/>
           <p:cNvSpPr/>
           <p:nvPr/>
         </p:nvSpPr>
@@ -4826,7 +4826,7 @@
       </p:sp>
       <p:sp>
         <p:nvSpPr>
-          <p:cNvPr id="209534049" name="Flèche : pentagone 1880610112"/>
+          <p:cNvPr id="1862527767" name="Flèche : pentagone 1880610112"/>
           <p:cNvSpPr/>
           <p:nvPr/>
         </p:nvSpPr>
@@ -4871,7 +4871,7 @@
       </p:sp>
       <p:sp>
         <p:nvSpPr>
-          <p:cNvPr id="530328058" name="Flèche : pentagone 446859139"/>
+          <p:cNvPr id="1463613950" name="Flèche : pentagone 446859139"/>
           <p:cNvSpPr/>
           <p:nvPr/>
         </p:nvSpPr>
@@ -4916,7 +4916,7 @@
       </p:sp>
       <p:sp>
         <p:nvSpPr>
-          <p:cNvPr id="1275593855" name="Flèche : pentagone 2055848356"/>
+          <p:cNvPr id="1900862832" name="Flèche : pentagone 2055848356"/>
           <p:cNvSpPr/>
           <p:nvPr/>
         </p:nvSpPr>
@@ -4961,7 +4961,7 @@
       </p:sp>
       <p:sp>
         <p:nvSpPr>
-          <p:cNvPr id="532000997" name="Flèche : pentagone 1980093981"/>
+          <p:cNvPr id="1785460251" name="Flèche : pentagone 1980093981"/>
           <p:cNvSpPr/>
           <p:nvPr/>
         </p:nvSpPr>
@@ -5006,7 +5006,7 @@
       </p:sp>
       <p:sp>
         <p:nvSpPr>
-          <p:cNvPr id="280149540" name="Flèche : pentagone 905284374"/>
+          <p:cNvPr id="1738345468" name="Flèche : pentagone 905284374"/>
           <p:cNvSpPr/>
           <p:nvPr/>
         </p:nvSpPr>
@@ -5051,14 +5051,14 @@
       </p:sp>
       <p:sp>
         <p:nvSpPr>
-          <p:cNvPr id="348950233" name="ZoneTexte 880464430"/>
+          <p:cNvPr id="1946409386" name="ZoneTexte 880464430"/>
           <p:cNvSpPr txBox="1"/>
           <p:nvPr/>
         </p:nvSpPr>
         <p:spPr bwMode="auto">
           <a:xfrm flipH="0" flipV="0">
-            <a:off x="3019132" y="8033530"/>
-            <a:ext cx="3851920" cy="579479"/>
+            <a:off x="3019131" y="8033529"/>
+            <a:ext cx="3864879" cy="579479"/>
           </a:xfrm>
           <a:prstGeom prst="rect">
             <a:avLst/>
@@ -5125,7 +5125,7 @@
                   </a:schemeClr>
                 </a:solidFill>
               </a:rPr>
-              <a:t>Après un test de résistance, cochez une case de stress. </a:t>
+              <a:t>Après un test de résistance réussi le MJ peut vous faire cocher une case de stress. </a:t>
             </a:r>
             <a:r>
               <a:rPr sz="800">
@@ -5232,7 +5232,7 @@
       </p:sp>
       <p:sp>
         <p:nvSpPr>
-          <p:cNvPr id="1631389451" name="ZoneTexte 1302587497"/>
+          <p:cNvPr id="2032708158" name="ZoneTexte 1302587497"/>
           <p:cNvSpPr txBox="1"/>
           <p:nvPr/>
         </p:nvSpPr>
@@ -5530,7 +5530,7 @@
       </p:sp>
       <p:cxnSp>
         <p:nvCxnSpPr>
-          <p:cNvPr id="1231553012" name="Connecteur droit 342798987"/>
+          <p:cNvPr id="779043747" name="Connecteur droit 342798987"/>
           <p:cNvCxnSpPr/>
           <p:nvPr/>
         </p:nvCxnSpPr>
@@ -5572,7 +5572,7 @@
       </p:cxnSp>
       <p:sp>
         <p:nvSpPr>
-          <p:cNvPr id="400014314" name="ZoneTexte 966486802"/>
+          <p:cNvPr id="1299181451" name="ZoneTexte 966486802"/>
           <p:cNvSpPr txBox="1"/>
           <p:nvPr/>
         </p:nvSpPr>
@@ -5612,7 +5612,7 @@
       </p:sp>
       <p:sp>
         <p:nvSpPr>
-          <p:cNvPr id="1425222587" name="Rectangle 38344096"/>
+          <p:cNvPr id="234644903" name="Rectangle 38344096"/>
           <p:cNvSpPr/>
           <p:nvPr/>
         </p:nvSpPr>
@@ -5652,13 +5652,13 @@
       </p:sp>
       <p:sp>
         <p:nvSpPr>
-          <p:cNvPr id="572675846" name="Rectangle 954364527"/>
+          <p:cNvPr id="726643718" name="Rectangle 954364527"/>
           <p:cNvSpPr/>
           <p:nvPr/>
         </p:nvSpPr>
         <p:spPr bwMode="auto">
           <a:xfrm flipH="0" flipV="0">
-            <a:off x="6688317" y="561971"/>
+            <a:off x="6688316" y="475380"/>
             <a:ext cx="162577" cy="1561405"/>
           </a:xfrm>
           <a:prstGeom prst="rect">
@@ -5692,13 +5692,13 @@
       </p:sp>
       <p:sp>
         <p:nvSpPr>
-          <p:cNvPr id="307332978" name="ZoneTexte 1527388901"/>
+          <p:cNvPr id="1878974112" name="ZoneTexte 1527388901"/>
           <p:cNvSpPr txBox="1"/>
           <p:nvPr/>
         </p:nvSpPr>
         <p:spPr bwMode="auto">
           <a:xfrm flipH="0" flipV="0">
-            <a:off x="4547592" y="2419866"/>
+            <a:off x="4547592" y="2333274"/>
             <a:ext cx="2353660" cy="2465977"/>
           </a:xfrm>
           <a:prstGeom prst="rect">
@@ -5914,7 +5914,7 @@
       </p:sp>
       <p:sp>
         <p:nvSpPr>
-          <p:cNvPr id="840280760" name="ZoneTexte 1440859034"/>
+          <p:cNvPr id="1052480000" name="ZoneTexte 1440859034"/>
           <p:cNvSpPr txBox="1"/>
           <p:nvPr/>
         </p:nvSpPr>
@@ -5965,7 +5965,7 @@
       </p:sp>
       <p:cxnSp>
         <p:nvCxnSpPr>
-          <p:cNvPr id="565996585" name="Connecteur droit 858914340"/>
+          <p:cNvPr id="508114051" name="Connecteur droit 858914340"/>
           <p:cNvCxnSpPr/>
           <p:nvPr/>
         </p:nvCxnSpPr>
@@ -6007,7 +6007,7 @@
       </p:cxnSp>
       <p:sp>
         <p:nvSpPr>
-          <p:cNvPr id="431505618" name="ZoneTexte 2018177722"/>
+          <p:cNvPr id="2099823931" name="ZoneTexte 2018177722"/>
           <p:cNvSpPr txBox="1"/>
           <p:nvPr/>
         </p:nvSpPr>
@@ -6054,7 +6054,7 @@
       </p:sp>
       <p:sp>
         <p:nvSpPr>
-          <p:cNvPr id="2087407717" name=""/>
+          <p:cNvPr id="1718314393" name=""/>
           <p:cNvSpPr txBox="1"/>
           <p:nvPr/>
         </p:nvSpPr>
@@ -6156,13 +6156,13 @@
       </p:sp>
       <p:cxnSp>
         <p:nvCxnSpPr>
-          <p:cNvPr id="650387508" name="Connecteur droit 858914340"/>
+          <p:cNvPr id="811730211" name="Connecteur droit 858914340"/>
           <p:cNvCxnSpPr/>
           <p:nvPr/>
         </p:nvCxnSpPr>
         <p:spPr bwMode="auto">
           <a:xfrm flipH="0" flipV="1">
-            <a:off x="4547592" y="5050662"/>
+            <a:off x="4547592" y="4900570"/>
             <a:ext cx="2320902" cy="0"/>
           </a:xfrm>
           <a:prstGeom prst="line">
@@ -6198,13 +6198,13 @@
       </p:cxnSp>
       <p:sp>
         <p:nvSpPr>
-          <p:cNvPr id="1525447510" name="ZoneTexte 2018177722"/>
+          <p:cNvPr id="851922046" name="ZoneTexte 2018177722"/>
           <p:cNvSpPr txBox="1"/>
           <p:nvPr/>
         </p:nvSpPr>
         <p:spPr bwMode="auto">
           <a:xfrm flipH="0" flipV="0">
-            <a:off x="4601547" y="4867598"/>
+            <a:off x="4601547" y="4717506"/>
             <a:ext cx="1831714" cy="366119"/>
           </a:xfrm>
           <a:prstGeom prst="rect">
@@ -6256,14 +6256,14 @@
       </p:sp>
       <p:sp>
         <p:nvSpPr>
-          <p:cNvPr id="1120277642" name=""/>
+          <p:cNvPr id="758371853" name=""/>
           <p:cNvSpPr txBox="1"/>
           <p:nvPr/>
         </p:nvSpPr>
         <p:spPr bwMode="auto">
           <a:xfrm rot="0" flipH="0" flipV="0">
-            <a:off x="4547592" y="5184190"/>
-            <a:ext cx="2328827" cy="1036679"/>
+            <a:off x="4547592" y="5013894"/>
+            <a:ext cx="2321301" cy="1341479"/>
           </a:xfrm>
           <a:prstGeom prst="rect">
             <a:avLst/>
@@ -6355,7 +6355,7 @@
                 <a:ea typeface="Arial"/>
                 <a:cs typeface="Arial"/>
               </a:rPr>
-              <a:t> à la valeur de compétence ou de résistance avec 1d100.</a:t>
+              <a:t> à la valeur de compétence ou de résistance avec 1d100. 1 est toujours une réussite, 100 toujours un échec.</a:t>
             </a:r>
             <a:r>
               <a:rPr lang="fr-FR" sz="800" b="0" i="0" u="none" strike="noStrike" cap="none" spc="0">
@@ -6367,6 +6367,76 @@
                 <a:cs typeface="Arial"/>
               </a:rPr>
               <a:t> </a:t>
+            </a:r>
+            <a:r>
+              <a:rPr lang="fr-FR" sz="800" b="0" i="0" u="none" strike="noStrike" cap="none" spc="0">
+                <a:solidFill>
+                  <a:schemeClr val="tx1">
+                    <a:lumMod val="50000"/>
+                    <a:lumOff val="50000"/>
+                  </a:schemeClr>
+                </a:solidFill>
+                <a:latin typeface="Arial"/>
+                <a:ea typeface="Arial"/>
+                <a:cs typeface="Arial"/>
+              </a:rPr>
+              <a:t>Si vous obtenez un </a:t>
+            </a:r>
+            <a:r>
+              <a:rPr lang="fr-FR" sz="800" b="1" i="0" u="none" strike="noStrike" cap="none" spc="0">
+                <a:solidFill>
+                  <a:schemeClr val="tx1">
+                    <a:lumMod val="50000"/>
+                    <a:lumOff val="50000"/>
+                  </a:schemeClr>
+                </a:solidFill>
+                <a:latin typeface="Arial"/>
+                <a:ea typeface="Arial"/>
+                <a:cs typeface="Arial"/>
+              </a:rPr>
+              <a:t>double</a:t>
+            </a:r>
+            <a:r>
+              <a:rPr lang="fr-FR" sz="800" b="0" i="0" u="none" strike="noStrike" cap="none" spc="0">
+                <a:solidFill>
+                  <a:schemeClr val="tx1">
+                    <a:lumMod val="50000"/>
+                    <a:lumOff val="50000"/>
+                  </a:schemeClr>
+                </a:solidFill>
+                <a:latin typeface="Arial"/>
+                <a:ea typeface="Arial"/>
+                <a:cs typeface="Arial"/>
+              </a:rPr>
+              <a:t>, c’est un </a:t>
+            </a:r>
+            <a:r>
+              <a:rPr lang="fr-FR" sz="800" b="1" i="0" u="none" strike="noStrike" cap="none" spc="0">
+                <a:solidFill>
+                  <a:schemeClr val="tx1">
+                    <a:lumMod val="50000"/>
+                    <a:lumOff val="50000"/>
+                  </a:schemeClr>
+                </a:solidFill>
+                <a:latin typeface="Arial"/>
+                <a:ea typeface="Arial"/>
+                <a:cs typeface="Arial"/>
+              </a:rPr>
+              <a:t>résultat critique</a:t>
+            </a:r>
+            <a:r>
+              <a:rPr lang="fr-FR" sz="800" b="0" i="0" u="none" strike="noStrike" cap="none" spc="0">
+                <a:solidFill>
+                  <a:schemeClr val="tx1">
+                    <a:lumMod val="50000"/>
+                    <a:lumOff val="50000"/>
+                  </a:schemeClr>
+                </a:solidFill>
+                <a:latin typeface="Arial"/>
+                <a:ea typeface="Arial"/>
+                <a:cs typeface="Arial"/>
+              </a:rPr>
+              <a:t> !</a:t>
             </a:r>
             <a:endParaRPr lang="fr-FR" sz="800" b="0" i="0" u="none" strike="noStrike" cap="none" spc="0">
               <a:solidFill>
@@ -6481,31 +6551,6 @@
               </a:spcAft>
               <a:defRPr/>
             </a:pPr>
-            <a:endParaRPr lang="fr-FR" sz="400" b="0" i="0" u="none" strike="noStrike" cap="none" spc="0">
-              <a:solidFill>
-                <a:schemeClr val="tx1">
-                  <a:lumMod val="50000"/>
-                  <a:lumOff val="50000"/>
-                </a:schemeClr>
-              </a:solidFill>
-              <a:latin typeface="Arial"/>
-              <a:ea typeface="Arial"/>
-              <a:cs typeface="Arial"/>
-            </a:endParaRPr>
-          </a:p>
-          <a:p>
-            <a:pPr marL="0" marR="0" indent="0" algn="l">
-              <a:lnSpc>
-                <a:spcPct val="100000"/>
-              </a:lnSpc>
-              <a:spcBef>
-                <a:spcPts val="0"/>
-              </a:spcBef>
-              <a:spcAft>
-                <a:spcPts val="0"/>
-              </a:spcAft>
-              <a:defRPr/>
-            </a:pPr>
             <a:r>
               <a:rPr lang="fr-FR" sz="800" b="0" i="0" u="none" strike="noStrike" cap="none" spc="0">
                 <a:solidFill>
@@ -6546,7 +6591,7 @@
                 <a:ea typeface="Arial"/>
                 <a:cs typeface="Arial"/>
               </a:rPr>
-              <a:t>cochée diminue votre score de compétence de 10 points. </a:t>
+              <a:t>cochée impose un malus de compétences de 10 points.</a:t>
             </a:r>
             <a:endParaRPr lang="fr-FR" sz="800" b="0" i="0" u="none" strike="noStrike" cap="none" spc="0">
               <a:solidFill>
@@ -6564,13 +6609,13 @@
       </p:sp>
       <p:sp>
         <p:nvSpPr>
-          <p:cNvPr id="1464651655" name="ZoneTexte 2021443538"/>
+          <p:cNvPr id="1641416899" name="ZoneTexte 2021443538"/>
           <p:cNvSpPr txBox="1"/>
           <p:nvPr/>
         </p:nvSpPr>
         <p:spPr bwMode="auto">
           <a:xfrm flipH="0" flipV="0">
-            <a:off x="75829" y="5620394"/>
+            <a:off x="75828" y="5533803"/>
             <a:ext cx="1702735" cy="643788"/>
           </a:xfrm>
           <a:prstGeom prst="rect">
@@ -6648,13 +6693,13 @@
       </p:sp>
       <p:sp>
         <p:nvSpPr>
-          <p:cNvPr id="2105541748" name="ZoneTexte 1075280509"/>
+          <p:cNvPr id="2133524732" name="ZoneTexte 1075280509"/>
           <p:cNvSpPr txBox="1"/>
           <p:nvPr/>
         </p:nvSpPr>
         <p:spPr bwMode="auto">
           <a:xfrm flipH="0" flipV="0">
-            <a:off x="44273" y="3699075"/>
+            <a:off x="44272" y="3612484"/>
             <a:ext cx="1746473" cy="643788"/>
           </a:xfrm>
           <a:prstGeom prst="rect">
@@ -6732,13 +6777,13 @@
       </p:sp>
       <p:sp>
         <p:nvSpPr>
-          <p:cNvPr id="666648485" name="ZoneTexte 824413856"/>
+          <p:cNvPr id="1355523757" name="ZoneTexte 824413856"/>
           <p:cNvSpPr txBox="1"/>
           <p:nvPr/>
         </p:nvSpPr>
         <p:spPr bwMode="auto">
           <a:xfrm>
-            <a:off x="40731" y="4341082"/>
+            <a:off x="40730" y="4254490"/>
             <a:ext cx="1737113" cy="643788"/>
           </a:xfrm>
           <a:prstGeom prst="rect">
@@ -6816,13 +6861,13 @@
       </p:sp>
       <p:sp>
         <p:nvSpPr>
-          <p:cNvPr id="1050756335" name="ZoneTexte 1036656844"/>
+          <p:cNvPr id="404894541" name="ZoneTexte 1036656844"/>
           <p:cNvSpPr txBox="1"/>
           <p:nvPr/>
         </p:nvSpPr>
         <p:spPr bwMode="auto">
           <a:xfrm flipH="0" flipV="0">
-            <a:off x="2359942" y="3704096"/>
+            <a:off x="2359941" y="3617505"/>
             <a:ext cx="1695711" cy="643788"/>
           </a:xfrm>
           <a:prstGeom prst="rect">
@@ -6900,13 +6945,13 @@
       </p:sp>
       <p:sp>
         <p:nvSpPr>
-          <p:cNvPr id="1505439446" name="ZoneTexte 226284734"/>
+          <p:cNvPr id="1272560865" name="ZoneTexte 226284734"/>
           <p:cNvSpPr txBox="1"/>
           <p:nvPr/>
         </p:nvSpPr>
         <p:spPr bwMode="auto">
           <a:xfrm flipH="0" flipV="0">
-            <a:off x="45352" y="3062625"/>
+            <a:off x="45351" y="2976033"/>
             <a:ext cx="1738193" cy="643788"/>
           </a:xfrm>
           <a:prstGeom prst="rect">
@@ -6984,13 +7029,13 @@
       </p:sp>
       <p:sp>
         <p:nvSpPr>
-          <p:cNvPr id="236986378" name="ZoneTexte 162158187"/>
+          <p:cNvPr id="2037134119" name="ZoneTexte 162158187"/>
           <p:cNvSpPr txBox="1"/>
           <p:nvPr/>
         </p:nvSpPr>
         <p:spPr bwMode="auto">
           <a:xfrm>
-            <a:off x="135711" y="2419869"/>
+            <a:off x="135711" y="2333278"/>
             <a:ext cx="1659357" cy="643788"/>
           </a:xfrm>
           <a:prstGeom prst="rect">
@@ -7048,13 +7093,13 @@
       </p:sp>
       <p:sp>
         <p:nvSpPr>
-          <p:cNvPr id="157562523" name="ZoneTexte 1063440096"/>
+          <p:cNvPr id="623492979" name="ZoneTexte 1063440096"/>
           <p:cNvSpPr txBox="1"/>
           <p:nvPr/>
         </p:nvSpPr>
         <p:spPr bwMode="auto">
           <a:xfrm>
-            <a:off x="97610" y="4979310"/>
+            <a:off x="97609" y="4892718"/>
             <a:ext cx="1680237" cy="643788"/>
           </a:xfrm>
           <a:prstGeom prst="rect">
@@ -7132,13 +7177,13 @@
       </p:sp>
       <p:sp>
         <p:nvSpPr>
-          <p:cNvPr id="483505165" name="ZoneTexte 1564072661"/>
+          <p:cNvPr id="1575660073" name="ZoneTexte 1564072661"/>
           <p:cNvSpPr txBox="1"/>
           <p:nvPr/>
         </p:nvSpPr>
         <p:spPr bwMode="auto">
           <a:xfrm>
-            <a:off x="2302386" y="3068291"/>
+            <a:off x="2302385" y="2981700"/>
             <a:ext cx="1735676" cy="643788"/>
           </a:xfrm>
           <a:prstGeom prst="rect">
@@ -7216,13 +7261,13 @@
       </p:sp>
       <p:sp>
         <p:nvSpPr>
-          <p:cNvPr id="1633195837" name="ZoneTexte 2102805411"/>
+          <p:cNvPr id="451723015" name="ZoneTexte 2102805411"/>
           <p:cNvSpPr txBox="1"/>
           <p:nvPr/>
         </p:nvSpPr>
         <p:spPr bwMode="auto">
           <a:xfrm flipH="0" flipV="0">
-            <a:off x="2347024" y="4347885"/>
+            <a:off x="2347023" y="4261294"/>
             <a:ext cx="1700753" cy="643788"/>
           </a:xfrm>
           <a:prstGeom prst="rect">
@@ -7300,13 +7345,13 @@
       </p:sp>
       <p:sp>
         <p:nvSpPr>
-          <p:cNvPr id="205776909" name="ZoneTexte 1094420572"/>
+          <p:cNvPr id="247399444" name="ZoneTexte 1094420572"/>
           <p:cNvSpPr txBox="1"/>
           <p:nvPr/>
         </p:nvSpPr>
         <p:spPr bwMode="auto">
           <a:xfrm>
-            <a:off x="2302386" y="2419868"/>
+            <a:off x="2302385" y="2333277"/>
             <a:ext cx="1743233" cy="643788"/>
           </a:xfrm>
           <a:prstGeom prst="rect">
@@ -7384,13 +7429,13 @@
       </p:sp>
       <p:sp>
         <p:nvSpPr>
-          <p:cNvPr id="395662421" name="ZoneTexte 1337742717"/>
+          <p:cNvPr id="1514609133" name="ZoneTexte 1337742717"/>
           <p:cNvSpPr txBox="1"/>
           <p:nvPr/>
         </p:nvSpPr>
         <p:spPr bwMode="auto">
           <a:xfrm flipH="0" flipV="0">
-            <a:off x="2309224" y="4981627"/>
+            <a:off x="2309223" y="4895035"/>
             <a:ext cx="1739636" cy="643788"/>
           </a:xfrm>
           <a:prstGeom prst="rect">
@@ -7448,13 +7493,13 @@
       </p:sp>
       <p:sp>
         <p:nvSpPr>
-          <p:cNvPr id="1418402273" name="ZoneTexte 1188730172"/>
+          <p:cNvPr id="645520408" name="ZoneTexte 1188730172"/>
           <p:cNvSpPr txBox="1"/>
           <p:nvPr/>
         </p:nvSpPr>
         <p:spPr bwMode="auto">
           <a:xfrm>
-            <a:off x="2309226" y="5622069"/>
+            <a:off x="2309225" y="5535478"/>
             <a:ext cx="1734594" cy="648425"/>
           </a:xfrm>
           <a:prstGeom prst="rect">
@@ -7512,13 +7557,13 @@
       </p:sp>
       <p:sp>
         <p:nvSpPr>
-          <p:cNvPr id="1387829570" name="Rectangle : avec coins arrondis en haut 1452601499"/>
+          <p:cNvPr id="1486490160" name="Rectangle : avec coins arrondis en haut 1452601499"/>
           <p:cNvSpPr/>
           <p:nvPr/>
         </p:nvSpPr>
         <p:spPr bwMode="auto">
           <a:xfrm rot="5399976">
-            <a:off x="1724006" y="2549025"/>
+            <a:off x="1724005" y="2462433"/>
             <a:ext cx="522740" cy="400050"/>
           </a:xfrm>
           <a:prstGeom prst="round2SameRect">
@@ -7558,13 +7603,13 @@
       </p:sp>
       <p:sp>
         <p:nvSpPr>
-          <p:cNvPr id="1663620339" name="Rectangle : avec coins arrondis en haut 1782110635"/>
+          <p:cNvPr id="105103469" name="Rectangle : avec coins arrondis en haut 1782110635"/>
           <p:cNvSpPr/>
           <p:nvPr/>
         </p:nvSpPr>
         <p:spPr bwMode="auto">
           <a:xfrm rot="5399976">
-            <a:off x="1718298" y="3188331"/>
+            <a:off x="1718298" y="3101739"/>
             <a:ext cx="520475" cy="400050"/>
           </a:xfrm>
           <a:prstGeom prst="round2SameRect">
@@ -7604,13 +7649,13 @@
       </p:sp>
       <p:sp>
         <p:nvSpPr>
-          <p:cNvPr id="777880148" name="Rectangle : avec coins arrondis en haut 945118596"/>
+          <p:cNvPr id="733771291" name="Rectangle : avec coins arrondis en haut 945118596"/>
           <p:cNvSpPr/>
           <p:nvPr/>
         </p:nvSpPr>
         <p:spPr bwMode="auto">
           <a:xfrm rot="5399976">
-            <a:off x="1725139" y="3820944"/>
+            <a:off x="1725138" y="3734353"/>
             <a:ext cx="520474" cy="400050"/>
           </a:xfrm>
           <a:prstGeom prst="round2SameRect">
@@ -7650,13 +7695,13 @@
       </p:sp>
       <p:sp>
         <p:nvSpPr>
-          <p:cNvPr id="852017424" name="Rectangle : avec coins arrondis en haut 500951796"/>
+          <p:cNvPr id="1039005388" name="Rectangle : avec coins arrondis en haut 500951796"/>
           <p:cNvSpPr/>
           <p:nvPr/>
         </p:nvSpPr>
         <p:spPr bwMode="auto">
           <a:xfrm rot="5399976">
-            <a:off x="1718299" y="4461385"/>
+            <a:off x="1718298" y="4374793"/>
             <a:ext cx="520474" cy="400050"/>
           </a:xfrm>
           <a:prstGeom prst="round2SameRect">
@@ -7696,13 +7741,13 @@
       </p:sp>
       <p:sp>
         <p:nvSpPr>
-          <p:cNvPr id="1931207641" name="Rectangle : avec coins arrondis en haut 203047490"/>
+          <p:cNvPr id="1802609863" name="Rectangle : avec coins arrondis en haut 203047490"/>
           <p:cNvSpPr/>
           <p:nvPr/>
         </p:nvSpPr>
         <p:spPr bwMode="auto">
           <a:xfrm rot="5399976">
-            <a:off x="1718299" y="5101825"/>
+            <a:off x="1718298" y="5015233"/>
             <a:ext cx="520474" cy="400050"/>
           </a:xfrm>
           <a:prstGeom prst="round2SameRect">
@@ -7742,13 +7787,13 @@
       </p:sp>
       <p:sp>
         <p:nvSpPr>
-          <p:cNvPr id="1525194779" name="Rectangle : avec coins arrondis en haut 818083012"/>
+          <p:cNvPr id="253269065" name="Rectangle : avec coins arrondis en haut 818083012"/>
           <p:cNvSpPr/>
           <p:nvPr/>
         </p:nvSpPr>
         <p:spPr bwMode="auto">
           <a:xfrm rot="5399976">
-            <a:off x="1718299" y="5742265"/>
+            <a:off x="1718298" y="5655673"/>
             <a:ext cx="520474" cy="400050"/>
           </a:xfrm>
           <a:prstGeom prst="round2SameRect">
@@ -7788,13 +7833,13 @@
       </p:sp>
       <p:sp>
         <p:nvSpPr>
-          <p:cNvPr id="749041578" name="Rectangle : avec coins arrondis en haut 310539005"/>
+          <p:cNvPr id="512256995" name="Rectangle : avec coins arrondis en haut 310539005"/>
           <p:cNvSpPr/>
           <p:nvPr/>
         </p:nvSpPr>
         <p:spPr bwMode="auto">
           <a:xfrm rot="5399976">
-            <a:off x="3987158" y="2549025"/>
+            <a:off x="3987157" y="2462433"/>
             <a:ext cx="522740" cy="400050"/>
           </a:xfrm>
           <a:prstGeom prst="round2SameRect">
@@ -7834,13 +7879,13 @@
       </p:sp>
       <p:sp>
         <p:nvSpPr>
-          <p:cNvPr id="1149877792" name="Rectangle : avec coins arrondis en haut 844307487"/>
+          <p:cNvPr id="2143621315" name="Rectangle : avec coins arrondis en haut 844307487"/>
           <p:cNvSpPr/>
           <p:nvPr/>
         </p:nvSpPr>
         <p:spPr bwMode="auto">
           <a:xfrm rot="5399976">
-            <a:off x="3981451" y="3188331"/>
+            <a:off x="3981450" y="3101739"/>
             <a:ext cx="520474" cy="400050"/>
           </a:xfrm>
           <a:prstGeom prst="round2SameRect">
@@ -7880,13 +7925,13 @@
       </p:sp>
       <p:sp>
         <p:nvSpPr>
-          <p:cNvPr id="804795253" name="Rectangle : avec coins arrondis en haut 1616510051"/>
+          <p:cNvPr id="1417756209" name="Rectangle : avec coins arrondis en haut 1616510051"/>
           <p:cNvSpPr/>
           <p:nvPr/>
         </p:nvSpPr>
         <p:spPr bwMode="auto">
           <a:xfrm rot="5399976">
-            <a:off x="3988291" y="3820946"/>
+            <a:off x="3988290" y="3734354"/>
             <a:ext cx="520474" cy="400050"/>
           </a:xfrm>
           <a:prstGeom prst="round2SameRect">
@@ -7926,13 +7971,13 @@
       </p:sp>
       <p:sp>
         <p:nvSpPr>
-          <p:cNvPr id="1721071030" name="Rectangle : avec coins arrondis en haut 1451691637"/>
+          <p:cNvPr id="1485342941" name="Rectangle : avec coins arrondis en haut 1451691637"/>
           <p:cNvSpPr/>
           <p:nvPr/>
         </p:nvSpPr>
         <p:spPr bwMode="auto">
           <a:xfrm rot="5399976">
-            <a:off x="3981451" y="4461386"/>
+            <a:off x="3981450" y="4374794"/>
             <a:ext cx="520474" cy="400050"/>
           </a:xfrm>
           <a:prstGeom prst="round2SameRect">
@@ -7972,13 +8017,13 @@
       </p:sp>
       <p:sp>
         <p:nvSpPr>
-          <p:cNvPr id="1812871095" name="Rectangle : avec coins arrondis en haut 260383743"/>
+          <p:cNvPr id="1346863176" name="Rectangle : avec coins arrondis en haut 260383743"/>
           <p:cNvSpPr/>
           <p:nvPr/>
         </p:nvSpPr>
         <p:spPr bwMode="auto">
           <a:xfrm rot="5399976">
-            <a:off x="3981451" y="5101826"/>
+            <a:off x="3981450" y="5015234"/>
             <a:ext cx="520474" cy="400050"/>
           </a:xfrm>
           <a:prstGeom prst="round2SameRect">
@@ -8018,13 +8063,13 @@
       </p:sp>
       <p:sp>
         <p:nvSpPr>
-          <p:cNvPr id="240314604" name="Rectangle : avec coins arrondis en haut 1280344391"/>
+          <p:cNvPr id="121402546" name="Rectangle : avec coins arrondis en haut 1280344391"/>
           <p:cNvSpPr/>
           <p:nvPr/>
         </p:nvSpPr>
         <p:spPr bwMode="auto">
           <a:xfrm rot="5399976">
-            <a:off x="3981451" y="5742266"/>
+            <a:off x="3981450" y="5655674"/>
             <a:ext cx="520474" cy="400050"/>
           </a:xfrm>
           <a:prstGeom prst="round2SameRect">
@@ -8064,7 +8109,7 @@
       </p:sp>
       <p:sp>
         <p:nvSpPr>
-          <p:cNvPr id="1680524393" name=""/>
+          <p:cNvPr id="489866219" name=""/>
           <p:cNvSpPr txBox="1"/>
           <p:nvPr/>
         </p:nvSpPr>
@@ -8188,7 +8233,7 @@
       </p:sp>
       <p:sp>
         <p:nvSpPr>
-          <p:cNvPr id="1736558263" name="ZoneTexte 1440859034"/>
+          <p:cNvPr id="582793882" name="ZoneTexte 1440859034"/>
           <p:cNvSpPr txBox="1"/>
           <p:nvPr/>
         </p:nvSpPr>
@@ -8230,7 +8275,7 @@
       </p:sp>
       <p:sp>
         <p:nvSpPr>
-          <p:cNvPr id="1282742848" name="ZoneTexte 1440859034"/>
+          <p:cNvPr id="1808884723" name="ZoneTexte 1440859034"/>
           <p:cNvSpPr txBox="1"/>
           <p:nvPr/>
         </p:nvSpPr>
@@ -8269,7 +8314,7 @@
       </p:sp>
       <p:cxnSp>
         <p:nvCxnSpPr>
-          <p:cNvPr id="1109749774" name=""/>
+          <p:cNvPr id="79942119" name=""/>
           <p:cNvCxnSpPr/>
           <p:nvPr/>
         </p:nvCxnSpPr>
@@ -8308,7 +8353,7 @@
       </p:cxnSp>
       <p:sp>
         <p:nvSpPr>
-          <p:cNvPr id="2008912901" name=""/>
+          <p:cNvPr id="654127914" name=""/>
           <p:cNvSpPr txBox="1"/>
           <p:nvPr/>
         </p:nvSpPr>
@@ -8472,7 +8517,7 @@
       </p:sp>
       <p:sp>
         <p:nvSpPr>
-          <p:cNvPr id="302082494" name="Rectangle 954364527"/>
+          <p:cNvPr id="976351608" name="Rectangle 954364527"/>
           <p:cNvSpPr/>
           <p:nvPr/>
         </p:nvSpPr>
@@ -8512,7 +8557,7 @@
       </p:sp>
       <p:sp>
         <p:nvSpPr>
-          <p:cNvPr id="1575045288" name="ZoneTexte 1527388901"/>
+          <p:cNvPr id="625782196" name="ZoneTexte 1527388901"/>
           <p:cNvSpPr txBox="1"/>
           <p:nvPr/>
         </p:nvSpPr>
@@ -8672,13 +8717,13 @@
       </p:sp>
       <p:sp>
         <p:nvSpPr>
-          <p:cNvPr id="1664863639" name="Rectangle 38344096"/>
+          <p:cNvPr id="865681334" name="Rectangle 38344096"/>
           <p:cNvSpPr/>
           <p:nvPr/>
         </p:nvSpPr>
         <p:spPr bwMode="auto">
           <a:xfrm flipH="0" flipV="0">
-            <a:off x="6688316" y="617159"/>
+            <a:off x="6688315" y="530568"/>
             <a:ext cx="104771" cy="1474465"/>
           </a:xfrm>
           <a:prstGeom prst="rect">
@@ -8712,7 +8757,7 @@
       </p:sp>
       <p:sp>
         <p:nvSpPr>
-          <p:cNvPr id="2087607335" name=""/>
+          <p:cNvPr id="112126359" name=""/>
           <p:cNvSpPr/>
           <p:nvPr/>
         </p:nvSpPr>
@@ -8783,7 +8828,7 @@
       </p:sp>
       <p:sp>
         <p:nvSpPr>
-          <p:cNvPr id="710073523" name="Flèche : pentagone 2055848356"/>
+          <p:cNvPr id="2061379955" name="Flèche : pentagone 2055848356"/>
           <p:cNvSpPr/>
           <p:nvPr/>
         </p:nvSpPr>
@@ -8828,7 +8873,7 @@
       </p:sp>
       <p:sp>
         <p:nvSpPr>
-          <p:cNvPr id="1561523880" name="Flèche : pentagone 1980093981"/>
+          <p:cNvPr id="1130868939" name="Flèche : pentagone 1980093981"/>
           <p:cNvSpPr/>
           <p:nvPr/>
         </p:nvSpPr>
@@ -8873,7 +8918,7 @@
       </p:sp>
       <p:sp>
         <p:nvSpPr>
-          <p:cNvPr id="2131580251" name="Flèche : pentagone 905284374"/>
+          <p:cNvPr id="896513868" name="Flèche : pentagone 905284374"/>
           <p:cNvSpPr/>
           <p:nvPr/>
         </p:nvSpPr>
@@ -8918,7 +8963,7 @@
       </p:sp>
       <p:sp>
         <p:nvSpPr>
-          <p:cNvPr id="376457569" name="ZoneTexte 1440859034"/>
+          <p:cNvPr id="185636334" name="ZoneTexte 1440859034"/>
           <p:cNvSpPr txBox="1"/>
           <p:nvPr/>
         </p:nvSpPr>
@@ -8957,7 +9002,7 @@
       </p:sp>
       <p:sp>
         <p:nvSpPr>
-          <p:cNvPr id="549150966" name="Flèche : pentagone 1880610112"/>
+          <p:cNvPr id="1899860570" name="Flèche : pentagone 1880610112"/>
           <p:cNvSpPr/>
           <p:nvPr/>
         </p:nvSpPr>
@@ -9002,7 +9047,7 @@
       </p:sp>
       <p:sp>
         <p:nvSpPr>
-          <p:cNvPr id="1293793439" name="Flèche : pentagone 446859139"/>
+          <p:cNvPr id="507360719" name="Flèche : pentagone 446859139"/>
           <p:cNvSpPr/>
           <p:nvPr/>
         </p:nvSpPr>
@@ -9047,7 +9092,7 @@
       </p:sp>
       <p:sp>
         <p:nvSpPr>
-          <p:cNvPr id="729174657" name="Flèche : pentagone 2055848356"/>
+          <p:cNvPr id="627952280" name="Flèche : pentagone 2055848356"/>
           <p:cNvSpPr/>
           <p:nvPr/>
         </p:nvSpPr>
@@ -9092,7 +9137,7 @@
       </p:sp>
       <p:sp>
         <p:nvSpPr>
-          <p:cNvPr id="412715580" name="Flèche : pentagone 1980093981"/>
+          <p:cNvPr id="1779433988" name="Flèche : pentagone 1980093981"/>
           <p:cNvSpPr/>
           <p:nvPr/>
         </p:nvSpPr>
@@ -9137,7 +9182,7 @@
       </p:sp>
       <p:sp>
         <p:nvSpPr>
-          <p:cNvPr id="586734789" name="Flèche : pentagone 905284374"/>
+          <p:cNvPr id="1689126577" name="Flèche : pentagone 905284374"/>
           <p:cNvSpPr/>
           <p:nvPr/>
         </p:nvSpPr>
@@ -9182,7 +9227,7 @@
       </p:sp>
       <p:sp>
         <p:nvSpPr>
-          <p:cNvPr id="2129701540" name="ZoneTexte 1440859034"/>
+          <p:cNvPr id="1103001713" name="ZoneTexte 1440859034"/>
           <p:cNvSpPr txBox="1"/>
           <p:nvPr/>
         </p:nvSpPr>
@@ -9221,7 +9266,7 @@
       </p:sp>
       <p:sp>
         <p:nvSpPr>
-          <p:cNvPr id="252799845" name="Flèche : pentagone 2055848356"/>
+          <p:cNvPr id="1866177301" name="Flèche : pentagone 2055848356"/>
           <p:cNvSpPr/>
           <p:nvPr/>
         </p:nvSpPr>
@@ -9266,7 +9311,7 @@
       </p:sp>
       <p:sp>
         <p:nvSpPr>
-          <p:cNvPr id="2114788804" name="Flèche : pentagone 1980093981"/>
+          <p:cNvPr id="39766193" name="Flèche : pentagone 1980093981"/>
           <p:cNvSpPr/>
           <p:nvPr/>
         </p:nvSpPr>
@@ -9311,7 +9356,7 @@
       </p:sp>
       <p:sp>
         <p:nvSpPr>
-          <p:cNvPr id="1594626648" name="Flèche : pentagone 905284374"/>
+          <p:cNvPr id="1975360642" name="Flèche : pentagone 905284374"/>
           <p:cNvSpPr/>
           <p:nvPr/>
         </p:nvSpPr>
@@ -9356,7 +9401,7 @@
       </p:sp>
       <p:sp>
         <p:nvSpPr>
-          <p:cNvPr id="879529534" name="ZoneTexte 1440859034"/>
+          <p:cNvPr id="361245199" name="ZoneTexte 1440859034"/>
           <p:cNvSpPr txBox="1"/>
           <p:nvPr/>
         </p:nvSpPr>
@@ -9395,7 +9440,7 @@
       </p:sp>
       <p:sp>
         <p:nvSpPr>
-          <p:cNvPr id="1781873730" name=""/>
+          <p:cNvPr id="649955242" name=""/>
           <p:cNvSpPr txBox="1"/>
           <p:nvPr/>
         </p:nvSpPr>
@@ -9559,7 +9604,7 @@
       </p:sp>
       <p:sp>
         <p:nvSpPr>
-          <p:cNvPr id="97868813" name=""/>
+          <p:cNvPr id="703144746" name=""/>
           <p:cNvSpPr txBox="1"/>
           <p:nvPr/>
         </p:nvSpPr>
@@ -9723,7 +9768,7 @@
       </p:sp>
       <p:sp>
         <p:nvSpPr>
-          <p:cNvPr id="349841803" name=""/>
+          <p:cNvPr id="990767537" name=""/>
           <p:cNvSpPr txBox="1"/>
           <p:nvPr/>
         </p:nvSpPr>
@@ -9920,7 +9965,7 @@
       </p:grpSpPr>
       <p:sp>
         <p:nvSpPr>
-          <p:cNvPr id="745459347" name=""/>
+          <p:cNvPr id="649340963" name=""/>
           <p:cNvSpPr/>
           <p:nvPr/>
         </p:nvSpPr>
@@ -9963,7 +10008,7 @@
       </p:sp>
       <p:sp>
         <p:nvSpPr>
-          <p:cNvPr id="672758515" name=""/>
+          <p:cNvPr id="1472128280" name=""/>
           <p:cNvSpPr txBox="1"/>
           <p:nvPr/>
         </p:nvSpPr>
@@ -10029,7 +10074,7 @@
       </p:sp>
       <p:cxnSp>
         <p:nvCxnSpPr>
-          <p:cNvPr id="1899523897" name="Connecteur droit 1568760680"/>
+          <p:cNvPr id="1869473795" name="Connecteur droit 1568760680"/>
           <p:cNvCxnSpPr/>
           <p:nvPr/>
         </p:nvCxnSpPr>
@@ -10071,7 +10116,7 @@
       </p:cxnSp>
       <p:sp>
         <p:nvSpPr>
-          <p:cNvPr id="351017717" name="ZoneTexte 1868728971"/>
+          <p:cNvPr id="963456314" name="ZoneTexte 1868728971"/>
           <p:cNvSpPr txBox="1"/>
           <p:nvPr/>
         </p:nvSpPr>
@@ -10111,7 +10156,7 @@
       </p:sp>
       <p:cxnSp>
         <p:nvCxnSpPr>
-          <p:cNvPr id="1525835065" name="Connecteur droit 806540798"/>
+          <p:cNvPr id="1942770612" name="Connecteur droit 806540798"/>
           <p:cNvCxnSpPr/>
           <p:nvPr/>
         </p:nvCxnSpPr>
@@ -10153,7 +10198,7 @@
       </p:cxnSp>
       <p:sp>
         <p:nvSpPr>
-          <p:cNvPr id="809570207" name="ZoneTexte 406616703"/>
+          <p:cNvPr id="442438207" name="ZoneTexte 406616703"/>
           <p:cNvSpPr txBox="1"/>
           <p:nvPr/>
         </p:nvSpPr>
@@ -10193,7 +10238,7 @@
       </p:sp>
       <p:sp>
         <p:nvSpPr>
-          <p:cNvPr id="416149107" name="ZoneTexte 1302587497"/>
+          <p:cNvPr id="1470196465" name="ZoneTexte 1302587497"/>
           <p:cNvSpPr txBox="1"/>
           <p:nvPr/>
         </p:nvSpPr>
@@ -10397,7 +10442,7 @@
       </p:sp>
       <p:sp>
         <p:nvSpPr>
-          <p:cNvPr id="831548298" name="Rectangle 38344096"/>
+          <p:cNvPr id="1045209498" name="Rectangle 38344096"/>
           <p:cNvSpPr/>
           <p:nvPr/>
         </p:nvSpPr>
@@ -10437,7 +10482,7 @@
       </p:sp>
       <p:sp>
         <p:nvSpPr>
-          <p:cNvPr id="1639296341" name="ZoneTexte 1075280509"/>
+          <p:cNvPr id="1832024674" name="ZoneTexte 1075280509"/>
           <p:cNvSpPr txBox="1"/>
           <p:nvPr/>
         </p:nvSpPr>
@@ -10510,7 +10555,7 @@
       </p:sp>
       <p:sp>
         <p:nvSpPr>
-          <p:cNvPr id="1367129143" name="ZoneTexte 226284734"/>
+          <p:cNvPr id="481891686" name="ZoneTexte 226284734"/>
           <p:cNvSpPr txBox="1"/>
           <p:nvPr/>
         </p:nvSpPr>
@@ -10583,7 +10628,7 @@
       </p:sp>
       <p:sp>
         <p:nvSpPr>
-          <p:cNvPr id="1448862591" name="ZoneTexte 162158187"/>
+          <p:cNvPr id="87213872" name="ZoneTexte 162158187"/>
           <p:cNvSpPr txBox="1"/>
           <p:nvPr/>
         </p:nvSpPr>
@@ -10633,7 +10678,7 @@
       </p:sp>
       <p:sp>
         <p:nvSpPr>
-          <p:cNvPr id="462678969" name="Rectangle : avec coins arrondis en haut 1452601499"/>
+          <p:cNvPr id="686315122" name="Rectangle : avec coins arrondis en haut 1452601499"/>
           <p:cNvSpPr/>
           <p:nvPr/>
         </p:nvSpPr>
@@ -10676,7 +10721,7 @@
       </p:sp>
       <p:sp>
         <p:nvSpPr>
-          <p:cNvPr id="1049181245" name="Rectangle : avec coins arrondis en haut 1782110635"/>
+          <p:cNvPr id="888710639" name="Rectangle : avec coins arrondis en haut 1782110635"/>
           <p:cNvSpPr/>
           <p:nvPr/>
         </p:nvSpPr>
@@ -10722,7 +10767,7 @@
       </p:sp>
       <p:sp>
         <p:nvSpPr>
-          <p:cNvPr id="483781736" name="Rectangle : avec coins arrondis en haut 945118596"/>
+          <p:cNvPr id="1401017521" name="Rectangle : avec coins arrondis en haut 945118596"/>
           <p:cNvSpPr/>
           <p:nvPr/>
         </p:nvSpPr>
@@ -10768,7 +10813,7 @@
       </p:sp>
       <p:sp>
         <p:nvSpPr>
-          <p:cNvPr id="488272194" name=""/>
+          <p:cNvPr id="106125392" name=""/>
           <p:cNvSpPr/>
           <p:nvPr/>
         </p:nvSpPr>
@@ -10810,7 +10855,7 @@
       </p:sp>
       <p:sp>
         <p:nvSpPr>
-          <p:cNvPr id="757050716" name=""/>
+          <p:cNvPr id="1560802628" name=""/>
           <p:cNvSpPr txBox="1"/>
           <p:nvPr/>
         </p:nvSpPr>
@@ -10850,7 +10895,7 @@
       </p:sp>
       <p:sp>
         <p:nvSpPr>
-          <p:cNvPr id="34923930" name=""/>
+          <p:cNvPr id="1307891382" name=""/>
           <p:cNvSpPr/>
           <p:nvPr/>
         </p:nvSpPr>
@@ -10921,7 +10966,7 @@
       </p:sp>
       <p:sp>
         <p:nvSpPr>
-          <p:cNvPr id="1074806287" name=""/>
+          <p:cNvPr id="622747174" name=""/>
           <p:cNvSpPr txBox="1"/>
           <p:nvPr/>
         </p:nvSpPr>
@@ -10958,7 +11003,7 @@
       </p:sp>
       <p:sp>
         <p:nvSpPr>
-          <p:cNvPr id="987266329" name=""/>
+          <p:cNvPr id="1023033709" name=""/>
           <p:cNvSpPr txBox="1"/>
           <p:nvPr/>
         </p:nvSpPr>
@@ -11192,7 +11237,7 @@
       </p:sp>
       <p:sp>
         <p:nvSpPr>
-          <p:cNvPr id="1753943238" name=""/>
+          <p:cNvPr id="1706113551" name=""/>
           <p:cNvSpPr txBox="1"/>
           <p:nvPr/>
         </p:nvSpPr>
@@ -11471,7 +11516,7 @@
       </p:sp>
       <p:sp>
         <p:nvSpPr>
-          <p:cNvPr id="1870179182" name=""/>
+          <p:cNvPr id="846902410" name=""/>
           <p:cNvSpPr txBox="1"/>
           <p:nvPr/>
         </p:nvSpPr>
@@ -11862,7 +11907,7 @@
       </p:sp>
       <p:sp>
         <p:nvSpPr>
-          <p:cNvPr id="2001836314" name=""/>
+          <p:cNvPr id="1117853446" name=""/>
           <p:cNvSpPr txBox="1"/>
           <p:nvPr/>
         </p:nvSpPr>
@@ -12253,7 +12298,7 @@
       </p:sp>
       <p:sp>
         <p:nvSpPr>
-          <p:cNvPr id="1273344706" name=""/>
+          <p:cNvPr id="1180704755" name=""/>
           <p:cNvSpPr txBox="1"/>
           <p:nvPr/>
         </p:nvSpPr>
@@ -12644,7 +12689,7 @@
       </p:sp>
       <p:sp>
         <p:nvSpPr>
-          <p:cNvPr id="1606519231" name=""/>
+          <p:cNvPr id="1934078725" name=""/>
           <p:cNvSpPr txBox="1"/>
           <p:nvPr/>
         </p:nvSpPr>
@@ -13035,7 +13080,7 @@
       </p:sp>
       <p:sp>
         <p:nvSpPr>
-          <p:cNvPr id="1804265967" name=""/>
+          <p:cNvPr id="936898628" name=""/>
           <p:cNvSpPr txBox="1"/>
           <p:nvPr/>
         </p:nvSpPr>
@@ -13426,7 +13471,7 @@
       </p:sp>
       <p:sp>
         <p:nvSpPr>
-          <p:cNvPr id="1005744922" name=""/>
+          <p:cNvPr id="1373832090" name=""/>
           <p:cNvSpPr txBox="1"/>
           <p:nvPr/>
         </p:nvSpPr>
@@ -13817,7 +13862,7 @@
       </p:sp>
       <p:sp>
         <p:nvSpPr>
-          <p:cNvPr id="147437140" name=""/>
+          <p:cNvPr id="1654578693" name=""/>
           <p:cNvSpPr txBox="1"/>
           <p:nvPr/>
         </p:nvSpPr>
@@ -14208,7 +14253,7 @@
       </p:sp>
       <p:sp>
         <p:nvSpPr>
-          <p:cNvPr id="960400657" name=""/>
+          <p:cNvPr id="930780351" name=""/>
           <p:cNvSpPr txBox="1"/>
           <p:nvPr/>
         </p:nvSpPr>
@@ -14599,7 +14644,7 @@
       </p:sp>
       <p:sp>
         <p:nvSpPr>
-          <p:cNvPr id="1632680430" name=""/>
+          <p:cNvPr id="1786403741" name=""/>
           <p:cNvSpPr txBox="1"/>
           <p:nvPr/>
         </p:nvSpPr>
@@ -14990,7 +15035,7 @@
       </p:sp>
       <p:sp>
         <p:nvSpPr>
-          <p:cNvPr id="868709823" name=""/>
+          <p:cNvPr id="1302681143" name=""/>
           <p:cNvSpPr txBox="1"/>
           <p:nvPr/>
         </p:nvSpPr>
@@ -15381,7 +15426,7 @@
       </p:sp>
       <p:sp>
         <p:nvSpPr>
-          <p:cNvPr id="923259890" name=""/>
+          <p:cNvPr id="1586802554" name=""/>
           <p:cNvSpPr txBox="1"/>
           <p:nvPr/>
         </p:nvSpPr>
@@ -15772,7 +15817,7 @@
       </p:sp>
       <p:sp>
         <p:nvSpPr>
-          <p:cNvPr id="49310510" name=""/>
+          <p:cNvPr id="931570151" name=""/>
           <p:cNvSpPr txBox="1"/>
           <p:nvPr/>
         </p:nvSpPr>
@@ -16163,7 +16208,7 @@
       </p:sp>
       <p:sp>
         <p:nvSpPr>
-          <p:cNvPr id="1387986339" name=""/>
+          <p:cNvPr id="1322673137" name=""/>
           <p:cNvSpPr txBox="1"/>
           <p:nvPr/>
         </p:nvSpPr>
@@ -16554,7 +16599,7 @@
       </p:sp>
       <p:sp>
         <p:nvSpPr>
-          <p:cNvPr id="489404281" name=""/>
+          <p:cNvPr id="391881892" name=""/>
           <p:cNvSpPr txBox="1"/>
           <p:nvPr/>
         </p:nvSpPr>
@@ -16945,7 +16990,7 @@
       </p:sp>
       <p:sp>
         <p:nvSpPr>
-          <p:cNvPr id="1746874062" name=""/>
+          <p:cNvPr id="1397390377" name=""/>
           <p:cNvSpPr txBox="1"/>
           <p:nvPr/>
         </p:nvSpPr>
@@ -17103,7 +17148,7 @@
       </p:sp>
       <p:cxnSp>
         <p:nvCxnSpPr>
-          <p:cNvPr id="239527333" name="Connecteur droit 806540798"/>
+          <p:cNvPr id="1900037677" name="Connecteur droit 806540798"/>
           <p:cNvCxnSpPr/>
           <p:nvPr/>
         </p:nvCxnSpPr>
@@ -17145,14 +17190,14 @@
       </p:cxnSp>
       <p:sp>
         <p:nvSpPr>
-          <p:cNvPr id="295113412" name="ZoneTexte 406616703"/>
+          <p:cNvPr id="1524289168" name="ZoneTexte 406616703"/>
           <p:cNvSpPr txBox="1"/>
           <p:nvPr/>
         </p:nvSpPr>
         <p:spPr bwMode="auto">
           <a:xfrm flipH="0" flipV="0">
             <a:off x="47485" y="8087728"/>
-            <a:ext cx="3374659" cy="366119"/>
+            <a:ext cx="3374658" cy="366119"/>
           </a:xfrm>
           <a:prstGeom prst="rect">
             <a:avLst/>
@@ -17185,7 +17230,7 @@
       </p:sp>
       <p:sp>
         <p:nvSpPr>
-          <p:cNvPr id="1008767577" name=""/>
+          <p:cNvPr id="1698743288" name=""/>
           <p:cNvSpPr txBox="1"/>
           <p:nvPr/>
         </p:nvSpPr>
@@ -17284,7 +17329,7 @@
       </p:grpSpPr>
       <p:cxnSp>
         <p:nvCxnSpPr>
-          <p:cNvPr id="1600989133" name="Connecteur droit 266926011"/>
+          <p:cNvPr id="1193577371" name="Connecteur droit 266926011"/>
           <p:cNvCxnSpPr/>
           <p:nvPr/>
         </p:nvCxnSpPr>
@@ -17326,7 +17371,7 @@
       </p:cxnSp>
       <p:sp>
         <p:nvSpPr>
-          <p:cNvPr id="412049831" name="ZoneTexte 1043763612"/>
+          <p:cNvPr id="1186865153" name="ZoneTexte 1043763612"/>
           <p:cNvSpPr txBox="1"/>
           <p:nvPr/>
         </p:nvSpPr>
@@ -17366,13 +17411,13 @@
       </p:sp>
       <p:cxnSp>
         <p:nvCxnSpPr>
-          <p:cNvPr id="1923723912" name="Connecteur droit 1586327141"/>
+          <p:cNvPr id="403079097" name="Connecteur droit 1586327141"/>
           <p:cNvCxnSpPr/>
           <p:nvPr/>
         </p:nvCxnSpPr>
         <p:spPr bwMode="auto">
           <a:xfrm flipV="1">
-            <a:off x="-56172" y="2187572"/>
+            <a:off x="-56171" y="1965321"/>
             <a:ext cx="6924673" cy="0"/>
           </a:xfrm>
           <a:prstGeom prst="line">
@@ -17409,13 +17454,13 @@
       </p:cxnSp>
       <p:sp>
         <p:nvSpPr>
-          <p:cNvPr id="596191006" name="ZoneTexte 1691387439"/>
+          <p:cNvPr id="805043982" name="ZoneTexte 1691387439"/>
           <p:cNvSpPr txBox="1"/>
           <p:nvPr/>
         </p:nvSpPr>
         <p:spPr bwMode="auto">
           <a:xfrm>
-            <a:off x="-56171" y="2004509"/>
+            <a:off x="-56170" y="1782258"/>
             <a:ext cx="4783407" cy="366119"/>
           </a:xfrm>
           <a:prstGeom prst="rect">
@@ -17449,7 +17494,7 @@
       </p:sp>
       <p:cxnSp>
         <p:nvCxnSpPr>
-          <p:cNvPr id="716979864" name="Connecteur droit 1743707585"/>
+          <p:cNvPr id="1320328720" name="Connecteur droit 1743707585"/>
           <p:cNvCxnSpPr/>
           <p:nvPr/>
         </p:nvCxnSpPr>
@@ -17492,7 +17537,7 @@
       </p:cxnSp>
       <p:sp>
         <p:nvSpPr>
-          <p:cNvPr id="1789531004" name="ZoneTexte 1503300725"/>
+          <p:cNvPr id="550402714" name="ZoneTexte 1503300725"/>
           <p:cNvSpPr txBox="1"/>
           <p:nvPr/>
         </p:nvSpPr>
@@ -17574,7 +17619,7 @@
       </p:sp>
       <p:sp>
         <p:nvSpPr>
-          <p:cNvPr id="1213771974" name="Rectangle : avec coins arrondis en haut 1151560973"/>
+          <p:cNvPr id="1362406254" name="Rectangle : avec coins arrondis en haut 1151560973"/>
           <p:cNvSpPr/>
           <p:nvPr/>
         </p:nvSpPr>
@@ -17620,7 +17665,7 @@
       </p:sp>
       <p:sp>
         <p:nvSpPr>
-          <p:cNvPr id="1572621845" name="Flèche : pentagone 1610574377"/>
+          <p:cNvPr id="653832836" name="Flèche : pentagone 1610574377"/>
           <p:cNvSpPr/>
           <p:nvPr/>
         </p:nvSpPr>
@@ -17665,7 +17710,7 @@
       </p:sp>
       <p:sp>
         <p:nvSpPr>
-          <p:cNvPr id="51520171" name="Flèche : pentagone 463861063"/>
+          <p:cNvPr id="1253625456" name="Flèche : pentagone 463861063"/>
           <p:cNvSpPr/>
           <p:nvPr/>
         </p:nvSpPr>
@@ -17710,7 +17755,7 @@
       </p:sp>
       <p:sp>
         <p:nvSpPr>
-          <p:cNvPr id="1462614581" name="Flèche : pentagone 272004907"/>
+          <p:cNvPr id="2117571115" name="Flèche : pentagone 272004907"/>
           <p:cNvSpPr/>
           <p:nvPr/>
         </p:nvSpPr>
@@ -17755,7 +17800,7 @@
       </p:sp>
       <p:sp>
         <p:nvSpPr>
-          <p:cNvPr id="1333871741" name="Flèche : pentagone 28174069"/>
+          <p:cNvPr id="1218077280" name="Flèche : pentagone 28174069"/>
           <p:cNvSpPr/>
           <p:nvPr/>
         </p:nvSpPr>
@@ -17800,7 +17845,7 @@
       </p:sp>
       <p:sp>
         <p:nvSpPr>
-          <p:cNvPr id="1872155" name="Flèche : pentagone 978127220"/>
+          <p:cNvPr id="625473441" name="Flèche : pentagone 978127220"/>
           <p:cNvSpPr/>
           <p:nvPr/>
         </p:nvSpPr>
@@ -17845,14 +17890,14 @@
       </p:sp>
       <p:sp>
         <p:nvSpPr>
-          <p:cNvPr id="927392393" name="ZoneTexte 1693594013"/>
+          <p:cNvPr id="83014463" name="ZoneTexte 1693594013"/>
           <p:cNvSpPr txBox="1"/>
           <p:nvPr/>
         </p:nvSpPr>
         <p:spPr bwMode="auto">
           <a:xfrm flipH="0" flipV="0">
-            <a:off x="3252186" y="6489751"/>
-            <a:ext cx="3578947" cy="3017880"/>
+            <a:off x="3252186" y="6489750"/>
+            <a:ext cx="3613866" cy="3139799"/>
           </a:xfrm>
           <a:prstGeom prst="rect">
             <a:avLst/>
@@ -17924,7 +17969,7 @@
                 <a:ea typeface="+mn-ea"/>
                 <a:cs typeface="+mn-cs"/>
               </a:rPr>
-              <a:t>Après chaque test de maîtrise de soi, cochez une case de faim.</a:t>
+              <a:t>Après un test de maîtrise de soi réussi, cochez une case de faim.</a:t>
             </a:r>
             <a:r>
               <a:rPr lang="fr-FR" sz="800" b="0" i="0" u="none" strike="noStrike" cap="none" spc="0">
@@ -17938,7 +17983,7 @@
                 <a:ea typeface="+mn-ea"/>
                 <a:cs typeface="+mn-cs"/>
               </a:rPr>
-              <a:t> Vous pouvez diminuer votre faim en vous laissant aller à celle-ci au cours d’une scène.</a:t>
+              <a:t> Vous pouvez diminuer votre faim en vous laissant aller à celle-ci au cours d’une scène. Si vous échouez à votre test de maîtrise de soi, cochez une case de rage.</a:t>
             </a:r>
             <a:endParaRPr sz="800">
               <a:solidFill>
@@ -18132,7 +18177,29 @@
                   </a:schemeClr>
                 </a:solidFill>
               </a:rPr>
-              <a:t>Lorsque la pleine lune apparaît dans le ciel pour la première fois durant la nuit, si votre maîtrise de soi est inférieure à 65, vous devez la tester. Si vous échouez, vous vous transformez en forme bestiale pour la scène. Si vous réussissez, cochez la première case de rage si elle ne l’était pas.</a:t>
+              <a:t>Lorsque la pleine lune apparaît dans le ciel pour la première fois durant la nuit, si votre maîtrise de soi est </a:t>
+            </a:r>
+            <a:r>
+              <a:rPr sz="800" b="1">
+                <a:solidFill>
+                  <a:schemeClr val="tx1">
+                    <a:lumMod val="50000"/>
+                    <a:lumOff val="50000"/>
+                  </a:schemeClr>
+                </a:solidFill>
+              </a:rPr>
+              <a:t>inférieure à 65</a:t>
+            </a:r>
+            <a:r>
+              <a:rPr sz="800">
+                <a:solidFill>
+                  <a:schemeClr val="tx1">
+                    <a:lumMod val="50000"/>
+                    <a:lumOff val="50000"/>
+                  </a:schemeClr>
+                </a:solidFill>
+              </a:rPr>
+              <a:t>, vous devez la tester. Si vous échouez, vous vous transformez en forme bestiale pour la scène. Si vous réussissez, cochez la première case de rage si elle ne l’était pas.</a:t>
             </a:r>
             <a:endParaRPr sz="800">
               <a:solidFill>
@@ -18174,7 +18241,7 @@
       </p:sp>
       <p:sp>
         <p:nvSpPr>
-          <p:cNvPr id="547078835" name="ZoneTexte 1975797288"/>
+          <p:cNvPr id="1541496191" name="ZoneTexte 1975797288"/>
           <p:cNvSpPr txBox="1"/>
           <p:nvPr/>
         </p:nvSpPr>
@@ -18214,14 +18281,14 @@
       </p:sp>
       <p:sp>
         <p:nvSpPr>
-          <p:cNvPr id="1845168150" name="ZoneTexte 2064865984"/>
+          <p:cNvPr id="770366251" name="ZoneTexte 2064865984"/>
           <p:cNvSpPr txBox="1"/>
           <p:nvPr/>
         </p:nvSpPr>
         <p:spPr bwMode="auto">
           <a:xfrm flipH="0" flipV="0">
-            <a:off x="972" y="3286432"/>
-            <a:ext cx="2000790" cy="1981559"/>
+            <a:off x="972" y="2873682"/>
+            <a:ext cx="2006189" cy="1981559"/>
           </a:xfrm>
           <a:prstGeom prst="rect">
             <a:avLst/>
@@ -18471,7 +18538,7 @@
                 <a:ea typeface="Arial"/>
                 <a:cs typeface="Arial"/>
               </a:rPr>
-              <a:t> à la fin d’une scène.</a:t>
+              <a:t> à la fin de chaque scène.</a:t>
             </a:r>
             <a:endParaRPr/>
           </a:p>
@@ -18479,14 +18546,14 @@
       </p:sp>
       <p:sp>
         <p:nvSpPr>
-          <p:cNvPr id="730661819" name="ZoneTexte 1387173154"/>
+          <p:cNvPr id="1154887250" name="ZoneTexte 1387173154"/>
           <p:cNvSpPr txBox="1"/>
           <p:nvPr/>
         </p:nvSpPr>
         <p:spPr bwMode="auto">
           <a:xfrm>
-            <a:off x="1933040" y="3296307"/>
-            <a:ext cx="2289743" cy="2103479"/>
+            <a:off x="1933039" y="2883556"/>
+            <a:ext cx="2299462" cy="2347319"/>
           </a:xfrm>
           <a:prstGeom prst="rect">
             <a:avLst/>
@@ -18786,7 +18853,35 @@
                 <a:ea typeface="Arial"/>
                 <a:cs typeface="Arial"/>
               </a:rPr>
-              <a:t> à la fin d’une scène.</a:t>
+              <a:t> à la fin d’une scène </a:t>
+            </a:r>
+            <a:r>
+              <a:rPr lang="fr-FR" sz="800" b="0" i="0" u="none" strike="noStrike" cap="none" spc="0">
+                <a:solidFill>
+                  <a:schemeClr val="tx1">
+                    <a:lumMod val="50000"/>
+                    <a:lumOff val="50000"/>
+                  </a:schemeClr>
+                </a:solidFill>
+                <a:latin typeface="Arial"/>
+                <a:ea typeface="Arial"/>
+                <a:cs typeface="Arial"/>
+              </a:rPr>
+              <a:t>et pouvez vous relever une fois durant une scène si vous aviez été mis hors-combat.</a:t>
+            </a:r>
+            <a:r>
+              <a:rPr lang="fr-FR" sz="800" b="0" i="0" u="none" strike="noStrike" cap="none" spc="0">
+                <a:solidFill>
+                  <a:schemeClr val="tx1">
+                    <a:lumMod val="50000"/>
+                    <a:lumOff val="50000"/>
+                  </a:schemeClr>
+                </a:solidFill>
+                <a:latin typeface="Arial"/>
+                <a:ea typeface="Arial"/>
+                <a:cs typeface="Arial"/>
+              </a:rPr>
+              <a:t> </a:t>
             </a:r>
             <a:endParaRPr lang="fr-FR" sz="800" b="0" i="0" u="none" strike="noStrike" cap="none" spc="0">
               <a:solidFill>
@@ -18803,14 +18898,14 @@
       </p:sp>
       <p:sp>
         <p:nvSpPr>
-          <p:cNvPr id="1044739637" name="ZoneTexte 523755832"/>
+          <p:cNvPr id="831132755" name="ZoneTexte 523755832"/>
           <p:cNvSpPr txBox="1"/>
           <p:nvPr/>
         </p:nvSpPr>
         <p:spPr bwMode="auto">
           <a:xfrm flipH="0" flipV="0">
-            <a:off x="4180724" y="3296306"/>
-            <a:ext cx="2673846" cy="2103480"/>
+            <a:off x="4180723" y="2883555"/>
+            <a:ext cx="2714166" cy="2469239"/>
           </a:xfrm>
           <a:prstGeom prst="rect">
             <a:avLst/>
@@ -18850,6 +18945,19 @@
               </a:rPr>
               <a:t>Sous forme bestiale, vous n’avez plus aucune maîtrise de vous-même et prenez l’apparence des créatures de terreur des légendes pour la durée d’une scène. Vous devez attaquer tout ce qui représente un danger pour vous ou fuir la civilisation dès que le danger est écarté.</a:t>
             </a:r>
+            <a:r>
+              <a:rPr lang="fr-FR" sz="800" b="0" i="0" u="none" strike="noStrike" cap="none" spc="0">
+                <a:solidFill>
+                  <a:schemeClr val="tx1">
+                    <a:lumMod val="50000"/>
+                    <a:lumOff val="50000"/>
+                  </a:schemeClr>
+                </a:solidFill>
+                <a:latin typeface="Arial"/>
+                <a:cs typeface="Arial"/>
+              </a:rPr>
+              <a:t> Vous pouvez prendre volontairement cette forme en cochant une case de rage.</a:t>
+            </a:r>
             <a:endParaRPr lang="fr-FR" sz="800" b="0" i="0" u="none" strike="noStrike" cap="none" spc="0">
               <a:solidFill>
                 <a:schemeClr val="tx1">
@@ -19089,7 +19197,35 @@
                 <a:ea typeface="Arial"/>
                 <a:cs typeface="Arial"/>
               </a:rPr>
-              <a:t> à la fin d’une scène.</a:t>
+              <a:t> à la fin d’une scène </a:t>
+            </a:r>
+            <a:r>
+              <a:rPr lang="fr-FR" sz="800" b="0" i="0" u="none" strike="noStrike" cap="none" spc="0">
+                <a:solidFill>
+                  <a:schemeClr val="tx1">
+                    <a:lumMod val="50000"/>
+                    <a:lumOff val="50000"/>
+                  </a:schemeClr>
+                </a:solidFill>
+                <a:latin typeface="Arial"/>
+                <a:ea typeface="Arial"/>
+                <a:cs typeface="Arial"/>
+              </a:rPr>
+              <a:t>et pouvez vous relever une fois durant une scène si vous aviez été mis hors-combat.</a:t>
+            </a:r>
+            <a:r>
+              <a:rPr lang="fr-FR" sz="800" b="0" i="0" u="none" strike="noStrike" cap="none" spc="0">
+                <a:solidFill>
+                  <a:schemeClr val="tx1">
+                    <a:lumMod val="50000"/>
+                    <a:lumOff val="50000"/>
+                  </a:schemeClr>
+                </a:solidFill>
+                <a:latin typeface="Arial"/>
+                <a:ea typeface="Arial"/>
+                <a:cs typeface="Arial"/>
+              </a:rPr>
+              <a:t>.</a:t>
             </a:r>
             <a:br>
               <a:rPr lang="fr-FR" sz="800" b="0" i="0" u="none" strike="noStrike" cap="none" spc="0">
@@ -19216,7 +19352,7 @@
       </p:sp>
       <p:cxnSp>
         <p:nvCxnSpPr>
-          <p:cNvPr id="621172540" name="Connecteur droit 2085669542"/>
+          <p:cNvPr id="1304321660" name="Connecteur droit 2085669542"/>
           <p:cNvCxnSpPr/>
           <p:nvPr/>
         </p:nvCxnSpPr>
@@ -19259,14 +19395,14 @@
       </p:cxnSp>
       <p:sp>
         <p:nvSpPr>
-          <p:cNvPr id="1042636605" name="ZoneTexte 34398067"/>
+          <p:cNvPr id="1446448137" name="ZoneTexte 34398067"/>
           <p:cNvSpPr txBox="1"/>
           <p:nvPr/>
         </p:nvSpPr>
         <p:spPr bwMode="auto">
           <a:xfrm>
-            <a:off x="-5859" y="5446451"/>
-            <a:ext cx="2833435" cy="366119"/>
+            <a:off x="-5859" y="5446450"/>
+            <a:ext cx="2843154" cy="366119"/>
           </a:xfrm>
           <a:prstGeom prst="rect">
             <a:avLst/>
@@ -19294,18 +19430,7 @@
                 <a:ea typeface="Arial"/>
                 <a:cs typeface="Arial"/>
               </a:rPr>
-              <a:t>Autres</a:t>
-            </a:r>
-            <a:r>
-              <a:rPr sz="1800" b="0">
-                <a:solidFill>
-                  <a:schemeClr val="tx1">
-                    <a:lumMod val="75000"/>
-                    <a:lumOff val="25000"/>
-                  </a:schemeClr>
-                </a:solidFill>
-              </a:rPr>
-              <a:t> Pouvoirs</a:t>
+              <a:t>Les pouvoirs de la Bête</a:t>
             </a:r>
             <a:endParaRPr/>
           </a:p>
@@ -19313,14 +19438,14 @@
       </p:sp>
       <p:sp>
         <p:nvSpPr>
-          <p:cNvPr id="1029583738" name="ZoneTexte 273581705"/>
+          <p:cNvPr id="1510524716" name="ZoneTexte 273581705"/>
           <p:cNvSpPr txBox="1"/>
           <p:nvPr/>
         </p:nvSpPr>
         <p:spPr bwMode="auto">
           <a:xfrm>
-            <a:off x="972" y="5871949"/>
-            <a:ext cx="3029678" cy="3714095"/>
+            <a:off x="972" y="5871948"/>
+            <a:ext cx="3033997" cy="3751959"/>
           </a:xfrm>
           <a:prstGeom prst="rect">
             <a:avLst/>
@@ -19611,7 +19736,7 @@
       </p:sp>
       <p:sp>
         <p:nvSpPr>
-          <p:cNvPr id="1428185201" name="ZoneTexte 1727393832"/>
+          <p:cNvPr id="989145323" name="ZoneTexte 1727393832"/>
           <p:cNvSpPr txBox="1"/>
           <p:nvPr/>
         </p:nvSpPr>
@@ -19653,7 +19778,7 @@
       </p:sp>
       <p:sp>
         <p:nvSpPr>
-          <p:cNvPr id="834982786" name="ZoneTexte 504516740"/>
+          <p:cNvPr id="2123010582" name="ZoneTexte 504516740"/>
           <p:cNvSpPr txBox="1"/>
           <p:nvPr/>
         </p:nvSpPr>
@@ -19695,14 +19820,14 @@
       </p:sp>
       <p:sp>
         <p:nvSpPr>
-          <p:cNvPr id="166140385" name="ZoneTexte 1"/>
+          <p:cNvPr id="1375254504" name="ZoneTexte 1"/>
           <p:cNvSpPr txBox="1"/>
           <p:nvPr/>
         </p:nvSpPr>
         <p:spPr bwMode="auto">
           <a:xfrm flipH="0" flipV="0">
-            <a:off x="3449955" y="531376"/>
-            <a:ext cx="3421777" cy="1737719"/>
+            <a:off x="3449954" y="531375"/>
+            <a:ext cx="3422496" cy="1432919"/>
           </a:xfrm>
           <a:prstGeom prst="rect">
             <a:avLst/>
@@ -19720,7 +19845,7 @@
               <a:defRPr/>
             </a:pPr>
             <a:r>
-              <a:rPr lang="fr-FR" sz="900">
+              <a:rPr lang="fr-FR" sz="800" i="1">
                 <a:solidFill>
                   <a:schemeClr val="tx1">
                     <a:lumMod val="50000"/>
@@ -19731,7 +19856,7 @@
               <a:t>Votre</a:t>
             </a:r>
             <a:r>
-              <a:rPr lang="fr-FR" sz="900">
+              <a:rPr lang="fr-FR" sz="800" i="1">
                 <a:solidFill>
                   <a:schemeClr val="tx1">
                     <a:lumMod val="50000"/>
@@ -19742,7 +19867,7 @@
               <a:t> </a:t>
             </a:r>
             <a:r>
-              <a:rPr lang="en-US" sz="900">
+              <a:rPr lang="en-US" sz="800" i="1">
                 <a:solidFill>
                   <a:schemeClr val="tx1">
                     <a:lumMod val="50000"/>
@@ -19753,7 +19878,7 @@
               <a:t>corps </a:t>
             </a:r>
             <a:r>
-              <a:rPr lang="en-US" sz="900">
+              <a:rPr lang="en-US" sz="800" i="1">
                 <a:solidFill>
                   <a:schemeClr val="tx1">
                     <a:lumMod val="50000"/>
@@ -19764,7 +19889,7 @@
               <a:t>s’</a:t>
             </a:r>
             <a:r>
-              <a:rPr lang="fr-FR" sz="900">
+              <a:rPr lang="fr-FR" sz="800" i="1">
                 <a:solidFill>
                   <a:schemeClr val="tx1">
                     <a:lumMod val="50000"/>
@@ -19775,7 +19900,7 @@
               <a:t>est</a:t>
             </a:r>
             <a:r>
-              <a:rPr lang="fr-FR" sz="900">
+              <a:rPr lang="fr-FR" sz="800" i="1">
                 <a:solidFill>
                   <a:schemeClr val="tx1">
                     <a:lumMod val="50000"/>
@@ -19786,7 +19911,7 @@
               <a:t> </a:t>
             </a:r>
             <a:r>
-              <a:rPr lang="fr-FR" sz="900">
+              <a:rPr lang="fr-FR" sz="800" i="1">
                 <a:solidFill>
                   <a:schemeClr val="tx1">
                     <a:lumMod val="50000"/>
@@ -19797,7 +19922,7 @@
               <a:t>renforcé</a:t>
             </a:r>
             <a:r>
-              <a:rPr lang="fr-FR" sz="900">
+              <a:rPr lang="fr-FR" sz="800" i="1">
                 <a:solidFill>
                   <a:schemeClr val="tx1">
                     <a:lumMod val="50000"/>
@@ -19808,7 +19933,7 @@
               <a:t> </a:t>
             </a:r>
             <a:r>
-              <a:rPr lang="fr-FR" sz="900">
+              <a:rPr lang="fr-FR" sz="800" i="1">
                 <a:solidFill>
                   <a:schemeClr val="tx1">
                     <a:lumMod val="50000"/>
@@ -19819,7 +19944,7 @@
               <a:t>et </a:t>
             </a:r>
             <a:r>
-              <a:rPr lang="fr-FR" sz="900">
+              <a:rPr lang="fr-FR" sz="800" i="1">
                 <a:solidFill>
                   <a:schemeClr val="tx1">
                     <a:lumMod val="50000"/>
@@ -19830,7 +19955,7 @@
               <a:t>il </a:t>
             </a:r>
             <a:r>
-              <a:rPr lang="fr-FR" sz="900">
+              <a:rPr lang="fr-FR" sz="800" i="1">
                 <a:solidFill>
                   <a:schemeClr val="tx1">
                     <a:lumMod val="50000"/>
@@ -19841,7 +19966,7 @@
               <a:t>guérit</a:t>
             </a:r>
             <a:r>
-              <a:rPr lang="fr-FR" sz="900">
+              <a:rPr lang="fr-FR" sz="800" i="1">
                 <a:solidFill>
                   <a:schemeClr val="tx1">
                     <a:lumMod val="50000"/>
@@ -19852,7 +19977,7 @@
               <a:t> </a:t>
             </a:r>
             <a:r>
-              <a:rPr lang="fr-FR" sz="900">
+              <a:rPr lang="fr-FR" sz="800" i="1">
                 <a:solidFill>
                   <a:schemeClr val="tx1">
                     <a:lumMod val="50000"/>
@@ -19863,7 +19988,7 @@
               <a:t>maintenant</a:t>
             </a:r>
             <a:r>
-              <a:rPr lang="fr-FR" sz="900">
+              <a:rPr lang="fr-FR" sz="800" i="1">
                 <a:solidFill>
                   <a:schemeClr val="tx1">
                     <a:lumMod val="50000"/>
@@ -19874,7 +19999,7 @@
               <a:t> </a:t>
             </a:r>
             <a:r>
-              <a:rPr lang="fr-FR" sz="900">
+              <a:rPr lang="fr-FR" sz="800" i="1">
                 <a:solidFill>
                   <a:schemeClr val="tx1">
                     <a:lumMod val="50000"/>
@@ -19885,7 +20010,7 @@
               <a:t>très </a:t>
             </a:r>
             <a:r>
-              <a:rPr lang="fr-FR" sz="900">
+              <a:rPr lang="fr-FR" sz="800" i="1">
                 <a:solidFill>
                   <a:schemeClr val="tx1">
                     <a:lumMod val="50000"/>
@@ -19896,7 +20021,7 @@
               <a:t>vite</a:t>
             </a:r>
             <a:r>
-              <a:rPr lang="fr-FR" sz="900">
+              <a:rPr lang="fr-FR" sz="800" i="1">
                 <a:solidFill>
                   <a:schemeClr val="tx1">
                     <a:lumMod val="50000"/>
@@ -19907,7 +20032,7 @@
               <a:t> </a:t>
             </a:r>
             <a:r>
-              <a:rPr lang="fr-FR" sz="900">
+              <a:rPr lang="fr-FR" sz="800" i="1">
                 <a:solidFill>
                   <a:schemeClr val="tx1">
                     <a:lumMod val="50000"/>
@@ -19918,7 +20043,7 @@
               <a:t>de </a:t>
             </a:r>
             <a:r>
-              <a:rPr lang="fr-FR" sz="900">
+              <a:rPr lang="fr-FR" sz="800" i="1">
                 <a:solidFill>
                   <a:schemeClr val="tx1">
                     <a:lumMod val="50000"/>
@@ -19929,7 +20054,7 @@
               <a:t>ses</a:t>
             </a:r>
             <a:r>
-              <a:rPr lang="fr-FR" sz="900">
+              <a:rPr lang="fr-FR" sz="800" i="1">
                 <a:solidFill>
                   <a:schemeClr val="tx1">
                     <a:lumMod val="50000"/>
@@ -19940,7 +20065,7 @@
               <a:t> </a:t>
             </a:r>
             <a:r>
-              <a:rPr lang="fr-FR" sz="900">
+              <a:rPr lang="fr-FR" sz="800" i="1">
                 <a:solidFill>
                   <a:schemeClr val="tx1">
                     <a:lumMod val="50000"/>
@@ -19951,7 +20076,7 @@
               <a:t>blessures</a:t>
             </a:r>
             <a:r>
-              <a:rPr lang="fr-FR" sz="900">
+              <a:rPr lang="fr-FR" sz="800" i="1">
                 <a:solidFill>
                   <a:schemeClr val="tx1">
                     <a:lumMod val="50000"/>
@@ -19962,7 +20087,7 @@
               <a:t> </a:t>
             </a:r>
             <a:r>
-              <a:rPr lang="en-US" sz="900">
+              <a:rPr lang="en-US" sz="800" i="1">
                 <a:solidFill>
                   <a:schemeClr val="tx1">
                     <a:lumMod val="50000"/>
@@ -19973,7 +20098,7 @@
               <a:t>; </a:t>
             </a:r>
             <a:r>
-              <a:rPr lang="fr-FR" sz="900">
+              <a:rPr lang="fr-FR" sz="800" i="1">
                 <a:solidFill>
                   <a:schemeClr val="tx1">
                     <a:lumMod val="50000"/>
@@ -19984,7 +20109,7 @@
               <a:t>vos</a:t>
             </a:r>
             <a:r>
-              <a:rPr lang="fr-FR" sz="900">
+              <a:rPr lang="fr-FR" sz="800" i="1">
                 <a:solidFill>
                   <a:schemeClr val="tx1">
                     <a:lumMod val="50000"/>
@@ -19995,7 +20120,7 @@
               <a:t> </a:t>
             </a:r>
             <a:r>
-              <a:rPr lang="en-US" sz="900">
+              <a:rPr lang="en-US" sz="800" i="1">
                 <a:solidFill>
                   <a:schemeClr val="tx1">
                     <a:lumMod val="50000"/>
@@ -20006,7 +20131,7 @@
               <a:t>sens</a:t>
             </a:r>
             <a:r>
-              <a:rPr lang="en-US" sz="900">
+              <a:rPr lang="en-US" sz="800" i="1">
                 <a:solidFill>
                   <a:schemeClr val="tx1">
                     <a:lumMod val="50000"/>
@@ -20017,7 +20142,7 @@
               <a:t> </a:t>
             </a:r>
             <a:r>
-              <a:rPr lang="fr-FR" sz="900">
+              <a:rPr lang="fr-FR" sz="800" i="1">
                 <a:solidFill>
                   <a:schemeClr val="tx1">
                     <a:lumMod val="50000"/>
@@ -20028,7 +20153,7 @@
               <a:t>sont</a:t>
             </a:r>
             <a:r>
-              <a:rPr lang="fr-FR" sz="900">
+              <a:rPr lang="fr-FR" sz="800" i="1">
                 <a:solidFill>
                   <a:schemeClr val="tx1">
                     <a:lumMod val="50000"/>
@@ -20039,7 +20164,7 @@
               <a:t> </a:t>
             </a:r>
             <a:r>
-              <a:rPr lang="en-US" sz="900">
+              <a:rPr lang="en-US" sz="800" i="1">
                 <a:solidFill>
                   <a:schemeClr val="tx1">
                     <a:lumMod val="50000"/>
@@ -20050,7 +20175,7 @@
               <a:t>plus </a:t>
             </a:r>
             <a:r>
-              <a:rPr lang="fr-FR" sz="900">
+              <a:rPr lang="fr-FR" sz="800" i="1">
                 <a:solidFill>
                   <a:schemeClr val="tx1">
                     <a:lumMod val="50000"/>
@@ -20061,7 +20186,7 @@
               <a:t>affûtés</a:t>
             </a:r>
             <a:r>
-              <a:rPr lang="en-US" sz="900">
+              <a:rPr lang="en-US" sz="800" i="1">
                 <a:solidFill>
                   <a:schemeClr val="tx1">
                     <a:lumMod val="50000"/>
@@ -20072,7 +20197,7 @@
               <a:t>, </a:t>
             </a:r>
             <a:r>
-              <a:rPr lang="fr-FR" sz="900">
+              <a:rPr lang="fr-FR" sz="800" i="1">
                 <a:solidFill>
                   <a:schemeClr val="tx1">
                     <a:lumMod val="50000"/>
@@ -20083,7 +20208,7 @@
               <a:t>surtout </a:t>
             </a:r>
             <a:r>
-              <a:rPr lang="fr-FR" sz="900">
+              <a:rPr lang="fr-FR" sz="800" i="1">
                 <a:solidFill>
                   <a:schemeClr val="tx1">
                     <a:lumMod val="50000"/>
@@ -20094,7 +20219,7 @@
               <a:t>votre</a:t>
             </a:r>
             <a:r>
-              <a:rPr lang="fr-FR" sz="900">
+              <a:rPr lang="fr-FR" sz="800" i="1">
                 <a:solidFill>
                   <a:schemeClr val="tx1">
                     <a:lumMod val="50000"/>
@@ -20105,7 +20230,7 @@
               <a:t> </a:t>
             </a:r>
             <a:r>
-              <a:rPr lang="fr-FR" sz="900">
+              <a:rPr lang="fr-FR" sz="800" i="1">
                 <a:solidFill>
                   <a:schemeClr val="tx1">
                     <a:lumMod val="50000"/>
@@ -20116,7 +20241,7 @@
               <a:t>ouïe</a:t>
             </a:r>
             <a:r>
-              <a:rPr lang="fr-FR" sz="900">
+              <a:rPr lang="fr-FR" sz="800" i="1">
                 <a:solidFill>
                   <a:schemeClr val="tx1">
                     <a:lumMod val="50000"/>
@@ -20127,7 +20252,7 @@
               <a:t> </a:t>
             </a:r>
             <a:r>
-              <a:rPr lang="fr-FR" sz="900">
+              <a:rPr lang="fr-FR" sz="800" i="1">
                 <a:solidFill>
                   <a:schemeClr val="tx1">
                     <a:lumMod val="50000"/>
@@ -20138,7 +20263,7 @@
               <a:t>et </a:t>
             </a:r>
             <a:r>
-              <a:rPr lang="fr-FR" sz="900">
+              <a:rPr lang="fr-FR" sz="800" i="1">
                 <a:solidFill>
                   <a:schemeClr val="tx1">
                     <a:lumMod val="50000"/>
@@ -20149,7 +20274,7 @@
               <a:t>votre</a:t>
             </a:r>
             <a:r>
-              <a:rPr lang="fr-FR" sz="900">
+              <a:rPr lang="fr-FR" sz="800" i="1">
                 <a:solidFill>
                   <a:schemeClr val="tx1">
                     <a:lumMod val="50000"/>
@@ -20160,7 +20285,7 @@
               <a:t> </a:t>
             </a:r>
             <a:r>
-              <a:rPr lang="fr-FR" sz="900">
+              <a:rPr lang="fr-FR" sz="800" i="1">
                 <a:solidFill>
                   <a:schemeClr val="tx1">
                     <a:lumMod val="50000"/>
@@ -20171,7 +20296,7 @@
               <a:t>odorat</a:t>
             </a:r>
             <a:r>
-              <a:rPr lang="en-US" sz="900">
+              <a:rPr lang="en-US" sz="800" i="1">
                 <a:solidFill>
                   <a:schemeClr val="tx1">
                     <a:lumMod val="50000"/>
@@ -20182,7 +20307,7 @@
               <a:t>. </a:t>
             </a:r>
             <a:r>
-              <a:rPr lang="fr-FR" sz="900">
+              <a:rPr lang="fr-FR" sz="800" i="1">
                 <a:solidFill>
                   <a:schemeClr val="tx1">
                     <a:lumMod val="50000"/>
@@ -20193,7 +20318,7 @@
               <a:t>Vous </a:t>
             </a:r>
             <a:r>
-              <a:rPr lang="fr-FR" sz="900">
+              <a:rPr lang="fr-FR" sz="800" i="1">
                 <a:solidFill>
                   <a:schemeClr val="tx1">
                     <a:lumMod val="50000"/>
@@ -20204,7 +20329,7 @@
               <a:t>sentez</a:t>
             </a:r>
             <a:r>
-              <a:rPr lang="fr-FR" sz="900">
+              <a:rPr lang="fr-FR" sz="800" i="1">
                 <a:solidFill>
                   <a:schemeClr val="tx1">
                     <a:lumMod val="50000"/>
@@ -20215,7 +20340,7 @@
               <a:t> </a:t>
             </a:r>
             <a:r>
-              <a:rPr lang="fr-FR" sz="900">
+              <a:rPr lang="fr-FR" sz="800" i="1">
                 <a:solidFill>
                   <a:schemeClr val="tx1">
                     <a:lumMod val="50000"/>
@@ -20226,7 +20351,7 @@
               <a:t>également</a:t>
             </a:r>
             <a:r>
-              <a:rPr lang="fr-FR" sz="900">
+              <a:rPr lang="fr-FR" sz="800" i="1">
                 <a:solidFill>
                   <a:schemeClr val="tx1">
                     <a:lumMod val="50000"/>
@@ -20237,7 +20362,7 @@
               <a:t> </a:t>
             </a:r>
             <a:r>
-              <a:rPr lang="en-US" sz="900">
+              <a:rPr lang="en-US" sz="800" i="1">
                 <a:solidFill>
                   <a:schemeClr val="tx1">
                     <a:lumMod val="50000"/>
@@ -20248,7 +20373,7 @@
               <a:t>la fascination </a:t>
             </a:r>
             <a:r>
-              <a:rPr lang="fr-FR" sz="900">
+              <a:rPr lang="fr-FR" sz="800" i="1">
                 <a:solidFill>
                   <a:schemeClr val="tx1">
                     <a:lumMod val="50000"/>
@@ -20259,7 +20384,7 @@
               <a:t>mêlée </a:t>
             </a:r>
             <a:r>
-              <a:rPr lang="fr-FR" sz="900">
+              <a:rPr lang="fr-FR" sz="800" i="1">
                 <a:solidFill>
                   <a:schemeClr val="tx1">
                     <a:lumMod val="50000"/>
@@ -20270,7 +20395,7 @@
               <a:t>de </a:t>
             </a:r>
             <a:r>
-              <a:rPr lang="fr-FR" sz="900">
+              <a:rPr lang="fr-FR" sz="800" i="1">
                 <a:solidFill>
                   <a:schemeClr val="tx1">
                     <a:lumMod val="50000"/>
@@ -20281,7 +20406,7 @@
               <a:t>peur</a:t>
             </a:r>
             <a:r>
-              <a:rPr lang="fr-FR" sz="900">
+              <a:rPr lang="fr-FR" sz="800" i="1">
                 <a:solidFill>
                   <a:schemeClr val="tx1">
                     <a:lumMod val="50000"/>
@@ -20292,7 +20417,7 @@
               <a:t> </a:t>
             </a:r>
             <a:r>
-              <a:rPr lang="en-US" sz="900">
+              <a:rPr lang="en-US" sz="800" i="1">
                 <a:solidFill>
                   <a:schemeClr val="tx1">
                     <a:lumMod val="50000"/>
@@ -20303,7 +20428,7 @@
               <a:t>diffuse </a:t>
             </a:r>
             <a:r>
-              <a:rPr lang="fr-FR" sz="900">
+              <a:rPr lang="fr-FR" sz="800" i="1">
                 <a:solidFill>
                   <a:schemeClr val="tx1">
                     <a:lumMod val="50000"/>
@@ -20314,7 +20439,7 @@
               <a:t>que</a:t>
             </a:r>
             <a:r>
-              <a:rPr lang="fr-FR" sz="900">
+              <a:rPr lang="fr-FR" sz="800" i="1">
                 <a:solidFill>
                   <a:schemeClr val="tx1">
                     <a:lumMod val="50000"/>
@@ -20325,7 +20450,7 @@
               <a:t> </a:t>
             </a:r>
             <a:r>
-              <a:rPr lang="fr-FR" sz="900">
+              <a:rPr lang="fr-FR" sz="800" i="1">
                 <a:solidFill>
                   <a:schemeClr val="tx1">
                     <a:lumMod val="50000"/>
@@ -20336,7 +20461,7 @@
               <a:t>vous </a:t>
             </a:r>
             <a:r>
-              <a:rPr lang="fr-FR" sz="900">
+              <a:rPr lang="fr-FR" sz="800" i="1">
                 <a:solidFill>
                   <a:schemeClr val="tx1">
                     <a:lumMod val="50000"/>
@@ -20347,7 +20472,7 @@
               <a:t>provoquez</a:t>
             </a:r>
             <a:r>
-              <a:rPr lang="fr-FR" sz="900">
+              <a:rPr lang="fr-FR" sz="800" i="1">
                 <a:solidFill>
                   <a:schemeClr val="tx1">
                     <a:lumMod val="50000"/>
@@ -20358,7 +20483,7 @@
               <a:t> </a:t>
             </a:r>
             <a:r>
-              <a:rPr lang="fr-FR" sz="900">
+              <a:rPr lang="fr-FR" sz="800" i="1">
                 <a:solidFill>
                   <a:schemeClr val="tx1">
                     <a:lumMod val="50000"/>
@@ -20369,7 +20494,7 @@
               <a:t>chez </a:t>
             </a:r>
             <a:r>
-              <a:rPr lang="fr-FR" sz="900">
+              <a:rPr lang="fr-FR" sz="800" i="1">
                 <a:solidFill>
                   <a:schemeClr val="tx1">
                     <a:lumMod val="50000"/>
@@ -20380,7 +20505,7 @@
               <a:t>les </a:t>
             </a:r>
             <a:r>
-              <a:rPr lang="fr-FR" sz="900">
+              <a:rPr lang="fr-FR" sz="800" i="1">
                 <a:solidFill>
                   <a:schemeClr val="tx1">
                     <a:lumMod val="50000"/>
@@ -20391,7 +20516,7 @@
               <a:t>humains</a:t>
             </a:r>
             <a:r>
-              <a:rPr lang="en-US" sz="900">
+              <a:rPr lang="en-US" sz="800" i="1">
                 <a:solidFill>
                   <a:schemeClr val="tx1">
                     <a:lumMod val="50000"/>
@@ -20401,7 +20526,7 @@
               </a:rPr>
               <a:t>.</a:t>
             </a:r>
-            <a:endParaRPr lang="fr-FR" sz="1600">
+            <a:endParaRPr sz="1400" i="1">
               <a:solidFill>
                 <a:schemeClr val="tx1">
                   <a:lumMod val="50000"/>
@@ -20414,14 +20539,14 @@
             <a:pPr>
               <a:defRPr/>
             </a:pPr>
-            <a:endParaRPr lang="en-US" sz="900"/>
+            <a:endParaRPr sz="800" i="1"/>
           </a:p>
           <a:p>
             <a:pPr>
               <a:defRPr/>
             </a:pPr>
             <a:r>
-              <a:rPr lang="en-US" sz="900">
+              <a:rPr lang="en-US" sz="800" i="1">
                 <a:solidFill>
                   <a:schemeClr val="tx1">
                     <a:lumMod val="50000"/>
@@ -20432,7 +20557,7 @@
               <a:t>Au </a:t>
             </a:r>
             <a:r>
-              <a:rPr lang="fr-FR" sz="900">
+              <a:rPr lang="fr-FR" sz="800" i="1">
                 <a:solidFill>
                   <a:schemeClr val="tx1">
                     <a:lumMod val="50000"/>
@@ -20443,7 +20568,7 @@
               <a:t>chapitre</a:t>
             </a:r>
             <a:r>
-              <a:rPr lang="fr-FR" sz="900">
+              <a:rPr lang="fr-FR" sz="800" i="1">
                 <a:solidFill>
                   <a:schemeClr val="tx1">
                     <a:lumMod val="50000"/>
@@ -20454,7 +20579,7 @@
               <a:t> </a:t>
             </a:r>
             <a:r>
-              <a:rPr lang="fr-FR" sz="900">
+              <a:rPr lang="fr-FR" sz="800" i="1">
                 <a:solidFill>
                   <a:schemeClr val="tx1">
                     <a:lumMod val="50000"/>
@@ -20465,7 +20590,7 @@
               <a:t>des </a:t>
             </a:r>
             <a:r>
-              <a:rPr lang="fr-FR" sz="900">
+              <a:rPr lang="fr-FR" sz="800" i="1">
                 <a:solidFill>
                   <a:schemeClr val="tx1">
                     <a:lumMod val="50000"/>
@@ -20476,7 +20601,7 @@
               <a:t>mauvaises</a:t>
             </a:r>
             <a:r>
-              <a:rPr lang="fr-FR" sz="900">
+              <a:rPr lang="fr-FR" sz="800" i="1">
                 <a:solidFill>
                   <a:schemeClr val="tx1">
                     <a:lumMod val="50000"/>
@@ -20487,7 +20612,7 @@
               <a:t> </a:t>
             </a:r>
             <a:r>
-              <a:rPr lang="fr-FR" sz="900">
+              <a:rPr lang="fr-FR" sz="800" i="1">
                 <a:solidFill>
                   <a:schemeClr val="tx1">
                     <a:lumMod val="50000"/>
@@ -20498,7 +20623,7 @@
               <a:t>nouvelles</a:t>
             </a:r>
             <a:r>
-              <a:rPr lang="en-US" sz="900">
+              <a:rPr lang="en-US" sz="800" i="1">
                 <a:solidFill>
                   <a:schemeClr val="tx1">
                     <a:lumMod val="50000"/>
@@ -20509,7 +20634,7 @@
               <a:t>, </a:t>
             </a:r>
             <a:r>
-              <a:rPr lang="fr-FR" sz="900">
+              <a:rPr lang="fr-FR" sz="800" i="1">
                 <a:solidFill>
                   <a:schemeClr val="tx1">
                     <a:lumMod val="50000"/>
@@ -20520,7 +20645,7 @@
               <a:t>vous </a:t>
             </a:r>
             <a:r>
-              <a:rPr lang="fr-FR" sz="900">
+              <a:rPr lang="fr-FR" sz="800" i="1">
                 <a:solidFill>
                   <a:schemeClr val="tx1">
                     <a:lumMod val="50000"/>
@@ -20531,7 +20656,7 @@
               <a:t>êtes</a:t>
             </a:r>
             <a:r>
-              <a:rPr lang="fr-FR" sz="900">
+              <a:rPr lang="fr-FR" sz="800" i="1">
                 <a:solidFill>
                   <a:schemeClr val="tx1">
                     <a:lumMod val="50000"/>
@@ -20542,7 +20667,7 @@
               <a:t> </a:t>
             </a:r>
             <a:r>
-              <a:rPr lang="fr-FR" sz="900">
+              <a:rPr lang="fr-FR" sz="800" i="1">
                 <a:solidFill>
                   <a:schemeClr val="tx1">
                     <a:lumMod val="50000"/>
@@ -20553,7 +20678,7 @@
               <a:t>devenu</a:t>
             </a:r>
             <a:r>
-              <a:rPr lang="fr-FR" sz="900">
+              <a:rPr lang="fr-FR" sz="800" i="1">
                 <a:solidFill>
                   <a:schemeClr val="tx1">
                     <a:lumMod val="50000"/>
@@ -20564,7 +20689,7 @@
               <a:t> </a:t>
             </a:r>
             <a:r>
-              <a:rPr lang="en-US" sz="900">
+              <a:rPr lang="en-US" sz="800" i="1">
                 <a:solidFill>
                   <a:schemeClr val="tx1">
                     <a:lumMod val="50000"/>
@@ -20575,7 +20700,7 @@
               <a:t>sensible à </a:t>
             </a:r>
             <a:r>
-              <a:rPr lang="en-US" sz="900">
+              <a:rPr lang="en-US" sz="800" i="1">
                 <a:solidFill>
                   <a:schemeClr val="tx1">
                     <a:lumMod val="50000"/>
@@ -20586,7 +20711,7 @@
               <a:t>l’</a:t>
             </a:r>
             <a:r>
-              <a:rPr lang="fr-FR" sz="900">
+              <a:rPr lang="fr-FR" sz="800" i="1">
                 <a:solidFill>
                   <a:schemeClr val="tx1">
                     <a:lumMod val="50000"/>
@@ -20597,7 +20722,7 @@
               <a:t>argent</a:t>
             </a:r>
             <a:r>
-              <a:rPr lang="fr-FR" sz="900">
+              <a:rPr lang="fr-FR" sz="800" i="1">
                 <a:solidFill>
                   <a:schemeClr val="tx1">
                     <a:lumMod val="50000"/>
@@ -20608,7 +20733,7 @@
               <a:t> </a:t>
             </a:r>
             <a:r>
-              <a:rPr lang="fr-FR" sz="900">
+              <a:rPr lang="fr-FR" sz="800" i="1">
                 <a:solidFill>
                   <a:schemeClr val="tx1">
                     <a:lumMod val="50000"/>
@@ -20619,7 +20744,7 @@
               <a:t>et </a:t>
             </a:r>
             <a:r>
-              <a:rPr lang="en-US" sz="900">
+              <a:rPr lang="en-US" sz="800" i="1">
                 <a:solidFill>
                   <a:schemeClr val="tx1">
                     <a:lumMod val="50000"/>
@@ -20630,7 +20755,7 @@
               <a:t>à </a:t>
             </a:r>
             <a:r>
-              <a:rPr lang="en-US" sz="900">
+              <a:rPr lang="en-US" sz="800" i="1">
                 <a:solidFill>
                   <a:schemeClr val="tx1">
                     <a:lumMod val="50000"/>
@@ -20641,7 +20766,7 @@
               <a:t>l’</a:t>
             </a:r>
             <a:r>
-              <a:rPr lang="fr-FR" sz="900">
+              <a:rPr lang="fr-FR" sz="800" i="1">
                 <a:solidFill>
                   <a:schemeClr val="tx1">
                     <a:lumMod val="50000"/>
@@ -20652,7 +20777,7 @@
               <a:t>aconit</a:t>
             </a:r>
             <a:r>
-              <a:rPr lang="en-US" sz="900">
+              <a:rPr lang="en-US" sz="800" i="1">
                 <a:solidFill>
                   <a:schemeClr val="tx1">
                     <a:lumMod val="50000"/>
@@ -20663,7 +20788,7 @@
               <a:t>. </a:t>
             </a:r>
             <a:r>
-              <a:rPr lang="fr-FR" sz="900">
+              <a:rPr lang="fr-FR" sz="800" i="1">
                 <a:solidFill>
                   <a:schemeClr val="tx1">
                     <a:lumMod val="50000"/>
@@ -20674,7 +20799,7 @@
               <a:t>Maintenir</a:t>
             </a:r>
             <a:r>
-              <a:rPr lang="fr-FR" sz="900">
+              <a:rPr lang="fr-FR" sz="800" i="1">
                 <a:solidFill>
                   <a:schemeClr val="tx1">
                     <a:lumMod val="50000"/>
@@ -20685,7 +20810,7 @@
               <a:t> </a:t>
             </a:r>
             <a:r>
-              <a:rPr lang="fr-FR" sz="900">
+              <a:rPr lang="fr-FR" sz="800" i="1">
                 <a:solidFill>
                   <a:schemeClr val="tx1">
                     <a:lumMod val="50000"/>
@@ -20696,7 +20821,7 @@
               <a:t>le </a:t>
             </a:r>
             <a:r>
-              <a:rPr lang="en-US" sz="900">
+              <a:rPr lang="en-US" sz="800" i="1">
                 <a:solidFill>
                   <a:schemeClr val="tx1">
                     <a:lumMod val="50000"/>
@@ -20707,7 +20832,7 @@
               <a:t>secret </a:t>
             </a:r>
             <a:r>
-              <a:rPr lang="fr-FR" sz="900">
+              <a:rPr lang="fr-FR" sz="800" i="1">
                 <a:solidFill>
                   <a:schemeClr val="tx1">
                     <a:lumMod val="50000"/>
@@ -20718,7 +20843,7 @@
               <a:t>de </a:t>
             </a:r>
             <a:r>
-              <a:rPr lang="fr-FR" sz="900">
+              <a:rPr lang="fr-FR" sz="800" i="1">
                 <a:solidFill>
                   <a:schemeClr val="tx1">
                     <a:lumMod val="50000"/>
@@ -20729,7 +20854,7 @@
               <a:t>votre</a:t>
             </a:r>
             <a:r>
-              <a:rPr lang="fr-FR" sz="900">
+              <a:rPr lang="fr-FR" sz="800" i="1">
                 <a:solidFill>
                   <a:schemeClr val="tx1">
                     <a:lumMod val="50000"/>
@@ -20740,7 +20865,7 @@
               <a:t> </a:t>
             </a:r>
             <a:r>
-              <a:rPr lang="en-US" sz="900">
+              <a:rPr lang="en-US" sz="800" i="1">
                 <a:solidFill>
                   <a:schemeClr val="tx1">
                     <a:lumMod val="50000"/>
@@ -20751,7 +20876,7 @@
               <a:t>condition est </a:t>
             </a:r>
             <a:r>
-              <a:rPr lang="fr-FR" sz="900">
+              <a:rPr lang="fr-FR" sz="800" i="1">
                 <a:solidFill>
                   <a:schemeClr val="tx1">
                     <a:lumMod val="50000"/>
@@ -20762,7 +20887,7 @@
               <a:t>maintenant</a:t>
             </a:r>
             <a:r>
-              <a:rPr lang="fr-FR" sz="900">
+              <a:rPr lang="fr-FR" sz="800" i="1">
                 <a:solidFill>
                   <a:schemeClr val="tx1">
                     <a:lumMod val="50000"/>
@@ -20773,7 +20898,7 @@
               <a:t> </a:t>
             </a:r>
             <a:r>
-              <a:rPr lang="fr-FR" sz="900">
+              <a:rPr lang="fr-FR" sz="800" i="1">
                 <a:solidFill>
                   <a:schemeClr val="tx1">
                     <a:lumMod val="50000"/>
@@ -20784,7 +20909,7 @@
               <a:t>aussi</a:t>
             </a:r>
             <a:r>
-              <a:rPr lang="fr-FR" sz="900">
+              <a:rPr lang="fr-FR" sz="800" i="1">
                 <a:solidFill>
                   <a:schemeClr val="tx1">
                     <a:lumMod val="50000"/>
@@ -20795,7 +20920,7 @@
               <a:t> </a:t>
             </a:r>
             <a:r>
-              <a:rPr lang="en-US" sz="900">
+              <a:rPr lang="en-US" sz="800" i="1">
                 <a:solidFill>
                   <a:schemeClr val="tx1">
                     <a:lumMod val="50000"/>
@@ -20806,7 +20931,7 @@
               <a:t>vital </a:t>
             </a:r>
             <a:r>
-              <a:rPr lang="fr-FR" sz="900">
+              <a:rPr lang="fr-FR" sz="800" i="1">
                 <a:solidFill>
                   <a:schemeClr val="tx1">
                     <a:lumMod val="50000"/>
@@ -20817,7 +20942,7 @@
               <a:t>que</a:t>
             </a:r>
             <a:r>
-              <a:rPr lang="fr-FR" sz="900">
+              <a:rPr lang="fr-FR" sz="800" i="1">
                 <a:solidFill>
                   <a:schemeClr val="tx1">
                     <a:lumMod val="50000"/>
@@ -20828,7 +20953,7 @@
               <a:t> </a:t>
             </a:r>
             <a:r>
-              <a:rPr lang="fr-FR" sz="900">
+              <a:rPr lang="fr-FR" sz="800" i="1">
                 <a:solidFill>
                   <a:schemeClr val="tx1">
                     <a:lumMod val="50000"/>
@@ -20839,7 +20964,7 @@
               <a:t>de </a:t>
             </a:r>
             <a:r>
-              <a:rPr lang="fr-FR" sz="900">
+              <a:rPr lang="fr-FR" sz="800" i="1">
                 <a:solidFill>
                   <a:schemeClr val="tx1">
                     <a:lumMod val="50000"/>
@@ -20850,7 +20975,7 @@
               <a:t>garder</a:t>
             </a:r>
             <a:r>
-              <a:rPr lang="fr-FR" sz="900">
+              <a:rPr lang="fr-FR" sz="800" i="1">
                 <a:solidFill>
                   <a:schemeClr val="tx1">
                     <a:lumMod val="50000"/>
@@ -20861,7 +20986,7 @@
               <a:t> </a:t>
             </a:r>
             <a:r>
-              <a:rPr lang="fr-FR" sz="900">
+              <a:rPr lang="fr-FR" sz="800" i="1">
                 <a:solidFill>
                   <a:schemeClr val="tx1">
                     <a:lumMod val="50000"/>
@@ -20872,7 +20997,7 @@
               <a:t>le </a:t>
             </a:r>
             <a:r>
-              <a:rPr lang="fr-FR" sz="900">
+              <a:rPr lang="fr-FR" sz="800" i="1">
                 <a:solidFill>
                   <a:schemeClr val="tx1">
                     <a:lumMod val="50000"/>
@@ -20883,7 +21008,7 @@
               <a:t>contrôle</a:t>
             </a:r>
             <a:r>
-              <a:rPr lang="fr-FR" sz="900">
+              <a:rPr lang="fr-FR" sz="800" i="1">
                 <a:solidFill>
                   <a:schemeClr val="tx1">
                     <a:lumMod val="50000"/>
@@ -20894,7 +21019,7 @@
               <a:t> </a:t>
             </a:r>
             <a:r>
-              <a:rPr lang="fr-FR" sz="900">
+              <a:rPr lang="fr-FR" sz="800" i="1">
                 <a:solidFill>
                   <a:schemeClr val="tx1">
                     <a:lumMod val="50000"/>
@@ -20905,7 +21030,7 @@
               <a:t>de </a:t>
             </a:r>
             <a:r>
-              <a:rPr lang="en-US" sz="900">
+              <a:rPr lang="en-US" sz="800" i="1">
                 <a:solidFill>
                   <a:schemeClr val="tx1">
                     <a:lumMod val="50000"/>
@@ -20916,7 +21041,7 @@
               <a:t>la </a:t>
             </a:r>
             <a:r>
-              <a:rPr lang="fr-FR" sz="900">
+              <a:rPr lang="fr-FR" sz="800" i="1">
                 <a:solidFill>
                   <a:schemeClr val="tx1">
                     <a:lumMod val="50000"/>
@@ -20927,7 +21052,7 @@
               <a:t>bête </a:t>
             </a:r>
             <a:r>
-              <a:rPr lang="fr-FR" sz="900">
+              <a:rPr lang="fr-FR" sz="800" i="1">
                 <a:solidFill>
                   <a:schemeClr val="tx1">
                     <a:lumMod val="50000"/>
@@ -20938,7 +21063,7 @@
               <a:t>qui </a:t>
             </a:r>
             <a:r>
-              <a:rPr lang="fr-FR" sz="900">
+              <a:rPr lang="fr-FR" sz="800" i="1">
                 <a:solidFill>
                   <a:schemeClr val="tx1">
                     <a:lumMod val="50000"/>
@@ -20949,7 +21074,7 @@
               <a:t>sommeille</a:t>
             </a:r>
             <a:r>
-              <a:rPr lang="fr-FR" sz="900">
+              <a:rPr lang="fr-FR" sz="800" i="1">
                 <a:solidFill>
                   <a:schemeClr val="tx1">
                     <a:lumMod val="50000"/>
@@ -20960,7 +21085,7 @@
               <a:t> </a:t>
             </a:r>
             <a:r>
-              <a:rPr lang="en-US" sz="900">
+              <a:rPr lang="en-US" sz="800" i="1">
                 <a:solidFill>
                   <a:schemeClr val="tx1">
                     <a:lumMod val="50000"/>
@@ -20971,7 +21096,7 @@
               <a:t>en</a:t>
             </a:r>
             <a:r>
-              <a:rPr lang="en-US" sz="900">
+              <a:rPr lang="en-US" sz="800" i="1">
                 <a:solidFill>
                   <a:schemeClr val="tx1">
                     <a:lumMod val="50000"/>
@@ -20982,7 +21107,7 @@
               <a:t> </a:t>
             </a:r>
             <a:r>
-              <a:rPr lang="fr-FR" sz="900">
+              <a:rPr lang="fr-FR" sz="800" i="1">
                 <a:solidFill>
                   <a:schemeClr val="tx1">
                     <a:lumMod val="50000"/>
@@ -20993,7 +21118,7 @@
               <a:t>vous </a:t>
             </a:r>
             <a:r>
-              <a:rPr lang="fr-FR" sz="900">
+              <a:rPr lang="fr-FR" sz="800" i="1">
                 <a:solidFill>
                   <a:schemeClr val="tx1">
                     <a:lumMod val="50000"/>
@@ -21004,7 +21129,7 @@
               <a:t>et </a:t>
             </a:r>
             <a:r>
-              <a:rPr lang="fr-FR" sz="900">
+              <a:rPr lang="fr-FR" sz="800" i="1">
                 <a:solidFill>
                   <a:schemeClr val="tx1">
                     <a:lumMod val="50000"/>
@@ -21015,7 +21140,7 @@
               <a:t>qui </a:t>
             </a:r>
             <a:r>
-              <a:rPr lang="fr-FR" sz="900">
+              <a:rPr lang="fr-FR" sz="800" i="1">
                 <a:solidFill>
                   <a:schemeClr val="tx1">
                     <a:lumMod val="50000"/>
@@ -21026,7 +21151,7 @@
               <a:t>pourrait</a:t>
             </a:r>
             <a:r>
-              <a:rPr lang="fr-FR" sz="900">
+              <a:rPr lang="fr-FR" sz="800" i="1">
                 <a:solidFill>
                   <a:schemeClr val="tx1">
                     <a:lumMod val="50000"/>
@@ -21037,7 +21162,7 @@
               <a:t> </a:t>
             </a:r>
             <a:r>
-              <a:rPr lang="fr-FR" sz="900">
+              <a:rPr lang="fr-FR" sz="800" i="1">
                 <a:solidFill>
                   <a:schemeClr val="tx1">
                     <a:lumMod val="50000"/>
@@ -21048,7 +21173,7 @@
               <a:t>blesser </a:t>
             </a:r>
             <a:r>
-              <a:rPr lang="fr-FR" sz="900">
+              <a:rPr lang="fr-FR" sz="800" i="1">
                 <a:solidFill>
                   <a:schemeClr val="tx1">
                     <a:lumMod val="50000"/>
@@ -21059,7 +21184,7 @@
               <a:t>des </a:t>
             </a:r>
             <a:r>
-              <a:rPr lang="fr-FR" sz="900">
+              <a:rPr lang="fr-FR" sz="800" i="1">
                 <a:solidFill>
                   <a:schemeClr val="tx1">
                     <a:lumMod val="50000"/>
@@ -21070,7 +21195,7 @@
               <a:t>êtres</a:t>
             </a:r>
             <a:r>
-              <a:rPr lang="fr-FR" sz="900">
+              <a:rPr lang="fr-FR" sz="800" i="1">
                 <a:solidFill>
                   <a:schemeClr val="tx1">
                     <a:lumMod val="50000"/>
@@ -21081,7 +21206,7 @@
               <a:t> </a:t>
             </a:r>
             <a:r>
-              <a:rPr lang="fr-FR" sz="900">
+              <a:rPr lang="fr-FR" sz="800" i="1">
                 <a:solidFill>
                   <a:schemeClr val="tx1">
                     <a:lumMod val="50000"/>
@@ -21092,7 +21217,7 @@
               <a:t>chers</a:t>
             </a:r>
             <a:r>
-              <a:rPr lang="en-US" sz="900">
+              <a:rPr lang="en-US" sz="800" i="1">
                 <a:solidFill>
                   <a:schemeClr val="tx1">
                     <a:lumMod val="50000"/>
@@ -21103,7 +21228,7 @@
               <a:t>, </a:t>
             </a:r>
             <a:r>
-              <a:rPr lang="fr-FR" sz="900">
+              <a:rPr lang="fr-FR" sz="800" i="1">
                 <a:solidFill>
                   <a:schemeClr val="tx1">
                     <a:lumMod val="50000"/>
@@ -21114,7 +21239,7 @@
               <a:t>ou</a:t>
             </a:r>
             <a:r>
-              <a:rPr lang="fr-FR" sz="900">
+              <a:rPr lang="fr-FR" sz="800" i="1">
                 <a:solidFill>
                   <a:schemeClr val="tx1">
                     <a:lumMod val="50000"/>
@@ -21125,7 +21250,7 @@
               <a:t> </a:t>
             </a:r>
             <a:r>
-              <a:rPr lang="fr-FR" sz="900">
+              <a:rPr lang="fr-FR" sz="800" i="1">
                 <a:solidFill>
                   <a:schemeClr val="tx1">
                     <a:lumMod val="50000"/>
@@ -21136,7 +21261,7 @@
               <a:t>pire</a:t>
             </a:r>
             <a:r>
-              <a:rPr lang="en-US" sz="900">
+              <a:rPr lang="en-US" sz="800" i="1">
                 <a:solidFill>
                   <a:schemeClr val="tx1">
                     <a:lumMod val="50000"/>
@@ -21146,26 +21271,26 @@
               </a:rPr>
               <a:t>.</a:t>
             </a:r>
-            <a:endParaRPr sz="1600"/>
+            <a:endParaRPr sz="1400" i="1"/>
           </a:p>
           <a:p>
             <a:pPr>
               <a:defRPr/>
             </a:pPr>
-            <a:endParaRPr lang="fr-FR"/>
+            <a:endParaRPr sz="1600" i="1"/>
           </a:p>
         </p:txBody>
       </p:sp>
       <p:sp>
         <p:nvSpPr>
-          <p:cNvPr id="2134778671" name="ZoneTexte 2"/>
+          <p:cNvPr id="886135028" name="ZoneTexte 2"/>
           <p:cNvSpPr txBox="1"/>
           <p:nvPr/>
         </p:nvSpPr>
         <p:spPr bwMode="auto">
           <a:xfrm>
-            <a:off x="-5168" y="533755"/>
-            <a:ext cx="3411159" cy="1737719"/>
+            <a:off x="-5167" y="533754"/>
+            <a:ext cx="3412598" cy="1310999"/>
           </a:xfrm>
           <a:prstGeom prst="rect">
             <a:avLst/>
@@ -21183,7 +21308,7 @@
               <a:defRPr/>
             </a:pPr>
             <a:r>
-              <a:rPr lang="fr-FR" sz="900" b="0" i="0" u="none" strike="noStrike" cap="none" spc="0">
+              <a:rPr lang="fr-FR" sz="800" b="0" i="1" u="none" strike="noStrike" cap="none" spc="0">
                 <a:solidFill>
                   <a:schemeClr val="tx1">
                     <a:lumMod val="50000"/>
@@ -21196,20 +21321,20 @@
               </a:rPr>
               <a:t>Depuis qu’il vous a mordu alors que la lune était pleine, vous sentez la rage parcourir votre corps et la faim s’insinuer jusque dans vos rêves. Cette faim insatiable vous pousse à vivre chaque instant comme s’il était le dernier et vous encourage à laisser libre cours à vos pulsions.</a:t>
             </a:r>
-            <a:endParaRPr sz="1600"/>
+            <a:endParaRPr sz="1400" i="1"/>
           </a:p>
           <a:p>
             <a:pPr>
               <a:defRPr/>
             </a:pPr>
-            <a:endParaRPr lang="en-US" sz="900"/>
+            <a:endParaRPr sz="800" i="1"/>
           </a:p>
           <a:p>
             <a:pPr>
               <a:defRPr/>
             </a:pPr>
             <a:r>
-              <a:rPr lang="fr-FR" sz="900" b="0" i="0" u="none" strike="noStrike" cap="none" spc="0">
+              <a:rPr lang="fr-FR" sz="800" b="0" i="1" u="none" strike="noStrike" cap="none" spc="0">
                 <a:solidFill>
                   <a:schemeClr val="tx1">
                     <a:lumMod val="50000"/>
@@ -21223,7 +21348,7 @@
               <a:t>Vous </a:t>
             </a:r>
             <a:r>
-              <a:rPr lang="fr-FR" sz="900" b="0" i="0" u="none" strike="noStrike" cap="none" spc="0">
+              <a:rPr lang="fr-FR" sz="800" b="0" i="1" u="none" strike="noStrike" cap="none" spc="0">
                 <a:solidFill>
                   <a:schemeClr val="tx1">
                     <a:lumMod val="50000"/>
@@ -21237,7 +21362,7 @@
               <a:t>avez </a:t>
             </a:r>
             <a:r>
-              <a:rPr lang="fr-FR" sz="900" b="0" i="0" u="none" strike="noStrike" cap="none" spc="0">
+              <a:rPr lang="fr-FR" sz="800" b="0" i="1" u="none" strike="noStrike" cap="none" spc="0">
                 <a:solidFill>
                   <a:schemeClr val="tx1">
                     <a:lumMod val="50000"/>
@@ -21251,7 +21376,7 @@
               <a:t>découvert </a:t>
             </a:r>
             <a:r>
-              <a:rPr lang="fr-FR" sz="900" b="0" i="0" u="none" strike="noStrike" cap="none" spc="0">
+              <a:rPr lang="fr-FR" sz="800" b="0" i="1" u="none" strike="noStrike" cap="none" spc="0">
                 <a:solidFill>
                   <a:schemeClr val="tx1">
                     <a:lumMod val="50000"/>
@@ -21265,7 +21390,7 @@
               <a:t>que </a:t>
             </a:r>
             <a:r>
-              <a:rPr lang="fr-FR" sz="900" b="0" i="0" u="none" strike="noStrike" cap="none" spc="0">
+              <a:rPr lang="fr-FR" sz="800" b="0" i="1" u="none" strike="noStrike" cap="none" spc="0">
                 <a:solidFill>
                   <a:schemeClr val="tx1">
                     <a:lumMod val="50000"/>
@@ -21279,7 +21404,7 @@
               <a:t>vous </a:t>
             </a:r>
             <a:r>
-              <a:rPr lang="fr-FR" sz="900" b="0" i="0" u="none" strike="noStrike" cap="none" spc="0">
+              <a:rPr lang="fr-FR" sz="800" b="0" i="1" u="none" strike="noStrike" cap="none" spc="0">
                 <a:solidFill>
                   <a:schemeClr val="tx1">
                     <a:lumMod val="50000"/>
@@ -21293,7 +21418,7 @@
               <a:t>pouviez </a:t>
             </a:r>
             <a:r>
-              <a:rPr lang="fr-FR" sz="900" b="0" i="0" u="none" strike="noStrike" cap="none" spc="0">
+              <a:rPr lang="fr-FR" sz="800" b="0" i="1" u="none" strike="noStrike" cap="none" spc="0">
                 <a:solidFill>
                   <a:schemeClr val="tx1">
                     <a:lumMod val="50000"/>
@@ -21307,7 +21432,7 @@
               <a:t>vous </a:t>
             </a:r>
             <a:r>
-              <a:rPr lang="en-US" sz="900" b="0" i="0" u="none" strike="noStrike" cap="none" spc="0">
+              <a:rPr lang="en-US" sz="800" b="0" i="1" u="none" strike="noStrike" cap="none" spc="0">
                 <a:solidFill>
                   <a:schemeClr val="tx1">
                     <a:lumMod val="50000"/>
@@ -21321,7 +21446,7 @@
               <a:t>transformer en </a:t>
             </a:r>
             <a:r>
-              <a:rPr lang="fr-FR" sz="900" b="0" i="0" u="none" strike="noStrike" cap="none" spc="0">
+              <a:rPr lang="fr-FR" sz="800" b="0" i="1" u="none" strike="noStrike" cap="none" spc="0">
                 <a:solidFill>
                   <a:schemeClr val="tx1">
                     <a:lumMod val="50000"/>
@@ -21335,7 +21460,7 @@
               <a:t>loup</a:t>
             </a:r>
             <a:r>
-              <a:rPr lang="en-US" sz="900" b="0" i="0" u="none" strike="noStrike" cap="none" spc="0">
+              <a:rPr lang="en-US" sz="800" b="0" i="1" u="none" strike="noStrike" cap="none" spc="0">
                 <a:solidFill>
                   <a:schemeClr val="tx1">
                     <a:lumMod val="50000"/>
@@ -21349,7 +21474,7 @@
               <a:t>-</a:t>
             </a:r>
             <a:r>
-              <a:rPr lang="fr-FR" sz="900" b="0" i="0" u="none" strike="noStrike" cap="none" spc="0">
+              <a:rPr lang="fr-FR" sz="800" b="0" i="1" u="none" strike="noStrike" cap="none" spc="0">
                 <a:solidFill>
                   <a:schemeClr val="tx1">
                     <a:lumMod val="50000"/>
@@ -21363,7 +21488,7 @@
               <a:t>garou </a:t>
             </a:r>
             <a:r>
-              <a:rPr lang="en-US" sz="900" b="0" i="0" u="none" strike="noStrike" cap="none" spc="0">
+              <a:rPr lang="en-US" sz="800" b="0" i="1" u="none" strike="noStrike" cap="none" spc="0">
                 <a:solidFill>
                   <a:schemeClr val="tx1">
                     <a:lumMod val="50000"/>
@@ -21377,7 +21502,7 @@
               <a:t>sous </a:t>
             </a:r>
             <a:r>
-              <a:rPr lang="fr-FR" sz="900" b="0" i="0" u="none" strike="noStrike" cap="none" spc="0">
+              <a:rPr lang="fr-FR" sz="800" b="0" i="1" u="none" strike="noStrike" cap="none" spc="0">
                 <a:solidFill>
                   <a:schemeClr val="tx1">
                     <a:lumMod val="50000"/>
@@ -21391,7 +21516,7 @@
               <a:t>forme </a:t>
             </a:r>
             <a:r>
-              <a:rPr lang="fr-FR" sz="900" b="0" i="0" u="none" strike="noStrike" cap="none" spc="0">
+              <a:rPr lang="fr-FR" sz="800" b="0" i="1" u="none" strike="noStrike" cap="none" spc="0">
                 <a:solidFill>
                   <a:schemeClr val="tx1">
                     <a:lumMod val="50000"/>
@@ -21405,7 +21530,7 @@
               <a:t>bestiale </a:t>
             </a:r>
             <a:r>
-              <a:rPr lang="fr-FR" sz="900" b="0" i="0" u="none" strike="noStrike" cap="none" spc="0">
+              <a:rPr lang="fr-FR" sz="800" b="0" i="1" u="none" strike="noStrike" cap="none" spc="0">
                 <a:solidFill>
                   <a:schemeClr val="tx1">
                     <a:lumMod val="50000"/>
@@ -21419,7 +21544,7 @@
               <a:t>lorsque </a:t>
             </a:r>
             <a:r>
-              <a:rPr lang="fr-FR" sz="900" b="0" i="0" u="none" strike="noStrike" cap="none" spc="0">
+              <a:rPr lang="fr-FR" sz="800" b="0" i="1" u="none" strike="noStrike" cap="none" spc="0">
                 <a:solidFill>
                   <a:schemeClr val="tx1">
                     <a:lumMod val="50000"/>
@@ -21433,7 +21558,7 @@
               <a:t>vous </a:t>
             </a:r>
             <a:r>
-              <a:rPr lang="fr-FR" sz="900" b="0" i="0" u="none" strike="noStrike" cap="none" spc="0">
+              <a:rPr lang="fr-FR" sz="800" b="0" i="1" u="none" strike="noStrike" cap="none" spc="0">
                 <a:solidFill>
                   <a:schemeClr val="tx1">
                     <a:lumMod val="50000"/>
@@ -21447,7 +21572,7 @@
               <a:t>négligez </a:t>
             </a:r>
             <a:r>
-              <a:rPr lang="fr-FR" sz="900" b="0" i="0" u="none" strike="noStrike" cap="none" spc="0">
+              <a:rPr lang="fr-FR" sz="800" b="0" i="1" u="none" strike="noStrike" cap="none" spc="0">
                 <a:solidFill>
                   <a:schemeClr val="tx1">
                     <a:lumMod val="50000"/>
@@ -21461,7 +21586,7 @@
               <a:t>trop </a:t>
             </a:r>
             <a:r>
-              <a:rPr lang="fr-FR" sz="900" b="0" i="0" u="none" strike="noStrike" cap="none" spc="0">
+              <a:rPr lang="fr-FR" sz="800" b="0" i="1" u="none" strike="noStrike" cap="none" spc="0">
                 <a:solidFill>
                   <a:schemeClr val="tx1">
                     <a:lumMod val="50000"/>
@@ -21475,7 +21600,7 @@
               <a:t>votre </a:t>
             </a:r>
             <a:r>
-              <a:rPr lang="fr-FR" sz="900" b="0" i="0" u="none" strike="noStrike" cap="none" spc="0">
+              <a:rPr lang="fr-FR" sz="800" b="0" i="1" u="none" strike="noStrike" cap="none" spc="0">
                 <a:solidFill>
                   <a:schemeClr val="tx1">
                     <a:lumMod val="50000"/>
@@ -21489,7 +21614,7 @@
               <a:t>faim</a:t>
             </a:r>
             <a:r>
-              <a:rPr lang="en-US" sz="900" b="0" i="0" u="none" strike="noStrike" cap="none" spc="0">
+              <a:rPr lang="en-US" sz="800" b="0" i="1" u="none" strike="noStrike" cap="none" spc="0">
                 <a:solidFill>
                   <a:schemeClr val="tx1">
                     <a:lumMod val="50000"/>
@@ -21503,7 +21628,7 @@
               <a:t>, </a:t>
             </a:r>
             <a:r>
-              <a:rPr lang="fr-FR" sz="900" b="0" i="0" u="none" strike="noStrike" cap="none" spc="0">
+              <a:rPr lang="fr-FR" sz="800" b="0" i="1" u="none" strike="noStrike" cap="none" spc="0">
                 <a:solidFill>
                   <a:schemeClr val="tx1">
                     <a:lumMod val="50000"/>
@@ -21517,7 +21642,7 @@
               <a:t>et </a:t>
             </a:r>
             <a:r>
-              <a:rPr lang="fr-FR" sz="900" b="0" i="0" u="none" strike="noStrike" cap="none" spc="0">
+              <a:rPr lang="fr-FR" sz="800" b="0" i="1" u="none" strike="noStrike" cap="none" spc="0">
                 <a:solidFill>
                   <a:schemeClr val="tx1">
                     <a:lumMod val="50000"/>
@@ -21531,7 +21656,7 @@
               <a:t>lui </a:t>
             </a:r>
             <a:r>
-              <a:rPr lang="fr-FR" sz="900" b="0" i="0" u="none" strike="noStrike" cap="none" spc="0">
+              <a:rPr lang="fr-FR" sz="800" b="0" i="1" u="none" strike="noStrike" cap="none" spc="0">
                 <a:solidFill>
                   <a:schemeClr val="tx1">
                     <a:lumMod val="50000"/>
@@ -21545,7 +21670,7 @@
               <a:t>préférez </a:t>
             </a:r>
             <a:r>
-              <a:rPr lang="en-US" sz="900" b="0" i="0" u="none" strike="noStrike" cap="none" spc="0">
+              <a:rPr lang="en-US" sz="800" b="0" i="1" u="none" strike="noStrike" cap="none" spc="0">
                 <a:solidFill>
                   <a:schemeClr val="tx1">
                     <a:lumMod val="50000"/>
@@ -21559,7 +21684,7 @@
               <a:t>la </a:t>
             </a:r>
             <a:r>
-              <a:rPr lang="fr-FR" sz="900" b="0" i="0" u="none" strike="noStrike" cap="none" spc="0">
+              <a:rPr lang="fr-FR" sz="800" b="0" i="1" u="none" strike="noStrike" cap="none" spc="0">
                 <a:solidFill>
                   <a:schemeClr val="tx1">
                     <a:lumMod val="50000"/>
@@ -21573,7 +21698,7 @@
               <a:t>forme </a:t>
             </a:r>
             <a:r>
-              <a:rPr lang="fr-FR" sz="900" b="0" i="0" u="none" strike="noStrike" cap="none" spc="0">
+              <a:rPr lang="fr-FR" sz="800" b="0" i="1" u="none" strike="noStrike" cap="none" spc="0">
                 <a:solidFill>
                   <a:schemeClr val="tx1">
                     <a:lumMod val="50000"/>
@@ -21587,7 +21712,7 @@
               <a:t>hybride </a:t>
             </a:r>
             <a:r>
-              <a:rPr lang="fr-FR" sz="900" b="0" i="0" u="none" strike="noStrike" cap="none" spc="0">
+              <a:rPr lang="fr-FR" sz="800" b="0" i="1" u="none" strike="noStrike" cap="none" spc="0">
                 <a:solidFill>
                   <a:schemeClr val="tx1">
                     <a:lumMod val="50000"/>
@@ -21601,7 +21726,7 @@
               <a:t>que </a:t>
             </a:r>
             <a:r>
-              <a:rPr lang="fr-FR" sz="900" b="0" i="0" u="none" strike="noStrike" cap="none" spc="0">
+              <a:rPr lang="fr-FR" sz="800" b="0" i="1" u="none" strike="noStrike" cap="none" spc="0">
                 <a:solidFill>
                   <a:schemeClr val="tx1">
                     <a:lumMod val="50000"/>
@@ -21615,7 +21740,7 @@
               <a:t>vous </a:t>
             </a:r>
             <a:r>
-              <a:rPr lang="fr-FR" sz="900" b="0" i="0" u="none" strike="noStrike" cap="none" spc="0">
+              <a:rPr lang="fr-FR" sz="800" b="0" i="1" u="none" strike="noStrike" cap="none" spc="0">
                 <a:solidFill>
                   <a:schemeClr val="tx1">
                     <a:lumMod val="50000"/>
@@ -21629,7 +21754,7 @@
               <a:t>pouvez </a:t>
             </a:r>
             <a:r>
-              <a:rPr lang="en-US" sz="900" b="0" i="0" u="none" strike="noStrike" cap="none" spc="0">
+              <a:rPr lang="en-US" sz="800" b="0" i="1" u="none" strike="noStrike" cap="none" spc="0">
                 <a:solidFill>
                   <a:schemeClr val="tx1">
                     <a:lumMod val="50000"/>
@@ -21643,7 +21768,7 @@
               <a:t>plus </a:t>
             </a:r>
             <a:r>
-              <a:rPr lang="fr-FR" sz="900" b="0" i="0" u="none" strike="noStrike" cap="none" spc="0">
+              <a:rPr lang="fr-FR" sz="800" b="0" i="1" u="none" strike="noStrike" cap="none" spc="0">
                 <a:solidFill>
                   <a:schemeClr val="tx1">
                     <a:lumMod val="50000"/>
@@ -21657,7 +21782,7 @@
               <a:t>aisément </a:t>
             </a:r>
             <a:r>
-              <a:rPr lang="fr-FR" sz="900" b="0" i="0" u="none" strike="noStrike" cap="none" spc="0">
+              <a:rPr lang="fr-FR" sz="800" b="0" i="1" u="none" strike="noStrike" cap="none" spc="0">
                 <a:solidFill>
                   <a:schemeClr val="tx1">
                     <a:lumMod val="50000"/>
@@ -21671,7 +21796,7 @@
               <a:t>contrôler</a:t>
             </a:r>
             <a:r>
-              <a:rPr lang="en-US" sz="900" b="0" i="0" u="none" strike="noStrike" cap="none" spc="0">
+              <a:rPr lang="en-US" sz="800" b="0" i="1" u="none" strike="noStrike" cap="none" spc="0">
                 <a:solidFill>
                   <a:schemeClr val="tx1">
                     <a:lumMod val="50000"/>
@@ -21684,19 +21809,19 @@
               </a:rPr>
               <a:t>.</a:t>
             </a:r>
-            <a:endParaRPr sz="1600"/>
+            <a:endParaRPr sz="1400" i="1"/>
           </a:p>
           <a:p>
             <a:pPr algn="l">
               <a:defRPr/>
             </a:pPr>
-            <a:endParaRPr lang="fr-FR"/>
+            <a:endParaRPr sz="1600" i="1"/>
           </a:p>
         </p:txBody>
       </p:sp>
       <p:sp>
         <p:nvSpPr>
-          <p:cNvPr id="753438764" name=""/>
+          <p:cNvPr id="1464779107" name=""/>
           <p:cNvSpPr/>
           <p:nvPr/>
         </p:nvSpPr>
@@ -21736,7 +21861,7 @@
       </p:sp>
       <p:sp>
         <p:nvSpPr>
-          <p:cNvPr id="969115684" name="Rectangle : avec coins arrondis en haut 1151560973"/>
+          <p:cNvPr id="1311667384" name="Rectangle : avec coins arrondis en haut 1151560973"/>
           <p:cNvSpPr/>
           <p:nvPr/>
         </p:nvSpPr>
@@ -21784,7 +21909,7 @@
       </p:sp>
       <p:sp>
         <p:nvSpPr>
-          <p:cNvPr id="598367499" name=""/>
+          <p:cNvPr id="1842018597" name=""/>
           <p:cNvSpPr/>
           <p:nvPr/>
         </p:nvSpPr>
@@ -21824,7 +21949,7 @@
       </p:sp>
       <p:sp>
         <p:nvSpPr>
-          <p:cNvPr id="914848757" name="Rectangle : avec coins arrondis en haut 1151560973"/>
+          <p:cNvPr id="1259413165" name="Rectangle : avec coins arrondis en haut 1151560973"/>
           <p:cNvSpPr/>
           <p:nvPr/>
         </p:nvSpPr>
@@ -21872,7 +21997,7 @@
       </p:sp>
       <p:sp>
         <p:nvSpPr>
-          <p:cNvPr id="504333857" name=""/>
+          <p:cNvPr id="690763686" name=""/>
           <p:cNvSpPr/>
           <p:nvPr/>
         </p:nvSpPr>
@@ -21912,7 +22037,7 @@
       </p:sp>
       <p:sp>
         <p:nvSpPr>
-          <p:cNvPr id="674466153" name="Rectangle : avec coins arrondis en haut 1151560973"/>
+          <p:cNvPr id="532608990" name="Rectangle : avec coins arrondis en haut 1151560973"/>
           <p:cNvSpPr/>
           <p:nvPr/>
         </p:nvSpPr>
@@ -21960,14 +22085,14 @@
       </p:sp>
       <p:sp>
         <p:nvSpPr>
-          <p:cNvPr id="2098064800" name=""/>
+          <p:cNvPr id="2073668016" name=""/>
           <p:cNvSpPr txBox="1"/>
           <p:nvPr/>
         </p:nvSpPr>
         <p:spPr bwMode="auto">
           <a:xfrm rot="0" flipH="0" flipV="0">
-            <a:off x="98432" y="2370628"/>
-            <a:ext cx="3393942" cy="777600"/>
+            <a:off x="98431" y="2116627"/>
+            <a:ext cx="3394301" cy="701399"/>
           </a:xfrm>
           <a:prstGeom prst="rect">
             <a:avLst/>
@@ -21983,7 +22108,7 @@
               <a:defRPr/>
             </a:pPr>
             <a:r>
-              <a:rPr lang="fr-FR" sz="900" b="0" i="0" u="none" strike="noStrike" cap="none" spc="0">
+              <a:rPr lang="fr-FR" sz="800" b="0" i="0" u="none" strike="noStrike" cap="none" spc="0">
                 <a:solidFill>
                   <a:schemeClr val="tx1">
                     <a:lumMod val="50000"/>
@@ -21997,7 +22122,7 @@
               <a:t>En tant que loup-garou, vous pouvez utiliser deux formes à volonté : la forme humaine et la forme hybride. Quant à la forme bestiale, elle est incontrôlable et est à l'origine de la plupart des mythes terrifiants qui concernent les enfants de la lune. Toutes les formes ont ceci en commun :</a:t>
             </a:r>
             <a:r>
-              <a:rPr lang="fr-FR" sz="900" b="0" i="0" u="none" strike="noStrike" cap="none" spc="0">
+              <a:rPr lang="fr-FR" sz="800" b="0" i="0" u="none" strike="noStrike" cap="none" spc="0">
                 <a:solidFill>
                   <a:schemeClr val="tx1">
                     <a:lumMod val="50000"/>
@@ -22010,7 +22135,7 @@
               </a:rPr>
               <a:t> </a:t>
             </a:r>
-            <a:endParaRPr lang="fr-FR" sz="900" b="0" i="0" u="none" strike="noStrike" cap="none" spc="0">
+            <a:endParaRPr lang="fr-FR" sz="800" b="0" i="0" u="none" strike="noStrike" cap="none" spc="0">
               <a:solidFill>
                 <a:schemeClr val="tx1">
                   <a:lumMod val="50000"/>
@@ -22025,14 +22150,14 @@
       </p:sp>
       <p:sp>
         <p:nvSpPr>
-          <p:cNvPr id="628801010" name=""/>
+          <p:cNvPr id="21417886" name=""/>
           <p:cNvSpPr txBox="1"/>
           <p:nvPr/>
         </p:nvSpPr>
         <p:spPr bwMode="auto">
           <a:xfrm rot="0" flipH="0" flipV="0">
-            <a:off x="3434313" y="2370628"/>
-            <a:ext cx="3396101" cy="914759"/>
+            <a:off x="3434312" y="2116627"/>
+            <a:ext cx="3411580" cy="701399"/>
           </a:xfrm>
           <a:prstGeom prst="rect">
             <a:avLst/>
@@ -22050,7 +22175,7 @@
               <a:defRPr/>
             </a:pPr>
             <a:r>
-              <a:rPr lang="fr-FR" sz="900" b="0" i="0" u="none" strike="noStrike" cap="none" spc="0">
+              <a:rPr lang="fr-FR" sz="800" b="0" i="0" u="none" strike="noStrike" cap="none" spc="0">
                 <a:solidFill>
                   <a:schemeClr val="tx1">
                     <a:lumMod val="50000"/>
@@ -22063,7 +22188,7 @@
               </a:rPr>
               <a:t>Votre ouïe et odorat sont améliorés au delà de la limite humaine.</a:t>
             </a:r>
-            <a:endParaRPr lang="fr-FR" sz="900" b="0" i="0" u="none" strike="noStrike" cap="none" spc="0">
+            <a:endParaRPr lang="fr-FR" sz="800" b="0" i="0" u="none" strike="noStrike" cap="none" spc="0">
               <a:solidFill>
                 <a:schemeClr val="tx1">
                   <a:lumMod val="50000"/>
@@ -22082,21 +22207,21 @@
               <a:defRPr/>
             </a:pPr>
             <a:r>
-              <a:rPr lang="fr-FR" sz="900" b="0" i="0" u="none" strike="noStrike" cap="none" spc="0">
-                <a:solidFill>
-                  <a:schemeClr val="tx1">
-                    <a:lumMod val="50000"/>
-                    <a:lumOff val="50000"/>
-                  </a:schemeClr>
-                </a:solidFill>
-                <a:latin typeface="Arial"/>
-                <a:ea typeface="Arial"/>
-                <a:cs typeface="Arial"/>
-              </a:rPr>
-              <a:t>Vous échouez systématiquement un test de résistance physique contre l’argent ou l’aconit.</a:t>
-            </a:r>
-            <a:r>
-              <a:rPr lang="fr-FR" sz="900" b="0" i="0" u="none" strike="noStrike" cap="none" spc="0">
+              <a:rPr lang="fr-FR" sz="800" b="0" i="0" u="none" strike="noStrike" cap="none" spc="0">
+                <a:solidFill>
+                  <a:schemeClr val="tx1">
+                    <a:lumMod val="50000"/>
+                    <a:lumOff val="50000"/>
+                  </a:schemeClr>
+                </a:solidFill>
+                <a:latin typeface="Arial"/>
+                <a:ea typeface="Arial"/>
+                <a:cs typeface="Arial"/>
+              </a:rPr>
+              <a:t>Vous subissez un malus de -50 à votre résistance physique contre l’argent ou l’aconit.</a:t>
+            </a:r>
+            <a:r>
+              <a:rPr lang="fr-FR" sz="800" b="0" i="0" u="none" strike="noStrike" cap="none" spc="0">
                 <a:solidFill>
                   <a:schemeClr val="tx1">
                     <a:lumMod val="50000"/>
@@ -22108,7 +22233,7 @@
               </a:rPr>
               <a:t> </a:t>
             </a:r>
-            <a:endParaRPr lang="fr-FR" sz="900" b="0" i="0" u="none" strike="noStrike" cap="none" spc="0">
+            <a:endParaRPr lang="fr-FR" sz="800" b="0" i="0" u="none" strike="noStrike" cap="none" spc="0">
               <a:solidFill>
                 <a:schemeClr val="tx1">
                   <a:lumMod val="50000"/>
@@ -22126,7 +22251,7 @@
               <a:defRPr/>
             </a:pPr>
             <a:r>
-              <a:rPr lang="fr-FR" sz="900" b="0" i="0" u="none" strike="noStrike" cap="none" spc="0">
+              <a:rPr lang="fr-FR" sz="800" b="0" i="0" u="none" strike="noStrike" cap="none" spc="0">
                 <a:solidFill>
                   <a:schemeClr val="tx1">
                     <a:lumMod val="50000"/>
@@ -22139,7 +22264,7 @@
               </a:rPr>
               <a:t>Vous pouvez guérir d'un trauma physique à chaque nuit de sommeil.</a:t>
             </a:r>
-            <a:endParaRPr lang="fr-FR" sz="900" b="0" i="0" u="none" strike="noStrike" cap="none" spc="0">
+            <a:endParaRPr lang="fr-FR" sz="800" b="0" i="0" u="none" strike="noStrike" cap="none" spc="0">
               <a:solidFill>
                 <a:schemeClr val="tx1">
                   <a:lumMod val="50000"/>
@@ -22154,7 +22279,7 @@
       </p:sp>
       <p:sp>
         <p:nvSpPr>
-          <p:cNvPr id="1578886863" name=""/>
+          <p:cNvPr id="949367765" name=""/>
           <p:cNvSpPr/>
           <p:nvPr/>
         </p:nvSpPr>
@@ -22225,7 +22350,7 @@
       </p:sp>
       <p:sp>
         <p:nvSpPr>
-          <p:cNvPr id="1984545742" name="Flèche : pentagone 1610574377"/>
+          <p:cNvPr id="1390174139" name="Flèche : pentagone 1610574377"/>
           <p:cNvSpPr/>
           <p:nvPr/>
         </p:nvSpPr>
@@ -22270,7 +22395,7 @@
       </p:sp>
       <p:sp>
         <p:nvSpPr>
-          <p:cNvPr id="754765507" name="Flèche : pentagone 463861063"/>
+          <p:cNvPr id="137263205" name="Flèche : pentagone 463861063"/>
           <p:cNvSpPr/>
           <p:nvPr/>
         </p:nvSpPr>
@@ -22315,7 +22440,7 @@
       </p:sp>
       <p:sp>
         <p:nvSpPr>
-          <p:cNvPr id="964357191" name="Flèche : pentagone 272004907"/>
+          <p:cNvPr id="754414562" name="Flèche : pentagone 272004907"/>
           <p:cNvSpPr/>
           <p:nvPr/>
         </p:nvSpPr>
@@ -22393,7 +22518,7 @@
       </p:grpSpPr>
       <p:cxnSp>
         <p:nvCxnSpPr>
-          <p:cNvPr id="1742463505" name="Connecteur droit 1942366049"/>
+          <p:cNvPr id="1493083498" name="Connecteur droit 1942366049"/>
           <p:cNvCxnSpPr/>
           <p:nvPr/>
         </p:nvCxnSpPr>
@@ -22436,7 +22561,7 @@
       </p:cxnSp>
       <p:sp>
         <p:nvSpPr>
-          <p:cNvPr id="1557048780" name="ZoneTexte 483029020"/>
+          <p:cNvPr id="895463028" name="ZoneTexte 483029020"/>
           <p:cNvSpPr txBox="1"/>
           <p:nvPr/>
         </p:nvSpPr>
@@ -22476,7 +22601,7 @@
       </p:sp>
       <p:cxnSp>
         <p:nvCxnSpPr>
-          <p:cNvPr id="2053469001" name="Connecteur droit 626166318"/>
+          <p:cNvPr id="1355088794" name="Connecteur droit 626166318"/>
           <p:cNvCxnSpPr/>
           <p:nvPr/>
         </p:nvCxnSpPr>
@@ -22519,7 +22644,7 @@
       </p:cxnSp>
       <p:sp>
         <p:nvSpPr>
-          <p:cNvPr id="669103801" name="ZoneTexte 2021489157"/>
+          <p:cNvPr id="723878163" name="ZoneTexte 2021489157"/>
           <p:cNvSpPr txBox="1"/>
           <p:nvPr/>
         </p:nvSpPr>
@@ -22559,13 +22684,13 @@
       </p:sp>
       <p:cxnSp>
         <p:nvCxnSpPr>
-          <p:cNvPr id="1561230533" name="Connecteur droit 1991074862"/>
+          <p:cNvPr id="441884715" name="Connecteur droit 1991074862"/>
           <p:cNvCxnSpPr/>
           <p:nvPr/>
         </p:nvCxnSpPr>
         <p:spPr bwMode="auto">
           <a:xfrm flipV="1">
-            <a:off x="3252187" y="6494699"/>
+            <a:off x="3252186" y="6126398"/>
             <a:ext cx="3616308" cy="0"/>
           </a:xfrm>
           <a:prstGeom prst="line">
@@ -22602,13 +22727,13 @@
       </p:cxnSp>
       <p:sp>
         <p:nvSpPr>
-          <p:cNvPr id="94257899" name="ZoneTexte 1094835336"/>
+          <p:cNvPr id="1217237277" name="ZoneTexte 1094835336"/>
           <p:cNvSpPr txBox="1"/>
           <p:nvPr/>
         </p:nvSpPr>
         <p:spPr bwMode="auto">
           <a:xfrm flipH="0" flipV="0">
-            <a:off x="3081033" y="6707863"/>
+            <a:off x="3081033" y="6339562"/>
             <a:ext cx="2205895" cy="643788"/>
           </a:xfrm>
           <a:prstGeom prst="rect">
@@ -22684,13 +22809,13 @@
       </p:sp>
       <p:sp>
         <p:nvSpPr>
-          <p:cNvPr id="685551990" name="Rectangle : avec coins arrondis en haut 1574209032"/>
+          <p:cNvPr id="886705832" name="Rectangle : avec coins arrondis en haut 1574209032"/>
           <p:cNvSpPr/>
           <p:nvPr/>
         </p:nvSpPr>
         <p:spPr bwMode="auto">
           <a:xfrm rot="5399942">
-            <a:off x="5223843" y="6828057"/>
+            <a:off x="5223843" y="6459756"/>
             <a:ext cx="520474" cy="400050"/>
           </a:xfrm>
           <a:prstGeom prst="round2SameRect">
@@ -22730,13 +22855,13 @@
       </p:sp>
       <p:sp>
         <p:nvSpPr>
-          <p:cNvPr id="635760807" name="Flèche : pentagone 521086653"/>
+          <p:cNvPr id="2027719344" name="Flèche : pentagone 521086653"/>
           <p:cNvSpPr/>
           <p:nvPr/>
         </p:nvSpPr>
         <p:spPr bwMode="auto">
           <a:xfrm>
-            <a:off x="5793892" y="6815468"/>
+            <a:off x="5793891" y="6447167"/>
             <a:ext cx="188775" cy="182467"/>
           </a:xfrm>
           <a:prstGeom prst="homePlate">
@@ -22775,13 +22900,13 @@
       </p:sp>
       <p:sp>
         <p:nvSpPr>
-          <p:cNvPr id="929621295" name="Flèche : pentagone 1507310733"/>
+          <p:cNvPr id="679322352" name="Flèche : pentagone 1507310733"/>
           <p:cNvSpPr/>
           <p:nvPr/>
         </p:nvSpPr>
         <p:spPr bwMode="auto">
           <a:xfrm>
-            <a:off x="5982669" y="6815468"/>
+            <a:off x="5982669" y="6447167"/>
             <a:ext cx="188775" cy="182467"/>
           </a:xfrm>
           <a:prstGeom prst="homePlate">
@@ -22820,13 +22945,13 @@
       </p:sp>
       <p:sp>
         <p:nvSpPr>
-          <p:cNvPr id="1348246851" name="Flèche : pentagone 732388424"/>
+          <p:cNvPr id="17273250" name="Flèche : pentagone 732388424"/>
           <p:cNvSpPr/>
           <p:nvPr/>
         </p:nvSpPr>
         <p:spPr bwMode="auto">
           <a:xfrm>
-            <a:off x="6171446" y="6815468"/>
+            <a:off x="6171445" y="6447167"/>
             <a:ext cx="188775" cy="182467"/>
           </a:xfrm>
           <a:prstGeom prst="homePlate">
@@ -22865,13 +22990,13 @@
       </p:sp>
       <p:sp>
         <p:nvSpPr>
-          <p:cNvPr id="583252090" name="Flèche : pentagone 326874465"/>
+          <p:cNvPr id="372654759" name="Flèche : pentagone 326874465"/>
           <p:cNvSpPr/>
           <p:nvPr/>
         </p:nvSpPr>
         <p:spPr bwMode="auto">
           <a:xfrm>
-            <a:off x="6360222" y="6815468"/>
+            <a:off x="6360221" y="6447167"/>
             <a:ext cx="188775" cy="182467"/>
           </a:xfrm>
           <a:prstGeom prst="homePlate">
@@ -22910,13 +23035,13 @@
       </p:sp>
       <p:sp>
         <p:nvSpPr>
-          <p:cNvPr id="258780548" name="Flèche : pentagone 2090650957"/>
+          <p:cNvPr id="1674417757" name="Flèche : pentagone 2090650957"/>
           <p:cNvSpPr/>
           <p:nvPr/>
         </p:nvSpPr>
         <p:spPr bwMode="auto">
           <a:xfrm>
-            <a:off x="6548997" y="6815468"/>
+            <a:off x="6548996" y="6447167"/>
             <a:ext cx="188775" cy="182467"/>
           </a:xfrm>
           <a:prstGeom prst="homePlate">
@@ -22955,14 +23080,14 @@
       </p:sp>
       <p:sp>
         <p:nvSpPr>
-          <p:cNvPr id="89609568" name="ZoneTexte 1374103996"/>
+          <p:cNvPr id="1408362641" name="ZoneTexte 1374103996"/>
           <p:cNvSpPr txBox="1"/>
           <p:nvPr/>
         </p:nvSpPr>
         <p:spPr bwMode="auto">
           <a:xfrm flipH="0" flipV="0">
-            <a:off x="3252177" y="7466067"/>
-            <a:ext cx="3603834" cy="2408279"/>
+            <a:off x="3252177" y="7097766"/>
+            <a:ext cx="3639114" cy="2652119"/>
           </a:xfrm>
           <a:prstGeom prst="rect">
             <a:avLst/>
@@ -23023,7 +23148,21 @@
                 <a:ea typeface="+mn-ea"/>
                 <a:cs typeface="+mn-cs"/>
               </a:rPr>
-              <a:t>Après chaque test de maîtrise de soi, cochez une case d’hubris. Vous pouvez diminuer votre hubris en méditant pour vous reconnecter à votre nature profonde durant une scène et en pratiquant un rituel de purification.</a:t>
+              <a:t>Après un test de maîtrise de soi réussi, cochez une case d’hubris. Vous pouvez diminuer votre hubris en méditant pour vous reconnecter à votre nature profonde durant une scène et en pratiquant un rituel de purification.</a:t>
+            </a:r>
+            <a:r>
+              <a:rPr lang="fr-FR" sz="800" b="0" i="0" u="none" strike="noStrike" cap="none" spc="0">
+                <a:solidFill>
+                  <a:schemeClr val="tx1">
+                    <a:lumMod val="50000"/>
+                    <a:lumOff val="50000"/>
+                  </a:schemeClr>
+                </a:solidFill>
+                <a:latin typeface="Arial"/>
+                <a:ea typeface="Arial"/>
+                <a:cs typeface="Arial"/>
+              </a:rPr>
+              <a:t> Si vous échouez à votre test de maîtrise de soi, cochez une case de corruption.</a:t>
             </a:r>
             <a:endParaRPr lang="fr-FR" sz="800" b="0" i="0" u="none" strike="noStrike" cap="none" spc="0">
               <a:solidFill>
@@ -23214,13 +23353,13 @@
       </p:sp>
       <p:sp>
         <p:nvSpPr>
-          <p:cNvPr id="947659776" name="ZoneTexte 1748705365"/>
+          <p:cNvPr id="628711473" name="ZoneTexte 1748705365"/>
           <p:cNvSpPr txBox="1"/>
           <p:nvPr/>
         </p:nvSpPr>
         <p:spPr bwMode="auto">
           <a:xfrm>
-            <a:off x="3296619" y="6311639"/>
+            <a:off x="3296619" y="5943338"/>
             <a:ext cx="2281465" cy="366119"/>
           </a:xfrm>
           <a:prstGeom prst="rect">
@@ -23254,7 +23393,7 @@
       </p:sp>
       <p:cxnSp>
         <p:nvCxnSpPr>
-          <p:cNvPr id="1296438100" name="Connecteur droit 1556830908"/>
+          <p:cNvPr id="448164339" name="Connecteur droit 1556830908"/>
           <p:cNvCxnSpPr/>
           <p:nvPr/>
         </p:nvCxnSpPr>
@@ -23297,7 +23436,7 @@
       </p:cxnSp>
       <p:sp>
         <p:nvSpPr>
-          <p:cNvPr id="901739321" name="ZoneTexte 409639257"/>
+          <p:cNvPr id="1828579770" name="ZoneTexte 409639257"/>
           <p:cNvSpPr txBox="1"/>
           <p:nvPr/>
         </p:nvSpPr>
@@ -23347,14 +23486,14 @@
       </p:sp>
       <p:sp>
         <p:nvSpPr>
-          <p:cNvPr id="34027076" name="ZoneTexte 1168472887"/>
+          <p:cNvPr id="1639202524" name="ZoneTexte 1168472887"/>
           <p:cNvSpPr txBox="1"/>
           <p:nvPr/>
         </p:nvSpPr>
         <p:spPr bwMode="auto">
           <a:xfrm flipH="0" flipV="0">
-            <a:off x="972" y="2380334"/>
-            <a:ext cx="3260218" cy="3670985"/>
+            <a:off x="972" y="2380333"/>
+            <a:ext cx="3319977" cy="3509917"/>
           </a:xfrm>
           <a:prstGeom prst="rect">
             <a:avLst/>
@@ -23410,7 +23549,7 @@
               <a:defRPr/>
             </a:pPr>
             <a:r>
-              <a:rPr lang="fr-FR" sz="1200" b="0" i="0" u="none" strike="noStrike" cap="none" spc="0">
+              <a:rPr lang="fr-FR" sz="1100" b="0" i="0" u="none" strike="noStrike" cap="none" spc="0">
                 <a:solidFill>
                   <a:schemeClr val="bg2">
                     <a:lumMod val="90000"/>
@@ -23420,19 +23559,181 @@
                 <a:ea typeface="Arial"/>
                 <a:cs typeface="Arial"/>
               </a:rPr>
-              <a:t>_________________________________________________________________________________________________________________________________________________________________________________________________________________________________________________________________________________________________________________________________________________________________________________________________</a:t>
-            </a:r>
-            <a:r>
+              <a:t>________________________________________________________________________________</a:t>
+            </a:r>
+            <a:br>
               <a:rPr lang="fr-FR" sz="1200" b="0" i="0" u="none" strike="noStrike" cap="none" spc="0">
                 <a:solidFill>
                   <a:schemeClr val="bg2">
                     <a:lumMod val="90000"/>
                   </a:schemeClr>
                 </a:solidFill>
-                <a:latin typeface="Times New Roman"/>
-                <a:cs typeface="Times New Roman"/>
-              </a:rPr>
-              <a:t>____________________________________________________</a:t>
+                <a:latin typeface="Arial"/>
+                <a:ea typeface="Arial"/>
+                <a:cs typeface="Arial"/>
+              </a:rPr>
+            </a:br>
+            <a:br>
+              <a:rPr lang="fr-FR" sz="700" b="0" i="0" u="none" strike="noStrike" cap="none" spc="0">
+                <a:solidFill>
+                  <a:schemeClr val="bg2">
+                    <a:lumMod val="90000"/>
+                  </a:schemeClr>
+                </a:solidFill>
+                <a:latin typeface="Arial"/>
+                <a:ea typeface="Arial"/>
+                <a:cs typeface="Arial"/>
+              </a:rPr>
+            </a:br>
+            <a:r>
+              <a:rPr lang="fr-FR" sz="1100" b="0" i="0" u="none" strike="noStrike" cap="none" spc="0">
+                <a:solidFill>
+                  <a:schemeClr val="bg2">
+                    <a:lumMod val="90000"/>
+                  </a:schemeClr>
+                </a:solidFill>
+                <a:latin typeface="Arial"/>
+                <a:ea typeface="Arial"/>
+                <a:cs typeface="Arial"/>
+              </a:rPr>
+              <a:t>________________________________________________________________________________</a:t>
+            </a:r>
+            <a:br>
+              <a:rPr lang="fr-FR" sz="1200" b="0" i="0" u="none" strike="noStrike" cap="none" spc="0">
+                <a:solidFill>
+                  <a:schemeClr val="bg2">
+                    <a:lumMod val="90000"/>
+                  </a:schemeClr>
+                </a:solidFill>
+                <a:latin typeface="Arial"/>
+                <a:ea typeface="Arial"/>
+                <a:cs typeface="Arial"/>
+              </a:rPr>
+            </a:br>
+            <a:br>
+              <a:rPr lang="fr-FR" sz="700" b="0" i="0" u="none" strike="noStrike" cap="none" spc="0">
+                <a:solidFill>
+                  <a:schemeClr val="bg2">
+                    <a:lumMod val="90000"/>
+                  </a:schemeClr>
+                </a:solidFill>
+                <a:latin typeface="Arial"/>
+                <a:ea typeface="Arial"/>
+                <a:cs typeface="Arial"/>
+              </a:rPr>
+            </a:br>
+            <a:r>
+              <a:rPr lang="fr-FR" sz="1100" b="0" i="0" u="none" strike="noStrike" cap="none" spc="0">
+                <a:solidFill>
+                  <a:schemeClr val="bg2">
+                    <a:lumMod val="90000"/>
+                  </a:schemeClr>
+                </a:solidFill>
+                <a:latin typeface="Arial"/>
+                <a:ea typeface="Arial"/>
+                <a:cs typeface="Arial"/>
+              </a:rPr>
+              <a:t>________________________________________________________________________________</a:t>
+            </a:r>
+            <a:br>
+              <a:rPr lang="fr-FR" sz="1200" b="0" i="0" u="none" strike="noStrike" cap="none" spc="0">
+                <a:solidFill>
+                  <a:schemeClr val="bg2">
+                    <a:lumMod val="90000"/>
+                  </a:schemeClr>
+                </a:solidFill>
+                <a:latin typeface="Arial"/>
+                <a:ea typeface="Arial"/>
+                <a:cs typeface="Arial"/>
+              </a:rPr>
+            </a:br>
+            <a:br>
+              <a:rPr lang="fr-FR" sz="600" b="0" i="0" u="none" strike="noStrike" cap="none" spc="0">
+                <a:solidFill>
+                  <a:schemeClr val="bg2">
+                    <a:lumMod val="90000"/>
+                  </a:schemeClr>
+                </a:solidFill>
+                <a:latin typeface="Arial"/>
+                <a:ea typeface="Arial"/>
+                <a:cs typeface="Arial"/>
+              </a:rPr>
+            </a:br>
+            <a:r>
+              <a:rPr lang="fr-FR" sz="1100" b="0" i="0" u="none" strike="noStrike" cap="none" spc="0">
+                <a:solidFill>
+                  <a:schemeClr val="bg2">
+                    <a:lumMod val="90000"/>
+                  </a:schemeClr>
+                </a:solidFill>
+                <a:latin typeface="Arial"/>
+                <a:ea typeface="Arial"/>
+                <a:cs typeface="Arial"/>
+              </a:rPr>
+              <a:t>_____________________________________________________________</a:t>
+            </a:r>
+            <a:r>
+              <a:rPr lang="fr-FR" sz="1100" b="0" i="0" u="none" strike="noStrike" cap="none" spc="0">
+                <a:solidFill>
+                  <a:schemeClr val="bg2">
+                    <a:lumMod val="90000"/>
+                  </a:schemeClr>
+                </a:solidFill>
+                <a:latin typeface="Arial"/>
+                <a:ea typeface="Arial"/>
+                <a:cs typeface="Arial"/>
+              </a:rPr>
+              <a:t>___________________</a:t>
+            </a:r>
+            <a:br>
+              <a:rPr lang="fr-FR" sz="1000" b="0" i="0" u="none" strike="noStrike" cap="none" spc="0">
+                <a:solidFill>
+                  <a:schemeClr val="bg2">
+                    <a:lumMod val="90000"/>
+                  </a:schemeClr>
+                </a:solidFill>
+                <a:latin typeface="Arial"/>
+                <a:ea typeface="Arial"/>
+                <a:cs typeface="Arial"/>
+              </a:rPr>
+            </a:br>
+            <a:br>
+              <a:rPr lang="fr-FR" sz="700" b="0" i="0" u="none" strike="noStrike" cap="none" spc="0">
+                <a:solidFill>
+                  <a:schemeClr val="bg2">
+                    <a:lumMod val="90000"/>
+                  </a:schemeClr>
+                </a:solidFill>
+                <a:latin typeface="Arial"/>
+                <a:ea typeface="Arial"/>
+                <a:cs typeface="Arial"/>
+              </a:rPr>
+            </a:br>
+            <a:r>
+              <a:rPr lang="fr-FR" sz="1100" b="0" i="0" u="none" strike="noStrike" cap="none" spc="0">
+                <a:solidFill>
+                  <a:schemeClr val="bg2">
+                    <a:lumMod val="90000"/>
+                  </a:schemeClr>
+                </a:solidFill>
+                <a:latin typeface="Arial"/>
+                <a:ea typeface="Arial"/>
+                <a:cs typeface="Arial"/>
+              </a:rPr>
+              <a:t>_____________________________________________________________</a:t>
+            </a:r>
+            <a:r>
+              <a:rPr lang="fr-FR" sz="1100" b="0" i="0" u="none" strike="noStrike" cap="none" spc="0">
+                <a:solidFill>
+                  <a:schemeClr val="bg2">
+                    <a:lumMod val="90000"/>
+                  </a:schemeClr>
+                </a:solidFill>
+                <a:latin typeface="Arial"/>
+                <a:ea typeface="Arial"/>
+                <a:cs typeface="Arial"/>
+              </a:rPr>
+              <a:t>___________________</a:t>
             </a:r>
             <a:endParaRPr/>
           </a:p>
@@ -23440,14 +23741,14 @@
       </p:sp>
       <p:sp>
         <p:nvSpPr>
-          <p:cNvPr id="159131467" name="ZoneTexte 114796530"/>
+          <p:cNvPr id="2084709977" name="ZoneTexte 114796530"/>
           <p:cNvSpPr txBox="1"/>
           <p:nvPr/>
         </p:nvSpPr>
         <p:spPr bwMode="auto">
           <a:xfrm flipH="0" flipV="0">
-            <a:off x="3274360" y="2380333"/>
-            <a:ext cx="3606952" cy="3901799"/>
+            <a:off x="3274359" y="2466923"/>
+            <a:ext cx="3616671" cy="3490319"/>
           </a:xfrm>
           <a:prstGeom prst="rect">
             <a:avLst/>
@@ -23467,7 +23768,7 @@
               <a:defRPr/>
             </a:pPr>
             <a:r>
-              <a:rPr lang="fr-FR" sz="1200" b="0" i="0" u="none" strike="noStrike" cap="none" spc="0">
+              <a:rPr lang="fr-FR" sz="1100" b="0" i="0" u="none" strike="noStrike" cap="none" spc="0">
                 <a:solidFill>
                   <a:schemeClr val="bg2">
                     <a:lumMod val="90000"/>
@@ -23477,10 +23778,10 @@
                 <a:ea typeface="Arial"/>
                 <a:cs typeface="Arial"/>
               </a:rPr>
-              <a:t>___________________________________________________________________________________________________________________________________________________________________________________________________________________________________________________________________________________________________________________________</a:t>
-            </a:r>
-            <a:r>
-              <a:rPr lang="fr-FR" sz="1200" b="0" i="0" u="none" strike="noStrike" cap="none" spc="0">
+              <a:t>________________________________________________________________________________________</a:t>
+            </a:r>
+            <a:br>
+              <a:rPr lang="fr-FR" sz="1100" b="0" i="0" u="none" strike="noStrike" cap="none" spc="0">
                 <a:solidFill>
                   <a:schemeClr val="bg2">
                     <a:lumMod val="90000"/>
@@ -23490,7 +23791,155 @@
                 <a:ea typeface="Arial"/>
                 <a:cs typeface="Arial"/>
               </a:rPr>
-              <a:t>_____________________________________________________________________________________________________________________________________________________________________________________________________________</a:t>
+            </a:br>
+            <a:br>
+              <a:rPr lang="fr-FR" sz="700" b="0" i="0" u="none" strike="noStrike" cap="none" spc="0">
+                <a:solidFill>
+                  <a:schemeClr val="bg2">
+                    <a:lumMod val="90000"/>
+                  </a:schemeClr>
+                </a:solidFill>
+                <a:latin typeface="Arial"/>
+                <a:ea typeface="Arial"/>
+                <a:cs typeface="Arial"/>
+              </a:rPr>
+            </a:br>
+            <a:r>
+              <a:rPr lang="fr-FR" sz="1100" b="0" i="0" u="none" strike="noStrike" cap="none" spc="0">
+                <a:solidFill>
+                  <a:schemeClr val="bg2">
+                    <a:lumMod val="90000"/>
+                  </a:schemeClr>
+                </a:solidFill>
+                <a:latin typeface="Arial"/>
+                <a:ea typeface="Arial"/>
+                <a:cs typeface="Arial"/>
+              </a:rPr>
+              <a:t>________________________________________________________________________________________</a:t>
+            </a:r>
+            <a:br>
+              <a:rPr lang="fr-FR" sz="1100" b="0" i="0" u="none" strike="noStrike" cap="none" spc="0">
+                <a:solidFill>
+                  <a:schemeClr val="bg2">
+                    <a:lumMod val="90000"/>
+                  </a:schemeClr>
+                </a:solidFill>
+                <a:latin typeface="Arial"/>
+                <a:ea typeface="Arial"/>
+                <a:cs typeface="Arial"/>
+              </a:rPr>
+            </a:br>
+            <a:br>
+              <a:rPr lang="fr-FR" sz="700" b="0" i="0" u="none" strike="noStrike" cap="none" spc="0">
+                <a:solidFill>
+                  <a:schemeClr val="bg2">
+                    <a:lumMod val="90000"/>
+                  </a:schemeClr>
+                </a:solidFill>
+                <a:latin typeface="Arial"/>
+                <a:ea typeface="Arial"/>
+                <a:cs typeface="Arial"/>
+              </a:rPr>
+            </a:br>
+            <a:r>
+              <a:rPr lang="fr-FR" sz="1100" b="0" i="0" u="none" strike="noStrike" cap="none" spc="0">
+                <a:solidFill>
+                  <a:schemeClr val="bg2">
+                    <a:lumMod val="90000"/>
+                  </a:schemeClr>
+                </a:solidFill>
+                <a:latin typeface="Arial"/>
+                <a:ea typeface="Arial"/>
+                <a:cs typeface="Arial"/>
+              </a:rPr>
+              <a:t>________________________________________________________________________________________</a:t>
+            </a:r>
+            <a:br>
+              <a:rPr lang="fr-FR" sz="1100" b="0" i="0" u="none" strike="noStrike" cap="none" spc="0">
+                <a:solidFill>
+                  <a:schemeClr val="bg2">
+                    <a:lumMod val="90000"/>
+                  </a:schemeClr>
+                </a:solidFill>
+                <a:latin typeface="Arial"/>
+                <a:ea typeface="Arial"/>
+                <a:cs typeface="Arial"/>
+              </a:rPr>
+            </a:br>
+            <a:br>
+              <a:rPr lang="fr-FR" sz="700" b="0" i="0" u="none" strike="noStrike" cap="none" spc="0">
+                <a:solidFill>
+                  <a:schemeClr val="bg2">
+                    <a:lumMod val="90000"/>
+                  </a:schemeClr>
+                </a:solidFill>
+                <a:latin typeface="Arial"/>
+                <a:ea typeface="Arial"/>
+                <a:cs typeface="Arial"/>
+              </a:rPr>
+            </a:br>
+            <a:r>
+              <a:rPr lang="fr-FR" sz="1100" b="0" i="0" u="none" strike="noStrike" cap="none" spc="0">
+                <a:solidFill>
+                  <a:schemeClr val="bg2">
+                    <a:lumMod val="90000"/>
+                  </a:schemeClr>
+                </a:solidFill>
+                <a:latin typeface="Arial"/>
+                <a:ea typeface="Arial"/>
+                <a:cs typeface="Arial"/>
+              </a:rPr>
+              <a:t>___________________________________________________</a:t>
+            </a:r>
+            <a:r>
+              <a:rPr lang="fr-FR" sz="1100" b="0" i="0" u="none" strike="noStrike" cap="none" spc="0">
+                <a:solidFill>
+                  <a:schemeClr val="bg2">
+                    <a:lumMod val="90000"/>
+                  </a:schemeClr>
+                </a:solidFill>
+                <a:latin typeface="Arial"/>
+                <a:ea typeface="Arial"/>
+                <a:cs typeface="Arial"/>
+              </a:rPr>
+              <a:t>_____________________________________</a:t>
+            </a:r>
+            <a:br>
+              <a:rPr lang="fr-FR" sz="1100" b="0" i="0" u="none" strike="noStrike" cap="none" spc="0">
+                <a:solidFill>
+                  <a:schemeClr val="bg2">
+                    <a:lumMod val="90000"/>
+                  </a:schemeClr>
+                </a:solidFill>
+                <a:latin typeface="Arial"/>
+                <a:ea typeface="Arial"/>
+                <a:cs typeface="Arial"/>
+              </a:rPr>
+            </a:br>
+            <a:br>
+              <a:rPr lang="fr-FR" sz="700" b="0" i="0" u="none" strike="noStrike" cap="none" spc="0">
+                <a:solidFill>
+                  <a:schemeClr val="bg2">
+                    <a:lumMod val="90000"/>
+                  </a:schemeClr>
+                </a:solidFill>
+                <a:latin typeface="Arial"/>
+                <a:ea typeface="Arial"/>
+                <a:cs typeface="Arial"/>
+              </a:rPr>
+            </a:br>
+            <a:r>
+              <a:rPr lang="fr-FR" sz="1100" b="0" i="0" u="none" strike="noStrike" cap="none" spc="0">
+                <a:solidFill>
+                  <a:schemeClr val="bg2">
+                    <a:lumMod val="90000"/>
+                  </a:schemeClr>
+                </a:solidFill>
+                <a:latin typeface="Arial"/>
+                <a:ea typeface="Arial"/>
+                <a:cs typeface="Arial"/>
+              </a:rPr>
+              <a:t>________________________________________________________________________________________</a:t>
             </a:r>
             <a:endParaRPr sz="1200" b="0" i="0" u="none" strike="noStrike" cap="none" spc="0">
               <a:solidFill>
@@ -23536,14 +23985,14 @@
       </p:sp>
       <p:sp>
         <p:nvSpPr>
-          <p:cNvPr id="958480831" name="ZoneTexte 1085068195"/>
+          <p:cNvPr id="1369498054" name="ZoneTexte 1085068195"/>
           <p:cNvSpPr txBox="1"/>
           <p:nvPr/>
         </p:nvSpPr>
         <p:spPr bwMode="auto">
           <a:xfrm flipH="0" flipV="0">
-            <a:off x="972" y="6271111"/>
-            <a:ext cx="3276987" cy="3383640"/>
+            <a:off x="972" y="6271110"/>
+            <a:ext cx="3204497" cy="3383640"/>
           </a:xfrm>
           <a:prstGeom prst="rect">
             <a:avLst/>
@@ -24377,7 +24826,7 @@
                   </a:schemeClr>
                 </a:solidFill>
               </a:rPr>
-              <a:t>nombre</a:t>
+              <a:t>sorts </a:t>
             </a:r>
             <a:r>
               <a:rPr sz="900">
@@ -24388,7 +24837,7 @@
                   </a:schemeClr>
                 </a:solidFill>
               </a:rPr>
-              <a:t> de sorts </a:t>
+              <a:t>actifs</a:t>
             </a:r>
             <a:r>
               <a:rPr sz="900">
@@ -24399,7 +24848,7 @@
                   </a:schemeClr>
                 </a:solidFill>
               </a:rPr>
-              <a:t>actifs</a:t>
+              <a:t> </a:t>
             </a:r>
             <a:r>
               <a:rPr sz="900">
@@ -24410,7 +24859,7 @@
                   </a:schemeClr>
                 </a:solidFill>
               </a:rPr>
-              <a:t> </a:t>
+              <a:t>simultané plus un </a:t>
             </a:r>
             <a:r>
               <a:rPr sz="900">
@@ -24421,95 +24870,7 @@
                   </a:schemeClr>
                 </a:solidFill>
               </a:rPr>
-              <a:t>simultanés</a:t>
-            </a:r>
-            <a:r>
-              <a:rPr sz="900">
-                <a:solidFill>
-                  <a:schemeClr val="tx1">
-                    <a:lumMod val="50000"/>
-                    <a:lumOff val="50000"/>
-                  </a:schemeClr>
-                </a:solidFill>
-              </a:rPr>
-              <a:t> </a:t>
-            </a:r>
-            <a:r>
-              <a:rPr sz="900">
-                <a:solidFill>
-                  <a:schemeClr val="tx1">
-                    <a:lumMod val="50000"/>
-                    <a:lumOff val="50000"/>
-                  </a:schemeClr>
-                </a:solidFill>
-              </a:rPr>
-              <a:t>égal</a:t>
-            </a:r>
-            <a:r>
-              <a:rPr sz="900">
-                <a:solidFill>
-                  <a:schemeClr val="tx1">
-                    <a:lumMod val="50000"/>
-                    <a:lumOff val="50000"/>
-                  </a:schemeClr>
-                </a:solidFill>
-              </a:rPr>
-              <a:t> à </a:t>
-            </a:r>
-            <a:r>
-              <a:rPr sz="900">
-                <a:solidFill>
-                  <a:schemeClr val="tx1">
-                    <a:lumMod val="50000"/>
-                    <a:lumOff val="50000"/>
-                  </a:schemeClr>
-                </a:solidFill>
-              </a:rPr>
-              <a:t>votre</a:t>
-            </a:r>
-            <a:r>
-              <a:rPr sz="900">
-                <a:solidFill>
-                  <a:schemeClr val="tx1">
-                    <a:lumMod val="50000"/>
-                    <a:lumOff val="50000"/>
-                  </a:schemeClr>
-                </a:solidFill>
-              </a:rPr>
-              <a:t> </a:t>
-            </a:r>
-            <a:r>
-              <a:rPr sz="900">
-                <a:solidFill>
-                  <a:schemeClr val="tx1">
-                    <a:lumMod val="50000"/>
-                    <a:lumOff val="50000"/>
-                  </a:schemeClr>
-                </a:solidFill>
-              </a:rPr>
-              <a:t>occultisme</a:t>
-            </a:r>
-            <a:r>
-              <a:rPr sz="900">
-                <a:solidFill>
-                  <a:schemeClr val="tx1">
-                    <a:lumMod val="50000"/>
-                    <a:lumOff val="50000"/>
-                  </a:schemeClr>
-                </a:solidFill>
-              </a:rPr>
-              <a:t> divisé</a:t>
-            </a:r>
-            <a:r>
-              <a:rPr sz="900">
-                <a:solidFill>
-                  <a:schemeClr val="tx1">
-                    <a:lumMod val="50000"/>
-                    <a:lumOff val="50000"/>
-                  </a:schemeClr>
-                </a:solidFill>
-              </a:rPr>
-              <a:t> par 20, arrondi au supérieur</a:t>
+              <a:t>pour chaque tranche de 20 points d’occultisme</a:t>
             </a:r>
             <a:r>
               <a:rPr sz="900">
@@ -24605,7 +24966,7 @@
       </p:sp>
       <p:sp>
         <p:nvSpPr>
-          <p:cNvPr id="488375420" name="Étoile : 5 branches 278736380"/>
+          <p:cNvPr id="908703098" name="Étoile : 5 branches 278736380"/>
           <p:cNvSpPr/>
           <p:nvPr/>
         </p:nvSpPr>
@@ -24652,7 +25013,7 @@
       </p:sp>
       <p:sp>
         <p:nvSpPr>
-          <p:cNvPr id="2117532121" name="Étoile : 5 branches 1495350449"/>
+          <p:cNvPr id="589654970" name="Étoile : 5 branches 1495350449"/>
           <p:cNvSpPr/>
           <p:nvPr/>
         </p:nvSpPr>
@@ -24699,7 +25060,7 @@
       </p:sp>
       <p:sp>
         <p:nvSpPr>
-          <p:cNvPr id="207000212" name="Étoile : 5 branches 79046386"/>
+          <p:cNvPr id="1608805699" name="Étoile : 5 branches 79046386"/>
           <p:cNvSpPr/>
           <p:nvPr/>
         </p:nvSpPr>
@@ -24746,7 +25107,7 @@
       </p:sp>
       <p:sp>
         <p:nvSpPr>
-          <p:cNvPr id="353991529" name="Étoile : 5 branches 749256076"/>
+          <p:cNvPr id="260759875" name="Étoile : 5 branches 749256076"/>
           <p:cNvSpPr/>
           <p:nvPr/>
         </p:nvSpPr>
@@ -24793,7 +25154,7 @@
       </p:sp>
       <p:sp>
         <p:nvSpPr>
-          <p:cNvPr id="933789582" name="Étoile : 5 branches 411245083"/>
+          <p:cNvPr id="921331786" name="Étoile : 5 branches 411245083"/>
           <p:cNvSpPr/>
           <p:nvPr/>
         </p:nvSpPr>
@@ -24840,13 +25201,13 @@
       </p:sp>
       <p:sp>
         <p:nvSpPr>
-          <p:cNvPr id="745286510" name="ZoneTexte 496444952"/>
+          <p:cNvPr id="2143505554" name="ZoneTexte 496444952"/>
           <p:cNvSpPr txBox="1"/>
           <p:nvPr/>
         </p:nvSpPr>
         <p:spPr bwMode="auto">
           <a:xfrm>
-            <a:off x="5805408" y="6599288"/>
+            <a:off x="5805407" y="6230987"/>
             <a:ext cx="1313115" cy="305159"/>
           </a:xfrm>
           <a:prstGeom prst="rect">
@@ -24882,13 +25243,13 @@
       </p:sp>
       <p:sp>
         <p:nvSpPr>
-          <p:cNvPr id="2010644920" name="ZoneTexte 474433989"/>
+          <p:cNvPr id="1854429639" name="ZoneTexte 474433989"/>
           <p:cNvSpPr txBox="1"/>
           <p:nvPr/>
         </p:nvSpPr>
         <p:spPr bwMode="auto">
           <a:xfrm>
-            <a:off x="5672056" y="7129417"/>
+            <a:off x="5672055" y="6761116"/>
             <a:ext cx="1431156" cy="274679"/>
           </a:xfrm>
           <a:prstGeom prst="rect">
@@ -24924,14 +25285,14 @@
       </p:sp>
       <p:sp>
         <p:nvSpPr>
-          <p:cNvPr id="1019756186" name="ZoneTexte 1"/>
+          <p:cNvPr id="1396663731" name="ZoneTexte 1"/>
           <p:cNvSpPr txBox="1"/>
           <p:nvPr/>
         </p:nvSpPr>
         <p:spPr bwMode="auto">
           <a:xfrm flipH="0" flipV="0">
-            <a:off x="1214" y="480140"/>
-            <a:ext cx="3428505" cy="1600559"/>
+            <a:off x="1213" y="480139"/>
+            <a:ext cx="3428865" cy="1600559"/>
           </a:xfrm>
           <a:prstGeom prst="rect">
             <a:avLst/>
@@ -24949,7 +25310,7 @@
               <a:defRPr/>
             </a:pPr>
             <a:r>
-              <a:rPr lang="fr-FR" sz="900">
+              <a:rPr lang="fr-FR" sz="900" i="1">
                 <a:solidFill>
                   <a:schemeClr val="tx1">
                     <a:lumMod val="50000"/>
@@ -24960,7 +25321,7 @@
               <a:t>C</a:t>
             </a:r>
             <a:r>
-              <a:rPr lang="fr-FR" sz="900" b="0" i="0" u="none" strike="noStrike" cap="none" spc="0">
+              <a:rPr lang="fr-FR" sz="900" b="0" i="1" u="none" strike="noStrike" cap="none" spc="0">
                 <a:solidFill>
                   <a:schemeClr val="tx1">
                     <a:lumMod val="50000"/>
@@ -24973,7 +25334,7 @@
               </a:rPr>
               <a:t>ertaines familles ont un pouvoir dans le sang, transmis le plus souvent de mères en filles, bien que des hommes puissent également en hériter. Ce pouvoir ne s’exprime que via la magie et offre à ses pratiquantes une puissance remarquable. Les sorcières sont avant tout les pratiquantes d’une tradition magique ayant des pouvoirs bien au delà de la plupart de leurs homologues. </a:t>
             </a:r>
-            <a:endParaRPr lang="fr-FR" sz="900" b="0" i="0" u="none" strike="noStrike" cap="none" spc="0">
+            <a:endParaRPr sz="900" b="0" i="1" u="none" strike="noStrike" cap="none" spc="0">
               <a:solidFill>
                 <a:schemeClr val="tx1">
                   <a:lumMod val="50000"/>
@@ -24989,7 +25350,7 @@
             <a:pPr>
               <a:defRPr/>
             </a:pPr>
-            <a:endParaRPr lang="fr-FR" sz="900" b="0" i="0" u="none" strike="noStrike" cap="none" spc="0">
+            <a:endParaRPr sz="900" b="0" i="1" u="none" strike="noStrike" cap="none" spc="0">
               <a:solidFill>
                 <a:schemeClr val="tx1">
                   <a:lumMod val="50000"/>
@@ -25006,7 +25367,7 @@
               <a:defRPr/>
             </a:pPr>
             <a:r>
-              <a:rPr lang="fr-FR" sz="900" b="0" i="0" u="none" strike="noStrike" cap="none" spc="0">
+              <a:rPr lang="fr-FR" sz="900" b="0" i="1" u="none" strike="noStrike" cap="none" spc="0">
                 <a:solidFill>
                   <a:schemeClr val="tx1">
                     <a:lumMod val="50000"/>
@@ -25019,20 +25380,20 @@
               </a:rPr>
               <a:t>Certaines familles s’enorgueillissent du pouvoir de leur lignée tandis que d’autres le cache comme un secret honteux ou ignorent complètement leurs dons.</a:t>
             </a:r>
-            <a:endParaRPr sz="1600"/>
+            <a:endParaRPr sz="1600" i="1"/>
           </a:p>
         </p:txBody>
       </p:sp>
       <p:sp>
         <p:nvSpPr>
-          <p:cNvPr id="132057614" name="ZoneTexte 2"/>
+          <p:cNvPr id="122353372" name="ZoneTexte 2"/>
           <p:cNvSpPr txBox="1"/>
           <p:nvPr/>
         </p:nvSpPr>
         <p:spPr bwMode="auto">
           <a:xfrm flipH="0" flipV="0">
-            <a:off x="3374467" y="471206"/>
-            <a:ext cx="3514068" cy="1737719"/>
+            <a:off x="3374466" y="471205"/>
+            <a:ext cx="3514428" cy="1737719"/>
           </a:xfrm>
           <a:prstGeom prst="rect">
             <a:avLst/>
@@ -25050,7 +25411,7 @@
               <a:defRPr/>
             </a:pPr>
             <a:r>
-              <a:rPr lang="fr-FR" sz="900">
+              <a:rPr lang="fr-FR" sz="900" i="1">
                 <a:solidFill>
                   <a:schemeClr val="tx1">
                     <a:lumMod val="50000"/>
@@ -25060,7 +25421,7 @@
               </a:rPr>
               <a:t>Les sorcières sont capables de ressentir l’utilisation du pouvoir dans leurs alentours proches, de quelque nature qu’il soit mais sans grande précision. </a:t>
             </a:r>
-            <a:endParaRPr lang="fr-FR" sz="900" b="0" i="0" u="none" strike="noStrike" cap="none" spc="0">
+            <a:endParaRPr sz="900" b="0" i="1" u="none" strike="noStrike" cap="none" spc="0">
               <a:solidFill>
                 <a:schemeClr val="tx1">
                   <a:lumMod val="50000"/>
@@ -25076,7 +25437,7 @@
             <a:pPr>
               <a:defRPr/>
             </a:pPr>
-            <a:endParaRPr lang="en-US" sz="900">
+            <a:endParaRPr sz="900" i="1">
               <a:solidFill>
                 <a:schemeClr val="tx1">
                   <a:lumMod val="50000"/>
@@ -25090,7 +25451,7 @@
               <a:defRPr/>
             </a:pPr>
             <a:r>
-              <a:rPr lang="fr-FR" sz="900" b="0" i="0" u="none" strike="noStrike" cap="none" spc="0">
+              <a:rPr lang="fr-FR" sz="900" b="0" i="1" u="none" strike="noStrike" cap="none" spc="0">
                 <a:solidFill>
                   <a:schemeClr val="tx1">
                     <a:lumMod val="50000"/>
@@ -25104,7 +25465,7 @@
               <a:t>Une sorcière pratique généralement sa magie à l’aide de rituels inscrits dans son propre livre des ombres mais elle reste capable d'invoquer le pouvoir de manière instinctif, ce que l’on considère comme un acte d'hubris.</a:t>
             </a:r>
             <a:br>
-              <a:rPr lang="en-US" sz="900">
+              <a:rPr lang="en-US" sz="900" i="1">
                 <a:solidFill>
                   <a:schemeClr val="tx1">
                     <a:lumMod val="50000"/>
@@ -25113,7 +25474,7 @@
                 </a:solidFill>
               </a:rPr>
             </a:br>
-            <a:endParaRPr lang="en-US" sz="900">
+            <a:endParaRPr sz="900" i="1">
               <a:solidFill>
                 <a:schemeClr val="tx1">
                   <a:lumMod val="50000"/>
@@ -25127,7 +25488,7 @@
               <a:defRPr/>
             </a:pPr>
             <a:r>
-              <a:rPr lang="fr-FR" sz="900">
+              <a:rPr lang="fr-FR" sz="900" i="1">
                 <a:solidFill>
                   <a:schemeClr val="tx1">
                     <a:lumMod val="50000"/>
@@ -25137,13 +25498,13 @@
               </a:rPr>
               <a:t>Trop d’actes d’hubris ainsi que la pratique de la magie noire ont un effet corrupteur et une pratiquante qui n’y prend pas garde peut rapidement perdre pied avec la réalité.</a:t>
             </a:r>
-            <a:endParaRPr sz="1600"/>
+            <a:endParaRPr sz="1600" i="1"/>
           </a:p>
         </p:txBody>
       </p:sp>
       <p:sp>
         <p:nvSpPr>
-          <p:cNvPr id="181230651" name=""/>
+          <p:cNvPr id="414870319" name=""/>
           <p:cNvSpPr/>
           <p:nvPr/>
         </p:nvSpPr>
@@ -25214,13 +25575,13 @@
       </p:sp>
       <p:sp>
         <p:nvSpPr>
-          <p:cNvPr id="985212677" name="Flèche : pentagone 1507310733"/>
+          <p:cNvPr id="434292943" name="Flèche : pentagone 1507310733"/>
           <p:cNvSpPr/>
           <p:nvPr/>
         </p:nvSpPr>
         <p:spPr bwMode="auto">
           <a:xfrm>
-            <a:off x="5982669" y="7028082"/>
+            <a:off x="5982669" y="6659781"/>
             <a:ext cx="188775" cy="182466"/>
           </a:xfrm>
           <a:prstGeom prst="homePlate">
@@ -25259,13 +25620,13 @@
       </p:sp>
       <p:sp>
         <p:nvSpPr>
-          <p:cNvPr id="1251454401" name="Flèche : pentagone 732388424"/>
+          <p:cNvPr id="2144028260" name="Flèche : pentagone 732388424"/>
           <p:cNvSpPr/>
           <p:nvPr/>
         </p:nvSpPr>
         <p:spPr bwMode="auto">
           <a:xfrm>
-            <a:off x="6171445" y="7028082"/>
+            <a:off x="6171444" y="6659781"/>
             <a:ext cx="188775" cy="182466"/>
           </a:xfrm>
           <a:prstGeom prst="homePlate">
@@ -25304,13 +25665,13 @@
       </p:sp>
       <p:sp>
         <p:nvSpPr>
-          <p:cNvPr id="2104308723" name="Flèche : pentagone 326874465"/>
+          <p:cNvPr id="2085438369" name="Flèche : pentagone 326874465"/>
           <p:cNvSpPr/>
           <p:nvPr/>
         </p:nvSpPr>
         <p:spPr bwMode="auto">
           <a:xfrm>
-            <a:off x="6360221" y="7028082"/>
+            <a:off x="6360220" y="6659781"/>
             <a:ext cx="188775" cy="182466"/>
           </a:xfrm>
           <a:prstGeom prst="homePlate">
@@ -25382,7 +25743,7 @@
       </p:grpSpPr>
       <p:sp>
         <p:nvSpPr>
-          <p:cNvPr id="1737656215" name="ZoneTexte 273581705"/>
+          <p:cNvPr id="124508990" name="ZoneTexte 273581705"/>
           <p:cNvSpPr txBox="1"/>
           <p:nvPr/>
         </p:nvSpPr>
@@ -25680,7 +26041,7 @@
       </p:sp>
       <p:cxnSp>
         <p:nvCxnSpPr>
-          <p:cNvPr id="141811882" name="Connecteur droit 1094832104"/>
+          <p:cNvPr id="1675492592" name="Connecteur droit 1094832104"/>
           <p:cNvCxnSpPr/>
           <p:nvPr/>
         </p:nvCxnSpPr>
@@ -25723,7 +26084,7 @@
       </p:cxnSp>
       <p:sp>
         <p:nvSpPr>
-          <p:cNvPr id="1318327925" name="ZoneTexte 2078543737"/>
+          <p:cNvPr id="1993548398" name="ZoneTexte 2078543737"/>
           <p:cNvSpPr txBox="1"/>
           <p:nvPr/>
         </p:nvSpPr>
@@ -25763,7 +26124,7 @@
       </p:sp>
       <p:cxnSp>
         <p:nvCxnSpPr>
-          <p:cNvPr id="1537400784" name="Connecteur droit 853743145"/>
+          <p:cNvPr id="828128601" name="Connecteur droit 853743145"/>
           <p:cNvCxnSpPr/>
           <p:nvPr/>
         </p:nvCxnSpPr>
@@ -25806,7 +26167,7 @@
       </p:cxnSp>
       <p:sp>
         <p:nvSpPr>
-          <p:cNvPr id="481399474" name="ZoneTexte 1473119298"/>
+          <p:cNvPr id="503213097" name="ZoneTexte 1473119298"/>
           <p:cNvSpPr txBox="1"/>
           <p:nvPr/>
         </p:nvSpPr>
@@ -25846,7 +26207,7 @@
       </p:sp>
       <p:cxnSp>
         <p:nvCxnSpPr>
-          <p:cNvPr id="1104708042" name="Connecteur droit 1727809509"/>
+          <p:cNvPr id="1464825197" name="Connecteur droit 1727809509"/>
           <p:cNvCxnSpPr/>
           <p:nvPr/>
         </p:nvCxnSpPr>
@@ -25889,7 +26250,7 @@
       </p:cxnSp>
       <p:sp>
         <p:nvSpPr>
-          <p:cNvPr id="807548801" name="ZoneTexte 759238070"/>
+          <p:cNvPr id="2063087602" name="ZoneTexte 759238070"/>
           <p:cNvSpPr txBox="1"/>
           <p:nvPr/>
         </p:nvSpPr>
@@ -25964,7 +26325,7 @@
       </p:sp>
       <p:sp>
         <p:nvSpPr>
-          <p:cNvPr id="891721616" name="Rectangle : avec coins arrondis en haut 965147191"/>
+          <p:cNvPr id="352423029" name="Rectangle : avec coins arrondis en haut 965147191"/>
           <p:cNvSpPr/>
           <p:nvPr/>
         </p:nvSpPr>
@@ -26010,7 +26371,7 @@
       </p:sp>
       <p:sp>
         <p:nvSpPr>
-          <p:cNvPr id="300305852" name="Flèche : pentagone 2070329900"/>
+          <p:cNvPr id="371062124" name="Flèche : pentagone 2070329900"/>
           <p:cNvSpPr/>
           <p:nvPr/>
         </p:nvSpPr>
@@ -26055,7 +26416,7 @@
       </p:sp>
       <p:sp>
         <p:nvSpPr>
-          <p:cNvPr id="530817302" name="Flèche : pentagone 1325137089"/>
+          <p:cNvPr id="1659132468" name="Flèche : pentagone 1325137089"/>
           <p:cNvSpPr/>
           <p:nvPr/>
         </p:nvSpPr>
@@ -26100,7 +26461,7 @@
       </p:sp>
       <p:sp>
         <p:nvSpPr>
-          <p:cNvPr id="157554016" name="Flèche : pentagone 295922856"/>
+          <p:cNvPr id="1646053965" name="Flèche : pentagone 295922856"/>
           <p:cNvSpPr/>
           <p:nvPr/>
         </p:nvSpPr>
@@ -26145,7 +26506,7 @@
       </p:sp>
       <p:sp>
         <p:nvSpPr>
-          <p:cNvPr id="468663145" name="Flèche : pentagone 1961547672"/>
+          <p:cNvPr id="46607203" name="Flèche : pentagone 1961547672"/>
           <p:cNvSpPr/>
           <p:nvPr/>
         </p:nvSpPr>
@@ -26190,7 +26551,7 @@
       </p:sp>
       <p:sp>
         <p:nvSpPr>
-          <p:cNvPr id="1757842054" name="Flèche : pentagone 1305647833"/>
+          <p:cNvPr id="837830624" name="Flèche : pentagone 1305647833"/>
           <p:cNvSpPr/>
           <p:nvPr/>
         </p:nvSpPr>
@@ -26235,14 +26596,14 @@
       </p:sp>
       <p:sp>
         <p:nvSpPr>
-          <p:cNvPr id="1845677323" name="ZoneTexte 545814566"/>
+          <p:cNvPr id="540287750" name="ZoneTexte 545814566"/>
           <p:cNvSpPr txBox="1"/>
           <p:nvPr/>
         </p:nvSpPr>
         <p:spPr bwMode="auto">
           <a:xfrm flipH="0" flipV="0">
-            <a:off x="3252179" y="7249357"/>
-            <a:ext cx="3613553" cy="2164439"/>
+            <a:off x="3252178" y="7249356"/>
+            <a:ext cx="3621472" cy="2408279"/>
           </a:xfrm>
           <a:prstGeom prst="rect">
             <a:avLst/>
@@ -26289,7 +26650,7 @@
                   </a:schemeClr>
                 </a:solidFill>
               </a:rPr>
-              <a:t>. Après un test de maîtrise de soi, cochez une case de soif. </a:t>
+              <a:t>. Après un test de maîtrise de soi réussi, cochez une case de soif. </a:t>
             </a:r>
             <a:r>
               <a:rPr lang="fr-FR" sz="800" b="0" i="0" u="none" strike="noStrike" cap="none" spc="0">
@@ -26303,7 +26664,7 @@
                 <a:ea typeface="+mn-ea"/>
                 <a:cs typeface="+mn-cs"/>
               </a:rPr>
-              <a:t>Lorsque vous vous nourrissez de sang, vous pouvez effacer vos cases de soif. Tant que vous n’avez pas coché les trois cases de perversion, effacez une case de perversion au début d’un nouveau scénario.</a:t>
+              <a:t>Si vous échouez à un test de maîtrise de soi, cochez une case de perversion. Lorsque vous vous nourrissez de sang, vous pouvez effacer vos cases de soif. </a:t>
             </a:r>
             <a:endParaRPr sz="800">
               <a:solidFill>
@@ -26343,7 +26704,7 @@
                 <a:ea typeface="+mn-ea"/>
                 <a:cs typeface="+mn-cs"/>
               </a:rPr>
-              <a:t>Lorsque vous cochez la première une case de perversion, la bête intérieure vous submerge et vous force à agir avec violence ou perversion pendant une scène bien que vous gardiez le contrôle.</a:t>
+              <a:t>Lorsque vous cochez la première une case de perversion, la bête intérieure vous submerge et vous force à agir avec violence ou perversion durant quelques instants, avant que vous ne repreniez le contrôle.</a:t>
             </a:r>
             <a:br>
               <a:rPr lang="fr-FR" sz="800" b="0" i="0" u="none" strike="noStrike" cap="none" spc="0">
@@ -26397,7 +26758,7 @@
                 <a:ea typeface="Arial"/>
                 <a:cs typeface="Arial"/>
               </a:rPr>
-              <a:t>Perdez 1d6 points  de maîtrise de soi</a:t>
+              <a:t>Perdez 1d6 points de maîtrise de soi</a:t>
             </a:r>
             <a:r>
               <a:rPr lang="fr-FR" sz="800" b="0" i="0" u="none" strike="noStrike" cap="none" spc="0">
@@ -26481,6 +26842,22 @@
               </a:rPr>
               <a:t>.</a:t>
             </a:r>
+            <a:endParaRPr lang="fr-FR" sz="800" b="0" i="0" u="none" strike="noStrike" cap="none" spc="0">
+              <a:solidFill>
+                <a:schemeClr val="tx1">
+                  <a:lumMod val="50000"/>
+                  <a:lumOff val="50000"/>
+                </a:schemeClr>
+              </a:solidFill>
+              <a:latin typeface="Arial"/>
+              <a:ea typeface="Arial"/>
+              <a:cs typeface="Arial"/>
+            </a:endParaRPr>
+          </a:p>
+          <a:p>
+            <a:pPr algn="l">
+              <a:defRPr/>
+            </a:pPr>
             <a:endParaRPr sz="800">
               <a:solidFill>
                 <a:schemeClr val="tx1">
@@ -26490,11 +26867,38 @@
               </a:solidFill>
             </a:endParaRPr>
           </a:p>
+          <a:p>
+            <a:pPr algn="l">
+              <a:defRPr/>
+            </a:pPr>
+            <a:r>
+              <a:rPr lang="fr-FR" sz="800" b="0" i="0" u="none" strike="noStrike" cap="none" spc="0">
+                <a:solidFill>
+                  <a:schemeClr val="tx1">
+                    <a:lumMod val="50000"/>
+                    <a:lumOff val="50000"/>
+                  </a:schemeClr>
+                </a:solidFill>
+                <a:latin typeface="Arial"/>
+                <a:ea typeface="Arial"/>
+                <a:cs typeface="Arial"/>
+              </a:rPr>
+              <a:t>Tant que vous n’avez pas coché les trois cases de perversion, effacez une case de perversion au début d’un nouveau scénario.</a:t>
+            </a:r>
+            <a:endParaRPr sz="800">
+              <a:solidFill>
+                <a:schemeClr val="tx1">
+                  <a:lumMod val="50000"/>
+                  <a:lumOff val="50000"/>
+                </a:schemeClr>
+              </a:solidFill>
+            </a:endParaRPr>
+          </a:p>
         </p:txBody>
       </p:sp>
       <p:sp>
         <p:nvSpPr>
-          <p:cNvPr id="1383650577" name="ZoneTexte 671978155"/>
+          <p:cNvPr id="2115267222" name="ZoneTexte 671978155"/>
           <p:cNvSpPr txBox="1"/>
           <p:nvPr/>
         </p:nvSpPr>
@@ -26534,7 +26938,7 @@
       </p:sp>
       <p:cxnSp>
         <p:nvCxnSpPr>
-          <p:cNvPr id="2084553449" name="Connecteur droit 637589304"/>
+          <p:cNvPr id="282117764" name="Connecteur droit 637589304"/>
           <p:cNvCxnSpPr/>
           <p:nvPr/>
         </p:nvCxnSpPr>
@@ -26577,7 +26981,7 @@
       </p:cxnSp>
       <p:sp>
         <p:nvSpPr>
-          <p:cNvPr id="462780862" name="ZoneTexte 172075623"/>
+          <p:cNvPr id="194958605" name="ZoneTexte 172075623"/>
           <p:cNvSpPr txBox="1"/>
           <p:nvPr/>
         </p:nvSpPr>
@@ -26627,14 +27031,14 @@
       </p:sp>
       <p:sp>
         <p:nvSpPr>
-          <p:cNvPr id="855960890" name="ZoneTexte 1642812764"/>
+          <p:cNvPr id="1596445687" name="ZoneTexte 1642812764"/>
           <p:cNvSpPr txBox="1"/>
           <p:nvPr/>
         </p:nvSpPr>
         <p:spPr bwMode="auto">
           <a:xfrm flipH="0" flipV="0">
-            <a:off x="0" y="2586746"/>
-            <a:ext cx="3368259" cy="2834999"/>
+            <a:off x="0" y="2586745"/>
+            <a:ext cx="3390939" cy="2834999"/>
           </a:xfrm>
           <a:prstGeom prst="rect">
             <a:avLst/>
@@ -26756,7 +27160,7 @@
                   </a:schemeClr>
                 </a:solidFill>
               </a:rPr>
-              <a:t>Vous nourrir deux fois sur la même personne en un mois oblige votre cible à effectuer un jet de résistance physique. S’il est échoué, le manque de sang le conduit à un coma léger (et à l’hôpital).</a:t>
+              <a:t>Vous nourrir deux fois sur la même personne en moins d’un mois oblige votre cible à effectuer un jet de résistance physique. S’il est échoué, le manque de sang le conduit au coma (et à l’hôpital).</a:t>
             </a:r>
             <a:endParaRPr sz="1600"/>
           </a:p>
@@ -26786,7 +27190,29 @@
                   </a:schemeClr>
                 </a:solidFill>
               </a:rPr>
-              <a:t>Si vous vous nourrissez sur une créature surnaturelle, vous gagnez un point de puissance de sang. Les points de puissance de sang sont perdus à chaque nouveau scénario.</a:t>
+              <a:t>Si vous vous nourrissez sur une créature surnaturelle, vous gagnez un point de </a:t>
+            </a:r>
+            <a:r>
+              <a:rPr sz="900" b="1">
+                <a:solidFill>
+                  <a:schemeClr val="tx1">
+                    <a:lumMod val="50000"/>
+                    <a:lumOff val="50000"/>
+                  </a:schemeClr>
+                </a:solidFill>
+              </a:rPr>
+              <a:t>puissance de sang</a:t>
+            </a:r>
+            <a:r>
+              <a:rPr sz="900">
+                <a:solidFill>
+                  <a:schemeClr val="tx1">
+                    <a:lumMod val="50000"/>
+                    <a:lumOff val="50000"/>
+                  </a:schemeClr>
+                </a:solidFill>
+              </a:rPr>
+              <a:t>. Les points de puissance de sang sont perdus à chaque nouveau scénario.</a:t>
             </a:r>
             <a:endParaRPr sz="1600"/>
           </a:p>
@@ -26794,7 +27220,7 @@
       </p:sp>
       <p:sp>
         <p:nvSpPr>
-          <p:cNvPr id="1918775273" name="Étoile : 7 branches 1681961038"/>
+          <p:cNvPr id="2137986765" name="Étoile : 7 branches 1681961038"/>
           <p:cNvSpPr/>
           <p:nvPr/>
         </p:nvSpPr>
@@ -26841,7 +27267,7 @@
       </p:sp>
       <p:sp>
         <p:nvSpPr>
-          <p:cNvPr id="1509379024" name="Étoile : 7 branches 1476951547"/>
+          <p:cNvPr id="739125117" name="Étoile : 7 branches 1476951547"/>
           <p:cNvSpPr/>
           <p:nvPr/>
         </p:nvSpPr>
@@ -26888,7 +27314,7 @@
       </p:sp>
       <p:sp>
         <p:nvSpPr>
-          <p:cNvPr id="5602541" name="Étoile : 7 branches 1520826925"/>
+          <p:cNvPr id="2080558550" name="Étoile : 7 branches 1520826925"/>
           <p:cNvSpPr/>
           <p:nvPr/>
         </p:nvSpPr>
@@ -26935,7 +27361,7 @@
       </p:sp>
       <p:sp>
         <p:nvSpPr>
-          <p:cNvPr id="965845103" name="ZoneTexte 1219899073"/>
+          <p:cNvPr id="1466534671" name="ZoneTexte 1219899073"/>
           <p:cNvSpPr txBox="1"/>
           <p:nvPr/>
         </p:nvSpPr>
@@ -26975,14 +27401,14 @@
       </p:sp>
       <p:sp>
         <p:nvSpPr>
-          <p:cNvPr id="2067924350" name="ZoneTexte 1283574123"/>
+          <p:cNvPr id="256326044" name="ZoneTexte 1283574123"/>
           <p:cNvSpPr txBox="1"/>
           <p:nvPr/>
         </p:nvSpPr>
         <p:spPr bwMode="auto">
           <a:xfrm flipH="0" flipV="0">
-            <a:off x="3303456" y="2586744"/>
-            <a:ext cx="3571152" cy="3520800"/>
+            <a:off x="3303455" y="2586743"/>
+            <a:ext cx="3571524" cy="3520800"/>
           </a:xfrm>
           <a:prstGeom prst="rect">
             <a:avLst/>
@@ -27004,7 +27430,7 @@
                 <a:ea typeface="+mn-ea"/>
                 <a:cs typeface="+mn-cs"/>
               </a:rPr>
-              <a:t>La Régénération :</a:t>
+              <a:t>La Régénération nocturne :</a:t>
             </a:r>
             <a:r>
               <a:rPr lang="fr-FR" sz="900" b="0" i="0" u="none" strike="noStrike" cap="none" spc="0">
@@ -27018,203 +27444,7 @@
                 <a:ea typeface="+mn-ea"/>
                 <a:cs typeface="+mn-cs"/>
               </a:rPr>
-              <a:t> Un vampire peut récupérer tout son stress physique prix d’une case de soif. De plus, </a:t>
-            </a:r>
-            <a:r>
-              <a:rPr lang="fr-FR" sz="900" b="0" i="0" u="none" strike="noStrike" cap="none" spc="0">
-                <a:solidFill>
-                  <a:schemeClr val="tx1">
-                    <a:lumMod val="50000"/>
-                    <a:lumOff val="50000"/>
-                  </a:schemeClr>
-                </a:solidFill>
-                <a:latin typeface="+mn-lt"/>
-                <a:ea typeface="+mn-ea"/>
-                <a:cs typeface="+mn-cs"/>
-              </a:rPr>
-              <a:t>il obtient</a:t>
-            </a:r>
-            <a:r>
-              <a:rPr lang="fr-FR" sz="900" b="0" i="0" u="none" strike="noStrike" cap="none" spc="0">
-                <a:solidFill>
-                  <a:schemeClr val="tx1">
-                    <a:lumMod val="50000"/>
-                    <a:lumOff val="50000"/>
-                  </a:schemeClr>
-                </a:solidFill>
-                <a:latin typeface="+mn-lt"/>
-                <a:ea typeface="+mn-ea"/>
-                <a:cs typeface="+mn-cs"/>
-              </a:rPr>
-              <a:t> un bonus de </a:t>
-            </a:r>
-            <a:r>
-              <a:rPr lang="fr-FR" sz="900" b="1" i="0" u="none" strike="noStrike" cap="none" spc="0">
-                <a:solidFill>
-                  <a:schemeClr val="tx1">
-                    <a:lumMod val="50000"/>
-                    <a:lumOff val="50000"/>
-                  </a:schemeClr>
-                </a:solidFill>
-                <a:latin typeface="+mn-lt"/>
-                <a:ea typeface="+mn-ea"/>
-                <a:cs typeface="+mn-cs"/>
-              </a:rPr>
-              <a:t>+10</a:t>
-            </a:r>
-            <a:r>
-              <a:rPr lang="fr-FR" sz="900" b="1" i="0" u="none" strike="noStrike" cap="none" spc="0">
-                <a:solidFill>
-                  <a:schemeClr val="tx1">
-                    <a:lumMod val="50000"/>
-                    <a:lumOff val="50000"/>
-                  </a:schemeClr>
-                </a:solidFill>
-                <a:latin typeface="+mn-lt"/>
-                <a:ea typeface="+mn-ea"/>
-                <a:cs typeface="+mn-cs"/>
-              </a:rPr>
-              <a:t> en résistance physique</a:t>
-            </a:r>
-            <a:r>
-              <a:rPr lang="fr-FR" sz="900" b="0" i="0" u="none" strike="noStrike" cap="none" spc="0">
-                <a:solidFill>
-                  <a:schemeClr val="tx1">
-                    <a:lumMod val="50000"/>
-                    <a:lumOff val="50000"/>
-                  </a:schemeClr>
-                </a:solidFill>
-                <a:latin typeface="+mn-lt"/>
-                <a:ea typeface="+mn-ea"/>
-                <a:cs typeface="+mn-cs"/>
-              </a:rPr>
-              <a:t> et peut toujours effectuer son jet de résistance,</a:t>
-            </a:r>
-            <a:r>
-              <a:rPr lang="fr-FR" sz="900" b="0" i="0" u="none" strike="noStrike" cap="none" spc="0">
-                <a:solidFill>
-                  <a:schemeClr val="tx1">
-                    <a:lumMod val="50000"/>
-                    <a:lumOff val="50000"/>
-                  </a:schemeClr>
-                </a:solidFill>
-                <a:latin typeface="+mn-lt"/>
-                <a:ea typeface="+mn-ea"/>
-                <a:cs typeface="+mn-cs"/>
-              </a:rPr>
-              <a:t> </a:t>
-            </a:r>
-            <a:r>
-              <a:rPr lang="fr-FR" sz="900" b="0" i="0" u="none" strike="noStrike" cap="none" spc="0">
-                <a:solidFill>
-                  <a:schemeClr val="tx1">
-                    <a:lumMod val="50000"/>
-                    <a:lumOff val="50000"/>
-                  </a:schemeClr>
-                </a:solidFill>
-                <a:latin typeface="+mn-lt"/>
-                <a:ea typeface="+mn-ea"/>
-                <a:cs typeface="+mn-cs"/>
-              </a:rPr>
-              <a:t>même</a:t>
-            </a:r>
-            <a:r>
-              <a:rPr lang="fr-FR" sz="900" b="0" i="0" u="none" strike="noStrike" cap="none" spc="0">
-                <a:solidFill>
-                  <a:schemeClr val="tx1">
-                    <a:lumMod val="50000"/>
-                    <a:lumOff val="50000"/>
-                  </a:schemeClr>
-                </a:solidFill>
-                <a:latin typeface="+mn-lt"/>
-                <a:ea typeface="+mn-ea"/>
-                <a:cs typeface="+mn-cs"/>
-              </a:rPr>
-              <a:t> </a:t>
-            </a:r>
-            <a:r>
-              <a:rPr lang="fr-FR" sz="900" b="0" i="0" u="none" strike="noStrike" cap="none" spc="0">
-                <a:solidFill>
-                  <a:schemeClr val="tx1">
-                    <a:lumMod val="50000"/>
-                    <a:lumOff val="50000"/>
-                  </a:schemeClr>
-                </a:solidFill>
-                <a:latin typeface="+mn-lt"/>
-                <a:ea typeface="+mn-ea"/>
-                <a:cs typeface="+mn-cs"/>
-              </a:rPr>
-              <a:t>contre</a:t>
-            </a:r>
-            <a:r>
-              <a:rPr lang="fr-FR" sz="900" b="0" i="0" u="none" strike="noStrike" cap="none" spc="0">
-                <a:solidFill>
-                  <a:schemeClr val="tx1">
-                    <a:lumMod val="50000"/>
-                    <a:lumOff val="50000"/>
-                  </a:schemeClr>
-                </a:solidFill>
-                <a:latin typeface="+mn-lt"/>
-                <a:ea typeface="+mn-ea"/>
-                <a:cs typeface="+mn-cs"/>
-              </a:rPr>
-              <a:t> les </a:t>
-            </a:r>
-            <a:r>
-              <a:rPr lang="fr-FR" sz="900" b="0" i="0" u="none" strike="noStrike" cap="none" spc="0">
-                <a:solidFill>
-                  <a:schemeClr val="tx1">
-                    <a:lumMod val="50000"/>
-                    <a:lumOff val="50000"/>
-                  </a:schemeClr>
-                </a:solidFill>
-                <a:latin typeface="+mn-lt"/>
-                <a:ea typeface="+mn-ea"/>
-                <a:cs typeface="+mn-cs"/>
-              </a:rPr>
-              <a:t>attaques</a:t>
-            </a:r>
-            <a:r>
-              <a:rPr lang="fr-FR" sz="900" b="0" i="0" u="none" strike="noStrike" cap="none" spc="0">
-                <a:solidFill>
-                  <a:schemeClr val="tx1">
-                    <a:lumMod val="50000"/>
-                    <a:lumOff val="50000"/>
-                  </a:schemeClr>
-                </a:solidFill>
-                <a:latin typeface="+mn-lt"/>
-                <a:ea typeface="+mn-ea"/>
-                <a:cs typeface="+mn-cs"/>
-              </a:rPr>
-              <a:t> </a:t>
-            </a:r>
-            <a:r>
-              <a:rPr lang="fr-FR" sz="900" b="0" i="0" u="none" strike="noStrike" cap="none" spc="0">
-                <a:solidFill>
-                  <a:schemeClr val="tx1">
-                    <a:lumMod val="50000"/>
-                    <a:lumOff val="50000"/>
-                  </a:schemeClr>
-                </a:solidFill>
-                <a:latin typeface="+mn-lt"/>
-                <a:ea typeface="+mn-ea"/>
-                <a:cs typeface="+mn-cs"/>
-              </a:rPr>
-              <a:t>létales</a:t>
-            </a:r>
-            <a:r>
-              <a:rPr lang="fr-FR" sz="900" b="0" i="0" u="none" strike="noStrike" cap="none" spc="0">
-                <a:solidFill>
-                  <a:schemeClr val="tx1">
-                    <a:lumMod val="50000"/>
-                    <a:lumOff val="50000"/>
-                  </a:schemeClr>
-                </a:solidFill>
-                <a:latin typeface="+mn-lt"/>
-                <a:ea typeface="+mn-ea"/>
-                <a:cs typeface="+mn-cs"/>
-              </a:rPr>
-              <a:t>.</a:t>
+              <a:t> Durant la nuit, à la fin d’une scène, vous pouvez récupérer tout votre stress physique prix d’une case de soif. </a:t>
             </a:r>
             <a:r>
               <a:rPr sz="900">
@@ -27225,7 +27455,7 @@
                   </a:schemeClr>
                 </a:solidFill>
               </a:rPr>
-              <a:t> La nuit, le vampire peut récupérer un trauma physique au prix d’une case de soif.</a:t>
+              <a:t>Vous pouvez également récupérer un trauma physique au prix d’une case de soif. Si vous êtes mis hors-combat au cours d’une scène, vous pouvez vous relever immédiatement au prix d’une case de perversion.</a:t>
             </a:r>
             <a:endParaRPr sz="900">
               <a:solidFill>
@@ -27899,7 +28129,7 @@
                   </a:schemeClr>
                 </a:solidFill>
               </a:rPr>
-              <a:t>morte ou le sien propre</a:t>
+              <a:t>mortel ou le sien propre</a:t>
             </a:r>
             <a:r>
               <a:rPr sz="900">
@@ -28168,7 +28398,7 @@
                   </a:schemeClr>
                 </a:solidFill>
               </a:rPr>
-              <a:t> Chaque vampire développe ses propres Pouvoirs. Les utiliser en journée vous coûte systématiquement une case de soif (mais ne vous oblige pas à effectuer un jet de maîtrise de soi).</a:t>
+              <a:t> Chaque vampire développe ses propres Pouvoirs. Les utiliser en journée vous coûte systématiquement une case de soif.</a:t>
             </a:r>
             <a:endParaRPr sz="1600"/>
           </a:p>
@@ -28176,7 +28406,7 @@
       </p:sp>
       <p:sp>
         <p:nvSpPr>
-          <p:cNvPr id="858510756" name="ZoneTexte 790352176"/>
+          <p:cNvPr id="1404606091" name="ZoneTexte 790352176"/>
           <p:cNvSpPr txBox="1"/>
           <p:nvPr/>
         </p:nvSpPr>
@@ -28218,7 +28448,7 @@
       </p:sp>
       <p:sp>
         <p:nvSpPr>
-          <p:cNvPr id="1999354727" name="ZoneTexte 2025740189"/>
+          <p:cNvPr id="696747448" name="ZoneTexte 2025740189"/>
           <p:cNvSpPr txBox="1"/>
           <p:nvPr/>
         </p:nvSpPr>
@@ -28275,7 +28505,7 @@
       </p:sp>
       <p:sp>
         <p:nvSpPr>
-          <p:cNvPr id="1922153905" name=""/>
+          <p:cNvPr id="168382576" name=""/>
           <p:cNvSpPr/>
           <p:nvPr/>
         </p:nvSpPr>
@@ -28315,7 +28545,7 @@
       </p:sp>
       <p:sp>
         <p:nvSpPr>
-          <p:cNvPr id="1540923843" name="Rectangle : avec coins arrondis en haut 1151560973"/>
+          <p:cNvPr id="948932594" name="Rectangle : avec coins arrondis en haut 1151560973"/>
           <p:cNvSpPr/>
           <p:nvPr/>
         </p:nvSpPr>
@@ -28363,7 +28593,7 @@
       </p:sp>
       <p:sp>
         <p:nvSpPr>
-          <p:cNvPr id="2129997791" name=""/>
+          <p:cNvPr id="138699720" name=""/>
           <p:cNvSpPr/>
           <p:nvPr/>
         </p:nvSpPr>
@@ -28403,7 +28633,7 @@
       </p:sp>
       <p:sp>
         <p:nvSpPr>
-          <p:cNvPr id="463302282" name="Rectangle : avec coins arrondis en haut 1151560973"/>
+          <p:cNvPr id="1914390274" name="Rectangle : avec coins arrondis en haut 1151560973"/>
           <p:cNvSpPr/>
           <p:nvPr/>
         </p:nvSpPr>
@@ -28451,7 +28681,7 @@
       </p:sp>
       <p:sp>
         <p:nvSpPr>
-          <p:cNvPr id="1294978337" name=""/>
+          <p:cNvPr id="574655605" name=""/>
           <p:cNvSpPr/>
           <p:nvPr/>
         </p:nvSpPr>
@@ -28491,7 +28721,7 @@
       </p:sp>
       <p:sp>
         <p:nvSpPr>
-          <p:cNvPr id="126226562" name="Rectangle : avec coins arrondis en haut 1151560973"/>
+          <p:cNvPr id="108376863" name="Rectangle : avec coins arrondis en haut 1151560973"/>
           <p:cNvSpPr/>
           <p:nvPr/>
         </p:nvSpPr>
@@ -28539,14 +28769,14 @@
       </p:sp>
       <p:sp>
         <p:nvSpPr>
-          <p:cNvPr id="814788179" name=""/>
+          <p:cNvPr id="1137491530" name=""/>
           <p:cNvSpPr txBox="1"/>
           <p:nvPr/>
         </p:nvSpPr>
         <p:spPr bwMode="auto">
           <a:xfrm rot="0" flipH="0" flipV="0">
-            <a:off x="71833" y="545004"/>
-            <a:ext cx="3185030" cy="1768199"/>
+            <a:off x="71832" y="545004"/>
+            <a:ext cx="3185389" cy="1768199"/>
           </a:xfrm>
           <a:prstGeom prst="rect">
             <a:avLst/>
@@ -28571,7 +28801,7 @@
               <a:defRPr/>
             </a:pPr>
             <a:r>
-              <a:rPr lang="fr-FR" sz="1000" b="0" i="0" u="none" strike="noStrike" cap="none" spc="0">
+              <a:rPr lang="fr-FR" sz="1000" b="0" i="1" u="none" strike="noStrike" cap="none" spc="0">
                 <a:solidFill>
                   <a:schemeClr val="tx1">
                     <a:lumMod val="50000"/>
@@ -28585,7 +28815,7 @@
               <a:t>Vous étiez vivant alors qu’un vampire aspirait votre sang jusqu’à la dernière goutte et vous offrait de boire le sien, de gré ou de </a:t>
             </a:r>
             <a:r>
-              <a:rPr lang="fr-FR" sz="1000" b="0" i="0" u="none" strike="noStrike" cap="none" spc="0">
+              <a:rPr lang="fr-FR" sz="1000" b="0" i="1" u="none" strike="noStrike" cap="none" spc="0">
                 <a:solidFill>
                   <a:schemeClr val="tx1">
                     <a:lumMod val="50000"/>
@@ -28599,7 +28829,7 @@
               <a:t>force</a:t>
             </a:r>
             <a:r>
-              <a:rPr lang="fr-FR" sz="1000" b="0" i="0" u="none" strike="noStrike" cap="none" spc="0">
+              <a:rPr lang="fr-FR" sz="1000" b="0" i="1" u="none" strike="noStrike" cap="none" spc="0">
                 <a:solidFill>
                   <a:schemeClr val="tx1">
                     <a:lumMod val="50000"/>
@@ -28613,7 +28843,7 @@
               <a:t>. Depuis cette nuit d’horreur, vous êtes un damné, un vampire qui dépend du sang des mortels pour continuer à exister. D’autres ont eu moins de chances que vous et sont devenus de simples goules, plus morts que vivants et aux ordres de leur créateur.</a:t>
             </a:r>
             <a:br>
-              <a:rPr lang="fr-FR" sz="1000" b="0" i="0" u="none" strike="noStrike" cap="none" spc="0">
+              <a:rPr lang="fr-FR" sz="1000" b="0" i="1" u="none" strike="noStrike" cap="none" spc="0">
                 <a:solidFill>
                   <a:schemeClr val="tx1">
                     <a:lumMod val="50000"/>
@@ -28626,7 +28856,7 @@
               </a:rPr>
             </a:br>
             <a:br>
-              <a:rPr lang="fr-FR" sz="1000" b="0" i="0" u="none" strike="noStrike" cap="none" spc="0">
+              <a:rPr lang="fr-FR" sz="1000" b="0" i="1" u="none" strike="noStrike" cap="none" spc="0">
                 <a:solidFill>
                   <a:schemeClr val="tx1">
                     <a:lumMod val="50000"/>
@@ -28639,7 +28869,7 @@
               </a:rPr>
             </a:br>
             <a:r>
-              <a:rPr lang="fr-FR" sz="1000" b="0" i="0" u="none" strike="noStrike" cap="none" spc="0">
+              <a:rPr lang="fr-FR" sz="1000" b="0" i="1" u="none" strike="noStrike" cap="none" spc="0">
                 <a:solidFill>
                   <a:schemeClr val="tx1">
                     <a:lumMod val="50000"/>
@@ -28652,7 +28882,7 @@
               </a:rPr>
               <a:t>Contrairement aux vieilles croyances, votre corps est encore fonctionnel bien que votre peau soit fraîche et</a:t>
             </a:r>
-            <a:endParaRPr lang="fr-FR" sz="1000" b="0" i="0" u="none" strike="noStrike" cap="none" spc="0">
+            <a:endParaRPr sz="1000" b="0" i="1" u="none" strike="noStrike" cap="none" spc="0">
               <a:solidFill>
                 <a:schemeClr val="tx1">
                   <a:lumMod val="50000"/>
@@ -28667,14 +28897,14 @@
       </p:sp>
       <p:sp>
         <p:nvSpPr>
-          <p:cNvPr id="1304926536" name=""/>
+          <p:cNvPr id="1187526638" name=""/>
           <p:cNvSpPr txBox="1"/>
           <p:nvPr/>
         </p:nvSpPr>
         <p:spPr bwMode="auto">
           <a:xfrm rot="0" flipH="0" flipV="0">
-            <a:off x="3472502" y="545004"/>
-            <a:ext cx="3191148" cy="1768199"/>
+            <a:off x="3472501" y="545004"/>
+            <a:ext cx="3191508" cy="1768199"/>
           </a:xfrm>
           <a:prstGeom prst="rect">
             <a:avLst/>
@@ -28699,7 +28929,7 @@
               <a:defRPr/>
             </a:pPr>
             <a:r>
-              <a:rPr lang="fr-FR" sz="1000" b="0" i="0" u="none" strike="noStrike" cap="none" spc="0">
+              <a:rPr lang="fr-FR" sz="1000" b="0" i="1" u="none" strike="noStrike" cap="none" spc="0">
                 <a:solidFill>
                   <a:schemeClr val="tx1">
                     <a:lumMod val="50000"/>
@@ -28712,7 +28942,7 @@
               </a:rPr>
               <a:t>votre rythme cardiaque ralenti. Votre peau ne craint pas la morsure du soleil, mais utiliser vos pouvoirs le jour vous coûte davantage.</a:t>
             </a:r>
-            <a:endParaRPr lang="fr-FR" sz="1000" b="0" i="0" u="none" strike="noStrike" cap="none" spc="0">
+            <a:endParaRPr sz="1000" b="0" i="1" u="none" strike="noStrike" cap="none" spc="0">
               <a:solidFill>
                 <a:schemeClr val="tx1">
                   <a:lumMod val="50000"/>
@@ -28737,7 +28967,7 @@
               </a:spcAft>
               <a:defRPr/>
             </a:pPr>
-            <a:endParaRPr lang="fr-FR" sz="1000" b="0" i="0" u="none" strike="noStrike" cap="none" spc="0">
+            <a:endParaRPr sz="1000" b="0" i="1" u="none" strike="noStrike" cap="none" spc="0">
               <a:solidFill>
                 <a:schemeClr val="tx1">
                   <a:lumMod val="50000"/>
@@ -28762,7 +28992,7 @@
               <a:defRPr/>
             </a:pPr>
             <a:r>
-              <a:rPr lang="fr-FR" sz="1000" b="0" i="0" u="none" strike="noStrike" cap="none" spc="0">
+              <a:rPr lang="fr-FR" sz="1000" b="0" i="1" u="none" strike="noStrike" cap="none" spc="0">
                 <a:solidFill>
                   <a:schemeClr val="tx1">
                     <a:lumMod val="50000"/>
@@ -28775,7 +29005,7 @@
               </a:rPr>
               <a:t>Vous ne vieillissez plus et votre corps régénère de ses blessures aisément. Vous éprouvez encore des sensations, des émotions, des désirs et de la douleur. La douleur de ne plus vraiment faire partie du monde des vivants. Elle est sans doute là, votre damnation : vous n’êtes pas tout à fait un monstre. Pas encore.</a:t>
             </a:r>
-            <a:endParaRPr lang="fr-FR" sz="1000" b="0" i="0" u="none" strike="noStrike" cap="none" spc="0">
+            <a:endParaRPr sz="1000" b="0" i="1" u="none" strike="noStrike" cap="none" spc="0">
               <a:solidFill>
                 <a:schemeClr val="tx1">
                   <a:lumMod val="50000"/>
@@ -28790,7 +29020,7 @@
       </p:sp>
       <p:sp>
         <p:nvSpPr>
-          <p:cNvPr id="275828204" name=""/>
+          <p:cNvPr id="667636083" name=""/>
           <p:cNvSpPr/>
           <p:nvPr/>
         </p:nvSpPr>
@@ -28861,7 +29091,7 @@
       </p:sp>
       <p:sp>
         <p:nvSpPr>
-          <p:cNvPr id="218729275" name="Flèche : pentagone 1325137089"/>
+          <p:cNvPr id="2016103158" name="Flèche : pentagone 1325137089"/>
           <p:cNvSpPr/>
           <p:nvPr/>
         </p:nvSpPr>
@@ -28906,7 +29136,7 @@
       </p:sp>
       <p:sp>
         <p:nvSpPr>
-          <p:cNvPr id="2146293530" name="Flèche : pentagone 295922856"/>
+          <p:cNvPr id="442934064" name="Flèche : pentagone 295922856"/>
           <p:cNvSpPr/>
           <p:nvPr/>
         </p:nvSpPr>
@@ -28951,7 +29181,7 @@
       </p:sp>
       <p:sp>
         <p:nvSpPr>
-          <p:cNvPr id="1467605960" name="Flèche : pentagone 1961547672"/>
+          <p:cNvPr id="8550405" name="Flèche : pentagone 1961547672"/>
           <p:cNvSpPr/>
           <p:nvPr/>
         </p:nvSpPr>
@@ -29029,7 +29259,7 @@
       </p:grpSpPr>
       <p:cxnSp>
         <p:nvCxnSpPr>
-          <p:cNvPr id="372593439" name="Connecteur droit 266926011"/>
+          <p:cNvPr id="1225727944" name="Connecteur droit 266926011"/>
           <p:cNvCxnSpPr/>
           <p:nvPr/>
         </p:nvCxnSpPr>
@@ -29072,7 +29302,7 @@
       </p:cxnSp>
       <p:sp>
         <p:nvSpPr>
-          <p:cNvPr id="1261509871" name="ZoneTexte 1043763612"/>
+          <p:cNvPr id="1230079619" name="ZoneTexte 1043763612"/>
           <p:cNvSpPr txBox="1"/>
           <p:nvPr/>
         </p:nvSpPr>
@@ -29112,7 +29342,7 @@
       </p:sp>
       <p:cxnSp>
         <p:nvCxnSpPr>
-          <p:cNvPr id="1691631037" name="Connecteur droit 1586327141"/>
+          <p:cNvPr id="1669442363" name="Connecteur droit 1586327141"/>
           <p:cNvCxnSpPr/>
           <p:nvPr/>
         </p:nvCxnSpPr>
@@ -29155,7 +29385,7 @@
       </p:cxnSp>
       <p:sp>
         <p:nvSpPr>
-          <p:cNvPr id="1786795457" name="ZoneTexte 1691387439"/>
+          <p:cNvPr id="1080656279" name="ZoneTexte 1691387439"/>
           <p:cNvSpPr txBox="1"/>
           <p:nvPr/>
         </p:nvSpPr>
@@ -29195,7 +29425,7 @@
       </p:sp>
       <p:cxnSp>
         <p:nvCxnSpPr>
-          <p:cNvPr id="77291934" name="Connecteur droit 1743707585"/>
+          <p:cNvPr id="14758503" name="Connecteur droit 1743707585"/>
           <p:cNvCxnSpPr/>
           <p:nvPr/>
         </p:nvCxnSpPr>
@@ -29238,13 +29468,13 @@
       </p:cxnSp>
       <p:sp>
         <p:nvSpPr>
-          <p:cNvPr id="216101182" name="ZoneTexte 1503300725"/>
+          <p:cNvPr id="529393388" name="ZoneTexte 1503300725"/>
           <p:cNvSpPr txBox="1"/>
           <p:nvPr/>
         </p:nvSpPr>
         <p:spPr bwMode="auto">
           <a:xfrm flipH="0" flipV="0">
-            <a:off x="3183322" y="6110718"/>
+            <a:off x="3183321" y="6067422"/>
             <a:ext cx="2002501" cy="648425"/>
           </a:xfrm>
           <a:prstGeom prst="rect">
@@ -29320,13 +29550,13 @@
       </p:sp>
       <p:sp>
         <p:nvSpPr>
-          <p:cNvPr id="994911220" name="Rectangle : avec coins arrondis en haut 1151560973"/>
+          <p:cNvPr id="895475484" name="Rectangle : avec coins arrondis en haut 1151560973"/>
           <p:cNvSpPr/>
           <p:nvPr/>
         </p:nvSpPr>
         <p:spPr bwMode="auto">
           <a:xfrm rot="5399942">
-            <a:off x="5128596" y="6230914"/>
+            <a:off x="5128596" y="6187618"/>
             <a:ext cx="520474" cy="400050"/>
           </a:xfrm>
           <a:prstGeom prst="round2SameRect">
@@ -29366,13 +29596,13 @@
       </p:sp>
       <p:sp>
         <p:nvSpPr>
-          <p:cNvPr id="1699393702" name="Flèche : pentagone 1610574377"/>
+          <p:cNvPr id="1282288783" name="Flèche : pentagone 1610574377"/>
           <p:cNvSpPr/>
           <p:nvPr/>
         </p:nvSpPr>
         <p:spPr bwMode="auto">
           <a:xfrm>
-            <a:off x="5746268" y="6218325"/>
+            <a:off x="5746267" y="6175029"/>
             <a:ext cx="188775" cy="182467"/>
           </a:xfrm>
           <a:prstGeom prst="homePlate">
@@ -29411,13 +29641,13 @@
       </p:sp>
       <p:sp>
         <p:nvSpPr>
-          <p:cNvPr id="1456207560" name="Flèche : pentagone 463861063"/>
+          <p:cNvPr id="832594763" name="Flèche : pentagone 463861063"/>
           <p:cNvSpPr/>
           <p:nvPr/>
         </p:nvSpPr>
         <p:spPr bwMode="auto">
           <a:xfrm>
-            <a:off x="5935044" y="6218325"/>
+            <a:off x="5935043" y="6175029"/>
             <a:ext cx="188775" cy="182467"/>
           </a:xfrm>
           <a:prstGeom prst="homePlate">
@@ -29456,13 +29686,13 @@
       </p:sp>
       <p:sp>
         <p:nvSpPr>
-          <p:cNvPr id="1565342904" name="Flèche : pentagone 272004907"/>
+          <p:cNvPr id="1901898065" name="Flèche : pentagone 272004907"/>
           <p:cNvSpPr/>
           <p:nvPr/>
         </p:nvSpPr>
         <p:spPr bwMode="auto">
           <a:xfrm>
-            <a:off x="6123825" y="6218325"/>
+            <a:off x="6123825" y="6175029"/>
             <a:ext cx="188775" cy="182467"/>
           </a:xfrm>
           <a:prstGeom prst="homePlate">
@@ -29501,13 +29731,13 @@
       </p:sp>
       <p:sp>
         <p:nvSpPr>
-          <p:cNvPr id="488719081" name="Flèche : pentagone 28174069"/>
+          <p:cNvPr id="1428868977" name="Flèche : pentagone 28174069"/>
           <p:cNvSpPr/>
           <p:nvPr/>
         </p:nvSpPr>
         <p:spPr bwMode="auto">
           <a:xfrm>
-            <a:off x="6312600" y="6218325"/>
+            <a:off x="6312600" y="6175029"/>
             <a:ext cx="188775" cy="182467"/>
           </a:xfrm>
           <a:prstGeom prst="homePlate">
@@ -29546,13 +29776,13 @@
       </p:sp>
       <p:sp>
         <p:nvSpPr>
-          <p:cNvPr id="1987891677" name="Flèche : pentagone 978127220"/>
+          <p:cNvPr id="1471171947" name="Flèche : pentagone 978127220"/>
           <p:cNvSpPr/>
           <p:nvPr/>
         </p:nvSpPr>
         <p:spPr bwMode="auto">
           <a:xfrm>
-            <a:off x="6501375" y="6218325"/>
+            <a:off x="6501375" y="6175029"/>
             <a:ext cx="188775" cy="182467"/>
           </a:xfrm>
           <a:prstGeom prst="homePlate">
@@ -29591,14 +29821,14 @@
       </p:sp>
       <p:sp>
         <p:nvSpPr>
-          <p:cNvPr id="1118752679" name="ZoneTexte 1693594013"/>
+          <p:cNvPr id="1127198409" name="ZoneTexte 1693594013"/>
           <p:cNvSpPr txBox="1"/>
           <p:nvPr/>
         </p:nvSpPr>
         <p:spPr bwMode="auto">
           <a:xfrm flipH="0" flipV="0">
-            <a:off x="3252179" y="6924480"/>
-            <a:ext cx="3608509" cy="2774039"/>
+            <a:off x="3252178" y="6794593"/>
+            <a:ext cx="3604192" cy="2895959"/>
           </a:xfrm>
           <a:prstGeom prst="rect">
             <a:avLst/>
@@ -29623,7 +29853,18 @@
                   </a:schemeClr>
                 </a:solidFill>
               </a:rPr>
-              <a:t>Chaque case de Pulsation cochée entraîne un malus de -10 à la maîtrise de soi.</a:t>
+              <a:t>Chaque case de Pulsation cochée entraîne un</a:t>
+            </a:r>
+            <a:r>
+              <a:rPr sz="800" b="1">
+                <a:solidFill>
+                  <a:schemeClr val="tx1">
+                    <a:lumMod val="50000"/>
+                    <a:lumOff val="50000"/>
+                  </a:schemeClr>
+                </a:solidFill>
+              </a:rPr>
+              <a:t> malus de -10 à la maîtrise de soi</a:t>
             </a:r>
             <a:r>
               <a:rPr sz="800">
@@ -29634,6 +29875,17 @@
                   </a:schemeClr>
                 </a:solidFill>
               </a:rPr>
+              <a:t>.</a:t>
+            </a:r>
+            <a:r>
+              <a:rPr sz="800">
+                <a:solidFill>
+                  <a:schemeClr val="tx1">
+                    <a:lumMod val="50000"/>
+                    <a:lumOff val="50000"/>
+                  </a:schemeClr>
+                </a:solidFill>
+              </a:rPr>
               <a:t> </a:t>
             </a:r>
             <a:r>
@@ -29648,7 +29900,7 @@
                 <a:ea typeface="Arial"/>
                 <a:cs typeface="Arial"/>
               </a:rPr>
-              <a:t>Après chaque test de maîtrise de soi, cochez une case de pulsation.</a:t>
+              <a:t>Après un test de maîtrise de soi réussi, cochez une case de pulsation. Si vous échouez à votre test de maîtrise de soi, cochez une case de colère.</a:t>
             </a:r>
             <a:r>
               <a:rPr lang="fr-FR" sz="800" b="0" i="0" u="none" strike="noStrike" cap="none" spc="0">
@@ -29663,17 +29915,6 @@
                 <a:cs typeface="Arial"/>
               </a:rPr>
               <a:t> Vous pouvez diminuer votre pulsation en vous harmonisant à la nature.</a:t>
-            </a:r>
-            <a:r>
-              <a:rPr sz="800">
-                <a:solidFill>
-                  <a:schemeClr val="tx1">
-                    <a:lumMod val="50000"/>
-                    <a:lumOff val="50000"/>
-                  </a:schemeClr>
-                </a:solidFill>
-              </a:rPr>
-              <a:t> Si vous n’avez pas déjà trois cases de colère cochées, effacez une case de colère au début d’un nouveau scénario.</a:t>
             </a:r>
             <a:endParaRPr sz="800">
               <a:solidFill>
@@ -29868,20 +30109,6 @@
                 <a:cs typeface="+mn-cs"/>
               </a:rPr>
               <a:t>Lorsque la nouvelle lune apparaît dans le ciel pour la première fois lors du cycle lunaire, cochez la première case de colère si elle ne l’était pas.</a:t>
-            </a:r>
-            <a:r>
-              <a:rPr lang="fr-FR" sz="800" b="0" i="0" u="none" strike="noStrike" cap="none" spc="0">
-                <a:solidFill>
-                  <a:schemeClr val="tx1">
-                    <a:lumMod val="50000"/>
-                    <a:lumOff val="50000"/>
-                  </a:schemeClr>
-                </a:solidFill>
-                <a:latin typeface="Arial"/>
-                <a:ea typeface="Arial"/>
-                <a:cs typeface="Arial"/>
-              </a:rPr>
-              <a:t>Tant que vous n’avez pas coché les 3 cases de colère, vous effacez une case de colère au début d’un nouveau scénario.</a:t>
             </a:r>
             <a:endParaRPr lang="fr-FR" sz="800" b="0" i="0" u="none" strike="noStrike" cap="none" spc="0">
               <a:solidFill>
@@ -29895,11 +30122,57 @@
               <a:cs typeface="Arial"/>
             </a:endParaRPr>
           </a:p>
+          <a:p>
+            <a:pPr algn="l">
+              <a:defRPr/>
+            </a:pPr>
+            <a:endParaRPr lang="fr-FR" sz="800" b="0" i="0" u="none" strike="noStrike" cap="none" spc="0">
+              <a:solidFill>
+                <a:schemeClr val="tx1">
+                  <a:lumMod val="50000"/>
+                  <a:lumOff val="50000"/>
+                </a:schemeClr>
+              </a:solidFill>
+              <a:latin typeface="Arial"/>
+              <a:ea typeface="Arial"/>
+              <a:cs typeface="Arial"/>
+            </a:endParaRPr>
+          </a:p>
+          <a:p>
+            <a:pPr algn="l">
+              <a:defRPr/>
+            </a:pPr>
+            <a:r>
+              <a:rPr lang="fr-FR" sz="800" b="0" i="0" u="none" strike="noStrike" cap="none" spc="0">
+                <a:solidFill>
+                  <a:schemeClr val="tx1">
+                    <a:lumMod val="50000"/>
+                    <a:lumOff val="50000"/>
+                  </a:schemeClr>
+                </a:solidFill>
+                <a:latin typeface="Arial"/>
+                <a:ea typeface="Arial"/>
+                <a:cs typeface="Arial"/>
+              </a:rPr>
+              <a:t>Tant que vous n’avez pas coché les 3 cases de colère, vous effacez une case de colère au début d’un nouveau scénario.</a:t>
+            </a:r>
+            <a:endParaRPr lang="fr-FR" sz="800" b="0" i="0" u="none" strike="noStrike" cap="none" spc="0">
+              <a:solidFill>
+                <a:schemeClr val="tx1">
+                  <a:lumMod val="50000"/>
+                  <a:lumOff val="50000"/>
+                </a:schemeClr>
+              </a:solidFill>
+              <a:latin typeface="Arial"/>
+              <a:ea typeface="Arial"/>
+              <a:cs typeface="Arial"/>
+            </a:endParaRPr>
+          </a:p>
         </p:txBody>
       </p:sp>
       <p:sp>
         <p:nvSpPr>
-          <p:cNvPr id="2129063552" name="ZoneTexte 1975797288"/>
+          <p:cNvPr id="1082181026" name="ZoneTexte 1975797288"/>
           <p:cNvSpPr txBox="1"/>
           <p:nvPr/>
         </p:nvSpPr>
@@ -29939,14 +30212,14 @@
       </p:sp>
       <p:sp>
         <p:nvSpPr>
-          <p:cNvPr id="1662747902" name="ZoneTexte 2064865984"/>
+          <p:cNvPr id="186556626" name="ZoneTexte 2064865984"/>
           <p:cNvSpPr txBox="1"/>
           <p:nvPr/>
         </p:nvSpPr>
         <p:spPr bwMode="auto">
           <a:xfrm flipH="0" flipV="0">
             <a:off x="972" y="3243357"/>
-            <a:ext cx="1795510" cy="1981559"/>
+            <a:ext cx="1802709" cy="1981559"/>
           </a:xfrm>
           <a:prstGeom prst="rect">
             <a:avLst/>
@@ -30143,7 +30416,7 @@
                 <a:ea typeface="Arial"/>
                 <a:cs typeface="Arial"/>
               </a:rPr>
-              <a:t> à la fin d’une scène.</a:t>
+              <a:t> à la fin de chaque scène.</a:t>
             </a:r>
             <a:endParaRPr lang="fr-FR" sz="800" b="0" i="0" u="none" strike="noStrike" cap="none" spc="0">
               <a:solidFill>
@@ -30161,14 +30434,14 @@
       </p:sp>
       <p:sp>
         <p:nvSpPr>
-          <p:cNvPr id="439082528" name="ZoneTexte 1387173154"/>
+          <p:cNvPr id="1620329675" name="ZoneTexte 1387173154"/>
           <p:cNvSpPr txBox="1"/>
           <p:nvPr/>
         </p:nvSpPr>
         <p:spPr bwMode="auto">
           <a:xfrm flipH="0" flipV="0">
-            <a:off x="1715351" y="3244246"/>
-            <a:ext cx="2469940" cy="2347319"/>
+            <a:off x="1715350" y="3244245"/>
+            <a:ext cx="2470659" cy="2347319"/>
           </a:xfrm>
           <a:prstGeom prst="rect">
             <a:avLst/>
@@ -30272,7 +30545,7 @@
                 <a:ea typeface="Arial"/>
                 <a:cs typeface="Arial"/>
               </a:rPr>
-              <a:t>+10 en Combat</a:t>
+              <a:t>+20 en Combat</a:t>
             </a:r>
             <a:r>
               <a:rPr lang="fr-FR" sz="800" b="0" i="0" u="none" strike="noStrike" cap="none" spc="0">
@@ -30413,14 +30686,14 @@
       </p:sp>
       <p:sp>
         <p:nvSpPr>
-          <p:cNvPr id="918816779" name="ZoneTexte 523755832"/>
+          <p:cNvPr id="1866792999" name="ZoneTexte 523755832"/>
           <p:cNvSpPr txBox="1"/>
           <p:nvPr/>
         </p:nvSpPr>
         <p:spPr bwMode="auto">
           <a:xfrm flipH="0" flipV="0">
-            <a:off x="4185292" y="3244246"/>
-            <a:ext cx="2649441" cy="2469238"/>
+            <a:off x="4185291" y="3244245"/>
+            <a:ext cx="2672120" cy="2347319"/>
           </a:xfrm>
           <a:prstGeom prst="rect">
             <a:avLst/>
@@ -30516,7 +30789,7 @@
                 <a:ea typeface="Arial"/>
                 <a:cs typeface="Arial"/>
               </a:rPr>
-              <a:t>+20 en Combat</a:t>
+              <a:t>+50 en Combat</a:t>
             </a:r>
             <a:r>
               <a:rPr lang="fr-FR" sz="800" b="0" i="0" u="none" strike="noStrike" cap="none" spc="0">
@@ -30544,7 +30817,7 @@
                 <a:ea typeface="Arial"/>
                 <a:cs typeface="Arial"/>
               </a:rPr>
-              <a:t>+10 en résistance physique</a:t>
+              <a:t>+20 en résistance physique</a:t>
             </a:r>
             <a:r>
               <a:rPr lang="fr-FR" sz="800" b="0" i="0" u="none" strike="noStrike" cap="none" spc="0">
@@ -30572,7 +30845,7 @@
                 <a:ea typeface="Arial"/>
                 <a:cs typeface="Arial"/>
               </a:rPr>
-              <a:t>+5 en Vigilance</a:t>
+              <a:t>+10 en Vigilance</a:t>
             </a:r>
             <a:r>
               <a:rPr lang="fr-FR" sz="800" b="0" i="0" u="none" strike="noStrike" cap="none" spc="0">
@@ -30614,7 +30887,7 @@
                 <a:ea typeface="Arial"/>
                 <a:cs typeface="Arial"/>
               </a:rPr>
-              <a:t> à la fin d’une scène. Vos griffes et vos bois sont des armes létales et vos cibles échouent automatiquement à leurs jets de résistance physique contre elles.</a:t>
+              <a:t> à la fin d’une scène. Vos griffes et vos bois sont des armes létales et vous octroient un bonus de +20 en dégâts..</a:t>
             </a:r>
             <a:endParaRPr lang="fr-FR" sz="800" b="0" i="0" u="none" strike="noStrike" cap="none" spc="0">
               <a:solidFill>
@@ -30673,7 +30946,7 @@
       </p:sp>
       <p:cxnSp>
         <p:nvCxnSpPr>
-          <p:cNvPr id="1938851022" name="Connecteur droit 2085669542"/>
+          <p:cNvPr id="465764746" name="Connecteur droit 2085669542"/>
           <p:cNvCxnSpPr/>
           <p:nvPr/>
         </p:nvCxnSpPr>
@@ -30716,14 +30989,14 @@
       </p:cxnSp>
       <p:sp>
         <p:nvSpPr>
-          <p:cNvPr id="279115784" name="ZoneTexte 34398067"/>
+          <p:cNvPr id="1807619602" name="ZoneTexte 34398067"/>
           <p:cNvSpPr txBox="1"/>
           <p:nvPr/>
         </p:nvSpPr>
         <p:spPr bwMode="auto">
           <a:xfrm>
-            <a:off x="-5859" y="5674807"/>
-            <a:ext cx="2833434" cy="366118"/>
+            <a:off x="-5859" y="5674806"/>
+            <a:ext cx="2842074" cy="366119"/>
           </a:xfrm>
           <a:prstGeom prst="rect">
             <a:avLst/>
@@ -30751,18 +31024,7 @@
                 <a:ea typeface="Arial"/>
                 <a:cs typeface="Arial"/>
               </a:rPr>
-              <a:t>Autres</a:t>
-            </a:r>
-            <a:r>
-              <a:rPr sz="1800" b="0">
-                <a:solidFill>
-                  <a:schemeClr val="tx1">
-                    <a:lumMod val="75000"/>
-                    <a:lumOff val="25000"/>
-                  </a:schemeClr>
-                </a:solidFill>
-              </a:rPr>
-              <a:t> Pouvoirs</a:t>
+              <a:t>Les Pouvoirs du Greffé</a:t>
             </a:r>
             <a:endParaRPr/>
           </a:p>
@@ -30770,7 +31032,7 @@
       </p:sp>
       <p:sp>
         <p:nvSpPr>
-          <p:cNvPr id="1237608305" name="ZoneTexte 273581705"/>
+          <p:cNvPr id="1205785519" name="ZoneTexte 273581705"/>
           <p:cNvSpPr txBox="1"/>
           <p:nvPr/>
         </p:nvSpPr>
@@ -31068,13 +31330,13 @@
       </p:sp>
       <p:sp>
         <p:nvSpPr>
-          <p:cNvPr id="1785675454" name="ZoneTexte 1727393832"/>
+          <p:cNvPr id="1410873348" name="ZoneTexte 1727393832"/>
           <p:cNvSpPr txBox="1"/>
           <p:nvPr/>
         </p:nvSpPr>
         <p:spPr bwMode="auto">
           <a:xfrm flipH="0" flipV="0">
-            <a:off x="5541296" y="5968411"/>
+            <a:off x="5541295" y="5925115"/>
             <a:ext cx="1386368" cy="335639"/>
           </a:xfrm>
           <a:prstGeom prst="rect">
@@ -31110,13 +31372,13 @@
       </p:sp>
       <p:sp>
         <p:nvSpPr>
-          <p:cNvPr id="920641115" name="ZoneTexte 504516740"/>
+          <p:cNvPr id="1583381989" name="ZoneTexte 504516740"/>
           <p:cNvSpPr txBox="1"/>
           <p:nvPr/>
         </p:nvSpPr>
         <p:spPr bwMode="auto">
           <a:xfrm flipH="0" flipV="0">
-            <a:off x="5746267" y="6533881"/>
+            <a:off x="5746266" y="6490585"/>
             <a:ext cx="1229439" cy="305159"/>
           </a:xfrm>
           <a:prstGeom prst="rect">
@@ -31152,14 +31414,14 @@
       </p:sp>
       <p:sp>
         <p:nvSpPr>
-          <p:cNvPr id="1877173734" name="ZoneTexte 1"/>
+          <p:cNvPr id="1066929032" name="ZoneTexte 1"/>
           <p:cNvSpPr txBox="1"/>
           <p:nvPr/>
         </p:nvSpPr>
         <p:spPr bwMode="auto">
           <a:xfrm flipH="0" flipV="0">
-            <a:off x="3449953" y="531374"/>
-            <a:ext cx="3424661" cy="1768199"/>
+            <a:off x="3449952" y="531373"/>
+            <a:ext cx="3425020" cy="1768199"/>
           </a:xfrm>
           <a:prstGeom prst="rect">
             <a:avLst/>
@@ -31177,7 +31439,7 @@
               <a:defRPr/>
             </a:pPr>
             <a:r>
-              <a:rPr lang="fr-FR" sz="1000" b="0" i="0" u="none" strike="noStrike" cap="none" spc="0">
+              <a:rPr lang="fr-FR" sz="1000" b="0" i="1" u="none" strike="noStrike" cap="none" spc="0">
                 <a:solidFill>
                   <a:schemeClr val="tx1">
                     <a:lumMod val="50000"/>
@@ -31191,7 +31453,7 @@
               <a:t>Si vous n'y prenez pas garde, vous pourriez vous transformer en greffé, une créature de chair et de bois évoquant un cauchemar issu de la nature sauvage en quête de vengeance. </a:t>
             </a:r>
             <a:r>
-              <a:rPr lang="fr-FR" sz="1000" b="0" i="0" u="none" strike="noStrike" cap="none" spc="0">
+              <a:rPr lang="fr-FR" sz="1000" b="0" i="1" u="none" strike="noStrike" cap="none" spc="0">
                 <a:solidFill>
                   <a:schemeClr val="tx1">
                     <a:lumMod val="50000"/>
@@ -31204,7 +31466,7 @@
               </a:rPr>
               <a:t>Vous avez cependant appris à utiliser la forme transitoire, qui au moins vous garantit de garder votre lucidité. </a:t>
             </a:r>
-            <a:endParaRPr lang="fr-FR" sz="1000" b="0" i="0" u="none" strike="noStrike" cap="none" spc="0">
+            <a:endParaRPr sz="1000" b="0" i="1" u="none" strike="noStrike" cap="none" spc="0">
               <a:solidFill>
                 <a:schemeClr val="tx1">
                   <a:lumMod val="50000"/>
@@ -31219,7 +31481,7 @@
             <a:pPr>
               <a:defRPr/>
             </a:pPr>
-            <a:endParaRPr lang="fr-FR" sz="1000" b="0" i="0" u="none" strike="noStrike" cap="none" spc="0">
+            <a:endParaRPr sz="1000" b="0" i="1" u="none" strike="noStrike" cap="none" spc="0">
               <a:solidFill>
                 <a:schemeClr val="tx1">
                   <a:lumMod val="50000"/>
@@ -31235,7 +31497,7 @@
               <a:defRPr/>
             </a:pPr>
             <a:r>
-              <a:rPr lang="fr-FR" sz="1000" b="0" i="0" u="none" strike="noStrike" cap="none" spc="0">
+              <a:rPr lang="fr-FR" sz="1000" b="0" i="1" u="none" strike="noStrike" cap="none" spc="0">
                 <a:solidFill>
                   <a:schemeClr val="tx1">
                     <a:lumMod val="50000"/>
@@ -31248,7 +31510,7 @@
               </a:rPr>
               <a:t>Les animaux ne vous craignent plus et vous considèrent même comme une forme de gardien. Vous êtes cependant devenu extrêmement susceptible au feu et vous éloignez de toute flamme dès que possible.</a:t>
             </a:r>
-            <a:endParaRPr lang="fr-FR" sz="1000" b="0" i="0" u="none" strike="noStrike" cap="none" spc="0">
+            <a:endParaRPr sz="1000" b="0" i="1" u="none" strike="noStrike" cap="none" spc="0">
               <a:solidFill>
                 <a:schemeClr val="tx1">
                   <a:lumMod val="50000"/>
@@ -31263,14 +31525,14 @@
       </p:sp>
       <p:sp>
         <p:nvSpPr>
-          <p:cNvPr id="761438865" name="ZoneTexte 2"/>
+          <p:cNvPr id="750078625" name="ZoneTexte 2"/>
           <p:cNvSpPr txBox="1"/>
           <p:nvPr/>
         </p:nvSpPr>
         <p:spPr bwMode="auto">
           <a:xfrm>
-            <a:off x="-5165" y="533754"/>
-            <a:ext cx="3443555" cy="1615799"/>
+            <a:off x="-5164" y="533754"/>
+            <a:ext cx="3443914" cy="1615799"/>
           </a:xfrm>
           <a:prstGeom prst="rect">
             <a:avLst/>
@@ -31288,7 +31550,7 @@
               <a:defRPr/>
             </a:pPr>
             <a:r>
-              <a:rPr lang="fr-FR" sz="1000" b="0" i="0" u="none" strike="noStrike" cap="none" spc="0">
+              <a:rPr lang="fr-FR" sz="1000" b="0" i="1" u="none" strike="noStrike" cap="none" spc="0">
                 <a:solidFill>
                   <a:schemeClr val="tx1">
                     <a:lumMod val="50000"/>
@@ -31302,7 +31564,7 @@
               <a:t>Vous auriez du mourir lors de cet accident dans la forêt, mais quelque chose vous a choisi. Un esprit protecteur aussi ancien que la forêt elle-même s'est greffé à vous, faisant vibrer votre cœur au rythme de la nature, de sa pulsation que vous ressentez maintenant comme un second cœur. </a:t>
             </a:r>
             <a:br>
-              <a:rPr lang="fr-FR" sz="1000" b="0" i="0" u="none" strike="noStrike" cap="none" spc="0">
+              <a:rPr lang="fr-FR" sz="1000" b="0" i="1" u="none" strike="noStrike" cap="none" spc="0">
                 <a:solidFill>
                   <a:schemeClr val="tx1">
                     <a:lumMod val="50000"/>
@@ -31315,7 +31577,7 @@
               </a:rPr>
             </a:br>
             <a:br>
-              <a:rPr lang="fr-FR" sz="1000" b="0" i="0" u="none" strike="noStrike" cap="none" spc="0">
+              <a:rPr lang="fr-FR" sz="1000" b="0" i="1" u="none" strike="noStrike" cap="none" spc="0">
                 <a:solidFill>
                   <a:schemeClr val="tx1">
                     <a:lumMod val="50000"/>
@@ -31328,7 +31590,7 @@
               </a:rPr>
             </a:br>
             <a:r>
-              <a:rPr lang="fr-FR" sz="1000" b="0" i="0" u="none" strike="noStrike" cap="none" spc="0">
+              <a:rPr lang="fr-FR" sz="1000" b="0" i="1" u="none" strike="noStrike" cap="none" spc="0">
                 <a:solidFill>
                   <a:schemeClr val="tx1">
                     <a:lumMod val="50000"/>
@@ -31341,13 +31603,13 @@
               </a:rPr>
               <a:t>Vous avez régénéré de vos blessures à une vitesse improbable et ressentez depuis lors les blessures infligées à la nature sauvage de manière viscérale. </a:t>
             </a:r>
-            <a:endParaRPr sz="1800"/>
+            <a:endParaRPr sz="1800" i="1"/>
           </a:p>
         </p:txBody>
       </p:sp>
       <p:sp>
         <p:nvSpPr>
-          <p:cNvPr id="764860075" name=""/>
+          <p:cNvPr id="161177335" name=""/>
           <p:cNvSpPr/>
           <p:nvPr/>
         </p:nvSpPr>
@@ -31387,7 +31649,7 @@
       </p:sp>
       <p:sp>
         <p:nvSpPr>
-          <p:cNvPr id="656690697" name="Rectangle : avec coins arrondis en haut 1151560973"/>
+          <p:cNvPr id="1800404176" name="Rectangle : avec coins arrondis en haut 1151560973"/>
           <p:cNvSpPr/>
           <p:nvPr/>
         </p:nvSpPr>
@@ -31435,7 +31697,7 @@
       </p:sp>
       <p:sp>
         <p:nvSpPr>
-          <p:cNvPr id="362355717" name=""/>
+          <p:cNvPr id="1367025197" name=""/>
           <p:cNvSpPr/>
           <p:nvPr/>
         </p:nvSpPr>
@@ -31475,7 +31737,7 @@
       </p:sp>
       <p:sp>
         <p:nvSpPr>
-          <p:cNvPr id="1459948749" name="Rectangle : avec coins arrondis en haut 1151560973"/>
+          <p:cNvPr id="1379273171" name="Rectangle : avec coins arrondis en haut 1151560973"/>
           <p:cNvSpPr/>
           <p:nvPr/>
         </p:nvSpPr>
@@ -31523,7 +31785,7 @@
       </p:sp>
       <p:sp>
         <p:nvSpPr>
-          <p:cNvPr id="365134688" name=""/>
+          <p:cNvPr id="473770335" name=""/>
           <p:cNvSpPr/>
           <p:nvPr/>
         </p:nvSpPr>
@@ -31563,7 +31825,7 @@
       </p:sp>
       <p:sp>
         <p:nvSpPr>
-          <p:cNvPr id="1006322393" name="Rectangle : avec coins arrondis en haut 1151560973"/>
+          <p:cNvPr id="1442853029" name="Rectangle : avec coins arrondis en haut 1151560973"/>
           <p:cNvSpPr/>
           <p:nvPr/>
         </p:nvSpPr>
@@ -31611,7 +31873,7 @@
       </p:sp>
       <p:sp>
         <p:nvSpPr>
-          <p:cNvPr id="1174257072" name=""/>
+          <p:cNvPr id="1361762947" name=""/>
           <p:cNvSpPr txBox="1"/>
           <p:nvPr/>
         </p:nvSpPr>
@@ -31662,7 +31924,7 @@
       </p:sp>
       <p:sp>
         <p:nvSpPr>
-          <p:cNvPr id="1253339981" name=""/>
+          <p:cNvPr id="1672552198" name=""/>
           <p:cNvSpPr txBox="1"/>
           <p:nvPr/>
         </p:nvSpPr>
@@ -31760,7 +32022,7 @@
       </p:sp>
       <p:sp>
         <p:nvSpPr>
-          <p:cNvPr id="2132614629" name=""/>
+          <p:cNvPr id="355009376" name=""/>
           <p:cNvSpPr/>
           <p:nvPr/>
         </p:nvSpPr>
@@ -31831,13 +32093,13 @@
       </p:sp>
       <p:sp>
         <p:nvSpPr>
-          <p:cNvPr id="163178995" name="Flèche : pentagone 463861063"/>
+          <p:cNvPr id="1180851376" name="Flèche : pentagone 463861063"/>
           <p:cNvSpPr/>
           <p:nvPr/>
         </p:nvSpPr>
         <p:spPr bwMode="auto">
           <a:xfrm>
-            <a:off x="5935043" y="6434930"/>
+            <a:off x="5935042" y="6391634"/>
             <a:ext cx="188775" cy="182466"/>
           </a:xfrm>
           <a:prstGeom prst="homePlate">
@@ -31876,13 +32138,13 @@
       </p:sp>
       <p:sp>
         <p:nvSpPr>
-          <p:cNvPr id="173525636" name="Flèche : pentagone 272004907"/>
+          <p:cNvPr id="1620449895" name="Flèche : pentagone 272004907"/>
           <p:cNvSpPr/>
           <p:nvPr/>
         </p:nvSpPr>
         <p:spPr bwMode="auto">
           <a:xfrm>
-            <a:off x="6123825" y="6434930"/>
+            <a:off x="6123825" y="6391634"/>
             <a:ext cx="188775" cy="182466"/>
           </a:xfrm>
           <a:prstGeom prst="homePlate">
@@ -31921,13 +32183,13 @@
       </p:sp>
       <p:sp>
         <p:nvSpPr>
-          <p:cNvPr id="433865073" name="Flèche : pentagone 28174069"/>
+          <p:cNvPr id="799572959" name="Flèche : pentagone 28174069"/>
           <p:cNvSpPr/>
           <p:nvPr/>
         </p:nvSpPr>
         <p:spPr bwMode="auto">
           <a:xfrm>
-            <a:off x="6312600" y="6434930"/>
+            <a:off x="6312600" y="6391634"/>
             <a:ext cx="188775" cy="182466"/>
           </a:xfrm>
           <a:prstGeom prst="homePlate">

--- a/Fiches de personnage.pptx
+++ b/Fiches de personnage.pptx
@@ -139,7 +139,7 @@
       </p:grpSpPr>
       <p:sp>
         <p:nvSpPr>
-          <p:cNvPr id="265206087" name="Espace réservé d'en-tête 1"/>
+          <p:cNvPr id="1075822041" name="Espace réservé d'en-tête 1"/>
           <p:cNvSpPr>
             <a:spLocks noGrp="1"/>
           </p:cNvSpPr>
@@ -173,7 +173,7 @@
       </p:sp>
       <p:sp>
         <p:nvSpPr>
-          <p:cNvPr id="163832913" name="Espace réservé pour la date 2"/>
+          <p:cNvPr id="725871149" name="Espace réservé pour la date 2"/>
           <p:cNvSpPr>
             <a:spLocks noGrp="1"/>
           </p:cNvSpPr>
@@ -211,7 +211,7 @@
       </p:sp>
       <p:sp>
         <p:nvSpPr>
-          <p:cNvPr id="1602158739" name="Espace réservé pour l'image de la diapositive 3"/>
+          <p:cNvPr id="961859798" name="Espace réservé pour l'image de la diapositive 3"/>
           <p:cNvSpPr>
             <a:spLocks noChangeAspect="1" noGrp="1" noRot="1"/>
           </p:cNvSpPr>
@@ -247,7 +247,7 @@
       </p:sp>
       <p:sp>
         <p:nvSpPr>
-          <p:cNvPr id="625020305" name="Remarques Espace réservé 4"/>
+          <p:cNvPr id="1812510502" name="Remarques Espace réservé 4"/>
           <p:cNvSpPr>
             <a:spLocks noGrp="1"/>
           </p:cNvSpPr>
@@ -321,7 +321,7 @@
       </p:sp>
       <p:sp>
         <p:nvSpPr>
-          <p:cNvPr id="1091809748" name="Espace réservé du pied de page 5"/>
+          <p:cNvPr id="333723202" name="Espace réservé du pied de page 5"/>
           <p:cNvSpPr>
             <a:spLocks noGrp="1"/>
           </p:cNvSpPr>
@@ -355,7 +355,7 @@
       </p:sp>
       <p:sp>
         <p:nvSpPr>
-          <p:cNvPr id="1023180098" name="Espace réservé du numéro de diapositive 6"/>
+          <p:cNvPr id="609421165" name="Espace réservé du numéro de diapositive 6"/>
           <p:cNvSpPr>
             <a:spLocks noGrp="1"/>
           </p:cNvSpPr>
@@ -508,7 +508,7 @@
       </p:grpSpPr>
       <p:sp>
         <p:nvSpPr>
-          <p:cNvPr id="1009675305" name="Espace réservé pour l'image de la diapositive 1"/>
+          <p:cNvPr id="763591253" name="Espace réservé pour l'image de la diapositive 1"/>
           <p:cNvSpPr>
             <a:spLocks noChangeAspect="1" noGrp="1" noRot="1"/>
           </p:cNvSpPr>
@@ -525,7 +525,7 @@
       </p:sp>
       <p:sp>
         <p:nvSpPr>
-          <p:cNvPr id="26594776" name="Remarques Espace réservé 2"/>
+          <p:cNvPr id="1863411345" name="Remarques Espace réservé 2"/>
           <p:cNvSpPr>
             <a:spLocks noGrp="1"/>
           </p:cNvSpPr>
@@ -550,7 +550,7 @@
       </p:sp>
       <p:sp>
         <p:nvSpPr>
-          <p:cNvPr id="844921682" name="Espace réservé pour le numéro de diapositive 3"/>
+          <p:cNvPr id="1937958219" name="Espace réservé pour le numéro de diapositive 3"/>
           <p:cNvSpPr>
             <a:spLocks noGrp="1"/>
           </p:cNvSpPr>
@@ -601,7 +601,7 @@
       </p:grpSpPr>
       <p:sp>
         <p:nvSpPr>
-          <p:cNvPr id="893874148" name="Espace réservé pour l'image de la diapositive 1"/>
+          <p:cNvPr id="1241481092" name="Espace réservé pour l'image de la diapositive 1"/>
           <p:cNvSpPr>
             <a:spLocks noChangeAspect="1" noGrp="1" noRot="1"/>
           </p:cNvSpPr>
@@ -618,7 +618,7 @@
       </p:sp>
       <p:sp>
         <p:nvSpPr>
-          <p:cNvPr id="1793647825" name="Remarques Espace réservé 2"/>
+          <p:cNvPr id="175162368" name="Remarques Espace réservé 2"/>
           <p:cNvSpPr>
             <a:spLocks noGrp="1"/>
           </p:cNvSpPr>
@@ -643,7 +643,7 @@
       </p:sp>
       <p:sp>
         <p:nvSpPr>
-          <p:cNvPr id="1517492237" name="Espace réservé pour le numéro de diapositive 3"/>
+          <p:cNvPr id="1862247540" name="Espace réservé pour le numéro de diapositive 3"/>
           <p:cNvSpPr>
             <a:spLocks noGrp="1"/>
           </p:cNvSpPr>
@@ -694,7 +694,7 @@
       </p:grpSpPr>
       <p:sp>
         <p:nvSpPr>
-          <p:cNvPr id="504723110" name="Espace réservé pour l'image de la diapositive 1"/>
+          <p:cNvPr id="50369451" name="Espace réservé pour l'image de la diapositive 1"/>
           <p:cNvSpPr>
             <a:spLocks noChangeAspect="1" noGrp="1" noRot="1"/>
           </p:cNvSpPr>
@@ -711,7 +711,7 @@
       </p:sp>
       <p:sp>
         <p:nvSpPr>
-          <p:cNvPr id="881538948" name="Remarques Espace réservé 2"/>
+          <p:cNvPr id="1813038814" name="Remarques Espace réservé 2"/>
           <p:cNvSpPr>
             <a:spLocks noGrp="1"/>
           </p:cNvSpPr>
@@ -736,7 +736,7 @@
       </p:sp>
       <p:sp>
         <p:nvSpPr>
-          <p:cNvPr id="845704875" name="Espace réservé pour le numéro de diapositive 3"/>
+          <p:cNvPr id="1520093849" name="Espace réservé pour le numéro de diapositive 3"/>
           <p:cNvSpPr>
             <a:spLocks noGrp="1"/>
           </p:cNvSpPr>
@@ -787,7 +787,7 @@
       </p:grpSpPr>
       <p:sp>
         <p:nvSpPr>
-          <p:cNvPr id="1540438073" name="Espace réservé pour l'image de la diapositive 1"/>
+          <p:cNvPr id="315882406" name="Espace réservé pour l'image de la diapositive 1"/>
           <p:cNvSpPr>
             <a:spLocks noChangeAspect="1" noGrp="1" noRot="1"/>
           </p:cNvSpPr>
@@ -804,7 +804,7 @@
       </p:sp>
       <p:sp>
         <p:nvSpPr>
-          <p:cNvPr id="1445557676" name="Remarques Espace réservé 2"/>
+          <p:cNvPr id="1192840762" name="Remarques Espace réservé 2"/>
           <p:cNvSpPr>
             <a:spLocks noGrp="1"/>
           </p:cNvSpPr>
@@ -829,7 +829,7 @@
       </p:sp>
       <p:sp>
         <p:nvSpPr>
-          <p:cNvPr id="492396329" name="Espace réservé pour le numéro de diapositive 3"/>
+          <p:cNvPr id="21341251" name="Espace réservé pour le numéro de diapositive 3"/>
           <p:cNvSpPr>
             <a:spLocks noGrp="1"/>
           </p:cNvSpPr>
@@ -880,7 +880,7 @@
       </p:grpSpPr>
       <p:sp>
         <p:nvSpPr>
-          <p:cNvPr id="1394215680" name="Espace réservé pour l'image de la diapositive 1"/>
+          <p:cNvPr id="379136730" name="Espace réservé pour l'image de la diapositive 1"/>
           <p:cNvSpPr>
             <a:spLocks noChangeAspect="1" noGrp="1" noRot="1"/>
           </p:cNvSpPr>
@@ -897,7 +897,7 @@
       </p:sp>
       <p:sp>
         <p:nvSpPr>
-          <p:cNvPr id="871493879" name="Remarques Espace réservé 2"/>
+          <p:cNvPr id="476707482" name="Remarques Espace réservé 2"/>
           <p:cNvSpPr>
             <a:spLocks noGrp="1"/>
           </p:cNvSpPr>
@@ -922,7 +922,7 @@
       </p:sp>
       <p:sp>
         <p:nvSpPr>
-          <p:cNvPr id="2048849980" name="Espace réservé pour le numéro de diapositive 3"/>
+          <p:cNvPr id="654600206" name="Espace réservé pour le numéro de diapositive 3"/>
           <p:cNvSpPr>
             <a:spLocks noGrp="1"/>
           </p:cNvSpPr>
@@ -973,7 +973,7 @@
       </p:grpSpPr>
       <p:sp>
         <p:nvSpPr>
-          <p:cNvPr id="204793652" name="Espace réservé pour l'image de la diapositive 1"/>
+          <p:cNvPr id="905993992" name="Espace réservé pour l'image de la diapositive 1"/>
           <p:cNvSpPr>
             <a:spLocks noChangeAspect="1" noGrp="1" noRot="1"/>
           </p:cNvSpPr>
@@ -990,7 +990,7 @@
       </p:sp>
       <p:sp>
         <p:nvSpPr>
-          <p:cNvPr id="219605830" name="Remarques Espace réservé 2"/>
+          <p:cNvPr id="1272877319" name="Remarques Espace réservé 2"/>
           <p:cNvSpPr>
             <a:spLocks noGrp="1"/>
           </p:cNvSpPr>
@@ -1015,7 +1015,7 @@
       </p:sp>
       <p:sp>
         <p:nvSpPr>
-          <p:cNvPr id="1557253955" name="Espace réservé pour le numéro de diapositive 3"/>
+          <p:cNvPr id="893460856" name="Espace réservé pour le numéro de diapositive 3"/>
           <p:cNvSpPr>
             <a:spLocks noGrp="1"/>
           </p:cNvSpPr>
@@ -1066,7 +1066,7 @@
       </p:grpSpPr>
       <p:sp>
         <p:nvSpPr>
-          <p:cNvPr id="1671822722" name="Titre 1"/>
+          <p:cNvPr id="1992995044" name="Titre 1"/>
           <p:cNvSpPr>
             <a:spLocks noGrp="1"/>
           </p:cNvSpPr>
@@ -1101,7 +1101,7 @@
       </p:sp>
       <p:sp>
         <p:nvSpPr>
-          <p:cNvPr id="16260441" name="Sous-titre 2"/>
+          <p:cNvPr id="787572138" name="Sous-titre 2"/>
           <p:cNvSpPr>
             <a:spLocks noGrp="1"/>
           </p:cNvSpPr>
@@ -1169,7 +1169,7 @@
       </p:sp>
       <p:sp>
         <p:nvSpPr>
-          <p:cNvPr id="258858501" name="Espace réservé de la date 3"/>
+          <p:cNvPr id="249466681" name="Espace réservé de la date 3"/>
           <p:cNvSpPr>
             <a:spLocks noGrp="1"/>
           </p:cNvSpPr>
@@ -1195,7 +1195,7 @@
       </p:sp>
       <p:sp>
         <p:nvSpPr>
-          <p:cNvPr id="1190737723" name="Espace réservé du pied de page 4"/>
+          <p:cNvPr id="1943028510" name="Espace réservé du pied de page 4"/>
           <p:cNvSpPr>
             <a:spLocks noGrp="1"/>
           </p:cNvSpPr>
@@ -1217,7 +1217,7 @@
       </p:sp>
       <p:sp>
         <p:nvSpPr>
-          <p:cNvPr id="589231571" name="Espace réservé du numéro de diapositive 5"/>
+          <p:cNvPr id="566596882" name="Espace réservé du numéro de diapositive 5"/>
           <p:cNvSpPr>
             <a:spLocks noGrp="1"/>
           </p:cNvSpPr>
@@ -1268,7 +1268,7 @@
       </p:grpSpPr>
       <p:sp>
         <p:nvSpPr>
-          <p:cNvPr id="1622189294" name="Titre 1"/>
+          <p:cNvPr id="1182555650" name="Titre 1"/>
           <p:cNvSpPr>
             <a:spLocks noGrp="1"/>
           </p:cNvSpPr>
@@ -1294,7 +1294,7 @@
       </p:sp>
       <p:sp>
         <p:nvSpPr>
-          <p:cNvPr id="2013143805" name="Espace réservé du texte vertical 2"/>
+          <p:cNvPr id="653248704" name="Espace réservé du texte vertical 2"/>
           <p:cNvSpPr>
             <a:spLocks noGrp="1"/>
           </p:cNvSpPr>
@@ -1360,7 +1360,7 @@
       </p:sp>
       <p:sp>
         <p:nvSpPr>
-          <p:cNvPr id="297595612" name="Espace réservé de la date 3"/>
+          <p:cNvPr id="622951119" name="Espace réservé de la date 3"/>
           <p:cNvSpPr>
             <a:spLocks noGrp="1"/>
           </p:cNvSpPr>
@@ -1386,7 +1386,7 @@
       </p:sp>
       <p:sp>
         <p:nvSpPr>
-          <p:cNvPr id="814702391" name="Espace réservé du pied de page 4"/>
+          <p:cNvPr id="233617360" name="Espace réservé du pied de page 4"/>
           <p:cNvSpPr>
             <a:spLocks noGrp="1"/>
           </p:cNvSpPr>
@@ -1408,7 +1408,7 @@
       </p:sp>
       <p:sp>
         <p:nvSpPr>
-          <p:cNvPr id="1389562612" name="Espace réservé du numéro de diapositive 5"/>
+          <p:cNvPr id="833483545" name="Espace réservé du numéro de diapositive 5"/>
           <p:cNvSpPr>
             <a:spLocks noGrp="1"/>
           </p:cNvSpPr>
@@ -1459,7 +1459,7 @@
       </p:grpSpPr>
       <p:sp>
         <p:nvSpPr>
-          <p:cNvPr id="387003085" name="Titre vertical 1"/>
+          <p:cNvPr id="148068918" name="Titre vertical 1"/>
           <p:cNvSpPr>
             <a:spLocks noGrp="1"/>
           </p:cNvSpPr>
@@ -1490,7 +1490,7 @@
       </p:sp>
       <p:sp>
         <p:nvSpPr>
-          <p:cNvPr id="1095314429" name="Espace réservé du texte vertical 2"/>
+          <p:cNvPr id="1929218128" name="Espace réservé du texte vertical 2"/>
           <p:cNvSpPr>
             <a:spLocks noGrp="1"/>
           </p:cNvSpPr>
@@ -1561,7 +1561,7 @@
       </p:sp>
       <p:sp>
         <p:nvSpPr>
-          <p:cNvPr id="1948580107" name="Espace réservé de la date 3"/>
+          <p:cNvPr id="1605158212" name="Espace réservé de la date 3"/>
           <p:cNvSpPr>
             <a:spLocks noGrp="1"/>
           </p:cNvSpPr>
@@ -1587,7 +1587,7 @@
       </p:sp>
       <p:sp>
         <p:nvSpPr>
-          <p:cNvPr id="620166189" name="Espace réservé du pied de page 4"/>
+          <p:cNvPr id="855468754" name="Espace réservé du pied de page 4"/>
           <p:cNvSpPr>
             <a:spLocks noGrp="1"/>
           </p:cNvSpPr>
@@ -1609,7 +1609,7 @@
       </p:sp>
       <p:sp>
         <p:nvSpPr>
-          <p:cNvPr id="1967482095" name="Espace réservé du numéro de diapositive 5"/>
+          <p:cNvPr id="568701608" name="Espace réservé du numéro de diapositive 5"/>
           <p:cNvSpPr>
             <a:spLocks noGrp="1"/>
           </p:cNvSpPr>
@@ -1660,7 +1660,7 @@
       </p:grpSpPr>
       <p:sp>
         <p:nvSpPr>
-          <p:cNvPr id="613231721" name="Titre 1"/>
+          <p:cNvPr id="966597585" name="Titre 1"/>
           <p:cNvSpPr>
             <a:spLocks noGrp="1"/>
           </p:cNvSpPr>
@@ -1686,7 +1686,7 @@
       </p:sp>
       <p:sp>
         <p:nvSpPr>
-          <p:cNvPr id="1528007959" name="Espace réservé du contenu 2"/>
+          <p:cNvPr id="687051341" name="Espace réservé du contenu 2"/>
           <p:cNvSpPr>
             <a:spLocks noGrp="1"/>
           </p:cNvSpPr>
@@ -1752,7 +1752,7 @@
       </p:sp>
       <p:sp>
         <p:nvSpPr>
-          <p:cNvPr id="535366378" name="Espace réservé de la date 3"/>
+          <p:cNvPr id="2141976599" name="Espace réservé de la date 3"/>
           <p:cNvSpPr>
             <a:spLocks noGrp="1"/>
           </p:cNvSpPr>
@@ -1778,7 +1778,7 @@
       </p:sp>
       <p:sp>
         <p:nvSpPr>
-          <p:cNvPr id="1115086580" name="Espace réservé du pied de page 4"/>
+          <p:cNvPr id="1294090532" name="Espace réservé du pied de page 4"/>
           <p:cNvSpPr>
             <a:spLocks noGrp="1"/>
           </p:cNvSpPr>
@@ -1800,7 +1800,7 @@
       </p:sp>
       <p:sp>
         <p:nvSpPr>
-          <p:cNvPr id="1251821726" name="Espace réservé du numéro de diapositive 5"/>
+          <p:cNvPr id="1795983424" name="Espace réservé du numéro de diapositive 5"/>
           <p:cNvSpPr>
             <a:spLocks noGrp="1"/>
           </p:cNvSpPr>
@@ -1851,7 +1851,7 @@
       </p:grpSpPr>
       <p:sp>
         <p:nvSpPr>
-          <p:cNvPr id="1561261570" name="Titre 1"/>
+          <p:cNvPr id="1364868047" name="Titre 1"/>
           <p:cNvSpPr>
             <a:spLocks noGrp="1"/>
           </p:cNvSpPr>
@@ -1886,7 +1886,7 @@
       </p:sp>
       <p:sp>
         <p:nvSpPr>
-          <p:cNvPr id="1495685575" name="Espace réservé du texte 2"/>
+          <p:cNvPr id="712155424" name="Espace réservé du texte 2"/>
           <p:cNvSpPr>
             <a:spLocks noGrp="1"/>
           </p:cNvSpPr>
@@ -2008,7 +2008,7 @@
       </p:sp>
       <p:sp>
         <p:nvSpPr>
-          <p:cNvPr id="1101620109" name="Espace réservé de la date 3"/>
+          <p:cNvPr id="1725913053" name="Espace réservé de la date 3"/>
           <p:cNvSpPr>
             <a:spLocks noGrp="1"/>
           </p:cNvSpPr>
@@ -2034,7 +2034,7 @@
       </p:sp>
       <p:sp>
         <p:nvSpPr>
-          <p:cNvPr id="1465449754" name="Espace réservé du pied de page 4"/>
+          <p:cNvPr id="102529025" name="Espace réservé du pied de page 4"/>
           <p:cNvSpPr>
             <a:spLocks noGrp="1"/>
           </p:cNvSpPr>
@@ -2056,7 +2056,7 @@
       </p:sp>
       <p:sp>
         <p:nvSpPr>
-          <p:cNvPr id="888133361" name="Espace réservé du numéro de diapositive 5"/>
+          <p:cNvPr id="337540765" name="Espace réservé du numéro de diapositive 5"/>
           <p:cNvSpPr>
             <a:spLocks noGrp="1"/>
           </p:cNvSpPr>
@@ -2107,7 +2107,7 @@
       </p:grpSpPr>
       <p:sp>
         <p:nvSpPr>
-          <p:cNvPr id="175669684" name="Titre 1"/>
+          <p:cNvPr id="332277793" name="Titre 1"/>
           <p:cNvSpPr>
             <a:spLocks noGrp="1"/>
           </p:cNvSpPr>
@@ -2133,7 +2133,7 @@
       </p:sp>
       <p:sp>
         <p:nvSpPr>
-          <p:cNvPr id="275853902" name="Espace réservé du contenu 2"/>
+          <p:cNvPr id="25733535" name="Espace réservé du contenu 2"/>
           <p:cNvSpPr>
             <a:spLocks noGrp="1"/>
           </p:cNvSpPr>
@@ -2204,7 +2204,7 @@
       </p:sp>
       <p:sp>
         <p:nvSpPr>
-          <p:cNvPr id="711741940" name="Espace réservé du contenu 3"/>
+          <p:cNvPr id="665145483" name="Espace réservé du contenu 3"/>
           <p:cNvSpPr>
             <a:spLocks noGrp="1"/>
           </p:cNvSpPr>
@@ -2275,7 +2275,7 @@
       </p:sp>
       <p:sp>
         <p:nvSpPr>
-          <p:cNvPr id="1774454442" name="Espace réservé de la date 4"/>
+          <p:cNvPr id="317971106" name="Espace réservé de la date 4"/>
           <p:cNvSpPr>
             <a:spLocks noGrp="1"/>
           </p:cNvSpPr>
@@ -2301,7 +2301,7 @@
       </p:sp>
       <p:sp>
         <p:nvSpPr>
-          <p:cNvPr id="131227308" name="Espace réservé du pied de page 5"/>
+          <p:cNvPr id="1968704793" name="Espace réservé du pied de page 5"/>
           <p:cNvSpPr>
             <a:spLocks noGrp="1"/>
           </p:cNvSpPr>
@@ -2323,7 +2323,7 @@
       </p:sp>
       <p:sp>
         <p:nvSpPr>
-          <p:cNvPr id="1371119021" name="Espace réservé du numéro de diapositive 6"/>
+          <p:cNvPr id="1683293698" name="Espace réservé du numéro de diapositive 6"/>
           <p:cNvSpPr>
             <a:spLocks noGrp="1"/>
           </p:cNvSpPr>
@@ -2374,7 +2374,7 @@
       </p:grpSpPr>
       <p:sp>
         <p:nvSpPr>
-          <p:cNvPr id="1348707153" name="Titre 1"/>
+          <p:cNvPr id="1840215883" name="Titre 1"/>
           <p:cNvSpPr>
             <a:spLocks noGrp="1"/>
           </p:cNvSpPr>
@@ -2405,7 +2405,7 @@
       </p:sp>
       <p:sp>
         <p:nvSpPr>
-          <p:cNvPr id="1704303569" name="Espace réservé du texte 2"/>
+          <p:cNvPr id="815977814" name="Espace réservé du texte 2"/>
           <p:cNvSpPr>
             <a:spLocks noGrp="1"/>
           </p:cNvSpPr>
@@ -2473,7 +2473,7 @@
       </p:sp>
       <p:sp>
         <p:nvSpPr>
-          <p:cNvPr id="99380269" name="Espace réservé du contenu 3"/>
+          <p:cNvPr id="1753986283" name="Espace réservé du contenu 3"/>
           <p:cNvSpPr>
             <a:spLocks noGrp="1"/>
           </p:cNvSpPr>
@@ -2544,7 +2544,7 @@
       </p:sp>
       <p:sp>
         <p:nvSpPr>
-          <p:cNvPr id="1151550294" name="Espace réservé du texte 4"/>
+          <p:cNvPr id="1066379033" name="Espace réservé du texte 4"/>
           <p:cNvSpPr>
             <a:spLocks noGrp="1"/>
           </p:cNvSpPr>
@@ -2612,7 +2612,7 @@
       </p:sp>
       <p:sp>
         <p:nvSpPr>
-          <p:cNvPr id="579729756" name="Espace réservé du contenu 5"/>
+          <p:cNvPr id="1696648508" name="Espace réservé du contenu 5"/>
           <p:cNvSpPr>
             <a:spLocks noGrp="1"/>
           </p:cNvSpPr>
@@ -2683,7 +2683,7 @@
       </p:sp>
       <p:sp>
         <p:nvSpPr>
-          <p:cNvPr id="932128150" name="Espace réservé de la date 6"/>
+          <p:cNvPr id="691533598" name="Espace réservé de la date 6"/>
           <p:cNvSpPr>
             <a:spLocks noGrp="1"/>
           </p:cNvSpPr>
@@ -2709,7 +2709,7 @@
       </p:sp>
       <p:sp>
         <p:nvSpPr>
-          <p:cNvPr id="916722548" name="Espace réservé du pied de page 7"/>
+          <p:cNvPr id="1856383132" name="Espace réservé du pied de page 7"/>
           <p:cNvSpPr>
             <a:spLocks noGrp="1"/>
           </p:cNvSpPr>
@@ -2731,7 +2731,7 @@
       </p:sp>
       <p:sp>
         <p:nvSpPr>
-          <p:cNvPr id="564363487" name="Espace réservé du numéro de diapositive 8"/>
+          <p:cNvPr id="647974869" name="Espace réservé du numéro de diapositive 8"/>
           <p:cNvSpPr>
             <a:spLocks noGrp="1"/>
           </p:cNvSpPr>
@@ -2782,7 +2782,7 @@
       </p:grpSpPr>
       <p:sp>
         <p:nvSpPr>
-          <p:cNvPr id="767477844" name="Titre 1"/>
+          <p:cNvPr id="1816347695" name="Titre 1"/>
           <p:cNvSpPr>
             <a:spLocks noGrp="1"/>
           </p:cNvSpPr>
@@ -2808,7 +2808,7 @@
       </p:sp>
       <p:sp>
         <p:nvSpPr>
-          <p:cNvPr id="1106676256" name="Espace réservé de la date 2"/>
+          <p:cNvPr id="296548332" name="Espace réservé de la date 2"/>
           <p:cNvSpPr>
             <a:spLocks noGrp="1"/>
           </p:cNvSpPr>
@@ -2834,7 +2834,7 @@
       </p:sp>
       <p:sp>
         <p:nvSpPr>
-          <p:cNvPr id="985897514" name="Espace réservé du pied de page 3"/>
+          <p:cNvPr id="1700917724" name="Espace réservé du pied de page 3"/>
           <p:cNvSpPr>
             <a:spLocks noGrp="1"/>
           </p:cNvSpPr>
@@ -2856,7 +2856,7 @@
       </p:sp>
       <p:sp>
         <p:nvSpPr>
-          <p:cNvPr id="1228011893" name="Espace réservé du numéro de diapositive 4"/>
+          <p:cNvPr id="350355627" name="Espace réservé du numéro de diapositive 4"/>
           <p:cNvSpPr>
             <a:spLocks noGrp="1"/>
           </p:cNvSpPr>
@@ -2907,7 +2907,7 @@
       </p:grpSpPr>
       <p:sp>
         <p:nvSpPr>
-          <p:cNvPr id="1892623325" name="Espace réservé de la date 1"/>
+          <p:cNvPr id="94709278" name="Espace réservé de la date 1"/>
           <p:cNvSpPr>
             <a:spLocks noGrp="1"/>
           </p:cNvSpPr>
@@ -2933,7 +2933,7 @@
       </p:sp>
       <p:sp>
         <p:nvSpPr>
-          <p:cNvPr id="825536378" name="Espace réservé du pied de page 2"/>
+          <p:cNvPr id="295793090" name="Espace réservé du pied de page 2"/>
           <p:cNvSpPr>
             <a:spLocks noGrp="1"/>
           </p:cNvSpPr>
@@ -2955,7 +2955,7 @@
       </p:sp>
       <p:sp>
         <p:nvSpPr>
-          <p:cNvPr id="584786259" name="Espace réservé du numéro de diapositive 3"/>
+          <p:cNvPr id="83232597" name="Espace réservé du numéro de diapositive 3"/>
           <p:cNvSpPr>
             <a:spLocks noGrp="1"/>
           </p:cNvSpPr>
@@ -3006,7 +3006,7 @@
       </p:grpSpPr>
       <p:sp>
         <p:nvSpPr>
-          <p:cNvPr id="13348717" name="Titre 1"/>
+          <p:cNvPr id="1555365818" name="Titre 1"/>
           <p:cNvSpPr>
             <a:spLocks noGrp="1"/>
           </p:cNvSpPr>
@@ -3041,7 +3041,7 @@
       </p:sp>
       <p:sp>
         <p:nvSpPr>
-          <p:cNvPr id="20836871" name="Espace réservé du contenu 2"/>
+          <p:cNvPr id="1339737277" name="Espace réservé du contenu 2"/>
           <p:cNvSpPr>
             <a:spLocks noGrp="1"/>
           </p:cNvSpPr>
@@ -3140,7 +3140,7 @@
       </p:sp>
       <p:sp>
         <p:nvSpPr>
-          <p:cNvPr id="1163623035" name="Espace réservé du texte 3"/>
+          <p:cNvPr id="1053266498" name="Espace réservé du texte 3"/>
           <p:cNvSpPr>
             <a:spLocks noGrp="1"/>
           </p:cNvSpPr>
@@ -3208,7 +3208,7 @@
       </p:sp>
       <p:sp>
         <p:nvSpPr>
-          <p:cNvPr id="1433571980" name="Espace réservé de la date 4"/>
+          <p:cNvPr id="888037768" name="Espace réservé de la date 4"/>
           <p:cNvSpPr>
             <a:spLocks noGrp="1"/>
           </p:cNvSpPr>
@@ -3234,7 +3234,7 @@
       </p:sp>
       <p:sp>
         <p:nvSpPr>
-          <p:cNvPr id="2125251971" name="Espace réservé du pied de page 5"/>
+          <p:cNvPr id="509166501" name="Espace réservé du pied de page 5"/>
           <p:cNvSpPr>
             <a:spLocks noGrp="1"/>
           </p:cNvSpPr>
@@ -3256,7 +3256,7 @@
       </p:sp>
       <p:sp>
         <p:nvSpPr>
-          <p:cNvPr id="1089404012" name="Espace réservé du numéro de diapositive 6"/>
+          <p:cNvPr id="754150469" name="Espace réservé du numéro de diapositive 6"/>
           <p:cNvSpPr>
             <a:spLocks noGrp="1"/>
           </p:cNvSpPr>
@@ -3307,7 +3307,7 @@
       </p:grpSpPr>
       <p:sp>
         <p:nvSpPr>
-          <p:cNvPr id="945704420" name="Titre 1"/>
+          <p:cNvPr id="1178479719" name="Titre 1"/>
           <p:cNvSpPr>
             <a:spLocks noGrp="1"/>
           </p:cNvSpPr>
@@ -3342,7 +3342,7 @@
       </p:sp>
       <p:sp>
         <p:nvSpPr>
-          <p:cNvPr id="906052916" name="Espace réservé pour une image 2"/>
+          <p:cNvPr id="1992788137" name="Espace réservé pour une image 2"/>
           <p:cNvSpPr>
             <a:spLocks noChangeAspect="1" noGrp="1"/>
           </p:cNvSpPr>
@@ -3410,7 +3410,7 @@
       </p:sp>
       <p:sp>
         <p:nvSpPr>
-          <p:cNvPr id="4321236" name="Espace réservé du texte 3"/>
+          <p:cNvPr id="1397956615" name="Espace réservé du texte 3"/>
           <p:cNvSpPr>
             <a:spLocks noGrp="1"/>
           </p:cNvSpPr>
@@ -3478,7 +3478,7 @@
       </p:sp>
       <p:sp>
         <p:nvSpPr>
-          <p:cNvPr id="1273131335" name="Espace réservé de la date 4"/>
+          <p:cNvPr id="88250460" name="Espace réservé de la date 4"/>
           <p:cNvSpPr>
             <a:spLocks noGrp="1"/>
           </p:cNvSpPr>
@@ -3504,7 +3504,7 @@
       </p:sp>
       <p:sp>
         <p:nvSpPr>
-          <p:cNvPr id="264732149" name="Espace réservé du pied de page 5"/>
+          <p:cNvPr id="1252993677" name="Espace réservé du pied de page 5"/>
           <p:cNvSpPr>
             <a:spLocks noGrp="1"/>
           </p:cNvSpPr>
@@ -3526,7 +3526,7 @@
       </p:sp>
       <p:sp>
         <p:nvSpPr>
-          <p:cNvPr id="693442155" name="Espace réservé du numéro de diapositive 6"/>
+          <p:cNvPr id="6911348" name="Espace réservé du numéro de diapositive 6"/>
           <p:cNvSpPr>
             <a:spLocks noGrp="1"/>
           </p:cNvSpPr>
@@ -3582,7 +3582,7 @@
       </p:grpSpPr>
       <p:sp>
         <p:nvSpPr>
-          <p:cNvPr id="346127240" name="Espace réservé du titre 1"/>
+          <p:cNvPr id="567446345" name="Espace réservé du titre 1"/>
           <p:cNvSpPr>
             <a:spLocks noGrp="1"/>
           </p:cNvSpPr>
@@ -3618,7 +3618,7 @@
       </p:sp>
       <p:sp>
         <p:nvSpPr>
-          <p:cNvPr id="1704175126" name="Espace réservé du texte 2"/>
+          <p:cNvPr id="903331003" name="Espace réservé du texte 2"/>
           <p:cNvSpPr>
             <a:spLocks noGrp="1"/>
           </p:cNvSpPr>
@@ -3694,7 +3694,7 @@
       </p:sp>
       <p:sp>
         <p:nvSpPr>
-          <p:cNvPr id="2065871367" name="Espace réservé de la date 3"/>
+          <p:cNvPr id="485124837" name="Espace réservé de la date 3"/>
           <p:cNvSpPr>
             <a:spLocks noGrp="1"/>
           </p:cNvSpPr>
@@ -3738,7 +3738,7 @@
       </p:sp>
       <p:sp>
         <p:nvSpPr>
-          <p:cNvPr id="1190398729" name="Espace réservé du pied de page 4"/>
+          <p:cNvPr id="1115900001" name="Espace réservé du pied de page 4"/>
           <p:cNvSpPr>
             <a:spLocks noGrp="1"/>
           </p:cNvSpPr>
@@ -3778,7 +3778,7 @@
       </p:sp>
       <p:sp>
         <p:nvSpPr>
-          <p:cNvPr id="2066248205" name="Espace réservé du numéro de diapositive 5"/>
+          <p:cNvPr id="924046641" name="Espace réservé du numéro de diapositive 5"/>
           <p:cNvSpPr>
             <a:spLocks noGrp="1"/>
           </p:cNvSpPr>
@@ -4138,7 +4138,7 @@
       </p:grpSpPr>
       <p:cxnSp>
         <p:nvCxnSpPr>
-          <p:cNvPr id="1855900895" name="Connecteur droit 1568760680"/>
+          <p:cNvPr id="239738196" name="Connecteur droit 1568760680"/>
           <p:cNvCxnSpPr/>
           <p:nvPr/>
         </p:nvCxnSpPr>
@@ -4180,7 +4180,7 @@
       </p:cxnSp>
       <p:sp>
         <p:nvSpPr>
-          <p:cNvPr id="671349321" name="ZoneTexte 1868728971"/>
+          <p:cNvPr id="664266157" name="ZoneTexte 1868728971"/>
           <p:cNvSpPr txBox="1"/>
           <p:nvPr/>
         </p:nvSpPr>
@@ -4220,7 +4220,7 @@
       </p:sp>
       <p:cxnSp>
         <p:nvCxnSpPr>
-          <p:cNvPr id="305246240" name="Connecteur droit 806540798"/>
+          <p:cNvPr id="215508207" name="Connecteur droit 806540798"/>
           <p:cNvCxnSpPr/>
           <p:nvPr/>
         </p:nvCxnSpPr>
@@ -4262,7 +4262,7 @@
       </p:cxnSp>
       <p:sp>
         <p:nvSpPr>
-          <p:cNvPr id="1919376985" name="ZoneTexte 406616703"/>
+          <p:cNvPr id="1764531282" name="ZoneTexte 406616703"/>
           <p:cNvSpPr txBox="1"/>
           <p:nvPr/>
         </p:nvSpPr>
@@ -4302,7 +4302,7 @@
       </p:sp>
       <p:cxnSp>
         <p:nvCxnSpPr>
-          <p:cNvPr id="699142866" name="Connecteur droit 858914340"/>
+          <p:cNvPr id="1983335748" name="Connecteur droit 858914340"/>
           <p:cNvCxnSpPr/>
           <p:nvPr/>
         </p:nvCxnSpPr>
@@ -4344,7 +4344,7 @@
       </p:cxnSp>
       <p:sp>
         <p:nvSpPr>
-          <p:cNvPr id="1555229522" name="ZoneTexte 2018177722"/>
+          <p:cNvPr id="189044569" name="ZoneTexte 2018177722"/>
           <p:cNvSpPr txBox="1"/>
           <p:nvPr/>
         </p:nvSpPr>
@@ -4391,7 +4391,7 @@
       </p:sp>
       <p:sp>
         <p:nvSpPr>
-          <p:cNvPr id="1072696093" name="ZoneTexte 519900862"/>
+          <p:cNvPr id="1311359524" name="ZoneTexte 519900862"/>
           <p:cNvSpPr txBox="1"/>
           <p:nvPr/>
         </p:nvSpPr>
@@ -4653,7 +4653,7 @@
       </p:sp>
       <p:sp>
         <p:nvSpPr>
-          <p:cNvPr id="1532268438" name="Rectangle : avec coins arrondis en haut 838565229"/>
+          <p:cNvPr id="1514185456" name="Rectangle : avec coins arrondis en haut 838565229"/>
           <p:cNvSpPr/>
           <p:nvPr/>
         </p:nvSpPr>
@@ -4699,7 +4699,7 @@
       </p:sp>
       <p:sp>
         <p:nvSpPr>
-          <p:cNvPr id="1203038589" name="ZoneTexte 448541368"/>
+          <p:cNvPr id="1746313211" name="ZoneTexte 448541368"/>
           <p:cNvSpPr txBox="1"/>
           <p:nvPr/>
         </p:nvSpPr>
@@ -4780,7 +4780,7 @@
       </p:sp>
       <p:sp>
         <p:nvSpPr>
-          <p:cNvPr id="173366445" name="Rectangle : avec coins arrondis en haut 1165584529"/>
+          <p:cNvPr id="1584849639" name="Rectangle : avec coins arrondis en haut 1165584529"/>
           <p:cNvSpPr/>
           <p:nvPr/>
         </p:nvSpPr>
@@ -4826,7 +4826,7 @@
       </p:sp>
       <p:sp>
         <p:nvSpPr>
-          <p:cNvPr id="1862527767" name="Flèche : pentagone 1880610112"/>
+          <p:cNvPr id="636727780" name="Flèche : pentagone 1880610112"/>
           <p:cNvSpPr/>
           <p:nvPr/>
         </p:nvSpPr>
@@ -4871,7 +4871,7 @@
       </p:sp>
       <p:sp>
         <p:nvSpPr>
-          <p:cNvPr id="1463613950" name="Flèche : pentagone 446859139"/>
+          <p:cNvPr id="1618632672" name="Flèche : pentagone 446859139"/>
           <p:cNvSpPr/>
           <p:nvPr/>
         </p:nvSpPr>
@@ -4916,7 +4916,7 @@
       </p:sp>
       <p:sp>
         <p:nvSpPr>
-          <p:cNvPr id="1900862832" name="Flèche : pentagone 2055848356"/>
+          <p:cNvPr id="2131040140" name="Flèche : pentagone 2055848356"/>
           <p:cNvSpPr/>
           <p:nvPr/>
         </p:nvSpPr>
@@ -4961,7 +4961,7 @@
       </p:sp>
       <p:sp>
         <p:nvSpPr>
-          <p:cNvPr id="1785460251" name="Flèche : pentagone 1980093981"/>
+          <p:cNvPr id="1611854873" name="Flèche : pentagone 1980093981"/>
           <p:cNvSpPr/>
           <p:nvPr/>
         </p:nvSpPr>
@@ -5006,7 +5006,7 @@
       </p:sp>
       <p:sp>
         <p:nvSpPr>
-          <p:cNvPr id="1738345468" name="Flèche : pentagone 905284374"/>
+          <p:cNvPr id="1961568390" name="Flèche : pentagone 905284374"/>
           <p:cNvSpPr/>
           <p:nvPr/>
         </p:nvSpPr>
@@ -5051,7 +5051,7 @@
       </p:sp>
       <p:sp>
         <p:nvSpPr>
-          <p:cNvPr id="1946409386" name="ZoneTexte 880464430"/>
+          <p:cNvPr id="554142160" name="ZoneTexte 880464430"/>
           <p:cNvSpPr txBox="1"/>
           <p:nvPr/>
         </p:nvSpPr>
@@ -5232,7 +5232,7 @@
       </p:sp>
       <p:sp>
         <p:nvSpPr>
-          <p:cNvPr id="2032708158" name="ZoneTexte 1302587497"/>
+          <p:cNvPr id="161558664" name="ZoneTexte 1302587497"/>
           <p:cNvSpPr txBox="1"/>
           <p:nvPr/>
         </p:nvSpPr>
@@ -5530,7 +5530,7 @@
       </p:sp>
       <p:cxnSp>
         <p:nvCxnSpPr>
-          <p:cNvPr id="779043747" name="Connecteur droit 342798987"/>
+          <p:cNvPr id="817298224" name="Connecteur droit 342798987"/>
           <p:cNvCxnSpPr/>
           <p:nvPr/>
         </p:nvCxnSpPr>
@@ -5572,7 +5572,7 @@
       </p:cxnSp>
       <p:sp>
         <p:nvSpPr>
-          <p:cNvPr id="1299181451" name="ZoneTexte 966486802"/>
+          <p:cNvPr id="668034659" name="ZoneTexte 966486802"/>
           <p:cNvSpPr txBox="1"/>
           <p:nvPr/>
         </p:nvSpPr>
@@ -5612,7 +5612,7 @@
       </p:sp>
       <p:sp>
         <p:nvSpPr>
-          <p:cNvPr id="234644903" name="Rectangle 38344096"/>
+          <p:cNvPr id="1165027225" name="Rectangle 38344096"/>
           <p:cNvSpPr/>
           <p:nvPr/>
         </p:nvSpPr>
@@ -5652,7 +5652,7 @@
       </p:sp>
       <p:sp>
         <p:nvSpPr>
-          <p:cNvPr id="726643718" name="Rectangle 954364527"/>
+          <p:cNvPr id="367712712" name="Rectangle 954364527"/>
           <p:cNvSpPr/>
           <p:nvPr/>
         </p:nvSpPr>
@@ -5692,7 +5692,7 @@
       </p:sp>
       <p:sp>
         <p:nvSpPr>
-          <p:cNvPr id="1878974112" name="ZoneTexte 1527388901"/>
+          <p:cNvPr id="1508344537" name="ZoneTexte 1527388901"/>
           <p:cNvSpPr txBox="1"/>
           <p:nvPr/>
         </p:nvSpPr>
@@ -5914,7 +5914,7 @@
       </p:sp>
       <p:sp>
         <p:nvSpPr>
-          <p:cNvPr id="1052480000" name="ZoneTexte 1440859034"/>
+          <p:cNvPr id="1459271136" name="ZoneTexte 1440859034"/>
           <p:cNvSpPr txBox="1"/>
           <p:nvPr/>
         </p:nvSpPr>
@@ -5965,7 +5965,7 @@
       </p:sp>
       <p:cxnSp>
         <p:nvCxnSpPr>
-          <p:cNvPr id="508114051" name="Connecteur droit 858914340"/>
+          <p:cNvPr id="1705058551" name="Connecteur droit 858914340"/>
           <p:cNvCxnSpPr/>
           <p:nvPr/>
         </p:nvCxnSpPr>
@@ -6007,7 +6007,7 @@
       </p:cxnSp>
       <p:sp>
         <p:nvSpPr>
-          <p:cNvPr id="2099823931" name="ZoneTexte 2018177722"/>
+          <p:cNvPr id="1770062826" name="ZoneTexte 2018177722"/>
           <p:cNvSpPr txBox="1"/>
           <p:nvPr/>
         </p:nvSpPr>
@@ -6054,7 +6054,7 @@
       </p:sp>
       <p:sp>
         <p:nvSpPr>
-          <p:cNvPr id="1718314393" name=""/>
+          <p:cNvPr id="489580447" name=""/>
           <p:cNvSpPr txBox="1"/>
           <p:nvPr/>
         </p:nvSpPr>
@@ -6156,13 +6156,13 @@
       </p:sp>
       <p:cxnSp>
         <p:nvCxnSpPr>
-          <p:cNvPr id="811730211" name="Connecteur droit 858914340"/>
+          <p:cNvPr id="1976685286" name="Connecteur droit 858914340"/>
           <p:cNvCxnSpPr/>
           <p:nvPr/>
         </p:nvCxnSpPr>
         <p:spPr bwMode="auto">
           <a:xfrm flipH="0" flipV="1">
-            <a:off x="4547592" y="4900570"/>
+            <a:off x="4547592" y="4940257"/>
             <a:ext cx="2320902" cy="0"/>
           </a:xfrm>
           <a:prstGeom prst="line">
@@ -6198,13 +6198,13 @@
       </p:cxnSp>
       <p:sp>
         <p:nvSpPr>
-          <p:cNvPr id="851922046" name="ZoneTexte 2018177722"/>
+          <p:cNvPr id="866550449" name="ZoneTexte 2018177722"/>
           <p:cNvSpPr txBox="1"/>
           <p:nvPr/>
         </p:nvSpPr>
         <p:spPr bwMode="auto">
           <a:xfrm flipH="0" flipV="0">
-            <a:off x="4601547" y="4717506"/>
+            <a:off x="4601547" y="4757193"/>
             <a:ext cx="1831714" cy="366119"/>
           </a:xfrm>
           <a:prstGeom prst="rect">
@@ -6256,14 +6256,14 @@
       </p:sp>
       <p:sp>
         <p:nvSpPr>
-          <p:cNvPr id="758371853" name=""/>
+          <p:cNvPr id="1998500530" name=""/>
           <p:cNvSpPr txBox="1"/>
           <p:nvPr/>
         </p:nvSpPr>
         <p:spPr bwMode="auto">
           <a:xfrm rot="0" flipH="0" flipV="0">
-            <a:off x="4547592" y="5013894"/>
-            <a:ext cx="2321301" cy="1341479"/>
+            <a:off x="4547592" y="5053581"/>
+            <a:ext cx="2342899" cy="1341479"/>
           </a:xfrm>
           <a:prstGeom prst="rect">
             <a:avLst/>
@@ -6360,7 +6360,10 @@
             <a:r>
               <a:rPr lang="fr-FR" sz="800" b="0" i="0" u="none" strike="noStrike" cap="none" spc="0">
                 <a:solidFill>
-                  <a:schemeClr val="tx1"/>
+                  <a:schemeClr val="tx1">
+                    <a:lumMod val="50000"/>
+                    <a:lumOff val="50000"/>
+                  </a:schemeClr>
                 </a:solidFill>
                 <a:latin typeface="Arial"/>
                 <a:ea typeface="Arial"/>
@@ -6380,7 +6383,7 @@
                 <a:ea typeface="Arial"/>
                 <a:cs typeface="Arial"/>
               </a:rPr>
-              <a:t>Si vous obtenez un </a:t>
+              <a:t>Chaque case de </a:t>
             </a:r>
             <a:r>
               <a:rPr lang="fr-FR" sz="800" b="1" i="0" u="none" strike="noStrike" cap="none" spc="0">
@@ -6394,7 +6397,7 @@
                 <a:ea typeface="Arial"/>
                 <a:cs typeface="Arial"/>
               </a:rPr>
-              <a:t>double</a:t>
+              <a:t>trauma </a:t>
             </a:r>
             <a:r>
               <a:rPr lang="fr-FR" sz="800" b="0" i="0" u="none" strike="noStrike" cap="none" spc="0">
@@ -6408,23 +6411,9 @@
                 <a:ea typeface="Arial"/>
                 <a:cs typeface="Arial"/>
               </a:rPr>
-              <a:t>, c’est un </a:t>
-            </a:r>
-            <a:r>
-              <a:rPr lang="fr-FR" sz="800" b="1" i="0" u="none" strike="noStrike" cap="none" spc="0">
-                <a:solidFill>
-                  <a:schemeClr val="tx1">
-                    <a:lumMod val="50000"/>
-                    <a:lumOff val="50000"/>
-                  </a:schemeClr>
-                </a:solidFill>
-                <a:latin typeface="Arial"/>
-                <a:ea typeface="Arial"/>
-                <a:cs typeface="Arial"/>
-              </a:rPr>
-              <a:t>résultat critique</a:t>
-            </a:r>
-            <a:r>
+              <a:t>cochée impose un malus de compétences de 10 points.</a:t>
+            </a:r>
+            <a:br>
               <a:rPr lang="fr-FR" sz="800" b="0" i="0" u="none" strike="noStrike" cap="none" spc="0">
                 <a:solidFill>
                   <a:schemeClr val="tx1">
@@ -6436,8 +6425,7 @@
                 <a:ea typeface="Arial"/>
                 <a:cs typeface="Arial"/>
               </a:rPr>
-              <a:t> !</a:t>
-            </a:r>
+            </a:br>
             <a:endParaRPr lang="fr-FR" sz="800" b="0" i="0" u="none" strike="noStrike" cap="none" spc="0">
               <a:solidFill>
                 <a:schemeClr val="tx1">
@@ -6551,48 +6539,6 @@
               </a:spcAft>
               <a:defRPr/>
             </a:pPr>
-            <a:r>
-              <a:rPr lang="fr-FR" sz="800" b="0" i="0" u="none" strike="noStrike" cap="none" spc="0">
-                <a:solidFill>
-                  <a:schemeClr val="tx1">
-                    <a:lumMod val="50000"/>
-                    <a:lumOff val="50000"/>
-                  </a:schemeClr>
-                </a:solidFill>
-                <a:latin typeface="Arial"/>
-                <a:ea typeface="Arial"/>
-                <a:cs typeface="Arial"/>
-              </a:rPr>
-              <a:t>Chaque case de </a:t>
-            </a:r>
-            <a:r>
-              <a:rPr lang="fr-FR" sz="800" b="1" i="0" u="none" strike="noStrike" cap="none" spc="0">
-                <a:solidFill>
-                  <a:schemeClr val="tx1">
-                    <a:lumMod val="50000"/>
-                    <a:lumOff val="50000"/>
-                  </a:schemeClr>
-                </a:solidFill>
-                <a:latin typeface="Arial"/>
-                <a:ea typeface="Arial"/>
-                <a:cs typeface="Arial"/>
-              </a:rPr>
-              <a:t>trauma </a:t>
-            </a:r>
-            <a:r>
-              <a:rPr lang="fr-FR" sz="800" b="0" i="0" u="none" strike="noStrike" cap="none" spc="0">
-                <a:solidFill>
-                  <a:schemeClr val="tx1">
-                    <a:lumMod val="50000"/>
-                    <a:lumOff val="50000"/>
-                  </a:schemeClr>
-                </a:solidFill>
-                <a:latin typeface="Arial"/>
-                <a:ea typeface="Arial"/>
-                <a:cs typeface="Arial"/>
-              </a:rPr>
-              <a:t>cochée impose un malus de compétences de 10 points.</a:t>
-            </a:r>
             <a:endParaRPr lang="fr-FR" sz="800" b="0" i="0" u="none" strike="noStrike" cap="none" spc="0">
               <a:solidFill>
                 <a:schemeClr val="tx1">
@@ -6609,7 +6555,7 @@
       </p:sp>
       <p:sp>
         <p:nvSpPr>
-          <p:cNvPr id="1641416899" name="ZoneTexte 2021443538"/>
+          <p:cNvPr id="2118428422" name="ZoneTexte 2021443538"/>
           <p:cNvSpPr txBox="1"/>
           <p:nvPr/>
         </p:nvSpPr>
@@ -6693,7 +6639,7 @@
       </p:sp>
       <p:sp>
         <p:nvSpPr>
-          <p:cNvPr id="2133524732" name="ZoneTexte 1075280509"/>
+          <p:cNvPr id="1118397053" name="ZoneTexte 1075280509"/>
           <p:cNvSpPr txBox="1"/>
           <p:nvPr/>
         </p:nvSpPr>
@@ -6777,7 +6723,7 @@
       </p:sp>
       <p:sp>
         <p:nvSpPr>
-          <p:cNvPr id="1355523757" name="ZoneTexte 824413856"/>
+          <p:cNvPr id="53678932" name="ZoneTexte 824413856"/>
           <p:cNvSpPr txBox="1"/>
           <p:nvPr/>
         </p:nvSpPr>
@@ -6861,7 +6807,7 @@
       </p:sp>
       <p:sp>
         <p:nvSpPr>
-          <p:cNvPr id="404894541" name="ZoneTexte 1036656844"/>
+          <p:cNvPr id="381169258" name="ZoneTexte 1036656844"/>
           <p:cNvSpPr txBox="1"/>
           <p:nvPr/>
         </p:nvSpPr>
@@ -6945,7 +6891,7 @@
       </p:sp>
       <p:sp>
         <p:nvSpPr>
-          <p:cNvPr id="1272560865" name="ZoneTexte 226284734"/>
+          <p:cNvPr id="2097090235" name="ZoneTexte 226284734"/>
           <p:cNvSpPr txBox="1"/>
           <p:nvPr/>
         </p:nvSpPr>
@@ -7029,7 +6975,7 @@
       </p:sp>
       <p:sp>
         <p:nvSpPr>
-          <p:cNvPr id="2037134119" name="ZoneTexte 162158187"/>
+          <p:cNvPr id="1383532837" name="ZoneTexte 162158187"/>
           <p:cNvSpPr txBox="1"/>
           <p:nvPr/>
         </p:nvSpPr>
@@ -7093,13 +7039,13 @@
       </p:sp>
       <p:sp>
         <p:nvSpPr>
-          <p:cNvPr id="623492979" name="ZoneTexte 1063440096"/>
+          <p:cNvPr id="144569684" name="ZoneTexte 1063440096"/>
           <p:cNvSpPr txBox="1"/>
           <p:nvPr/>
         </p:nvSpPr>
         <p:spPr bwMode="auto">
           <a:xfrm>
-            <a:off x="97609" y="4892718"/>
+            <a:off x="97609" y="4892717"/>
             <a:ext cx="1680237" cy="643788"/>
           </a:xfrm>
           <a:prstGeom prst="rect">
@@ -7177,7 +7123,7 @@
       </p:sp>
       <p:sp>
         <p:nvSpPr>
-          <p:cNvPr id="1575660073" name="ZoneTexte 1564072661"/>
+          <p:cNvPr id="889263305" name="ZoneTexte 1564072661"/>
           <p:cNvSpPr txBox="1"/>
           <p:nvPr/>
         </p:nvSpPr>
@@ -7261,7 +7207,7 @@
       </p:sp>
       <p:sp>
         <p:nvSpPr>
-          <p:cNvPr id="451723015" name="ZoneTexte 2102805411"/>
+          <p:cNvPr id="1034110610" name="ZoneTexte 2102805411"/>
           <p:cNvSpPr txBox="1"/>
           <p:nvPr/>
         </p:nvSpPr>
@@ -7345,7 +7291,7 @@
       </p:sp>
       <p:sp>
         <p:nvSpPr>
-          <p:cNvPr id="247399444" name="ZoneTexte 1094420572"/>
+          <p:cNvPr id="775325702" name="ZoneTexte 1094420572"/>
           <p:cNvSpPr txBox="1"/>
           <p:nvPr/>
         </p:nvSpPr>
@@ -7429,13 +7375,13 @@
       </p:sp>
       <p:sp>
         <p:nvSpPr>
-          <p:cNvPr id="1514609133" name="ZoneTexte 1337742717"/>
+          <p:cNvPr id="1155397355" name="ZoneTexte 1337742717"/>
           <p:cNvSpPr txBox="1"/>
           <p:nvPr/>
         </p:nvSpPr>
         <p:spPr bwMode="auto">
           <a:xfrm flipH="0" flipV="0">
-            <a:off x="2309223" y="4895035"/>
+            <a:off x="2309223" y="4895034"/>
             <a:ext cx="1739636" cy="643788"/>
           </a:xfrm>
           <a:prstGeom prst="rect">
@@ -7493,7 +7439,7 @@
       </p:sp>
       <p:sp>
         <p:nvSpPr>
-          <p:cNvPr id="645520408" name="ZoneTexte 1188730172"/>
+          <p:cNvPr id="1548305526" name="ZoneTexte 1188730172"/>
           <p:cNvSpPr txBox="1"/>
           <p:nvPr/>
         </p:nvSpPr>
@@ -7557,13 +7503,13 @@
       </p:sp>
       <p:sp>
         <p:nvSpPr>
-          <p:cNvPr id="1486490160" name="Rectangle : avec coins arrondis en haut 1452601499"/>
+          <p:cNvPr id="499454768" name="Rectangle : avec coins arrondis en haut 1452601499"/>
           <p:cNvSpPr/>
           <p:nvPr/>
         </p:nvSpPr>
         <p:spPr bwMode="auto">
           <a:xfrm rot="5399976">
-            <a:off x="1724005" y="2462433"/>
+            <a:off x="1724005" y="2462432"/>
             <a:ext cx="522740" cy="400050"/>
           </a:xfrm>
           <a:prstGeom prst="round2SameRect">
@@ -7603,7 +7549,7 @@
       </p:sp>
       <p:sp>
         <p:nvSpPr>
-          <p:cNvPr id="105103469" name="Rectangle : avec coins arrondis en haut 1782110635"/>
+          <p:cNvPr id="1138723688" name="Rectangle : avec coins arrondis en haut 1782110635"/>
           <p:cNvSpPr/>
           <p:nvPr/>
         </p:nvSpPr>
@@ -7649,7 +7595,7 @@
       </p:sp>
       <p:sp>
         <p:nvSpPr>
-          <p:cNvPr id="733771291" name="Rectangle : avec coins arrondis en haut 945118596"/>
+          <p:cNvPr id="1960514368" name="Rectangle : avec coins arrondis en haut 945118596"/>
           <p:cNvSpPr/>
           <p:nvPr/>
         </p:nvSpPr>
@@ -7695,7 +7641,7 @@
       </p:sp>
       <p:sp>
         <p:nvSpPr>
-          <p:cNvPr id="1039005388" name="Rectangle : avec coins arrondis en haut 500951796"/>
+          <p:cNvPr id="1392614288" name="Rectangle : avec coins arrondis en haut 500951796"/>
           <p:cNvSpPr/>
           <p:nvPr/>
         </p:nvSpPr>
@@ -7741,7 +7687,7 @@
       </p:sp>
       <p:sp>
         <p:nvSpPr>
-          <p:cNvPr id="1802609863" name="Rectangle : avec coins arrondis en haut 203047490"/>
+          <p:cNvPr id="2073726181" name="Rectangle : avec coins arrondis en haut 203047490"/>
           <p:cNvSpPr/>
           <p:nvPr/>
         </p:nvSpPr>
@@ -7787,7 +7733,7 @@
       </p:sp>
       <p:sp>
         <p:nvSpPr>
-          <p:cNvPr id="253269065" name="Rectangle : avec coins arrondis en haut 818083012"/>
+          <p:cNvPr id="132016040" name="Rectangle : avec coins arrondis en haut 818083012"/>
           <p:cNvSpPr/>
           <p:nvPr/>
         </p:nvSpPr>
@@ -7833,13 +7779,13 @@
       </p:sp>
       <p:sp>
         <p:nvSpPr>
-          <p:cNvPr id="512256995" name="Rectangle : avec coins arrondis en haut 310539005"/>
+          <p:cNvPr id="147430957" name="Rectangle : avec coins arrondis en haut 310539005"/>
           <p:cNvSpPr/>
           <p:nvPr/>
         </p:nvSpPr>
         <p:spPr bwMode="auto">
           <a:xfrm rot="5399976">
-            <a:off x="3987157" y="2462433"/>
+            <a:off x="3987157" y="2462432"/>
             <a:ext cx="522740" cy="400050"/>
           </a:xfrm>
           <a:prstGeom prst="round2SameRect">
@@ -7879,7 +7825,7 @@
       </p:sp>
       <p:sp>
         <p:nvSpPr>
-          <p:cNvPr id="2143621315" name="Rectangle : avec coins arrondis en haut 844307487"/>
+          <p:cNvPr id="595939398" name="Rectangle : avec coins arrondis en haut 844307487"/>
           <p:cNvSpPr/>
           <p:nvPr/>
         </p:nvSpPr>
@@ -7925,7 +7871,7 @@
       </p:sp>
       <p:sp>
         <p:nvSpPr>
-          <p:cNvPr id="1417756209" name="Rectangle : avec coins arrondis en haut 1616510051"/>
+          <p:cNvPr id="442987930" name="Rectangle : avec coins arrondis en haut 1616510051"/>
           <p:cNvSpPr/>
           <p:nvPr/>
         </p:nvSpPr>
@@ -7971,7 +7917,7 @@
       </p:sp>
       <p:sp>
         <p:nvSpPr>
-          <p:cNvPr id="1485342941" name="Rectangle : avec coins arrondis en haut 1451691637"/>
+          <p:cNvPr id="995627717" name="Rectangle : avec coins arrondis en haut 1451691637"/>
           <p:cNvSpPr/>
           <p:nvPr/>
         </p:nvSpPr>
@@ -8017,7 +7963,7 @@
       </p:sp>
       <p:sp>
         <p:nvSpPr>
-          <p:cNvPr id="1346863176" name="Rectangle : avec coins arrondis en haut 260383743"/>
+          <p:cNvPr id="386632115" name="Rectangle : avec coins arrondis en haut 260383743"/>
           <p:cNvSpPr/>
           <p:nvPr/>
         </p:nvSpPr>
@@ -8063,7 +8009,7 @@
       </p:sp>
       <p:sp>
         <p:nvSpPr>
-          <p:cNvPr id="121402546" name="Rectangle : avec coins arrondis en haut 1280344391"/>
+          <p:cNvPr id="1625598296" name="Rectangle : avec coins arrondis en haut 1280344391"/>
           <p:cNvSpPr/>
           <p:nvPr/>
         </p:nvSpPr>
@@ -8109,7 +8055,7 @@
       </p:sp>
       <p:sp>
         <p:nvSpPr>
-          <p:cNvPr id="489866219" name=""/>
+          <p:cNvPr id="459984406" name=""/>
           <p:cNvSpPr txBox="1"/>
           <p:nvPr/>
         </p:nvSpPr>
@@ -8233,7 +8179,7 @@
       </p:sp>
       <p:sp>
         <p:nvSpPr>
-          <p:cNvPr id="582793882" name="ZoneTexte 1440859034"/>
+          <p:cNvPr id="1375249955" name="ZoneTexte 1440859034"/>
           <p:cNvSpPr txBox="1"/>
           <p:nvPr/>
         </p:nvSpPr>
@@ -8275,7 +8221,7 @@
       </p:sp>
       <p:sp>
         <p:nvSpPr>
-          <p:cNvPr id="1808884723" name="ZoneTexte 1440859034"/>
+          <p:cNvPr id="1165392198" name="ZoneTexte 1440859034"/>
           <p:cNvSpPr txBox="1"/>
           <p:nvPr/>
         </p:nvSpPr>
@@ -8314,7 +8260,7 @@
       </p:sp>
       <p:cxnSp>
         <p:nvCxnSpPr>
-          <p:cNvPr id="79942119" name=""/>
+          <p:cNvPr id="21906939" name=""/>
           <p:cNvCxnSpPr/>
           <p:nvPr/>
         </p:nvCxnSpPr>
@@ -8353,7 +8299,7 @@
       </p:cxnSp>
       <p:sp>
         <p:nvSpPr>
-          <p:cNvPr id="654127914" name=""/>
+          <p:cNvPr id="1559576383" name=""/>
           <p:cNvSpPr txBox="1"/>
           <p:nvPr/>
         </p:nvSpPr>
@@ -8517,7 +8463,7 @@
       </p:sp>
       <p:sp>
         <p:nvSpPr>
-          <p:cNvPr id="976351608" name="Rectangle 954364527"/>
+          <p:cNvPr id="409586064" name="Rectangle 954364527"/>
           <p:cNvSpPr/>
           <p:nvPr/>
         </p:nvSpPr>
@@ -8557,7 +8503,7 @@
       </p:sp>
       <p:sp>
         <p:nvSpPr>
-          <p:cNvPr id="625782196" name="ZoneTexte 1527388901"/>
+          <p:cNvPr id="632209026" name="ZoneTexte 1527388901"/>
           <p:cNvSpPr txBox="1"/>
           <p:nvPr/>
         </p:nvSpPr>
@@ -8717,7 +8663,7 @@
       </p:sp>
       <p:sp>
         <p:nvSpPr>
-          <p:cNvPr id="865681334" name="Rectangle 38344096"/>
+          <p:cNvPr id="232746571" name="Rectangle 38344096"/>
           <p:cNvSpPr/>
           <p:nvPr/>
         </p:nvSpPr>
@@ -8757,7 +8703,7 @@
       </p:sp>
       <p:sp>
         <p:nvSpPr>
-          <p:cNvPr id="112126359" name=""/>
+          <p:cNvPr id="1144654" name=""/>
           <p:cNvSpPr/>
           <p:nvPr/>
         </p:nvSpPr>
@@ -8828,7 +8774,7 @@
       </p:sp>
       <p:sp>
         <p:nvSpPr>
-          <p:cNvPr id="2061379955" name="Flèche : pentagone 2055848356"/>
+          <p:cNvPr id="1638818762" name="Flèche : pentagone 2055848356"/>
           <p:cNvSpPr/>
           <p:nvPr/>
         </p:nvSpPr>
@@ -8873,7 +8819,7 @@
       </p:sp>
       <p:sp>
         <p:nvSpPr>
-          <p:cNvPr id="1130868939" name="Flèche : pentagone 1980093981"/>
+          <p:cNvPr id="412227783" name="Flèche : pentagone 1980093981"/>
           <p:cNvSpPr/>
           <p:nvPr/>
         </p:nvSpPr>
@@ -8918,7 +8864,7 @@
       </p:sp>
       <p:sp>
         <p:nvSpPr>
-          <p:cNvPr id="896513868" name="Flèche : pentagone 905284374"/>
+          <p:cNvPr id="1082499250" name="Flèche : pentagone 905284374"/>
           <p:cNvSpPr/>
           <p:nvPr/>
         </p:nvSpPr>
@@ -8963,7 +8909,7 @@
       </p:sp>
       <p:sp>
         <p:nvSpPr>
-          <p:cNvPr id="185636334" name="ZoneTexte 1440859034"/>
+          <p:cNvPr id="806435740" name="ZoneTexte 1440859034"/>
           <p:cNvSpPr txBox="1"/>
           <p:nvPr/>
         </p:nvSpPr>
@@ -9002,7 +8948,7 @@
       </p:sp>
       <p:sp>
         <p:nvSpPr>
-          <p:cNvPr id="1899860570" name="Flèche : pentagone 1880610112"/>
+          <p:cNvPr id="179306724" name="Flèche : pentagone 1880610112"/>
           <p:cNvSpPr/>
           <p:nvPr/>
         </p:nvSpPr>
@@ -9047,7 +8993,7 @@
       </p:sp>
       <p:sp>
         <p:nvSpPr>
-          <p:cNvPr id="507360719" name="Flèche : pentagone 446859139"/>
+          <p:cNvPr id="1036864690" name="Flèche : pentagone 446859139"/>
           <p:cNvSpPr/>
           <p:nvPr/>
         </p:nvSpPr>
@@ -9092,7 +9038,7 @@
       </p:sp>
       <p:sp>
         <p:nvSpPr>
-          <p:cNvPr id="627952280" name="Flèche : pentagone 2055848356"/>
+          <p:cNvPr id="1235574988" name="Flèche : pentagone 2055848356"/>
           <p:cNvSpPr/>
           <p:nvPr/>
         </p:nvSpPr>
@@ -9137,7 +9083,7 @@
       </p:sp>
       <p:sp>
         <p:nvSpPr>
-          <p:cNvPr id="1779433988" name="Flèche : pentagone 1980093981"/>
+          <p:cNvPr id="562523930" name="Flèche : pentagone 1980093981"/>
           <p:cNvSpPr/>
           <p:nvPr/>
         </p:nvSpPr>
@@ -9182,7 +9128,7 @@
       </p:sp>
       <p:sp>
         <p:nvSpPr>
-          <p:cNvPr id="1689126577" name="Flèche : pentagone 905284374"/>
+          <p:cNvPr id="1481875302" name="Flèche : pentagone 905284374"/>
           <p:cNvSpPr/>
           <p:nvPr/>
         </p:nvSpPr>
@@ -9227,7 +9173,7 @@
       </p:sp>
       <p:sp>
         <p:nvSpPr>
-          <p:cNvPr id="1103001713" name="ZoneTexte 1440859034"/>
+          <p:cNvPr id="466358085" name="ZoneTexte 1440859034"/>
           <p:cNvSpPr txBox="1"/>
           <p:nvPr/>
         </p:nvSpPr>
@@ -9266,7 +9212,7 @@
       </p:sp>
       <p:sp>
         <p:nvSpPr>
-          <p:cNvPr id="1866177301" name="Flèche : pentagone 2055848356"/>
+          <p:cNvPr id="900618495" name="Flèche : pentagone 2055848356"/>
           <p:cNvSpPr/>
           <p:nvPr/>
         </p:nvSpPr>
@@ -9311,7 +9257,7 @@
       </p:sp>
       <p:sp>
         <p:nvSpPr>
-          <p:cNvPr id="39766193" name="Flèche : pentagone 1980093981"/>
+          <p:cNvPr id="540669760" name="Flèche : pentagone 1980093981"/>
           <p:cNvSpPr/>
           <p:nvPr/>
         </p:nvSpPr>
@@ -9356,7 +9302,7 @@
       </p:sp>
       <p:sp>
         <p:nvSpPr>
-          <p:cNvPr id="1975360642" name="Flèche : pentagone 905284374"/>
+          <p:cNvPr id="644611589" name="Flèche : pentagone 905284374"/>
           <p:cNvSpPr/>
           <p:nvPr/>
         </p:nvSpPr>
@@ -9401,7 +9347,7 @@
       </p:sp>
       <p:sp>
         <p:nvSpPr>
-          <p:cNvPr id="361245199" name="ZoneTexte 1440859034"/>
+          <p:cNvPr id="1911182902" name="ZoneTexte 1440859034"/>
           <p:cNvSpPr txBox="1"/>
           <p:nvPr/>
         </p:nvSpPr>
@@ -9440,7 +9386,7 @@
       </p:sp>
       <p:sp>
         <p:nvSpPr>
-          <p:cNvPr id="649955242" name=""/>
+          <p:cNvPr id="867304022" name=""/>
           <p:cNvSpPr txBox="1"/>
           <p:nvPr/>
         </p:nvSpPr>
@@ -9604,7 +9550,7 @@
       </p:sp>
       <p:sp>
         <p:nvSpPr>
-          <p:cNvPr id="703144746" name=""/>
+          <p:cNvPr id="990033117" name=""/>
           <p:cNvSpPr txBox="1"/>
           <p:nvPr/>
         </p:nvSpPr>
@@ -9768,7 +9714,7 @@
       </p:sp>
       <p:sp>
         <p:nvSpPr>
-          <p:cNvPr id="990767537" name=""/>
+          <p:cNvPr id="2052020826" name=""/>
           <p:cNvSpPr txBox="1"/>
           <p:nvPr/>
         </p:nvSpPr>
@@ -9965,7 +9911,7 @@
       </p:grpSpPr>
       <p:sp>
         <p:nvSpPr>
-          <p:cNvPr id="649340963" name=""/>
+          <p:cNvPr id="1589547125" name=""/>
           <p:cNvSpPr/>
           <p:nvPr/>
         </p:nvSpPr>
@@ -10008,7 +9954,7 @@
       </p:sp>
       <p:sp>
         <p:nvSpPr>
-          <p:cNvPr id="1472128280" name=""/>
+          <p:cNvPr id="657258373" name=""/>
           <p:cNvSpPr txBox="1"/>
           <p:nvPr/>
         </p:nvSpPr>
@@ -10074,7 +10020,7 @@
       </p:sp>
       <p:cxnSp>
         <p:nvCxnSpPr>
-          <p:cNvPr id="1869473795" name="Connecteur droit 1568760680"/>
+          <p:cNvPr id="2076048455" name="Connecteur droit 1568760680"/>
           <p:cNvCxnSpPr/>
           <p:nvPr/>
         </p:nvCxnSpPr>
@@ -10116,7 +10062,7 @@
       </p:cxnSp>
       <p:sp>
         <p:nvSpPr>
-          <p:cNvPr id="963456314" name="ZoneTexte 1868728971"/>
+          <p:cNvPr id="332779699" name="ZoneTexte 1868728971"/>
           <p:cNvSpPr txBox="1"/>
           <p:nvPr/>
         </p:nvSpPr>
@@ -10156,7 +10102,7 @@
       </p:sp>
       <p:cxnSp>
         <p:nvCxnSpPr>
-          <p:cNvPr id="1942770612" name="Connecteur droit 806540798"/>
+          <p:cNvPr id="849235761" name="Connecteur droit 806540798"/>
           <p:cNvCxnSpPr/>
           <p:nvPr/>
         </p:nvCxnSpPr>
@@ -10198,7 +10144,7 @@
       </p:cxnSp>
       <p:sp>
         <p:nvSpPr>
-          <p:cNvPr id="442438207" name="ZoneTexte 406616703"/>
+          <p:cNvPr id="1212292529" name="ZoneTexte 406616703"/>
           <p:cNvSpPr txBox="1"/>
           <p:nvPr/>
         </p:nvSpPr>
@@ -10238,7 +10184,7 @@
       </p:sp>
       <p:sp>
         <p:nvSpPr>
-          <p:cNvPr id="1470196465" name="ZoneTexte 1302587497"/>
+          <p:cNvPr id="1243223720" name="ZoneTexte 1302587497"/>
           <p:cNvSpPr txBox="1"/>
           <p:nvPr/>
         </p:nvSpPr>
@@ -10442,7 +10388,7 @@
       </p:sp>
       <p:sp>
         <p:nvSpPr>
-          <p:cNvPr id="1045209498" name="Rectangle 38344096"/>
+          <p:cNvPr id="841561227" name="Rectangle 38344096"/>
           <p:cNvSpPr/>
           <p:nvPr/>
         </p:nvSpPr>
@@ -10482,7 +10428,7 @@
       </p:sp>
       <p:sp>
         <p:nvSpPr>
-          <p:cNvPr id="1832024674" name="ZoneTexte 1075280509"/>
+          <p:cNvPr id="1355090274" name="ZoneTexte 1075280509"/>
           <p:cNvSpPr txBox="1"/>
           <p:nvPr/>
         </p:nvSpPr>
@@ -10555,7 +10501,7 @@
       </p:sp>
       <p:sp>
         <p:nvSpPr>
-          <p:cNvPr id="481891686" name="ZoneTexte 226284734"/>
+          <p:cNvPr id="2012799497" name="ZoneTexte 226284734"/>
           <p:cNvSpPr txBox="1"/>
           <p:nvPr/>
         </p:nvSpPr>
@@ -10628,7 +10574,7 @@
       </p:sp>
       <p:sp>
         <p:nvSpPr>
-          <p:cNvPr id="87213872" name="ZoneTexte 162158187"/>
+          <p:cNvPr id="481263249" name="ZoneTexte 162158187"/>
           <p:cNvSpPr txBox="1"/>
           <p:nvPr/>
         </p:nvSpPr>
@@ -10678,7 +10624,7 @@
       </p:sp>
       <p:sp>
         <p:nvSpPr>
-          <p:cNvPr id="686315122" name="Rectangle : avec coins arrondis en haut 1452601499"/>
+          <p:cNvPr id="665404061" name="Rectangle : avec coins arrondis en haut 1452601499"/>
           <p:cNvSpPr/>
           <p:nvPr/>
         </p:nvSpPr>
@@ -10721,7 +10667,7 @@
       </p:sp>
       <p:sp>
         <p:nvSpPr>
-          <p:cNvPr id="888710639" name="Rectangle : avec coins arrondis en haut 1782110635"/>
+          <p:cNvPr id="1516003078" name="Rectangle : avec coins arrondis en haut 1782110635"/>
           <p:cNvSpPr/>
           <p:nvPr/>
         </p:nvSpPr>
@@ -10767,7 +10713,7 @@
       </p:sp>
       <p:sp>
         <p:nvSpPr>
-          <p:cNvPr id="1401017521" name="Rectangle : avec coins arrondis en haut 945118596"/>
+          <p:cNvPr id="1769615234" name="Rectangle : avec coins arrondis en haut 945118596"/>
           <p:cNvSpPr/>
           <p:nvPr/>
         </p:nvSpPr>
@@ -10813,7 +10759,7 @@
       </p:sp>
       <p:sp>
         <p:nvSpPr>
-          <p:cNvPr id="106125392" name=""/>
+          <p:cNvPr id="1615022777" name=""/>
           <p:cNvSpPr/>
           <p:nvPr/>
         </p:nvSpPr>
@@ -10855,7 +10801,7 @@
       </p:sp>
       <p:sp>
         <p:nvSpPr>
-          <p:cNvPr id="1560802628" name=""/>
+          <p:cNvPr id="392219449" name=""/>
           <p:cNvSpPr txBox="1"/>
           <p:nvPr/>
         </p:nvSpPr>
@@ -10895,7 +10841,7 @@
       </p:sp>
       <p:sp>
         <p:nvSpPr>
-          <p:cNvPr id="1307891382" name=""/>
+          <p:cNvPr id="663718787" name=""/>
           <p:cNvSpPr/>
           <p:nvPr/>
         </p:nvSpPr>
@@ -10966,7 +10912,7 @@
       </p:sp>
       <p:sp>
         <p:nvSpPr>
-          <p:cNvPr id="622747174" name=""/>
+          <p:cNvPr id="370804005" name=""/>
           <p:cNvSpPr txBox="1"/>
           <p:nvPr/>
         </p:nvSpPr>
@@ -11003,7 +10949,7 @@
       </p:sp>
       <p:sp>
         <p:nvSpPr>
-          <p:cNvPr id="1023033709" name=""/>
+          <p:cNvPr id="2118689286" name=""/>
           <p:cNvSpPr txBox="1"/>
           <p:nvPr/>
         </p:nvSpPr>
@@ -11237,7 +11183,7 @@
       </p:sp>
       <p:sp>
         <p:nvSpPr>
-          <p:cNvPr id="1706113551" name=""/>
+          <p:cNvPr id="2133854576" name=""/>
           <p:cNvSpPr txBox="1"/>
           <p:nvPr/>
         </p:nvSpPr>
@@ -11516,7 +11462,7 @@
       </p:sp>
       <p:sp>
         <p:nvSpPr>
-          <p:cNvPr id="846902410" name=""/>
+          <p:cNvPr id="2031695712" name=""/>
           <p:cNvSpPr txBox="1"/>
           <p:nvPr/>
         </p:nvSpPr>
@@ -11907,7 +11853,7 @@
       </p:sp>
       <p:sp>
         <p:nvSpPr>
-          <p:cNvPr id="1117853446" name=""/>
+          <p:cNvPr id="138702694" name=""/>
           <p:cNvSpPr txBox="1"/>
           <p:nvPr/>
         </p:nvSpPr>
@@ -12298,7 +12244,7 @@
       </p:sp>
       <p:sp>
         <p:nvSpPr>
-          <p:cNvPr id="1180704755" name=""/>
+          <p:cNvPr id="1477642555" name=""/>
           <p:cNvSpPr txBox="1"/>
           <p:nvPr/>
         </p:nvSpPr>
@@ -12689,7 +12635,7 @@
       </p:sp>
       <p:sp>
         <p:nvSpPr>
-          <p:cNvPr id="1934078725" name=""/>
+          <p:cNvPr id="1328735186" name=""/>
           <p:cNvSpPr txBox="1"/>
           <p:nvPr/>
         </p:nvSpPr>
@@ -13080,7 +13026,7 @@
       </p:sp>
       <p:sp>
         <p:nvSpPr>
-          <p:cNvPr id="936898628" name=""/>
+          <p:cNvPr id="2023199793" name=""/>
           <p:cNvSpPr txBox="1"/>
           <p:nvPr/>
         </p:nvSpPr>
@@ -13471,7 +13417,7 @@
       </p:sp>
       <p:sp>
         <p:nvSpPr>
-          <p:cNvPr id="1373832090" name=""/>
+          <p:cNvPr id="1573270285" name=""/>
           <p:cNvSpPr txBox="1"/>
           <p:nvPr/>
         </p:nvSpPr>
@@ -13862,7 +13808,7 @@
       </p:sp>
       <p:sp>
         <p:nvSpPr>
-          <p:cNvPr id="1654578693" name=""/>
+          <p:cNvPr id="698945592" name=""/>
           <p:cNvSpPr txBox="1"/>
           <p:nvPr/>
         </p:nvSpPr>
@@ -14253,7 +14199,7 @@
       </p:sp>
       <p:sp>
         <p:nvSpPr>
-          <p:cNvPr id="930780351" name=""/>
+          <p:cNvPr id="30497442" name=""/>
           <p:cNvSpPr txBox="1"/>
           <p:nvPr/>
         </p:nvSpPr>
@@ -14644,7 +14590,7 @@
       </p:sp>
       <p:sp>
         <p:nvSpPr>
-          <p:cNvPr id="1786403741" name=""/>
+          <p:cNvPr id="1265926190" name=""/>
           <p:cNvSpPr txBox="1"/>
           <p:nvPr/>
         </p:nvSpPr>
@@ -15035,7 +14981,7 @@
       </p:sp>
       <p:sp>
         <p:nvSpPr>
-          <p:cNvPr id="1302681143" name=""/>
+          <p:cNvPr id="1106888677" name=""/>
           <p:cNvSpPr txBox="1"/>
           <p:nvPr/>
         </p:nvSpPr>
@@ -15426,7 +15372,7 @@
       </p:sp>
       <p:sp>
         <p:nvSpPr>
-          <p:cNvPr id="1586802554" name=""/>
+          <p:cNvPr id="554333878" name=""/>
           <p:cNvSpPr txBox="1"/>
           <p:nvPr/>
         </p:nvSpPr>
@@ -15817,7 +15763,7 @@
       </p:sp>
       <p:sp>
         <p:nvSpPr>
-          <p:cNvPr id="931570151" name=""/>
+          <p:cNvPr id="1426604268" name=""/>
           <p:cNvSpPr txBox="1"/>
           <p:nvPr/>
         </p:nvSpPr>
@@ -16208,7 +16154,7 @@
       </p:sp>
       <p:sp>
         <p:nvSpPr>
-          <p:cNvPr id="1322673137" name=""/>
+          <p:cNvPr id="1254178923" name=""/>
           <p:cNvSpPr txBox="1"/>
           <p:nvPr/>
         </p:nvSpPr>
@@ -16599,7 +16545,7 @@
       </p:sp>
       <p:sp>
         <p:nvSpPr>
-          <p:cNvPr id="391881892" name=""/>
+          <p:cNvPr id="1227957535" name=""/>
           <p:cNvSpPr txBox="1"/>
           <p:nvPr/>
         </p:nvSpPr>
@@ -16990,7 +16936,7 @@
       </p:sp>
       <p:sp>
         <p:nvSpPr>
-          <p:cNvPr id="1397390377" name=""/>
+          <p:cNvPr id="1969757910" name=""/>
           <p:cNvSpPr txBox="1"/>
           <p:nvPr/>
         </p:nvSpPr>
@@ -17148,7 +17094,7 @@
       </p:sp>
       <p:cxnSp>
         <p:nvCxnSpPr>
-          <p:cNvPr id="1900037677" name="Connecteur droit 806540798"/>
+          <p:cNvPr id="524023175" name="Connecteur droit 806540798"/>
           <p:cNvCxnSpPr/>
           <p:nvPr/>
         </p:nvCxnSpPr>
@@ -17190,7 +17136,7 @@
       </p:cxnSp>
       <p:sp>
         <p:nvSpPr>
-          <p:cNvPr id="1524289168" name="ZoneTexte 406616703"/>
+          <p:cNvPr id="1616566078" name="ZoneTexte 406616703"/>
           <p:cNvSpPr txBox="1"/>
           <p:nvPr/>
         </p:nvSpPr>
@@ -17230,7 +17176,7 @@
       </p:sp>
       <p:sp>
         <p:nvSpPr>
-          <p:cNvPr id="1698743288" name=""/>
+          <p:cNvPr id="231002670" name=""/>
           <p:cNvSpPr txBox="1"/>
           <p:nvPr/>
         </p:nvSpPr>
@@ -17329,7 +17275,7 @@
       </p:grpSpPr>
       <p:cxnSp>
         <p:nvCxnSpPr>
-          <p:cNvPr id="1193577371" name="Connecteur droit 266926011"/>
+          <p:cNvPr id="126098952" name="Connecteur droit 266926011"/>
           <p:cNvCxnSpPr/>
           <p:nvPr/>
         </p:nvCxnSpPr>
@@ -17371,7 +17317,7 @@
       </p:cxnSp>
       <p:sp>
         <p:nvSpPr>
-          <p:cNvPr id="1186865153" name="ZoneTexte 1043763612"/>
+          <p:cNvPr id="174765529" name="ZoneTexte 1043763612"/>
           <p:cNvSpPr txBox="1"/>
           <p:nvPr/>
         </p:nvSpPr>
@@ -17411,7 +17357,7 @@
       </p:sp>
       <p:cxnSp>
         <p:nvCxnSpPr>
-          <p:cNvPr id="403079097" name="Connecteur droit 1586327141"/>
+          <p:cNvPr id="1241821866" name="Connecteur droit 1586327141"/>
           <p:cNvCxnSpPr/>
           <p:nvPr/>
         </p:nvCxnSpPr>
@@ -17454,7 +17400,7 @@
       </p:cxnSp>
       <p:sp>
         <p:nvSpPr>
-          <p:cNvPr id="805043982" name="ZoneTexte 1691387439"/>
+          <p:cNvPr id="1885052967" name="ZoneTexte 1691387439"/>
           <p:cNvSpPr txBox="1"/>
           <p:nvPr/>
         </p:nvSpPr>
@@ -17494,7 +17440,7 @@
       </p:sp>
       <p:cxnSp>
         <p:nvCxnSpPr>
-          <p:cNvPr id="1320328720" name="Connecteur droit 1743707585"/>
+          <p:cNvPr id="1944247821" name="Connecteur droit 1743707585"/>
           <p:cNvCxnSpPr/>
           <p:nvPr/>
         </p:nvCxnSpPr>
@@ -17537,7 +17483,7 @@
       </p:cxnSp>
       <p:sp>
         <p:nvSpPr>
-          <p:cNvPr id="550402714" name="ZoneTexte 1503300725"/>
+          <p:cNvPr id="2111962080" name="ZoneTexte 1503300725"/>
           <p:cNvSpPr txBox="1"/>
           <p:nvPr/>
         </p:nvSpPr>
@@ -17619,7 +17565,7 @@
       </p:sp>
       <p:sp>
         <p:nvSpPr>
-          <p:cNvPr id="1362406254" name="Rectangle : avec coins arrondis en haut 1151560973"/>
+          <p:cNvPr id="1295557076" name="Rectangle : avec coins arrondis en haut 1151560973"/>
           <p:cNvSpPr/>
           <p:nvPr/>
         </p:nvSpPr>
@@ -17665,7 +17611,7 @@
       </p:sp>
       <p:sp>
         <p:nvSpPr>
-          <p:cNvPr id="653832836" name="Flèche : pentagone 1610574377"/>
+          <p:cNvPr id="783214497" name="Flèche : pentagone 1610574377"/>
           <p:cNvSpPr/>
           <p:nvPr/>
         </p:nvSpPr>
@@ -17710,7 +17656,7 @@
       </p:sp>
       <p:sp>
         <p:nvSpPr>
-          <p:cNvPr id="1253625456" name="Flèche : pentagone 463861063"/>
+          <p:cNvPr id="531035494" name="Flèche : pentagone 463861063"/>
           <p:cNvSpPr/>
           <p:nvPr/>
         </p:nvSpPr>
@@ -17755,7 +17701,7 @@
       </p:sp>
       <p:sp>
         <p:nvSpPr>
-          <p:cNvPr id="2117571115" name="Flèche : pentagone 272004907"/>
+          <p:cNvPr id="1560761990" name="Flèche : pentagone 272004907"/>
           <p:cNvSpPr/>
           <p:nvPr/>
         </p:nvSpPr>
@@ -17800,7 +17746,7 @@
       </p:sp>
       <p:sp>
         <p:nvSpPr>
-          <p:cNvPr id="1218077280" name="Flèche : pentagone 28174069"/>
+          <p:cNvPr id="143693350" name="Flèche : pentagone 28174069"/>
           <p:cNvSpPr/>
           <p:nvPr/>
         </p:nvSpPr>
@@ -17845,7 +17791,7 @@
       </p:sp>
       <p:sp>
         <p:nvSpPr>
-          <p:cNvPr id="625473441" name="Flèche : pentagone 978127220"/>
+          <p:cNvPr id="629186780" name="Flèche : pentagone 978127220"/>
           <p:cNvSpPr/>
           <p:nvPr/>
         </p:nvSpPr>
@@ -17890,7 +17836,7 @@
       </p:sp>
       <p:sp>
         <p:nvSpPr>
-          <p:cNvPr id="83014463" name="ZoneTexte 1693594013"/>
+          <p:cNvPr id="2111811090" name="ZoneTexte 1693594013"/>
           <p:cNvSpPr txBox="1"/>
           <p:nvPr/>
         </p:nvSpPr>
@@ -18241,7 +18187,7 @@
       </p:sp>
       <p:sp>
         <p:nvSpPr>
-          <p:cNvPr id="1541496191" name="ZoneTexte 1975797288"/>
+          <p:cNvPr id="538453532" name="ZoneTexte 1975797288"/>
           <p:cNvSpPr txBox="1"/>
           <p:nvPr/>
         </p:nvSpPr>
@@ -18281,7 +18227,7 @@
       </p:sp>
       <p:sp>
         <p:nvSpPr>
-          <p:cNvPr id="770366251" name="ZoneTexte 2064865984"/>
+          <p:cNvPr id="1644733668" name="ZoneTexte 2064865984"/>
           <p:cNvSpPr txBox="1"/>
           <p:nvPr/>
         </p:nvSpPr>
@@ -18546,7 +18492,7 @@
       </p:sp>
       <p:sp>
         <p:nvSpPr>
-          <p:cNvPr id="1154887250" name="ZoneTexte 1387173154"/>
+          <p:cNvPr id="1021455280" name="ZoneTexte 1387173154"/>
           <p:cNvSpPr txBox="1"/>
           <p:nvPr/>
         </p:nvSpPr>
@@ -18898,14 +18844,14 @@
       </p:sp>
       <p:sp>
         <p:nvSpPr>
-          <p:cNvPr id="831132755" name="ZoneTexte 523755832"/>
+          <p:cNvPr id="837886643" name="ZoneTexte 523755832"/>
           <p:cNvSpPr txBox="1"/>
           <p:nvPr/>
         </p:nvSpPr>
         <p:spPr bwMode="auto">
           <a:xfrm flipH="0" flipV="0">
             <a:off x="4180723" y="2883555"/>
-            <a:ext cx="2714166" cy="2469239"/>
+            <a:ext cx="2714166" cy="2469238"/>
           </a:xfrm>
           <a:prstGeom prst="rect">
             <a:avLst/>
@@ -19352,7 +19298,7 @@
       </p:sp>
       <p:cxnSp>
         <p:nvCxnSpPr>
-          <p:cNvPr id="1304321660" name="Connecteur droit 2085669542"/>
+          <p:cNvPr id="1150637642" name="Connecteur droit 2085669542"/>
           <p:cNvCxnSpPr/>
           <p:nvPr/>
         </p:nvCxnSpPr>
@@ -19395,7 +19341,7 @@
       </p:cxnSp>
       <p:sp>
         <p:nvSpPr>
-          <p:cNvPr id="1446448137" name="ZoneTexte 34398067"/>
+          <p:cNvPr id="596973147" name="ZoneTexte 34398067"/>
           <p:cNvSpPr txBox="1"/>
           <p:nvPr/>
         </p:nvSpPr>
@@ -19438,7 +19384,7 @@
       </p:sp>
       <p:sp>
         <p:nvSpPr>
-          <p:cNvPr id="1510524716" name="ZoneTexte 273581705"/>
+          <p:cNvPr id="1760055459" name="ZoneTexte 273581705"/>
           <p:cNvSpPr txBox="1"/>
           <p:nvPr/>
         </p:nvSpPr>
@@ -19736,7 +19682,7 @@
       </p:sp>
       <p:sp>
         <p:nvSpPr>
-          <p:cNvPr id="989145323" name="ZoneTexte 1727393832"/>
+          <p:cNvPr id="1478362665" name="ZoneTexte 1727393832"/>
           <p:cNvSpPr txBox="1"/>
           <p:nvPr/>
         </p:nvSpPr>
@@ -19778,7 +19724,7 @@
       </p:sp>
       <p:sp>
         <p:nvSpPr>
-          <p:cNvPr id="2123010582" name="ZoneTexte 504516740"/>
+          <p:cNvPr id="127909586" name="ZoneTexte 504516740"/>
           <p:cNvSpPr txBox="1"/>
           <p:nvPr/>
         </p:nvSpPr>
@@ -19820,7 +19766,7 @@
       </p:sp>
       <p:sp>
         <p:nvSpPr>
-          <p:cNvPr id="1375254504" name="ZoneTexte 1"/>
+          <p:cNvPr id="2092722964" name="ZoneTexte 1"/>
           <p:cNvSpPr txBox="1"/>
           <p:nvPr/>
         </p:nvSpPr>
@@ -21283,7 +21229,7 @@
       </p:sp>
       <p:sp>
         <p:nvSpPr>
-          <p:cNvPr id="886135028" name="ZoneTexte 2"/>
+          <p:cNvPr id="679305318" name="ZoneTexte 2"/>
           <p:cNvSpPr txBox="1"/>
           <p:nvPr/>
         </p:nvSpPr>
@@ -21821,7 +21767,7 @@
       </p:sp>
       <p:sp>
         <p:nvSpPr>
-          <p:cNvPr id="1464779107" name=""/>
+          <p:cNvPr id="1129361454" name=""/>
           <p:cNvSpPr/>
           <p:nvPr/>
         </p:nvSpPr>
@@ -21861,7 +21807,7 @@
       </p:sp>
       <p:sp>
         <p:nvSpPr>
-          <p:cNvPr id="1311667384" name="Rectangle : avec coins arrondis en haut 1151560973"/>
+          <p:cNvPr id="1436133240" name="Rectangle : avec coins arrondis en haut 1151560973"/>
           <p:cNvSpPr/>
           <p:nvPr/>
         </p:nvSpPr>
@@ -21909,7 +21855,7 @@
       </p:sp>
       <p:sp>
         <p:nvSpPr>
-          <p:cNvPr id="1842018597" name=""/>
+          <p:cNvPr id="2116743757" name=""/>
           <p:cNvSpPr/>
           <p:nvPr/>
         </p:nvSpPr>
@@ -21949,7 +21895,7 @@
       </p:sp>
       <p:sp>
         <p:nvSpPr>
-          <p:cNvPr id="1259413165" name="Rectangle : avec coins arrondis en haut 1151560973"/>
+          <p:cNvPr id="1967023357" name="Rectangle : avec coins arrondis en haut 1151560973"/>
           <p:cNvSpPr/>
           <p:nvPr/>
         </p:nvSpPr>
@@ -21997,7 +21943,7 @@
       </p:sp>
       <p:sp>
         <p:nvSpPr>
-          <p:cNvPr id="690763686" name=""/>
+          <p:cNvPr id="381619709" name=""/>
           <p:cNvSpPr/>
           <p:nvPr/>
         </p:nvSpPr>
@@ -22037,7 +21983,7 @@
       </p:sp>
       <p:sp>
         <p:nvSpPr>
-          <p:cNvPr id="532608990" name="Rectangle : avec coins arrondis en haut 1151560973"/>
+          <p:cNvPr id="1860510733" name="Rectangle : avec coins arrondis en haut 1151560973"/>
           <p:cNvSpPr/>
           <p:nvPr/>
         </p:nvSpPr>
@@ -22085,7 +22031,7 @@
       </p:sp>
       <p:sp>
         <p:nvSpPr>
-          <p:cNvPr id="2073668016" name=""/>
+          <p:cNvPr id="1041842579" name=""/>
           <p:cNvSpPr txBox="1"/>
           <p:nvPr/>
         </p:nvSpPr>
@@ -22150,7 +22096,7 @@
       </p:sp>
       <p:sp>
         <p:nvSpPr>
-          <p:cNvPr id="21417886" name=""/>
+          <p:cNvPr id="53779348" name=""/>
           <p:cNvSpPr txBox="1"/>
           <p:nvPr/>
         </p:nvSpPr>
@@ -22279,7 +22225,7 @@
       </p:sp>
       <p:sp>
         <p:nvSpPr>
-          <p:cNvPr id="949367765" name=""/>
+          <p:cNvPr id="102288365" name=""/>
           <p:cNvSpPr/>
           <p:nvPr/>
         </p:nvSpPr>
@@ -22350,7 +22296,7 @@
       </p:sp>
       <p:sp>
         <p:nvSpPr>
-          <p:cNvPr id="1390174139" name="Flèche : pentagone 1610574377"/>
+          <p:cNvPr id="2121464712" name="Flèche : pentagone 1610574377"/>
           <p:cNvSpPr/>
           <p:nvPr/>
         </p:nvSpPr>
@@ -22395,7 +22341,7 @@
       </p:sp>
       <p:sp>
         <p:nvSpPr>
-          <p:cNvPr id="137263205" name="Flèche : pentagone 463861063"/>
+          <p:cNvPr id="415551053" name="Flèche : pentagone 463861063"/>
           <p:cNvSpPr/>
           <p:nvPr/>
         </p:nvSpPr>
@@ -22440,7 +22386,7 @@
       </p:sp>
       <p:sp>
         <p:nvSpPr>
-          <p:cNvPr id="754414562" name="Flèche : pentagone 272004907"/>
+          <p:cNvPr id="1323541798" name="Flèche : pentagone 272004907"/>
           <p:cNvSpPr/>
           <p:nvPr/>
         </p:nvSpPr>
@@ -22518,7 +22464,7 @@
       </p:grpSpPr>
       <p:cxnSp>
         <p:nvCxnSpPr>
-          <p:cNvPr id="1493083498" name="Connecteur droit 1942366049"/>
+          <p:cNvPr id="1703297037" name="Connecteur droit 1942366049"/>
           <p:cNvCxnSpPr/>
           <p:nvPr/>
         </p:nvCxnSpPr>
@@ -22561,7 +22507,7 @@
       </p:cxnSp>
       <p:sp>
         <p:nvSpPr>
-          <p:cNvPr id="895463028" name="ZoneTexte 483029020"/>
+          <p:cNvPr id="381411601" name="ZoneTexte 483029020"/>
           <p:cNvSpPr txBox="1"/>
           <p:nvPr/>
         </p:nvSpPr>
@@ -22601,7 +22547,7 @@
       </p:sp>
       <p:cxnSp>
         <p:nvCxnSpPr>
-          <p:cNvPr id="1355088794" name="Connecteur droit 626166318"/>
+          <p:cNvPr id="261448022" name="Connecteur droit 626166318"/>
           <p:cNvCxnSpPr/>
           <p:nvPr/>
         </p:nvCxnSpPr>
@@ -22644,7 +22590,7 @@
       </p:cxnSp>
       <p:sp>
         <p:nvSpPr>
-          <p:cNvPr id="723878163" name="ZoneTexte 2021489157"/>
+          <p:cNvPr id="1268219239" name="ZoneTexte 2021489157"/>
           <p:cNvSpPr txBox="1"/>
           <p:nvPr/>
         </p:nvSpPr>
@@ -22684,7 +22630,7 @@
       </p:sp>
       <p:cxnSp>
         <p:nvCxnSpPr>
-          <p:cNvPr id="441884715" name="Connecteur droit 1991074862"/>
+          <p:cNvPr id="1364215175" name="Connecteur droit 1991074862"/>
           <p:cNvCxnSpPr/>
           <p:nvPr/>
         </p:nvCxnSpPr>
@@ -22727,7 +22673,7 @@
       </p:cxnSp>
       <p:sp>
         <p:nvSpPr>
-          <p:cNvPr id="1217237277" name="ZoneTexte 1094835336"/>
+          <p:cNvPr id="1910881816" name="ZoneTexte 1094835336"/>
           <p:cNvSpPr txBox="1"/>
           <p:nvPr/>
         </p:nvSpPr>
@@ -22809,7 +22755,7 @@
       </p:sp>
       <p:sp>
         <p:nvSpPr>
-          <p:cNvPr id="886705832" name="Rectangle : avec coins arrondis en haut 1574209032"/>
+          <p:cNvPr id="910818605" name="Rectangle : avec coins arrondis en haut 1574209032"/>
           <p:cNvSpPr/>
           <p:nvPr/>
         </p:nvSpPr>
@@ -22855,7 +22801,7 @@
       </p:sp>
       <p:sp>
         <p:nvSpPr>
-          <p:cNvPr id="2027719344" name="Flèche : pentagone 521086653"/>
+          <p:cNvPr id="1672873982" name="Flèche : pentagone 521086653"/>
           <p:cNvSpPr/>
           <p:nvPr/>
         </p:nvSpPr>
@@ -22900,7 +22846,7 @@
       </p:sp>
       <p:sp>
         <p:nvSpPr>
-          <p:cNvPr id="679322352" name="Flèche : pentagone 1507310733"/>
+          <p:cNvPr id="70605931" name="Flèche : pentagone 1507310733"/>
           <p:cNvSpPr/>
           <p:nvPr/>
         </p:nvSpPr>
@@ -22945,7 +22891,7 @@
       </p:sp>
       <p:sp>
         <p:nvSpPr>
-          <p:cNvPr id="17273250" name="Flèche : pentagone 732388424"/>
+          <p:cNvPr id="505974203" name="Flèche : pentagone 732388424"/>
           <p:cNvSpPr/>
           <p:nvPr/>
         </p:nvSpPr>
@@ -22990,7 +22936,7 @@
       </p:sp>
       <p:sp>
         <p:nvSpPr>
-          <p:cNvPr id="372654759" name="Flèche : pentagone 326874465"/>
+          <p:cNvPr id="1321002962" name="Flèche : pentagone 326874465"/>
           <p:cNvSpPr/>
           <p:nvPr/>
         </p:nvSpPr>
@@ -23035,7 +22981,7 @@
       </p:sp>
       <p:sp>
         <p:nvSpPr>
-          <p:cNvPr id="1674417757" name="Flèche : pentagone 2090650957"/>
+          <p:cNvPr id="1419669556" name="Flèche : pentagone 2090650957"/>
           <p:cNvSpPr/>
           <p:nvPr/>
         </p:nvSpPr>
@@ -23080,7 +23026,7 @@
       </p:sp>
       <p:sp>
         <p:nvSpPr>
-          <p:cNvPr id="1408362641" name="ZoneTexte 1374103996"/>
+          <p:cNvPr id="1239769010" name="ZoneTexte 1374103996"/>
           <p:cNvSpPr txBox="1"/>
           <p:nvPr/>
         </p:nvSpPr>
@@ -23353,7 +23299,7 @@
       </p:sp>
       <p:sp>
         <p:nvSpPr>
-          <p:cNvPr id="628711473" name="ZoneTexte 1748705365"/>
+          <p:cNvPr id="628182176" name="ZoneTexte 1748705365"/>
           <p:cNvSpPr txBox="1"/>
           <p:nvPr/>
         </p:nvSpPr>
@@ -23393,7 +23339,7 @@
       </p:sp>
       <p:cxnSp>
         <p:nvCxnSpPr>
-          <p:cNvPr id="448164339" name="Connecteur droit 1556830908"/>
+          <p:cNvPr id="805920938" name="Connecteur droit 1556830908"/>
           <p:cNvCxnSpPr/>
           <p:nvPr/>
         </p:nvCxnSpPr>
@@ -23436,7 +23382,7 @@
       </p:cxnSp>
       <p:sp>
         <p:nvSpPr>
-          <p:cNvPr id="1828579770" name="ZoneTexte 409639257"/>
+          <p:cNvPr id="1473298752" name="ZoneTexte 409639257"/>
           <p:cNvSpPr txBox="1"/>
           <p:nvPr/>
         </p:nvSpPr>
@@ -23486,7 +23432,7 @@
       </p:sp>
       <p:sp>
         <p:nvSpPr>
-          <p:cNvPr id="1639202524" name="ZoneTexte 1168472887"/>
+          <p:cNvPr id="852062796" name="ZoneTexte 1168472887"/>
           <p:cNvSpPr txBox="1"/>
           <p:nvPr/>
         </p:nvSpPr>
@@ -23741,13 +23687,13 @@
       </p:sp>
       <p:sp>
         <p:nvSpPr>
-          <p:cNvPr id="2084709977" name="ZoneTexte 114796530"/>
+          <p:cNvPr id="1179374343" name="ZoneTexte 114796530"/>
           <p:cNvSpPr txBox="1"/>
           <p:nvPr/>
         </p:nvSpPr>
         <p:spPr bwMode="auto">
           <a:xfrm flipH="0" flipV="0">
-            <a:off x="3274359" y="2466923"/>
+            <a:off x="3274358" y="2466923"/>
             <a:ext cx="3616671" cy="3490319"/>
           </a:xfrm>
           <a:prstGeom prst="rect">
@@ -23985,7 +23931,7 @@
       </p:sp>
       <p:sp>
         <p:nvSpPr>
-          <p:cNvPr id="1369498054" name="ZoneTexte 1085068195"/>
+          <p:cNvPr id="1245940176" name="ZoneTexte 1085068195"/>
           <p:cNvSpPr txBox="1"/>
           <p:nvPr/>
         </p:nvSpPr>
@@ -24966,7 +24912,7 @@
       </p:sp>
       <p:sp>
         <p:nvSpPr>
-          <p:cNvPr id="908703098" name="Étoile : 5 branches 278736380"/>
+          <p:cNvPr id="877553407" name="Étoile : 5 branches 278736380"/>
           <p:cNvSpPr/>
           <p:nvPr/>
         </p:nvSpPr>
@@ -25013,7 +24959,7 @@
       </p:sp>
       <p:sp>
         <p:nvSpPr>
-          <p:cNvPr id="589654970" name="Étoile : 5 branches 1495350449"/>
+          <p:cNvPr id="823466386" name="Étoile : 5 branches 1495350449"/>
           <p:cNvSpPr/>
           <p:nvPr/>
         </p:nvSpPr>
@@ -25060,7 +25006,7 @@
       </p:sp>
       <p:sp>
         <p:nvSpPr>
-          <p:cNvPr id="1608805699" name="Étoile : 5 branches 79046386"/>
+          <p:cNvPr id="1373936343" name="Étoile : 5 branches 79046386"/>
           <p:cNvSpPr/>
           <p:nvPr/>
         </p:nvSpPr>
@@ -25107,7 +25053,7 @@
       </p:sp>
       <p:sp>
         <p:nvSpPr>
-          <p:cNvPr id="260759875" name="Étoile : 5 branches 749256076"/>
+          <p:cNvPr id="1463289862" name="Étoile : 5 branches 749256076"/>
           <p:cNvSpPr/>
           <p:nvPr/>
         </p:nvSpPr>
@@ -25154,7 +25100,7 @@
       </p:sp>
       <p:sp>
         <p:nvSpPr>
-          <p:cNvPr id="921331786" name="Étoile : 5 branches 411245083"/>
+          <p:cNvPr id="1907641921" name="Étoile : 5 branches 411245083"/>
           <p:cNvSpPr/>
           <p:nvPr/>
         </p:nvSpPr>
@@ -25201,7 +25147,7 @@
       </p:sp>
       <p:sp>
         <p:nvSpPr>
-          <p:cNvPr id="2143505554" name="ZoneTexte 496444952"/>
+          <p:cNvPr id="2055526541" name="ZoneTexte 496444952"/>
           <p:cNvSpPr txBox="1"/>
           <p:nvPr/>
         </p:nvSpPr>
@@ -25243,7 +25189,7 @@
       </p:sp>
       <p:sp>
         <p:nvSpPr>
-          <p:cNvPr id="1854429639" name="ZoneTexte 474433989"/>
+          <p:cNvPr id="734686717" name="ZoneTexte 474433989"/>
           <p:cNvSpPr txBox="1"/>
           <p:nvPr/>
         </p:nvSpPr>
@@ -25285,7 +25231,7 @@
       </p:sp>
       <p:sp>
         <p:nvSpPr>
-          <p:cNvPr id="1396663731" name="ZoneTexte 1"/>
+          <p:cNvPr id="2062721227" name="ZoneTexte 1"/>
           <p:cNvSpPr txBox="1"/>
           <p:nvPr/>
         </p:nvSpPr>
@@ -25386,7 +25332,7 @@
       </p:sp>
       <p:sp>
         <p:nvSpPr>
-          <p:cNvPr id="122353372" name="ZoneTexte 2"/>
+          <p:cNvPr id="1892502423" name="ZoneTexte 2"/>
           <p:cNvSpPr txBox="1"/>
           <p:nvPr/>
         </p:nvSpPr>
@@ -25504,7 +25450,7 @@
       </p:sp>
       <p:sp>
         <p:nvSpPr>
-          <p:cNvPr id="414870319" name=""/>
+          <p:cNvPr id="410336140" name=""/>
           <p:cNvSpPr/>
           <p:nvPr/>
         </p:nvSpPr>
@@ -25575,7 +25521,7 @@
       </p:sp>
       <p:sp>
         <p:nvSpPr>
-          <p:cNvPr id="434292943" name="Flèche : pentagone 1507310733"/>
+          <p:cNvPr id="1728218246" name="Flèche : pentagone 1507310733"/>
           <p:cNvSpPr/>
           <p:nvPr/>
         </p:nvSpPr>
@@ -25620,7 +25566,7 @@
       </p:sp>
       <p:sp>
         <p:nvSpPr>
-          <p:cNvPr id="2144028260" name="Flèche : pentagone 732388424"/>
+          <p:cNvPr id="1332447638" name="Flèche : pentagone 732388424"/>
           <p:cNvSpPr/>
           <p:nvPr/>
         </p:nvSpPr>
@@ -25665,7 +25611,7 @@
       </p:sp>
       <p:sp>
         <p:nvSpPr>
-          <p:cNvPr id="2085438369" name="Flèche : pentagone 326874465"/>
+          <p:cNvPr id="749636672" name="Flèche : pentagone 326874465"/>
           <p:cNvSpPr/>
           <p:nvPr/>
         </p:nvSpPr>
@@ -25743,7 +25689,7 @@
       </p:grpSpPr>
       <p:sp>
         <p:nvSpPr>
-          <p:cNvPr id="124508990" name="ZoneTexte 273581705"/>
+          <p:cNvPr id="2018721363" name="ZoneTexte 273581705"/>
           <p:cNvSpPr txBox="1"/>
           <p:nvPr/>
         </p:nvSpPr>
@@ -26041,7 +25987,7 @@
       </p:sp>
       <p:cxnSp>
         <p:nvCxnSpPr>
-          <p:cNvPr id="1675492592" name="Connecteur droit 1094832104"/>
+          <p:cNvPr id="1769948599" name="Connecteur droit 1094832104"/>
           <p:cNvCxnSpPr/>
           <p:nvPr/>
         </p:nvCxnSpPr>
@@ -26084,7 +26030,7 @@
       </p:cxnSp>
       <p:sp>
         <p:nvSpPr>
-          <p:cNvPr id="1993548398" name="ZoneTexte 2078543737"/>
+          <p:cNvPr id="358014417" name="ZoneTexte 2078543737"/>
           <p:cNvSpPr txBox="1"/>
           <p:nvPr/>
         </p:nvSpPr>
@@ -26124,7 +26070,7 @@
       </p:sp>
       <p:cxnSp>
         <p:nvCxnSpPr>
-          <p:cNvPr id="828128601" name="Connecteur droit 853743145"/>
+          <p:cNvPr id="971881137" name="Connecteur droit 853743145"/>
           <p:cNvCxnSpPr/>
           <p:nvPr/>
         </p:nvCxnSpPr>
@@ -26167,7 +26113,7 @@
       </p:cxnSp>
       <p:sp>
         <p:nvSpPr>
-          <p:cNvPr id="503213097" name="ZoneTexte 1473119298"/>
+          <p:cNvPr id="736816990" name="ZoneTexte 1473119298"/>
           <p:cNvSpPr txBox="1"/>
           <p:nvPr/>
         </p:nvSpPr>
@@ -26207,7 +26153,7 @@
       </p:sp>
       <p:cxnSp>
         <p:nvCxnSpPr>
-          <p:cNvPr id="1464825197" name="Connecteur droit 1727809509"/>
+          <p:cNvPr id="1023897724" name="Connecteur droit 1727809509"/>
           <p:cNvCxnSpPr/>
           <p:nvPr/>
         </p:nvCxnSpPr>
@@ -26250,7 +26196,7 @@
       </p:cxnSp>
       <p:sp>
         <p:nvSpPr>
-          <p:cNvPr id="2063087602" name="ZoneTexte 759238070"/>
+          <p:cNvPr id="1332244584" name="ZoneTexte 759238070"/>
           <p:cNvSpPr txBox="1"/>
           <p:nvPr/>
         </p:nvSpPr>
@@ -26325,7 +26271,7 @@
       </p:sp>
       <p:sp>
         <p:nvSpPr>
-          <p:cNvPr id="352423029" name="Rectangle : avec coins arrondis en haut 965147191"/>
+          <p:cNvPr id="569469743" name="Rectangle : avec coins arrondis en haut 965147191"/>
           <p:cNvSpPr/>
           <p:nvPr/>
         </p:nvSpPr>
@@ -26371,7 +26317,7 @@
       </p:sp>
       <p:sp>
         <p:nvSpPr>
-          <p:cNvPr id="371062124" name="Flèche : pentagone 2070329900"/>
+          <p:cNvPr id="82254189" name="Flèche : pentagone 2070329900"/>
           <p:cNvSpPr/>
           <p:nvPr/>
         </p:nvSpPr>
@@ -26416,7 +26362,7 @@
       </p:sp>
       <p:sp>
         <p:nvSpPr>
-          <p:cNvPr id="1659132468" name="Flèche : pentagone 1325137089"/>
+          <p:cNvPr id="213896741" name="Flèche : pentagone 1325137089"/>
           <p:cNvSpPr/>
           <p:nvPr/>
         </p:nvSpPr>
@@ -26461,7 +26407,7 @@
       </p:sp>
       <p:sp>
         <p:nvSpPr>
-          <p:cNvPr id="1646053965" name="Flèche : pentagone 295922856"/>
+          <p:cNvPr id="1602522266" name="Flèche : pentagone 295922856"/>
           <p:cNvSpPr/>
           <p:nvPr/>
         </p:nvSpPr>
@@ -26506,7 +26452,7 @@
       </p:sp>
       <p:sp>
         <p:nvSpPr>
-          <p:cNvPr id="46607203" name="Flèche : pentagone 1961547672"/>
+          <p:cNvPr id="2007705143" name="Flèche : pentagone 1961547672"/>
           <p:cNvSpPr/>
           <p:nvPr/>
         </p:nvSpPr>
@@ -26551,7 +26497,7 @@
       </p:sp>
       <p:sp>
         <p:nvSpPr>
-          <p:cNvPr id="837830624" name="Flèche : pentagone 1305647833"/>
+          <p:cNvPr id="1461750087" name="Flèche : pentagone 1305647833"/>
           <p:cNvSpPr/>
           <p:nvPr/>
         </p:nvSpPr>
@@ -26596,7 +26542,7 @@
       </p:sp>
       <p:sp>
         <p:nvSpPr>
-          <p:cNvPr id="540287750" name="ZoneTexte 545814566"/>
+          <p:cNvPr id="1971959834" name="ZoneTexte 545814566"/>
           <p:cNvSpPr txBox="1"/>
           <p:nvPr/>
         </p:nvSpPr>
@@ -26898,7 +26844,7 @@
       </p:sp>
       <p:sp>
         <p:nvSpPr>
-          <p:cNvPr id="2115267222" name="ZoneTexte 671978155"/>
+          <p:cNvPr id="18820238" name="ZoneTexte 671978155"/>
           <p:cNvSpPr txBox="1"/>
           <p:nvPr/>
         </p:nvSpPr>
@@ -26938,7 +26884,7 @@
       </p:sp>
       <p:cxnSp>
         <p:nvCxnSpPr>
-          <p:cNvPr id="282117764" name="Connecteur droit 637589304"/>
+          <p:cNvPr id="2005886478" name="Connecteur droit 637589304"/>
           <p:cNvCxnSpPr/>
           <p:nvPr/>
         </p:nvCxnSpPr>
@@ -26981,7 +26927,7 @@
       </p:cxnSp>
       <p:sp>
         <p:nvSpPr>
-          <p:cNvPr id="194958605" name="ZoneTexte 172075623"/>
+          <p:cNvPr id="1845610388" name="ZoneTexte 172075623"/>
           <p:cNvSpPr txBox="1"/>
           <p:nvPr/>
         </p:nvSpPr>
@@ -27031,7 +26977,7 @@
       </p:sp>
       <p:sp>
         <p:nvSpPr>
-          <p:cNvPr id="1596445687" name="ZoneTexte 1642812764"/>
+          <p:cNvPr id="1137100765" name="ZoneTexte 1642812764"/>
           <p:cNvSpPr txBox="1"/>
           <p:nvPr/>
         </p:nvSpPr>
@@ -27220,7 +27166,7 @@
       </p:sp>
       <p:sp>
         <p:nvSpPr>
-          <p:cNvPr id="2137986765" name="Étoile : 7 branches 1681961038"/>
+          <p:cNvPr id="1346673492" name="Étoile : 7 branches 1681961038"/>
           <p:cNvSpPr/>
           <p:nvPr/>
         </p:nvSpPr>
@@ -27267,7 +27213,7 @@
       </p:sp>
       <p:sp>
         <p:nvSpPr>
-          <p:cNvPr id="739125117" name="Étoile : 7 branches 1476951547"/>
+          <p:cNvPr id="906742170" name="Étoile : 7 branches 1476951547"/>
           <p:cNvSpPr/>
           <p:nvPr/>
         </p:nvSpPr>
@@ -27314,7 +27260,7 @@
       </p:sp>
       <p:sp>
         <p:nvSpPr>
-          <p:cNvPr id="2080558550" name="Étoile : 7 branches 1520826925"/>
+          <p:cNvPr id="43702731" name="Étoile : 7 branches 1520826925"/>
           <p:cNvSpPr/>
           <p:nvPr/>
         </p:nvSpPr>
@@ -27361,7 +27307,7 @@
       </p:sp>
       <p:sp>
         <p:nvSpPr>
-          <p:cNvPr id="1466534671" name="ZoneTexte 1219899073"/>
+          <p:cNvPr id="452703259" name="ZoneTexte 1219899073"/>
           <p:cNvSpPr txBox="1"/>
           <p:nvPr/>
         </p:nvSpPr>
@@ -27401,7 +27347,7 @@
       </p:sp>
       <p:sp>
         <p:nvSpPr>
-          <p:cNvPr id="256326044" name="ZoneTexte 1283574123"/>
+          <p:cNvPr id="247200246" name="ZoneTexte 1283574123"/>
           <p:cNvSpPr txBox="1"/>
           <p:nvPr/>
         </p:nvSpPr>
@@ -28406,7 +28352,7 @@
       </p:sp>
       <p:sp>
         <p:nvSpPr>
-          <p:cNvPr id="1404606091" name="ZoneTexte 790352176"/>
+          <p:cNvPr id="1937891398" name="ZoneTexte 790352176"/>
           <p:cNvSpPr txBox="1"/>
           <p:nvPr/>
         </p:nvSpPr>
@@ -28448,7 +28394,7 @@
       </p:sp>
       <p:sp>
         <p:nvSpPr>
-          <p:cNvPr id="696747448" name="ZoneTexte 2025740189"/>
+          <p:cNvPr id="1069232398" name="ZoneTexte 2025740189"/>
           <p:cNvSpPr txBox="1"/>
           <p:nvPr/>
         </p:nvSpPr>
@@ -28505,7 +28451,7 @@
       </p:sp>
       <p:sp>
         <p:nvSpPr>
-          <p:cNvPr id="168382576" name=""/>
+          <p:cNvPr id="133622732" name=""/>
           <p:cNvSpPr/>
           <p:nvPr/>
         </p:nvSpPr>
@@ -28545,7 +28491,7 @@
       </p:sp>
       <p:sp>
         <p:nvSpPr>
-          <p:cNvPr id="948932594" name="Rectangle : avec coins arrondis en haut 1151560973"/>
+          <p:cNvPr id="1133236227" name="Rectangle : avec coins arrondis en haut 1151560973"/>
           <p:cNvSpPr/>
           <p:nvPr/>
         </p:nvSpPr>
@@ -28593,7 +28539,7 @@
       </p:sp>
       <p:sp>
         <p:nvSpPr>
-          <p:cNvPr id="138699720" name=""/>
+          <p:cNvPr id="346987594" name=""/>
           <p:cNvSpPr/>
           <p:nvPr/>
         </p:nvSpPr>
@@ -28633,7 +28579,7 @@
       </p:sp>
       <p:sp>
         <p:nvSpPr>
-          <p:cNvPr id="1914390274" name="Rectangle : avec coins arrondis en haut 1151560973"/>
+          <p:cNvPr id="1465150098" name="Rectangle : avec coins arrondis en haut 1151560973"/>
           <p:cNvSpPr/>
           <p:nvPr/>
         </p:nvSpPr>
@@ -28681,7 +28627,7 @@
       </p:sp>
       <p:sp>
         <p:nvSpPr>
-          <p:cNvPr id="574655605" name=""/>
+          <p:cNvPr id="1293021410" name=""/>
           <p:cNvSpPr/>
           <p:nvPr/>
         </p:nvSpPr>
@@ -28721,7 +28667,7 @@
       </p:sp>
       <p:sp>
         <p:nvSpPr>
-          <p:cNvPr id="108376863" name="Rectangle : avec coins arrondis en haut 1151560973"/>
+          <p:cNvPr id="40011275" name="Rectangle : avec coins arrondis en haut 1151560973"/>
           <p:cNvSpPr/>
           <p:nvPr/>
         </p:nvSpPr>
@@ -28769,7 +28715,7 @@
       </p:sp>
       <p:sp>
         <p:nvSpPr>
-          <p:cNvPr id="1137491530" name=""/>
+          <p:cNvPr id="545633213" name=""/>
           <p:cNvSpPr txBox="1"/>
           <p:nvPr/>
         </p:nvSpPr>
@@ -28897,7 +28843,7 @@
       </p:sp>
       <p:sp>
         <p:nvSpPr>
-          <p:cNvPr id="1187526638" name=""/>
+          <p:cNvPr id="468587331" name=""/>
           <p:cNvSpPr txBox="1"/>
           <p:nvPr/>
         </p:nvSpPr>
@@ -29020,7 +28966,7 @@
       </p:sp>
       <p:sp>
         <p:nvSpPr>
-          <p:cNvPr id="667636083" name=""/>
+          <p:cNvPr id="2119304445" name=""/>
           <p:cNvSpPr/>
           <p:nvPr/>
         </p:nvSpPr>
@@ -29091,7 +29037,7 @@
       </p:sp>
       <p:sp>
         <p:nvSpPr>
-          <p:cNvPr id="2016103158" name="Flèche : pentagone 1325137089"/>
+          <p:cNvPr id="1589773542" name="Flèche : pentagone 1325137089"/>
           <p:cNvSpPr/>
           <p:nvPr/>
         </p:nvSpPr>
@@ -29136,7 +29082,7 @@
       </p:sp>
       <p:sp>
         <p:nvSpPr>
-          <p:cNvPr id="442934064" name="Flèche : pentagone 295922856"/>
+          <p:cNvPr id="1319282344" name="Flèche : pentagone 295922856"/>
           <p:cNvSpPr/>
           <p:nvPr/>
         </p:nvSpPr>
@@ -29181,7 +29127,7 @@
       </p:sp>
       <p:sp>
         <p:nvSpPr>
-          <p:cNvPr id="8550405" name="Flèche : pentagone 1961547672"/>
+          <p:cNvPr id="1196984250" name="Flèche : pentagone 1961547672"/>
           <p:cNvSpPr/>
           <p:nvPr/>
         </p:nvSpPr>
@@ -29259,7 +29205,7 @@
       </p:grpSpPr>
       <p:cxnSp>
         <p:nvCxnSpPr>
-          <p:cNvPr id="1225727944" name="Connecteur droit 266926011"/>
+          <p:cNvPr id="1770789650" name="Connecteur droit 266926011"/>
           <p:cNvCxnSpPr/>
           <p:nvPr/>
         </p:nvCxnSpPr>
@@ -29302,7 +29248,7 @@
       </p:cxnSp>
       <p:sp>
         <p:nvSpPr>
-          <p:cNvPr id="1230079619" name="ZoneTexte 1043763612"/>
+          <p:cNvPr id="1568777373" name="ZoneTexte 1043763612"/>
           <p:cNvSpPr txBox="1"/>
           <p:nvPr/>
         </p:nvSpPr>
@@ -29342,7 +29288,7 @@
       </p:sp>
       <p:cxnSp>
         <p:nvCxnSpPr>
-          <p:cNvPr id="1669442363" name="Connecteur droit 1586327141"/>
+          <p:cNvPr id="511008190" name="Connecteur droit 1586327141"/>
           <p:cNvCxnSpPr/>
           <p:nvPr/>
         </p:nvCxnSpPr>
@@ -29385,7 +29331,7 @@
       </p:cxnSp>
       <p:sp>
         <p:nvSpPr>
-          <p:cNvPr id="1080656279" name="ZoneTexte 1691387439"/>
+          <p:cNvPr id="178191648" name="ZoneTexte 1691387439"/>
           <p:cNvSpPr txBox="1"/>
           <p:nvPr/>
         </p:nvSpPr>
@@ -29425,7 +29371,7 @@
       </p:sp>
       <p:cxnSp>
         <p:nvCxnSpPr>
-          <p:cNvPr id="14758503" name="Connecteur droit 1743707585"/>
+          <p:cNvPr id="141858029" name="Connecteur droit 1743707585"/>
           <p:cNvCxnSpPr/>
           <p:nvPr/>
         </p:nvCxnSpPr>
@@ -29468,7 +29414,7 @@
       </p:cxnSp>
       <p:sp>
         <p:nvSpPr>
-          <p:cNvPr id="529393388" name="ZoneTexte 1503300725"/>
+          <p:cNvPr id="1494506519" name="ZoneTexte 1503300725"/>
           <p:cNvSpPr txBox="1"/>
           <p:nvPr/>
         </p:nvSpPr>
@@ -29550,7 +29496,7 @@
       </p:sp>
       <p:sp>
         <p:nvSpPr>
-          <p:cNvPr id="895475484" name="Rectangle : avec coins arrondis en haut 1151560973"/>
+          <p:cNvPr id="648337856" name="Rectangle : avec coins arrondis en haut 1151560973"/>
           <p:cNvSpPr/>
           <p:nvPr/>
         </p:nvSpPr>
@@ -29596,7 +29542,7 @@
       </p:sp>
       <p:sp>
         <p:nvSpPr>
-          <p:cNvPr id="1282288783" name="Flèche : pentagone 1610574377"/>
+          <p:cNvPr id="230607268" name="Flèche : pentagone 1610574377"/>
           <p:cNvSpPr/>
           <p:nvPr/>
         </p:nvSpPr>
@@ -29641,7 +29587,7 @@
       </p:sp>
       <p:sp>
         <p:nvSpPr>
-          <p:cNvPr id="832594763" name="Flèche : pentagone 463861063"/>
+          <p:cNvPr id="679477163" name="Flèche : pentagone 463861063"/>
           <p:cNvSpPr/>
           <p:nvPr/>
         </p:nvSpPr>
@@ -29686,7 +29632,7 @@
       </p:sp>
       <p:sp>
         <p:nvSpPr>
-          <p:cNvPr id="1901898065" name="Flèche : pentagone 272004907"/>
+          <p:cNvPr id="1895345446" name="Flèche : pentagone 272004907"/>
           <p:cNvSpPr/>
           <p:nvPr/>
         </p:nvSpPr>
@@ -29731,7 +29677,7 @@
       </p:sp>
       <p:sp>
         <p:nvSpPr>
-          <p:cNvPr id="1428868977" name="Flèche : pentagone 28174069"/>
+          <p:cNvPr id="1812502936" name="Flèche : pentagone 28174069"/>
           <p:cNvSpPr/>
           <p:nvPr/>
         </p:nvSpPr>
@@ -29776,7 +29722,7 @@
       </p:sp>
       <p:sp>
         <p:nvSpPr>
-          <p:cNvPr id="1471171947" name="Flèche : pentagone 978127220"/>
+          <p:cNvPr id="541680973" name="Flèche : pentagone 978127220"/>
           <p:cNvSpPr/>
           <p:nvPr/>
         </p:nvSpPr>
@@ -29821,7 +29767,7 @@
       </p:sp>
       <p:sp>
         <p:nvSpPr>
-          <p:cNvPr id="1127198409" name="ZoneTexte 1693594013"/>
+          <p:cNvPr id="1179566915" name="ZoneTexte 1693594013"/>
           <p:cNvSpPr txBox="1"/>
           <p:nvPr/>
         </p:nvSpPr>
@@ -30172,7 +30118,7 @@
       </p:sp>
       <p:sp>
         <p:nvSpPr>
-          <p:cNvPr id="1082181026" name="ZoneTexte 1975797288"/>
+          <p:cNvPr id="2028866682" name="ZoneTexte 1975797288"/>
           <p:cNvSpPr txBox="1"/>
           <p:nvPr/>
         </p:nvSpPr>
@@ -30212,7 +30158,7 @@
       </p:sp>
       <p:sp>
         <p:nvSpPr>
-          <p:cNvPr id="186556626" name="ZoneTexte 2064865984"/>
+          <p:cNvPr id="1857938322" name="ZoneTexte 2064865984"/>
           <p:cNvSpPr txBox="1"/>
           <p:nvPr/>
         </p:nvSpPr>
@@ -30434,14 +30380,14 @@
       </p:sp>
       <p:sp>
         <p:nvSpPr>
-          <p:cNvPr id="1620329675" name="ZoneTexte 1387173154"/>
+          <p:cNvPr id="335887386" name="ZoneTexte 1387173154"/>
           <p:cNvSpPr txBox="1"/>
           <p:nvPr/>
         </p:nvSpPr>
         <p:spPr bwMode="auto">
           <a:xfrm flipH="0" flipV="0">
-            <a:off x="1715350" y="3244245"/>
-            <a:ext cx="2470659" cy="2347319"/>
+            <a:off x="1715349" y="3244244"/>
+            <a:ext cx="2471378" cy="2347319"/>
           </a:xfrm>
           <a:prstGeom prst="rect">
             <a:avLst/>
@@ -30487,7 +30433,7 @@
                 <a:ea typeface="Arial"/>
                 <a:cs typeface="Arial"/>
               </a:rPr>
-              <a:t>C’est sous cette forme que vous ressentez plus fortement la pulsation qui bat en vous ainsi que le hurlement de la nature autour de vous. Vous devenez capable de vous enraciner au sol. Votre musculature devient plus dense, vos traits empruntent à ceux du règle végétal et votre peau se durcit comme l’écorce, limitant considérablement vos activités sociales. Votre voix est également plus rauque mais votre diction suffisante pour être compris.</a:t>
+              <a:t>C’est sous cette forme que vous ressentez plus fortement la pulsation qui bat en vous ainsi que le hurlement de la nature autour de vous. Vous devenez capable de vous enraciner au sol. Votre musculature devient plus dense, vos traits empruntent à ceux du règne végétal et votre peau se durcit comme l’écorce, limitant considérablement vos activités sociales. Votre voix est également plus rauque mais votre diction suffisante pour être compris.</a:t>
             </a:r>
             <a:endParaRPr lang="fr-FR" sz="800" b="0" i="0" u="none" strike="noStrike" cap="none" spc="0">
               <a:solidFill>
@@ -30686,7 +30632,7 @@
       </p:sp>
       <p:sp>
         <p:nvSpPr>
-          <p:cNvPr id="1866792999" name="ZoneTexte 523755832"/>
+          <p:cNvPr id="36264117" name="ZoneTexte 523755832"/>
           <p:cNvSpPr txBox="1"/>
           <p:nvPr/>
         </p:nvSpPr>
@@ -30946,7 +30892,7 @@
       </p:sp>
       <p:cxnSp>
         <p:nvCxnSpPr>
-          <p:cNvPr id="465764746" name="Connecteur droit 2085669542"/>
+          <p:cNvPr id="350699643" name="Connecteur droit 2085669542"/>
           <p:cNvCxnSpPr/>
           <p:nvPr/>
         </p:nvCxnSpPr>
@@ -30989,7 +30935,7 @@
       </p:cxnSp>
       <p:sp>
         <p:nvSpPr>
-          <p:cNvPr id="1807619602" name="ZoneTexte 34398067"/>
+          <p:cNvPr id="627249124" name="ZoneTexte 34398067"/>
           <p:cNvSpPr txBox="1"/>
           <p:nvPr/>
         </p:nvSpPr>
@@ -31032,7 +30978,7 @@
       </p:sp>
       <p:sp>
         <p:nvSpPr>
-          <p:cNvPr id="1205785519" name="ZoneTexte 273581705"/>
+          <p:cNvPr id="916669655" name="ZoneTexte 273581705"/>
           <p:cNvSpPr txBox="1"/>
           <p:nvPr/>
         </p:nvSpPr>
@@ -31330,7 +31276,7 @@
       </p:sp>
       <p:sp>
         <p:nvSpPr>
-          <p:cNvPr id="1410873348" name="ZoneTexte 1727393832"/>
+          <p:cNvPr id="579239958" name="ZoneTexte 1727393832"/>
           <p:cNvSpPr txBox="1"/>
           <p:nvPr/>
         </p:nvSpPr>
@@ -31372,7 +31318,7 @@
       </p:sp>
       <p:sp>
         <p:nvSpPr>
-          <p:cNvPr id="1583381989" name="ZoneTexte 504516740"/>
+          <p:cNvPr id="1218109938" name="ZoneTexte 504516740"/>
           <p:cNvSpPr txBox="1"/>
           <p:nvPr/>
         </p:nvSpPr>
@@ -31414,7 +31360,7 @@
       </p:sp>
       <p:sp>
         <p:nvSpPr>
-          <p:cNvPr id="1066929032" name="ZoneTexte 1"/>
+          <p:cNvPr id="1458619185" name="ZoneTexte 1"/>
           <p:cNvSpPr txBox="1"/>
           <p:nvPr/>
         </p:nvSpPr>
@@ -31525,7 +31471,7 @@
       </p:sp>
       <p:sp>
         <p:nvSpPr>
-          <p:cNvPr id="750078625" name="ZoneTexte 2"/>
+          <p:cNvPr id="396629142" name="ZoneTexte 2"/>
           <p:cNvSpPr txBox="1"/>
           <p:nvPr/>
         </p:nvSpPr>
@@ -31609,7 +31555,7 @@
       </p:sp>
       <p:sp>
         <p:nvSpPr>
-          <p:cNvPr id="161177335" name=""/>
+          <p:cNvPr id="1781821656" name=""/>
           <p:cNvSpPr/>
           <p:nvPr/>
         </p:nvSpPr>
@@ -31649,7 +31595,7 @@
       </p:sp>
       <p:sp>
         <p:nvSpPr>
-          <p:cNvPr id="1800404176" name="Rectangle : avec coins arrondis en haut 1151560973"/>
+          <p:cNvPr id="2103756223" name="Rectangle : avec coins arrondis en haut 1151560973"/>
           <p:cNvSpPr/>
           <p:nvPr/>
         </p:nvSpPr>
@@ -31697,7 +31643,7 @@
       </p:sp>
       <p:sp>
         <p:nvSpPr>
-          <p:cNvPr id="1367025197" name=""/>
+          <p:cNvPr id="2032960552" name=""/>
           <p:cNvSpPr/>
           <p:nvPr/>
         </p:nvSpPr>
@@ -31737,7 +31683,7 @@
       </p:sp>
       <p:sp>
         <p:nvSpPr>
-          <p:cNvPr id="1379273171" name="Rectangle : avec coins arrondis en haut 1151560973"/>
+          <p:cNvPr id="1536152299" name="Rectangle : avec coins arrondis en haut 1151560973"/>
           <p:cNvSpPr/>
           <p:nvPr/>
         </p:nvSpPr>
@@ -31785,7 +31731,7 @@
       </p:sp>
       <p:sp>
         <p:nvSpPr>
-          <p:cNvPr id="473770335" name=""/>
+          <p:cNvPr id="885318184" name=""/>
           <p:cNvSpPr/>
           <p:nvPr/>
         </p:nvSpPr>
@@ -31825,7 +31771,7 @@
       </p:sp>
       <p:sp>
         <p:nvSpPr>
-          <p:cNvPr id="1442853029" name="Rectangle : avec coins arrondis en haut 1151560973"/>
+          <p:cNvPr id="2139222309" name="Rectangle : avec coins arrondis en haut 1151560973"/>
           <p:cNvSpPr/>
           <p:nvPr/>
         </p:nvSpPr>
@@ -31873,7 +31819,7 @@
       </p:sp>
       <p:sp>
         <p:nvSpPr>
-          <p:cNvPr id="1361762947" name=""/>
+          <p:cNvPr id="232151115" name=""/>
           <p:cNvSpPr txBox="1"/>
           <p:nvPr/>
         </p:nvSpPr>
@@ -31924,7 +31870,7 @@
       </p:sp>
       <p:sp>
         <p:nvSpPr>
-          <p:cNvPr id="1672552198" name=""/>
+          <p:cNvPr id="792858276" name=""/>
           <p:cNvSpPr txBox="1"/>
           <p:nvPr/>
         </p:nvSpPr>
@@ -32022,7 +31968,7 @@
       </p:sp>
       <p:sp>
         <p:nvSpPr>
-          <p:cNvPr id="355009376" name=""/>
+          <p:cNvPr id="121229932" name=""/>
           <p:cNvSpPr/>
           <p:nvPr/>
         </p:nvSpPr>
@@ -32093,7 +32039,7 @@
       </p:sp>
       <p:sp>
         <p:nvSpPr>
-          <p:cNvPr id="1180851376" name="Flèche : pentagone 463861063"/>
+          <p:cNvPr id="699384027" name="Flèche : pentagone 463861063"/>
           <p:cNvSpPr/>
           <p:nvPr/>
         </p:nvSpPr>
@@ -32138,7 +32084,7 @@
       </p:sp>
       <p:sp>
         <p:nvSpPr>
-          <p:cNvPr id="1620449895" name="Flèche : pentagone 272004907"/>
+          <p:cNvPr id="654906823" name="Flèche : pentagone 272004907"/>
           <p:cNvSpPr/>
           <p:nvPr/>
         </p:nvSpPr>
@@ -32183,7 +32129,7 @@
       </p:sp>
       <p:sp>
         <p:nvSpPr>
-          <p:cNvPr id="799572959" name="Flèche : pentagone 28174069"/>
+          <p:cNvPr id="2065924660" name="Flèche : pentagone 28174069"/>
           <p:cNvSpPr/>
           <p:nvPr/>
         </p:nvSpPr>

--- a/Fiches de personnage.pptx
+++ b/Fiches de personnage.pptx
@@ -139,7 +139,7 @@
       </p:grpSpPr>
       <p:sp>
         <p:nvSpPr>
-          <p:cNvPr id="1075822041" name="Espace réservé d'en-tête 1"/>
+          <p:cNvPr id="42627421" name="Espace réservé d'en-tête 1"/>
           <p:cNvSpPr>
             <a:spLocks noGrp="1"/>
           </p:cNvSpPr>
@@ -173,7 +173,7 @@
       </p:sp>
       <p:sp>
         <p:nvSpPr>
-          <p:cNvPr id="725871149" name="Espace réservé pour la date 2"/>
+          <p:cNvPr id="875626368" name="Espace réservé pour la date 2"/>
           <p:cNvSpPr>
             <a:spLocks noGrp="1"/>
           </p:cNvSpPr>
@@ -211,7 +211,7 @@
       </p:sp>
       <p:sp>
         <p:nvSpPr>
-          <p:cNvPr id="961859798" name="Espace réservé pour l'image de la diapositive 3"/>
+          <p:cNvPr id="950591764" name="Espace réservé pour l'image de la diapositive 3"/>
           <p:cNvSpPr>
             <a:spLocks noChangeAspect="1" noGrp="1" noRot="1"/>
           </p:cNvSpPr>
@@ -247,7 +247,7 @@
       </p:sp>
       <p:sp>
         <p:nvSpPr>
-          <p:cNvPr id="1812510502" name="Remarques Espace réservé 4"/>
+          <p:cNvPr id="418846793" name="Remarques Espace réservé 4"/>
           <p:cNvSpPr>
             <a:spLocks noGrp="1"/>
           </p:cNvSpPr>
@@ -321,7 +321,7 @@
       </p:sp>
       <p:sp>
         <p:nvSpPr>
-          <p:cNvPr id="333723202" name="Espace réservé du pied de page 5"/>
+          <p:cNvPr id="922095793" name="Espace réservé du pied de page 5"/>
           <p:cNvSpPr>
             <a:spLocks noGrp="1"/>
           </p:cNvSpPr>
@@ -355,7 +355,7 @@
       </p:sp>
       <p:sp>
         <p:nvSpPr>
-          <p:cNvPr id="609421165" name="Espace réservé du numéro de diapositive 6"/>
+          <p:cNvPr id="1185523463" name="Espace réservé du numéro de diapositive 6"/>
           <p:cNvSpPr>
             <a:spLocks noGrp="1"/>
           </p:cNvSpPr>
@@ -508,7 +508,7 @@
       </p:grpSpPr>
       <p:sp>
         <p:nvSpPr>
-          <p:cNvPr id="763591253" name="Espace réservé pour l'image de la diapositive 1"/>
+          <p:cNvPr id="1590052534" name="Espace réservé pour l'image de la diapositive 1"/>
           <p:cNvSpPr>
             <a:spLocks noChangeAspect="1" noGrp="1" noRot="1"/>
           </p:cNvSpPr>
@@ -525,7 +525,7 @@
       </p:sp>
       <p:sp>
         <p:nvSpPr>
-          <p:cNvPr id="1863411345" name="Remarques Espace réservé 2"/>
+          <p:cNvPr id="1136368552" name="Remarques Espace réservé 2"/>
           <p:cNvSpPr>
             <a:spLocks noGrp="1"/>
           </p:cNvSpPr>
@@ -550,7 +550,7 @@
       </p:sp>
       <p:sp>
         <p:nvSpPr>
-          <p:cNvPr id="1937958219" name="Espace réservé pour le numéro de diapositive 3"/>
+          <p:cNvPr id="277874172" name="Espace réservé pour le numéro de diapositive 3"/>
           <p:cNvSpPr>
             <a:spLocks noGrp="1"/>
           </p:cNvSpPr>
@@ -601,7 +601,7 @@
       </p:grpSpPr>
       <p:sp>
         <p:nvSpPr>
-          <p:cNvPr id="1241481092" name="Espace réservé pour l'image de la diapositive 1"/>
+          <p:cNvPr id="94796924" name="Espace réservé pour l'image de la diapositive 1"/>
           <p:cNvSpPr>
             <a:spLocks noChangeAspect="1" noGrp="1" noRot="1"/>
           </p:cNvSpPr>
@@ -618,7 +618,7 @@
       </p:sp>
       <p:sp>
         <p:nvSpPr>
-          <p:cNvPr id="175162368" name="Remarques Espace réservé 2"/>
+          <p:cNvPr id="1822183406" name="Remarques Espace réservé 2"/>
           <p:cNvSpPr>
             <a:spLocks noGrp="1"/>
           </p:cNvSpPr>
@@ -643,7 +643,7 @@
       </p:sp>
       <p:sp>
         <p:nvSpPr>
-          <p:cNvPr id="1862247540" name="Espace réservé pour le numéro de diapositive 3"/>
+          <p:cNvPr id="1040183754" name="Espace réservé pour le numéro de diapositive 3"/>
           <p:cNvSpPr>
             <a:spLocks noGrp="1"/>
           </p:cNvSpPr>
@@ -694,7 +694,7 @@
       </p:grpSpPr>
       <p:sp>
         <p:nvSpPr>
-          <p:cNvPr id="50369451" name="Espace réservé pour l'image de la diapositive 1"/>
+          <p:cNvPr id="1216344876" name="Espace réservé pour l'image de la diapositive 1"/>
           <p:cNvSpPr>
             <a:spLocks noChangeAspect="1" noGrp="1" noRot="1"/>
           </p:cNvSpPr>
@@ -711,7 +711,7 @@
       </p:sp>
       <p:sp>
         <p:nvSpPr>
-          <p:cNvPr id="1813038814" name="Remarques Espace réservé 2"/>
+          <p:cNvPr id="68312811" name="Remarques Espace réservé 2"/>
           <p:cNvSpPr>
             <a:spLocks noGrp="1"/>
           </p:cNvSpPr>
@@ -736,7 +736,7 @@
       </p:sp>
       <p:sp>
         <p:nvSpPr>
-          <p:cNvPr id="1520093849" name="Espace réservé pour le numéro de diapositive 3"/>
+          <p:cNvPr id="24260839" name="Espace réservé pour le numéro de diapositive 3"/>
           <p:cNvSpPr>
             <a:spLocks noGrp="1"/>
           </p:cNvSpPr>
@@ -787,7 +787,7 @@
       </p:grpSpPr>
       <p:sp>
         <p:nvSpPr>
-          <p:cNvPr id="315882406" name="Espace réservé pour l'image de la diapositive 1"/>
+          <p:cNvPr id="241285010" name="Espace réservé pour l'image de la diapositive 1"/>
           <p:cNvSpPr>
             <a:spLocks noChangeAspect="1" noGrp="1" noRot="1"/>
           </p:cNvSpPr>
@@ -804,7 +804,7 @@
       </p:sp>
       <p:sp>
         <p:nvSpPr>
-          <p:cNvPr id="1192840762" name="Remarques Espace réservé 2"/>
+          <p:cNvPr id="612736274" name="Remarques Espace réservé 2"/>
           <p:cNvSpPr>
             <a:spLocks noGrp="1"/>
           </p:cNvSpPr>
@@ -829,7 +829,7 @@
       </p:sp>
       <p:sp>
         <p:nvSpPr>
-          <p:cNvPr id="21341251" name="Espace réservé pour le numéro de diapositive 3"/>
+          <p:cNvPr id="936626761" name="Espace réservé pour le numéro de diapositive 3"/>
           <p:cNvSpPr>
             <a:spLocks noGrp="1"/>
           </p:cNvSpPr>
@@ -880,7 +880,7 @@
       </p:grpSpPr>
       <p:sp>
         <p:nvSpPr>
-          <p:cNvPr id="379136730" name="Espace réservé pour l'image de la diapositive 1"/>
+          <p:cNvPr id="1882730366" name="Espace réservé pour l'image de la diapositive 1"/>
           <p:cNvSpPr>
             <a:spLocks noChangeAspect="1" noGrp="1" noRot="1"/>
           </p:cNvSpPr>
@@ -897,7 +897,7 @@
       </p:sp>
       <p:sp>
         <p:nvSpPr>
-          <p:cNvPr id="476707482" name="Remarques Espace réservé 2"/>
+          <p:cNvPr id="837395935" name="Remarques Espace réservé 2"/>
           <p:cNvSpPr>
             <a:spLocks noGrp="1"/>
           </p:cNvSpPr>
@@ -922,7 +922,7 @@
       </p:sp>
       <p:sp>
         <p:nvSpPr>
-          <p:cNvPr id="654600206" name="Espace réservé pour le numéro de diapositive 3"/>
+          <p:cNvPr id="1553727353" name="Espace réservé pour le numéro de diapositive 3"/>
           <p:cNvSpPr>
             <a:spLocks noGrp="1"/>
           </p:cNvSpPr>
@@ -973,7 +973,7 @@
       </p:grpSpPr>
       <p:sp>
         <p:nvSpPr>
-          <p:cNvPr id="905993992" name="Espace réservé pour l'image de la diapositive 1"/>
+          <p:cNvPr id="546004861" name="Espace réservé pour l'image de la diapositive 1"/>
           <p:cNvSpPr>
             <a:spLocks noChangeAspect="1" noGrp="1" noRot="1"/>
           </p:cNvSpPr>
@@ -990,7 +990,7 @@
       </p:sp>
       <p:sp>
         <p:nvSpPr>
-          <p:cNvPr id="1272877319" name="Remarques Espace réservé 2"/>
+          <p:cNvPr id="1902732673" name="Remarques Espace réservé 2"/>
           <p:cNvSpPr>
             <a:spLocks noGrp="1"/>
           </p:cNvSpPr>
@@ -1015,7 +1015,7 @@
       </p:sp>
       <p:sp>
         <p:nvSpPr>
-          <p:cNvPr id="893460856" name="Espace réservé pour le numéro de diapositive 3"/>
+          <p:cNvPr id="455257708" name="Espace réservé pour le numéro de diapositive 3"/>
           <p:cNvSpPr>
             <a:spLocks noGrp="1"/>
           </p:cNvSpPr>
@@ -1066,7 +1066,7 @@
       </p:grpSpPr>
       <p:sp>
         <p:nvSpPr>
-          <p:cNvPr id="1992995044" name="Titre 1"/>
+          <p:cNvPr id="1510336676" name="Titre 1"/>
           <p:cNvSpPr>
             <a:spLocks noGrp="1"/>
           </p:cNvSpPr>
@@ -1101,7 +1101,7 @@
       </p:sp>
       <p:sp>
         <p:nvSpPr>
-          <p:cNvPr id="787572138" name="Sous-titre 2"/>
+          <p:cNvPr id="584563278" name="Sous-titre 2"/>
           <p:cNvSpPr>
             <a:spLocks noGrp="1"/>
           </p:cNvSpPr>
@@ -1169,7 +1169,7 @@
       </p:sp>
       <p:sp>
         <p:nvSpPr>
-          <p:cNvPr id="249466681" name="Espace réservé de la date 3"/>
+          <p:cNvPr id="1792997950" name="Espace réservé de la date 3"/>
           <p:cNvSpPr>
             <a:spLocks noGrp="1"/>
           </p:cNvSpPr>
@@ -1195,7 +1195,7 @@
       </p:sp>
       <p:sp>
         <p:nvSpPr>
-          <p:cNvPr id="1943028510" name="Espace réservé du pied de page 4"/>
+          <p:cNvPr id="836820070" name="Espace réservé du pied de page 4"/>
           <p:cNvSpPr>
             <a:spLocks noGrp="1"/>
           </p:cNvSpPr>
@@ -1217,7 +1217,7 @@
       </p:sp>
       <p:sp>
         <p:nvSpPr>
-          <p:cNvPr id="566596882" name="Espace réservé du numéro de diapositive 5"/>
+          <p:cNvPr id="1323195380" name="Espace réservé du numéro de diapositive 5"/>
           <p:cNvSpPr>
             <a:spLocks noGrp="1"/>
           </p:cNvSpPr>
@@ -1268,7 +1268,7 @@
       </p:grpSpPr>
       <p:sp>
         <p:nvSpPr>
-          <p:cNvPr id="1182555650" name="Titre 1"/>
+          <p:cNvPr id="1650807890" name="Titre 1"/>
           <p:cNvSpPr>
             <a:spLocks noGrp="1"/>
           </p:cNvSpPr>
@@ -1294,7 +1294,7 @@
       </p:sp>
       <p:sp>
         <p:nvSpPr>
-          <p:cNvPr id="653248704" name="Espace réservé du texte vertical 2"/>
+          <p:cNvPr id="785424467" name="Espace réservé du texte vertical 2"/>
           <p:cNvSpPr>
             <a:spLocks noGrp="1"/>
           </p:cNvSpPr>
@@ -1360,7 +1360,7 @@
       </p:sp>
       <p:sp>
         <p:nvSpPr>
-          <p:cNvPr id="622951119" name="Espace réservé de la date 3"/>
+          <p:cNvPr id="1688149412" name="Espace réservé de la date 3"/>
           <p:cNvSpPr>
             <a:spLocks noGrp="1"/>
           </p:cNvSpPr>
@@ -1386,7 +1386,7 @@
       </p:sp>
       <p:sp>
         <p:nvSpPr>
-          <p:cNvPr id="233617360" name="Espace réservé du pied de page 4"/>
+          <p:cNvPr id="603509222" name="Espace réservé du pied de page 4"/>
           <p:cNvSpPr>
             <a:spLocks noGrp="1"/>
           </p:cNvSpPr>
@@ -1408,7 +1408,7 @@
       </p:sp>
       <p:sp>
         <p:nvSpPr>
-          <p:cNvPr id="833483545" name="Espace réservé du numéro de diapositive 5"/>
+          <p:cNvPr id="1084115466" name="Espace réservé du numéro de diapositive 5"/>
           <p:cNvSpPr>
             <a:spLocks noGrp="1"/>
           </p:cNvSpPr>
@@ -1459,7 +1459,7 @@
       </p:grpSpPr>
       <p:sp>
         <p:nvSpPr>
-          <p:cNvPr id="148068918" name="Titre vertical 1"/>
+          <p:cNvPr id="1656195528" name="Titre vertical 1"/>
           <p:cNvSpPr>
             <a:spLocks noGrp="1"/>
           </p:cNvSpPr>
@@ -1490,7 +1490,7 @@
       </p:sp>
       <p:sp>
         <p:nvSpPr>
-          <p:cNvPr id="1929218128" name="Espace réservé du texte vertical 2"/>
+          <p:cNvPr id="1995106649" name="Espace réservé du texte vertical 2"/>
           <p:cNvSpPr>
             <a:spLocks noGrp="1"/>
           </p:cNvSpPr>
@@ -1561,7 +1561,7 @@
       </p:sp>
       <p:sp>
         <p:nvSpPr>
-          <p:cNvPr id="1605158212" name="Espace réservé de la date 3"/>
+          <p:cNvPr id="1949268024" name="Espace réservé de la date 3"/>
           <p:cNvSpPr>
             <a:spLocks noGrp="1"/>
           </p:cNvSpPr>
@@ -1587,7 +1587,7 @@
       </p:sp>
       <p:sp>
         <p:nvSpPr>
-          <p:cNvPr id="855468754" name="Espace réservé du pied de page 4"/>
+          <p:cNvPr id="1560359338" name="Espace réservé du pied de page 4"/>
           <p:cNvSpPr>
             <a:spLocks noGrp="1"/>
           </p:cNvSpPr>
@@ -1609,7 +1609,7 @@
       </p:sp>
       <p:sp>
         <p:nvSpPr>
-          <p:cNvPr id="568701608" name="Espace réservé du numéro de diapositive 5"/>
+          <p:cNvPr id="1591798683" name="Espace réservé du numéro de diapositive 5"/>
           <p:cNvSpPr>
             <a:spLocks noGrp="1"/>
           </p:cNvSpPr>
@@ -1660,7 +1660,7 @@
       </p:grpSpPr>
       <p:sp>
         <p:nvSpPr>
-          <p:cNvPr id="966597585" name="Titre 1"/>
+          <p:cNvPr id="1539744997" name="Titre 1"/>
           <p:cNvSpPr>
             <a:spLocks noGrp="1"/>
           </p:cNvSpPr>
@@ -1686,7 +1686,7 @@
       </p:sp>
       <p:sp>
         <p:nvSpPr>
-          <p:cNvPr id="687051341" name="Espace réservé du contenu 2"/>
+          <p:cNvPr id="1439927143" name="Espace réservé du contenu 2"/>
           <p:cNvSpPr>
             <a:spLocks noGrp="1"/>
           </p:cNvSpPr>
@@ -1752,7 +1752,7 @@
       </p:sp>
       <p:sp>
         <p:nvSpPr>
-          <p:cNvPr id="2141976599" name="Espace réservé de la date 3"/>
+          <p:cNvPr id="882923929" name="Espace réservé de la date 3"/>
           <p:cNvSpPr>
             <a:spLocks noGrp="1"/>
           </p:cNvSpPr>
@@ -1778,7 +1778,7 @@
       </p:sp>
       <p:sp>
         <p:nvSpPr>
-          <p:cNvPr id="1294090532" name="Espace réservé du pied de page 4"/>
+          <p:cNvPr id="1017032734" name="Espace réservé du pied de page 4"/>
           <p:cNvSpPr>
             <a:spLocks noGrp="1"/>
           </p:cNvSpPr>
@@ -1800,7 +1800,7 @@
       </p:sp>
       <p:sp>
         <p:nvSpPr>
-          <p:cNvPr id="1795983424" name="Espace réservé du numéro de diapositive 5"/>
+          <p:cNvPr id="1540913864" name="Espace réservé du numéro de diapositive 5"/>
           <p:cNvSpPr>
             <a:spLocks noGrp="1"/>
           </p:cNvSpPr>
@@ -1851,7 +1851,7 @@
       </p:grpSpPr>
       <p:sp>
         <p:nvSpPr>
-          <p:cNvPr id="1364868047" name="Titre 1"/>
+          <p:cNvPr id="277240438" name="Titre 1"/>
           <p:cNvSpPr>
             <a:spLocks noGrp="1"/>
           </p:cNvSpPr>
@@ -1886,7 +1886,7 @@
       </p:sp>
       <p:sp>
         <p:nvSpPr>
-          <p:cNvPr id="712155424" name="Espace réservé du texte 2"/>
+          <p:cNvPr id="1678095719" name="Espace réservé du texte 2"/>
           <p:cNvSpPr>
             <a:spLocks noGrp="1"/>
           </p:cNvSpPr>
@@ -2008,7 +2008,7 @@
       </p:sp>
       <p:sp>
         <p:nvSpPr>
-          <p:cNvPr id="1725913053" name="Espace réservé de la date 3"/>
+          <p:cNvPr id="1186355083" name="Espace réservé de la date 3"/>
           <p:cNvSpPr>
             <a:spLocks noGrp="1"/>
           </p:cNvSpPr>
@@ -2034,7 +2034,7 @@
       </p:sp>
       <p:sp>
         <p:nvSpPr>
-          <p:cNvPr id="102529025" name="Espace réservé du pied de page 4"/>
+          <p:cNvPr id="1694241393" name="Espace réservé du pied de page 4"/>
           <p:cNvSpPr>
             <a:spLocks noGrp="1"/>
           </p:cNvSpPr>
@@ -2056,7 +2056,7 @@
       </p:sp>
       <p:sp>
         <p:nvSpPr>
-          <p:cNvPr id="337540765" name="Espace réservé du numéro de diapositive 5"/>
+          <p:cNvPr id="641813619" name="Espace réservé du numéro de diapositive 5"/>
           <p:cNvSpPr>
             <a:spLocks noGrp="1"/>
           </p:cNvSpPr>
@@ -2107,7 +2107,7 @@
       </p:grpSpPr>
       <p:sp>
         <p:nvSpPr>
-          <p:cNvPr id="332277793" name="Titre 1"/>
+          <p:cNvPr id="584072955" name="Titre 1"/>
           <p:cNvSpPr>
             <a:spLocks noGrp="1"/>
           </p:cNvSpPr>
@@ -2133,7 +2133,7 @@
       </p:sp>
       <p:sp>
         <p:nvSpPr>
-          <p:cNvPr id="25733535" name="Espace réservé du contenu 2"/>
+          <p:cNvPr id="162246671" name="Espace réservé du contenu 2"/>
           <p:cNvSpPr>
             <a:spLocks noGrp="1"/>
           </p:cNvSpPr>
@@ -2204,7 +2204,7 @@
       </p:sp>
       <p:sp>
         <p:nvSpPr>
-          <p:cNvPr id="665145483" name="Espace réservé du contenu 3"/>
+          <p:cNvPr id="2098968490" name="Espace réservé du contenu 3"/>
           <p:cNvSpPr>
             <a:spLocks noGrp="1"/>
           </p:cNvSpPr>
@@ -2275,7 +2275,7 @@
       </p:sp>
       <p:sp>
         <p:nvSpPr>
-          <p:cNvPr id="317971106" name="Espace réservé de la date 4"/>
+          <p:cNvPr id="1772022308" name="Espace réservé de la date 4"/>
           <p:cNvSpPr>
             <a:spLocks noGrp="1"/>
           </p:cNvSpPr>
@@ -2301,7 +2301,7 @@
       </p:sp>
       <p:sp>
         <p:nvSpPr>
-          <p:cNvPr id="1968704793" name="Espace réservé du pied de page 5"/>
+          <p:cNvPr id="54441121" name="Espace réservé du pied de page 5"/>
           <p:cNvSpPr>
             <a:spLocks noGrp="1"/>
           </p:cNvSpPr>
@@ -2323,7 +2323,7 @@
       </p:sp>
       <p:sp>
         <p:nvSpPr>
-          <p:cNvPr id="1683293698" name="Espace réservé du numéro de diapositive 6"/>
+          <p:cNvPr id="888741111" name="Espace réservé du numéro de diapositive 6"/>
           <p:cNvSpPr>
             <a:spLocks noGrp="1"/>
           </p:cNvSpPr>
@@ -2374,7 +2374,7 @@
       </p:grpSpPr>
       <p:sp>
         <p:nvSpPr>
-          <p:cNvPr id="1840215883" name="Titre 1"/>
+          <p:cNvPr id="1988461502" name="Titre 1"/>
           <p:cNvSpPr>
             <a:spLocks noGrp="1"/>
           </p:cNvSpPr>
@@ -2405,7 +2405,7 @@
       </p:sp>
       <p:sp>
         <p:nvSpPr>
-          <p:cNvPr id="815977814" name="Espace réservé du texte 2"/>
+          <p:cNvPr id="1915959932" name="Espace réservé du texte 2"/>
           <p:cNvSpPr>
             <a:spLocks noGrp="1"/>
           </p:cNvSpPr>
@@ -2473,7 +2473,7 @@
       </p:sp>
       <p:sp>
         <p:nvSpPr>
-          <p:cNvPr id="1753986283" name="Espace réservé du contenu 3"/>
+          <p:cNvPr id="741055392" name="Espace réservé du contenu 3"/>
           <p:cNvSpPr>
             <a:spLocks noGrp="1"/>
           </p:cNvSpPr>
@@ -2544,7 +2544,7 @@
       </p:sp>
       <p:sp>
         <p:nvSpPr>
-          <p:cNvPr id="1066379033" name="Espace réservé du texte 4"/>
+          <p:cNvPr id="1471808200" name="Espace réservé du texte 4"/>
           <p:cNvSpPr>
             <a:spLocks noGrp="1"/>
           </p:cNvSpPr>
@@ -2612,7 +2612,7 @@
       </p:sp>
       <p:sp>
         <p:nvSpPr>
-          <p:cNvPr id="1696648508" name="Espace réservé du contenu 5"/>
+          <p:cNvPr id="1780686271" name="Espace réservé du contenu 5"/>
           <p:cNvSpPr>
             <a:spLocks noGrp="1"/>
           </p:cNvSpPr>
@@ -2683,7 +2683,7 @@
       </p:sp>
       <p:sp>
         <p:nvSpPr>
-          <p:cNvPr id="691533598" name="Espace réservé de la date 6"/>
+          <p:cNvPr id="1824485832" name="Espace réservé de la date 6"/>
           <p:cNvSpPr>
             <a:spLocks noGrp="1"/>
           </p:cNvSpPr>
@@ -2709,7 +2709,7 @@
       </p:sp>
       <p:sp>
         <p:nvSpPr>
-          <p:cNvPr id="1856383132" name="Espace réservé du pied de page 7"/>
+          <p:cNvPr id="695904415" name="Espace réservé du pied de page 7"/>
           <p:cNvSpPr>
             <a:spLocks noGrp="1"/>
           </p:cNvSpPr>
@@ -2731,7 +2731,7 @@
       </p:sp>
       <p:sp>
         <p:nvSpPr>
-          <p:cNvPr id="647974869" name="Espace réservé du numéro de diapositive 8"/>
+          <p:cNvPr id="1721572063" name="Espace réservé du numéro de diapositive 8"/>
           <p:cNvSpPr>
             <a:spLocks noGrp="1"/>
           </p:cNvSpPr>
@@ -2782,7 +2782,7 @@
       </p:grpSpPr>
       <p:sp>
         <p:nvSpPr>
-          <p:cNvPr id="1816347695" name="Titre 1"/>
+          <p:cNvPr id="1603099733" name="Titre 1"/>
           <p:cNvSpPr>
             <a:spLocks noGrp="1"/>
           </p:cNvSpPr>
@@ -2808,7 +2808,7 @@
       </p:sp>
       <p:sp>
         <p:nvSpPr>
-          <p:cNvPr id="296548332" name="Espace réservé de la date 2"/>
+          <p:cNvPr id="822847613" name="Espace réservé de la date 2"/>
           <p:cNvSpPr>
             <a:spLocks noGrp="1"/>
           </p:cNvSpPr>
@@ -2834,7 +2834,7 @@
       </p:sp>
       <p:sp>
         <p:nvSpPr>
-          <p:cNvPr id="1700917724" name="Espace réservé du pied de page 3"/>
+          <p:cNvPr id="1539687152" name="Espace réservé du pied de page 3"/>
           <p:cNvSpPr>
             <a:spLocks noGrp="1"/>
           </p:cNvSpPr>
@@ -2856,7 +2856,7 @@
       </p:sp>
       <p:sp>
         <p:nvSpPr>
-          <p:cNvPr id="350355627" name="Espace réservé du numéro de diapositive 4"/>
+          <p:cNvPr id="1274215469" name="Espace réservé du numéro de diapositive 4"/>
           <p:cNvSpPr>
             <a:spLocks noGrp="1"/>
           </p:cNvSpPr>
@@ -2907,7 +2907,7 @@
       </p:grpSpPr>
       <p:sp>
         <p:nvSpPr>
-          <p:cNvPr id="94709278" name="Espace réservé de la date 1"/>
+          <p:cNvPr id="246664440" name="Espace réservé de la date 1"/>
           <p:cNvSpPr>
             <a:spLocks noGrp="1"/>
           </p:cNvSpPr>
@@ -2933,7 +2933,7 @@
       </p:sp>
       <p:sp>
         <p:nvSpPr>
-          <p:cNvPr id="295793090" name="Espace réservé du pied de page 2"/>
+          <p:cNvPr id="1573600396" name="Espace réservé du pied de page 2"/>
           <p:cNvSpPr>
             <a:spLocks noGrp="1"/>
           </p:cNvSpPr>
@@ -2955,7 +2955,7 @@
       </p:sp>
       <p:sp>
         <p:nvSpPr>
-          <p:cNvPr id="83232597" name="Espace réservé du numéro de diapositive 3"/>
+          <p:cNvPr id="1657780482" name="Espace réservé du numéro de diapositive 3"/>
           <p:cNvSpPr>
             <a:spLocks noGrp="1"/>
           </p:cNvSpPr>
@@ -3006,7 +3006,7 @@
       </p:grpSpPr>
       <p:sp>
         <p:nvSpPr>
-          <p:cNvPr id="1555365818" name="Titre 1"/>
+          <p:cNvPr id="561462715" name="Titre 1"/>
           <p:cNvSpPr>
             <a:spLocks noGrp="1"/>
           </p:cNvSpPr>
@@ -3041,7 +3041,7 @@
       </p:sp>
       <p:sp>
         <p:nvSpPr>
-          <p:cNvPr id="1339737277" name="Espace réservé du contenu 2"/>
+          <p:cNvPr id="1964388844" name="Espace réservé du contenu 2"/>
           <p:cNvSpPr>
             <a:spLocks noGrp="1"/>
           </p:cNvSpPr>
@@ -3140,7 +3140,7 @@
       </p:sp>
       <p:sp>
         <p:nvSpPr>
-          <p:cNvPr id="1053266498" name="Espace réservé du texte 3"/>
+          <p:cNvPr id="1048672463" name="Espace réservé du texte 3"/>
           <p:cNvSpPr>
             <a:spLocks noGrp="1"/>
           </p:cNvSpPr>
@@ -3208,7 +3208,7 @@
       </p:sp>
       <p:sp>
         <p:nvSpPr>
-          <p:cNvPr id="888037768" name="Espace réservé de la date 4"/>
+          <p:cNvPr id="928165858" name="Espace réservé de la date 4"/>
           <p:cNvSpPr>
             <a:spLocks noGrp="1"/>
           </p:cNvSpPr>
@@ -3234,7 +3234,7 @@
       </p:sp>
       <p:sp>
         <p:nvSpPr>
-          <p:cNvPr id="509166501" name="Espace réservé du pied de page 5"/>
+          <p:cNvPr id="491134374" name="Espace réservé du pied de page 5"/>
           <p:cNvSpPr>
             <a:spLocks noGrp="1"/>
           </p:cNvSpPr>
@@ -3256,7 +3256,7 @@
       </p:sp>
       <p:sp>
         <p:nvSpPr>
-          <p:cNvPr id="754150469" name="Espace réservé du numéro de diapositive 6"/>
+          <p:cNvPr id="757007241" name="Espace réservé du numéro de diapositive 6"/>
           <p:cNvSpPr>
             <a:spLocks noGrp="1"/>
           </p:cNvSpPr>
@@ -3307,7 +3307,7 @@
       </p:grpSpPr>
       <p:sp>
         <p:nvSpPr>
-          <p:cNvPr id="1178479719" name="Titre 1"/>
+          <p:cNvPr id="1748197707" name="Titre 1"/>
           <p:cNvSpPr>
             <a:spLocks noGrp="1"/>
           </p:cNvSpPr>
@@ -3342,7 +3342,7 @@
       </p:sp>
       <p:sp>
         <p:nvSpPr>
-          <p:cNvPr id="1992788137" name="Espace réservé pour une image 2"/>
+          <p:cNvPr id="677986660" name="Espace réservé pour une image 2"/>
           <p:cNvSpPr>
             <a:spLocks noChangeAspect="1" noGrp="1"/>
           </p:cNvSpPr>
@@ -3410,7 +3410,7 @@
       </p:sp>
       <p:sp>
         <p:nvSpPr>
-          <p:cNvPr id="1397956615" name="Espace réservé du texte 3"/>
+          <p:cNvPr id="1384989057" name="Espace réservé du texte 3"/>
           <p:cNvSpPr>
             <a:spLocks noGrp="1"/>
           </p:cNvSpPr>
@@ -3478,7 +3478,7 @@
       </p:sp>
       <p:sp>
         <p:nvSpPr>
-          <p:cNvPr id="88250460" name="Espace réservé de la date 4"/>
+          <p:cNvPr id="1890004678" name="Espace réservé de la date 4"/>
           <p:cNvSpPr>
             <a:spLocks noGrp="1"/>
           </p:cNvSpPr>
@@ -3504,7 +3504,7 @@
       </p:sp>
       <p:sp>
         <p:nvSpPr>
-          <p:cNvPr id="1252993677" name="Espace réservé du pied de page 5"/>
+          <p:cNvPr id="1944914624" name="Espace réservé du pied de page 5"/>
           <p:cNvSpPr>
             <a:spLocks noGrp="1"/>
           </p:cNvSpPr>
@@ -3526,7 +3526,7 @@
       </p:sp>
       <p:sp>
         <p:nvSpPr>
-          <p:cNvPr id="6911348" name="Espace réservé du numéro de diapositive 6"/>
+          <p:cNvPr id="1594369152" name="Espace réservé du numéro de diapositive 6"/>
           <p:cNvSpPr>
             <a:spLocks noGrp="1"/>
           </p:cNvSpPr>
@@ -3582,7 +3582,7 @@
       </p:grpSpPr>
       <p:sp>
         <p:nvSpPr>
-          <p:cNvPr id="567446345" name="Espace réservé du titre 1"/>
+          <p:cNvPr id="612013306" name="Espace réservé du titre 1"/>
           <p:cNvSpPr>
             <a:spLocks noGrp="1"/>
           </p:cNvSpPr>
@@ -3618,7 +3618,7 @@
       </p:sp>
       <p:sp>
         <p:nvSpPr>
-          <p:cNvPr id="903331003" name="Espace réservé du texte 2"/>
+          <p:cNvPr id="1873188760" name="Espace réservé du texte 2"/>
           <p:cNvSpPr>
             <a:spLocks noGrp="1"/>
           </p:cNvSpPr>
@@ -3694,7 +3694,7 @@
       </p:sp>
       <p:sp>
         <p:nvSpPr>
-          <p:cNvPr id="485124837" name="Espace réservé de la date 3"/>
+          <p:cNvPr id="21743955" name="Espace réservé de la date 3"/>
           <p:cNvSpPr>
             <a:spLocks noGrp="1"/>
           </p:cNvSpPr>
@@ -3738,7 +3738,7 @@
       </p:sp>
       <p:sp>
         <p:nvSpPr>
-          <p:cNvPr id="1115900001" name="Espace réservé du pied de page 4"/>
+          <p:cNvPr id="296303770" name="Espace réservé du pied de page 4"/>
           <p:cNvSpPr>
             <a:spLocks noGrp="1"/>
           </p:cNvSpPr>
@@ -3778,7 +3778,7 @@
       </p:sp>
       <p:sp>
         <p:nvSpPr>
-          <p:cNvPr id="924046641" name="Espace réservé du numéro de diapositive 5"/>
+          <p:cNvPr id="1205261072" name="Espace réservé du numéro de diapositive 5"/>
           <p:cNvSpPr>
             <a:spLocks noGrp="1"/>
           </p:cNvSpPr>
@@ -4138,7 +4138,7 @@
       </p:grpSpPr>
       <p:cxnSp>
         <p:nvCxnSpPr>
-          <p:cNvPr id="239738196" name="Connecteur droit 1568760680"/>
+          <p:cNvPr id="312971185" name="Connecteur droit 1568760680"/>
           <p:cNvCxnSpPr/>
           <p:nvPr/>
         </p:nvCxnSpPr>
@@ -4180,7 +4180,7 @@
       </p:cxnSp>
       <p:sp>
         <p:nvSpPr>
-          <p:cNvPr id="664266157" name="ZoneTexte 1868728971"/>
+          <p:cNvPr id="663848184" name="ZoneTexte 1868728971"/>
           <p:cNvSpPr txBox="1"/>
           <p:nvPr/>
         </p:nvSpPr>
@@ -4220,7 +4220,7 @@
       </p:sp>
       <p:cxnSp>
         <p:nvCxnSpPr>
-          <p:cNvPr id="215508207" name="Connecteur droit 806540798"/>
+          <p:cNvPr id="1961574055" name="Connecteur droit 806540798"/>
           <p:cNvCxnSpPr/>
           <p:nvPr/>
         </p:nvCxnSpPr>
@@ -4262,7 +4262,7 @@
       </p:cxnSp>
       <p:sp>
         <p:nvSpPr>
-          <p:cNvPr id="1764531282" name="ZoneTexte 406616703"/>
+          <p:cNvPr id="270001050" name="ZoneTexte 406616703"/>
           <p:cNvSpPr txBox="1"/>
           <p:nvPr/>
         </p:nvSpPr>
@@ -4302,7 +4302,7 @@
       </p:sp>
       <p:cxnSp>
         <p:nvCxnSpPr>
-          <p:cNvPr id="1983335748" name="Connecteur droit 858914340"/>
+          <p:cNvPr id="821263167" name="Connecteur droit 858914340"/>
           <p:cNvCxnSpPr/>
           <p:nvPr/>
         </p:nvCxnSpPr>
@@ -4344,7 +4344,7 @@
       </p:cxnSp>
       <p:sp>
         <p:nvSpPr>
-          <p:cNvPr id="189044569" name="ZoneTexte 2018177722"/>
+          <p:cNvPr id="350121804" name="ZoneTexte 2018177722"/>
           <p:cNvSpPr txBox="1"/>
           <p:nvPr/>
         </p:nvSpPr>
@@ -4391,7 +4391,7 @@
       </p:sp>
       <p:sp>
         <p:nvSpPr>
-          <p:cNvPr id="1311359524" name="ZoneTexte 519900862"/>
+          <p:cNvPr id="1567987975" name="ZoneTexte 519900862"/>
           <p:cNvSpPr txBox="1"/>
           <p:nvPr/>
         </p:nvSpPr>
@@ -4653,7 +4653,7 @@
       </p:sp>
       <p:sp>
         <p:nvSpPr>
-          <p:cNvPr id="1514185456" name="Rectangle : avec coins arrondis en haut 838565229"/>
+          <p:cNvPr id="214561691" name="Rectangle : avec coins arrondis en haut 838565229"/>
           <p:cNvSpPr/>
           <p:nvPr/>
         </p:nvSpPr>
@@ -4699,7 +4699,7 @@
       </p:sp>
       <p:sp>
         <p:nvSpPr>
-          <p:cNvPr id="1746313211" name="ZoneTexte 448541368"/>
+          <p:cNvPr id="1242192860" name="ZoneTexte 448541368"/>
           <p:cNvSpPr txBox="1"/>
           <p:nvPr/>
         </p:nvSpPr>
@@ -4780,7 +4780,7 @@
       </p:sp>
       <p:sp>
         <p:nvSpPr>
-          <p:cNvPr id="1584849639" name="Rectangle : avec coins arrondis en haut 1165584529"/>
+          <p:cNvPr id="1498329553" name="Rectangle : avec coins arrondis en haut 1165584529"/>
           <p:cNvSpPr/>
           <p:nvPr/>
         </p:nvSpPr>
@@ -4826,7 +4826,7 @@
       </p:sp>
       <p:sp>
         <p:nvSpPr>
-          <p:cNvPr id="636727780" name="Flèche : pentagone 1880610112"/>
+          <p:cNvPr id="1267974980" name="Flèche : pentagone 1880610112"/>
           <p:cNvSpPr/>
           <p:nvPr/>
         </p:nvSpPr>
@@ -4871,7 +4871,7 @@
       </p:sp>
       <p:sp>
         <p:nvSpPr>
-          <p:cNvPr id="1618632672" name="Flèche : pentagone 446859139"/>
+          <p:cNvPr id="1912762754" name="Flèche : pentagone 446859139"/>
           <p:cNvSpPr/>
           <p:nvPr/>
         </p:nvSpPr>
@@ -4916,7 +4916,7 @@
       </p:sp>
       <p:sp>
         <p:nvSpPr>
-          <p:cNvPr id="2131040140" name="Flèche : pentagone 2055848356"/>
+          <p:cNvPr id="1168790229" name="Flèche : pentagone 2055848356"/>
           <p:cNvSpPr/>
           <p:nvPr/>
         </p:nvSpPr>
@@ -4961,7 +4961,7 @@
       </p:sp>
       <p:sp>
         <p:nvSpPr>
-          <p:cNvPr id="1611854873" name="Flèche : pentagone 1980093981"/>
+          <p:cNvPr id="198036050" name="Flèche : pentagone 1980093981"/>
           <p:cNvSpPr/>
           <p:nvPr/>
         </p:nvSpPr>
@@ -5006,7 +5006,7 @@
       </p:sp>
       <p:sp>
         <p:nvSpPr>
-          <p:cNvPr id="1961568390" name="Flèche : pentagone 905284374"/>
+          <p:cNvPr id="1929128847" name="Flèche : pentagone 905284374"/>
           <p:cNvSpPr/>
           <p:nvPr/>
         </p:nvSpPr>
@@ -5051,7 +5051,7 @@
       </p:sp>
       <p:sp>
         <p:nvSpPr>
-          <p:cNvPr id="554142160" name="ZoneTexte 880464430"/>
+          <p:cNvPr id="1276900740" name="ZoneTexte 880464430"/>
           <p:cNvSpPr txBox="1"/>
           <p:nvPr/>
         </p:nvSpPr>
@@ -5232,7 +5232,7 @@
       </p:sp>
       <p:sp>
         <p:nvSpPr>
-          <p:cNvPr id="161558664" name="ZoneTexte 1302587497"/>
+          <p:cNvPr id="1526178222" name="ZoneTexte 1302587497"/>
           <p:cNvSpPr txBox="1"/>
           <p:nvPr/>
         </p:nvSpPr>
@@ -5530,7 +5530,7 @@
       </p:sp>
       <p:cxnSp>
         <p:nvCxnSpPr>
-          <p:cNvPr id="817298224" name="Connecteur droit 342798987"/>
+          <p:cNvPr id="282910713" name="Connecteur droit 342798987"/>
           <p:cNvCxnSpPr/>
           <p:nvPr/>
         </p:nvCxnSpPr>
@@ -5572,7 +5572,7 @@
       </p:cxnSp>
       <p:sp>
         <p:nvSpPr>
-          <p:cNvPr id="668034659" name="ZoneTexte 966486802"/>
+          <p:cNvPr id="1383857327" name="ZoneTexte 966486802"/>
           <p:cNvSpPr txBox="1"/>
           <p:nvPr/>
         </p:nvSpPr>
@@ -5612,7 +5612,7 @@
       </p:sp>
       <p:sp>
         <p:nvSpPr>
-          <p:cNvPr id="1165027225" name="Rectangle 38344096"/>
+          <p:cNvPr id="1830410539" name="Rectangle 38344096"/>
           <p:cNvSpPr/>
           <p:nvPr/>
         </p:nvSpPr>
@@ -5652,7 +5652,7 @@
       </p:sp>
       <p:sp>
         <p:nvSpPr>
-          <p:cNvPr id="367712712" name="Rectangle 954364527"/>
+          <p:cNvPr id="742624253" name="Rectangle 954364527"/>
           <p:cNvSpPr/>
           <p:nvPr/>
         </p:nvSpPr>
@@ -5692,7 +5692,7 @@
       </p:sp>
       <p:sp>
         <p:nvSpPr>
-          <p:cNvPr id="1508344537" name="ZoneTexte 1527388901"/>
+          <p:cNvPr id="116221013" name="ZoneTexte 1527388901"/>
           <p:cNvSpPr txBox="1"/>
           <p:nvPr/>
         </p:nvSpPr>
@@ -5914,7 +5914,7 @@
       </p:sp>
       <p:sp>
         <p:nvSpPr>
-          <p:cNvPr id="1459271136" name="ZoneTexte 1440859034"/>
+          <p:cNvPr id="1350094087" name="ZoneTexte 1440859034"/>
           <p:cNvSpPr txBox="1"/>
           <p:nvPr/>
         </p:nvSpPr>
@@ -5965,7 +5965,7 @@
       </p:sp>
       <p:cxnSp>
         <p:nvCxnSpPr>
-          <p:cNvPr id="1705058551" name="Connecteur droit 858914340"/>
+          <p:cNvPr id="842087821" name="Connecteur droit 858914340"/>
           <p:cNvCxnSpPr/>
           <p:nvPr/>
         </p:nvCxnSpPr>
@@ -6007,7 +6007,7 @@
       </p:cxnSp>
       <p:sp>
         <p:nvSpPr>
-          <p:cNvPr id="1770062826" name="ZoneTexte 2018177722"/>
+          <p:cNvPr id="1256216692" name="ZoneTexte 2018177722"/>
           <p:cNvSpPr txBox="1"/>
           <p:nvPr/>
         </p:nvSpPr>
@@ -6054,7 +6054,7 @@
       </p:sp>
       <p:sp>
         <p:nvSpPr>
-          <p:cNvPr id="489580447" name=""/>
+          <p:cNvPr id="105190461" name=""/>
           <p:cNvSpPr txBox="1"/>
           <p:nvPr/>
         </p:nvSpPr>
@@ -6156,7 +6156,7 @@
       </p:sp>
       <p:cxnSp>
         <p:nvCxnSpPr>
-          <p:cNvPr id="1976685286" name="Connecteur droit 858914340"/>
+          <p:cNvPr id="700139843" name="Connecteur droit 858914340"/>
           <p:cNvCxnSpPr/>
           <p:nvPr/>
         </p:nvCxnSpPr>
@@ -6198,7 +6198,7 @@
       </p:cxnSp>
       <p:sp>
         <p:nvSpPr>
-          <p:cNvPr id="866550449" name="ZoneTexte 2018177722"/>
+          <p:cNvPr id="101529252" name="ZoneTexte 2018177722"/>
           <p:cNvSpPr txBox="1"/>
           <p:nvPr/>
         </p:nvSpPr>
@@ -6256,14 +6256,14 @@
       </p:sp>
       <p:sp>
         <p:nvSpPr>
-          <p:cNvPr id="1998500530" name=""/>
+          <p:cNvPr id="1732692953" name=""/>
           <p:cNvSpPr txBox="1"/>
           <p:nvPr/>
         </p:nvSpPr>
         <p:spPr bwMode="auto">
           <a:xfrm rot="0" flipH="0" flipV="0">
             <a:off x="4547592" y="5053581"/>
-            <a:ext cx="2342899" cy="1341479"/>
+            <a:ext cx="2312300" cy="1509120"/>
           </a:xfrm>
           <a:prstGeom prst="rect">
             <a:avLst/>
@@ -6355,63 +6355,7 @@
                 <a:ea typeface="Arial"/>
                 <a:cs typeface="Arial"/>
               </a:rPr>
-              <a:t> à la valeur de compétence ou de résistance avec 1d100. 1 est toujours une réussite, 100 toujours un échec.</a:t>
-            </a:r>
-            <a:r>
-              <a:rPr lang="fr-FR" sz="800" b="0" i="0" u="none" strike="noStrike" cap="none" spc="0">
-                <a:solidFill>
-                  <a:schemeClr val="tx1">
-                    <a:lumMod val="50000"/>
-                    <a:lumOff val="50000"/>
-                  </a:schemeClr>
-                </a:solidFill>
-                <a:latin typeface="Arial"/>
-                <a:ea typeface="Arial"/>
-                <a:cs typeface="Arial"/>
-              </a:rPr>
-              <a:t> </a:t>
-            </a:r>
-            <a:r>
-              <a:rPr lang="fr-FR" sz="800" b="0" i="0" u="none" strike="noStrike" cap="none" spc="0">
-                <a:solidFill>
-                  <a:schemeClr val="tx1">
-                    <a:lumMod val="50000"/>
-                    <a:lumOff val="50000"/>
-                  </a:schemeClr>
-                </a:solidFill>
-                <a:latin typeface="Arial"/>
-                <a:ea typeface="Arial"/>
-                <a:cs typeface="Arial"/>
-              </a:rPr>
-              <a:t>Chaque case de </a:t>
-            </a:r>
-            <a:r>
-              <a:rPr lang="fr-FR" sz="800" b="1" i="0" u="none" strike="noStrike" cap="none" spc="0">
-                <a:solidFill>
-                  <a:schemeClr val="tx1">
-                    <a:lumMod val="50000"/>
-                    <a:lumOff val="50000"/>
-                  </a:schemeClr>
-                </a:solidFill>
-                <a:latin typeface="Arial"/>
-                <a:ea typeface="Arial"/>
-                <a:cs typeface="Arial"/>
-              </a:rPr>
-              <a:t>trauma </a:t>
-            </a:r>
-            <a:r>
-              <a:rPr lang="fr-FR" sz="800" b="0" i="0" u="none" strike="noStrike" cap="none" spc="0">
-                <a:solidFill>
-                  <a:schemeClr val="tx1">
-                    <a:lumMod val="50000"/>
-                    <a:lumOff val="50000"/>
-                  </a:schemeClr>
-                </a:solidFill>
-                <a:latin typeface="Arial"/>
-                <a:ea typeface="Arial"/>
-                <a:cs typeface="Arial"/>
-              </a:rPr>
-              <a:t>cochée impose un malus de compétences de 10 points.</a:t>
+              <a:t> à la valeur de compétence ou de résistance avec 1d100. </a:t>
             </a:r>
             <a:br>
               <a:rPr lang="fr-FR" sz="800" b="0" i="0" u="none" strike="noStrike" cap="none" spc="0">
@@ -6426,6 +6370,177 @@
                 <a:cs typeface="Arial"/>
               </a:rPr>
             </a:br>
+            <a:r>
+              <a:rPr lang="fr-FR" sz="800" b="0" i="0" u="none" strike="noStrike" cap="none" spc="0">
+                <a:solidFill>
+                  <a:schemeClr val="tx1">
+                    <a:lumMod val="50000"/>
+                    <a:lumOff val="50000"/>
+                  </a:schemeClr>
+                </a:solidFill>
+                <a:latin typeface="Arial"/>
+                <a:ea typeface="Arial"/>
+                <a:cs typeface="Arial"/>
+              </a:rPr>
+              <a:t>1 est toujours une réussite, 100 toujours un échec.</a:t>
+            </a:r>
+            <a:r>
+              <a:rPr lang="fr-FR" sz="800" b="0" i="0" u="none" strike="noStrike" cap="none" spc="0">
+                <a:solidFill>
+                  <a:schemeClr val="tx1">
+                    <a:lumMod val="50000"/>
+                    <a:lumOff val="50000"/>
+                  </a:schemeClr>
+                </a:solidFill>
+                <a:latin typeface="Arial"/>
+                <a:ea typeface="Arial"/>
+                <a:cs typeface="Arial"/>
+              </a:rPr>
+              <a:t> </a:t>
+            </a:r>
+            <a:r>
+              <a:rPr lang="fr-FR" sz="800" b="0" i="0" u="none" strike="noStrike" cap="none" spc="0">
+                <a:solidFill>
+                  <a:schemeClr val="tx1">
+                    <a:lumMod val="50000"/>
+                    <a:lumOff val="50000"/>
+                  </a:schemeClr>
+                </a:solidFill>
+                <a:latin typeface="Arial"/>
+                <a:ea typeface="Arial"/>
+                <a:cs typeface="Arial"/>
+              </a:rPr>
+              <a:t>Chaque case de </a:t>
+            </a:r>
+            <a:r>
+              <a:rPr lang="fr-FR" sz="800" b="1" i="0" u="none" strike="noStrike" cap="none" spc="0">
+                <a:solidFill>
+                  <a:schemeClr val="tx1">
+                    <a:lumMod val="50000"/>
+                    <a:lumOff val="50000"/>
+                  </a:schemeClr>
+                </a:solidFill>
+                <a:latin typeface="Arial"/>
+                <a:ea typeface="Arial"/>
+                <a:cs typeface="Arial"/>
+              </a:rPr>
+              <a:t>trauma </a:t>
+            </a:r>
+            <a:r>
+              <a:rPr lang="fr-FR" sz="800" b="0" i="0" u="none" strike="noStrike" cap="none" spc="0">
+                <a:solidFill>
+                  <a:schemeClr val="tx1">
+                    <a:lumMod val="50000"/>
+                    <a:lumOff val="50000"/>
+                  </a:schemeClr>
+                </a:solidFill>
+                <a:latin typeface="Arial"/>
+                <a:ea typeface="Arial"/>
+                <a:cs typeface="Arial"/>
+              </a:rPr>
+              <a:t>cochée impose un malus de compétences de 10 points.</a:t>
+            </a:r>
+            <a:br>
+              <a:rPr lang="fr-FR" sz="800" b="0" i="0" u="none" strike="noStrike" cap="none" spc="0">
+                <a:solidFill>
+                  <a:schemeClr val="tx1">
+                    <a:lumMod val="50000"/>
+                    <a:lumOff val="50000"/>
+                  </a:schemeClr>
+                </a:solidFill>
+                <a:latin typeface="Arial"/>
+                <a:ea typeface="Arial"/>
+                <a:cs typeface="Arial"/>
+              </a:rPr>
+            </a:br>
+            <a:endParaRPr lang="fr-FR" sz="300" b="0" i="0" u="none" strike="noStrike" cap="none" spc="0">
+              <a:solidFill>
+                <a:schemeClr val="tx1">
+                  <a:lumMod val="50000"/>
+                  <a:lumOff val="50000"/>
+                </a:schemeClr>
+              </a:solidFill>
+              <a:latin typeface="Arial"/>
+              <a:ea typeface="Arial"/>
+              <a:cs typeface="Arial"/>
+            </a:endParaRPr>
+          </a:p>
+          <a:p>
+            <a:pPr marL="0" marR="0" indent="0" algn="l">
+              <a:lnSpc>
+                <a:spcPct val="100000"/>
+              </a:lnSpc>
+              <a:spcBef>
+                <a:spcPts val="0"/>
+              </a:spcBef>
+              <a:spcAft>
+                <a:spcPts val="0"/>
+              </a:spcAft>
+              <a:defRPr/>
+            </a:pPr>
+            <a:endParaRPr sz="200" b="0" i="0" u="none" strike="noStrike" cap="none" spc="0">
+              <a:solidFill>
+                <a:schemeClr val="tx1"/>
+              </a:solidFill>
+              <a:latin typeface="Times New Roman"/>
+              <a:cs typeface="Times New Roman"/>
+            </a:endParaRPr>
+          </a:p>
+          <a:p>
+            <a:pPr marL="0" marR="0" indent="0" algn="l">
+              <a:lnSpc>
+                <a:spcPct val="100000"/>
+              </a:lnSpc>
+              <a:spcBef>
+                <a:spcPts val="0"/>
+              </a:spcBef>
+              <a:spcAft>
+                <a:spcPts val="0"/>
+              </a:spcAft>
+              <a:defRPr/>
+            </a:pPr>
+            <a:r>
+              <a:rPr lang="fr-FR" sz="800" b="0" i="0" u="none" strike="noStrike" cap="none" spc="0">
+                <a:solidFill>
+                  <a:schemeClr val="tx1">
+                    <a:lumMod val="50000"/>
+                    <a:lumOff val="50000"/>
+                  </a:schemeClr>
+                </a:solidFill>
+                <a:latin typeface="Arial"/>
+                <a:ea typeface="Arial"/>
+                <a:cs typeface="Arial"/>
+              </a:rPr>
+              <a:t>En cas de </a:t>
+            </a:r>
+            <a:r>
+              <a:rPr lang="fr-FR" sz="800" b="1" i="0" u="none" strike="noStrike" cap="none" spc="0">
+                <a:solidFill>
+                  <a:schemeClr val="tx1">
+                    <a:lumMod val="50000"/>
+                    <a:lumOff val="50000"/>
+                  </a:schemeClr>
+                </a:solidFill>
+                <a:latin typeface="Arial"/>
+                <a:ea typeface="Arial"/>
+                <a:cs typeface="Arial"/>
+              </a:rPr>
+              <a:t>test opposé</a:t>
+            </a:r>
+            <a:r>
+              <a:rPr lang="fr-FR" sz="800" b="0" i="0" u="none" strike="noStrike" cap="none" spc="0">
+                <a:solidFill>
+                  <a:schemeClr val="tx1">
+                    <a:lumMod val="50000"/>
+                    <a:lumOff val="50000"/>
+                  </a:schemeClr>
+                </a:solidFill>
+                <a:latin typeface="Arial"/>
+                <a:ea typeface="Arial"/>
+                <a:cs typeface="Arial"/>
+              </a:rPr>
+              <a:t>, celui qui réussi le test et qui obtient le plus haut score au dé est vainqueur.</a:t>
+            </a:r>
             <a:endParaRPr lang="fr-FR" sz="800" b="0" i="0" u="none" strike="noStrike" cap="none" spc="0">
               <a:solidFill>
                 <a:schemeClr val="tx1">
@@ -6451,69 +6566,6 @@
               </a:spcAft>
               <a:defRPr/>
             </a:pPr>
-            <a:endParaRPr sz="200" b="0" i="0" u="none" strike="noStrike" cap="none" spc="0">
-              <a:solidFill>
-                <a:schemeClr val="tx1"/>
-              </a:solidFill>
-              <a:latin typeface="Times New Roman"/>
-              <a:cs typeface="Times New Roman"/>
-            </a:endParaRPr>
-          </a:p>
-          <a:p>
-            <a:pPr marL="0" marR="0" indent="0" algn="l">
-              <a:lnSpc>
-                <a:spcPct val="100000"/>
-              </a:lnSpc>
-              <a:spcBef>
-                <a:spcPts val="0"/>
-              </a:spcBef>
-              <a:spcAft>
-                <a:spcPts val="0"/>
-              </a:spcAft>
-              <a:defRPr/>
-            </a:pPr>
-            <a:r>
-              <a:rPr lang="fr-FR" sz="800" b="0" i="0" u="none" strike="noStrike" cap="none" spc="0">
-                <a:solidFill>
-                  <a:schemeClr val="tx1">
-                    <a:lumMod val="50000"/>
-                    <a:lumOff val="50000"/>
-                  </a:schemeClr>
-                </a:solidFill>
-                <a:latin typeface="Arial"/>
-                <a:ea typeface="Arial"/>
-                <a:cs typeface="Arial"/>
-              </a:rPr>
-              <a:t>En cas de </a:t>
-            </a:r>
-            <a:r>
-              <a:rPr lang="fr-FR" sz="800" b="1" i="0" u="none" strike="noStrike" cap="none" spc="0">
-                <a:solidFill>
-                  <a:schemeClr val="tx1">
-                    <a:lumMod val="50000"/>
-                    <a:lumOff val="50000"/>
-                  </a:schemeClr>
-                </a:solidFill>
-                <a:latin typeface="Arial"/>
-                <a:ea typeface="Arial"/>
-                <a:cs typeface="Arial"/>
-              </a:rPr>
-              <a:t>conflit</a:t>
-            </a:r>
-            <a:r>
-              <a:rPr lang="fr-FR" sz="800" b="0" i="0" u="none" strike="noStrike" cap="none" spc="0">
-                <a:solidFill>
-                  <a:schemeClr val="tx1">
-                    <a:lumMod val="50000"/>
-                    <a:lumOff val="50000"/>
-                  </a:schemeClr>
-                </a:solidFill>
-                <a:latin typeface="Arial"/>
-                <a:ea typeface="Arial"/>
-                <a:cs typeface="Arial"/>
-              </a:rPr>
-              <a:t>, celui qui réussi le test et qui obtient le plus haut score au dé est vainqueur.</a:t>
-            </a:r>
             <a:endParaRPr lang="fr-FR" sz="800" b="0" i="0" u="none" strike="noStrike" cap="none" spc="0">
               <a:solidFill>
                 <a:schemeClr val="tx1">
@@ -6526,36 +6578,11 @@
               <a:cs typeface="Arial"/>
             </a:endParaRPr>
           </a:p>
-          <a:p>
-            <a:pPr marL="0" marR="0" indent="0" algn="l">
-              <a:lnSpc>
-                <a:spcPct val="100000"/>
-              </a:lnSpc>
-              <a:spcBef>
-                <a:spcPts val="0"/>
-              </a:spcBef>
-              <a:spcAft>
-                <a:spcPts val="0"/>
-              </a:spcAft>
-              <a:defRPr/>
-            </a:pPr>
-            <a:endParaRPr lang="fr-FR" sz="800" b="0" i="0" u="none" strike="noStrike" cap="none" spc="0">
-              <a:solidFill>
-                <a:schemeClr val="tx1">
-                  <a:lumMod val="50000"/>
-                  <a:lumOff val="50000"/>
-                </a:schemeClr>
-              </a:solidFill>
-              <a:latin typeface="Arial"/>
-              <a:ea typeface="Arial"/>
-              <a:cs typeface="Arial"/>
-            </a:endParaRPr>
-          </a:p>
         </p:txBody>
       </p:sp>
       <p:sp>
         <p:nvSpPr>
-          <p:cNvPr id="2118428422" name="ZoneTexte 2021443538"/>
+          <p:cNvPr id="940298515" name="ZoneTexte 2021443538"/>
           <p:cNvSpPr txBox="1"/>
           <p:nvPr/>
         </p:nvSpPr>
@@ -6639,7 +6666,7 @@
       </p:sp>
       <p:sp>
         <p:nvSpPr>
-          <p:cNvPr id="1118397053" name="ZoneTexte 1075280509"/>
+          <p:cNvPr id="51888916" name="ZoneTexte 1075280509"/>
           <p:cNvSpPr txBox="1"/>
           <p:nvPr/>
         </p:nvSpPr>
@@ -6723,7 +6750,7 @@
       </p:sp>
       <p:sp>
         <p:nvSpPr>
-          <p:cNvPr id="53678932" name="ZoneTexte 824413856"/>
+          <p:cNvPr id="358970868" name="ZoneTexte 824413856"/>
           <p:cNvSpPr txBox="1"/>
           <p:nvPr/>
         </p:nvSpPr>
@@ -6807,7 +6834,7 @@
       </p:sp>
       <p:sp>
         <p:nvSpPr>
-          <p:cNvPr id="381169258" name="ZoneTexte 1036656844"/>
+          <p:cNvPr id="1334295219" name="ZoneTexte 1036656844"/>
           <p:cNvSpPr txBox="1"/>
           <p:nvPr/>
         </p:nvSpPr>
@@ -6891,7 +6918,7 @@
       </p:sp>
       <p:sp>
         <p:nvSpPr>
-          <p:cNvPr id="2097090235" name="ZoneTexte 226284734"/>
+          <p:cNvPr id="1841481673" name="ZoneTexte 226284734"/>
           <p:cNvSpPr txBox="1"/>
           <p:nvPr/>
         </p:nvSpPr>
@@ -6975,7 +7002,7 @@
       </p:sp>
       <p:sp>
         <p:nvSpPr>
-          <p:cNvPr id="1383532837" name="ZoneTexte 162158187"/>
+          <p:cNvPr id="656071358" name="ZoneTexte 162158187"/>
           <p:cNvSpPr txBox="1"/>
           <p:nvPr/>
         </p:nvSpPr>
@@ -7039,7 +7066,7 @@
       </p:sp>
       <p:sp>
         <p:nvSpPr>
-          <p:cNvPr id="144569684" name="ZoneTexte 1063440096"/>
+          <p:cNvPr id="1502691587" name="ZoneTexte 1063440096"/>
           <p:cNvSpPr txBox="1"/>
           <p:nvPr/>
         </p:nvSpPr>
@@ -7123,7 +7150,7 @@
       </p:sp>
       <p:sp>
         <p:nvSpPr>
-          <p:cNvPr id="889263305" name="ZoneTexte 1564072661"/>
+          <p:cNvPr id="1965368542" name="ZoneTexte 1564072661"/>
           <p:cNvSpPr txBox="1"/>
           <p:nvPr/>
         </p:nvSpPr>
@@ -7207,7 +7234,7 @@
       </p:sp>
       <p:sp>
         <p:nvSpPr>
-          <p:cNvPr id="1034110610" name="ZoneTexte 2102805411"/>
+          <p:cNvPr id="1475065464" name="ZoneTexte 2102805411"/>
           <p:cNvSpPr txBox="1"/>
           <p:nvPr/>
         </p:nvSpPr>
@@ -7291,7 +7318,7 @@
       </p:sp>
       <p:sp>
         <p:nvSpPr>
-          <p:cNvPr id="775325702" name="ZoneTexte 1094420572"/>
+          <p:cNvPr id="826160681" name="ZoneTexte 1094420572"/>
           <p:cNvSpPr txBox="1"/>
           <p:nvPr/>
         </p:nvSpPr>
@@ -7375,7 +7402,7 @@
       </p:sp>
       <p:sp>
         <p:nvSpPr>
-          <p:cNvPr id="1155397355" name="ZoneTexte 1337742717"/>
+          <p:cNvPr id="1417626724" name="ZoneTexte 1337742717"/>
           <p:cNvSpPr txBox="1"/>
           <p:nvPr/>
         </p:nvSpPr>
@@ -7439,7 +7466,7 @@
       </p:sp>
       <p:sp>
         <p:nvSpPr>
-          <p:cNvPr id="1548305526" name="ZoneTexte 1188730172"/>
+          <p:cNvPr id="1078518932" name="ZoneTexte 1188730172"/>
           <p:cNvSpPr txBox="1"/>
           <p:nvPr/>
         </p:nvSpPr>
@@ -7503,7 +7530,7 @@
       </p:sp>
       <p:sp>
         <p:nvSpPr>
-          <p:cNvPr id="499454768" name="Rectangle : avec coins arrondis en haut 1452601499"/>
+          <p:cNvPr id="157286704" name="Rectangle : avec coins arrondis en haut 1452601499"/>
           <p:cNvSpPr/>
           <p:nvPr/>
         </p:nvSpPr>
@@ -7549,7 +7576,7 @@
       </p:sp>
       <p:sp>
         <p:nvSpPr>
-          <p:cNvPr id="1138723688" name="Rectangle : avec coins arrondis en haut 1782110635"/>
+          <p:cNvPr id="1183712085" name="Rectangle : avec coins arrondis en haut 1782110635"/>
           <p:cNvSpPr/>
           <p:nvPr/>
         </p:nvSpPr>
@@ -7595,7 +7622,7 @@
       </p:sp>
       <p:sp>
         <p:nvSpPr>
-          <p:cNvPr id="1960514368" name="Rectangle : avec coins arrondis en haut 945118596"/>
+          <p:cNvPr id="1831747967" name="Rectangle : avec coins arrondis en haut 945118596"/>
           <p:cNvSpPr/>
           <p:nvPr/>
         </p:nvSpPr>
@@ -7641,7 +7668,7 @@
       </p:sp>
       <p:sp>
         <p:nvSpPr>
-          <p:cNvPr id="1392614288" name="Rectangle : avec coins arrondis en haut 500951796"/>
+          <p:cNvPr id="1655154102" name="Rectangle : avec coins arrondis en haut 500951796"/>
           <p:cNvSpPr/>
           <p:nvPr/>
         </p:nvSpPr>
@@ -7687,7 +7714,7 @@
       </p:sp>
       <p:sp>
         <p:nvSpPr>
-          <p:cNvPr id="2073726181" name="Rectangle : avec coins arrondis en haut 203047490"/>
+          <p:cNvPr id="705919691" name="Rectangle : avec coins arrondis en haut 203047490"/>
           <p:cNvSpPr/>
           <p:nvPr/>
         </p:nvSpPr>
@@ -7733,7 +7760,7 @@
       </p:sp>
       <p:sp>
         <p:nvSpPr>
-          <p:cNvPr id="132016040" name="Rectangle : avec coins arrondis en haut 818083012"/>
+          <p:cNvPr id="2119416366" name="Rectangle : avec coins arrondis en haut 818083012"/>
           <p:cNvSpPr/>
           <p:nvPr/>
         </p:nvSpPr>
@@ -7779,7 +7806,7 @@
       </p:sp>
       <p:sp>
         <p:nvSpPr>
-          <p:cNvPr id="147430957" name="Rectangle : avec coins arrondis en haut 310539005"/>
+          <p:cNvPr id="1809229747" name="Rectangle : avec coins arrondis en haut 310539005"/>
           <p:cNvSpPr/>
           <p:nvPr/>
         </p:nvSpPr>
@@ -7825,7 +7852,7 @@
       </p:sp>
       <p:sp>
         <p:nvSpPr>
-          <p:cNvPr id="595939398" name="Rectangle : avec coins arrondis en haut 844307487"/>
+          <p:cNvPr id="167164646" name="Rectangle : avec coins arrondis en haut 844307487"/>
           <p:cNvSpPr/>
           <p:nvPr/>
         </p:nvSpPr>
@@ -7871,7 +7898,7 @@
       </p:sp>
       <p:sp>
         <p:nvSpPr>
-          <p:cNvPr id="442987930" name="Rectangle : avec coins arrondis en haut 1616510051"/>
+          <p:cNvPr id="654924830" name="Rectangle : avec coins arrondis en haut 1616510051"/>
           <p:cNvSpPr/>
           <p:nvPr/>
         </p:nvSpPr>
@@ -7917,7 +7944,7 @@
       </p:sp>
       <p:sp>
         <p:nvSpPr>
-          <p:cNvPr id="995627717" name="Rectangle : avec coins arrondis en haut 1451691637"/>
+          <p:cNvPr id="1548794559" name="Rectangle : avec coins arrondis en haut 1451691637"/>
           <p:cNvSpPr/>
           <p:nvPr/>
         </p:nvSpPr>
@@ -7963,7 +7990,7 @@
       </p:sp>
       <p:sp>
         <p:nvSpPr>
-          <p:cNvPr id="386632115" name="Rectangle : avec coins arrondis en haut 260383743"/>
+          <p:cNvPr id="763086418" name="Rectangle : avec coins arrondis en haut 260383743"/>
           <p:cNvSpPr/>
           <p:nvPr/>
         </p:nvSpPr>
@@ -8009,7 +8036,7 @@
       </p:sp>
       <p:sp>
         <p:nvSpPr>
-          <p:cNvPr id="1625598296" name="Rectangle : avec coins arrondis en haut 1280344391"/>
+          <p:cNvPr id="412564430" name="Rectangle : avec coins arrondis en haut 1280344391"/>
           <p:cNvSpPr/>
           <p:nvPr/>
         </p:nvSpPr>
@@ -8055,7 +8082,7 @@
       </p:sp>
       <p:sp>
         <p:nvSpPr>
-          <p:cNvPr id="459984406" name=""/>
+          <p:cNvPr id="1096664056" name=""/>
           <p:cNvSpPr txBox="1"/>
           <p:nvPr/>
         </p:nvSpPr>
@@ -8179,7 +8206,7 @@
       </p:sp>
       <p:sp>
         <p:nvSpPr>
-          <p:cNvPr id="1375249955" name="ZoneTexte 1440859034"/>
+          <p:cNvPr id="1914346377" name="ZoneTexte 1440859034"/>
           <p:cNvSpPr txBox="1"/>
           <p:nvPr/>
         </p:nvSpPr>
@@ -8221,7 +8248,7 @@
       </p:sp>
       <p:sp>
         <p:nvSpPr>
-          <p:cNvPr id="1165392198" name="ZoneTexte 1440859034"/>
+          <p:cNvPr id="1701843996" name="ZoneTexte 1440859034"/>
           <p:cNvSpPr txBox="1"/>
           <p:nvPr/>
         </p:nvSpPr>
@@ -8260,7 +8287,7 @@
       </p:sp>
       <p:cxnSp>
         <p:nvCxnSpPr>
-          <p:cNvPr id="21906939" name=""/>
+          <p:cNvPr id="50274832" name=""/>
           <p:cNvCxnSpPr/>
           <p:nvPr/>
         </p:nvCxnSpPr>
@@ -8299,7 +8326,7 @@
       </p:cxnSp>
       <p:sp>
         <p:nvSpPr>
-          <p:cNvPr id="1559576383" name=""/>
+          <p:cNvPr id="965266246" name=""/>
           <p:cNvSpPr txBox="1"/>
           <p:nvPr/>
         </p:nvSpPr>
@@ -8463,7 +8490,7 @@
       </p:sp>
       <p:sp>
         <p:nvSpPr>
-          <p:cNvPr id="409586064" name="Rectangle 954364527"/>
+          <p:cNvPr id="2095573868" name="Rectangle 954364527"/>
           <p:cNvSpPr/>
           <p:nvPr/>
         </p:nvSpPr>
@@ -8503,7 +8530,7 @@
       </p:sp>
       <p:sp>
         <p:nvSpPr>
-          <p:cNvPr id="632209026" name="ZoneTexte 1527388901"/>
+          <p:cNvPr id="550998349" name="ZoneTexte 1527388901"/>
           <p:cNvSpPr txBox="1"/>
           <p:nvPr/>
         </p:nvSpPr>
@@ -8663,7 +8690,7 @@
       </p:sp>
       <p:sp>
         <p:nvSpPr>
-          <p:cNvPr id="232746571" name="Rectangle 38344096"/>
+          <p:cNvPr id="1018337220" name="Rectangle 38344096"/>
           <p:cNvSpPr/>
           <p:nvPr/>
         </p:nvSpPr>
@@ -8703,7 +8730,7 @@
       </p:sp>
       <p:sp>
         <p:nvSpPr>
-          <p:cNvPr id="1144654" name=""/>
+          <p:cNvPr id="776125739" name=""/>
           <p:cNvSpPr/>
           <p:nvPr/>
         </p:nvSpPr>
@@ -8774,7 +8801,7 @@
       </p:sp>
       <p:sp>
         <p:nvSpPr>
-          <p:cNvPr id="1638818762" name="Flèche : pentagone 2055848356"/>
+          <p:cNvPr id="348459612" name="Flèche : pentagone 2055848356"/>
           <p:cNvSpPr/>
           <p:nvPr/>
         </p:nvSpPr>
@@ -8819,7 +8846,7 @@
       </p:sp>
       <p:sp>
         <p:nvSpPr>
-          <p:cNvPr id="412227783" name="Flèche : pentagone 1980093981"/>
+          <p:cNvPr id="504718185" name="Flèche : pentagone 1980093981"/>
           <p:cNvSpPr/>
           <p:nvPr/>
         </p:nvSpPr>
@@ -8864,7 +8891,7 @@
       </p:sp>
       <p:sp>
         <p:nvSpPr>
-          <p:cNvPr id="1082499250" name="Flèche : pentagone 905284374"/>
+          <p:cNvPr id="14028971" name="Flèche : pentagone 905284374"/>
           <p:cNvSpPr/>
           <p:nvPr/>
         </p:nvSpPr>
@@ -8909,7 +8936,7 @@
       </p:sp>
       <p:sp>
         <p:nvSpPr>
-          <p:cNvPr id="806435740" name="ZoneTexte 1440859034"/>
+          <p:cNvPr id="2090795282" name="ZoneTexte 1440859034"/>
           <p:cNvSpPr txBox="1"/>
           <p:nvPr/>
         </p:nvSpPr>
@@ -8948,7 +8975,7 @@
       </p:sp>
       <p:sp>
         <p:nvSpPr>
-          <p:cNvPr id="179306724" name="Flèche : pentagone 1880610112"/>
+          <p:cNvPr id="1383741428" name="Flèche : pentagone 1880610112"/>
           <p:cNvSpPr/>
           <p:nvPr/>
         </p:nvSpPr>
@@ -8993,7 +9020,7 @@
       </p:sp>
       <p:sp>
         <p:nvSpPr>
-          <p:cNvPr id="1036864690" name="Flèche : pentagone 446859139"/>
+          <p:cNvPr id="1824497955" name="Flèche : pentagone 446859139"/>
           <p:cNvSpPr/>
           <p:nvPr/>
         </p:nvSpPr>
@@ -9038,7 +9065,7 @@
       </p:sp>
       <p:sp>
         <p:nvSpPr>
-          <p:cNvPr id="1235574988" name="Flèche : pentagone 2055848356"/>
+          <p:cNvPr id="1306819546" name="Flèche : pentagone 2055848356"/>
           <p:cNvSpPr/>
           <p:nvPr/>
         </p:nvSpPr>
@@ -9083,7 +9110,7 @@
       </p:sp>
       <p:sp>
         <p:nvSpPr>
-          <p:cNvPr id="562523930" name="Flèche : pentagone 1980093981"/>
+          <p:cNvPr id="973063630" name="Flèche : pentagone 1980093981"/>
           <p:cNvSpPr/>
           <p:nvPr/>
         </p:nvSpPr>
@@ -9128,7 +9155,7 @@
       </p:sp>
       <p:sp>
         <p:nvSpPr>
-          <p:cNvPr id="1481875302" name="Flèche : pentagone 905284374"/>
+          <p:cNvPr id="2127240908" name="Flèche : pentagone 905284374"/>
           <p:cNvSpPr/>
           <p:nvPr/>
         </p:nvSpPr>
@@ -9173,7 +9200,7 @@
       </p:sp>
       <p:sp>
         <p:nvSpPr>
-          <p:cNvPr id="466358085" name="ZoneTexte 1440859034"/>
+          <p:cNvPr id="493891317" name="ZoneTexte 1440859034"/>
           <p:cNvSpPr txBox="1"/>
           <p:nvPr/>
         </p:nvSpPr>
@@ -9212,7 +9239,7 @@
       </p:sp>
       <p:sp>
         <p:nvSpPr>
-          <p:cNvPr id="900618495" name="Flèche : pentagone 2055848356"/>
+          <p:cNvPr id="1642814078" name="Flèche : pentagone 2055848356"/>
           <p:cNvSpPr/>
           <p:nvPr/>
         </p:nvSpPr>
@@ -9257,7 +9284,7 @@
       </p:sp>
       <p:sp>
         <p:nvSpPr>
-          <p:cNvPr id="540669760" name="Flèche : pentagone 1980093981"/>
+          <p:cNvPr id="2090202873" name="Flèche : pentagone 1980093981"/>
           <p:cNvSpPr/>
           <p:nvPr/>
         </p:nvSpPr>
@@ -9302,7 +9329,7 @@
       </p:sp>
       <p:sp>
         <p:nvSpPr>
-          <p:cNvPr id="644611589" name="Flèche : pentagone 905284374"/>
+          <p:cNvPr id="350052829" name="Flèche : pentagone 905284374"/>
           <p:cNvSpPr/>
           <p:nvPr/>
         </p:nvSpPr>
@@ -9347,7 +9374,7 @@
       </p:sp>
       <p:sp>
         <p:nvSpPr>
-          <p:cNvPr id="1911182902" name="ZoneTexte 1440859034"/>
+          <p:cNvPr id="862852539" name="ZoneTexte 1440859034"/>
           <p:cNvSpPr txBox="1"/>
           <p:nvPr/>
         </p:nvSpPr>
@@ -9386,7 +9413,7 @@
       </p:sp>
       <p:sp>
         <p:nvSpPr>
-          <p:cNvPr id="867304022" name=""/>
+          <p:cNvPr id="1074846463" name=""/>
           <p:cNvSpPr txBox="1"/>
           <p:nvPr/>
         </p:nvSpPr>
@@ -9550,7 +9577,7 @@
       </p:sp>
       <p:sp>
         <p:nvSpPr>
-          <p:cNvPr id="990033117" name=""/>
+          <p:cNvPr id="1470432610" name=""/>
           <p:cNvSpPr txBox="1"/>
           <p:nvPr/>
         </p:nvSpPr>
@@ -9714,7 +9741,7 @@
       </p:sp>
       <p:sp>
         <p:nvSpPr>
-          <p:cNvPr id="2052020826" name=""/>
+          <p:cNvPr id="1552225962" name=""/>
           <p:cNvSpPr txBox="1"/>
           <p:nvPr/>
         </p:nvSpPr>
@@ -9911,7 +9938,7 @@
       </p:grpSpPr>
       <p:sp>
         <p:nvSpPr>
-          <p:cNvPr id="1589547125" name=""/>
+          <p:cNvPr id="1524678108" name=""/>
           <p:cNvSpPr/>
           <p:nvPr/>
         </p:nvSpPr>
@@ -9954,7 +9981,7 @@
       </p:sp>
       <p:sp>
         <p:nvSpPr>
-          <p:cNvPr id="657258373" name=""/>
+          <p:cNvPr id="402836655" name=""/>
           <p:cNvSpPr txBox="1"/>
           <p:nvPr/>
         </p:nvSpPr>
@@ -10020,7 +10047,7 @@
       </p:sp>
       <p:cxnSp>
         <p:nvCxnSpPr>
-          <p:cNvPr id="2076048455" name="Connecteur droit 1568760680"/>
+          <p:cNvPr id="1399007637" name="Connecteur droit 1568760680"/>
           <p:cNvCxnSpPr/>
           <p:nvPr/>
         </p:nvCxnSpPr>
@@ -10062,7 +10089,7 @@
       </p:cxnSp>
       <p:sp>
         <p:nvSpPr>
-          <p:cNvPr id="332779699" name="ZoneTexte 1868728971"/>
+          <p:cNvPr id="999382871" name="ZoneTexte 1868728971"/>
           <p:cNvSpPr txBox="1"/>
           <p:nvPr/>
         </p:nvSpPr>
@@ -10102,7 +10129,7 @@
       </p:sp>
       <p:cxnSp>
         <p:nvCxnSpPr>
-          <p:cNvPr id="849235761" name="Connecteur droit 806540798"/>
+          <p:cNvPr id="57371088" name="Connecteur droit 806540798"/>
           <p:cNvCxnSpPr/>
           <p:nvPr/>
         </p:nvCxnSpPr>
@@ -10144,7 +10171,7 @@
       </p:cxnSp>
       <p:sp>
         <p:nvSpPr>
-          <p:cNvPr id="1212292529" name="ZoneTexte 406616703"/>
+          <p:cNvPr id="598003385" name="ZoneTexte 406616703"/>
           <p:cNvSpPr txBox="1"/>
           <p:nvPr/>
         </p:nvSpPr>
@@ -10184,7 +10211,7 @@
       </p:sp>
       <p:sp>
         <p:nvSpPr>
-          <p:cNvPr id="1243223720" name="ZoneTexte 1302587497"/>
+          <p:cNvPr id="2146932976" name="ZoneTexte 1302587497"/>
           <p:cNvSpPr txBox="1"/>
           <p:nvPr/>
         </p:nvSpPr>
@@ -10388,7 +10415,7 @@
       </p:sp>
       <p:sp>
         <p:nvSpPr>
-          <p:cNvPr id="841561227" name="Rectangle 38344096"/>
+          <p:cNvPr id="1894303040" name="Rectangle 38344096"/>
           <p:cNvSpPr/>
           <p:nvPr/>
         </p:nvSpPr>
@@ -10428,7 +10455,7 @@
       </p:sp>
       <p:sp>
         <p:nvSpPr>
-          <p:cNvPr id="1355090274" name="ZoneTexte 1075280509"/>
+          <p:cNvPr id="133073043" name="ZoneTexte 1075280509"/>
           <p:cNvSpPr txBox="1"/>
           <p:nvPr/>
         </p:nvSpPr>
@@ -10501,7 +10528,7 @@
       </p:sp>
       <p:sp>
         <p:nvSpPr>
-          <p:cNvPr id="2012799497" name="ZoneTexte 226284734"/>
+          <p:cNvPr id="646449508" name="ZoneTexte 226284734"/>
           <p:cNvSpPr txBox="1"/>
           <p:nvPr/>
         </p:nvSpPr>
@@ -10574,7 +10601,7 @@
       </p:sp>
       <p:sp>
         <p:nvSpPr>
-          <p:cNvPr id="481263249" name="ZoneTexte 162158187"/>
+          <p:cNvPr id="1368667371" name="ZoneTexte 162158187"/>
           <p:cNvSpPr txBox="1"/>
           <p:nvPr/>
         </p:nvSpPr>
@@ -10624,7 +10651,7 @@
       </p:sp>
       <p:sp>
         <p:nvSpPr>
-          <p:cNvPr id="665404061" name="Rectangle : avec coins arrondis en haut 1452601499"/>
+          <p:cNvPr id="1744230420" name="Rectangle : avec coins arrondis en haut 1452601499"/>
           <p:cNvSpPr/>
           <p:nvPr/>
         </p:nvSpPr>
@@ -10667,7 +10694,7 @@
       </p:sp>
       <p:sp>
         <p:nvSpPr>
-          <p:cNvPr id="1516003078" name="Rectangle : avec coins arrondis en haut 1782110635"/>
+          <p:cNvPr id="329756119" name="Rectangle : avec coins arrondis en haut 1782110635"/>
           <p:cNvSpPr/>
           <p:nvPr/>
         </p:nvSpPr>
@@ -10713,7 +10740,7 @@
       </p:sp>
       <p:sp>
         <p:nvSpPr>
-          <p:cNvPr id="1769615234" name="Rectangle : avec coins arrondis en haut 945118596"/>
+          <p:cNvPr id="2109786519" name="Rectangle : avec coins arrondis en haut 945118596"/>
           <p:cNvSpPr/>
           <p:nvPr/>
         </p:nvSpPr>
@@ -10759,7 +10786,7 @@
       </p:sp>
       <p:sp>
         <p:nvSpPr>
-          <p:cNvPr id="1615022777" name=""/>
+          <p:cNvPr id="1707703278" name=""/>
           <p:cNvSpPr/>
           <p:nvPr/>
         </p:nvSpPr>
@@ -10801,7 +10828,7 @@
       </p:sp>
       <p:sp>
         <p:nvSpPr>
-          <p:cNvPr id="392219449" name=""/>
+          <p:cNvPr id="464253283" name=""/>
           <p:cNvSpPr txBox="1"/>
           <p:nvPr/>
         </p:nvSpPr>
@@ -10841,7 +10868,7 @@
       </p:sp>
       <p:sp>
         <p:nvSpPr>
-          <p:cNvPr id="663718787" name=""/>
+          <p:cNvPr id="1036353486" name=""/>
           <p:cNvSpPr/>
           <p:nvPr/>
         </p:nvSpPr>
@@ -10912,7 +10939,7 @@
       </p:sp>
       <p:sp>
         <p:nvSpPr>
-          <p:cNvPr id="370804005" name=""/>
+          <p:cNvPr id="765709985" name=""/>
           <p:cNvSpPr txBox="1"/>
           <p:nvPr/>
         </p:nvSpPr>
@@ -10949,7 +10976,7 @@
       </p:sp>
       <p:sp>
         <p:nvSpPr>
-          <p:cNvPr id="2118689286" name=""/>
+          <p:cNvPr id="1532078588" name=""/>
           <p:cNvSpPr txBox="1"/>
           <p:nvPr/>
         </p:nvSpPr>
@@ -11183,7 +11210,7 @@
       </p:sp>
       <p:sp>
         <p:nvSpPr>
-          <p:cNvPr id="2133854576" name=""/>
+          <p:cNvPr id="451198303" name=""/>
           <p:cNvSpPr txBox="1"/>
           <p:nvPr/>
         </p:nvSpPr>
@@ -11462,7 +11489,7 @@
       </p:sp>
       <p:sp>
         <p:nvSpPr>
-          <p:cNvPr id="2031695712" name=""/>
+          <p:cNvPr id="1912501249" name=""/>
           <p:cNvSpPr txBox="1"/>
           <p:nvPr/>
         </p:nvSpPr>
@@ -11853,7 +11880,7 @@
       </p:sp>
       <p:sp>
         <p:nvSpPr>
-          <p:cNvPr id="138702694" name=""/>
+          <p:cNvPr id="1502078870" name=""/>
           <p:cNvSpPr txBox="1"/>
           <p:nvPr/>
         </p:nvSpPr>
@@ -12244,7 +12271,7 @@
       </p:sp>
       <p:sp>
         <p:nvSpPr>
-          <p:cNvPr id="1477642555" name=""/>
+          <p:cNvPr id="186913155" name=""/>
           <p:cNvSpPr txBox="1"/>
           <p:nvPr/>
         </p:nvSpPr>
@@ -12635,7 +12662,7 @@
       </p:sp>
       <p:sp>
         <p:nvSpPr>
-          <p:cNvPr id="1328735186" name=""/>
+          <p:cNvPr id="1930975617" name=""/>
           <p:cNvSpPr txBox="1"/>
           <p:nvPr/>
         </p:nvSpPr>
@@ -13026,7 +13053,7 @@
       </p:sp>
       <p:sp>
         <p:nvSpPr>
-          <p:cNvPr id="2023199793" name=""/>
+          <p:cNvPr id="5806924" name=""/>
           <p:cNvSpPr txBox="1"/>
           <p:nvPr/>
         </p:nvSpPr>
@@ -13417,7 +13444,7 @@
       </p:sp>
       <p:sp>
         <p:nvSpPr>
-          <p:cNvPr id="1573270285" name=""/>
+          <p:cNvPr id="530456556" name=""/>
           <p:cNvSpPr txBox="1"/>
           <p:nvPr/>
         </p:nvSpPr>
@@ -13808,7 +13835,7 @@
       </p:sp>
       <p:sp>
         <p:nvSpPr>
-          <p:cNvPr id="698945592" name=""/>
+          <p:cNvPr id="1033313841" name=""/>
           <p:cNvSpPr txBox="1"/>
           <p:nvPr/>
         </p:nvSpPr>
@@ -14199,7 +14226,7 @@
       </p:sp>
       <p:sp>
         <p:nvSpPr>
-          <p:cNvPr id="30497442" name=""/>
+          <p:cNvPr id="1407175926" name=""/>
           <p:cNvSpPr txBox="1"/>
           <p:nvPr/>
         </p:nvSpPr>
@@ -14590,7 +14617,7 @@
       </p:sp>
       <p:sp>
         <p:nvSpPr>
-          <p:cNvPr id="1265926190" name=""/>
+          <p:cNvPr id="1008891577" name=""/>
           <p:cNvSpPr txBox="1"/>
           <p:nvPr/>
         </p:nvSpPr>
@@ -14981,7 +15008,7 @@
       </p:sp>
       <p:sp>
         <p:nvSpPr>
-          <p:cNvPr id="1106888677" name=""/>
+          <p:cNvPr id="921423285" name=""/>
           <p:cNvSpPr txBox="1"/>
           <p:nvPr/>
         </p:nvSpPr>
@@ -15372,7 +15399,7 @@
       </p:sp>
       <p:sp>
         <p:nvSpPr>
-          <p:cNvPr id="554333878" name=""/>
+          <p:cNvPr id="950221227" name=""/>
           <p:cNvSpPr txBox="1"/>
           <p:nvPr/>
         </p:nvSpPr>
@@ -15763,7 +15790,7 @@
       </p:sp>
       <p:sp>
         <p:nvSpPr>
-          <p:cNvPr id="1426604268" name=""/>
+          <p:cNvPr id="688143852" name=""/>
           <p:cNvSpPr txBox="1"/>
           <p:nvPr/>
         </p:nvSpPr>
@@ -16154,7 +16181,7 @@
       </p:sp>
       <p:sp>
         <p:nvSpPr>
-          <p:cNvPr id="1254178923" name=""/>
+          <p:cNvPr id="644892482" name=""/>
           <p:cNvSpPr txBox="1"/>
           <p:nvPr/>
         </p:nvSpPr>
@@ -16545,7 +16572,7 @@
       </p:sp>
       <p:sp>
         <p:nvSpPr>
-          <p:cNvPr id="1227957535" name=""/>
+          <p:cNvPr id="660628825" name=""/>
           <p:cNvSpPr txBox="1"/>
           <p:nvPr/>
         </p:nvSpPr>
@@ -16936,14 +16963,14 @@
       </p:sp>
       <p:sp>
         <p:nvSpPr>
-          <p:cNvPr id="1969757910" name=""/>
+          <p:cNvPr id="1833851477" name=""/>
           <p:cNvSpPr txBox="1"/>
           <p:nvPr/>
         </p:nvSpPr>
         <p:spPr bwMode="auto">
           <a:xfrm rot="0" flipH="0" flipV="0">
-            <a:off x="58496" y="7331037"/>
-            <a:ext cx="6716677" cy="701399"/>
+            <a:off x="58495" y="7331036"/>
+            <a:ext cx="6723876" cy="701399"/>
           </a:xfrm>
           <a:prstGeom prst="rect">
             <a:avLst/>
@@ -16987,7 +17014,7 @@
                 <a:ea typeface="Arial"/>
                 <a:cs typeface="Arial"/>
               </a:rPr>
-              <a:t>Côtoyer le personnage</a:t>
+              <a:t>Évaluer la relation</a:t>
             </a:r>
             <a:r>
               <a:rPr lang="fr-FR" sz="800" b="0" i="0" u="none" strike="noStrike" cap="none" spc="0">
@@ -17094,7 +17121,7 @@
       </p:sp>
       <p:cxnSp>
         <p:nvCxnSpPr>
-          <p:cNvPr id="524023175" name="Connecteur droit 806540798"/>
+          <p:cNvPr id="521518901" name="Connecteur droit 806540798"/>
           <p:cNvCxnSpPr/>
           <p:nvPr/>
         </p:nvCxnSpPr>
@@ -17136,7 +17163,7 @@
       </p:cxnSp>
       <p:sp>
         <p:nvSpPr>
-          <p:cNvPr id="1616566078" name="ZoneTexte 406616703"/>
+          <p:cNvPr id="575583547" name="ZoneTexte 406616703"/>
           <p:cNvSpPr txBox="1"/>
           <p:nvPr/>
         </p:nvSpPr>
@@ -17176,7 +17203,7 @@
       </p:sp>
       <p:sp>
         <p:nvSpPr>
-          <p:cNvPr id="231002670" name=""/>
+          <p:cNvPr id="1314500193" name=""/>
           <p:cNvSpPr txBox="1"/>
           <p:nvPr/>
         </p:nvSpPr>
@@ -17275,7 +17302,7 @@
       </p:grpSpPr>
       <p:cxnSp>
         <p:nvCxnSpPr>
-          <p:cNvPr id="126098952" name="Connecteur droit 266926011"/>
+          <p:cNvPr id="1792529884" name="Connecteur droit 266926011"/>
           <p:cNvCxnSpPr/>
           <p:nvPr/>
         </p:nvCxnSpPr>
@@ -17317,7 +17344,7 @@
       </p:cxnSp>
       <p:sp>
         <p:nvSpPr>
-          <p:cNvPr id="174765529" name="ZoneTexte 1043763612"/>
+          <p:cNvPr id="1160846419" name="ZoneTexte 1043763612"/>
           <p:cNvSpPr txBox="1"/>
           <p:nvPr/>
         </p:nvSpPr>
@@ -17357,7 +17384,7 @@
       </p:sp>
       <p:cxnSp>
         <p:nvCxnSpPr>
-          <p:cNvPr id="1241821866" name="Connecteur droit 1586327141"/>
+          <p:cNvPr id="306792536" name="Connecteur droit 1586327141"/>
           <p:cNvCxnSpPr/>
           <p:nvPr/>
         </p:nvCxnSpPr>
@@ -17400,7 +17427,7 @@
       </p:cxnSp>
       <p:sp>
         <p:nvSpPr>
-          <p:cNvPr id="1885052967" name="ZoneTexte 1691387439"/>
+          <p:cNvPr id="1296378902" name="ZoneTexte 1691387439"/>
           <p:cNvSpPr txBox="1"/>
           <p:nvPr/>
         </p:nvSpPr>
@@ -17440,7 +17467,7 @@
       </p:sp>
       <p:cxnSp>
         <p:nvCxnSpPr>
-          <p:cNvPr id="1944247821" name="Connecteur droit 1743707585"/>
+          <p:cNvPr id="119876008" name="Connecteur droit 1743707585"/>
           <p:cNvCxnSpPr/>
           <p:nvPr/>
         </p:nvCxnSpPr>
@@ -17483,7 +17510,7 @@
       </p:cxnSp>
       <p:sp>
         <p:nvSpPr>
-          <p:cNvPr id="2111962080" name="ZoneTexte 1503300725"/>
+          <p:cNvPr id="1670220913" name="ZoneTexte 1503300725"/>
           <p:cNvSpPr txBox="1"/>
           <p:nvPr/>
         </p:nvSpPr>
@@ -17565,7 +17592,7 @@
       </p:sp>
       <p:sp>
         <p:nvSpPr>
-          <p:cNvPr id="1295557076" name="Rectangle : avec coins arrondis en haut 1151560973"/>
+          <p:cNvPr id="1118454174" name="Rectangle : avec coins arrondis en haut 1151560973"/>
           <p:cNvSpPr/>
           <p:nvPr/>
         </p:nvSpPr>
@@ -17611,7 +17638,7 @@
       </p:sp>
       <p:sp>
         <p:nvSpPr>
-          <p:cNvPr id="783214497" name="Flèche : pentagone 1610574377"/>
+          <p:cNvPr id="41553612" name="Flèche : pentagone 1610574377"/>
           <p:cNvSpPr/>
           <p:nvPr/>
         </p:nvSpPr>
@@ -17656,7 +17683,7 @@
       </p:sp>
       <p:sp>
         <p:nvSpPr>
-          <p:cNvPr id="531035494" name="Flèche : pentagone 463861063"/>
+          <p:cNvPr id="1539439595" name="Flèche : pentagone 463861063"/>
           <p:cNvSpPr/>
           <p:nvPr/>
         </p:nvSpPr>
@@ -17701,7 +17728,7 @@
       </p:sp>
       <p:sp>
         <p:nvSpPr>
-          <p:cNvPr id="1560761990" name="Flèche : pentagone 272004907"/>
+          <p:cNvPr id="1315082865" name="Flèche : pentagone 272004907"/>
           <p:cNvSpPr/>
           <p:nvPr/>
         </p:nvSpPr>
@@ -17746,7 +17773,7 @@
       </p:sp>
       <p:sp>
         <p:nvSpPr>
-          <p:cNvPr id="143693350" name="Flèche : pentagone 28174069"/>
+          <p:cNvPr id="1430271889" name="Flèche : pentagone 28174069"/>
           <p:cNvSpPr/>
           <p:nvPr/>
         </p:nvSpPr>
@@ -17791,7 +17818,7 @@
       </p:sp>
       <p:sp>
         <p:nvSpPr>
-          <p:cNvPr id="629186780" name="Flèche : pentagone 978127220"/>
+          <p:cNvPr id="1499318014" name="Flèche : pentagone 978127220"/>
           <p:cNvSpPr/>
           <p:nvPr/>
         </p:nvSpPr>
@@ -17836,7 +17863,7 @@
       </p:sp>
       <p:sp>
         <p:nvSpPr>
-          <p:cNvPr id="2111811090" name="ZoneTexte 1693594013"/>
+          <p:cNvPr id="234007241" name="ZoneTexte 1693594013"/>
           <p:cNvSpPr txBox="1"/>
           <p:nvPr/>
         </p:nvSpPr>
@@ -18187,7 +18214,7 @@
       </p:sp>
       <p:sp>
         <p:nvSpPr>
-          <p:cNvPr id="538453532" name="ZoneTexte 1975797288"/>
+          <p:cNvPr id="1595470385" name="ZoneTexte 1975797288"/>
           <p:cNvSpPr txBox="1"/>
           <p:nvPr/>
         </p:nvSpPr>
@@ -18227,7 +18254,7 @@
       </p:sp>
       <p:sp>
         <p:nvSpPr>
-          <p:cNvPr id="1644733668" name="ZoneTexte 2064865984"/>
+          <p:cNvPr id="1059120077" name="ZoneTexte 2064865984"/>
           <p:cNvSpPr txBox="1"/>
           <p:nvPr/>
         </p:nvSpPr>
@@ -18492,14 +18519,14 @@
       </p:sp>
       <p:sp>
         <p:nvSpPr>
-          <p:cNvPr id="1021455280" name="ZoneTexte 1387173154"/>
+          <p:cNvPr id="1755946503" name="ZoneTexte 1387173154"/>
           <p:cNvSpPr txBox="1"/>
           <p:nvPr/>
         </p:nvSpPr>
         <p:spPr bwMode="auto">
           <a:xfrm>
-            <a:off x="1933039" y="2883556"/>
-            <a:ext cx="2299462" cy="2347319"/>
+            <a:off x="1933038" y="2883555"/>
+            <a:ext cx="2323221" cy="2469238"/>
           </a:xfrm>
           <a:prstGeom prst="rect">
             <a:avLst/>
@@ -18813,7 +18840,35 @@
                 <a:ea typeface="Arial"/>
                 <a:cs typeface="Arial"/>
               </a:rPr>
-              <a:t>et pouvez vous relever une fois durant une scène si vous aviez été mis hors-combat.</a:t>
+              <a:t>et pouvez </a:t>
+            </a:r>
+            <a:r>
+              <a:rPr lang="fr-FR" sz="800" b="1" i="0" u="none" strike="noStrike" cap="none" spc="0">
+                <a:solidFill>
+                  <a:schemeClr val="tx1">
+                    <a:lumMod val="50000"/>
+                    <a:lumOff val="50000"/>
+                  </a:schemeClr>
+                </a:solidFill>
+                <a:latin typeface="Arial"/>
+                <a:ea typeface="Arial"/>
+                <a:cs typeface="Arial"/>
+              </a:rPr>
+              <a:t>vous relever</a:t>
+            </a:r>
+            <a:r>
+              <a:rPr lang="fr-FR" sz="800" b="0" i="0" u="none" strike="noStrike" cap="none" spc="0">
+                <a:solidFill>
+                  <a:schemeClr val="tx1">
+                    <a:lumMod val="50000"/>
+                    <a:lumOff val="50000"/>
+                  </a:schemeClr>
+                </a:solidFill>
+                <a:latin typeface="Arial"/>
+                <a:ea typeface="Arial"/>
+                <a:cs typeface="Arial"/>
+              </a:rPr>
+              <a:t> une fois durant une scène si vous aviez été mis hors-combat en cochant une case de rage.</a:t>
             </a:r>
             <a:r>
               <a:rPr lang="fr-FR" sz="800" b="0" i="0" u="none" strike="noStrike" cap="none" spc="0">
@@ -18844,14 +18899,14 @@
       </p:sp>
       <p:sp>
         <p:nvSpPr>
-          <p:cNvPr id="837886643" name="ZoneTexte 523755832"/>
+          <p:cNvPr id="1488636219" name="ZoneTexte 523755832"/>
           <p:cNvSpPr txBox="1"/>
           <p:nvPr/>
         </p:nvSpPr>
         <p:spPr bwMode="auto">
           <a:xfrm flipH="0" flipV="0">
-            <a:off x="4180723" y="2883555"/>
-            <a:ext cx="2714166" cy="2469238"/>
+            <a:off x="4180722" y="2883555"/>
+            <a:ext cx="2719206" cy="2591159"/>
           </a:xfrm>
           <a:prstGeom prst="rect">
             <a:avLst/>
@@ -19157,7 +19212,49 @@
                 <a:ea typeface="Arial"/>
                 <a:cs typeface="Arial"/>
               </a:rPr>
-              <a:t>et pouvez vous relever une fois durant une scène si vous aviez été mis hors-combat.</a:t>
+              <a:t>et pouvez </a:t>
+            </a:r>
+            <a:r>
+              <a:rPr lang="fr-FR" sz="800" b="1" i="0" u="none" strike="noStrike" cap="none" spc="0">
+                <a:solidFill>
+                  <a:schemeClr val="tx1">
+                    <a:lumMod val="50000"/>
+                    <a:lumOff val="50000"/>
+                  </a:schemeClr>
+                </a:solidFill>
+                <a:latin typeface="Arial"/>
+                <a:ea typeface="Arial"/>
+                <a:cs typeface="Arial"/>
+              </a:rPr>
+              <a:t>vous relever</a:t>
+            </a:r>
+            <a:r>
+              <a:rPr lang="fr-FR" sz="800" b="0" i="0" u="none" strike="noStrike" cap="none" spc="0">
+                <a:solidFill>
+                  <a:schemeClr val="tx1">
+                    <a:lumMod val="50000"/>
+                    <a:lumOff val="50000"/>
+                  </a:schemeClr>
+                </a:solidFill>
+                <a:latin typeface="Arial"/>
+                <a:ea typeface="Arial"/>
+                <a:cs typeface="Arial"/>
+              </a:rPr>
+              <a:t> une fois durant une scène si vous aviez été mis hors-combat en cochant</a:t>
+            </a:r>
+            <a:r>
+              <a:rPr lang="fr-FR" sz="800" b="0" i="0" u="none" strike="noStrike" cap="none" spc="0">
+                <a:solidFill>
+                  <a:schemeClr val="tx1">
+                    <a:lumMod val="50000"/>
+                    <a:lumOff val="50000"/>
+                  </a:schemeClr>
+                </a:solidFill>
+                <a:latin typeface="Arial"/>
+                <a:ea typeface="Arial"/>
+                <a:cs typeface="Arial"/>
+              </a:rPr>
+              <a:t> une case de rage</a:t>
             </a:r>
             <a:r>
               <a:rPr lang="fr-FR" sz="800" b="0" i="0" u="none" strike="noStrike" cap="none" spc="0">
@@ -19298,7 +19395,7 @@
       </p:sp>
       <p:cxnSp>
         <p:nvCxnSpPr>
-          <p:cNvPr id="1150637642" name="Connecteur droit 2085669542"/>
+          <p:cNvPr id="365169606" name="Connecteur droit 2085669542"/>
           <p:cNvCxnSpPr/>
           <p:nvPr/>
         </p:nvCxnSpPr>
@@ -19341,7 +19438,7 @@
       </p:cxnSp>
       <p:sp>
         <p:nvSpPr>
-          <p:cNvPr id="596973147" name="ZoneTexte 34398067"/>
+          <p:cNvPr id="1639312917" name="ZoneTexte 34398067"/>
           <p:cNvSpPr txBox="1"/>
           <p:nvPr/>
         </p:nvSpPr>
@@ -19384,7 +19481,7 @@
       </p:sp>
       <p:sp>
         <p:nvSpPr>
-          <p:cNvPr id="1760055459" name="ZoneTexte 273581705"/>
+          <p:cNvPr id="1345233866" name="ZoneTexte 273581705"/>
           <p:cNvSpPr txBox="1"/>
           <p:nvPr/>
         </p:nvSpPr>
@@ -19682,7 +19779,7 @@
       </p:sp>
       <p:sp>
         <p:nvSpPr>
-          <p:cNvPr id="1478362665" name="ZoneTexte 1727393832"/>
+          <p:cNvPr id="1313799576" name="ZoneTexte 1727393832"/>
           <p:cNvSpPr txBox="1"/>
           <p:nvPr/>
         </p:nvSpPr>
@@ -19724,7 +19821,7 @@
       </p:sp>
       <p:sp>
         <p:nvSpPr>
-          <p:cNvPr id="127909586" name="ZoneTexte 504516740"/>
+          <p:cNvPr id="831953589" name="ZoneTexte 504516740"/>
           <p:cNvSpPr txBox="1"/>
           <p:nvPr/>
         </p:nvSpPr>
@@ -19766,7 +19863,7 @@
       </p:sp>
       <p:sp>
         <p:nvSpPr>
-          <p:cNvPr id="2092722964" name="ZoneTexte 1"/>
+          <p:cNvPr id="378985949" name="ZoneTexte 1"/>
           <p:cNvSpPr txBox="1"/>
           <p:nvPr/>
         </p:nvSpPr>
@@ -21229,7 +21326,7 @@
       </p:sp>
       <p:sp>
         <p:nvSpPr>
-          <p:cNvPr id="679305318" name="ZoneTexte 2"/>
+          <p:cNvPr id="773542412" name="ZoneTexte 2"/>
           <p:cNvSpPr txBox="1"/>
           <p:nvPr/>
         </p:nvSpPr>
@@ -21767,7 +21864,7 @@
       </p:sp>
       <p:sp>
         <p:nvSpPr>
-          <p:cNvPr id="1129361454" name=""/>
+          <p:cNvPr id="785592782" name=""/>
           <p:cNvSpPr/>
           <p:nvPr/>
         </p:nvSpPr>
@@ -21807,7 +21904,7 @@
       </p:sp>
       <p:sp>
         <p:nvSpPr>
-          <p:cNvPr id="1436133240" name="Rectangle : avec coins arrondis en haut 1151560973"/>
+          <p:cNvPr id="1398821124" name="Rectangle : avec coins arrondis en haut 1151560973"/>
           <p:cNvSpPr/>
           <p:nvPr/>
         </p:nvSpPr>
@@ -21855,7 +21952,7 @@
       </p:sp>
       <p:sp>
         <p:nvSpPr>
-          <p:cNvPr id="2116743757" name=""/>
+          <p:cNvPr id="1368699706" name=""/>
           <p:cNvSpPr/>
           <p:nvPr/>
         </p:nvSpPr>
@@ -21895,7 +21992,7 @@
       </p:sp>
       <p:sp>
         <p:nvSpPr>
-          <p:cNvPr id="1967023357" name="Rectangle : avec coins arrondis en haut 1151560973"/>
+          <p:cNvPr id="1037111042" name="Rectangle : avec coins arrondis en haut 1151560973"/>
           <p:cNvSpPr/>
           <p:nvPr/>
         </p:nvSpPr>
@@ -21943,7 +22040,7 @@
       </p:sp>
       <p:sp>
         <p:nvSpPr>
-          <p:cNvPr id="381619709" name=""/>
+          <p:cNvPr id="1108441913" name=""/>
           <p:cNvSpPr/>
           <p:nvPr/>
         </p:nvSpPr>
@@ -21983,7 +22080,7 @@
       </p:sp>
       <p:sp>
         <p:nvSpPr>
-          <p:cNvPr id="1860510733" name="Rectangle : avec coins arrondis en haut 1151560973"/>
+          <p:cNvPr id="1906376223" name="Rectangle : avec coins arrondis en haut 1151560973"/>
           <p:cNvSpPr/>
           <p:nvPr/>
         </p:nvSpPr>
@@ -22031,7 +22128,7 @@
       </p:sp>
       <p:sp>
         <p:nvSpPr>
-          <p:cNvPr id="1041842579" name=""/>
+          <p:cNvPr id="1196620907" name=""/>
           <p:cNvSpPr txBox="1"/>
           <p:nvPr/>
         </p:nvSpPr>
@@ -22096,7 +22193,7 @@
       </p:sp>
       <p:sp>
         <p:nvSpPr>
-          <p:cNvPr id="53779348" name=""/>
+          <p:cNvPr id="936783434" name=""/>
           <p:cNvSpPr txBox="1"/>
           <p:nvPr/>
         </p:nvSpPr>
@@ -22225,7 +22322,7 @@
       </p:sp>
       <p:sp>
         <p:nvSpPr>
-          <p:cNvPr id="102288365" name=""/>
+          <p:cNvPr id="449518127" name=""/>
           <p:cNvSpPr/>
           <p:nvPr/>
         </p:nvSpPr>
@@ -22296,7 +22393,7 @@
       </p:sp>
       <p:sp>
         <p:nvSpPr>
-          <p:cNvPr id="2121464712" name="Flèche : pentagone 1610574377"/>
+          <p:cNvPr id="1117985357" name="Flèche : pentagone 1610574377"/>
           <p:cNvSpPr/>
           <p:nvPr/>
         </p:nvSpPr>
@@ -22341,7 +22438,7 @@
       </p:sp>
       <p:sp>
         <p:nvSpPr>
-          <p:cNvPr id="415551053" name="Flèche : pentagone 463861063"/>
+          <p:cNvPr id="681253260" name="Flèche : pentagone 463861063"/>
           <p:cNvSpPr/>
           <p:nvPr/>
         </p:nvSpPr>
@@ -22386,7 +22483,7 @@
       </p:sp>
       <p:sp>
         <p:nvSpPr>
-          <p:cNvPr id="1323541798" name="Flèche : pentagone 272004907"/>
+          <p:cNvPr id="790925809" name="Flèche : pentagone 272004907"/>
           <p:cNvSpPr/>
           <p:nvPr/>
         </p:nvSpPr>
@@ -22464,7 +22561,7 @@
       </p:grpSpPr>
       <p:cxnSp>
         <p:nvCxnSpPr>
-          <p:cNvPr id="1703297037" name="Connecteur droit 1942366049"/>
+          <p:cNvPr id="1068087642" name="Connecteur droit 1942366049"/>
           <p:cNvCxnSpPr/>
           <p:nvPr/>
         </p:nvCxnSpPr>
@@ -22507,7 +22604,7 @@
       </p:cxnSp>
       <p:sp>
         <p:nvSpPr>
-          <p:cNvPr id="381411601" name="ZoneTexte 483029020"/>
+          <p:cNvPr id="2027373897" name="ZoneTexte 483029020"/>
           <p:cNvSpPr txBox="1"/>
           <p:nvPr/>
         </p:nvSpPr>
@@ -22547,7 +22644,7 @@
       </p:sp>
       <p:cxnSp>
         <p:nvCxnSpPr>
-          <p:cNvPr id="261448022" name="Connecteur droit 626166318"/>
+          <p:cNvPr id="2123035435" name="Connecteur droit 626166318"/>
           <p:cNvCxnSpPr/>
           <p:nvPr/>
         </p:nvCxnSpPr>
@@ -22590,7 +22687,7 @@
       </p:cxnSp>
       <p:sp>
         <p:nvSpPr>
-          <p:cNvPr id="1268219239" name="ZoneTexte 2021489157"/>
+          <p:cNvPr id="1791913143" name="ZoneTexte 2021489157"/>
           <p:cNvSpPr txBox="1"/>
           <p:nvPr/>
         </p:nvSpPr>
@@ -22630,7 +22727,7 @@
       </p:sp>
       <p:cxnSp>
         <p:nvCxnSpPr>
-          <p:cNvPr id="1364215175" name="Connecteur droit 1991074862"/>
+          <p:cNvPr id="845688817" name="Connecteur droit 1991074862"/>
           <p:cNvCxnSpPr/>
           <p:nvPr/>
         </p:nvCxnSpPr>
@@ -22673,7 +22770,7 @@
       </p:cxnSp>
       <p:sp>
         <p:nvSpPr>
-          <p:cNvPr id="1910881816" name="ZoneTexte 1094835336"/>
+          <p:cNvPr id="14729994" name="ZoneTexte 1094835336"/>
           <p:cNvSpPr txBox="1"/>
           <p:nvPr/>
         </p:nvSpPr>
@@ -22755,7 +22852,7 @@
       </p:sp>
       <p:sp>
         <p:nvSpPr>
-          <p:cNvPr id="910818605" name="Rectangle : avec coins arrondis en haut 1574209032"/>
+          <p:cNvPr id="699227219" name="Rectangle : avec coins arrondis en haut 1574209032"/>
           <p:cNvSpPr/>
           <p:nvPr/>
         </p:nvSpPr>
@@ -22801,7 +22898,7 @@
       </p:sp>
       <p:sp>
         <p:nvSpPr>
-          <p:cNvPr id="1672873982" name="Flèche : pentagone 521086653"/>
+          <p:cNvPr id="2023038428" name="Flèche : pentagone 521086653"/>
           <p:cNvSpPr/>
           <p:nvPr/>
         </p:nvSpPr>
@@ -22846,7 +22943,7 @@
       </p:sp>
       <p:sp>
         <p:nvSpPr>
-          <p:cNvPr id="70605931" name="Flèche : pentagone 1507310733"/>
+          <p:cNvPr id="1607122278" name="Flèche : pentagone 1507310733"/>
           <p:cNvSpPr/>
           <p:nvPr/>
         </p:nvSpPr>
@@ -22891,7 +22988,7 @@
       </p:sp>
       <p:sp>
         <p:nvSpPr>
-          <p:cNvPr id="505974203" name="Flèche : pentagone 732388424"/>
+          <p:cNvPr id="894085998" name="Flèche : pentagone 732388424"/>
           <p:cNvSpPr/>
           <p:nvPr/>
         </p:nvSpPr>
@@ -22936,7 +23033,7 @@
       </p:sp>
       <p:sp>
         <p:nvSpPr>
-          <p:cNvPr id="1321002962" name="Flèche : pentagone 326874465"/>
+          <p:cNvPr id="725575848" name="Flèche : pentagone 326874465"/>
           <p:cNvSpPr/>
           <p:nvPr/>
         </p:nvSpPr>
@@ -22981,7 +23078,7 @@
       </p:sp>
       <p:sp>
         <p:nvSpPr>
-          <p:cNvPr id="1419669556" name="Flèche : pentagone 2090650957"/>
+          <p:cNvPr id="2135865321" name="Flèche : pentagone 2090650957"/>
           <p:cNvSpPr/>
           <p:nvPr/>
         </p:nvSpPr>
@@ -23026,7 +23123,7 @@
       </p:sp>
       <p:sp>
         <p:nvSpPr>
-          <p:cNvPr id="1239769010" name="ZoneTexte 1374103996"/>
+          <p:cNvPr id="596473251" name="ZoneTexte 1374103996"/>
           <p:cNvSpPr txBox="1"/>
           <p:nvPr/>
         </p:nvSpPr>
@@ -23299,7 +23396,7 @@
       </p:sp>
       <p:sp>
         <p:nvSpPr>
-          <p:cNvPr id="628182176" name="ZoneTexte 1748705365"/>
+          <p:cNvPr id="714974937" name="ZoneTexte 1748705365"/>
           <p:cNvSpPr txBox="1"/>
           <p:nvPr/>
         </p:nvSpPr>
@@ -23339,7 +23436,7 @@
       </p:sp>
       <p:cxnSp>
         <p:nvCxnSpPr>
-          <p:cNvPr id="805920938" name="Connecteur droit 1556830908"/>
+          <p:cNvPr id="523870000" name="Connecteur droit 1556830908"/>
           <p:cNvCxnSpPr/>
           <p:nvPr/>
         </p:nvCxnSpPr>
@@ -23382,7 +23479,7 @@
       </p:cxnSp>
       <p:sp>
         <p:nvSpPr>
-          <p:cNvPr id="1473298752" name="ZoneTexte 409639257"/>
+          <p:cNvPr id="2050025695" name="ZoneTexte 409639257"/>
           <p:cNvSpPr txBox="1"/>
           <p:nvPr/>
         </p:nvSpPr>
@@ -23432,7 +23529,7 @@
       </p:sp>
       <p:sp>
         <p:nvSpPr>
-          <p:cNvPr id="852062796" name="ZoneTexte 1168472887"/>
+          <p:cNvPr id="674964387" name="ZoneTexte 1168472887"/>
           <p:cNvSpPr txBox="1"/>
           <p:nvPr/>
         </p:nvSpPr>
@@ -23687,7 +23784,7 @@
       </p:sp>
       <p:sp>
         <p:nvSpPr>
-          <p:cNvPr id="1179374343" name="ZoneTexte 114796530"/>
+          <p:cNvPr id="2095082727" name="ZoneTexte 114796530"/>
           <p:cNvSpPr txBox="1"/>
           <p:nvPr/>
         </p:nvSpPr>
@@ -23931,7 +24028,7 @@
       </p:sp>
       <p:sp>
         <p:nvSpPr>
-          <p:cNvPr id="1245940176" name="ZoneTexte 1085068195"/>
+          <p:cNvPr id="880767252" name="ZoneTexte 1085068195"/>
           <p:cNvSpPr txBox="1"/>
           <p:nvPr/>
         </p:nvSpPr>
@@ -24912,7 +25009,7 @@
       </p:sp>
       <p:sp>
         <p:nvSpPr>
-          <p:cNvPr id="877553407" name="Étoile : 5 branches 278736380"/>
+          <p:cNvPr id="941560710" name="Étoile : 5 branches 278736380"/>
           <p:cNvSpPr/>
           <p:nvPr/>
         </p:nvSpPr>
@@ -24959,7 +25056,7 @@
       </p:sp>
       <p:sp>
         <p:nvSpPr>
-          <p:cNvPr id="823466386" name="Étoile : 5 branches 1495350449"/>
+          <p:cNvPr id="489174378" name="Étoile : 5 branches 1495350449"/>
           <p:cNvSpPr/>
           <p:nvPr/>
         </p:nvSpPr>
@@ -25006,7 +25103,7 @@
       </p:sp>
       <p:sp>
         <p:nvSpPr>
-          <p:cNvPr id="1373936343" name="Étoile : 5 branches 79046386"/>
+          <p:cNvPr id="150972940" name="Étoile : 5 branches 79046386"/>
           <p:cNvSpPr/>
           <p:nvPr/>
         </p:nvSpPr>
@@ -25053,7 +25150,7 @@
       </p:sp>
       <p:sp>
         <p:nvSpPr>
-          <p:cNvPr id="1463289862" name="Étoile : 5 branches 749256076"/>
+          <p:cNvPr id="415770445" name="Étoile : 5 branches 749256076"/>
           <p:cNvSpPr/>
           <p:nvPr/>
         </p:nvSpPr>
@@ -25100,7 +25197,7 @@
       </p:sp>
       <p:sp>
         <p:nvSpPr>
-          <p:cNvPr id="1907641921" name="Étoile : 5 branches 411245083"/>
+          <p:cNvPr id="1084133877" name="Étoile : 5 branches 411245083"/>
           <p:cNvSpPr/>
           <p:nvPr/>
         </p:nvSpPr>
@@ -25147,7 +25244,7 @@
       </p:sp>
       <p:sp>
         <p:nvSpPr>
-          <p:cNvPr id="2055526541" name="ZoneTexte 496444952"/>
+          <p:cNvPr id="109929728" name="ZoneTexte 496444952"/>
           <p:cNvSpPr txBox="1"/>
           <p:nvPr/>
         </p:nvSpPr>
@@ -25189,7 +25286,7 @@
       </p:sp>
       <p:sp>
         <p:nvSpPr>
-          <p:cNvPr id="734686717" name="ZoneTexte 474433989"/>
+          <p:cNvPr id="266826442" name="ZoneTexte 474433989"/>
           <p:cNvSpPr txBox="1"/>
           <p:nvPr/>
         </p:nvSpPr>
@@ -25231,7 +25328,7 @@
       </p:sp>
       <p:sp>
         <p:nvSpPr>
-          <p:cNvPr id="2062721227" name="ZoneTexte 1"/>
+          <p:cNvPr id="182026971" name="ZoneTexte 1"/>
           <p:cNvSpPr txBox="1"/>
           <p:nvPr/>
         </p:nvSpPr>
@@ -25332,7 +25429,7 @@
       </p:sp>
       <p:sp>
         <p:nvSpPr>
-          <p:cNvPr id="1892502423" name="ZoneTexte 2"/>
+          <p:cNvPr id="709771370" name="ZoneTexte 2"/>
           <p:cNvSpPr txBox="1"/>
           <p:nvPr/>
         </p:nvSpPr>
@@ -25450,7 +25547,7 @@
       </p:sp>
       <p:sp>
         <p:nvSpPr>
-          <p:cNvPr id="410336140" name=""/>
+          <p:cNvPr id="1944621967" name=""/>
           <p:cNvSpPr/>
           <p:nvPr/>
         </p:nvSpPr>
@@ -25521,7 +25618,7 @@
       </p:sp>
       <p:sp>
         <p:nvSpPr>
-          <p:cNvPr id="1728218246" name="Flèche : pentagone 1507310733"/>
+          <p:cNvPr id="65640620" name="Flèche : pentagone 1507310733"/>
           <p:cNvSpPr/>
           <p:nvPr/>
         </p:nvSpPr>
@@ -25566,7 +25663,7 @@
       </p:sp>
       <p:sp>
         <p:nvSpPr>
-          <p:cNvPr id="1332447638" name="Flèche : pentagone 732388424"/>
+          <p:cNvPr id="463387920" name="Flèche : pentagone 732388424"/>
           <p:cNvSpPr/>
           <p:nvPr/>
         </p:nvSpPr>
@@ -25611,7 +25708,7 @@
       </p:sp>
       <p:sp>
         <p:nvSpPr>
-          <p:cNvPr id="749636672" name="Flèche : pentagone 326874465"/>
+          <p:cNvPr id="520161676" name="Flèche : pentagone 326874465"/>
           <p:cNvSpPr/>
           <p:nvPr/>
         </p:nvSpPr>
@@ -25689,7 +25786,7 @@
       </p:grpSpPr>
       <p:sp>
         <p:nvSpPr>
-          <p:cNvPr id="2018721363" name="ZoneTexte 273581705"/>
+          <p:cNvPr id="1704437606" name="ZoneTexte 273581705"/>
           <p:cNvSpPr txBox="1"/>
           <p:nvPr/>
         </p:nvSpPr>
@@ -25987,7 +26084,7 @@
       </p:sp>
       <p:cxnSp>
         <p:nvCxnSpPr>
-          <p:cNvPr id="1769948599" name="Connecteur droit 1094832104"/>
+          <p:cNvPr id="1347700000" name="Connecteur droit 1094832104"/>
           <p:cNvCxnSpPr/>
           <p:nvPr/>
         </p:nvCxnSpPr>
@@ -26030,7 +26127,7 @@
       </p:cxnSp>
       <p:sp>
         <p:nvSpPr>
-          <p:cNvPr id="358014417" name="ZoneTexte 2078543737"/>
+          <p:cNvPr id="1098856925" name="ZoneTexte 2078543737"/>
           <p:cNvSpPr txBox="1"/>
           <p:nvPr/>
         </p:nvSpPr>
@@ -26070,7 +26167,7 @@
       </p:sp>
       <p:cxnSp>
         <p:nvCxnSpPr>
-          <p:cNvPr id="971881137" name="Connecteur droit 853743145"/>
+          <p:cNvPr id="1870545913" name="Connecteur droit 853743145"/>
           <p:cNvCxnSpPr/>
           <p:nvPr/>
         </p:nvCxnSpPr>
@@ -26113,7 +26210,7 @@
       </p:cxnSp>
       <p:sp>
         <p:nvSpPr>
-          <p:cNvPr id="736816990" name="ZoneTexte 1473119298"/>
+          <p:cNvPr id="1052409063" name="ZoneTexte 1473119298"/>
           <p:cNvSpPr txBox="1"/>
           <p:nvPr/>
         </p:nvSpPr>
@@ -26153,7 +26250,7 @@
       </p:sp>
       <p:cxnSp>
         <p:nvCxnSpPr>
-          <p:cNvPr id="1023897724" name="Connecteur droit 1727809509"/>
+          <p:cNvPr id="1997388932" name="Connecteur droit 1727809509"/>
           <p:cNvCxnSpPr/>
           <p:nvPr/>
         </p:nvCxnSpPr>
@@ -26196,7 +26293,7 @@
       </p:cxnSp>
       <p:sp>
         <p:nvSpPr>
-          <p:cNvPr id="1332244584" name="ZoneTexte 759238070"/>
+          <p:cNvPr id="1670322145" name="ZoneTexte 759238070"/>
           <p:cNvSpPr txBox="1"/>
           <p:nvPr/>
         </p:nvSpPr>
@@ -26271,7 +26368,7 @@
       </p:sp>
       <p:sp>
         <p:nvSpPr>
-          <p:cNvPr id="569469743" name="Rectangle : avec coins arrondis en haut 965147191"/>
+          <p:cNvPr id="1201393778" name="Rectangle : avec coins arrondis en haut 965147191"/>
           <p:cNvSpPr/>
           <p:nvPr/>
         </p:nvSpPr>
@@ -26317,7 +26414,7 @@
       </p:sp>
       <p:sp>
         <p:nvSpPr>
-          <p:cNvPr id="82254189" name="Flèche : pentagone 2070329900"/>
+          <p:cNvPr id="1602751036" name="Flèche : pentagone 2070329900"/>
           <p:cNvSpPr/>
           <p:nvPr/>
         </p:nvSpPr>
@@ -26362,7 +26459,7 @@
       </p:sp>
       <p:sp>
         <p:nvSpPr>
-          <p:cNvPr id="213896741" name="Flèche : pentagone 1325137089"/>
+          <p:cNvPr id="172191881" name="Flèche : pentagone 1325137089"/>
           <p:cNvSpPr/>
           <p:nvPr/>
         </p:nvSpPr>
@@ -26407,7 +26504,7 @@
       </p:sp>
       <p:sp>
         <p:nvSpPr>
-          <p:cNvPr id="1602522266" name="Flèche : pentagone 295922856"/>
+          <p:cNvPr id="1365488783" name="Flèche : pentagone 295922856"/>
           <p:cNvSpPr/>
           <p:nvPr/>
         </p:nvSpPr>
@@ -26452,7 +26549,7 @@
       </p:sp>
       <p:sp>
         <p:nvSpPr>
-          <p:cNvPr id="2007705143" name="Flèche : pentagone 1961547672"/>
+          <p:cNvPr id="355147080" name="Flèche : pentagone 1961547672"/>
           <p:cNvSpPr/>
           <p:nvPr/>
         </p:nvSpPr>
@@ -26497,7 +26594,7 @@
       </p:sp>
       <p:sp>
         <p:nvSpPr>
-          <p:cNvPr id="1461750087" name="Flèche : pentagone 1305647833"/>
+          <p:cNvPr id="941697702" name="Flèche : pentagone 1305647833"/>
           <p:cNvSpPr/>
           <p:nvPr/>
         </p:nvSpPr>
@@ -26542,7 +26639,7 @@
       </p:sp>
       <p:sp>
         <p:nvSpPr>
-          <p:cNvPr id="1971959834" name="ZoneTexte 545814566"/>
+          <p:cNvPr id="1363467856" name="ZoneTexte 545814566"/>
           <p:cNvSpPr txBox="1"/>
           <p:nvPr/>
         </p:nvSpPr>
@@ -26844,7 +26941,7 @@
       </p:sp>
       <p:sp>
         <p:nvSpPr>
-          <p:cNvPr id="18820238" name="ZoneTexte 671978155"/>
+          <p:cNvPr id="320476602" name="ZoneTexte 671978155"/>
           <p:cNvSpPr txBox="1"/>
           <p:nvPr/>
         </p:nvSpPr>
@@ -26884,7 +26981,7 @@
       </p:sp>
       <p:cxnSp>
         <p:nvCxnSpPr>
-          <p:cNvPr id="2005886478" name="Connecteur droit 637589304"/>
+          <p:cNvPr id="926534617" name="Connecteur droit 637589304"/>
           <p:cNvCxnSpPr/>
           <p:nvPr/>
         </p:nvCxnSpPr>
@@ -26927,7 +27024,7 @@
       </p:cxnSp>
       <p:sp>
         <p:nvSpPr>
-          <p:cNvPr id="1845610388" name="ZoneTexte 172075623"/>
+          <p:cNvPr id="2002172119" name="ZoneTexte 172075623"/>
           <p:cNvSpPr txBox="1"/>
           <p:nvPr/>
         </p:nvSpPr>
@@ -26977,7 +27074,7 @@
       </p:sp>
       <p:sp>
         <p:nvSpPr>
-          <p:cNvPr id="1137100765" name="ZoneTexte 1642812764"/>
+          <p:cNvPr id="1203026159" name="ZoneTexte 1642812764"/>
           <p:cNvSpPr txBox="1"/>
           <p:nvPr/>
         </p:nvSpPr>
@@ -27166,7 +27263,7 @@
       </p:sp>
       <p:sp>
         <p:nvSpPr>
-          <p:cNvPr id="1346673492" name="Étoile : 7 branches 1681961038"/>
+          <p:cNvPr id="1609126208" name="Étoile : 7 branches 1681961038"/>
           <p:cNvSpPr/>
           <p:nvPr/>
         </p:nvSpPr>
@@ -27213,7 +27310,7 @@
       </p:sp>
       <p:sp>
         <p:nvSpPr>
-          <p:cNvPr id="906742170" name="Étoile : 7 branches 1476951547"/>
+          <p:cNvPr id="1137286536" name="Étoile : 7 branches 1476951547"/>
           <p:cNvSpPr/>
           <p:nvPr/>
         </p:nvSpPr>
@@ -27260,7 +27357,7 @@
       </p:sp>
       <p:sp>
         <p:nvSpPr>
-          <p:cNvPr id="43702731" name="Étoile : 7 branches 1520826925"/>
+          <p:cNvPr id="931573661" name="Étoile : 7 branches 1520826925"/>
           <p:cNvSpPr/>
           <p:nvPr/>
         </p:nvSpPr>
@@ -27307,7 +27404,7 @@
       </p:sp>
       <p:sp>
         <p:nvSpPr>
-          <p:cNvPr id="452703259" name="ZoneTexte 1219899073"/>
+          <p:cNvPr id="1456383369" name="ZoneTexte 1219899073"/>
           <p:cNvSpPr txBox="1"/>
           <p:nvPr/>
         </p:nvSpPr>
@@ -27347,14 +27444,14 @@
       </p:sp>
       <p:sp>
         <p:nvSpPr>
-          <p:cNvPr id="247200246" name="ZoneTexte 1283574123"/>
+          <p:cNvPr id="1736030461" name="ZoneTexte 1283574123"/>
           <p:cNvSpPr txBox="1"/>
           <p:nvPr/>
         </p:nvSpPr>
         <p:spPr bwMode="auto">
           <a:xfrm flipH="0" flipV="0">
-            <a:off x="3303455" y="2586743"/>
-            <a:ext cx="3571524" cy="3520800"/>
+            <a:off x="3303453" y="2586741"/>
+            <a:ext cx="3551475" cy="3520800"/>
           </a:xfrm>
           <a:prstGeom prst="rect">
             <a:avLst/>
@@ -28352,7 +28449,7 @@
       </p:sp>
       <p:sp>
         <p:nvSpPr>
-          <p:cNvPr id="1937891398" name="ZoneTexte 790352176"/>
+          <p:cNvPr id="1599926025" name="ZoneTexte 790352176"/>
           <p:cNvSpPr txBox="1"/>
           <p:nvPr/>
         </p:nvSpPr>
@@ -28394,7 +28491,7 @@
       </p:sp>
       <p:sp>
         <p:nvSpPr>
-          <p:cNvPr id="1069232398" name="ZoneTexte 2025740189"/>
+          <p:cNvPr id="364852397" name="ZoneTexte 2025740189"/>
           <p:cNvSpPr txBox="1"/>
           <p:nvPr/>
         </p:nvSpPr>
@@ -28451,7 +28548,7 @@
       </p:sp>
       <p:sp>
         <p:nvSpPr>
-          <p:cNvPr id="133622732" name=""/>
+          <p:cNvPr id="788226561" name=""/>
           <p:cNvSpPr/>
           <p:nvPr/>
         </p:nvSpPr>
@@ -28491,7 +28588,7 @@
       </p:sp>
       <p:sp>
         <p:nvSpPr>
-          <p:cNvPr id="1133236227" name="Rectangle : avec coins arrondis en haut 1151560973"/>
+          <p:cNvPr id="848160886" name="Rectangle : avec coins arrondis en haut 1151560973"/>
           <p:cNvSpPr/>
           <p:nvPr/>
         </p:nvSpPr>
@@ -28539,7 +28636,7 @@
       </p:sp>
       <p:sp>
         <p:nvSpPr>
-          <p:cNvPr id="346987594" name=""/>
+          <p:cNvPr id="1170325459" name=""/>
           <p:cNvSpPr/>
           <p:nvPr/>
         </p:nvSpPr>
@@ -28579,7 +28676,7 @@
       </p:sp>
       <p:sp>
         <p:nvSpPr>
-          <p:cNvPr id="1465150098" name="Rectangle : avec coins arrondis en haut 1151560973"/>
+          <p:cNvPr id="1872794496" name="Rectangle : avec coins arrondis en haut 1151560973"/>
           <p:cNvSpPr/>
           <p:nvPr/>
         </p:nvSpPr>
@@ -28627,7 +28724,7 @@
       </p:sp>
       <p:sp>
         <p:nvSpPr>
-          <p:cNvPr id="1293021410" name=""/>
+          <p:cNvPr id="1244015394" name=""/>
           <p:cNvSpPr/>
           <p:nvPr/>
         </p:nvSpPr>
@@ -28667,7 +28764,7 @@
       </p:sp>
       <p:sp>
         <p:nvSpPr>
-          <p:cNvPr id="40011275" name="Rectangle : avec coins arrondis en haut 1151560973"/>
+          <p:cNvPr id="861867979" name="Rectangle : avec coins arrondis en haut 1151560973"/>
           <p:cNvSpPr/>
           <p:nvPr/>
         </p:nvSpPr>
@@ -28715,7 +28812,7 @@
       </p:sp>
       <p:sp>
         <p:nvSpPr>
-          <p:cNvPr id="545633213" name=""/>
+          <p:cNvPr id="1989807308" name=""/>
           <p:cNvSpPr txBox="1"/>
           <p:nvPr/>
         </p:nvSpPr>
@@ -28843,7 +28940,7 @@
       </p:sp>
       <p:sp>
         <p:nvSpPr>
-          <p:cNvPr id="468587331" name=""/>
+          <p:cNvPr id="103262348" name=""/>
           <p:cNvSpPr txBox="1"/>
           <p:nvPr/>
         </p:nvSpPr>
@@ -28966,7 +29063,7 @@
       </p:sp>
       <p:sp>
         <p:nvSpPr>
-          <p:cNvPr id="2119304445" name=""/>
+          <p:cNvPr id="1753368477" name=""/>
           <p:cNvSpPr/>
           <p:nvPr/>
         </p:nvSpPr>
@@ -29037,7 +29134,7 @@
       </p:sp>
       <p:sp>
         <p:nvSpPr>
-          <p:cNvPr id="1589773542" name="Flèche : pentagone 1325137089"/>
+          <p:cNvPr id="39666694" name="Flèche : pentagone 1325137089"/>
           <p:cNvSpPr/>
           <p:nvPr/>
         </p:nvSpPr>
@@ -29082,7 +29179,7 @@
       </p:sp>
       <p:sp>
         <p:nvSpPr>
-          <p:cNvPr id="1319282344" name="Flèche : pentagone 295922856"/>
+          <p:cNvPr id="780059438" name="Flèche : pentagone 295922856"/>
           <p:cNvSpPr/>
           <p:nvPr/>
         </p:nvSpPr>
@@ -29127,7 +29224,7 @@
       </p:sp>
       <p:sp>
         <p:nvSpPr>
-          <p:cNvPr id="1196984250" name="Flèche : pentagone 1961547672"/>
+          <p:cNvPr id="2028842745" name="Flèche : pentagone 1961547672"/>
           <p:cNvSpPr/>
           <p:nvPr/>
         </p:nvSpPr>
@@ -29205,7 +29302,7 @@
       </p:grpSpPr>
       <p:cxnSp>
         <p:nvCxnSpPr>
-          <p:cNvPr id="1770789650" name="Connecteur droit 266926011"/>
+          <p:cNvPr id="43883093" name="Connecteur droit 266926011"/>
           <p:cNvCxnSpPr/>
           <p:nvPr/>
         </p:nvCxnSpPr>
@@ -29248,7 +29345,7 @@
       </p:cxnSp>
       <p:sp>
         <p:nvSpPr>
-          <p:cNvPr id="1568777373" name="ZoneTexte 1043763612"/>
+          <p:cNvPr id="1144551359" name="ZoneTexte 1043763612"/>
           <p:cNvSpPr txBox="1"/>
           <p:nvPr/>
         </p:nvSpPr>
@@ -29288,7 +29385,7 @@
       </p:sp>
       <p:cxnSp>
         <p:nvCxnSpPr>
-          <p:cNvPr id="511008190" name="Connecteur droit 1586327141"/>
+          <p:cNvPr id="1327192455" name="Connecteur droit 1586327141"/>
           <p:cNvCxnSpPr/>
           <p:nvPr/>
         </p:nvCxnSpPr>
@@ -29331,7 +29428,7 @@
       </p:cxnSp>
       <p:sp>
         <p:nvSpPr>
-          <p:cNvPr id="178191648" name="ZoneTexte 1691387439"/>
+          <p:cNvPr id="2075079300" name="ZoneTexte 1691387439"/>
           <p:cNvSpPr txBox="1"/>
           <p:nvPr/>
         </p:nvSpPr>
@@ -29371,7 +29468,7 @@
       </p:sp>
       <p:cxnSp>
         <p:nvCxnSpPr>
-          <p:cNvPr id="141858029" name="Connecteur droit 1743707585"/>
+          <p:cNvPr id="897739789" name="Connecteur droit 1743707585"/>
           <p:cNvCxnSpPr/>
           <p:nvPr/>
         </p:nvCxnSpPr>
@@ -29414,7 +29511,7 @@
       </p:cxnSp>
       <p:sp>
         <p:nvSpPr>
-          <p:cNvPr id="1494506519" name="ZoneTexte 1503300725"/>
+          <p:cNvPr id="1371989959" name="ZoneTexte 1503300725"/>
           <p:cNvSpPr txBox="1"/>
           <p:nvPr/>
         </p:nvSpPr>
@@ -29496,7 +29593,7 @@
       </p:sp>
       <p:sp>
         <p:nvSpPr>
-          <p:cNvPr id="648337856" name="Rectangle : avec coins arrondis en haut 1151560973"/>
+          <p:cNvPr id="1961341658" name="Rectangle : avec coins arrondis en haut 1151560973"/>
           <p:cNvSpPr/>
           <p:nvPr/>
         </p:nvSpPr>
@@ -29542,7 +29639,7 @@
       </p:sp>
       <p:sp>
         <p:nvSpPr>
-          <p:cNvPr id="230607268" name="Flèche : pentagone 1610574377"/>
+          <p:cNvPr id="2030251349" name="Flèche : pentagone 1610574377"/>
           <p:cNvSpPr/>
           <p:nvPr/>
         </p:nvSpPr>
@@ -29587,7 +29684,7 @@
       </p:sp>
       <p:sp>
         <p:nvSpPr>
-          <p:cNvPr id="679477163" name="Flèche : pentagone 463861063"/>
+          <p:cNvPr id="1673931189" name="Flèche : pentagone 463861063"/>
           <p:cNvSpPr/>
           <p:nvPr/>
         </p:nvSpPr>
@@ -29632,7 +29729,7 @@
       </p:sp>
       <p:sp>
         <p:nvSpPr>
-          <p:cNvPr id="1895345446" name="Flèche : pentagone 272004907"/>
+          <p:cNvPr id="1043108314" name="Flèche : pentagone 272004907"/>
           <p:cNvSpPr/>
           <p:nvPr/>
         </p:nvSpPr>
@@ -29677,7 +29774,7 @@
       </p:sp>
       <p:sp>
         <p:nvSpPr>
-          <p:cNvPr id="1812502936" name="Flèche : pentagone 28174069"/>
+          <p:cNvPr id="1849866209" name="Flèche : pentagone 28174069"/>
           <p:cNvSpPr/>
           <p:nvPr/>
         </p:nvSpPr>
@@ -29722,7 +29819,7 @@
       </p:sp>
       <p:sp>
         <p:nvSpPr>
-          <p:cNvPr id="541680973" name="Flèche : pentagone 978127220"/>
+          <p:cNvPr id="844871416" name="Flèche : pentagone 978127220"/>
           <p:cNvSpPr/>
           <p:nvPr/>
         </p:nvSpPr>
@@ -29767,7 +29864,7 @@
       </p:sp>
       <p:sp>
         <p:nvSpPr>
-          <p:cNvPr id="1179566915" name="ZoneTexte 1693594013"/>
+          <p:cNvPr id="411606525" name="ZoneTexte 1693594013"/>
           <p:cNvSpPr txBox="1"/>
           <p:nvPr/>
         </p:nvSpPr>
@@ -30118,7 +30215,7 @@
       </p:sp>
       <p:sp>
         <p:nvSpPr>
-          <p:cNvPr id="2028866682" name="ZoneTexte 1975797288"/>
+          <p:cNvPr id="315698834" name="ZoneTexte 1975797288"/>
           <p:cNvSpPr txBox="1"/>
           <p:nvPr/>
         </p:nvSpPr>
@@ -30158,7 +30255,7 @@
       </p:sp>
       <p:sp>
         <p:nvSpPr>
-          <p:cNvPr id="1857938322" name="ZoneTexte 2064865984"/>
+          <p:cNvPr id="1494340436" name="ZoneTexte 2064865984"/>
           <p:cNvSpPr txBox="1"/>
           <p:nvPr/>
         </p:nvSpPr>
@@ -30380,7 +30477,7 @@
       </p:sp>
       <p:sp>
         <p:nvSpPr>
-          <p:cNvPr id="335887386" name="ZoneTexte 1387173154"/>
+          <p:cNvPr id="601657366" name="ZoneTexte 1387173154"/>
           <p:cNvSpPr txBox="1"/>
           <p:nvPr/>
         </p:nvSpPr>
@@ -30632,7 +30729,7 @@
       </p:sp>
       <p:sp>
         <p:nvSpPr>
-          <p:cNvPr id="36264117" name="ZoneTexte 523755832"/>
+          <p:cNvPr id="189127002" name="ZoneTexte 523755832"/>
           <p:cNvSpPr txBox="1"/>
           <p:nvPr/>
         </p:nvSpPr>
@@ -30892,7 +30989,7 @@
       </p:sp>
       <p:cxnSp>
         <p:nvCxnSpPr>
-          <p:cNvPr id="350699643" name="Connecteur droit 2085669542"/>
+          <p:cNvPr id="962021659" name="Connecteur droit 2085669542"/>
           <p:cNvCxnSpPr/>
           <p:nvPr/>
         </p:nvCxnSpPr>
@@ -30935,7 +31032,7 @@
       </p:cxnSp>
       <p:sp>
         <p:nvSpPr>
-          <p:cNvPr id="627249124" name="ZoneTexte 34398067"/>
+          <p:cNvPr id="1247649417" name="ZoneTexte 34398067"/>
           <p:cNvSpPr txBox="1"/>
           <p:nvPr/>
         </p:nvSpPr>
@@ -30978,7 +31075,7 @@
       </p:sp>
       <p:sp>
         <p:nvSpPr>
-          <p:cNvPr id="916669655" name="ZoneTexte 273581705"/>
+          <p:cNvPr id="1747130482" name="ZoneTexte 273581705"/>
           <p:cNvSpPr txBox="1"/>
           <p:nvPr/>
         </p:nvSpPr>
@@ -31276,7 +31373,7 @@
       </p:sp>
       <p:sp>
         <p:nvSpPr>
-          <p:cNvPr id="579239958" name="ZoneTexte 1727393832"/>
+          <p:cNvPr id="13060313" name="ZoneTexte 1727393832"/>
           <p:cNvSpPr txBox="1"/>
           <p:nvPr/>
         </p:nvSpPr>
@@ -31318,7 +31415,7 @@
       </p:sp>
       <p:sp>
         <p:nvSpPr>
-          <p:cNvPr id="1218109938" name="ZoneTexte 504516740"/>
+          <p:cNvPr id="444619960" name="ZoneTexte 504516740"/>
           <p:cNvSpPr txBox="1"/>
           <p:nvPr/>
         </p:nvSpPr>
@@ -31360,7 +31457,7 @@
       </p:sp>
       <p:sp>
         <p:nvSpPr>
-          <p:cNvPr id="1458619185" name="ZoneTexte 1"/>
+          <p:cNvPr id="1384863487" name="ZoneTexte 1"/>
           <p:cNvSpPr txBox="1"/>
           <p:nvPr/>
         </p:nvSpPr>
@@ -31471,7 +31568,7 @@
       </p:sp>
       <p:sp>
         <p:nvSpPr>
-          <p:cNvPr id="396629142" name="ZoneTexte 2"/>
+          <p:cNvPr id="851757951" name="ZoneTexte 2"/>
           <p:cNvSpPr txBox="1"/>
           <p:nvPr/>
         </p:nvSpPr>
@@ -31555,7 +31652,7 @@
       </p:sp>
       <p:sp>
         <p:nvSpPr>
-          <p:cNvPr id="1781821656" name=""/>
+          <p:cNvPr id="2135514737" name=""/>
           <p:cNvSpPr/>
           <p:nvPr/>
         </p:nvSpPr>
@@ -31595,7 +31692,7 @@
       </p:sp>
       <p:sp>
         <p:nvSpPr>
-          <p:cNvPr id="2103756223" name="Rectangle : avec coins arrondis en haut 1151560973"/>
+          <p:cNvPr id="1204022595" name="Rectangle : avec coins arrondis en haut 1151560973"/>
           <p:cNvSpPr/>
           <p:nvPr/>
         </p:nvSpPr>
@@ -31643,7 +31740,7 @@
       </p:sp>
       <p:sp>
         <p:nvSpPr>
-          <p:cNvPr id="2032960552" name=""/>
+          <p:cNvPr id="1479682016" name=""/>
           <p:cNvSpPr/>
           <p:nvPr/>
         </p:nvSpPr>
@@ -31683,7 +31780,7 @@
       </p:sp>
       <p:sp>
         <p:nvSpPr>
-          <p:cNvPr id="1536152299" name="Rectangle : avec coins arrondis en haut 1151560973"/>
+          <p:cNvPr id="53338505" name="Rectangle : avec coins arrondis en haut 1151560973"/>
           <p:cNvSpPr/>
           <p:nvPr/>
         </p:nvSpPr>
@@ -31731,7 +31828,7 @@
       </p:sp>
       <p:sp>
         <p:nvSpPr>
-          <p:cNvPr id="885318184" name=""/>
+          <p:cNvPr id="2065709347" name=""/>
           <p:cNvSpPr/>
           <p:nvPr/>
         </p:nvSpPr>
@@ -31771,7 +31868,7 @@
       </p:sp>
       <p:sp>
         <p:nvSpPr>
-          <p:cNvPr id="2139222309" name="Rectangle : avec coins arrondis en haut 1151560973"/>
+          <p:cNvPr id="463246401" name="Rectangle : avec coins arrondis en haut 1151560973"/>
           <p:cNvSpPr/>
           <p:nvPr/>
         </p:nvSpPr>
@@ -31819,7 +31916,7 @@
       </p:sp>
       <p:sp>
         <p:nvSpPr>
-          <p:cNvPr id="232151115" name=""/>
+          <p:cNvPr id="2015416383" name=""/>
           <p:cNvSpPr txBox="1"/>
           <p:nvPr/>
         </p:nvSpPr>
@@ -31870,7 +31967,7 @@
       </p:sp>
       <p:sp>
         <p:nvSpPr>
-          <p:cNvPr id="792858276" name=""/>
+          <p:cNvPr id="396832356" name=""/>
           <p:cNvSpPr txBox="1"/>
           <p:nvPr/>
         </p:nvSpPr>
@@ -31968,7 +32065,7 @@
       </p:sp>
       <p:sp>
         <p:nvSpPr>
-          <p:cNvPr id="121229932" name=""/>
+          <p:cNvPr id="943706169" name=""/>
           <p:cNvSpPr/>
           <p:nvPr/>
         </p:nvSpPr>
@@ -32039,7 +32136,7 @@
       </p:sp>
       <p:sp>
         <p:nvSpPr>
-          <p:cNvPr id="699384027" name="Flèche : pentagone 463861063"/>
+          <p:cNvPr id="479120478" name="Flèche : pentagone 463861063"/>
           <p:cNvSpPr/>
           <p:nvPr/>
         </p:nvSpPr>
@@ -32084,7 +32181,7 @@
       </p:sp>
       <p:sp>
         <p:nvSpPr>
-          <p:cNvPr id="654906823" name="Flèche : pentagone 272004907"/>
+          <p:cNvPr id="1568588353" name="Flèche : pentagone 272004907"/>
           <p:cNvSpPr/>
           <p:nvPr/>
         </p:nvSpPr>
@@ -32129,7 +32226,7 @@
       </p:sp>
       <p:sp>
         <p:nvSpPr>
-          <p:cNvPr id="2065924660" name="Flèche : pentagone 28174069"/>
+          <p:cNvPr id="1934859494" name="Flèche : pentagone 28174069"/>
           <p:cNvSpPr/>
           <p:nvPr/>
         </p:nvSpPr>

--- a/Fiches de personnage.pptx
+++ b/Fiches de personnage.pptx
@@ -139,7 +139,7 @@
       </p:grpSpPr>
       <p:sp>
         <p:nvSpPr>
-          <p:cNvPr id="42627421" name="Espace réservé d'en-tête 1"/>
+          <p:cNvPr id="1882178426" name="Espace réservé d'en-tête 1"/>
           <p:cNvSpPr>
             <a:spLocks noGrp="1"/>
           </p:cNvSpPr>
@@ -173,7 +173,7 @@
       </p:sp>
       <p:sp>
         <p:nvSpPr>
-          <p:cNvPr id="875626368" name="Espace réservé pour la date 2"/>
+          <p:cNvPr id="1178178499" name="Espace réservé pour la date 2"/>
           <p:cNvSpPr>
             <a:spLocks noGrp="1"/>
           </p:cNvSpPr>
@@ -211,7 +211,7 @@
       </p:sp>
       <p:sp>
         <p:nvSpPr>
-          <p:cNvPr id="950591764" name="Espace réservé pour l'image de la diapositive 3"/>
+          <p:cNvPr id="2044345824" name="Espace réservé pour l'image de la diapositive 3"/>
           <p:cNvSpPr>
             <a:spLocks noChangeAspect="1" noGrp="1" noRot="1"/>
           </p:cNvSpPr>
@@ -247,7 +247,7 @@
       </p:sp>
       <p:sp>
         <p:nvSpPr>
-          <p:cNvPr id="418846793" name="Remarques Espace réservé 4"/>
+          <p:cNvPr id="1156600170" name="Remarques Espace réservé 4"/>
           <p:cNvSpPr>
             <a:spLocks noGrp="1"/>
           </p:cNvSpPr>
@@ -321,7 +321,7 @@
       </p:sp>
       <p:sp>
         <p:nvSpPr>
-          <p:cNvPr id="922095793" name="Espace réservé du pied de page 5"/>
+          <p:cNvPr id="2045142639" name="Espace réservé du pied de page 5"/>
           <p:cNvSpPr>
             <a:spLocks noGrp="1"/>
           </p:cNvSpPr>
@@ -355,7 +355,7 @@
       </p:sp>
       <p:sp>
         <p:nvSpPr>
-          <p:cNvPr id="1185523463" name="Espace réservé du numéro de diapositive 6"/>
+          <p:cNvPr id="910667669" name="Espace réservé du numéro de diapositive 6"/>
           <p:cNvSpPr>
             <a:spLocks noGrp="1"/>
           </p:cNvSpPr>
@@ -508,7 +508,7 @@
       </p:grpSpPr>
       <p:sp>
         <p:nvSpPr>
-          <p:cNvPr id="1590052534" name="Espace réservé pour l'image de la diapositive 1"/>
+          <p:cNvPr id="1678985713" name="Espace réservé pour l'image de la diapositive 1"/>
           <p:cNvSpPr>
             <a:spLocks noChangeAspect="1" noGrp="1" noRot="1"/>
           </p:cNvSpPr>
@@ -525,7 +525,7 @@
       </p:sp>
       <p:sp>
         <p:nvSpPr>
-          <p:cNvPr id="1136368552" name="Remarques Espace réservé 2"/>
+          <p:cNvPr id="785086760" name="Remarques Espace réservé 2"/>
           <p:cNvSpPr>
             <a:spLocks noGrp="1"/>
           </p:cNvSpPr>
@@ -550,7 +550,7 @@
       </p:sp>
       <p:sp>
         <p:nvSpPr>
-          <p:cNvPr id="277874172" name="Espace réservé pour le numéro de diapositive 3"/>
+          <p:cNvPr id="287783116" name="Espace réservé pour le numéro de diapositive 3"/>
           <p:cNvSpPr>
             <a:spLocks noGrp="1"/>
           </p:cNvSpPr>
@@ -601,7 +601,7 @@
       </p:grpSpPr>
       <p:sp>
         <p:nvSpPr>
-          <p:cNvPr id="94796924" name="Espace réservé pour l'image de la diapositive 1"/>
+          <p:cNvPr id="760282113" name="Espace réservé pour l'image de la diapositive 1"/>
           <p:cNvSpPr>
             <a:spLocks noChangeAspect="1" noGrp="1" noRot="1"/>
           </p:cNvSpPr>
@@ -618,7 +618,7 @@
       </p:sp>
       <p:sp>
         <p:nvSpPr>
-          <p:cNvPr id="1822183406" name="Remarques Espace réservé 2"/>
+          <p:cNvPr id="1373085923" name="Remarques Espace réservé 2"/>
           <p:cNvSpPr>
             <a:spLocks noGrp="1"/>
           </p:cNvSpPr>
@@ -643,7 +643,7 @@
       </p:sp>
       <p:sp>
         <p:nvSpPr>
-          <p:cNvPr id="1040183754" name="Espace réservé pour le numéro de diapositive 3"/>
+          <p:cNvPr id="487089650" name="Espace réservé pour le numéro de diapositive 3"/>
           <p:cNvSpPr>
             <a:spLocks noGrp="1"/>
           </p:cNvSpPr>
@@ -694,7 +694,7 @@
       </p:grpSpPr>
       <p:sp>
         <p:nvSpPr>
-          <p:cNvPr id="1216344876" name="Espace réservé pour l'image de la diapositive 1"/>
+          <p:cNvPr id="474132245" name="Espace réservé pour l'image de la diapositive 1"/>
           <p:cNvSpPr>
             <a:spLocks noChangeAspect="1" noGrp="1" noRot="1"/>
           </p:cNvSpPr>
@@ -711,7 +711,7 @@
       </p:sp>
       <p:sp>
         <p:nvSpPr>
-          <p:cNvPr id="68312811" name="Remarques Espace réservé 2"/>
+          <p:cNvPr id="1722381857" name="Remarques Espace réservé 2"/>
           <p:cNvSpPr>
             <a:spLocks noGrp="1"/>
           </p:cNvSpPr>
@@ -736,7 +736,7 @@
       </p:sp>
       <p:sp>
         <p:nvSpPr>
-          <p:cNvPr id="24260839" name="Espace réservé pour le numéro de diapositive 3"/>
+          <p:cNvPr id="2105043950" name="Espace réservé pour le numéro de diapositive 3"/>
           <p:cNvSpPr>
             <a:spLocks noGrp="1"/>
           </p:cNvSpPr>
@@ -787,7 +787,7 @@
       </p:grpSpPr>
       <p:sp>
         <p:nvSpPr>
-          <p:cNvPr id="241285010" name="Espace réservé pour l'image de la diapositive 1"/>
+          <p:cNvPr id="1394914919" name="Espace réservé pour l'image de la diapositive 1"/>
           <p:cNvSpPr>
             <a:spLocks noChangeAspect="1" noGrp="1" noRot="1"/>
           </p:cNvSpPr>
@@ -804,7 +804,7 @@
       </p:sp>
       <p:sp>
         <p:nvSpPr>
-          <p:cNvPr id="612736274" name="Remarques Espace réservé 2"/>
+          <p:cNvPr id="1831331311" name="Remarques Espace réservé 2"/>
           <p:cNvSpPr>
             <a:spLocks noGrp="1"/>
           </p:cNvSpPr>
@@ -829,7 +829,7 @@
       </p:sp>
       <p:sp>
         <p:nvSpPr>
-          <p:cNvPr id="936626761" name="Espace réservé pour le numéro de diapositive 3"/>
+          <p:cNvPr id="1829595989" name="Espace réservé pour le numéro de diapositive 3"/>
           <p:cNvSpPr>
             <a:spLocks noGrp="1"/>
           </p:cNvSpPr>
@@ -880,7 +880,7 @@
       </p:grpSpPr>
       <p:sp>
         <p:nvSpPr>
-          <p:cNvPr id="1882730366" name="Espace réservé pour l'image de la diapositive 1"/>
+          <p:cNvPr id="738808738" name="Espace réservé pour l'image de la diapositive 1"/>
           <p:cNvSpPr>
             <a:spLocks noChangeAspect="1" noGrp="1" noRot="1"/>
           </p:cNvSpPr>
@@ -897,7 +897,7 @@
       </p:sp>
       <p:sp>
         <p:nvSpPr>
-          <p:cNvPr id="837395935" name="Remarques Espace réservé 2"/>
+          <p:cNvPr id="735544349" name="Remarques Espace réservé 2"/>
           <p:cNvSpPr>
             <a:spLocks noGrp="1"/>
           </p:cNvSpPr>
@@ -922,7 +922,7 @@
       </p:sp>
       <p:sp>
         <p:nvSpPr>
-          <p:cNvPr id="1553727353" name="Espace réservé pour le numéro de diapositive 3"/>
+          <p:cNvPr id="18655242" name="Espace réservé pour le numéro de diapositive 3"/>
           <p:cNvSpPr>
             <a:spLocks noGrp="1"/>
           </p:cNvSpPr>
@@ -973,7 +973,7 @@
       </p:grpSpPr>
       <p:sp>
         <p:nvSpPr>
-          <p:cNvPr id="546004861" name="Espace réservé pour l'image de la diapositive 1"/>
+          <p:cNvPr id="310474032" name="Espace réservé pour l'image de la diapositive 1"/>
           <p:cNvSpPr>
             <a:spLocks noChangeAspect="1" noGrp="1" noRot="1"/>
           </p:cNvSpPr>
@@ -990,7 +990,7 @@
       </p:sp>
       <p:sp>
         <p:nvSpPr>
-          <p:cNvPr id="1902732673" name="Remarques Espace réservé 2"/>
+          <p:cNvPr id="202671637" name="Remarques Espace réservé 2"/>
           <p:cNvSpPr>
             <a:spLocks noGrp="1"/>
           </p:cNvSpPr>
@@ -1015,7 +1015,7 @@
       </p:sp>
       <p:sp>
         <p:nvSpPr>
-          <p:cNvPr id="455257708" name="Espace réservé pour le numéro de diapositive 3"/>
+          <p:cNvPr id="996940566" name="Espace réservé pour le numéro de diapositive 3"/>
           <p:cNvSpPr>
             <a:spLocks noGrp="1"/>
           </p:cNvSpPr>
@@ -1066,7 +1066,7 @@
       </p:grpSpPr>
       <p:sp>
         <p:nvSpPr>
-          <p:cNvPr id="1510336676" name="Titre 1"/>
+          <p:cNvPr id="558189616" name="Titre 1"/>
           <p:cNvSpPr>
             <a:spLocks noGrp="1"/>
           </p:cNvSpPr>
@@ -1101,7 +1101,7 @@
       </p:sp>
       <p:sp>
         <p:nvSpPr>
-          <p:cNvPr id="584563278" name="Sous-titre 2"/>
+          <p:cNvPr id="414177799" name="Sous-titre 2"/>
           <p:cNvSpPr>
             <a:spLocks noGrp="1"/>
           </p:cNvSpPr>
@@ -1169,7 +1169,7 @@
       </p:sp>
       <p:sp>
         <p:nvSpPr>
-          <p:cNvPr id="1792997950" name="Espace réservé de la date 3"/>
+          <p:cNvPr id="251713442" name="Espace réservé de la date 3"/>
           <p:cNvSpPr>
             <a:spLocks noGrp="1"/>
           </p:cNvSpPr>
@@ -1195,7 +1195,7 @@
       </p:sp>
       <p:sp>
         <p:nvSpPr>
-          <p:cNvPr id="836820070" name="Espace réservé du pied de page 4"/>
+          <p:cNvPr id="416733969" name="Espace réservé du pied de page 4"/>
           <p:cNvSpPr>
             <a:spLocks noGrp="1"/>
           </p:cNvSpPr>
@@ -1217,7 +1217,7 @@
       </p:sp>
       <p:sp>
         <p:nvSpPr>
-          <p:cNvPr id="1323195380" name="Espace réservé du numéro de diapositive 5"/>
+          <p:cNvPr id="985561519" name="Espace réservé du numéro de diapositive 5"/>
           <p:cNvSpPr>
             <a:spLocks noGrp="1"/>
           </p:cNvSpPr>
@@ -1268,7 +1268,7 @@
       </p:grpSpPr>
       <p:sp>
         <p:nvSpPr>
-          <p:cNvPr id="1650807890" name="Titre 1"/>
+          <p:cNvPr id="1687982084" name="Titre 1"/>
           <p:cNvSpPr>
             <a:spLocks noGrp="1"/>
           </p:cNvSpPr>
@@ -1294,7 +1294,7 @@
       </p:sp>
       <p:sp>
         <p:nvSpPr>
-          <p:cNvPr id="785424467" name="Espace réservé du texte vertical 2"/>
+          <p:cNvPr id="106436850" name="Espace réservé du texte vertical 2"/>
           <p:cNvSpPr>
             <a:spLocks noGrp="1"/>
           </p:cNvSpPr>
@@ -1360,7 +1360,7 @@
       </p:sp>
       <p:sp>
         <p:nvSpPr>
-          <p:cNvPr id="1688149412" name="Espace réservé de la date 3"/>
+          <p:cNvPr id="49072126" name="Espace réservé de la date 3"/>
           <p:cNvSpPr>
             <a:spLocks noGrp="1"/>
           </p:cNvSpPr>
@@ -1386,7 +1386,7 @@
       </p:sp>
       <p:sp>
         <p:nvSpPr>
-          <p:cNvPr id="603509222" name="Espace réservé du pied de page 4"/>
+          <p:cNvPr id="279924206" name="Espace réservé du pied de page 4"/>
           <p:cNvSpPr>
             <a:spLocks noGrp="1"/>
           </p:cNvSpPr>
@@ -1408,7 +1408,7 @@
       </p:sp>
       <p:sp>
         <p:nvSpPr>
-          <p:cNvPr id="1084115466" name="Espace réservé du numéro de diapositive 5"/>
+          <p:cNvPr id="1850354030" name="Espace réservé du numéro de diapositive 5"/>
           <p:cNvSpPr>
             <a:spLocks noGrp="1"/>
           </p:cNvSpPr>
@@ -1459,7 +1459,7 @@
       </p:grpSpPr>
       <p:sp>
         <p:nvSpPr>
-          <p:cNvPr id="1656195528" name="Titre vertical 1"/>
+          <p:cNvPr id="1904798361" name="Titre vertical 1"/>
           <p:cNvSpPr>
             <a:spLocks noGrp="1"/>
           </p:cNvSpPr>
@@ -1490,7 +1490,7 @@
       </p:sp>
       <p:sp>
         <p:nvSpPr>
-          <p:cNvPr id="1995106649" name="Espace réservé du texte vertical 2"/>
+          <p:cNvPr id="1313611520" name="Espace réservé du texte vertical 2"/>
           <p:cNvSpPr>
             <a:spLocks noGrp="1"/>
           </p:cNvSpPr>
@@ -1561,7 +1561,7 @@
       </p:sp>
       <p:sp>
         <p:nvSpPr>
-          <p:cNvPr id="1949268024" name="Espace réservé de la date 3"/>
+          <p:cNvPr id="1387792319" name="Espace réservé de la date 3"/>
           <p:cNvSpPr>
             <a:spLocks noGrp="1"/>
           </p:cNvSpPr>
@@ -1587,7 +1587,7 @@
       </p:sp>
       <p:sp>
         <p:nvSpPr>
-          <p:cNvPr id="1560359338" name="Espace réservé du pied de page 4"/>
+          <p:cNvPr id="593748649" name="Espace réservé du pied de page 4"/>
           <p:cNvSpPr>
             <a:spLocks noGrp="1"/>
           </p:cNvSpPr>
@@ -1609,7 +1609,7 @@
       </p:sp>
       <p:sp>
         <p:nvSpPr>
-          <p:cNvPr id="1591798683" name="Espace réservé du numéro de diapositive 5"/>
+          <p:cNvPr id="1982763948" name="Espace réservé du numéro de diapositive 5"/>
           <p:cNvSpPr>
             <a:spLocks noGrp="1"/>
           </p:cNvSpPr>
@@ -1660,7 +1660,7 @@
       </p:grpSpPr>
       <p:sp>
         <p:nvSpPr>
-          <p:cNvPr id="1539744997" name="Titre 1"/>
+          <p:cNvPr id="1385489598" name="Titre 1"/>
           <p:cNvSpPr>
             <a:spLocks noGrp="1"/>
           </p:cNvSpPr>
@@ -1686,7 +1686,7 @@
       </p:sp>
       <p:sp>
         <p:nvSpPr>
-          <p:cNvPr id="1439927143" name="Espace réservé du contenu 2"/>
+          <p:cNvPr id="1649293310" name="Espace réservé du contenu 2"/>
           <p:cNvSpPr>
             <a:spLocks noGrp="1"/>
           </p:cNvSpPr>
@@ -1752,7 +1752,7 @@
       </p:sp>
       <p:sp>
         <p:nvSpPr>
-          <p:cNvPr id="882923929" name="Espace réservé de la date 3"/>
+          <p:cNvPr id="907960888" name="Espace réservé de la date 3"/>
           <p:cNvSpPr>
             <a:spLocks noGrp="1"/>
           </p:cNvSpPr>
@@ -1778,7 +1778,7 @@
       </p:sp>
       <p:sp>
         <p:nvSpPr>
-          <p:cNvPr id="1017032734" name="Espace réservé du pied de page 4"/>
+          <p:cNvPr id="843242738" name="Espace réservé du pied de page 4"/>
           <p:cNvSpPr>
             <a:spLocks noGrp="1"/>
           </p:cNvSpPr>
@@ -1800,7 +1800,7 @@
       </p:sp>
       <p:sp>
         <p:nvSpPr>
-          <p:cNvPr id="1540913864" name="Espace réservé du numéro de diapositive 5"/>
+          <p:cNvPr id="674920304" name="Espace réservé du numéro de diapositive 5"/>
           <p:cNvSpPr>
             <a:spLocks noGrp="1"/>
           </p:cNvSpPr>
@@ -1851,7 +1851,7 @@
       </p:grpSpPr>
       <p:sp>
         <p:nvSpPr>
-          <p:cNvPr id="277240438" name="Titre 1"/>
+          <p:cNvPr id="1947220028" name="Titre 1"/>
           <p:cNvSpPr>
             <a:spLocks noGrp="1"/>
           </p:cNvSpPr>
@@ -1886,7 +1886,7 @@
       </p:sp>
       <p:sp>
         <p:nvSpPr>
-          <p:cNvPr id="1678095719" name="Espace réservé du texte 2"/>
+          <p:cNvPr id="1471853232" name="Espace réservé du texte 2"/>
           <p:cNvSpPr>
             <a:spLocks noGrp="1"/>
           </p:cNvSpPr>
@@ -2008,7 +2008,7 @@
       </p:sp>
       <p:sp>
         <p:nvSpPr>
-          <p:cNvPr id="1186355083" name="Espace réservé de la date 3"/>
+          <p:cNvPr id="2024152615" name="Espace réservé de la date 3"/>
           <p:cNvSpPr>
             <a:spLocks noGrp="1"/>
           </p:cNvSpPr>
@@ -2034,7 +2034,7 @@
       </p:sp>
       <p:sp>
         <p:nvSpPr>
-          <p:cNvPr id="1694241393" name="Espace réservé du pied de page 4"/>
+          <p:cNvPr id="76345141" name="Espace réservé du pied de page 4"/>
           <p:cNvSpPr>
             <a:spLocks noGrp="1"/>
           </p:cNvSpPr>
@@ -2056,7 +2056,7 @@
       </p:sp>
       <p:sp>
         <p:nvSpPr>
-          <p:cNvPr id="641813619" name="Espace réservé du numéro de diapositive 5"/>
+          <p:cNvPr id="931831762" name="Espace réservé du numéro de diapositive 5"/>
           <p:cNvSpPr>
             <a:spLocks noGrp="1"/>
           </p:cNvSpPr>
@@ -2107,7 +2107,7 @@
       </p:grpSpPr>
       <p:sp>
         <p:nvSpPr>
-          <p:cNvPr id="584072955" name="Titre 1"/>
+          <p:cNvPr id="1883880562" name="Titre 1"/>
           <p:cNvSpPr>
             <a:spLocks noGrp="1"/>
           </p:cNvSpPr>
@@ -2133,7 +2133,7 @@
       </p:sp>
       <p:sp>
         <p:nvSpPr>
-          <p:cNvPr id="162246671" name="Espace réservé du contenu 2"/>
+          <p:cNvPr id="1745825645" name="Espace réservé du contenu 2"/>
           <p:cNvSpPr>
             <a:spLocks noGrp="1"/>
           </p:cNvSpPr>
@@ -2204,7 +2204,7 @@
       </p:sp>
       <p:sp>
         <p:nvSpPr>
-          <p:cNvPr id="2098968490" name="Espace réservé du contenu 3"/>
+          <p:cNvPr id="2140528698" name="Espace réservé du contenu 3"/>
           <p:cNvSpPr>
             <a:spLocks noGrp="1"/>
           </p:cNvSpPr>
@@ -2275,7 +2275,7 @@
       </p:sp>
       <p:sp>
         <p:nvSpPr>
-          <p:cNvPr id="1772022308" name="Espace réservé de la date 4"/>
+          <p:cNvPr id="1113313262" name="Espace réservé de la date 4"/>
           <p:cNvSpPr>
             <a:spLocks noGrp="1"/>
           </p:cNvSpPr>
@@ -2301,7 +2301,7 @@
       </p:sp>
       <p:sp>
         <p:nvSpPr>
-          <p:cNvPr id="54441121" name="Espace réservé du pied de page 5"/>
+          <p:cNvPr id="628715013" name="Espace réservé du pied de page 5"/>
           <p:cNvSpPr>
             <a:spLocks noGrp="1"/>
           </p:cNvSpPr>
@@ -2323,7 +2323,7 @@
       </p:sp>
       <p:sp>
         <p:nvSpPr>
-          <p:cNvPr id="888741111" name="Espace réservé du numéro de diapositive 6"/>
+          <p:cNvPr id="904081603" name="Espace réservé du numéro de diapositive 6"/>
           <p:cNvSpPr>
             <a:spLocks noGrp="1"/>
           </p:cNvSpPr>
@@ -2374,7 +2374,7 @@
       </p:grpSpPr>
       <p:sp>
         <p:nvSpPr>
-          <p:cNvPr id="1988461502" name="Titre 1"/>
+          <p:cNvPr id="501653835" name="Titre 1"/>
           <p:cNvSpPr>
             <a:spLocks noGrp="1"/>
           </p:cNvSpPr>
@@ -2405,7 +2405,7 @@
       </p:sp>
       <p:sp>
         <p:nvSpPr>
-          <p:cNvPr id="1915959932" name="Espace réservé du texte 2"/>
+          <p:cNvPr id="738729152" name="Espace réservé du texte 2"/>
           <p:cNvSpPr>
             <a:spLocks noGrp="1"/>
           </p:cNvSpPr>
@@ -2473,7 +2473,7 @@
       </p:sp>
       <p:sp>
         <p:nvSpPr>
-          <p:cNvPr id="741055392" name="Espace réservé du contenu 3"/>
+          <p:cNvPr id="1575257793" name="Espace réservé du contenu 3"/>
           <p:cNvSpPr>
             <a:spLocks noGrp="1"/>
           </p:cNvSpPr>
@@ -2544,7 +2544,7 @@
       </p:sp>
       <p:sp>
         <p:nvSpPr>
-          <p:cNvPr id="1471808200" name="Espace réservé du texte 4"/>
+          <p:cNvPr id="1760239665" name="Espace réservé du texte 4"/>
           <p:cNvSpPr>
             <a:spLocks noGrp="1"/>
           </p:cNvSpPr>
@@ -2612,7 +2612,7 @@
       </p:sp>
       <p:sp>
         <p:nvSpPr>
-          <p:cNvPr id="1780686271" name="Espace réservé du contenu 5"/>
+          <p:cNvPr id="372917692" name="Espace réservé du contenu 5"/>
           <p:cNvSpPr>
             <a:spLocks noGrp="1"/>
           </p:cNvSpPr>
@@ -2683,7 +2683,7 @@
       </p:sp>
       <p:sp>
         <p:nvSpPr>
-          <p:cNvPr id="1824485832" name="Espace réservé de la date 6"/>
+          <p:cNvPr id="1939686315" name="Espace réservé de la date 6"/>
           <p:cNvSpPr>
             <a:spLocks noGrp="1"/>
           </p:cNvSpPr>
@@ -2709,7 +2709,7 @@
       </p:sp>
       <p:sp>
         <p:nvSpPr>
-          <p:cNvPr id="695904415" name="Espace réservé du pied de page 7"/>
+          <p:cNvPr id="1752389350" name="Espace réservé du pied de page 7"/>
           <p:cNvSpPr>
             <a:spLocks noGrp="1"/>
           </p:cNvSpPr>
@@ -2731,7 +2731,7 @@
       </p:sp>
       <p:sp>
         <p:nvSpPr>
-          <p:cNvPr id="1721572063" name="Espace réservé du numéro de diapositive 8"/>
+          <p:cNvPr id="944197296" name="Espace réservé du numéro de diapositive 8"/>
           <p:cNvSpPr>
             <a:spLocks noGrp="1"/>
           </p:cNvSpPr>
@@ -2782,7 +2782,7 @@
       </p:grpSpPr>
       <p:sp>
         <p:nvSpPr>
-          <p:cNvPr id="1603099733" name="Titre 1"/>
+          <p:cNvPr id="1703684044" name="Titre 1"/>
           <p:cNvSpPr>
             <a:spLocks noGrp="1"/>
           </p:cNvSpPr>
@@ -2808,7 +2808,7 @@
       </p:sp>
       <p:sp>
         <p:nvSpPr>
-          <p:cNvPr id="822847613" name="Espace réservé de la date 2"/>
+          <p:cNvPr id="362334234" name="Espace réservé de la date 2"/>
           <p:cNvSpPr>
             <a:spLocks noGrp="1"/>
           </p:cNvSpPr>
@@ -2834,7 +2834,7 @@
       </p:sp>
       <p:sp>
         <p:nvSpPr>
-          <p:cNvPr id="1539687152" name="Espace réservé du pied de page 3"/>
+          <p:cNvPr id="731021578" name="Espace réservé du pied de page 3"/>
           <p:cNvSpPr>
             <a:spLocks noGrp="1"/>
           </p:cNvSpPr>
@@ -2856,7 +2856,7 @@
       </p:sp>
       <p:sp>
         <p:nvSpPr>
-          <p:cNvPr id="1274215469" name="Espace réservé du numéro de diapositive 4"/>
+          <p:cNvPr id="844324523" name="Espace réservé du numéro de diapositive 4"/>
           <p:cNvSpPr>
             <a:spLocks noGrp="1"/>
           </p:cNvSpPr>
@@ -2907,7 +2907,7 @@
       </p:grpSpPr>
       <p:sp>
         <p:nvSpPr>
-          <p:cNvPr id="246664440" name="Espace réservé de la date 1"/>
+          <p:cNvPr id="929309128" name="Espace réservé de la date 1"/>
           <p:cNvSpPr>
             <a:spLocks noGrp="1"/>
           </p:cNvSpPr>
@@ -2933,7 +2933,7 @@
       </p:sp>
       <p:sp>
         <p:nvSpPr>
-          <p:cNvPr id="1573600396" name="Espace réservé du pied de page 2"/>
+          <p:cNvPr id="1789839483" name="Espace réservé du pied de page 2"/>
           <p:cNvSpPr>
             <a:spLocks noGrp="1"/>
           </p:cNvSpPr>
@@ -2955,7 +2955,7 @@
       </p:sp>
       <p:sp>
         <p:nvSpPr>
-          <p:cNvPr id="1657780482" name="Espace réservé du numéro de diapositive 3"/>
+          <p:cNvPr id="1766040998" name="Espace réservé du numéro de diapositive 3"/>
           <p:cNvSpPr>
             <a:spLocks noGrp="1"/>
           </p:cNvSpPr>
@@ -3006,7 +3006,7 @@
       </p:grpSpPr>
       <p:sp>
         <p:nvSpPr>
-          <p:cNvPr id="561462715" name="Titre 1"/>
+          <p:cNvPr id="425663145" name="Titre 1"/>
           <p:cNvSpPr>
             <a:spLocks noGrp="1"/>
           </p:cNvSpPr>
@@ -3041,7 +3041,7 @@
       </p:sp>
       <p:sp>
         <p:nvSpPr>
-          <p:cNvPr id="1964388844" name="Espace réservé du contenu 2"/>
+          <p:cNvPr id="1578457474" name="Espace réservé du contenu 2"/>
           <p:cNvSpPr>
             <a:spLocks noGrp="1"/>
           </p:cNvSpPr>
@@ -3140,7 +3140,7 @@
       </p:sp>
       <p:sp>
         <p:nvSpPr>
-          <p:cNvPr id="1048672463" name="Espace réservé du texte 3"/>
+          <p:cNvPr id="858983078" name="Espace réservé du texte 3"/>
           <p:cNvSpPr>
             <a:spLocks noGrp="1"/>
           </p:cNvSpPr>
@@ -3208,7 +3208,7 @@
       </p:sp>
       <p:sp>
         <p:nvSpPr>
-          <p:cNvPr id="928165858" name="Espace réservé de la date 4"/>
+          <p:cNvPr id="372892862" name="Espace réservé de la date 4"/>
           <p:cNvSpPr>
             <a:spLocks noGrp="1"/>
           </p:cNvSpPr>
@@ -3234,7 +3234,7 @@
       </p:sp>
       <p:sp>
         <p:nvSpPr>
-          <p:cNvPr id="491134374" name="Espace réservé du pied de page 5"/>
+          <p:cNvPr id="326343801" name="Espace réservé du pied de page 5"/>
           <p:cNvSpPr>
             <a:spLocks noGrp="1"/>
           </p:cNvSpPr>
@@ -3256,7 +3256,7 @@
       </p:sp>
       <p:sp>
         <p:nvSpPr>
-          <p:cNvPr id="757007241" name="Espace réservé du numéro de diapositive 6"/>
+          <p:cNvPr id="545950065" name="Espace réservé du numéro de diapositive 6"/>
           <p:cNvSpPr>
             <a:spLocks noGrp="1"/>
           </p:cNvSpPr>
@@ -3307,7 +3307,7 @@
       </p:grpSpPr>
       <p:sp>
         <p:nvSpPr>
-          <p:cNvPr id="1748197707" name="Titre 1"/>
+          <p:cNvPr id="1727352917" name="Titre 1"/>
           <p:cNvSpPr>
             <a:spLocks noGrp="1"/>
           </p:cNvSpPr>
@@ -3342,7 +3342,7 @@
       </p:sp>
       <p:sp>
         <p:nvSpPr>
-          <p:cNvPr id="677986660" name="Espace réservé pour une image 2"/>
+          <p:cNvPr id="1935476158" name="Espace réservé pour une image 2"/>
           <p:cNvSpPr>
             <a:spLocks noChangeAspect="1" noGrp="1"/>
           </p:cNvSpPr>
@@ -3410,7 +3410,7 @@
       </p:sp>
       <p:sp>
         <p:nvSpPr>
-          <p:cNvPr id="1384989057" name="Espace réservé du texte 3"/>
+          <p:cNvPr id="1358227892" name="Espace réservé du texte 3"/>
           <p:cNvSpPr>
             <a:spLocks noGrp="1"/>
           </p:cNvSpPr>
@@ -3478,7 +3478,7 @@
       </p:sp>
       <p:sp>
         <p:nvSpPr>
-          <p:cNvPr id="1890004678" name="Espace réservé de la date 4"/>
+          <p:cNvPr id="808179552" name="Espace réservé de la date 4"/>
           <p:cNvSpPr>
             <a:spLocks noGrp="1"/>
           </p:cNvSpPr>
@@ -3504,7 +3504,7 @@
       </p:sp>
       <p:sp>
         <p:nvSpPr>
-          <p:cNvPr id="1944914624" name="Espace réservé du pied de page 5"/>
+          <p:cNvPr id="1680068817" name="Espace réservé du pied de page 5"/>
           <p:cNvSpPr>
             <a:spLocks noGrp="1"/>
           </p:cNvSpPr>
@@ -3526,7 +3526,7 @@
       </p:sp>
       <p:sp>
         <p:nvSpPr>
-          <p:cNvPr id="1594369152" name="Espace réservé du numéro de diapositive 6"/>
+          <p:cNvPr id="599591034" name="Espace réservé du numéro de diapositive 6"/>
           <p:cNvSpPr>
             <a:spLocks noGrp="1"/>
           </p:cNvSpPr>
@@ -3582,7 +3582,7 @@
       </p:grpSpPr>
       <p:sp>
         <p:nvSpPr>
-          <p:cNvPr id="612013306" name="Espace réservé du titre 1"/>
+          <p:cNvPr id="719571281" name="Espace réservé du titre 1"/>
           <p:cNvSpPr>
             <a:spLocks noGrp="1"/>
           </p:cNvSpPr>
@@ -3618,7 +3618,7 @@
       </p:sp>
       <p:sp>
         <p:nvSpPr>
-          <p:cNvPr id="1873188760" name="Espace réservé du texte 2"/>
+          <p:cNvPr id="1489779153" name="Espace réservé du texte 2"/>
           <p:cNvSpPr>
             <a:spLocks noGrp="1"/>
           </p:cNvSpPr>
@@ -3694,7 +3694,7 @@
       </p:sp>
       <p:sp>
         <p:nvSpPr>
-          <p:cNvPr id="21743955" name="Espace réservé de la date 3"/>
+          <p:cNvPr id="1966787215" name="Espace réservé de la date 3"/>
           <p:cNvSpPr>
             <a:spLocks noGrp="1"/>
           </p:cNvSpPr>
@@ -3738,7 +3738,7 @@
       </p:sp>
       <p:sp>
         <p:nvSpPr>
-          <p:cNvPr id="296303770" name="Espace réservé du pied de page 4"/>
+          <p:cNvPr id="1485288775" name="Espace réservé du pied de page 4"/>
           <p:cNvSpPr>
             <a:spLocks noGrp="1"/>
           </p:cNvSpPr>
@@ -3778,7 +3778,7 @@
       </p:sp>
       <p:sp>
         <p:nvSpPr>
-          <p:cNvPr id="1205261072" name="Espace réservé du numéro de diapositive 5"/>
+          <p:cNvPr id="1117715197" name="Espace réservé du numéro de diapositive 5"/>
           <p:cNvSpPr>
             <a:spLocks noGrp="1"/>
           </p:cNvSpPr>
@@ -4138,7 +4138,7 @@
       </p:grpSpPr>
       <p:cxnSp>
         <p:nvCxnSpPr>
-          <p:cNvPr id="312971185" name="Connecteur droit 1568760680"/>
+          <p:cNvPr id="507409488" name="Connecteur droit 1568760680"/>
           <p:cNvCxnSpPr/>
           <p:nvPr/>
         </p:nvCxnSpPr>
@@ -4180,7 +4180,7 @@
       </p:cxnSp>
       <p:sp>
         <p:nvSpPr>
-          <p:cNvPr id="663848184" name="ZoneTexte 1868728971"/>
+          <p:cNvPr id="1224542497" name="ZoneTexte 1868728971"/>
           <p:cNvSpPr txBox="1"/>
           <p:nvPr/>
         </p:nvSpPr>
@@ -4220,7 +4220,7 @@
       </p:sp>
       <p:cxnSp>
         <p:nvCxnSpPr>
-          <p:cNvPr id="1961574055" name="Connecteur droit 806540798"/>
+          <p:cNvPr id="1678038039" name="Connecteur droit 806540798"/>
           <p:cNvCxnSpPr/>
           <p:nvPr/>
         </p:nvCxnSpPr>
@@ -4262,7 +4262,7 @@
       </p:cxnSp>
       <p:sp>
         <p:nvSpPr>
-          <p:cNvPr id="270001050" name="ZoneTexte 406616703"/>
+          <p:cNvPr id="1375667479" name="ZoneTexte 406616703"/>
           <p:cNvSpPr txBox="1"/>
           <p:nvPr/>
         </p:nvSpPr>
@@ -4302,7 +4302,7 @@
       </p:sp>
       <p:cxnSp>
         <p:nvCxnSpPr>
-          <p:cNvPr id="821263167" name="Connecteur droit 858914340"/>
+          <p:cNvPr id="690848301" name="Connecteur droit 858914340"/>
           <p:cNvCxnSpPr/>
           <p:nvPr/>
         </p:nvCxnSpPr>
@@ -4344,7 +4344,7 @@
       </p:cxnSp>
       <p:sp>
         <p:nvSpPr>
-          <p:cNvPr id="350121804" name="ZoneTexte 2018177722"/>
+          <p:cNvPr id="2006009998" name="ZoneTexte 2018177722"/>
           <p:cNvSpPr txBox="1"/>
           <p:nvPr/>
         </p:nvSpPr>
@@ -4391,7 +4391,7 @@
       </p:sp>
       <p:sp>
         <p:nvSpPr>
-          <p:cNvPr id="1567987975" name="ZoneTexte 519900862"/>
+          <p:cNvPr id="1455414506" name="ZoneTexte 519900862"/>
           <p:cNvSpPr txBox="1"/>
           <p:nvPr/>
         </p:nvSpPr>
@@ -4653,7 +4653,7 @@
       </p:sp>
       <p:sp>
         <p:nvSpPr>
-          <p:cNvPr id="214561691" name="Rectangle : avec coins arrondis en haut 838565229"/>
+          <p:cNvPr id="768021577" name="Rectangle : avec coins arrondis en haut 838565229"/>
           <p:cNvSpPr/>
           <p:nvPr/>
         </p:nvSpPr>
@@ -4699,7 +4699,7 @@
       </p:sp>
       <p:sp>
         <p:nvSpPr>
-          <p:cNvPr id="1242192860" name="ZoneTexte 448541368"/>
+          <p:cNvPr id="1434167112" name="ZoneTexte 448541368"/>
           <p:cNvSpPr txBox="1"/>
           <p:nvPr/>
         </p:nvSpPr>
@@ -4780,7 +4780,7 @@
       </p:sp>
       <p:sp>
         <p:nvSpPr>
-          <p:cNvPr id="1498329553" name="Rectangle : avec coins arrondis en haut 1165584529"/>
+          <p:cNvPr id="1872558063" name="Rectangle : avec coins arrondis en haut 1165584529"/>
           <p:cNvSpPr/>
           <p:nvPr/>
         </p:nvSpPr>
@@ -4826,7 +4826,7 @@
       </p:sp>
       <p:sp>
         <p:nvSpPr>
-          <p:cNvPr id="1267974980" name="Flèche : pentagone 1880610112"/>
+          <p:cNvPr id="1049701009" name="Flèche : pentagone 1880610112"/>
           <p:cNvSpPr/>
           <p:nvPr/>
         </p:nvSpPr>
@@ -4871,7 +4871,7 @@
       </p:sp>
       <p:sp>
         <p:nvSpPr>
-          <p:cNvPr id="1912762754" name="Flèche : pentagone 446859139"/>
+          <p:cNvPr id="1418313625" name="Flèche : pentagone 446859139"/>
           <p:cNvSpPr/>
           <p:nvPr/>
         </p:nvSpPr>
@@ -4916,7 +4916,7 @@
       </p:sp>
       <p:sp>
         <p:nvSpPr>
-          <p:cNvPr id="1168790229" name="Flèche : pentagone 2055848356"/>
+          <p:cNvPr id="847990409" name="Flèche : pentagone 2055848356"/>
           <p:cNvSpPr/>
           <p:nvPr/>
         </p:nvSpPr>
@@ -4961,7 +4961,7 @@
       </p:sp>
       <p:sp>
         <p:nvSpPr>
-          <p:cNvPr id="198036050" name="Flèche : pentagone 1980093981"/>
+          <p:cNvPr id="1261605472" name="Flèche : pentagone 1980093981"/>
           <p:cNvSpPr/>
           <p:nvPr/>
         </p:nvSpPr>
@@ -5006,7 +5006,7 @@
       </p:sp>
       <p:sp>
         <p:nvSpPr>
-          <p:cNvPr id="1929128847" name="Flèche : pentagone 905284374"/>
+          <p:cNvPr id="1275476913" name="Flèche : pentagone 905284374"/>
           <p:cNvSpPr/>
           <p:nvPr/>
         </p:nvSpPr>
@@ -5051,7 +5051,7 @@
       </p:sp>
       <p:sp>
         <p:nvSpPr>
-          <p:cNvPr id="1276900740" name="ZoneTexte 880464430"/>
+          <p:cNvPr id="218561115" name="ZoneTexte 880464430"/>
           <p:cNvSpPr txBox="1"/>
           <p:nvPr/>
         </p:nvSpPr>
@@ -5232,7 +5232,7 @@
       </p:sp>
       <p:sp>
         <p:nvSpPr>
-          <p:cNvPr id="1526178222" name="ZoneTexte 1302587497"/>
+          <p:cNvPr id="100417881" name="ZoneTexte 1302587497"/>
           <p:cNvSpPr txBox="1"/>
           <p:nvPr/>
         </p:nvSpPr>
@@ -5530,7 +5530,7 @@
       </p:sp>
       <p:cxnSp>
         <p:nvCxnSpPr>
-          <p:cNvPr id="282910713" name="Connecteur droit 342798987"/>
+          <p:cNvPr id="464449333" name="Connecteur droit 342798987"/>
           <p:cNvCxnSpPr/>
           <p:nvPr/>
         </p:nvCxnSpPr>
@@ -5572,7 +5572,7 @@
       </p:cxnSp>
       <p:sp>
         <p:nvSpPr>
-          <p:cNvPr id="1383857327" name="ZoneTexte 966486802"/>
+          <p:cNvPr id="1591983656" name="ZoneTexte 966486802"/>
           <p:cNvSpPr txBox="1"/>
           <p:nvPr/>
         </p:nvSpPr>
@@ -5612,7 +5612,7 @@
       </p:sp>
       <p:sp>
         <p:nvSpPr>
-          <p:cNvPr id="1830410539" name="Rectangle 38344096"/>
+          <p:cNvPr id="1400307141" name="Rectangle 38344096"/>
           <p:cNvSpPr/>
           <p:nvPr/>
         </p:nvSpPr>
@@ -5652,7 +5652,7 @@
       </p:sp>
       <p:sp>
         <p:nvSpPr>
-          <p:cNvPr id="742624253" name="Rectangle 954364527"/>
+          <p:cNvPr id="1250646240" name="Rectangle 954364527"/>
           <p:cNvSpPr/>
           <p:nvPr/>
         </p:nvSpPr>
@@ -5692,7 +5692,7 @@
       </p:sp>
       <p:sp>
         <p:nvSpPr>
-          <p:cNvPr id="116221013" name="ZoneTexte 1527388901"/>
+          <p:cNvPr id="1452331357" name="ZoneTexte 1527388901"/>
           <p:cNvSpPr txBox="1"/>
           <p:nvPr/>
         </p:nvSpPr>
@@ -5914,14 +5914,14 @@
       </p:sp>
       <p:sp>
         <p:nvSpPr>
-          <p:cNvPr id="1350094087" name="ZoneTexte 1440859034"/>
+          <p:cNvPr id="1382511241" name="ZoneTexte 1440859034"/>
           <p:cNvSpPr txBox="1"/>
           <p:nvPr/>
         </p:nvSpPr>
         <p:spPr bwMode="auto">
           <a:xfrm>
-            <a:off x="5757451" y="6722326"/>
-            <a:ext cx="793338" cy="274679"/>
+            <a:off x="5710631" y="6695111"/>
+            <a:ext cx="894969" cy="305159"/>
           </a:xfrm>
           <a:prstGeom prst="rect">
             <a:avLst/>
@@ -5947,7 +5947,7 @@
               <a:defRPr/>
             </a:pPr>
             <a:r>
-              <a:rPr lang="fr-FR" sz="1200" b="1" i="0" u="none" strike="noStrike" cap="none" spc="0">
+              <a:rPr lang="fr-FR" sz="1400" b="1" i="0" u="none" strike="noStrike" cap="none" spc="0">
                 <a:solidFill>
                   <a:schemeClr val="bg1">
                     <a:lumMod val="65000"/>
@@ -5965,7 +5965,7 @@
       </p:sp>
       <p:cxnSp>
         <p:nvCxnSpPr>
-          <p:cNvPr id="842087821" name="Connecteur droit 858914340"/>
+          <p:cNvPr id="1727206409" name="Connecteur droit 858914340"/>
           <p:cNvCxnSpPr/>
           <p:nvPr/>
         </p:nvCxnSpPr>
@@ -6007,7 +6007,7 @@
       </p:cxnSp>
       <p:sp>
         <p:nvSpPr>
-          <p:cNvPr id="1256216692" name="ZoneTexte 2018177722"/>
+          <p:cNvPr id="1192019932" name="ZoneTexte 2018177722"/>
           <p:cNvSpPr txBox="1"/>
           <p:nvPr/>
         </p:nvSpPr>
@@ -6054,7 +6054,7 @@
       </p:sp>
       <p:sp>
         <p:nvSpPr>
-          <p:cNvPr id="105190461" name=""/>
+          <p:cNvPr id="1677388360" name=""/>
           <p:cNvSpPr txBox="1"/>
           <p:nvPr/>
         </p:nvSpPr>
@@ -6156,7 +6156,7 @@
       </p:sp>
       <p:cxnSp>
         <p:nvCxnSpPr>
-          <p:cNvPr id="700139843" name="Connecteur droit 858914340"/>
+          <p:cNvPr id="25789445" name="Connecteur droit 858914340"/>
           <p:cNvCxnSpPr/>
           <p:nvPr/>
         </p:nvCxnSpPr>
@@ -6198,7 +6198,7 @@
       </p:cxnSp>
       <p:sp>
         <p:nvSpPr>
-          <p:cNvPr id="101529252" name="ZoneTexte 2018177722"/>
+          <p:cNvPr id="1476156191" name="ZoneTexte 2018177722"/>
           <p:cNvSpPr txBox="1"/>
           <p:nvPr/>
         </p:nvSpPr>
@@ -6256,14 +6256,14 @@
       </p:sp>
       <p:sp>
         <p:nvSpPr>
-          <p:cNvPr id="1732692953" name=""/>
+          <p:cNvPr id="324108197" name=""/>
           <p:cNvSpPr txBox="1"/>
           <p:nvPr/>
         </p:nvSpPr>
         <p:spPr bwMode="auto">
           <a:xfrm rot="0" flipH="0" flipV="0">
-            <a:off x="4547592" y="5053581"/>
-            <a:ext cx="2312300" cy="1509120"/>
+            <a:off x="4547592" y="5033170"/>
+            <a:ext cx="2343979" cy="1539599"/>
           </a:xfrm>
           <a:prstGeom prst="rect">
             <a:avLst/>
@@ -6299,7 +6299,7 @@
                 <a:ea typeface="Arial"/>
                 <a:cs typeface="Arial"/>
               </a:rPr>
-              <a:t>Pour réussir un </a:t>
+              <a:t>Vous réussissez un </a:t>
             </a:r>
             <a:r>
               <a:rPr lang="fr-FR" sz="800" b="1" i="0" u="none" strike="noStrike" cap="none" spc="0">
@@ -6327,7 +6327,7 @@
                 <a:ea typeface="Arial"/>
                 <a:cs typeface="Arial"/>
               </a:rPr>
-              <a:t>, vous devez obtenir un résultat</a:t>
+              <a:t> sur un résultat</a:t>
             </a:r>
             <a:r>
               <a:rPr lang="fr-FR" sz="800" b="1" i="0" u="none" strike="noStrike" cap="none" spc="0">
@@ -6357,7 +6357,21 @@
               </a:rPr>
               <a:t> à la valeur de compétence ou de résistance avec 1d100. </a:t>
             </a:r>
-            <a:br>
+            <a:r>
+              <a:rPr lang="fr-FR" sz="800" b="1" i="0" u="none" strike="noStrike" cap="none" spc="0">
+                <a:solidFill>
+                  <a:schemeClr val="tx1">
+                    <a:lumMod val="50000"/>
+                    <a:lumOff val="50000"/>
+                  </a:schemeClr>
+                </a:solidFill>
+                <a:latin typeface="Arial"/>
+                <a:ea typeface="Arial"/>
+                <a:cs typeface="Arial"/>
+              </a:rPr>
+              <a:t>1</a:t>
+            </a:r>
+            <a:r>
               <a:rPr lang="fr-FR" sz="800" b="0" i="0" u="none" strike="noStrike" cap="none" spc="0">
                 <a:solidFill>
                   <a:schemeClr val="tx1">
@@ -6369,7 +6383,22 @@
                 <a:ea typeface="Arial"/>
                 <a:cs typeface="Arial"/>
               </a:rPr>
-            </a:br>
+              <a:t> est toujours une réussite, </a:t>
+            </a:r>
+            <a:r>
+              <a:rPr lang="fr-FR" sz="800" b="1" i="0" u="none" strike="noStrike" cap="none" spc="0">
+                <a:solidFill>
+                  <a:schemeClr val="tx1">
+                    <a:lumMod val="50000"/>
+                    <a:lumOff val="50000"/>
+                  </a:schemeClr>
+                </a:solidFill>
+                <a:latin typeface="Arial"/>
+                <a:ea typeface="Arial"/>
+                <a:cs typeface="Arial"/>
+              </a:rPr>
+              <a:t>100</a:t>
+            </a:r>
             <a:r>
               <a:rPr lang="fr-FR" sz="800" b="0" i="0" u="none" strike="noStrike" cap="none" spc="0">
                 <a:solidFill>
@@ -6382,7 +6411,7 @@
                 <a:ea typeface="Arial"/>
                 <a:cs typeface="Arial"/>
               </a:rPr>
-              <a:t>1 est toujours une réussite, 100 toujours un échec.</a:t>
+              <a:t> toujours un échec.</a:t>
             </a:r>
             <a:r>
               <a:rPr lang="fr-FR" sz="800" b="0" i="0" u="none" strike="noStrike" cap="none" spc="0">
@@ -6410,7 +6439,7 @@
                 <a:ea typeface="Arial"/>
                 <a:cs typeface="Arial"/>
               </a:rPr>
-              <a:t>Chaque case de </a:t>
+              <a:t>Un </a:t>
             </a:r>
             <a:r>
               <a:rPr lang="fr-FR" sz="800" b="1" i="0" u="none" strike="noStrike" cap="none" spc="0">
@@ -6424,7 +6453,7 @@
                 <a:ea typeface="Arial"/>
                 <a:cs typeface="Arial"/>
               </a:rPr>
-              <a:t>trauma </a:t>
+              <a:t>double</a:t>
             </a:r>
             <a:r>
               <a:rPr lang="fr-FR" sz="800" b="0" i="0" u="none" strike="noStrike" cap="none" spc="0">
@@ -6438,7 +6467,35 @@
                 <a:ea typeface="Arial"/>
                 <a:cs typeface="Arial"/>
               </a:rPr>
-              <a:t>cochée impose un malus de compétences de 10 points.</a:t>
+              <a:t> naturel est un </a:t>
+            </a:r>
+            <a:r>
+              <a:rPr lang="fr-FR" sz="800" b="1" i="0" u="none" strike="noStrike" cap="none" spc="0">
+                <a:solidFill>
+                  <a:schemeClr val="tx1">
+                    <a:lumMod val="50000"/>
+                    <a:lumOff val="50000"/>
+                  </a:schemeClr>
+                </a:solidFill>
+                <a:latin typeface="Arial"/>
+                <a:ea typeface="Arial"/>
+                <a:cs typeface="Arial"/>
+              </a:rPr>
+              <a:t>résultat critique</a:t>
+            </a:r>
+            <a:r>
+              <a:rPr lang="fr-FR" sz="800" b="0" i="0" u="none" strike="noStrike" cap="none" spc="0">
+                <a:solidFill>
+                  <a:schemeClr val="tx1">
+                    <a:lumMod val="50000"/>
+                    <a:lumOff val="50000"/>
+                  </a:schemeClr>
+                </a:solidFill>
+                <a:latin typeface="Arial"/>
+                <a:ea typeface="Arial"/>
+                <a:cs typeface="Arial"/>
+              </a:rPr>
+              <a:t>. </a:t>
             </a:r>
             <a:br>
               <a:rPr lang="fr-FR" sz="800" b="0" i="0" u="none" strike="noStrike" cap="none" spc="0">
@@ -6541,6 +6598,74 @@
               </a:rPr>
               <a:t>, celui qui réussi le test et qui obtient le plus haut score au dé est vainqueur.</a:t>
             </a:r>
+            <a:br>
+              <a:rPr lang="fr-FR" sz="800" b="0" i="0" u="none" strike="noStrike" cap="none" spc="0">
+                <a:solidFill>
+                  <a:schemeClr val="tx1">
+                    <a:lumMod val="50000"/>
+                    <a:lumOff val="50000"/>
+                  </a:schemeClr>
+                </a:solidFill>
+                <a:latin typeface="Arial"/>
+                <a:ea typeface="Arial"/>
+                <a:cs typeface="Arial"/>
+              </a:rPr>
+            </a:br>
+            <a:br>
+              <a:rPr lang="fr-FR" sz="200" b="0" i="0" u="none" strike="noStrike" cap="none" spc="0">
+                <a:solidFill>
+                  <a:schemeClr val="tx1">
+                    <a:lumMod val="50000"/>
+                    <a:lumOff val="50000"/>
+                  </a:schemeClr>
+                </a:solidFill>
+                <a:latin typeface="Arial"/>
+                <a:ea typeface="Arial"/>
+                <a:cs typeface="Arial"/>
+              </a:rPr>
+            </a:br>
+            <a:r>
+              <a:rPr lang="fr-FR" sz="800" b="0" i="0" u="none" strike="noStrike" cap="none" spc="0">
+                <a:solidFill>
+                  <a:schemeClr val="tx1">
+                    <a:lumMod val="50000"/>
+                    <a:lumOff val="50000"/>
+                  </a:schemeClr>
+                </a:solidFill>
+                <a:latin typeface="Arial"/>
+                <a:ea typeface="Arial"/>
+                <a:cs typeface="Arial"/>
+              </a:rPr>
+              <a:t>Chaque case de </a:t>
+            </a:r>
+            <a:r>
+              <a:rPr lang="fr-FR" sz="800" b="1" i="0" u="none" strike="noStrike" cap="none" spc="0">
+                <a:solidFill>
+                  <a:schemeClr val="tx1">
+                    <a:lumMod val="50000"/>
+                    <a:lumOff val="50000"/>
+                  </a:schemeClr>
+                </a:solidFill>
+                <a:latin typeface="Arial"/>
+                <a:ea typeface="Arial"/>
+                <a:cs typeface="Arial"/>
+              </a:rPr>
+              <a:t>trauma </a:t>
+            </a:r>
+            <a:r>
+              <a:rPr lang="fr-FR" sz="800" b="0" i="0" u="none" strike="noStrike" cap="none" spc="0">
+                <a:solidFill>
+                  <a:schemeClr val="tx1">
+                    <a:lumMod val="50000"/>
+                    <a:lumOff val="50000"/>
+                  </a:schemeClr>
+                </a:solidFill>
+                <a:latin typeface="Arial"/>
+                <a:ea typeface="Arial"/>
+                <a:cs typeface="Arial"/>
+              </a:rPr>
+              <a:t>cochée impose un malus de compétences de 10 points.</a:t>
+            </a:r>
             <a:endParaRPr lang="fr-FR" sz="800" b="0" i="0" u="none" strike="noStrike" cap="none" spc="0">
               <a:solidFill>
                 <a:schemeClr val="tx1">
@@ -6582,7 +6707,7 @@
       </p:sp>
       <p:sp>
         <p:nvSpPr>
-          <p:cNvPr id="940298515" name="ZoneTexte 2021443538"/>
+          <p:cNvPr id="586684640" name="ZoneTexte 2021443538"/>
           <p:cNvSpPr txBox="1"/>
           <p:nvPr/>
         </p:nvSpPr>
@@ -6666,7 +6791,7 @@
       </p:sp>
       <p:sp>
         <p:nvSpPr>
-          <p:cNvPr id="51888916" name="ZoneTexte 1075280509"/>
+          <p:cNvPr id="469094918" name="ZoneTexte 1075280509"/>
           <p:cNvSpPr txBox="1"/>
           <p:nvPr/>
         </p:nvSpPr>
@@ -6750,7 +6875,7 @@
       </p:sp>
       <p:sp>
         <p:nvSpPr>
-          <p:cNvPr id="358970868" name="ZoneTexte 824413856"/>
+          <p:cNvPr id="586342179" name="ZoneTexte 824413856"/>
           <p:cNvSpPr txBox="1"/>
           <p:nvPr/>
         </p:nvSpPr>
@@ -6834,7 +6959,7 @@
       </p:sp>
       <p:sp>
         <p:nvSpPr>
-          <p:cNvPr id="1334295219" name="ZoneTexte 1036656844"/>
+          <p:cNvPr id="1603150477" name="ZoneTexte 1036656844"/>
           <p:cNvSpPr txBox="1"/>
           <p:nvPr/>
         </p:nvSpPr>
@@ -6918,7 +7043,7 @@
       </p:sp>
       <p:sp>
         <p:nvSpPr>
-          <p:cNvPr id="1841481673" name="ZoneTexte 226284734"/>
+          <p:cNvPr id="82058722" name="ZoneTexte 226284734"/>
           <p:cNvSpPr txBox="1"/>
           <p:nvPr/>
         </p:nvSpPr>
@@ -7002,7 +7127,7 @@
       </p:sp>
       <p:sp>
         <p:nvSpPr>
-          <p:cNvPr id="656071358" name="ZoneTexte 162158187"/>
+          <p:cNvPr id="1462733146" name="ZoneTexte 162158187"/>
           <p:cNvSpPr txBox="1"/>
           <p:nvPr/>
         </p:nvSpPr>
@@ -7066,7 +7191,7 @@
       </p:sp>
       <p:sp>
         <p:nvSpPr>
-          <p:cNvPr id="1502691587" name="ZoneTexte 1063440096"/>
+          <p:cNvPr id="1718820745" name="ZoneTexte 1063440096"/>
           <p:cNvSpPr txBox="1"/>
           <p:nvPr/>
         </p:nvSpPr>
@@ -7150,7 +7275,7 @@
       </p:sp>
       <p:sp>
         <p:nvSpPr>
-          <p:cNvPr id="1965368542" name="ZoneTexte 1564072661"/>
+          <p:cNvPr id="1369343456" name="ZoneTexte 1564072661"/>
           <p:cNvSpPr txBox="1"/>
           <p:nvPr/>
         </p:nvSpPr>
@@ -7234,7 +7359,7 @@
       </p:sp>
       <p:sp>
         <p:nvSpPr>
-          <p:cNvPr id="1475065464" name="ZoneTexte 2102805411"/>
+          <p:cNvPr id="1953860243" name="ZoneTexte 2102805411"/>
           <p:cNvSpPr txBox="1"/>
           <p:nvPr/>
         </p:nvSpPr>
@@ -7318,7 +7443,7 @@
       </p:sp>
       <p:sp>
         <p:nvSpPr>
-          <p:cNvPr id="826160681" name="ZoneTexte 1094420572"/>
+          <p:cNvPr id="1806342990" name="ZoneTexte 1094420572"/>
           <p:cNvSpPr txBox="1"/>
           <p:nvPr/>
         </p:nvSpPr>
@@ -7402,7 +7527,7 @@
       </p:sp>
       <p:sp>
         <p:nvSpPr>
-          <p:cNvPr id="1417626724" name="ZoneTexte 1337742717"/>
+          <p:cNvPr id="714334013" name="ZoneTexte 1337742717"/>
           <p:cNvSpPr txBox="1"/>
           <p:nvPr/>
         </p:nvSpPr>
@@ -7466,7 +7591,7 @@
       </p:sp>
       <p:sp>
         <p:nvSpPr>
-          <p:cNvPr id="1078518932" name="ZoneTexte 1188730172"/>
+          <p:cNvPr id="1195545713" name="ZoneTexte 1188730172"/>
           <p:cNvSpPr txBox="1"/>
           <p:nvPr/>
         </p:nvSpPr>
@@ -7530,7 +7655,7 @@
       </p:sp>
       <p:sp>
         <p:nvSpPr>
-          <p:cNvPr id="157286704" name="Rectangle : avec coins arrondis en haut 1452601499"/>
+          <p:cNvPr id="1446167710" name="Rectangle : avec coins arrondis en haut 1452601499"/>
           <p:cNvSpPr/>
           <p:nvPr/>
         </p:nvSpPr>
@@ -7576,7 +7701,7 @@
       </p:sp>
       <p:sp>
         <p:nvSpPr>
-          <p:cNvPr id="1183712085" name="Rectangle : avec coins arrondis en haut 1782110635"/>
+          <p:cNvPr id="634058292" name="Rectangle : avec coins arrondis en haut 1782110635"/>
           <p:cNvSpPr/>
           <p:nvPr/>
         </p:nvSpPr>
@@ -7622,7 +7747,7 @@
       </p:sp>
       <p:sp>
         <p:nvSpPr>
-          <p:cNvPr id="1831747967" name="Rectangle : avec coins arrondis en haut 945118596"/>
+          <p:cNvPr id="1056872102" name="Rectangle : avec coins arrondis en haut 945118596"/>
           <p:cNvSpPr/>
           <p:nvPr/>
         </p:nvSpPr>
@@ -7668,7 +7793,7 @@
       </p:sp>
       <p:sp>
         <p:nvSpPr>
-          <p:cNvPr id="1655154102" name="Rectangle : avec coins arrondis en haut 500951796"/>
+          <p:cNvPr id="247414251" name="Rectangle : avec coins arrondis en haut 500951796"/>
           <p:cNvSpPr/>
           <p:nvPr/>
         </p:nvSpPr>
@@ -7714,7 +7839,7 @@
       </p:sp>
       <p:sp>
         <p:nvSpPr>
-          <p:cNvPr id="705919691" name="Rectangle : avec coins arrondis en haut 203047490"/>
+          <p:cNvPr id="1661661777" name="Rectangle : avec coins arrondis en haut 203047490"/>
           <p:cNvSpPr/>
           <p:nvPr/>
         </p:nvSpPr>
@@ -7760,7 +7885,7 @@
       </p:sp>
       <p:sp>
         <p:nvSpPr>
-          <p:cNvPr id="2119416366" name="Rectangle : avec coins arrondis en haut 818083012"/>
+          <p:cNvPr id="350126673" name="Rectangle : avec coins arrondis en haut 818083012"/>
           <p:cNvSpPr/>
           <p:nvPr/>
         </p:nvSpPr>
@@ -7806,7 +7931,7 @@
       </p:sp>
       <p:sp>
         <p:nvSpPr>
-          <p:cNvPr id="1809229747" name="Rectangle : avec coins arrondis en haut 310539005"/>
+          <p:cNvPr id="524954427" name="Rectangle : avec coins arrondis en haut 310539005"/>
           <p:cNvSpPr/>
           <p:nvPr/>
         </p:nvSpPr>
@@ -7852,7 +7977,7 @@
       </p:sp>
       <p:sp>
         <p:nvSpPr>
-          <p:cNvPr id="167164646" name="Rectangle : avec coins arrondis en haut 844307487"/>
+          <p:cNvPr id="1159525531" name="Rectangle : avec coins arrondis en haut 844307487"/>
           <p:cNvSpPr/>
           <p:nvPr/>
         </p:nvSpPr>
@@ -7898,7 +8023,7 @@
       </p:sp>
       <p:sp>
         <p:nvSpPr>
-          <p:cNvPr id="654924830" name="Rectangle : avec coins arrondis en haut 1616510051"/>
+          <p:cNvPr id="1550854231" name="Rectangle : avec coins arrondis en haut 1616510051"/>
           <p:cNvSpPr/>
           <p:nvPr/>
         </p:nvSpPr>
@@ -7944,7 +8069,7 @@
       </p:sp>
       <p:sp>
         <p:nvSpPr>
-          <p:cNvPr id="1548794559" name="Rectangle : avec coins arrondis en haut 1451691637"/>
+          <p:cNvPr id="480347884" name="Rectangle : avec coins arrondis en haut 1451691637"/>
           <p:cNvSpPr/>
           <p:nvPr/>
         </p:nvSpPr>
@@ -7990,7 +8115,7 @@
       </p:sp>
       <p:sp>
         <p:nvSpPr>
-          <p:cNvPr id="763086418" name="Rectangle : avec coins arrondis en haut 260383743"/>
+          <p:cNvPr id="922129415" name="Rectangle : avec coins arrondis en haut 260383743"/>
           <p:cNvSpPr/>
           <p:nvPr/>
         </p:nvSpPr>
@@ -8036,7 +8161,7 @@
       </p:sp>
       <p:sp>
         <p:nvSpPr>
-          <p:cNvPr id="412564430" name="Rectangle : avec coins arrondis en haut 1280344391"/>
+          <p:cNvPr id="229002386" name="Rectangle : avec coins arrondis en haut 1280344391"/>
           <p:cNvSpPr/>
           <p:nvPr/>
         </p:nvSpPr>
@@ -8082,7 +8207,7 @@
       </p:sp>
       <p:sp>
         <p:nvSpPr>
-          <p:cNvPr id="1096664056" name=""/>
+          <p:cNvPr id="239542065" name=""/>
           <p:cNvSpPr txBox="1"/>
           <p:nvPr/>
         </p:nvSpPr>
@@ -8206,7 +8331,7 @@
       </p:sp>
       <p:sp>
         <p:nvSpPr>
-          <p:cNvPr id="1914346377" name="ZoneTexte 1440859034"/>
+          <p:cNvPr id="1096037567" name="ZoneTexte 1440859034"/>
           <p:cNvSpPr txBox="1"/>
           <p:nvPr/>
         </p:nvSpPr>
@@ -8248,7 +8373,7 @@
       </p:sp>
       <p:sp>
         <p:nvSpPr>
-          <p:cNvPr id="1701843996" name="ZoneTexte 1440859034"/>
+          <p:cNvPr id="1197677637" name="ZoneTexte 1440859034"/>
           <p:cNvSpPr txBox="1"/>
           <p:nvPr/>
         </p:nvSpPr>
@@ -8287,7 +8412,7 @@
       </p:sp>
       <p:cxnSp>
         <p:nvCxnSpPr>
-          <p:cNvPr id="50274832" name=""/>
+          <p:cNvPr id="400569307" name=""/>
           <p:cNvCxnSpPr/>
           <p:nvPr/>
         </p:nvCxnSpPr>
@@ -8326,7 +8451,7 @@
       </p:cxnSp>
       <p:sp>
         <p:nvSpPr>
-          <p:cNvPr id="965266246" name=""/>
+          <p:cNvPr id="788523408" name=""/>
           <p:cNvSpPr txBox="1"/>
           <p:nvPr/>
         </p:nvSpPr>
@@ -8490,7 +8615,7 @@
       </p:sp>
       <p:sp>
         <p:nvSpPr>
-          <p:cNvPr id="2095573868" name="Rectangle 954364527"/>
+          <p:cNvPr id="1664968998" name="Rectangle 954364527"/>
           <p:cNvSpPr/>
           <p:nvPr/>
         </p:nvSpPr>
@@ -8530,7 +8655,7 @@
       </p:sp>
       <p:sp>
         <p:nvSpPr>
-          <p:cNvPr id="550998349" name="ZoneTexte 1527388901"/>
+          <p:cNvPr id="1008907928" name="ZoneTexte 1527388901"/>
           <p:cNvSpPr txBox="1"/>
           <p:nvPr/>
         </p:nvSpPr>
@@ -8690,7 +8815,7 @@
       </p:sp>
       <p:sp>
         <p:nvSpPr>
-          <p:cNvPr id="1018337220" name="Rectangle 38344096"/>
+          <p:cNvPr id="2011187832" name="Rectangle 38344096"/>
           <p:cNvSpPr/>
           <p:nvPr/>
         </p:nvSpPr>
@@ -8730,7 +8855,7 @@
       </p:sp>
       <p:sp>
         <p:nvSpPr>
-          <p:cNvPr id="776125739" name=""/>
+          <p:cNvPr id="174437826" name=""/>
           <p:cNvSpPr/>
           <p:nvPr/>
         </p:nvSpPr>
@@ -8801,7 +8926,7 @@
       </p:sp>
       <p:sp>
         <p:nvSpPr>
-          <p:cNvPr id="348459612" name="Flèche : pentagone 2055848356"/>
+          <p:cNvPr id="924026724" name="Flèche : pentagone 2055848356"/>
           <p:cNvSpPr/>
           <p:nvPr/>
         </p:nvSpPr>
@@ -8846,7 +8971,7 @@
       </p:sp>
       <p:sp>
         <p:nvSpPr>
-          <p:cNvPr id="504718185" name="Flèche : pentagone 1980093981"/>
+          <p:cNvPr id="1836875480" name="Flèche : pentagone 1980093981"/>
           <p:cNvSpPr/>
           <p:nvPr/>
         </p:nvSpPr>
@@ -8891,7 +9016,7 @@
       </p:sp>
       <p:sp>
         <p:nvSpPr>
-          <p:cNvPr id="14028971" name="Flèche : pentagone 905284374"/>
+          <p:cNvPr id="1031703884" name="Flèche : pentagone 905284374"/>
           <p:cNvSpPr/>
           <p:nvPr/>
         </p:nvSpPr>
@@ -8936,14 +9061,14 @@
       </p:sp>
       <p:sp>
         <p:nvSpPr>
-          <p:cNvPr id="2090795282" name="ZoneTexte 1440859034"/>
+          <p:cNvPr id="632836252" name="ZoneTexte 1440859034"/>
           <p:cNvSpPr txBox="1"/>
           <p:nvPr/>
         </p:nvSpPr>
         <p:spPr bwMode="auto">
           <a:xfrm>
-            <a:off x="5763545" y="7138872"/>
-            <a:ext cx="843867" cy="274679"/>
+            <a:off x="5708702" y="7138872"/>
+            <a:ext cx="953910" cy="305159"/>
           </a:xfrm>
           <a:prstGeom prst="rect">
             <a:avLst/>
@@ -8960,7 +9085,7 @@
               <a:defRPr/>
             </a:pPr>
             <a:r>
-              <a:rPr sz="1200" b="1">
+              <a:rPr sz="1400" b="1">
                 <a:solidFill>
                   <a:schemeClr val="bg1">
                     <a:lumMod val="65000"/>
@@ -8975,7 +9100,7 @@
       </p:sp>
       <p:sp>
         <p:nvSpPr>
-          <p:cNvPr id="1383741428" name="Flèche : pentagone 1880610112"/>
+          <p:cNvPr id="12174300" name="Flèche : pentagone 1880610112"/>
           <p:cNvSpPr/>
           <p:nvPr/>
         </p:nvSpPr>
@@ -9020,7 +9145,7 @@
       </p:sp>
       <p:sp>
         <p:nvSpPr>
-          <p:cNvPr id="1824497955" name="Flèche : pentagone 446859139"/>
+          <p:cNvPr id="888026582" name="Flèche : pentagone 446859139"/>
           <p:cNvSpPr/>
           <p:nvPr/>
         </p:nvSpPr>
@@ -9065,7 +9190,7 @@
       </p:sp>
       <p:sp>
         <p:nvSpPr>
-          <p:cNvPr id="1306819546" name="Flèche : pentagone 2055848356"/>
+          <p:cNvPr id="866979880" name="Flèche : pentagone 2055848356"/>
           <p:cNvSpPr/>
           <p:nvPr/>
         </p:nvSpPr>
@@ -9110,7 +9235,7 @@
       </p:sp>
       <p:sp>
         <p:nvSpPr>
-          <p:cNvPr id="973063630" name="Flèche : pentagone 1980093981"/>
+          <p:cNvPr id="393676056" name="Flèche : pentagone 1980093981"/>
           <p:cNvSpPr/>
           <p:nvPr/>
         </p:nvSpPr>
@@ -9155,7 +9280,7 @@
       </p:sp>
       <p:sp>
         <p:nvSpPr>
-          <p:cNvPr id="2127240908" name="Flèche : pentagone 905284374"/>
+          <p:cNvPr id="138251967" name="Flèche : pentagone 905284374"/>
           <p:cNvSpPr/>
           <p:nvPr/>
         </p:nvSpPr>
@@ -9200,14 +9325,14 @@
       </p:sp>
       <p:sp>
         <p:nvSpPr>
-          <p:cNvPr id="493891317" name="ZoneTexte 1440859034"/>
+          <p:cNvPr id="1745635626" name="ZoneTexte 1440859034"/>
           <p:cNvSpPr txBox="1"/>
           <p:nvPr/>
         </p:nvSpPr>
         <p:spPr bwMode="auto">
           <a:xfrm>
-            <a:off x="5757631" y="7355218"/>
-            <a:ext cx="793338" cy="274679"/>
+            <a:off x="5706995" y="7334807"/>
+            <a:ext cx="894969" cy="305159"/>
           </a:xfrm>
           <a:prstGeom prst="rect">
             <a:avLst/>
@@ -9224,7 +9349,7 @@
               <a:defRPr/>
             </a:pPr>
             <a:r>
-              <a:rPr sz="1200" b="1">
+              <a:rPr sz="1400" b="1">
                 <a:solidFill>
                   <a:schemeClr val="bg1">
                     <a:lumMod val="65000"/>
@@ -9239,7 +9364,7 @@
       </p:sp>
       <p:sp>
         <p:nvSpPr>
-          <p:cNvPr id="1642814078" name="Flèche : pentagone 2055848356"/>
+          <p:cNvPr id="1677523332" name="Flèche : pentagone 2055848356"/>
           <p:cNvSpPr/>
           <p:nvPr/>
         </p:nvSpPr>
@@ -9284,7 +9409,7 @@
       </p:sp>
       <p:sp>
         <p:nvSpPr>
-          <p:cNvPr id="2090202873" name="Flèche : pentagone 1980093981"/>
+          <p:cNvPr id="1455415556" name="Flèche : pentagone 1980093981"/>
           <p:cNvSpPr/>
           <p:nvPr/>
         </p:nvSpPr>
@@ -9329,7 +9454,7 @@
       </p:sp>
       <p:sp>
         <p:nvSpPr>
-          <p:cNvPr id="350052829" name="Flèche : pentagone 905284374"/>
+          <p:cNvPr id="2068665878" name="Flèche : pentagone 905284374"/>
           <p:cNvSpPr/>
           <p:nvPr/>
         </p:nvSpPr>
@@ -9374,14 +9499,14 @@
       </p:sp>
       <p:sp>
         <p:nvSpPr>
-          <p:cNvPr id="862852539" name="ZoneTexte 1440859034"/>
+          <p:cNvPr id="1632807343" name="ZoneTexte 1440859034"/>
           <p:cNvSpPr txBox="1"/>
           <p:nvPr/>
         </p:nvSpPr>
         <p:spPr bwMode="auto">
           <a:xfrm>
-            <a:off x="5763725" y="7777056"/>
-            <a:ext cx="843867" cy="274679"/>
+            <a:off x="5708882" y="7777055"/>
+            <a:ext cx="953910" cy="305159"/>
           </a:xfrm>
           <a:prstGeom prst="rect">
             <a:avLst/>
@@ -9398,7 +9523,7 @@
               <a:defRPr/>
             </a:pPr>
             <a:r>
-              <a:rPr sz="1200" b="1">
+              <a:rPr sz="1400" b="1">
                 <a:solidFill>
                   <a:schemeClr val="bg1">
                     <a:lumMod val="65000"/>
@@ -9413,7 +9538,7 @@
       </p:sp>
       <p:sp>
         <p:nvSpPr>
-          <p:cNvPr id="1074846463" name=""/>
+          <p:cNvPr id="1143695030" name=""/>
           <p:cNvSpPr txBox="1"/>
           <p:nvPr/>
         </p:nvSpPr>
@@ -9577,7 +9702,7 @@
       </p:sp>
       <p:sp>
         <p:nvSpPr>
-          <p:cNvPr id="1470432610" name=""/>
+          <p:cNvPr id="360959361" name=""/>
           <p:cNvSpPr txBox="1"/>
           <p:nvPr/>
         </p:nvSpPr>
@@ -9741,7 +9866,7 @@
       </p:sp>
       <p:sp>
         <p:nvSpPr>
-          <p:cNvPr id="1552225962" name=""/>
+          <p:cNvPr id="1655146142" name=""/>
           <p:cNvSpPr txBox="1"/>
           <p:nvPr/>
         </p:nvSpPr>
@@ -9938,7 +10063,7 @@
       </p:grpSpPr>
       <p:sp>
         <p:nvSpPr>
-          <p:cNvPr id="1524678108" name=""/>
+          <p:cNvPr id="38997469" name=""/>
           <p:cNvSpPr/>
           <p:nvPr/>
         </p:nvSpPr>
@@ -9981,7 +10106,7 @@
       </p:sp>
       <p:sp>
         <p:nvSpPr>
-          <p:cNvPr id="402836655" name=""/>
+          <p:cNvPr id="593595920" name=""/>
           <p:cNvSpPr txBox="1"/>
           <p:nvPr/>
         </p:nvSpPr>
@@ -10047,7 +10172,7 @@
       </p:sp>
       <p:cxnSp>
         <p:nvCxnSpPr>
-          <p:cNvPr id="1399007637" name="Connecteur droit 1568760680"/>
+          <p:cNvPr id="250524992" name="Connecteur droit 1568760680"/>
           <p:cNvCxnSpPr/>
           <p:nvPr/>
         </p:nvCxnSpPr>
@@ -10089,7 +10214,7 @@
       </p:cxnSp>
       <p:sp>
         <p:nvSpPr>
-          <p:cNvPr id="999382871" name="ZoneTexte 1868728971"/>
+          <p:cNvPr id="1853304664" name="ZoneTexte 1868728971"/>
           <p:cNvSpPr txBox="1"/>
           <p:nvPr/>
         </p:nvSpPr>
@@ -10129,7 +10254,7 @@
       </p:sp>
       <p:cxnSp>
         <p:nvCxnSpPr>
-          <p:cNvPr id="57371088" name="Connecteur droit 806540798"/>
+          <p:cNvPr id="928638840" name="Connecteur droit 806540798"/>
           <p:cNvCxnSpPr/>
           <p:nvPr/>
         </p:nvCxnSpPr>
@@ -10171,7 +10296,7 @@
       </p:cxnSp>
       <p:sp>
         <p:nvSpPr>
-          <p:cNvPr id="598003385" name="ZoneTexte 406616703"/>
+          <p:cNvPr id="243505817" name="ZoneTexte 406616703"/>
           <p:cNvSpPr txBox="1"/>
           <p:nvPr/>
         </p:nvSpPr>
@@ -10211,7 +10336,7 @@
       </p:sp>
       <p:sp>
         <p:nvSpPr>
-          <p:cNvPr id="2146932976" name="ZoneTexte 1302587497"/>
+          <p:cNvPr id="2074964307" name="ZoneTexte 1302587497"/>
           <p:cNvSpPr txBox="1"/>
           <p:nvPr/>
         </p:nvSpPr>
@@ -10415,7 +10540,7 @@
       </p:sp>
       <p:sp>
         <p:nvSpPr>
-          <p:cNvPr id="1894303040" name="Rectangle 38344096"/>
+          <p:cNvPr id="1478011223" name="Rectangle 38344096"/>
           <p:cNvSpPr/>
           <p:nvPr/>
         </p:nvSpPr>
@@ -10455,7 +10580,7 @@
       </p:sp>
       <p:sp>
         <p:nvSpPr>
-          <p:cNvPr id="133073043" name="ZoneTexte 1075280509"/>
+          <p:cNvPr id="723718965" name="ZoneTexte 1075280509"/>
           <p:cNvSpPr txBox="1"/>
           <p:nvPr/>
         </p:nvSpPr>
@@ -10528,7 +10653,7 @@
       </p:sp>
       <p:sp>
         <p:nvSpPr>
-          <p:cNvPr id="646449508" name="ZoneTexte 226284734"/>
+          <p:cNvPr id="1070291821" name="ZoneTexte 226284734"/>
           <p:cNvSpPr txBox="1"/>
           <p:nvPr/>
         </p:nvSpPr>
@@ -10601,7 +10726,7 @@
       </p:sp>
       <p:sp>
         <p:nvSpPr>
-          <p:cNvPr id="1368667371" name="ZoneTexte 162158187"/>
+          <p:cNvPr id="697341943" name="ZoneTexte 162158187"/>
           <p:cNvSpPr txBox="1"/>
           <p:nvPr/>
         </p:nvSpPr>
@@ -10651,7 +10776,7 @@
       </p:sp>
       <p:sp>
         <p:nvSpPr>
-          <p:cNvPr id="1744230420" name="Rectangle : avec coins arrondis en haut 1452601499"/>
+          <p:cNvPr id="156812537" name="Rectangle : avec coins arrondis en haut 1452601499"/>
           <p:cNvSpPr/>
           <p:nvPr/>
         </p:nvSpPr>
@@ -10694,7 +10819,7 @@
       </p:sp>
       <p:sp>
         <p:nvSpPr>
-          <p:cNvPr id="329756119" name="Rectangle : avec coins arrondis en haut 1782110635"/>
+          <p:cNvPr id="1773797890" name="Rectangle : avec coins arrondis en haut 1782110635"/>
           <p:cNvSpPr/>
           <p:nvPr/>
         </p:nvSpPr>
@@ -10740,7 +10865,7 @@
       </p:sp>
       <p:sp>
         <p:nvSpPr>
-          <p:cNvPr id="2109786519" name="Rectangle : avec coins arrondis en haut 945118596"/>
+          <p:cNvPr id="272423393" name="Rectangle : avec coins arrondis en haut 945118596"/>
           <p:cNvSpPr/>
           <p:nvPr/>
         </p:nvSpPr>
@@ -10786,7 +10911,7 @@
       </p:sp>
       <p:sp>
         <p:nvSpPr>
-          <p:cNvPr id="1707703278" name=""/>
+          <p:cNvPr id="930212870" name=""/>
           <p:cNvSpPr/>
           <p:nvPr/>
         </p:nvSpPr>
@@ -10828,7 +10953,7 @@
       </p:sp>
       <p:sp>
         <p:nvSpPr>
-          <p:cNvPr id="464253283" name=""/>
+          <p:cNvPr id="2061323065" name=""/>
           <p:cNvSpPr txBox="1"/>
           <p:nvPr/>
         </p:nvSpPr>
@@ -10868,7 +10993,7 @@
       </p:sp>
       <p:sp>
         <p:nvSpPr>
-          <p:cNvPr id="1036353486" name=""/>
+          <p:cNvPr id="1765827829" name=""/>
           <p:cNvSpPr/>
           <p:nvPr/>
         </p:nvSpPr>
@@ -10939,7 +11064,7 @@
       </p:sp>
       <p:sp>
         <p:nvSpPr>
-          <p:cNvPr id="765709985" name=""/>
+          <p:cNvPr id="1800266668" name=""/>
           <p:cNvSpPr txBox="1"/>
           <p:nvPr/>
         </p:nvSpPr>
@@ -10976,7 +11101,7 @@
       </p:sp>
       <p:sp>
         <p:nvSpPr>
-          <p:cNvPr id="1532078588" name=""/>
+          <p:cNvPr id="980531447" name=""/>
           <p:cNvSpPr txBox="1"/>
           <p:nvPr/>
         </p:nvSpPr>
@@ -11210,7 +11335,7 @@
       </p:sp>
       <p:sp>
         <p:nvSpPr>
-          <p:cNvPr id="451198303" name=""/>
+          <p:cNvPr id="770633209" name=""/>
           <p:cNvSpPr txBox="1"/>
           <p:nvPr/>
         </p:nvSpPr>
@@ -11489,7 +11614,7 @@
       </p:sp>
       <p:sp>
         <p:nvSpPr>
-          <p:cNvPr id="1912501249" name=""/>
+          <p:cNvPr id="1505881002" name=""/>
           <p:cNvSpPr txBox="1"/>
           <p:nvPr/>
         </p:nvSpPr>
@@ -11880,7 +12005,7 @@
       </p:sp>
       <p:sp>
         <p:nvSpPr>
-          <p:cNvPr id="1502078870" name=""/>
+          <p:cNvPr id="519004949" name=""/>
           <p:cNvSpPr txBox="1"/>
           <p:nvPr/>
         </p:nvSpPr>
@@ -12271,7 +12396,7 @@
       </p:sp>
       <p:sp>
         <p:nvSpPr>
-          <p:cNvPr id="186913155" name=""/>
+          <p:cNvPr id="495674657" name=""/>
           <p:cNvSpPr txBox="1"/>
           <p:nvPr/>
         </p:nvSpPr>
@@ -12662,7 +12787,7 @@
       </p:sp>
       <p:sp>
         <p:nvSpPr>
-          <p:cNvPr id="1930975617" name=""/>
+          <p:cNvPr id="2132386061" name=""/>
           <p:cNvSpPr txBox="1"/>
           <p:nvPr/>
         </p:nvSpPr>
@@ -13053,7 +13178,7 @@
       </p:sp>
       <p:sp>
         <p:nvSpPr>
-          <p:cNvPr id="5806924" name=""/>
+          <p:cNvPr id="1386806432" name=""/>
           <p:cNvSpPr txBox="1"/>
           <p:nvPr/>
         </p:nvSpPr>
@@ -13444,7 +13569,7 @@
       </p:sp>
       <p:sp>
         <p:nvSpPr>
-          <p:cNvPr id="530456556" name=""/>
+          <p:cNvPr id="413998984" name=""/>
           <p:cNvSpPr txBox="1"/>
           <p:nvPr/>
         </p:nvSpPr>
@@ -13835,7 +13960,7 @@
       </p:sp>
       <p:sp>
         <p:nvSpPr>
-          <p:cNvPr id="1033313841" name=""/>
+          <p:cNvPr id="352832646" name=""/>
           <p:cNvSpPr txBox="1"/>
           <p:nvPr/>
         </p:nvSpPr>
@@ -14226,7 +14351,7 @@
       </p:sp>
       <p:sp>
         <p:nvSpPr>
-          <p:cNvPr id="1407175926" name=""/>
+          <p:cNvPr id="1678378542" name=""/>
           <p:cNvSpPr txBox="1"/>
           <p:nvPr/>
         </p:nvSpPr>
@@ -14617,7 +14742,7 @@
       </p:sp>
       <p:sp>
         <p:nvSpPr>
-          <p:cNvPr id="1008891577" name=""/>
+          <p:cNvPr id="1414613981" name=""/>
           <p:cNvSpPr txBox="1"/>
           <p:nvPr/>
         </p:nvSpPr>
@@ -15008,7 +15133,7 @@
       </p:sp>
       <p:sp>
         <p:nvSpPr>
-          <p:cNvPr id="921423285" name=""/>
+          <p:cNvPr id="1740224451" name=""/>
           <p:cNvSpPr txBox="1"/>
           <p:nvPr/>
         </p:nvSpPr>
@@ -15399,7 +15524,7 @@
       </p:sp>
       <p:sp>
         <p:nvSpPr>
-          <p:cNvPr id="950221227" name=""/>
+          <p:cNvPr id="1260203910" name=""/>
           <p:cNvSpPr txBox="1"/>
           <p:nvPr/>
         </p:nvSpPr>
@@ -15790,7 +15915,7 @@
       </p:sp>
       <p:sp>
         <p:nvSpPr>
-          <p:cNvPr id="688143852" name=""/>
+          <p:cNvPr id="2141500198" name=""/>
           <p:cNvSpPr txBox="1"/>
           <p:nvPr/>
         </p:nvSpPr>
@@ -16181,7 +16306,7 @@
       </p:sp>
       <p:sp>
         <p:nvSpPr>
-          <p:cNvPr id="644892482" name=""/>
+          <p:cNvPr id="351757380" name=""/>
           <p:cNvSpPr txBox="1"/>
           <p:nvPr/>
         </p:nvSpPr>
@@ -16572,7 +16697,7 @@
       </p:sp>
       <p:sp>
         <p:nvSpPr>
-          <p:cNvPr id="660628825" name=""/>
+          <p:cNvPr id="1745774310" name=""/>
           <p:cNvSpPr txBox="1"/>
           <p:nvPr/>
         </p:nvSpPr>
@@ -16963,14 +17088,14 @@
       </p:sp>
       <p:sp>
         <p:nvSpPr>
-          <p:cNvPr id="1833851477" name=""/>
+          <p:cNvPr id="1201286088" name=""/>
           <p:cNvSpPr txBox="1"/>
           <p:nvPr/>
         </p:nvSpPr>
         <p:spPr bwMode="auto">
           <a:xfrm rot="0" flipH="0" flipV="0">
-            <a:off x="58495" y="7331036"/>
-            <a:ext cx="6723876" cy="701399"/>
+            <a:off x="58494" y="7297017"/>
+            <a:ext cx="6779315" cy="829180"/>
           </a:xfrm>
           <a:prstGeom prst="rect">
             <a:avLst/>
@@ -17113,7 +17238,57 @@
                 <a:ea typeface="Arial"/>
                 <a:cs typeface="Arial"/>
               </a:rPr>
-              <a:t> permet de réduire la valeur d’hostilité, s’il existe une affinité en amitié.</a:t>
+              <a:t> permet de réduire la valeur d’hostilité, s’il existe une affinité en amitié. Si le personnage possède une affinité avec vous, cochez la case </a:t>
+            </a:r>
+            <a:r>
+              <a:rPr lang="fr-FR" sz="800" b="1" i="0" u="none" strike="noStrike" cap="none" spc="0">
+                <a:solidFill>
+                  <a:schemeClr val="tx1">
+                    <a:lumMod val="50000"/>
+                    <a:lumOff val="50000"/>
+                  </a:schemeClr>
+                </a:solidFill>
+                <a:latin typeface="Arial"/>
+                <a:ea typeface="Arial"/>
+                <a:cs typeface="Arial"/>
+              </a:rPr>
+              <a:t>☘</a:t>
+            </a:r>
+            <a:r>
+              <a:rPr lang="fr-FR" sz="800" b="0" i="0" u="none" strike="noStrike" cap="none" spc="0">
+                <a:solidFill>
+                  <a:srgbClr val="808080"/>
+                </a:solidFill>
+                <a:latin typeface="Arial"/>
+                <a:ea typeface="Arial"/>
+                <a:cs typeface="Arial"/>
+              </a:rPr>
+              <a:t>. Si le personnage est hostile au lieu d’amical, cochez la case </a:t>
+            </a:r>
+            <a:r>
+              <a:rPr lang="fr-FR" sz="800" b="1" i="0" u="none" strike="noStrike" cap="none" spc="0">
+                <a:solidFill>
+                  <a:schemeClr val="tx1">
+                    <a:lumMod val="50000"/>
+                    <a:lumOff val="50000"/>
+                  </a:schemeClr>
+                </a:solidFill>
+                <a:latin typeface="Arial"/>
+                <a:ea typeface="Arial"/>
+                <a:cs typeface="Arial"/>
+              </a:rPr>
+              <a:t>☠</a:t>
+            </a:r>
+            <a:r>
+              <a:rPr lang="fr-FR" sz="800" b="0" i="0" u="none" strike="noStrike" cap="none" spc="0">
+                <a:solidFill>
+                  <a:srgbClr val="808080"/>
+                </a:solidFill>
+                <a:latin typeface="Arial"/>
+                <a:ea typeface="Arial"/>
+                <a:cs typeface="Arial"/>
+              </a:rPr>
+              <a:t>.</a:t>
             </a:r>
             <a:endParaRPr/>
           </a:p>
@@ -17121,7 +17296,7 @@
       </p:sp>
       <p:cxnSp>
         <p:nvCxnSpPr>
-          <p:cNvPr id="521518901" name="Connecteur droit 806540798"/>
+          <p:cNvPr id="76463490" name="Connecteur droit 806540798"/>
           <p:cNvCxnSpPr/>
           <p:nvPr/>
         </p:nvCxnSpPr>
@@ -17163,7 +17338,7 @@
       </p:cxnSp>
       <p:sp>
         <p:nvSpPr>
-          <p:cNvPr id="575583547" name="ZoneTexte 406616703"/>
+          <p:cNvPr id="1609198624" name="ZoneTexte 406616703"/>
           <p:cNvSpPr txBox="1"/>
           <p:nvPr/>
         </p:nvSpPr>
@@ -17203,7 +17378,7 @@
       </p:sp>
       <p:sp>
         <p:nvSpPr>
-          <p:cNvPr id="1314500193" name=""/>
+          <p:cNvPr id="704265852" name=""/>
           <p:cNvSpPr txBox="1"/>
           <p:nvPr/>
         </p:nvSpPr>
@@ -17302,7 +17477,7 @@
       </p:grpSpPr>
       <p:cxnSp>
         <p:nvCxnSpPr>
-          <p:cNvPr id="1792529884" name="Connecteur droit 266926011"/>
+          <p:cNvPr id="856193300" name="Connecteur droit 266926011"/>
           <p:cNvCxnSpPr/>
           <p:nvPr/>
         </p:nvCxnSpPr>
@@ -17344,7 +17519,7 @@
       </p:cxnSp>
       <p:sp>
         <p:nvSpPr>
-          <p:cNvPr id="1160846419" name="ZoneTexte 1043763612"/>
+          <p:cNvPr id="1628026633" name="ZoneTexte 1043763612"/>
           <p:cNvSpPr txBox="1"/>
           <p:nvPr/>
         </p:nvSpPr>
@@ -17384,7 +17559,7 @@
       </p:sp>
       <p:cxnSp>
         <p:nvCxnSpPr>
-          <p:cNvPr id="306792536" name="Connecteur droit 1586327141"/>
+          <p:cNvPr id="857961706" name="Connecteur droit 1586327141"/>
           <p:cNvCxnSpPr/>
           <p:nvPr/>
         </p:nvCxnSpPr>
@@ -17427,7 +17602,7 @@
       </p:cxnSp>
       <p:sp>
         <p:nvSpPr>
-          <p:cNvPr id="1296378902" name="ZoneTexte 1691387439"/>
+          <p:cNvPr id="1672004710" name="ZoneTexte 1691387439"/>
           <p:cNvSpPr txBox="1"/>
           <p:nvPr/>
         </p:nvSpPr>
@@ -17467,7 +17642,7 @@
       </p:sp>
       <p:cxnSp>
         <p:nvCxnSpPr>
-          <p:cNvPr id="119876008" name="Connecteur droit 1743707585"/>
+          <p:cNvPr id="1978691096" name="Connecteur droit 1743707585"/>
           <p:cNvCxnSpPr/>
           <p:nvPr/>
         </p:nvCxnSpPr>
@@ -17510,7 +17685,7 @@
       </p:cxnSp>
       <p:sp>
         <p:nvSpPr>
-          <p:cNvPr id="1670220913" name="ZoneTexte 1503300725"/>
+          <p:cNvPr id="530358375" name="ZoneTexte 1503300725"/>
           <p:cNvSpPr txBox="1"/>
           <p:nvPr/>
         </p:nvSpPr>
@@ -17592,7 +17767,7 @@
       </p:sp>
       <p:sp>
         <p:nvSpPr>
-          <p:cNvPr id="1118454174" name="Rectangle : avec coins arrondis en haut 1151560973"/>
+          <p:cNvPr id="335176745" name="Rectangle : avec coins arrondis en haut 1151560973"/>
           <p:cNvSpPr/>
           <p:nvPr/>
         </p:nvSpPr>
@@ -17638,7 +17813,7 @@
       </p:sp>
       <p:sp>
         <p:nvSpPr>
-          <p:cNvPr id="41553612" name="Flèche : pentagone 1610574377"/>
+          <p:cNvPr id="1263464841" name="Flèche : pentagone 1610574377"/>
           <p:cNvSpPr/>
           <p:nvPr/>
         </p:nvSpPr>
@@ -17683,7 +17858,7 @@
       </p:sp>
       <p:sp>
         <p:nvSpPr>
-          <p:cNvPr id="1539439595" name="Flèche : pentagone 463861063"/>
+          <p:cNvPr id="2095902457" name="Flèche : pentagone 463861063"/>
           <p:cNvSpPr/>
           <p:nvPr/>
         </p:nvSpPr>
@@ -17728,7 +17903,7 @@
       </p:sp>
       <p:sp>
         <p:nvSpPr>
-          <p:cNvPr id="1315082865" name="Flèche : pentagone 272004907"/>
+          <p:cNvPr id="235177083" name="Flèche : pentagone 272004907"/>
           <p:cNvSpPr/>
           <p:nvPr/>
         </p:nvSpPr>
@@ -17773,7 +17948,7 @@
       </p:sp>
       <p:sp>
         <p:nvSpPr>
-          <p:cNvPr id="1430271889" name="Flèche : pentagone 28174069"/>
+          <p:cNvPr id="1056720817" name="Flèche : pentagone 28174069"/>
           <p:cNvSpPr/>
           <p:nvPr/>
         </p:nvSpPr>
@@ -17818,7 +17993,7 @@
       </p:sp>
       <p:sp>
         <p:nvSpPr>
-          <p:cNvPr id="1499318014" name="Flèche : pentagone 978127220"/>
+          <p:cNvPr id="556320636" name="Flèche : pentagone 978127220"/>
           <p:cNvSpPr/>
           <p:nvPr/>
         </p:nvSpPr>
@@ -17863,7 +18038,7 @@
       </p:sp>
       <p:sp>
         <p:nvSpPr>
-          <p:cNvPr id="234007241" name="ZoneTexte 1693594013"/>
+          <p:cNvPr id="239309316" name="ZoneTexte 1693594013"/>
           <p:cNvSpPr txBox="1"/>
           <p:nvPr/>
         </p:nvSpPr>
@@ -18214,7 +18389,7 @@
       </p:sp>
       <p:sp>
         <p:nvSpPr>
-          <p:cNvPr id="1595470385" name="ZoneTexte 1975797288"/>
+          <p:cNvPr id="1817830570" name="ZoneTexte 1975797288"/>
           <p:cNvSpPr txBox="1"/>
           <p:nvPr/>
         </p:nvSpPr>
@@ -18254,7 +18429,7 @@
       </p:sp>
       <p:sp>
         <p:nvSpPr>
-          <p:cNvPr id="1059120077" name="ZoneTexte 2064865984"/>
+          <p:cNvPr id="1971585763" name="ZoneTexte 2064865984"/>
           <p:cNvSpPr txBox="1"/>
           <p:nvPr/>
         </p:nvSpPr>
@@ -18519,7 +18694,7 @@
       </p:sp>
       <p:sp>
         <p:nvSpPr>
-          <p:cNvPr id="1755946503" name="ZoneTexte 1387173154"/>
+          <p:cNvPr id="397506746" name="ZoneTexte 1387173154"/>
           <p:cNvSpPr txBox="1"/>
           <p:nvPr/>
         </p:nvSpPr>
@@ -18899,7 +19074,7 @@
       </p:sp>
       <p:sp>
         <p:nvSpPr>
-          <p:cNvPr id="1488636219" name="ZoneTexte 523755832"/>
+          <p:cNvPr id="56001036" name="ZoneTexte 523755832"/>
           <p:cNvSpPr txBox="1"/>
           <p:nvPr/>
         </p:nvSpPr>
@@ -19395,7 +19570,7 @@
       </p:sp>
       <p:cxnSp>
         <p:nvCxnSpPr>
-          <p:cNvPr id="365169606" name="Connecteur droit 2085669542"/>
+          <p:cNvPr id="1442167181" name="Connecteur droit 2085669542"/>
           <p:cNvCxnSpPr/>
           <p:nvPr/>
         </p:nvCxnSpPr>
@@ -19438,7 +19613,7 @@
       </p:cxnSp>
       <p:sp>
         <p:nvSpPr>
-          <p:cNvPr id="1639312917" name="ZoneTexte 34398067"/>
+          <p:cNvPr id="1198983638" name="ZoneTexte 34398067"/>
           <p:cNvSpPr txBox="1"/>
           <p:nvPr/>
         </p:nvSpPr>
@@ -19481,7 +19656,7 @@
       </p:sp>
       <p:sp>
         <p:nvSpPr>
-          <p:cNvPr id="1345233866" name="ZoneTexte 273581705"/>
+          <p:cNvPr id="978608668" name="ZoneTexte 273581705"/>
           <p:cNvSpPr txBox="1"/>
           <p:nvPr/>
         </p:nvSpPr>
@@ -19779,7 +19954,7 @@
       </p:sp>
       <p:sp>
         <p:nvSpPr>
-          <p:cNvPr id="1313799576" name="ZoneTexte 1727393832"/>
+          <p:cNvPr id="954761481" name="ZoneTexte 1727393832"/>
           <p:cNvSpPr txBox="1"/>
           <p:nvPr/>
         </p:nvSpPr>
@@ -19821,7 +19996,7 @@
       </p:sp>
       <p:sp>
         <p:nvSpPr>
-          <p:cNvPr id="831953589" name="ZoneTexte 504516740"/>
+          <p:cNvPr id="982535305" name="ZoneTexte 504516740"/>
           <p:cNvSpPr txBox="1"/>
           <p:nvPr/>
         </p:nvSpPr>
@@ -19863,7 +20038,7 @@
       </p:sp>
       <p:sp>
         <p:nvSpPr>
-          <p:cNvPr id="378985949" name="ZoneTexte 1"/>
+          <p:cNvPr id="746831229" name="ZoneTexte 1"/>
           <p:cNvSpPr txBox="1"/>
           <p:nvPr/>
         </p:nvSpPr>
@@ -21326,7 +21501,7 @@
       </p:sp>
       <p:sp>
         <p:nvSpPr>
-          <p:cNvPr id="773542412" name="ZoneTexte 2"/>
+          <p:cNvPr id="1377223522" name="ZoneTexte 2"/>
           <p:cNvSpPr txBox="1"/>
           <p:nvPr/>
         </p:nvSpPr>
@@ -21864,7 +22039,7 @@
       </p:sp>
       <p:sp>
         <p:nvSpPr>
-          <p:cNvPr id="785592782" name=""/>
+          <p:cNvPr id="991754872" name=""/>
           <p:cNvSpPr/>
           <p:nvPr/>
         </p:nvSpPr>
@@ -21904,7 +22079,7 @@
       </p:sp>
       <p:sp>
         <p:nvSpPr>
-          <p:cNvPr id="1398821124" name="Rectangle : avec coins arrondis en haut 1151560973"/>
+          <p:cNvPr id="1568185821" name="Rectangle : avec coins arrondis en haut 1151560973"/>
           <p:cNvSpPr/>
           <p:nvPr/>
         </p:nvSpPr>
@@ -21952,7 +22127,7 @@
       </p:sp>
       <p:sp>
         <p:nvSpPr>
-          <p:cNvPr id="1368699706" name=""/>
+          <p:cNvPr id="798272772" name=""/>
           <p:cNvSpPr/>
           <p:nvPr/>
         </p:nvSpPr>
@@ -21992,7 +22167,7 @@
       </p:sp>
       <p:sp>
         <p:nvSpPr>
-          <p:cNvPr id="1037111042" name="Rectangle : avec coins arrondis en haut 1151560973"/>
+          <p:cNvPr id="1753183782" name="Rectangle : avec coins arrondis en haut 1151560973"/>
           <p:cNvSpPr/>
           <p:nvPr/>
         </p:nvSpPr>
@@ -22040,7 +22215,7 @@
       </p:sp>
       <p:sp>
         <p:nvSpPr>
-          <p:cNvPr id="1108441913" name=""/>
+          <p:cNvPr id="1791999018" name=""/>
           <p:cNvSpPr/>
           <p:nvPr/>
         </p:nvSpPr>
@@ -22080,7 +22255,7 @@
       </p:sp>
       <p:sp>
         <p:nvSpPr>
-          <p:cNvPr id="1906376223" name="Rectangle : avec coins arrondis en haut 1151560973"/>
+          <p:cNvPr id="707347440" name="Rectangle : avec coins arrondis en haut 1151560973"/>
           <p:cNvSpPr/>
           <p:nvPr/>
         </p:nvSpPr>
@@ -22128,7 +22303,7 @@
       </p:sp>
       <p:sp>
         <p:nvSpPr>
-          <p:cNvPr id="1196620907" name=""/>
+          <p:cNvPr id="1694039779" name=""/>
           <p:cNvSpPr txBox="1"/>
           <p:nvPr/>
         </p:nvSpPr>
@@ -22193,7 +22368,7 @@
       </p:sp>
       <p:sp>
         <p:nvSpPr>
-          <p:cNvPr id="936783434" name=""/>
+          <p:cNvPr id="1691187295" name=""/>
           <p:cNvSpPr txBox="1"/>
           <p:nvPr/>
         </p:nvSpPr>
@@ -22322,7 +22497,7 @@
       </p:sp>
       <p:sp>
         <p:nvSpPr>
-          <p:cNvPr id="449518127" name=""/>
+          <p:cNvPr id="1548377374" name=""/>
           <p:cNvSpPr/>
           <p:nvPr/>
         </p:nvSpPr>
@@ -22393,7 +22568,7 @@
       </p:sp>
       <p:sp>
         <p:nvSpPr>
-          <p:cNvPr id="1117985357" name="Flèche : pentagone 1610574377"/>
+          <p:cNvPr id="1552225654" name="Flèche : pentagone 1610574377"/>
           <p:cNvSpPr/>
           <p:nvPr/>
         </p:nvSpPr>
@@ -22438,7 +22613,7 @@
       </p:sp>
       <p:sp>
         <p:nvSpPr>
-          <p:cNvPr id="681253260" name="Flèche : pentagone 463861063"/>
+          <p:cNvPr id="1404151983" name="Flèche : pentagone 463861063"/>
           <p:cNvSpPr/>
           <p:nvPr/>
         </p:nvSpPr>
@@ -22483,7 +22658,7 @@
       </p:sp>
       <p:sp>
         <p:nvSpPr>
-          <p:cNvPr id="790925809" name="Flèche : pentagone 272004907"/>
+          <p:cNvPr id="368819361" name="Flèche : pentagone 272004907"/>
           <p:cNvSpPr/>
           <p:nvPr/>
         </p:nvSpPr>
@@ -22561,7 +22736,7 @@
       </p:grpSpPr>
       <p:cxnSp>
         <p:nvCxnSpPr>
-          <p:cNvPr id="1068087642" name="Connecteur droit 1942366049"/>
+          <p:cNvPr id="1361626944" name="Connecteur droit 1942366049"/>
           <p:cNvCxnSpPr/>
           <p:nvPr/>
         </p:nvCxnSpPr>
@@ -22604,7 +22779,7 @@
       </p:cxnSp>
       <p:sp>
         <p:nvSpPr>
-          <p:cNvPr id="2027373897" name="ZoneTexte 483029020"/>
+          <p:cNvPr id="323742760" name="ZoneTexte 483029020"/>
           <p:cNvSpPr txBox="1"/>
           <p:nvPr/>
         </p:nvSpPr>
@@ -22644,7 +22819,7 @@
       </p:sp>
       <p:cxnSp>
         <p:nvCxnSpPr>
-          <p:cNvPr id="2123035435" name="Connecteur droit 626166318"/>
+          <p:cNvPr id="223919695" name="Connecteur droit 626166318"/>
           <p:cNvCxnSpPr/>
           <p:nvPr/>
         </p:nvCxnSpPr>
@@ -22687,7 +22862,7 @@
       </p:cxnSp>
       <p:sp>
         <p:nvSpPr>
-          <p:cNvPr id="1791913143" name="ZoneTexte 2021489157"/>
+          <p:cNvPr id="353649003" name="ZoneTexte 2021489157"/>
           <p:cNvSpPr txBox="1"/>
           <p:nvPr/>
         </p:nvSpPr>
@@ -22727,13 +22902,13 @@
       </p:sp>
       <p:cxnSp>
         <p:nvCxnSpPr>
-          <p:cNvPr id="845688817" name="Connecteur droit 1991074862"/>
+          <p:cNvPr id="1929945060" name="Connecteur droit 1991074862"/>
           <p:cNvCxnSpPr/>
           <p:nvPr/>
         </p:nvCxnSpPr>
         <p:spPr bwMode="auto">
           <a:xfrm flipV="1">
-            <a:off x="3252186" y="6126398"/>
+            <a:off x="3252186" y="6280263"/>
             <a:ext cx="3616308" cy="0"/>
           </a:xfrm>
           <a:prstGeom prst="line">
@@ -22770,13 +22945,13 @@
       </p:cxnSp>
       <p:sp>
         <p:nvSpPr>
-          <p:cNvPr id="14729994" name="ZoneTexte 1094835336"/>
+          <p:cNvPr id="886747521" name="ZoneTexte 1094835336"/>
           <p:cNvSpPr txBox="1"/>
           <p:nvPr/>
         </p:nvSpPr>
         <p:spPr bwMode="auto">
           <a:xfrm flipH="0" flipV="0">
-            <a:off x="3081033" y="6339562"/>
+            <a:off x="3081033" y="6412831"/>
             <a:ext cx="2205895" cy="643788"/>
           </a:xfrm>
           <a:prstGeom prst="rect">
@@ -22852,13 +23027,13 @@
       </p:sp>
       <p:sp>
         <p:nvSpPr>
-          <p:cNvPr id="699227219" name="Rectangle : avec coins arrondis en haut 1574209032"/>
+          <p:cNvPr id="884738375" name="Rectangle : avec coins arrondis en haut 1574209032"/>
           <p:cNvSpPr/>
           <p:nvPr/>
         </p:nvSpPr>
         <p:spPr bwMode="auto">
           <a:xfrm rot="5399942">
-            <a:off x="5223843" y="6459756"/>
+            <a:off x="5223843" y="6533025"/>
             <a:ext cx="520474" cy="400050"/>
           </a:xfrm>
           <a:prstGeom prst="round2SameRect">
@@ -22898,13 +23073,13 @@
       </p:sp>
       <p:sp>
         <p:nvSpPr>
-          <p:cNvPr id="2023038428" name="Flèche : pentagone 521086653"/>
+          <p:cNvPr id="1704484196" name="Flèche : pentagone 521086653"/>
           <p:cNvSpPr/>
           <p:nvPr/>
         </p:nvSpPr>
         <p:spPr bwMode="auto">
           <a:xfrm>
-            <a:off x="5793891" y="6447167"/>
+            <a:off x="5793890" y="6520435"/>
             <a:ext cx="188775" cy="182467"/>
           </a:xfrm>
           <a:prstGeom prst="homePlate">
@@ -22943,13 +23118,13 @@
       </p:sp>
       <p:sp>
         <p:nvSpPr>
-          <p:cNvPr id="1607122278" name="Flèche : pentagone 1507310733"/>
+          <p:cNvPr id="499481763" name="Flèche : pentagone 1507310733"/>
           <p:cNvSpPr/>
           <p:nvPr/>
         </p:nvSpPr>
         <p:spPr bwMode="auto">
           <a:xfrm>
-            <a:off x="5982669" y="6447167"/>
+            <a:off x="5982669" y="6520435"/>
             <a:ext cx="188775" cy="182467"/>
           </a:xfrm>
           <a:prstGeom prst="homePlate">
@@ -22988,13 +23163,13 @@
       </p:sp>
       <p:sp>
         <p:nvSpPr>
-          <p:cNvPr id="894085998" name="Flèche : pentagone 732388424"/>
+          <p:cNvPr id="1250211229" name="Flèche : pentagone 732388424"/>
           <p:cNvSpPr/>
           <p:nvPr/>
         </p:nvSpPr>
         <p:spPr bwMode="auto">
           <a:xfrm>
-            <a:off x="6171445" y="6447167"/>
+            <a:off x="6171444" y="6520435"/>
             <a:ext cx="188775" cy="182467"/>
           </a:xfrm>
           <a:prstGeom prst="homePlate">
@@ -23033,13 +23208,13 @@
       </p:sp>
       <p:sp>
         <p:nvSpPr>
-          <p:cNvPr id="725575848" name="Flèche : pentagone 326874465"/>
+          <p:cNvPr id="799554721" name="Flèche : pentagone 326874465"/>
           <p:cNvSpPr/>
           <p:nvPr/>
         </p:nvSpPr>
         <p:spPr bwMode="auto">
           <a:xfrm>
-            <a:off x="6360221" y="6447167"/>
+            <a:off x="6360220" y="6520435"/>
             <a:ext cx="188775" cy="182467"/>
           </a:xfrm>
           <a:prstGeom prst="homePlate">
@@ -23078,13 +23253,13 @@
       </p:sp>
       <p:sp>
         <p:nvSpPr>
-          <p:cNvPr id="2135865321" name="Flèche : pentagone 2090650957"/>
+          <p:cNvPr id="1174155179" name="Flèche : pentagone 2090650957"/>
           <p:cNvSpPr/>
           <p:nvPr/>
         </p:nvSpPr>
         <p:spPr bwMode="auto">
           <a:xfrm>
-            <a:off x="6548996" y="6447167"/>
+            <a:off x="6548995" y="6520435"/>
             <a:ext cx="188775" cy="182467"/>
           </a:xfrm>
           <a:prstGeom prst="homePlate">
@@ -23123,13 +23298,13 @@
       </p:sp>
       <p:sp>
         <p:nvSpPr>
-          <p:cNvPr id="596473251" name="ZoneTexte 1374103996"/>
+          <p:cNvPr id="640628238" name="ZoneTexte 1374103996"/>
           <p:cNvSpPr txBox="1"/>
           <p:nvPr/>
         </p:nvSpPr>
         <p:spPr bwMode="auto">
           <a:xfrm flipH="0" flipV="0">
-            <a:off x="3252177" y="7097766"/>
+            <a:off x="3252177" y="7134400"/>
             <a:ext cx="3639114" cy="2652119"/>
           </a:xfrm>
           <a:prstGeom prst="rect">
@@ -23396,13 +23571,13 @@
       </p:sp>
       <p:sp>
         <p:nvSpPr>
-          <p:cNvPr id="714974937" name="ZoneTexte 1748705365"/>
+          <p:cNvPr id="787531564" name="ZoneTexte 1748705365"/>
           <p:cNvSpPr txBox="1"/>
           <p:nvPr/>
         </p:nvSpPr>
         <p:spPr bwMode="auto">
           <a:xfrm>
-            <a:off x="3296619" y="5943338"/>
+            <a:off x="3296619" y="6097203"/>
             <a:ext cx="2281465" cy="366119"/>
           </a:xfrm>
           <a:prstGeom prst="rect">
@@ -23436,13 +23611,13 @@
       </p:sp>
       <p:cxnSp>
         <p:nvCxnSpPr>
-          <p:cNvPr id="523870000" name="Connecteur droit 1556830908"/>
+          <p:cNvPr id="478178043" name="Connecteur droit 1556830908"/>
           <p:cNvCxnSpPr/>
           <p:nvPr/>
         </p:nvCxnSpPr>
         <p:spPr bwMode="auto">
           <a:xfrm flipV="1">
-            <a:off x="-37125" y="6127743"/>
+            <a:off x="-37125" y="5175243"/>
             <a:ext cx="3190874" cy="0"/>
           </a:xfrm>
           <a:prstGeom prst="line">
@@ -23479,13 +23654,13 @@
       </p:cxnSp>
       <p:sp>
         <p:nvSpPr>
-          <p:cNvPr id="2050025695" name="ZoneTexte 409639257"/>
+          <p:cNvPr id="805618818" name="ZoneTexte 409639257"/>
           <p:cNvSpPr txBox="1"/>
           <p:nvPr/>
         </p:nvSpPr>
         <p:spPr bwMode="auto">
           <a:xfrm>
-            <a:off x="-5859" y="5944681"/>
+            <a:off x="-5859" y="4992179"/>
             <a:ext cx="2105049" cy="366119"/>
           </a:xfrm>
           <a:prstGeom prst="rect">
@@ -23529,14 +23704,14 @@
       </p:sp>
       <p:sp>
         <p:nvSpPr>
-          <p:cNvPr id="674964387" name="ZoneTexte 1168472887"/>
+          <p:cNvPr id="872464940" name="ZoneTexte 1168472887"/>
           <p:cNvSpPr txBox="1"/>
           <p:nvPr/>
         </p:nvSpPr>
         <p:spPr bwMode="auto">
           <a:xfrm flipH="0" flipV="0">
-            <a:off x="972" y="2380333"/>
-            <a:ext cx="3319977" cy="3509917"/>
+            <a:off x="972" y="2380332"/>
+            <a:ext cx="3333296" cy="3080007"/>
           </a:xfrm>
           <a:prstGeom prst="rect">
             <a:avLst/>
@@ -23592,6 +23767,20 @@
               <a:defRPr/>
             </a:pPr>
             <a:r>
+              <a:rPr lang="fr-FR" sz="1100" b="1" i="0" u="none" strike="noStrike" cap="none" spc="0">
+                <a:solidFill>
+                  <a:schemeClr val="tx1">
+                    <a:lumMod val="65000"/>
+                    <a:lumOff val="35000"/>
+                  </a:schemeClr>
+                </a:solidFill>
+                <a:latin typeface="Arial"/>
+                <a:ea typeface="Arial"/>
+                <a:cs typeface="Arial"/>
+              </a:rPr>
+              <a:t>⚝</a:t>
+            </a:r>
+            <a:r>
               <a:rPr lang="fr-FR" sz="1100" b="0" i="0" u="none" strike="noStrike" cap="none" spc="0">
                 <a:solidFill>
                   <a:schemeClr val="bg2">
@@ -23602,7 +23791,7 @@
                 <a:ea typeface="Arial"/>
                 <a:cs typeface="Arial"/>
               </a:rPr>
-              <a:t>________________________________________________________________________________</a:t>
+              <a:t>_______________________________________________________________________________</a:t>
             </a:r>
             <a:br>
               <a:rPr lang="fr-FR" sz="1200" b="0" i="0" u="none" strike="noStrike" cap="none" spc="0">
@@ -23617,7 +23806,7 @@
               </a:rPr>
             </a:br>
             <a:br>
-              <a:rPr lang="fr-FR" sz="700" b="0" i="0" u="none" strike="noStrike" cap="none" spc="0">
+              <a:rPr lang="fr-FR" sz="300" b="0" i="0" u="none" strike="noStrike" cap="none" spc="0">
                 <a:solidFill>
                   <a:schemeClr val="bg2">
                     <a:lumMod val="90000"/>
@@ -23629,6 +23818,20 @@
               </a:rPr>
             </a:br>
             <a:r>
+              <a:rPr lang="fr-FR" sz="1100" b="1" i="0" u="none" strike="noStrike" cap="none" spc="0">
+                <a:solidFill>
+                  <a:schemeClr val="tx1">
+                    <a:lumMod val="65000"/>
+                    <a:lumOff val="35000"/>
+                  </a:schemeClr>
+                </a:solidFill>
+                <a:latin typeface="Arial"/>
+                <a:ea typeface="Arial"/>
+                <a:cs typeface="Arial"/>
+              </a:rPr>
+              <a:t>⚝</a:t>
+            </a:r>
+            <a:r>
               <a:rPr lang="fr-FR" sz="1100" b="0" i="0" u="none" strike="noStrike" cap="none" spc="0">
                 <a:solidFill>
                   <a:schemeClr val="bg2">
@@ -23639,7 +23842,7 @@
                 <a:ea typeface="Arial"/>
                 <a:cs typeface="Arial"/>
               </a:rPr>
-              <a:t>________________________________________________________________________________</a:t>
+              <a:t>_______________________________________________________________________________</a:t>
             </a:r>
             <a:br>
               <a:rPr lang="fr-FR" sz="1200" b="0" i="0" u="none" strike="noStrike" cap="none" spc="0">
@@ -23654,7 +23857,7 @@
               </a:rPr>
             </a:br>
             <a:br>
-              <a:rPr lang="fr-FR" sz="700" b="0" i="0" u="none" strike="noStrike" cap="none" spc="0">
+              <a:rPr lang="fr-FR" sz="300" b="0" i="0" u="none" strike="noStrike" cap="none" spc="0">
                 <a:solidFill>
                   <a:schemeClr val="bg2">
                     <a:lumMod val="90000"/>
@@ -23666,6 +23869,20 @@
               </a:rPr>
             </a:br>
             <a:r>
+              <a:rPr lang="fr-FR" sz="1100" b="1" i="0" u="none" strike="noStrike" cap="none" spc="0">
+                <a:solidFill>
+                  <a:schemeClr val="tx1">
+                    <a:lumMod val="65000"/>
+                    <a:lumOff val="35000"/>
+                  </a:schemeClr>
+                </a:solidFill>
+                <a:latin typeface="Arial"/>
+                <a:ea typeface="Arial"/>
+                <a:cs typeface="Arial"/>
+              </a:rPr>
+              <a:t>⚝</a:t>
+            </a:r>
+            <a:r>
               <a:rPr lang="fr-FR" sz="1100" b="0" i="0" u="none" strike="noStrike" cap="none" spc="0">
                 <a:solidFill>
                   <a:schemeClr val="bg2">
@@ -23676,7 +23893,7 @@
                 <a:ea typeface="Arial"/>
                 <a:cs typeface="Arial"/>
               </a:rPr>
-              <a:t>________________________________________________________________________________</a:t>
+              <a:t>_______________________________________________________________________________</a:t>
             </a:r>
             <a:br>
               <a:rPr lang="fr-FR" sz="1200" b="0" i="0" u="none" strike="noStrike" cap="none" spc="0">
@@ -23691,7 +23908,7 @@
               </a:rPr>
             </a:br>
             <a:br>
-              <a:rPr lang="fr-FR" sz="600" b="0" i="0" u="none" strike="noStrike" cap="none" spc="0">
+              <a:rPr lang="fr-FR" sz="300" b="0" i="0" u="none" strike="noStrike" cap="none" spc="0">
                 <a:solidFill>
                   <a:schemeClr val="bg2">
                     <a:lumMod val="90000"/>
@@ -23703,6 +23920,20 @@
               </a:rPr>
             </a:br>
             <a:r>
+              <a:rPr lang="fr-FR" sz="1100" b="1" i="0" u="none" strike="noStrike" cap="none" spc="0">
+                <a:solidFill>
+                  <a:schemeClr val="tx1">
+                    <a:lumMod val="65000"/>
+                    <a:lumOff val="35000"/>
+                  </a:schemeClr>
+                </a:solidFill>
+                <a:latin typeface="Arial"/>
+                <a:ea typeface="Arial"/>
+                <a:cs typeface="Arial"/>
+              </a:rPr>
+              <a:t>⚝</a:t>
+            </a:r>
+            <a:r>
               <a:rPr lang="fr-FR" sz="1100" b="0" i="0" u="none" strike="noStrike" cap="none" spc="0">
                 <a:solidFill>
                   <a:schemeClr val="bg2">
@@ -23713,7 +23944,7 @@
                 <a:ea typeface="Arial"/>
                 <a:cs typeface="Arial"/>
               </a:rPr>
-              <a:t>_____________________________________________________________</a:t>
+              <a:t>____________________________________________________________</a:t>
             </a:r>
             <a:r>
               <a:rPr lang="fr-FR" sz="1100" b="0" i="0" u="none" strike="noStrike" cap="none" spc="0">
@@ -23741,7 +23972,7 @@
               </a:rPr>
             </a:br>
             <a:br>
-              <a:rPr lang="fr-FR" sz="700" b="0" i="0" u="none" strike="noStrike" cap="none" spc="0">
+              <a:rPr lang="fr-FR" sz="300" b="0" i="0" u="none" strike="noStrike" cap="none" spc="0">
                 <a:solidFill>
                   <a:schemeClr val="bg2">
                     <a:lumMod val="90000"/>
@@ -23752,46 +23983,20 @@
                 <a:cs typeface="Arial"/>
               </a:rPr>
             </a:br>
-            <a:r>
-              <a:rPr lang="fr-FR" sz="1100" b="0" i="0" u="none" strike="noStrike" cap="none" spc="0">
-                <a:solidFill>
-                  <a:schemeClr val="bg2">
-                    <a:lumMod val="90000"/>
-                  </a:schemeClr>
-                </a:solidFill>
-                <a:latin typeface="Arial"/>
-                <a:ea typeface="Arial"/>
-                <a:cs typeface="Arial"/>
-              </a:rPr>
-              <a:t>_____________________________________________________________</a:t>
-            </a:r>
-            <a:r>
-              <a:rPr lang="fr-FR" sz="1100" b="0" i="0" u="none" strike="noStrike" cap="none" spc="0">
-                <a:solidFill>
-                  <a:schemeClr val="bg2">
-                    <a:lumMod val="90000"/>
-                  </a:schemeClr>
-                </a:solidFill>
-                <a:latin typeface="Arial"/>
-                <a:ea typeface="Arial"/>
-                <a:cs typeface="Arial"/>
-              </a:rPr>
-              <a:t>___________________</a:t>
-            </a:r>
             <a:endParaRPr/>
           </a:p>
         </p:txBody>
       </p:sp>
       <p:sp>
         <p:nvSpPr>
-          <p:cNvPr id="2095082727" name="ZoneTexte 114796530"/>
+          <p:cNvPr id="1846095214" name="ZoneTexte 114796530"/>
           <p:cNvSpPr txBox="1"/>
           <p:nvPr/>
         </p:nvSpPr>
         <p:spPr bwMode="auto">
           <a:xfrm flipH="0" flipV="0">
-            <a:off x="3274358" y="2466923"/>
-            <a:ext cx="3616671" cy="3490319"/>
+            <a:off x="3274357" y="2466922"/>
+            <a:ext cx="3637910" cy="3702704"/>
           </a:xfrm>
           <a:prstGeom prst="rect">
             <a:avLst/>
@@ -23811,6 +24016,20 @@
               <a:defRPr/>
             </a:pPr>
             <a:r>
+              <a:rPr lang="fr-FR" sz="1100" b="1" i="0" u="none" strike="noStrike" cap="none" spc="0">
+                <a:solidFill>
+                  <a:schemeClr val="tx1">
+                    <a:lumMod val="65000"/>
+                    <a:lumOff val="35000"/>
+                  </a:schemeClr>
+                </a:solidFill>
+                <a:latin typeface="Arial"/>
+                <a:ea typeface="Arial"/>
+                <a:cs typeface="Arial"/>
+              </a:rPr>
+              <a:t>⚝</a:t>
+            </a:r>
+            <a:r>
               <a:rPr lang="fr-FR" sz="1100" b="0" i="0" u="none" strike="noStrike" cap="none" spc="0">
                 <a:solidFill>
                   <a:schemeClr val="bg2">
@@ -23821,7 +24040,7 @@
                 <a:ea typeface="Arial"/>
                 <a:cs typeface="Arial"/>
               </a:rPr>
-              <a:t>________________________________________________________________________________________</a:t>
+              <a:t>______________________________________________________________________________________</a:t>
             </a:r>
             <a:br>
               <a:rPr lang="fr-FR" sz="1100" b="0" i="0" u="none" strike="noStrike" cap="none" spc="0">
@@ -23836,7 +24055,7 @@
               </a:rPr>
             </a:br>
             <a:br>
-              <a:rPr lang="fr-FR" sz="700" b="0" i="0" u="none" strike="noStrike" cap="none" spc="0">
+              <a:rPr lang="fr-FR" sz="300" b="0" i="0" u="none" strike="noStrike" cap="none" spc="0">
                 <a:solidFill>
                   <a:schemeClr val="bg2">
                     <a:lumMod val="90000"/>
@@ -23848,6 +24067,20 @@
               </a:rPr>
             </a:br>
             <a:r>
+              <a:rPr lang="fr-FR" sz="1100" b="1" i="0" u="none" strike="noStrike" cap="none" spc="0">
+                <a:solidFill>
+                  <a:schemeClr val="tx1">
+                    <a:lumMod val="65000"/>
+                    <a:lumOff val="35000"/>
+                  </a:schemeClr>
+                </a:solidFill>
+                <a:latin typeface="Arial"/>
+                <a:ea typeface="Arial"/>
+                <a:cs typeface="Arial"/>
+              </a:rPr>
+              <a:t>⚝</a:t>
+            </a:r>
+            <a:r>
               <a:rPr lang="fr-FR" sz="1100" b="0" i="0" u="none" strike="noStrike" cap="none" spc="0">
                 <a:solidFill>
                   <a:schemeClr val="bg2">
@@ -23858,7 +24091,7 @@
                 <a:ea typeface="Arial"/>
                 <a:cs typeface="Arial"/>
               </a:rPr>
-              <a:t>________________________________________________________________________________________</a:t>
+              <a:t>______________________________________________________________________________________</a:t>
             </a:r>
             <a:br>
               <a:rPr lang="fr-FR" sz="1100" b="0" i="0" u="none" strike="noStrike" cap="none" spc="0">
@@ -23873,7 +24106,7 @@
               </a:rPr>
             </a:br>
             <a:br>
-              <a:rPr lang="fr-FR" sz="700" b="0" i="0" u="none" strike="noStrike" cap="none" spc="0">
+              <a:rPr lang="fr-FR" sz="300" b="0" i="0" u="none" strike="noStrike" cap="none" spc="0">
                 <a:solidFill>
                   <a:schemeClr val="bg2">
                     <a:lumMod val="90000"/>
@@ -23885,6 +24118,20 @@
               </a:rPr>
             </a:br>
             <a:r>
+              <a:rPr lang="fr-FR" sz="1100" b="1" i="0" u="none" strike="noStrike" cap="none" spc="0">
+                <a:solidFill>
+                  <a:schemeClr val="tx1">
+                    <a:lumMod val="65000"/>
+                    <a:lumOff val="35000"/>
+                  </a:schemeClr>
+                </a:solidFill>
+                <a:latin typeface="Arial"/>
+                <a:ea typeface="Arial"/>
+                <a:cs typeface="Arial"/>
+              </a:rPr>
+              <a:t>⚝</a:t>
+            </a:r>
+            <a:r>
               <a:rPr lang="fr-FR" sz="1100" b="0" i="0" u="none" strike="noStrike" cap="none" spc="0">
                 <a:solidFill>
                   <a:schemeClr val="bg2">
@@ -23895,7 +24142,7 @@
                 <a:ea typeface="Arial"/>
                 <a:cs typeface="Arial"/>
               </a:rPr>
-              <a:t>________________________________________________________________________________________</a:t>
+              <a:t>______________________________________________________________________________________</a:t>
             </a:r>
             <a:br>
               <a:rPr lang="fr-FR" sz="1100" b="0" i="0" u="none" strike="noStrike" cap="none" spc="0">
@@ -23910,7 +24157,7 @@
               </a:rPr>
             </a:br>
             <a:br>
-              <a:rPr lang="fr-FR" sz="700" b="0" i="0" u="none" strike="noStrike" cap="none" spc="0">
+              <a:rPr lang="fr-FR" sz="300" b="0" i="0" u="none" strike="noStrike" cap="none" spc="0">
                 <a:solidFill>
                   <a:schemeClr val="bg2">
                     <a:lumMod val="90000"/>
@@ -23922,6 +24169,20 @@
               </a:rPr>
             </a:br>
             <a:r>
+              <a:rPr lang="fr-FR" sz="1100" b="1" i="0" u="none" strike="noStrike" cap="none" spc="0">
+                <a:solidFill>
+                  <a:schemeClr val="tx1">
+                    <a:lumMod val="65000"/>
+                    <a:lumOff val="35000"/>
+                  </a:schemeClr>
+                </a:solidFill>
+                <a:latin typeface="Arial"/>
+                <a:ea typeface="Arial"/>
+                <a:cs typeface="Arial"/>
+              </a:rPr>
+              <a:t>⚝</a:t>
+            </a:r>
+            <a:r>
               <a:rPr lang="fr-FR" sz="1100" b="0" i="0" u="none" strike="noStrike" cap="none" spc="0">
                 <a:solidFill>
                   <a:schemeClr val="bg2">
@@ -23945,7 +24206,7 @@
                 <a:ea typeface="Arial"/>
                 <a:cs typeface="Arial"/>
               </a:rPr>
-              <a:t>_____________________________________</a:t>
+              <a:t>___________________________________</a:t>
             </a:r>
             <a:br>
               <a:rPr lang="fr-FR" sz="1100" b="0" i="0" u="none" strike="noStrike" cap="none" spc="0">
@@ -23960,7 +24221,7 @@
               </a:rPr>
             </a:br>
             <a:br>
-              <a:rPr lang="fr-FR" sz="700" b="0" i="0" u="none" strike="noStrike" cap="none" spc="0">
+              <a:rPr lang="fr-FR" sz="300" b="0" i="0" u="none" strike="noStrike" cap="none" spc="0">
                 <a:solidFill>
                   <a:schemeClr val="bg2">
                     <a:lumMod val="90000"/>
@@ -23972,6 +24233,20 @@
               </a:rPr>
             </a:br>
             <a:r>
+              <a:rPr lang="fr-FR" sz="1100" b="1" i="0" u="none" strike="noStrike" cap="none" spc="0">
+                <a:solidFill>
+                  <a:schemeClr val="tx1">
+                    <a:lumMod val="65000"/>
+                    <a:lumOff val="35000"/>
+                  </a:schemeClr>
+                </a:solidFill>
+                <a:latin typeface="Arial"/>
+                <a:ea typeface="Arial"/>
+                <a:cs typeface="Arial"/>
+              </a:rPr>
+              <a:t>⚝</a:t>
+            </a:r>
+            <a:r>
               <a:rPr lang="fr-FR" sz="1100" b="0" i="0" u="none" strike="noStrike" cap="none" spc="0">
                 <a:solidFill>
                   <a:schemeClr val="bg2">
@@ -23982,7 +24257,71 @@
                 <a:ea typeface="Arial"/>
                 <a:cs typeface="Arial"/>
               </a:rPr>
-              <a:t>________________________________________________________________________________________</a:t>
+              <a:t>______________________________________________________________________________________</a:t>
+            </a:r>
+            <a:br>
+              <a:rPr lang="fr-FR" sz="1100" b="0" i="0" u="none" strike="noStrike" cap="none" spc="0">
+                <a:solidFill>
+                  <a:schemeClr val="bg2">
+                    <a:lumMod val="90000"/>
+                  </a:schemeClr>
+                </a:solidFill>
+                <a:latin typeface="Arial"/>
+                <a:ea typeface="Arial"/>
+                <a:cs typeface="Arial"/>
+              </a:rPr>
+            </a:br>
+            <a:br>
+              <a:rPr lang="fr-FR" sz="300" b="0" i="0" u="none" strike="noStrike" cap="none" spc="0">
+                <a:solidFill>
+                  <a:schemeClr val="bg2">
+                    <a:lumMod val="90000"/>
+                  </a:schemeClr>
+                </a:solidFill>
+                <a:latin typeface="Arial"/>
+                <a:ea typeface="Arial"/>
+                <a:cs typeface="Arial"/>
+              </a:rPr>
+            </a:br>
+            <a:r>
+              <a:rPr lang="fr-FR" sz="1100" b="1" i="0" u="none" strike="noStrike" cap="none" spc="0">
+                <a:solidFill>
+                  <a:schemeClr val="tx1">
+                    <a:lumMod val="65000"/>
+                    <a:lumOff val="35000"/>
+                  </a:schemeClr>
+                </a:solidFill>
+                <a:latin typeface="Arial"/>
+                <a:ea typeface="Arial"/>
+                <a:cs typeface="Arial"/>
+              </a:rPr>
+              <a:t>⚝</a:t>
+            </a:r>
+            <a:r>
+              <a:rPr lang="fr-FR" sz="1100" b="0" i="0" u="none" strike="noStrike" cap="none" spc="0">
+                <a:solidFill>
+                  <a:schemeClr val="bg2">
+                    <a:lumMod val="90000"/>
+                  </a:schemeClr>
+                </a:solidFill>
+                <a:latin typeface="Arial"/>
+                <a:ea typeface="Arial"/>
+                <a:cs typeface="Arial"/>
+              </a:rPr>
+              <a:t>___________________________________________________________________</a:t>
+            </a:r>
+            <a:r>
+              <a:rPr lang="fr-FR" sz="1100" b="0" i="0" u="none" strike="noStrike" cap="none" spc="0">
+                <a:solidFill>
+                  <a:schemeClr val="bg2">
+                    <a:lumMod val="90000"/>
+                  </a:schemeClr>
+                </a:solidFill>
+                <a:latin typeface="Arial"/>
+                <a:ea typeface="Arial"/>
+                <a:cs typeface="Arial"/>
+              </a:rPr>
+              <a:t>___________________</a:t>
             </a:r>
             <a:endParaRPr sz="1200" b="0" i="0" u="none" strike="noStrike" cap="none" spc="0">
               <a:solidFill>
@@ -24028,14 +24367,14 @@
       </p:sp>
       <p:sp>
         <p:nvSpPr>
-          <p:cNvPr id="880767252" name="ZoneTexte 1085068195"/>
+          <p:cNvPr id="641833951" name="ZoneTexte 1085068195"/>
           <p:cNvSpPr txBox="1"/>
           <p:nvPr/>
         </p:nvSpPr>
         <p:spPr bwMode="auto">
           <a:xfrm flipH="0" flipV="0">
-            <a:off x="972" y="6271110"/>
-            <a:ext cx="3204497" cy="3383640"/>
+            <a:off x="972" y="5318609"/>
+            <a:ext cx="3296367" cy="4343760"/>
           </a:xfrm>
           <a:prstGeom prst="rect">
             <a:avLst/>
@@ -24301,7 +24640,7 @@
             </a:r>
             <a:r>
               <a:rPr sz="900"/>
-              <a:t> la Magie :</a:t>
+              <a:t> la magie :</a:t>
             </a:r>
             <a:r>
               <a:rPr sz="900">
@@ -24765,7 +25104,7 @@
                   </a:schemeClr>
                 </a:solidFill>
               </a:rPr>
-              <a:t>. Invoquer la magie noire fait automatiquement échouer le test de maîtrise de soi.</a:t>
+              <a:t>. </a:t>
             </a:r>
             <a:endParaRPr sz="900">
               <a:solidFill>
@@ -24777,7 +25116,16 @@
             </a:endParaRPr>
           </a:p>
           <a:p>
-            <a:pPr>
+            <a:pPr marL="0" marR="0" indent="0" algn="l">
+              <a:lnSpc>
+                <a:spcPct val="100000"/>
+              </a:lnSpc>
+              <a:spcBef>
+                <a:spcPts val="0"/>
+              </a:spcBef>
+              <a:spcAft>
+                <a:spcPts val="0"/>
+              </a:spcAft>
               <a:defRPr/>
             </a:pPr>
             <a:endParaRPr sz="900">
@@ -24790,6 +25138,142 @@
             </a:endParaRPr>
           </a:p>
           <a:p>
+            <a:pPr marL="0" marR="0" indent="0" algn="l">
+              <a:lnSpc>
+                <a:spcPct val="100000"/>
+              </a:lnSpc>
+              <a:spcBef>
+                <a:spcPts val="0"/>
+              </a:spcBef>
+              <a:spcAft>
+                <a:spcPts val="0"/>
+              </a:spcAft>
+              <a:defRPr/>
+            </a:pPr>
+            <a:r>
+              <a:rPr lang="fr-FR" sz="900" b="0" i="0" u="none" strike="noStrike" cap="none" spc="0">
+                <a:solidFill>
+                  <a:schemeClr val="tx1"/>
+                </a:solidFill>
+                <a:latin typeface="Arial"/>
+                <a:ea typeface="Arial"/>
+                <a:cs typeface="Arial"/>
+              </a:rPr>
+              <a:t>Magie noire </a:t>
+            </a:r>
+            <a:r>
+              <a:rPr sz="900">
+                <a:solidFill>
+                  <a:schemeClr val="tx1">
+                    <a:lumMod val="50000"/>
+                    <a:lumOff val="50000"/>
+                  </a:schemeClr>
+                </a:solidFill>
+              </a:rPr>
+              <a:t>: </a:t>
+            </a:r>
+            <a:r>
+              <a:rPr lang="fr-FR" sz="900" b="0" i="0" u="none" strike="noStrike" cap="none" spc="0">
+                <a:solidFill>
+                  <a:schemeClr val="tx1">
+                    <a:lumMod val="50000"/>
+                    <a:lumOff val="50000"/>
+                  </a:schemeClr>
+                </a:solidFill>
+                <a:latin typeface="+mn-lt"/>
+                <a:ea typeface="+mn-ea"/>
+                <a:cs typeface="+mn-cs"/>
+              </a:rPr>
+              <a:t>Invoquer la magie noire fait automatiquement cocher une case de corruption.</a:t>
+            </a:r>
+            <a:r>
+              <a:rPr sz="900">
+                <a:solidFill>
+                  <a:schemeClr val="tx1">
+                    <a:lumMod val="50000"/>
+                    <a:lumOff val="50000"/>
+                  </a:schemeClr>
+                </a:solidFill>
+              </a:rPr>
+              <a:t> Toute magie réalisée à l’encontre de quelqu’un d’autre, sous le coup de la colère, par vengeance ou par jalousie est considérée comme noire.</a:t>
+            </a:r>
+            <a:endParaRPr sz="900">
+              <a:solidFill>
+                <a:schemeClr val="tx1">
+                  <a:lumMod val="50000"/>
+                  <a:lumOff val="50000"/>
+                </a:schemeClr>
+              </a:solidFill>
+            </a:endParaRPr>
+          </a:p>
+          <a:p>
+            <a:pPr marL="0" marR="0" indent="0" algn="l">
+              <a:lnSpc>
+                <a:spcPct val="100000"/>
+              </a:lnSpc>
+              <a:spcBef>
+                <a:spcPts val="0"/>
+              </a:spcBef>
+              <a:spcAft>
+                <a:spcPts val="0"/>
+              </a:spcAft>
+              <a:defRPr/>
+            </a:pPr>
+            <a:br>
+              <a:rPr sz="900">
+                <a:solidFill>
+                  <a:schemeClr val="tx1">
+                    <a:lumMod val="50000"/>
+                    <a:lumOff val="50000"/>
+                  </a:schemeClr>
+                </a:solidFill>
+              </a:rPr>
+            </a:br>
+            <a:r>
+              <a:rPr lang="fr-FR" sz="900" b="0" i="0" u="none" strike="noStrike" cap="none" spc="0">
+                <a:solidFill>
+                  <a:schemeClr val="tx1"/>
+                </a:solidFill>
+                <a:latin typeface="Arial"/>
+                <a:ea typeface="Arial"/>
+                <a:cs typeface="Arial"/>
+              </a:rPr>
+              <a:t>Rituels de convent</a:t>
+            </a:r>
+            <a:r>
+              <a:rPr sz="900">
+                <a:solidFill>
+                  <a:schemeClr val="tx1">
+                    <a:lumMod val="50000"/>
+                    <a:lumOff val="50000"/>
+                  </a:schemeClr>
+                </a:solidFill>
+              </a:rPr>
+              <a:t> : Réaliser un rituel en convent permet de cumuler plusieurs effets de sorts et d’obtenir des bonus grâce à la participation des autres sorcières (détails dans le manuel de jeu).</a:t>
+            </a:r>
+            <a:endParaRPr sz="900">
+              <a:solidFill>
+                <a:schemeClr val="tx1">
+                  <a:lumMod val="50000"/>
+                  <a:lumOff val="50000"/>
+                </a:schemeClr>
+              </a:solidFill>
+            </a:endParaRPr>
+          </a:p>
+          <a:p>
+            <a:pPr>
+              <a:defRPr/>
+            </a:pPr>
+            <a:endParaRPr sz="900">
+              <a:solidFill>
+                <a:schemeClr val="tx1">
+                  <a:lumMod val="50000"/>
+                  <a:lumOff val="50000"/>
+                </a:schemeClr>
+              </a:solidFill>
+            </a:endParaRPr>
+          </a:p>
+          <a:p>
             <a:pPr>
               <a:defRPr/>
             </a:pPr>
@@ -25009,13 +25493,13 @@
       </p:sp>
       <p:sp>
         <p:nvSpPr>
-          <p:cNvPr id="941560710" name="Étoile : 5 branches 278736380"/>
+          <p:cNvPr id="313954208" name="Étoile : 5 branches 278736380"/>
           <p:cNvSpPr/>
           <p:nvPr/>
         </p:nvSpPr>
         <p:spPr bwMode="auto">
           <a:xfrm>
-            <a:off x="2180358" y="9555491"/>
+            <a:off x="2180358" y="9555490"/>
             <a:ext cx="188775" cy="182466"/>
           </a:xfrm>
           <a:prstGeom prst="star5">
@@ -25056,13 +25540,13 @@
       </p:sp>
       <p:sp>
         <p:nvSpPr>
-          <p:cNvPr id="489174378" name="Étoile : 5 branches 1495350449"/>
+          <p:cNvPr id="818346800" name="Étoile : 5 branches 1495350449"/>
           <p:cNvSpPr/>
           <p:nvPr/>
         </p:nvSpPr>
         <p:spPr bwMode="auto">
           <a:xfrm>
-            <a:off x="2369134" y="9555491"/>
+            <a:off x="2369133" y="9555490"/>
             <a:ext cx="188775" cy="182466"/>
           </a:xfrm>
           <a:prstGeom prst="star5">
@@ -25103,13 +25587,13 @@
       </p:sp>
       <p:sp>
         <p:nvSpPr>
-          <p:cNvPr id="150972940" name="Étoile : 5 branches 79046386"/>
+          <p:cNvPr id="1280394579" name="Étoile : 5 branches 79046386"/>
           <p:cNvSpPr/>
           <p:nvPr/>
         </p:nvSpPr>
         <p:spPr bwMode="auto">
           <a:xfrm>
-            <a:off x="2557913" y="9555491"/>
+            <a:off x="2557912" y="9555490"/>
             <a:ext cx="188775" cy="182466"/>
           </a:xfrm>
           <a:prstGeom prst="star5">
@@ -25150,13 +25634,13 @@
       </p:sp>
       <p:sp>
         <p:nvSpPr>
-          <p:cNvPr id="415770445" name="Étoile : 5 branches 749256076"/>
+          <p:cNvPr id="1709261930" name="Étoile : 5 branches 749256076"/>
           <p:cNvSpPr/>
           <p:nvPr/>
         </p:nvSpPr>
         <p:spPr bwMode="auto">
           <a:xfrm>
-            <a:off x="2746688" y="9555491"/>
+            <a:off x="2746687" y="9555490"/>
             <a:ext cx="188775" cy="182466"/>
           </a:xfrm>
           <a:prstGeom prst="star5">
@@ -25197,13 +25681,13 @@
       </p:sp>
       <p:sp>
         <p:nvSpPr>
-          <p:cNvPr id="1084133877" name="Étoile : 5 branches 411245083"/>
+          <p:cNvPr id="378524086" name="Étoile : 5 branches 411245083"/>
           <p:cNvSpPr/>
           <p:nvPr/>
         </p:nvSpPr>
         <p:spPr bwMode="auto">
           <a:xfrm>
-            <a:off x="2935460" y="9555491"/>
+            <a:off x="2935459" y="9555490"/>
             <a:ext cx="188775" cy="182466"/>
           </a:xfrm>
           <a:prstGeom prst="star5">
@@ -25244,13 +25728,13 @@
       </p:sp>
       <p:sp>
         <p:nvSpPr>
-          <p:cNvPr id="109929728" name="ZoneTexte 496444952"/>
+          <p:cNvPr id="587470465" name="ZoneTexte 496444952"/>
           <p:cNvSpPr txBox="1"/>
           <p:nvPr/>
         </p:nvSpPr>
         <p:spPr bwMode="auto">
           <a:xfrm>
-            <a:off x="5805407" y="6230987"/>
+            <a:off x="5805405" y="6304255"/>
             <a:ext cx="1313115" cy="305159"/>
           </a:xfrm>
           <a:prstGeom prst="rect">
@@ -25286,13 +25770,13 @@
       </p:sp>
       <p:sp>
         <p:nvSpPr>
-          <p:cNvPr id="266826442" name="ZoneTexte 474433989"/>
+          <p:cNvPr id="1025022191" name="ZoneTexte 474433989"/>
           <p:cNvSpPr txBox="1"/>
           <p:nvPr/>
         </p:nvSpPr>
         <p:spPr bwMode="auto">
           <a:xfrm>
-            <a:off x="5672055" y="6761116"/>
+            <a:off x="5672054" y="6834385"/>
             <a:ext cx="1431156" cy="274679"/>
           </a:xfrm>
           <a:prstGeom prst="rect">
@@ -25328,7 +25812,7 @@
       </p:sp>
       <p:sp>
         <p:nvSpPr>
-          <p:cNvPr id="182026971" name="ZoneTexte 1"/>
+          <p:cNvPr id="794250017" name="ZoneTexte 1"/>
           <p:cNvSpPr txBox="1"/>
           <p:nvPr/>
         </p:nvSpPr>
@@ -25429,7 +25913,7 @@
       </p:sp>
       <p:sp>
         <p:nvSpPr>
-          <p:cNvPr id="709771370" name="ZoneTexte 2"/>
+          <p:cNvPr id="2078935424" name="ZoneTexte 2"/>
           <p:cNvSpPr txBox="1"/>
           <p:nvPr/>
         </p:nvSpPr>
@@ -25547,7 +26031,7 @@
       </p:sp>
       <p:sp>
         <p:nvSpPr>
-          <p:cNvPr id="1944621967" name=""/>
+          <p:cNvPr id="2130877399" name=""/>
           <p:cNvSpPr/>
           <p:nvPr/>
         </p:nvSpPr>
@@ -25618,13 +26102,13 @@
       </p:sp>
       <p:sp>
         <p:nvSpPr>
-          <p:cNvPr id="65640620" name="Flèche : pentagone 1507310733"/>
+          <p:cNvPr id="1768233873" name="Flèche : pentagone 1507310733"/>
           <p:cNvSpPr/>
           <p:nvPr/>
         </p:nvSpPr>
         <p:spPr bwMode="auto">
           <a:xfrm>
-            <a:off x="5982669" y="6659781"/>
+            <a:off x="5982669" y="6733050"/>
             <a:ext cx="188775" cy="182466"/>
           </a:xfrm>
           <a:prstGeom prst="homePlate">
@@ -25663,13 +26147,13 @@
       </p:sp>
       <p:sp>
         <p:nvSpPr>
-          <p:cNvPr id="463387920" name="Flèche : pentagone 732388424"/>
+          <p:cNvPr id="1794425274" name="Flèche : pentagone 732388424"/>
           <p:cNvSpPr/>
           <p:nvPr/>
         </p:nvSpPr>
         <p:spPr bwMode="auto">
           <a:xfrm>
-            <a:off x="6171444" y="6659781"/>
+            <a:off x="6171444" y="6733050"/>
             <a:ext cx="188775" cy="182466"/>
           </a:xfrm>
           <a:prstGeom prst="homePlate">
@@ -25708,13 +26192,13 @@
       </p:sp>
       <p:sp>
         <p:nvSpPr>
-          <p:cNvPr id="520161676" name="Flèche : pentagone 326874465"/>
+          <p:cNvPr id="2133463687" name="Flèche : pentagone 326874465"/>
           <p:cNvSpPr/>
           <p:nvPr/>
         </p:nvSpPr>
         <p:spPr bwMode="auto">
           <a:xfrm>
-            <a:off x="6360220" y="6659781"/>
+            <a:off x="6360219" y="6733050"/>
             <a:ext cx="188775" cy="182466"/>
           </a:xfrm>
           <a:prstGeom prst="homePlate">
@@ -25786,7 +26270,7 @@
       </p:grpSpPr>
       <p:sp>
         <p:nvSpPr>
-          <p:cNvPr id="1704437606" name="ZoneTexte 273581705"/>
+          <p:cNvPr id="1968950398" name="ZoneTexte 273581705"/>
           <p:cNvSpPr txBox="1"/>
           <p:nvPr/>
         </p:nvSpPr>
@@ -26084,7 +26568,7 @@
       </p:sp>
       <p:cxnSp>
         <p:nvCxnSpPr>
-          <p:cNvPr id="1347700000" name="Connecteur droit 1094832104"/>
+          <p:cNvPr id="1050238293" name="Connecteur droit 1094832104"/>
           <p:cNvCxnSpPr/>
           <p:nvPr/>
         </p:nvCxnSpPr>
@@ -26127,7 +26611,7 @@
       </p:cxnSp>
       <p:sp>
         <p:nvSpPr>
-          <p:cNvPr id="1098856925" name="ZoneTexte 2078543737"/>
+          <p:cNvPr id="684138979" name="ZoneTexte 2078543737"/>
           <p:cNvSpPr txBox="1"/>
           <p:nvPr/>
         </p:nvSpPr>
@@ -26167,7 +26651,7 @@
       </p:sp>
       <p:cxnSp>
         <p:nvCxnSpPr>
-          <p:cNvPr id="1870545913" name="Connecteur droit 853743145"/>
+          <p:cNvPr id="2020117561" name="Connecteur droit 853743145"/>
           <p:cNvCxnSpPr/>
           <p:nvPr/>
         </p:nvCxnSpPr>
@@ -26210,7 +26694,7 @@
       </p:cxnSp>
       <p:sp>
         <p:nvSpPr>
-          <p:cNvPr id="1052409063" name="ZoneTexte 1473119298"/>
+          <p:cNvPr id="1624027286" name="ZoneTexte 1473119298"/>
           <p:cNvSpPr txBox="1"/>
           <p:nvPr/>
         </p:nvSpPr>
@@ -26250,7 +26734,7 @@
       </p:sp>
       <p:cxnSp>
         <p:nvCxnSpPr>
-          <p:cNvPr id="1997388932" name="Connecteur droit 1727809509"/>
+          <p:cNvPr id="2078538214" name="Connecteur droit 1727809509"/>
           <p:cNvCxnSpPr/>
           <p:nvPr/>
         </p:nvCxnSpPr>
@@ -26293,7 +26777,7 @@
       </p:cxnSp>
       <p:sp>
         <p:nvSpPr>
-          <p:cNvPr id="1670322145" name="ZoneTexte 759238070"/>
+          <p:cNvPr id="641953977" name="ZoneTexte 759238070"/>
           <p:cNvSpPr txBox="1"/>
           <p:nvPr/>
         </p:nvSpPr>
@@ -26368,7 +26852,7 @@
       </p:sp>
       <p:sp>
         <p:nvSpPr>
-          <p:cNvPr id="1201393778" name="Rectangle : avec coins arrondis en haut 965147191"/>
+          <p:cNvPr id="1960519122" name="Rectangle : avec coins arrondis en haut 965147191"/>
           <p:cNvSpPr/>
           <p:nvPr/>
         </p:nvSpPr>
@@ -26414,7 +26898,7 @@
       </p:sp>
       <p:sp>
         <p:nvSpPr>
-          <p:cNvPr id="1602751036" name="Flèche : pentagone 2070329900"/>
+          <p:cNvPr id="65735639" name="Flèche : pentagone 2070329900"/>
           <p:cNvSpPr/>
           <p:nvPr/>
         </p:nvSpPr>
@@ -26459,7 +26943,7 @@
       </p:sp>
       <p:sp>
         <p:nvSpPr>
-          <p:cNvPr id="172191881" name="Flèche : pentagone 1325137089"/>
+          <p:cNvPr id="1370491936" name="Flèche : pentagone 1325137089"/>
           <p:cNvSpPr/>
           <p:nvPr/>
         </p:nvSpPr>
@@ -26504,7 +26988,7 @@
       </p:sp>
       <p:sp>
         <p:nvSpPr>
-          <p:cNvPr id="1365488783" name="Flèche : pentagone 295922856"/>
+          <p:cNvPr id="1085323765" name="Flèche : pentagone 295922856"/>
           <p:cNvSpPr/>
           <p:nvPr/>
         </p:nvSpPr>
@@ -26549,7 +27033,7 @@
       </p:sp>
       <p:sp>
         <p:nvSpPr>
-          <p:cNvPr id="355147080" name="Flèche : pentagone 1961547672"/>
+          <p:cNvPr id="823918728" name="Flèche : pentagone 1961547672"/>
           <p:cNvSpPr/>
           <p:nvPr/>
         </p:nvSpPr>
@@ -26594,7 +27078,7 @@
       </p:sp>
       <p:sp>
         <p:nvSpPr>
-          <p:cNvPr id="941697702" name="Flèche : pentagone 1305647833"/>
+          <p:cNvPr id="1055890644" name="Flèche : pentagone 1305647833"/>
           <p:cNvSpPr/>
           <p:nvPr/>
         </p:nvSpPr>
@@ -26639,7 +27123,7 @@
       </p:sp>
       <p:sp>
         <p:nvSpPr>
-          <p:cNvPr id="1363467856" name="ZoneTexte 545814566"/>
+          <p:cNvPr id="1125901458" name="ZoneTexte 545814566"/>
           <p:cNvSpPr txBox="1"/>
           <p:nvPr/>
         </p:nvSpPr>
@@ -26941,7 +27425,7 @@
       </p:sp>
       <p:sp>
         <p:nvSpPr>
-          <p:cNvPr id="320476602" name="ZoneTexte 671978155"/>
+          <p:cNvPr id="1720304327" name="ZoneTexte 671978155"/>
           <p:cNvSpPr txBox="1"/>
           <p:nvPr/>
         </p:nvSpPr>
@@ -26981,7 +27465,7 @@
       </p:sp>
       <p:cxnSp>
         <p:nvCxnSpPr>
-          <p:cNvPr id="926534617" name="Connecteur droit 637589304"/>
+          <p:cNvPr id="2066098241" name="Connecteur droit 637589304"/>
           <p:cNvCxnSpPr/>
           <p:nvPr/>
         </p:nvCxnSpPr>
@@ -27024,7 +27508,7 @@
       </p:cxnSp>
       <p:sp>
         <p:nvSpPr>
-          <p:cNvPr id="2002172119" name="ZoneTexte 172075623"/>
+          <p:cNvPr id="217350333" name="ZoneTexte 172075623"/>
           <p:cNvSpPr txBox="1"/>
           <p:nvPr/>
         </p:nvSpPr>
@@ -27074,13 +27558,13 @@
       </p:sp>
       <p:sp>
         <p:nvSpPr>
-          <p:cNvPr id="1203026159" name="ZoneTexte 1642812764"/>
+          <p:cNvPr id="1194353101" name="ZoneTexte 1642812764"/>
           <p:cNvSpPr txBox="1"/>
           <p:nvPr/>
         </p:nvSpPr>
         <p:spPr bwMode="auto">
           <a:xfrm flipH="0" flipV="0">
-            <a:off x="0" y="2586745"/>
+            <a:off x="0" y="2558169"/>
             <a:ext cx="3390939" cy="2834999"/>
           </a:xfrm>
           <a:prstGeom prst="rect">
@@ -27263,7 +27747,7 @@
       </p:sp>
       <p:sp>
         <p:nvSpPr>
-          <p:cNvPr id="1609126208" name="Étoile : 7 branches 1681961038"/>
+          <p:cNvPr id="151346959" name="Étoile : 7 branches 1681961038"/>
           <p:cNvSpPr/>
           <p:nvPr/>
         </p:nvSpPr>
@@ -27310,7 +27794,7 @@
       </p:sp>
       <p:sp>
         <p:nvSpPr>
-          <p:cNvPr id="1137286536" name="Étoile : 7 branches 1476951547"/>
+          <p:cNvPr id="78213850" name="Étoile : 7 branches 1476951547"/>
           <p:cNvSpPr/>
           <p:nvPr/>
         </p:nvSpPr>
@@ -27357,7 +27841,7 @@
       </p:sp>
       <p:sp>
         <p:nvSpPr>
-          <p:cNvPr id="931573661" name="Étoile : 7 branches 1520826925"/>
+          <p:cNvPr id="802274116" name="Étoile : 7 branches 1520826925"/>
           <p:cNvSpPr/>
           <p:nvPr/>
         </p:nvSpPr>
@@ -27404,7 +27888,7 @@
       </p:sp>
       <p:sp>
         <p:nvSpPr>
-          <p:cNvPr id="1456383369" name="ZoneTexte 1219899073"/>
+          <p:cNvPr id="927022789" name="ZoneTexte 1219899073"/>
           <p:cNvSpPr txBox="1"/>
           <p:nvPr/>
         </p:nvSpPr>
@@ -27444,14 +27928,14 @@
       </p:sp>
       <p:sp>
         <p:nvSpPr>
-          <p:cNvPr id="1736030461" name="ZoneTexte 1283574123"/>
+          <p:cNvPr id="894270370" name="ZoneTexte 1283574123"/>
           <p:cNvSpPr txBox="1"/>
           <p:nvPr/>
         </p:nvSpPr>
         <p:spPr bwMode="auto">
           <a:xfrm flipH="0" flipV="0">
-            <a:off x="3303453" y="2586741"/>
-            <a:ext cx="3551475" cy="3520800"/>
+            <a:off x="3303452" y="2558165"/>
+            <a:ext cx="3551118" cy="3657960"/>
           </a:xfrm>
           <a:prstGeom prst="rect">
             <a:avLst/>
@@ -28040,7 +28524,7 @@
                   </a:schemeClr>
                 </a:solidFill>
               </a:rPr>
-              <a:t> goule. Une goule est un vampire mineur </a:t>
+              <a:t> goule. Une goule est un vampire mineur lié à son</a:t>
             </a:r>
             <a:r>
               <a:rPr sz="900">
@@ -28051,7 +28535,7 @@
                   </a:schemeClr>
                 </a:solidFill>
               </a:rPr>
-              <a:t>esclave</a:t>
+              <a:t> son créateur</a:t>
             </a:r>
             <a:r>
               <a:rPr sz="900">
@@ -28062,7 +28546,7 @@
                   </a:schemeClr>
                 </a:solidFill>
               </a:rPr>
-              <a:t> de son créateur</a:t>
+              <a:t> </a:t>
             </a:r>
             <a:r>
               <a:rPr sz="900">
@@ -28073,6 +28557,39 @@
                   </a:schemeClr>
                 </a:solidFill>
               </a:rPr>
+              <a:t>dont</a:t>
+            </a:r>
+            <a:r>
+              <a:rPr sz="900">
+                <a:solidFill>
+                  <a:schemeClr val="tx1">
+                    <a:lumMod val="50000"/>
+                    <a:lumOff val="50000"/>
+                  </a:schemeClr>
+                </a:solidFill>
+              </a:rPr>
+              <a:t> il </a:t>
+            </a:r>
+            <a:r>
+              <a:rPr sz="900">
+                <a:solidFill>
+                  <a:schemeClr val="tx1">
+                    <a:lumMod val="50000"/>
+                    <a:lumOff val="50000"/>
+                  </a:schemeClr>
+                </a:solidFill>
+              </a:rPr>
+              <a:t>devient</a:t>
+            </a:r>
+            <a:r>
+              <a:rPr sz="900">
+                <a:solidFill>
+                  <a:schemeClr val="tx1">
+                    <a:lumMod val="50000"/>
+                    <a:lumOff val="50000"/>
+                  </a:schemeClr>
+                </a:solidFill>
+              </a:rPr>
               <a:t> </a:t>
             </a:r>
             <a:r>
@@ -28084,7 +28601,7 @@
                   </a:schemeClr>
                 </a:solidFill>
               </a:rPr>
-              <a:t>dont</a:t>
+              <a:t>dépendant, ce dernier devant </a:t>
             </a:r>
             <a:r>
               <a:rPr sz="900">
@@ -28095,7 +28612,7 @@
                   </a:schemeClr>
                 </a:solidFill>
               </a:rPr>
-              <a:t> il </a:t>
+              <a:t>le </a:t>
             </a:r>
             <a:r>
               <a:rPr sz="900">
@@ -28106,6 +28623,61 @@
                   </a:schemeClr>
                 </a:solidFill>
               </a:rPr>
+              <a:t>nourrir</a:t>
+            </a:r>
+            <a:r>
+              <a:rPr sz="900">
+                <a:solidFill>
+                  <a:schemeClr val="tx1">
+                    <a:lumMod val="50000"/>
+                    <a:lumOff val="50000"/>
+                  </a:schemeClr>
+                </a:solidFill>
+              </a:rPr>
+              <a:t> avec son sang une fois par semaine</a:t>
+            </a:r>
+            <a:r>
+              <a:rPr sz="900">
+                <a:solidFill>
+                  <a:schemeClr val="tx1">
+                    <a:lumMod val="50000"/>
+                    <a:lumOff val="50000"/>
+                  </a:schemeClr>
+                </a:solidFill>
+              </a:rPr>
+              <a:t>. </a:t>
+            </a:r>
+            <a:r>
+              <a:rPr sz="900">
+                <a:solidFill>
+                  <a:schemeClr val="tx1">
+                    <a:lumMod val="50000"/>
+                    <a:lumOff val="50000"/>
+                  </a:schemeClr>
+                </a:solidFill>
+              </a:rPr>
+              <a:t>Abandonné</a:t>
+            </a:r>
+            <a:r>
+              <a:rPr sz="900">
+                <a:solidFill>
+                  <a:schemeClr val="tx1">
+                    <a:lumMod val="50000"/>
+                    <a:lumOff val="50000"/>
+                  </a:schemeClr>
+                </a:solidFill>
+              </a:rPr>
+              <a:t> par son créateur, il </a:t>
+            </a:r>
+            <a:r>
+              <a:rPr sz="900">
+                <a:solidFill>
+                  <a:schemeClr val="tx1">
+                    <a:lumMod val="50000"/>
+                    <a:lumOff val="50000"/>
+                  </a:schemeClr>
+                </a:solidFill>
+              </a:rPr>
               <a:t>devient</a:t>
             </a:r>
             <a:r>
@@ -28128,7 +28700,7 @@
                   </a:schemeClr>
                 </a:solidFill>
               </a:rPr>
-              <a:t>dépendant, ce dernier devant </a:t>
+              <a:t>une</a:t>
             </a:r>
             <a:r>
               <a:rPr sz="900">
@@ -28139,7 +28711,7 @@
                   </a:schemeClr>
                 </a:solidFill>
               </a:rPr>
-              <a:t>le </a:t>
+              <a:t> goule sauvage </a:t>
             </a:r>
             <a:r>
               <a:rPr sz="900">
@@ -28150,7 +28722,7 @@
                   </a:schemeClr>
                 </a:solidFill>
               </a:rPr>
-              <a:t>nourrir</a:t>
+              <a:t>cherchant</a:t>
             </a:r>
             <a:r>
               <a:rPr sz="900">
@@ -28161,7 +28733,7 @@
                   </a:schemeClr>
                 </a:solidFill>
               </a:rPr>
-              <a:t> avec du sang de </a:t>
+              <a:t> à </a:t>
             </a:r>
             <a:r>
               <a:rPr sz="900">
@@ -28172,7 +28744,7 @@
                   </a:schemeClr>
                 </a:solidFill>
               </a:rPr>
-              <a:t>mortel ou le sien propre</a:t>
+              <a:t>boire</a:t>
             </a:r>
             <a:r>
               <a:rPr sz="900">
@@ -28183,7 +28755,7 @@
                   </a:schemeClr>
                 </a:solidFill>
               </a:rPr>
-              <a:t>. </a:t>
+              <a:t> le sang des </a:t>
             </a:r>
             <a:r>
               <a:rPr sz="900">
@@ -28194,7 +28766,7 @@
                   </a:schemeClr>
                 </a:solidFill>
               </a:rPr>
-              <a:t>Abandonné</a:t>
+              <a:t>mortels</a:t>
             </a:r>
             <a:r>
               <a:rPr sz="900">
@@ -28205,7 +28777,7 @@
                   </a:schemeClr>
                 </a:solidFill>
               </a:rPr>
-              <a:t> par son maître, il </a:t>
+              <a:t> pour continuer d’</a:t>
             </a:r>
             <a:r>
               <a:rPr sz="900">
@@ -28216,7 +28788,7 @@
                   </a:schemeClr>
                 </a:solidFill>
               </a:rPr>
-              <a:t>devient</a:t>
+              <a:t>exister</a:t>
             </a:r>
             <a:r>
               <a:rPr sz="900">
@@ -28227,7 +28799,18 @@
                   </a:schemeClr>
                 </a:solidFill>
               </a:rPr>
-              <a:t> </a:t>
+              <a:t>. Contrairement à un vampire, une goule n’a aucun pouvoir personnel et son baiser n’engendre ni l’</a:t>
+            </a:r>
+            <a:r>
+              <a:rPr sz="900" b="1">
+                <a:solidFill>
+                  <a:schemeClr val="tx1">
+                    <a:lumMod val="50000"/>
+                    <a:lumOff val="50000"/>
+                  </a:schemeClr>
+                </a:solidFill>
+              </a:rPr>
+              <a:t>extase </a:t>
             </a:r>
             <a:r>
               <a:rPr sz="900">
@@ -28238,7 +28821,18 @@
                   </a:schemeClr>
                 </a:solidFill>
               </a:rPr>
-              <a:t>une</a:t>
+              <a:t>ni l’</a:t>
+            </a:r>
+            <a:r>
+              <a:rPr sz="900" b="1">
+                <a:solidFill>
+                  <a:schemeClr val="tx1">
+                    <a:lumMod val="50000"/>
+                    <a:lumOff val="50000"/>
+                  </a:schemeClr>
+                </a:solidFill>
+              </a:rPr>
+              <a:t>oubli</a:t>
             </a:r>
             <a:r>
               <a:rPr sz="900">
@@ -28249,139 +28843,7 @@
                   </a:schemeClr>
                 </a:solidFill>
               </a:rPr>
-              <a:t> goule sauvage </a:t>
-            </a:r>
-            <a:r>
-              <a:rPr sz="900">
-                <a:solidFill>
-                  <a:schemeClr val="tx1">
-                    <a:lumMod val="50000"/>
-                    <a:lumOff val="50000"/>
-                  </a:schemeClr>
-                </a:solidFill>
-              </a:rPr>
-              <a:t>cherchant</a:t>
-            </a:r>
-            <a:r>
-              <a:rPr sz="900">
-                <a:solidFill>
-                  <a:schemeClr val="tx1">
-                    <a:lumMod val="50000"/>
-                    <a:lumOff val="50000"/>
-                  </a:schemeClr>
-                </a:solidFill>
-              </a:rPr>
-              <a:t> à </a:t>
-            </a:r>
-            <a:r>
-              <a:rPr sz="900">
-                <a:solidFill>
-                  <a:schemeClr val="tx1">
-                    <a:lumMod val="50000"/>
-                    <a:lumOff val="50000"/>
-                  </a:schemeClr>
-                </a:solidFill>
-              </a:rPr>
-              <a:t>boire</a:t>
-            </a:r>
-            <a:r>
-              <a:rPr sz="900">
-                <a:solidFill>
-                  <a:schemeClr val="tx1">
-                    <a:lumMod val="50000"/>
-                    <a:lumOff val="50000"/>
-                  </a:schemeClr>
-                </a:solidFill>
-              </a:rPr>
-              <a:t> le sang des </a:t>
-            </a:r>
-            <a:r>
-              <a:rPr sz="900">
-                <a:solidFill>
-                  <a:schemeClr val="tx1">
-                    <a:lumMod val="50000"/>
-                    <a:lumOff val="50000"/>
-                  </a:schemeClr>
-                </a:solidFill>
-              </a:rPr>
-              <a:t>mortels</a:t>
-            </a:r>
-            <a:r>
-              <a:rPr sz="900">
-                <a:solidFill>
-                  <a:schemeClr val="tx1">
-                    <a:lumMod val="50000"/>
-                    <a:lumOff val="50000"/>
-                  </a:schemeClr>
-                </a:solidFill>
-              </a:rPr>
-              <a:t> pour continuer à </a:t>
-            </a:r>
-            <a:r>
-              <a:rPr sz="900">
-                <a:solidFill>
-                  <a:schemeClr val="tx1">
-                    <a:lumMod val="50000"/>
-                    <a:lumOff val="50000"/>
-                  </a:schemeClr>
-                </a:solidFill>
-              </a:rPr>
-              <a:t>exister</a:t>
-            </a:r>
-            <a:r>
-              <a:rPr sz="900">
-                <a:solidFill>
-                  <a:schemeClr val="tx1">
-                    <a:lumMod val="50000"/>
-                    <a:lumOff val="50000"/>
-                  </a:schemeClr>
-                </a:solidFill>
-              </a:rPr>
-              <a:t>. Contrairement à un vampire, une goule n’a aucun pouvoir personnel et son baiser n’engendre ni l’</a:t>
-            </a:r>
-            <a:r>
-              <a:rPr sz="900" b="1">
-                <a:solidFill>
-                  <a:schemeClr val="tx1">
-                    <a:lumMod val="50000"/>
-                    <a:lumOff val="50000"/>
-                  </a:schemeClr>
-                </a:solidFill>
-              </a:rPr>
-              <a:t>extase </a:t>
-            </a:r>
-            <a:r>
-              <a:rPr sz="900">
-                <a:solidFill>
-                  <a:schemeClr val="tx1">
-                    <a:lumMod val="50000"/>
-                    <a:lumOff val="50000"/>
-                  </a:schemeClr>
-                </a:solidFill>
-              </a:rPr>
-              <a:t>ni l’</a:t>
-            </a:r>
-            <a:r>
-              <a:rPr sz="900" b="1">
-                <a:solidFill>
-                  <a:schemeClr val="tx1">
-                    <a:lumMod val="50000"/>
-                    <a:lumOff val="50000"/>
-                  </a:schemeClr>
-                </a:solidFill>
-              </a:rPr>
-              <a:t>oubli</a:t>
-            </a:r>
-            <a:r>
-              <a:rPr sz="900">
-                <a:solidFill>
-                  <a:schemeClr val="tx1">
-                    <a:lumMod val="50000"/>
-                    <a:lumOff val="50000"/>
-                  </a:schemeClr>
-                </a:solidFill>
-              </a:rPr>
-              <a:t>.</a:t>
+              <a:t>. Vous trouverez plus de détails dans le manuel de jeu.</a:t>
             </a:r>
             <a:endParaRPr sz="1600"/>
           </a:p>
@@ -28449,7 +28911,7 @@
       </p:sp>
       <p:sp>
         <p:nvSpPr>
-          <p:cNvPr id="1599926025" name="ZoneTexte 790352176"/>
+          <p:cNvPr id="612114348" name="ZoneTexte 790352176"/>
           <p:cNvSpPr txBox="1"/>
           <p:nvPr/>
         </p:nvSpPr>
@@ -28491,7 +28953,7 @@
       </p:sp>
       <p:sp>
         <p:nvSpPr>
-          <p:cNvPr id="364852397" name="ZoneTexte 2025740189"/>
+          <p:cNvPr id="882678340" name="ZoneTexte 2025740189"/>
           <p:cNvSpPr txBox="1"/>
           <p:nvPr/>
         </p:nvSpPr>
@@ -28548,7 +29010,7 @@
       </p:sp>
       <p:sp>
         <p:nvSpPr>
-          <p:cNvPr id="788226561" name=""/>
+          <p:cNvPr id="824273109" name=""/>
           <p:cNvSpPr/>
           <p:nvPr/>
         </p:nvSpPr>
@@ -28588,7 +29050,7 @@
       </p:sp>
       <p:sp>
         <p:nvSpPr>
-          <p:cNvPr id="848160886" name="Rectangle : avec coins arrondis en haut 1151560973"/>
+          <p:cNvPr id="582113805" name="Rectangle : avec coins arrondis en haut 1151560973"/>
           <p:cNvSpPr/>
           <p:nvPr/>
         </p:nvSpPr>
@@ -28636,7 +29098,7 @@
       </p:sp>
       <p:sp>
         <p:nvSpPr>
-          <p:cNvPr id="1170325459" name=""/>
+          <p:cNvPr id="1217321013" name=""/>
           <p:cNvSpPr/>
           <p:nvPr/>
         </p:nvSpPr>
@@ -28676,7 +29138,7 @@
       </p:sp>
       <p:sp>
         <p:nvSpPr>
-          <p:cNvPr id="1872794496" name="Rectangle : avec coins arrondis en haut 1151560973"/>
+          <p:cNvPr id="1593386879" name="Rectangle : avec coins arrondis en haut 1151560973"/>
           <p:cNvSpPr/>
           <p:nvPr/>
         </p:nvSpPr>
@@ -28724,7 +29186,7 @@
       </p:sp>
       <p:sp>
         <p:nvSpPr>
-          <p:cNvPr id="1244015394" name=""/>
+          <p:cNvPr id="737342628" name=""/>
           <p:cNvSpPr/>
           <p:nvPr/>
         </p:nvSpPr>
@@ -28764,7 +29226,7 @@
       </p:sp>
       <p:sp>
         <p:nvSpPr>
-          <p:cNvPr id="861867979" name="Rectangle : avec coins arrondis en haut 1151560973"/>
+          <p:cNvPr id="1839835660" name="Rectangle : avec coins arrondis en haut 1151560973"/>
           <p:cNvSpPr/>
           <p:nvPr/>
         </p:nvSpPr>
@@ -28812,7 +29274,7 @@
       </p:sp>
       <p:sp>
         <p:nvSpPr>
-          <p:cNvPr id="1989807308" name=""/>
+          <p:cNvPr id="1124911377" name=""/>
           <p:cNvSpPr txBox="1"/>
           <p:nvPr/>
         </p:nvSpPr>
@@ -28940,7 +29402,7 @@
       </p:sp>
       <p:sp>
         <p:nvSpPr>
-          <p:cNvPr id="103262348" name=""/>
+          <p:cNvPr id="398705570" name=""/>
           <p:cNvSpPr txBox="1"/>
           <p:nvPr/>
         </p:nvSpPr>
@@ -29063,7 +29525,7 @@
       </p:sp>
       <p:sp>
         <p:nvSpPr>
-          <p:cNvPr id="1753368477" name=""/>
+          <p:cNvPr id="1634646182" name=""/>
           <p:cNvSpPr/>
           <p:nvPr/>
         </p:nvSpPr>
@@ -29134,7 +29596,7 @@
       </p:sp>
       <p:sp>
         <p:nvSpPr>
-          <p:cNvPr id="39666694" name="Flèche : pentagone 1325137089"/>
+          <p:cNvPr id="815866738" name="Flèche : pentagone 1325137089"/>
           <p:cNvSpPr/>
           <p:nvPr/>
         </p:nvSpPr>
@@ -29179,7 +29641,7 @@
       </p:sp>
       <p:sp>
         <p:nvSpPr>
-          <p:cNvPr id="780059438" name="Flèche : pentagone 295922856"/>
+          <p:cNvPr id="1604799581" name="Flèche : pentagone 295922856"/>
           <p:cNvSpPr/>
           <p:nvPr/>
         </p:nvSpPr>
@@ -29224,7 +29686,7 @@
       </p:sp>
       <p:sp>
         <p:nvSpPr>
-          <p:cNvPr id="2028842745" name="Flèche : pentagone 1961547672"/>
+          <p:cNvPr id="1833788049" name="Flèche : pentagone 1961547672"/>
           <p:cNvSpPr/>
           <p:nvPr/>
         </p:nvSpPr>
@@ -29302,7 +29764,7 @@
       </p:grpSpPr>
       <p:cxnSp>
         <p:nvCxnSpPr>
-          <p:cNvPr id="43883093" name="Connecteur droit 266926011"/>
+          <p:cNvPr id="1121445696" name="Connecteur droit 266926011"/>
           <p:cNvCxnSpPr/>
           <p:nvPr/>
         </p:nvCxnSpPr>
@@ -29345,7 +29807,7 @@
       </p:cxnSp>
       <p:sp>
         <p:nvSpPr>
-          <p:cNvPr id="1144551359" name="ZoneTexte 1043763612"/>
+          <p:cNvPr id="2127747989" name="ZoneTexte 1043763612"/>
           <p:cNvSpPr txBox="1"/>
           <p:nvPr/>
         </p:nvSpPr>
@@ -29385,7 +29847,7 @@
       </p:sp>
       <p:cxnSp>
         <p:nvCxnSpPr>
-          <p:cNvPr id="1327192455" name="Connecteur droit 1586327141"/>
+          <p:cNvPr id="1509716605" name="Connecteur droit 1586327141"/>
           <p:cNvCxnSpPr/>
           <p:nvPr/>
         </p:nvCxnSpPr>
@@ -29428,7 +29890,7 @@
       </p:cxnSp>
       <p:sp>
         <p:nvSpPr>
-          <p:cNvPr id="2075079300" name="ZoneTexte 1691387439"/>
+          <p:cNvPr id="920824085" name="ZoneTexte 1691387439"/>
           <p:cNvSpPr txBox="1"/>
           <p:nvPr/>
         </p:nvSpPr>
@@ -29468,7 +29930,7 @@
       </p:sp>
       <p:cxnSp>
         <p:nvCxnSpPr>
-          <p:cNvPr id="897739789" name="Connecteur droit 1743707585"/>
+          <p:cNvPr id="1832300827" name="Connecteur droit 1743707585"/>
           <p:cNvCxnSpPr/>
           <p:nvPr/>
         </p:nvCxnSpPr>
@@ -29511,7 +29973,7 @@
       </p:cxnSp>
       <p:sp>
         <p:nvSpPr>
-          <p:cNvPr id="1371989959" name="ZoneTexte 1503300725"/>
+          <p:cNvPr id="655736038" name="ZoneTexte 1503300725"/>
           <p:cNvSpPr txBox="1"/>
           <p:nvPr/>
         </p:nvSpPr>
@@ -29593,7 +30055,7 @@
       </p:sp>
       <p:sp>
         <p:nvSpPr>
-          <p:cNvPr id="1961341658" name="Rectangle : avec coins arrondis en haut 1151560973"/>
+          <p:cNvPr id="865874376" name="Rectangle : avec coins arrondis en haut 1151560973"/>
           <p:cNvSpPr/>
           <p:nvPr/>
         </p:nvSpPr>
@@ -29639,7 +30101,7 @@
       </p:sp>
       <p:sp>
         <p:nvSpPr>
-          <p:cNvPr id="2030251349" name="Flèche : pentagone 1610574377"/>
+          <p:cNvPr id="1096912003" name="Flèche : pentagone 1610574377"/>
           <p:cNvSpPr/>
           <p:nvPr/>
         </p:nvSpPr>
@@ -29684,7 +30146,7 @@
       </p:sp>
       <p:sp>
         <p:nvSpPr>
-          <p:cNvPr id="1673931189" name="Flèche : pentagone 463861063"/>
+          <p:cNvPr id="472406102" name="Flèche : pentagone 463861063"/>
           <p:cNvSpPr/>
           <p:nvPr/>
         </p:nvSpPr>
@@ -29729,7 +30191,7 @@
       </p:sp>
       <p:sp>
         <p:nvSpPr>
-          <p:cNvPr id="1043108314" name="Flèche : pentagone 272004907"/>
+          <p:cNvPr id="854035438" name="Flèche : pentagone 272004907"/>
           <p:cNvSpPr/>
           <p:nvPr/>
         </p:nvSpPr>
@@ -29774,7 +30236,7 @@
       </p:sp>
       <p:sp>
         <p:nvSpPr>
-          <p:cNvPr id="1849866209" name="Flèche : pentagone 28174069"/>
+          <p:cNvPr id="541023008" name="Flèche : pentagone 28174069"/>
           <p:cNvSpPr/>
           <p:nvPr/>
         </p:nvSpPr>
@@ -29819,7 +30281,7 @@
       </p:sp>
       <p:sp>
         <p:nvSpPr>
-          <p:cNvPr id="844871416" name="Flèche : pentagone 978127220"/>
+          <p:cNvPr id="634634263" name="Flèche : pentagone 978127220"/>
           <p:cNvSpPr/>
           <p:nvPr/>
         </p:nvSpPr>
@@ -29864,7 +30326,7 @@
       </p:sp>
       <p:sp>
         <p:nvSpPr>
-          <p:cNvPr id="411606525" name="ZoneTexte 1693594013"/>
+          <p:cNvPr id="1061747482" name="ZoneTexte 1693594013"/>
           <p:cNvSpPr txBox="1"/>
           <p:nvPr/>
         </p:nvSpPr>
@@ -30215,7 +30677,7 @@
       </p:sp>
       <p:sp>
         <p:nvSpPr>
-          <p:cNvPr id="315698834" name="ZoneTexte 1975797288"/>
+          <p:cNvPr id="72887749" name="ZoneTexte 1975797288"/>
           <p:cNvSpPr txBox="1"/>
           <p:nvPr/>
         </p:nvSpPr>
@@ -30255,7 +30717,7 @@
       </p:sp>
       <p:sp>
         <p:nvSpPr>
-          <p:cNvPr id="1494340436" name="ZoneTexte 2064865984"/>
+          <p:cNvPr id="954971418" name="ZoneTexte 2064865984"/>
           <p:cNvSpPr txBox="1"/>
           <p:nvPr/>
         </p:nvSpPr>
@@ -30477,7 +30939,7 @@
       </p:sp>
       <p:sp>
         <p:nvSpPr>
-          <p:cNvPr id="601657366" name="ZoneTexte 1387173154"/>
+          <p:cNvPr id="1380473758" name="ZoneTexte 1387173154"/>
           <p:cNvSpPr txBox="1"/>
           <p:nvPr/>
         </p:nvSpPr>
@@ -30729,7 +31191,7 @@
       </p:sp>
       <p:sp>
         <p:nvSpPr>
-          <p:cNvPr id="189127002" name="ZoneTexte 523755832"/>
+          <p:cNvPr id="624966799" name="ZoneTexte 523755832"/>
           <p:cNvSpPr txBox="1"/>
           <p:nvPr/>
         </p:nvSpPr>
@@ -30989,7 +31451,7 @@
       </p:sp>
       <p:cxnSp>
         <p:nvCxnSpPr>
-          <p:cNvPr id="962021659" name="Connecteur droit 2085669542"/>
+          <p:cNvPr id="754440574" name="Connecteur droit 2085669542"/>
           <p:cNvCxnSpPr/>
           <p:nvPr/>
         </p:nvCxnSpPr>
@@ -31032,7 +31494,7 @@
       </p:cxnSp>
       <p:sp>
         <p:nvSpPr>
-          <p:cNvPr id="1247649417" name="ZoneTexte 34398067"/>
+          <p:cNvPr id="1170164881" name="ZoneTexte 34398067"/>
           <p:cNvSpPr txBox="1"/>
           <p:nvPr/>
         </p:nvSpPr>
@@ -31075,7 +31537,7 @@
       </p:sp>
       <p:sp>
         <p:nvSpPr>
-          <p:cNvPr id="1747130482" name="ZoneTexte 273581705"/>
+          <p:cNvPr id="716214869" name="ZoneTexte 273581705"/>
           <p:cNvSpPr txBox="1"/>
           <p:nvPr/>
         </p:nvSpPr>
@@ -31373,7 +31835,7 @@
       </p:sp>
       <p:sp>
         <p:nvSpPr>
-          <p:cNvPr id="13060313" name="ZoneTexte 1727393832"/>
+          <p:cNvPr id="443059261" name="ZoneTexte 1727393832"/>
           <p:cNvSpPr txBox="1"/>
           <p:nvPr/>
         </p:nvSpPr>
@@ -31415,7 +31877,7 @@
       </p:sp>
       <p:sp>
         <p:nvSpPr>
-          <p:cNvPr id="444619960" name="ZoneTexte 504516740"/>
+          <p:cNvPr id="1943229574" name="ZoneTexte 504516740"/>
           <p:cNvSpPr txBox="1"/>
           <p:nvPr/>
         </p:nvSpPr>
@@ -31457,7 +31919,7 @@
       </p:sp>
       <p:sp>
         <p:nvSpPr>
-          <p:cNvPr id="1384863487" name="ZoneTexte 1"/>
+          <p:cNvPr id="348950914" name="ZoneTexte 1"/>
           <p:cNvSpPr txBox="1"/>
           <p:nvPr/>
         </p:nvSpPr>
@@ -31568,7 +32030,7 @@
       </p:sp>
       <p:sp>
         <p:nvSpPr>
-          <p:cNvPr id="851757951" name="ZoneTexte 2"/>
+          <p:cNvPr id="329302094" name="ZoneTexte 2"/>
           <p:cNvSpPr txBox="1"/>
           <p:nvPr/>
         </p:nvSpPr>
@@ -31652,7 +32114,7 @@
       </p:sp>
       <p:sp>
         <p:nvSpPr>
-          <p:cNvPr id="2135514737" name=""/>
+          <p:cNvPr id="2001158476" name=""/>
           <p:cNvSpPr/>
           <p:nvPr/>
         </p:nvSpPr>
@@ -31692,7 +32154,7 @@
       </p:sp>
       <p:sp>
         <p:nvSpPr>
-          <p:cNvPr id="1204022595" name="Rectangle : avec coins arrondis en haut 1151560973"/>
+          <p:cNvPr id="484174042" name="Rectangle : avec coins arrondis en haut 1151560973"/>
           <p:cNvSpPr/>
           <p:nvPr/>
         </p:nvSpPr>
@@ -31740,7 +32202,7 @@
       </p:sp>
       <p:sp>
         <p:nvSpPr>
-          <p:cNvPr id="1479682016" name=""/>
+          <p:cNvPr id="2023007188" name=""/>
           <p:cNvSpPr/>
           <p:nvPr/>
         </p:nvSpPr>
@@ -31780,7 +32242,7 @@
       </p:sp>
       <p:sp>
         <p:nvSpPr>
-          <p:cNvPr id="53338505" name="Rectangle : avec coins arrondis en haut 1151560973"/>
+          <p:cNvPr id="1754759045" name="Rectangle : avec coins arrondis en haut 1151560973"/>
           <p:cNvSpPr/>
           <p:nvPr/>
         </p:nvSpPr>
@@ -31828,7 +32290,7 @@
       </p:sp>
       <p:sp>
         <p:nvSpPr>
-          <p:cNvPr id="2065709347" name=""/>
+          <p:cNvPr id="628781658" name=""/>
           <p:cNvSpPr/>
           <p:nvPr/>
         </p:nvSpPr>
@@ -31868,7 +32330,7 @@
       </p:sp>
       <p:sp>
         <p:nvSpPr>
-          <p:cNvPr id="463246401" name="Rectangle : avec coins arrondis en haut 1151560973"/>
+          <p:cNvPr id="836626723" name="Rectangle : avec coins arrondis en haut 1151560973"/>
           <p:cNvSpPr/>
           <p:nvPr/>
         </p:nvSpPr>
@@ -31916,7 +32378,7 @@
       </p:sp>
       <p:sp>
         <p:nvSpPr>
-          <p:cNvPr id="2015416383" name=""/>
+          <p:cNvPr id="40391679" name=""/>
           <p:cNvSpPr txBox="1"/>
           <p:nvPr/>
         </p:nvSpPr>
@@ -31967,7 +32429,7 @@
       </p:sp>
       <p:sp>
         <p:nvSpPr>
-          <p:cNvPr id="396832356" name=""/>
+          <p:cNvPr id="419708160" name=""/>
           <p:cNvSpPr txBox="1"/>
           <p:nvPr/>
         </p:nvSpPr>
@@ -32065,7 +32527,7 @@
       </p:sp>
       <p:sp>
         <p:nvSpPr>
-          <p:cNvPr id="943706169" name=""/>
+          <p:cNvPr id="1191609752" name=""/>
           <p:cNvSpPr/>
           <p:nvPr/>
         </p:nvSpPr>
@@ -32136,7 +32598,7 @@
       </p:sp>
       <p:sp>
         <p:nvSpPr>
-          <p:cNvPr id="479120478" name="Flèche : pentagone 463861063"/>
+          <p:cNvPr id="1258479643" name="Flèche : pentagone 463861063"/>
           <p:cNvSpPr/>
           <p:nvPr/>
         </p:nvSpPr>
@@ -32181,7 +32643,7 @@
       </p:sp>
       <p:sp>
         <p:nvSpPr>
-          <p:cNvPr id="1568588353" name="Flèche : pentagone 272004907"/>
+          <p:cNvPr id="1526469330" name="Flèche : pentagone 272004907"/>
           <p:cNvSpPr/>
           <p:nvPr/>
         </p:nvSpPr>
@@ -32226,7 +32688,7 @@
       </p:sp>
       <p:sp>
         <p:nvSpPr>
-          <p:cNvPr id="1934859494" name="Flèche : pentagone 28174069"/>
+          <p:cNvPr id="1304395920" name="Flèche : pentagone 28174069"/>
           <p:cNvSpPr/>
           <p:nvPr/>
         </p:nvSpPr>

--- a/Fiches de personnage.pptx
+++ b/Fiches de personnage.pptx
@@ -139,7 +139,7 @@
       </p:grpSpPr>
       <p:sp>
         <p:nvSpPr>
-          <p:cNvPr id="1882178426" name="Espace réservé d'en-tête 1"/>
+          <p:cNvPr id="2040666693" name="Espace réservé d'en-tête 1"/>
           <p:cNvSpPr>
             <a:spLocks noGrp="1"/>
           </p:cNvSpPr>
@@ -173,7 +173,7 @@
       </p:sp>
       <p:sp>
         <p:nvSpPr>
-          <p:cNvPr id="1178178499" name="Espace réservé pour la date 2"/>
+          <p:cNvPr id="1572029216" name="Espace réservé pour la date 2"/>
           <p:cNvSpPr>
             <a:spLocks noGrp="1"/>
           </p:cNvSpPr>
@@ -211,7 +211,7 @@
       </p:sp>
       <p:sp>
         <p:nvSpPr>
-          <p:cNvPr id="2044345824" name="Espace réservé pour l'image de la diapositive 3"/>
+          <p:cNvPr id="462002510" name="Espace réservé pour l'image de la diapositive 3"/>
           <p:cNvSpPr>
             <a:spLocks noChangeAspect="1" noGrp="1" noRot="1"/>
           </p:cNvSpPr>
@@ -247,7 +247,7 @@
       </p:sp>
       <p:sp>
         <p:nvSpPr>
-          <p:cNvPr id="1156600170" name="Remarques Espace réservé 4"/>
+          <p:cNvPr id="890498024" name="Remarques Espace réservé 4"/>
           <p:cNvSpPr>
             <a:spLocks noGrp="1"/>
           </p:cNvSpPr>
@@ -321,7 +321,7 @@
       </p:sp>
       <p:sp>
         <p:nvSpPr>
-          <p:cNvPr id="2045142639" name="Espace réservé du pied de page 5"/>
+          <p:cNvPr id="1196606101" name="Espace réservé du pied de page 5"/>
           <p:cNvSpPr>
             <a:spLocks noGrp="1"/>
           </p:cNvSpPr>
@@ -355,7 +355,7 @@
       </p:sp>
       <p:sp>
         <p:nvSpPr>
-          <p:cNvPr id="910667669" name="Espace réservé du numéro de diapositive 6"/>
+          <p:cNvPr id="1602332169" name="Espace réservé du numéro de diapositive 6"/>
           <p:cNvSpPr>
             <a:spLocks noGrp="1"/>
           </p:cNvSpPr>
@@ -508,7 +508,7 @@
       </p:grpSpPr>
       <p:sp>
         <p:nvSpPr>
-          <p:cNvPr id="1678985713" name="Espace réservé pour l'image de la diapositive 1"/>
+          <p:cNvPr id="747912810" name="Espace réservé pour l'image de la diapositive 1"/>
           <p:cNvSpPr>
             <a:spLocks noChangeAspect="1" noGrp="1" noRot="1"/>
           </p:cNvSpPr>
@@ -525,7 +525,7 @@
       </p:sp>
       <p:sp>
         <p:nvSpPr>
-          <p:cNvPr id="785086760" name="Remarques Espace réservé 2"/>
+          <p:cNvPr id="1125423406" name="Remarques Espace réservé 2"/>
           <p:cNvSpPr>
             <a:spLocks noGrp="1"/>
           </p:cNvSpPr>
@@ -550,7 +550,7 @@
       </p:sp>
       <p:sp>
         <p:nvSpPr>
-          <p:cNvPr id="287783116" name="Espace réservé pour le numéro de diapositive 3"/>
+          <p:cNvPr id="743289646" name="Espace réservé pour le numéro de diapositive 3"/>
           <p:cNvSpPr>
             <a:spLocks noGrp="1"/>
           </p:cNvSpPr>
@@ -601,7 +601,7 @@
       </p:grpSpPr>
       <p:sp>
         <p:nvSpPr>
-          <p:cNvPr id="760282113" name="Espace réservé pour l'image de la diapositive 1"/>
+          <p:cNvPr id="1390273845" name="Espace réservé pour l'image de la diapositive 1"/>
           <p:cNvSpPr>
             <a:spLocks noChangeAspect="1" noGrp="1" noRot="1"/>
           </p:cNvSpPr>
@@ -618,7 +618,7 @@
       </p:sp>
       <p:sp>
         <p:nvSpPr>
-          <p:cNvPr id="1373085923" name="Remarques Espace réservé 2"/>
+          <p:cNvPr id="1907755220" name="Remarques Espace réservé 2"/>
           <p:cNvSpPr>
             <a:spLocks noGrp="1"/>
           </p:cNvSpPr>
@@ -643,7 +643,7 @@
       </p:sp>
       <p:sp>
         <p:nvSpPr>
-          <p:cNvPr id="487089650" name="Espace réservé pour le numéro de diapositive 3"/>
+          <p:cNvPr id="391906385" name="Espace réservé pour le numéro de diapositive 3"/>
           <p:cNvSpPr>
             <a:spLocks noGrp="1"/>
           </p:cNvSpPr>
@@ -694,7 +694,7 @@
       </p:grpSpPr>
       <p:sp>
         <p:nvSpPr>
-          <p:cNvPr id="474132245" name="Espace réservé pour l'image de la diapositive 1"/>
+          <p:cNvPr id="1130117418" name="Espace réservé pour l'image de la diapositive 1"/>
           <p:cNvSpPr>
             <a:spLocks noChangeAspect="1" noGrp="1" noRot="1"/>
           </p:cNvSpPr>
@@ -711,7 +711,7 @@
       </p:sp>
       <p:sp>
         <p:nvSpPr>
-          <p:cNvPr id="1722381857" name="Remarques Espace réservé 2"/>
+          <p:cNvPr id="1547802792" name="Remarques Espace réservé 2"/>
           <p:cNvSpPr>
             <a:spLocks noGrp="1"/>
           </p:cNvSpPr>
@@ -736,7 +736,7 @@
       </p:sp>
       <p:sp>
         <p:nvSpPr>
-          <p:cNvPr id="2105043950" name="Espace réservé pour le numéro de diapositive 3"/>
+          <p:cNvPr id="368834759" name="Espace réservé pour le numéro de diapositive 3"/>
           <p:cNvSpPr>
             <a:spLocks noGrp="1"/>
           </p:cNvSpPr>
@@ -787,7 +787,7 @@
       </p:grpSpPr>
       <p:sp>
         <p:nvSpPr>
-          <p:cNvPr id="1394914919" name="Espace réservé pour l'image de la diapositive 1"/>
+          <p:cNvPr id="681177182" name="Espace réservé pour l'image de la diapositive 1"/>
           <p:cNvSpPr>
             <a:spLocks noChangeAspect="1" noGrp="1" noRot="1"/>
           </p:cNvSpPr>
@@ -804,7 +804,7 @@
       </p:sp>
       <p:sp>
         <p:nvSpPr>
-          <p:cNvPr id="1831331311" name="Remarques Espace réservé 2"/>
+          <p:cNvPr id="638498131" name="Remarques Espace réservé 2"/>
           <p:cNvSpPr>
             <a:spLocks noGrp="1"/>
           </p:cNvSpPr>
@@ -829,7 +829,7 @@
       </p:sp>
       <p:sp>
         <p:nvSpPr>
-          <p:cNvPr id="1829595989" name="Espace réservé pour le numéro de diapositive 3"/>
+          <p:cNvPr id="1036385960" name="Espace réservé pour le numéro de diapositive 3"/>
           <p:cNvSpPr>
             <a:spLocks noGrp="1"/>
           </p:cNvSpPr>
@@ -880,7 +880,7 @@
       </p:grpSpPr>
       <p:sp>
         <p:nvSpPr>
-          <p:cNvPr id="738808738" name="Espace réservé pour l'image de la diapositive 1"/>
+          <p:cNvPr id="1377271674" name="Espace réservé pour l'image de la diapositive 1"/>
           <p:cNvSpPr>
             <a:spLocks noChangeAspect="1" noGrp="1" noRot="1"/>
           </p:cNvSpPr>
@@ -897,7 +897,7 @@
       </p:sp>
       <p:sp>
         <p:nvSpPr>
-          <p:cNvPr id="735544349" name="Remarques Espace réservé 2"/>
+          <p:cNvPr id="2043678491" name="Remarques Espace réservé 2"/>
           <p:cNvSpPr>
             <a:spLocks noGrp="1"/>
           </p:cNvSpPr>
@@ -922,7 +922,7 @@
       </p:sp>
       <p:sp>
         <p:nvSpPr>
-          <p:cNvPr id="18655242" name="Espace réservé pour le numéro de diapositive 3"/>
+          <p:cNvPr id="1515951974" name="Espace réservé pour le numéro de diapositive 3"/>
           <p:cNvSpPr>
             <a:spLocks noGrp="1"/>
           </p:cNvSpPr>
@@ -973,7 +973,7 @@
       </p:grpSpPr>
       <p:sp>
         <p:nvSpPr>
-          <p:cNvPr id="310474032" name="Espace réservé pour l'image de la diapositive 1"/>
+          <p:cNvPr id="790150836" name="Espace réservé pour l'image de la diapositive 1"/>
           <p:cNvSpPr>
             <a:spLocks noChangeAspect="1" noGrp="1" noRot="1"/>
           </p:cNvSpPr>
@@ -990,7 +990,7 @@
       </p:sp>
       <p:sp>
         <p:nvSpPr>
-          <p:cNvPr id="202671637" name="Remarques Espace réservé 2"/>
+          <p:cNvPr id="354425994" name="Remarques Espace réservé 2"/>
           <p:cNvSpPr>
             <a:spLocks noGrp="1"/>
           </p:cNvSpPr>
@@ -1015,7 +1015,7 @@
       </p:sp>
       <p:sp>
         <p:nvSpPr>
-          <p:cNvPr id="996940566" name="Espace réservé pour le numéro de diapositive 3"/>
+          <p:cNvPr id="511401180" name="Espace réservé pour le numéro de diapositive 3"/>
           <p:cNvSpPr>
             <a:spLocks noGrp="1"/>
           </p:cNvSpPr>
@@ -1066,7 +1066,7 @@
       </p:grpSpPr>
       <p:sp>
         <p:nvSpPr>
-          <p:cNvPr id="558189616" name="Titre 1"/>
+          <p:cNvPr id="314970116" name="Titre 1"/>
           <p:cNvSpPr>
             <a:spLocks noGrp="1"/>
           </p:cNvSpPr>
@@ -1101,7 +1101,7 @@
       </p:sp>
       <p:sp>
         <p:nvSpPr>
-          <p:cNvPr id="414177799" name="Sous-titre 2"/>
+          <p:cNvPr id="144678903" name="Sous-titre 2"/>
           <p:cNvSpPr>
             <a:spLocks noGrp="1"/>
           </p:cNvSpPr>
@@ -1169,7 +1169,7 @@
       </p:sp>
       <p:sp>
         <p:nvSpPr>
-          <p:cNvPr id="251713442" name="Espace réservé de la date 3"/>
+          <p:cNvPr id="1932473164" name="Espace réservé de la date 3"/>
           <p:cNvSpPr>
             <a:spLocks noGrp="1"/>
           </p:cNvSpPr>
@@ -1195,7 +1195,7 @@
       </p:sp>
       <p:sp>
         <p:nvSpPr>
-          <p:cNvPr id="416733969" name="Espace réservé du pied de page 4"/>
+          <p:cNvPr id="1398734857" name="Espace réservé du pied de page 4"/>
           <p:cNvSpPr>
             <a:spLocks noGrp="1"/>
           </p:cNvSpPr>
@@ -1217,7 +1217,7 @@
       </p:sp>
       <p:sp>
         <p:nvSpPr>
-          <p:cNvPr id="985561519" name="Espace réservé du numéro de diapositive 5"/>
+          <p:cNvPr id="1614580790" name="Espace réservé du numéro de diapositive 5"/>
           <p:cNvSpPr>
             <a:spLocks noGrp="1"/>
           </p:cNvSpPr>
@@ -1268,7 +1268,7 @@
       </p:grpSpPr>
       <p:sp>
         <p:nvSpPr>
-          <p:cNvPr id="1687982084" name="Titre 1"/>
+          <p:cNvPr id="198483966" name="Titre 1"/>
           <p:cNvSpPr>
             <a:spLocks noGrp="1"/>
           </p:cNvSpPr>
@@ -1294,7 +1294,7 @@
       </p:sp>
       <p:sp>
         <p:nvSpPr>
-          <p:cNvPr id="106436850" name="Espace réservé du texte vertical 2"/>
+          <p:cNvPr id="1303095560" name="Espace réservé du texte vertical 2"/>
           <p:cNvSpPr>
             <a:spLocks noGrp="1"/>
           </p:cNvSpPr>
@@ -1360,7 +1360,7 @@
       </p:sp>
       <p:sp>
         <p:nvSpPr>
-          <p:cNvPr id="49072126" name="Espace réservé de la date 3"/>
+          <p:cNvPr id="680300301" name="Espace réservé de la date 3"/>
           <p:cNvSpPr>
             <a:spLocks noGrp="1"/>
           </p:cNvSpPr>
@@ -1386,7 +1386,7 @@
       </p:sp>
       <p:sp>
         <p:nvSpPr>
-          <p:cNvPr id="279924206" name="Espace réservé du pied de page 4"/>
+          <p:cNvPr id="477322645" name="Espace réservé du pied de page 4"/>
           <p:cNvSpPr>
             <a:spLocks noGrp="1"/>
           </p:cNvSpPr>
@@ -1408,7 +1408,7 @@
       </p:sp>
       <p:sp>
         <p:nvSpPr>
-          <p:cNvPr id="1850354030" name="Espace réservé du numéro de diapositive 5"/>
+          <p:cNvPr id="569026755" name="Espace réservé du numéro de diapositive 5"/>
           <p:cNvSpPr>
             <a:spLocks noGrp="1"/>
           </p:cNvSpPr>
@@ -1459,7 +1459,7 @@
       </p:grpSpPr>
       <p:sp>
         <p:nvSpPr>
-          <p:cNvPr id="1904798361" name="Titre vertical 1"/>
+          <p:cNvPr id="188799116" name="Titre vertical 1"/>
           <p:cNvSpPr>
             <a:spLocks noGrp="1"/>
           </p:cNvSpPr>
@@ -1490,7 +1490,7 @@
       </p:sp>
       <p:sp>
         <p:nvSpPr>
-          <p:cNvPr id="1313611520" name="Espace réservé du texte vertical 2"/>
+          <p:cNvPr id="1831909756" name="Espace réservé du texte vertical 2"/>
           <p:cNvSpPr>
             <a:spLocks noGrp="1"/>
           </p:cNvSpPr>
@@ -1561,7 +1561,7 @@
       </p:sp>
       <p:sp>
         <p:nvSpPr>
-          <p:cNvPr id="1387792319" name="Espace réservé de la date 3"/>
+          <p:cNvPr id="1087312334" name="Espace réservé de la date 3"/>
           <p:cNvSpPr>
             <a:spLocks noGrp="1"/>
           </p:cNvSpPr>
@@ -1587,7 +1587,7 @@
       </p:sp>
       <p:sp>
         <p:nvSpPr>
-          <p:cNvPr id="593748649" name="Espace réservé du pied de page 4"/>
+          <p:cNvPr id="1571959307" name="Espace réservé du pied de page 4"/>
           <p:cNvSpPr>
             <a:spLocks noGrp="1"/>
           </p:cNvSpPr>
@@ -1609,7 +1609,7 @@
       </p:sp>
       <p:sp>
         <p:nvSpPr>
-          <p:cNvPr id="1982763948" name="Espace réservé du numéro de diapositive 5"/>
+          <p:cNvPr id="573739372" name="Espace réservé du numéro de diapositive 5"/>
           <p:cNvSpPr>
             <a:spLocks noGrp="1"/>
           </p:cNvSpPr>
@@ -1660,7 +1660,7 @@
       </p:grpSpPr>
       <p:sp>
         <p:nvSpPr>
-          <p:cNvPr id="1385489598" name="Titre 1"/>
+          <p:cNvPr id="510780619" name="Titre 1"/>
           <p:cNvSpPr>
             <a:spLocks noGrp="1"/>
           </p:cNvSpPr>
@@ -1686,7 +1686,7 @@
       </p:sp>
       <p:sp>
         <p:nvSpPr>
-          <p:cNvPr id="1649293310" name="Espace réservé du contenu 2"/>
+          <p:cNvPr id="1788805616" name="Espace réservé du contenu 2"/>
           <p:cNvSpPr>
             <a:spLocks noGrp="1"/>
           </p:cNvSpPr>
@@ -1752,7 +1752,7 @@
       </p:sp>
       <p:sp>
         <p:nvSpPr>
-          <p:cNvPr id="907960888" name="Espace réservé de la date 3"/>
+          <p:cNvPr id="900364658" name="Espace réservé de la date 3"/>
           <p:cNvSpPr>
             <a:spLocks noGrp="1"/>
           </p:cNvSpPr>
@@ -1778,7 +1778,7 @@
       </p:sp>
       <p:sp>
         <p:nvSpPr>
-          <p:cNvPr id="843242738" name="Espace réservé du pied de page 4"/>
+          <p:cNvPr id="1654042181" name="Espace réservé du pied de page 4"/>
           <p:cNvSpPr>
             <a:spLocks noGrp="1"/>
           </p:cNvSpPr>
@@ -1800,7 +1800,7 @@
       </p:sp>
       <p:sp>
         <p:nvSpPr>
-          <p:cNvPr id="674920304" name="Espace réservé du numéro de diapositive 5"/>
+          <p:cNvPr id="2057026300" name="Espace réservé du numéro de diapositive 5"/>
           <p:cNvSpPr>
             <a:spLocks noGrp="1"/>
           </p:cNvSpPr>
@@ -1851,7 +1851,7 @@
       </p:grpSpPr>
       <p:sp>
         <p:nvSpPr>
-          <p:cNvPr id="1947220028" name="Titre 1"/>
+          <p:cNvPr id="979374322" name="Titre 1"/>
           <p:cNvSpPr>
             <a:spLocks noGrp="1"/>
           </p:cNvSpPr>
@@ -1886,7 +1886,7 @@
       </p:sp>
       <p:sp>
         <p:nvSpPr>
-          <p:cNvPr id="1471853232" name="Espace réservé du texte 2"/>
+          <p:cNvPr id="1152925210" name="Espace réservé du texte 2"/>
           <p:cNvSpPr>
             <a:spLocks noGrp="1"/>
           </p:cNvSpPr>
@@ -2008,7 +2008,7 @@
       </p:sp>
       <p:sp>
         <p:nvSpPr>
-          <p:cNvPr id="2024152615" name="Espace réservé de la date 3"/>
+          <p:cNvPr id="361113608" name="Espace réservé de la date 3"/>
           <p:cNvSpPr>
             <a:spLocks noGrp="1"/>
           </p:cNvSpPr>
@@ -2034,7 +2034,7 @@
       </p:sp>
       <p:sp>
         <p:nvSpPr>
-          <p:cNvPr id="76345141" name="Espace réservé du pied de page 4"/>
+          <p:cNvPr id="1991613578" name="Espace réservé du pied de page 4"/>
           <p:cNvSpPr>
             <a:spLocks noGrp="1"/>
           </p:cNvSpPr>
@@ -2056,7 +2056,7 @@
       </p:sp>
       <p:sp>
         <p:nvSpPr>
-          <p:cNvPr id="931831762" name="Espace réservé du numéro de diapositive 5"/>
+          <p:cNvPr id="2090687442" name="Espace réservé du numéro de diapositive 5"/>
           <p:cNvSpPr>
             <a:spLocks noGrp="1"/>
           </p:cNvSpPr>
@@ -2107,7 +2107,7 @@
       </p:grpSpPr>
       <p:sp>
         <p:nvSpPr>
-          <p:cNvPr id="1883880562" name="Titre 1"/>
+          <p:cNvPr id="1399988215" name="Titre 1"/>
           <p:cNvSpPr>
             <a:spLocks noGrp="1"/>
           </p:cNvSpPr>
@@ -2133,7 +2133,7 @@
       </p:sp>
       <p:sp>
         <p:nvSpPr>
-          <p:cNvPr id="1745825645" name="Espace réservé du contenu 2"/>
+          <p:cNvPr id="1817419386" name="Espace réservé du contenu 2"/>
           <p:cNvSpPr>
             <a:spLocks noGrp="1"/>
           </p:cNvSpPr>
@@ -2204,7 +2204,7 @@
       </p:sp>
       <p:sp>
         <p:nvSpPr>
-          <p:cNvPr id="2140528698" name="Espace réservé du contenu 3"/>
+          <p:cNvPr id="2003741434" name="Espace réservé du contenu 3"/>
           <p:cNvSpPr>
             <a:spLocks noGrp="1"/>
           </p:cNvSpPr>
@@ -2275,7 +2275,7 @@
       </p:sp>
       <p:sp>
         <p:nvSpPr>
-          <p:cNvPr id="1113313262" name="Espace réservé de la date 4"/>
+          <p:cNvPr id="875739953" name="Espace réservé de la date 4"/>
           <p:cNvSpPr>
             <a:spLocks noGrp="1"/>
           </p:cNvSpPr>
@@ -2301,7 +2301,7 @@
       </p:sp>
       <p:sp>
         <p:nvSpPr>
-          <p:cNvPr id="628715013" name="Espace réservé du pied de page 5"/>
+          <p:cNvPr id="1022071695" name="Espace réservé du pied de page 5"/>
           <p:cNvSpPr>
             <a:spLocks noGrp="1"/>
           </p:cNvSpPr>
@@ -2323,7 +2323,7 @@
       </p:sp>
       <p:sp>
         <p:nvSpPr>
-          <p:cNvPr id="904081603" name="Espace réservé du numéro de diapositive 6"/>
+          <p:cNvPr id="1055233315" name="Espace réservé du numéro de diapositive 6"/>
           <p:cNvSpPr>
             <a:spLocks noGrp="1"/>
           </p:cNvSpPr>
@@ -2374,7 +2374,7 @@
       </p:grpSpPr>
       <p:sp>
         <p:nvSpPr>
-          <p:cNvPr id="501653835" name="Titre 1"/>
+          <p:cNvPr id="110596012" name="Titre 1"/>
           <p:cNvSpPr>
             <a:spLocks noGrp="1"/>
           </p:cNvSpPr>
@@ -2405,7 +2405,7 @@
       </p:sp>
       <p:sp>
         <p:nvSpPr>
-          <p:cNvPr id="738729152" name="Espace réservé du texte 2"/>
+          <p:cNvPr id="1088804505" name="Espace réservé du texte 2"/>
           <p:cNvSpPr>
             <a:spLocks noGrp="1"/>
           </p:cNvSpPr>
@@ -2473,7 +2473,7 @@
       </p:sp>
       <p:sp>
         <p:nvSpPr>
-          <p:cNvPr id="1575257793" name="Espace réservé du contenu 3"/>
+          <p:cNvPr id="1186543842" name="Espace réservé du contenu 3"/>
           <p:cNvSpPr>
             <a:spLocks noGrp="1"/>
           </p:cNvSpPr>
@@ -2544,7 +2544,7 @@
       </p:sp>
       <p:sp>
         <p:nvSpPr>
-          <p:cNvPr id="1760239665" name="Espace réservé du texte 4"/>
+          <p:cNvPr id="1026937471" name="Espace réservé du texte 4"/>
           <p:cNvSpPr>
             <a:spLocks noGrp="1"/>
           </p:cNvSpPr>
@@ -2612,7 +2612,7 @@
       </p:sp>
       <p:sp>
         <p:nvSpPr>
-          <p:cNvPr id="372917692" name="Espace réservé du contenu 5"/>
+          <p:cNvPr id="466270696" name="Espace réservé du contenu 5"/>
           <p:cNvSpPr>
             <a:spLocks noGrp="1"/>
           </p:cNvSpPr>
@@ -2683,7 +2683,7 @@
       </p:sp>
       <p:sp>
         <p:nvSpPr>
-          <p:cNvPr id="1939686315" name="Espace réservé de la date 6"/>
+          <p:cNvPr id="1946345847" name="Espace réservé de la date 6"/>
           <p:cNvSpPr>
             <a:spLocks noGrp="1"/>
           </p:cNvSpPr>
@@ -2709,7 +2709,7 @@
       </p:sp>
       <p:sp>
         <p:nvSpPr>
-          <p:cNvPr id="1752389350" name="Espace réservé du pied de page 7"/>
+          <p:cNvPr id="944280402" name="Espace réservé du pied de page 7"/>
           <p:cNvSpPr>
             <a:spLocks noGrp="1"/>
           </p:cNvSpPr>
@@ -2731,7 +2731,7 @@
       </p:sp>
       <p:sp>
         <p:nvSpPr>
-          <p:cNvPr id="944197296" name="Espace réservé du numéro de diapositive 8"/>
+          <p:cNvPr id="1476641285" name="Espace réservé du numéro de diapositive 8"/>
           <p:cNvSpPr>
             <a:spLocks noGrp="1"/>
           </p:cNvSpPr>
@@ -2782,7 +2782,7 @@
       </p:grpSpPr>
       <p:sp>
         <p:nvSpPr>
-          <p:cNvPr id="1703684044" name="Titre 1"/>
+          <p:cNvPr id="364799974" name="Titre 1"/>
           <p:cNvSpPr>
             <a:spLocks noGrp="1"/>
           </p:cNvSpPr>
@@ -2808,7 +2808,7 @@
       </p:sp>
       <p:sp>
         <p:nvSpPr>
-          <p:cNvPr id="362334234" name="Espace réservé de la date 2"/>
+          <p:cNvPr id="680378980" name="Espace réservé de la date 2"/>
           <p:cNvSpPr>
             <a:spLocks noGrp="1"/>
           </p:cNvSpPr>
@@ -2834,7 +2834,7 @@
       </p:sp>
       <p:sp>
         <p:nvSpPr>
-          <p:cNvPr id="731021578" name="Espace réservé du pied de page 3"/>
+          <p:cNvPr id="863415358" name="Espace réservé du pied de page 3"/>
           <p:cNvSpPr>
             <a:spLocks noGrp="1"/>
           </p:cNvSpPr>
@@ -2856,7 +2856,7 @@
       </p:sp>
       <p:sp>
         <p:nvSpPr>
-          <p:cNvPr id="844324523" name="Espace réservé du numéro de diapositive 4"/>
+          <p:cNvPr id="545835428" name="Espace réservé du numéro de diapositive 4"/>
           <p:cNvSpPr>
             <a:spLocks noGrp="1"/>
           </p:cNvSpPr>
@@ -2907,7 +2907,7 @@
       </p:grpSpPr>
       <p:sp>
         <p:nvSpPr>
-          <p:cNvPr id="929309128" name="Espace réservé de la date 1"/>
+          <p:cNvPr id="248482896" name="Espace réservé de la date 1"/>
           <p:cNvSpPr>
             <a:spLocks noGrp="1"/>
           </p:cNvSpPr>
@@ -2933,7 +2933,7 @@
       </p:sp>
       <p:sp>
         <p:nvSpPr>
-          <p:cNvPr id="1789839483" name="Espace réservé du pied de page 2"/>
+          <p:cNvPr id="1753976020" name="Espace réservé du pied de page 2"/>
           <p:cNvSpPr>
             <a:spLocks noGrp="1"/>
           </p:cNvSpPr>
@@ -2955,7 +2955,7 @@
       </p:sp>
       <p:sp>
         <p:nvSpPr>
-          <p:cNvPr id="1766040998" name="Espace réservé du numéro de diapositive 3"/>
+          <p:cNvPr id="957574731" name="Espace réservé du numéro de diapositive 3"/>
           <p:cNvSpPr>
             <a:spLocks noGrp="1"/>
           </p:cNvSpPr>
@@ -3006,7 +3006,7 @@
       </p:grpSpPr>
       <p:sp>
         <p:nvSpPr>
-          <p:cNvPr id="425663145" name="Titre 1"/>
+          <p:cNvPr id="2017085882" name="Titre 1"/>
           <p:cNvSpPr>
             <a:spLocks noGrp="1"/>
           </p:cNvSpPr>
@@ -3041,7 +3041,7 @@
       </p:sp>
       <p:sp>
         <p:nvSpPr>
-          <p:cNvPr id="1578457474" name="Espace réservé du contenu 2"/>
+          <p:cNvPr id="258380514" name="Espace réservé du contenu 2"/>
           <p:cNvSpPr>
             <a:spLocks noGrp="1"/>
           </p:cNvSpPr>
@@ -3140,7 +3140,7 @@
       </p:sp>
       <p:sp>
         <p:nvSpPr>
-          <p:cNvPr id="858983078" name="Espace réservé du texte 3"/>
+          <p:cNvPr id="2057236931" name="Espace réservé du texte 3"/>
           <p:cNvSpPr>
             <a:spLocks noGrp="1"/>
           </p:cNvSpPr>
@@ -3208,7 +3208,7 @@
       </p:sp>
       <p:sp>
         <p:nvSpPr>
-          <p:cNvPr id="372892862" name="Espace réservé de la date 4"/>
+          <p:cNvPr id="347406851" name="Espace réservé de la date 4"/>
           <p:cNvSpPr>
             <a:spLocks noGrp="1"/>
           </p:cNvSpPr>
@@ -3234,7 +3234,7 @@
       </p:sp>
       <p:sp>
         <p:nvSpPr>
-          <p:cNvPr id="326343801" name="Espace réservé du pied de page 5"/>
+          <p:cNvPr id="217652191" name="Espace réservé du pied de page 5"/>
           <p:cNvSpPr>
             <a:spLocks noGrp="1"/>
           </p:cNvSpPr>
@@ -3256,7 +3256,7 @@
       </p:sp>
       <p:sp>
         <p:nvSpPr>
-          <p:cNvPr id="545950065" name="Espace réservé du numéro de diapositive 6"/>
+          <p:cNvPr id="1700504212" name="Espace réservé du numéro de diapositive 6"/>
           <p:cNvSpPr>
             <a:spLocks noGrp="1"/>
           </p:cNvSpPr>
@@ -3307,7 +3307,7 @@
       </p:grpSpPr>
       <p:sp>
         <p:nvSpPr>
-          <p:cNvPr id="1727352917" name="Titre 1"/>
+          <p:cNvPr id="1506912933" name="Titre 1"/>
           <p:cNvSpPr>
             <a:spLocks noGrp="1"/>
           </p:cNvSpPr>
@@ -3342,7 +3342,7 @@
       </p:sp>
       <p:sp>
         <p:nvSpPr>
-          <p:cNvPr id="1935476158" name="Espace réservé pour une image 2"/>
+          <p:cNvPr id="505272274" name="Espace réservé pour une image 2"/>
           <p:cNvSpPr>
             <a:spLocks noChangeAspect="1" noGrp="1"/>
           </p:cNvSpPr>
@@ -3410,7 +3410,7 @@
       </p:sp>
       <p:sp>
         <p:nvSpPr>
-          <p:cNvPr id="1358227892" name="Espace réservé du texte 3"/>
+          <p:cNvPr id="200777869" name="Espace réservé du texte 3"/>
           <p:cNvSpPr>
             <a:spLocks noGrp="1"/>
           </p:cNvSpPr>
@@ -3478,7 +3478,7 @@
       </p:sp>
       <p:sp>
         <p:nvSpPr>
-          <p:cNvPr id="808179552" name="Espace réservé de la date 4"/>
+          <p:cNvPr id="1369608143" name="Espace réservé de la date 4"/>
           <p:cNvSpPr>
             <a:spLocks noGrp="1"/>
           </p:cNvSpPr>
@@ -3504,7 +3504,7 @@
       </p:sp>
       <p:sp>
         <p:nvSpPr>
-          <p:cNvPr id="1680068817" name="Espace réservé du pied de page 5"/>
+          <p:cNvPr id="1425883107" name="Espace réservé du pied de page 5"/>
           <p:cNvSpPr>
             <a:spLocks noGrp="1"/>
           </p:cNvSpPr>
@@ -3526,7 +3526,7 @@
       </p:sp>
       <p:sp>
         <p:nvSpPr>
-          <p:cNvPr id="599591034" name="Espace réservé du numéro de diapositive 6"/>
+          <p:cNvPr id="1446276006" name="Espace réservé du numéro de diapositive 6"/>
           <p:cNvSpPr>
             <a:spLocks noGrp="1"/>
           </p:cNvSpPr>
@@ -3582,7 +3582,7 @@
       </p:grpSpPr>
       <p:sp>
         <p:nvSpPr>
-          <p:cNvPr id="719571281" name="Espace réservé du titre 1"/>
+          <p:cNvPr id="678136126" name="Espace réservé du titre 1"/>
           <p:cNvSpPr>
             <a:spLocks noGrp="1"/>
           </p:cNvSpPr>
@@ -3618,7 +3618,7 @@
       </p:sp>
       <p:sp>
         <p:nvSpPr>
-          <p:cNvPr id="1489779153" name="Espace réservé du texte 2"/>
+          <p:cNvPr id="1287926911" name="Espace réservé du texte 2"/>
           <p:cNvSpPr>
             <a:spLocks noGrp="1"/>
           </p:cNvSpPr>
@@ -3694,7 +3694,7 @@
       </p:sp>
       <p:sp>
         <p:nvSpPr>
-          <p:cNvPr id="1966787215" name="Espace réservé de la date 3"/>
+          <p:cNvPr id="1182210001" name="Espace réservé de la date 3"/>
           <p:cNvSpPr>
             <a:spLocks noGrp="1"/>
           </p:cNvSpPr>
@@ -3738,7 +3738,7 @@
       </p:sp>
       <p:sp>
         <p:nvSpPr>
-          <p:cNvPr id="1485288775" name="Espace réservé du pied de page 4"/>
+          <p:cNvPr id="672993085" name="Espace réservé du pied de page 4"/>
           <p:cNvSpPr>
             <a:spLocks noGrp="1"/>
           </p:cNvSpPr>
@@ -3778,7 +3778,7 @@
       </p:sp>
       <p:sp>
         <p:nvSpPr>
-          <p:cNvPr id="1117715197" name="Espace réservé du numéro de diapositive 5"/>
+          <p:cNvPr id="443715021" name="Espace réservé du numéro de diapositive 5"/>
           <p:cNvSpPr>
             <a:spLocks noGrp="1"/>
           </p:cNvSpPr>
@@ -4138,7 +4138,7 @@
       </p:grpSpPr>
       <p:cxnSp>
         <p:nvCxnSpPr>
-          <p:cNvPr id="507409488" name="Connecteur droit 1568760680"/>
+          <p:cNvPr id="1532741522" name="Connecteur droit 1568760680"/>
           <p:cNvCxnSpPr/>
           <p:nvPr/>
         </p:nvCxnSpPr>
@@ -4180,7 +4180,7 @@
       </p:cxnSp>
       <p:sp>
         <p:nvSpPr>
-          <p:cNvPr id="1224542497" name="ZoneTexte 1868728971"/>
+          <p:cNvPr id="593838180" name="ZoneTexte 1868728971"/>
           <p:cNvSpPr txBox="1"/>
           <p:nvPr/>
         </p:nvSpPr>
@@ -4220,7 +4220,7 @@
       </p:sp>
       <p:cxnSp>
         <p:nvCxnSpPr>
-          <p:cNvPr id="1678038039" name="Connecteur droit 806540798"/>
+          <p:cNvPr id="1303461049" name="Connecteur droit 806540798"/>
           <p:cNvCxnSpPr/>
           <p:nvPr/>
         </p:nvCxnSpPr>
@@ -4262,7 +4262,7 @@
       </p:cxnSp>
       <p:sp>
         <p:nvSpPr>
-          <p:cNvPr id="1375667479" name="ZoneTexte 406616703"/>
+          <p:cNvPr id="1309950420" name="ZoneTexte 406616703"/>
           <p:cNvSpPr txBox="1"/>
           <p:nvPr/>
         </p:nvSpPr>
@@ -4302,7 +4302,7 @@
       </p:sp>
       <p:cxnSp>
         <p:nvCxnSpPr>
-          <p:cNvPr id="690848301" name="Connecteur droit 858914340"/>
+          <p:cNvPr id="856027309" name="Connecteur droit 858914340"/>
           <p:cNvCxnSpPr/>
           <p:nvPr/>
         </p:nvCxnSpPr>
@@ -4344,7 +4344,7 @@
       </p:cxnSp>
       <p:sp>
         <p:nvSpPr>
-          <p:cNvPr id="2006009998" name="ZoneTexte 2018177722"/>
+          <p:cNvPr id="861197053" name="ZoneTexte 2018177722"/>
           <p:cNvSpPr txBox="1"/>
           <p:nvPr/>
         </p:nvSpPr>
@@ -4391,7 +4391,7 @@
       </p:sp>
       <p:sp>
         <p:nvSpPr>
-          <p:cNvPr id="1455414506" name="ZoneTexte 519900862"/>
+          <p:cNvPr id="661093404" name="ZoneTexte 519900862"/>
           <p:cNvSpPr txBox="1"/>
           <p:nvPr/>
         </p:nvSpPr>
@@ -4653,7 +4653,7 @@
       </p:sp>
       <p:sp>
         <p:nvSpPr>
-          <p:cNvPr id="768021577" name="Rectangle : avec coins arrondis en haut 838565229"/>
+          <p:cNvPr id="345396503" name="Rectangle : avec coins arrondis en haut 838565229"/>
           <p:cNvSpPr/>
           <p:nvPr/>
         </p:nvSpPr>
@@ -4699,7 +4699,7 @@
       </p:sp>
       <p:sp>
         <p:nvSpPr>
-          <p:cNvPr id="1434167112" name="ZoneTexte 448541368"/>
+          <p:cNvPr id="896533933" name="ZoneTexte 448541368"/>
           <p:cNvSpPr txBox="1"/>
           <p:nvPr/>
         </p:nvSpPr>
@@ -4780,7 +4780,7 @@
       </p:sp>
       <p:sp>
         <p:nvSpPr>
-          <p:cNvPr id="1872558063" name="Rectangle : avec coins arrondis en haut 1165584529"/>
+          <p:cNvPr id="2139699756" name="Rectangle : avec coins arrondis en haut 1165584529"/>
           <p:cNvSpPr/>
           <p:nvPr/>
         </p:nvSpPr>
@@ -4826,7 +4826,7 @@
       </p:sp>
       <p:sp>
         <p:nvSpPr>
-          <p:cNvPr id="1049701009" name="Flèche : pentagone 1880610112"/>
+          <p:cNvPr id="667599793" name="Flèche : pentagone 1880610112"/>
           <p:cNvSpPr/>
           <p:nvPr/>
         </p:nvSpPr>
@@ -4871,7 +4871,7 @@
       </p:sp>
       <p:sp>
         <p:nvSpPr>
-          <p:cNvPr id="1418313625" name="Flèche : pentagone 446859139"/>
+          <p:cNvPr id="2086776254" name="Flèche : pentagone 446859139"/>
           <p:cNvSpPr/>
           <p:nvPr/>
         </p:nvSpPr>
@@ -4916,7 +4916,7 @@
       </p:sp>
       <p:sp>
         <p:nvSpPr>
-          <p:cNvPr id="847990409" name="Flèche : pentagone 2055848356"/>
+          <p:cNvPr id="608899272" name="Flèche : pentagone 2055848356"/>
           <p:cNvSpPr/>
           <p:nvPr/>
         </p:nvSpPr>
@@ -4961,7 +4961,7 @@
       </p:sp>
       <p:sp>
         <p:nvSpPr>
-          <p:cNvPr id="1261605472" name="Flèche : pentagone 1980093981"/>
+          <p:cNvPr id="1109948262" name="Flèche : pentagone 1980093981"/>
           <p:cNvSpPr/>
           <p:nvPr/>
         </p:nvSpPr>
@@ -5006,7 +5006,7 @@
       </p:sp>
       <p:sp>
         <p:nvSpPr>
-          <p:cNvPr id="1275476913" name="Flèche : pentagone 905284374"/>
+          <p:cNvPr id="243960226" name="Flèche : pentagone 905284374"/>
           <p:cNvSpPr/>
           <p:nvPr/>
         </p:nvSpPr>
@@ -5051,14 +5051,14 @@
       </p:sp>
       <p:sp>
         <p:nvSpPr>
-          <p:cNvPr id="218561115" name="ZoneTexte 880464430"/>
+          <p:cNvPr id="2121608420" name="ZoneTexte 880464430"/>
           <p:cNvSpPr txBox="1"/>
           <p:nvPr/>
         </p:nvSpPr>
         <p:spPr bwMode="auto">
           <a:xfrm flipH="0" flipV="0">
-            <a:off x="3019131" y="8033529"/>
-            <a:ext cx="3864879" cy="579479"/>
+            <a:off x="3170222" y="8017653"/>
+            <a:ext cx="3685709" cy="579479"/>
           </a:xfrm>
           <a:prstGeom prst="rect">
             <a:avLst/>
@@ -5071,7 +5071,7 @@
           </a:bodyPr>
           <a:lstStyle/>
           <a:p>
-            <a:pPr algn="r">
+            <a:pPr algn="l">
               <a:defRPr/>
             </a:pPr>
             <a:r>
@@ -5125,29 +5125,18 @@
                   </a:schemeClr>
                 </a:solidFill>
               </a:rPr>
-              <a:t>Après un test de résistance réussi le MJ peut vous faire cocher une case de stress. </a:t>
-            </a:r>
-            <a:r>
-              <a:rPr sz="800">
-                <a:solidFill>
-                  <a:schemeClr val="tx1">
-                    <a:lumMod val="50000"/>
-                    <a:lumOff val="50000"/>
-                  </a:schemeClr>
-                </a:solidFill>
-              </a:rPr>
-              <a:t>Si vous </a:t>
-            </a:r>
-            <a:r>
-              <a:rPr sz="800">
-                <a:solidFill>
-                  <a:schemeClr val="tx1">
-                    <a:lumMod val="50000"/>
-                    <a:lumOff val="50000"/>
-                  </a:schemeClr>
-                </a:solidFill>
-              </a:rPr>
-              <a:t>échouez</a:t>
+              <a:t>Si vous échouez à un test d’</a:t>
+            </a:r>
+            <a:r>
+              <a:rPr lang="fr-FR" sz="800" b="1">
+                <a:solidFill>
+                  <a:schemeClr val="tx1">
+                    <a:lumMod val="50000"/>
+                    <a:lumOff val="50000"/>
+                  </a:schemeClr>
+                </a:solidFill>
+              </a:rPr>
+              <a:t>épreuve</a:t>
             </a:r>
             <a:r>
               <a:rPr lang="fr-FR" sz="800">
@@ -5158,18 +5147,18 @@
                   </a:schemeClr>
                 </a:solidFill>
               </a:rPr>
-              <a:t> à un test de résistance</a:t>
-            </a:r>
-            <a:r>
-              <a:rPr sz="800">
-                <a:solidFill>
-                  <a:schemeClr val="tx1">
-                    <a:lumMod val="50000"/>
-                    <a:lumOff val="50000"/>
-                  </a:schemeClr>
-                </a:solidFill>
-              </a:rPr>
-              <a:t>, </a:t>
+              <a:t>, cochez une case de stress. Si vous réussissez à un test de </a:t>
+            </a:r>
+            <a:r>
+              <a:rPr lang="fr-FR" sz="800" b="1">
+                <a:solidFill>
+                  <a:schemeClr val="tx1">
+                    <a:lumMod val="50000"/>
+                    <a:lumOff val="50000"/>
+                  </a:schemeClr>
+                </a:solidFill>
+              </a:rPr>
+              <a:t>choc</a:t>
             </a:r>
             <a:r>
               <a:rPr lang="fr-FR" sz="800">
@@ -5180,40 +5169,29 @@
                   </a:schemeClr>
                 </a:solidFill>
               </a:rPr>
-              <a:t>vous en </a:t>
-            </a:r>
-            <a:r>
-              <a:rPr sz="800">
-                <a:solidFill>
-                  <a:schemeClr val="tx1">
-                    <a:lumMod val="50000"/>
-                    <a:lumOff val="50000"/>
-                  </a:schemeClr>
-                </a:solidFill>
-              </a:rPr>
-              <a:t>subissez</a:t>
-            </a:r>
-            <a:r>
-              <a:rPr sz="800">
-                <a:solidFill>
-                  <a:schemeClr val="tx1">
-                    <a:lumMod val="50000"/>
-                    <a:lumOff val="50000"/>
-                  </a:schemeClr>
-                </a:solidFill>
-              </a:rPr>
-              <a:t> les </a:t>
-            </a:r>
-            <a:r>
-              <a:rPr sz="800">
-                <a:solidFill>
-                  <a:schemeClr val="tx1">
-                    <a:lumMod val="50000"/>
-                    <a:lumOff val="50000"/>
-                  </a:schemeClr>
-                </a:solidFill>
-              </a:rPr>
-              <a:t>conséquences et le MJ peut vous faire cocher une case de trauma</a:t>
+              <a:t>, cochez une case de stress ; si vous échouez à un test de </a:t>
+            </a:r>
+            <a:r>
+              <a:rPr lang="fr-FR" sz="800" b="1">
+                <a:solidFill>
+                  <a:schemeClr val="tx1">
+                    <a:lumMod val="50000"/>
+                    <a:lumOff val="50000"/>
+                  </a:schemeClr>
+                </a:solidFill>
+              </a:rPr>
+              <a:t>choc</a:t>
+            </a:r>
+            <a:r>
+              <a:rPr lang="fr-FR" sz="800">
+                <a:solidFill>
+                  <a:schemeClr val="tx1">
+                    <a:lumMod val="50000"/>
+                    <a:lumOff val="50000"/>
+                  </a:schemeClr>
+                </a:solidFill>
+              </a:rPr>
+              <a:t>, cochez une case de trauma.</a:t>
             </a:r>
             <a:r>
               <a:rPr sz="800">
@@ -5232,7 +5210,7 @@
       </p:sp>
       <p:sp>
         <p:nvSpPr>
-          <p:cNvPr id="100417881" name="ZoneTexte 1302587497"/>
+          <p:cNvPr id="82992999" name="ZoneTexte 1302587497"/>
           <p:cNvSpPr txBox="1"/>
           <p:nvPr/>
         </p:nvSpPr>
@@ -5530,7 +5508,7 @@
       </p:sp>
       <p:cxnSp>
         <p:nvCxnSpPr>
-          <p:cNvPr id="464449333" name="Connecteur droit 342798987"/>
+          <p:cNvPr id="2080080959" name="Connecteur droit 342798987"/>
           <p:cNvCxnSpPr/>
           <p:nvPr/>
         </p:nvCxnSpPr>
@@ -5572,7 +5550,7 @@
       </p:cxnSp>
       <p:sp>
         <p:nvSpPr>
-          <p:cNvPr id="1591983656" name="ZoneTexte 966486802"/>
+          <p:cNvPr id="525502652" name="ZoneTexte 966486802"/>
           <p:cNvSpPr txBox="1"/>
           <p:nvPr/>
         </p:nvSpPr>
@@ -5612,7 +5590,7 @@
       </p:sp>
       <p:sp>
         <p:nvSpPr>
-          <p:cNvPr id="1400307141" name="Rectangle 38344096"/>
+          <p:cNvPr id="445801858" name="Rectangle 38344096"/>
           <p:cNvSpPr/>
           <p:nvPr/>
         </p:nvSpPr>
@@ -5652,7 +5630,7 @@
       </p:sp>
       <p:sp>
         <p:nvSpPr>
-          <p:cNvPr id="1250646240" name="Rectangle 954364527"/>
+          <p:cNvPr id="550201533" name="Rectangle 954364527"/>
           <p:cNvSpPr/>
           <p:nvPr/>
         </p:nvSpPr>
@@ -5692,7 +5670,7 @@
       </p:sp>
       <p:sp>
         <p:nvSpPr>
-          <p:cNvPr id="1452331357" name="ZoneTexte 1527388901"/>
+          <p:cNvPr id="2004992052" name="ZoneTexte 1527388901"/>
           <p:cNvSpPr txBox="1"/>
           <p:nvPr/>
         </p:nvSpPr>
@@ -5914,7 +5892,7 @@
       </p:sp>
       <p:sp>
         <p:nvSpPr>
-          <p:cNvPr id="1382511241" name="ZoneTexte 1440859034"/>
+          <p:cNvPr id="900174181" name="ZoneTexte 1440859034"/>
           <p:cNvSpPr txBox="1"/>
           <p:nvPr/>
         </p:nvSpPr>
@@ -5965,7 +5943,7 @@
       </p:sp>
       <p:cxnSp>
         <p:nvCxnSpPr>
-          <p:cNvPr id="1727206409" name="Connecteur droit 858914340"/>
+          <p:cNvPr id="1510938914" name="Connecteur droit 858914340"/>
           <p:cNvCxnSpPr/>
           <p:nvPr/>
         </p:nvCxnSpPr>
@@ -6007,7 +5985,7 @@
       </p:cxnSp>
       <p:sp>
         <p:nvSpPr>
-          <p:cNvPr id="1192019932" name="ZoneTexte 2018177722"/>
+          <p:cNvPr id="660126262" name="ZoneTexte 2018177722"/>
           <p:cNvSpPr txBox="1"/>
           <p:nvPr/>
         </p:nvSpPr>
@@ -6054,7 +6032,7 @@
       </p:sp>
       <p:sp>
         <p:nvSpPr>
-          <p:cNvPr id="1677388360" name=""/>
+          <p:cNvPr id="1579775185" name=""/>
           <p:cNvSpPr txBox="1"/>
           <p:nvPr/>
         </p:nvSpPr>
@@ -6156,7 +6134,7 @@
       </p:sp>
       <p:cxnSp>
         <p:nvCxnSpPr>
-          <p:cNvPr id="25789445" name="Connecteur droit 858914340"/>
+          <p:cNvPr id="323845804" name="Connecteur droit 858914340"/>
           <p:cNvCxnSpPr/>
           <p:nvPr/>
         </p:nvCxnSpPr>
@@ -6198,7 +6176,7 @@
       </p:cxnSp>
       <p:sp>
         <p:nvSpPr>
-          <p:cNvPr id="1476156191" name="ZoneTexte 2018177722"/>
+          <p:cNvPr id="277397206" name="ZoneTexte 2018177722"/>
           <p:cNvSpPr txBox="1"/>
           <p:nvPr/>
         </p:nvSpPr>
@@ -6256,7 +6234,7 @@
       </p:sp>
       <p:sp>
         <p:nvSpPr>
-          <p:cNvPr id="324108197" name=""/>
+          <p:cNvPr id="1071139541" name=""/>
           <p:cNvSpPr txBox="1"/>
           <p:nvPr/>
         </p:nvSpPr>
@@ -6707,7 +6685,7 @@
       </p:sp>
       <p:sp>
         <p:nvSpPr>
-          <p:cNvPr id="586684640" name="ZoneTexte 2021443538"/>
+          <p:cNvPr id="1409849097" name="ZoneTexte 2021443538"/>
           <p:cNvSpPr txBox="1"/>
           <p:nvPr/>
         </p:nvSpPr>
@@ -6791,7 +6769,7 @@
       </p:sp>
       <p:sp>
         <p:nvSpPr>
-          <p:cNvPr id="469094918" name="ZoneTexte 1075280509"/>
+          <p:cNvPr id="1010453911" name="ZoneTexte 1075280509"/>
           <p:cNvSpPr txBox="1"/>
           <p:nvPr/>
         </p:nvSpPr>
@@ -6875,7 +6853,7 @@
       </p:sp>
       <p:sp>
         <p:nvSpPr>
-          <p:cNvPr id="586342179" name="ZoneTexte 824413856"/>
+          <p:cNvPr id="817834899" name="ZoneTexte 824413856"/>
           <p:cNvSpPr txBox="1"/>
           <p:nvPr/>
         </p:nvSpPr>
@@ -6959,7 +6937,7 @@
       </p:sp>
       <p:sp>
         <p:nvSpPr>
-          <p:cNvPr id="1603150477" name="ZoneTexte 1036656844"/>
+          <p:cNvPr id="847148624" name="ZoneTexte 1036656844"/>
           <p:cNvSpPr txBox="1"/>
           <p:nvPr/>
         </p:nvSpPr>
@@ -7043,7 +7021,7 @@
       </p:sp>
       <p:sp>
         <p:nvSpPr>
-          <p:cNvPr id="82058722" name="ZoneTexte 226284734"/>
+          <p:cNvPr id="778881228" name="ZoneTexte 226284734"/>
           <p:cNvSpPr txBox="1"/>
           <p:nvPr/>
         </p:nvSpPr>
@@ -7127,7 +7105,7 @@
       </p:sp>
       <p:sp>
         <p:nvSpPr>
-          <p:cNvPr id="1462733146" name="ZoneTexte 162158187"/>
+          <p:cNvPr id="1850804362" name="ZoneTexte 162158187"/>
           <p:cNvSpPr txBox="1"/>
           <p:nvPr/>
         </p:nvSpPr>
@@ -7191,7 +7169,7 @@
       </p:sp>
       <p:sp>
         <p:nvSpPr>
-          <p:cNvPr id="1718820745" name="ZoneTexte 1063440096"/>
+          <p:cNvPr id="1231872024" name="ZoneTexte 1063440096"/>
           <p:cNvSpPr txBox="1"/>
           <p:nvPr/>
         </p:nvSpPr>
@@ -7275,7 +7253,7 @@
       </p:sp>
       <p:sp>
         <p:nvSpPr>
-          <p:cNvPr id="1369343456" name="ZoneTexte 1564072661"/>
+          <p:cNvPr id="157697195" name="ZoneTexte 1564072661"/>
           <p:cNvSpPr txBox="1"/>
           <p:nvPr/>
         </p:nvSpPr>
@@ -7359,7 +7337,7 @@
       </p:sp>
       <p:sp>
         <p:nvSpPr>
-          <p:cNvPr id="1953860243" name="ZoneTexte 2102805411"/>
+          <p:cNvPr id="345336653" name="ZoneTexte 2102805411"/>
           <p:cNvSpPr txBox="1"/>
           <p:nvPr/>
         </p:nvSpPr>
@@ -7443,7 +7421,7 @@
       </p:sp>
       <p:sp>
         <p:nvSpPr>
-          <p:cNvPr id="1806342990" name="ZoneTexte 1094420572"/>
+          <p:cNvPr id="1666533552" name="ZoneTexte 1094420572"/>
           <p:cNvSpPr txBox="1"/>
           <p:nvPr/>
         </p:nvSpPr>
@@ -7527,7 +7505,7 @@
       </p:sp>
       <p:sp>
         <p:nvSpPr>
-          <p:cNvPr id="714334013" name="ZoneTexte 1337742717"/>
+          <p:cNvPr id="1746955738" name="ZoneTexte 1337742717"/>
           <p:cNvSpPr txBox="1"/>
           <p:nvPr/>
         </p:nvSpPr>
@@ -7591,7 +7569,7 @@
       </p:sp>
       <p:sp>
         <p:nvSpPr>
-          <p:cNvPr id="1195545713" name="ZoneTexte 1188730172"/>
+          <p:cNvPr id="400750683" name="ZoneTexte 1188730172"/>
           <p:cNvSpPr txBox="1"/>
           <p:nvPr/>
         </p:nvSpPr>
@@ -7655,7 +7633,7 @@
       </p:sp>
       <p:sp>
         <p:nvSpPr>
-          <p:cNvPr id="1446167710" name="Rectangle : avec coins arrondis en haut 1452601499"/>
+          <p:cNvPr id="332568858" name="Rectangle : avec coins arrondis en haut 1452601499"/>
           <p:cNvSpPr/>
           <p:nvPr/>
         </p:nvSpPr>
@@ -7701,7 +7679,7 @@
       </p:sp>
       <p:sp>
         <p:nvSpPr>
-          <p:cNvPr id="634058292" name="Rectangle : avec coins arrondis en haut 1782110635"/>
+          <p:cNvPr id="130513037" name="Rectangle : avec coins arrondis en haut 1782110635"/>
           <p:cNvSpPr/>
           <p:nvPr/>
         </p:nvSpPr>
@@ -7747,7 +7725,7 @@
       </p:sp>
       <p:sp>
         <p:nvSpPr>
-          <p:cNvPr id="1056872102" name="Rectangle : avec coins arrondis en haut 945118596"/>
+          <p:cNvPr id="607345861" name="Rectangle : avec coins arrondis en haut 945118596"/>
           <p:cNvSpPr/>
           <p:nvPr/>
         </p:nvSpPr>
@@ -7793,7 +7771,7 @@
       </p:sp>
       <p:sp>
         <p:nvSpPr>
-          <p:cNvPr id="247414251" name="Rectangle : avec coins arrondis en haut 500951796"/>
+          <p:cNvPr id="126291578" name="Rectangle : avec coins arrondis en haut 500951796"/>
           <p:cNvSpPr/>
           <p:nvPr/>
         </p:nvSpPr>
@@ -7839,7 +7817,7 @@
       </p:sp>
       <p:sp>
         <p:nvSpPr>
-          <p:cNvPr id="1661661777" name="Rectangle : avec coins arrondis en haut 203047490"/>
+          <p:cNvPr id="1543224370" name="Rectangle : avec coins arrondis en haut 203047490"/>
           <p:cNvSpPr/>
           <p:nvPr/>
         </p:nvSpPr>
@@ -7885,7 +7863,7 @@
       </p:sp>
       <p:sp>
         <p:nvSpPr>
-          <p:cNvPr id="350126673" name="Rectangle : avec coins arrondis en haut 818083012"/>
+          <p:cNvPr id="193046829" name="Rectangle : avec coins arrondis en haut 818083012"/>
           <p:cNvSpPr/>
           <p:nvPr/>
         </p:nvSpPr>
@@ -7931,7 +7909,7 @@
       </p:sp>
       <p:sp>
         <p:nvSpPr>
-          <p:cNvPr id="524954427" name="Rectangle : avec coins arrondis en haut 310539005"/>
+          <p:cNvPr id="1578835917" name="Rectangle : avec coins arrondis en haut 310539005"/>
           <p:cNvSpPr/>
           <p:nvPr/>
         </p:nvSpPr>
@@ -7977,7 +7955,7 @@
       </p:sp>
       <p:sp>
         <p:nvSpPr>
-          <p:cNvPr id="1159525531" name="Rectangle : avec coins arrondis en haut 844307487"/>
+          <p:cNvPr id="1152120255" name="Rectangle : avec coins arrondis en haut 844307487"/>
           <p:cNvSpPr/>
           <p:nvPr/>
         </p:nvSpPr>
@@ -8023,7 +8001,7 @@
       </p:sp>
       <p:sp>
         <p:nvSpPr>
-          <p:cNvPr id="1550854231" name="Rectangle : avec coins arrondis en haut 1616510051"/>
+          <p:cNvPr id="1578508363" name="Rectangle : avec coins arrondis en haut 1616510051"/>
           <p:cNvSpPr/>
           <p:nvPr/>
         </p:nvSpPr>
@@ -8069,7 +8047,7 @@
       </p:sp>
       <p:sp>
         <p:nvSpPr>
-          <p:cNvPr id="480347884" name="Rectangle : avec coins arrondis en haut 1451691637"/>
+          <p:cNvPr id="569585095" name="Rectangle : avec coins arrondis en haut 1451691637"/>
           <p:cNvSpPr/>
           <p:nvPr/>
         </p:nvSpPr>
@@ -8115,7 +8093,7 @@
       </p:sp>
       <p:sp>
         <p:nvSpPr>
-          <p:cNvPr id="922129415" name="Rectangle : avec coins arrondis en haut 260383743"/>
+          <p:cNvPr id="170192750" name="Rectangle : avec coins arrondis en haut 260383743"/>
           <p:cNvSpPr/>
           <p:nvPr/>
         </p:nvSpPr>
@@ -8161,7 +8139,7 @@
       </p:sp>
       <p:sp>
         <p:nvSpPr>
-          <p:cNvPr id="229002386" name="Rectangle : avec coins arrondis en haut 1280344391"/>
+          <p:cNvPr id="1015394765" name="Rectangle : avec coins arrondis en haut 1280344391"/>
           <p:cNvSpPr/>
           <p:nvPr/>
         </p:nvSpPr>
@@ -8207,7 +8185,7 @@
       </p:sp>
       <p:sp>
         <p:nvSpPr>
-          <p:cNvPr id="239542065" name=""/>
+          <p:cNvPr id="2129365332" name=""/>
           <p:cNvSpPr txBox="1"/>
           <p:nvPr/>
         </p:nvSpPr>
@@ -8331,7 +8309,7 @@
       </p:sp>
       <p:sp>
         <p:nvSpPr>
-          <p:cNvPr id="1096037567" name="ZoneTexte 1440859034"/>
+          <p:cNvPr id="1040366270" name="ZoneTexte 1440859034"/>
           <p:cNvSpPr txBox="1"/>
           <p:nvPr/>
         </p:nvSpPr>
@@ -8373,7 +8351,7 @@
       </p:sp>
       <p:sp>
         <p:nvSpPr>
-          <p:cNvPr id="1197677637" name="ZoneTexte 1440859034"/>
+          <p:cNvPr id="1652128631" name="ZoneTexte 1440859034"/>
           <p:cNvSpPr txBox="1"/>
           <p:nvPr/>
         </p:nvSpPr>
@@ -8412,7 +8390,7 @@
       </p:sp>
       <p:cxnSp>
         <p:nvCxnSpPr>
-          <p:cNvPr id="400569307" name=""/>
+          <p:cNvPr id="20986284" name=""/>
           <p:cNvCxnSpPr/>
           <p:nvPr/>
         </p:nvCxnSpPr>
@@ -8451,7 +8429,7 @@
       </p:cxnSp>
       <p:sp>
         <p:nvSpPr>
-          <p:cNvPr id="788523408" name=""/>
+          <p:cNvPr id="2044373370" name=""/>
           <p:cNvSpPr txBox="1"/>
           <p:nvPr/>
         </p:nvSpPr>
@@ -8615,7 +8593,7 @@
       </p:sp>
       <p:sp>
         <p:nvSpPr>
-          <p:cNvPr id="1664968998" name="Rectangle 954364527"/>
+          <p:cNvPr id="1151424050" name="Rectangle 954364527"/>
           <p:cNvSpPr/>
           <p:nvPr/>
         </p:nvSpPr>
@@ -8655,7 +8633,7 @@
       </p:sp>
       <p:sp>
         <p:nvSpPr>
-          <p:cNvPr id="1008907928" name="ZoneTexte 1527388901"/>
+          <p:cNvPr id="634541515" name="ZoneTexte 1527388901"/>
           <p:cNvSpPr txBox="1"/>
           <p:nvPr/>
         </p:nvSpPr>
@@ -8815,7 +8793,7 @@
       </p:sp>
       <p:sp>
         <p:nvSpPr>
-          <p:cNvPr id="2011187832" name="Rectangle 38344096"/>
+          <p:cNvPr id="937330216" name="Rectangle 38344096"/>
           <p:cNvSpPr/>
           <p:nvPr/>
         </p:nvSpPr>
@@ -8855,7 +8833,7 @@
       </p:sp>
       <p:sp>
         <p:nvSpPr>
-          <p:cNvPr id="174437826" name=""/>
+          <p:cNvPr id="1095452117" name=""/>
           <p:cNvSpPr/>
           <p:nvPr/>
         </p:nvSpPr>
@@ -8926,7 +8904,7 @@
       </p:sp>
       <p:sp>
         <p:nvSpPr>
-          <p:cNvPr id="924026724" name="Flèche : pentagone 2055848356"/>
+          <p:cNvPr id="1887674137" name="Flèche : pentagone 2055848356"/>
           <p:cNvSpPr/>
           <p:nvPr/>
         </p:nvSpPr>
@@ -8971,7 +8949,7 @@
       </p:sp>
       <p:sp>
         <p:nvSpPr>
-          <p:cNvPr id="1836875480" name="Flèche : pentagone 1980093981"/>
+          <p:cNvPr id="1470337902" name="Flèche : pentagone 1980093981"/>
           <p:cNvSpPr/>
           <p:nvPr/>
         </p:nvSpPr>
@@ -9016,7 +8994,7 @@
       </p:sp>
       <p:sp>
         <p:nvSpPr>
-          <p:cNvPr id="1031703884" name="Flèche : pentagone 905284374"/>
+          <p:cNvPr id="1912628321" name="Flèche : pentagone 905284374"/>
           <p:cNvSpPr/>
           <p:nvPr/>
         </p:nvSpPr>
@@ -9061,7 +9039,7 @@
       </p:sp>
       <p:sp>
         <p:nvSpPr>
-          <p:cNvPr id="632836252" name="ZoneTexte 1440859034"/>
+          <p:cNvPr id="601131564" name="ZoneTexte 1440859034"/>
           <p:cNvSpPr txBox="1"/>
           <p:nvPr/>
         </p:nvSpPr>
@@ -9100,7 +9078,7 @@
       </p:sp>
       <p:sp>
         <p:nvSpPr>
-          <p:cNvPr id="12174300" name="Flèche : pentagone 1880610112"/>
+          <p:cNvPr id="1077154462" name="Flèche : pentagone 1880610112"/>
           <p:cNvSpPr/>
           <p:nvPr/>
         </p:nvSpPr>
@@ -9145,7 +9123,7 @@
       </p:sp>
       <p:sp>
         <p:nvSpPr>
-          <p:cNvPr id="888026582" name="Flèche : pentagone 446859139"/>
+          <p:cNvPr id="1038363559" name="Flèche : pentagone 446859139"/>
           <p:cNvSpPr/>
           <p:nvPr/>
         </p:nvSpPr>
@@ -9190,7 +9168,7 @@
       </p:sp>
       <p:sp>
         <p:nvSpPr>
-          <p:cNvPr id="866979880" name="Flèche : pentagone 2055848356"/>
+          <p:cNvPr id="1940043257" name="Flèche : pentagone 2055848356"/>
           <p:cNvSpPr/>
           <p:nvPr/>
         </p:nvSpPr>
@@ -9235,7 +9213,7 @@
       </p:sp>
       <p:sp>
         <p:nvSpPr>
-          <p:cNvPr id="393676056" name="Flèche : pentagone 1980093981"/>
+          <p:cNvPr id="1333161651" name="Flèche : pentagone 1980093981"/>
           <p:cNvSpPr/>
           <p:nvPr/>
         </p:nvSpPr>
@@ -9280,7 +9258,7 @@
       </p:sp>
       <p:sp>
         <p:nvSpPr>
-          <p:cNvPr id="138251967" name="Flèche : pentagone 905284374"/>
+          <p:cNvPr id="1492564396" name="Flèche : pentagone 905284374"/>
           <p:cNvSpPr/>
           <p:nvPr/>
         </p:nvSpPr>
@@ -9325,7 +9303,7 @@
       </p:sp>
       <p:sp>
         <p:nvSpPr>
-          <p:cNvPr id="1745635626" name="ZoneTexte 1440859034"/>
+          <p:cNvPr id="1160487741" name="ZoneTexte 1440859034"/>
           <p:cNvSpPr txBox="1"/>
           <p:nvPr/>
         </p:nvSpPr>
@@ -9364,7 +9342,7 @@
       </p:sp>
       <p:sp>
         <p:nvSpPr>
-          <p:cNvPr id="1677523332" name="Flèche : pentagone 2055848356"/>
+          <p:cNvPr id="977833722" name="Flèche : pentagone 2055848356"/>
           <p:cNvSpPr/>
           <p:nvPr/>
         </p:nvSpPr>
@@ -9409,7 +9387,7 @@
       </p:sp>
       <p:sp>
         <p:nvSpPr>
-          <p:cNvPr id="1455415556" name="Flèche : pentagone 1980093981"/>
+          <p:cNvPr id="1900194777" name="Flèche : pentagone 1980093981"/>
           <p:cNvSpPr/>
           <p:nvPr/>
         </p:nvSpPr>
@@ -9454,7 +9432,7 @@
       </p:sp>
       <p:sp>
         <p:nvSpPr>
-          <p:cNvPr id="2068665878" name="Flèche : pentagone 905284374"/>
+          <p:cNvPr id="1817866907" name="Flèche : pentagone 905284374"/>
           <p:cNvSpPr/>
           <p:nvPr/>
         </p:nvSpPr>
@@ -9499,7 +9477,7 @@
       </p:sp>
       <p:sp>
         <p:nvSpPr>
-          <p:cNvPr id="1632807343" name="ZoneTexte 1440859034"/>
+          <p:cNvPr id="1660188788" name="ZoneTexte 1440859034"/>
           <p:cNvSpPr txBox="1"/>
           <p:nvPr/>
         </p:nvSpPr>
@@ -9538,7 +9516,7 @@
       </p:sp>
       <p:sp>
         <p:nvSpPr>
-          <p:cNvPr id="1143695030" name=""/>
+          <p:cNvPr id="894474244" name=""/>
           <p:cNvSpPr txBox="1"/>
           <p:nvPr/>
         </p:nvSpPr>
@@ -9702,7 +9680,7 @@
       </p:sp>
       <p:sp>
         <p:nvSpPr>
-          <p:cNvPr id="360959361" name=""/>
+          <p:cNvPr id="973291325" name=""/>
           <p:cNvSpPr txBox="1"/>
           <p:nvPr/>
         </p:nvSpPr>
@@ -9866,7 +9844,7 @@
       </p:sp>
       <p:sp>
         <p:nvSpPr>
-          <p:cNvPr id="1655146142" name=""/>
+          <p:cNvPr id="1051435069" name=""/>
           <p:cNvSpPr txBox="1"/>
           <p:nvPr/>
         </p:nvSpPr>
@@ -10063,7 +10041,7 @@
       </p:grpSpPr>
       <p:sp>
         <p:nvSpPr>
-          <p:cNvPr id="38997469" name=""/>
+          <p:cNvPr id="591387563" name=""/>
           <p:cNvSpPr/>
           <p:nvPr/>
         </p:nvSpPr>
@@ -10106,7 +10084,7 @@
       </p:sp>
       <p:sp>
         <p:nvSpPr>
-          <p:cNvPr id="593595920" name=""/>
+          <p:cNvPr id="2077322176" name=""/>
           <p:cNvSpPr txBox="1"/>
           <p:nvPr/>
         </p:nvSpPr>
@@ -10172,7 +10150,7 @@
       </p:sp>
       <p:cxnSp>
         <p:nvCxnSpPr>
-          <p:cNvPr id="250524992" name="Connecteur droit 1568760680"/>
+          <p:cNvPr id="1299865765" name="Connecteur droit 1568760680"/>
           <p:cNvCxnSpPr/>
           <p:nvPr/>
         </p:nvCxnSpPr>
@@ -10214,7 +10192,7 @@
       </p:cxnSp>
       <p:sp>
         <p:nvSpPr>
-          <p:cNvPr id="1853304664" name="ZoneTexte 1868728971"/>
+          <p:cNvPr id="556345685" name="ZoneTexte 1868728971"/>
           <p:cNvSpPr txBox="1"/>
           <p:nvPr/>
         </p:nvSpPr>
@@ -10254,7 +10232,7 @@
       </p:sp>
       <p:cxnSp>
         <p:nvCxnSpPr>
-          <p:cNvPr id="928638840" name="Connecteur droit 806540798"/>
+          <p:cNvPr id="828269592" name="Connecteur droit 806540798"/>
           <p:cNvCxnSpPr/>
           <p:nvPr/>
         </p:nvCxnSpPr>
@@ -10296,7 +10274,7 @@
       </p:cxnSp>
       <p:sp>
         <p:nvSpPr>
-          <p:cNvPr id="243505817" name="ZoneTexte 406616703"/>
+          <p:cNvPr id="86531202" name="ZoneTexte 406616703"/>
           <p:cNvSpPr txBox="1"/>
           <p:nvPr/>
         </p:nvSpPr>
@@ -10336,7 +10314,7 @@
       </p:sp>
       <p:sp>
         <p:nvSpPr>
-          <p:cNvPr id="2074964307" name="ZoneTexte 1302587497"/>
+          <p:cNvPr id="1003509021" name="ZoneTexte 1302587497"/>
           <p:cNvSpPr txBox="1"/>
           <p:nvPr/>
         </p:nvSpPr>
@@ -10540,7 +10518,7 @@
       </p:sp>
       <p:sp>
         <p:nvSpPr>
-          <p:cNvPr id="1478011223" name="Rectangle 38344096"/>
+          <p:cNvPr id="374080768" name="Rectangle 38344096"/>
           <p:cNvSpPr/>
           <p:nvPr/>
         </p:nvSpPr>
@@ -10580,7 +10558,7 @@
       </p:sp>
       <p:sp>
         <p:nvSpPr>
-          <p:cNvPr id="723718965" name="ZoneTexte 1075280509"/>
+          <p:cNvPr id="133886075" name="ZoneTexte 1075280509"/>
           <p:cNvSpPr txBox="1"/>
           <p:nvPr/>
         </p:nvSpPr>
@@ -10653,7 +10631,7 @@
       </p:sp>
       <p:sp>
         <p:nvSpPr>
-          <p:cNvPr id="1070291821" name="ZoneTexte 226284734"/>
+          <p:cNvPr id="1942043863" name="ZoneTexte 226284734"/>
           <p:cNvSpPr txBox="1"/>
           <p:nvPr/>
         </p:nvSpPr>
@@ -10726,7 +10704,7 @@
       </p:sp>
       <p:sp>
         <p:nvSpPr>
-          <p:cNvPr id="697341943" name="ZoneTexte 162158187"/>
+          <p:cNvPr id="1018123804" name="ZoneTexte 162158187"/>
           <p:cNvSpPr txBox="1"/>
           <p:nvPr/>
         </p:nvSpPr>
@@ -10776,7 +10754,7 @@
       </p:sp>
       <p:sp>
         <p:nvSpPr>
-          <p:cNvPr id="156812537" name="Rectangle : avec coins arrondis en haut 1452601499"/>
+          <p:cNvPr id="1761064515" name="Rectangle : avec coins arrondis en haut 1452601499"/>
           <p:cNvSpPr/>
           <p:nvPr/>
         </p:nvSpPr>
@@ -10819,7 +10797,7 @@
       </p:sp>
       <p:sp>
         <p:nvSpPr>
-          <p:cNvPr id="1773797890" name="Rectangle : avec coins arrondis en haut 1782110635"/>
+          <p:cNvPr id="325763081" name="Rectangle : avec coins arrondis en haut 1782110635"/>
           <p:cNvSpPr/>
           <p:nvPr/>
         </p:nvSpPr>
@@ -10865,7 +10843,7 @@
       </p:sp>
       <p:sp>
         <p:nvSpPr>
-          <p:cNvPr id="272423393" name="Rectangle : avec coins arrondis en haut 945118596"/>
+          <p:cNvPr id="854606838" name="Rectangle : avec coins arrondis en haut 945118596"/>
           <p:cNvSpPr/>
           <p:nvPr/>
         </p:nvSpPr>
@@ -10911,7 +10889,7 @@
       </p:sp>
       <p:sp>
         <p:nvSpPr>
-          <p:cNvPr id="930212870" name=""/>
+          <p:cNvPr id="632961650" name=""/>
           <p:cNvSpPr/>
           <p:nvPr/>
         </p:nvSpPr>
@@ -10953,7 +10931,7 @@
       </p:sp>
       <p:sp>
         <p:nvSpPr>
-          <p:cNvPr id="2061323065" name=""/>
+          <p:cNvPr id="2049584505" name=""/>
           <p:cNvSpPr txBox="1"/>
           <p:nvPr/>
         </p:nvSpPr>
@@ -10993,7 +10971,7 @@
       </p:sp>
       <p:sp>
         <p:nvSpPr>
-          <p:cNvPr id="1765827829" name=""/>
+          <p:cNvPr id="1326703020" name=""/>
           <p:cNvSpPr/>
           <p:nvPr/>
         </p:nvSpPr>
@@ -11064,7 +11042,7 @@
       </p:sp>
       <p:sp>
         <p:nvSpPr>
-          <p:cNvPr id="1800266668" name=""/>
+          <p:cNvPr id="1475935701" name=""/>
           <p:cNvSpPr txBox="1"/>
           <p:nvPr/>
         </p:nvSpPr>
@@ -11101,7 +11079,7 @@
       </p:sp>
       <p:sp>
         <p:nvSpPr>
-          <p:cNvPr id="980531447" name=""/>
+          <p:cNvPr id="2117444558" name=""/>
           <p:cNvSpPr txBox="1"/>
           <p:nvPr/>
         </p:nvSpPr>
@@ -11335,7 +11313,7 @@
       </p:sp>
       <p:sp>
         <p:nvSpPr>
-          <p:cNvPr id="770633209" name=""/>
+          <p:cNvPr id="1302113014" name=""/>
           <p:cNvSpPr txBox="1"/>
           <p:nvPr/>
         </p:nvSpPr>
@@ -11614,7 +11592,7 @@
       </p:sp>
       <p:sp>
         <p:nvSpPr>
-          <p:cNvPr id="1505881002" name=""/>
+          <p:cNvPr id="1964273091" name=""/>
           <p:cNvSpPr txBox="1"/>
           <p:nvPr/>
         </p:nvSpPr>
@@ -12005,7 +11983,7 @@
       </p:sp>
       <p:sp>
         <p:nvSpPr>
-          <p:cNvPr id="519004949" name=""/>
+          <p:cNvPr id="2008820004" name=""/>
           <p:cNvSpPr txBox="1"/>
           <p:nvPr/>
         </p:nvSpPr>
@@ -12396,7 +12374,7 @@
       </p:sp>
       <p:sp>
         <p:nvSpPr>
-          <p:cNvPr id="495674657" name=""/>
+          <p:cNvPr id="1436579179" name=""/>
           <p:cNvSpPr txBox="1"/>
           <p:nvPr/>
         </p:nvSpPr>
@@ -12787,7 +12765,7 @@
       </p:sp>
       <p:sp>
         <p:nvSpPr>
-          <p:cNvPr id="2132386061" name=""/>
+          <p:cNvPr id="201230791" name=""/>
           <p:cNvSpPr txBox="1"/>
           <p:nvPr/>
         </p:nvSpPr>
@@ -13178,7 +13156,7 @@
       </p:sp>
       <p:sp>
         <p:nvSpPr>
-          <p:cNvPr id="1386806432" name=""/>
+          <p:cNvPr id="152823308" name=""/>
           <p:cNvSpPr txBox="1"/>
           <p:nvPr/>
         </p:nvSpPr>
@@ -13569,7 +13547,7 @@
       </p:sp>
       <p:sp>
         <p:nvSpPr>
-          <p:cNvPr id="413998984" name=""/>
+          <p:cNvPr id="489985910" name=""/>
           <p:cNvSpPr txBox="1"/>
           <p:nvPr/>
         </p:nvSpPr>
@@ -13960,7 +13938,7 @@
       </p:sp>
       <p:sp>
         <p:nvSpPr>
-          <p:cNvPr id="352832646" name=""/>
+          <p:cNvPr id="516138876" name=""/>
           <p:cNvSpPr txBox="1"/>
           <p:nvPr/>
         </p:nvSpPr>
@@ -14351,7 +14329,7 @@
       </p:sp>
       <p:sp>
         <p:nvSpPr>
-          <p:cNvPr id="1678378542" name=""/>
+          <p:cNvPr id="882747423" name=""/>
           <p:cNvSpPr txBox="1"/>
           <p:nvPr/>
         </p:nvSpPr>
@@ -14742,7 +14720,7 @@
       </p:sp>
       <p:sp>
         <p:nvSpPr>
-          <p:cNvPr id="1414613981" name=""/>
+          <p:cNvPr id="733840457" name=""/>
           <p:cNvSpPr txBox="1"/>
           <p:nvPr/>
         </p:nvSpPr>
@@ -15133,7 +15111,7 @@
       </p:sp>
       <p:sp>
         <p:nvSpPr>
-          <p:cNvPr id="1740224451" name=""/>
+          <p:cNvPr id="1725048076" name=""/>
           <p:cNvSpPr txBox="1"/>
           <p:nvPr/>
         </p:nvSpPr>
@@ -15524,7 +15502,7 @@
       </p:sp>
       <p:sp>
         <p:nvSpPr>
-          <p:cNvPr id="1260203910" name=""/>
+          <p:cNvPr id="519257650" name=""/>
           <p:cNvSpPr txBox="1"/>
           <p:nvPr/>
         </p:nvSpPr>
@@ -15915,7 +15893,7 @@
       </p:sp>
       <p:sp>
         <p:nvSpPr>
-          <p:cNvPr id="2141500198" name=""/>
+          <p:cNvPr id="335385134" name=""/>
           <p:cNvSpPr txBox="1"/>
           <p:nvPr/>
         </p:nvSpPr>
@@ -16306,7 +16284,7 @@
       </p:sp>
       <p:sp>
         <p:nvSpPr>
-          <p:cNvPr id="351757380" name=""/>
+          <p:cNvPr id="116187254" name=""/>
           <p:cNvSpPr txBox="1"/>
           <p:nvPr/>
         </p:nvSpPr>
@@ -16697,7 +16675,7 @@
       </p:sp>
       <p:sp>
         <p:nvSpPr>
-          <p:cNvPr id="1745774310" name=""/>
+          <p:cNvPr id="11058899" name=""/>
           <p:cNvSpPr txBox="1"/>
           <p:nvPr/>
         </p:nvSpPr>
@@ -17088,14 +17066,14 @@
       </p:sp>
       <p:sp>
         <p:nvSpPr>
-          <p:cNvPr id="1201286088" name=""/>
+          <p:cNvPr id="2101764948" name=""/>
           <p:cNvSpPr txBox="1"/>
           <p:nvPr/>
         </p:nvSpPr>
         <p:spPr bwMode="auto">
           <a:xfrm rot="0" flipH="0" flipV="0">
-            <a:off x="58494" y="7297017"/>
-            <a:ext cx="6779315" cy="829180"/>
+            <a:off x="58493" y="7297016"/>
+            <a:ext cx="6787234" cy="829180"/>
           </a:xfrm>
           <a:prstGeom prst="rect">
             <a:avLst/>
@@ -17205,7 +17183,7 @@
                 <a:ea typeface="Arial"/>
                 <a:cs typeface="Arial"/>
               </a:rPr>
-              <a:t>Accorder de l’attention au personnage</a:t>
+              <a:t>Partager son activité</a:t>
             </a:r>
             <a:r>
               <a:rPr lang="fr-FR" sz="800" b="0" i="0" u="none" strike="noStrike" cap="none" spc="0">
@@ -17296,7 +17274,7 @@
       </p:sp>
       <p:cxnSp>
         <p:nvCxnSpPr>
-          <p:cNvPr id="76463490" name="Connecteur droit 806540798"/>
+          <p:cNvPr id="2081557740" name="Connecteur droit 806540798"/>
           <p:cNvCxnSpPr/>
           <p:nvPr/>
         </p:nvCxnSpPr>
@@ -17338,7 +17316,7 @@
       </p:cxnSp>
       <p:sp>
         <p:nvSpPr>
-          <p:cNvPr id="1609198624" name="ZoneTexte 406616703"/>
+          <p:cNvPr id="579160766" name="ZoneTexte 406616703"/>
           <p:cNvSpPr txBox="1"/>
           <p:nvPr/>
         </p:nvSpPr>
@@ -17378,7 +17356,7 @@
       </p:sp>
       <p:sp>
         <p:nvSpPr>
-          <p:cNvPr id="704265852" name=""/>
+          <p:cNvPr id="1307579552" name=""/>
           <p:cNvSpPr txBox="1"/>
           <p:nvPr/>
         </p:nvSpPr>
@@ -17477,7 +17455,7 @@
       </p:grpSpPr>
       <p:cxnSp>
         <p:nvCxnSpPr>
-          <p:cNvPr id="856193300" name="Connecteur droit 266926011"/>
+          <p:cNvPr id="852453575" name="Connecteur droit 266926011"/>
           <p:cNvCxnSpPr/>
           <p:nvPr/>
         </p:nvCxnSpPr>
@@ -17519,7 +17497,7 @@
       </p:cxnSp>
       <p:sp>
         <p:nvSpPr>
-          <p:cNvPr id="1628026633" name="ZoneTexte 1043763612"/>
+          <p:cNvPr id="978918710" name="ZoneTexte 1043763612"/>
           <p:cNvSpPr txBox="1"/>
           <p:nvPr/>
         </p:nvSpPr>
@@ -17559,7 +17537,7 @@
       </p:sp>
       <p:cxnSp>
         <p:nvCxnSpPr>
-          <p:cNvPr id="857961706" name="Connecteur droit 1586327141"/>
+          <p:cNvPr id="1844698844" name="Connecteur droit 1586327141"/>
           <p:cNvCxnSpPr/>
           <p:nvPr/>
         </p:nvCxnSpPr>
@@ -17602,7 +17580,7 @@
       </p:cxnSp>
       <p:sp>
         <p:nvSpPr>
-          <p:cNvPr id="1672004710" name="ZoneTexte 1691387439"/>
+          <p:cNvPr id="164244367" name="ZoneTexte 1691387439"/>
           <p:cNvSpPr txBox="1"/>
           <p:nvPr/>
         </p:nvSpPr>
@@ -17642,7 +17620,7 @@
       </p:sp>
       <p:cxnSp>
         <p:nvCxnSpPr>
-          <p:cNvPr id="1978691096" name="Connecteur droit 1743707585"/>
+          <p:cNvPr id="1813051427" name="Connecteur droit 1743707585"/>
           <p:cNvCxnSpPr/>
           <p:nvPr/>
         </p:nvCxnSpPr>
@@ -17685,7 +17663,7 @@
       </p:cxnSp>
       <p:sp>
         <p:nvSpPr>
-          <p:cNvPr id="530358375" name="ZoneTexte 1503300725"/>
+          <p:cNvPr id="1955254136" name="ZoneTexte 1503300725"/>
           <p:cNvSpPr txBox="1"/>
           <p:nvPr/>
         </p:nvSpPr>
@@ -17767,7 +17745,7 @@
       </p:sp>
       <p:sp>
         <p:nvSpPr>
-          <p:cNvPr id="335176745" name="Rectangle : avec coins arrondis en haut 1151560973"/>
+          <p:cNvPr id="858693496" name="Rectangle : avec coins arrondis en haut 1151560973"/>
           <p:cNvSpPr/>
           <p:nvPr/>
         </p:nvSpPr>
@@ -17813,7 +17791,7 @@
       </p:sp>
       <p:sp>
         <p:nvSpPr>
-          <p:cNvPr id="1263464841" name="Flèche : pentagone 1610574377"/>
+          <p:cNvPr id="2015265541" name="Flèche : pentagone 1610574377"/>
           <p:cNvSpPr/>
           <p:nvPr/>
         </p:nvSpPr>
@@ -17858,7 +17836,7 @@
       </p:sp>
       <p:sp>
         <p:nvSpPr>
-          <p:cNvPr id="2095902457" name="Flèche : pentagone 463861063"/>
+          <p:cNvPr id="529512172" name="Flèche : pentagone 463861063"/>
           <p:cNvSpPr/>
           <p:nvPr/>
         </p:nvSpPr>
@@ -17903,7 +17881,7 @@
       </p:sp>
       <p:sp>
         <p:nvSpPr>
-          <p:cNvPr id="235177083" name="Flèche : pentagone 272004907"/>
+          <p:cNvPr id="606492989" name="Flèche : pentagone 272004907"/>
           <p:cNvSpPr/>
           <p:nvPr/>
         </p:nvSpPr>
@@ -17948,7 +17926,7 @@
       </p:sp>
       <p:sp>
         <p:nvSpPr>
-          <p:cNvPr id="1056720817" name="Flèche : pentagone 28174069"/>
+          <p:cNvPr id="972714653" name="Flèche : pentagone 28174069"/>
           <p:cNvSpPr/>
           <p:nvPr/>
         </p:nvSpPr>
@@ -17993,7 +17971,7 @@
       </p:sp>
       <p:sp>
         <p:nvSpPr>
-          <p:cNvPr id="556320636" name="Flèche : pentagone 978127220"/>
+          <p:cNvPr id="241482915" name="Flèche : pentagone 978127220"/>
           <p:cNvSpPr/>
           <p:nvPr/>
         </p:nvSpPr>
@@ -18038,14 +18016,14 @@
       </p:sp>
       <p:sp>
         <p:nvSpPr>
-          <p:cNvPr id="239309316" name="ZoneTexte 1693594013"/>
+          <p:cNvPr id="1388904870" name="ZoneTexte 1693594013"/>
           <p:cNvSpPr txBox="1"/>
           <p:nvPr/>
         </p:nvSpPr>
         <p:spPr bwMode="auto">
           <a:xfrm flipH="0" flipV="0">
-            <a:off x="3252186" y="6489750"/>
-            <a:ext cx="3613866" cy="3139799"/>
+            <a:off x="3252185" y="6489749"/>
+            <a:ext cx="3594425" cy="3261719"/>
           </a:xfrm>
           <a:prstGeom prst="rect">
             <a:avLst/>
@@ -18117,7 +18095,7 @@
                 <a:ea typeface="+mn-ea"/>
                 <a:cs typeface="+mn-cs"/>
               </a:rPr>
-              <a:t>Après un test de maîtrise de soi réussi, cochez une case de faim.</a:t>
+              <a:t>Après une épreuve de maîtrise de soi échouée, cochez une case de faim.</a:t>
             </a:r>
             <a:r>
               <a:rPr lang="fr-FR" sz="800" b="0" i="0" u="none" strike="noStrike" cap="none" spc="0">
@@ -18131,7 +18109,21 @@
                 <a:ea typeface="+mn-ea"/>
                 <a:cs typeface="+mn-cs"/>
               </a:rPr>
-              <a:t> Vous pouvez diminuer votre faim en vous laissant aller à celle-ci au cours d’une scène. Si vous échouez à votre test de maîtrise de soi, cochez une case de rage.</a:t>
+              <a:t> Si vous réussissez un choc de maîtrise de soi, cochez une case de faim. Si vous échouez à un choc de maîtrise de soi, cochez une case de rage. </a:t>
+            </a:r>
+            <a:r>
+              <a:rPr lang="fr-FR" sz="800" b="0" i="0" u="none" strike="noStrike" cap="none" spc="0">
+                <a:solidFill>
+                  <a:schemeClr val="tx1">
+                    <a:lumMod val="50000"/>
+                    <a:lumOff val="50000"/>
+                  </a:schemeClr>
+                </a:solidFill>
+                <a:latin typeface="Arial"/>
+                <a:ea typeface="Arial"/>
+                <a:cs typeface="Arial"/>
+              </a:rPr>
+              <a:t>Vous pouvez diminuer votre faim en vous laissant aller à celle-ci au cours d’une scène.</a:t>
             </a:r>
             <a:endParaRPr sz="800">
               <a:solidFill>
@@ -18389,7 +18381,7 @@
       </p:sp>
       <p:sp>
         <p:nvSpPr>
-          <p:cNvPr id="1817830570" name="ZoneTexte 1975797288"/>
+          <p:cNvPr id="679686526" name="ZoneTexte 1975797288"/>
           <p:cNvSpPr txBox="1"/>
           <p:nvPr/>
         </p:nvSpPr>
@@ -18429,7 +18421,7 @@
       </p:sp>
       <p:sp>
         <p:nvSpPr>
-          <p:cNvPr id="1971585763" name="ZoneTexte 2064865984"/>
+          <p:cNvPr id="1080242708" name="ZoneTexte 2064865984"/>
           <p:cNvSpPr txBox="1"/>
           <p:nvPr/>
         </p:nvSpPr>
@@ -18694,7 +18686,7 @@
       </p:sp>
       <p:sp>
         <p:nvSpPr>
-          <p:cNvPr id="397506746" name="ZoneTexte 1387173154"/>
+          <p:cNvPr id="768979426" name="ZoneTexte 1387173154"/>
           <p:cNvSpPr txBox="1"/>
           <p:nvPr/>
         </p:nvSpPr>
@@ -19074,7 +19066,7 @@
       </p:sp>
       <p:sp>
         <p:nvSpPr>
-          <p:cNvPr id="56001036" name="ZoneTexte 523755832"/>
+          <p:cNvPr id="701627336" name="ZoneTexte 523755832"/>
           <p:cNvSpPr txBox="1"/>
           <p:nvPr/>
         </p:nvSpPr>
@@ -19570,7 +19562,7 @@
       </p:sp>
       <p:cxnSp>
         <p:nvCxnSpPr>
-          <p:cNvPr id="1442167181" name="Connecteur droit 2085669542"/>
+          <p:cNvPr id="469805259" name="Connecteur droit 2085669542"/>
           <p:cNvCxnSpPr/>
           <p:nvPr/>
         </p:nvCxnSpPr>
@@ -19613,7 +19605,7 @@
       </p:cxnSp>
       <p:sp>
         <p:nvSpPr>
-          <p:cNvPr id="1198983638" name="ZoneTexte 34398067"/>
+          <p:cNvPr id="1295948456" name="ZoneTexte 34398067"/>
           <p:cNvSpPr txBox="1"/>
           <p:nvPr/>
         </p:nvSpPr>
@@ -19656,7 +19648,7 @@
       </p:sp>
       <p:sp>
         <p:nvSpPr>
-          <p:cNvPr id="978608668" name="ZoneTexte 273581705"/>
+          <p:cNvPr id="461347571" name="ZoneTexte 273581705"/>
           <p:cNvSpPr txBox="1"/>
           <p:nvPr/>
         </p:nvSpPr>
@@ -19954,7 +19946,7 @@
       </p:sp>
       <p:sp>
         <p:nvSpPr>
-          <p:cNvPr id="954761481" name="ZoneTexte 1727393832"/>
+          <p:cNvPr id="1739647728" name="ZoneTexte 1727393832"/>
           <p:cNvSpPr txBox="1"/>
           <p:nvPr/>
         </p:nvSpPr>
@@ -19996,7 +19988,7 @@
       </p:sp>
       <p:sp>
         <p:nvSpPr>
-          <p:cNvPr id="982535305" name="ZoneTexte 504516740"/>
+          <p:cNvPr id="409147043" name="ZoneTexte 504516740"/>
           <p:cNvSpPr txBox="1"/>
           <p:nvPr/>
         </p:nvSpPr>
@@ -20038,7 +20030,7 @@
       </p:sp>
       <p:sp>
         <p:nvSpPr>
-          <p:cNvPr id="746831229" name="ZoneTexte 1"/>
+          <p:cNvPr id="254907847" name="ZoneTexte 1"/>
           <p:cNvSpPr txBox="1"/>
           <p:nvPr/>
         </p:nvSpPr>
@@ -21501,7 +21493,7 @@
       </p:sp>
       <p:sp>
         <p:nvSpPr>
-          <p:cNvPr id="1377223522" name="ZoneTexte 2"/>
+          <p:cNvPr id="854874084" name="ZoneTexte 2"/>
           <p:cNvSpPr txBox="1"/>
           <p:nvPr/>
         </p:nvSpPr>
@@ -22039,7 +22031,7 @@
       </p:sp>
       <p:sp>
         <p:nvSpPr>
-          <p:cNvPr id="991754872" name=""/>
+          <p:cNvPr id="1602303910" name=""/>
           <p:cNvSpPr/>
           <p:nvPr/>
         </p:nvSpPr>
@@ -22079,7 +22071,7 @@
       </p:sp>
       <p:sp>
         <p:nvSpPr>
-          <p:cNvPr id="1568185821" name="Rectangle : avec coins arrondis en haut 1151560973"/>
+          <p:cNvPr id="1322435642" name="Rectangle : avec coins arrondis en haut 1151560973"/>
           <p:cNvSpPr/>
           <p:nvPr/>
         </p:nvSpPr>
@@ -22127,7 +22119,7 @@
       </p:sp>
       <p:sp>
         <p:nvSpPr>
-          <p:cNvPr id="798272772" name=""/>
+          <p:cNvPr id="1100762921" name=""/>
           <p:cNvSpPr/>
           <p:nvPr/>
         </p:nvSpPr>
@@ -22167,7 +22159,7 @@
       </p:sp>
       <p:sp>
         <p:nvSpPr>
-          <p:cNvPr id="1753183782" name="Rectangle : avec coins arrondis en haut 1151560973"/>
+          <p:cNvPr id="1667960735" name="Rectangle : avec coins arrondis en haut 1151560973"/>
           <p:cNvSpPr/>
           <p:nvPr/>
         </p:nvSpPr>
@@ -22215,7 +22207,7 @@
       </p:sp>
       <p:sp>
         <p:nvSpPr>
-          <p:cNvPr id="1791999018" name=""/>
+          <p:cNvPr id="1149175492" name=""/>
           <p:cNvSpPr/>
           <p:nvPr/>
         </p:nvSpPr>
@@ -22255,7 +22247,7 @@
       </p:sp>
       <p:sp>
         <p:nvSpPr>
-          <p:cNvPr id="707347440" name="Rectangle : avec coins arrondis en haut 1151560973"/>
+          <p:cNvPr id="225730948" name="Rectangle : avec coins arrondis en haut 1151560973"/>
           <p:cNvSpPr/>
           <p:nvPr/>
         </p:nvSpPr>
@@ -22303,7 +22295,7 @@
       </p:sp>
       <p:sp>
         <p:nvSpPr>
-          <p:cNvPr id="1694039779" name=""/>
+          <p:cNvPr id="930305326" name=""/>
           <p:cNvSpPr txBox="1"/>
           <p:nvPr/>
         </p:nvSpPr>
@@ -22368,7 +22360,7 @@
       </p:sp>
       <p:sp>
         <p:nvSpPr>
-          <p:cNvPr id="1691187295" name=""/>
+          <p:cNvPr id="996808007" name=""/>
           <p:cNvSpPr txBox="1"/>
           <p:nvPr/>
         </p:nvSpPr>
@@ -22497,7 +22489,7 @@
       </p:sp>
       <p:sp>
         <p:nvSpPr>
-          <p:cNvPr id="1548377374" name=""/>
+          <p:cNvPr id="336631616" name=""/>
           <p:cNvSpPr/>
           <p:nvPr/>
         </p:nvSpPr>
@@ -22568,7 +22560,7 @@
       </p:sp>
       <p:sp>
         <p:nvSpPr>
-          <p:cNvPr id="1552225654" name="Flèche : pentagone 1610574377"/>
+          <p:cNvPr id="1075153033" name="Flèche : pentagone 1610574377"/>
           <p:cNvSpPr/>
           <p:nvPr/>
         </p:nvSpPr>
@@ -22613,7 +22605,7 @@
       </p:sp>
       <p:sp>
         <p:nvSpPr>
-          <p:cNvPr id="1404151983" name="Flèche : pentagone 463861063"/>
+          <p:cNvPr id="850415433" name="Flèche : pentagone 463861063"/>
           <p:cNvSpPr/>
           <p:nvPr/>
         </p:nvSpPr>
@@ -22658,7 +22650,7 @@
       </p:sp>
       <p:sp>
         <p:nvSpPr>
-          <p:cNvPr id="368819361" name="Flèche : pentagone 272004907"/>
+          <p:cNvPr id="1198010113" name="Flèche : pentagone 272004907"/>
           <p:cNvSpPr/>
           <p:nvPr/>
         </p:nvSpPr>
@@ -22736,7 +22728,7 @@
       </p:grpSpPr>
       <p:cxnSp>
         <p:nvCxnSpPr>
-          <p:cNvPr id="1361626944" name="Connecteur droit 1942366049"/>
+          <p:cNvPr id="1484776467" name="Connecteur droit 1942366049"/>
           <p:cNvCxnSpPr/>
           <p:nvPr/>
         </p:nvCxnSpPr>
@@ -22779,7 +22771,7 @@
       </p:cxnSp>
       <p:sp>
         <p:nvSpPr>
-          <p:cNvPr id="323742760" name="ZoneTexte 483029020"/>
+          <p:cNvPr id="1504666801" name="ZoneTexte 483029020"/>
           <p:cNvSpPr txBox="1"/>
           <p:nvPr/>
         </p:nvSpPr>
@@ -22819,7 +22811,7 @@
       </p:sp>
       <p:cxnSp>
         <p:nvCxnSpPr>
-          <p:cNvPr id="223919695" name="Connecteur droit 626166318"/>
+          <p:cNvPr id="1257275958" name="Connecteur droit 626166318"/>
           <p:cNvCxnSpPr/>
           <p:nvPr/>
         </p:nvCxnSpPr>
@@ -22862,7 +22854,7 @@
       </p:cxnSp>
       <p:sp>
         <p:nvSpPr>
-          <p:cNvPr id="353649003" name="ZoneTexte 2021489157"/>
+          <p:cNvPr id="1975798018" name="ZoneTexte 2021489157"/>
           <p:cNvSpPr txBox="1"/>
           <p:nvPr/>
         </p:nvSpPr>
@@ -22902,7 +22894,7 @@
       </p:sp>
       <p:cxnSp>
         <p:nvCxnSpPr>
-          <p:cNvPr id="1929945060" name="Connecteur droit 1991074862"/>
+          <p:cNvPr id="425895818" name="Connecteur droit 1991074862"/>
           <p:cNvCxnSpPr/>
           <p:nvPr/>
         </p:nvCxnSpPr>
@@ -22945,7 +22937,7 @@
       </p:cxnSp>
       <p:sp>
         <p:nvSpPr>
-          <p:cNvPr id="886747521" name="ZoneTexte 1094835336"/>
+          <p:cNvPr id="1360303659" name="ZoneTexte 1094835336"/>
           <p:cNvSpPr txBox="1"/>
           <p:nvPr/>
         </p:nvSpPr>
@@ -23027,7 +23019,7 @@
       </p:sp>
       <p:sp>
         <p:nvSpPr>
-          <p:cNvPr id="884738375" name="Rectangle : avec coins arrondis en haut 1574209032"/>
+          <p:cNvPr id="223471646" name="Rectangle : avec coins arrondis en haut 1574209032"/>
           <p:cNvSpPr/>
           <p:nvPr/>
         </p:nvSpPr>
@@ -23073,7 +23065,7 @@
       </p:sp>
       <p:sp>
         <p:nvSpPr>
-          <p:cNvPr id="1704484196" name="Flèche : pentagone 521086653"/>
+          <p:cNvPr id="1507023305" name="Flèche : pentagone 521086653"/>
           <p:cNvSpPr/>
           <p:nvPr/>
         </p:nvSpPr>
@@ -23118,7 +23110,7 @@
       </p:sp>
       <p:sp>
         <p:nvSpPr>
-          <p:cNvPr id="499481763" name="Flèche : pentagone 1507310733"/>
+          <p:cNvPr id="710745071" name="Flèche : pentagone 1507310733"/>
           <p:cNvSpPr/>
           <p:nvPr/>
         </p:nvSpPr>
@@ -23163,7 +23155,7 @@
       </p:sp>
       <p:sp>
         <p:nvSpPr>
-          <p:cNvPr id="1250211229" name="Flèche : pentagone 732388424"/>
+          <p:cNvPr id="850134923" name="Flèche : pentagone 732388424"/>
           <p:cNvSpPr/>
           <p:nvPr/>
         </p:nvSpPr>
@@ -23208,7 +23200,7 @@
       </p:sp>
       <p:sp>
         <p:nvSpPr>
-          <p:cNvPr id="799554721" name="Flèche : pentagone 326874465"/>
+          <p:cNvPr id="1315492640" name="Flèche : pentagone 326874465"/>
           <p:cNvSpPr/>
           <p:nvPr/>
         </p:nvSpPr>
@@ -23253,7 +23245,7 @@
       </p:sp>
       <p:sp>
         <p:nvSpPr>
-          <p:cNvPr id="1174155179" name="Flèche : pentagone 2090650957"/>
+          <p:cNvPr id="708903371" name="Flèche : pentagone 2090650957"/>
           <p:cNvSpPr/>
           <p:nvPr/>
         </p:nvSpPr>
@@ -23298,14 +23290,14 @@
       </p:sp>
       <p:sp>
         <p:nvSpPr>
-          <p:cNvPr id="640628238" name="ZoneTexte 1374103996"/>
+          <p:cNvPr id="41714026" name="ZoneTexte 1374103996"/>
           <p:cNvSpPr txBox="1"/>
           <p:nvPr/>
         </p:nvSpPr>
         <p:spPr bwMode="auto">
           <a:xfrm flipH="0" flipV="0">
-            <a:off x="3252177" y="7134400"/>
-            <a:ext cx="3639114" cy="2652119"/>
+            <a:off x="3252177" y="7134399"/>
+            <a:ext cx="3602394" cy="2774039"/>
           </a:xfrm>
           <a:prstGeom prst="rect">
             <a:avLst/>
@@ -23330,7 +23322,7 @@
                   </a:schemeClr>
                 </a:solidFill>
               </a:rPr>
-              <a:t>Chaque case d’Hubris cochée entraîne un </a:t>
+              <a:t>Chaque case d’hubris cochée entraîne un </a:t>
             </a:r>
             <a:r>
               <a:rPr sz="800" b="1">
@@ -23366,7 +23358,7 @@
                 <a:ea typeface="+mn-ea"/>
                 <a:cs typeface="+mn-cs"/>
               </a:rPr>
-              <a:t>Après un test de maîtrise de soi réussi, cochez une case d’hubris. Vous pouvez diminuer votre hubris en méditant pour vous reconnecter à votre nature profonde durant une scène et en pratiquant un rituel de purification.</a:t>
+              <a:t>Après une épreuve de maîtrise de soi échouée, cochez une case d’hubris. </a:t>
             </a:r>
             <a:r>
               <a:rPr lang="fr-FR" sz="800" b="0" i="0" u="none" strike="noStrike" cap="none" spc="0">
@@ -23380,7 +23372,21 @@
                 <a:ea typeface="Arial"/>
                 <a:cs typeface="Arial"/>
               </a:rPr>
-              <a:t> Si vous échouez à votre test de maîtrise de soi, cochez une case de corruption.</a:t>
+              <a:t>Si vous réussissez un choc de maîtrise de soi, cochez une case d’hubris. Si vous échouez à un choc de maîtrise de soi, cochez une case de corruption. </a:t>
+            </a:r>
+            <a:r>
+              <a:rPr lang="fr-FR" sz="800" b="0" i="0" u="none" strike="noStrike" cap="none" spc="0">
+                <a:solidFill>
+                  <a:schemeClr val="tx1">
+                    <a:lumMod val="50000"/>
+                    <a:lumOff val="50000"/>
+                  </a:schemeClr>
+                </a:solidFill>
+                <a:latin typeface="Arial"/>
+                <a:ea typeface="Arial"/>
+                <a:cs typeface="Arial"/>
+              </a:rPr>
+              <a:t>Vous pouvez diminuer votre hubris en méditant pour vous reconnecter à votre nature profonde durant une scène et en pratiquant un rituel de purification.</a:t>
             </a:r>
             <a:endParaRPr lang="fr-FR" sz="800" b="0" i="0" u="none" strike="noStrike" cap="none" spc="0">
               <a:solidFill>
@@ -23571,7 +23577,7 @@
       </p:sp>
       <p:sp>
         <p:nvSpPr>
-          <p:cNvPr id="787531564" name="ZoneTexte 1748705365"/>
+          <p:cNvPr id="1708275734" name="ZoneTexte 1748705365"/>
           <p:cNvSpPr txBox="1"/>
           <p:nvPr/>
         </p:nvSpPr>
@@ -23611,7 +23617,7 @@
       </p:sp>
       <p:cxnSp>
         <p:nvCxnSpPr>
-          <p:cNvPr id="478178043" name="Connecteur droit 1556830908"/>
+          <p:cNvPr id="1670723432" name="Connecteur droit 1556830908"/>
           <p:cNvCxnSpPr/>
           <p:nvPr/>
         </p:nvCxnSpPr>
@@ -23654,7 +23660,7 @@
       </p:cxnSp>
       <p:sp>
         <p:nvSpPr>
-          <p:cNvPr id="805618818" name="ZoneTexte 409639257"/>
+          <p:cNvPr id="1298133452" name="ZoneTexte 409639257"/>
           <p:cNvSpPr txBox="1"/>
           <p:nvPr/>
         </p:nvSpPr>
@@ -23704,7 +23710,7 @@
       </p:sp>
       <p:sp>
         <p:nvSpPr>
-          <p:cNvPr id="872464940" name="ZoneTexte 1168472887"/>
+          <p:cNvPr id="1651004070" name="ZoneTexte 1168472887"/>
           <p:cNvSpPr txBox="1"/>
           <p:nvPr/>
         </p:nvSpPr>
@@ -23989,7 +23995,7 @@
       </p:sp>
       <p:sp>
         <p:nvSpPr>
-          <p:cNvPr id="1846095214" name="ZoneTexte 114796530"/>
+          <p:cNvPr id="1596943327" name="ZoneTexte 114796530"/>
           <p:cNvSpPr txBox="1"/>
           <p:nvPr/>
         </p:nvSpPr>
@@ -24367,7 +24373,7 @@
       </p:sp>
       <p:sp>
         <p:nvSpPr>
-          <p:cNvPr id="641833951" name="ZoneTexte 1085068195"/>
+          <p:cNvPr id="489235130" name="ZoneTexte 1085068195"/>
           <p:cNvSpPr txBox="1"/>
           <p:nvPr/>
         </p:nvSpPr>
@@ -25493,7 +25499,7 @@
       </p:sp>
       <p:sp>
         <p:nvSpPr>
-          <p:cNvPr id="313954208" name="Étoile : 5 branches 278736380"/>
+          <p:cNvPr id="909321350" name="Étoile : 5 branches 278736380"/>
           <p:cNvSpPr/>
           <p:nvPr/>
         </p:nvSpPr>
@@ -25540,7 +25546,7 @@
       </p:sp>
       <p:sp>
         <p:nvSpPr>
-          <p:cNvPr id="818346800" name="Étoile : 5 branches 1495350449"/>
+          <p:cNvPr id="690427963" name="Étoile : 5 branches 1495350449"/>
           <p:cNvSpPr/>
           <p:nvPr/>
         </p:nvSpPr>
@@ -25587,7 +25593,7 @@
       </p:sp>
       <p:sp>
         <p:nvSpPr>
-          <p:cNvPr id="1280394579" name="Étoile : 5 branches 79046386"/>
+          <p:cNvPr id="999586084" name="Étoile : 5 branches 79046386"/>
           <p:cNvSpPr/>
           <p:nvPr/>
         </p:nvSpPr>
@@ -25634,7 +25640,7 @@
       </p:sp>
       <p:sp>
         <p:nvSpPr>
-          <p:cNvPr id="1709261930" name="Étoile : 5 branches 749256076"/>
+          <p:cNvPr id="1474669068" name="Étoile : 5 branches 749256076"/>
           <p:cNvSpPr/>
           <p:nvPr/>
         </p:nvSpPr>
@@ -25681,7 +25687,7 @@
       </p:sp>
       <p:sp>
         <p:nvSpPr>
-          <p:cNvPr id="378524086" name="Étoile : 5 branches 411245083"/>
+          <p:cNvPr id="766989575" name="Étoile : 5 branches 411245083"/>
           <p:cNvSpPr/>
           <p:nvPr/>
         </p:nvSpPr>
@@ -25728,7 +25734,7 @@
       </p:sp>
       <p:sp>
         <p:nvSpPr>
-          <p:cNvPr id="587470465" name="ZoneTexte 496444952"/>
+          <p:cNvPr id="1735966127" name="ZoneTexte 496444952"/>
           <p:cNvSpPr txBox="1"/>
           <p:nvPr/>
         </p:nvSpPr>
@@ -25770,7 +25776,7 @@
       </p:sp>
       <p:sp>
         <p:nvSpPr>
-          <p:cNvPr id="1025022191" name="ZoneTexte 474433989"/>
+          <p:cNvPr id="196173645" name="ZoneTexte 474433989"/>
           <p:cNvSpPr txBox="1"/>
           <p:nvPr/>
         </p:nvSpPr>
@@ -25812,7 +25818,7 @@
       </p:sp>
       <p:sp>
         <p:nvSpPr>
-          <p:cNvPr id="794250017" name="ZoneTexte 1"/>
+          <p:cNvPr id="626535147" name="ZoneTexte 1"/>
           <p:cNvSpPr txBox="1"/>
           <p:nvPr/>
         </p:nvSpPr>
@@ -25913,7 +25919,7 @@
       </p:sp>
       <p:sp>
         <p:nvSpPr>
-          <p:cNvPr id="2078935424" name="ZoneTexte 2"/>
+          <p:cNvPr id="1996539142" name="ZoneTexte 2"/>
           <p:cNvSpPr txBox="1"/>
           <p:nvPr/>
         </p:nvSpPr>
@@ -26031,7 +26037,7 @@
       </p:sp>
       <p:sp>
         <p:nvSpPr>
-          <p:cNvPr id="2130877399" name=""/>
+          <p:cNvPr id="1735183187" name=""/>
           <p:cNvSpPr/>
           <p:nvPr/>
         </p:nvSpPr>
@@ -26102,7 +26108,7 @@
       </p:sp>
       <p:sp>
         <p:nvSpPr>
-          <p:cNvPr id="1768233873" name="Flèche : pentagone 1507310733"/>
+          <p:cNvPr id="1993262628" name="Flèche : pentagone 1507310733"/>
           <p:cNvSpPr/>
           <p:nvPr/>
         </p:nvSpPr>
@@ -26147,7 +26153,7 @@
       </p:sp>
       <p:sp>
         <p:nvSpPr>
-          <p:cNvPr id="1794425274" name="Flèche : pentagone 732388424"/>
+          <p:cNvPr id="1519321939" name="Flèche : pentagone 732388424"/>
           <p:cNvSpPr/>
           <p:nvPr/>
         </p:nvSpPr>
@@ -26192,7 +26198,7 @@
       </p:sp>
       <p:sp>
         <p:nvSpPr>
-          <p:cNvPr id="2133463687" name="Flèche : pentagone 326874465"/>
+          <p:cNvPr id="1007289477" name="Flèche : pentagone 326874465"/>
           <p:cNvSpPr/>
           <p:nvPr/>
         </p:nvSpPr>
@@ -26270,7 +26276,7 @@
       </p:grpSpPr>
       <p:sp>
         <p:nvSpPr>
-          <p:cNvPr id="1968950398" name="ZoneTexte 273581705"/>
+          <p:cNvPr id="76367496" name="ZoneTexte 273581705"/>
           <p:cNvSpPr txBox="1"/>
           <p:nvPr/>
         </p:nvSpPr>
@@ -26568,7 +26574,7 @@
       </p:sp>
       <p:cxnSp>
         <p:nvCxnSpPr>
-          <p:cNvPr id="1050238293" name="Connecteur droit 1094832104"/>
+          <p:cNvPr id="819180566" name="Connecteur droit 1094832104"/>
           <p:cNvCxnSpPr/>
           <p:nvPr/>
         </p:nvCxnSpPr>
@@ -26611,7 +26617,7 @@
       </p:cxnSp>
       <p:sp>
         <p:nvSpPr>
-          <p:cNvPr id="684138979" name="ZoneTexte 2078543737"/>
+          <p:cNvPr id="1987112866" name="ZoneTexte 2078543737"/>
           <p:cNvSpPr txBox="1"/>
           <p:nvPr/>
         </p:nvSpPr>
@@ -26651,7 +26657,7 @@
       </p:sp>
       <p:cxnSp>
         <p:nvCxnSpPr>
-          <p:cNvPr id="2020117561" name="Connecteur droit 853743145"/>
+          <p:cNvPr id="240915531" name="Connecteur droit 853743145"/>
           <p:cNvCxnSpPr/>
           <p:nvPr/>
         </p:nvCxnSpPr>
@@ -26694,7 +26700,7 @@
       </p:cxnSp>
       <p:sp>
         <p:nvSpPr>
-          <p:cNvPr id="1624027286" name="ZoneTexte 1473119298"/>
+          <p:cNvPr id="1201220389" name="ZoneTexte 1473119298"/>
           <p:cNvSpPr txBox="1"/>
           <p:nvPr/>
         </p:nvSpPr>
@@ -26734,7 +26740,7 @@
       </p:sp>
       <p:cxnSp>
         <p:nvCxnSpPr>
-          <p:cNvPr id="2078538214" name="Connecteur droit 1727809509"/>
+          <p:cNvPr id="853975640" name="Connecteur droit 1727809509"/>
           <p:cNvCxnSpPr/>
           <p:nvPr/>
         </p:nvCxnSpPr>
@@ -26777,7 +26783,7 @@
       </p:cxnSp>
       <p:sp>
         <p:nvSpPr>
-          <p:cNvPr id="641953977" name="ZoneTexte 759238070"/>
+          <p:cNvPr id="1564390764" name="ZoneTexte 759238070"/>
           <p:cNvSpPr txBox="1"/>
           <p:nvPr/>
         </p:nvSpPr>
@@ -26852,7 +26858,7 @@
       </p:sp>
       <p:sp>
         <p:nvSpPr>
-          <p:cNvPr id="1960519122" name="Rectangle : avec coins arrondis en haut 965147191"/>
+          <p:cNvPr id="1987219180" name="Rectangle : avec coins arrondis en haut 965147191"/>
           <p:cNvSpPr/>
           <p:nvPr/>
         </p:nvSpPr>
@@ -26898,7 +26904,7 @@
       </p:sp>
       <p:sp>
         <p:nvSpPr>
-          <p:cNvPr id="65735639" name="Flèche : pentagone 2070329900"/>
+          <p:cNvPr id="1618510730" name="Flèche : pentagone 2070329900"/>
           <p:cNvSpPr/>
           <p:nvPr/>
         </p:nvSpPr>
@@ -26943,7 +26949,7 @@
       </p:sp>
       <p:sp>
         <p:nvSpPr>
-          <p:cNvPr id="1370491936" name="Flèche : pentagone 1325137089"/>
+          <p:cNvPr id="470940618" name="Flèche : pentagone 1325137089"/>
           <p:cNvSpPr/>
           <p:nvPr/>
         </p:nvSpPr>
@@ -26988,7 +26994,7 @@
       </p:sp>
       <p:sp>
         <p:nvSpPr>
-          <p:cNvPr id="1085323765" name="Flèche : pentagone 295922856"/>
+          <p:cNvPr id="658289539" name="Flèche : pentagone 295922856"/>
           <p:cNvSpPr/>
           <p:nvPr/>
         </p:nvSpPr>
@@ -27033,7 +27039,7 @@
       </p:sp>
       <p:sp>
         <p:nvSpPr>
-          <p:cNvPr id="823918728" name="Flèche : pentagone 1961547672"/>
+          <p:cNvPr id="274052788" name="Flèche : pentagone 1961547672"/>
           <p:cNvSpPr/>
           <p:nvPr/>
         </p:nvSpPr>
@@ -27078,7 +27084,7 @@
       </p:sp>
       <p:sp>
         <p:nvSpPr>
-          <p:cNvPr id="1055890644" name="Flèche : pentagone 1305647833"/>
+          <p:cNvPr id="1157465230" name="Flèche : pentagone 1305647833"/>
           <p:cNvSpPr/>
           <p:nvPr/>
         </p:nvSpPr>
@@ -27123,14 +27129,14 @@
       </p:sp>
       <p:sp>
         <p:nvSpPr>
-          <p:cNvPr id="1125901458" name="ZoneTexte 545814566"/>
+          <p:cNvPr id="353563391" name="ZoneTexte 545814566"/>
           <p:cNvSpPr txBox="1"/>
           <p:nvPr/>
         </p:nvSpPr>
         <p:spPr bwMode="auto">
           <a:xfrm flipH="0" flipV="0">
-            <a:off x="3252178" y="7249356"/>
-            <a:ext cx="3621472" cy="2408279"/>
+            <a:off x="3252177" y="7209668"/>
+            <a:ext cx="3603111" cy="2652119"/>
           </a:xfrm>
           <a:prstGeom prst="rect">
             <a:avLst/>
@@ -27177,7 +27183,7 @@
                   </a:schemeClr>
                 </a:solidFill>
               </a:rPr>
-              <a:t>. Après un test de maîtrise de soi réussi, cochez une case de soif. </a:t>
+              <a:t>. Si vous échouez à une épreuve de maîtrise de soi, cochez une case de soif. </a:t>
             </a:r>
             <a:r>
               <a:rPr lang="fr-FR" sz="800" b="0" i="0" u="none" strike="noStrike" cap="none" spc="0">
@@ -27191,7 +27197,7 @@
                 <a:ea typeface="+mn-ea"/>
                 <a:cs typeface="+mn-cs"/>
               </a:rPr>
-              <a:t>Si vous échouez à un test de maîtrise de soi, cochez une case de perversion. Lorsque vous vous nourrissez de sang, vous pouvez effacer vos cases de soif. </a:t>
+              <a:t>Si vous réussissez à un choc de maîtrise de soi, cochez une case de soif. Si vous échouez à un choc de maîtrise de soi, cochez une case de perversion. Lorsque vous vous nourrissez de sang, vous pouvez effacer vos cases de soif. </a:t>
             </a:r>
             <a:endParaRPr sz="800">
               <a:solidFill>
@@ -27425,7 +27431,7 @@
       </p:sp>
       <p:sp>
         <p:nvSpPr>
-          <p:cNvPr id="1720304327" name="ZoneTexte 671978155"/>
+          <p:cNvPr id="1563888156" name="ZoneTexte 671978155"/>
           <p:cNvSpPr txBox="1"/>
           <p:nvPr/>
         </p:nvSpPr>
@@ -27465,7 +27471,7 @@
       </p:sp>
       <p:cxnSp>
         <p:nvCxnSpPr>
-          <p:cNvPr id="2066098241" name="Connecteur droit 637589304"/>
+          <p:cNvPr id="1770152566" name="Connecteur droit 637589304"/>
           <p:cNvCxnSpPr/>
           <p:nvPr/>
         </p:nvCxnSpPr>
@@ -27508,7 +27514,7 @@
       </p:cxnSp>
       <p:sp>
         <p:nvSpPr>
-          <p:cNvPr id="217350333" name="ZoneTexte 172075623"/>
+          <p:cNvPr id="849397241" name="ZoneTexte 172075623"/>
           <p:cNvSpPr txBox="1"/>
           <p:nvPr/>
         </p:nvSpPr>
@@ -27558,7 +27564,7 @@
       </p:sp>
       <p:sp>
         <p:nvSpPr>
-          <p:cNvPr id="1194353101" name="ZoneTexte 1642812764"/>
+          <p:cNvPr id="1022739783" name="ZoneTexte 1642812764"/>
           <p:cNvSpPr txBox="1"/>
           <p:nvPr/>
         </p:nvSpPr>
@@ -27747,7 +27753,7 @@
       </p:sp>
       <p:sp>
         <p:nvSpPr>
-          <p:cNvPr id="151346959" name="Étoile : 7 branches 1681961038"/>
+          <p:cNvPr id="1357926259" name="Étoile : 7 branches 1681961038"/>
           <p:cNvSpPr/>
           <p:nvPr/>
         </p:nvSpPr>
@@ -27794,7 +27800,7 @@
       </p:sp>
       <p:sp>
         <p:nvSpPr>
-          <p:cNvPr id="78213850" name="Étoile : 7 branches 1476951547"/>
+          <p:cNvPr id="1548474571" name="Étoile : 7 branches 1476951547"/>
           <p:cNvSpPr/>
           <p:nvPr/>
         </p:nvSpPr>
@@ -27841,7 +27847,7 @@
       </p:sp>
       <p:sp>
         <p:nvSpPr>
-          <p:cNvPr id="802274116" name="Étoile : 7 branches 1520826925"/>
+          <p:cNvPr id="980611172" name="Étoile : 7 branches 1520826925"/>
           <p:cNvSpPr/>
           <p:nvPr/>
         </p:nvSpPr>
@@ -27888,7 +27894,7 @@
       </p:sp>
       <p:sp>
         <p:nvSpPr>
-          <p:cNvPr id="927022789" name="ZoneTexte 1219899073"/>
+          <p:cNvPr id="834398221" name="ZoneTexte 1219899073"/>
           <p:cNvSpPr txBox="1"/>
           <p:nvPr/>
         </p:nvSpPr>
@@ -27928,7 +27934,7 @@
       </p:sp>
       <p:sp>
         <p:nvSpPr>
-          <p:cNvPr id="894270370" name="ZoneTexte 1283574123"/>
+          <p:cNvPr id="830181110" name="ZoneTexte 1283574123"/>
           <p:cNvSpPr txBox="1"/>
           <p:nvPr/>
         </p:nvSpPr>
@@ -28911,7 +28917,7 @@
       </p:sp>
       <p:sp>
         <p:nvSpPr>
-          <p:cNvPr id="612114348" name="ZoneTexte 790352176"/>
+          <p:cNvPr id="1740626819" name="ZoneTexte 790352176"/>
           <p:cNvSpPr txBox="1"/>
           <p:nvPr/>
         </p:nvSpPr>
@@ -28953,7 +28959,7 @@
       </p:sp>
       <p:sp>
         <p:nvSpPr>
-          <p:cNvPr id="882678340" name="ZoneTexte 2025740189"/>
+          <p:cNvPr id="1280907199" name="ZoneTexte 2025740189"/>
           <p:cNvSpPr txBox="1"/>
           <p:nvPr/>
         </p:nvSpPr>
@@ -29010,7 +29016,7 @@
       </p:sp>
       <p:sp>
         <p:nvSpPr>
-          <p:cNvPr id="824273109" name=""/>
+          <p:cNvPr id="320926438" name=""/>
           <p:cNvSpPr/>
           <p:nvPr/>
         </p:nvSpPr>
@@ -29050,7 +29056,7 @@
       </p:sp>
       <p:sp>
         <p:nvSpPr>
-          <p:cNvPr id="582113805" name="Rectangle : avec coins arrondis en haut 1151560973"/>
+          <p:cNvPr id="1287122166" name="Rectangle : avec coins arrondis en haut 1151560973"/>
           <p:cNvSpPr/>
           <p:nvPr/>
         </p:nvSpPr>
@@ -29098,7 +29104,7 @@
       </p:sp>
       <p:sp>
         <p:nvSpPr>
-          <p:cNvPr id="1217321013" name=""/>
+          <p:cNvPr id="168376835" name=""/>
           <p:cNvSpPr/>
           <p:nvPr/>
         </p:nvSpPr>
@@ -29138,7 +29144,7 @@
       </p:sp>
       <p:sp>
         <p:nvSpPr>
-          <p:cNvPr id="1593386879" name="Rectangle : avec coins arrondis en haut 1151560973"/>
+          <p:cNvPr id="1314108518" name="Rectangle : avec coins arrondis en haut 1151560973"/>
           <p:cNvSpPr/>
           <p:nvPr/>
         </p:nvSpPr>
@@ -29186,7 +29192,7 @@
       </p:sp>
       <p:sp>
         <p:nvSpPr>
-          <p:cNvPr id="737342628" name=""/>
+          <p:cNvPr id="460959396" name=""/>
           <p:cNvSpPr/>
           <p:nvPr/>
         </p:nvSpPr>
@@ -29226,7 +29232,7 @@
       </p:sp>
       <p:sp>
         <p:nvSpPr>
-          <p:cNvPr id="1839835660" name="Rectangle : avec coins arrondis en haut 1151560973"/>
+          <p:cNvPr id="1813943262" name="Rectangle : avec coins arrondis en haut 1151560973"/>
           <p:cNvSpPr/>
           <p:nvPr/>
         </p:nvSpPr>
@@ -29274,7 +29280,7 @@
       </p:sp>
       <p:sp>
         <p:nvSpPr>
-          <p:cNvPr id="1124911377" name=""/>
+          <p:cNvPr id="1589702726" name=""/>
           <p:cNvSpPr txBox="1"/>
           <p:nvPr/>
         </p:nvSpPr>
@@ -29402,7 +29408,7 @@
       </p:sp>
       <p:sp>
         <p:nvSpPr>
-          <p:cNvPr id="398705570" name=""/>
+          <p:cNvPr id="603214370" name=""/>
           <p:cNvSpPr txBox="1"/>
           <p:nvPr/>
         </p:nvSpPr>
@@ -29525,7 +29531,7 @@
       </p:sp>
       <p:sp>
         <p:nvSpPr>
-          <p:cNvPr id="1634646182" name=""/>
+          <p:cNvPr id="2007710764" name=""/>
           <p:cNvSpPr/>
           <p:nvPr/>
         </p:nvSpPr>
@@ -29596,7 +29602,7 @@
       </p:sp>
       <p:sp>
         <p:nvSpPr>
-          <p:cNvPr id="815866738" name="Flèche : pentagone 1325137089"/>
+          <p:cNvPr id="1059096730" name="Flèche : pentagone 1325137089"/>
           <p:cNvSpPr/>
           <p:nvPr/>
         </p:nvSpPr>
@@ -29641,7 +29647,7 @@
       </p:sp>
       <p:sp>
         <p:nvSpPr>
-          <p:cNvPr id="1604799581" name="Flèche : pentagone 295922856"/>
+          <p:cNvPr id="594854256" name="Flèche : pentagone 295922856"/>
           <p:cNvSpPr/>
           <p:nvPr/>
         </p:nvSpPr>
@@ -29686,7 +29692,7 @@
       </p:sp>
       <p:sp>
         <p:nvSpPr>
-          <p:cNvPr id="1833788049" name="Flèche : pentagone 1961547672"/>
+          <p:cNvPr id="6365743" name="Flèche : pentagone 1961547672"/>
           <p:cNvSpPr/>
           <p:nvPr/>
         </p:nvSpPr>
@@ -29764,7 +29770,7 @@
       </p:grpSpPr>
       <p:cxnSp>
         <p:nvCxnSpPr>
-          <p:cNvPr id="1121445696" name="Connecteur droit 266926011"/>
+          <p:cNvPr id="1753681886" name="Connecteur droit 266926011"/>
           <p:cNvCxnSpPr/>
           <p:nvPr/>
         </p:nvCxnSpPr>
@@ -29807,7 +29813,7 @@
       </p:cxnSp>
       <p:sp>
         <p:nvSpPr>
-          <p:cNvPr id="2127747989" name="ZoneTexte 1043763612"/>
+          <p:cNvPr id="259543649" name="ZoneTexte 1043763612"/>
           <p:cNvSpPr txBox="1"/>
           <p:nvPr/>
         </p:nvSpPr>
@@ -29847,7 +29853,7 @@
       </p:sp>
       <p:cxnSp>
         <p:nvCxnSpPr>
-          <p:cNvPr id="1509716605" name="Connecteur droit 1586327141"/>
+          <p:cNvPr id="820006435" name="Connecteur droit 1586327141"/>
           <p:cNvCxnSpPr/>
           <p:nvPr/>
         </p:nvCxnSpPr>
@@ -29890,7 +29896,7 @@
       </p:cxnSp>
       <p:sp>
         <p:nvSpPr>
-          <p:cNvPr id="920824085" name="ZoneTexte 1691387439"/>
+          <p:cNvPr id="345008247" name="ZoneTexte 1691387439"/>
           <p:cNvSpPr txBox="1"/>
           <p:nvPr/>
         </p:nvSpPr>
@@ -29930,7 +29936,7 @@
       </p:sp>
       <p:cxnSp>
         <p:nvCxnSpPr>
-          <p:cNvPr id="1832300827" name="Connecteur droit 1743707585"/>
+          <p:cNvPr id="1904516477" name="Connecteur droit 1743707585"/>
           <p:cNvCxnSpPr/>
           <p:nvPr/>
         </p:nvCxnSpPr>
@@ -29973,7 +29979,7 @@
       </p:cxnSp>
       <p:sp>
         <p:nvSpPr>
-          <p:cNvPr id="655736038" name="ZoneTexte 1503300725"/>
+          <p:cNvPr id="435482451" name="ZoneTexte 1503300725"/>
           <p:cNvSpPr txBox="1"/>
           <p:nvPr/>
         </p:nvSpPr>
@@ -30055,7 +30061,7 @@
       </p:sp>
       <p:sp>
         <p:nvSpPr>
-          <p:cNvPr id="865874376" name="Rectangle : avec coins arrondis en haut 1151560973"/>
+          <p:cNvPr id="220385855" name="Rectangle : avec coins arrondis en haut 1151560973"/>
           <p:cNvSpPr/>
           <p:nvPr/>
         </p:nvSpPr>
@@ -30101,7 +30107,7 @@
       </p:sp>
       <p:sp>
         <p:nvSpPr>
-          <p:cNvPr id="1096912003" name="Flèche : pentagone 1610574377"/>
+          <p:cNvPr id="856706994" name="Flèche : pentagone 1610574377"/>
           <p:cNvSpPr/>
           <p:nvPr/>
         </p:nvSpPr>
@@ -30146,7 +30152,7 @@
       </p:sp>
       <p:sp>
         <p:nvSpPr>
-          <p:cNvPr id="472406102" name="Flèche : pentagone 463861063"/>
+          <p:cNvPr id="75443619" name="Flèche : pentagone 463861063"/>
           <p:cNvSpPr/>
           <p:nvPr/>
         </p:nvSpPr>
@@ -30191,7 +30197,7 @@
       </p:sp>
       <p:sp>
         <p:nvSpPr>
-          <p:cNvPr id="854035438" name="Flèche : pentagone 272004907"/>
+          <p:cNvPr id="2091102768" name="Flèche : pentagone 272004907"/>
           <p:cNvSpPr/>
           <p:nvPr/>
         </p:nvSpPr>
@@ -30236,7 +30242,7 @@
       </p:sp>
       <p:sp>
         <p:nvSpPr>
-          <p:cNvPr id="541023008" name="Flèche : pentagone 28174069"/>
+          <p:cNvPr id="89635411" name="Flèche : pentagone 28174069"/>
           <p:cNvSpPr/>
           <p:nvPr/>
         </p:nvSpPr>
@@ -30281,7 +30287,7 @@
       </p:sp>
       <p:sp>
         <p:nvSpPr>
-          <p:cNvPr id="634634263" name="Flèche : pentagone 978127220"/>
+          <p:cNvPr id="777402171" name="Flèche : pentagone 978127220"/>
           <p:cNvSpPr/>
           <p:nvPr/>
         </p:nvSpPr>
@@ -30326,14 +30332,14 @@
       </p:sp>
       <p:sp>
         <p:nvSpPr>
-          <p:cNvPr id="1061747482" name="ZoneTexte 1693594013"/>
+          <p:cNvPr id="1109355734" name="ZoneTexte 1693594013"/>
           <p:cNvSpPr txBox="1"/>
           <p:nvPr/>
         </p:nvSpPr>
         <p:spPr bwMode="auto">
           <a:xfrm flipH="0" flipV="0">
-            <a:off x="3252178" y="6794593"/>
-            <a:ext cx="3604192" cy="2895959"/>
+            <a:off x="3252177" y="6794592"/>
+            <a:ext cx="3613194" cy="3017880"/>
           </a:xfrm>
           <a:prstGeom prst="rect">
             <a:avLst/>
@@ -30391,7 +30397,7 @@
                   </a:schemeClr>
                 </a:solidFill>
               </a:rPr>
-              <a:t> </a:t>
+              <a:t> Si vous échouez une épreuve </a:t>
             </a:r>
             <a:r>
               <a:rPr lang="fr-FR" sz="800" b="0" i="0" u="none" strike="noStrike" cap="none" spc="0">
@@ -30405,7 +30411,7 @@
                 <a:ea typeface="Arial"/>
                 <a:cs typeface="Arial"/>
               </a:rPr>
-              <a:t>Après un test de maîtrise de soi réussi, cochez une case de pulsation. Si vous échouez à votre test de maîtrise de soi, cochez une case de colère.</a:t>
+              <a:t>de maîtrise de soi, cochez une case de pulsation. Si vous réussissez un choc de maîtrise de soi, cochez une case de pulsation. Si vous échouez à un choc de maîtrise de soi, cochez une case de colère.</a:t>
             </a:r>
             <a:r>
               <a:rPr lang="fr-FR" sz="800" b="0" i="0" u="none" strike="noStrike" cap="none" spc="0">
@@ -30419,7 +30425,7 @@
                 <a:ea typeface="Arial"/>
                 <a:cs typeface="Arial"/>
               </a:rPr>
-              <a:t> Vous pouvez diminuer votre pulsation en vous harmonisant à la nature.</a:t>
+              <a:t> Vous pouvez effacer une case de pulsation en vous harmonisant à la nature.</a:t>
             </a:r>
             <a:endParaRPr sz="800">
               <a:solidFill>
@@ -30677,7 +30683,7 @@
       </p:sp>
       <p:sp>
         <p:nvSpPr>
-          <p:cNvPr id="72887749" name="ZoneTexte 1975797288"/>
+          <p:cNvPr id="16740282" name="ZoneTexte 1975797288"/>
           <p:cNvSpPr txBox="1"/>
           <p:nvPr/>
         </p:nvSpPr>
@@ -30717,7 +30723,7 @@
       </p:sp>
       <p:sp>
         <p:nvSpPr>
-          <p:cNvPr id="954971418" name="ZoneTexte 2064865984"/>
+          <p:cNvPr id="1402627254" name="ZoneTexte 2064865984"/>
           <p:cNvSpPr txBox="1"/>
           <p:nvPr/>
         </p:nvSpPr>
@@ -30939,7 +30945,7 @@
       </p:sp>
       <p:sp>
         <p:nvSpPr>
-          <p:cNvPr id="1380473758" name="ZoneTexte 1387173154"/>
+          <p:cNvPr id="1351452128" name="ZoneTexte 1387173154"/>
           <p:cNvSpPr txBox="1"/>
           <p:nvPr/>
         </p:nvSpPr>
@@ -31191,7 +31197,7 @@
       </p:sp>
       <p:sp>
         <p:nvSpPr>
-          <p:cNvPr id="624966799" name="ZoneTexte 523755832"/>
+          <p:cNvPr id="553804603" name="ZoneTexte 523755832"/>
           <p:cNvSpPr txBox="1"/>
           <p:nvPr/>
         </p:nvSpPr>
@@ -31451,7 +31457,7 @@
       </p:sp>
       <p:cxnSp>
         <p:nvCxnSpPr>
-          <p:cNvPr id="754440574" name="Connecteur droit 2085669542"/>
+          <p:cNvPr id="1673881241" name="Connecteur droit 2085669542"/>
           <p:cNvCxnSpPr/>
           <p:nvPr/>
         </p:nvCxnSpPr>
@@ -31494,7 +31500,7 @@
       </p:cxnSp>
       <p:sp>
         <p:nvSpPr>
-          <p:cNvPr id="1170164881" name="ZoneTexte 34398067"/>
+          <p:cNvPr id="586965177" name="ZoneTexte 34398067"/>
           <p:cNvSpPr txBox="1"/>
           <p:nvPr/>
         </p:nvSpPr>
@@ -31537,7 +31543,7 @@
       </p:sp>
       <p:sp>
         <p:nvSpPr>
-          <p:cNvPr id="716214869" name="ZoneTexte 273581705"/>
+          <p:cNvPr id="1362357947" name="ZoneTexte 273581705"/>
           <p:cNvSpPr txBox="1"/>
           <p:nvPr/>
         </p:nvSpPr>
@@ -31835,7 +31841,7 @@
       </p:sp>
       <p:sp>
         <p:nvSpPr>
-          <p:cNvPr id="443059261" name="ZoneTexte 1727393832"/>
+          <p:cNvPr id="970147706" name="ZoneTexte 1727393832"/>
           <p:cNvSpPr txBox="1"/>
           <p:nvPr/>
         </p:nvSpPr>
@@ -31877,7 +31883,7 @@
       </p:sp>
       <p:sp>
         <p:nvSpPr>
-          <p:cNvPr id="1943229574" name="ZoneTexte 504516740"/>
+          <p:cNvPr id="518872138" name="ZoneTexte 504516740"/>
           <p:cNvSpPr txBox="1"/>
           <p:nvPr/>
         </p:nvSpPr>
@@ -31919,7 +31925,7 @@
       </p:sp>
       <p:sp>
         <p:nvSpPr>
-          <p:cNvPr id="348950914" name="ZoneTexte 1"/>
+          <p:cNvPr id="379807974" name="ZoneTexte 1"/>
           <p:cNvSpPr txBox="1"/>
           <p:nvPr/>
         </p:nvSpPr>
@@ -32030,7 +32036,7 @@
       </p:sp>
       <p:sp>
         <p:nvSpPr>
-          <p:cNvPr id="329302094" name="ZoneTexte 2"/>
+          <p:cNvPr id="459593951" name="ZoneTexte 2"/>
           <p:cNvSpPr txBox="1"/>
           <p:nvPr/>
         </p:nvSpPr>
@@ -32114,7 +32120,7 @@
       </p:sp>
       <p:sp>
         <p:nvSpPr>
-          <p:cNvPr id="2001158476" name=""/>
+          <p:cNvPr id="752371547" name=""/>
           <p:cNvSpPr/>
           <p:nvPr/>
         </p:nvSpPr>
@@ -32154,7 +32160,7 @@
       </p:sp>
       <p:sp>
         <p:nvSpPr>
-          <p:cNvPr id="484174042" name="Rectangle : avec coins arrondis en haut 1151560973"/>
+          <p:cNvPr id="900999839" name="Rectangle : avec coins arrondis en haut 1151560973"/>
           <p:cNvSpPr/>
           <p:nvPr/>
         </p:nvSpPr>
@@ -32202,7 +32208,7 @@
       </p:sp>
       <p:sp>
         <p:nvSpPr>
-          <p:cNvPr id="2023007188" name=""/>
+          <p:cNvPr id="125373068" name=""/>
           <p:cNvSpPr/>
           <p:nvPr/>
         </p:nvSpPr>
@@ -32242,7 +32248,7 @@
       </p:sp>
       <p:sp>
         <p:nvSpPr>
-          <p:cNvPr id="1754759045" name="Rectangle : avec coins arrondis en haut 1151560973"/>
+          <p:cNvPr id="158729030" name="Rectangle : avec coins arrondis en haut 1151560973"/>
           <p:cNvSpPr/>
           <p:nvPr/>
         </p:nvSpPr>
@@ -32290,7 +32296,7 @@
       </p:sp>
       <p:sp>
         <p:nvSpPr>
-          <p:cNvPr id="628781658" name=""/>
+          <p:cNvPr id="968439887" name=""/>
           <p:cNvSpPr/>
           <p:nvPr/>
         </p:nvSpPr>
@@ -32330,7 +32336,7 @@
       </p:sp>
       <p:sp>
         <p:nvSpPr>
-          <p:cNvPr id="836626723" name="Rectangle : avec coins arrondis en haut 1151560973"/>
+          <p:cNvPr id="164852458" name="Rectangle : avec coins arrondis en haut 1151560973"/>
           <p:cNvSpPr/>
           <p:nvPr/>
         </p:nvSpPr>
@@ -32378,7 +32384,7 @@
       </p:sp>
       <p:sp>
         <p:nvSpPr>
-          <p:cNvPr id="40391679" name=""/>
+          <p:cNvPr id="1559983273" name=""/>
           <p:cNvSpPr txBox="1"/>
           <p:nvPr/>
         </p:nvSpPr>
@@ -32429,7 +32435,7 @@
       </p:sp>
       <p:sp>
         <p:nvSpPr>
-          <p:cNvPr id="419708160" name=""/>
+          <p:cNvPr id="1367828593" name=""/>
           <p:cNvSpPr txBox="1"/>
           <p:nvPr/>
         </p:nvSpPr>
@@ -32527,7 +32533,7 @@
       </p:sp>
       <p:sp>
         <p:nvSpPr>
-          <p:cNvPr id="1191609752" name=""/>
+          <p:cNvPr id="1218686343" name=""/>
           <p:cNvSpPr/>
           <p:nvPr/>
         </p:nvSpPr>
@@ -32598,7 +32604,7 @@
       </p:sp>
       <p:sp>
         <p:nvSpPr>
-          <p:cNvPr id="1258479643" name="Flèche : pentagone 463861063"/>
+          <p:cNvPr id="1000000456" name="Flèche : pentagone 463861063"/>
           <p:cNvSpPr/>
           <p:nvPr/>
         </p:nvSpPr>
@@ -32643,7 +32649,7 @@
       </p:sp>
       <p:sp>
         <p:nvSpPr>
-          <p:cNvPr id="1526469330" name="Flèche : pentagone 272004907"/>
+          <p:cNvPr id="1872022294" name="Flèche : pentagone 272004907"/>
           <p:cNvSpPr/>
           <p:nvPr/>
         </p:nvSpPr>
@@ -32688,7 +32694,7 @@
       </p:sp>
       <p:sp>
         <p:nvSpPr>
-          <p:cNvPr id="1304395920" name="Flèche : pentagone 28174069"/>
+          <p:cNvPr id="400623106" name="Flèche : pentagone 28174069"/>
           <p:cNvSpPr/>
           <p:nvPr/>
         </p:nvSpPr>

--- a/Fiches de personnage.pptx
+++ b/Fiches de personnage.pptx
@@ -139,7 +139,7 @@
       </p:grpSpPr>
       <p:sp>
         <p:nvSpPr>
-          <p:cNvPr id="2040666693" name="Espace réservé d'en-tête 1"/>
+          <p:cNvPr id="1515761318" name="Espace réservé d'en-tête 1"/>
           <p:cNvSpPr>
             <a:spLocks noGrp="1"/>
           </p:cNvSpPr>
@@ -173,7 +173,7 @@
       </p:sp>
       <p:sp>
         <p:nvSpPr>
-          <p:cNvPr id="1572029216" name="Espace réservé pour la date 2"/>
+          <p:cNvPr id="1348577438" name="Espace réservé pour la date 2"/>
           <p:cNvSpPr>
             <a:spLocks noGrp="1"/>
           </p:cNvSpPr>
@@ -211,7 +211,7 @@
       </p:sp>
       <p:sp>
         <p:nvSpPr>
-          <p:cNvPr id="462002510" name="Espace réservé pour l'image de la diapositive 3"/>
+          <p:cNvPr id="1270962817" name="Espace réservé pour l'image de la diapositive 3"/>
           <p:cNvSpPr>
             <a:spLocks noChangeAspect="1" noGrp="1" noRot="1"/>
           </p:cNvSpPr>
@@ -247,7 +247,7 @@
       </p:sp>
       <p:sp>
         <p:nvSpPr>
-          <p:cNvPr id="890498024" name="Remarques Espace réservé 4"/>
+          <p:cNvPr id="2064074269" name="Remarques Espace réservé 4"/>
           <p:cNvSpPr>
             <a:spLocks noGrp="1"/>
           </p:cNvSpPr>
@@ -321,7 +321,7 @@
       </p:sp>
       <p:sp>
         <p:nvSpPr>
-          <p:cNvPr id="1196606101" name="Espace réservé du pied de page 5"/>
+          <p:cNvPr id="1183153066" name="Espace réservé du pied de page 5"/>
           <p:cNvSpPr>
             <a:spLocks noGrp="1"/>
           </p:cNvSpPr>
@@ -355,7 +355,7 @@
       </p:sp>
       <p:sp>
         <p:nvSpPr>
-          <p:cNvPr id="1602332169" name="Espace réservé du numéro de diapositive 6"/>
+          <p:cNvPr id="2034022386" name="Espace réservé du numéro de diapositive 6"/>
           <p:cNvSpPr>
             <a:spLocks noGrp="1"/>
           </p:cNvSpPr>
@@ -508,7 +508,7 @@
       </p:grpSpPr>
       <p:sp>
         <p:nvSpPr>
-          <p:cNvPr id="747912810" name="Espace réservé pour l'image de la diapositive 1"/>
+          <p:cNvPr id="1950129452" name="Espace réservé pour l'image de la diapositive 1"/>
           <p:cNvSpPr>
             <a:spLocks noChangeAspect="1" noGrp="1" noRot="1"/>
           </p:cNvSpPr>
@@ -518,14 +518,14 @@
         </p:nvSpPr>
         <p:spPr bwMode="auto">
           <a:xfrm>
-            <a:off x="2360612" y="1143000"/>
-            <a:ext cx="2136774" cy="3086100"/>
+            <a:off x="2360611" y="1143000"/>
+            <a:ext cx="2136773" cy="3086100"/>
           </a:xfrm>
         </p:spPr>
       </p:sp>
       <p:sp>
         <p:nvSpPr>
-          <p:cNvPr id="1125423406" name="Remarques Espace réservé 2"/>
+          <p:cNvPr id="1434449053" name="Remarques Espace réservé 2"/>
           <p:cNvSpPr>
             <a:spLocks noGrp="1"/>
           </p:cNvSpPr>
@@ -550,7 +550,7 @@
       </p:sp>
       <p:sp>
         <p:nvSpPr>
-          <p:cNvPr id="743289646" name="Espace réservé pour le numéro de diapositive 3"/>
+          <p:cNvPr id="1780571901" name="Espace réservé pour le numéro de diapositive 3"/>
           <p:cNvSpPr>
             <a:spLocks noGrp="1"/>
           </p:cNvSpPr>
@@ -566,7 +566,7 @@
             <a:pPr>
               <a:defRPr/>
             </a:pPr>
-            <a:fld id="{3A7CB8C3-4752-FF7C-2D01-DE008A36A7B4}" type="slidenum">
+            <a:fld id="{55581762-C1F8-3E96-73C0-907FD0C662FA}" type="slidenum">
               <a:rPr lang="fr-FR"/>
               <a:t>1</a:t>
             </a:fld>
@@ -601,7 +601,7 @@
       </p:grpSpPr>
       <p:sp>
         <p:nvSpPr>
-          <p:cNvPr id="1390273845" name="Espace réservé pour l'image de la diapositive 1"/>
+          <p:cNvPr id="1159800262" name="Espace réservé pour l'image de la diapositive 1"/>
           <p:cNvSpPr>
             <a:spLocks noChangeAspect="1" noGrp="1" noRot="1"/>
           </p:cNvSpPr>
@@ -618,7 +618,7 @@
       </p:sp>
       <p:sp>
         <p:nvSpPr>
-          <p:cNvPr id="1907755220" name="Remarques Espace réservé 2"/>
+          <p:cNvPr id="1410518527" name="Remarques Espace réservé 2"/>
           <p:cNvSpPr>
             <a:spLocks noGrp="1"/>
           </p:cNvSpPr>
@@ -643,7 +643,7 @@
       </p:sp>
       <p:sp>
         <p:nvSpPr>
-          <p:cNvPr id="391906385" name="Espace réservé pour le numéro de diapositive 3"/>
+          <p:cNvPr id="955345656" name="Espace réservé pour le numéro de diapositive 3"/>
           <p:cNvSpPr>
             <a:spLocks noGrp="1"/>
           </p:cNvSpPr>
@@ -694,7 +694,7 @@
       </p:grpSpPr>
       <p:sp>
         <p:nvSpPr>
-          <p:cNvPr id="1130117418" name="Espace réservé pour l'image de la diapositive 1"/>
+          <p:cNvPr id="1224434012" name="Espace réservé pour l'image de la diapositive 1"/>
           <p:cNvSpPr>
             <a:spLocks noChangeAspect="1" noGrp="1" noRot="1"/>
           </p:cNvSpPr>
@@ -711,7 +711,7 @@
       </p:sp>
       <p:sp>
         <p:nvSpPr>
-          <p:cNvPr id="1547802792" name="Remarques Espace réservé 2"/>
+          <p:cNvPr id="994603532" name="Remarques Espace réservé 2"/>
           <p:cNvSpPr>
             <a:spLocks noGrp="1"/>
           </p:cNvSpPr>
@@ -736,7 +736,7 @@
       </p:sp>
       <p:sp>
         <p:nvSpPr>
-          <p:cNvPr id="368834759" name="Espace réservé pour le numéro de diapositive 3"/>
+          <p:cNvPr id="1928480903" name="Espace réservé pour le numéro de diapositive 3"/>
           <p:cNvSpPr>
             <a:spLocks noGrp="1"/>
           </p:cNvSpPr>
@@ -787,7 +787,7 @@
       </p:grpSpPr>
       <p:sp>
         <p:nvSpPr>
-          <p:cNvPr id="681177182" name="Espace réservé pour l'image de la diapositive 1"/>
+          <p:cNvPr id="1891824993" name="Espace réservé pour l'image de la diapositive 1"/>
           <p:cNvSpPr>
             <a:spLocks noChangeAspect="1" noGrp="1" noRot="1"/>
           </p:cNvSpPr>
@@ -804,7 +804,7 @@
       </p:sp>
       <p:sp>
         <p:nvSpPr>
-          <p:cNvPr id="638498131" name="Remarques Espace réservé 2"/>
+          <p:cNvPr id="1869465596" name="Remarques Espace réservé 2"/>
           <p:cNvSpPr>
             <a:spLocks noGrp="1"/>
           </p:cNvSpPr>
@@ -829,7 +829,7 @@
       </p:sp>
       <p:sp>
         <p:nvSpPr>
-          <p:cNvPr id="1036385960" name="Espace réservé pour le numéro de diapositive 3"/>
+          <p:cNvPr id="660112773" name="Espace réservé pour le numéro de diapositive 3"/>
           <p:cNvSpPr>
             <a:spLocks noGrp="1"/>
           </p:cNvSpPr>
@@ -880,7 +880,7 @@
       </p:grpSpPr>
       <p:sp>
         <p:nvSpPr>
-          <p:cNvPr id="1377271674" name="Espace réservé pour l'image de la diapositive 1"/>
+          <p:cNvPr id="624339122" name="Espace réservé pour l'image de la diapositive 1"/>
           <p:cNvSpPr>
             <a:spLocks noChangeAspect="1" noGrp="1" noRot="1"/>
           </p:cNvSpPr>
@@ -897,7 +897,7 @@
       </p:sp>
       <p:sp>
         <p:nvSpPr>
-          <p:cNvPr id="2043678491" name="Remarques Espace réservé 2"/>
+          <p:cNvPr id="198617377" name="Remarques Espace réservé 2"/>
           <p:cNvSpPr>
             <a:spLocks noGrp="1"/>
           </p:cNvSpPr>
@@ -922,7 +922,7 @@
       </p:sp>
       <p:sp>
         <p:nvSpPr>
-          <p:cNvPr id="1515951974" name="Espace réservé pour le numéro de diapositive 3"/>
+          <p:cNvPr id="1730555999" name="Espace réservé pour le numéro de diapositive 3"/>
           <p:cNvSpPr>
             <a:spLocks noGrp="1"/>
           </p:cNvSpPr>
@@ -973,7 +973,7 @@
       </p:grpSpPr>
       <p:sp>
         <p:nvSpPr>
-          <p:cNvPr id="790150836" name="Espace réservé pour l'image de la diapositive 1"/>
+          <p:cNvPr id="141241006" name="Espace réservé pour l'image de la diapositive 1"/>
           <p:cNvSpPr>
             <a:spLocks noChangeAspect="1" noGrp="1" noRot="1"/>
           </p:cNvSpPr>
@@ -990,7 +990,7 @@
       </p:sp>
       <p:sp>
         <p:nvSpPr>
-          <p:cNvPr id="354425994" name="Remarques Espace réservé 2"/>
+          <p:cNvPr id="988596705" name="Remarques Espace réservé 2"/>
           <p:cNvSpPr>
             <a:spLocks noGrp="1"/>
           </p:cNvSpPr>
@@ -1015,7 +1015,7 @@
       </p:sp>
       <p:sp>
         <p:nvSpPr>
-          <p:cNvPr id="511401180" name="Espace réservé pour le numéro de diapositive 3"/>
+          <p:cNvPr id="1210841575" name="Espace réservé pour le numéro de diapositive 3"/>
           <p:cNvSpPr>
             <a:spLocks noGrp="1"/>
           </p:cNvSpPr>
@@ -1066,7 +1066,7 @@
       </p:grpSpPr>
       <p:sp>
         <p:nvSpPr>
-          <p:cNvPr id="314970116" name="Titre 1"/>
+          <p:cNvPr id="1843193585" name="Titre 1"/>
           <p:cNvSpPr>
             <a:spLocks noGrp="1"/>
           </p:cNvSpPr>
@@ -1101,7 +1101,7 @@
       </p:sp>
       <p:sp>
         <p:nvSpPr>
-          <p:cNvPr id="144678903" name="Sous-titre 2"/>
+          <p:cNvPr id="1013916826" name="Sous-titre 2"/>
           <p:cNvSpPr>
             <a:spLocks noGrp="1"/>
           </p:cNvSpPr>
@@ -1169,7 +1169,7 @@
       </p:sp>
       <p:sp>
         <p:nvSpPr>
-          <p:cNvPr id="1932473164" name="Espace réservé de la date 3"/>
+          <p:cNvPr id="1841382056" name="Espace réservé de la date 3"/>
           <p:cNvSpPr>
             <a:spLocks noGrp="1"/>
           </p:cNvSpPr>
@@ -1195,7 +1195,7 @@
       </p:sp>
       <p:sp>
         <p:nvSpPr>
-          <p:cNvPr id="1398734857" name="Espace réservé du pied de page 4"/>
+          <p:cNvPr id="1506989335" name="Espace réservé du pied de page 4"/>
           <p:cNvSpPr>
             <a:spLocks noGrp="1"/>
           </p:cNvSpPr>
@@ -1217,7 +1217,7 @@
       </p:sp>
       <p:sp>
         <p:nvSpPr>
-          <p:cNvPr id="1614580790" name="Espace réservé du numéro de diapositive 5"/>
+          <p:cNvPr id="53683365" name="Espace réservé du numéro de diapositive 5"/>
           <p:cNvSpPr>
             <a:spLocks noGrp="1"/>
           </p:cNvSpPr>
@@ -1268,7 +1268,7 @@
       </p:grpSpPr>
       <p:sp>
         <p:nvSpPr>
-          <p:cNvPr id="198483966" name="Titre 1"/>
+          <p:cNvPr id="1712552295" name="Titre 1"/>
           <p:cNvSpPr>
             <a:spLocks noGrp="1"/>
           </p:cNvSpPr>
@@ -1294,7 +1294,7 @@
       </p:sp>
       <p:sp>
         <p:nvSpPr>
-          <p:cNvPr id="1303095560" name="Espace réservé du texte vertical 2"/>
+          <p:cNvPr id="418936099" name="Espace réservé du texte vertical 2"/>
           <p:cNvSpPr>
             <a:spLocks noGrp="1"/>
           </p:cNvSpPr>
@@ -1360,7 +1360,7 @@
       </p:sp>
       <p:sp>
         <p:nvSpPr>
-          <p:cNvPr id="680300301" name="Espace réservé de la date 3"/>
+          <p:cNvPr id="1266723730" name="Espace réservé de la date 3"/>
           <p:cNvSpPr>
             <a:spLocks noGrp="1"/>
           </p:cNvSpPr>
@@ -1386,7 +1386,7 @@
       </p:sp>
       <p:sp>
         <p:nvSpPr>
-          <p:cNvPr id="477322645" name="Espace réservé du pied de page 4"/>
+          <p:cNvPr id="360705495" name="Espace réservé du pied de page 4"/>
           <p:cNvSpPr>
             <a:spLocks noGrp="1"/>
           </p:cNvSpPr>
@@ -1408,7 +1408,7 @@
       </p:sp>
       <p:sp>
         <p:nvSpPr>
-          <p:cNvPr id="569026755" name="Espace réservé du numéro de diapositive 5"/>
+          <p:cNvPr id="1645238075" name="Espace réservé du numéro de diapositive 5"/>
           <p:cNvSpPr>
             <a:spLocks noGrp="1"/>
           </p:cNvSpPr>
@@ -1459,7 +1459,7 @@
       </p:grpSpPr>
       <p:sp>
         <p:nvSpPr>
-          <p:cNvPr id="188799116" name="Titre vertical 1"/>
+          <p:cNvPr id="1738919629" name="Titre vertical 1"/>
           <p:cNvSpPr>
             <a:spLocks noGrp="1"/>
           </p:cNvSpPr>
@@ -1490,7 +1490,7 @@
       </p:sp>
       <p:sp>
         <p:nvSpPr>
-          <p:cNvPr id="1831909756" name="Espace réservé du texte vertical 2"/>
+          <p:cNvPr id="16516507" name="Espace réservé du texte vertical 2"/>
           <p:cNvSpPr>
             <a:spLocks noGrp="1"/>
           </p:cNvSpPr>
@@ -1561,7 +1561,7 @@
       </p:sp>
       <p:sp>
         <p:nvSpPr>
-          <p:cNvPr id="1087312334" name="Espace réservé de la date 3"/>
+          <p:cNvPr id="1562819728" name="Espace réservé de la date 3"/>
           <p:cNvSpPr>
             <a:spLocks noGrp="1"/>
           </p:cNvSpPr>
@@ -1587,7 +1587,7 @@
       </p:sp>
       <p:sp>
         <p:nvSpPr>
-          <p:cNvPr id="1571959307" name="Espace réservé du pied de page 4"/>
+          <p:cNvPr id="1976839807" name="Espace réservé du pied de page 4"/>
           <p:cNvSpPr>
             <a:spLocks noGrp="1"/>
           </p:cNvSpPr>
@@ -1609,7 +1609,7 @@
       </p:sp>
       <p:sp>
         <p:nvSpPr>
-          <p:cNvPr id="573739372" name="Espace réservé du numéro de diapositive 5"/>
+          <p:cNvPr id="344622797" name="Espace réservé du numéro de diapositive 5"/>
           <p:cNvSpPr>
             <a:spLocks noGrp="1"/>
           </p:cNvSpPr>
@@ -1660,7 +1660,7 @@
       </p:grpSpPr>
       <p:sp>
         <p:nvSpPr>
-          <p:cNvPr id="510780619" name="Titre 1"/>
+          <p:cNvPr id="245747040" name="Titre 1"/>
           <p:cNvSpPr>
             <a:spLocks noGrp="1"/>
           </p:cNvSpPr>
@@ -1686,7 +1686,7 @@
       </p:sp>
       <p:sp>
         <p:nvSpPr>
-          <p:cNvPr id="1788805616" name="Espace réservé du contenu 2"/>
+          <p:cNvPr id="439014031" name="Espace réservé du contenu 2"/>
           <p:cNvSpPr>
             <a:spLocks noGrp="1"/>
           </p:cNvSpPr>
@@ -1752,7 +1752,7 @@
       </p:sp>
       <p:sp>
         <p:nvSpPr>
-          <p:cNvPr id="900364658" name="Espace réservé de la date 3"/>
+          <p:cNvPr id="1163756223" name="Espace réservé de la date 3"/>
           <p:cNvSpPr>
             <a:spLocks noGrp="1"/>
           </p:cNvSpPr>
@@ -1778,7 +1778,7 @@
       </p:sp>
       <p:sp>
         <p:nvSpPr>
-          <p:cNvPr id="1654042181" name="Espace réservé du pied de page 4"/>
+          <p:cNvPr id="485416591" name="Espace réservé du pied de page 4"/>
           <p:cNvSpPr>
             <a:spLocks noGrp="1"/>
           </p:cNvSpPr>
@@ -1800,7 +1800,7 @@
       </p:sp>
       <p:sp>
         <p:nvSpPr>
-          <p:cNvPr id="2057026300" name="Espace réservé du numéro de diapositive 5"/>
+          <p:cNvPr id="1059657500" name="Espace réservé du numéro de diapositive 5"/>
           <p:cNvSpPr>
             <a:spLocks noGrp="1"/>
           </p:cNvSpPr>
@@ -1851,7 +1851,7 @@
       </p:grpSpPr>
       <p:sp>
         <p:nvSpPr>
-          <p:cNvPr id="979374322" name="Titre 1"/>
+          <p:cNvPr id="1301699739" name="Titre 1"/>
           <p:cNvSpPr>
             <a:spLocks noGrp="1"/>
           </p:cNvSpPr>
@@ -1886,7 +1886,7 @@
       </p:sp>
       <p:sp>
         <p:nvSpPr>
-          <p:cNvPr id="1152925210" name="Espace réservé du texte 2"/>
+          <p:cNvPr id="1043447496" name="Espace réservé du texte 2"/>
           <p:cNvSpPr>
             <a:spLocks noGrp="1"/>
           </p:cNvSpPr>
@@ -2008,7 +2008,7 @@
       </p:sp>
       <p:sp>
         <p:nvSpPr>
-          <p:cNvPr id="361113608" name="Espace réservé de la date 3"/>
+          <p:cNvPr id="1350005619" name="Espace réservé de la date 3"/>
           <p:cNvSpPr>
             <a:spLocks noGrp="1"/>
           </p:cNvSpPr>
@@ -2034,7 +2034,7 @@
       </p:sp>
       <p:sp>
         <p:nvSpPr>
-          <p:cNvPr id="1991613578" name="Espace réservé du pied de page 4"/>
+          <p:cNvPr id="415084961" name="Espace réservé du pied de page 4"/>
           <p:cNvSpPr>
             <a:spLocks noGrp="1"/>
           </p:cNvSpPr>
@@ -2056,7 +2056,7 @@
       </p:sp>
       <p:sp>
         <p:nvSpPr>
-          <p:cNvPr id="2090687442" name="Espace réservé du numéro de diapositive 5"/>
+          <p:cNvPr id="145359918" name="Espace réservé du numéro de diapositive 5"/>
           <p:cNvSpPr>
             <a:spLocks noGrp="1"/>
           </p:cNvSpPr>
@@ -2107,7 +2107,7 @@
       </p:grpSpPr>
       <p:sp>
         <p:nvSpPr>
-          <p:cNvPr id="1399988215" name="Titre 1"/>
+          <p:cNvPr id="1675420550" name="Titre 1"/>
           <p:cNvSpPr>
             <a:spLocks noGrp="1"/>
           </p:cNvSpPr>
@@ -2133,7 +2133,7 @@
       </p:sp>
       <p:sp>
         <p:nvSpPr>
-          <p:cNvPr id="1817419386" name="Espace réservé du contenu 2"/>
+          <p:cNvPr id="2052632131" name="Espace réservé du contenu 2"/>
           <p:cNvSpPr>
             <a:spLocks noGrp="1"/>
           </p:cNvSpPr>
@@ -2204,7 +2204,7 @@
       </p:sp>
       <p:sp>
         <p:nvSpPr>
-          <p:cNvPr id="2003741434" name="Espace réservé du contenu 3"/>
+          <p:cNvPr id="1014881511" name="Espace réservé du contenu 3"/>
           <p:cNvSpPr>
             <a:spLocks noGrp="1"/>
           </p:cNvSpPr>
@@ -2275,7 +2275,7 @@
       </p:sp>
       <p:sp>
         <p:nvSpPr>
-          <p:cNvPr id="875739953" name="Espace réservé de la date 4"/>
+          <p:cNvPr id="1447265105" name="Espace réservé de la date 4"/>
           <p:cNvSpPr>
             <a:spLocks noGrp="1"/>
           </p:cNvSpPr>
@@ -2301,7 +2301,7 @@
       </p:sp>
       <p:sp>
         <p:nvSpPr>
-          <p:cNvPr id="1022071695" name="Espace réservé du pied de page 5"/>
+          <p:cNvPr id="1960446048" name="Espace réservé du pied de page 5"/>
           <p:cNvSpPr>
             <a:spLocks noGrp="1"/>
           </p:cNvSpPr>
@@ -2323,7 +2323,7 @@
       </p:sp>
       <p:sp>
         <p:nvSpPr>
-          <p:cNvPr id="1055233315" name="Espace réservé du numéro de diapositive 6"/>
+          <p:cNvPr id="1856239214" name="Espace réservé du numéro de diapositive 6"/>
           <p:cNvSpPr>
             <a:spLocks noGrp="1"/>
           </p:cNvSpPr>
@@ -2374,7 +2374,7 @@
       </p:grpSpPr>
       <p:sp>
         <p:nvSpPr>
-          <p:cNvPr id="110596012" name="Titre 1"/>
+          <p:cNvPr id="1826159559" name="Titre 1"/>
           <p:cNvSpPr>
             <a:spLocks noGrp="1"/>
           </p:cNvSpPr>
@@ -2405,7 +2405,7 @@
       </p:sp>
       <p:sp>
         <p:nvSpPr>
-          <p:cNvPr id="1088804505" name="Espace réservé du texte 2"/>
+          <p:cNvPr id="426034449" name="Espace réservé du texte 2"/>
           <p:cNvSpPr>
             <a:spLocks noGrp="1"/>
           </p:cNvSpPr>
@@ -2473,7 +2473,7 @@
       </p:sp>
       <p:sp>
         <p:nvSpPr>
-          <p:cNvPr id="1186543842" name="Espace réservé du contenu 3"/>
+          <p:cNvPr id="1729320360" name="Espace réservé du contenu 3"/>
           <p:cNvSpPr>
             <a:spLocks noGrp="1"/>
           </p:cNvSpPr>
@@ -2544,7 +2544,7 @@
       </p:sp>
       <p:sp>
         <p:nvSpPr>
-          <p:cNvPr id="1026937471" name="Espace réservé du texte 4"/>
+          <p:cNvPr id="906485593" name="Espace réservé du texte 4"/>
           <p:cNvSpPr>
             <a:spLocks noGrp="1"/>
           </p:cNvSpPr>
@@ -2612,7 +2612,7 @@
       </p:sp>
       <p:sp>
         <p:nvSpPr>
-          <p:cNvPr id="466270696" name="Espace réservé du contenu 5"/>
+          <p:cNvPr id="141000722" name="Espace réservé du contenu 5"/>
           <p:cNvSpPr>
             <a:spLocks noGrp="1"/>
           </p:cNvSpPr>
@@ -2683,7 +2683,7 @@
       </p:sp>
       <p:sp>
         <p:nvSpPr>
-          <p:cNvPr id="1946345847" name="Espace réservé de la date 6"/>
+          <p:cNvPr id="297160200" name="Espace réservé de la date 6"/>
           <p:cNvSpPr>
             <a:spLocks noGrp="1"/>
           </p:cNvSpPr>
@@ -2709,7 +2709,7 @@
       </p:sp>
       <p:sp>
         <p:nvSpPr>
-          <p:cNvPr id="944280402" name="Espace réservé du pied de page 7"/>
+          <p:cNvPr id="1109758397" name="Espace réservé du pied de page 7"/>
           <p:cNvSpPr>
             <a:spLocks noGrp="1"/>
           </p:cNvSpPr>
@@ -2731,7 +2731,7 @@
       </p:sp>
       <p:sp>
         <p:nvSpPr>
-          <p:cNvPr id="1476641285" name="Espace réservé du numéro de diapositive 8"/>
+          <p:cNvPr id="1900134894" name="Espace réservé du numéro de diapositive 8"/>
           <p:cNvSpPr>
             <a:spLocks noGrp="1"/>
           </p:cNvSpPr>
@@ -2782,7 +2782,7 @@
       </p:grpSpPr>
       <p:sp>
         <p:nvSpPr>
-          <p:cNvPr id="364799974" name="Titre 1"/>
+          <p:cNvPr id="1940141884" name="Titre 1"/>
           <p:cNvSpPr>
             <a:spLocks noGrp="1"/>
           </p:cNvSpPr>
@@ -2808,7 +2808,7 @@
       </p:sp>
       <p:sp>
         <p:nvSpPr>
-          <p:cNvPr id="680378980" name="Espace réservé de la date 2"/>
+          <p:cNvPr id="1692015330" name="Espace réservé de la date 2"/>
           <p:cNvSpPr>
             <a:spLocks noGrp="1"/>
           </p:cNvSpPr>
@@ -2834,7 +2834,7 @@
       </p:sp>
       <p:sp>
         <p:nvSpPr>
-          <p:cNvPr id="863415358" name="Espace réservé du pied de page 3"/>
+          <p:cNvPr id="205380036" name="Espace réservé du pied de page 3"/>
           <p:cNvSpPr>
             <a:spLocks noGrp="1"/>
           </p:cNvSpPr>
@@ -2856,7 +2856,7 @@
       </p:sp>
       <p:sp>
         <p:nvSpPr>
-          <p:cNvPr id="545835428" name="Espace réservé du numéro de diapositive 4"/>
+          <p:cNvPr id="950140006" name="Espace réservé du numéro de diapositive 4"/>
           <p:cNvSpPr>
             <a:spLocks noGrp="1"/>
           </p:cNvSpPr>
@@ -2907,7 +2907,7 @@
       </p:grpSpPr>
       <p:sp>
         <p:nvSpPr>
-          <p:cNvPr id="248482896" name="Espace réservé de la date 1"/>
+          <p:cNvPr id="655591655" name="Espace réservé de la date 1"/>
           <p:cNvSpPr>
             <a:spLocks noGrp="1"/>
           </p:cNvSpPr>
@@ -2933,7 +2933,7 @@
       </p:sp>
       <p:sp>
         <p:nvSpPr>
-          <p:cNvPr id="1753976020" name="Espace réservé du pied de page 2"/>
+          <p:cNvPr id="249130005" name="Espace réservé du pied de page 2"/>
           <p:cNvSpPr>
             <a:spLocks noGrp="1"/>
           </p:cNvSpPr>
@@ -2955,7 +2955,7 @@
       </p:sp>
       <p:sp>
         <p:nvSpPr>
-          <p:cNvPr id="957574731" name="Espace réservé du numéro de diapositive 3"/>
+          <p:cNvPr id="1372975104" name="Espace réservé du numéro de diapositive 3"/>
           <p:cNvSpPr>
             <a:spLocks noGrp="1"/>
           </p:cNvSpPr>
@@ -3006,7 +3006,7 @@
       </p:grpSpPr>
       <p:sp>
         <p:nvSpPr>
-          <p:cNvPr id="2017085882" name="Titre 1"/>
+          <p:cNvPr id="1727355599" name="Titre 1"/>
           <p:cNvSpPr>
             <a:spLocks noGrp="1"/>
           </p:cNvSpPr>
@@ -3041,7 +3041,7 @@
       </p:sp>
       <p:sp>
         <p:nvSpPr>
-          <p:cNvPr id="258380514" name="Espace réservé du contenu 2"/>
+          <p:cNvPr id="1992037117" name="Espace réservé du contenu 2"/>
           <p:cNvSpPr>
             <a:spLocks noGrp="1"/>
           </p:cNvSpPr>
@@ -3140,7 +3140,7 @@
       </p:sp>
       <p:sp>
         <p:nvSpPr>
-          <p:cNvPr id="2057236931" name="Espace réservé du texte 3"/>
+          <p:cNvPr id="1127418375" name="Espace réservé du texte 3"/>
           <p:cNvSpPr>
             <a:spLocks noGrp="1"/>
           </p:cNvSpPr>
@@ -3208,7 +3208,7 @@
       </p:sp>
       <p:sp>
         <p:nvSpPr>
-          <p:cNvPr id="347406851" name="Espace réservé de la date 4"/>
+          <p:cNvPr id="808285411" name="Espace réservé de la date 4"/>
           <p:cNvSpPr>
             <a:spLocks noGrp="1"/>
           </p:cNvSpPr>
@@ -3234,7 +3234,7 @@
       </p:sp>
       <p:sp>
         <p:nvSpPr>
-          <p:cNvPr id="217652191" name="Espace réservé du pied de page 5"/>
+          <p:cNvPr id="983780282" name="Espace réservé du pied de page 5"/>
           <p:cNvSpPr>
             <a:spLocks noGrp="1"/>
           </p:cNvSpPr>
@@ -3256,7 +3256,7 @@
       </p:sp>
       <p:sp>
         <p:nvSpPr>
-          <p:cNvPr id="1700504212" name="Espace réservé du numéro de diapositive 6"/>
+          <p:cNvPr id="790165398" name="Espace réservé du numéro de diapositive 6"/>
           <p:cNvSpPr>
             <a:spLocks noGrp="1"/>
           </p:cNvSpPr>
@@ -3307,7 +3307,7 @@
       </p:grpSpPr>
       <p:sp>
         <p:nvSpPr>
-          <p:cNvPr id="1506912933" name="Titre 1"/>
+          <p:cNvPr id="832513243" name="Titre 1"/>
           <p:cNvSpPr>
             <a:spLocks noGrp="1"/>
           </p:cNvSpPr>
@@ -3342,7 +3342,7 @@
       </p:sp>
       <p:sp>
         <p:nvSpPr>
-          <p:cNvPr id="505272274" name="Espace réservé pour une image 2"/>
+          <p:cNvPr id="755991100" name="Espace réservé pour une image 2"/>
           <p:cNvSpPr>
             <a:spLocks noChangeAspect="1" noGrp="1"/>
           </p:cNvSpPr>
@@ -3410,7 +3410,7 @@
       </p:sp>
       <p:sp>
         <p:nvSpPr>
-          <p:cNvPr id="200777869" name="Espace réservé du texte 3"/>
+          <p:cNvPr id="1135850512" name="Espace réservé du texte 3"/>
           <p:cNvSpPr>
             <a:spLocks noGrp="1"/>
           </p:cNvSpPr>
@@ -3478,7 +3478,7 @@
       </p:sp>
       <p:sp>
         <p:nvSpPr>
-          <p:cNvPr id="1369608143" name="Espace réservé de la date 4"/>
+          <p:cNvPr id="978929930" name="Espace réservé de la date 4"/>
           <p:cNvSpPr>
             <a:spLocks noGrp="1"/>
           </p:cNvSpPr>
@@ -3504,7 +3504,7 @@
       </p:sp>
       <p:sp>
         <p:nvSpPr>
-          <p:cNvPr id="1425883107" name="Espace réservé du pied de page 5"/>
+          <p:cNvPr id="1798176278" name="Espace réservé du pied de page 5"/>
           <p:cNvSpPr>
             <a:spLocks noGrp="1"/>
           </p:cNvSpPr>
@@ -3526,7 +3526,7 @@
       </p:sp>
       <p:sp>
         <p:nvSpPr>
-          <p:cNvPr id="1446276006" name="Espace réservé du numéro de diapositive 6"/>
+          <p:cNvPr id="1036121794" name="Espace réservé du numéro de diapositive 6"/>
           <p:cNvSpPr>
             <a:spLocks noGrp="1"/>
           </p:cNvSpPr>
@@ -3582,7 +3582,7 @@
       </p:grpSpPr>
       <p:sp>
         <p:nvSpPr>
-          <p:cNvPr id="678136126" name="Espace réservé du titre 1"/>
+          <p:cNvPr id="2061194049" name="Espace réservé du titre 1"/>
           <p:cNvSpPr>
             <a:spLocks noGrp="1"/>
           </p:cNvSpPr>
@@ -3618,7 +3618,7 @@
       </p:sp>
       <p:sp>
         <p:nvSpPr>
-          <p:cNvPr id="1287926911" name="Espace réservé du texte 2"/>
+          <p:cNvPr id="1597225632" name="Espace réservé du texte 2"/>
           <p:cNvSpPr>
             <a:spLocks noGrp="1"/>
           </p:cNvSpPr>
@@ -3694,7 +3694,7 @@
       </p:sp>
       <p:sp>
         <p:nvSpPr>
-          <p:cNvPr id="1182210001" name="Espace réservé de la date 3"/>
+          <p:cNvPr id="860308965" name="Espace réservé de la date 3"/>
           <p:cNvSpPr>
             <a:spLocks noGrp="1"/>
           </p:cNvSpPr>
@@ -3738,7 +3738,7 @@
       </p:sp>
       <p:sp>
         <p:nvSpPr>
-          <p:cNvPr id="672993085" name="Espace réservé du pied de page 4"/>
+          <p:cNvPr id="1486532779" name="Espace réservé du pied de page 4"/>
           <p:cNvSpPr>
             <a:spLocks noGrp="1"/>
           </p:cNvSpPr>
@@ -3778,7 +3778,7 @@
       </p:sp>
       <p:sp>
         <p:nvSpPr>
-          <p:cNvPr id="443715021" name="Espace réservé du numéro de diapositive 5"/>
+          <p:cNvPr id="1915368622" name="Espace réservé du numéro de diapositive 5"/>
           <p:cNvSpPr>
             <a:spLocks noGrp="1"/>
           </p:cNvSpPr>
@@ -4138,95 +4138,13 @@
       </p:grpSpPr>
       <p:cxnSp>
         <p:nvCxnSpPr>
-          <p:cNvPr id="1532741522" name="Connecteur droit 1568760680"/>
+          <p:cNvPr id="659764172" name="Connecteur droit 1568760680"/>
           <p:cNvCxnSpPr/>
           <p:nvPr/>
         </p:nvCxnSpPr>
         <p:spPr bwMode="auto">
           <a:xfrm flipV="1">
-            <a:off x="-56173" y="361948"/>
-            <a:ext cx="6924673" cy="0"/>
-          </a:xfrm>
-          <a:prstGeom prst="line">
-            <a:avLst/>
-          </a:prstGeom>
-          <a:ln w="76199" cap="flat" cmpd="sng" algn="ctr">
-            <a:solidFill>
-              <a:schemeClr val="bg1">
-                <a:lumMod val="74901"/>
-                <a:alpha val="99999"/>
-              </a:schemeClr>
-            </a:solidFill>
-            <a:prstDash val="solid"/>
-            <a:miter lim="800000"/>
-          </a:ln>
-        </p:spPr>
-        <p:style>
-          <a:lnRef idx="1">
-            <a:schemeClr val="accent1">
-              <a:shade val="50000"/>
-            </a:schemeClr>
-          </a:lnRef>
-          <a:fillRef idx="0">
-            <a:schemeClr val="accent1"/>
-          </a:fillRef>
-          <a:effectRef idx="0">
-            <a:schemeClr val="accent1"/>
-          </a:effectRef>
-          <a:fontRef idx="minor">
-            <a:schemeClr val="tx1"/>
-          </a:fontRef>
-        </p:style>
-      </p:cxnSp>
-      <p:sp>
-        <p:nvSpPr>
-          <p:cNvPr id="593838180" name="ZoneTexte 1868728971"/>
-          <p:cNvSpPr txBox="1"/>
-          <p:nvPr/>
-        </p:nvSpPr>
-        <p:spPr bwMode="auto">
-          <a:xfrm>
-            <a:off x="45901" y="178886"/>
-            <a:ext cx="4760367" cy="366118"/>
-          </a:xfrm>
-          <a:prstGeom prst="rect">
-            <a:avLst/>
-          </a:prstGeom>
-          <a:noFill/>
-        </p:spPr>
-        <p:txBody>
-          <a:bodyPr vertOverflow="overflow" horzOverflow="overflow" vert="horz" wrap="square" lIns="91440" tIns="45720" rIns="91440" bIns="45720" numCol="1" spcCol="0" rtlCol="0" fromWordArt="0" anchor="t" anchorCtr="0" forceAA="0" compatLnSpc="0">
-            <a:spAutoFit/>
-          </a:bodyPr>
-          <a:lstStyle/>
-          <a:p>
-            <a:pPr algn="l">
-              <a:defRPr/>
-            </a:pPr>
-            <a:r>
-              <a:rPr sz="1800" b="0">
-                <a:solidFill>
-                  <a:schemeClr val="tx1">
-                    <a:lumMod val="75000"/>
-                    <a:lumOff val="25000"/>
-                  </a:schemeClr>
-                </a:solidFill>
-              </a:rPr>
-              <a:t>Informations Générales</a:t>
-            </a:r>
-            <a:endParaRPr/>
-          </a:p>
-        </p:txBody>
-      </p:sp>
-      <p:cxnSp>
-        <p:nvCxnSpPr>
-          <p:cNvPr id="1303461049" name="Connecteur droit 806540798"/>
-          <p:cNvCxnSpPr/>
-          <p:nvPr/>
-        </p:nvCxnSpPr>
-        <p:spPr bwMode="auto">
-          <a:xfrm flipV="1">
-            <a:off x="972" y="2110804"/>
+            <a:off x="-56172" y="361947"/>
             <a:ext cx="6924672" cy="0"/>
           </a:xfrm>
           <a:prstGeom prst="line">
@@ -4262,14 +4180,14 @@
       </p:cxnSp>
       <p:sp>
         <p:nvSpPr>
-          <p:cNvPr id="1309950420" name="ZoneTexte 406616703"/>
+          <p:cNvPr id="719299099" name="ZoneTexte 1868728971"/>
           <p:cNvSpPr txBox="1"/>
           <p:nvPr/>
         </p:nvSpPr>
         <p:spPr bwMode="auto">
-          <a:xfrm flipH="0" flipV="0">
-            <a:off x="45900" y="1927743"/>
-            <a:ext cx="3360981" cy="366119"/>
+          <a:xfrm>
+            <a:off x="45900" y="178885"/>
+            <a:ext cx="4760366" cy="366117"/>
           </a:xfrm>
           <a:prstGeom prst="rect">
             <a:avLst/>
@@ -4294,7 +4212,7 @@
                   </a:schemeClr>
                 </a:solidFill>
               </a:rPr>
-              <a:t>Compétences &amp; Spécialités</a:t>
+              <a:t>Informations Générales</a:t>
             </a:r>
             <a:endParaRPr/>
           </a:p>
@@ -4302,14 +4220,14 @@
       </p:sp>
       <p:cxnSp>
         <p:nvCxnSpPr>
-          <p:cNvPr id="856027309" name="Connecteur droit 858914340"/>
+          <p:cNvPr id="1926390371" name="Connecteur droit 806540798"/>
           <p:cNvCxnSpPr/>
           <p:nvPr/>
         </p:nvCxnSpPr>
         <p:spPr bwMode="auto">
           <a:xfrm flipV="1">
-            <a:off x="3252190" y="6540795"/>
-            <a:ext cx="3616305" cy="0"/>
+            <a:off x="972" y="2110803"/>
+            <a:ext cx="6924672" cy="0"/>
           </a:xfrm>
           <a:prstGeom prst="line">
             <a:avLst/>
@@ -4344,14 +4262,14 @@
       </p:cxnSp>
       <p:sp>
         <p:nvSpPr>
-          <p:cNvPr id="861197053" name="ZoneTexte 2018177722"/>
+          <p:cNvPr id="1467850438" name="ZoneTexte 406616703"/>
           <p:cNvSpPr txBox="1"/>
           <p:nvPr/>
         </p:nvSpPr>
         <p:spPr bwMode="auto">
           <a:xfrm flipH="0" flipV="0">
-            <a:off x="3306145" y="6357734"/>
-            <a:ext cx="3522024" cy="366119"/>
+            <a:off x="45899" y="1927742"/>
+            <a:ext cx="3360980" cy="366118"/>
           </a:xfrm>
           <a:prstGeom prst="rect">
             <a:avLst/>
@@ -4364,11 +4282,11 @@
           </a:bodyPr>
           <a:lstStyle/>
           <a:p>
-            <a:pPr>
-              <a:defRPr/>
-            </a:pPr>
-            <a:r>
-              <a:rPr lang="fr-FR">
+            <a:pPr algn="l">
+              <a:defRPr/>
+            </a:pPr>
+            <a:r>
+              <a:rPr sz="1800" b="0">
                 <a:solidFill>
                   <a:schemeClr val="tx1">
                     <a:lumMod val="75000"/>
@@ -4376,29 +4294,64 @@
                   </a:schemeClr>
                 </a:solidFill>
               </a:rPr>
-              <a:t>Résistances, Stress &amp; Trauma</a:t>
-            </a:r>
-            <a:endParaRPr sz="1800" b="0">
-              <a:solidFill>
-                <a:schemeClr val="tx1">
-                  <a:lumMod val="75000"/>
-                  <a:lumOff val="25000"/>
-                </a:schemeClr>
-              </a:solidFill>
-            </a:endParaRPr>
+              <a:t>Compétences &amp; Spécialités</a:t>
+            </a:r>
+            <a:endParaRPr/>
           </a:p>
         </p:txBody>
       </p:sp>
+      <p:cxnSp>
+        <p:nvCxnSpPr>
+          <p:cNvPr id="1237438328" name="Connecteur droit 858914340"/>
+          <p:cNvCxnSpPr/>
+          <p:nvPr/>
+        </p:nvCxnSpPr>
+        <p:spPr bwMode="auto">
+          <a:xfrm flipV="1">
+            <a:off x="3252189" y="6540795"/>
+            <a:ext cx="3616304" cy="0"/>
+          </a:xfrm>
+          <a:prstGeom prst="line">
+            <a:avLst/>
+          </a:prstGeom>
+          <a:ln w="76199" cap="flat" cmpd="sng" algn="ctr">
+            <a:solidFill>
+              <a:schemeClr val="bg1">
+                <a:lumMod val="74901"/>
+                <a:alpha val="99999"/>
+              </a:schemeClr>
+            </a:solidFill>
+            <a:prstDash val="solid"/>
+            <a:miter lim="800000"/>
+          </a:ln>
+        </p:spPr>
+        <p:style>
+          <a:lnRef idx="1">
+            <a:schemeClr val="accent1">
+              <a:shade val="50000"/>
+            </a:schemeClr>
+          </a:lnRef>
+          <a:fillRef idx="0">
+            <a:schemeClr val="accent1"/>
+          </a:fillRef>
+          <a:effectRef idx="0">
+            <a:schemeClr val="accent1"/>
+          </a:effectRef>
+          <a:fontRef idx="minor">
+            <a:schemeClr val="tx1"/>
+          </a:fontRef>
+        </p:style>
+      </p:cxnSp>
       <p:sp>
         <p:nvSpPr>
-          <p:cNvPr id="661093404" name="ZoneTexte 519900862"/>
+          <p:cNvPr id="325129873" name="ZoneTexte 2018177722"/>
           <p:cNvSpPr txBox="1"/>
           <p:nvPr/>
         </p:nvSpPr>
         <p:spPr bwMode="auto">
-          <a:xfrm>
-            <a:off x="3076544" y="6743511"/>
-            <a:ext cx="2181488" cy="616450"/>
+          <a:xfrm flipH="0" flipV="0">
+            <a:off x="3306144" y="6357733"/>
+            <a:ext cx="3522024" cy="366118"/>
           </a:xfrm>
           <a:prstGeom prst="rect">
             <a:avLst/>
@@ -4411,6 +4364,53 @@
           </a:bodyPr>
           <a:lstStyle/>
           <a:p>
+            <a:pPr>
+              <a:defRPr/>
+            </a:pPr>
+            <a:r>
+              <a:rPr lang="fr-FR">
+                <a:solidFill>
+                  <a:schemeClr val="tx1">
+                    <a:lumMod val="75000"/>
+                    <a:lumOff val="25000"/>
+                  </a:schemeClr>
+                </a:solidFill>
+              </a:rPr>
+              <a:t>Résistances, Stress &amp; Trauma</a:t>
+            </a:r>
+            <a:endParaRPr sz="1800" b="0">
+              <a:solidFill>
+                <a:schemeClr val="tx1">
+                  <a:lumMod val="75000"/>
+                  <a:lumOff val="25000"/>
+                </a:schemeClr>
+              </a:solidFill>
+            </a:endParaRPr>
+          </a:p>
+        </p:txBody>
+      </p:sp>
+      <p:sp>
+        <p:nvSpPr>
+          <p:cNvPr id="512811105" name="ZoneTexte 519900862"/>
+          <p:cNvSpPr txBox="1"/>
+          <p:nvPr/>
+        </p:nvSpPr>
+        <p:spPr bwMode="auto">
+          <a:xfrm>
+            <a:off x="3076543" y="6743511"/>
+            <a:ext cx="2181487" cy="616449"/>
+          </a:xfrm>
+          <a:prstGeom prst="rect">
+            <a:avLst/>
+          </a:prstGeom>
+          <a:noFill/>
+        </p:spPr>
+        <p:txBody>
+          <a:bodyPr vertOverflow="overflow" horzOverflow="overflow" vert="horz" wrap="square" lIns="91440" tIns="45720" rIns="91440" bIns="45720" numCol="1" spcCol="0" rtlCol="0" fromWordArt="0" anchor="t" anchorCtr="0" forceAA="0" compatLnSpc="0">
+            <a:spAutoFit/>
+          </a:bodyPr>
+          <a:lstStyle/>
+          <a:p>
             <a:pPr algn="r">
               <a:defRPr/>
             </a:pPr>
@@ -4653,13 +4653,3039 @@
       </p:sp>
       <p:sp>
         <p:nvSpPr>
-          <p:cNvPr id="345396503" name="Rectangle : avec coins arrondis en haut 838565229"/>
+          <p:cNvPr id="2098956928" name="Rectangle : avec coins arrondis en haut 838565229"/>
           <p:cNvSpPr/>
           <p:nvPr/>
         </p:nvSpPr>
         <p:spPr bwMode="auto">
           <a:xfrm rot="5399976">
-            <a:off x="5203793" y="6863708"/>
+            <a:off x="5203792" y="6863707"/>
+            <a:ext cx="520473" cy="400050"/>
+          </a:xfrm>
+          <a:prstGeom prst="round2SameRect">
+            <a:avLst>
+              <a:gd name="adj1" fmla="val 16667"/>
+              <a:gd name="adj2" fmla="val 0"/>
+            </a:avLst>
+          </a:prstGeom>
+          <a:noFill/>
+          <a:ln w="12699" cap="flat" cmpd="sng" algn="ctr">
+            <a:solidFill>
+              <a:schemeClr val="tx1">
+                <a:lumMod val="50196"/>
+                <a:lumOff val="49804"/>
+              </a:schemeClr>
+            </a:solidFill>
+            <a:prstDash val="solid"/>
+            <a:miter lim="800000"/>
+          </a:ln>
+        </p:spPr>
+        <p:style>
+          <a:lnRef idx="2">
+            <a:schemeClr val="accent1">
+              <a:shade val="50000"/>
+            </a:schemeClr>
+          </a:lnRef>
+          <a:fillRef idx="1">
+            <a:schemeClr val="accent1"/>
+          </a:fillRef>
+          <a:effectRef idx="0">
+            <a:schemeClr val="accent1"/>
+          </a:effectRef>
+          <a:fontRef idx="minor">
+            <a:schemeClr val="lt1"/>
+          </a:fontRef>
+        </p:style>
+      </p:sp>
+      <p:sp>
+        <p:nvSpPr>
+          <p:cNvPr id="1839666904" name="ZoneTexte 448541368"/>
+          <p:cNvSpPr txBox="1"/>
+          <p:nvPr/>
+        </p:nvSpPr>
+        <p:spPr bwMode="auto">
+          <a:xfrm>
+            <a:off x="3085691" y="7383949"/>
+            <a:ext cx="2170176" cy="643788"/>
+          </a:xfrm>
+          <a:prstGeom prst="rect">
+            <a:avLst/>
+          </a:prstGeom>
+          <a:noFill/>
+        </p:spPr>
+        <p:txBody>
+          <a:bodyPr vertOverflow="overflow" horzOverflow="overflow" vert="horz" wrap="square" lIns="91440" tIns="45720" rIns="91440" bIns="45720" numCol="1" spcCol="0" rtlCol="0" fromWordArt="0" anchor="t" anchorCtr="0" forceAA="0" compatLnSpc="0">
+            <a:spAutoFit/>
+          </a:bodyPr>
+          <a:lstStyle/>
+          <a:p>
+            <a:pPr algn="r">
+              <a:defRPr/>
+            </a:pPr>
+            <a:r>
+              <a:rPr sz="1200"/>
+              <a:t>Résistance mentale </a:t>
+            </a:r>
+            <a:r>
+              <a:rPr lang="fr-FR" sz="1200" b="0" i="0" u="none" strike="noStrike" cap="none" spc="0">
+                <a:solidFill>
+                  <a:schemeClr val="tx1">
+                    <a:lumMod val="50000"/>
+                    <a:lumOff val="50000"/>
+                  </a:schemeClr>
+                </a:solidFill>
+                <a:latin typeface="Arial"/>
+                <a:ea typeface="Arial"/>
+                <a:cs typeface="Arial"/>
+              </a:rPr>
+              <a:t>◇</a:t>
+            </a:r>
+            <a:br>
+              <a:rPr lang="fr-FR" sz="800" b="0" i="0" u="none" strike="noStrike" cap="none" spc="0">
+                <a:solidFill>
+                  <a:schemeClr val="tx1">
+                    <a:lumMod val="50000"/>
+                    <a:lumOff val="50000"/>
+                  </a:schemeClr>
+                </a:solidFill>
+                <a:latin typeface="Arial"/>
+                <a:ea typeface="Arial"/>
+                <a:cs typeface="Arial"/>
+              </a:rPr>
+            </a:br>
+            <a:r>
+              <a:rPr lang="fr-FR" sz="800" b="0" i="0" u="none" strike="noStrike" cap="none" spc="0">
+                <a:solidFill>
+                  <a:schemeClr val="tx1">
+                    <a:lumMod val="50000"/>
+                    <a:lumOff val="50000"/>
+                  </a:schemeClr>
+                </a:solidFill>
+                <a:latin typeface="Arial"/>
+                <a:ea typeface="Arial"/>
+                <a:cs typeface="Arial"/>
+              </a:rPr>
+              <a:t>Faites un test lors d’une agression sociale ou mentale, ou lorsque votre santé mentale est mise en danger.</a:t>
+            </a:r>
+            <a:endParaRPr sz="800">
+              <a:solidFill>
+                <a:schemeClr val="tx1">
+                  <a:lumMod val="50000"/>
+                  <a:lumOff val="50000"/>
+                </a:schemeClr>
+              </a:solidFill>
+            </a:endParaRPr>
+          </a:p>
+        </p:txBody>
+      </p:sp>
+      <p:sp>
+        <p:nvSpPr>
+          <p:cNvPr id="1703007119" name="Rectangle : avec coins arrondis en haut 1165584529"/>
+          <p:cNvSpPr/>
+          <p:nvPr/>
+        </p:nvSpPr>
+        <p:spPr bwMode="auto">
+          <a:xfrm rot="5399976">
+            <a:off x="5195512" y="7504146"/>
+            <a:ext cx="520473" cy="400050"/>
+          </a:xfrm>
+          <a:prstGeom prst="round2SameRect">
+            <a:avLst>
+              <a:gd name="adj1" fmla="val 16667"/>
+              <a:gd name="adj2" fmla="val 0"/>
+            </a:avLst>
+          </a:prstGeom>
+          <a:noFill/>
+          <a:ln w="12699" cap="flat" cmpd="sng" algn="ctr">
+            <a:solidFill>
+              <a:schemeClr val="tx1">
+                <a:lumMod val="50196"/>
+                <a:lumOff val="49804"/>
+              </a:schemeClr>
+            </a:solidFill>
+            <a:prstDash val="solid"/>
+            <a:miter lim="800000"/>
+          </a:ln>
+        </p:spPr>
+        <p:style>
+          <a:lnRef idx="2">
+            <a:schemeClr val="accent1">
+              <a:shade val="50000"/>
+            </a:schemeClr>
+          </a:lnRef>
+          <a:fillRef idx="1">
+            <a:schemeClr val="accent1"/>
+          </a:fillRef>
+          <a:effectRef idx="0">
+            <a:schemeClr val="accent1"/>
+          </a:effectRef>
+          <a:fontRef idx="minor">
+            <a:schemeClr val="lt1"/>
+          </a:fontRef>
+        </p:style>
+      </p:sp>
+      <p:sp>
+        <p:nvSpPr>
+          <p:cNvPr id="902810861" name="Flèche : pentagone 1880610112"/>
+          <p:cNvSpPr/>
+          <p:nvPr/>
+        </p:nvSpPr>
+        <p:spPr bwMode="auto">
+          <a:xfrm flipH="0" flipV="0">
+            <a:off x="5798788" y="6916887"/>
+            <a:ext cx="143169" cy="140445"/>
+          </a:xfrm>
+          <a:prstGeom prst="homePlate">
+            <a:avLst>
+              <a:gd name="adj" fmla="val 50000"/>
+            </a:avLst>
+          </a:prstGeom>
+          <a:noFill/>
+          <a:ln w="12700" cap="flat" cmpd="sng" algn="ctr">
+            <a:solidFill>
+              <a:schemeClr val="tx1">
+                <a:lumMod val="50196"/>
+                <a:lumOff val="49804"/>
+              </a:schemeClr>
+            </a:solidFill>
+            <a:prstDash val="solid"/>
+            <a:miter lim="800000"/>
+          </a:ln>
+        </p:spPr>
+        <p:style>
+          <a:lnRef idx="2">
+            <a:schemeClr val="accent1">
+              <a:shade val="50000"/>
+            </a:schemeClr>
+          </a:lnRef>
+          <a:fillRef idx="1">
+            <a:schemeClr val="accent1"/>
+          </a:fillRef>
+          <a:effectRef idx="0">
+            <a:schemeClr val="accent1"/>
+          </a:effectRef>
+          <a:fontRef idx="minor">
+            <a:schemeClr val="lt1"/>
+          </a:fontRef>
+        </p:style>
+      </p:sp>
+      <p:sp>
+        <p:nvSpPr>
+          <p:cNvPr id="10132194" name="Flèche : pentagone 446859139"/>
+          <p:cNvSpPr/>
+          <p:nvPr/>
+        </p:nvSpPr>
+        <p:spPr bwMode="auto">
+          <a:xfrm flipH="0" flipV="0">
+            <a:off x="5949463" y="6916887"/>
+            <a:ext cx="143169" cy="140443"/>
+          </a:xfrm>
+          <a:prstGeom prst="homePlate">
+            <a:avLst>
+              <a:gd name="adj" fmla="val 50000"/>
+            </a:avLst>
+          </a:prstGeom>
+          <a:noFill/>
+          <a:ln w="12700" cap="flat" cmpd="sng" algn="ctr">
+            <a:solidFill>
+              <a:schemeClr val="tx1">
+                <a:lumMod val="50196"/>
+                <a:lumOff val="49804"/>
+              </a:schemeClr>
+            </a:solidFill>
+            <a:prstDash val="solid"/>
+            <a:miter lim="800000"/>
+          </a:ln>
+        </p:spPr>
+        <p:style>
+          <a:lnRef idx="2">
+            <a:schemeClr val="accent1">
+              <a:shade val="50000"/>
+            </a:schemeClr>
+          </a:lnRef>
+          <a:fillRef idx="1">
+            <a:schemeClr val="accent1"/>
+          </a:fillRef>
+          <a:effectRef idx="0">
+            <a:schemeClr val="accent1"/>
+          </a:effectRef>
+          <a:fontRef idx="minor">
+            <a:schemeClr val="lt1"/>
+          </a:fontRef>
+        </p:style>
+      </p:sp>
+      <p:sp>
+        <p:nvSpPr>
+          <p:cNvPr id="167852545" name="Flèche : pentagone 2055848356"/>
+          <p:cNvSpPr/>
+          <p:nvPr/>
+        </p:nvSpPr>
+        <p:spPr bwMode="auto">
+          <a:xfrm flipH="0" flipV="0">
+            <a:off x="6100142" y="6916887"/>
+            <a:ext cx="143169" cy="140443"/>
+          </a:xfrm>
+          <a:prstGeom prst="homePlate">
+            <a:avLst>
+              <a:gd name="adj" fmla="val 50000"/>
+            </a:avLst>
+          </a:prstGeom>
+          <a:noFill/>
+          <a:ln w="12700" cap="flat" cmpd="sng" algn="ctr">
+            <a:solidFill>
+              <a:schemeClr val="tx1">
+                <a:lumMod val="50196"/>
+                <a:lumOff val="49804"/>
+              </a:schemeClr>
+            </a:solidFill>
+            <a:prstDash val="solid"/>
+            <a:miter lim="800000"/>
+          </a:ln>
+        </p:spPr>
+        <p:style>
+          <a:lnRef idx="2">
+            <a:schemeClr val="accent1">
+              <a:shade val="50000"/>
+            </a:schemeClr>
+          </a:lnRef>
+          <a:fillRef idx="1">
+            <a:schemeClr val="accent1"/>
+          </a:fillRef>
+          <a:effectRef idx="0">
+            <a:schemeClr val="accent1"/>
+          </a:effectRef>
+          <a:fontRef idx="minor">
+            <a:schemeClr val="lt1"/>
+          </a:fontRef>
+        </p:style>
+      </p:sp>
+      <p:sp>
+        <p:nvSpPr>
+          <p:cNvPr id="813242163" name="Flèche : pentagone 1980093981"/>
+          <p:cNvSpPr/>
+          <p:nvPr/>
+        </p:nvSpPr>
+        <p:spPr bwMode="auto">
+          <a:xfrm flipH="0" flipV="0">
+            <a:off x="6250817" y="6916887"/>
+            <a:ext cx="143169" cy="140443"/>
+          </a:xfrm>
+          <a:prstGeom prst="homePlate">
+            <a:avLst>
+              <a:gd name="adj" fmla="val 50000"/>
+            </a:avLst>
+          </a:prstGeom>
+          <a:noFill/>
+          <a:ln w="12700" cap="flat" cmpd="sng" algn="ctr">
+            <a:solidFill>
+              <a:schemeClr val="tx1">
+                <a:lumMod val="50196"/>
+                <a:lumOff val="49804"/>
+              </a:schemeClr>
+            </a:solidFill>
+            <a:prstDash val="solid"/>
+            <a:miter lim="800000"/>
+          </a:ln>
+        </p:spPr>
+        <p:style>
+          <a:lnRef idx="2">
+            <a:schemeClr val="accent1">
+              <a:shade val="50000"/>
+            </a:schemeClr>
+          </a:lnRef>
+          <a:fillRef idx="1">
+            <a:schemeClr val="accent1"/>
+          </a:fillRef>
+          <a:effectRef idx="0">
+            <a:schemeClr val="accent1"/>
+          </a:effectRef>
+          <a:fontRef idx="minor">
+            <a:schemeClr val="lt1"/>
+          </a:fontRef>
+        </p:style>
+      </p:sp>
+      <p:sp>
+        <p:nvSpPr>
+          <p:cNvPr id="425300617" name="Flèche : pentagone 905284374"/>
+          <p:cNvSpPr/>
+          <p:nvPr/>
+        </p:nvSpPr>
+        <p:spPr bwMode="auto">
+          <a:xfrm flipH="0" flipV="0">
+            <a:off x="6401493" y="6916887"/>
+            <a:ext cx="143169" cy="140443"/>
+          </a:xfrm>
+          <a:prstGeom prst="homePlate">
+            <a:avLst>
+              <a:gd name="adj" fmla="val 50000"/>
+            </a:avLst>
+          </a:prstGeom>
+          <a:noFill/>
+          <a:ln w="12700" cap="flat" cmpd="sng" algn="ctr">
+            <a:solidFill>
+              <a:schemeClr val="tx1">
+                <a:lumMod val="50196"/>
+                <a:lumOff val="49804"/>
+              </a:schemeClr>
+            </a:solidFill>
+            <a:prstDash val="solid"/>
+            <a:miter lim="800000"/>
+          </a:ln>
+        </p:spPr>
+        <p:style>
+          <a:lnRef idx="2">
+            <a:schemeClr val="accent1">
+              <a:shade val="50000"/>
+            </a:schemeClr>
+          </a:lnRef>
+          <a:fillRef idx="1">
+            <a:schemeClr val="accent1"/>
+          </a:fillRef>
+          <a:effectRef idx="0">
+            <a:schemeClr val="accent1"/>
+          </a:effectRef>
+          <a:fontRef idx="minor">
+            <a:schemeClr val="lt1"/>
+          </a:fontRef>
+        </p:style>
+      </p:sp>
+      <p:sp>
+        <p:nvSpPr>
+          <p:cNvPr id="1220770323" name="ZoneTexte 880464430"/>
+          <p:cNvSpPr txBox="1"/>
+          <p:nvPr/>
+        </p:nvSpPr>
+        <p:spPr bwMode="auto">
+          <a:xfrm flipH="0" flipV="0">
+            <a:off x="3170221" y="8017652"/>
+            <a:ext cx="3685708" cy="579478"/>
+          </a:xfrm>
+          <a:prstGeom prst="rect">
+            <a:avLst/>
+          </a:prstGeom>
+          <a:noFill/>
+        </p:spPr>
+        <p:txBody>
+          <a:bodyPr vertOverflow="overflow" horzOverflow="overflow" vert="horz" wrap="square" lIns="91440" tIns="45720" rIns="91440" bIns="45720" numCol="1" spcCol="0" rtlCol="0" fromWordArt="0" anchor="t" anchorCtr="0" forceAA="0" compatLnSpc="0">
+            <a:spAutoFit/>
+          </a:bodyPr>
+          <a:lstStyle/>
+          <a:p>
+            <a:pPr algn="l">
+              <a:defRPr/>
+            </a:pPr>
+            <a:r>
+              <a:rPr lang="fr-FR" sz="800" b="0" i="0" u="none" strike="noStrike" cap="none" spc="0">
+                <a:solidFill>
+                  <a:schemeClr val="tx1">
+                    <a:lumMod val="50000"/>
+                    <a:lumOff val="50000"/>
+                  </a:schemeClr>
+                </a:solidFill>
+                <a:latin typeface="Arial"/>
+                <a:ea typeface="Arial"/>
+                <a:cs typeface="Arial"/>
+              </a:rPr>
+              <a:t>Chaque case de stress cochée entraîne un </a:t>
+            </a:r>
+            <a:r>
+              <a:rPr lang="fr-FR" sz="800" b="1" i="0" u="none" strike="noStrike" cap="none" spc="0">
+                <a:solidFill>
+                  <a:schemeClr val="tx1">
+                    <a:lumMod val="50000"/>
+                    <a:lumOff val="50000"/>
+                  </a:schemeClr>
+                </a:solidFill>
+                <a:latin typeface="Arial"/>
+                <a:ea typeface="Arial"/>
+                <a:cs typeface="Arial"/>
+              </a:rPr>
+              <a:t>malus de -10</a:t>
+            </a:r>
+            <a:r>
+              <a:rPr lang="fr-FR" sz="800" b="0" i="0" u="none" strike="noStrike" cap="none" spc="0">
+                <a:solidFill>
+                  <a:schemeClr val="tx1">
+                    <a:lumMod val="50000"/>
+                    <a:lumOff val="50000"/>
+                  </a:schemeClr>
+                </a:solidFill>
+                <a:latin typeface="Arial"/>
+                <a:ea typeface="Arial"/>
+                <a:cs typeface="Arial"/>
+              </a:rPr>
+              <a:t> à la résistance concernée. </a:t>
+            </a:r>
+            <a:r>
+              <a:rPr lang="fr-FR" sz="800">
+                <a:solidFill>
+                  <a:schemeClr val="tx1">
+                    <a:lumMod val="50000"/>
+                    <a:lumOff val="50000"/>
+                  </a:schemeClr>
+                </a:solidFill>
+              </a:rPr>
+              <a:t>Si vous échouez à un test d’</a:t>
+            </a:r>
+            <a:r>
+              <a:rPr lang="fr-FR" sz="800" b="1">
+                <a:solidFill>
+                  <a:schemeClr val="tx1">
+                    <a:lumMod val="50000"/>
+                    <a:lumOff val="50000"/>
+                  </a:schemeClr>
+                </a:solidFill>
+              </a:rPr>
+              <a:t>épreuve</a:t>
+            </a:r>
+            <a:r>
+              <a:rPr lang="fr-FR" sz="800">
+                <a:solidFill>
+                  <a:schemeClr val="tx1">
+                    <a:lumMod val="50000"/>
+                    <a:lumOff val="50000"/>
+                  </a:schemeClr>
+                </a:solidFill>
+              </a:rPr>
+              <a:t>, cochez une case de stress. Si vous réussissez à un test de </a:t>
+            </a:r>
+            <a:r>
+              <a:rPr lang="fr-FR" sz="800" b="1">
+                <a:solidFill>
+                  <a:schemeClr val="tx1">
+                    <a:lumMod val="50000"/>
+                    <a:lumOff val="50000"/>
+                  </a:schemeClr>
+                </a:solidFill>
+              </a:rPr>
+              <a:t>choc</a:t>
+            </a:r>
+            <a:r>
+              <a:rPr lang="fr-FR" sz="800">
+                <a:solidFill>
+                  <a:schemeClr val="tx1">
+                    <a:lumMod val="50000"/>
+                    <a:lumOff val="50000"/>
+                  </a:schemeClr>
+                </a:solidFill>
+              </a:rPr>
+              <a:t>, cochez une case de stress ; si vous échouez à un test de </a:t>
+            </a:r>
+            <a:r>
+              <a:rPr lang="fr-FR" sz="800" b="1">
+                <a:solidFill>
+                  <a:schemeClr val="tx1">
+                    <a:lumMod val="50000"/>
+                    <a:lumOff val="50000"/>
+                  </a:schemeClr>
+                </a:solidFill>
+              </a:rPr>
+              <a:t>choc</a:t>
+            </a:r>
+            <a:r>
+              <a:rPr lang="fr-FR" sz="800">
+                <a:solidFill>
+                  <a:schemeClr val="tx1">
+                    <a:lumMod val="50000"/>
+                    <a:lumOff val="50000"/>
+                  </a:schemeClr>
+                </a:solidFill>
+              </a:rPr>
+              <a:t>, cochez une case de trauma.</a:t>
+            </a:r>
+            <a:r>
+              <a:rPr sz="800">
+                <a:solidFill>
+                  <a:schemeClr val="tx1">
+                    <a:lumMod val="50000"/>
+                    <a:lumOff val="50000"/>
+                  </a:schemeClr>
+                </a:solidFill>
+              </a:rPr>
+              <a:t>.</a:t>
+            </a:r>
+            <a:endParaRPr sz="1800"/>
+          </a:p>
+        </p:txBody>
+      </p:sp>
+      <p:sp>
+        <p:nvSpPr>
+          <p:cNvPr id="1212945650" name="ZoneTexte 1302587497"/>
+          <p:cNvSpPr txBox="1"/>
+          <p:nvPr/>
+        </p:nvSpPr>
+        <p:spPr bwMode="auto">
+          <a:xfrm>
+            <a:off x="142542" y="563517"/>
+            <a:ext cx="4300362" cy="1463400"/>
+          </a:xfrm>
+          <a:prstGeom prst="rect">
+            <a:avLst/>
+          </a:prstGeom>
+          <a:noFill/>
+        </p:spPr>
+        <p:txBody>
+          <a:bodyPr vertOverflow="overflow" horzOverflow="overflow" vert="horz" wrap="square" lIns="91440" tIns="45720" rIns="91440" bIns="45720" numCol="1" spcCol="0" rtlCol="0" fromWordArt="0" anchor="t" anchorCtr="0" forceAA="0" compatLnSpc="0">
+            <a:spAutoFit/>
+          </a:bodyPr>
+          <a:lstStyle/>
+          <a:p>
+            <a:pPr>
+              <a:lnSpc>
+                <a:spcPct val="150000"/>
+              </a:lnSpc>
+              <a:defRPr/>
+            </a:pPr>
+            <a:r>
+              <a:rPr sz="1000"/>
+              <a:t>Nom :</a:t>
+            </a:r>
+            <a:r>
+              <a:rPr sz="1000">
+                <a:solidFill>
+                  <a:schemeClr val="bg2">
+                    <a:lumMod val="90000"/>
+                  </a:schemeClr>
+                </a:solidFill>
+              </a:rPr>
+              <a:t> __________________________________________________</a:t>
+            </a:r>
+            <a:endParaRPr/>
+          </a:p>
+          <a:p>
+            <a:pPr>
+              <a:lnSpc>
+                <a:spcPct val="150000"/>
+              </a:lnSpc>
+              <a:defRPr/>
+            </a:pPr>
+            <a:r>
+              <a:rPr sz="1000"/>
+              <a:t>Âge</a:t>
+            </a:r>
+            <a:r>
+              <a:rPr sz="1000"/>
+              <a:t> : </a:t>
+            </a:r>
+            <a:r>
+              <a:rPr sz="1000">
+                <a:solidFill>
+                  <a:schemeClr val="bg2">
+                    <a:lumMod val="90000"/>
+                  </a:schemeClr>
+                </a:solidFill>
+              </a:rPr>
+              <a:t>_______</a:t>
+            </a:r>
+            <a:r>
+              <a:rPr sz="1000"/>
+              <a:t>	Sexe : </a:t>
+            </a:r>
+            <a:r>
+              <a:rPr sz="1000">
+                <a:solidFill>
+                  <a:schemeClr val="bg2">
+                    <a:lumMod val="90000"/>
+                  </a:schemeClr>
+                </a:solidFill>
+              </a:rPr>
+              <a:t>______</a:t>
+            </a:r>
+            <a:r>
+              <a:rPr sz="1000"/>
+              <a:t>	Taille : </a:t>
+            </a:r>
+            <a:r>
+              <a:rPr sz="1000">
+                <a:solidFill>
+                  <a:schemeClr val="bg2">
+                    <a:lumMod val="90000"/>
+                  </a:schemeClr>
+                </a:solidFill>
+              </a:rPr>
+              <a:t>_______</a:t>
+            </a:r>
+            <a:r>
+              <a:rPr sz="1000"/>
+              <a:t>	  </a:t>
+            </a:r>
+            <a:r>
+              <a:rPr sz="1000"/>
+              <a:t>Poids</a:t>
+            </a:r>
+            <a:r>
+              <a:rPr sz="1000"/>
+              <a:t> : </a:t>
+            </a:r>
+            <a:r>
+              <a:rPr sz="1000">
+                <a:solidFill>
+                  <a:schemeClr val="bg2">
+                    <a:lumMod val="90000"/>
+                  </a:schemeClr>
+                </a:solidFill>
+              </a:rPr>
+              <a:t>_________</a:t>
+            </a:r>
+            <a:endParaRPr>
+              <a:solidFill>
+                <a:schemeClr val="bg2">
+                  <a:lumMod val="90000"/>
+                </a:schemeClr>
+              </a:solidFill>
+            </a:endParaRPr>
+          </a:p>
+          <a:p>
+            <a:pPr>
+              <a:lnSpc>
+                <a:spcPct val="150000"/>
+              </a:lnSpc>
+              <a:defRPr/>
+            </a:pPr>
+            <a:r>
+              <a:rPr sz="1000"/>
+              <a:t>Yeux : </a:t>
+            </a:r>
+            <a:r>
+              <a:rPr sz="1000">
+                <a:solidFill>
+                  <a:schemeClr val="bg2">
+                    <a:lumMod val="90000"/>
+                  </a:schemeClr>
+                </a:solidFill>
+              </a:rPr>
+              <a:t>___________________</a:t>
+            </a:r>
+            <a:r>
+              <a:rPr sz="1000"/>
+              <a:t>	</a:t>
+            </a:r>
+            <a:r>
+              <a:rPr sz="1000"/>
+              <a:t>Cheveux</a:t>
+            </a:r>
+            <a:r>
+              <a:rPr sz="1000"/>
+              <a:t> : </a:t>
+            </a:r>
+            <a:r>
+              <a:rPr sz="1000">
+                <a:solidFill>
+                  <a:schemeClr val="bg2">
+                    <a:lumMod val="90000"/>
+                  </a:schemeClr>
+                </a:solidFill>
+              </a:rPr>
+              <a:t>_____________________</a:t>
+            </a:r>
+            <a:endParaRPr/>
+          </a:p>
+          <a:p>
+            <a:pPr>
+              <a:lnSpc>
+                <a:spcPct val="150000"/>
+              </a:lnSpc>
+              <a:defRPr/>
+            </a:pPr>
+            <a:r>
+              <a:rPr sz="1000"/>
+              <a:t>Personnalité </a:t>
+            </a:r>
+            <a:r>
+              <a:rPr sz="1000"/>
+              <a:t>: </a:t>
+            </a:r>
+            <a:r>
+              <a:rPr sz="1000">
+                <a:solidFill>
+                  <a:schemeClr val="bg2">
+                    <a:lumMod val="90000"/>
+                  </a:schemeClr>
+                </a:solidFill>
+              </a:rPr>
+              <a:t>____________________________________________</a:t>
+            </a:r>
+            <a:r>
+              <a:rPr lang="fr-FR" sz="1000" b="0" i="0" u="none" strike="noStrike" cap="none" spc="0">
+                <a:solidFill>
+                  <a:schemeClr val="tx1"/>
+                </a:solidFill>
+                <a:latin typeface="Arial"/>
+                <a:ea typeface="Arial"/>
+                <a:cs typeface="Arial"/>
+              </a:rPr>
+              <a:t>	</a:t>
+            </a:r>
+            <a:endParaRPr/>
+          </a:p>
+          <a:p>
+            <a:pPr>
+              <a:lnSpc>
+                <a:spcPct val="150000"/>
+              </a:lnSpc>
+              <a:defRPr/>
+            </a:pPr>
+            <a:r>
+              <a:rPr lang="fr-FR" sz="1000" b="0" i="0" u="none" strike="noStrike" cap="none" spc="0">
+                <a:latin typeface="Arial"/>
+                <a:ea typeface="Arial"/>
+                <a:cs typeface="Arial"/>
+              </a:rPr>
+              <a:t>Exutoires :</a:t>
+            </a:r>
+            <a:r>
+              <a:rPr sz="1000"/>
+              <a:t> </a:t>
+            </a:r>
+            <a:r>
+              <a:rPr sz="1000">
+                <a:solidFill>
+                  <a:schemeClr val="bg2">
+                    <a:lumMod val="90000"/>
+                  </a:schemeClr>
+                </a:solidFill>
+              </a:rPr>
+              <a:t>_______________________________________________</a:t>
+            </a:r>
+            <a:endParaRPr sz="1000">
+              <a:solidFill>
+                <a:schemeClr val="bg2">
+                  <a:lumMod val="90000"/>
+                </a:schemeClr>
+              </a:solidFill>
+            </a:endParaRPr>
+          </a:p>
+          <a:p>
+            <a:pPr>
+              <a:lnSpc>
+                <a:spcPct val="150000"/>
+              </a:lnSpc>
+              <a:defRPr/>
+            </a:pPr>
+            <a:r>
+              <a:rPr lang="fr-FR" sz="1000" b="0" i="0" u="none" strike="noStrike" cap="none" spc="0">
+                <a:solidFill>
+                  <a:schemeClr val="tx1"/>
+                </a:solidFill>
+                <a:latin typeface="Arial"/>
+                <a:ea typeface="Arial"/>
+                <a:cs typeface="Arial"/>
+              </a:rPr>
+              <a:t>Complications :</a:t>
+            </a:r>
+            <a:r>
+              <a:rPr lang="fr-FR" sz="1000" b="0" i="0" u="none" strike="noStrike" cap="none" spc="0">
+                <a:solidFill>
+                  <a:schemeClr val="bg2">
+                    <a:lumMod val="90000"/>
+                  </a:schemeClr>
+                </a:solidFill>
+                <a:latin typeface="Arial"/>
+                <a:ea typeface="Arial"/>
+                <a:cs typeface="Arial"/>
+              </a:rPr>
+              <a:t> </a:t>
+            </a:r>
+            <a:r>
+              <a:rPr sz="1000">
+                <a:solidFill>
+                  <a:schemeClr val="bg2">
+                    <a:lumMod val="90000"/>
+                  </a:schemeClr>
+                </a:solidFill>
+              </a:rPr>
+              <a:t>___________________________________________</a:t>
+            </a:r>
+            <a:endParaRPr>
+              <a:solidFill>
+                <a:schemeClr val="bg2">
+                  <a:lumMod val="90000"/>
+                </a:schemeClr>
+              </a:solidFill>
+            </a:endParaRPr>
+          </a:p>
+        </p:txBody>
+      </p:sp>
+      <p:cxnSp>
+        <p:nvCxnSpPr>
+          <p:cNvPr id="186275386" name="Connecteur droit 342798987"/>
+          <p:cNvCxnSpPr/>
+          <p:nvPr/>
+        </p:nvCxnSpPr>
+        <p:spPr bwMode="auto">
+          <a:xfrm flipV="1">
+            <a:off x="3259026" y="8683857"/>
+            <a:ext cx="3609464" cy="0"/>
+          </a:xfrm>
+          <a:prstGeom prst="line">
+            <a:avLst/>
+          </a:prstGeom>
+          <a:ln w="76199" cap="flat" cmpd="sng" algn="ctr">
+            <a:solidFill>
+              <a:schemeClr val="bg1">
+                <a:lumMod val="74901"/>
+                <a:alpha val="99999"/>
+              </a:schemeClr>
+            </a:solidFill>
+            <a:prstDash val="solid"/>
+            <a:miter lim="800000"/>
+          </a:ln>
+        </p:spPr>
+        <p:style>
+          <a:lnRef idx="1">
+            <a:schemeClr val="accent1">
+              <a:shade val="50000"/>
+            </a:schemeClr>
+          </a:lnRef>
+          <a:fillRef idx="0">
+            <a:schemeClr val="accent1"/>
+          </a:fillRef>
+          <a:effectRef idx="0">
+            <a:schemeClr val="accent1"/>
+          </a:effectRef>
+          <a:fontRef idx="minor">
+            <a:schemeClr val="tx1"/>
+          </a:fontRef>
+        </p:style>
+      </p:cxnSp>
+      <p:sp>
+        <p:nvSpPr>
+          <p:cNvPr id="2099811014" name="ZoneTexte 966486802"/>
+          <p:cNvSpPr txBox="1"/>
+          <p:nvPr/>
+        </p:nvSpPr>
+        <p:spPr bwMode="auto">
+          <a:xfrm>
+            <a:off x="3303459" y="8500797"/>
+            <a:ext cx="2270304" cy="366118"/>
+          </a:xfrm>
+          <a:prstGeom prst="rect">
+            <a:avLst/>
+          </a:prstGeom>
+          <a:noFill/>
+        </p:spPr>
+        <p:txBody>
+          <a:bodyPr vertOverflow="overflow" horzOverflow="overflow" vert="horz" wrap="square" lIns="91440" tIns="45720" rIns="91440" bIns="45720" numCol="1" spcCol="0" rtlCol="0" fromWordArt="0" anchor="t" anchorCtr="0" forceAA="0" compatLnSpc="0">
+            <a:spAutoFit/>
+          </a:bodyPr>
+          <a:lstStyle/>
+          <a:p>
+            <a:pPr algn="l">
+              <a:defRPr/>
+            </a:pPr>
+            <a:r>
+              <a:rPr sz="1800" b="0">
+                <a:solidFill>
+                  <a:schemeClr val="tx1">
+                    <a:lumMod val="75000"/>
+                    <a:lumOff val="25000"/>
+                  </a:schemeClr>
+                </a:solidFill>
+              </a:rPr>
+              <a:t>Ressources</a:t>
+            </a:r>
+            <a:endParaRPr/>
+          </a:p>
+        </p:txBody>
+      </p:sp>
+      <p:sp>
+        <p:nvSpPr>
+          <p:cNvPr id="2031518102" name="Rectangle 38344096"/>
+          <p:cNvSpPr/>
+          <p:nvPr/>
+        </p:nvSpPr>
+        <p:spPr bwMode="auto">
+          <a:xfrm flipH="0" flipV="0">
+            <a:off x="4106250" y="552447"/>
+            <a:ext cx="104771" cy="1474465"/>
+          </a:xfrm>
+          <a:prstGeom prst="rect">
+            <a:avLst/>
+          </a:prstGeom>
+          <a:solidFill>
+            <a:schemeClr val="bg1"/>
+          </a:solidFill>
+          <a:ln w="12700" cap="flat" cmpd="sng" algn="ctr">
+            <a:noFill/>
+            <a:prstDash val="solid"/>
+            <a:miter lim="800000"/>
+          </a:ln>
+        </p:spPr>
+        <p:style>
+          <a:lnRef idx="2">
+            <a:schemeClr val="accent1">
+              <a:shade val="50000"/>
+            </a:schemeClr>
+          </a:lnRef>
+          <a:fillRef idx="1">
+            <a:schemeClr val="accent1"/>
+          </a:fillRef>
+          <a:effectRef idx="0">
+            <a:schemeClr val="accent1"/>
+          </a:effectRef>
+          <a:fontRef idx="minor">
+            <a:schemeClr val="lt1"/>
+          </a:fontRef>
+        </p:style>
+      </p:sp>
+      <p:sp>
+        <p:nvSpPr>
+          <p:cNvPr id="1159720982" name="Rectangle 954364527"/>
+          <p:cNvSpPr/>
+          <p:nvPr/>
+        </p:nvSpPr>
+        <p:spPr bwMode="auto">
+          <a:xfrm flipH="0" flipV="0">
+            <a:off x="6688315" y="475380"/>
+            <a:ext cx="162576" cy="1561403"/>
+          </a:xfrm>
+          <a:prstGeom prst="rect">
+            <a:avLst/>
+          </a:prstGeom>
+          <a:solidFill>
+            <a:schemeClr val="bg1"/>
+          </a:solidFill>
+          <a:ln w="12700" cap="flat" cmpd="sng" algn="ctr">
+            <a:noFill/>
+            <a:prstDash val="solid"/>
+            <a:miter lim="800000"/>
+          </a:ln>
+        </p:spPr>
+        <p:style>
+          <a:lnRef idx="2">
+            <a:schemeClr val="accent1">
+              <a:shade val="50000"/>
+            </a:schemeClr>
+          </a:lnRef>
+          <a:fillRef idx="1">
+            <a:schemeClr val="accent1"/>
+          </a:fillRef>
+          <a:effectRef idx="0">
+            <a:schemeClr val="accent1"/>
+          </a:effectRef>
+          <a:fontRef idx="minor">
+            <a:schemeClr val="lt1"/>
+          </a:fontRef>
+        </p:style>
+      </p:sp>
+      <p:sp>
+        <p:nvSpPr>
+          <p:cNvPr id="1086455721" name="ZoneTexte 1527388901"/>
+          <p:cNvSpPr txBox="1"/>
+          <p:nvPr/>
+        </p:nvSpPr>
+        <p:spPr bwMode="auto">
+          <a:xfrm flipH="0" flipV="0">
+            <a:off x="4547592" y="2333273"/>
+            <a:ext cx="2353659" cy="2465976"/>
+          </a:xfrm>
+          <a:prstGeom prst="rect">
+            <a:avLst/>
+          </a:prstGeom>
+          <a:noFill/>
+        </p:spPr>
+        <p:txBody>
+          <a:bodyPr vertOverflow="overflow" horzOverflow="overflow" vert="horz" wrap="square" lIns="91440" tIns="45720" rIns="91440" bIns="45720" numCol="1" spcCol="0" rtlCol="0" fromWordArt="0" anchor="t" anchorCtr="0" forceAA="0" compatLnSpc="0">
+            <a:spAutoFit/>
+          </a:bodyPr>
+          <a:lstStyle/>
+          <a:p>
+            <a:pPr>
+              <a:lnSpc>
+                <a:spcPct val="150000"/>
+              </a:lnSpc>
+              <a:defRPr/>
+            </a:pPr>
+            <a:r>
+              <a:rPr sz="1200"/>
+              <a:t>Spécialités</a:t>
+            </a:r>
+            <a:r>
+              <a:rPr lang="fr-FR" sz="1200" b="0" i="0" u="none" strike="noStrike" cap="none" spc="0">
+                <a:solidFill>
+                  <a:schemeClr val="tx1"/>
+                </a:solidFill>
+                <a:latin typeface="Arial"/>
+                <a:ea typeface="Arial"/>
+                <a:cs typeface="Arial"/>
+              </a:rPr>
+              <a:t> </a:t>
+            </a:r>
+            <a:r>
+              <a:rPr lang="fr-FR" sz="1200" b="0" i="0" u="none" strike="noStrike" cap="none" spc="0">
+                <a:solidFill>
+                  <a:schemeClr val="tx1">
+                    <a:lumMod val="50000"/>
+                    <a:lumOff val="50000"/>
+                  </a:schemeClr>
+                </a:solidFill>
+                <a:latin typeface="Arial"/>
+                <a:ea typeface="Arial"/>
+                <a:cs typeface="Arial"/>
+              </a:rPr>
+              <a:t>◇</a:t>
+            </a:r>
+            <a:endParaRPr lang="fr-FR" sz="1200" b="0" i="0" u="none" strike="noStrike" cap="none" spc="0">
+              <a:solidFill>
+                <a:schemeClr val="tx1">
+                  <a:lumMod val="50000"/>
+                  <a:lumOff val="50000"/>
+                </a:schemeClr>
+              </a:solidFill>
+              <a:latin typeface="Times New Roman"/>
+              <a:cs typeface="Times New Roman"/>
+            </a:endParaRPr>
+          </a:p>
+          <a:p>
+            <a:pPr>
+              <a:lnSpc>
+                <a:spcPct val="150000"/>
+              </a:lnSpc>
+              <a:defRPr/>
+            </a:pPr>
+            <a:r>
+              <a:rPr lang="fr-FR" sz="1000" b="0" i="0" u="none" strike="noStrike" cap="none" spc="0">
+                <a:solidFill>
+                  <a:schemeClr val="bg2">
+                    <a:lumMod val="90000"/>
+                  </a:schemeClr>
+                </a:solidFill>
+                <a:latin typeface="Arial"/>
+                <a:ea typeface="Arial"/>
+                <a:cs typeface="Arial"/>
+              </a:rPr>
+              <a:t>_____</a:t>
+            </a:r>
+            <a:r>
+              <a:rPr lang="fr-FR" sz="1000" b="0" i="0" u="none" strike="noStrike" cap="none" spc="0">
+                <a:solidFill>
+                  <a:schemeClr val="bg2">
+                    <a:lumMod val="90000"/>
+                  </a:schemeClr>
+                </a:solidFill>
+                <a:latin typeface="Arial"/>
+                <a:ea typeface="Arial"/>
+                <a:cs typeface="Arial"/>
+              </a:rPr>
+              <a:t>_______________________________________________________________________________________________________________________________________________________</a:t>
+            </a:r>
+            <a:r>
+              <a:rPr lang="fr-FR" sz="1000" b="0" i="0" u="none" strike="noStrike" cap="none" spc="0">
+                <a:solidFill>
+                  <a:schemeClr val="bg2">
+                    <a:lumMod val="90000"/>
+                  </a:schemeClr>
+                </a:solidFill>
+                <a:latin typeface="Arial"/>
+                <a:ea typeface="Arial"/>
+                <a:cs typeface="Arial"/>
+              </a:rPr>
+              <a:t>______________________________________________________</a:t>
+            </a:r>
+            <a:endParaRPr lang="fr-FR" sz="1200" b="0" i="0" u="none" strike="noStrike" cap="none" spc="0">
+              <a:solidFill>
+                <a:schemeClr val="bg2">
+                  <a:lumMod val="90000"/>
+                </a:schemeClr>
+              </a:solidFill>
+              <a:latin typeface="Times New Roman"/>
+              <a:cs typeface="Times New Roman"/>
+            </a:endParaRPr>
+          </a:p>
+          <a:p>
+            <a:pPr>
+              <a:lnSpc>
+                <a:spcPct val="100000"/>
+              </a:lnSpc>
+              <a:defRPr/>
+            </a:pPr>
+            <a:r>
+              <a:rPr lang="fr-FR" sz="800" b="0" i="0" u="none" strike="noStrike" cap="none" spc="0">
+                <a:solidFill>
+                  <a:schemeClr val="tx1">
+                    <a:lumMod val="50000"/>
+                    <a:lumOff val="50000"/>
+                  </a:schemeClr>
+                </a:solidFill>
+                <a:latin typeface="Arial"/>
+                <a:ea typeface="Arial"/>
+                <a:cs typeface="Arial"/>
+              </a:rPr>
+              <a:t>Une spécialité apporte un </a:t>
+            </a:r>
+            <a:r>
+              <a:rPr lang="fr-FR" sz="800" b="1" i="0" u="none" strike="noStrike" cap="none" spc="0">
+                <a:solidFill>
+                  <a:schemeClr val="tx1">
+                    <a:lumMod val="50000"/>
+                    <a:lumOff val="50000"/>
+                  </a:schemeClr>
+                </a:solidFill>
+                <a:latin typeface="Arial"/>
+                <a:ea typeface="Arial"/>
+                <a:cs typeface="Arial"/>
+              </a:rPr>
+              <a:t>bonus de +10</a:t>
+            </a:r>
+            <a:r>
+              <a:rPr lang="fr-FR" sz="800" b="0" i="0" u="none" strike="noStrike" cap="none" spc="0">
+                <a:solidFill>
+                  <a:schemeClr val="tx1">
+                    <a:lumMod val="50000"/>
+                    <a:lumOff val="50000"/>
+                  </a:schemeClr>
+                </a:solidFill>
+                <a:latin typeface="Arial"/>
+                <a:ea typeface="Arial"/>
+                <a:cs typeface="Arial"/>
+              </a:rPr>
+              <a:t> à une compétence.</a:t>
+            </a:r>
+            <a:r>
+              <a:rPr lang="fr-FR" sz="800" b="0" i="0" u="none" strike="noStrike" cap="none" spc="0">
+                <a:solidFill>
+                  <a:schemeClr val="bg2">
+                    <a:lumMod val="90000"/>
+                  </a:schemeClr>
+                </a:solidFill>
+                <a:latin typeface="Arial"/>
+                <a:ea typeface="Arial"/>
+                <a:cs typeface="Arial"/>
+              </a:rPr>
+              <a:t> </a:t>
+            </a:r>
+            <a:r>
+              <a:rPr lang="fr-FR" sz="800" b="0" i="0" u="none" strike="noStrike" cap="none" spc="0">
+                <a:solidFill>
+                  <a:schemeClr val="tx1">
+                    <a:lumMod val="50000"/>
+                    <a:lumOff val="50000"/>
+                  </a:schemeClr>
+                </a:solidFill>
+                <a:latin typeface="Arial"/>
+                <a:ea typeface="Arial"/>
+                <a:cs typeface="Arial"/>
+              </a:rPr>
+              <a:t>Pour acquérir une nouvelle  spécialité, chaque spécialité possédée occupe 15% des chances d’obtention</a:t>
+            </a:r>
+            <a:r>
+              <a:rPr lang="fr-FR" sz="800">
+                <a:solidFill>
+                  <a:schemeClr val="tx1">
+                    <a:lumMod val="50000"/>
+                    <a:lumOff val="50000"/>
+                  </a:schemeClr>
+                </a:solidFill>
+              </a:rPr>
+              <a:t>.</a:t>
+            </a:r>
+            <a:endParaRPr sz="800">
+              <a:solidFill>
+                <a:schemeClr val="tx1">
+                  <a:lumMod val="50000"/>
+                  <a:lumOff val="50000"/>
+                </a:schemeClr>
+              </a:solidFill>
+            </a:endParaRPr>
+          </a:p>
+        </p:txBody>
+      </p:sp>
+      <p:sp>
+        <p:nvSpPr>
+          <p:cNvPr id="1939947376" name="ZoneTexte 1440859034"/>
+          <p:cNvSpPr txBox="1"/>
+          <p:nvPr/>
+        </p:nvSpPr>
+        <p:spPr bwMode="auto">
+          <a:xfrm>
+            <a:off x="5710630" y="6695110"/>
+            <a:ext cx="894969" cy="305158"/>
+          </a:xfrm>
+          <a:prstGeom prst="rect">
+            <a:avLst/>
+          </a:prstGeom>
+          <a:noFill/>
+        </p:spPr>
+        <p:txBody>
+          <a:bodyPr vertOverflow="overflow" horzOverflow="overflow" vert="horz" wrap="none" lIns="91440" tIns="45720" rIns="91440" bIns="45720" numCol="1" spcCol="0" rtlCol="0" fromWordArt="0" anchor="t" anchorCtr="0" forceAA="0" compatLnSpc="0">
+            <a:spAutoFit/>
+          </a:bodyPr>
+          <a:lstStyle/>
+          <a:p>
+            <a:pPr marL="0" marR="0" indent="0" algn="l">
+              <a:lnSpc>
+                <a:spcPct val="100000"/>
+              </a:lnSpc>
+              <a:spcBef>
+                <a:spcPts val="0"/>
+              </a:spcBef>
+              <a:spcAft>
+                <a:spcPts val="0"/>
+              </a:spcAft>
+              <a:defRPr/>
+            </a:pPr>
+            <a:r>
+              <a:rPr lang="fr-FR" sz="1400" b="1" i="0" u="none" strike="noStrike" cap="none" spc="0">
+                <a:solidFill>
+                  <a:schemeClr val="bg1">
+                    <a:lumMod val="65000"/>
+                  </a:schemeClr>
+                </a:solidFill>
+                <a:latin typeface="Arial"/>
+                <a:ea typeface="Arial"/>
+                <a:cs typeface="Arial"/>
+              </a:rPr>
+              <a:t>STRESS</a:t>
+            </a:r>
+            <a:endParaRPr sz="1600"/>
+          </a:p>
+        </p:txBody>
+      </p:sp>
+      <p:cxnSp>
+        <p:nvCxnSpPr>
+          <p:cNvPr id="1742025520" name="Connecteur droit 858914340"/>
+          <p:cNvCxnSpPr/>
+          <p:nvPr/>
+        </p:nvCxnSpPr>
+        <p:spPr bwMode="auto">
+          <a:xfrm flipH="0" flipV="1">
+            <a:off x="-66688" y="6540795"/>
+            <a:ext cx="3068035" cy="0"/>
+          </a:xfrm>
+          <a:prstGeom prst="line">
+            <a:avLst/>
+          </a:prstGeom>
+          <a:ln w="76199" cap="flat" cmpd="sng" algn="ctr">
+            <a:solidFill>
+              <a:schemeClr val="bg1">
+                <a:lumMod val="74901"/>
+                <a:alpha val="99999"/>
+              </a:schemeClr>
+            </a:solidFill>
+            <a:prstDash val="solid"/>
+            <a:miter lim="800000"/>
+          </a:ln>
+        </p:spPr>
+        <p:style>
+          <a:lnRef idx="1">
+            <a:schemeClr val="accent1">
+              <a:shade val="50000"/>
+            </a:schemeClr>
+          </a:lnRef>
+          <a:fillRef idx="0">
+            <a:schemeClr val="accent1"/>
+          </a:fillRef>
+          <a:effectRef idx="0">
+            <a:schemeClr val="accent1"/>
+          </a:effectRef>
+          <a:fontRef idx="minor">
+            <a:schemeClr val="tx1"/>
+          </a:fontRef>
+        </p:style>
+      </p:cxnSp>
+      <p:sp>
+        <p:nvSpPr>
+          <p:cNvPr id="1649277529" name="ZoneTexte 2018177722"/>
+          <p:cNvSpPr txBox="1"/>
+          <p:nvPr/>
+        </p:nvSpPr>
+        <p:spPr bwMode="auto">
+          <a:xfrm flipH="0" flipV="0">
+            <a:off x="32193" y="6357735"/>
+            <a:ext cx="1815876" cy="366117"/>
+          </a:xfrm>
+          <a:prstGeom prst="rect">
+            <a:avLst/>
+          </a:prstGeom>
+          <a:noFill/>
+        </p:spPr>
+        <p:txBody>
+          <a:bodyPr vertOverflow="overflow" horzOverflow="overflow" vert="horz" wrap="square" lIns="91440" tIns="45720" rIns="91440" bIns="45720" numCol="1" spcCol="0" rtlCol="0" fromWordArt="0" anchor="t" anchorCtr="0" forceAA="0" compatLnSpc="0">
+            <a:spAutoFit/>
+          </a:bodyPr>
+          <a:lstStyle/>
+          <a:p>
+            <a:pPr>
+              <a:defRPr/>
+            </a:pPr>
+            <a:r>
+              <a:rPr lang="fr-FR">
+                <a:solidFill>
+                  <a:schemeClr val="tx1">
+                    <a:lumMod val="75000"/>
+                    <a:lumOff val="25000"/>
+                  </a:schemeClr>
+                </a:solidFill>
+              </a:rPr>
+              <a:t>Équipement</a:t>
+            </a:r>
+            <a:endParaRPr sz="1800" b="0">
+              <a:solidFill>
+                <a:schemeClr val="tx1">
+                  <a:lumMod val="75000"/>
+                  <a:lumOff val="25000"/>
+                </a:schemeClr>
+              </a:solidFill>
+            </a:endParaRPr>
+          </a:p>
+        </p:txBody>
+      </p:sp>
+      <p:sp>
+        <p:nvSpPr>
+          <p:cNvPr id="1959316975" name=""/>
+          <p:cNvSpPr txBox="1"/>
+          <p:nvPr/>
+        </p:nvSpPr>
+        <p:spPr bwMode="auto">
+          <a:xfrm rot="0" flipH="0" flipV="0">
+            <a:off x="11160" y="6674321"/>
+            <a:ext cx="3007973" cy="3376018"/>
+          </a:xfrm>
+          <a:prstGeom prst="rect">
+            <a:avLst/>
+          </a:prstGeom>
+          <a:noFill/>
+        </p:spPr>
+        <p:txBody>
+          <a:bodyPr vertOverflow="overflow" horzOverflow="overflow" vert="horz" wrap="square" lIns="91440" tIns="45720" rIns="91440" bIns="45720" numCol="1" spcCol="0" rtlCol="0" fromWordArt="0" anchor="t" anchorCtr="0" forceAA="0" upright="0" compatLnSpc="0">
+            <a:spAutoFit/>
+          </a:bodyPr>
+          <a:p>
+            <a:pPr algn="l">
+              <a:lnSpc>
+                <a:spcPct val="150000"/>
+              </a:lnSpc>
+              <a:defRPr/>
+            </a:pPr>
+            <a:r>
+              <a:rPr lang="fr-FR" sz="1200" b="0" i="0" u="none" strike="noStrike" cap="none" spc="0">
+                <a:solidFill>
+                  <a:schemeClr val="bg2">
+                    <a:lumMod val="90000"/>
+                  </a:schemeClr>
+                </a:solidFill>
+                <a:latin typeface="Arial"/>
+                <a:ea typeface="Arial"/>
+                <a:cs typeface="Arial"/>
+              </a:rPr>
+              <a:t>_____________________________________________________________</a:t>
+            </a:r>
+            <a:r>
+              <a:rPr lang="fr-FR" sz="1200" b="0" i="0" u="none" strike="noStrike" cap="none" spc="0">
+                <a:solidFill>
+                  <a:schemeClr val="bg2">
+                    <a:lumMod val="90000"/>
+                  </a:schemeClr>
+                </a:solidFill>
+                <a:latin typeface="Arial"/>
+                <a:ea typeface="Arial"/>
+                <a:cs typeface="Arial"/>
+              </a:rPr>
+              <a:t>______________________________________________________________________________________________________________________________________________________________________________________________________________________________________________________________________________________________________________</a:t>
+            </a:r>
+            <a:endParaRPr lang="fr-FR" sz="1200" b="0" i="0" u="none" strike="noStrike" cap="none" spc="0">
+              <a:solidFill>
+                <a:schemeClr val="bg2">
+                  <a:lumMod val="90000"/>
+                </a:schemeClr>
+              </a:solidFill>
+              <a:latin typeface="Arial"/>
+              <a:ea typeface="Arial"/>
+              <a:cs typeface="Arial"/>
+            </a:endParaRPr>
+          </a:p>
+          <a:p>
+            <a:pPr>
+              <a:lnSpc>
+                <a:spcPct val="100000"/>
+              </a:lnSpc>
+              <a:defRPr/>
+            </a:pPr>
+            <a:endParaRPr sz="400" b="0" i="0" u="none" strike="noStrike" cap="none" spc="0">
+              <a:solidFill>
+                <a:schemeClr val="tx1">
+                  <a:lumMod val="50000"/>
+                  <a:lumOff val="50000"/>
+                </a:schemeClr>
+              </a:solidFill>
+              <a:latin typeface="Arial"/>
+              <a:ea typeface="Arial"/>
+              <a:cs typeface="Arial"/>
+            </a:endParaRPr>
+          </a:p>
+          <a:p>
+            <a:pPr algn="l">
+              <a:lnSpc>
+                <a:spcPct val="150000"/>
+              </a:lnSpc>
+              <a:defRPr/>
+            </a:pPr>
+            <a:endParaRPr lang="fr-FR" sz="900" b="0" i="0" u="none" strike="noStrike" cap="none" spc="0">
+              <a:solidFill>
+                <a:schemeClr val="bg2">
+                  <a:lumMod val="90000"/>
+                </a:schemeClr>
+              </a:solidFill>
+              <a:latin typeface="Times New Roman"/>
+              <a:cs typeface="Times New Roman"/>
+            </a:endParaRPr>
+          </a:p>
+        </p:txBody>
+      </p:sp>
+      <p:cxnSp>
+        <p:nvCxnSpPr>
+          <p:cNvPr id="2130853905" name="Connecteur droit 858914340"/>
+          <p:cNvCxnSpPr/>
+          <p:nvPr/>
+        </p:nvCxnSpPr>
+        <p:spPr bwMode="auto">
+          <a:xfrm flipH="0" flipV="1">
+            <a:off x="4547592" y="4940256"/>
+            <a:ext cx="2320902" cy="0"/>
+          </a:xfrm>
+          <a:prstGeom prst="line">
+            <a:avLst/>
+          </a:prstGeom>
+          <a:ln w="76199" cap="flat" cmpd="sng" algn="ctr">
+            <a:solidFill>
+              <a:schemeClr val="bg1">
+                <a:lumMod val="74901"/>
+                <a:alpha val="99999"/>
+              </a:schemeClr>
+            </a:solidFill>
+            <a:prstDash val="solid"/>
+            <a:miter lim="800000"/>
+          </a:ln>
+        </p:spPr>
+        <p:style>
+          <a:lnRef idx="1">
+            <a:schemeClr val="accent1">
+              <a:shade val="50000"/>
+            </a:schemeClr>
+          </a:lnRef>
+          <a:fillRef idx="0">
+            <a:schemeClr val="accent1"/>
+          </a:fillRef>
+          <a:effectRef idx="0">
+            <a:schemeClr val="accent1"/>
+          </a:effectRef>
+          <a:fontRef idx="minor">
+            <a:schemeClr val="tx1"/>
+          </a:fontRef>
+        </p:style>
+      </p:cxnSp>
+      <p:sp>
+        <p:nvSpPr>
+          <p:cNvPr id="1741988812" name="ZoneTexte 2018177722"/>
+          <p:cNvSpPr txBox="1"/>
+          <p:nvPr/>
+        </p:nvSpPr>
+        <p:spPr bwMode="auto">
+          <a:xfrm flipH="0" flipV="0">
+            <a:off x="4601547" y="4757193"/>
+            <a:ext cx="1831713" cy="366118"/>
+          </a:xfrm>
+          <a:prstGeom prst="rect">
+            <a:avLst/>
+          </a:prstGeom>
+          <a:noFill/>
+        </p:spPr>
+        <p:txBody>
+          <a:bodyPr vertOverflow="overflow" horzOverflow="overflow" vert="horz" wrap="square" lIns="91440" tIns="45720" rIns="91440" bIns="45720" numCol="1" spcCol="0" rtlCol="0" fromWordArt="0" anchor="t" anchorCtr="0" forceAA="0" compatLnSpc="0">
+            <a:spAutoFit/>
+          </a:bodyPr>
+          <a:lstStyle/>
+          <a:p>
+            <a:pPr>
+              <a:defRPr/>
+            </a:pPr>
+            <a:r>
+              <a:rPr lang="fr-FR">
+                <a:solidFill>
+                  <a:schemeClr val="tx1">
+                    <a:lumMod val="75000"/>
+                    <a:lumOff val="25000"/>
+                  </a:schemeClr>
+                </a:solidFill>
+              </a:rPr>
+              <a:t>Tests</a:t>
+            </a:r>
+            <a:r>
+              <a:rPr sz="1800" b="0">
+                <a:solidFill>
+                  <a:schemeClr val="tx1">
+                    <a:lumMod val="75000"/>
+                    <a:lumOff val="25000"/>
+                  </a:schemeClr>
+                </a:solidFill>
+              </a:rPr>
+              <a:t> &amp; d100</a:t>
+            </a:r>
+            <a:endParaRPr sz="1800" b="0">
+              <a:solidFill>
+                <a:schemeClr val="tx1">
+                  <a:lumMod val="75000"/>
+                  <a:lumOff val="25000"/>
+                </a:schemeClr>
+              </a:solidFill>
+            </a:endParaRPr>
+          </a:p>
+        </p:txBody>
+      </p:sp>
+      <p:sp>
+        <p:nvSpPr>
+          <p:cNvPr id="356306380" name=""/>
+          <p:cNvSpPr txBox="1"/>
+          <p:nvPr/>
+        </p:nvSpPr>
+        <p:spPr bwMode="auto">
+          <a:xfrm rot="0" flipH="0" flipV="0">
+            <a:off x="4547592" y="5033169"/>
+            <a:ext cx="2343978" cy="1539598"/>
+          </a:xfrm>
+          <a:prstGeom prst="rect">
+            <a:avLst/>
+          </a:prstGeom>
+          <a:noFill/>
+        </p:spPr>
+        <p:txBody>
+          <a:bodyPr vertOverflow="overflow" horzOverflow="overflow" vert="horz" wrap="square" lIns="91440" tIns="45720" rIns="91440" bIns="45720" numCol="1" spcCol="0" rtlCol="0" fromWordArt="0" anchor="t" anchorCtr="0" forceAA="0" upright="0" compatLnSpc="0">
+            <a:spAutoFit/>
+          </a:bodyPr>
+          <a:p>
+            <a:pPr marL="0" marR="0" indent="0" algn="l">
+              <a:lnSpc>
+                <a:spcPct val="100000"/>
+              </a:lnSpc>
+              <a:spcBef>
+                <a:spcPts val="0"/>
+              </a:spcBef>
+              <a:spcAft>
+                <a:spcPts val="0"/>
+              </a:spcAft>
+              <a:defRPr/>
+            </a:pPr>
+            <a:r>
+              <a:rPr lang="fr-FR" sz="800" b="0" i="0" u="none" strike="noStrike" cap="none" spc="0">
+                <a:solidFill>
+                  <a:schemeClr val="tx1">
+                    <a:lumMod val="50000"/>
+                    <a:lumOff val="50000"/>
+                  </a:schemeClr>
+                </a:solidFill>
+                <a:latin typeface="Arial"/>
+                <a:ea typeface="Arial"/>
+                <a:cs typeface="Arial"/>
+              </a:rPr>
+              <a:t>Vous réussissez un </a:t>
+            </a:r>
+            <a:r>
+              <a:rPr lang="fr-FR" sz="800" b="1" i="0" u="none" strike="noStrike" cap="none" spc="0">
+                <a:solidFill>
+                  <a:schemeClr val="tx1">
+                    <a:lumMod val="50000"/>
+                    <a:lumOff val="50000"/>
+                  </a:schemeClr>
+                </a:solidFill>
+                <a:latin typeface="Arial"/>
+                <a:ea typeface="Arial"/>
+                <a:cs typeface="Arial"/>
+              </a:rPr>
+              <a:t>test</a:t>
+            </a:r>
+            <a:r>
+              <a:rPr lang="fr-FR" sz="800" b="0" i="0" u="none" strike="noStrike" cap="none" spc="0">
+                <a:solidFill>
+                  <a:schemeClr val="tx1">
+                    <a:lumMod val="50000"/>
+                    <a:lumOff val="50000"/>
+                  </a:schemeClr>
+                </a:solidFill>
+                <a:latin typeface="Arial"/>
+                <a:ea typeface="Arial"/>
+                <a:cs typeface="Arial"/>
+              </a:rPr>
+              <a:t> sur un résultat</a:t>
+            </a:r>
+            <a:r>
+              <a:rPr lang="fr-FR" sz="800" b="1" i="0" u="none" strike="noStrike" cap="none" spc="0">
+                <a:solidFill>
+                  <a:schemeClr val="tx1">
+                    <a:lumMod val="50000"/>
+                    <a:lumOff val="50000"/>
+                  </a:schemeClr>
+                </a:solidFill>
+                <a:latin typeface="Arial"/>
+                <a:ea typeface="Arial"/>
+                <a:cs typeface="Arial"/>
+              </a:rPr>
+              <a:t> inférieur ou égal</a:t>
+            </a:r>
+            <a:r>
+              <a:rPr lang="fr-FR" sz="800" b="0" i="0" u="none" strike="noStrike" cap="none" spc="0">
+                <a:solidFill>
+                  <a:schemeClr val="tx1">
+                    <a:lumMod val="50000"/>
+                    <a:lumOff val="50000"/>
+                  </a:schemeClr>
+                </a:solidFill>
+                <a:latin typeface="Arial"/>
+                <a:ea typeface="Arial"/>
+                <a:cs typeface="Arial"/>
+              </a:rPr>
+              <a:t> à la valeur de compétence ou de résistance avec 1d100. </a:t>
+            </a:r>
+            <a:r>
+              <a:rPr lang="fr-FR" sz="800" b="1" i="0" u="none" strike="noStrike" cap="none" spc="0">
+                <a:solidFill>
+                  <a:schemeClr val="tx1">
+                    <a:lumMod val="50000"/>
+                    <a:lumOff val="50000"/>
+                  </a:schemeClr>
+                </a:solidFill>
+                <a:latin typeface="Arial"/>
+                <a:ea typeface="Arial"/>
+                <a:cs typeface="Arial"/>
+              </a:rPr>
+              <a:t>1</a:t>
+            </a:r>
+            <a:r>
+              <a:rPr lang="fr-FR" sz="800" b="0" i="0" u="none" strike="noStrike" cap="none" spc="0">
+                <a:solidFill>
+                  <a:schemeClr val="tx1">
+                    <a:lumMod val="50000"/>
+                    <a:lumOff val="50000"/>
+                  </a:schemeClr>
+                </a:solidFill>
+                <a:latin typeface="Arial"/>
+                <a:ea typeface="Arial"/>
+                <a:cs typeface="Arial"/>
+              </a:rPr>
+              <a:t> est toujours une réussite, </a:t>
+            </a:r>
+            <a:r>
+              <a:rPr lang="fr-FR" sz="800" b="1" i="0" u="none" strike="noStrike" cap="none" spc="0">
+                <a:solidFill>
+                  <a:schemeClr val="tx1">
+                    <a:lumMod val="50000"/>
+                    <a:lumOff val="50000"/>
+                  </a:schemeClr>
+                </a:solidFill>
+                <a:latin typeface="Arial"/>
+                <a:ea typeface="Arial"/>
+                <a:cs typeface="Arial"/>
+              </a:rPr>
+              <a:t>100</a:t>
+            </a:r>
+            <a:r>
+              <a:rPr lang="fr-FR" sz="800" b="0" i="0" u="none" strike="noStrike" cap="none" spc="0">
+                <a:solidFill>
+                  <a:schemeClr val="tx1">
+                    <a:lumMod val="50000"/>
+                    <a:lumOff val="50000"/>
+                  </a:schemeClr>
+                </a:solidFill>
+                <a:latin typeface="Arial"/>
+                <a:ea typeface="Arial"/>
+                <a:cs typeface="Arial"/>
+              </a:rPr>
+              <a:t> toujours un échec.</a:t>
+            </a:r>
+            <a:r>
+              <a:rPr lang="fr-FR" sz="800" b="0" i="0" u="none" strike="noStrike" cap="none" spc="0">
+                <a:solidFill>
+                  <a:schemeClr val="tx1">
+                    <a:lumMod val="50000"/>
+                    <a:lumOff val="50000"/>
+                  </a:schemeClr>
+                </a:solidFill>
+                <a:latin typeface="Arial"/>
+                <a:ea typeface="Arial"/>
+                <a:cs typeface="Arial"/>
+              </a:rPr>
+              <a:t> </a:t>
+            </a:r>
+            <a:r>
+              <a:rPr lang="fr-FR" sz="800" b="0" i="0" u="none" strike="noStrike" cap="none" spc="0">
+                <a:solidFill>
+                  <a:schemeClr val="tx1">
+                    <a:lumMod val="50000"/>
+                    <a:lumOff val="50000"/>
+                  </a:schemeClr>
+                </a:solidFill>
+                <a:latin typeface="Arial"/>
+                <a:ea typeface="Arial"/>
+                <a:cs typeface="Arial"/>
+              </a:rPr>
+              <a:t>Un </a:t>
+            </a:r>
+            <a:r>
+              <a:rPr lang="fr-FR" sz="800" b="1" i="0" u="none" strike="noStrike" cap="none" spc="0">
+                <a:solidFill>
+                  <a:schemeClr val="tx1">
+                    <a:lumMod val="50000"/>
+                    <a:lumOff val="50000"/>
+                  </a:schemeClr>
+                </a:solidFill>
+                <a:latin typeface="Arial"/>
+                <a:ea typeface="Arial"/>
+                <a:cs typeface="Arial"/>
+              </a:rPr>
+              <a:t>double</a:t>
+            </a:r>
+            <a:r>
+              <a:rPr lang="fr-FR" sz="800" b="0" i="0" u="none" strike="noStrike" cap="none" spc="0">
+                <a:solidFill>
+                  <a:schemeClr val="tx1">
+                    <a:lumMod val="50000"/>
+                    <a:lumOff val="50000"/>
+                  </a:schemeClr>
+                </a:solidFill>
+                <a:latin typeface="Arial"/>
+                <a:ea typeface="Arial"/>
+                <a:cs typeface="Arial"/>
+              </a:rPr>
+              <a:t> naturel est un </a:t>
+            </a:r>
+            <a:r>
+              <a:rPr lang="fr-FR" sz="800" b="1" i="0" u="none" strike="noStrike" cap="none" spc="0">
+                <a:solidFill>
+                  <a:schemeClr val="tx1">
+                    <a:lumMod val="50000"/>
+                    <a:lumOff val="50000"/>
+                  </a:schemeClr>
+                </a:solidFill>
+                <a:latin typeface="Arial"/>
+                <a:ea typeface="Arial"/>
+                <a:cs typeface="Arial"/>
+              </a:rPr>
+              <a:t>résultat critique</a:t>
+            </a:r>
+            <a:r>
+              <a:rPr lang="fr-FR" sz="800" b="0" i="0" u="none" strike="noStrike" cap="none" spc="0">
+                <a:solidFill>
+                  <a:schemeClr val="tx1">
+                    <a:lumMod val="50000"/>
+                    <a:lumOff val="50000"/>
+                  </a:schemeClr>
+                </a:solidFill>
+                <a:latin typeface="Arial"/>
+                <a:ea typeface="Arial"/>
+                <a:cs typeface="Arial"/>
+              </a:rPr>
+              <a:t>. </a:t>
+            </a:r>
+            <a:br>
+              <a:rPr lang="fr-FR" sz="800" b="0" i="0" u="none" strike="noStrike" cap="none" spc="0">
+                <a:solidFill>
+                  <a:schemeClr val="tx1">
+                    <a:lumMod val="50000"/>
+                    <a:lumOff val="50000"/>
+                  </a:schemeClr>
+                </a:solidFill>
+                <a:latin typeface="Arial"/>
+                <a:ea typeface="Arial"/>
+                <a:cs typeface="Arial"/>
+              </a:rPr>
+            </a:br>
+            <a:endParaRPr lang="fr-FR" sz="300" b="0" i="0" u="none" strike="noStrike" cap="none" spc="0">
+              <a:solidFill>
+                <a:schemeClr val="tx1">
+                  <a:lumMod val="50000"/>
+                  <a:lumOff val="50000"/>
+                </a:schemeClr>
+              </a:solidFill>
+              <a:latin typeface="Arial"/>
+              <a:ea typeface="Arial"/>
+              <a:cs typeface="Arial"/>
+            </a:endParaRPr>
+          </a:p>
+          <a:p>
+            <a:pPr marL="0" marR="0" indent="0" algn="l">
+              <a:lnSpc>
+                <a:spcPct val="100000"/>
+              </a:lnSpc>
+              <a:spcBef>
+                <a:spcPts val="0"/>
+              </a:spcBef>
+              <a:spcAft>
+                <a:spcPts val="0"/>
+              </a:spcAft>
+              <a:defRPr/>
+            </a:pPr>
+            <a:endParaRPr sz="200" b="0" i="0" u="none" strike="noStrike" cap="none" spc="0">
+              <a:solidFill>
+                <a:schemeClr val="tx1"/>
+              </a:solidFill>
+              <a:latin typeface="Times New Roman"/>
+              <a:cs typeface="Times New Roman"/>
+            </a:endParaRPr>
+          </a:p>
+          <a:p>
+            <a:pPr marL="0" marR="0" indent="0" algn="l">
+              <a:lnSpc>
+                <a:spcPct val="100000"/>
+              </a:lnSpc>
+              <a:spcBef>
+                <a:spcPts val="0"/>
+              </a:spcBef>
+              <a:spcAft>
+                <a:spcPts val="0"/>
+              </a:spcAft>
+              <a:defRPr/>
+            </a:pPr>
+            <a:r>
+              <a:rPr lang="fr-FR" sz="800" b="0" i="0" u="none" strike="noStrike" cap="none" spc="0">
+                <a:solidFill>
+                  <a:schemeClr val="tx1">
+                    <a:lumMod val="50000"/>
+                    <a:lumOff val="50000"/>
+                  </a:schemeClr>
+                </a:solidFill>
+                <a:latin typeface="Arial"/>
+                <a:ea typeface="Arial"/>
+                <a:cs typeface="Arial"/>
+              </a:rPr>
+              <a:t>En cas de </a:t>
+            </a:r>
+            <a:r>
+              <a:rPr lang="fr-FR" sz="800" b="1" i="0" u="none" strike="noStrike" cap="none" spc="0">
+                <a:solidFill>
+                  <a:schemeClr val="tx1">
+                    <a:lumMod val="50000"/>
+                    <a:lumOff val="50000"/>
+                  </a:schemeClr>
+                </a:solidFill>
+                <a:latin typeface="Arial"/>
+                <a:ea typeface="Arial"/>
+                <a:cs typeface="Arial"/>
+              </a:rPr>
+              <a:t>test opposé</a:t>
+            </a:r>
+            <a:r>
+              <a:rPr lang="fr-FR" sz="800" b="0" i="0" u="none" strike="noStrike" cap="none" spc="0">
+                <a:solidFill>
+                  <a:schemeClr val="tx1">
+                    <a:lumMod val="50000"/>
+                    <a:lumOff val="50000"/>
+                  </a:schemeClr>
+                </a:solidFill>
+                <a:latin typeface="Arial"/>
+                <a:ea typeface="Arial"/>
+                <a:cs typeface="Arial"/>
+              </a:rPr>
+              <a:t>, celui qui réussi le test et qui obtient le plus haut score au dé est vainqueur.</a:t>
+            </a:r>
+            <a:br>
+              <a:rPr lang="fr-FR" sz="800" b="0" i="0" u="none" strike="noStrike" cap="none" spc="0">
+                <a:solidFill>
+                  <a:schemeClr val="tx1">
+                    <a:lumMod val="50000"/>
+                    <a:lumOff val="50000"/>
+                  </a:schemeClr>
+                </a:solidFill>
+                <a:latin typeface="Arial"/>
+                <a:ea typeface="Arial"/>
+                <a:cs typeface="Arial"/>
+              </a:rPr>
+            </a:br>
+            <a:br>
+              <a:rPr lang="fr-FR" sz="200" b="0" i="0" u="none" strike="noStrike" cap="none" spc="0">
+                <a:solidFill>
+                  <a:schemeClr val="tx1">
+                    <a:lumMod val="50000"/>
+                    <a:lumOff val="50000"/>
+                  </a:schemeClr>
+                </a:solidFill>
+                <a:latin typeface="Arial"/>
+                <a:ea typeface="Arial"/>
+                <a:cs typeface="Arial"/>
+              </a:rPr>
+            </a:br>
+            <a:r>
+              <a:rPr lang="fr-FR" sz="800" b="0" i="0" u="none" strike="noStrike" cap="none" spc="0">
+                <a:solidFill>
+                  <a:schemeClr val="tx1">
+                    <a:lumMod val="50000"/>
+                    <a:lumOff val="50000"/>
+                  </a:schemeClr>
+                </a:solidFill>
+                <a:latin typeface="Arial"/>
+                <a:ea typeface="Arial"/>
+                <a:cs typeface="Arial"/>
+              </a:rPr>
+              <a:t>Chaque case de </a:t>
+            </a:r>
+            <a:r>
+              <a:rPr lang="fr-FR" sz="800" b="1" i="0" u="none" strike="noStrike" cap="none" spc="0">
+                <a:solidFill>
+                  <a:schemeClr val="tx1">
+                    <a:lumMod val="50000"/>
+                    <a:lumOff val="50000"/>
+                  </a:schemeClr>
+                </a:solidFill>
+                <a:latin typeface="Arial"/>
+                <a:ea typeface="Arial"/>
+                <a:cs typeface="Arial"/>
+              </a:rPr>
+              <a:t>trauma </a:t>
+            </a:r>
+            <a:r>
+              <a:rPr lang="fr-FR" sz="800" b="0" i="0" u="none" strike="noStrike" cap="none" spc="0">
+                <a:solidFill>
+                  <a:schemeClr val="tx1">
+                    <a:lumMod val="50000"/>
+                    <a:lumOff val="50000"/>
+                  </a:schemeClr>
+                </a:solidFill>
+                <a:latin typeface="Arial"/>
+                <a:ea typeface="Arial"/>
+                <a:cs typeface="Arial"/>
+              </a:rPr>
+              <a:t>cochée impose un malus de compétences de 10 points.</a:t>
+            </a:r>
+            <a:endParaRPr lang="fr-FR" sz="800" b="0" i="0" u="none" strike="noStrike" cap="none" spc="0">
+              <a:solidFill>
+                <a:schemeClr val="tx1">
+                  <a:lumMod val="50000"/>
+                  <a:lumOff val="50000"/>
+                </a:schemeClr>
+              </a:solidFill>
+              <a:latin typeface="Arial"/>
+              <a:ea typeface="Arial"/>
+              <a:cs typeface="Arial"/>
+            </a:endParaRPr>
+          </a:p>
+          <a:p>
+            <a:pPr marL="0" marR="0" indent="0" algn="l">
+              <a:lnSpc>
+                <a:spcPct val="100000"/>
+              </a:lnSpc>
+              <a:spcBef>
+                <a:spcPts val="0"/>
+              </a:spcBef>
+              <a:spcAft>
+                <a:spcPts val="0"/>
+              </a:spcAft>
+              <a:defRPr/>
+            </a:pPr>
+            <a:endParaRPr lang="fr-FR" sz="800" b="0" i="0" u="none" strike="noStrike" cap="none" spc="0">
+              <a:solidFill>
+                <a:schemeClr val="tx1">
+                  <a:lumMod val="50000"/>
+                  <a:lumOff val="50000"/>
+                </a:schemeClr>
+              </a:solidFill>
+              <a:latin typeface="Arial"/>
+              <a:ea typeface="Arial"/>
+              <a:cs typeface="Arial"/>
+            </a:endParaRPr>
+          </a:p>
+        </p:txBody>
+      </p:sp>
+      <p:sp>
+        <p:nvSpPr>
+          <p:cNvPr id="818235611" name="ZoneTexte 2021443538"/>
+          <p:cNvSpPr txBox="1"/>
+          <p:nvPr/>
+        </p:nvSpPr>
+        <p:spPr bwMode="auto">
+          <a:xfrm flipH="0" flipV="0">
+            <a:off x="75827" y="5533802"/>
+            <a:ext cx="1702734" cy="643788"/>
+          </a:xfrm>
+          <a:prstGeom prst="rect">
+            <a:avLst/>
+          </a:prstGeom>
+          <a:noFill/>
+        </p:spPr>
+        <p:txBody>
+          <a:bodyPr vertOverflow="overflow" horzOverflow="overflow" vert="horz" wrap="square" lIns="91440" tIns="45720" rIns="91440" bIns="45720" numCol="1" spcCol="0" rtlCol="0" fromWordArt="0" anchor="t" anchorCtr="0" forceAA="0" compatLnSpc="0">
+            <a:spAutoFit/>
+          </a:bodyPr>
+          <a:lstStyle/>
+          <a:p>
+            <a:pPr marL="0" marR="0" lvl="0" indent="0" algn="r" defTabSz="914400" rtl="0">
+              <a:lnSpc>
+                <a:spcPct val="100000"/>
+              </a:lnSpc>
+              <a:spcBef>
+                <a:spcPts val="0"/>
+              </a:spcBef>
+              <a:spcAft>
+                <a:spcPts val="0"/>
+              </a:spcAft>
+              <a:defRPr lang="fr-FR" sz="1800" b="0" i="0" u="none" strike="noStrike" cap="none" spc="0">
+                <a:solidFill>
+                  <a:srgbClr val="000000"/>
+                </a:solidFill>
+                <a:latin typeface="Arial"/>
+                <a:ea typeface="Arial"/>
+                <a:cs typeface="Arial"/>
+              </a:defRPr>
+            </a:pPr>
+            <a:r>
+              <a:rPr lang="fr-FR" sz="1200" b="0" i="0" u="none" strike="noStrike" cap="none" spc="0">
+                <a:solidFill>
+                  <a:srgbClr val="000000"/>
+                </a:solidFill>
+                <a:latin typeface="Arial"/>
+                <a:ea typeface="Arial"/>
+                <a:cs typeface="Arial"/>
+              </a:rPr>
+              <a:t>Médecine </a:t>
+            </a:r>
+            <a:r>
+              <a:rPr lang="fr-FR" sz="1200" b="0" i="0" u="none" strike="noStrike" cap="none" spc="0">
+                <a:solidFill>
+                  <a:srgbClr val="808080"/>
+                </a:solidFill>
+                <a:latin typeface="Arial"/>
+                <a:ea typeface="Arial"/>
+                <a:cs typeface="Arial"/>
+              </a:rPr>
+              <a:t>◇</a:t>
+            </a:r>
+            <a:endParaRPr sz="1600"/>
+          </a:p>
+          <a:p>
+            <a:pPr algn="r">
+              <a:defRPr/>
+            </a:pPr>
+            <a:r>
+              <a:rPr lang="fr-FR" sz="800" b="0" i="0" u="none" strike="noStrike" cap="none" spc="0">
+                <a:solidFill>
+                  <a:srgbClr val="808080"/>
+                </a:solidFill>
+                <a:latin typeface="Arial"/>
+                <a:ea typeface="Arial"/>
+                <a:cs typeface="Arial"/>
+              </a:rPr>
+              <a:t>Effectuer des premiers soins, sauver des vies, avoir des connaissances médicales.</a:t>
+            </a:r>
+            <a:endParaRPr/>
+          </a:p>
+        </p:txBody>
+      </p:sp>
+      <p:sp>
+        <p:nvSpPr>
+          <p:cNvPr id="298451672" name="ZoneTexte 1075280509"/>
+          <p:cNvSpPr txBox="1"/>
+          <p:nvPr/>
+        </p:nvSpPr>
+        <p:spPr bwMode="auto">
+          <a:xfrm flipH="0" flipV="0">
+            <a:off x="44270" y="3612483"/>
+            <a:ext cx="1746472" cy="643788"/>
+          </a:xfrm>
+          <a:prstGeom prst="rect">
+            <a:avLst/>
+          </a:prstGeom>
+          <a:noFill/>
+        </p:spPr>
+        <p:txBody>
+          <a:bodyPr vertOverflow="overflow" horzOverflow="overflow" vert="horz" wrap="square" lIns="91440" tIns="45720" rIns="91440" bIns="45720" numCol="1" spcCol="0" rtlCol="0" fromWordArt="0" anchor="t" anchorCtr="0" forceAA="0" compatLnSpc="0">
+            <a:spAutoFit/>
+          </a:bodyPr>
+          <a:lstStyle/>
+          <a:p>
+            <a:pPr marL="0" marR="0" lvl="0" indent="0" algn="r" defTabSz="914400" rtl="0">
+              <a:lnSpc>
+                <a:spcPct val="100000"/>
+              </a:lnSpc>
+              <a:spcBef>
+                <a:spcPts val="0"/>
+              </a:spcBef>
+              <a:spcAft>
+                <a:spcPts val="0"/>
+              </a:spcAft>
+              <a:defRPr lang="fr-FR" sz="1800" b="0" i="0" u="none" strike="noStrike" cap="none" spc="0">
+                <a:solidFill>
+                  <a:srgbClr val="000000"/>
+                </a:solidFill>
+                <a:latin typeface="Arial"/>
+                <a:ea typeface="Arial"/>
+                <a:cs typeface="Arial"/>
+              </a:defRPr>
+            </a:pPr>
+            <a:r>
+              <a:rPr lang="fr-FR" sz="1200" b="0" i="0" u="none" strike="noStrike" cap="none" spc="0">
+                <a:solidFill>
+                  <a:srgbClr val="000000"/>
+                </a:solidFill>
+                <a:latin typeface="Arial"/>
+                <a:ea typeface="Arial"/>
+                <a:cs typeface="Arial"/>
+              </a:rPr>
+              <a:t>Bagou </a:t>
+            </a:r>
+            <a:r>
+              <a:rPr lang="fr-FR" sz="1200" b="0" i="0" u="none" strike="noStrike" cap="none" spc="0">
+                <a:solidFill>
+                  <a:srgbClr val="808080"/>
+                </a:solidFill>
+                <a:latin typeface="Arial"/>
+                <a:ea typeface="Arial"/>
+                <a:cs typeface="Arial"/>
+              </a:rPr>
+              <a:t>◇</a:t>
+            </a:r>
+            <a:endParaRPr sz="1600"/>
+          </a:p>
+          <a:p>
+            <a:pPr algn="r">
+              <a:defRPr/>
+            </a:pPr>
+            <a:r>
+              <a:rPr lang="fr-FR" sz="800" b="0" i="0" u="none" strike="noStrike" cap="none" spc="0">
+                <a:solidFill>
+                  <a:srgbClr val="808080"/>
+                </a:solidFill>
+                <a:latin typeface="Arial"/>
+                <a:ea typeface="Arial"/>
+                <a:cs typeface="Arial"/>
+              </a:rPr>
+              <a:t>Être à l’aise en société, savoir parler en public, envoyer des piques et se faire des amis.</a:t>
+            </a:r>
+            <a:endParaRPr/>
+          </a:p>
+        </p:txBody>
+      </p:sp>
+      <p:sp>
+        <p:nvSpPr>
+          <p:cNvPr id="492275633" name="ZoneTexte 824413856"/>
+          <p:cNvSpPr txBox="1"/>
+          <p:nvPr/>
+        </p:nvSpPr>
+        <p:spPr bwMode="auto">
+          <a:xfrm>
+            <a:off x="40729" y="4254489"/>
+            <a:ext cx="1737112" cy="643788"/>
+          </a:xfrm>
+          <a:prstGeom prst="rect">
+            <a:avLst/>
+          </a:prstGeom>
+          <a:noFill/>
+        </p:spPr>
+        <p:txBody>
+          <a:bodyPr vertOverflow="overflow" horzOverflow="overflow" vert="horz" wrap="square" lIns="91440" tIns="45720" rIns="91440" bIns="45720" numCol="1" spcCol="0" rtlCol="0" fromWordArt="0" anchor="t" anchorCtr="0" forceAA="0" compatLnSpc="0">
+            <a:spAutoFit/>
+          </a:bodyPr>
+          <a:lstStyle/>
+          <a:p>
+            <a:pPr marL="0" marR="0" lvl="0" indent="0" algn="r" defTabSz="914400" rtl="0">
+              <a:lnSpc>
+                <a:spcPct val="100000"/>
+              </a:lnSpc>
+              <a:spcBef>
+                <a:spcPts val="0"/>
+              </a:spcBef>
+              <a:spcAft>
+                <a:spcPts val="0"/>
+              </a:spcAft>
+              <a:defRPr lang="fr-FR" sz="1800" b="0" i="0" u="none" strike="noStrike" cap="none" spc="0">
+                <a:solidFill>
+                  <a:srgbClr val="000000"/>
+                </a:solidFill>
+                <a:latin typeface="Arial"/>
+                <a:ea typeface="Arial"/>
+                <a:cs typeface="Arial"/>
+              </a:defRPr>
+            </a:pPr>
+            <a:r>
+              <a:rPr lang="fr-FR" sz="1200" b="0" i="0" u="none" strike="noStrike" cap="none" spc="0">
+                <a:solidFill>
+                  <a:srgbClr val="000000"/>
+                </a:solidFill>
+                <a:latin typeface="Arial"/>
+                <a:ea typeface="Arial"/>
+                <a:cs typeface="Arial"/>
+              </a:rPr>
+              <a:t>Combat </a:t>
+            </a:r>
+            <a:r>
+              <a:rPr lang="fr-FR" sz="1200" b="0" i="0" u="none" strike="noStrike" cap="none" spc="0">
+                <a:solidFill>
+                  <a:srgbClr val="808080"/>
+                </a:solidFill>
+                <a:latin typeface="Arial"/>
+                <a:ea typeface="Arial"/>
+                <a:cs typeface="Arial"/>
+              </a:rPr>
+              <a:t>◇</a:t>
+            </a:r>
+            <a:endParaRPr sz="1600"/>
+          </a:p>
+          <a:p>
+            <a:pPr algn="r">
+              <a:defRPr/>
+            </a:pPr>
+            <a:r>
+              <a:rPr lang="fr-FR" sz="800" b="0" i="0" u="none" strike="noStrike" cap="none" spc="0">
+                <a:solidFill>
+                  <a:srgbClr val="808080"/>
+                </a:solidFill>
+                <a:latin typeface="Arial"/>
+                <a:ea typeface="Arial"/>
+                <a:cs typeface="Arial"/>
+              </a:rPr>
+              <a:t>Attaquer ou se défendre physiquement, avec ou sans armes.</a:t>
+            </a:r>
+            <a:endParaRPr/>
+          </a:p>
+        </p:txBody>
+      </p:sp>
+      <p:sp>
+        <p:nvSpPr>
+          <p:cNvPr id="1349244422" name="ZoneTexte 1036656844"/>
+          <p:cNvSpPr txBox="1"/>
+          <p:nvPr/>
+        </p:nvSpPr>
+        <p:spPr bwMode="auto">
+          <a:xfrm flipH="0" flipV="0">
+            <a:off x="2359940" y="3617505"/>
+            <a:ext cx="1695710" cy="643788"/>
+          </a:xfrm>
+          <a:prstGeom prst="rect">
+            <a:avLst/>
+          </a:prstGeom>
+          <a:noFill/>
+        </p:spPr>
+        <p:txBody>
+          <a:bodyPr vertOverflow="overflow" horzOverflow="overflow" vert="horz" wrap="square" lIns="91440" tIns="45720" rIns="91440" bIns="45720" numCol="1" spcCol="0" rtlCol="0" fromWordArt="0" anchor="t" anchorCtr="0" forceAA="0" compatLnSpc="0">
+            <a:spAutoFit/>
+          </a:bodyPr>
+          <a:lstStyle/>
+          <a:p>
+            <a:pPr marL="0" marR="0" lvl="0" indent="0" algn="r" defTabSz="914400" rtl="0">
+              <a:lnSpc>
+                <a:spcPct val="100000"/>
+              </a:lnSpc>
+              <a:spcBef>
+                <a:spcPts val="0"/>
+              </a:spcBef>
+              <a:spcAft>
+                <a:spcPts val="0"/>
+              </a:spcAft>
+              <a:defRPr lang="fr-FR" sz="1800" b="0" i="0" u="none" strike="noStrike" cap="none" spc="0">
+                <a:solidFill>
+                  <a:srgbClr val="000000"/>
+                </a:solidFill>
+                <a:latin typeface="Arial"/>
+                <a:ea typeface="Arial"/>
+                <a:cs typeface="Arial"/>
+              </a:defRPr>
+            </a:pPr>
+            <a:r>
+              <a:rPr lang="fr-FR" sz="1200" b="0" i="0" u="none" strike="noStrike" cap="none" spc="0">
+                <a:solidFill>
+                  <a:srgbClr val="000000"/>
+                </a:solidFill>
+                <a:latin typeface="Arial"/>
+                <a:ea typeface="Arial"/>
+                <a:cs typeface="Arial"/>
+              </a:rPr>
+              <a:t>Savoir </a:t>
+            </a:r>
+            <a:r>
+              <a:rPr lang="fr-FR" sz="1200" b="0" i="0" u="none" strike="noStrike" cap="none" spc="0">
+                <a:solidFill>
+                  <a:srgbClr val="808080"/>
+                </a:solidFill>
+                <a:latin typeface="Arial"/>
+                <a:ea typeface="Arial"/>
+                <a:cs typeface="Arial"/>
+              </a:rPr>
+              <a:t>◇</a:t>
+            </a:r>
+            <a:endParaRPr sz="1600"/>
+          </a:p>
+          <a:p>
+            <a:pPr algn="r">
+              <a:defRPr/>
+            </a:pPr>
+            <a:r>
+              <a:rPr lang="fr-FR" sz="800" b="0" i="0" u="none" strike="noStrike" cap="none" spc="0">
+                <a:solidFill>
+                  <a:srgbClr val="808080"/>
+                </a:solidFill>
+                <a:latin typeface="Arial"/>
+                <a:ea typeface="Arial"/>
+                <a:cs typeface="Arial"/>
+              </a:rPr>
+              <a:t>Se remémorer ses souvenirs et effectuer des recherches dans une bibliothèque efficacement.</a:t>
+            </a:r>
+            <a:endParaRPr/>
+          </a:p>
+        </p:txBody>
+      </p:sp>
+      <p:sp>
+        <p:nvSpPr>
+          <p:cNvPr id="2073843041" name="ZoneTexte 226284734"/>
+          <p:cNvSpPr txBox="1"/>
+          <p:nvPr/>
+        </p:nvSpPr>
+        <p:spPr bwMode="auto">
+          <a:xfrm flipH="0" flipV="0">
+            <a:off x="45350" y="2976032"/>
+            <a:ext cx="1738192" cy="643788"/>
+          </a:xfrm>
+          <a:prstGeom prst="rect">
+            <a:avLst/>
+          </a:prstGeom>
+          <a:noFill/>
+        </p:spPr>
+        <p:txBody>
+          <a:bodyPr vertOverflow="overflow" horzOverflow="overflow" vert="horz" wrap="square" lIns="91440" tIns="45720" rIns="91440" bIns="45720" numCol="1" spcCol="0" rtlCol="0" fromWordArt="0" anchor="t" anchorCtr="0" forceAA="0" compatLnSpc="0">
+            <a:spAutoFit/>
+          </a:bodyPr>
+          <a:lstStyle/>
+          <a:p>
+            <a:pPr marL="0" marR="0" lvl="0" indent="0" algn="r" defTabSz="914400" rtl="0">
+              <a:lnSpc>
+                <a:spcPct val="100000"/>
+              </a:lnSpc>
+              <a:spcBef>
+                <a:spcPts val="0"/>
+              </a:spcBef>
+              <a:spcAft>
+                <a:spcPts val="0"/>
+              </a:spcAft>
+              <a:defRPr lang="fr-FR" sz="1800" b="0" i="0" u="none" strike="noStrike" cap="none" spc="0">
+                <a:solidFill>
+                  <a:srgbClr val="000000"/>
+                </a:solidFill>
+                <a:latin typeface="Arial"/>
+                <a:ea typeface="Arial"/>
+                <a:cs typeface="Arial"/>
+              </a:defRPr>
+            </a:pPr>
+            <a:r>
+              <a:rPr lang="fr-FR" sz="1200" b="0" i="0" u="none" strike="noStrike" cap="none" spc="0">
+                <a:solidFill>
+                  <a:srgbClr val="000000"/>
+                </a:solidFill>
+                <a:latin typeface="Arial"/>
+                <a:ea typeface="Arial"/>
+                <a:cs typeface="Arial"/>
+              </a:rPr>
+              <a:t>Athlétisme </a:t>
+            </a:r>
+            <a:r>
+              <a:rPr lang="fr-FR" sz="1200" b="0" i="0" u="none" strike="noStrike" cap="none" spc="0">
+                <a:solidFill>
+                  <a:srgbClr val="808080"/>
+                </a:solidFill>
+                <a:latin typeface="Arial"/>
+                <a:ea typeface="Arial"/>
+                <a:cs typeface="Arial"/>
+              </a:rPr>
+              <a:t>◇</a:t>
+            </a:r>
+            <a:endParaRPr sz="1600"/>
+          </a:p>
+          <a:p>
+            <a:pPr algn="r">
+              <a:defRPr/>
+            </a:pPr>
+            <a:r>
+              <a:rPr lang="fr-FR" sz="800" b="0" i="0" u="none" strike="noStrike" cap="none" spc="0">
+                <a:solidFill>
+                  <a:srgbClr val="808080"/>
+                </a:solidFill>
+                <a:latin typeface="Arial"/>
+                <a:ea typeface="Arial"/>
+                <a:cs typeface="Arial"/>
+              </a:rPr>
+              <a:t>Escalader, nager, pratiquer des activités physiques, avoir une bonne santé.</a:t>
+            </a:r>
+            <a:endParaRPr/>
+          </a:p>
+        </p:txBody>
+      </p:sp>
+      <p:sp>
+        <p:nvSpPr>
+          <p:cNvPr id="635734666" name="ZoneTexte 162158187"/>
+          <p:cNvSpPr txBox="1"/>
+          <p:nvPr/>
+        </p:nvSpPr>
+        <p:spPr bwMode="auto">
+          <a:xfrm>
+            <a:off x="135711" y="2333277"/>
+            <a:ext cx="1659357" cy="643788"/>
+          </a:xfrm>
+          <a:prstGeom prst="rect">
+            <a:avLst/>
+          </a:prstGeom>
+          <a:noFill/>
+        </p:spPr>
+        <p:txBody>
+          <a:bodyPr vertOverflow="overflow" horzOverflow="overflow" vert="horz" wrap="square" lIns="91440" tIns="45720" rIns="91440" bIns="45720" numCol="1" spcCol="0" rtlCol="0" fromWordArt="0" anchor="t" anchorCtr="0" forceAA="0" compatLnSpc="0">
+            <a:spAutoFit/>
+          </a:bodyPr>
+          <a:lstStyle/>
+          <a:p>
+            <a:pPr algn="r">
+              <a:defRPr/>
+            </a:pPr>
+            <a:r>
+              <a:rPr sz="1200"/>
+              <a:t>Art </a:t>
+            </a:r>
+            <a:r>
+              <a:rPr lang="fr-FR" sz="1200" b="0" i="0" u="none" strike="noStrike" cap="none" spc="0">
+                <a:solidFill>
+                  <a:schemeClr val="tx1">
+                    <a:lumMod val="50000"/>
+                    <a:lumOff val="50000"/>
+                  </a:schemeClr>
+                </a:solidFill>
+                <a:latin typeface="Arial"/>
+                <a:ea typeface="Arial"/>
+                <a:cs typeface="Arial"/>
+              </a:rPr>
+              <a:t>◇</a:t>
+            </a:r>
+            <a:endParaRPr sz="1600"/>
+          </a:p>
+          <a:p>
+            <a:pPr algn="r">
+              <a:defRPr/>
+            </a:pPr>
+            <a:r>
+              <a:rPr sz="800">
+                <a:solidFill>
+                  <a:schemeClr val="tx1">
+                    <a:lumMod val="50000"/>
+                    <a:lumOff val="50000"/>
+                  </a:schemeClr>
+                </a:solidFill>
+              </a:rPr>
+              <a:t>Écrire, cuisiner, dessiner, peindre, imaginer, transmettre des émotions et y être sensible.</a:t>
+            </a:r>
+            <a:endParaRPr/>
+          </a:p>
+        </p:txBody>
+      </p:sp>
+      <p:sp>
+        <p:nvSpPr>
+          <p:cNvPr id="702366423" name="ZoneTexte 1063440096"/>
+          <p:cNvSpPr txBox="1"/>
+          <p:nvPr/>
+        </p:nvSpPr>
+        <p:spPr bwMode="auto">
+          <a:xfrm>
+            <a:off x="97608" y="4892716"/>
+            <a:ext cx="1680237" cy="643788"/>
+          </a:xfrm>
+          <a:prstGeom prst="rect">
+            <a:avLst/>
+          </a:prstGeom>
+          <a:noFill/>
+        </p:spPr>
+        <p:txBody>
+          <a:bodyPr vertOverflow="overflow" horzOverflow="overflow" vert="horz" wrap="square" lIns="91440" tIns="45720" rIns="91440" bIns="45720" numCol="1" spcCol="0" rtlCol="0" fromWordArt="0" anchor="t" anchorCtr="0" forceAA="0" compatLnSpc="0">
+            <a:spAutoFit/>
+          </a:bodyPr>
+          <a:lstStyle/>
+          <a:p>
+            <a:pPr marL="0" marR="0" lvl="0" indent="0" algn="r" defTabSz="914400" rtl="0">
+              <a:lnSpc>
+                <a:spcPct val="100000"/>
+              </a:lnSpc>
+              <a:spcBef>
+                <a:spcPts val="0"/>
+              </a:spcBef>
+              <a:spcAft>
+                <a:spcPts val="0"/>
+              </a:spcAft>
+              <a:defRPr lang="fr-FR" sz="1800" b="0" i="0" u="none" strike="noStrike" cap="none" spc="0">
+                <a:solidFill>
+                  <a:srgbClr val="000000"/>
+                </a:solidFill>
+                <a:latin typeface="Arial"/>
+                <a:ea typeface="Arial"/>
+                <a:cs typeface="Arial"/>
+              </a:defRPr>
+            </a:pPr>
+            <a:r>
+              <a:rPr lang="fr-FR" sz="1200" b="0" i="0" u="none" strike="noStrike" cap="none" spc="0">
+                <a:solidFill>
+                  <a:srgbClr val="000000"/>
+                </a:solidFill>
+                <a:latin typeface="Arial"/>
+                <a:ea typeface="Arial"/>
+                <a:cs typeface="Arial"/>
+              </a:rPr>
+              <a:t>Filouterie </a:t>
+            </a:r>
+            <a:r>
+              <a:rPr lang="fr-FR" sz="1200" b="0" i="0" u="none" strike="noStrike" cap="none" spc="0">
+                <a:solidFill>
+                  <a:srgbClr val="808080"/>
+                </a:solidFill>
+                <a:latin typeface="Arial"/>
+                <a:ea typeface="Arial"/>
+                <a:cs typeface="Arial"/>
+              </a:rPr>
+              <a:t>◇</a:t>
+            </a:r>
+            <a:endParaRPr sz="1600"/>
+          </a:p>
+          <a:p>
+            <a:pPr algn="r">
+              <a:defRPr/>
+            </a:pPr>
+            <a:r>
+              <a:rPr lang="fr-FR" sz="800" b="0" i="0" u="none" strike="noStrike" cap="none" spc="0">
+                <a:solidFill>
+                  <a:srgbClr val="808080"/>
+                </a:solidFill>
+                <a:latin typeface="Arial"/>
+                <a:ea typeface="Arial"/>
+                <a:cs typeface="Arial"/>
+              </a:rPr>
+              <a:t>Agir discrètement, dérober des objets, crocheter les serrures, connaître le monde de l’illégalité.</a:t>
+            </a:r>
+            <a:endParaRPr/>
+          </a:p>
+        </p:txBody>
+      </p:sp>
+      <p:sp>
+        <p:nvSpPr>
+          <p:cNvPr id="1382966603" name="ZoneTexte 1564072661"/>
+          <p:cNvSpPr txBox="1"/>
+          <p:nvPr/>
+        </p:nvSpPr>
+        <p:spPr bwMode="auto">
+          <a:xfrm>
+            <a:off x="2302384" y="2981700"/>
+            <a:ext cx="1735675" cy="643788"/>
+          </a:xfrm>
+          <a:prstGeom prst="rect">
+            <a:avLst/>
+          </a:prstGeom>
+          <a:noFill/>
+        </p:spPr>
+        <p:txBody>
+          <a:bodyPr vertOverflow="overflow" horzOverflow="overflow" vert="horz" wrap="square" lIns="91440" tIns="45720" rIns="91440" bIns="45720" numCol="1" spcCol="0" rtlCol="0" fromWordArt="0" anchor="t" anchorCtr="0" forceAA="0" compatLnSpc="0">
+            <a:spAutoFit/>
+          </a:bodyPr>
+          <a:lstStyle/>
+          <a:p>
+            <a:pPr marL="0" marR="0" lvl="0" indent="0" algn="r" defTabSz="914400" rtl="0">
+              <a:lnSpc>
+                <a:spcPct val="100000"/>
+              </a:lnSpc>
+              <a:spcBef>
+                <a:spcPts val="0"/>
+              </a:spcBef>
+              <a:spcAft>
+                <a:spcPts val="0"/>
+              </a:spcAft>
+              <a:defRPr lang="fr-FR" sz="1800" b="0" i="0" u="none" strike="noStrike" cap="none" spc="0">
+                <a:solidFill>
+                  <a:srgbClr val="000000"/>
+                </a:solidFill>
+                <a:latin typeface="Arial"/>
+                <a:ea typeface="Arial"/>
+                <a:cs typeface="Arial"/>
+              </a:defRPr>
+            </a:pPr>
+            <a:r>
+              <a:rPr lang="fr-FR" sz="1200" b="0" i="0" u="none" strike="noStrike" cap="none" spc="0">
+                <a:solidFill>
+                  <a:srgbClr val="000000"/>
+                </a:solidFill>
+                <a:latin typeface="Arial"/>
+                <a:ea typeface="Arial"/>
+                <a:cs typeface="Arial"/>
+              </a:rPr>
+              <a:t>Occultisme </a:t>
+            </a:r>
+            <a:r>
+              <a:rPr lang="fr-FR" sz="1200" b="0" i="0" u="none" strike="noStrike" cap="none" spc="0">
+                <a:solidFill>
+                  <a:srgbClr val="808080"/>
+                </a:solidFill>
+                <a:latin typeface="Arial"/>
+                <a:ea typeface="Arial"/>
+                <a:cs typeface="Arial"/>
+              </a:rPr>
+              <a:t>◇</a:t>
+            </a:r>
+            <a:endParaRPr sz="1600"/>
+          </a:p>
+          <a:p>
+            <a:pPr algn="r">
+              <a:defRPr/>
+            </a:pPr>
+            <a:r>
+              <a:rPr lang="fr-FR" sz="800" b="0" i="0" u="none" strike="noStrike" cap="none" spc="0">
+                <a:solidFill>
+                  <a:srgbClr val="808080"/>
+                </a:solidFill>
+                <a:latin typeface="Arial"/>
+                <a:ea typeface="Arial"/>
+                <a:cs typeface="Arial"/>
+              </a:rPr>
+              <a:t>Avoir des connaissances sur le surnaturel, connaître les entités et les pratiques occultes.</a:t>
+            </a:r>
+            <a:endParaRPr/>
+          </a:p>
+        </p:txBody>
+      </p:sp>
+      <p:sp>
+        <p:nvSpPr>
+          <p:cNvPr id="419190701" name="ZoneTexte 2102805411"/>
+          <p:cNvSpPr txBox="1"/>
+          <p:nvPr/>
+        </p:nvSpPr>
+        <p:spPr bwMode="auto">
+          <a:xfrm flipH="0" flipV="0">
+            <a:off x="2347022" y="4261293"/>
+            <a:ext cx="1700752" cy="643788"/>
+          </a:xfrm>
+          <a:prstGeom prst="rect">
+            <a:avLst/>
+          </a:prstGeom>
+          <a:noFill/>
+        </p:spPr>
+        <p:txBody>
+          <a:bodyPr vertOverflow="overflow" horzOverflow="overflow" vert="horz" wrap="square" lIns="91440" tIns="45720" rIns="91440" bIns="45720" numCol="1" spcCol="0" rtlCol="0" fromWordArt="0" anchor="t" anchorCtr="0" forceAA="0" compatLnSpc="0">
+            <a:spAutoFit/>
+          </a:bodyPr>
+          <a:lstStyle/>
+          <a:p>
+            <a:pPr marL="0" marR="0" lvl="0" indent="0" algn="r" defTabSz="914400" rtl="0">
+              <a:lnSpc>
+                <a:spcPct val="100000"/>
+              </a:lnSpc>
+              <a:spcBef>
+                <a:spcPts val="0"/>
+              </a:spcBef>
+              <a:spcAft>
+                <a:spcPts val="0"/>
+              </a:spcAft>
+              <a:defRPr lang="fr-FR" sz="1800" b="0" i="0" u="none" strike="noStrike" cap="none" spc="0">
+                <a:solidFill>
+                  <a:srgbClr val="000000"/>
+                </a:solidFill>
+                <a:latin typeface="Arial"/>
+                <a:ea typeface="Arial"/>
+                <a:cs typeface="Arial"/>
+              </a:defRPr>
+            </a:pPr>
+            <a:r>
+              <a:rPr lang="fr-FR" sz="1200" b="0" i="0" u="none" strike="noStrike" cap="none" spc="0">
+                <a:solidFill>
+                  <a:srgbClr val="000000"/>
+                </a:solidFill>
+                <a:latin typeface="Arial"/>
+                <a:ea typeface="Arial"/>
+                <a:cs typeface="Arial"/>
+              </a:rPr>
+              <a:t>Technologie </a:t>
+            </a:r>
+            <a:r>
+              <a:rPr lang="fr-FR" sz="1200" b="0" i="0" u="none" strike="noStrike" cap="none" spc="0">
+                <a:solidFill>
+                  <a:srgbClr val="808080"/>
+                </a:solidFill>
+                <a:latin typeface="Arial"/>
+                <a:ea typeface="Arial"/>
+                <a:cs typeface="Arial"/>
+              </a:rPr>
+              <a:t>◇</a:t>
+            </a:r>
+            <a:endParaRPr sz="1600"/>
+          </a:p>
+          <a:p>
+            <a:pPr algn="r">
+              <a:defRPr/>
+            </a:pPr>
+            <a:r>
+              <a:rPr lang="fr-FR" sz="800" b="0" i="0" u="none" strike="noStrike" cap="none" spc="0">
+                <a:solidFill>
+                  <a:srgbClr val="808080"/>
+                </a:solidFill>
+                <a:latin typeface="Arial"/>
+                <a:ea typeface="Arial"/>
+                <a:cs typeface="Arial"/>
+              </a:rPr>
+              <a:t>Bricoler, entretenir le matériel, savoir comment fonctionne un trébuchet.</a:t>
+            </a:r>
+            <a:endParaRPr/>
+          </a:p>
+        </p:txBody>
+      </p:sp>
+      <p:sp>
+        <p:nvSpPr>
+          <p:cNvPr id="1060791606" name="ZoneTexte 1094420572"/>
+          <p:cNvSpPr txBox="1"/>
+          <p:nvPr/>
+        </p:nvSpPr>
+        <p:spPr bwMode="auto">
+          <a:xfrm>
+            <a:off x="2302384" y="2333277"/>
+            <a:ext cx="1743232" cy="643788"/>
+          </a:xfrm>
+          <a:prstGeom prst="rect">
+            <a:avLst/>
+          </a:prstGeom>
+          <a:noFill/>
+        </p:spPr>
+        <p:txBody>
+          <a:bodyPr vertOverflow="overflow" horzOverflow="overflow" vert="horz" wrap="square" lIns="91440" tIns="45720" rIns="91440" bIns="45720" numCol="1" spcCol="0" rtlCol="0" fromWordArt="0" anchor="t" anchorCtr="0" forceAA="0" compatLnSpc="0">
+            <a:spAutoFit/>
+          </a:bodyPr>
+          <a:lstStyle/>
+          <a:p>
+            <a:pPr marL="0" marR="0" lvl="0" indent="0" algn="r" defTabSz="914400" rtl="0">
+              <a:lnSpc>
+                <a:spcPct val="100000"/>
+              </a:lnSpc>
+              <a:spcBef>
+                <a:spcPts val="0"/>
+              </a:spcBef>
+              <a:spcAft>
+                <a:spcPts val="0"/>
+              </a:spcAft>
+              <a:defRPr lang="fr-FR" sz="1800" b="0" i="0" u="none" strike="noStrike" cap="none" spc="0">
+                <a:solidFill>
+                  <a:srgbClr val="000000"/>
+                </a:solidFill>
+                <a:latin typeface="Arial"/>
+                <a:ea typeface="Arial"/>
+                <a:cs typeface="Arial"/>
+              </a:defRPr>
+            </a:pPr>
+            <a:r>
+              <a:rPr lang="fr-FR" sz="1200" b="0" i="0" u="none" strike="noStrike" cap="none" spc="0">
+                <a:solidFill>
+                  <a:srgbClr val="000000"/>
+                </a:solidFill>
+                <a:latin typeface="Arial"/>
+                <a:ea typeface="Arial"/>
+                <a:cs typeface="Arial"/>
+              </a:rPr>
+              <a:t>Nature </a:t>
+            </a:r>
+            <a:r>
+              <a:rPr lang="fr-FR" sz="1200" b="0" i="0" u="none" strike="noStrike" cap="none" spc="0">
+                <a:solidFill>
+                  <a:srgbClr val="808080"/>
+                </a:solidFill>
+                <a:latin typeface="Arial"/>
+                <a:ea typeface="Arial"/>
+                <a:cs typeface="Arial"/>
+              </a:rPr>
+              <a:t>◇</a:t>
+            </a:r>
+            <a:endParaRPr sz="1600"/>
+          </a:p>
+          <a:p>
+            <a:pPr algn="r">
+              <a:defRPr/>
+            </a:pPr>
+            <a:r>
+              <a:rPr lang="fr-FR" sz="800" b="0" i="0" u="none" strike="noStrike" cap="none" spc="0">
+                <a:solidFill>
+                  <a:srgbClr val="808080"/>
+                </a:solidFill>
+                <a:latin typeface="Arial"/>
+                <a:ea typeface="Arial"/>
+                <a:cs typeface="Arial"/>
+              </a:rPr>
+              <a:t>Savoir survivre dans la nature, connaître la flore et la faune, camper, se déplacer en extérieur.</a:t>
+            </a:r>
+            <a:endParaRPr/>
+          </a:p>
+        </p:txBody>
+      </p:sp>
+      <p:sp>
+        <p:nvSpPr>
+          <p:cNvPr id="777848412" name="ZoneTexte 1337742717"/>
+          <p:cNvSpPr txBox="1"/>
+          <p:nvPr/>
+        </p:nvSpPr>
+        <p:spPr bwMode="auto">
+          <a:xfrm flipH="0" flipV="0">
+            <a:off x="2309222" y="4895033"/>
+            <a:ext cx="1739635" cy="643788"/>
+          </a:xfrm>
+          <a:prstGeom prst="rect">
+            <a:avLst/>
+          </a:prstGeom>
+          <a:noFill/>
+        </p:spPr>
+        <p:txBody>
+          <a:bodyPr vertOverflow="overflow" horzOverflow="overflow" vert="horz" wrap="square" lIns="91440" tIns="45720" rIns="91440" bIns="45720" numCol="1" spcCol="0" rtlCol="0" fromWordArt="0" anchor="t" anchorCtr="0" forceAA="0" compatLnSpc="0">
+            <a:spAutoFit/>
+          </a:bodyPr>
+          <a:lstStyle/>
+          <a:p>
+            <a:pPr algn="r">
+              <a:defRPr/>
+            </a:pPr>
+            <a:r>
+              <a:rPr sz="1200"/>
+              <a:t>Véhicules </a:t>
+            </a:r>
+            <a:r>
+              <a:rPr lang="fr-FR" sz="1200" b="0" i="0" u="none" strike="noStrike" cap="none" spc="0">
+                <a:solidFill>
+                  <a:schemeClr val="tx1">
+                    <a:lumMod val="50000"/>
+                    <a:lumOff val="50000"/>
+                  </a:schemeClr>
+                </a:solidFill>
+                <a:latin typeface="Arial"/>
+                <a:ea typeface="Arial"/>
+                <a:cs typeface="Arial"/>
+              </a:rPr>
+              <a:t>◇</a:t>
+            </a:r>
+            <a:endParaRPr sz="1600"/>
+          </a:p>
+          <a:p>
+            <a:pPr algn="r">
+              <a:defRPr/>
+            </a:pPr>
+            <a:r>
+              <a:rPr sz="800">
+                <a:solidFill>
+                  <a:schemeClr val="tx1">
+                    <a:lumMod val="50000"/>
+                    <a:lumOff val="50000"/>
+                  </a:schemeClr>
+                </a:solidFill>
+              </a:rPr>
+              <a:t>Conduire et piloter toutes sortes de véhicules, monter à cheval, avoir le pied marin.</a:t>
+            </a:r>
+            <a:endParaRPr/>
+          </a:p>
+        </p:txBody>
+      </p:sp>
+      <p:sp>
+        <p:nvSpPr>
+          <p:cNvPr id="401142313" name="ZoneTexte 1188730172"/>
+          <p:cNvSpPr txBox="1"/>
+          <p:nvPr/>
+        </p:nvSpPr>
+        <p:spPr bwMode="auto">
+          <a:xfrm>
+            <a:off x="2309224" y="5535477"/>
+            <a:ext cx="1734593" cy="648424"/>
+          </a:xfrm>
+          <a:prstGeom prst="rect">
+            <a:avLst/>
+          </a:prstGeom>
+          <a:noFill/>
+        </p:spPr>
+        <p:txBody>
+          <a:bodyPr vertOverflow="overflow" horzOverflow="overflow" vert="horz" wrap="square" lIns="91440" tIns="45720" rIns="91440" bIns="45720" numCol="1" spcCol="0" rtlCol="0" fromWordArt="0" anchor="t" anchorCtr="0" forceAA="0" compatLnSpc="0">
+            <a:spAutoFit/>
+          </a:bodyPr>
+          <a:lstStyle/>
+          <a:p>
+            <a:pPr algn="r">
+              <a:defRPr/>
+            </a:pPr>
+            <a:r>
+              <a:rPr sz="1200"/>
+              <a:t>Vigilance </a:t>
+            </a:r>
+            <a:r>
+              <a:rPr lang="fr-FR" sz="1200" b="1" i="0" u="none" strike="noStrike" cap="none" spc="0">
+                <a:solidFill>
+                  <a:schemeClr val="tx1">
+                    <a:lumMod val="50000"/>
+                    <a:lumOff val="50000"/>
+                  </a:schemeClr>
+                </a:solidFill>
+                <a:latin typeface="Arial"/>
+                <a:ea typeface="Arial"/>
+                <a:cs typeface="Arial"/>
+              </a:rPr>
+              <a:t>◇</a:t>
+            </a:r>
+            <a:endParaRPr sz="1600"/>
+          </a:p>
+          <a:p>
+            <a:pPr algn="r">
+              <a:defRPr/>
+            </a:pPr>
+            <a:r>
+              <a:rPr sz="800">
+                <a:solidFill>
+                  <a:schemeClr val="tx1">
+                    <a:lumMod val="50000"/>
+                    <a:lumOff val="50000"/>
+                  </a:schemeClr>
+                </a:solidFill>
+              </a:rPr>
+              <a:t>Observer, remarquer les détails, être attentif à son environnement et y réagir rapidement.</a:t>
+            </a:r>
+            <a:endParaRPr/>
+          </a:p>
+        </p:txBody>
+      </p:sp>
+      <p:sp>
+        <p:nvSpPr>
+          <p:cNvPr id="818019235" name="Rectangle : avec coins arrondis en haut 1452601499"/>
+          <p:cNvSpPr/>
+          <p:nvPr/>
+        </p:nvSpPr>
+        <p:spPr bwMode="auto">
+          <a:xfrm rot="5399976">
+            <a:off x="1724004" y="2462431"/>
+            <a:ext cx="522739" cy="400050"/>
+          </a:xfrm>
+          <a:prstGeom prst="round2SameRect">
+            <a:avLst>
+              <a:gd name="adj1" fmla="val 16667"/>
+              <a:gd name="adj2" fmla="val 0"/>
+            </a:avLst>
+          </a:prstGeom>
+          <a:noFill/>
+          <a:ln w="12699" cap="flat" cmpd="sng" algn="ctr">
+            <a:solidFill>
+              <a:schemeClr val="tx1">
+                <a:lumMod val="50196"/>
+                <a:lumOff val="49804"/>
+              </a:schemeClr>
+            </a:solidFill>
+            <a:prstDash val="solid"/>
+            <a:miter lim="800000"/>
+          </a:ln>
+        </p:spPr>
+        <p:style>
+          <a:lnRef idx="2">
+            <a:schemeClr val="accent1">
+              <a:shade val="50000"/>
+            </a:schemeClr>
+          </a:lnRef>
+          <a:fillRef idx="1">
+            <a:schemeClr val="accent1"/>
+          </a:fillRef>
+          <a:effectRef idx="0">
+            <a:schemeClr val="accent1"/>
+          </a:effectRef>
+          <a:fontRef idx="minor">
+            <a:schemeClr val="lt1"/>
+          </a:fontRef>
+        </p:style>
+      </p:sp>
+      <p:sp>
+        <p:nvSpPr>
+          <p:cNvPr id="922301880" name="Rectangle : avec coins arrondis en haut 1782110635"/>
+          <p:cNvSpPr/>
+          <p:nvPr/>
+        </p:nvSpPr>
+        <p:spPr bwMode="auto">
+          <a:xfrm rot="5399976">
+            <a:off x="1718298" y="3101738"/>
             <a:ext cx="520474" cy="400050"/>
           </a:xfrm>
           <a:prstGeom prst="round2SameRect">
@@ -4699,95 +7725,14 @@
       </p:sp>
       <p:sp>
         <p:nvSpPr>
-          <p:cNvPr id="896533933" name="ZoneTexte 448541368"/>
-          <p:cNvSpPr txBox="1"/>
-          <p:nvPr/>
-        </p:nvSpPr>
-        <p:spPr bwMode="auto">
-          <a:xfrm>
-            <a:off x="3085692" y="7383950"/>
-            <a:ext cx="2170177" cy="643788"/>
-          </a:xfrm>
-          <a:prstGeom prst="rect">
-            <a:avLst/>
-          </a:prstGeom>
-          <a:noFill/>
-        </p:spPr>
-        <p:txBody>
-          <a:bodyPr vertOverflow="overflow" horzOverflow="overflow" vert="horz" wrap="square" lIns="91440" tIns="45720" rIns="91440" bIns="45720" numCol="1" spcCol="0" rtlCol="0" fromWordArt="0" anchor="t" anchorCtr="0" forceAA="0" compatLnSpc="0">
-            <a:spAutoFit/>
-          </a:bodyPr>
-          <a:lstStyle/>
-          <a:p>
-            <a:pPr algn="r">
-              <a:defRPr/>
-            </a:pPr>
-            <a:r>
-              <a:rPr sz="1200"/>
-              <a:t>Résistance mentale </a:t>
-            </a:r>
-            <a:r>
-              <a:rPr lang="fr-FR" sz="1200" b="0" i="0" u="none" strike="noStrike" cap="none" spc="0">
-                <a:solidFill>
-                  <a:schemeClr val="tx1">
-                    <a:lumMod val="50000"/>
-                    <a:lumOff val="50000"/>
-                  </a:schemeClr>
-                </a:solidFill>
-                <a:latin typeface="Arial"/>
-                <a:ea typeface="Arial"/>
-                <a:cs typeface="Arial"/>
-              </a:rPr>
-              <a:t>◇</a:t>
-            </a:r>
-            <a:br>
-              <a:rPr lang="fr-FR" sz="800" b="0" i="0" u="none" strike="noStrike" cap="none" spc="0">
-                <a:solidFill>
-                  <a:schemeClr val="tx1">
-                    <a:lumMod val="50000"/>
-                    <a:lumOff val="50000"/>
-                  </a:schemeClr>
-                </a:solidFill>
-                <a:latin typeface="Arial"/>
-                <a:ea typeface="Arial"/>
-                <a:cs typeface="Arial"/>
-              </a:rPr>
-            </a:br>
-            <a:r>
-              <a:rPr lang="fr-FR" sz="800" b="0" i="0" u="none" strike="noStrike" cap="none" spc="0">
-                <a:solidFill>
-                  <a:schemeClr val="tx1">
-                    <a:lumMod val="50000"/>
-                    <a:lumOff val="50000"/>
-                  </a:schemeClr>
-                </a:solidFill>
-                <a:latin typeface="Arial"/>
-                <a:ea typeface="Arial"/>
-                <a:cs typeface="Arial"/>
-              </a:rPr>
-              <a:t>Faites un test lors d’une agression sociale ou mentale, ou lorsque votre santé mentale est mise en danger.</a:t>
-            </a:r>
-            <a:endParaRPr sz="800">
-              <a:solidFill>
-                <a:schemeClr val="tx1">
-                  <a:lumMod val="50000"/>
-                  <a:lumOff val="50000"/>
-                </a:schemeClr>
-              </a:solidFill>
-            </a:endParaRPr>
-          </a:p>
-        </p:txBody>
-      </p:sp>
-      <p:sp>
-        <p:nvSpPr>
-          <p:cNvPr id="2139699756" name="Rectangle : avec coins arrondis en haut 1165584529"/>
+          <p:cNvPr id="398138142" name="Rectangle : avec coins arrondis en haut 945118596"/>
           <p:cNvSpPr/>
           <p:nvPr/>
         </p:nvSpPr>
         <p:spPr bwMode="auto">
           <a:xfrm rot="5399976">
-            <a:off x="5195513" y="7504147"/>
-            <a:ext cx="520474" cy="400050"/>
+            <a:off x="1725138" y="3734352"/>
+            <a:ext cx="520473" cy="400050"/>
           </a:xfrm>
           <a:prstGeom prst="round2SameRect">
             <a:avLst>
@@ -4826,2821 +7771,14 @@
       </p:sp>
       <p:sp>
         <p:nvSpPr>
-          <p:cNvPr id="667599793" name="Flèche : pentagone 1880610112"/>
-          <p:cNvSpPr/>
-          <p:nvPr/>
-        </p:nvSpPr>
-        <p:spPr bwMode="auto">
-          <a:xfrm flipH="0" flipV="0">
-            <a:off x="5798789" y="6916887"/>
-            <a:ext cx="143170" cy="140445"/>
-          </a:xfrm>
-          <a:prstGeom prst="homePlate">
-            <a:avLst>
-              <a:gd name="adj" fmla="val 50000"/>
-            </a:avLst>
-          </a:prstGeom>
-          <a:noFill/>
-          <a:ln w="12700" cap="flat" cmpd="sng" algn="ctr">
-            <a:solidFill>
-              <a:schemeClr val="tx1">
-                <a:lumMod val="50196"/>
-                <a:lumOff val="49804"/>
-              </a:schemeClr>
-            </a:solidFill>
-            <a:prstDash val="solid"/>
-            <a:miter lim="800000"/>
-          </a:ln>
-        </p:spPr>
-        <p:style>
-          <a:lnRef idx="2">
-            <a:schemeClr val="accent1">
-              <a:shade val="50000"/>
-            </a:schemeClr>
-          </a:lnRef>
-          <a:fillRef idx="1">
-            <a:schemeClr val="accent1"/>
-          </a:fillRef>
-          <a:effectRef idx="0">
-            <a:schemeClr val="accent1"/>
-          </a:effectRef>
-          <a:fontRef idx="minor">
-            <a:schemeClr val="lt1"/>
-          </a:fontRef>
-        </p:style>
-      </p:sp>
-      <p:sp>
-        <p:nvSpPr>
-          <p:cNvPr id="2086776254" name="Flèche : pentagone 446859139"/>
-          <p:cNvSpPr/>
-          <p:nvPr/>
-        </p:nvSpPr>
-        <p:spPr bwMode="auto">
-          <a:xfrm flipH="0" flipV="0">
-            <a:off x="5949464" y="6916887"/>
-            <a:ext cx="143170" cy="140444"/>
-          </a:xfrm>
-          <a:prstGeom prst="homePlate">
-            <a:avLst>
-              <a:gd name="adj" fmla="val 50000"/>
-            </a:avLst>
-          </a:prstGeom>
-          <a:noFill/>
-          <a:ln w="12700" cap="flat" cmpd="sng" algn="ctr">
-            <a:solidFill>
-              <a:schemeClr val="tx1">
-                <a:lumMod val="50196"/>
-                <a:lumOff val="49804"/>
-              </a:schemeClr>
-            </a:solidFill>
-            <a:prstDash val="solid"/>
-            <a:miter lim="800000"/>
-          </a:ln>
-        </p:spPr>
-        <p:style>
-          <a:lnRef idx="2">
-            <a:schemeClr val="accent1">
-              <a:shade val="50000"/>
-            </a:schemeClr>
-          </a:lnRef>
-          <a:fillRef idx="1">
-            <a:schemeClr val="accent1"/>
-          </a:fillRef>
-          <a:effectRef idx="0">
-            <a:schemeClr val="accent1"/>
-          </a:effectRef>
-          <a:fontRef idx="minor">
-            <a:schemeClr val="lt1"/>
-          </a:fontRef>
-        </p:style>
-      </p:sp>
-      <p:sp>
-        <p:nvSpPr>
-          <p:cNvPr id="608899272" name="Flèche : pentagone 2055848356"/>
-          <p:cNvSpPr/>
-          <p:nvPr/>
-        </p:nvSpPr>
-        <p:spPr bwMode="auto">
-          <a:xfrm flipH="0" flipV="0">
-            <a:off x="6100143" y="6916887"/>
-            <a:ext cx="143170" cy="140444"/>
-          </a:xfrm>
-          <a:prstGeom prst="homePlate">
-            <a:avLst>
-              <a:gd name="adj" fmla="val 50000"/>
-            </a:avLst>
-          </a:prstGeom>
-          <a:noFill/>
-          <a:ln w="12700" cap="flat" cmpd="sng" algn="ctr">
-            <a:solidFill>
-              <a:schemeClr val="tx1">
-                <a:lumMod val="50196"/>
-                <a:lumOff val="49804"/>
-              </a:schemeClr>
-            </a:solidFill>
-            <a:prstDash val="solid"/>
-            <a:miter lim="800000"/>
-          </a:ln>
-        </p:spPr>
-        <p:style>
-          <a:lnRef idx="2">
-            <a:schemeClr val="accent1">
-              <a:shade val="50000"/>
-            </a:schemeClr>
-          </a:lnRef>
-          <a:fillRef idx="1">
-            <a:schemeClr val="accent1"/>
-          </a:fillRef>
-          <a:effectRef idx="0">
-            <a:schemeClr val="accent1"/>
-          </a:effectRef>
-          <a:fontRef idx="minor">
-            <a:schemeClr val="lt1"/>
-          </a:fontRef>
-        </p:style>
-      </p:sp>
-      <p:sp>
-        <p:nvSpPr>
-          <p:cNvPr id="1109948262" name="Flèche : pentagone 1980093981"/>
-          <p:cNvSpPr/>
-          <p:nvPr/>
-        </p:nvSpPr>
-        <p:spPr bwMode="auto">
-          <a:xfrm flipH="0" flipV="0">
-            <a:off x="6250818" y="6916887"/>
-            <a:ext cx="143170" cy="140444"/>
-          </a:xfrm>
-          <a:prstGeom prst="homePlate">
-            <a:avLst>
-              <a:gd name="adj" fmla="val 50000"/>
-            </a:avLst>
-          </a:prstGeom>
-          <a:noFill/>
-          <a:ln w="12700" cap="flat" cmpd="sng" algn="ctr">
-            <a:solidFill>
-              <a:schemeClr val="tx1">
-                <a:lumMod val="50196"/>
-                <a:lumOff val="49804"/>
-              </a:schemeClr>
-            </a:solidFill>
-            <a:prstDash val="solid"/>
-            <a:miter lim="800000"/>
-          </a:ln>
-        </p:spPr>
-        <p:style>
-          <a:lnRef idx="2">
-            <a:schemeClr val="accent1">
-              <a:shade val="50000"/>
-            </a:schemeClr>
-          </a:lnRef>
-          <a:fillRef idx="1">
-            <a:schemeClr val="accent1"/>
-          </a:fillRef>
-          <a:effectRef idx="0">
-            <a:schemeClr val="accent1"/>
-          </a:effectRef>
-          <a:fontRef idx="minor">
-            <a:schemeClr val="lt1"/>
-          </a:fontRef>
-        </p:style>
-      </p:sp>
-      <p:sp>
-        <p:nvSpPr>
-          <p:cNvPr id="243960226" name="Flèche : pentagone 905284374"/>
-          <p:cNvSpPr/>
-          <p:nvPr/>
-        </p:nvSpPr>
-        <p:spPr bwMode="auto">
-          <a:xfrm flipH="0" flipV="0">
-            <a:off x="6401493" y="6916887"/>
-            <a:ext cx="143170" cy="140444"/>
-          </a:xfrm>
-          <a:prstGeom prst="homePlate">
-            <a:avLst>
-              <a:gd name="adj" fmla="val 50000"/>
-            </a:avLst>
-          </a:prstGeom>
-          <a:noFill/>
-          <a:ln w="12700" cap="flat" cmpd="sng" algn="ctr">
-            <a:solidFill>
-              <a:schemeClr val="tx1">
-                <a:lumMod val="50196"/>
-                <a:lumOff val="49804"/>
-              </a:schemeClr>
-            </a:solidFill>
-            <a:prstDash val="solid"/>
-            <a:miter lim="800000"/>
-          </a:ln>
-        </p:spPr>
-        <p:style>
-          <a:lnRef idx="2">
-            <a:schemeClr val="accent1">
-              <a:shade val="50000"/>
-            </a:schemeClr>
-          </a:lnRef>
-          <a:fillRef idx="1">
-            <a:schemeClr val="accent1"/>
-          </a:fillRef>
-          <a:effectRef idx="0">
-            <a:schemeClr val="accent1"/>
-          </a:effectRef>
-          <a:fontRef idx="minor">
-            <a:schemeClr val="lt1"/>
-          </a:fontRef>
-        </p:style>
-      </p:sp>
-      <p:sp>
-        <p:nvSpPr>
-          <p:cNvPr id="2121608420" name="ZoneTexte 880464430"/>
-          <p:cNvSpPr txBox="1"/>
-          <p:nvPr/>
-        </p:nvSpPr>
-        <p:spPr bwMode="auto">
-          <a:xfrm flipH="0" flipV="0">
-            <a:off x="3170222" y="8017653"/>
-            <a:ext cx="3685709" cy="579479"/>
-          </a:xfrm>
-          <a:prstGeom prst="rect">
-            <a:avLst/>
-          </a:prstGeom>
-          <a:noFill/>
-        </p:spPr>
-        <p:txBody>
-          <a:bodyPr vertOverflow="overflow" horzOverflow="overflow" vert="horz" wrap="square" lIns="91440" tIns="45720" rIns="91440" bIns="45720" numCol="1" spcCol="0" rtlCol="0" fromWordArt="0" anchor="t" anchorCtr="0" forceAA="0" compatLnSpc="0">
-            <a:spAutoFit/>
-          </a:bodyPr>
-          <a:lstStyle/>
-          <a:p>
-            <a:pPr algn="l">
-              <a:defRPr/>
-            </a:pPr>
-            <a:r>
-              <a:rPr lang="fr-FR" sz="800" b="0" i="0" u="none" strike="noStrike" cap="none" spc="0">
-                <a:solidFill>
-                  <a:schemeClr val="tx1">
-                    <a:lumMod val="50000"/>
-                    <a:lumOff val="50000"/>
-                  </a:schemeClr>
-                </a:solidFill>
-                <a:latin typeface="Arial"/>
-                <a:ea typeface="Arial"/>
-                <a:cs typeface="Arial"/>
-              </a:rPr>
-              <a:t>Chaque case de stress cochée entraîne un </a:t>
-            </a:r>
-            <a:r>
-              <a:rPr lang="fr-FR" sz="800" b="1" i="0" u="none" strike="noStrike" cap="none" spc="0">
-                <a:solidFill>
-                  <a:schemeClr val="tx1">
-                    <a:lumMod val="50000"/>
-                    <a:lumOff val="50000"/>
-                  </a:schemeClr>
-                </a:solidFill>
-                <a:latin typeface="Arial"/>
-                <a:ea typeface="Arial"/>
-                <a:cs typeface="Arial"/>
-              </a:rPr>
-              <a:t>malus de -10</a:t>
-            </a:r>
-            <a:r>
-              <a:rPr lang="fr-FR" sz="800" b="0" i="0" u="none" strike="noStrike" cap="none" spc="0">
-                <a:solidFill>
-                  <a:schemeClr val="tx1">
-                    <a:lumMod val="50000"/>
-                    <a:lumOff val="50000"/>
-                  </a:schemeClr>
-                </a:solidFill>
-                <a:latin typeface="Arial"/>
-                <a:ea typeface="Arial"/>
-                <a:cs typeface="Arial"/>
-              </a:rPr>
-              <a:t> à la résistance concernée. </a:t>
-            </a:r>
-            <a:r>
-              <a:rPr lang="fr-FR" sz="800">
-                <a:solidFill>
-                  <a:schemeClr val="tx1">
-                    <a:lumMod val="50000"/>
-                    <a:lumOff val="50000"/>
-                  </a:schemeClr>
-                </a:solidFill>
-              </a:rPr>
-              <a:t>Si vous échouez à un test d’</a:t>
-            </a:r>
-            <a:r>
-              <a:rPr lang="fr-FR" sz="800" b="1">
-                <a:solidFill>
-                  <a:schemeClr val="tx1">
-                    <a:lumMod val="50000"/>
-                    <a:lumOff val="50000"/>
-                  </a:schemeClr>
-                </a:solidFill>
-              </a:rPr>
-              <a:t>épreuve</a:t>
-            </a:r>
-            <a:r>
-              <a:rPr lang="fr-FR" sz="800">
-                <a:solidFill>
-                  <a:schemeClr val="tx1">
-                    <a:lumMod val="50000"/>
-                    <a:lumOff val="50000"/>
-                  </a:schemeClr>
-                </a:solidFill>
-              </a:rPr>
-              <a:t>, cochez une case de stress. Si vous réussissez à un test de </a:t>
-            </a:r>
-            <a:r>
-              <a:rPr lang="fr-FR" sz="800" b="1">
-                <a:solidFill>
-                  <a:schemeClr val="tx1">
-                    <a:lumMod val="50000"/>
-                    <a:lumOff val="50000"/>
-                  </a:schemeClr>
-                </a:solidFill>
-              </a:rPr>
-              <a:t>choc</a:t>
-            </a:r>
-            <a:r>
-              <a:rPr lang="fr-FR" sz="800">
-                <a:solidFill>
-                  <a:schemeClr val="tx1">
-                    <a:lumMod val="50000"/>
-                    <a:lumOff val="50000"/>
-                  </a:schemeClr>
-                </a:solidFill>
-              </a:rPr>
-              <a:t>, cochez une case de stress ; si vous échouez à un test de </a:t>
-            </a:r>
-            <a:r>
-              <a:rPr lang="fr-FR" sz="800" b="1">
-                <a:solidFill>
-                  <a:schemeClr val="tx1">
-                    <a:lumMod val="50000"/>
-                    <a:lumOff val="50000"/>
-                  </a:schemeClr>
-                </a:solidFill>
-              </a:rPr>
-              <a:t>choc</a:t>
-            </a:r>
-            <a:r>
-              <a:rPr lang="fr-FR" sz="800">
-                <a:solidFill>
-                  <a:schemeClr val="tx1">
-                    <a:lumMod val="50000"/>
-                    <a:lumOff val="50000"/>
-                  </a:schemeClr>
-                </a:solidFill>
-              </a:rPr>
-              <a:t>, cochez une case de trauma.</a:t>
-            </a:r>
-            <a:r>
-              <a:rPr sz="800">
-                <a:solidFill>
-                  <a:schemeClr val="tx1">
-                    <a:lumMod val="50000"/>
-                    <a:lumOff val="50000"/>
-                  </a:schemeClr>
-                </a:solidFill>
-              </a:rPr>
-              <a:t>.</a:t>
-            </a:r>
-            <a:endParaRPr sz="1800"/>
-          </a:p>
-        </p:txBody>
-      </p:sp>
-      <p:sp>
-        <p:nvSpPr>
-          <p:cNvPr id="82992999" name="ZoneTexte 1302587497"/>
-          <p:cNvSpPr txBox="1"/>
-          <p:nvPr/>
-        </p:nvSpPr>
-        <p:spPr bwMode="auto">
-          <a:xfrm>
-            <a:off x="142542" y="563517"/>
-            <a:ext cx="4300362" cy="1463400"/>
-          </a:xfrm>
-          <a:prstGeom prst="rect">
-            <a:avLst/>
-          </a:prstGeom>
-          <a:noFill/>
-        </p:spPr>
-        <p:txBody>
-          <a:bodyPr vertOverflow="overflow" horzOverflow="overflow" vert="horz" wrap="square" lIns="91440" tIns="45720" rIns="91440" bIns="45720" numCol="1" spcCol="0" rtlCol="0" fromWordArt="0" anchor="t" anchorCtr="0" forceAA="0" compatLnSpc="0">
-            <a:spAutoFit/>
-          </a:bodyPr>
-          <a:lstStyle/>
-          <a:p>
-            <a:pPr>
-              <a:lnSpc>
-                <a:spcPct val="150000"/>
-              </a:lnSpc>
-              <a:defRPr/>
-            </a:pPr>
-            <a:r>
-              <a:rPr sz="1000"/>
-              <a:t>Nom :</a:t>
-            </a:r>
-            <a:r>
-              <a:rPr sz="1000">
-                <a:solidFill>
-                  <a:schemeClr val="bg2">
-                    <a:lumMod val="90000"/>
-                  </a:schemeClr>
-                </a:solidFill>
-              </a:rPr>
-              <a:t> __________________________________________________</a:t>
-            </a:r>
-            <a:endParaRPr/>
-          </a:p>
-          <a:p>
-            <a:pPr>
-              <a:lnSpc>
-                <a:spcPct val="150000"/>
-              </a:lnSpc>
-              <a:defRPr/>
-            </a:pPr>
-            <a:r>
-              <a:rPr sz="1000"/>
-              <a:t>Âge</a:t>
-            </a:r>
-            <a:r>
-              <a:rPr sz="1000"/>
-              <a:t> : </a:t>
-            </a:r>
-            <a:r>
-              <a:rPr sz="1000">
-                <a:solidFill>
-                  <a:schemeClr val="bg2">
-                    <a:lumMod val="90000"/>
-                  </a:schemeClr>
-                </a:solidFill>
-              </a:rPr>
-              <a:t>_______</a:t>
-            </a:r>
-            <a:r>
-              <a:rPr sz="1000"/>
-              <a:t>	Sexe : </a:t>
-            </a:r>
-            <a:r>
-              <a:rPr sz="1000">
-                <a:solidFill>
-                  <a:schemeClr val="bg2">
-                    <a:lumMod val="90000"/>
-                  </a:schemeClr>
-                </a:solidFill>
-              </a:rPr>
-              <a:t>______</a:t>
-            </a:r>
-            <a:r>
-              <a:rPr sz="1000"/>
-              <a:t>	Taille : </a:t>
-            </a:r>
-            <a:r>
-              <a:rPr sz="1000">
-                <a:solidFill>
-                  <a:schemeClr val="bg2">
-                    <a:lumMod val="90000"/>
-                  </a:schemeClr>
-                </a:solidFill>
-              </a:rPr>
-              <a:t>_______</a:t>
-            </a:r>
-            <a:r>
-              <a:rPr sz="1000"/>
-              <a:t>	  </a:t>
-            </a:r>
-            <a:r>
-              <a:rPr sz="1000"/>
-              <a:t>Poids</a:t>
-            </a:r>
-            <a:r>
-              <a:rPr sz="1000"/>
-              <a:t> : </a:t>
-            </a:r>
-            <a:r>
-              <a:rPr sz="1000">
-                <a:solidFill>
-                  <a:schemeClr val="bg2">
-                    <a:lumMod val="90000"/>
-                  </a:schemeClr>
-                </a:solidFill>
-              </a:rPr>
-              <a:t>_________</a:t>
-            </a:r>
-            <a:endParaRPr>
-              <a:solidFill>
-                <a:schemeClr val="bg2">
-                  <a:lumMod val="90000"/>
-                </a:schemeClr>
-              </a:solidFill>
-            </a:endParaRPr>
-          </a:p>
-          <a:p>
-            <a:pPr>
-              <a:lnSpc>
-                <a:spcPct val="150000"/>
-              </a:lnSpc>
-              <a:defRPr/>
-            </a:pPr>
-            <a:r>
-              <a:rPr sz="1000"/>
-              <a:t>Yeux : </a:t>
-            </a:r>
-            <a:r>
-              <a:rPr sz="1000">
-                <a:solidFill>
-                  <a:schemeClr val="bg2">
-                    <a:lumMod val="90000"/>
-                  </a:schemeClr>
-                </a:solidFill>
-              </a:rPr>
-              <a:t>___________________</a:t>
-            </a:r>
-            <a:r>
-              <a:rPr sz="1000"/>
-              <a:t>	</a:t>
-            </a:r>
-            <a:r>
-              <a:rPr sz="1000"/>
-              <a:t>Cheveux</a:t>
-            </a:r>
-            <a:r>
-              <a:rPr sz="1000"/>
-              <a:t> : </a:t>
-            </a:r>
-            <a:r>
-              <a:rPr sz="1000">
-                <a:solidFill>
-                  <a:schemeClr val="bg2">
-                    <a:lumMod val="90000"/>
-                  </a:schemeClr>
-                </a:solidFill>
-              </a:rPr>
-              <a:t>_____________________</a:t>
-            </a:r>
-            <a:endParaRPr/>
-          </a:p>
-          <a:p>
-            <a:pPr>
-              <a:lnSpc>
-                <a:spcPct val="150000"/>
-              </a:lnSpc>
-              <a:defRPr/>
-            </a:pPr>
-            <a:r>
-              <a:rPr sz="1000"/>
-              <a:t>Personnalité </a:t>
-            </a:r>
-            <a:r>
-              <a:rPr sz="1000"/>
-              <a:t>: </a:t>
-            </a:r>
-            <a:r>
-              <a:rPr sz="1000">
-                <a:solidFill>
-                  <a:schemeClr val="bg2">
-                    <a:lumMod val="90000"/>
-                  </a:schemeClr>
-                </a:solidFill>
-              </a:rPr>
-              <a:t>____________________________________________</a:t>
-            </a:r>
-            <a:r>
-              <a:rPr lang="fr-FR" sz="1000" b="0" i="0" u="none" strike="noStrike" cap="none" spc="0">
-                <a:solidFill>
-                  <a:schemeClr val="tx1"/>
-                </a:solidFill>
-                <a:latin typeface="+mn-lt"/>
-                <a:ea typeface="+mn-ea"/>
-                <a:cs typeface="+mn-cs"/>
-              </a:rPr>
-              <a:t>	</a:t>
-            </a:r>
-            <a:endParaRPr/>
-          </a:p>
-          <a:p>
-            <a:pPr>
-              <a:lnSpc>
-                <a:spcPct val="150000"/>
-              </a:lnSpc>
-              <a:defRPr/>
-            </a:pPr>
-            <a:r>
-              <a:rPr lang="fr-FR" sz="1000" b="0" i="0" u="none" strike="noStrike" cap="none" spc="0">
-                <a:latin typeface="Arial"/>
-                <a:ea typeface="Arial"/>
-                <a:cs typeface="Arial"/>
-              </a:rPr>
-              <a:t>Exutoires :</a:t>
-            </a:r>
-            <a:r>
-              <a:rPr sz="1000"/>
-              <a:t> </a:t>
-            </a:r>
-            <a:r>
-              <a:rPr sz="1000">
-                <a:solidFill>
-                  <a:schemeClr val="bg2">
-                    <a:lumMod val="90000"/>
-                  </a:schemeClr>
-                </a:solidFill>
-              </a:rPr>
-              <a:t>_______________________________________________</a:t>
-            </a:r>
-            <a:endParaRPr sz="1000">
-              <a:solidFill>
-                <a:schemeClr val="bg2">
-                  <a:lumMod val="90000"/>
-                </a:schemeClr>
-              </a:solidFill>
-            </a:endParaRPr>
-          </a:p>
-          <a:p>
-            <a:pPr>
-              <a:lnSpc>
-                <a:spcPct val="150000"/>
-              </a:lnSpc>
-              <a:defRPr/>
-            </a:pPr>
-            <a:r>
-              <a:rPr lang="fr-FR" sz="1000" b="0" i="0" u="none" strike="noStrike" cap="none" spc="0">
-                <a:solidFill>
-                  <a:schemeClr val="tx1"/>
-                </a:solidFill>
-                <a:latin typeface="+mn-lt"/>
-                <a:ea typeface="+mn-ea"/>
-                <a:cs typeface="+mn-cs"/>
-              </a:rPr>
-              <a:t>Complications :</a:t>
-            </a:r>
-            <a:r>
-              <a:rPr lang="fr-FR" sz="1000" b="0" i="0" u="none" strike="noStrike" cap="none" spc="0">
-                <a:solidFill>
-                  <a:schemeClr val="bg2">
-                    <a:lumMod val="90000"/>
-                  </a:schemeClr>
-                </a:solidFill>
-                <a:latin typeface="+mn-lt"/>
-                <a:ea typeface="+mn-ea"/>
-                <a:cs typeface="+mn-cs"/>
-              </a:rPr>
-              <a:t> </a:t>
-            </a:r>
-            <a:r>
-              <a:rPr sz="1000">
-                <a:solidFill>
-                  <a:schemeClr val="bg2">
-                    <a:lumMod val="90000"/>
-                  </a:schemeClr>
-                </a:solidFill>
-              </a:rPr>
-              <a:t>___________________________________________</a:t>
-            </a:r>
-            <a:endParaRPr>
-              <a:solidFill>
-                <a:schemeClr val="bg2">
-                  <a:lumMod val="90000"/>
-                </a:schemeClr>
-              </a:solidFill>
-            </a:endParaRPr>
-          </a:p>
-        </p:txBody>
-      </p:sp>
-      <p:cxnSp>
-        <p:nvCxnSpPr>
-          <p:cNvPr id="2080080959" name="Connecteur droit 342798987"/>
-          <p:cNvCxnSpPr/>
-          <p:nvPr/>
-        </p:nvCxnSpPr>
-        <p:spPr bwMode="auto">
-          <a:xfrm flipV="1">
-            <a:off x="3259026" y="8683857"/>
-            <a:ext cx="3609465" cy="0"/>
-          </a:xfrm>
-          <a:prstGeom prst="line">
-            <a:avLst/>
-          </a:prstGeom>
-          <a:ln w="76199" cap="flat" cmpd="sng" algn="ctr">
-            <a:solidFill>
-              <a:schemeClr val="bg1">
-                <a:lumMod val="74901"/>
-                <a:alpha val="99999"/>
-              </a:schemeClr>
-            </a:solidFill>
-            <a:prstDash val="solid"/>
-            <a:miter lim="800000"/>
-          </a:ln>
-        </p:spPr>
-        <p:style>
-          <a:lnRef idx="1">
-            <a:schemeClr val="accent1">
-              <a:shade val="50000"/>
-            </a:schemeClr>
-          </a:lnRef>
-          <a:fillRef idx="0">
-            <a:schemeClr val="accent1"/>
-          </a:fillRef>
-          <a:effectRef idx="0">
-            <a:schemeClr val="accent1"/>
-          </a:effectRef>
-          <a:fontRef idx="minor">
-            <a:schemeClr val="tx1"/>
-          </a:fontRef>
-        </p:style>
-      </p:cxnSp>
-      <p:sp>
-        <p:nvSpPr>
-          <p:cNvPr id="525502652" name="ZoneTexte 966486802"/>
-          <p:cNvSpPr txBox="1"/>
-          <p:nvPr/>
-        </p:nvSpPr>
-        <p:spPr bwMode="auto">
-          <a:xfrm>
-            <a:off x="3303459" y="8500798"/>
-            <a:ext cx="2270304" cy="366119"/>
-          </a:xfrm>
-          <a:prstGeom prst="rect">
-            <a:avLst/>
-          </a:prstGeom>
-          <a:noFill/>
-        </p:spPr>
-        <p:txBody>
-          <a:bodyPr vertOverflow="overflow" horzOverflow="overflow" vert="horz" wrap="square" lIns="91440" tIns="45720" rIns="91440" bIns="45720" numCol="1" spcCol="0" rtlCol="0" fromWordArt="0" anchor="t" anchorCtr="0" forceAA="0" compatLnSpc="0">
-            <a:spAutoFit/>
-          </a:bodyPr>
-          <a:lstStyle/>
-          <a:p>
-            <a:pPr algn="l">
-              <a:defRPr/>
-            </a:pPr>
-            <a:r>
-              <a:rPr sz="1800" b="0">
-                <a:solidFill>
-                  <a:schemeClr val="tx1">
-                    <a:lumMod val="75000"/>
-                    <a:lumOff val="25000"/>
-                  </a:schemeClr>
-                </a:solidFill>
-              </a:rPr>
-              <a:t>Ressources</a:t>
-            </a:r>
-            <a:endParaRPr/>
-          </a:p>
-        </p:txBody>
-      </p:sp>
-      <p:sp>
-        <p:nvSpPr>
-          <p:cNvPr id="445801858" name="Rectangle 38344096"/>
-          <p:cNvSpPr/>
-          <p:nvPr/>
-        </p:nvSpPr>
-        <p:spPr bwMode="auto">
-          <a:xfrm flipH="0" flipV="0">
-            <a:off x="4106250" y="552447"/>
-            <a:ext cx="104772" cy="1474466"/>
-          </a:xfrm>
-          <a:prstGeom prst="rect">
-            <a:avLst/>
-          </a:prstGeom>
-          <a:solidFill>
-            <a:schemeClr val="bg1"/>
-          </a:solidFill>
-          <a:ln w="12700" cap="flat" cmpd="sng" algn="ctr">
-            <a:noFill/>
-            <a:prstDash val="solid"/>
-            <a:miter lim="800000"/>
-          </a:ln>
-        </p:spPr>
-        <p:style>
-          <a:lnRef idx="2">
-            <a:schemeClr val="accent1">
-              <a:shade val="50000"/>
-            </a:schemeClr>
-          </a:lnRef>
-          <a:fillRef idx="1">
-            <a:schemeClr val="accent1"/>
-          </a:fillRef>
-          <a:effectRef idx="0">
-            <a:schemeClr val="accent1"/>
-          </a:effectRef>
-          <a:fontRef idx="minor">
-            <a:schemeClr val="lt1"/>
-          </a:fontRef>
-        </p:style>
-      </p:sp>
-      <p:sp>
-        <p:nvSpPr>
-          <p:cNvPr id="550201533" name="Rectangle 954364527"/>
-          <p:cNvSpPr/>
-          <p:nvPr/>
-        </p:nvSpPr>
-        <p:spPr bwMode="auto">
-          <a:xfrm flipH="0" flipV="0">
-            <a:off x="6688316" y="475380"/>
-            <a:ext cx="162577" cy="1561405"/>
-          </a:xfrm>
-          <a:prstGeom prst="rect">
-            <a:avLst/>
-          </a:prstGeom>
-          <a:solidFill>
-            <a:schemeClr val="bg1"/>
-          </a:solidFill>
-          <a:ln w="12700" cap="flat" cmpd="sng" algn="ctr">
-            <a:noFill/>
-            <a:prstDash val="solid"/>
-            <a:miter lim="800000"/>
-          </a:ln>
-        </p:spPr>
-        <p:style>
-          <a:lnRef idx="2">
-            <a:schemeClr val="accent1">
-              <a:shade val="50000"/>
-            </a:schemeClr>
-          </a:lnRef>
-          <a:fillRef idx="1">
-            <a:schemeClr val="accent1"/>
-          </a:fillRef>
-          <a:effectRef idx="0">
-            <a:schemeClr val="accent1"/>
-          </a:effectRef>
-          <a:fontRef idx="minor">
-            <a:schemeClr val="lt1"/>
-          </a:fontRef>
-        </p:style>
-      </p:sp>
-      <p:sp>
-        <p:nvSpPr>
-          <p:cNvPr id="2004992052" name="ZoneTexte 1527388901"/>
-          <p:cNvSpPr txBox="1"/>
-          <p:nvPr/>
-        </p:nvSpPr>
-        <p:spPr bwMode="auto">
-          <a:xfrm flipH="0" flipV="0">
-            <a:off x="4547592" y="2333274"/>
-            <a:ext cx="2353660" cy="2465977"/>
-          </a:xfrm>
-          <a:prstGeom prst="rect">
-            <a:avLst/>
-          </a:prstGeom>
-          <a:noFill/>
-        </p:spPr>
-        <p:txBody>
-          <a:bodyPr vertOverflow="overflow" horzOverflow="overflow" vert="horz" wrap="square" lIns="91440" tIns="45720" rIns="91440" bIns="45720" numCol="1" spcCol="0" rtlCol="0" fromWordArt="0" anchor="t" anchorCtr="0" forceAA="0" compatLnSpc="0">
-            <a:spAutoFit/>
-          </a:bodyPr>
-          <a:lstStyle/>
-          <a:p>
-            <a:pPr>
-              <a:lnSpc>
-                <a:spcPct val="150000"/>
-              </a:lnSpc>
-              <a:defRPr/>
-            </a:pPr>
-            <a:r>
-              <a:rPr sz="1200"/>
-              <a:t>Spécialités</a:t>
-            </a:r>
-            <a:r>
-              <a:rPr lang="fr-FR" sz="1200" b="0" i="0" u="none" strike="noStrike" cap="none" spc="0">
-                <a:solidFill>
-                  <a:schemeClr val="tx1"/>
-                </a:solidFill>
-                <a:latin typeface="Arial"/>
-                <a:ea typeface="Arial"/>
-                <a:cs typeface="Arial"/>
-              </a:rPr>
-              <a:t> </a:t>
-            </a:r>
-            <a:r>
-              <a:rPr lang="fr-FR" sz="1200" b="0" i="0" u="none" strike="noStrike" cap="none" spc="0">
-                <a:solidFill>
-                  <a:schemeClr val="tx1">
-                    <a:lumMod val="50000"/>
-                    <a:lumOff val="50000"/>
-                  </a:schemeClr>
-                </a:solidFill>
-                <a:latin typeface="Arial"/>
-                <a:ea typeface="Arial"/>
-                <a:cs typeface="Arial"/>
-              </a:rPr>
-              <a:t>◇</a:t>
-            </a:r>
-            <a:endParaRPr lang="fr-FR" sz="1200" b="0" i="0" u="none" strike="noStrike" cap="none" spc="0">
-              <a:solidFill>
-                <a:schemeClr val="tx1">
-                  <a:lumMod val="50000"/>
-                  <a:lumOff val="50000"/>
-                </a:schemeClr>
-              </a:solidFill>
-              <a:latin typeface="Times New Roman"/>
-              <a:cs typeface="Times New Roman"/>
-            </a:endParaRPr>
-          </a:p>
-          <a:p>
-            <a:pPr>
-              <a:lnSpc>
-                <a:spcPct val="150000"/>
-              </a:lnSpc>
-              <a:defRPr/>
-            </a:pPr>
-            <a:r>
-              <a:rPr lang="fr-FR" sz="1000" b="0" i="0" u="none" strike="noStrike" cap="none" spc="0">
-                <a:solidFill>
-                  <a:schemeClr val="bg2">
-                    <a:lumMod val="90000"/>
-                  </a:schemeClr>
-                </a:solidFill>
-                <a:latin typeface="Arial"/>
-                <a:ea typeface="Arial"/>
-                <a:cs typeface="Arial"/>
-              </a:rPr>
-              <a:t>_____</a:t>
-            </a:r>
-            <a:r>
-              <a:rPr lang="fr-FR" sz="1000" b="0" i="0" u="none" strike="noStrike" cap="none" spc="0">
-                <a:solidFill>
-                  <a:schemeClr val="bg2">
-                    <a:lumMod val="90000"/>
-                  </a:schemeClr>
-                </a:solidFill>
-                <a:latin typeface="Arial"/>
-                <a:ea typeface="Arial"/>
-                <a:cs typeface="Arial"/>
-              </a:rPr>
-              <a:t>_______________________________________________________________________________________________________________________________________________________</a:t>
-            </a:r>
-            <a:r>
-              <a:rPr lang="fr-FR" sz="1000" b="0" i="0" u="none" strike="noStrike" cap="none" spc="0">
-                <a:solidFill>
-                  <a:schemeClr val="bg2">
-                    <a:lumMod val="90000"/>
-                  </a:schemeClr>
-                </a:solidFill>
-                <a:latin typeface="Arial"/>
-                <a:ea typeface="Arial"/>
-                <a:cs typeface="Arial"/>
-              </a:rPr>
-              <a:t>______________________________________________________</a:t>
-            </a:r>
-            <a:endParaRPr lang="fr-FR" sz="1200" b="0" i="0" u="none" strike="noStrike" cap="none" spc="0">
-              <a:solidFill>
-                <a:schemeClr val="bg2">
-                  <a:lumMod val="90000"/>
-                </a:schemeClr>
-              </a:solidFill>
-              <a:latin typeface="Times New Roman"/>
-              <a:cs typeface="Times New Roman"/>
-            </a:endParaRPr>
-          </a:p>
-          <a:p>
-            <a:pPr>
-              <a:lnSpc>
-                <a:spcPct val="100000"/>
-              </a:lnSpc>
-              <a:defRPr/>
-            </a:pPr>
-            <a:r>
-              <a:rPr lang="fr-FR" sz="800" b="0" i="0" u="none" strike="noStrike" cap="none" spc="0">
-                <a:solidFill>
-                  <a:schemeClr val="tx1">
-                    <a:lumMod val="50000"/>
-                    <a:lumOff val="50000"/>
-                  </a:schemeClr>
-                </a:solidFill>
-                <a:latin typeface="Arial"/>
-                <a:ea typeface="Arial"/>
-                <a:cs typeface="Arial"/>
-              </a:rPr>
-              <a:t>Une spécialité apporte un </a:t>
-            </a:r>
-            <a:r>
-              <a:rPr lang="fr-FR" sz="800" b="1" i="0" u="none" strike="noStrike" cap="none" spc="0">
-                <a:solidFill>
-                  <a:schemeClr val="tx1">
-                    <a:lumMod val="50000"/>
-                    <a:lumOff val="50000"/>
-                  </a:schemeClr>
-                </a:solidFill>
-                <a:latin typeface="Arial"/>
-                <a:ea typeface="Arial"/>
-                <a:cs typeface="Arial"/>
-              </a:rPr>
-              <a:t>bonus de +10</a:t>
-            </a:r>
-            <a:r>
-              <a:rPr lang="fr-FR" sz="800" b="0" i="0" u="none" strike="noStrike" cap="none" spc="0">
-                <a:solidFill>
-                  <a:schemeClr val="tx1">
-                    <a:lumMod val="50000"/>
-                    <a:lumOff val="50000"/>
-                  </a:schemeClr>
-                </a:solidFill>
-                <a:latin typeface="Arial"/>
-                <a:ea typeface="Arial"/>
-                <a:cs typeface="Arial"/>
-              </a:rPr>
-              <a:t> à une compétence.</a:t>
-            </a:r>
-            <a:r>
-              <a:rPr lang="fr-FR" sz="800" b="0" i="0" u="none" strike="noStrike" cap="none" spc="0">
-                <a:solidFill>
-                  <a:schemeClr val="bg2">
-                    <a:lumMod val="90000"/>
-                  </a:schemeClr>
-                </a:solidFill>
-                <a:latin typeface="Arial"/>
-                <a:ea typeface="Arial"/>
-                <a:cs typeface="Arial"/>
-              </a:rPr>
-              <a:t> </a:t>
-            </a:r>
-            <a:r>
-              <a:rPr lang="fr-FR" sz="800" b="0" i="0" u="none" strike="noStrike" cap="none" spc="0">
-                <a:solidFill>
-                  <a:schemeClr val="tx1">
-                    <a:lumMod val="50000"/>
-                    <a:lumOff val="50000"/>
-                  </a:schemeClr>
-                </a:solidFill>
-                <a:latin typeface="Arial"/>
-                <a:ea typeface="Arial"/>
-                <a:cs typeface="Arial"/>
-              </a:rPr>
-              <a:t>Pour acquérir une nouvelle  spécialité, chaque spécialité possédée occupe 15% des chances d’obtention</a:t>
-            </a:r>
-            <a:r>
-              <a:rPr lang="fr-FR" sz="800">
-                <a:solidFill>
-                  <a:schemeClr val="tx1">
-                    <a:lumMod val="50000"/>
-                    <a:lumOff val="50000"/>
-                  </a:schemeClr>
-                </a:solidFill>
-              </a:rPr>
-              <a:t>.</a:t>
-            </a:r>
-            <a:endParaRPr sz="800">
-              <a:solidFill>
-                <a:schemeClr val="tx1">
-                  <a:lumMod val="50000"/>
-                  <a:lumOff val="50000"/>
-                </a:schemeClr>
-              </a:solidFill>
-            </a:endParaRPr>
-          </a:p>
-        </p:txBody>
-      </p:sp>
-      <p:sp>
-        <p:nvSpPr>
-          <p:cNvPr id="900174181" name="ZoneTexte 1440859034"/>
-          <p:cNvSpPr txBox="1"/>
-          <p:nvPr/>
-        </p:nvSpPr>
-        <p:spPr bwMode="auto">
-          <a:xfrm>
-            <a:off x="5710631" y="6695111"/>
-            <a:ext cx="894969" cy="305159"/>
-          </a:xfrm>
-          <a:prstGeom prst="rect">
-            <a:avLst/>
-          </a:prstGeom>
-          <a:noFill/>
-        </p:spPr>
-        <p:txBody>
-          <a:bodyPr vertOverflow="overflow" horzOverflow="overflow" vert="horz" wrap="none" lIns="91440" tIns="45720" rIns="91440" bIns="45720" numCol="1" spcCol="0" rtlCol="0" fromWordArt="0" anchor="t" anchorCtr="0" forceAA="0" compatLnSpc="0">
-            <a:spAutoFit/>
-          </a:bodyPr>
-          <a:lstStyle/>
-          <a:p>
-            <a:pPr marL="0" marR="0" indent="0" algn="l">
-              <a:lnSpc>
-                <a:spcPct val="100000"/>
-              </a:lnSpc>
-              <a:spcBef>
-                <a:spcPts val="0"/>
-              </a:spcBef>
-              <a:spcAft>
-                <a:spcPts val="0"/>
-              </a:spcAft>
-              <a:defRPr/>
-            </a:pPr>
-            <a:r>
-              <a:rPr lang="fr-FR" sz="1400" b="1" i="0" u="none" strike="noStrike" cap="none" spc="0">
-                <a:solidFill>
-                  <a:schemeClr val="bg1">
-                    <a:lumMod val="65000"/>
-                  </a:schemeClr>
-                </a:solidFill>
-                <a:latin typeface="Arial"/>
-                <a:ea typeface="Arial"/>
-                <a:cs typeface="Arial"/>
-              </a:rPr>
-              <a:t>STRESS</a:t>
-            </a:r>
-            <a:endParaRPr sz="1600"/>
-          </a:p>
-        </p:txBody>
-      </p:sp>
-      <p:cxnSp>
-        <p:nvCxnSpPr>
-          <p:cNvPr id="1510938914" name="Connecteur droit 858914340"/>
-          <p:cNvCxnSpPr/>
-          <p:nvPr/>
-        </p:nvCxnSpPr>
-        <p:spPr bwMode="auto">
-          <a:xfrm flipH="0" flipV="1">
-            <a:off x="-66689" y="6540795"/>
-            <a:ext cx="3068036" cy="0"/>
-          </a:xfrm>
-          <a:prstGeom prst="line">
-            <a:avLst/>
-          </a:prstGeom>
-          <a:ln w="76199" cap="flat" cmpd="sng" algn="ctr">
-            <a:solidFill>
-              <a:schemeClr val="bg1">
-                <a:lumMod val="74901"/>
-                <a:alpha val="99999"/>
-              </a:schemeClr>
-            </a:solidFill>
-            <a:prstDash val="solid"/>
-            <a:miter lim="800000"/>
-          </a:ln>
-        </p:spPr>
-        <p:style>
-          <a:lnRef idx="1">
-            <a:schemeClr val="accent1">
-              <a:shade val="50000"/>
-            </a:schemeClr>
-          </a:lnRef>
-          <a:fillRef idx="0">
-            <a:schemeClr val="accent1"/>
-          </a:fillRef>
-          <a:effectRef idx="0">
-            <a:schemeClr val="accent1"/>
-          </a:effectRef>
-          <a:fontRef idx="minor">
-            <a:schemeClr val="tx1"/>
-          </a:fontRef>
-        </p:style>
-      </p:cxnSp>
-      <p:sp>
-        <p:nvSpPr>
-          <p:cNvPr id="660126262" name="ZoneTexte 2018177722"/>
-          <p:cNvSpPr txBox="1"/>
-          <p:nvPr/>
-        </p:nvSpPr>
-        <p:spPr bwMode="auto">
-          <a:xfrm flipH="0" flipV="0">
-            <a:off x="32193" y="6357735"/>
-            <a:ext cx="1815876" cy="366118"/>
-          </a:xfrm>
-          <a:prstGeom prst="rect">
-            <a:avLst/>
-          </a:prstGeom>
-          <a:noFill/>
-        </p:spPr>
-        <p:txBody>
-          <a:bodyPr vertOverflow="overflow" horzOverflow="overflow" vert="horz" wrap="square" lIns="91440" tIns="45720" rIns="91440" bIns="45720" numCol="1" spcCol="0" rtlCol="0" fromWordArt="0" anchor="t" anchorCtr="0" forceAA="0" compatLnSpc="0">
-            <a:spAutoFit/>
-          </a:bodyPr>
-          <a:lstStyle/>
-          <a:p>
-            <a:pPr>
-              <a:defRPr/>
-            </a:pPr>
-            <a:r>
-              <a:rPr lang="fr-FR">
-                <a:solidFill>
-                  <a:schemeClr val="tx1">
-                    <a:lumMod val="75000"/>
-                    <a:lumOff val="25000"/>
-                  </a:schemeClr>
-                </a:solidFill>
-              </a:rPr>
-              <a:t>Équipement</a:t>
-            </a:r>
-            <a:endParaRPr sz="1800" b="0">
-              <a:solidFill>
-                <a:schemeClr val="tx1">
-                  <a:lumMod val="75000"/>
-                  <a:lumOff val="25000"/>
-                </a:schemeClr>
-              </a:solidFill>
-            </a:endParaRPr>
-          </a:p>
-        </p:txBody>
-      </p:sp>
-      <p:sp>
-        <p:nvSpPr>
-          <p:cNvPr id="1579775185" name=""/>
-          <p:cNvSpPr txBox="1"/>
-          <p:nvPr/>
-        </p:nvSpPr>
-        <p:spPr bwMode="auto">
-          <a:xfrm rot="0" flipH="0" flipV="0">
-            <a:off x="11160" y="6674322"/>
-            <a:ext cx="3007974" cy="3376019"/>
-          </a:xfrm>
-          <a:prstGeom prst="rect">
-            <a:avLst/>
-          </a:prstGeom>
-          <a:noFill/>
-        </p:spPr>
-        <p:txBody>
-          <a:bodyPr vertOverflow="overflow" horzOverflow="overflow" vert="horz" wrap="square" lIns="91440" tIns="45720" rIns="91440" bIns="45720" numCol="1" spcCol="0" rtlCol="0" fromWordArt="0" anchor="t" anchorCtr="0" forceAA="0" upright="0" compatLnSpc="0">
-            <a:spAutoFit/>
-          </a:bodyPr>
-          <a:p>
-            <a:pPr algn="l">
-              <a:lnSpc>
-                <a:spcPct val="150000"/>
-              </a:lnSpc>
-              <a:defRPr/>
-            </a:pPr>
-            <a:r>
-              <a:rPr lang="fr-FR" sz="1200" b="0" i="0" u="none" strike="noStrike" cap="none" spc="0">
-                <a:solidFill>
-                  <a:schemeClr val="bg2">
-                    <a:lumMod val="90000"/>
-                  </a:schemeClr>
-                </a:solidFill>
-                <a:latin typeface="Arial"/>
-                <a:ea typeface="Arial"/>
-                <a:cs typeface="Arial"/>
-              </a:rPr>
-              <a:t>_____________________________________________________________</a:t>
-            </a:r>
-            <a:r>
-              <a:rPr lang="fr-FR" sz="1200" b="0" i="0" u="none" strike="noStrike" cap="none" spc="0">
-                <a:solidFill>
-                  <a:schemeClr val="bg2">
-                    <a:lumMod val="90000"/>
-                  </a:schemeClr>
-                </a:solidFill>
-                <a:latin typeface="Arial"/>
-                <a:ea typeface="Arial"/>
-                <a:cs typeface="Arial"/>
-              </a:rPr>
-              <a:t>______________________________________________________________________________________________________________________________________________________________________________________________________________________________________________________________________________________________________________</a:t>
-            </a:r>
-            <a:endParaRPr lang="fr-FR" sz="1200" b="0" i="0" u="none" strike="noStrike" cap="none" spc="0">
-              <a:solidFill>
-                <a:schemeClr val="bg2">
-                  <a:lumMod val="90000"/>
-                </a:schemeClr>
-              </a:solidFill>
-              <a:latin typeface="Arial"/>
-              <a:ea typeface="Arial"/>
-              <a:cs typeface="Arial"/>
-            </a:endParaRPr>
-          </a:p>
-          <a:p>
-            <a:pPr>
-              <a:lnSpc>
-                <a:spcPct val="100000"/>
-              </a:lnSpc>
-              <a:defRPr/>
-            </a:pPr>
-            <a:endParaRPr sz="400" b="0" i="0" u="none" strike="noStrike" cap="none" spc="0">
-              <a:solidFill>
-                <a:schemeClr val="tx1">
-                  <a:lumMod val="50000"/>
-                  <a:lumOff val="50000"/>
-                </a:schemeClr>
-              </a:solidFill>
-              <a:latin typeface="Arial"/>
-              <a:ea typeface="Arial"/>
-              <a:cs typeface="Arial"/>
-            </a:endParaRPr>
-          </a:p>
-          <a:p>
-            <a:pPr algn="l">
-              <a:lnSpc>
-                <a:spcPct val="150000"/>
-              </a:lnSpc>
-              <a:defRPr/>
-            </a:pPr>
-            <a:endParaRPr lang="fr-FR" sz="900" b="0" i="0" u="none" strike="noStrike" cap="none" spc="0">
-              <a:solidFill>
-                <a:schemeClr val="bg2">
-                  <a:lumMod val="90000"/>
-                </a:schemeClr>
-              </a:solidFill>
-              <a:latin typeface="Times New Roman"/>
-              <a:cs typeface="Times New Roman"/>
-            </a:endParaRPr>
-          </a:p>
-        </p:txBody>
-      </p:sp>
-      <p:cxnSp>
-        <p:nvCxnSpPr>
-          <p:cNvPr id="323845804" name="Connecteur droit 858914340"/>
-          <p:cNvCxnSpPr/>
-          <p:nvPr/>
-        </p:nvCxnSpPr>
-        <p:spPr bwMode="auto">
-          <a:xfrm flipH="0" flipV="1">
-            <a:off x="4547592" y="4940257"/>
-            <a:ext cx="2320902" cy="0"/>
-          </a:xfrm>
-          <a:prstGeom prst="line">
-            <a:avLst/>
-          </a:prstGeom>
-          <a:ln w="76199" cap="flat" cmpd="sng" algn="ctr">
-            <a:solidFill>
-              <a:schemeClr val="bg1">
-                <a:lumMod val="74901"/>
-                <a:alpha val="99999"/>
-              </a:schemeClr>
-            </a:solidFill>
-            <a:prstDash val="solid"/>
-            <a:miter lim="800000"/>
-          </a:ln>
-        </p:spPr>
-        <p:style>
-          <a:lnRef idx="1">
-            <a:schemeClr val="accent1">
-              <a:shade val="50000"/>
-            </a:schemeClr>
-          </a:lnRef>
-          <a:fillRef idx="0">
-            <a:schemeClr val="accent1"/>
-          </a:fillRef>
-          <a:effectRef idx="0">
-            <a:schemeClr val="accent1"/>
-          </a:effectRef>
-          <a:fontRef idx="minor">
-            <a:schemeClr val="tx1"/>
-          </a:fontRef>
-        </p:style>
-      </p:cxnSp>
-      <p:sp>
-        <p:nvSpPr>
-          <p:cNvPr id="277397206" name="ZoneTexte 2018177722"/>
-          <p:cNvSpPr txBox="1"/>
-          <p:nvPr/>
-        </p:nvSpPr>
-        <p:spPr bwMode="auto">
-          <a:xfrm flipH="0" flipV="0">
-            <a:off x="4601547" y="4757193"/>
-            <a:ext cx="1831714" cy="366119"/>
-          </a:xfrm>
-          <a:prstGeom prst="rect">
-            <a:avLst/>
-          </a:prstGeom>
-          <a:noFill/>
-        </p:spPr>
-        <p:txBody>
-          <a:bodyPr vertOverflow="overflow" horzOverflow="overflow" vert="horz" wrap="square" lIns="91440" tIns="45720" rIns="91440" bIns="45720" numCol="1" spcCol="0" rtlCol="0" fromWordArt="0" anchor="t" anchorCtr="0" forceAA="0" compatLnSpc="0">
-            <a:spAutoFit/>
-          </a:bodyPr>
-          <a:lstStyle/>
-          <a:p>
-            <a:pPr>
-              <a:defRPr/>
-            </a:pPr>
-            <a:r>
-              <a:rPr lang="fr-FR">
-                <a:solidFill>
-                  <a:schemeClr val="tx1">
-                    <a:lumMod val="75000"/>
-                    <a:lumOff val="25000"/>
-                  </a:schemeClr>
-                </a:solidFill>
-              </a:rPr>
-              <a:t>Tests</a:t>
-            </a:r>
-            <a:r>
-              <a:rPr sz="1800" b="0">
-                <a:solidFill>
-                  <a:schemeClr val="tx1">
-                    <a:lumMod val="75000"/>
-                    <a:lumOff val="25000"/>
-                  </a:schemeClr>
-                </a:solidFill>
-              </a:rPr>
-              <a:t> &amp; d100</a:t>
-            </a:r>
-            <a:endParaRPr sz="1800" b="0">
-              <a:solidFill>
-                <a:schemeClr val="tx1">
-                  <a:lumMod val="75000"/>
-                  <a:lumOff val="25000"/>
-                </a:schemeClr>
-              </a:solidFill>
-            </a:endParaRPr>
-          </a:p>
-        </p:txBody>
-      </p:sp>
-      <p:sp>
-        <p:nvSpPr>
-          <p:cNvPr id="1071139541" name=""/>
-          <p:cNvSpPr txBox="1"/>
-          <p:nvPr/>
-        </p:nvSpPr>
-        <p:spPr bwMode="auto">
-          <a:xfrm rot="0" flipH="0" flipV="0">
-            <a:off x="4547592" y="5033170"/>
-            <a:ext cx="2343979" cy="1539599"/>
-          </a:xfrm>
-          <a:prstGeom prst="rect">
-            <a:avLst/>
-          </a:prstGeom>
-          <a:noFill/>
-        </p:spPr>
-        <p:txBody>
-          <a:bodyPr vertOverflow="overflow" horzOverflow="overflow" vert="horz" wrap="square" lIns="91440" tIns="45720" rIns="91440" bIns="45720" numCol="1" spcCol="0" rtlCol="0" fromWordArt="0" anchor="t" anchorCtr="0" forceAA="0" upright="0" compatLnSpc="0">
-            <a:spAutoFit/>
-          </a:bodyPr>
-          <a:p>
-            <a:pPr marL="0" marR="0" indent="0" algn="l">
-              <a:lnSpc>
-                <a:spcPct val="100000"/>
-              </a:lnSpc>
-              <a:spcBef>
-                <a:spcPts val="0"/>
-              </a:spcBef>
-              <a:spcAft>
-                <a:spcPts val="0"/>
-              </a:spcAft>
-              <a:defRPr/>
-            </a:pPr>
-            <a:r>
-              <a:rPr lang="fr-FR" sz="800" b="0" i="0" u="none" strike="noStrike" cap="none" spc="0">
-                <a:solidFill>
-                  <a:schemeClr val="tx1">
-                    <a:lumMod val="50000"/>
-                    <a:lumOff val="50000"/>
-                  </a:schemeClr>
-                </a:solidFill>
-                <a:latin typeface="Arial"/>
-                <a:ea typeface="Arial"/>
-                <a:cs typeface="Arial"/>
-              </a:rPr>
-              <a:t>Vous réussissez un </a:t>
-            </a:r>
-            <a:r>
-              <a:rPr lang="fr-FR" sz="800" b="1" i="0" u="none" strike="noStrike" cap="none" spc="0">
-                <a:solidFill>
-                  <a:schemeClr val="tx1">
-                    <a:lumMod val="50000"/>
-                    <a:lumOff val="50000"/>
-                  </a:schemeClr>
-                </a:solidFill>
-                <a:latin typeface="Arial"/>
-                <a:ea typeface="Arial"/>
-                <a:cs typeface="Arial"/>
-              </a:rPr>
-              <a:t>test</a:t>
-            </a:r>
-            <a:r>
-              <a:rPr lang="fr-FR" sz="800" b="0" i="0" u="none" strike="noStrike" cap="none" spc="0">
-                <a:solidFill>
-                  <a:schemeClr val="tx1">
-                    <a:lumMod val="50000"/>
-                    <a:lumOff val="50000"/>
-                  </a:schemeClr>
-                </a:solidFill>
-                <a:latin typeface="Arial"/>
-                <a:ea typeface="Arial"/>
-                <a:cs typeface="Arial"/>
-              </a:rPr>
-              <a:t> sur un résultat</a:t>
-            </a:r>
-            <a:r>
-              <a:rPr lang="fr-FR" sz="800" b="1" i="0" u="none" strike="noStrike" cap="none" spc="0">
-                <a:solidFill>
-                  <a:schemeClr val="tx1">
-                    <a:lumMod val="50000"/>
-                    <a:lumOff val="50000"/>
-                  </a:schemeClr>
-                </a:solidFill>
-                <a:latin typeface="Arial"/>
-                <a:ea typeface="Arial"/>
-                <a:cs typeface="Arial"/>
-              </a:rPr>
-              <a:t> inférieur ou égal</a:t>
-            </a:r>
-            <a:r>
-              <a:rPr lang="fr-FR" sz="800" b="0" i="0" u="none" strike="noStrike" cap="none" spc="0">
-                <a:solidFill>
-                  <a:schemeClr val="tx1">
-                    <a:lumMod val="50000"/>
-                    <a:lumOff val="50000"/>
-                  </a:schemeClr>
-                </a:solidFill>
-                <a:latin typeface="Arial"/>
-                <a:ea typeface="Arial"/>
-                <a:cs typeface="Arial"/>
-              </a:rPr>
-              <a:t> à la valeur de compétence ou de résistance avec 1d100. </a:t>
-            </a:r>
-            <a:r>
-              <a:rPr lang="fr-FR" sz="800" b="1" i="0" u="none" strike="noStrike" cap="none" spc="0">
-                <a:solidFill>
-                  <a:schemeClr val="tx1">
-                    <a:lumMod val="50000"/>
-                    <a:lumOff val="50000"/>
-                  </a:schemeClr>
-                </a:solidFill>
-                <a:latin typeface="Arial"/>
-                <a:ea typeface="Arial"/>
-                <a:cs typeface="Arial"/>
-              </a:rPr>
-              <a:t>1</a:t>
-            </a:r>
-            <a:r>
-              <a:rPr lang="fr-FR" sz="800" b="0" i="0" u="none" strike="noStrike" cap="none" spc="0">
-                <a:solidFill>
-                  <a:schemeClr val="tx1">
-                    <a:lumMod val="50000"/>
-                    <a:lumOff val="50000"/>
-                  </a:schemeClr>
-                </a:solidFill>
-                <a:latin typeface="Arial"/>
-                <a:ea typeface="Arial"/>
-                <a:cs typeface="Arial"/>
-              </a:rPr>
-              <a:t> est toujours une réussite, </a:t>
-            </a:r>
-            <a:r>
-              <a:rPr lang="fr-FR" sz="800" b="1" i="0" u="none" strike="noStrike" cap="none" spc="0">
-                <a:solidFill>
-                  <a:schemeClr val="tx1">
-                    <a:lumMod val="50000"/>
-                    <a:lumOff val="50000"/>
-                  </a:schemeClr>
-                </a:solidFill>
-                <a:latin typeface="Arial"/>
-                <a:ea typeface="Arial"/>
-                <a:cs typeface="Arial"/>
-              </a:rPr>
-              <a:t>100</a:t>
-            </a:r>
-            <a:r>
-              <a:rPr lang="fr-FR" sz="800" b="0" i="0" u="none" strike="noStrike" cap="none" spc="0">
-                <a:solidFill>
-                  <a:schemeClr val="tx1">
-                    <a:lumMod val="50000"/>
-                    <a:lumOff val="50000"/>
-                  </a:schemeClr>
-                </a:solidFill>
-                <a:latin typeface="Arial"/>
-                <a:ea typeface="Arial"/>
-                <a:cs typeface="Arial"/>
-              </a:rPr>
-              <a:t> toujours un échec.</a:t>
-            </a:r>
-            <a:r>
-              <a:rPr lang="fr-FR" sz="800" b="0" i="0" u="none" strike="noStrike" cap="none" spc="0">
-                <a:solidFill>
-                  <a:schemeClr val="tx1">
-                    <a:lumMod val="50000"/>
-                    <a:lumOff val="50000"/>
-                  </a:schemeClr>
-                </a:solidFill>
-                <a:latin typeface="Arial"/>
-                <a:ea typeface="Arial"/>
-                <a:cs typeface="Arial"/>
-              </a:rPr>
-              <a:t> </a:t>
-            </a:r>
-            <a:r>
-              <a:rPr lang="fr-FR" sz="800" b="0" i="0" u="none" strike="noStrike" cap="none" spc="0">
-                <a:solidFill>
-                  <a:schemeClr val="tx1">
-                    <a:lumMod val="50000"/>
-                    <a:lumOff val="50000"/>
-                  </a:schemeClr>
-                </a:solidFill>
-                <a:latin typeface="Arial"/>
-                <a:ea typeface="Arial"/>
-                <a:cs typeface="Arial"/>
-              </a:rPr>
-              <a:t>Un </a:t>
-            </a:r>
-            <a:r>
-              <a:rPr lang="fr-FR" sz="800" b="1" i="0" u="none" strike="noStrike" cap="none" spc="0">
-                <a:solidFill>
-                  <a:schemeClr val="tx1">
-                    <a:lumMod val="50000"/>
-                    <a:lumOff val="50000"/>
-                  </a:schemeClr>
-                </a:solidFill>
-                <a:latin typeface="Arial"/>
-                <a:ea typeface="Arial"/>
-                <a:cs typeface="Arial"/>
-              </a:rPr>
-              <a:t>double</a:t>
-            </a:r>
-            <a:r>
-              <a:rPr lang="fr-FR" sz="800" b="0" i="0" u="none" strike="noStrike" cap="none" spc="0">
-                <a:solidFill>
-                  <a:schemeClr val="tx1">
-                    <a:lumMod val="50000"/>
-                    <a:lumOff val="50000"/>
-                  </a:schemeClr>
-                </a:solidFill>
-                <a:latin typeface="Arial"/>
-                <a:ea typeface="Arial"/>
-                <a:cs typeface="Arial"/>
-              </a:rPr>
-              <a:t> naturel est un </a:t>
-            </a:r>
-            <a:r>
-              <a:rPr lang="fr-FR" sz="800" b="1" i="0" u="none" strike="noStrike" cap="none" spc="0">
-                <a:solidFill>
-                  <a:schemeClr val="tx1">
-                    <a:lumMod val="50000"/>
-                    <a:lumOff val="50000"/>
-                  </a:schemeClr>
-                </a:solidFill>
-                <a:latin typeface="Arial"/>
-                <a:ea typeface="Arial"/>
-                <a:cs typeface="Arial"/>
-              </a:rPr>
-              <a:t>résultat critique</a:t>
-            </a:r>
-            <a:r>
-              <a:rPr lang="fr-FR" sz="800" b="0" i="0" u="none" strike="noStrike" cap="none" spc="0">
-                <a:solidFill>
-                  <a:schemeClr val="tx1">
-                    <a:lumMod val="50000"/>
-                    <a:lumOff val="50000"/>
-                  </a:schemeClr>
-                </a:solidFill>
-                <a:latin typeface="Arial"/>
-                <a:ea typeface="Arial"/>
-                <a:cs typeface="Arial"/>
-              </a:rPr>
-              <a:t>. </a:t>
-            </a:r>
-            <a:br>
-              <a:rPr lang="fr-FR" sz="800" b="0" i="0" u="none" strike="noStrike" cap="none" spc="0">
-                <a:solidFill>
-                  <a:schemeClr val="tx1">
-                    <a:lumMod val="50000"/>
-                    <a:lumOff val="50000"/>
-                  </a:schemeClr>
-                </a:solidFill>
-                <a:latin typeface="Arial"/>
-                <a:ea typeface="Arial"/>
-                <a:cs typeface="Arial"/>
-              </a:rPr>
-            </a:br>
-            <a:endParaRPr lang="fr-FR" sz="300" b="0" i="0" u="none" strike="noStrike" cap="none" spc="0">
-              <a:solidFill>
-                <a:schemeClr val="tx1">
-                  <a:lumMod val="50000"/>
-                  <a:lumOff val="50000"/>
-                </a:schemeClr>
-              </a:solidFill>
-              <a:latin typeface="Arial"/>
-              <a:ea typeface="Arial"/>
-              <a:cs typeface="Arial"/>
-            </a:endParaRPr>
-          </a:p>
-          <a:p>
-            <a:pPr marL="0" marR="0" indent="0" algn="l">
-              <a:lnSpc>
-                <a:spcPct val="100000"/>
-              </a:lnSpc>
-              <a:spcBef>
-                <a:spcPts val="0"/>
-              </a:spcBef>
-              <a:spcAft>
-                <a:spcPts val="0"/>
-              </a:spcAft>
-              <a:defRPr/>
-            </a:pPr>
-            <a:endParaRPr sz="200" b="0" i="0" u="none" strike="noStrike" cap="none" spc="0">
-              <a:solidFill>
-                <a:schemeClr val="tx1"/>
-              </a:solidFill>
-              <a:latin typeface="Times New Roman"/>
-              <a:cs typeface="Times New Roman"/>
-            </a:endParaRPr>
-          </a:p>
-          <a:p>
-            <a:pPr marL="0" marR="0" indent="0" algn="l">
-              <a:lnSpc>
-                <a:spcPct val="100000"/>
-              </a:lnSpc>
-              <a:spcBef>
-                <a:spcPts val="0"/>
-              </a:spcBef>
-              <a:spcAft>
-                <a:spcPts val="0"/>
-              </a:spcAft>
-              <a:defRPr/>
-            </a:pPr>
-            <a:r>
-              <a:rPr lang="fr-FR" sz="800" b="0" i="0" u="none" strike="noStrike" cap="none" spc="0">
-                <a:solidFill>
-                  <a:schemeClr val="tx1">
-                    <a:lumMod val="50000"/>
-                    <a:lumOff val="50000"/>
-                  </a:schemeClr>
-                </a:solidFill>
-                <a:latin typeface="Arial"/>
-                <a:ea typeface="Arial"/>
-                <a:cs typeface="Arial"/>
-              </a:rPr>
-              <a:t>En cas de </a:t>
-            </a:r>
-            <a:r>
-              <a:rPr lang="fr-FR" sz="800" b="1" i="0" u="none" strike="noStrike" cap="none" spc="0">
-                <a:solidFill>
-                  <a:schemeClr val="tx1">
-                    <a:lumMod val="50000"/>
-                    <a:lumOff val="50000"/>
-                  </a:schemeClr>
-                </a:solidFill>
-                <a:latin typeface="Arial"/>
-                <a:ea typeface="Arial"/>
-                <a:cs typeface="Arial"/>
-              </a:rPr>
-              <a:t>test opposé</a:t>
-            </a:r>
-            <a:r>
-              <a:rPr lang="fr-FR" sz="800" b="0" i="0" u="none" strike="noStrike" cap="none" spc="0">
-                <a:solidFill>
-                  <a:schemeClr val="tx1">
-                    <a:lumMod val="50000"/>
-                    <a:lumOff val="50000"/>
-                  </a:schemeClr>
-                </a:solidFill>
-                <a:latin typeface="Arial"/>
-                <a:ea typeface="Arial"/>
-                <a:cs typeface="Arial"/>
-              </a:rPr>
-              <a:t>, celui qui réussi le test et qui obtient le plus haut score au dé est vainqueur.</a:t>
-            </a:r>
-            <a:br>
-              <a:rPr lang="fr-FR" sz="800" b="0" i="0" u="none" strike="noStrike" cap="none" spc="0">
-                <a:solidFill>
-                  <a:schemeClr val="tx1">
-                    <a:lumMod val="50000"/>
-                    <a:lumOff val="50000"/>
-                  </a:schemeClr>
-                </a:solidFill>
-                <a:latin typeface="Arial"/>
-                <a:ea typeface="Arial"/>
-                <a:cs typeface="Arial"/>
-              </a:rPr>
-            </a:br>
-            <a:br>
-              <a:rPr lang="fr-FR" sz="200" b="0" i="0" u="none" strike="noStrike" cap="none" spc="0">
-                <a:solidFill>
-                  <a:schemeClr val="tx1">
-                    <a:lumMod val="50000"/>
-                    <a:lumOff val="50000"/>
-                  </a:schemeClr>
-                </a:solidFill>
-                <a:latin typeface="Arial"/>
-                <a:ea typeface="Arial"/>
-                <a:cs typeface="Arial"/>
-              </a:rPr>
-            </a:br>
-            <a:r>
-              <a:rPr lang="fr-FR" sz="800" b="0" i="0" u="none" strike="noStrike" cap="none" spc="0">
-                <a:solidFill>
-                  <a:schemeClr val="tx1">
-                    <a:lumMod val="50000"/>
-                    <a:lumOff val="50000"/>
-                  </a:schemeClr>
-                </a:solidFill>
-                <a:latin typeface="Arial"/>
-                <a:ea typeface="Arial"/>
-                <a:cs typeface="Arial"/>
-              </a:rPr>
-              <a:t>Chaque case de </a:t>
-            </a:r>
-            <a:r>
-              <a:rPr lang="fr-FR" sz="800" b="1" i="0" u="none" strike="noStrike" cap="none" spc="0">
-                <a:solidFill>
-                  <a:schemeClr val="tx1">
-                    <a:lumMod val="50000"/>
-                    <a:lumOff val="50000"/>
-                  </a:schemeClr>
-                </a:solidFill>
-                <a:latin typeface="Arial"/>
-                <a:ea typeface="Arial"/>
-                <a:cs typeface="Arial"/>
-              </a:rPr>
-              <a:t>trauma </a:t>
-            </a:r>
-            <a:r>
-              <a:rPr lang="fr-FR" sz="800" b="0" i="0" u="none" strike="noStrike" cap="none" spc="0">
-                <a:solidFill>
-                  <a:schemeClr val="tx1">
-                    <a:lumMod val="50000"/>
-                    <a:lumOff val="50000"/>
-                  </a:schemeClr>
-                </a:solidFill>
-                <a:latin typeface="Arial"/>
-                <a:ea typeface="Arial"/>
-                <a:cs typeface="Arial"/>
-              </a:rPr>
-              <a:t>cochée impose un malus de compétences de 10 points.</a:t>
-            </a:r>
-            <a:endParaRPr lang="fr-FR" sz="800" b="0" i="0" u="none" strike="noStrike" cap="none" spc="0">
-              <a:solidFill>
-                <a:schemeClr val="tx1">
-                  <a:lumMod val="50000"/>
-                  <a:lumOff val="50000"/>
-                </a:schemeClr>
-              </a:solidFill>
-              <a:latin typeface="Arial"/>
-              <a:ea typeface="Arial"/>
-              <a:cs typeface="Arial"/>
-            </a:endParaRPr>
-          </a:p>
-          <a:p>
-            <a:pPr marL="0" marR="0" indent="0" algn="l">
-              <a:lnSpc>
-                <a:spcPct val="100000"/>
-              </a:lnSpc>
-              <a:spcBef>
-                <a:spcPts val="0"/>
-              </a:spcBef>
-              <a:spcAft>
-                <a:spcPts val="0"/>
-              </a:spcAft>
-              <a:defRPr/>
-            </a:pPr>
-            <a:endParaRPr lang="fr-FR" sz="800" b="0" i="0" u="none" strike="noStrike" cap="none" spc="0">
-              <a:solidFill>
-                <a:schemeClr val="tx1">
-                  <a:lumMod val="50000"/>
-                  <a:lumOff val="50000"/>
-                </a:schemeClr>
-              </a:solidFill>
-              <a:latin typeface="Arial"/>
-              <a:ea typeface="Arial"/>
-              <a:cs typeface="Arial"/>
-            </a:endParaRPr>
-          </a:p>
-        </p:txBody>
-      </p:sp>
-      <p:sp>
-        <p:nvSpPr>
-          <p:cNvPr id="1409849097" name="ZoneTexte 2021443538"/>
-          <p:cNvSpPr txBox="1"/>
-          <p:nvPr/>
-        </p:nvSpPr>
-        <p:spPr bwMode="auto">
-          <a:xfrm flipH="0" flipV="0">
-            <a:off x="75828" y="5533803"/>
-            <a:ext cx="1702735" cy="643788"/>
-          </a:xfrm>
-          <a:prstGeom prst="rect">
-            <a:avLst/>
-          </a:prstGeom>
-          <a:noFill/>
-        </p:spPr>
-        <p:txBody>
-          <a:bodyPr vertOverflow="overflow" horzOverflow="overflow" vert="horz" wrap="square" lIns="91440" tIns="45720" rIns="91440" bIns="45720" numCol="1" spcCol="0" rtlCol="0" fromWordArt="0" anchor="t" anchorCtr="0" forceAA="0" compatLnSpc="0">
-            <a:spAutoFit/>
-          </a:bodyPr>
-          <a:lstStyle/>
-          <a:p>
-            <a:pPr marL="0" marR="0" lvl="0" indent="0" algn="r" defTabSz="914400" rtl="0">
-              <a:lnSpc>
-                <a:spcPct val="100000"/>
-              </a:lnSpc>
-              <a:spcBef>
-                <a:spcPts val="0"/>
-              </a:spcBef>
-              <a:spcAft>
-                <a:spcPts val="0"/>
-              </a:spcAft>
-              <a:defRPr lang="fr-FR" sz="1800" b="0" i="0" u="none" strike="noStrike" cap="none" spc="0">
-                <a:solidFill>
-                  <a:srgbClr val="000000"/>
-                </a:solidFill>
-                <a:latin typeface="Arial"/>
-                <a:ea typeface="Arial"/>
-                <a:cs typeface="Arial"/>
-              </a:defRPr>
-            </a:pPr>
-            <a:r>
-              <a:rPr lang="fr-FR" sz="1200" b="0" i="0" u="none" strike="noStrike" cap="none" spc="0">
-                <a:solidFill>
-                  <a:srgbClr val="000000"/>
-                </a:solidFill>
-                <a:latin typeface="Arial"/>
-                <a:ea typeface="Arial"/>
-                <a:cs typeface="Arial"/>
-              </a:rPr>
-              <a:t>Médecine </a:t>
-            </a:r>
-            <a:r>
-              <a:rPr lang="fr-FR" sz="1200" b="0" i="0" u="none" strike="noStrike" cap="none" spc="0">
-                <a:solidFill>
-                  <a:srgbClr val="808080"/>
-                </a:solidFill>
-                <a:latin typeface="Arial"/>
-                <a:ea typeface="Arial"/>
-                <a:cs typeface="Arial"/>
-              </a:rPr>
-              <a:t>◇</a:t>
-            </a:r>
-            <a:endParaRPr sz="1600"/>
-          </a:p>
-          <a:p>
-            <a:pPr algn="r">
-              <a:defRPr/>
-            </a:pPr>
-            <a:r>
-              <a:rPr lang="fr-FR" sz="800" b="0" i="0" u="none" strike="noStrike" cap="none" spc="0">
-                <a:solidFill>
-                  <a:srgbClr val="808080"/>
-                </a:solidFill>
-                <a:latin typeface="Arial"/>
-                <a:ea typeface="Arial"/>
-                <a:cs typeface="Arial"/>
-              </a:rPr>
-              <a:t>Effectuer des premiers soins, sauver des vies, avoir des connaissances médicales.</a:t>
-            </a:r>
-            <a:endParaRPr/>
-          </a:p>
-        </p:txBody>
-      </p:sp>
-      <p:sp>
-        <p:nvSpPr>
-          <p:cNvPr id="1010453911" name="ZoneTexte 1075280509"/>
-          <p:cNvSpPr txBox="1"/>
-          <p:nvPr/>
-        </p:nvSpPr>
-        <p:spPr bwMode="auto">
-          <a:xfrm flipH="0" flipV="0">
-            <a:off x="44272" y="3612484"/>
-            <a:ext cx="1746473" cy="643788"/>
-          </a:xfrm>
-          <a:prstGeom prst="rect">
-            <a:avLst/>
-          </a:prstGeom>
-          <a:noFill/>
-        </p:spPr>
-        <p:txBody>
-          <a:bodyPr vertOverflow="overflow" horzOverflow="overflow" vert="horz" wrap="square" lIns="91440" tIns="45720" rIns="91440" bIns="45720" numCol="1" spcCol="0" rtlCol="0" fromWordArt="0" anchor="t" anchorCtr="0" forceAA="0" compatLnSpc="0">
-            <a:spAutoFit/>
-          </a:bodyPr>
-          <a:lstStyle/>
-          <a:p>
-            <a:pPr marL="0" marR="0" lvl="0" indent="0" algn="r" defTabSz="914400" rtl="0">
-              <a:lnSpc>
-                <a:spcPct val="100000"/>
-              </a:lnSpc>
-              <a:spcBef>
-                <a:spcPts val="0"/>
-              </a:spcBef>
-              <a:spcAft>
-                <a:spcPts val="0"/>
-              </a:spcAft>
-              <a:defRPr lang="fr-FR" sz="1800" b="0" i="0" u="none" strike="noStrike" cap="none" spc="0">
-                <a:solidFill>
-                  <a:srgbClr val="000000"/>
-                </a:solidFill>
-                <a:latin typeface="Arial"/>
-                <a:ea typeface="Arial"/>
-                <a:cs typeface="Arial"/>
-              </a:defRPr>
-            </a:pPr>
-            <a:r>
-              <a:rPr lang="fr-FR" sz="1200" b="0" i="0" u="none" strike="noStrike" cap="none" spc="0">
-                <a:solidFill>
-                  <a:srgbClr val="000000"/>
-                </a:solidFill>
-                <a:latin typeface="Arial"/>
-                <a:ea typeface="Arial"/>
-                <a:cs typeface="Arial"/>
-              </a:rPr>
-              <a:t>Bagou </a:t>
-            </a:r>
-            <a:r>
-              <a:rPr lang="fr-FR" sz="1200" b="0" i="0" u="none" strike="noStrike" cap="none" spc="0">
-                <a:solidFill>
-                  <a:srgbClr val="808080"/>
-                </a:solidFill>
-                <a:latin typeface="Arial"/>
-                <a:ea typeface="Arial"/>
-                <a:cs typeface="Arial"/>
-              </a:rPr>
-              <a:t>◇</a:t>
-            </a:r>
-            <a:endParaRPr sz="1600"/>
-          </a:p>
-          <a:p>
-            <a:pPr algn="r">
-              <a:defRPr/>
-            </a:pPr>
-            <a:r>
-              <a:rPr lang="fr-FR" sz="800" b="0" i="0" u="none" strike="noStrike" cap="none" spc="0">
-                <a:solidFill>
-                  <a:srgbClr val="808080"/>
-                </a:solidFill>
-                <a:latin typeface="Arial"/>
-                <a:ea typeface="Arial"/>
-                <a:cs typeface="Arial"/>
-              </a:rPr>
-              <a:t>Être à l’aise en société, savoir parler en public, envoyer des piques et se faire des amis.</a:t>
-            </a:r>
-            <a:endParaRPr/>
-          </a:p>
-        </p:txBody>
-      </p:sp>
-      <p:sp>
-        <p:nvSpPr>
-          <p:cNvPr id="817834899" name="ZoneTexte 824413856"/>
-          <p:cNvSpPr txBox="1"/>
-          <p:nvPr/>
-        </p:nvSpPr>
-        <p:spPr bwMode="auto">
-          <a:xfrm>
-            <a:off x="40730" y="4254490"/>
-            <a:ext cx="1737113" cy="643788"/>
-          </a:xfrm>
-          <a:prstGeom prst="rect">
-            <a:avLst/>
-          </a:prstGeom>
-          <a:noFill/>
-        </p:spPr>
-        <p:txBody>
-          <a:bodyPr vertOverflow="overflow" horzOverflow="overflow" vert="horz" wrap="square" lIns="91440" tIns="45720" rIns="91440" bIns="45720" numCol="1" spcCol="0" rtlCol="0" fromWordArt="0" anchor="t" anchorCtr="0" forceAA="0" compatLnSpc="0">
-            <a:spAutoFit/>
-          </a:bodyPr>
-          <a:lstStyle/>
-          <a:p>
-            <a:pPr marL="0" marR="0" lvl="0" indent="0" algn="r" defTabSz="914400" rtl="0">
-              <a:lnSpc>
-                <a:spcPct val="100000"/>
-              </a:lnSpc>
-              <a:spcBef>
-                <a:spcPts val="0"/>
-              </a:spcBef>
-              <a:spcAft>
-                <a:spcPts val="0"/>
-              </a:spcAft>
-              <a:defRPr lang="fr-FR" sz="1800" b="0" i="0" u="none" strike="noStrike" cap="none" spc="0">
-                <a:solidFill>
-                  <a:srgbClr val="000000"/>
-                </a:solidFill>
-                <a:latin typeface="Arial"/>
-                <a:ea typeface="Arial"/>
-                <a:cs typeface="Arial"/>
-              </a:defRPr>
-            </a:pPr>
-            <a:r>
-              <a:rPr lang="fr-FR" sz="1200" b="0" i="0" u="none" strike="noStrike" cap="none" spc="0">
-                <a:solidFill>
-                  <a:srgbClr val="000000"/>
-                </a:solidFill>
-                <a:latin typeface="Arial"/>
-                <a:ea typeface="Arial"/>
-                <a:cs typeface="Arial"/>
-              </a:rPr>
-              <a:t>Combat </a:t>
-            </a:r>
-            <a:r>
-              <a:rPr lang="fr-FR" sz="1200" b="0" i="0" u="none" strike="noStrike" cap="none" spc="0">
-                <a:solidFill>
-                  <a:srgbClr val="808080"/>
-                </a:solidFill>
-                <a:latin typeface="Arial"/>
-                <a:ea typeface="Arial"/>
-                <a:cs typeface="Arial"/>
-              </a:rPr>
-              <a:t>◇</a:t>
-            </a:r>
-            <a:endParaRPr sz="1600"/>
-          </a:p>
-          <a:p>
-            <a:pPr algn="r">
-              <a:defRPr/>
-            </a:pPr>
-            <a:r>
-              <a:rPr lang="fr-FR" sz="800" b="0" i="0" u="none" strike="noStrike" cap="none" spc="0">
-                <a:solidFill>
-                  <a:srgbClr val="808080"/>
-                </a:solidFill>
-                <a:latin typeface="Arial"/>
-                <a:ea typeface="Arial"/>
-                <a:cs typeface="Arial"/>
-              </a:rPr>
-              <a:t>Attaquer ou se défendre physiquement, avec ou sans armes.</a:t>
-            </a:r>
-            <a:endParaRPr/>
-          </a:p>
-        </p:txBody>
-      </p:sp>
-      <p:sp>
-        <p:nvSpPr>
-          <p:cNvPr id="847148624" name="ZoneTexte 1036656844"/>
-          <p:cNvSpPr txBox="1"/>
-          <p:nvPr/>
-        </p:nvSpPr>
-        <p:spPr bwMode="auto">
-          <a:xfrm flipH="0" flipV="0">
-            <a:off x="2359941" y="3617505"/>
-            <a:ext cx="1695711" cy="643788"/>
-          </a:xfrm>
-          <a:prstGeom prst="rect">
-            <a:avLst/>
-          </a:prstGeom>
-          <a:noFill/>
-        </p:spPr>
-        <p:txBody>
-          <a:bodyPr vertOverflow="overflow" horzOverflow="overflow" vert="horz" wrap="square" lIns="91440" tIns="45720" rIns="91440" bIns="45720" numCol="1" spcCol="0" rtlCol="0" fromWordArt="0" anchor="t" anchorCtr="0" forceAA="0" compatLnSpc="0">
-            <a:spAutoFit/>
-          </a:bodyPr>
-          <a:lstStyle/>
-          <a:p>
-            <a:pPr marL="0" marR="0" lvl="0" indent="0" algn="r" defTabSz="914400" rtl="0">
-              <a:lnSpc>
-                <a:spcPct val="100000"/>
-              </a:lnSpc>
-              <a:spcBef>
-                <a:spcPts val="0"/>
-              </a:spcBef>
-              <a:spcAft>
-                <a:spcPts val="0"/>
-              </a:spcAft>
-              <a:defRPr lang="fr-FR" sz="1800" b="0" i="0" u="none" strike="noStrike" cap="none" spc="0">
-                <a:solidFill>
-                  <a:srgbClr val="000000"/>
-                </a:solidFill>
-                <a:latin typeface="Arial"/>
-                <a:ea typeface="Arial"/>
-                <a:cs typeface="Arial"/>
-              </a:defRPr>
-            </a:pPr>
-            <a:r>
-              <a:rPr lang="fr-FR" sz="1200" b="0" i="0" u="none" strike="noStrike" cap="none" spc="0">
-                <a:solidFill>
-                  <a:srgbClr val="000000"/>
-                </a:solidFill>
-                <a:latin typeface="Arial"/>
-                <a:ea typeface="Arial"/>
-                <a:cs typeface="Arial"/>
-              </a:rPr>
-              <a:t>Savoir </a:t>
-            </a:r>
-            <a:r>
-              <a:rPr lang="fr-FR" sz="1200" b="0" i="0" u="none" strike="noStrike" cap="none" spc="0">
-                <a:solidFill>
-                  <a:srgbClr val="808080"/>
-                </a:solidFill>
-                <a:latin typeface="Arial"/>
-                <a:ea typeface="Arial"/>
-                <a:cs typeface="Arial"/>
-              </a:rPr>
-              <a:t>◇</a:t>
-            </a:r>
-            <a:endParaRPr sz="1600"/>
-          </a:p>
-          <a:p>
-            <a:pPr algn="r">
-              <a:defRPr/>
-            </a:pPr>
-            <a:r>
-              <a:rPr lang="fr-FR" sz="800" b="0" i="0" u="none" strike="noStrike" cap="none" spc="0">
-                <a:solidFill>
-                  <a:srgbClr val="808080"/>
-                </a:solidFill>
-                <a:latin typeface="Arial"/>
-                <a:ea typeface="Arial"/>
-                <a:cs typeface="Arial"/>
-              </a:rPr>
-              <a:t>Se remémorer ses souvenirs et effectuer des recherches dans une bibliothèque efficacement.</a:t>
-            </a:r>
-            <a:endParaRPr/>
-          </a:p>
-        </p:txBody>
-      </p:sp>
-      <p:sp>
-        <p:nvSpPr>
-          <p:cNvPr id="778881228" name="ZoneTexte 226284734"/>
-          <p:cNvSpPr txBox="1"/>
-          <p:nvPr/>
-        </p:nvSpPr>
-        <p:spPr bwMode="auto">
-          <a:xfrm flipH="0" flipV="0">
-            <a:off x="45351" y="2976033"/>
-            <a:ext cx="1738193" cy="643788"/>
-          </a:xfrm>
-          <a:prstGeom prst="rect">
-            <a:avLst/>
-          </a:prstGeom>
-          <a:noFill/>
-        </p:spPr>
-        <p:txBody>
-          <a:bodyPr vertOverflow="overflow" horzOverflow="overflow" vert="horz" wrap="square" lIns="91440" tIns="45720" rIns="91440" bIns="45720" numCol="1" spcCol="0" rtlCol="0" fromWordArt="0" anchor="t" anchorCtr="0" forceAA="0" compatLnSpc="0">
-            <a:spAutoFit/>
-          </a:bodyPr>
-          <a:lstStyle/>
-          <a:p>
-            <a:pPr marL="0" marR="0" lvl="0" indent="0" algn="r" defTabSz="914400" rtl="0">
-              <a:lnSpc>
-                <a:spcPct val="100000"/>
-              </a:lnSpc>
-              <a:spcBef>
-                <a:spcPts val="0"/>
-              </a:spcBef>
-              <a:spcAft>
-                <a:spcPts val="0"/>
-              </a:spcAft>
-              <a:defRPr lang="fr-FR" sz="1800" b="0" i="0" u="none" strike="noStrike" cap="none" spc="0">
-                <a:solidFill>
-                  <a:srgbClr val="000000"/>
-                </a:solidFill>
-                <a:latin typeface="Arial"/>
-                <a:ea typeface="Arial"/>
-                <a:cs typeface="Arial"/>
-              </a:defRPr>
-            </a:pPr>
-            <a:r>
-              <a:rPr lang="fr-FR" sz="1200" b="0" i="0" u="none" strike="noStrike" cap="none" spc="0">
-                <a:solidFill>
-                  <a:srgbClr val="000000"/>
-                </a:solidFill>
-                <a:latin typeface="Arial"/>
-                <a:ea typeface="Arial"/>
-                <a:cs typeface="Arial"/>
-              </a:rPr>
-              <a:t>Athlétisme </a:t>
-            </a:r>
-            <a:r>
-              <a:rPr lang="fr-FR" sz="1200" b="0" i="0" u="none" strike="noStrike" cap="none" spc="0">
-                <a:solidFill>
-                  <a:srgbClr val="808080"/>
-                </a:solidFill>
-                <a:latin typeface="Arial"/>
-                <a:ea typeface="Arial"/>
-                <a:cs typeface="Arial"/>
-              </a:rPr>
-              <a:t>◇</a:t>
-            </a:r>
-            <a:endParaRPr sz="1600"/>
-          </a:p>
-          <a:p>
-            <a:pPr algn="r">
-              <a:defRPr/>
-            </a:pPr>
-            <a:r>
-              <a:rPr lang="fr-FR" sz="800" b="0" i="0" u="none" strike="noStrike" cap="none" spc="0">
-                <a:solidFill>
-                  <a:srgbClr val="808080"/>
-                </a:solidFill>
-                <a:latin typeface="Arial"/>
-                <a:ea typeface="Arial"/>
-                <a:cs typeface="Arial"/>
-              </a:rPr>
-              <a:t>Escalader, nager, pratiquer des activités physiques, avoir une bonne santé.</a:t>
-            </a:r>
-            <a:endParaRPr/>
-          </a:p>
-        </p:txBody>
-      </p:sp>
-      <p:sp>
-        <p:nvSpPr>
-          <p:cNvPr id="1850804362" name="ZoneTexte 162158187"/>
-          <p:cNvSpPr txBox="1"/>
-          <p:nvPr/>
-        </p:nvSpPr>
-        <p:spPr bwMode="auto">
-          <a:xfrm>
-            <a:off x="135711" y="2333278"/>
-            <a:ext cx="1659357" cy="643788"/>
-          </a:xfrm>
-          <a:prstGeom prst="rect">
-            <a:avLst/>
-          </a:prstGeom>
-          <a:noFill/>
-        </p:spPr>
-        <p:txBody>
-          <a:bodyPr vertOverflow="overflow" horzOverflow="overflow" vert="horz" wrap="square" lIns="91440" tIns="45720" rIns="91440" bIns="45720" numCol="1" spcCol="0" rtlCol="0" fromWordArt="0" anchor="t" anchorCtr="0" forceAA="0" compatLnSpc="0">
-            <a:spAutoFit/>
-          </a:bodyPr>
-          <a:lstStyle/>
-          <a:p>
-            <a:pPr algn="r">
-              <a:defRPr/>
-            </a:pPr>
-            <a:r>
-              <a:rPr sz="1200"/>
-              <a:t>Art </a:t>
-            </a:r>
-            <a:r>
-              <a:rPr lang="fr-FR" sz="1200" b="0" i="0" u="none" strike="noStrike" cap="none" spc="0">
-                <a:solidFill>
-                  <a:schemeClr val="tx1">
-                    <a:lumMod val="50000"/>
-                    <a:lumOff val="50000"/>
-                  </a:schemeClr>
-                </a:solidFill>
-                <a:latin typeface="Arial"/>
-                <a:ea typeface="Arial"/>
-                <a:cs typeface="Arial"/>
-              </a:rPr>
-              <a:t>◇</a:t>
-            </a:r>
-            <a:endParaRPr sz="1600"/>
-          </a:p>
-          <a:p>
-            <a:pPr algn="r">
-              <a:defRPr/>
-            </a:pPr>
-            <a:r>
-              <a:rPr sz="800">
-                <a:solidFill>
-                  <a:schemeClr val="tx1">
-                    <a:lumMod val="50000"/>
-                    <a:lumOff val="50000"/>
-                  </a:schemeClr>
-                </a:solidFill>
-              </a:rPr>
-              <a:t>Écrire, cuisiner, dessiner, peindre, imaginer, transmettre des émotions et y être sensible.</a:t>
-            </a:r>
-            <a:endParaRPr/>
-          </a:p>
-        </p:txBody>
-      </p:sp>
-      <p:sp>
-        <p:nvSpPr>
-          <p:cNvPr id="1231872024" name="ZoneTexte 1063440096"/>
-          <p:cNvSpPr txBox="1"/>
-          <p:nvPr/>
-        </p:nvSpPr>
-        <p:spPr bwMode="auto">
-          <a:xfrm>
-            <a:off x="97609" y="4892717"/>
-            <a:ext cx="1680237" cy="643788"/>
-          </a:xfrm>
-          <a:prstGeom prst="rect">
-            <a:avLst/>
-          </a:prstGeom>
-          <a:noFill/>
-        </p:spPr>
-        <p:txBody>
-          <a:bodyPr vertOverflow="overflow" horzOverflow="overflow" vert="horz" wrap="square" lIns="91440" tIns="45720" rIns="91440" bIns="45720" numCol="1" spcCol="0" rtlCol="0" fromWordArt="0" anchor="t" anchorCtr="0" forceAA="0" compatLnSpc="0">
-            <a:spAutoFit/>
-          </a:bodyPr>
-          <a:lstStyle/>
-          <a:p>
-            <a:pPr marL="0" marR="0" lvl="0" indent="0" algn="r" defTabSz="914400" rtl="0">
-              <a:lnSpc>
-                <a:spcPct val="100000"/>
-              </a:lnSpc>
-              <a:spcBef>
-                <a:spcPts val="0"/>
-              </a:spcBef>
-              <a:spcAft>
-                <a:spcPts val="0"/>
-              </a:spcAft>
-              <a:defRPr lang="fr-FR" sz="1800" b="0" i="0" u="none" strike="noStrike" cap="none" spc="0">
-                <a:solidFill>
-                  <a:srgbClr val="000000"/>
-                </a:solidFill>
-                <a:latin typeface="Arial"/>
-                <a:ea typeface="Arial"/>
-                <a:cs typeface="Arial"/>
-              </a:defRPr>
-            </a:pPr>
-            <a:r>
-              <a:rPr lang="fr-FR" sz="1200" b="0" i="0" u="none" strike="noStrike" cap="none" spc="0">
-                <a:solidFill>
-                  <a:srgbClr val="000000"/>
-                </a:solidFill>
-                <a:latin typeface="Arial"/>
-                <a:ea typeface="Arial"/>
-                <a:cs typeface="Arial"/>
-              </a:rPr>
-              <a:t>Filouterie </a:t>
-            </a:r>
-            <a:r>
-              <a:rPr lang="fr-FR" sz="1200" b="0" i="0" u="none" strike="noStrike" cap="none" spc="0">
-                <a:solidFill>
-                  <a:srgbClr val="808080"/>
-                </a:solidFill>
-                <a:latin typeface="Arial"/>
-                <a:ea typeface="Arial"/>
-                <a:cs typeface="Arial"/>
-              </a:rPr>
-              <a:t>◇</a:t>
-            </a:r>
-            <a:endParaRPr sz="1600"/>
-          </a:p>
-          <a:p>
-            <a:pPr algn="r">
-              <a:defRPr/>
-            </a:pPr>
-            <a:r>
-              <a:rPr lang="fr-FR" sz="800" b="0" i="0" u="none" strike="noStrike" cap="none" spc="0">
-                <a:solidFill>
-                  <a:srgbClr val="808080"/>
-                </a:solidFill>
-                <a:latin typeface="Arial"/>
-                <a:ea typeface="Arial"/>
-                <a:cs typeface="Arial"/>
-              </a:rPr>
-              <a:t>Agir discrètement, dérober des objets, crocheter les serrures, connaître le monde de l’illégalité.</a:t>
-            </a:r>
-            <a:endParaRPr/>
-          </a:p>
-        </p:txBody>
-      </p:sp>
-      <p:sp>
-        <p:nvSpPr>
-          <p:cNvPr id="157697195" name="ZoneTexte 1564072661"/>
-          <p:cNvSpPr txBox="1"/>
-          <p:nvPr/>
-        </p:nvSpPr>
-        <p:spPr bwMode="auto">
-          <a:xfrm>
-            <a:off x="2302385" y="2981700"/>
-            <a:ext cx="1735676" cy="643788"/>
-          </a:xfrm>
-          <a:prstGeom prst="rect">
-            <a:avLst/>
-          </a:prstGeom>
-          <a:noFill/>
-        </p:spPr>
-        <p:txBody>
-          <a:bodyPr vertOverflow="overflow" horzOverflow="overflow" vert="horz" wrap="square" lIns="91440" tIns="45720" rIns="91440" bIns="45720" numCol="1" spcCol="0" rtlCol="0" fromWordArt="0" anchor="t" anchorCtr="0" forceAA="0" compatLnSpc="0">
-            <a:spAutoFit/>
-          </a:bodyPr>
-          <a:lstStyle/>
-          <a:p>
-            <a:pPr marL="0" marR="0" lvl="0" indent="0" algn="r" defTabSz="914400" rtl="0">
-              <a:lnSpc>
-                <a:spcPct val="100000"/>
-              </a:lnSpc>
-              <a:spcBef>
-                <a:spcPts val="0"/>
-              </a:spcBef>
-              <a:spcAft>
-                <a:spcPts val="0"/>
-              </a:spcAft>
-              <a:defRPr lang="fr-FR" sz="1800" b="0" i="0" u="none" strike="noStrike" cap="none" spc="0">
-                <a:solidFill>
-                  <a:srgbClr val="000000"/>
-                </a:solidFill>
-                <a:latin typeface="Arial"/>
-                <a:ea typeface="Arial"/>
-                <a:cs typeface="Arial"/>
-              </a:defRPr>
-            </a:pPr>
-            <a:r>
-              <a:rPr lang="fr-FR" sz="1200" b="0" i="0" u="none" strike="noStrike" cap="none" spc="0">
-                <a:solidFill>
-                  <a:srgbClr val="000000"/>
-                </a:solidFill>
-                <a:latin typeface="Arial"/>
-                <a:ea typeface="Arial"/>
-                <a:cs typeface="Arial"/>
-              </a:rPr>
-              <a:t>Occultisme </a:t>
-            </a:r>
-            <a:r>
-              <a:rPr lang="fr-FR" sz="1200" b="0" i="0" u="none" strike="noStrike" cap="none" spc="0">
-                <a:solidFill>
-                  <a:srgbClr val="808080"/>
-                </a:solidFill>
-                <a:latin typeface="Arial"/>
-                <a:ea typeface="Arial"/>
-                <a:cs typeface="Arial"/>
-              </a:rPr>
-              <a:t>◇</a:t>
-            </a:r>
-            <a:endParaRPr sz="1600"/>
-          </a:p>
-          <a:p>
-            <a:pPr algn="r">
-              <a:defRPr/>
-            </a:pPr>
-            <a:r>
-              <a:rPr lang="fr-FR" sz="800" b="0" i="0" u="none" strike="noStrike" cap="none" spc="0">
-                <a:solidFill>
-                  <a:srgbClr val="808080"/>
-                </a:solidFill>
-                <a:latin typeface="Arial"/>
-                <a:ea typeface="Arial"/>
-                <a:cs typeface="Arial"/>
-              </a:rPr>
-              <a:t>Avoir des connaissances sur le surnaturel, connaître les entités et les pratiques occultes.</a:t>
-            </a:r>
-            <a:endParaRPr/>
-          </a:p>
-        </p:txBody>
-      </p:sp>
-      <p:sp>
-        <p:nvSpPr>
-          <p:cNvPr id="345336653" name="ZoneTexte 2102805411"/>
-          <p:cNvSpPr txBox="1"/>
-          <p:nvPr/>
-        </p:nvSpPr>
-        <p:spPr bwMode="auto">
-          <a:xfrm flipH="0" flipV="0">
-            <a:off x="2347023" y="4261294"/>
-            <a:ext cx="1700753" cy="643788"/>
-          </a:xfrm>
-          <a:prstGeom prst="rect">
-            <a:avLst/>
-          </a:prstGeom>
-          <a:noFill/>
-        </p:spPr>
-        <p:txBody>
-          <a:bodyPr vertOverflow="overflow" horzOverflow="overflow" vert="horz" wrap="square" lIns="91440" tIns="45720" rIns="91440" bIns="45720" numCol="1" spcCol="0" rtlCol="0" fromWordArt="0" anchor="t" anchorCtr="0" forceAA="0" compatLnSpc="0">
-            <a:spAutoFit/>
-          </a:bodyPr>
-          <a:lstStyle/>
-          <a:p>
-            <a:pPr marL="0" marR="0" lvl="0" indent="0" algn="r" defTabSz="914400" rtl="0">
-              <a:lnSpc>
-                <a:spcPct val="100000"/>
-              </a:lnSpc>
-              <a:spcBef>
-                <a:spcPts val="0"/>
-              </a:spcBef>
-              <a:spcAft>
-                <a:spcPts val="0"/>
-              </a:spcAft>
-              <a:defRPr lang="fr-FR" sz="1800" b="0" i="0" u="none" strike="noStrike" cap="none" spc="0">
-                <a:solidFill>
-                  <a:srgbClr val="000000"/>
-                </a:solidFill>
-                <a:latin typeface="Arial"/>
-                <a:ea typeface="Arial"/>
-                <a:cs typeface="Arial"/>
-              </a:defRPr>
-            </a:pPr>
-            <a:r>
-              <a:rPr lang="fr-FR" sz="1200" b="0" i="0" u="none" strike="noStrike" cap="none" spc="0">
-                <a:solidFill>
-                  <a:srgbClr val="000000"/>
-                </a:solidFill>
-                <a:latin typeface="Arial"/>
-                <a:ea typeface="Arial"/>
-                <a:cs typeface="Arial"/>
-              </a:rPr>
-              <a:t>Technologie </a:t>
-            </a:r>
-            <a:r>
-              <a:rPr lang="fr-FR" sz="1200" b="0" i="0" u="none" strike="noStrike" cap="none" spc="0">
-                <a:solidFill>
-                  <a:srgbClr val="808080"/>
-                </a:solidFill>
-                <a:latin typeface="Arial"/>
-                <a:ea typeface="Arial"/>
-                <a:cs typeface="Arial"/>
-              </a:rPr>
-              <a:t>◇</a:t>
-            </a:r>
-            <a:endParaRPr sz="1600"/>
-          </a:p>
-          <a:p>
-            <a:pPr algn="r">
-              <a:defRPr/>
-            </a:pPr>
-            <a:r>
-              <a:rPr lang="fr-FR" sz="800" b="0" i="0" u="none" strike="noStrike" cap="none" spc="0">
-                <a:solidFill>
-                  <a:srgbClr val="808080"/>
-                </a:solidFill>
-                <a:latin typeface="Arial"/>
-                <a:ea typeface="Arial"/>
-                <a:cs typeface="Arial"/>
-              </a:rPr>
-              <a:t>Bricoler, entretenir le matériel, savoir comment fonctionne un trébuchet.</a:t>
-            </a:r>
-            <a:endParaRPr/>
-          </a:p>
-        </p:txBody>
-      </p:sp>
-      <p:sp>
-        <p:nvSpPr>
-          <p:cNvPr id="1666533552" name="ZoneTexte 1094420572"/>
-          <p:cNvSpPr txBox="1"/>
-          <p:nvPr/>
-        </p:nvSpPr>
-        <p:spPr bwMode="auto">
-          <a:xfrm>
-            <a:off x="2302385" y="2333277"/>
-            <a:ext cx="1743233" cy="643788"/>
-          </a:xfrm>
-          <a:prstGeom prst="rect">
-            <a:avLst/>
-          </a:prstGeom>
-          <a:noFill/>
-        </p:spPr>
-        <p:txBody>
-          <a:bodyPr vertOverflow="overflow" horzOverflow="overflow" vert="horz" wrap="square" lIns="91440" tIns="45720" rIns="91440" bIns="45720" numCol="1" spcCol="0" rtlCol="0" fromWordArt="0" anchor="t" anchorCtr="0" forceAA="0" compatLnSpc="0">
-            <a:spAutoFit/>
-          </a:bodyPr>
-          <a:lstStyle/>
-          <a:p>
-            <a:pPr marL="0" marR="0" lvl="0" indent="0" algn="r" defTabSz="914400" rtl="0">
-              <a:lnSpc>
-                <a:spcPct val="100000"/>
-              </a:lnSpc>
-              <a:spcBef>
-                <a:spcPts val="0"/>
-              </a:spcBef>
-              <a:spcAft>
-                <a:spcPts val="0"/>
-              </a:spcAft>
-              <a:defRPr lang="fr-FR" sz="1800" b="0" i="0" u="none" strike="noStrike" cap="none" spc="0">
-                <a:solidFill>
-                  <a:srgbClr val="000000"/>
-                </a:solidFill>
-                <a:latin typeface="Arial"/>
-                <a:ea typeface="Arial"/>
-                <a:cs typeface="Arial"/>
-              </a:defRPr>
-            </a:pPr>
-            <a:r>
-              <a:rPr lang="fr-FR" sz="1200" b="0" i="0" u="none" strike="noStrike" cap="none" spc="0">
-                <a:solidFill>
-                  <a:srgbClr val="000000"/>
-                </a:solidFill>
-                <a:latin typeface="Arial"/>
-                <a:ea typeface="Arial"/>
-                <a:cs typeface="Arial"/>
-              </a:rPr>
-              <a:t>Nature </a:t>
-            </a:r>
-            <a:r>
-              <a:rPr lang="fr-FR" sz="1200" b="0" i="0" u="none" strike="noStrike" cap="none" spc="0">
-                <a:solidFill>
-                  <a:srgbClr val="808080"/>
-                </a:solidFill>
-                <a:latin typeface="Arial"/>
-                <a:ea typeface="Arial"/>
-                <a:cs typeface="Arial"/>
-              </a:rPr>
-              <a:t>◇</a:t>
-            </a:r>
-            <a:endParaRPr sz="1600"/>
-          </a:p>
-          <a:p>
-            <a:pPr algn="r">
-              <a:defRPr/>
-            </a:pPr>
-            <a:r>
-              <a:rPr lang="fr-FR" sz="800" b="0" i="0" u="none" strike="noStrike" cap="none" spc="0">
-                <a:solidFill>
-                  <a:srgbClr val="808080"/>
-                </a:solidFill>
-                <a:latin typeface="Arial"/>
-                <a:ea typeface="Arial"/>
-                <a:cs typeface="Arial"/>
-              </a:rPr>
-              <a:t>Savoir survivre dans la nature, connaître la flore et la faune, camper, se déplacer en extérieur.</a:t>
-            </a:r>
-            <a:endParaRPr/>
-          </a:p>
-        </p:txBody>
-      </p:sp>
-      <p:sp>
-        <p:nvSpPr>
-          <p:cNvPr id="1746955738" name="ZoneTexte 1337742717"/>
-          <p:cNvSpPr txBox="1"/>
-          <p:nvPr/>
-        </p:nvSpPr>
-        <p:spPr bwMode="auto">
-          <a:xfrm flipH="0" flipV="0">
-            <a:off x="2309223" y="4895034"/>
-            <a:ext cx="1739636" cy="643788"/>
-          </a:xfrm>
-          <a:prstGeom prst="rect">
-            <a:avLst/>
-          </a:prstGeom>
-          <a:noFill/>
-        </p:spPr>
-        <p:txBody>
-          <a:bodyPr vertOverflow="overflow" horzOverflow="overflow" vert="horz" wrap="square" lIns="91440" tIns="45720" rIns="91440" bIns="45720" numCol="1" spcCol="0" rtlCol="0" fromWordArt="0" anchor="t" anchorCtr="0" forceAA="0" compatLnSpc="0">
-            <a:spAutoFit/>
-          </a:bodyPr>
-          <a:lstStyle/>
-          <a:p>
-            <a:pPr algn="r">
-              <a:defRPr/>
-            </a:pPr>
-            <a:r>
-              <a:rPr sz="1200"/>
-              <a:t>Véhicules </a:t>
-            </a:r>
-            <a:r>
-              <a:rPr lang="fr-FR" sz="1200" b="0" i="0" u="none" strike="noStrike" cap="none" spc="0">
-                <a:solidFill>
-                  <a:schemeClr val="tx1">
-                    <a:lumMod val="50000"/>
-                    <a:lumOff val="50000"/>
-                  </a:schemeClr>
-                </a:solidFill>
-                <a:latin typeface="Arial"/>
-                <a:ea typeface="Arial"/>
-                <a:cs typeface="Arial"/>
-              </a:rPr>
-              <a:t>◇</a:t>
-            </a:r>
-            <a:endParaRPr sz="1600"/>
-          </a:p>
-          <a:p>
-            <a:pPr algn="r">
-              <a:defRPr/>
-            </a:pPr>
-            <a:r>
-              <a:rPr sz="800">
-                <a:solidFill>
-                  <a:schemeClr val="tx1">
-                    <a:lumMod val="50000"/>
-                    <a:lumOff val="50000"/>
-                  </a:schemeClr>
-                </a:solidFill>
-              </a:rPr>
-              <a:t>Conduire et piloter toutes sortes de véhicules, monter à cheval, avoir le pied marin.</a:t>
-            </a:r>
-            <a:endParaRPr/>
-          </a:p>
-        </p:txBody>
-      </p:sp>
-      <p:sp>
-        <p:nvSpPr>
-          <p:cNvPr id="400750683" name="ZoneTexte 1188730172"/>
-          <p:cNvSpPr txBox="1"/>
-          <p:nvPr/>
-        </p:nvSpPr>
-        <p:spPr bwMode="auto">
-          <a:xfrm>
-            <a:off x="2309225" y="5535478"/>
-            <a:ext cx="1734594" cy="648425"/>
-          </a:xfrm>
-          <a:prstGeom prst="rect">
-            <a:avLst/>
-          </a:prstGeom>
-          <a:noFill/>
-        </p:spPr>
-        <p:txBody>
-          <a:bodyPr vertOverflow="overflow" horzOverflow="overflow" vert="horz" wrap="square" lIns="91440" tIns="45720" rIns="91440" bIns="45720" numCol="1" spcCol="0" rtlCol="0" fromWordArt="0" anchor="t" anchorCtr="0" forceAA="0" compatLnSpc="0">
-            <a:spAutoFit/>
-          </a:bodyPr>
-          <a:lstStyle/>
-          <a:p>
-            <a:pPr algn="r">
-              <a:defRPr/>
-            </a:pPr>
-            <a:r>
-              <a:rPr sz="1200"/>
-              <a:t>Vigilance </a:t>
-            </a:r>
-            <a:r>
-              <a:rPr lang="fr-FR" sz="1200" b="1" i="0" u="none" strike="noStrike" cap="none" spc="0">
-                <a:solidFill>
-                  <a:schemeClr val="tx1">
-                    <a:lumMod val="50000"/>
-                    <a:lumOff val="50000"/>
-                  </a:schemeClr>
-                </a:solidFill>
-                <a:latin typeface="Arial"/>
-                <a:ea typeface="Arial"/>
-                <a:cs typeface="Arial"/>
-              </a:rPr>
-              <a:t>◇</a:t>
-            </a:r>
-            <a:endParaRPr sz="1600"/>
-          </a:p>
-          <a:p>
-            <a:pPr algn="r">
-              <a:defRPr/>
-            </a:pPr>
-            <a:r>
-              <a:rPr sz="800">
-                <a:solidFill>
-                  <a:schemeClr val="tx1">
-                    <a:lumMod val="50000"/>
-                    <a:lumOff val="50000"/>
-                  </a:schemeClr>
-                </a:solidFill>
-              </a:rPr>
-              <a:t>Observer, remarquer les détails, être attentif à son environnement et y réagir rapidement.</a:t>
-            </a:r>
-            <a:endParaRPr/>
-          </a:p>
-        </p:txBody>
-      </p:sp>
-      <p:sp>
-        <p:nvSpPr>
-          <p:cNvPr id="332568858" name="Rectangle : avec coins arrondis en haut 1452601499"/>
+          <p:cNvPr id="1000524102" name="Rectangle : avec coins arrondis en haut 500951796"/>
           <p:cNvSpPr/>
           <p:nvPr/>
         </p:nvSpPr>
         <p:spPr bwMode="auto">
           <a:xfrm rot="5399976">
-            <a:off x="1724005" y="2462432"/>
-            <a:ext cx="522740" cy="400050"/>
+            <a:off x="1718298" y="4374792"/>
+            <a:ext cx="520473" cy="400050"/>
           </a:xfrm>
           <a:prstGeom prst="round2SameRect">
             <a:avLst>
@@ -7679,14 +7817,14 @@
       </p:sp>
       <p:sp>
         <p:nvSpPr>
-          <p:cNvPr id="130513037" name="Rectangle : avec coins arrondis en haut 1782110635"/>
+          <p:cNvPr id="296097166" name="Rectangle : avec coins arrondis en haut 203047490"/>
           <p:cNvSpPr/>
           <p:nvPr/>
         </p:nvSpPr>
         <p:spPr bwMode="auto">
           <a:xfrm rot="5399976">
-            <a:off x="1718298" y="3101739"/>
-            <a:ext cx="520475" cy="400050"/>
+            <a:off x="1718298" y="5015232"/>
+            <a:ext cx="520473" cy="400050"/>
           </a:xfrm>
           <a:prstGeom prst="round2SameRect">
             <a:avLst>
@@ -7725,14 +7863,14 @@
       </p:sp>
       <p:sp>
         <p:nvSpPr>
-          <p:cNvPr id="607345861" name="Rectangle : avec coins arrondis en haut 945118596"/>
+          <p:cNvPr id="1439991712" name="Rectangle : avec coins arrondis en haut 818083012"/>
           <p:cNvSpPr/>
           <p:nvPr/>
         </p:nvSpPr>
         <p:spPr bwMode="auto">
           <a:xfrm rot="5399976">
-            <a:off x="1725138" y="3734353"/>
-            <a:ext cx="520474" cy="400050"/>
+            <a:off x="1718298" y="5655672"/>
+            <a:ext cx="520473" cy="400050"/>
           </a:xfrm>
           <a:prstGeom prst="round2SameRect">
             <a:avLst>
@@ -7771,14 +7909,14 @@
       </p:sp>
       <p:sp>
         <p:nvSpPr>
-          <p:cNvPr id="126291578" name="Rectangle : avec coins arrondis en haut 500951796"/>
+          <p:cNvPr id="103752486" name="Rectangle : avec coins arrondis en haut 310539005"/>
           <p:cNvSpPr/>
           <p:nvPr/>
         </p:nvSpPr>
         <p:spPr bwMode="auto">
           <a:xfrm rot="5399976">
-            <a:off x="1718298" y="4374793"/>
-            <a:ext cx="520474" cy="400050"/>
+            <a:off x="3987156" y="2462431"/>
+            <a:ext cx="522739" cy="400050"/>
           </a:xfrm>
           <a:prstGeom prst="round2SameRect">
             <a:avLst>
@@ -7817,14 +7955,14 @@
       </p:sp>
       <p:sp>
         <p:nvSpPr>
-          <p:cNvPr id="1543224370" name="Rectangle : avec coins arrondis en haut 203047490"/>
+          <p:cNvPr id="1117179137" name="Rectangle : avec coins arrondis en haut 844307487"/>
           <p:cNvSpPr/>
           <p:nvPr/>
         </p:nvSpPr>
         <p:spPr bwMode="auto">
           <a:xfrm rot="5399976">
-            <a:off x="1718298" y="5015233"/>
-            <a:ext cx="520474" cy="400050"/>
+            <a:off x="3981449" y="3101738"/>
+            <a:ext cx="520473" cy="400050"/>
           </a:xfrm>
           <a:prstGeom prst="round2SameRect">
             <a:avLst>
@@ -7863,14 +8001,14 @@
       </p:sp>
       <p:sp>
         <p:nvSpPr>
-          <p:cNvPr id="193046829" name="Rectangle : avec coins arrondis en haut 818083012"/>
+          <p:cNvPr id="158994311" name="Rectangle : avec coins arrondis en haut 1616510051"/>
           <p:cNvSpPr/>
           <p:nvPr/>
         </p:nvSpPr>
         <p:spPr bwMode="auto">
           <a:xfrm rot="5399976">
-            <a:off x="1718298" y="5655673"/>
-            <a:ext cx="520474" cy="400050"/>
+            <a:off x="3988289" y="3734353"/>
+            <a:ext cx="520473" cy="400050"/>
           </a:xfrm>
           <a:prstGeom prst="round2SameRect">
             <a:avLst>
@@ -7909,14 +8047,14 @@
       </p:sp>
       <p:sp>
         <p:nvSpPr>
-          <p:cNvPr id="1578835917" name="Rectangle : avec coins arrondis en haut 310539005"/>
+          <p:cNvPr id="2111738458" name="Rectangle : avec coins arrondis en haut 1451691637"/>
           <p:cNvSpPr/>
           <p:nvPr/>
         </p:nvSpPr>
         <p:spPr bwMode="auto">
           <a:xfrm rot="5399976">
-            <a:off x="3987157" y="2462432"/>
-            <a:ext cx="522740" cy="400050"/>
+            <a:off x="3981449" y="4374793"/>
+            <a:ext cx="520473" cy="400050"/>
           </a:xfrm>
           <a:prstGeom prst="round2SameRect">
             <a:avLst>
@@ -7955,14 +8093,14 @@
       </p:sp>
       <p:sp>
         <p:nvSpPr>
-          <p:cNvPr id="1152120255" name="Rectangle : avec coins arrondis en haut 844307487"/>
+          <p:cNvPr id="224815873" name="Rectangle : avec coins arrondis en haut 260383743"/>
           <p:cNvSpPr/>
           <p:nvPr/>
         </p:nvSpPr>
         <p:spPr bwMode="auto">
           <a:xfrm rot="5399976">
-            <a:off x="3981450" y="3101739"/>
-            <a:ext cx="520474" cy="400050"/>
+            <a:off x="3981449" y="5015233"/>
+            <a:ext cx="520473" cy="400050"/>
           </a:xfrm>
           <a:prstGeom prst="round2SameRect">
             <a:avLst>
@@ -8001,14 +8139,14 @@
       </p:sp>
       <p:sp>
         <p:nvSpPr>
-          <p:cNvPr id="1578508363" name="Rectangle : avec coins arrondis en haut 1616510051"/>
+          <p:cNvPr id="760500082" name="Rectangle : avec coins arrondis en haut 1280344391"/>
           <p:cNvSpPr/>
           <p:nvPr/>
         </p:nvSpPr>
         <p:spPr bwMode="auto">
           <a:xfrm rot="5399976">
-            <a:off x="3988290" y="3734354"/>
-            <a:ext cx="520474" cy="400050"/>
+            <a:off x="3981449" y="5655673"/>
+            <a:ext cx="520473" cy="400050"/>
           </a:xfrm>
           <a:prstGeom prst="round2SameRect">
             <a:avLst>
@@ -8047,152 +8185,14 @@
       </p:sp>
       <p:sp>
         <p:nvSpPr>
-          <p:cNvPr id="569585095" name="Rectangle : avec coins arrondis en haut 1451691637"/>
-          <p:cNvSpPr/>
-          <p:nvPr/>
-        </p:nvSpPr>
-        <p:spPr bwMode="auto">
-          <a:xfrm rot="5399976">
-            <a:off x="3981450" y="4374794"/>
-            <a:ext cx="520474" cy="400050"/>
-          </a:xfrm>
-          <a:prstGeom prst="round2SameRect">
-            <a:avLst>
-              <a:gd name="adj1" fmla="val 16667"/>
-              <a:gd name="adj2" fmla="val 0"/>
-            </a:avLst>
-          </a:prstGeom>
-          <a:noFill/>
-          <a:ln w="12699" cap="flat" cmpd="sng" algn="ctr">
-            <a:solidFill>
-              <a:schemeClr val="tx1">
-                <a:lumMod val="50196"/>
-                <a:lumOff val="49804"/>
-              </a:schemeClr>
-            </a:solidFill>
-            <a:prstDash val="solid"/>
-            <a:miter lim="800000"/>
-          </a:ln>
-        </p:spPr>
-        <p:style>
-          <a:lnRef idx="2">
-            <a:schemeClr val="accent1">
-              <a:shade val="50000"/>
-            </a:schemeClr>
-          </a:lnRef>
-          <a:fillRef idx="1">
-            <a:schemeClr val="accent1"/>
-          </a:fillRef>
-          <a:effectRef idx="0">
-            <a:schemeClr val="accent1"/>
-          </a:effectRef>
-          <a:fontRef idx="minor">
-            <a:schemeClr val="lt1"/>
-          </a:fontRef>
-        </p:style>
-      </p:sp>
-      <p:sp>
-        <p:nvSpPr>
-          <p:cNvPr id="170192750" name="Rectangle : avec coins arrondis en haut 260383743"/>
-          <p:cNvSpPr/>
-          <p:nvPr/>
-        </p:nvSpPr>
-        <p:spPr bwMode="auto">
-          <a:xfrm rot="5399976">
-            <a:off x="3981450" y="5015234"/>
-            <a:ext cx="520474" cy="400050"/>
-          </a:xfrm>
-          <a:prstGeom prst="round2SameRect">
-            <a:avLst>
-              <a:gd name="adj1" fmla="val 16667"/>
-              <a:gd name="adj2" fmla="val 0"/>
-            </a:avLst>
-          </a:prstGeom>
-          <a:noFill/>
-          <a:ln w="12699" cap="flat" cmpd="sng" algn="ctr">
-            <a:solidFill>
-              <a:schemeClr val="tx1">
-                <a:lumMod val="50196"/>
-                <a:lumOff val="49804"/>
-              </a:schemeClr>
-            </a:solidFill>
-            <a:prstDash val="solid"/>
-            <a:miter lim="800000"/>
-          </a:ln>
-        </p:spPr>
-        <p:style>
-          <a:lnRef idx="2">
-            <a:schemeClr val="accent1">
-              <a:shade val="50000"/>
-            </a:schemeClr>
-          </a:lnRef>
-          <a:fillRef idx="1">
-            <a:schemeClr val="accent1"/>
-          </a:fillRef>
-          <a:effectRef idx="0">
-            <a:schemeClr val="accent1"/>
-          </a:effectRef>
-          <a:fontRef idx="minor">
-            <a:schemeClr val="lt1"/>
-          </a:fontRef>
-        </p:style>
-      </p:sp>
-      <p:sp>
-        <p:nvSpPr>
-          <p:cNvPr id="1015394765" name="Rectangle : avec coins arrondis en haut 1280344391"/>
-          <p:cNvSpPr/>
-          <p:nvPr/>
-        </p:nvSpPr>
-        <p:spPr bwMode="auto">
-          <a:xfrm rot="5399976">
-            <a:off x="3981450" y="5655674"/>
-            <a:ext cx="520474" cy="400050"/>
-          </a:xfrm>
-          <a:prstGeom prst="round2SameRect">
-            <a:avLst>
-              <a:gd name="adj1" fmla="val 16667"/>
-              <a:gd name="adj2" fmla="val 0"/>
-            </a:avLst>
-          </a:prstGeom>
-          <a:noFill/>
-          <a:ln w="12699" cap="flat" cmpd="sng" algn="ctr">
-            <a:solidFill>
-              <a:schemeClr val="tx1">
-                <a:lumMod val="50196"/>
-                <a:lumOff val="49804"/>
-              </a:schemeClr>
-            </a:solidFill>
-            <a:prstDash val="solid"/>
-            <a:miter lim="800000"/>
-          </a:ln>
-        </p:spPr>
-        <p:style>
-          <a:lnRef idx="2">
-            <a:schemeClr val="accent1">
-              <a:shade val="50000"/>
-            </a:schemeClr>
-          </a:lnRef>
-          <a:fillRef idx="1">
-            <a:schemeClr val="accent1"/>
-          </a:fillRef>
-          <a:effectRef idx="0">
-            <a:schemeClr val="accent1"/>
-          </a:effectRef>
-          <a:fontRef idx="minor">
-            <a:schemeClr val="lt1"/>
-          </a:fontRef>
-        </p:style>
-      </p:sp>
-      <p:sp>
-        <p:nvSpPr>
-          <p:cNvPr id="2129365332" name=""/>
+          <p:cNvPr id="1269437730" name=""/>
           <p:cNvSpPr txBox="1"/>
           <p:nvPr/>
         </p:nvSpPr>
         <p:spPr bwMode="auto">
           <a:xfrm rot="0" flipH="0" flipV="0">
-            <a:off x="3207797" y="8821298"/>
-            <a:ext cx="3727654" cy="548999"/>
+            <a:off x="3207796" y="8821297"/>
+            <a:ext cx="3727653" cy="548998"/>
           </a:xfrm>
           <a:prstGeom prst="rect">
             <a:avLst/>
@@ -8309,14 +8309,14 @@
       </p:sp>
       <p:sp>
         <p:nvSpPr>
-          <p:cNvPr id="1040366270" name="ZoneTexte 1440859034"/>
+          <p:cNvPr id="58774705" name="ZoneTexte 1440859034"/>
           <p:cNvSpPr txBox="1"/>
           <p:nvPr/>
         </p:nvSpPr>
         <p:spPr bwMode="auto">
           <a:xfrm>
-            <a:off x="3555766" y="9620490"/>
-            <a:ext cx="1115027" cy="274679"/>
+            <a:off x="3555765" y="9620489"/>
+            <a:ext cx="1115026" cy="274678"/>
           </a:xfrm>
           <a:prstGeom prst="rect">
             <a:avLst/>
@@ -8351,14 +8351,14 @@
       </p:sp>
       <p:sp>
         <p:nvSpPr>
-          <p:cNvPr id="1652128631" name="ZoneTexte 1440859034"/>
+          <p:cNvPr id="730549030" name="ZoneTexte 1440859034"/>
           <p:cNvSpPr txBox="1"/>
           <p:nvPr/>
         </p:nvSpPr>
         <p:spPr bwMode="auto">
           <a:xfrm>
-            <a:off x="5572020" y="9620491"/>
-            <a:ext cx="784781" cy="274679"/>
+            <a:off x="5572019" y="9620490"/>
+            <a:ext cx="784780" cy="274678"/>
           </a:xfrm>
           <a:prstGeom prst="rect">
             <a:avLst/>
@@ -8390,14 +8390,14 @@
       </p:sp>
       <p:cxnSp>
         <p:nvCxnSpPr>
-          <p:cNvPr id="20986284" name=""/>
+          <p:cNvPr id="271994648" name=""/>
           <p:cNvCxnSpPr/>
           <p:nvPr/>
         </p:nvCxnSpPr>
         <p:spPr bwMode="auto">
           <a:xfrm flipH="0" flipV="1">
-            <a:off x="5062577" y="9338887"/>
-            <a:ext cx="0" cy="530164"/>
+            <a:off x="5062576" y="9338886"/>
+            <a:ext cx="0" cy="530163"/>
           </a:xfrm>
           <a:prstGeom prst="line">
             <a:avLst/>
@@ -8429,13 +8429,13 @@
       </p:cxnSp>
       <p:sp>
         <p:nvSpPr>
-          <p:cNvPr id="2044373370" name=""/>
+          <p:cNvPr id="1873067258" name=""/>
           <p:cNvSpPr txBox="1"/>
           <p:nvPr/>
         </p:nvSpPr>
         <p:spPr bwMode="auto">
           <a:xfrm rot="0" flipH="0" flipV="0">
-            <a:off x="3426224" y="9186383"/>
+            <a:off x="3426223" y="9186382"/>
             <a:ext cx="1546056" cy="385902"/>
           </a:xfrm>
           <a:prstGeom prst="rect">
@@ -8593,14 +8593,14 @@
       </p:sp>
       <p:sp>
         <p:nvSpPr>
-          <p:cNvPr id="1151424050" name="Rectangle 954364527"/>
+          <p:cNvPr id="2027161406" name="Rectangle 954364527"/>
           <p:cNvSpPr/>
           <p:nvPr/>
         </p:nvSpPr>
         <p:spPr bwMode="auto">
           <a:xfrm flipH="0" flipV="0">
-            <a:off x="6664875" y="8821298"/>
-            <a:ext cx="162576" cy="1047755"/>
+            <a:off x="6664874" y="8821297"/>
+            <a:ext cx="162576" cy="1047754"/>
           </a:xfrm>
           <a:prstGeom prst="rect">
             <a:avLst/>
@@ -8633,13 +8633,13 @@
       </p:sp>
       <p:sp>
         <p:nvSpPr>
-          <p:cNvPr id="634541515" name="ZoneTexte 1527388901"/>
+          <p:cNvPr id="1134888723" name="ZoneTexte 1527388901"/>
           <p:cNvSpPr txBox="1"/>
           <p:nvPr/>
         </p:nvSpPr>
         <p:spPr bwMode="auto">
           <a:xfrm flipH="0" flipV="0">
-            <a:off x="4211020" y="563517"/>
+            <a:off x="4211019" y="563517"/>
             <a:ext cx="2661831" cy="1463400"/>
           </a:xfrm>
           <a:prstGeom prst="rect">
@@ -8793,14 +8793,14 @@
       </p:sp>
       <p:sp>
         <p:nvSpPr>
-          <p:cNvPr id="937330216" name="Rectangle 38344096"/>
+          <p:cNvPr id="778363155" name="Rectangle 38344096"/>
           <p:cNvSpPr/>
           <p:nvPr/>
         </p:nvSpPr>
         <p:spPr bwMode="auto">
           <a:xfrm flipH="0" flipV="0">
-            <a:off x="6688315" y="530568"/>
-            <a:ext cx="104771" cy="1474465"/>
+            <a:off x="6688314" y="530568"/>
+            <a:ext cx="104770" cy="1474464"/>
           </a:xfrm>
           <a:prstGeom prst="rect">
             <a:avLst/>
@@ -8833,14 +8833,14 @@
       </p:sp>
       <p:sp>
         <p:nvSpPr>
-          <p:cNvPr id="1095452117" name=""/>
+          <p:cNvPr id="1856197595" name=""/>
           <p:cNvSpPr/>
           <p:nvPr/>
         </p:nvSpPr>
         <p:spPr bwMode="auto">
           <a:xfrm>
-            <a:off x="3283148" y="22347"/>
-            <a:ext cx="3571425" cy="427079"/>
+            <a:off x="3283147" y="22347"/>
+            <a:ext cx="3571425" cy="427078"/>
           </a:xfrm>
           <a:prstGeom prst="rect">
             <a:avLst/>
@@ -8904,232 +8904,13 @@
       </p:sp>
       <p:sp>
         <p:nvSpPr>
-          <p:cNvPr id="1887674137" name="Flèche : pentagone 2055848356"/>
+          <p:cNvPr id="313615499" name="Flèche : pentagone 2055848356"/>
           <p:cNvSpPr/>
           <p:nvPr/>
         </p:nvSpPr>
         <p:spPr bwMode="auto">
           <a:xfrm flipH="0" flipV="0">
-            <a:off x="5949464" y="7085078"/>
-            <a:ext cx="143170" cy="140444"/>
-          </a:xfrm>
-          <a:prstGeom prst="homePlate">
-            <a:avLst>
-              <a:gd name="adj" fmla="val 50000"/>
-            </a:avLst>
-          </a:prstGeom>
-          <a:noFill/>
-          <a:ln w="12700" cap="flat" cmpd="sng" algn="ctr">
-            <a:solidFill>
-              <a:schemeClr val="tx1">
-                <a:lumMod val="50196"/>
-                <a:lumOff val="49804"/>
-              </a:schemeClr>
-            </a:solidFill>
-            <a:prstDash val="solid"/>
-            <a:miter lim="800000"/>
-          </a:ln>
-        </p:spPr>
-        <p:style>
-          <a:lnRef idx="2">
-            <a:schemeClr val="accent1">
-              <a:shade val="50000"/>
-            </a:schemeClr>
-          </a:lnRef>
-          <a:fillRef idx="1">
-            <a:schemeClr val="accent1"/>
-          </a:fillRef>
-          <a:effectRef idx="0">
-            <a:schemeClr val="accent1"/>
-          </a:effectRef>
-          <a:fontRef idx="minor">
-            <a:schemeClr val="lt1"/>
-          </a:fontRef>
-        </p:style>
-      </p:sp>
-      <p:sp>
-        <p:nvSpPr>
-          <p:cNvPr id="1470337902" name="Flèche : pentagone 1980093981"/>
-          <p:cNvSpPr/>
-          <p:nvPr/>
-        </p:nvSpPr>
-        <p:spPr bwMode="auto">
-          <a:xfrm flipH="0" flipV="0">
-            <a:off x="6100139" y="7085078"/>
-            <a:ext cx="143170" cy="140444"/>
-          </a:xfrm>
-          <a:prstGeom prst="homePlate">
-            <a:avLst>
-              <a:gd name="adj" fmla="val 50000"/>
-            </a:avLst>
-          </a:prstGeom>
-          <a:noFill/>
-          <a:ln w="12700" cap="flat" cmpd="sng" algn="ctr">
-            <a:solidFill>
-              <a:schemeClr val="tx1">
-                <a:lumMod val="50196"/>
-                <a:lumOff val="49804"/>
-              </a:schemeClr>
-            </a:solidFill>
-            <a:prstDash val="solid"/>
-            <a:miter lim="800000"/>
-          </a:ln>
-        </p:spPr>
-        <p:style>
-          <a:lnRef idx="2">
-            <a:schemeClr val="accent1">
-              <a:shade val="50000"/>
-            </a:schemeClr>
-          </a:lnRef>
-          <a:fillRef idx="1">
-            <a:schemeClr val="accent1"/>
-          </a:fillRef>
-          <a:effectRef idx="0">
-            <a:schemeClr val="accent1"/>
-          </a:effectRef>
-          <a:fontRef idx="minor">
-            <a:schemeClr val="lt1"/>
-          </a:fontRef>
-        </p:style>
-      </p:sp>
-      <p:sp>
-        <p:nvSpPr>
-          <p:cNvPr id="1912628321" name="Flèche : pentagone 905284374"/>
-          <p:cNvSpPr/>
-          <p:nvPr/>
-        </p:nvSpPr>
-        <p:spPr bwMode="auto">
-          <a:xfrm flipH="0" flipV="0">
-            <a:off x="6250818" y="7085078"/>
-            <a:ext cx="143170" cy="140444"/>
-          </a:xfrm>
-          <a:prstGeom prst="homePlate">
-            <a:avLst>
-              <a:gd name="adj" fmla="val 50000"/>
-            </a:avLst>
-          </a:prstGeom>
-          <a:noFill/>
-          <a:ln w="12700" cap="flat" cmpd="sng" algn="ctr">
-            <a:solidFill>
-              <a:schemeClr val="tx1">
-                <a:lumMod val="50196"/>
-                <a:lumOff val="49804"/>
-              </a:schemeClr>
-            </a:solidFill>
-            <a:prstDash val="solid"/>
-            <a:miter lim="800000"/>
-          </a:ln>
-        </p:spPr>
-        <p:style>
-          <a:lnRef idx="2">
-            <a:schemeClr val="accent1">
-              <a:shade val="50000"/>
-            </a:schemeClr>
-          </a:lnRef>
-          <a:fillRef idx="1">
-            <a:schemeClr val="accent1"/>
-          </a:fillRef>
-          <a:effectRef idx="0">
-            <a:schemeClr val="accent1"/>
-          </a:effectRef>
-          <a:fontRef idx="minor">
-            <a:schemeClr val="lt1"/>
-          </a:fontRef>
-        </p:style>
-      </p:sp>
-      <p:sp>
-        <p:nvSpPr>
-          <p:cNvPr id="601131564" name="ZoneTexte 1440859034"/>
-          <p:cNvSpPr txBox="1"/>
-          <p:nvPr/>
-        </p:nvSpPr>
-        <p:spPr bwMode="auto">
-          <a:xfrm>
-            <a:off x="5708702" y="7138872"/>
-            <a:ext cx="953910" cy="305159"/>
-          </a:xfrm>
-          <a:prstGeom prst="rect">
-            <a:avLst/>
-          </a:prstGeom>
-          <a:noFill/>
-        </p:spPr>
-        <p:txBody>
-          <a:bodyPr vertOverflow="overflow" horzOverflow="overflow" vert="horz" wrap="none" lIns="91440" tIns="45720" rIns="91440" bIns="45720" numCol="1" spcCol="0" rtlCol="0" fromWordArt="0" anchor="t" anchorCtr="0" forceAA="0" compatLnSpc="0">
-            <a:spAutoFit/>
-          </a:bodyPr>
-          <a:lstStyle/>
-          <a:p>
-            <a:pPr algn="ctr">
-              <a:defRPr/>
-            </a:pPr>
-            <a:r>
-              <a:rPr sz="1400" b="1">
-                <a:solidFill>
-                  <a:schemeClr val="bg1">
-                    <a:lumMod val="65000"/>
-                  </a:schemeClr>
-                </a:solidFill>
-              </a:rPr>
-              <a:t>TRAUMA</a:t>
-            </a:r>
-            <a:endParaRPr sz="1600"/>
-          </a:p>
-        </p:txBody>
-      </p:sp>
-      <p:sp>
-        <p:nvSpPr>
-          <p:cNvPr id="1077154462" name="Flèche : pentagone 1880610112"/>
-          <p:cNvSpPr/>
-          <p:nvPr/>
-        </p:nvSpPr>
-        <p:spPr bwMode="auto">
-          <a:xfrm flipH="0" flipV="0">
-            <a:off x="5798789" y="7549779"/>
-            <a:ext cx="143169" cy="140445"/>
-          </a:xfrm>
-          <a:prstGeom prst="homePlate">
-            <a:avLst>
-              <a:gd name="adj" fmla="val 50000"/>
-            </a:avLst>
-          </a:prstGeom>
-          <a:noFill/>
-          <a:ln w="12700" cap="flat" cmpd="sng" algn="ctr">
-            <a:solidFill>
-              <a:schemeClr val="tx1">
-                <a:lumMod val="50196"/>
-                <a:lumOff val="49804"/>
-              </a:schemeClr>
-            </a:solidFill>
-            <a:prstDash val="solid"/>
-            <a:miter lim="800000"/>
-          </a:ln>
-        </p:spPr>
-        <p:style>
-          <a:lnRef idx="2">
-            <a:schemeClr val="accent1">
-              <a:shade val="50000"/>
-            </a:schemeClr>
-          </a:lnRef>
-          <a:fillRef idx="1">
-            <a:schemeClr val="accent1"/>
-          </a:fillRef>
-          <a:effectRef idx="0">
-            <a:schemeClr val="accent1"/>
-          </a:effectRef>
-          <a:fontRef idx="minor">
-            <a:schemeClr val="lt1"/>
-          </a:fontRef>
-        </p:style>
-      </p:sp>
-      <p:sp>
-        <p:nvSpPr>
-          <p:cNvPr id="1038363559" name="Flèche : pentagone 446859139"/>
-          <p:cNvSpPr/>
-          <p:nvPr/>
-        </p:nvSpPr>
-        <p:spPr bwMode="auto">
-          <a:xfrm flipH="0" flipV="0">
-            <a:off x="5949464" y="7549779"/>
+            <a:off x="5949463" y="7085077"/>
             <a:ext cx="143169" cy="140443"/>
           </a:xfrm>
           <a:prstGeom prst="homePlate">
@@ -9168,13 +8949,13 @@
       </p:sp>
       <p:sp>
         <p:nvSpPr>
-          <p:cNvPr id="1940043257" name="Flèche : pentagone 2055848356"/>
+          <p:cNvPr id="28686391" name="Flèche : pentagone 1980093981"/>
           <p:cNvSpPr/>
           <p:nvPr/>
         </p:nvSpPr>
         <p:spPr bwMode="auto">
           <a:xfrm flipH="0" flipV="0">
-            <a:off x="6100143" y="7549779"/>
+            <a:off x="6100138" y="7085077"/>
             <a:ext cx="143169" cy="140443"/>
           </a:xfrm>
           <a:prstGeom prst="homePlate">
@@ -9213,13 +8994,13 @@
       </p:sp>
       <p:sp>
         <p:nvSpPr>
-          <p:cNvPr id="1333161651" name="Flèche : pentagone 1980093981"/>
+          <p:cNvPr id="1631435291" name="Flèche : pentagone 905284374"/>
           <p:cNvSpPr/>
           <p:nvPr/>
         </p:nvSpPr>
         <p:spPr bwMode="auto">
           <a:xfrm flipH="0" flipV="0">
-            <a:off x="6250818" y="7549779"/>
+            <a:off x="6250817" y="7085077"/>
             <a:ext cx="143169" cy="140443"/>
           </a:xfrm>
           <a:prstGeom prst="homePlate">
@@ -9258,14 +9039,53 @@
       </p:sp>
       <p:sp>
         <p:nvSpPr>
-          <p:cNvPr id="1492564396" name="Flèche : pentagone 905284374"/>
+          <p:cNvPr id="1841455217" name="ZoneTexte 1440859034"/>
+          <p:cNvSpPr txBox="1"/>
+          <p:nvPr/>
+        </p:nvSpPr>
+        <p:spPr bwMode="auto">
+          <a:xfrm>
+            <a:off x="5708701" y="7138872"/>
+            <a:ext cx="953910" cy="305158"/>
+          </a:xfrm>
+          <a:prstGeom prst="rect">
+            <a:avLst/>
+          </a:prstGeom>
+          <a:noFill/>
+        </p:spPr>
+        <p:txBody>
+          <a:bodyPr vertOverflow="overflow" horzOverflow="overflow" vert="horz" wrap="none" lIns="91440" tIns="45720" rIns="91440" bIns="45720" numCol="1" spcCol="0" rtlCol="0" fromWordArt="0" anchor="t" anchorCtr="0" forceAA="0" compatLnSpc="0">
+            <a:spAutoFit/>
+          </a:bodyPr>
+          <a:lstStyle/>
+          <a:p>
+            <a:pPr algn="ctr">
+              <a:defRPr/>
+            </a:pPr>
+            <a:r>
+              <a:rPr sz="1400" b="1">
+                <a:solidFill>
+                  <a:schemeClr val="bg1">
+                    <a:lumMod val="65000"/>
+                  </a:schemeClr>
+                </a:solidFill>
+              </a:rPr>
+              <a:t>TRAUMA</a:t>
+            </a:r>
+            <a:endParaRPr sz="1600"/>
+          </a:p>
+        </p:txBody>
+      </p:sp>
+      <p:sp>
+        <p:nvSpPr>
+          <p:cNvPr id="493919413" name="Flèche : pentagone 1880610112"/>
           <p:cNvSpPr/>
           <p:nvPr/>
         </p:nvSpPr>
         <p:spPr bwMode="auto">
           <a:xfrm flipH="0" flipV="0">
-            <a:off x="6401493" y="7549779"/>
-            <a:ext cx="143169" cy="140443"/>
+            <a:off x="5798788" y="7549778"/>
+            <a:ext cx="143168" cy="140445"/>
           </a:xfrm>
           <a:prstGeom prst="homePlate">
             <a:avLst>
@@ -9303,53 +9123,14 @@
       </p:sp>
       <p:sp>
         <p:nvSpPr>
-          <p:cNvPr id="1160487741" name="ZoneTexte 1440859034"/>
-          <p:cNvSpPr txBox="1"/>
-          <p:nvPr/>
-        </p:nvSpPr>
-        <p:spPr bwMode="auto">
-          <a:xfrm>
-            <a:off x="5706995" y="7334807"/>
-            <a:ext cx="894969" cy="305159"/>
-          </a:xfrm>
-          <a:prstGeom prst="rect">
-            <a:avLst/>
-          </a:prstGeom>
-          <a:noFill/>
-        </p:spPr>
-        <p:txBody>
-          <a:bodyPr vertOverflow="overflow" horzOverflow="overflow" vert="horz" wrap="none" lIns="91440" tIns="45720" rIns="91440" bIns="45720" numCol="1" spcCol="0" rtlCol="0" fromWordArt="0" anchor="t" anchorCtr="0" forceAA="0" compatLnSpc="0">
-            <a:spAutoFit/>
-          </a:bodyPr>
-          <a:lstStyle/>
-          <a:p>
-            <a:pPr algn="ctr">
-              <a:defRPr/>
-            </a:pPr>
-            <a:r>
-              <a:rPr sz="1400" b="1">
-                <a:solidFill>
-                  <a:schemeClr val="bg1">
-                    <a:lumMod val="65000"/>
-                  </a:schemeClr>
-                </a:solidFill>
-              </a:rPr>
-              <a:t>STRESS</a:t>
-            </a:r>
-            <a:endParaRPr sz="1600"/>
-          </a:p>
-        </p:txBody>
-      </p:sp>
-      <p:sp>
-        <p:nvSpPr>
-          <p:cNvPr id="977833722" name="Flèche : pentagone 2055848356"/>
+          <p:cNvPr id="926318724" name="Flèche : pentagone 446859139"/>
           <p:cNvSpPr/>
           <p:nvPr/>
         </p:nvSpPr>
         <p:spPr bwMode="auto">
           <a:xfrm flipH="0" flipV="0">
-            <a:off x="5949464" y="7717969"/>
-            <a:ext cx="143169" cy="140443"/>
+            <a:off x="5949463" y="7549778"/>
+            <a:ext cx="143168" cy="140442"/>
           </a:xfrm>
           <a:prstGeom prst="homePlate">
             <a:avLst>
@@ -9387,14 +9168,14 @@
       </p:sp>
       <p:sp>
         <p:nvSpPr>
-          <p:cNvPr id="1900194777" name="Flèche : pentagone 1980093981"/>
+          <p:cNvPr id="957390982" name="Flèche : pentagone 2055848356"/>
           <p:cNvSpPr/>
           <p:nvPr/>
         </p:nvSpPr>
         <p:spPr bwMode="auto">
           <a:xfrm flipH="0" flipV="0">
-            <a:off x="6100139" y="7717969"/>
-            <a:ext cx="143169" cy="140443"/>
+            <a:off x="6100142" y="7549778"/>
+            <a:ext cx="143168" cy="140442"/>
           </a:xfrm>
           <a:prstGeom prst="homePlate">
             <a:avLst>
@@ -9432,14 +9213,14 @@
       </p:sp>
       <p:sp>
         <p:nvSpPr>
-          <p:cNvPr id="1817866907" name="Flèche : pentagone 905284374"/>
+          <p:cNvPr id="645976634" name="Flèche : pentagone 1980093981"/>
           <p:cNvSpPr/>
           <p:nvPr/>
         </p:nvSpPr>
         <p:spPr bwMode="auto">
           <a:xfrm flipH="0" flipV="0">
-            <a:off x="6250818" y="7717969"/>
-            <a:ext cx="143169" cy="140443"/>
+            <a:off x="6250817" y="7549778"/>
+            <a:ext cx="143168" cy="140442"/>
           </a:xfrm>
           <a:prstGeom prst="homePlate">
             <a:avLst>
@@ -9477,14 +9258,59 @@
       </p:sp>
       <p:sp>
         <p:nvSpPr>
-          <p:cNvPr id="1660188788" name="ZoneTexte 1440859034"/>
+          <p:cNvPr id="1996518039" name="Flèche : pentagone 905284374"/>
+          <p:cNvSpPr/>
+          <p:nvPr/>
+        </p:nvSpPr>
+        <p:spPr bwMode="auto">
+          <a:xfrm flipH="0" flipV="0">
+            <a:off x="6401493" y="7549778"/>
+            <a:ext cx="143168" cy="140442"/>
+          </a:xfrm>
+          <a:prstGeom prst="homePlate">
+            <a:avLst>
+              <a:gd name="adj" fmla="val 50000"/>
+            </a:avLst>
+          </a:prstGeom>
+          <a:noFill/>
+          <a:ln w="12700" cap="flat" cmpd="sng" algn="ctr">
+            <a:solidFill>
+              <a:schemeClr val="tx1">
+                <a:lumMod val="50196"/>
+                <a:lumOff val="49804"/>
+              </a:schemeClr>
+            </a:solidFill>
+            <a:prstDash val="solid"/>
+            <a:miter lim="800000"/>
+          </a:ln>
+        </p:spPr>
+        <p:style>
+          <a:lnRef idx="2">
+            <a:schemeClr val="accent1">
+              <a:shade val="50000"/>
+            </a:schemeClr>
+          </a:lnRef>
+          <a:fillRef idx="1">
+            <a:schemeClr val="accent1"/>
+          </a:fillRef>
+          <a:effectRef idx="0">
+            <a:schemeClr val="accent1"/>
+          </a:effectRef>
+          <a:fontRef idx="minor">
+            <a:schemeClr val="lt1"/>
+          </a:fontRef>
+        </p:style>
+      </p:sp>
+      <p:sp>
+        <p:nvSpPr>
+          <p:cNvPr id="1466860256" name="ZoneTexte 1440859034"/>
           <p:cNvSpPr txBox="1"/>
           <p:nvPr/>
         </p:nvSpPr>
         <p:spPr bwMode="auto">
           <a:xfrm>
-            <a:off x="5708882" y="7777055"/>
-            <a:ext cx="953910" cy="305159"/>
+            <a:off x="5706994" y="7334806"/>
+            <a:ext cx="894969" cy="305158"/>
           </a:xfrm>
           <a:prstGeom prst="rect">
             <a:avLst/>
@@ -9508,7 +9334,7 @@
                   </a:schemeClr>
                 </a:solidFill>
               </a:rPr>
-              <a:t>TRAUMA</a:t>
+              <a:t>STRESS</a:t>
             </a:r>
             <a:endParaRPr sz="1600"/>
           </a:p>
@@ -9516,13 +9342,187 @@
       </p:sp>
       <p:sp>
         <p:nvSpPr>
-          <p:cNvPr id="894474244" name=""/>
+          <p:cNvPr id="1154417666" name="Flèche : pentagone 2055848356"/>
+          <p:cNvSpPr/>
+          <p:nvPr/>
+        </p:nvSpPr>
+        <p:spPr bwMode="auto">
+          <a:xfrm flipH="0" flipV="0">
+            <a:off x="5949463" y="7717968"/>
+            <a:ext cx="143168" cy="140442"/>
+          </a:xfrm>
+          <a:prstGeom prst="homePlate">
+            <a:avLst>
+              <a:gd name="adj" fmla="val 50000"/>
+            </a:avLst>
+          </a:prstGeom>
+          <a:noFill/>
+          <a:ln w="12700" cap="flat" cmpd="sng" algn="ctr">
+            <a:solidFill>
+              <a:schemeClr val="tx1">
+                <a:lumMod val="50196"/>
+                <a:lumOff val="49804"/>
+              </a:schemeClr>
+            </a:solidFill>
+            <a:prstDash val="solid"/>
+            <a:miter lim="800000"/>
+          </a:ln>
+        </p:spPr>
+        <p:style>
+          <a:lnRef idx="2">
+            <a:schemeClr val="accent1">
+              <a:shade val="50000"/>
+            </a:schemeClr>
+          </a:lnRef>
+          <a:fillRef idx="1">
+            <a:schemeClr val="accent1"/>
+          </a:fillRef>
+          <a:effectRef idx="0">
+            <a:schemeClr val="accent1"/>
+          </a:effectRef>
+          <a:fontRef idx="minor">
+            <a:schemeClr val="lt1"/>
+          </a:fontRef>
+        </p:style>
+      </p:sp>
+      <p:sp>
+        <p:nvSpPr>
+          <p:cNvPr id="1049054438" name="Flèche : pentagone 1980093981"/>
+          <p:cNvSpPr/>
+          <p:nvPr/>
+        </p:nvSpPr>
+        <p:spPr bwMode="auto">
+          <a:xfrm flipH="0" flipV="0">
+            <a:off x="6100138" y="7717968"/>
+            <a:ext cx="143168" cy="140442"/>
+          </a:xfrm>
+          <a:prstGeom prst="homePlate">
+            <a:avLst>
+              <a:gd name="adj" fmla="val 50000"/>
+            </a:avLst>
+          </a:prstGeom>
+          <a:noFill/>
+          <a:ln w="12700" cap="flat" cmpd="sng" algn="ctr">
+            <a:solidFill>
+              <a:schemeClr val="tx1">
+                <a:lumMod val="50196"/>
+                <a:lumOff val="49804"/>
+              </a:schemeClr>
+            </a:solidFill>
+            <a:prstDash val="solid"/>
+            <a:miter lim="800000"/>
+          </a:ln>
+        </p:spPr>
+        <p:style>
+          <a:lnRef idx="2">
+            <a:schemeClr val="accent1">
+              <a:shade val="50000"/>
+            </a:schemeClr>
+          </a:lnRef>
+          <a:fillRef idx="1">
+            <a:schemeClr val="accent1"/>
+          </a:fillRef>
+          <a:effectRef idx="0">
+            <a:schemeClr val="accent1"/>
+          </a:effectRef>
+          <a:fontRef idx="minor">
+            <a:schemeClr val="lt1"/>
+          </a:fontRef>
+        </p:style>
+      </p:sp>
+      <p:sp>
+        <p:nvSpPr>
+          <p:cNvPr id="1640577591" name="Flèche : pentagone 905284374"/>
+          <p:cNvSpPr/>
+          <p:nvPr/>
+        </p:nvSpPr>
+        <p:spPr bwMode="auto">
+          <a:xfrm flipH="0" flipV="0">
+            <a:off x="6250817" y="7717968"/>
+            <a:ext cx="143168" cy="140442"/>
+          </a:xfrm>
+          <a:prstGeom prst="homePlate">
+            <a:avLst>
+              <a:gd name="adj" fmla="val 50000"/>
+            </a:avLst>
+          </a:prstGeom>
+          <a:noFill/>
+          <a:ln w="12700" cap="flat" cmpd="sng" algn="ctr">
+            <a:solidFill>
+              <a:schemeClr val="tx1">
+                <a:lumMod val="50196"/>
+                <a:lumOff val="49804"/>
+              </a:schemeClr>
+            </a:solidFill>
+            <a:prstDash val="solid"/>
+            <a:miter lim="800000"/>
+          </a:ln>
+        </p:spPr>
+        <p:style>
+          <a:lnRef idx="2">
+            <a:schemeClr val="accent1">
+              <a:shade val="50000"/>
+            </a:schemeClr>
+          </a:lnRef>
+          <a:fillRef idx="1">
+            <a:schemeClr val="accent1"/>
+          </a:fillRef>
+          <a:effectRef idx="0">
+            <a:schemeClr val="accent1"/>
+          </a:effectRef>
+          <a:fontRef idx="minor">
+            <a:schemeClr val="lt1"/>
+          </a:fontRef>
+        </p:style>
+      </p:sp>
+      <p:sp>
+        <p:nvSpPr>
+          <p:cNvPr id="1235941007" name="ZoneTexte 1440859034"/>
+          <p:cNvSpPr txBox="1"/>
+          <p:nvPr/>
+        </p:nvSpPr>
+        <p:spPr bwMode="auto">
+          <a:xfrm>
+            <a:off x="5708881" y="7777053"/>
+            <a:ext cx="953910" cy="305158"/>
+          </a:xfrm>
+          <a:prstGeom prst="rect">
+            <a:avLst/>
+          </a:prstGeom>
+          <a:noFill/>
+        </p:spPr>
+        <p:txBody>
+          <a:bodyPr vertOverflow="overflow" horzOverflow="overflow" vert="horz" wrap="none" lIns="91440" tIns="45720" rIns="91440" bIns="45720" numCol="1" spcCol="0" rtlCol="0" fromWordArt="0" anchor="t" anchorCtr="0" forceAA="0" compatLnSpc="0">
+            <a:spAutoFit/>
+          </a:bodyPr>
+          <a:lstStyle/>
+          <a:p>
+            <a:pPr algn="ctr">
+              <a:defRPr/>
+            </a:pPr>
+            <a:r>
+              <a:rPr sz="1400" b="1">
+                <a:solidFill>
+                  <a:schemeClr val="bg1">
+                    <a:lumMod val="65000"/>
+                  </a:schemeClr>
+                </a:solidFill>
+              </a:rPr>
+              <a:t>TRAUMA</a:t>
+            </a:r>
+            <a:endParaRPr sz="1600"/>
+          </a:p>
+        </p:txBody>
+      </p:sp>
+      <p:sp>
+        <p:nvSpPr>
+          <p:cNvPr id="40452898" name=""/>
           <p:cNvSpPr txBox="1"/>
           <p:nvPr/>
         </p:nvSpPr>
         <p:spPr bwMode="auto">
           <a:xfrm rot="0" flipH="0" flipV="0">
-            <a:off x="3426224" y="9345174"/>
+            <a:off x="3426223" y="9345173"/>
             <a:ext cx="1546416" cy="385902"/>
           </a:xfrm>
           <a:prstGeom prst="rect">
@@ -9680,13 +9680,13 @@
       </p:sp>
       <p:sp>
         <p:nvSpPr>
-          <p:cNvPr id="973291325" name=""/>
+          <p:cNvPr id="346168976" name=""/>
           <p:cNvSpPr txBox="1"/>
           <p:nvPr/>
         </p:nvSpPr>
         <p:spPr bwMode="auto">
           <a:xfrm rot="0" flipH="0" flipV="0">
-            <a:off x="5270756" y="9186383"/>
+            <a:off x="5270755" y="9186382"/>
             <a:ext cx="1546416" cy="385902"/>
           </a:xfrm>
           <a:prstGeom prst="rect">
@@ -9844,13 +9844,13 @@
       </p:sp>
       <p:sp>
         <p:nvSpPr>
-          <p:cNvPr id="1051435069" name=""/>
+          <p:cNvPr id="316838929" name=""/>
           <p:cNvSpPr txBox="1"/>
           <p:nvPr/>
         </p:nvSpPr>
         <p:spPr bwMode="auto">
           <a:xfrm rot="0" flipH="0" flipV="0">
-            <a:off x="5270756" y="9345174"/>
+            <a:off x="5270755" y="9345173"/>
             <a:ext cx="1546776" cy="385902"/>
           </a:xfrm>
           <a:prstGeom prst="rect">
@@ -10041,7 +10041,7 @@
       </p:grpSpPr>
       <p:sp>
         <p:nvSpPr>
-          <p:cNvPr id="591387563" name=""/>
+          <p:cNvPr id="485337054" name=""/>
           <p:cNvSpPr/>
           <p:nvPr/>
         </p:nvSpPr>
@@ -10084,7 +10084,7 @@
       </p:sp>
       <p:sp>
         <p:nvSpPr>
-          <p:cNvPr id="2077322176" name=""/>
+          <p:cNvPr id="1749974021" name=""/>
           <p:cNvSpPr txBox="1"/>
           <p:nvPr/>
         </p:nvSpPr>
@@ -10150,7 +10150,7 @@
       </p:sp>
       <p:cxnSp>
         <p:nvCxnSpPr>
-          <p:cNvPr id="1299865765" name="Connecteur droit 1568760680"/>
+          <p:cNvPr id="630201107" name="Connecteur droit 1568760680"/>
           <p:cNvCxnSpPr/>
           <p:nvPr/>
         </p:nvCxnSpPr>
@@ -10192,7 +10192,7 @@
       </p:cxnSp>
       <p:sp>
         <p:nvSpPr>
-          <p:cNvPr id="556345685" name="ZoneTexte 1868728971"/>
+          <p:cNvPr id="261600234" name="ZoneTexte 1868728971"/>
           <p:cNvSpPr txBox="1"/>
           <p:nvPr/>
         </p:nvSpPr>
@@ -10232,7 +10232,7 @@
       </p:sp>
       <p:cxnSp>
         <p:nvCxnSpPr>
-          <p:cNvPr id="828269592" name="Connecteur droit 806540798"/>
+          <p:cNvPr id="755194337" name="Connecteur droit 806540798"/>
           <p:cNvCxnSpPr/>
           <p:nvPr/>
         </p:nvCxnSpPr>
@@ -10274,7 +10274,7 @@
       </p:cxnSp>
       <p:sp>
         <p:nvSpPr>
-          <p:cNvPr id="86531202" name="ZoneTexte 406616703"/>
+          <p:cNvPr id="630387427" name="ZoneTexte 406616703"/>
           <p:cNvSpPr txBox="1"/>
           <p:nvPr/>
         </p:nvSpPr>
@@ -10314,7 +10314,7 @@
       </p:sp>
       <p:sp>
         <p:nvSpPr>
-          <p:cNvPr id="1003509021" name="ZoneTexte 1302587497"/>
+          <p:cNvPr id="1628357421" name="ZoneTexte 1302587497"/>
           <p:cNvSpPr txBox="1"/>
           <p:nvPr/>
         </p:nvSpPr>
@@ -10518,7 +10518,7 @@
       </p:sp>
       <p:sp>
         <p:nvSpPr>
-          <p:cNvPr id="374080768" name="Rectangle 38344096"/>
+          <p:cNvPr id="1308805756" name="Rectangle 38344096"/>
           <p:cNvSpPr/>
           <p:nvPr/>
         </p:nvSpPr>
@@ -10558,7 +10558,7 @@
       </p:sp>
       <p:sp>
         <p:nvSpPr>
-          <p:cNvPr id="133886075" name="ZoneTexte 1075280509"/>
+          <p:cNvPr id="172557796" name="ZoneTexte 1075280509"/>
           <p:cNvSpPr txBox="1"/>
           <p:nvPr/>
         </p:nvSpPr>
@@ -10631,7 +10631,7 @@
       </p:sp>
       <p:sp>
         <p:nvSpPr>
-          <p:cNvPr id="1942043863" name="ZoneTexte 226284734"/>
+          <p:cNvPr id="727795876" name="ZoneTexte 226284734"/>
           <p:cNvSpPr txBox="1"/>
           <p:nvPr/>
         </p:nvSpPr>
@@ -10704,7 +10704,7 @@
       </p:sp>
       <p:sp>
         <p:nvSpPr>
-          <p:cNvPr id="1018123804" name="ZoneTexte 162158187"/>
+          <p:cNvPr id="1670902098" name="ZoneTexte 162158187"/>
           <p:cNvSpPr txBox="1"/>
           <p:nvPr/>
         </p:nvSpPr>
@@ -10754,7 +10754,7 @@
       </p:sp>
       <p:sp>
         <p:nvSpPr>
-          <p:cNvPr id="1761064515" name="Rectangle : avec coins arrondis en haut 1452601499"/>
+          <p:cNvPr id="269449638" name="Rectangle : avec coins arrondis en haut 1452601499"/>
           <p:cNvSpPr/>
           <p:nvPr/>
         </p:nvSpPr>
@@ -10797,7 +10797,7 @@
       </p:sp>
       <p:sp>
         <p:nvSpPr>
-          <p:cNvPr id="325763081" name="Rectangle : avec coins arrondis en haut 1782110635"/>
+          <p:cNvPr id="1264614689" name="Rectangle : avec coins arrondis en haut 1782110635"/>
           <p:cNvSpPr/>
           <p:nvPr/>
         </p:nvSpPr>
@@ -10843,7 +10843,7 @@
       </p:sp>
       <p:sp>
         <p:nvSpPr>
-          <p:cNvPr id="854606838" name="Rectangle : avec coins arrondis en haut 945118596"/>
+          <p:cNvPr id="1995197173" name="Rectangle : avec coins arrondis en haut 945118596"/>
           <p:cNvSpPr/>
           <p:nvPr/>
         </p:nvSpPr>
@@ -10889,7 +10889,7 @@
       </p:sp>
       <p:sp>
         <p:nvSpPr>
-          <p:cNvPr id="632961650" name=""/>
+          <p:cNvPr id="918961277" name=""/>
           <p:cNvSpPr/>
           <p:nvPr/>
         </p:nvSpPr>
@@ -10931,7 +10931,7 @@
       </p:sp>
       <p:sp>
         <p:nvSpPr>
-          <p:cNvPr id="2049584505" name=""/>
+          <p:cNvPr id="433376560" name=""/>
           <p:cNvSpPr txBox="1"/>
           <p:nvPr/>
         </p:nvSpPr>
@@ -10971,7 +10971,7 @@
       </p:sp>
       <p:sp>
         <p:nvSpPr>
-          <p:cNvPr id="1326703020" name=""/>
+          <p:cNvPr id="344712811" name=""/>
           <p:cNvSpPr/>
           <p:nvPr/>
         </p:nvSpPr>
@@ -11042,7 +11042,7 @@
       </p:sp>
       <p:sp>
         <p:nvSpPr>
-          <p:cNvPr id="1475935701" name=""/>
+          <p:cNvPr id="822562660" name=""/>
           <p:cNvSpPr txBox="1"/>
           <p:nvPr/>
         </p:nvSpPr>
@@ -11079,7 +11079,7 @@
       </p:sp>
       <p:sp>
         <p:nvSpPr>
-          <p:cNvPr id="2117444558" name=""/>
+          <p:cNvPr id="1869324117" name=""/>
           <p:cNvSpPr txBox="1"/>
           <p:nvPr/>
         </p:nvSpPr>
@@ -11313,7 +11313,7 @@
       </p:sp>
       <p:sp>
         <p:nvSpPr>
-          <p:cNvPr id="1302113014" name=""/>
+          <p:cNvPr id="852086003" name=""/>
           <p:cNvSpPr txBox="1"/>
           <p:nvPr/>
         </p:nvSpPr>
@@ -11592,7 +11592,7 @@
       </p:sp>
       <p:sp>
         <p:nvSpPr>
-          <p:cNvPr id="1964273091" name=""/>
+          <p:cNvPr id="550848842" name=""/>
           <p:cNvSpPr txBox="1"/>
           <p:nvPr/>
         </p:nvSpPr>
@@ -11983,7 +11983,7 @@
       </p:sp>
       <p:sp>
         <p:nvSpPr>
-          <p:cNvPr id="2008820004" name=""/>
+          <p:cNvPr id="397996081" name=""/>
           <p:cNvSpPr txBox="1"/>
           <p:nvPr/>
         </p:nvSpPr>
@@ -12374,7 +12374,7 @@
       </p:sp>
       <p:sp>
         <p:nvSpPr>
-          <p:cNvPr id="1436579179" name=""/>
+          <p:cNvPr id="1980439228" name=""/>
           <p:cNvSpPr txBox="1"/>
           <p:nvPr/>
         </p:nvSpPr>
@@ -12765,7 +12765,7 @@
       </p:sp>
       <p:sp>
         <p:nvSpPr>
-          <p:cNvPr id="201230791" name=""/>
+          <p:cNvPr id="2111992988" name=""/>
           <p:cNvSpPr txBox="1"/>
           <p:nvPr/>
         </p:nvSpPr>
@@ -13156,7 +13156,7 @@
       </p:sp>
       <p:sp>
         <p:nvSpPr>
-          <p:cNvPr id="152823308" name=""/>
+          <p:cNvPr id="771286076" name=""/>
           <p:cNvSpPr txBox="1"/>
           <p:nvPr/>
         </p:nvSpPr>
@@ -13547,7 +13547,7 @@
       </p:sp>
       <p:sp>
         <p:nvSpPr>
-          <p:cNvPr id="489985910" name=""/>
+          <p:cNvPr id="1564893991" name=""/>
           <p:cNvSpPr txBox="1"/>
           <p:nvPr/>
         </p:nvSpPr>
@@ -13938,7 +13938,7 @@
       </p:sp>
       <p:sp>
         <p:nvSpPr>
-          <p:cNvPr id="516138876" name=""/>
+          <p:cNvPr id="24132190" name=""/>
           <p:cNvSpPr txBox="1"/>
           <p:nvPr/>
         </p:nvSpPr>
@@ -14329,7 +14329,7 @@
       </p:sp>
       <p:sp>
         <p:nvSpPr>
-          <p:cNvPr id="882747423" name=""/>
+          <p:cNvPr id="232991173" name=""/>
           <p:cNvSpPr txBox="1"/>
           <p:nvPr/>
         </p:nvSpPr>
@@ -14720,7 +14720,7 @@
       </p:sp>
       <p:sp>
         <p:nvSpPr>
-          <p:cNvPr id="733840457" name=""/>
+          <p:cNvPr id="141361794" name=""/>
           <p:cNvSpPr txBox="1"/>
           <p:nvPr/>
         </p:nvSpPr>
@@ -15111,7 +15111,7 @@
       </p:sp>
       <p:sp>
         <p:nvSpPr>
-          <p:cNvPr id="1725048076" name=""/>
+          <p:cNvPr id="1765869880" name=""/>
           <p:cNvSpPr txBox="1"/>
           <p:nvPr/>
         </p:nvSpPr>
@@ -15502,7 +15502,7 @@
       </p:sp>
       <p:sp>
         <p:nvSpPr>
-          <p:cNvPr id="519257650" name=""/>
+          <p:cNvPr id="1224842233" name=""/>
           <p:cNvSpPr txBox="1"/>
           <p:nvPr/>
         </p:nvSpPr>
@@ -15893,7 +15893,7 @@
       </p:sp>
       <p:sp>
         <p:nvSpPr>
-          <p:cNvPr id="335385134" name=""/>
+          <p:cNvPr id="527852477" name=""/>
           <p:cNvSpPr txBox="1"/>
           <p:nvPr/>
         </p:nvSpPr>
@@ -16284,7 +16284,7 @@
       </p:sp>
       <p:sp>
         <p:nvSpPr>
-          <p:cNvPr id="116187254" name=""/>
+          <p:cNvPr id="1990450279" name=""/>
           <p:cNvSpPr txBox="1"/>
           <p:nvPr/>
         </p:nvSpPr>
@@ -16675,7 +16675,7 @@
       </p:sp>
       <p:sp>
         <p:nvSpPr>
-          <p:cNvPr id="11058899" name=""/>
+          <p:cNvPr id="902056354" name=""/>
           <p:cNvSpPr txBox="1"/>
           <p:nvPr/>
         </p:nvSpPr>
@@ -17066,7 +17066,7 @@
       </p:sp>
       <p:sp>
         <p:nvSpPr>
-          <p:cNvPr id="2101764948" name=""/>
+          <p:cNvPr id="684594148" name=""/>
           <p:cNvSpPr txBox="1"/>
           <p:nvPr/>
         </p:nvSpPr>
@@ -17274,7 +17274,7 @@
       </p:sp>
       <p:cxnSp>
         <p:nvCxnSpPr>
-          <p:cNvPr id="2081557740" name="Connecteur droit 806540798"/>
+          <p:cNvPr id="1346224713" name="Connecteur droit 806540798"/>
           <p:cNvCxnSpPr/>
           <p:nvPr/>
         </p:nvCxnSpPr>
@@ -17316,7 +17316,7 @@
       </p:cxnSp>
       <p:sp>
         <p:nvSpPr>
-          <p:cNvPr id="579160766" name="ZoneTexte 406616703"/>
+          <p:cNvPr id="441476318" name="ZoneTexte 406616703"/>
           <p:cNvSpPr txBox="1"/>
           <p:nvPr/>
         </p:nvSpPr>
@@ -17356,7 +17356,7 @@
       </p:sp>
       <p:sp>
         <p:nvSpPr>
-          <p:cNvPr id="1307579552" name=""/>
+          <p:cNvPr id="1521223584" name=""/>
           <p:cNvSpPr txBox="1"/>
           <p:nvPr/>
         </p:nvSpPr>
@@ -17455,7 +17455,7 @@
       </p:grpSpPr>
       <p:cxnSp>
         <p:nvCxnSpPr>
-          <p:cNvPr id="852453575" name="Connecteur droit 266926011"/>
+          <p:cNvPr id="51370687" name="Connecteur droit 266926011"/>
           <p:cNvCxnSpPr/>
           <p:nvPr/>
         </p:nvCxnSpPr>
@@ -17497,7 +17497,7 @@
       </p:cxnSp>
       <p:sp>
         <p:nvSpPr>
-          <p:cNvPr id="978918710" name="ZoneTexte 1043763612"/>
+          <p:cNvPr id="2030155601" name="ZoneTexte 1043763612"/>
           <p:cNvSpPr txBox="1"/>
           <p:nvPr/>
         </p:nvSpPr>
@@ -17537,7 +17537,7 @@
       </p:sp>
       <p:cxnSp>
         <p:nvCxnSpPr>
-          <p:cNvPr id="1844698844" name="Connecteur droit 1586327141"/>
+          <p:cNvPr id="655990818" name="Connecteur droit 1586327141"/>
           <p:cNvCxnSpPr/>
           <p:nvPr/>
         </p:nvCxnSpPr>
@@ -17580,7 +17580,7 @@
       </p:cxnSp>
       <p:sp>
         <p:nvSpPr>
-          <p:cNvPr id="164244367" name="ZoneTexte 1691387439"/>
+          <p:cNvPr id="761148832" name="ZoneTexte 1691387439"/>
           <p:cNvSpPr txBox="1"/>
           <p:nvPr/>
         </p:nvSpPr>
@@ -17620,7 +17620,7 @@
       </p:sp>
       <p:cxnSp>
         <p:nvCxnSpPr>
-          <p:cNvPr id="1813051427" name="Connecteur droit 1743707585"/>
+          <p:cNvPr id="1927788260" name="Connecteur droit 1743707585"/>
           <p:cNvCxnSpPr/>
           <p:nvPr/>
         </p:nvCxnSpPr>
@@ -17663,7 +17663,7 @@
       </p:cxnSp>
       <p:sp>
         <p:nvSpPr>
-          <p:cNvPr id="1955254136" name="ZoneTexte 1503300725"/>
+          <p:cNvPr id="854937027" name="ZoneTexte 1503300725"/>
           <p:cNvSpPr txBox="1"/>
           <p:nvPr/>
         </p:nvSpPr>
@@ -17745,7 +17745,7 @@
       </p:sp>
       <p:sp>
         <p:nvSpPr>
-          <p:cNvPr id="858693496" name="Rectangle : avec coins arrondis en haut 1151560973"/>
+          <p:cNvPr id="1394441093" name="Rectangle : avec coins arrondis en haut 1151560973"/>
           <p:cNvSpPr/>
           <p:nvPr/>
         </p:nvSpPr>
@@ -17791,7 +17791,7 @@
       </p:sp>
       <p:sp>
         <p:nvSpPr>
-          <p:cNvPr id="2015265541" name="Flèche : pentagone 1610574377"/>
+          <p:cNvPr id="1323594208" name="Flèche : pentagone 1610574377"/>
           <p:cNvSpPr/>
           <p:nvPr/>
         </p:nvSpPr>
@@ -17836,7 +17836,7 @@
       </p:sp>
       <p:sp>
         <p:nvSpPr>
-          <p:cNvPr id="529512172" name="Flèche : pentagone 463861063"/>
+          <p:cNvPr id="700293164" name="Flèche : pentagone 463861063"/>
           <p:cNvSpPr/>
           <p:nvPr/>
         </p:nvSpPr>
@@ -17881,7 +17881,7 @@
       </p:sp>
       <p:sp>
         <p:nvSpPr>
-          <p:cNvPr id="606492989" name="Flèche : pentagone 272004907"/>
+          <p:cNvPr id="612677833" name="Flèche : pentagone 272004907"/>
           <p:cNvSpPr/>
           <p:nvPr/>
         </p:nvSpPr>
@@ -17926,7 +17926,7 @@
       </p:sp>
       <p:sp>
         <p:nvSpPr>
-          <p:cNvPr id="972714653" name="Flèche : pentagone 28174069"/>
+          <p:cNvPr id="711462972" name="Flèche : pentagone 28174069"/>
           <p:cNvSpPr/>
           <p:nvPr/>
         </p:nvSpPr>
@@ -17971,7 +17971,7 @@
       </p:sp>
       <p:sp>
         <p:nvSpPr>
-          <p:cNvPr id="241482915" name="Flèche : pentagone 978127220"/>
+          <p:cNvPr id="1244723136" name="Flèche : pentagone 978127220"/>
           <p:cNvSpPr/>
           <p:nvPr/>
         </p:nvSpPr>
@@ -18016,7 +18016,7 @@
       </p:sp>
       <p:sp>
         <p:nvSpPr>
-          <p:cNvPr id="1388904870" name="ZoneTexte 1693594013"/>
+          <p:cNvPr id="360579640" name="ZoneTexte 1693594013"/>
           <p:cNvSpPr txBox="1"/>
           <p:nvPr/>
         </p:nvSpPr>
@@ -18381,7 +18381,7 @@
       </p:sp>
       <p:sp>
         <p:nvSpPr>
-          <p:cNvPr id="679686526" name="ZoneTexte 1975797288"/>
+          <p:cNvPr id="650677522" name="ZoneTexte 1975797288"/>
           <p:cNvSpPr txBox="1"/>
           <p:nvPr/>
         </p:nvSpPr>
@@ -18421,7 +18421,7 @@
       </p:sp>
       <p:sp>
         <p:nvSpPr>
-          <p:cNvPr id="1080242708" name="ZoneTexte 2064865984"/>
+          <p:cNvPr id="774654996" name="ZoneTexte 2064865984"/>
           <p:cNvSpPr txBox="1"/>
           <p:nvPr/>
         </p:nvSpPr>
@@ -18686,7 +18686,7 @@
       </p:sp>
       <p:sp>
         <p:nvSpPr>
-          <p:cNvPr id="768979426" name="ZoneTexte 1387173154"/>
+          <p:cNvPr id="984324018" name="ZoneTexte 1387173154"/>
           <p:cNvSpPr txBox="1"/>
           <p:nvPr/>
         </p:nvSpPr>
@@ -19066,7 +19066,7 @@
       </p:sp>
       <p:sp>
         <p:nvSpPr>
-          <p:cNvPr id="701627336" name="ZoneTexte 523755832"/>
+          <p:cNvPr id="1529192805" name="ZoneTexte 523755832"/>
           <p:cNvSpPr txBox="1"/>
           <p:nvPr/>
         </p:nvSpPr>
@@ -19562,7 +19562,7 @@
       </p:sp>
       <p:cxnSp>
         <p:nvCxnSpPr>
-          <p:cNvPr id="469805259" name="Connecteur droit 2085669542"/>
+          <p:cNvPr id="308049474" name="Connecteur droit 2085669542"/>
           <p:cNvCxnSpPr/>
           <p:nvPr/>
         </p:nvCxnSpPr>
@@ -19605,7 +19605,7 @@
       </p:cxnSp>
       <p:sp>
         <p:nvSpPr>
-          <p:cNvPr id="1295948456" name="ZoneTexte 34398067"/>
+          <p:cNvPr id="1665866136" name="ZoneTexte 34398067"/>
           <p:cNvSpPr txBox="1"/>
           <p:nvPr/>
         </p:nvSpPr>
@@ -19648,7 +19648,7 @@
       </p:sp>
       <p:sp>
         <p:nvSpPr>
-          <p:cNvPr id="461347571" name="ZoneTexte 273581705"/>
+          <p:cNvPr id="861853551" name="ZoneTexte 273581705"/>
           <p:cNvSpPr txBox="1"/>
           <p:nvPr/>
         </p:nvSpPr>
@@ -19946,7 +19946,7 @@
       </p:sp>
       <p:sp>
         <p:nvSpPr>
-          <p:cNvPr id="1739647728" name="ZoneTexte 1727393832"/>
+          <p:cNvPr id="940376329" name="ZoneTexte 1727393832"/>
           <p:cNvSpPr txBox="1"/>
           <p:nvPr/>
         </p:nvSpPr>
@@ -19988,7 +19988,7 @@
       </p:sp>
       <p:sp>
         <p:nvSpPr>
-          <p:cNvPr id="409147043" name="ZoneTexte 504516740"/>
+          <p:cNvPr id="1183379562" name="ZoneTexte 504516740"/>
           <p:cNvSpPr txBox="1"/>
           <p:nvPr/>
         </p:nvSpPr>
@@ -20030,7 +20030,7 @@
       </p:sp>
       <p:sp>
         <p:nvSpPr>
-          <p:cNvPr id="254907847" name="ZoneTexte 1"/>
+          <p:cNvPr id="1737963380" name="ZoneTexte 1"/>
           <p:cNvSpPr txBox="1"/>
           <p:nvPr/>
         </p:nvSpPr>
@@ -21493,7 +21493,7 @@
       </p:sp>
       <p:sp>
         <p:nvSpPr>
-          <p:cNvPr id="854874084" name="ZoneTexte 2"/>
+          <p:cNvPr id="1032224572" name="ZoneTexte 2"/>
           <p:cNvSpPr txBox="1"/>
           <p:nvPr/>
         </p:nvSpPr>
@@ -22031,7 +22031,7 @@
       </p:sp>
       <p:sp>
         <p:nvSpPr>
-          <p:cNvPr id="1602303910" name=""/>
+          <p:cNvPr id="2103378489" name=""/>
           <p:cNvSpPr/>
           <p:nvPr/>
         </p:nvSpPr>
@@ -22071,7 +22071,7 @@
       </p:sp>
       <p:sp>
         <p:nvSpPr>
-          <p:cNvPr id="1322435642" name="Rectangle : avec coins arrondis en haut 1151560973"/>
+          <p:cNvPr id="690231890" name="Rectangle : avec coins arrondis en haut 1151560973"/>
           <p:cNvSpPr/>
           <p:nvPr/>
         </p:nvSpPr>
@@ -22119,7 +22119,7 @@
       </p:sp>
       <p:sp>
         <p:nvSpPr>
-          <p:cNvPr id="1100762921" name=""/>
+          <p:cNvPr id="509524490" name=""/>
           <p:cNvSpPr/>
           <p:nvPr/>
         </p:nvSpPr>
@@ -22159,7 +22159,7 @@
       </p:sp>
       <p:sp>
         <p:nvSpPr>
-          <p:cNvPr id="1667960735" name="Rectangle : avec coins arrondis en haut 1151560973"/>
+          <p:cNvPr id="1604471321" name="Rectangle : avec coins arrondis en haut 1151560973"/>
           <p:cNvSpPr/>
           <p:nvPr/>
         </p:nvSpPr>
@@ -22207,7 +22207,7 @@
       </p:sp>
       <p:sp>
         <p:nvSpPr>
-          <p:cNvPr id="1149175492" name=""/>
+          <p:cNvPr id="1304013939" name=""/>
           <p:cNvSpPr/>
           <p:nvPr/>
         </p:nvSpPr>
@@ -22247,7 +22247,7 @@
       </p:sp>
       <p:sp>
         <p:nvSpPr>
-          <p:cNvPr id="225730948" name="Rectangle : avec coins arrondis en haut 1151560973"/>
+          <p:cNvPr id="957267439" name="Rectangle : avec coins arrondis en haut 1151560973"/>
           <p:cNvSpPr/>
           <p:nvPr/>
         </p:nvSpPr>
@@ -22295,7 +22295,7 @@
       </p:sp>
       <p:sp>
         <p:nvSpPr>
-          <p:cNvPr id="930305326" name=""/>
+          <p:cNvPr id="1044241669" name=""/>
           <p:cNvSpPr txBox="1"/>
           <p:nvPr/>
         </p:nvSpPr>
@@ -22360,7 +22360,7 @@
       </p:sp>
       <p:sp>
         <p:nvSpPr>
-          <p:cNvPr id="996808007" name=""/>
+          <p:cNvPr id="1468565400" name=""/>
           <p:cNvSpPr txBox="1"/>
           <p:nvPr/>
         </p:nvSpPr>
@@ -22489,7 +22489,7 @@
       </p:sp>
       <p:sp>
         <p:nvSpPr>
-          <p:cNvPr id="336631616" name=""/>
+          <p:cNvPr id="1581871426" name=""/>
           <p:cNvSpPr/>
           <p:nvPr/>
         </p:nvSpPr>
@@ -22560,7 +22560,7 @@
       </p:sp>
       <p:sp>
         <p:nvSpPr>
-          <p:cNvPr id="1075153033" name="Flèche : pentagone 1610574377"/>
+          <p:cNvPr id="697783622" name="Flèche : pentagone 1610574377"/>
           <p:cNvSpPr/>
           <p:nvPr/>
         </p:nvSpPr>
@@ -22605,7 +22605,7 @@
       </p:sp>
       <p:sp>
         <p:nvSpPr>
-          <p:cNvPr id="850415433" name="Flèche : pentagone 463861063"/>
+          <p:cNvPr id="1310695694" name="Flèche : pentagone 463861063"/>
           <p:cNvSpPr/>
           <p:nvPr/>
         </p:nvSpPr>
@@ -22650,7 +22650,7 @@
       </p:sp>
       <p:sp>
         <p:nvSpPr>
-          <p:cNvPr id="1198010113" name="Flèche : pentagone 272004907"/>
+          <p:cNvPr id="1947802982" name="Flèche : pentagone 272004907"/>
           <p:cNvSpPr/>
           <p:nvPr/>
         </p:nvSpPr>
@@ -22728,7 +22728,7 @@
       </p:grpSpPr>
       <p:cxnSp>
         <p:nvCxnSpPr>
-          <p:cNvPr id="1484776467" name="Connecteur droit 1942366049"/>
+          <p:cNvPr id="1773844373" name="Connecteur droit 1942366049"/>
           <p:cNvCxnSpPr/>
           <p:nvPr/>
         </p:nvCxnSpPr>
@@ -22771,7 +22771,7 @@
       </p:cxnSp>
       <p:sp>
         <p:nvSpPr>
-          <p:cNvPr id="1504666801" name="ZoneTexte 483029020"/>
+          <p:cNvPr id="2069180838" name="ZoneTexte 483029020"/>
           <p:cNvSpPr txBox="1"/>
           <p:nvPr/>
         </p:nvSpPr>
@@ -22811,7 +22811,7 @@
       </p:sp>
       <p:cxnSp>
         <p:nvCxnSpPr>
-          <p:cNvPr id="1257275958" name="Connecteur droit 626166318"/>
+          <p:cNvPr id="695932085" name="Connecteur droit 626166318"/>
           <p:cNvCxnSpPr/>
           <p:nvPr/>
         </p:nvCxnSpPr>
@@ -22854,7 +22854,7 @@
       </p:cxnSp>
       <p:sp>
         <p:nvSpPr>
-          <p:cNvPr id="1975798018" name="ZoneTexte 2021489157"/>
+          <p:cNvPr id="2116808874" name="ZoneTexte 2021489157"/>
           <p:cNvSpPr txBox="1"/>
           <p:nvPr/>
         </p:nvSpPr>
@@ -22894,7 +22894,7 @@
       </p:sp>
       <p:cxnSp>
         <p:nvCxnSpPr>
-          <p:cNvPr id="425895818" name="Connecteur droit 1991074862"/>
+          <p:cNvPr id="729209437" name="Connecteur droit 1991074862"/>
           <p:cNvCxnSpPr/>
           <p:nvPr/>
         </p:nvCxnSpPr>
@@ -22937,7 +22937,7 @@
       </p:cxnSp>
       <p:sp>
         <p:nvSpPr>
-          <p:cNvPr id="1360303659" name="ZoneTexte 1094835336"/>
+          <p:cNvPr id="1438266110" name="ZoneTexte 1094835336"/>
           <p:cNvSpPr txBox="1"/>
           <p:nvPr/>
         </p:nvSpPr>
@@ -23019,7 +23019,7 @@
       </p:sp>
       <p:sp>
         <p:nvSpPr>
-          <p:cNvPr id="223471646" name="Rectangle : avec coins arrondis en haut 1574209032"/>
+          <p:cNvPr id="182263078" name="Rectangle : avec coins arrondis en haut 1574209032"/>
           <p:cNvSpPr/>
           <p:nvPr/>
         </p:nvSpPr>
@@ -23065,7 +23065,7 @@
       </p:sp>
       <p:sp>
         <p:nvSpPr>
-          <p:cNvPr id="1507023305" name="Flèche : pentagone 521086653"/>
+          <p:cNvPr id="1854213721" name="Flèche : pentagone 521086653"/>
           <p:cNvSpPr/>
           <p:nvPr/>
         </p:nvSpPr>
@@ -23110,7 +23110,7 @@
       </p:sp>
       <p:sp>
         <p:nvSpPr>
-          <p:cNvPr id="710745071" name="Flèche : pentagone 1507310733"/>
+          <p:cNvPr id="755762214" name="Flèche : pentagone 1507310733"/>
           <p:cNvSpPr/>
           <p:nvPr/>
         </p:nvSpPr>
@@ -23155,7 +23155,7 @@
       </p:sp>
       <p:sp>
         <p:nvSpPr>
-          <p:cNvPr id="850134923" name="Flèche : pentagone 732388424"/>
+          <p:cNvPr id="980688293" name="Flèche : pentagone 732388424"/>
           <p:cNvSpPr/>
           <p:nvPr/>
         </p:nvSpPr>
@@ -23200,7 +23200,7 @@
       </p:sp>
       <p:sp>
         <p:nvSpPr>
-          <p:cNvPr id="1315492640" name="Flèche : pentagone 326874465"/>
+          <p:cNvPr id="252107384" name="Flèche : pentagone 326874465"/>
           <p:cNvSpPr/>
           <p:nvPr/>
         </p:nvSpPr>
@@ -23245,7 +23245,7 @@
       </p:sp>
       <p:sp>
         <p:nvSpPr>
-          <p:cNvPr id="708903371" name="Flèche : pentagone 2090650957"/>
+          <p:cNvPr id="1302093649" name="Flèche : pentagone 2090650957"/>
           <p:cNvSpPr/>
           <p:nvPr/>
         </p:nvSpPr>
@@ -23290,7 +23290,7 @@
       </p:sp>
       <p:sp>
         <p:nvSpPr>
-          <p:cNvPr id="41714026" name="ZoneTexte 1374103996"/>
+          <p:cNvPr id="1015838131" name="ZoneTexte 1374103996"/>
           <p:cNvSpPr txBox="1"/>
           <p:nvPr/>
         </p:nvSpPr>
@@ -23577,7 +23577,7 @@
       </p:sp>
       <p:sp>
         <p:nvSpPr>
-          <p:cNvPr id="1708275734" name="ZoneTexte 1748705365"/>
+          <p:cNvPr id="976290110" name="ZoneTexte 1748705365"/>
           <p:cNvSpPr txBox="1"/>
           <p:nvPr/>
         </p:nvSpPr>
@@ -23617,7 +23617,7 @@
       </p:sp>
       <p:cxnSp>
         <p:nvCxnSpPr>
-          <p:cNvPr id="1670723432" name="Connecteur droit 1556830908"/>
+          <p:cNvPr id="274641750" name="Connecteur droit 1556830908"/>
           <p:cNvCxnSpPr/>
           <p:nvPr/>
         </p:nvCxnSpPr>
@@ -23660,7 +23660,7 @@
       </p:cxnSp>
       <p:sp>
         <p:nvSpPr>
-          <p:cNvPr id="1298133452" name="ZoneTexte 409639257"/>
+          <p:cNvPr id="1149681127" name="ZoneTexte 409639257"/>
           <p:cNvSpPr txBox="1"/>
           <p:nvPr/>
         </p:nvSpPr>
@@ -23710,7 +23710,7 @@
       </p:sp>
       <p:sp>
         <p:nvSpPr>
-          <p:cNvPr id="1651004070" name="ZoneTexte 1168472887"/>
+          <p:cNvPr id="1811491143" name="ZoneTexte 1168472887"/>
           <p:cNvSpPr txBox="1"/>
           <p:nvPr/>
         </p:nvSpPr>
@@ -23995,7 +23995,7 @@
       </p:sp>
       <p:sp>
         <p:nvSpPr>
-          <p:cNvPr id="1596943327" name="ZoneTexte 114796530"/>
+          <p:cNvPr id="1942764787" name="ZoneTexte 114796530"/>
           <p:cNvSpPr txBox="1"/>
           <p:nvPr/>
         </p:nvSpPr>
@@ -24373,7 +24373,7 @@
       </p:sp>
       <p:sp>
         <p:nvSpPr>
-          <p:cNvPr id="489235130" name="ZoneTexte 1085068195"/>
+          <p:cNvPr id="504347762" name="ZoneTexte 1085068195"/>
           <p:cNvSpPr txBox="1"/>
           <p:nvPr/>
         </p:nvSpPr>
@@ -25499,7 +25499,7 @@
       </p:sp>
       <p:sp>
         <p:nvSpPr>
-          <p:cNvPr id="909321350" name="Étoile : 5 branches 278736380"/>
+          <p:cNvPr id="1631813686" name="Étoile : 5 branches 278736380"/>
           <p:cNvSpPr/>
           <p:nvPr/>
         </p:nvSpPr>
@@ -25546,7 +25546,7 @@
       </p:sp>
       <p:sp>
         <p:nvSpPr>
-          <p:cNvPr id="690427963" name="Étoile : 5 branches 1495350449"/>
+          <p:cNvPr id="734927332" name="Étoile : 5 branches 1495350449"/>
           <p:cNvSpPr/>
           <p:nvPr/>
         </p:nvSpPr>
@@ -25593,7 +25593,7 @@
       </p:sp>
       <p:sp>
         <p:nvSpPr>
-          <p:cNvPr id="999586084" name="Étoile : 5 branches 79046386"/>
+          <p:cNvPr id="156000808" name="Étoile : 5 branches 79046386"/>
           <p:cNvSpPr/>
           <p:nvPr/>
         </p:nvSpPr>
@@ -25640,7 +25640,7 @@
       </p:sp>
       <p:sp>
         <p:nvSpPr>
-          <p:cNvPr id="1474669068" name="Étoile : 5 branches 749256076"/>
+          <p:cNvPr id="1327280840" name="Étoile : 5 branches 749256076"/>
           <p:cNvSpPr/>
           <p:nvPr/>
         </p:nvSpPr>
@@ -25687,7 +25687,7 @@
       </p:sp>
       <p:sp>
         <p:nvSpPr>
-          <p:cNvPr id="766989575" name="Étoile : 5 branches 411245083"/>
+          <p:cNvPr id="706099500" name="Étoile : 5 branches 411245083"/>
           <p:cNvSpPr/>
           <p:nvPr/>
         </p:nvSpPr>
@@ -25734,7 +25734,7 @@
       </p:sp>
       <p:sp>
         <p:nvSpPr>
-          <p:cNvPr id="1735966127" name="ZoneTexte 496444952"/>
+          <p:cNvPr id="313409989" name="ZoneTexte 496444952"/>
           <p:cNvSpPr txBox="1"/>
           <p:nvPr/>
         </p:nvSpPr>
@@ -25776,7 +25776,7 @@
       </p:sp>
       <p:sp>
         <p:nvSpPr>
-          <p:cNvPr id="196173645" name="ZoneTexte 474433989"/>
+          <p:cNvPr id="2073580061" name="ZoneTexte 474433989"/>
           <p:cNvSpPr txBox="1"/>
           <p:nvPr/>
         </p:nvSpPr>
@@ -25818,7 +25818,7 @@
       </p:sp>
       <p:sp>
         <p:nvSpPr>
-          <p:cNvPr id="626535147" name="ZoneTexte 1"/>
+          <p:cNvPr id="1115033643" name="ZoneTexte 1"/>
           <p:cNvSpPr txBox="1"/>
           <p:nvPr/>
         </p:nvSpPr>
@@ -25919,7 +25919,7 @@
       </p:sp>
       <p:sp>
         <p:nvSpPr>
-          <p:cNvPr id="1996539142" name="ZoneTexte 2"/>
+          <p:cNvPr id="2051111808" name="ZoneTexte 2"/>
           <p:cNvSpPr txBox="1"/>
           <p:nvPr/>
         </p:nvSpPr>
@@ -26037,7 +26037,7 @@
       </p:sp>
       <p:sp>
         <p:nvSpPr>
-          <p:cNvPr id="1735183187" name=""/>
+          <p:cNvPr id="894147815" name=""/>
           <p:cNvSpPr/>
           <p:nvPr/>
         </p:nvSpPr>
@@ -26108,7 +26108,7 @@
       </p:sp>
       <p:sp>
         <p:nvSpPr>
-          <p:cNvPr id="1993262628" name="Flèche : pentagone 1507310733"/>
+          <p:cNvPr id="57479847" name="Flèche : pentagone 1507310733"/>
           <p:cNvSpPr/>
           <p:nvPr/>
         </p:nvSpPr>
@@ -26153,7 +26153,7 @@
       </p:sp>
       <p:sp>
         <p:nvSpPr>
-          <p:cNvPr id="1519321939" name="Flèche : pentagone 732388424"/>
+          <p:cNvPr id="278150328" name="Flèche : pentagone 732388424"/>
           <p:cNvSpPr/>
           <p:nvPr/>
         </p:nvSpPr>
@@ -26198,7 +26198,7 @@
       </p:sp>
       <p:sp>
         <p:nvSpPr>
-          <p:cNvPr id="1007289477" name="Flèche : pentagone 326874465"/>
+          <p:cNvPr id="2094357770" name="Flèche : pentagone 326874465"/>
           <p:cNvSpPr/>
           <p:nvPr/>
         </p:nvSpPr>
@@ -26276,7 +26276,7 @@
       </p:grpSpPr>
       <p:sp>
         <p:nvSpPr>
-          <p:cNvPr id="76367496" name="ZoneTexte 273581705"/>
+          <p:cNvPr id="2015792959" name="ZoneTexte 273581705"/>
           <p:cNvSpPr txBox="1"/>
           <p:nvPr/>
         </p:nvSpPr>
@@ -26574,7 +26574,7 @@
       </p:sp>
       <p:cxnSp>
         <p:nvCxnSpPr>
-          <p:cNvPr id="819180566" name="Connecteur droit 1094832104"/>
+          <p:cNvPr id="267726942" name="Connecteur droit 1094832104"/>
           <p:cNvCxnSpPr/>
           <p:nvPr/>
         </p:nvCxnSpPr>
@@ -26617,7 +26617,7 @@
       </p:cxnSp>
       <p:sp>
         <p:nvSpPr>
-          <p:cNvPr id="1987112866" name="ZoneTexte 2078543737"/>
+          <p:cNvPr id="456480968" name="ZoneTexte 2078543737"/>
           <p:cNvSpPr txBox="1"/>
           <p:nvPr/>
         </p:nvSpPr>
@@ -26657,7 +26657,7 @@
       </p:sp>
       <p:cxnSp>
         <p:nvCxnSpPr>
-          <p:cNvPr id="240915531" name="Connecteur droit 853743145"/>
+          <p:cNvPr id="571152001" name="Connecteur droit 853743145"/>
           <p:cNvCxnSpPr/>
           <p:nvPr/>
         </p:nvCxnSpPr>
@@ -26700,7 +26700,7 @@
       </p:cxnSp>
       <p:sp>
         <p:nvSpPr>
-          <p:cNvPr id="1201220389" name="ZoneTexte 1473119298"/>
+          <p:cNvPr id="1676109489" name="ZoneTexte 1473119298"/>
           <p:cNvSpPr txBox="1"/>
           <p:nvPr/>
         </p:nvSpPr>
@@ -26740,7 +26740,7 @@
       </p:sp>
       <p:cxnSp>
         <p:nvCxnSpPr>
-          <p:cNvPr id="853975640" name="Connecteur droit 1727809509"/>
+          <p:cNvPr id="1135663496" name="Connecteur droit 1727809509"/>
           <p:cNvCxnSpPr/>
           <p:nvPr/>
         </p:nvCxnSpPr>
@@ -26783,7 +26783,7 @@
       </p:cxnSp>
       <p:sp>
         <p:nvSpPr>
-          <p:cNvPr id="1564390764" name="ZoneTexte 759238070"/>
+          <p:cNvPr id="219715414" name="ZoneTexte 759238070"/>
           <p:cNvSpPr txBox="1"/>
           <p:nvPr/>
         </p:nvSpPr>
@@ -26858,7 +26858,7 @@
       </p:sp>
       <p:sp>
         <p:nvSpPr>
-          <p:cNvPr id="1987219180" name="Rectangle : avec coins arrondis en haut 965147191"/>
+          <p:cNvPr id="929421305" name="Rectangle : avec coins arrondis en haut 965147191"/>
           <p:cNvSpPr/>
           <p:nvPr/>
         </p:nvSpPr>
@@ -26904,7 +26904,7 @@
       </p:sp>
       <p:sp>
         <p:nvSpPr>
-          <p:cNvPr id="1618510730" name="Flèche : pentagone 2070329900"/>
+          <p:cNvPr id="1617622110" name="Flèche : pentagone 2070329900"/>
           <p:cNvSpPr/>
           <p:nvPr/>
         </p:nvSpPr>
@@ -26949,7 +26949,7 @@
       </p:sp>
       <p:sp>
         <p:nvSpPr>
-          <p:cNvPr id="470940618" name="Flèche : pentagone 1325137089"/>
+          <p:cNvPr id="394459523" name="Flèche : pentagone 1325137089"/>
           <p:cNvSpPr/>
           <p:nvPr/>
         </p:nvSpPr>
@@ -26994,7 +26994,7 @@
       </p:sp>
       <p:sp>
         <p:nvSpPr>
-          <p:cNvPr id="658289539" name="Flèche : pentagone 295922856"/>
+          <p:cNvPr id="1640187790" name="Flèche : pentagone 295922856"/>
           <p:cNvSpPr/>
           <p:nvPr/>
         </p:nvSpPr>
@@ -27039,7 +27039,7 @@
       </p:sp>
       <p:sp>
         <p:nvSpPr>
-          <p:cNvPr id="274052788" name="Flèche : pentagone 1961547672"/>
+          <p:cNvPr id="1442590686" name="Flèche : pentagone 1961547672"/>
           <p:cNvSpPr/>
           <p:nvPr/>
         </p:nvSpPr>
@@ -27084,7 +27084,7 @@
       </p:sp>
       <p:sp>
         <p:nvSpPr>
-          <p:cNvPr id="1157465230" name="Flèche : pentagone 1305647833"/>
+          <p:cNvPr id="1759149447" name="Flèche : pentagone 1305647833"/>
           <p:cNvSpPr/>
           <p:nvPr/>
         </p:nvSpPr>
@@ -27129,7 +27129,7 @@
       </p:sp>
       <p:sp>
         <p:nvSpPr>
-          <p:cNvPr id="353563391" name="ZoneTexte 545814566"/>
+          <p:cNvPr id="1585755008" name="ZoneTexte 545814566"/>
           <p:cNvSpPr txBox="1"/>
           <p:nvPr/>
         </p:nvSpPr>
@@ -27431,7 +27431,7 @@
       </p:sp>
       <p:sp>
         <p:nvSpPr>
-          <p:cNvPr id="1563888156" name="ZoneTexte 671978155"/>
+          <p:cNvPr id="1539595518" name="ZoneTexte 671978155"/>
           <p:cNvSpPr txBox="1"/>
           <p:nvPr/>
         </p:nvSpPr>
@@ -27471,7 +27471,7 @@
       </p:sp>
       <p:cxnSp>
         <p:nvCxnSpPr>
-          <p:cNvPr id="1770152566" name="Connecteur droit 637589304"/>
+          <p:cNvPr id="1104828202" name="Connecteur droit 637589304"/>
           <p:cNvCxnSpPr/>
           <p:nvPr/>
         </p:nvCxnSpPr>
@@ -27514,7 +27514,7 @@
       </p:cxnSp>
       <p:sp>
         <p:nvSpPr>
-          <p:cNvPr id="849397241" name="ZoneTexte 172075623"/>
+          <p:cNvPr id="853651187" name="ZoneTexte 172075623"/>
           <p:cNvSpPr txBox="1"/>
           <p:nvPr/>
         </p:nvSpPr>
@@ -27564,7 +27564,7 @@
       </p:sp>
       <p:sp>
         <p:nvSpPr>
-          <p:cNvPr id="1022739783" name="ZoneTexte 1642812764"/>
+          <p:cNvPr id="1830772038" name="ZoneTexte 1642812764"/>
           <p:cNvSpPr txBox="1"/>
           <p:nvPr/>
         </p:nvSpPr>
@@ -27753,7 +27753,7 @@
       </p:sp>
       <p:sp>
         <p:nvSpPr>
-          <p:cNvPr id="1357926259" name="Étoile : 7 branches 1681961038"/>
+          <p:cNvPr id="1837170297" name="Étoile : 7 branches 1681961038"/>
           <p:cNvSpPr/>
           <p:nvPr/>
         </p:nvSpPr>
@@ -27800,7 +27800,7 @@
       </p:sp>
       <p:sp>
         <p:nvSpPr>
-          <p:cNvPr id="1548474571" name="Étoile : 7 branches 1476951547"/>
+          <p:cNvPr id="695635165" name="Étoile : 7 branches 1476951547"/>
           <p:cNvSpPr/>
           <p:nvPr/>
         </p:nvSpPr>
@@ -27847,7 +27847,7 @@
       </p:sp>
       <p:sp>
         <p:nvSpPr>
-          <p:cNvPr id="980611172" name="Étoile : 7 branches 1520826925"/>
+          <p:cNvPr id="935213571" name="Étoile : 7 branches 1520826925"/>
           <p:cNvSpPr/>
           <p:nvPr/>
         </p:nvSpPr>
@@ -27894,7 +27894,7 @@
       </p:sp>
       <p:sp>
         <p:nvSpPr>
-          <p:cNvPr id="834398221" name="ZoneTexte 1219899073"/>
+          <p:cNvPr id="31504911" name="ZoneTexte 1219899073"/>
           <p:cNvSpPr txBox="1"/>
           <p:nvPr/>
         </p:nvSpPr>
@@ -27934,7 +27934,7 @@
       </p:sp>
       <p:sp>
         <p:nvSpPr>
-          <p:cNvPr id="830181110" name="ZoneTexte 1283574123"/>
+          <p:cNvPr id="1627549090" name="ZoneTexte 1283574123"/>
           <p:cNvSpPr txBox="1"/>
           <p:nvPr/>
         </p:nvSpPr>
@@ -28917,7 +28917,7 @@
       </p:sp>
       <p:sp>
         <p:nvSpPr>
-          <p:cNvPr id="1740626819" name="ZoneTexte 790352176"/>
+          <p:cNvPr id="1857148213" name="ZoneTexte 790352176"/>
           <p:cNvSpPr txBox="1"/>
           <p:nvPr/>
         </p:nvSpPr>
@@ -28959,7 +28959,7 @@
       </p:sp>
       <p:sp>
         <p:nvSpPr>
-          <p:cNvPr id="1280907199" name="ZoneTexte 2025740189"/>
+          <p:cNvPr id="1885810782" name="ZoneTexte 2025740189"/>
           <p:cNvSpPr txBox="1"/>
           <p:nvPr/>
         </p:nvSpPr>
@@ -29016,7 +29016,7 @@
       </p:sp>
       <p:sp>
         <p:nvSpPr>
-          <p:cNvPr id="320926438" name=""/>
+          <p:cNvPr id="146392361" name=""/>
           <p:cNvSpPr/>
           <p:nvPr/>
         </p:nvSpPr>
@@ -29056,7 +29056,7 @@
       </p:sp>
       <p:sp>
         <p:nvSpPr>
-          <p:cNvPr id="1287122166" name="Rectangle : avec coins arrondis en haut 1151560973"/>
+          <p:cNvPr id="1474734949" name="Rectangle : avec coins arrondis en haut 1151560973"/>
           <p:cNvSpPr/>
           <p:nvPr/>
         </p:nvSpPr>
@@ -29104,7 +29104,7 @@
       </p:sp>
       <p:sp>
         <p:nvSpPr>
-          <p:cNvPr id="168376835" name=""/>
+          <p:cNvPr id="580373130" name=""/>
           <p:cNvSpPr/>
           <p:nvPr/>
         </p:nvSpPr>
@@ -29144,7 +29144,7 @@
       </p:sp>
       <p:sp>
         <p:nvSpPr>
-          <p:cNvPr id="1314108518" name="Rectangle : avec coins arrondis en haut 1151560973"/>
+          <p:cNvPr id="1536524895" name="Rectangle : avec coins arrondis en haut 1151560973"/>
           <p:cNvSpPr/>
           <p:nvPr/>
         </p:nvSpPr>
@@ -29192,7 +29192,7 @@
       </p:sp>
       <p:sp>
         <p:nvSpPr>
-          <p:cNvPr id="460959396" name=""/>
+          <p:cNvPr id="1966548861" name=""/>
           <p:cNvSpPr/>
           <p:nvPr/>
         </p:nvSpPr>
@@ -29232,7 +29232,7 @@
       </p:sp>
       <p:sp>
         <p:nvSpPr>
-          <p:cNvPr id="1813943262" name="Rectangle : avec coins arrondis en haut 1151560973"/>
+          <p:cNvPr id="1236556843" name="Rectangle : avec coins arrondis en haut 1151560973"/>
           <p:cNvSpPr/>
           <p:nvPr/>
         </p:nvSpPr>
@@ -29280,7 +29280,7 @@
       </p:sp>
       <p:sp>
         <p:nvSpPr>
-          <p:cNvPr id="1589702726" name=""/>
+          <p:cNvPr id="1780714246" name=""/>
           <p:cNvSpPr txBox="1"/>
           <p:nvPr/>
         </p:nvSpPr>
@@ -29408,7 +29408,7 @@
       </p:sp>
       <p:sp>
         <p:nvSpPr>
-          <p:cNvPr id="603214370" name=""/>
+          <p:cNvPr id="1691671122" name=""/>
           <p:cNvSpPr txBox="1"/>
           <p:nvPr/>
         </p:nvSpPr>
@@ -29531,7 +29531,7 @@
       </p:sp>
       <p:sp>
         <p:nvSpPr>
-          <p:cNvPr id="2007710764" name=""/>
+          <p:cNvPr id="921040287" name=""/>
           <p:cNvSpPr/>
           <p:nvPr/>
         </p:nvSpPr>
@@ -29602,7 +29602,7 @@
       </p:sp>
       <p:sp>
         <p:nvSpPr>
-          <p:cNvPr id="1059096730" name="Flèche : pentagone 1325137089"/>
+          <p:cNvPr id="2060426492" name="Flèche : pentagone 1325137089"/>
           <p:cNvSpPr/>
           <p:nvPr/>
         </p:nvSpPr>
@@ -29647,7 +29647,7 @@
       </p:sp>
       <p:sp>
         <p:nvSpPr>
-          <p:cNvPr id="594854256" name="Flèche : pentagone 295922856"/>
+          <p:cNvPr id="1485234592" name="Flèche : pentagone 295922856"/>
           <p:cNvSpPr/>
           <p:nvPr/>
         </p:nvSpPr>
@@ -29692,7 +29692,7 @@
       </p:sp>
       <p:sp>
         <p:nvSpPr>
-          <p:cNvPr id="6365743" name="Flèche : pentagone 1961547672"/>
+          <p:cNvPr id="391101897" name="Flèche : pentagone 1961547672"/>
           <p:cNvSpPr/>
           <p:nvPr/>
         </p:nvSpPr>
@@ -29770,7 +29770,7 @@
       </p:grpSpPr>
       <p:cxnSp>
         <p:nvCxnSpPr>
-          <p:cNvPr id="1753681886" name="Connecteur droit 266926011"/>
+          <p:cNvPr id="128653533" name="Connecteur droit 266926011"/>
           <p:cNvCxnSpPr/>
           <p:nvPr/>
         </p:nvCxnSpPr>
@@ -29813,7 +29813,7 @@
       </p:cxnSp>
       <p:sp>
         <p:nvSpPr>
-          <p:cNvPr id="259543649" name="ZoneTexte 1043763612"/>
+          <p:cNvPr id="609950274" name="ZoneTexte 1043763612"/>
           <p:cNvSpPr txBox="1"/>
           <p:nvPr/>
         </p:nvSpPr>
@@ -29853,7 +29853,7 @@
       </p:sp>
       <p:cxnSp>
         <p:nvCxnSpPr>
-          <p:cNvPr id="820006435" name="Connecteur droit 1586327141"/>
+          <p:cNvPr id="1059030073" name="Connecteur droit 1586327141"/>
           <p:cNvCxnSpPr/>
           <p:nvPr/>
         </p:nvCxnSpPr>
@@ -29896,7 +29896,7 @@
       </p:cxnSp>
       <p:sp>
         <p:nvSpPr>
-          <p:cNvPr id="345008247" name="ZoneTexte 1691387439"/>
+          <p:cNvPr id="906907939" name="ZoneTexte 1691387439"/>
           <p:cNvSpPr txBox="1"/>
           <p:nvPr/>
         </p:nvSpPr>
@@ -29936,7 +29936,7 @@
       </p:sp>
       <p:cxnSp>
         <p:nvCxnSpPr>
-          <p:cNvPr id="1904516477" name="Connecteur droit 1743707585"/>
+          <p:cNvPr id="226433105" name="Connecteur droit 1743707585"/>
           <p:cNvCxnSpPr/>
           <p:nvPr/>
         </p:nvCxnSpPr>
@@ -29979,7 +29979,7 @@
       </p:cxnSp>
       <p:sp>
         <p:nvSpPr>
-          <p:cNvPr id="435482451" name="ZoneTexte 1503300725"/>
+          <p:cNvPr id="1323613220" name="ZoneTexte 1503300725"/>
           <p:cNvSpPr txBox="1"/>
           <p:nvPr/>
         </p:nvSpPr>
@@ -30061,7 +30061,7 @@
       </p:sp>
       <p:sp>
         <p:nvSpPr>
-          <p:cNvPr id="220385855" name="Rectangle : avec coins arrondis en haut 1151560973"/>
+          <p:cNvPr id="2006230970" name="Rectangle : avec coins arrondis en haut 1151560973"/>
           <p:cNvSpPr/>
           <p:nvPr/>
         </p:nvSpPr>
@@ -30107,7 +30107,7 @@
       </p:sp>
       <p:sp>
         <p:nvSpPr>
-          <p:cNvPr id="856706994" name="Flèche : pentagone 1610574377"/>
+          <p:cNvPr id="579943258" name="Flèche : pentagone 1610574377"/>
           <p:cNvSpPr/>
           <p:nvPr/>
         </p:nvSpPr>
@@ -30152,7 +30152,7 @@
       </p:sp>
       <p:sp>
         <p:nvSpPr>
-          <p:cNvPr id="75443619" name="Flèche : pentagone 463861063"/>
+          <p:cNvPr id="1277884246" name="Flèche : pentagone 463861063"/>
           <p:cNvSpPr/>
           <p:nvPr/>
         </p:nvSpPr>
@@ -30197,7 +30197,7 @@
       </p:sp>
       <p:sp>
         <p:nvSpPr>
-          <p:cNvPr id="2091102768" name="Flèche : pentagone 272004907"/>
+          <p:cNvPr id="1730978801" name="Flèche : pentagone 272004907"/>
           <p:cNvSpPr/>
           <p:nvPr/>
         </p:nvSpPr>
@@ -30242,7 +30242,7 @@
       </p:sp>
       <p:sp>
         <p:nvSpPr>
-          <p:cNvPr id="89635411" name="Flèche : pentagone 28174069"/>
+          <p:cNvPr id="2014325473" name="Flèche : pentagone 28174069"/>
           <p:cNvSpPr/>
           <p:nvPr/>
         </p:nvSpPr>
@@ -30287,7 +30287,7 @@
       </p:sp>
       <p:sp>
         <p:nvSpPr>
-          <p:cNvPr id="777402171" name="Flèche : pentagone 978127220"/>
+          <p:cNvPr id="507204804" name="Flèche : pentagone 978127220"/>
           <p:cNvSpPr/>
           <p:nvPr/>
         </p:nvSpPr>
@@ -30332,7 +30332,7 @@
       </p:sp>
       <p:sp>
         <p:nvSpPr>
-          <p:cNvPr id="1109355734" name="ZoneTexte 1693594013"/>
+          <p:cNvPr id="438511731" name="ZoneTexte 1693594013"/>
           <p:cNvSpPr txBox="1"/>
           <p:nvPr/>
         </p:nvSpPr>
@@ -30683,7 +30683,7 @@
       </p:sp>
       <p:sp>
         <p:nvSpPr>
-          <p:cNvPr id="16740282" name="ZoneTexte 1975797288"/>
+          <p:cNvPr id="277853717" name="ZoneTexte 1975797288"/>
           <p:cNvSpPr txBox="1"/>
           <p:nvPr/>
         </p:nvSpPr>
@@ -30723,7 +30723,7 @@
       </p:sp>
       <p:sp>
         <p:nvSpPr>
-          <p:cNvPr id="1402627254" name="ZoneTexte 2064865984"/>
+          <p:cNvPr id="1672507006" name="ZoneTexte 2064865984"/>
           <p:cNvSpPr txBox="1"/>
           <p:nvPr/>
         </p:nvSpPr>
@@ -30945,7 +30945,7 @@
       </p:sp>
       <p:sp>
         <p:nvSpPr>
-          <p:cNvPr id="1351452128" name="ZoneTexte 1387173154"/>
+          <p:cNvPr id="2056184526" name="ZoneTexte 1387173154"/>
           <p:cNvSpPr txBox="1"/>
           <p:nvPr/>
         </p:nvSpPr>
@@ -31197,7 +31197,7 @@
       </p:sp>
       <p:sp>
         <p:nvSpPr>
-          <p:cNvPr id="553804603" name="ZoneTexte 523755832"/>
+          <p:cNvPr id="399936893" name="ZoneTexte 523755832"/>
           <p:cNvSpPr txBox="1"/>
           <p:nvPr/>
         </p:nvSpPr>
@@ -31457,7 +31457,7 @@
       </p:sp>
       <p:cxnSp>
         <p:nvCxnSpPr>
-          <p:cNvPr id="1673881241" name="Connecteur droit 2085669542"/>
+          <p:cNvPr id="656146341" name="Connecteur droit 2085669542"/>
           <p:cNvCxnSpPr/>
           <p:nvPr/>
         </p:nvCxnSpPr>
@@ -31500,7 +31500,7 @@
       </p:cxnSp>
       <p:sp>
         <p:nvSpPr>
-          <p:cNvPr id="586965177" name="ZoneTexte 34398067"/>
+          <p:cNvPr id="776535059" name="ZoneTexte 34398067"/>
           <p:cNvSpPr txBox="1"/>
           <p:nvPr/>
         </p:nvSpPr>
@@ -31543,7 +31543,7 @@
       </p:sp>
       <p:sp>
         <p:nvSpPr>
-          <p:cNvPr id="1362357947" name="ZoneTexte 273581705"/>
+          <p:cNvPr id="886530406" name="ZoneTexte 273581705"/>
           <p:cNvSpPr txBox="1"/>
           <p:nvPr/>
         </p:nvSpPr>
@@ -31841,7 +31841,7 @@
       </p:sp>
       <p:sp>
         <p:nvSpPr>
-          <p:cNvPr id="970147706" name="ZoneTexte 1727393832"/>
+          <p:cNvPr id="1895624333" name="ZoneTexte 1727393832"/>
           <p:cNvSpPr txBox="1"/>
           <p:nvPr/>
         </p:nvSpPr>
@@ -31883,7 +31883,7 @@
       </p:sp>
       <p:sp>
         <p:nvSpPr>
-          <p:cNvPr id="518872138" name="ZoneTexte 504516740"/>
+          <p:cNvPr id="1515469671" name="ZoneTexte 504516740"/>
           <p:cNvSpPr txBox="1"/>
           <p:nvPr/>
         </p:nvSpPr>
@@ -31925,7 +31925,7 @@
       </p:sp>
       <p:sp>
         <p:nvSpPr>
-          <p:cNvPr id="379807974" name="ZoneTexte 1"/>
+          <p:cNvPr id="37124658" name="ZoneTexte 1"/>
           <p:cNvSpPr txBox="1"/>
           <p:nvPr/>
         </p:nvSpPr>
@@ -32036,7 +32036,7 @@
       </p:sp>
       <p:sp>
         <p:nvSpPr>
-          <p:cNvPr id="459593951" name="ZoneTexte 2"/>
+          <p:cNvPr id="39806520" name="ZoneTexte 2"/>
           <p:cNvSpPr txBox="1"/>
           <p:nvPr/>
         </p:nvSpPr>
@@ -32120,7 +32120,7 @@
       </p:sp>
       <p:sp>
         <p:nvSpPr>
-          <p:cNvPr id="752371547" name=""/>
+          <p:cNvPr id="162999035" name=""/>
           <p:cNvSpPr/>
           <p:nvPr/>
         </p:nvSpPr>
@@ -32160,7 +32160,7 @@
       </p:sp>
       <p:sp>
         <p:nvSpPr>
-          <p:cNvPr id="900999839" name="Rectangle : avec coins arrondis en haut 1151560973"/>
+          <p:cNvPr id="24522179" name="Rectangle : avec coins arrondis en haut 1151560973"/>
           <p:cNvSpPr/>
           <p:nvPr/>
         </p:nvSpPr>
@@ -32208,7 +32208,7 @@
       </p:sp>
       <p:sp>
         <p:nvSpPr>
-          <p:cNvPr id="125373068" name=""/>
+          <p:cNvPr id="534317182" name=""/>
           <p:cNvSpPr/>
           <p:nvPr/>
         </p:nvSpPr>
@@ -32248,7 +32248,7 @@
       </p:sp>
       <p:sp>
         <p:nvSpPr>
-          <p:cNvPr id="158729030" name="Rectangle : avec coins arrondis en haut 1151560973"/>
+          <p:cNvPr id="196435173" name="Rectangle : avec coins arrondis en haut 1151560973"/>
           <p:cNvSpPr/>
           <p:nvPr/>
         </p:nvSpPr>
@@ -32296,7 +32296,7 @@
       </p:sp>
       <p:sp>
         <p:nvSpPr>
-          <p:cNvPr id="968439887" name=""/>
+          <p:cNvPr id="19195748" name=""/>
           <p:cNvSpPr/>
           <p:nvPr/>
         </p:nvSpPr>
@@ -32336,7 +32336,7 @@
       </p:sp>
       <p:sp>
         <p:nvSpPr>
-          <p:cNvPr id="164852458" name="Rectangle : avec coins arrondis en haut 1151560973"/>
+          <p:cNvPr id="1158107643" name="Rectangle : avec coins arrondis en haut 1151560973"/>
           <p:cNvSpPr/>
           <p:nvPr/>
         </p:nvSpPr>
@@ -32384,7 +32384,7 @@
       </p:sp>
       <p:sp>
         <p:nvSpPr>
-          <p:cNvPr id="1559983273" name=""/>
+          <p:cNvPr id="1111378716" name=""/>
           <p:cNvSpPr txBox="1"/>
           <p:nvPr/>
         </p:nvSpPr>
@@ -32435,7 +32435,7 @@
       </p:sp>
       <p:sp>
         <p:nvSpPr>
-          <p:cNvPr id="1367828593" name=""/>
+          <p:cNvPr id="582845223" name=""/>
           <p:cNvSpPr txBox="1"/>
           <p:nvPr/>
         </p:nvSpPr>
@@ -32533,7 +32533,7 @@
       </p:sp>
       <p:sp>
         <p:nvSpPr>
-          <p:cNvPr id="1218686343" name=""/>
+          <p:cNvPr id="1180824339" name=""/>
           <p:cNvSpPr/>
           <p:nvPr/>
         </p:nvSpPr>
@@ -32604,7 +32604,7 @@
       </p:sp>
       <p:sp>
         <p:nvSpPr>
-          <p:cNvPr id="1000000456" name="Flèche : pentagone 463861063"/>
+          <p:cNvPr id="1616565120" name="Flèche : pentagone 463861063"/>
           <p:cNvSpPr/>
           <p:nvPr/>
         </p:nvSpPr>
@@ -32649,7 +32649,7 @@
       </p:sp>
       <p:sp>
         <p:nvSpPr>
-          <p:cNvPr id="1872022294" name="Flèche : pentagone 272004907"/>
+          <p:cNvPr id="1899160042" name="Flèche : pentagone 272004907"/>
           <p:cNvSpPr/>
           <p:nvPr/>
         </p:nvSpPr>
@@ -32694,7 +32694,7 @@
       </p:sp>
       <p:sp>
         <p:nvSpPr>
-          <p:cNvPr id="400623106" name="Flèche : pentagone 28174069"/>
+          <p:cNvPr id="133210494" name="Flèche : pentagone 28174069"/>
           <p:cNvSpPr/>
           <p:nvPr/>
         </p:nvSpPr>

--- a/Fiches de personnage.pptx
+++ b/Fiches de personnage.pptx
@@ -139,7 +139,7 @@
       </p:grpSpPr>
       <p:sp>
         <p:nvSpPr>
-          <p:cNvPr id="1515761318" name="Espace réservé d'en-tête 1"/>
+          <p:cNvPr id="307224571" name="Espace réservé d'en-tête 1"/>
           <p:cNvSpPr>
             <a:spLocks noGrp="1"/>
           </p:cNvSpPr>
@@ -173,7 +173,7 @@
       </p:sp>
       <p:sp>
         <p:nvSpPr>
-          <p:cNvPr id="1348577438" name="Espace réservé pour la date 2"/>
+          <p:cNvPr id="384568661" name="Espace réservé pour la date 2"/>
           <p:cNvSpPr>
             <a:spLocks noGrp="1"/>
           </p:cNvSpPr>
@@ -211,7 +211,7 @@
       </p:sp>
       <p:sp>
         <p:nvSpPr>
-          <p:cNvPr id="1270962817" name="Espace réservé pour l'image de la diapositive 3"/>
+          <p:cNvPr id="217868565" name="Espace réservé pour l'image de la diapositive 3"/>
           <p:cNvSpPr>
             <a:spLocks noChangeAspect="1" noGrp="1" noRot="1"/>
           </p:cNvSpPr>
@@ -247,7 +247,7 @@
       </p:sp>
       <p:sp>
         <p:nvSpPr>
-          <p:cNvPr id="2064074269" name="Remarques Espace réservé 4"/>
+          <p:cNvPr id="1106613541" name="Remarques Espace réservé 4"/>
           <p:cNvSpPr>
             <a:spLocks noGrp="1"/>
           </p:cNvSpPr>
@@ -321,7 +321,7 @@
       </p:sp>
       <p:sp>
         <p:nvSpPr>
-          <p:cNvPr id="1183153066" name="Espace réservé du pied de page 5"/>
+          <p:cNvPr id="952428525" name="Espace réservé du pied de page 5"/>
           <p:cNvSpPr>
             <a:spLocks noGrp="1"/>
           </p:cNvSpPr>
@@ -355,7 +355,7 @@
       </p:sp>
       <p:sp>
         <p:nvSpPr>
-          <p:cNvPr id="2034022386" name="Espace réservé du numéro de diapositive 6"/>
+          <p:cNvPr id="1444669330" name="Espace réservé du numéro de diapositive 6"/>
           <p:cNvSpPr>
             <a:spLocks noGrp="1"/>
           </p:cNvSpPr>
@@ -508,7 +508,7 @@
       </p:grpSpPr>
       <p:sp>
         <p:nvSpPr>
-          <p:cNvPr id="1950129452" name="Espace réservé pour l'image de la diapositive 1"/>
+          <p:cNvPr id="527725713" name="Espace réservé pour l'image de la diapositive 1"/>
           <p:cNvSpPr>
             <a:spLocks noChangeAspect="1" noGrp="1" noRot="1"/>
           </p:cNvSpPr>
@@ -525,7 +525,7 @@
       </p:sp>
       <p:sp>
         <p:nvSpPr>
-          <p:cNvPr id="1434449053" name="Remarques Espace réservé 2"/>
+          <p:cNvPr id="1124721139" name="Remarques Espace réservé 2"/>
           <p:cNvSpPr>
             <a:spLocks noGrp="1"/>
           </p:cNvSpPr>
@@ -550,7 +550,7 @@
       </p:sp>
       <p:sp>
         <p:nvSpPr>
-          <p:cNvPr id="1780571901" name="Espace réservé pour le numéro de diapositive 3"/>
+          <p:cNvPr id="2036584513" name="Espace réservé pour le numéro de diapositive 3"/>
           <p:cNvSpPr>
             <a:spLocks noGrp="1"/>
           </p:cNvSpPr>
@@ -601,7 +601,7 @@
       </p:grpSpPr>
       <p:sp>
         <p:nvSpPr>
-          <p:cNvPr id="1159800262" name="Espace réservé pour l'image de la diapositive 1"/>
+          <p:cNvPr id="1900771020" name="Espace réservé pour l'image de la diapositive 1"/>
           <p:cNvSpPr>
             <a:spLocks noChangeAspect="1" noGrp="1" noRot="1"/>
           </p:cNvSpPr>
@@ -618,7 +618,7 @@
       </p:sp>
       <p:sp>
         <p:nvSpPr>
-          <p:cNvPr id="1410518527" name="Remarques Espace réservé 2"/>
+          <p:cNvPr id="645800930" name="Remarques Espace réservé 2"/>
           <p:cNvSpPr>
             <a:spLocks noGrp="1"/>
           </p:cNvSpPr>
@@ -643,7 +643,7 @@
       </p:sp>
       <p:sp>
         <p:nvSpPr>
-          <p:cNvPr id="955345656" name="Espace réservé pour le numéro de diapositive 3"/>
+          <p:cNvPr id="325759053" name="Espace réservé pour le numéro de diapositive 3"/>
           <p:cNvSpPr>
             <a:spLocks noGrp="1"/>
           </p:cNvSpPr>
@@ -694,7 +694,7 @@
       </p:grpSpPr>
       <p:sp>
         <p:nvSpPr>
-          <p:cNvPr id="1224434012" name="Espace réservé pour l'image de la diapositive 1"/>
+          <p:cNvPr id="706814360" name="Espace réservé pour l'image de la diapositive 1"/>
           <p:cNvSpPr>
             <a:spLocks noChangeAspect="1" noGrp="1" noRot="1"/>
           </p:cNvSpPr>
@@ -711,7 +711,7 @@
       </p:sp>
       <p:sp>
         <p:nvSpPr>
-          <p:cNvPr id="994603532" name="Remarques Espace réservé 2"/>
+          <p:cNvPr id="2039373860" name="Remarques Espace réservé 2"/>
           <p:cNvSpPr>
             <a:spLocks noGrp="1"/>
           </p:cNvSpPr>
@@ -736,7 +736,7 @@
       </p:sp>
       <p:sp>
         <p:nvSpPr>
-          <p:cNvPr id="1928480903" name="Espace réservé pour le numéro de diapositive 3"/>
+          <p:cNvPr id="688191389" name="Espace réservé pour le numéro de diapositive 3"/>
           <p:cNvSpPr>
             <a:spLocks noGrp="1"/>
           </p:cNvSpPr>
@@ -787,7 +787,7 @@
       </p:grpSpPr>
       <p:sp>
         <p:nvSpPr>
-          <p:cNvPr id="1891824993" name="Espace réservé pour l'image de la diapositive 1"/>
+          <p:cNvPr id="147224854" name="Espace réservé pour l'image de la diapositive 1"/>
           <p:cNvSpPr>
             <a:spLocks noChangeAspect="1" noGrp="1" noRot="1"/>
           </p:cNvSpPr>
@@ -804,7 +804,7 @@
       </p:sp>
       <p:sp>
         <p:nvSpPr>
-          <p:cNvPr id="1869465596" name="Remarques Espace réservé 2"/>
+          <p:cNvPr id="455268552" name="Remarques Espace réservé 2"/>
           <p:cNvSpPr>
             <a:spLocks noGrp="1"/>
           </p:cNvSpPr>
@@ -829,7 +829,7 @@
       </p:sp>
       <p:sp>
         <p:nvSpPr>
-          <p:cNvPr id="660112773" name="Espace réservé pour le numéro de diapositive 3"/>
+          <p:cNvPr id="200054325" name="Espace réservé pour le numéro de diapositive 3"/>
           <p:cNvSpPr>
             <a:spLocks noGrp="1"/>
           </p:cNvSpPr>
@@ -880,7 +880,7 @@
       </p:grpSpPr>
       <p:sp>
         <p:nvSpPr>
-          <p:cNvPr id="624339122" name="Espace réservé pour l'image de la diapositive 1"/>
+          <p:cNvPr id="322317679" name="Espace réservé pour l'image de la diapositive 1"/>
           <p:cNvSpPr>
             <a:spLocks noChangeAspect="1" noGrp="1" noRot="1"/>
           </p:cNvSpPr>
@@ -897,7 +897,7 @@
       </p:sp>
       <p:sp>
         <p:nvSpPr>
-          <p:cNvPr id="198617377" name="Remarques Espace réservé 2"/>
+          <p:cNvPr id="2004817509" name="Remarques Espace réservé 2"/>
           <p:cNvSpPr>
             <a:spLocks noGrp="1"/>
           </p:cNvSpPr>
@@ -922,7 +922,7 @@
       </p:sp>
       <p:sp>
         <p:nvSpPr>
-          <p:cNvPr id="1730555999" name="Espace réservé pour le numéro de diapositive 3"/>
+          <p:cNvPr id="1707944167" name="Espace réservé pour le numéro de diapositive 3"/>
           <p:cNvSpPr>
             <a:spLocks noGrp="1"/>
           </p:cNvSpPr>
@@ -973,7 +973,7 @@
       </p:grpSpPr>
       <p:sp>
         <p:nvSpPr>
-          <p:cNvPr id="141241006" name="Espace réservé pour l'image de la diapositive 1"/>
+          <p:cNvPr id="788029295" name="Espace réservé pour l'image de la diapositive 1"/>
           <p:cNvSpPr>
             <a:spLocks noChangeAspect="1" noGrp="1" noRot="1"/>
           </p:cNvSpPr>
@@ -990,7 +990,7 @@
       </p:sp>
       <p:sp>
         <p:nvSpPr>
-          <p:cNvPr id="988596705" name="Remarques Espace réservé 2"/>
+          <p:cNvPr id="1955391172" name="Remarques Espace réservé 2"/>
           <p:cNvSpPr>
             <a:spLocks noGrp="1"/>
           </p:cNvSpPr>
@@ -1015,7 +1015,7 @@
       </p:sp>
       <p:sp>
         <p:nvSpPr>
-          <p:cNvPr id="1210841575" name="Espace réservé pour le numéro de diapositive 3"/>
+          <p:cNvPr id="776518168" name="Espace réservé pour le numéro de diapositive 3"/>
           <p:cNvSpPr>
             <a:spLocks noGrp="1"/>
           </p:cNvSpPr>
@@ -1066,7 +1066,7 @@
       </p:grpSpPr>
       <p:sp>
         <p:nvSpPr>
-          <p:cNvPr id="1843193585" name="Titre 1"/>
+          <p:cNvPr id="568112933" name="Titre 1"/>
           <p:cNvSpPr>
             <a:spLocks noGrp="1"/>
           </p:cNvSpPr>
@@ -1101,7 +1101,7 @@
       </p:sp>
       <p:sp>
         <p:nvSpPr>
-          <p:cNvPr id="1013916826" name="Sous-titre 2"/>
+          <p:cNvPr id="424913495" name="Sous-titre 2"/>
           <p:cNvSpPr>
             <a:spLocks noGrp="1"/>
           </p:cNvSpPr>
@@ -1169,7 +1169,7 @@
       </p:sp>
       <p:sp>
         <p:nvSpPr>
-          <p:cNvPr id="1841382056" name="Espace réservé de la date 3"/>
+          <p:cNvPr id="1932915738" name="Espace réservé de la date 3"/>
           <p:cNvSpPr>
             <a:spLocks noGrp="1"/>
           </p:cNvSpPr>
@@ -1195,7 +1195,7 @@
       </p:sp>
       <p:sp>
         <p:nvSpPr>
-          <p:cNvPr id="1506989335" name="Espace réservé du pied de page 4"/>
+          <p:cNvPr id="14932660" name="Espace réservé du pied de page 4"/>
           <p:cNvSpPr>
             <a:spLocks noGrp="1"/>
           </p:cNvSpPr>
@@ -1217,7 +1217,7 @@
       </p:sp>
       <p:sp>
         <p:nvSpPr>
-          <p:cNvPr id="53683365" name="Espace réservé du numéro de diapositive 5"/>
+          <p:cNvPr id="1158888155" name="Espace réservé du numéro de diapositive 5"/>
           <p:cNvSpPr>
             <a:spLocks noGrp="1"/>
           </p:cNvSpPr>
@@ -1268,7 +1268,7 @@
       </p:grpSpPr>
       <p:sp>
         <p:nvSpPr>
-          <p:cNvPr id="1712552295" name="Titre 1"/>
+          <p:cNvPr id="1877646523" name="Titre 1"/>
           <p:cNvSpPr>
             <a:spLocks noGrp="1"/>
           </p:cNvSpPr>
@@ -1294,7 +1294,7 @@
       </p:sp>
       <p:sp>
         <p:nvSpPr>
-          <p:cNvPr id="418936099" name="Espace réservé du texte vertical 2"/>
+          <p:cNvPr id="399340270" name="Espace réservé du texte vertical 2"/>
           <p:cNvSpPr>
             <a:spLocks noGrp="1"/>
           </p:cNvSpPr>
@@ -1360,7 +1360,7 @@
       </p:sp>
       <p:sp>
         <p:nvSpPr>
-          <p:cNvPr id="1266723730" name="Espace réservé de la date 3"/>
+          <p:cNvPr id="513729784" name="Espace réservé de la date 3"/>
           <p:cNvSpPr>
             <a:spLocks noGrp="1"/>
           </p:cNvSpPr>
@@ -1386,7 +1386,7 @@
       </p:sp>
       <p:sp>
         <p:nvSpPr>
-          <p:cNvPr id="360705495" name="Espace réservé du pied de page 4"/>
+          <p:cNvPr id="1325854908" name="Espace réservé du pied de page 4"/>
           <p:cNvSpPr>
             <a:spLocks noGrp="1"/>
           </p:cNvSpPr>
@@ -1408,7 +1408,7 @@
       </p:sp>
       <p:sp>
         <p:nvSpPr>
-          <p:cNvPr id="1645238075" name="Espace réservé du numéro de diapositive 5"/>
+          <p:cNvPr id="1203376687" name="Espace réservé du numéro de diapositive 5"/>
           <p:cNvSpPr>
             <a:spLocks noGrp="1"/>
           </p:cNvSpPr>
@@ -1459,7 +1459,7 @@
       </p:grpSpPr>
       <p:sp>
         <p:nvSpPr>
-          <p:cNvPr id="1738919629" name="Titre vertical 1"/>
+          <p:cNvPr id="232205924" name="Titre vertical 1"/>
           <p:cNvSpPr>
             <a:spLocks noGrp="1"/>
           </p:cNvSpPr>
@@ -1490,7 +1490,7 @@
       </p:sp>
       <p:sp>
         <p:nvSpPr>
-          <p:cNvPr id="16516507" name="Espace réservé du texte vertical 2"/>
+          <p:cNvPr id="1616876430" name="Espace réservé du texte vertical 2"/>
           <p:cNvSpPr>
             <a:spLocks noGrp="1"/>
           </p:cNvSpPr>
@@ -1561,7 +1561,7 @@
       </p:sp>
       <p:sp>
         <p:nvSpPr>
-          <p:cNvPr id="1562819728" name="Espace réservé de la date 3"/>
+          <p:cNvPr id="264923520" name="Espace réservé de la date 3"/>
           <p:cNvSpPr>
             <a:spLocks noGrp="1"/>
           </p:cNvSpPr>
@@ -1587,7 +1587,7 @@
       </p:sp>
       <p:sp>
         <p:nvSpPr>
-          <p:cNvPr id="1976839807" name="Espace réservé du pied de page 4"/>
+          <p:cNvPr id="1565876742" name="Espace réservé du pied de page 4"/>
           <p:cNvSpPr>
             <a:spLocks noGrp="1"/>
           </p:cNvSpPr>
@@ -1609,7 +1609,7 @@
       </p:sp>
       <p:sp>
         <p:nvSpPr>
-          <p:cNvPr id="344622797" name="Espace réservé du numéro de diapositive 5"/>
+          <p:cNvPr id="152915514" name="Espace réservé du numéro de diapositive 5"/>
           <p:cNvSpPr>
             <a:spLocks noGrp="1"/>
           </p:cNvSpPr>
@@ -1660,7 +1660,7 @@
       </p:grpSpPr>
       <p:sp>
         <p:nvSpPr>
-          <p:cNvPr id="245747040" name="Titre 1"/>
+          <p:cNvPr id="1259698438" name="Titre 1"/>
           <p:cNvSpPr>
             <a:spLocks noGrp="1"/>
           </p:cNvSpPr>
@@ -1686,7 +1686,7 @@
       </p:sp>
       <p:sp>
         <p:nvSpPr>
-          <p:cNvPr id="439014031" name="Espace réservé du contenu 2"/>
+          <p:cNvPr id="909668411" name="Espace réservé du contenu 2"/>
           <p:cNvSpPr>
             <a:spLocks noGrp="1"/>
           </p:cNvSpPr>
@@ -1752,7 +1752,7 @@
       </p:sp>
       <p:sp>
         <p:nvSpPr>
-          <p:cNvPr id="1163756223" name="Espace réservé de la date 3"/>
+          <p:cNvPr id="1105776935" name="Espace réservé de la date 3"/>
           <p:cNvSpPr>
             <a:spLocks noGrp="1"/>
           </p:cNvSpPr>
@@ -1778,7 +1778,7 @@
       </p:sp>
       <p:sp>
         <p:nvSpPr>
-          <p:cNvPr id="485416591" name="Espace réservé du pied de page 4"/>
+          <p:cNvPr id="437451916" name="Espace réservé du pied de page 4"/>
           <p:cNvSpPr>
             <a:spLocks noGrp="1"/>
           </p:cNvSpPr>
@@ -1800,7 +1800,7 @@
       </p:sp>
       <p:sp>
         <p:nvSpPr>
-          <p:cNvPr id="1059657500" name="Espace réservé du numéro de diapositive 5"/>
+          <p:cNvPr id="1866766740" name="Espace réservé du numéro de diapositive 5"/>
           <p:cNvSpPr>
             <a:spLocks noGrp="1"/>
           </p:cNvSpPr>
@@ -1851,7 +1851,7 @@
       </p:grpSpPr>
       <p:sp>
         <p:nvSpPr>
-          <p:cNvPr id="1301699739" name="Titre 1"/>
+          <p:cNvPr id="249838872" name="Titre 1"/>
           <p:cNvSpPr>
             <a:spLocks noGrp="1"/>
           </p:cNvSpPr>
@@ -1886,7 +1886,7 @@
       </p:sp>
       <p:sp>
         <p:nvSpPr>
-          <p:cNvPr id="1043447496" name="Espace réservé du texte 2"/>
+          <p:cNvPr id="225277860" name="Espace réservé du texte 2"/>
           <p:cNvSpPr>
             <a:spLocks noGrp="1"/>
           </p:cNvSpPr>
@@ -2008,7 +2008,7 @@
       </p:sp>
       <p:sp>
         <p:nvSpPr>
-          <p:cNvPr id="1350005619" name="Espace réservé de la date 3"/>
+          <p:cNvPr id="351168860" name="Espace réservé de la date 3"/>
           <p:cNvSpPr>
             <a:spLocks noGrp="1"/>
           </p:cNvSpPr>
@@ -2034,7 +2034,7 @@
       </p:sp>
       <p:sp>
         <p:nvSpPr>
-          <p:cNvPr id="415084961" name="Espace réservé du pied de page 4"/>
+          <p:cNvPr id="1883939087" name="Espace réservé du pied de page 4"/>
           <p:cNvSpPr>
             <a:spLocks noGrp="1"/>
           </p:cNvSpPr>
@@ -2056,7 +2056,7 @@
       </p:sp>
       <p:sp>
         <p:nvSpPr>
-          <p:cNvPr id="145359918" name="Espace réservé du numéro de diapositive 5"/>
+          <p:cNvPr id="296486752" name="Espace réservé du numéro de diapositive 5"/>
           <p:cNvSpPr>
             <a:spLocks noGrp="1"/>
           </p:cNvSpPr>
@@ -2107,7 +2107,7 @@
       </p:grpSpPr>
       <p:sp>
         <p:nvSpPr>
-          <p:cNvPr id="1675420550" name="Titre 1"/>
+          <p:cNvPr id="2002090465" name="Titre 1"/>
           <p:cNvSpPr>
             <a:spLocks noGrp="1"/>
           </p:cNvSpPr>
@@ -2133,7 +2133,7 @@
       </p:sp>
       <p:sp>
         <p:nvSpPr>
-          <p:cNvPr id="2052632131" name="Espace réservé du contenu 2"/>
+          <p:cNvPr id="1094545470" name="Espace réservé du contenu 2"/>
           <p:cNvSpPr>
             <a:spLocks noGrp="1"/>
           </p:cNvSpPr>
@@ -2204,7 +2204,7 @@
       </p:sp>
       <p:sp>
         <p:nvSpPr>
-          <p:cNvPr id="1014881511" name="Espace réservé du contenu 3"/>
+          <p:cNvPr id="554920468" name="Espace réservé du contenu 3"/>
           <p:cNvSpPr>
             <a:spLocks noGrp="1"/>
           </p:cNvSpPr>
@@ -2275,7 +2275,7 @@
       </p:sp>
       <p:sp>
         <p:nvSpPr>
-          <p:cNvPr id="1447265105" name="Espace réservé de la date 4"/>
+          <p:cNvPr id="1766736489" name="Espace réservé de la date 4"/>
           <p:cNvSpPr>
             <a:spLocks noGrp="1"/>
           </p:cNvSpPr>
@@ -2301,7 +2301,7 @@
       </p:sp>
       <p:sp>
         <p:nvSpPr>
-          <p:cNvPr id="1960446048" name="Espace réservé du pied de page 5"/>
+          <p:cNvPr id="958480532" name="Espace réservé du pied de page 5"/>
           <p:cNvSpPr>
             <a:spLocks noGrp="1"/>
           </p:cNvSpPr>
@@ -2323,7 +2323,7 @@
       </p:sp>
       <p:sp>
         <p:nvSpPr>
-          <p:cNvPr id="1856239214" name="Espace réservé du numéro de diapositive 6"/>
+          <p:cNvPr id="1492632577" name="Espace réservé du numéro de diapositive 6"/>
           <p:cNvSpPr>
             <a:spLocks noGrp="1"/>
           </p:cNvSpPr>
@@ -2374,7 +2374,7 @@
       </p:grpSpPr>
       <p:sp>
         <p:nvSpPr>
-          <p:cNvPr id="1826159559" name="Titre 1"/>
+          <p:cNvPr id="1661619366" name="Titre 1"/>
           <p:cNvSpPr>
             <a:spLocks noGrp="1"/>
           </p:cNvSpPr>
@@ -2405,7 +2405,7 @@
       </p:sp>
       <p:sp>
         <p:nvSpPr>
-          <p:cNvPr id="426034449" name="Espace réservé du texte 2"/>
+          <p:cNvPr id="358068196" name="Espace réservé du texte 2"/>
           <p:cNvSpPr>
             <a:spLocks noGrp="1"/>
           </p:cNvSpPr>
@@ -2473,7 +2473,7 @@
       </p:sp>
       <p:sp>
         <p:nvSpPr>
-          <p:cNvPr id="1729320360" name="Espace réservé du contenu 3"/>
+          <p:cNvPr id="2006182969" name="Espace réservé du contenu 3"/>
           <p:cNvSpPr>
             <a:spLocks noGrp="1"/>
           </p:cNvSpPr>
@@ -2544,7 +2544,7 @@
       </p:sp>
       <p:sp>
         <p:nvSpPr>
-          <p:cNvPr id="906485593" name="Espace réservé du texte 4"/>
+          <p:cNvPr id="1007762728" name="Espace réservé du texte 4"/>
           <p:cNvSpPr>
             <a:spLocks noGrp="1"/>
           </p:cNvSpPr>
@@ -2612,7 +2612,7 @@
       </p:sp>
       <p:sp>
         <p:nvSpPr>
-          <p:cNvPr id="141000722" name="Espace réservé du contenu 5"/>
+          <p:cNvPr id="204160326" name="Espace réservé du contenu 5"/>
           <p:cNvSpPr>
             <a:spLocks noGrp="1"/>
           </p:cNvSpPr>
@@ -2683,7 +2683,7 @@
       </p:sp>
       <p:sp>
         <p:nvSpPr>
-          <p:cNvPr id="297160200" name="Espace réservé de la date 6"/>
+          <p:cNvPr id="418523583" name="Espace réservé de la date 6"/>
           <p:cNvSpPr>
             <a:spLocks noGrp="1"/>
           </p:cNvSpPr>
@@ -2709,7 +2709,7 @@
       </p:sp>
       <p:sp>
         <p:nvSpPr>
-          <p:cNvPr id="1109758397" name="Espace réservé du pied de page 7"/>
+          <p:cNvPr id="645677258" name="Espace réservé du pied de page 7"/>
           <p:cNvSpPr>
             <a:spLocks noGrp="1"/>
           </p:cNvSpPr>
@@ -2731,7 +2731,7 @@
       </p:sp>
       <p:sp>
         <p:nvSpPr>
-          <p:cNvPr id="1900134894" name="Espace réservé du numéro de diapositive 8"/>
+          <p:cNvPr id="1561800505" name="Espace réservé du numéro de diapositive 8"/>
           <p:cNvSpPr>
             <a:spLocks noGrp="1"/>
           </p:cNvSpPr>
@@ -2782,7 +2782,7 @@
       </p:grpSpPr>
       <p:sp>
         <p:nvSpPr>
-          <p:cNvPr id="1940141884" name="Titre 1"/>
+          <p:cNvPr id="1142642314" name="Titre 1"/>
           <p:cNvSpPr>
             <a:spLocks noGrp="1"/>
           </p:cNvSpPr>
@@ -2808,7 +2808,7 @@
       </p:sp>
       <p:sp>
         <p:nvSpPr>
-          <p:cNvPr id="1692015330" name="Espace réservé de la date 2"/>
+          <p:cNvPr id="1528534677" name="Espace réservé de la date 2"/>
           <p:cNvSpPr>
             <a:spLocks noGrp="1"/>
           </p:cNvSpPr>
@@ -2834,7 +2834,7 @@
       </p:sp>
       <p:sp>
         <p:nvSpPr>
-          <p:cNvPr id="205380036" name="Espace réservé du pied de page 3"/>
+          <p:cNvPr id="197094135" name="Espace réservé du pied de page 3"/>
           <p:cNvSpPr>
             <a:spLocks noGrp="1"/>
           </p:cNvSpPr>
@@ -2856,7 +2856,7 @@
       </p:sp>
       <p:sp>
         <p:nvSpPr>
-          <p:cNvPr id="950140006" name="Espace réservé du numéro de diapositive 4"/>
+          <p:cNvPr id="1206109690" name="Espace réservé du numéro de diapositive 4"/>
           <p:cNvSpPr>
             <a:spLocks noGrp="1"/>
           </p:cNvSpPr>
@@ -2907,7 +2907,7 @@
       </p:grpSpPr>
       <p:sp>
         <p:nvSpPr>
-          <p:cNvPr id="655591655" name="Espace réservé de la date 1"/>
+          <p:cNvPr id="1630564142" name="Espace réservé de la date 1"/>
           <p:cNvSpPr>
             <a:spLocks noGrp="1"/>
           </p:cNvSpPr>
@@ -2933,7 +2933,7 @@
       </p:sp>
       <p:sp>
         <p:nvSpPr>
-          <p:cNvPr id="249130005" name="Espace réservé du pied de page 2"/>
+          <p:cNvPr id="211839433" name="Espace réservé du pied de page 2"/>
           <p:cNvSpPr>
             <a:spLocks noGrp="1"/>
           </p:cNvSpPr>
@@ -2955,7 +2955,7 @@
       </p:sp>
       <p:sp>
         <p:nvSpPr>
-          <p:cNvPr id="1372975104" name="Espace réservé du numéro de diapositive 3"/>
+          <p:cNvPr id="263869495" name="Espace réservé du numéro de diapositive 3"/>
           <p:cNvSpPr>
             <a:spLocks noGrp="1"/>
           </p:cNvSpPr>
@@ -3006,7 +3006,7 @@
       </p:grpSpPr>
       <p:sp>
         <p:nvSpPr>
-          <p:cNvPr id="1727355599" name="Titre 1"/>
+          <p:cNvPr id="1201331477" name="Titre 1"/>
           <p:cNvSpPr>
             <a:spLocks noGrp="1"/>
           </p:cNvSpPr>
@@ -3041,7 +3041,7 @@
       </p:sp>
       <p:sp>
         <p:nvSpPr>
-          <p:cNvPr id="1992037117" name="Espace réservé du contenu 2"/>
+          <p:cNvPr id="1196811967" name="Espace réservé du contenu 2"/>
           <p:cNvSpPr>
             <a:spLocks noGrp="1"/>
           </p:cNvSpPr>
@@ -3140,7 +3140,7 @@
       </p:sp>
       <p:sp>
         <p:nvSpPr>
-          <p:cNvPr id="1127418375" name="Espace réservé du texte 3"/>
+          <p:cNvPr id="359288057" name="Espace réservé du texte 3"/>
           <p:cNvSpPr>
             <a:spLocks noGrp="1"/>
           </p:cNvSpPr>
@@ -3208,7 +3208,7 @@
       </p:sp>
       <p:sp>
         <p:nvSpPr>
-          <p:cNvPr id="808285411" name="Espace réservé de la date 4"/>
+          <p:cNvPr id="2139961260" name="Espace réservé de la date 4"/>
           <p:cNvSpPr>
             <a:spLocks noGrp="1"/>
           </p:cNvSpPr>
@@ -3234,7 +3234,7 @@
       </p:sp>
       <p:sp>
         <p:nvSpPr>
-          <p:cNvPr id="983780282" name="Espace réservé du pied de page 5"/>
+          <p:cNvPr id="682609590" name="Espace réservé du pied de page 5"/>
           <p:cNvSpPr>
             <a:spLocks noGrp="1"/>
           </p:cNvSpPr>
@@ -3256,7 +3256,7 @@
       </p:sp>
       <p:sp>
         <p:nvSpPr>
-          <p:cNvPr id="790165398" name="Espace réservé du numéro de diapositive 6"/>
+          <p:cNvPr id="480997060" name="Espace réservé du numéro de diapositive 6"/>
           <p:cNvSpPr>
             <a:spLocks noGrp="1"/>
           </p:cNvSpPr>
@@ -3307,7 +3307,7 @@
       </p:grpSpPr>
       <p:sp>
         <p:nvSpPr>
-          <p:cNvPr id="832513243" name="Titre 1"/>
+          <p:cNvPr id="325407828" name="Titre 1"/>
           <p:cNvSpPr>
             <a:spLocks noGrp="1"/>
           </p:cNvSpPr>
@@ -3342,7 +3342,7 @@
       </p:sp>
       <p:sp>
         <p:nvSpPr>
-          <p:cNvPr id="755991100" name="Espace réservé pour une image 2"/>
+          <p:cNvPr id="1570816001" name="Espace réservé pour une image 2"/>
           <p:cNvSpPr>
             <a:spLocks noChangeAspect="1" noGrp="1"/>
           </p:cNvSpPr>
@@ -3410,7 +3410,7 @@
       </p:sp>
       <p:sp>
         <p:nvSpPr>
-          <p:cNvPr id="1135850512" name="Espace réservé du texte 3"/>
+          <p:cNvPr id="1745651133" name="Espace réservé du texte 3"/>
           <p:cNvSpPr>
             <a:spLocks noGrp="1"/>
           </p:cNvSpPr>
@@ -3478,7 +3478,7 @@
       </p:sp>
       <p:sp>
         <p:nvSpPr>
-          <p:cNvPr id="978929930" name="Espace réservé de la date 4"/>
+          <p:cNvPr id="1229654096" name="Espace réservé de la date 4"/>
           <p:cNvSpPr>
             <a:spLocks noGrp="1"/>
           </p:cNvSpPr>
@@ -3504,7 +3504,7 @@
       </p:sp>
       <p:sp>
         <p:nvSpPr>
-          <p:cNvPr id="1798176278" name="Espace réservé du pied de page 5"/>
+          <p:cNvPr id="1523224916" name="Espace réservé du pied de page 5"/>
           <p:cNvSpPr>
             <a:spLocks noGrp="1"/>
           </p:cNvSpPr>
@@ -3526,7 +3526,7 @@
       </p:sp>
       <p:sp>
         <p:nvSpPr>
-          <p:cNvPr id="1036121794" name="Espace réservé du numéro de diapositive 6"/>
+          <p:cNvPr id="745043059" name="Espace réservé du numéro de diapositive 6"/>
           <p:cNvSpPr>
             <a:spLocks noGrp="1"/>
           </p:cNvSpPr>
@@ -3582,7 +3582,7 @@
       </p:grpSpPr>
       <p:sp>
         <p:nvSpPr>
-          <p:cNvPr id="2061194049" name="Espace réservé du titre 1"/>
+          <p:cNvPr id="815786878" name="Espace réservé du titre 1"/>
           <p:cNvSpPr>
             <a:spLocks noGrp="1"/>
           </p:cNvSpPr>
@@ -3618,7 +3618,7 @@
       </p:sp>
       <p:sp>
         <p:nvSpPr>
-          <p:cNvPr id="1597225632" name="Espace réservé du texte 2"/>
+          <p:cNvPr id="673205001" name="Espace réservé du texte 2"/>
           <p:cNvSpPr>
             <a:spLocks noGrp="1"/>
           </p:cNvSpPr>
@@ -3694,7 +3694,7 @@
       </p:sp>
       <p:sp>
         <p:nvSpPr>
-          <p:cNvPr id="860308965" name="Espace réservé de la date 3"/>
+          <p:cNvPr id="387627483" name="Espace réservé de la date 3"/>
           <p:cNvSpPr>
             <a:spLocks noGrp="1"/>
           </p:cNvSpPr>
@@ -3738,7 +3738,7 @@
       </p:sp>
       <p:sp>
         <p:nvSpPr>
-          <p:cNvPr id="1486532779" name="Espace réservé du pied de page 4"/>
+          <p:cNvPr id="615003185" name="Espace réservé du pied de page 4"/>
           <p:cNvSpPr>
             <a:spLocks noGrp="1"/>
           </p:cNvSpPr>
@@ -3778,7 +3778,7 @@
       </p:sp>
       <p:sp>
         <p:nvSpPr>
-          <p:cNvPr id="1915368622" name="Espace réservé du numéro de diapositive 5"/>
+          <p:cNvPr id="1085444227" name="Espace réservé du numéro de diapositive 5"/>
           <p:cNvSpPr>
             <a:spLocks noGrp="1"/>
           </p:cNvSpPr>
@@ -4138,7 +4138,7 @@
       </p:grpSpPr>
       <p:cxnSp>
         <p:nvCxnSpPr>
-          <p:cNvPr id="659764172" name="Connecteur droit 1568760680"/>
+          <p:cNvPr id="1011535862" name="Connecteur droit 1568760680"/>
           <p:cNvCxnSpPr/>
           <p:nvPr/>
         </p:nvCxnSpPr>
@@ -4180,7 +4180,7 @@
       </p:cxnSp>
       <p:sp>
         <p:nvSpPr>
-          <p:cNvPr id="719299099" name="ZoneTexte 1868728971"/>
+          <p:cNvPr id="743910822" name="ZoneTexte 1868728971"/>
           <p:cNvSpPr txBox="1"/>
           <p:nvPr/>
         </p:nvSpPr>
@@ -4220,7 +4220,7 @@
       </p:sp>
       <p:cxnSp>
         <p:nvCxnSpPr>
-          <p:cNvPr id="1926390371" name="Connecteur droit 806540798"/>
+          <p:cNvPr id="1808263830" name="Connecteur droit 806540798"/>
           <p:cNvCxnSpPr/>
           <p:nvPr/>
         </p:nvCxnSpPr>
@@ -4262,7 +4262,7 @@
       </p:cxnSp>
       <p:sp>
         <p:nvSpPr>
-          <p:cNvPr id="1467850438" name="ZoneTexte 406616703"/>
+          <p:cNvPr id="78429684" name="ZoneTexte 406616703"/>
           <p:cNvSpPr txBox="1"/>
           <p:nvPr/>
         </p:nvSpPr>
@@ -4302,13 +4302,13 @@
       </p:sp>
       <p:cxnSp>
         <p:nvCxnSpPr>
-          <p:cNvPr id="1237438328" name="Connecteur droit 858914340"/>
+          <p:cNvPr id="725984429" name="Connecteur droit 858914340"/>
           <p:cNvCxnSpPr/>
           <p:nvPr/>
         </p:nvCxnSpPr>
         <p:spPr bwMode="auto">
           <a:xfrm flipV="1">
-            <a:off x="3252189" y="6540795"/>
+            <a:off x="3252188" y="6630653"/>
             <a:ext cx="3616304" cy="0"/>
           </a:xfrm>
           <a:prstGeom prst="line">
@@ -4344,14 +4344,14 @@
       </p:cxnSp>
       <p:sp>
         <p:nvSpPr>
-          <p:cNvPr id="325129873" name="ZoneTexte 2018177722"/>
+          <p:cNvPr id="655687" name="ZoneTexte 2018177722"/>
           <p:cNvSpPr txBox="1"/>
           <p:nvPr/>
         </p:nvSpPr>
         <p:spPr bwMode="auto">
           <a:xfrm flipH="0" flipV="0">
-            <a:off x="3306144" y="6357733"/>
-            <a:ext cx="3522024" cy="366118"/>
+            <a:off x="3306143" y="6447591"/>
+            <a:ext cx="3522384" cy="366119"/>
           </a:xfrm>
           <a:prstGeom prst="rect">
             <a:avLst/>
@@ -4376,7 +4376,7 @@
                   </a:schemeClr>
                 </a:solidFill>
               </a:rPr>
-              <a:t>Résistances, Stress &amp; Trauma</a:t>
+              <a:t>Résistances</a:t>
             </a:r>
             <a:endParaRPr sz="1800" b="0">
               <a:solidFill>
@@ -4391,13 +4391,13 @@
       </p:sp>
       <p:sp>
         <p:nvSpPr>
-          <p:cNvPr id="512811105" name="ZoneTexte 519900862"/>
+          <p:cNvPr id="1302065422" name="ZoneTexte 519900862"/>
           <p:cNvSpPr txBox="1"/>
           <p:nvPr/>
         </p:nvSpPr>
         <p:spPr bwMode="auto">
           <a:xfrm>
-            <a:off x="3076543" y="6743511"/>
+            <a:off x="3076542" y="6788440"/>
             <a:ext cx="2181487" cy="616449"/>
           </a:xfrm>
           <a:prstGeom prst="rect">
@@ -4653,13 +4653,13 @@
       </p:sp>
       <p:sp>
         <p:nvSpPr>
-          <p:cNvPr id="2098956928" name="Rectangle : avec coins arrondis en haut 838565229"/>
+          <p:cNvPr id="2077066419" name="Rectangle : avec coins arrondis en haut 838565229"/>
           <p:cNvSpPr/>
           <p:nvPr/>
         </p:nvSpPr>
         <p:spPr bwMode="auto">
           <a:xfrm rot="5399976">
-            <a:off x="5203792" y="6863707"/>
+            <a:off x="5203791" y="6908636"/>
             <a:ext cx="520473" cy="400050"/>
           </a:xfrm>
           <a:prstGeom prst="round2SameRect">
@@ -4699,13 +4699,13 @@
       </p:sp>
       <p:sp>
         <p:nvSpPr>
-          <p:cNvPr id="1839666904" name="ZoneTexte 448541368"/>
+          <p:cNvPr id="445672518" name="ZoneTexte 448541368"/>
           <p:cNvSpPr txBox="1"/>
           <p:nvPr/>
         </p:nvSpPr>
         <p:spPr bwMode="auto">
           <a:xfrm>
-            <a:off x="3085691" y="7383949"/>
+            <a:off x="3085690" y="7428877"/>
             <a:ext cx="2170176" cy="643788"/>
           </a:xfrm>
           <a:prstGeom prst="rect">
@@ -4780,13 +4780,13 @@
       </p:sp>
       <p:sp>
         <p:nvSpPr>
-          <p:cNvPr id="1703007119" name="Rectangle : avec coins arrondis en haut 1165584529"/>
+          <p:cNvPr id="79406005" name="Rectangle : avec coins arrondis en haut 1165584529"/>
           <p:cNvSpPr/>
           <p:nvPr/>
         </p:nvSpPr>
         <p:spPr bwMode="auto">
           <a:xfrm rot="5399976">
-            <a:off x="5195512" y="7504146"/>
+            <a:off x="5195511" y="7549075"/>
             <a:ext cx="520473" cy="400050"/>
           </a:xfrm>
           <a:prstGeom prst="round2SameRect">
@@ -4826,13 +4826,13 @@
       </p:sp>
       <p:sp>
         <p:nvSpPr>
-          <p:cNvPr id="902810861" name="Flèche : pentagone 1880610112"/>
+          <p:cNvPr id="626906343" name="Flèche : pentagone 1880610112"/>
           <p:cNvSpPr/>
           <p:nvPr/>
         </p:nvSpPr>
         <p:spPr bwMode="auto">
           <a:xfrm flipH="0" flipV="0">
-            <a:off x="5798788" y="6916887"/>
+            <a:off x="5798787" y="6961816"/>
             <a:ext cx="143169" cy="140445"/>
           </a:xfrm>
           <a:prstGeom prst="homePlate">
@@ -4871,13 +4871,13 @@
       </p:sp>
       <p:sp>
         <p:nvSpPr>
-          <p:cNvPr id="10132194" name="Flèche : pentagone 446859139"/>
+          <p:cNvPr id="54414047" name="Flèche : pentagone 446859139"/>
           <p:cNvSpPr/>
           <p:nvPr/>
         </p:nvSpPr>
         <p:spPr bwMode="auto">
           <a:xfrm flipH="0" flipV="0">
-            <a:off x="5949463" y="6916887"/>
+            <a:off x="5949462" y="6961816"/>
             <a:ext cx="143169" cy="140443"/>
           </a:xfrm>
           <a:prstGeom prst="homePlate">
@@ -4916,13 +4916,13 @@
       </p:sp>
       <p:sp>
         <p:nvSpPr>
-          <p:cNvPr id="167852545" name="Flèche : pentagone 2055848356"/>
+          <p:cNvPr id="535286051" name="Flèche : pentagone 2055848356"/>
           <p:cNvSpPr/>
           <p:nvPr/>
         </p:nvSpPr>
         <p:spPr bwMode="auto">
           <a:xfrm flipH="0" flipV="0">
-            <a:off x="6100142" y="6916887"/>
+            <a:off x="6100141" y="6961816"/>
             <a:ext cx="143169" cy="140443"/>
           </a:xfrm>
           <a:prstGeom prst="homePlate">
@@ -4961,13 +4961,13 @@
       </p:sp>
       <p:sp>
         <p:nvSpPr>
-          <p:cNvPr id="813242163" name="Flèche : pentagone 1980093981"/>
+          <p:cNvPr id="1865730616" name="Flèche : pentagone 1980093981"/>
           <p:cNvSpPr/>
           <p:nvPr/>
         </p:nvSpPr>
         <p:spPr bwMode="auto">
           <a:xfrm flipH="0" flipV="0">
-            <a:off x="6250817" y="6916887"/>
+            <a:off x="6250816" y="6961816"/>
             <a:ext cx="143169" cy="140443"/>
           </a:xfrm>
           <a:prstGeom prst="homePlate">
@@ -5006,13 +5006,13 @@
       </p:sp>
       <p:sp>
         <p:nvSpPr>
-          <p:cNvPr id="425300617" name="Flèche : pentagone 905284374"/>
+          <p:cNvPr id="745685095" name="Flèche : pentagone 905284374"/>
           <p:cNvSpPr/>
           <p:nvPr/>
         </p:nvSpPr>
         <p:spPr bwMode="auto">
           <a:xfrm flipH="0" flipV="0">
-            <a:off x="6401493" y="6916887"/>
+            <a:off x="6401493" y="6961816"/>
             <a:ext cx="143169" cy="140443"/>
           </a:xfrm>
           <a:prstGeom prst="homePlate">
@@ -5051,14 +5051,14 @@
       </p:sp>
       <p:sp>
         <p:nvSpPr>
-          <p:cNvPr id="1220770323" name="ZoneTexte 880464430"/>
+          <p:cNvPr id="1902503090" name="ZoneTexte 880464430"/>
           <p:cNvSpPr txBox="1"/>
           <p:nvPr/>
         </p:nvSpPr>
         <p:spPr bwMode="auto">
           <a:xfrm flipH="0" flipV="0">
-            <a:off x="3170221" y="8017652"/>
-            <a:ext cx="3685708" cy="579478"/>
+            <a:off x="3170220" y="8107510"/>
+            <a:ext cx="3687147" cy="823319"/>
           </a:xfrm>
           <a:prstGeom prst="rect">
             <a:avLst/>
@@ -5116,6 +5116,32 @@
               </a:rPr>
               <a:t> à la résistance concernée. </a:t>
             </a:r>
+            <a:br>
+              <a:rPr lang="fr-FR" sz="800" b="0" i="0" u="none" strike="noStrike" cap="none" spc="0">
+                <a:solidFill>
+                  <a:schemeClr val="tx1">
+                    <a:lumMod val="50000"/>
+                    <a:lumOff val="50000"/>
+                  </a:schemeClr>
+                </a:solidFill>
+                <a:latin typeface="Arial"/>
+                <a:ea typeface="Arial"/>
+                <a:cs typeface="Arial"/>
+              </a:rPr>
+            </a:br>
+            <a:br>
+              <a:rPr lang="fr-FR" sz="800" b="0" i="0" u="none" strike="noStrike" cap="none" spc="0">
+                <a:solidFill>
+                  <a:schemeClr val="tx1">
+                    <a:lumMod val="50000"/>
+                    <a:lumOff val="50000"/>
+                  </a:schemeClr>
+                </a:solidFill>
+                <a:latin typeface="Arial"/>
+                <a:ea typeface="Arial"/>
+                <a:cs typeface="Arial"/>
+              </a:rPr>
+            </a:br>
             <a:r>
               <a:rPr lang="fr-FR" sz="800">
                 <a:solidFill>
@@ -5147,7 +5173,28 @@
                   </a:schemeClr>
                 </a:solidFill>
               </a:rPr>
-              <a:t>, cochez une case de stress. Si vous réussissez à un test de </a:t>
+              <a:t>, cochez une case de stress. </a:t>
+            </a:r>
+            <a:br>
+              <a:rPr lang="fr-FR" sz="800">
+                <a:solidFill>
+                  <a:schemeClr val="tx1">
+                    <a:lumMod val="50000"/>
+                    <a:lumOff val="50000"/>
+                  </a:schemeClr>
+                </a:solidFill>
+              </a:rPr>
+            </a:br>
+            <a:r>
+              <a:rPr lang="fr-FR" sz="800">
+                <a:solidFill>
+                  <a:schemeClr val="tx1">
+                    <a:lumMod val="50000"/>
+                    <a:lumOff val="50000"/>
+                  </a:schemeClr>
+                </a:solidFill>
+              </a:rPr>
+              <a:t>Si vous réussissez à un test de </a:t>
             </a:r>
             <a:r>
               <a:rPr lang="fr-FR" sz="800" b="1">
@@ -5210,7 +5257,7 @@
       </p:sp>
       <p:sp>
         <p:nvSpPr>
-          <p:cNvPr id="1212945650" name="ZoneTexte 1302587497"/>
+          <p:cNvPr id="653181082" name="ZoneTexte 1302587497"/>
           <p:cNvSpPr txBox="1"/>
           <p:nvPr/>
         </p:nvSpPr>
@@ -5508,13 +5555,13 @@
       </p:sp>
       <p:cxnSp>
         <p:nvCxnSpPr>
-          <p:cNvPr id="186275386" name="Connecteur droit 342798987"/>
+          <p:cNvPr id="193026919" name="Connecteur droit 342798987"/>
           <p:cNvCxnSpPr/>
           <p:nvPr/>
         </p:nvCxnSpPr>
         <p:spPr bwMode="auto">
           <a:xfrm flipV="1">
-            <a:off x="3259026" y="8683857"/>
+            <a:off x="3259026" y="9133149"/>
             <a:ext cx="3609464" cy="0"/>
           </a:xfrm>
           <a:prstGeom prst="line">
@@ -5550,13 +5597,13 @@
       </p:cxnSp>
       <p:sp>
         <p:nvSpPr>
-          <p:cNvPr id="2099811014" name="ZoneTexte 966486802"/>
+          <p:cNvPr id="460564154" name="ZoneTexte 966486802"/>
           <p:cNvSpPr txBox="1"/>
           <p:nvPr/>
         </p:nvSpPr>
         <p:spPr bwMode="auto">
           <a:xfrm>
-            <a:off x="3303459" y="8500797"/>
+            <a:off x="3303459" y="8950089"/>
             <a:ext cx="2270304" cy="366118"/>
           </a:xfrm>
           <a:prstGeom prst="rect">
@@ -5590,7 +5637,7 @@
       </p:sp>
       <p:sp>
         <p:nvSpPr>
-          <p:cNvPr id="2031518102" name="Rectangle 38344096"/>
+          <p:cNvPr id="571043282" name="Rectangle 38344096"/>
           <p:cNvSpPr/>
           <p:nvPr/>
         </p:nvSpPr>
@@ -5630,7 +5677,7 @@
       </p:sp>
       <p:sp>
         <p:nvSpPr>
-          <p:cNvPr id="1159720982" name="Rectangle 954364527"/>
+          <p:cNvPr id="1923208512" name="Rectangle 954364527"/>
           <p:cNvSpPr/>
           <p:nvPr/>
         </p:nvSpPr>
@@ -5670,7 +5717,7 @@
       </p:sp>
       <p:sp>
         <p:nvSpPr>
-          <p:cNvPr id="1086455721" name="ZoneTexte 1527388901"/>
+          <p:cNvPr id="1886974297" name="ZoneTexte 1527388901"/>
           <p:cNvSpPr txBox="1"/>
           <p:nvPr/>
         </p:nvSpPr>
@@ -5892,13 +5939,13 @@
       </p:sp>
       <p:sp>
         <p:nvSpPr>
-          <p:cNvPr id="1939947376" name="ZoneTexte 1440859034"/>
+          <p:cNvPr id="1367163426" name="ZoneTexte 1440859034"/>
           <p:cNvSpPr txBox="1"/>
           <p:nvPr/>
         </p:nvSpPr>
         <p:spPr bwMode="auto">
           <a:xfrm>
-            <a:off x="5710630" y="6695110"/>
+            <a:off x="5710629" y="6740039"/>
             <a:ext cx="894969" cy="305158"/>
           </a:xfrm>
           <a:prstGeom prst="rect">
@@ -5943,13 +5990,13 @@
       </p:sp>
       <p:cxnSp>
         <p:nvCxnSpPr>
-          <p:cNvPr id="1742025520" name="Connecteur droit 858914340"/>
+          <p:cNvPr id="385179359" name="Connecteur droit 858914340"/>
           <p:cNvCxnSpPr/>
           <p:nvPr/>
         </p:nvCxnSpPr>
         <p:spPr bwMode="auto">
           <a:xfrm flipH="0" flipV="1">
-            <a:off x="-66688" y="6540795"/>
+            <a:off x="-66687" y="6630653"/>
             <a:ext cx="3068035" cy="0"/>
           </a:xfrm>
           <a:prstGeom prst="line">
@@ -5985,13 +6032,13 @@
       </p:cxnSp>
       <p:sp>
         <p:nvSpPr>
-          <p:cNvPr id="1649277529" name="ZoneTexte 2018177722"/>
+          <p:cNvPr id="396243764" name="ZoneTexte 2018177722"/>
           <p:cNvSpPr txBox="1"/>
           <p:nvPr/>
         </p:nvSpPr>
         <p:spPr bwMode="auto">
           <a:xfrm flipH="0" flipV="0">
-            <a:off x="32193" y="6357735"/>
+            <a:off x="32193" y="6447593"/>
             <a:ext cx="1815876" cy="366117"/>
           </a:xfrm>
           <a:prstGeom prst="rect">
@@ -6032,13 +6079,13 @@
       </p:sp>
       <p:sp>
         <p:nvSpPr>
-          <p:cNvPr id="1959316975" name=""/>
+          <p:cNvPr id="1340444636" name=""/>
           <p:cNvSpPr txBox="1"/>
           <p:nvPr/>
         </p:nvSpPr>
         <p:spPr bwMode="auto">
           <a:xfrm rot="0" flipH="0" flipV="0">
-            <a:off x="11160" y="6674321"/>
+            <a:off x="11160" y="6764179"/>
             <a:ext cx="3007973" cy="3376018"/>
           </a:xfrm>
           <a:prstGeom prst="rect">
@@ -6134,13 +6181,13 @@
       </p:sp>
       <p:cxnSp>
         <p:nvCxnSpPr>
-          <p:cNvPr id="2130853905" name="Connecteur droit 858914340"/>
+          <p:cNvPr id="20696715" name="Connecteur droit 858914340"/>
           <p:cNvCxnSpPr/>
           <p:nvPr/>
         </p:nvCxnSpPr>
         <p:spPr bwMode="auto">
           <a:xfrm flipH="0" flipV="1">
-            <a:off x="4547592" y="4940256"/>
+            <a:off x="4547592" y="4985184"/>
             <a:ext cx="2320902" cy="0"/>
           </a:xfrm>
           <a:prstGeom prst="line">
@@ -6176,13 +6223,13 @@
       </p:cxnSp>
       <p:sp>
         <p:nvSpPr>
-          <p:cNvPr id="1741988812" name="ZoneTexte 2018177722"/>
+          <p:cNvPr id="2144023034" name="ZoneTexte 2018177722"/>
           <p:cNvSpPr txBox="1"/>
           <p:nvPr/>
         </p:nvSpPr>
         <p:spPr bwMode="auto">
           <a:xfrm flipH="0" flipV="0">
-            <a:off x="4601547" y="4757193"/>
+            <a:off x="4601547" y="4802122"/>
             <a:ext cx="1831713" cy="366118"/>
           </a:xfrm>
           <a:prstGeom prst="rect">
@@ -6234,14 +6281,14 @@
       </p:sp>
       <p:sp>
         <p:nvSpPr>
-          <p:cNvPr id="356306380" name=""/>
+          <p:cNvPr id="1410526633" name=""/>
           <p:cNvSpPr txBox="1"/>
           <p:nvPr/>
         </p:nvSpPr>
         <p:spPr bwMode="auto">
           <a:xfrm rot="0" flipH="0" flipV="0">
-            <a:off x="4547592" y="5033169"/>
-            <a:ext cx="2343978" cy="1539598"/>
+            <a:off x="4547592" y="5123027"/>
+            <a:ext cx="2344698" cy="1417680"/>
           </a:xfrm>
           <a:prstGeom prst="rect">
             <a:avLst/>
@@ -6390,90 +6437,6 @@
                 <a:cs typeface="Arial"/>
               </a:rPr>
               <a:t> toujours un échec.</a:t>
-            </a:r>
-            <a:r>
-              <a:rPr lang="fr-FR" sz="800" b="0" i="0" u="none" strike="noStrike" cap="none" spc="0">
-                <a:solidFill>
-                  <a:schemeClr val="tx1">
-                    <a:lumMod val="50000"/>
-                    <a:lumOff val="50000"/>
-                  </a:schemeClr>
-                </a:solidFill>
-                <a:latin typeface="Arial"/>
-                <a:ea typeface="Arial"/>
-                <a:cs typeface="Arial"/>
-              </a:rPr>
-              <a:t> </a:t>
-            </a:r>
-            <a:r>
-              <a:rPr lang="fr-FR" sz="800" b="0" i="0" u="none" strike="noStrike" cap="none" spc="0">
-                <a:solidFill>
-                  <a:schemeClr val="tx1">
-                    <a:lumMod val="50000"/>
-                    <a:lumOff val="50000"/>
-                  </a:schemeClr>
-                </a:solidFill>
-                <a:latin typeface="Arial"/>
-                <a:ea typeface="Arial"/>
-                <a:cs typeface="Arial"/>
-              </a:rPr>
-              <a:t>Un </a:t>
-            </a:r>
-            <a:r>
-              <a:rPr lang="fr-FR" sz="800" b="1" i="0" u="none" strike="noStrike" cap="none" spc="0">
-                <a:solidFill>
-                  <a:schemeClr val="tx1">
-                    <a:lumMod val="50000"/>
-                    <a:lumOff val="50000"/>
-                  </a:schemeClr>
-                </a:solidFill>
-                <a:latin typeface="Arial"/>
-                <a:ea typeface="Arial"/>
-                <a:cs typeface="Arial"/>
-              </a:rPr>
-              <a:t>double</a:t>
-            </a:r>
-            <a:r>
-              <a:rPr lang="fr-FR" sz="800" b="0" i="0" u="none" strike="noStrike" cap="none" spc="0">
-                <a:solidFill>
-                  <a:schemeClr val="tx1">
-                    <a:lumMod val="50000"/>
-                    <a:lumOff val="50000"/>
-                  </a:schemeClr>
-                </a:solidFill>
-                <a:latin typeface="Arial"/>
-                <a:ea typeface="Arial"/>
-                <a:cs typeface="Arial"/>
-              </a:rPr>
-              <a:t> naturel est un </a:t>
-            </a:r>
-            <a:r>
-              <a:rPr lang="fr-FR" sz="800" b="1" i="0" u="none" strike="noStrike" cap="none" spc="0">
-                <a:solidFill>
-                  <a:schemeClr val="tx1">
-                    <a:lumMod val="50000"/>
-                    <a:lumOff val="50000"/>
-                  </a:schemeClr>
-                </a:solidFill>
-                <a:latin typeface="Arial"/>
-                <a:ea typeface="Arial"/>
-                <a:cs typeface="Arial"/>
-              </a:rPr>
-              <a:t>résultat critique</a:t>
-            </a:r>
-            <a:r>
-              <a:rPr lang="fr-FR" sz="800" b="0" i="0" u="none" strike="noStrike" cap="none" spc="0">
-                <a:solidFill>
-                  <a:schemeClr val="tx1">
-                    <a:lumMod val="50000"/>
-                    <a:lumOff val="50000"/>
-                  </a:schemeClr>
-                </a:solidFill>
-                <a:latin typeface="Arial"/>
-                <a:ea typeface="Arial"/>
-                <a:cs typeface="Arial"/>
-              </a:rPr>
-              <a:t>. </a:t>
             </a:r>
             <a:br>
               <a:rPr lang="fr-FR" sz="800" b="0" i="0" u="none" strike="noStrike" cap="none" spc="0">
@@ -6685,7 +6648,7 @@
       </p:sp>
       <p:sp>
         <p:nvSpPr>
-          <p:cNvPr id="818235611" name="ZoneTexte 2021443538"/>
+          <p:cNvPr id="1553755908" name="ZoneTexte 2021443538"/>
           <p:cNvSpPr txBox="1"/>
           <p:nvPr/>
         </p:nvSpPr>
@@ -6769,7 +6732,7 @@
       </p:sp>
       <p:sp>
         <p:nvSpPr>
-          <p:cNvPr id="298451672" name="ZoneTexte 1075280509"/>
+          <p:cNvPr id="1720971382" name="ZoneTexte 1075280509"/>
           <p:cNvSpPr txBox="1"/>
           <p:nvPr/>
         </p:nvSpPr>
@@ -6853,7 +6816,7 @@
       </p:sp>
       <p:sp>
         <p:nvSpPr>
-          <p:cNvPr id="492275633" name="ZoneTexte 824413856"/>
+          <p:cNvPr id="2096058637" name="ZoneTexte 824413856"/>
           <p:cNvSpPr txBox="1"/>
           <p:nvPr/>
         </p:nvSpPr>
@@ -6937,7 +6900,7 @@
       </p:sp>
       <p:sp>
         <p:nvSpPr>
-          <p:cNvPr id="1349244422" name="ZoneTexte 1036656844"/>
+          <p:cNvPr id="911996527" name="ZoneTexte 1036656844"/>
           <p:cNvSpPr txBox="1"/>
           <p:nvPr/>
         </p:nvSpPr>
@@ -7021,7 +6984,7 @@
       </p:sp>
       <p:sp>
         <p:nvSpPr>
-          <p:cNvPr id="2073843041" name="ZoneTexte 226284734"/>
+          <p:cNvPr id="1833577436" name="ZoneTexte 226284734"/>
           <p:cNvSpPr txBox="1"/>
           <p:nvPr/>
         </p:nvSpPr>
@@ -7105,7 +7068,7 @@
       </p:sp>
       <p:sp>
         <p:nvSpPr>
-          <p:cNvPr id="635734666" name="ZoneTexte 162158187"/>
+          <p:cNvPr id="1396047921" name="ZoneTexte 162158187"/>
           <p:cNvSpPr txBox="1"/>
           <p:nvPr/>
         </p:nvSpPr>
@@ -7169,7 +7132,7 @@
       </p:sp>
       <p:sp>
         <p:nvSpPr>
-          <p:cNvPr id="702366423" name="ZoneTexte 1063440096"/>
+          <p:cNvPr id="146040611" name="ZoneTexte 1063440096"/>
           <p:cNvSpPr txBox="1"/>
           <p:nvPr/>
         </p:nvSpPr>
@@ -7253,7 +7216,7 @@
       </p:sp>
       <p:sp>
         <p:nvSpPr>
-          <p:cNvPr id="1382966603" name="ZoneTexte 1564072661"/>
+          <p:cNvPr id="216133220" name="ZoneTexte 1564072661"/>
           <p:cNvSpPr txBox="1"/>
           <p:nvPr/>
         </p:nvSpPr>
@@ -7337,7 +7300,7 @@
       </p:sp>
       <p:sp>
         <p:nvSpPr>
-          <p:cNvPr id="419190701" name="ZoneTexte 2102805411"/>
+          <p:cNvPr id="510122020" name="ZoneTexte 2102805411"/>
           <p:cNvSpPr txBox="1"/>
           <p:nvPr/>
         </p:nvSpPr>
@@ -7421,7 +7384,7 @@
       </p:sp>
       <p:sp>
         <p:nvSpPr>
-          <p:cNvPr id="1060791606" name="ZoneTexte 1094420572"/>
+          <p:cNvPr id="298112756" name="ZoneTexte 1094420572"/>
           <p:cNvSpPr txBox="1"/>
           <p:nvPr/>
         </p:nvSpPr>
@@ -7505,7 +7468,7 @@
       </p:sp>
       <p:sp>
         <p:nvSpPr>
-          <p:cNvPr id="777848412" name="ZoneTexte 1337742717"/>
+          <p:cNvPr id="185828047" name="ZoneTexte 1337742717"/>
           <p:cNvSpPr txBox="1"/>
           <p:nvPr/>
         </p:nvSpPr>
@@ -7569,7 +7532,7 @@
       </p:sp>
       <p:sp>
         <p:nvSpPr>
-          <p:cNvPr id="401142313" name="ZoneTexte 1188730172"/>
+          <p:cNvPr id="1760089565" name="ZoneTexte 1188730172"/>
           <p:cNvSpPr txBox="1"/>
           <p:nvPr/>
         </p:nvSpPr>
@@ -7633,7 +7596,7 @@
       </p:sp>
       <p:sp>
         <p:nvSpPr>
-          <p:cNvPr id="818019235" name="Rectangle : avec coins arrondis en haut 1452601499"/>
+          <p:cNvPr id="754802527" name="Rectangle : avec coins arrondis en haut 1452601499"/>
           <p:cNvSpPr/>
           <p:nvPr/>
         </p:nvSpPr>
@@ -7679,7 +7642,7 @@
       </p:sp>
       <p:sp>
         <p:nvSpPr>
-          <p:cNvPr id="922301880" name="Rectangle : avec coins arrondis en haut 1782110635"/>
+          <p:cNvPr id="1757666287" name="Rectangle : avec coins arrondis en haut 1782110635"/>
           <p:cNvSpPr/>
           <p:nvPr/>
         </p:nvSpPr>
@@ -7725,7 +7688,7 @@
       </p:sp>
       <p:sp>
         <p:nvSpPr>
-          <p:cNvPr id="398138142" name="Rectangle : avec coins arrondis en haut 945118596"/>
+          <p:cNvPr id="2102014763" name="Rectangle : avec coins arrondis en haut 945118596"/>
           <p:cNvSpPr/>
           <p:nvPr/>
         </p:nvSpPr>
@@ -7771,7 +7734,7 @@
       </p:sp>
       <p:sp>
         <p:nvSpPr>
-          <p:cNvPr id="1000524102" name="Rectangle : avec coins arrondis en haut 500951796"/>
+          <p:cNvPr id="855610182" name="Rectangle : avec coins arrondis en haut 500951796"/>
           <p:cNvSpPr/>
           <p:nvPr/>
         </p:nvSpPr>
@@ -7817,7 +7780,7 @@
       </p:sp>
       <p:sp>
         <p:nvSpPr>
-          <p:cNvPr id="296097166" name="Rectangle : avec coins arrondis en haut 203047490"/>
+          <p:cNvPr id="136989505" name="Rectangle : avec coins arrondis en haut 203047490"/>
           <p:cNvSpPr/>
           <p:nvPr/>
         </p:nvSpPr>
@@ -7863,7 +7826,7 @@
       </p:sp>
       <p:sp>
         <p:nvSpPr>
-          <p:cNvPr id="1439991712" name="Rectangle : avec coins arrondis en haut 818083012"/>
+          <p:cNvPr id="1112041954" name="Rectangle : avec coins arrondis en haut 818083012"/>
           <p:cNvSpPr/>
           <p:nvPr/>
         </p:nvSpPr>
@@ -7909,7 +7872,7 @@
       </p:sp>
       <p:sp>
         <p:nvSpPr>
-          <p:cNvPr id="103752486" name="Rectangle : avec coins arrondis en haut 310539005"/>
+          <p:cNvPr id="53887571" name="Rectangle : avec coins arrondis en haut 310539005"/>
           <p:cNvSpPr/>
           <p:nvPr/>
         </p:nvSpPr>
@@ -7955,7 +7918,7 @@
       </p:sp>
       <p:sp>
         <p:nvSpPr>
-          <p:cNvPr id="1117179137" name="Rectangle : avec coins arrondis en haut 844307487"/>
+          <p:cNvPr id="1551010333" name="Rectangle : avec coins arrondis en haut 844307487"/>
           <p:cNvSpPr/>
           <p:nvPr/>
         </p:nvSpPr>
@@ -8001,7 +7964,7 @@
       </p:sp>
       <p:sp>
         <p:nvSpPr>
-          <p:cNvPr id="158994311" name="Rectangle : avec coins arrondis en haut 1616510051"/>
+          <p:cNvPr id="534466157" name="Rectangle : avec coins arrondis en haut 1616510051"/>
           <p:cNvSpPr/>
           <p:nvPr/>
         </p:nvSpPr>
@@ -8047,7 +8010,7 @@
       </p:sp>
       <p:sp>
         <p:nvSpPr>
-          <p:cNvPr id="2111738458" name="Rectangle : avec coins arrondis en haut 1451691637"/>
+          <p:cNvPr id="286711538" name="Rectangle : avec coins arrondis en haut 1451691637"/>
           <p:cNvSpPr/>
           <p:nvPr/>
         </p:nvSpPr>
@@ -8093,7 +8056,7 @@
       </p:sp>
       <p:sp>
         <p:nvSpPr>
-          <p:cNvPr id="224815873" name="Rectangle : avec coins arrondis en haut 260383743"/>
+          <p:cNvPr id="1078155515" name="Rectangle : avec coins arrondis en haut 260383743"/>
           <p:cNvSpPr/>
           <p:nvPr/>
         </p:nvSpPr>
@@ -8139,7 +8102,7 @@
       </p:sp>
       <p:sp>
         <p:nvSpPr>
-          <p:cNvPr id="760500082" name="Rectangle : avec coins arrondis en haut 1280344391"/>
+          <p:cNvPr id="1250594812" name="Rectangle : avec coins arrondis en haut 1280344391"/>
           <p:cNvSpPr/>
           <p:nvPr/>
         </p:nvSpPr>
@@ -8185,14 +8148,14 @@
       </p:sp>
       <p:sp>
         <p:nvSpPr>
-          <p:cNvPr id="1269437730" name=""/>
+          <p:cNvPr id="1475985731" name=""/>
           <p:cNvSpPr txBox="1"/>
           <p:nvPr/>
         </p:nvSpPr>
         <p:spPr bwMode="auto">
           <a:xfrm rot="0" flipH="0" flipV="0">
-            <a:off x="3207796" y="8821297"/>
-            <a:ext cx="3727653" cy="548998"/>
+            <a:off x="3207795" y="9270589"/>
+            <a:ext cx="3741332" cy="548999"/>
           </a:xfrm>
           <a:prstGeom prst="rect">
             <a:avLst/>
@@ -8309,331 +8272,7 @@
       </p:sp>
       <p:sp>
         <p:nvSpPr>
-          <p:cNvPr id="58774705" name="ZoneTexte 1440859034"/>
-          <p:cNvSpPr txBox="1"/>
-          <p:nvPr/>
-        </p:nvSpPr>
-        <p:spPr bwMode="auto">
-          <a:xfrm>
-            <a:off x="3555765" y="9620489"/>
-            <a:ext cx="1115026" cy="274678"/>
-          </a:xfrm>
-          <a:prstGeom prst="rect">
-            <a:avLst/>
-          </a:prstGeom>
-          <a:noFill/>
-        </p:spPr>
-        <p:txBody>
-          <a:bodyPr vertOverflow="overflow" horzOverflow="overflow" vert="horz" wrap="none" lIns="91440" tIns="45720" rIns="91440" bIns="45720" numCol="1" spcCol="0" rtlCol="0" fromWordArt="0" anchor="t" anchorCtr="0" forceAA="0" compatLnSpc="0">
-            <a:spAutoFit/>
-          </a:bodyPr>
-          <a:lstStyle/>
-          <a:p>
-            <a:pPr>
-              <a:defRPr/>
-            </a:pPr>
-            <a:r>
-              <a:rPr lang="fr-FR" sz="1200" b="1" i="0" u="none" strike="noStrike" cap="none" spc="0">
-                <a:solidFill>
-                  <a:schemeClr val="bg1">
-                    <a:lumMod val="65000"/>
-                  </a:schemeClr>
-                </a:solidFill>
-                <a:latin typeface="Arial"/>
-                <a:ea typeface="Arial"/>
-                <a:cs typeface="Arial"/>
-              </a:rPr>
-              <a:t>ÉCONOMIES</a:t>
-            </a:r>
-            <a:endParaRPr/>
-          </a:p>
-        </p:txBody>
-      </p:sp>
-      <p:sp>
-        <p:nvSpPr>
-          <p:cNvPr id="730549030" name="ZoneTexte 1440859034"/>
-          <p:cNvSpPr txBox="1"/>
-          <p:nvPr/>
-        </p:nvSpPr>
-        <p:spPr bwMode="auto">
-          <a:xfrm>
-            <a:off x="5572019" y="9620490"/>
-            <a:ext cx="784780" cy="274678"/>
-          </a:xfrm>
-          <a:prstGeom prst="rect">
-            <a:avLst/>
-          </a:prstGeom>
-          <a:noFill/>
-        </p:spPr>
-        <p:txBody>
-          <a:bodyPr vertOverflow="overflow" horzOverflow="overflow" vert="horz" wrap="none" lIns="91440" tIns="45720" rIns="91440" bIns="45720" numCol="1" spcCol="0" rtlCol="0" fromWordArt="0" anchor="t" anchorCtr="0" forceAA="0" compatLnSpc="0">
-            <a:spAutoFit/>
-          </a:bodyPr>
-          <a:lstStyle/>
-          <a:p>
-            <a:pPr>
-              <a:defRPr/>
-            </a:pPr>
-            <a:r>
-              <a:rPr sz="1200" b="1">
-                <a:solidFill>
-                  <a:schemeClr val="bg1">
-                    <a:lumMod val="65000"/>
-                  </a:schemeClr>
-                </a:solidFill>
-              </a:rPr>
-              <a:t>DETTES</a:t>
-            </a:r>
-            <a:endParaRPr/>
-          </a:p>
-        </p:txBody>
-      </p:sp>
-      <p:cxnSp>
-        <p:nvCxnSpPr>
-          <p:cNvPr id="271994648" name=""/>
-          <p:cNvCxnSpPr/>
-          <p:nvPr/>
-        </p:nvCxnSpPr>
-        <p:spPr bwMode="auto">
-          <a:xfrm flipH="0" flipV="1">
-            <a:off x="5062576" y="9338886"/>
-            <a:ext cx="0" cy="530163"/>
-          </a:xfrm>
-          <a:prstGeom prst="line">
-            <a:avLst/>
-          </a:prstGeom>
-          <a:ln w="12700" cap="flat" cmpd="sng" algn="ctr">
-            <a:solidFill>
-              <a:srgbClr val="A6A6A6"/>
-            </a:solidFill>
-            <a:prstDash val="dash"/>
-            <a:miter lim="800000"/>
-          </a:ln>
-        </p:spPr>
-        <p:style>
-          <a:lnRef idx="1">
-            <a:schemeClr val="accent1">
-              <a:shade val="50000"/>
-            </a:schemeClr>
-          </a:lnRef>
-          <a:fillRef idx="0">
-            <a:schemeClr val="accent1"/>
-          </a:fillRef>
-          <a:effectRef idx="0">
-            <a:schemeClr val="accent1"/>
-          </a:effectRef>
-          <a:fontRef idx="minor">
-            <a:schemeClr val="tx1"/>
-          </a:fontRef>
-        </p:style>
-      </p:cxnSp>
-      <p:sp>
-        <p:nvSpPr>
-          <p:cNvPr id="1873067258" name=""/>
-          <p:cNvSpPr txBox="1"/>
-          <p:nvPr/>
-        </p:nvSpPr>
-        <p:spPr bwMode="auto">
-          <a:xfrm rot="0" flipH="0" flipV="0">
-            <a:off x="3426223" y="9186382"/>
-            <a:ext cx="1546056" cy="385902"/>
-          </a:xfrm>
-          <a:prstGeom prst="rect">
-            <a:avLst/>
-          </a:prstGeom>
-          <a:noFill/>
-        </p:spPr>
-        <p:txBody>
-          <a:bodyPr vertOverflow="overflow" horzOverflow="overflow" vert="horz" wrap="square" lIns="91440" tIns="45720" rIns="91440" bIns="45720" numCol="1" spcCol="0" rtlCol="0" fromWordArt="0" anchor="t" anchorCtr="0" forceAA="0" upright="0" compatLnSpc="0">
-            <a:spAutoFit/>
-          </a:bodyPr>
-          <a:p>
-            <a:pPr>
-              <a:defRPr/>
-            </a:pPr>
-            <a:r>
-              <a:rPr sz="1800" b="1">
-                <a:solidFill>
-                  <a:schemeClr val="bg1">
-                    <a:lumMod val="65000"/>
-                  </a:schemeClr>
-                </a:solidFill>
-                <a:latin typeface="Arial"/>
-                <a:ea typeface="Arial"/>
-                <a:cs typeface="Arial"/>
-              </a:rPr>
-              <a:t>▢</a:t>
-            </a:r>
-            <a:r>
-              <a:rPr lang="fr-FR" sz="1800" b="1" i="0" u="none" strike="noStrike" cap="none" spc="0">
-                <a:solidFill>
-                  <a:schemeClr val="bg1">
-                    <a:lumMod val="65000"/>
-                  </a:schemeClr>
-                </a:solidFill>
-                <a:latin typeface="Arial"/>
-                <a:ea typeface="Arial"/>
-                <a:cs typeface="Arial"/>
-              </a:rPr>
-              <a:t>▢</a:t>
-            </a:r>
-            <a:r>
-              <a:rPr lang="fr-FR" sz="1800" b="1" i="0" u="none" strike="noStrike" cap="none" spc="0">
-                <a:solidFill>
-                  <a:schemeClr val="bg1">
-                    <a:lumMod val="65000"/>
-                  </a:schemeClr>
-                </a:solidFill>
-                <a:latin typeface="Arial"/>
-                <a:ea typeface="Arial"/>
-                <a:cs typeface="Arial"/>
-              </a:rPr>
-              <a:t>▢</a:t>
-            </a:r>
-            <a:r>
-              <a:rPr lang="fr-FR" sz="1800" b="1" i="0" u="none" strike="noStrike" cap="none" spc="0">
-                <a:solidFill>
-                  <a:schemeClr val="bg1">
-                    <a:lumMod val="65000"/>
-                  </a:schemeClr>
-                </a:solidFill>
-                <a:latin typeface="Arial"/>
-                <a:ea typeface="Arial"/>
-                <a:cs typeface="Arial"/>
-              </a:rPr>
-              <a:t>▢</a:t>
-            </a:r>
-            <a:r>
-              <a:rPr lang="fr-FR" sz="1800" b="1" i="0" u="none" strike="noStrike" cap="none" spc="0">
-                <a:solidFill>
-                  <a:schemeClr val="bg1">
-                    <a:lumMod val="65000"/>
-                  </a:schemeClr>
-                </a:solidFill>
-                <a:latin typeface="Arial"/>
-                <a:ea typeface="Arial"/>
-                <a:cs typeface="Arial"/>
-              </a:rPr>
-              <a:t>▢ </a:t>
-            </a:r>
-            <a:r>
-              <a:rPr lang="fr-FR" sz="1800" b="1" i="0" u="none" strike="noStrike" cap="none" spc="0">
-                <a:solidFill>
-                  <a:schemeClr val="bg1">
-                    <a:lumMod val="65000"/>
-                  </a:schemeClr>
-                </a:solidFill>
-                <a:latin typeface="Arial"/>
-                <a:ea typeface="Arial"/>
-                <a:cs typeface="Arial"/>
-              </a:rPr>
-              <a:t>▢</a:t>
-            </a:r>
-            <a:r>
-              <a:rPr lang="fr-FR" sz="1800" b="1" i="0" u="none" strike="noStrike" cap="none" spc="0">
-                <a:solidFill>
-                  <a:schemeClr val="bg1">
-                    <a:lumMod val="65000"/>
-                  </a:schemeClr>
-                </a:solidFill>
-                <a:latin typeface="Arial"/>
-                <a:ea typeface="Arial"/>
-                <a:cs typeface="Arial"/>
-              </a:rPr>
-              <a:t>▢</a:t>
-            </a:r>
-            <a:r>
-              <a:rPr lang="fr-FR" sz="1800" b="1" i="0" u="none" strike="noStrike" cap="none" spc="0">
-                <a:solidFill>
-                  <a:schemeClr val="bg1">
-                    <a:lumMod val="65000"/>
-                  </a:schemeClr>
-                </a:solidFill>
-                <a:latin typeface="Arial"/>
-                <a:ea typeface="Arial"/>
-                <a:cs typeface="Arial"/>
-              </a:rPr>
-              <a:t>▢</a:t>
-            </a:r>
-            <a:r>
-              <a:rPr lang="fr-FR" sz="1800" b="1" i="0" u="none" strike="noStrike" cap="none" spc="0">
-                <a:solidFill>
-                  <a:schemeClr val="bg1">
-                    <a:lumMod val="65000"/>
-                  </a:schemeClr>
-                </a:solidFill>
-                <a:latin typeface="Arial"/>
-                <a:ea typeface="Arial"/>
-                <a:cs typeface="Arial"/>
-              </a:rPr>
-              <a:t>▢</a:t>
-            </a:r>
-            <a:r>
-              <a:rPr lang="fr-FR" sz="1800" b="1" i="0" u="none" strike="noStrike" cap="none" spc="0">
-                <a:solidFill>
-                  <a:schemeClr val="bg1">
-                    <a:lumMod val="65000"/>
-                  </a:schemeClr>
-                </a:solidFill>
-                <a:latin typeface="Arial"/>
-                <a:ea typeface="Arial"/>
-                <a:cs typeface="Arial"/>
-              </a:rPr>
-              <a:t>▢</a:t>
-            </a:r>
-            <a:endParaRPr sz="2200" b="1">
-              <a:solidFill>
-                <a:schemeClr val="bg1">
-                  <a:lumMod val="65000"/>
-                </a:schemeClr>
-              </a:solidFill>
-            </a:endParaRPr>
-          </a:p>
-        </p:txBody>
-      </p:sp>
-      <p:sp>
-        <p:nvSpPr>
-          <p:cNvPr id="2027161406" name="Rectangle 954364527"/>
-          <p:cNvSpPr/>
-          <p:nvPr/>
-        </p:nvSpPr>
-        <p:spPr bwMode="auto">
-          <a:xfrm flipH="0" flipV="0">
-            <a:off x="6664874" y="8821297"/>
-            <a:ext cx="162576" cy="1047754"/>
-          </a:xfrm>
-          <a:prstGeom prst="rect">
-            <a:avLst/>
-          </a:prstGeom>
-          <a:solidFill>
-            <a:schemeClr val="bg1"/>
-          </a:solidFill>
-          <a:ln w="12700" cap="flat" cmpd="sng" algn="ctr">
-            <a:noFill/>
-            <a:prstDash val="solid"/>
-            <a:miter lim="800000"/>
-          </a:ln>
-        </p:spPr>
-        <p:style>
-          <a:lnRef idx="2">
-            <a:schemeClr val="accent1">
-              <a:shade val="50000"/>
-            </a:schemeClr>
-          </a:lnRef>
-          <a:fillRef idx="1">
-            <a:schemeClr val="accent1"/>
-          </a:fillRef>
-          <a:effectRef idx="0">
-            <a:schemeClr val="accent1"/>
-          </a:effectRef>
-          <a:fontRef idx="minor">
-            <a:schemeClr val="lt1"/>
-          </a:fontRef>
-        </p:style>
-      </p:sp>
-      <p:sp>
-        <p:nvSpPr>
-          <p:cNvPr id="1134888723" name="ZoneTexte 1527388901"/>
+          <p:cNvPr id="1618229276" name="ZoneTexte 1527388901"/>
           <p:cNvSpPr txBox="1"/>
           <p:nvPr/>
         </p:nvSpPr>
@@ -8793,7 +8432,7 @@
       </p:sp>
       <p:sp>
         <p:nvSpPr>
-          <p:cNvPr id="778363155" name="Rectangle 38344096"/>
+          <p:cNvPr id="1410954801" name="Rectangle 38344096"/>
           <p:cNvSpPr/>
           <p:nvPr/>
         </p:nvSpPr>
@@ -8833,7 +8472,7 @@
       </p:sp>
       <p:sp>
         <p:nvSpPr>
-          <p:cNvPr id="1856197595" name=""/>
+          <p:cNvPr id="1761491966" name=""/>
           <p:cNvSpPr/>
           <p:nvPr/>
         </p:nvSpPr>
@@ -8904,13 +8543,13 @@
       </p:sp>
       <p:sp>
         <p:nvSpPr>
-          <p:cNvPr id="313615499" name="Flèche : pentagone 2055848356"/>
+          <p:cNvPr id="1546415770" name="Flèche : pentagone 2055848356"/>
           <p:cNvSpPr/>
           <p:nvPr/>
         </p:nvSpPr>
         <p:spPr bwMode="auto">
           <a:xfrm flipH="0" flipV="0">
-            <a:off x="5949463" y="7085077"/>
+            <a:off x="5949462" y="7130005"/>
             <a:ext cx="143169" cy="140443"/>
           </a:xfrm>
           <a:prstGeom prst="homePlate">
@@ -8949,13 +8588,13 @@
       </p:sp>
       <p:sp>
         <p:nvSpPr>
-          <p:cNvPr id="28686391" name="Flèche : pentagone 1980093981"/>
+          <p:cNvPr id="532725278" name="Flèche : pentagone 1980093981"/>
           <p:cNvSpPr/>
           <p:nvPr/>
         </p:nvSpPr>
         <p:spPr bwMode="auto">
           <a:xfrm flipH="0" flipV="0">
-            <a:off x="6100138" y="7085077"/>
+            <a:off x="6100137" y="7130005"/>
             <a:ext cx="143169" cy="140443"/>
           </a:xfrm>
           <a:prstGeom prst="homePlate">
@@ -8994,13 +8633,13 @@
       </p:sp>
       <p:sp>
         <p:nvSpPr>
-          <p:cNvPr id="1631435291" name="Flèche : pentagone 905284374"/>
+          <p:cNvPr id="1518242702" name="Flèche : pentagone 905284374"/>
           <p:cNvSpPr/>
           <p:nvPr/>
         </p:nvSpPr>
         <p:spPr bwMode="auto">
           <a:xfrm flipH="0" flipV="0">
-            <a:off x="6250817" y="7085077"/>
+            <a:off x="6250816" y="7130005"/>
             <a:ext cx="143169" cy="140443"/>
           </a:xfrm>
           <a:prstGeom prst="homePlate">
@@ -9039,13 +8678,13 @@
       </p:sp>
       <p:sp>
         <p:nvSpPr>
-          <p:cNvPr id="1841455217" name="ZoneTexte 1440859034"/>
+          <p:cNvPr id="2113391228" name="ZoneTexte 1440859034"/>
           <p:cNvSpPr txBox="1"/>
           <p:nvPr/>
         </p:nvSpPr>
         <p:spPr bwMode="auto">
           <a:xfrm>
-            <a:off x="5708701" y="7138872"/>
+            <a:off x="5708700" y="7183801"/>
             <a:ext cx="953910" cy="305158"/>
           </a:xfrm>
           <a:prstGeom prst="rect">
@@ -9078,13 +8717,13 @@
       </p:sp>
       <p:sp>
         <p:nvSpPr>
-          <p:cNvPr id="493919413" name="Flèche : pentagone 1880610112"/>
+          <p:cNvPr id="457022198" name="Flèche : pentagone 1880610112"/>
           <p:cNvSpPr/>
           <p:nvPr/>
         </p:nvSpPr>
         <p:spPr bwMode="auto">
           <a:xfrm flipH="0" flipV="0">
-            <a:off x="5798788" y="7549778"/>
+            <a:off x="5798787" y="7594707"/>
             <a:ext cx="143168" cy="140445"/>
           </a:xfrm>
           <a:prstGeom prst="homePlate">
@@ -9123,13 +8762,13 @@
       </p:sp>
       <p:sp>
         <p:nvSpPr>
-          <p:cNvPr id="926318724" name="Flèche : pentagone 446859139"/>
+          <p:cNvPr id="1718118954" name="Flèche : pentagone 446859139"/>
           <p:cNvSpPr/>
           <p:nvPr/>
         </p:nvSpPr>
         <p:spPr bwMode="auto">
           <a:xfrm flipH="0" flipV="0">
-            <a:off x="5949463" y="7549778"/>
+            <a:off x="5949462" y="7594707"/>
             <a:ext cx="143168" cy="140442"/>
           </a:xfrm>
           <a:prstGeom prst="homePlate">
@@ -9168,13 +8807,13 @@
       </p:sp>
       <p:sp>
         <p:nvSpPr>
-          <p:cNvPr id="957390982" name="Flèche : pentagone 2055848356"/>
+          <p:cNvPr id="75247757" name="Flèche : pentagone 2055848356"/>
           <p:cNvSpPr/>
           <p:nvPr/>
         </p:nvSpPr>
         <p:spPr bwMode="auto">
           <a:xfrm flipH="0" flipV="0">
-            <a:off x="6100142" y="7549778"/>
+            <a:off x="6100141" y="7594707"/>
             <a:ext cx="143168" cy="140442"/>
           </a:xfrm>
           <a:prstGeom prst="homePlate">
@@ -9213,13 +8852,13 @@
       </p:sp>
       <p:sp>
         <p:nvSpPr>
-          <p:cNvPr id="645976634" name="Flèche : pentagone 1980093981"/>
+          <p:cNvPr id="757857986" name="Flèche : pentagone 1980093981"/>
           <p:cNvSpPr/>
           <p:nvPr/>
         </p:nvSpPr>
         <p:spPr bwMode="auto">
           <a:xfrm flipH="0" flipV="0">
-            <a:off x="6250817" y="7549778"/>
+            <a:off x="6250816" y="7594707"/>
             <a:ext cx="143168" cy="140442"/>
           </a:xfrm>
           <a:prstGeom prst="homePlate">
@@ -9258,13 +8897,13 @@
       </p:sp>
       <p:sp>
         <p:nvSpPr>
-          <p:cNvPr id="1996518039" name="Flèche : pentagone 905284374"/>
+          <p:cNvPr id="886986814" name="Flèche : pentagone 905284374"/>
           <p:cNvSpPr/>
           <p:nvPr/>
         </p:nvSpPr>
         <p:spPr bwMode="auto">
           <a:xfrm flipH="0" flipV="0">
-            <a:off x="6401493" y="7549778"/>
+            <a:off x="6401493" y="7594707"/>
             <a:ext cx="143168" cy="140442"/>
           </a:xfrm>
           <a:prstGeom prst="homePlate">
@@ -9303,13 +8942,13 @@
       </p:sp>
       <p:sp>
         <p:nvSpPr>
-          <p:cNvPr id="1466860256" name="ZoneTexte 1440859034"/>
+          <p:cNvPr id="1370522460" name="ZoneTexte 1440859034"/>
           <p:cNvSpPr txBox="1"/>
           <p:nvPr/>
         </p:nvSpPr>
         <p:spPr bwMode="auto">
           <a:xfrm>
-            <a:off x="5706994" y="7334806"/>
+            <a:off x="5706993" y="7379735"/>
             <a:ext cx="894969" cy="305158"/>
           </a:xfrm>
           <a:prstGeom prst="rect">
@@ -9342,13 +8981,13 @@
       </p:sp>
       <p:sp>
         <p:nvSpPr>
-          <p:cNvPr id="1154417666" name="Flèche : pentagone 2055848356"/>
+          <p:cNvPr id="922889750" name="Flèche : pentagone 2055848356"/>
           <p:cNvSpPr/>
           <p:nvPr/>
         </p:nvSpPr>
         <p:spPr bwMode="auto">
           <a:xfrm flipH="0" flipV="0">
-            <a:off x="5949463" y="7717968"/>
+            <a:off x="5949462" y="7762897"/>
             <a:ext cx="143168" cy="140442"/>
           </a:xfrm>
           <a:prstGeom prst="homePlate">
@@ -9387,13 +9026,13 @@
       </p:sp>
       <p:sp>
         <p:nvSpPr>
-          <p:cNvPr id="1049054438" name="Flèche : pentagone 1980093981"/>
+          <p:cNvPr id="468910065" name="Flèche : pentagone 1980093981"/>
           <p:cNvSpPr/>
           <p:nvPr/>
         </p:nvSpPr>
         <p:spPr bwMode="auto">
           <a:xfrm flipH="0" flipV="0">
-            <a:off x="6100138" y="7717968"/>
+            <a:off x="6100137" y="7762897"/>
             <a:ext cx="143168" cy="140442"/>
           </a:xfrm>
           <a:prstGeom prst="homePlate">
@@ -9432,13 +9071,13 @@
       </p:sp>
       <p:sp>
         <p:nvSpPr>
-          <p:cNvPr id="1640577591" name="Flèche : pentagone 905284374"/>
+          <p:cNvPr id="441293241" name="Flèche : pentagone 905284374"/>
           <p:cNvSpPr/>
           <p:nvPr/>
         </p:nvSpPr>
         <p:spPr bwMode="auto">
           <a:xfrm flipH="0" flipV="0">
-            <a:off x="6250817" y="7717968"/>
+            <a:off x="6250816" y="7762897"/>
             <a:ext cx="143168" cy="140442"/>
           </a:xfrm>
           <a:prstGeom prst="homePlate">
@@ -9477,13 +9116,13 @@
       </p:sp>
       <p:sp>
         <p:nvSpPr>
-          <p:cNvPr id="1235941007" name="ZoneTexte 1440859034"/>
+          <p:cNvPr id="270225134" name="ZoneTexte 1440859034"/>
           <p:cNvSpPr txBox="1"/>
           <p:nvPr/>
         </p:nvSpPr>
         <p:spPr bwMode="auto">
           <a:xfrm>
-            <a:off x="5708881" y="7777053"/>
+            <a:off x="5708880" y="7821982"/>
             <a:ext cx="953910" cy="305158"/>
           </a:xfrm>
           <a:prstGeom prst="rect">
@@ -9511,498 +9150,6 @@
               <a:t>TRAUMA</a:t>
             </a:r>
             <a:endParaRPr sz="1600"/>
-          </a:p>
-        </p:txBody>
-      </p:sp>
-      <p:sp>
-        <p:nvSpPr>
-          <p:cNvPr id="40452898" name=""/>
-          <p:cNvSpPr txBox="1"/>
-          <p:nvPr/>
-        </p:nvSpPr>
-        <p:spPr bwMode="auto">
-          <a:xfrm rot="0" flipH="0" flipV="0">
-            <a:off x="3426223" y="9345173"/>
-            <a:ext cx="1546416" cy="385902"/>
-          </a:xfrm>
-          <a:prstGeom prst="rect">
-            <a:avLst/>
-          </a:prstGeom>
-          <a:noFill/>
-        </p:spPr>
-        <p:txBody>
-          <a:bodyPr vertOverflow="overflow" horzOverflow="overflow" vert="horz" wrap="square" lIns="91440" tIns="45720" rIns="91440" bIns="45720" numCol="1" spcCol="0" rtlCol="0" fromWordArt="0" anchor="t" anchorCtr="0" forceAA="0" upright="0" compatLnSpc="0">
-            <a:spAutoFit/>
-          </a:bodyPr>
-          <a:p>
-            <a:pPr>
-              <a:defRPr/>
-            </a:pPr>
-            <a:r>
-              <a:rPr sz="1800" b="1">
-                <a:solidFill>
-                  <a:schemeClr val="bg1">
-                    <a:lumMod val="65000"/>
-                  </a:schemeClr>
-                </a:solidFill>
-                <a:latin typeface="Arial"/>
-                <a:ea typeface="Arial"/>
-                <a:cs typeface="Arial"/>
-              </a:rPr>
-              <a:t>▢</a:t>
-            </a:r>
-            <a:r>
-              <a:rPr lang="fr-FR" sz="1800" b="1" i="0" u="none" strike="noStrike" cap="none" spc="0">
-                <a:solidFill>
-                  <a:schemeClr val="bg1">
-                    <a:lumMod val="65000"/>
-                  </a:schemeClr>
-                </a:solidFill>
-                <a:latin typeface="Arial"/>
-                <a:ea typeface="Arial"/>
-                <a:cs typeface="Arial"/>
-              </a:rPr>
-              <a:t>▢</a:t>
-            </a:r>
-            <a:r>
-              <a:rPr lang="fr-FR" sz="1800" b="1" i="0" u="none" strike="noStrike" cap="none" spc="0">
-                <a:solidFill>
-                  <a:schemeClr val="bg1">
-                    <a:lumMod val="65000"/>
-                  </a:schemeClr>
-                </a:solidFill>
-                <a:latin typeface="Arial"/>
-                <a:ea typeface="Arial"/>
-                <a:cs typeface="Arial"/>
-              </a:rPr>
-              <a:t>▢</a:t>
-            </a:r>
-            <a:r>
-              <a:rPr lang="fr-FR" sz="1800" b="1" i="0" u="none" strike="noStrike" cap="none" spc="0">
-                <a:solidFill>
-                  <a:schemeClr val="bg1">
-                    <a:lumMod val="65000"/>
-                  </a:schemeClr>
-                </a:solidFill>
-                <a:latin typeface="Arial"/>
-                <a:ea typeface="Arial"/>
-                <a:cs typeface="Arial"/>
-              </a:rPr>
-              <a:t>▢</a:t>
-            </a:r>
-            <a:r>
-              <a:rPr lang="fr-FR" sz="1800" b="1" i="0" u="none" strike="noStrike" cap="none" spc="0">
-                <a:solidFill>
-                  <a:schemeClr val="bg1">
-                    <a:lumMod val="65000"/>
-                  </a:schemeClr>
-                </a:solidFill>
-                <a:latin typeface="Arial"/>
-                <a:ea typeface="Arial"/>
-                <a:cs typeface="Arial"/>
-              </a:rPr>
-              <a:t>▢ </a:t>
-            </a:r>
-            <a:r>
-              <a:rPr lang="fr-FR" sz="1800" b="1" i="0" u="none" strike="noStrike" cap="none" spc="0">
-                <a:solidFill>
-                  <a:schemeClr val="bg1">
-                    <a:lumMod val="65000"/>
-                  </a:schemeClr>
-                </a:solidFill>
-                <a:latin typeface="Arial"/>
-                <a:ea typeface="Arial"/>
-                <a:cs typeface="Arial"/>
-              </a:rPr>
-              <a:t>▢</a:t>
-            </a:r>
-            <a:r>
-              <a:rPr lang="fr-FR" sz="1800" b="1" i="0" u="none" strike="noStrike" cap="none" spc="0">
-                <a:solidFill>
-                  <a:schemeClr val="bg1">
-                    <a:lumMod val="65000"/>
-                  </a:schemeClr>
-                </a:solidFill>
-                <a:latin typeface="Arial"/>
-                <a:ea typeface="Arial"/>
-                <a:cs typeface="Arial"/>
-              </a:rPr>
-              <a:t>▢</a:t>
-            </a:r>
-            <a:r>
-              <a:rPr lang="fr-FR" sz="1800" b="1" i="0" u="none" strike="noStrike" cap="none" spc="0">
-                <a:solidFill>
-                  <a:schemeClr val="bg1">
-                    <a:lumMod val="65000"/>
-                  </a:schemeClr>
-                </a:solidFill>
-                <a:latin typeface="Arial"/>
-                <a:ea typeface="Arial"/>
-                <a:cs typeface="Arial"/>
-              </a:rPr>
-              <a:t>▢</a:t>
-            </a:r>
-            <a:r>
-              <a:rPr lang="fr-FR" sz="1800" b="1" i="0" u="none" strike="noStrike" cap="none" spc="0">
-                <a:solidFill>
-                  <a:schemeClr val="bg1">
-                    <a:lumMod val="65000"/>
-                  </a:schemeClr>
-                </a:solidFill>
-                <a:latin typeface="Arial"/>
-                <a:ea typeface="Arial"/>
-                <a:cs typeface="Arial"/>
-              </a:rPr>
-              <a:t>▢</a:t>
-            </a:r>
-            <a:r>
-              <a:rPr lang="fr-FR" sz="1800" b="1" i="0" u="none" strike="noStrike" cap="none" spc="0">
-                <a:solidFill>
-                  <a:schemeClr val="bg1">
-                    <a:lumMod val="65000"/>
-                  </a:schemeClr>
-                </a:solidFill>
-                <a:latin typeface="Arial"/>
-                <a:ea typeface="Arial"/>
-                <a:cs typeface="Arial"/>
-              </a:rPr>
-              <a:t>▢</a:t>
-            </a:r>
-            <a:endParaRPr sz="2200" b="1">
-              <a:solidFill>
-                <a:schemeClr val="bg1">
-                  <a:lumMod val="65000"/>
-                </a:schemeClr>
-              </a:solidFill>
-            </a:endParaRPr>
-          </a:p>
-        </p:txBody>
-      </p:sp>
-      <p:sp>
-        <p:nvSpPr>
-          <p:cNvPr id="346168976" name=""/>
-          <p:cNvSpPr txBox="1"/>
-          <p:nvPr/>
-        </p:nvSpPr>
-        <p:spPr bwMode="auto">
-          <a:xfrm rot="0" flipH="0" flipV="0">
-            <a:off x="5270755" y="9186382"/>
-            <a:ext cx="1546416" cy="385902"/>
-          </a:xfrm>
-          <a:prstGeom prst="rect">
-            <a:avLst/>
-          </a:prstGeom>
-          <a:noFill/>
-        </p:spPr>
-        <p:txBody>
-          <a:bodyPr vertOverflow="overflow" horzOverflow="overflow" vert="horz" wrap="square" lIns="91440" tIns="45720" rIns="91440" bIns="45720" numCol="1" spcCol="0" rtlCol="0" fromWordArt="0" anchor="t" anchorCtr="0" forceAA="0" upright="0" compatLnSpc="0">
-            <a:spAutoFit/>
-          </a:bodyPr>
-          <a:p>
-            <a:pPr>
-              <a:defRPr/>
-            </a:pPr>
-            <a:r>
-              <a:rPr sz="1800" b="1">
-                <a:solidFill>
-                  <a:schemeClr val="bg1">
-                    <a:lumMod val="65000"/>
-                  </a:schemeClr>
-                </a:solidFill>
-                <a:latin typeface="Arial"/>
-                <a:ea typeface="Arial"/>
-                <a:cs typeface="Arial"/>
-              </a:rPr>
-              <a:t>▢</a:t>
-            </a:r>
-            <a:r>
-              <a:rPr lang="fr-FR" sz="1800" b="1" i="0" u="none" strike="noStrike" cap="none" spc="0">
-                <a:solidFill>
-                  <a:schemeClr val="bg1">
-                    <a:lumMod val="65000"/>
-                  </a:schemeClr>
-                </a:solidFill>
-                <a:latin typeface="Arial"/>
-                <a:ea typeface="Arial"/>
-                <a:cs typeface="Arial"/>
-              </a:rPr>
-              <a:t>▢</a:t>
-            </a:r>
-            <a:r>
-              <a:rPr lang="fr-FR" sz="1800" b="1" i="0" u="none" strike="noStrike" cap="none" spc="0">
-                <a:solidFill>
-                  <a:schemeClr val="bg1">
-                    <a:lumMod val="65000"/>
-                  </a:schemeClr>
-                </a:solidFill>
-                <a:latin typeface="Arial"/>
-                <a:ea typeface="Arial"/>
-                <a:cs typeface="Arial"/>
-              </a:rPr>
-              <a:t>▢</a:t>
-            </a:r>
-            <a:r>
-              <a:rPr lang="fr-FR" sz="1800" b="1" i="0" u="none" strike="noStrike" cap="none" spc="0">
-                <a:solidFill>
-                  <a:schemeClr val="bg1">
-                    <a:lumMod val="65000"/>
-                  </a:schemeClr>
-                </a:solidFill>
-                <a:latin typeface="Arial"/>
-                <a:ea typeface="Arial"/>
-                <a:cs typeface="Arial"/>
-              </a:rPr>
-              <a:t>▢</a:t>
-            </a:r>
-            <a:r>
-              <a:rPr lang="fr-FR" sz="1800" b="1" i="0" u="none" strike="noStrike" cap="none" spc="0">
-                <a:solidFill>
-                  <a:schemeClr val="bg1">
-                    <a:lumMod val="65000"/>
-                  </a:schemeClr>
-                </a:solidFill>
-                <a:latin typeface="Arial"/>
-                <a:ea typeface="Arial"/>
-                <a:cs typeface="Arial"/>
-              </a:rPr>
-              <a:t>▢ </a:t>
-            </a:r>
-            <a:r>
-              <a:rPr lang="fr-FR" sz="1800" b="1" i="0" u="none" strike="noStrike" cap="none" spc="0">
-                <a:solidFill>
-                  <a:schemeClr val="bg1">
-                    <a:lumMod val="65000"/>
-                  </a:schemeClr>
-                </a:solidFill>
-                <a:latin typeface="Arial"/>
-                <a:ea typeface="Arial"/>
-                <a:cs typeface="Arial"/>
-              </a:rPr>
-              <a:t>▢</a:t>
-            </a:r>
-            <a:r>
-              <a:rPr lang="fr-FR" sz="1800" b="1" i="0" u="none" strike="noStrike" cap="none" spc="0">
-                <a:solidFill>
-                  <a:schemeClr val="bg1">
-                    <a:lumMod val="65000"/>
-                  </a:schemeClr>
-                </a:solidFill>
-                <a:latin typeface="Arial"/>
-                <a:ea typeface="Arial"/>
-                <a:cs typeface="Arial"/>
-              </a:rPr>
-              <a:t>▢</a:t>
-            </a:r>
-            <a:r>
-              <a:rPr lang="fr-FR" sz="1800" b="1" i="0" u="none" strike="noStrike" cap="none" spc="0">
-                <a:solidFill>
-                  <a:schemeClr val="bg1">
-                    <a:lumMod val="65000"/>
-                  </a:schemeClr>
-                </a:solidFill>
-                <a:latin typeface="Arial"/>
-                <a:ea typeface="Arial"/>
-                <a:cs typeface="Arial"/>
-              </a:rPr>
-              <a:t>▢</a:t>
-            </a:r>
-            <a:r>
-              <a:rPr lang="fr-FR" sz="1800" b="1" i="0" u="none" strike="noStrike" cap="none" spc="0">
-                <a:solidFill>
-                  <a:schemeClr val="bg1">
-                    <a:lumMod val="65000"/>
-                  </a:schemeClr>
-                </a:solidFill>
-                <a:latin typeface="Arial"/>
-                <a:ea typeface="Arial"/>
-                <a:cs typeface="Arial"/>
-              </a:rPr>
-              <a:t>▢</a:t>
-            </a:r>
-            <a:r>
-              <a:rPr lang="fr-FR" sz="1800" b="1" i="0" u="none" strike="noStrike" cap="none" spc="0">
-                <a:solidFill>
-                  <a:schemeClr val="bg1">
-                    <a:lumMod val="65000"/>
-                  </a:schemeClr>
-                </a:solidFill>
-                <a:latin typeface="Arial"/>
-                <a:ea typeface="Arial"/>
-                <a:cs typeface="Arial"/>
-              </a:rPr>
-              <a:t>▢</a:t>
-            </a:r>
-            <a:endParaRPr sz="2200" b="1">
-              <a:solidFill>
-                <a:schemeClr val="bg1">
-                  <a:lumMod val="65000"/>
-                </a:schemeClr>
-              </a:solidFill>
-            </a:endParaRPr>
-          </a:p>
-        </p:txBody>
-      </p:sp>
-      <p:sp>
-        <p:nvSpPr>
-          <p:cNvPr id="316838929" name=""/>
-          <p:cNvSpPr txBox="1"/>
-          <p:nvPr/>
-        </p:nvSpPr>
-        <p:spPr bwMode="auto">
-          <a:xfrm rot="0" flipH="0" flipV="0">
-            <a:off x="5270755" y="9345173"/>
-            <a:ext cx="1546776" cy="385902"/>
-          </a:xfrm>
-          <a:prstGeom prst="rect">
-            <a:avLst/>
-          </a:prstGeom>
-          <a:noFill/>
-        </p:spPr>
-        <p:txBody>
-          <a:bodyPr vertOverflow="overflow" horzOverflow="overflow" vert="horz" wrap="square" lIns="91440" tIns="45720" rIns="91440" bIns="45720" numCol="1" spcCol="0" rtlCol="0" fromWordArt="0" anchor="t" anchorCtr="0" forceAA="0" upright="0" compatLnSpc="0">
-            <a:spAutoFit/>
-          </a:bodyPr>
-          <a:p>
-            <a:pPr>
-              <a:defRPr/>
-            </a:pPr>
-            <a:r>
-              <a:rPr sz="1800" b="1">
-                <a:solidFill>
-                  <a:schemeClr val="bg1">
-                    <a:lumMod val="65000"/>
-                  </a:schemeClr>
-                </a:solidFill>
-                <a:latin typeface="Arial"/>
-                <a:ea typeface="Arial"/>
-                <a:cs typeface="Arial"/>
-              </a:rPr>
-              <a:t>▢</a:t>
-            </a:r>
-            <a:r>
-              <a:rPr lang="fr-FR" sz="1800" b="1" i="0" u="none" strike="noStrike" cap="none" spc="0">
-                <a:solidFill>
-                  <a:schemeClr val="bg1">
-                    <a:lumMod val="65000"/>
-                  </a:schemeClr>
-                </a:solidFill>
-                <a:latin typeface="Arial"/>
-                <a:ea typeface="Arial"/>
-                <a:cs typeface="Arial"/>
-              </a:rPr>
-              <a:t>▢</a:t>
-            </a:r>
-            <a:r>
-              <a:rPr lang="fr-FR" sz="1800" b="1" i="0" u="none" strike="noStrike" cap="none" spc="0">
-                <a:solidFill>
-                  <a:schemeClr val="bg1">
-                    <a:lumMod val="65000"/>
-                  </a:schemeClr>
-                </a:solidFill>
-                <a:latin typeface="Arial"/>
-                <a:ea typeface="Arial"/>
-                <a:cs typeface="Arial"/>
-              </a:rPr>
-              <a:t>▢</a:t>
-            </a:r>
-            <a:r>
-              <a:rPr lang="fr-FR" sz="1800" b="1" i="0" u="none" strike="noStrike" cap="none" spc="0">
-                <a:solidFill>
-                  <a:schemeClr val="bg1">
-                    <a:lumMod val="65000"/>
-                  </a:schemeClr>
-                </a:solidFill>
-                <a:latin typeface="Arial"/>
-                <a:ea typeface="Arial"/>
-                <a:cs typeface="Arial"/>
-              </a:rPr>
-              <a:t>▢</a:t>
-            </a:r>
-            <a:r>
-              <a:rPr lang="fr-FR" sz="1800" b="1" i="0" u="none" strike="noStrike" cap="none" spc="0">
-                <a:solidFill>
-                  <a:schemeClr val="bg1">
-                    <a:lumMod val="65000"/>
-                  </a:schemeClr>
-                </a:solidFill>
-                <a:latin typeface="Arial"/>
-                <a:ea typeface="Arial"/>
-                <a:cs typeface="Arial"/>
-              </a:rPr>
-              <a:t>▢ </a:t>
-            </a:r>
-            <a:r>
-              <a:rPr lang="fr-FR" sz="1800" b="1" i="0" u="none" strike="noStrike" cap="none" spc="0">
-                <a:solidFill>
-                  <a:schemeClr val="bg1">
-                    <a:lumMod val="65000"/>
-                  </a:schemeClr>
-                </a:solidFill>
-                <a:latin typeface="Arial"/>
-                <a:ea typeface="Arial"/>
-                <a:cs typeface="Arial"/>
-              </a:rPr>
-              <a:t>▢</a:t>
-            </a:r>
-            <a:r>
-              <a:rPr lang="fr-FR" sz="1800" b="1" i="0" u="none" strike="noStrike" cap="none" spc="0">
-                <a:solidFill>
-                  <a:schemeClr val="bg1">
-                    <a:lumMod val="65000"/>
-                  </a:schemeClr>
-                </a:solidFill>
-                <a:latin typeface="Arial"/>
-                <a:ea typeface="Arial"/>
-                <a:cs typeface="Arial"/>
-              </a:rPr>
-              <a:t>▢</a:t>
-            </a:r>
-            <a:r>
-              <a:rPr lang="fr-FR" sz="1800" b="1" i="0" u="none" strike="noStrike" cap="none" spc="0">
-                <a:solidFill>
-                  <a:schemeClr val="bg1">
-                    <a:lumMod val="65000"/>
-                  </a:schemeClr>
-                </a:solidFill>
-                <a:latin typeface="Arial"/>
-                <a:ea typeface="Arial"/>
-                <a:cs typeface="Arial"/>
-              </a:rPr>
-              <a:t>▢</a:t>
-            </a:r>
-            <a:r>
-              <a:rPr lang="fr-FR" sz="1800" b="1" i="0" u="none" strike="noStrike" cap="none" spc="0">
-                <a:solidFill>
-                  <a:schemeClr val="bg1">
-                    <a:lumMod val="65000"/>
-                  </a:schemeClr>
-                </a:solidFill>
-                <a:latin typeface="Arial"/>
-                <a:ea typeface="Arial"/>
-                <a:cs typeface="Arial"/>
-              </a:rPr>
-              <a:t>▢</a:t>
-            </a:r>
-            <a:r>
-              <a:rPr lang="fr-FR" sz="1800" b="1" i="0" u="none" strike="noStrike" cap="none" spc="0">
-                <a:solidFill>
-                  <a:schemeClr val="bg1">
-                    <a:lumMod val="65000"/>
-                  </a:schemeClr>
-                </a:solidFill>
-                <a:latin typeface="Arial"/>
-                <a:ea typeface="Arial"/>
-                <a:cs typeface="Arial"/>
-              </a:rPr>
-              <a:t>▢</a:t>
-            </a:r>
-            <a:endParaRPr sz="2200" b="1">
-              <a:solidFill>
-                <a:schemeClr val="bg1">
-                  <a:lumMod val="65000"/>
-                </a:schemeClr>
-              </a:solidFill>
-            </a:endParaRPr>
           </a:p>
         </p:txBody>
       </p:sp>
@@ -10041,7 +9188,7 @@
       </p:grpSpPr>
       <p:sp>
         <p:nvSpPr>
-          <p:cNvPr id="485337054" name=""/>
+          <p:cNvPr id="342584325" name=""/>
           <p:cNvSpPr/>
           <p:nvPr/>
         </p:nvSpPr>
@@ -10084,7 +9231,7 @@
       </p:sp>
       <p:sp>
         <p:nvSpPr>
-          <p:cNvPr id="1749974021" name=""/>
+          <p:cNvPr id="1667762641" name=""/>
           <p:cNvSpPr txBox="1"/>
           <p:nvPr/>
         </p:nvSpPr>
@@ -10150,7 +9297,7 @@
       </p:sp>
       <p:cxnSp>
         <p:nvCxnSpPr>
-          <p:cNvPr id="630201107" name="Connecteur droit 1568760680"/>
+          <p:cNvPr id="1701554271" name="Connecteur droit 1568760680"/>
           <p:cNvCxnSpPr/>
           <p:nvPr/>
         </p:nvCxnSpPr>
@@ -10192,7 +9339,7 @@
       </p:cxnSp>
       <p:sp>
         <p:nvSpPr>
-          <p:cNvPr id="261600234" name="ZoneTexte 1868728971"/>
+          <p:cNvPr id="1753106823" name="ZoneTexte 1868728971"/>
           <p:cNvSpPr txBox="1"/>
           <p:nvPr/>
         </p:nvSpPr>
@@ -10232,7 +9379,7 @@
       </p:sp>
       <p:cxnSp>
         <p:nvCxnSpPr>
-          <p:cNvPr id="755194337" name="Connecteur droit 806540798"/>
+          <p:cNvPr id="1874895995" name="Connecteur droit 806540798"/>
           <p:cNvCxnSpPr/>
           <p:nvPr/>
         </p:nvCxnSpPr>
@@ -10274,7 +9421,7 @@
       </p:cxnSp>
       <p:sp>
         <p:nvSpPr>
-          <p:cNvPr id="630387427" name="ZoneTexte 406616703"/>
+          <p:cNvPr id="1925409996" name="ZoneTexte 406616703"/>
           <p:cNvSpPr txBox="1"/>
           <p:nvPr/>
         </p:nvSpPr>
@@ -10314,7 +9461,7 @@
       </p:sp>
       <p:sp>
         <p:nvSpPr>
-          <p:cNvPr id="1628357421" name="ZoneTexte 1302587497"/>
+          <p:cNvPr id="1432542250" name="ZoneTexte 1302587497"/>
           <p:cNvSpPr txBox="1"/>
           <p:nvPr/>
         </p:nvSpPr>
@@ -10518,7 +9665,7 @@
       </p:sp>
       <p:sp>
         <p:nvSpPr>
-          <p:cNvPr id="1308805756" name="Rectangle 38344096"/>
+          <p:cNvPr id="984545829" name="Rectangle 38344096"/>
           <p:cNvSpPr/>
           <p:nvPr/>
         </p:nvSpPr>
@@ -10558,7 +9705,7 @@
       </p:sp>
       <p:sp>
         <p:nvSpPr>
-          <p:cNvPr id="172557796" name="ZoneTexte 1075280509"/>
+          <p:cNvPr id="1598178677" name="ZoneTexte 1075280509"/>
           <p:cNvSpPr txBox="1"/>
           <p:nvPr/>
         </p:nvSpPr>
@@ -10631,7 +9778,7 @@
       </p:sp>
       <p:sp>
         <p:nvSpPr>
-          <p:cNvPr id="727795876" name="ZoneTexte 226284734"/>
+          <p:cNvPr id="2007586354" name="ZoneTexte 226284734"/>
           <p:cNvSpPr txBox="1"/>
           <p:nvPr/>
         </p:nvSpPr>
@@ -10704,7 +9851,7 @@
       </p:sp>
       <p:sp>
         <p:nvSpPr>
-          <p:cNvPr id="1670902098" name="ZoneTexte 162158187"/>
+          <p:cNvPr id="992153186" name="ZoneTexte 162158187"/>
           <p:cNvSpPr txBox="1"/>
           <p:nvPr/>
         </p:nvSpPr>
@@ -10754,7 +9901,7 @@
       </p:sp>
       <p:sp>
         <p:nvSpPr>
-          <p:cNvPr id="269449638" name="Rectangle : avec coins arrondis en haut 1452601499"/>
+          <p:cNvPr id="117519585" name="Rectangle : avec coins arrondis en haut 1452601499"/>
           <p:cNvSpPr/>
           <p:nvPr/>
         </p:nvSpPr>
@@ -10797,7 +9944,7 @@
       </p:sp>
       <p:sp>
         <p:nvSpPr>
-          <p:cNvPr id="1264614689" name="Rectangle : avec coins arrondis en haut 1782110635"/>
+          <p:cNvPr id="919757012" name="Rectangle : avec coins arrondis en haut 1782110635"/>
           <p:cNvSpPr/>
           <p:nvPr/>
         </p:nvSpPr>
@@ -10843,7 +9990,7 @@
       </p:sp>
       <p:sp>
         <p:nvSpPr>
-          <p:cNvPr id="1995197173" name="Rectangle : avec coins arrondis en haut 945118596"/>
+          <p:cNvPr id="86947435" name="Rectangle : avec coins arrondis en haut 945118596"/>
           <p:cNvSpPr/>
           <p:nvPr/>
         </p:nvSpPr>
@@ -10889,7 +10036,7 @@
       </p:sp>
       <p:sp>
         <p:nvSpPr>
-          <p:cNvPr id="918961277" name=""/>
+          <p:cNvPr id="569631684" name=""/>
           <p:cNvSpPr/>
           <p:nvPr/>
         </p:nvSpPr>
@@ -10931,7 +10078,7 @@
       </p:sp>
       <p:sp>
         <p:nvSpPr>
-          <p:cNvPr id="433376560" name=""/>
+          <p:cNvPr id="785821794" name=""/>
           <p:cNvSpPr txBox="1"/>
           <p:nvPr/>
         </p:nvSpPr>
@@ -10971,7 +10118,7 @@
       </p:sp>
       <p:sp>
         <p:nvSpPr>
-          <p:cNvPr id="344712811" name=""/>
+          <p:cNvPr id="1269411888" name=""/>
           <p:cNvSpPr/>
           <p:nvPr/>
         </p:nvSpPr>
@@ -11042,7 +10189,7 @@
       </p:sp>
       <p:sp>
         <p:nvSpPr>
-          <p:cNvPr id="822562660" name=""/>
+          <p:cNvPr id="1918023211" name=""/>
           <p:cNvSpPr txBox="1"/>
           <p:nvPr/>
         </p:nvSpPr>
@@ -11079,7 +10226,7 @@
       </p:sp>
       <p:sp>
         <p:nvSpPr>
-          <p:cNvPr id="1869324117" name=""/>
+          <p:cNvPr id="1874579217" name=""/>
           <p:cNvSpPr txBox="1"/>
           <p:nvPr/>
         </p:nvSpPr>
@@ -11313,14 +10460,14 @@
       </p:sp>
       <p:sp>
         <p:nvSpPr>
-          <p:cNvPr id="852086003" name=""/>
+          <p:cNvPr id="517276006" name=""/>
           <p:cNvSpPr txBox="1"/>
           <p:nvPr/>
         </p:nvSpPr>
         <p:spPr bwMode="auto">
           <a:xfrm rot="0" flipH="0" flipV="0">
-            <a:off x="142539" y="1901376"/>
-            <a:ext cx="4304277" cy="945239"/>
+            <a:off x="142538" y="1901376"/>
+            <a:ext cx="4313277" cy="945239"/>
           </a:xfrm>
           <a:prstGeom prst="rect">
             <a:avLst/>
@@ -11375,7 +10522,7 @@
                 <a:ea typeface="Arial"/>
                 <a:cs typeface="Arial"/>
               </a:rPr>
-              <a:t> et gagnez 1d6 ou 2d6 en fonction du temps passé entre les épisodes (au MJ de décider). Là où vous n’avez pas mis d’efforts vous pouvez perdre en valeur. </a:t>
+              <a:t> et gagnez 1d6 ou 2d6 en fonction du temps passé entre les épisodes (au MJ de décider). Là où vous n’avez pas mis d’efforts votre score peut baisser. </a:t>
             </a:r>
             <a:r>
               <a:rPr lang="fr-FR" sz="800" b="1" i="0" u="none" strike="noStrike" cap="none" spc="0">
@@ -11592,7 +10739,7 @@
       </p:sp>
       <p:sp>
         <p:nvSpPr>
-          <p:cNvPr id="550848842" name=""/>
+          <p:cNvPr id="1708288660" name=""/>
           <p:cNvSpPr txBox="1"/>
           <p:nvPr/>
         </p:nvSpPr>
@@ -11983,7 +11130,7 @@
       </p:sp>
       <p:sp>
         <p:nvSpPr>
-          <p:cNvPr id="397996081" name=""/>
+          <p:cNvPr id="526166082" name=""/>
           <p:cNvSpPr txBox="1"/>
           <p:nvPr/>
         </p:nvSpPr>
@@ -12374,7 +11521,7 @@
       </p:sp>
       <p:sp>
         <p:nvSpPr>
-          <p:cNvPr id="1980439228" name=""/>
+          <p:cNvPr id="1777298565" name=""/>
           <p:cNvSpPr txBox="1"/>
           <p:nvPr/>
         </p:nvSpPr>
@@ -12765,7 +11912,7 @@
       </p:sp>
       <p:sp>
         <p:nvSpPr>
-          <p:cNvPr id="2111992988" name=""/>
+          <p:cNvPr id="1150680621" name=""/>
           <p:cNvSpPr txBox="1"/>
           <p:nvPr/>
         </p:nvSpPr>
@@ -13156,7 +12303,7 @@
       </p:sp>
       <p:sp>
         <p:nvSpPr>
-          <p:cNvPr id="771286076" name=""/>
+          <p:cNvPr id="90600726" name=""/>
           <p:cNvSpPr txBox="1"/>
           <p:nvPr/>
         </p:nvSpPr>
@@ -13547,7 +12694,7 @@
       </p:sp>
       <p:sp>
         <p:nvSpPr>
-          <p:cNvPr id="1564893991" name=""/>
+          <p:cNvPr id="1874014360" name=""/>
           <p:cNvSpPr txBox="1"/>
           <p:nvPr/>
         </p:nvSpPr>
@@ -13938,7 +13085,7 @@
       </p:sp>
       <p:sp>
         <p:nvSpPr>
-          <p:cNvPr id="24132190" name=""/>
+          <p:cNvPr id="762184310" name=""/>
           <p:cNvSpPr txBox="1"/>
           <p:nvPr/>
         </p:nvSpPr>
@@ -14329,7 +13476,7 @@
       </p:sp>
       <p:sp>
         <p:nvSpPr>
-          <p:cNvPr id="232991173" name=""/>
+          <p:cNvPr id="1105098064" name=""/>
           <p:cNvSpPr txBox="1"/>
           <p:nvPr/>
         </p:nvSpPr>
@@ -14720,7 +13867,7 @@
       </p:sp>
       <p:sp>
         <p:nvSpPr>
-          <p:cNvPr id="141361794" name=""/>
+          <p:cNvPr id="1923716044" name=""/>
           <p:cNvSpPr txBox="1"/>
           <p:nvPr/>
         </p:nvSpPr>
@@ -15111,7 +14258,7 @@
       </p:sp>
       <p:sp>
         <p:nvSpPr>
-          <p:cNvPr id="1765869880" name=""/>
+          <p:cNvPr id="925140641" name=""/>
           <p:cNvSpPr txBox="1"/>
           <p:nvPr/>
         </p:nvSpPr>
@@ -15502,7 +14649,7 @@
       </p:sp>
       <p:sp>
         <p:nvSpPr>
-          <p:cNvPr id="1224842233" name=""/>
+          <p:cNvPr id="1414487026" name=""/>
           <p:cNvSpPr txBox="1"/>
           <p:nvPr/>
         </p:nvSpPr>
@@ -15893,7 +15040,7 @@
       </p:sp>
       <p:sp>
         <p:nvSpPr>
-          <p:cNvPr id="527852477" name=""/>
+          <p:cNvPr id="373578126" name=""/>
           <p:cNvSpPr txBox="1"/>
           <p:nvPr/>
         </p:nvSpPr>
@@ -16284,7 +15431,7 @@
       </p:sp>
       <p:sp>
         <p:nvSpPr>
-          <p:cNvPr id="1990450279" name=""/>
+          <p:cNvPr id="1131354221" name=""/>
           <p:cNvSpPr txBox="1"/>
           <p:nvPr/>
         </p:nvSpPr>
@@ -16675,7 +15822,7 @@
       </p:sp>
       <p:sp>
         <p:nvSpPr>
-          <p:cNvPr id="902056354" name=""/>
+          <p:cNvPr id="1167344577" name=""/>
           <p:cNvSpPr txBox="1"/>
           <p:nvPr/>
         </p:nvSpPr>
@@ -17066,7 +16213,7 @@
       </p:sp>
       <p:sp>
         <p:nvSpPr>
-          <p:cNvPr id="684594148" name=""/>
+          <p:cNvPr id="1814871297" name=""/>
           <p:cNvSpPr txBox="1"/>
           <p:nvPr/>
         </p:nvSpPr>
@@ -17274,7 +16421,7 @@
       </p:sp>
       <p:cxnSp>
         <p:nvCxnSpPr>
-          <p:cNvPr id="1346224713" name="Connecteur droit 806540798"/>
+          <p:cNvPr id="210417914" name="Connecteur droit 806540798"/>
           <p:cNvCxnSpPr/>
           <p:nvPr/>
         </p:nvCxnSpPr>
@@ -17316,7 +16463,7 @@
       </p:cxnSp>
       <p:sp>
         <p:nvSpPr>
-          <p:cNvPr id="441476318" name="ZoneTexte 406616703"/>
+          <p:cNvPr id="64960315" name="ZoneTexte 406616703"/>
           <p:cNvSpPr txBox="1"/>
           <p:nvPr/>
         </p:nvSpPr>
@@ -17356,14 +16503,14 @@
       </p:sp>
       <p:sp>
         <p:nvSpPr>
-          <p:cNvPr id="1521223584" name=""/>
+          <p:cNvPr id="465978417" name="ZoneTexte 1302587497"/>
           <p:cNvSpPr txBox="1"/>
           <p:nvPr/>
         </p:nvSpPr>
         <p:spPr bwMode="auto">
-          <a:xfrm rot="0" flipH="0" flipV="0">
-            <a:off x="58495" y="8374473"/>
-            <a:ext cx="6719196" cy="1463400"/>
+          <a:xfrm flipH="0" flipV="0">
+            <a:off x="45897" y="8391722"/>
+            <a:ext cx="6861396" cy="1463400"/>
           </a:xfrm>
           <a:prstGeom prst="rect">
             <a:avLst/>
@@ -17371,18 +16518,23 @@
           <a:noFill/>
         </p:spPr>
         <p:txBody>
-          <a:bodyPr vertOverflow="overflow" horzOverflow="overflow" vert="horz" wrap="square" lIns="91440" tIns="45720" rIns="91440" bIns="45720" numCol="1" spcCol="0" rtlCol="0" fromWordArt="0" anchor="t" anchorCtr="0" forceAA="0" upright="0" compatLnSpc="0">
+          <a:bodyPr vertOverflow="overflow" horzOverflow="overflow" vert="horz" wrap="square" lIns="91440" tIns="45720" rIns="91440" bIns="45720" numCol="1" spcCol="0" rtlCol="0" fromWordArt="0" anchor="t" anchorCtr="0" forceAA="0" compatLnSpc="0">
             <a:spAutoFit/>
           </a:bodyPr>
-          <a:p>
-            <a:pPr algn="l">
+          <a:lstStyle/>
+          <a:p>
+            <a:pPr>
               <a:lnSpc>
                 <a:spcPct val="150000"/>
               </a:lnSpc>
               <a:defRPr/>
             </a:pPr>
             <a:r>
-              <a:rPr lang="fr-FR" sz="1200" b="0" i="0" u="none" strike="noStrike" cap="none" spc="0">
+              <a:rPr sz="1000"/>
+              <a:t>Milieu et activité familiale : </a:t>
+            </a:r>
+            <a:r>
+              <a:rPr lang="fr-FR" sz="1000" b="0" i="0" u="none" strike="noStrike" cap="none" spc="0">
                 <a:solidFill>
                   <a:schemeClr val="bg2">
                     <a:lumMod val="90000"/>
@@ -17392,33 +16544,206 @@
                 <a:ea typeface="Arial"/>
                 <a:cs typeface="Arial"/>
               </a:rPr>
-              <a:t>_____________________________________________________________</a:t>
-            </a:r>
-            <a:r>
-              <a:rPr lang="fr-FR" sz="1200" b="0" i="0" u="none" strike="noStrike" cap="none" spc="0">
+              <a:t>________________________________________________________________________</a:t>
+            </a:r>
+            <a:br>
+              <a:rPr sz="1000"/>
+            </a:br>
+            <a:r>
+              <a:rPr sz="1000"/>
+              <a:t>Frères et sœurs :</a:t>
+            </a:r>
+            <a:r>
+              <a:rPr sz="1000">
                 <a:solidFill>
                   <a:schemeClr val="bg2">
                     <a:lumMod val="90000"/>
                   </a:schemeClr>
                 </a:solidFill>
-                <a:latin typeface="Arial"/>
-                <a:ea typeface="Arial"/>
-                <a:cs typeface="Arial"/>
-              </a:rPr>
-              <a:t>____________________________________________________________________________________________________________________________________________________________________________________________________________________________________________________________________________________________________________________________________</a:t>
-            </a:r>
-            <a:endParaRPr sz="1200" b="0" i="0" u="none" strike="noStrike" cap="none" spc="0">
+              </a:rPr>
+              <a:t> ________________________________________________________________________________</a:t>
+            </a:r>
+            <a:endParaRPr/>
+          </a:p>
+          <a:p>
+            <a:pPr>
+              <a:lnSpc>
+                <a:spcPct val="150000"/>
+              </a:lnSpc>
+              <a:defRPr/>
+            </a:pPr>
+            <a:r>
+              <a:rPr sz="1000"/>
+              <a:t>Lien d’enfance</a:t>
+            </a:r>
+            <a:r>
+              <a:rPr sz="1000"/>
+              <a:t> : </a:t>
+            </a:r>
+            <a:r>
+              <a:rPr sz="1000">
+                <a:solidFill>
+                  <a:schemeClr val="bg2">
+                    <a:lumMod val="90000"/>
+                  </a:schemeClr>
+                </a:solidFill>
+              </a:rPr>
+              <a:t>________________________________________________________________________________</a:t>
+            </a:r>
+            <a:endParaRPr/>
+          </a:p>
+          <a:p>
+            <a:pPr>
+              <a:lnSpc>
+                <a:spcPct val="150000"/>
+              </a:lnSpc>
+              <a:defRPr/>
+            </a:pPr>
+            <a:r>
+              <a:rPr sz="1000"/>
+              <a:t>Difficultés familiales </a:t>
+            </a:r>
+            <a:r>
+              <a:rPr sz="1000"/>
+              <a:t>: </a:t>
+            </a:r>
+            <a:r>
+              <a:rPr sz="1000">
+                <a:solidFill>
+                  <a:schemeClr val="bg2">
+                    <a:lumMod val="90000"/>
+                  </a:schemeClr>
+                </a:solidFill>
+              </a:rPr>
+              <a:t>____________________________________________________________________________</a:t>
+            </a:r>
+            <a:r>
+              <a:rPr lang="fr-FR" sz="1000" b="0" i="0" u="none" strike="noStrike" cap="none" spc="0">
+                <a:solidFill>
+                  <a:schemeClr val="tx1"/>
+                </a:solidFill>
+                <a:latin typeface="Arial"/>
+                <a:ea typeface="Arial"/>
+                <a:cs typeface="Arial"/>
+              </a:rPr>
+              <a:t>	</a:t>
+            </a:r>
+            <a:endParaRPr/>
+          </a:p>
+          <a:p>
+            <a:pPr>
+              <a:lnSpc>
+                <a:spcPct val="150000"/>
+              </a:lnSpc>
+              <a:defRPr/>
+            </a:pPr>
+            <a:r>
+              <a:rPr lang="fr-FR" sz="1000" b="0" i="0" u="none" strike="noStrike" cap="none" spc="0">
+                <a:latin typeface="Arial"/>
+                <a:ea typeface="Arial"/>
+                <a:cs typeface="Arial"/>
+              </a:rPr>
+              <a:t>Lien de préadolescence:</a:t>
+            </a:r>
+            <a:r>
+              <a:rPr sz="1000"/>
+              <a:t> </a:t>
+            </a:r>
+            <a:r>
+              <a:rPr sz="1000">
+                <a:solidFill>
+                  <a:schemeClr val="bg2">
+                    <a:lumMod val="90000"/>
+                  </a:schemeClr>
+                </a:solidFill>
+              </a:rPr>
+              <a:t>_________________________________________________________________________</a:t>
+            </a:r>
+            <a:endParaRPr sz="1000">
               <a:solidFill>
                 <a:schemeClr val="bg2">
                   <a:lumMod val="90000"/>
                 </a:schemeClr>
               </a:solidFill>
-              <a:latin typeface="Arial"/>
-              <a:ea typeface="Arial"/>
-              <a:cs typeface="Arial"/>
             </a:endParaRPr>
           </a:p>
+          <a:p>
+            <a:pPr>
+              <a:lnSpc>
+                <a:spcPct val="150000"/>
+              </a:lnSpc>
+              <a:defRPr/>
+            </a:pPr>
+            <a:r>
+              <a:rPr lang="fr-FR" sz="1000" b="0" i="0" u="none" strike="noStrike" cap="none" spc="0">
+                <a:solidFill>
+                  <a:schemeClr val="tx1"/>
+                </a:solidFill>
+                <a:latin typeface="Arial"/>
+                <a:ea typeface="Arial"/>
+                <a:cs typeface="Arial"/>
+              </a:rPr>
+              <a:t>Difficultés personnelles : </a:t>
+            </a:r>
+            <a:r>
+              <a:rPr sz="1000">
+                <a:solidFill>
+                  <a:schemeClr val="bg2">
+                    <a:lumMod val="90000"/>
+                  </a:schemeClr>
+                </a:solidFill>
+              </a:rPr>
+              <a:t>_________________________________________________________________________</a:t>
+            </a:r>
+            <a:endParaRPr>
+              <a:solidFill>
+                <a:schemeClr val="bg2">
+                  <a:lumMod val="90000"/>
+                </a:schemeClr>
+              </a:solidFill>
+            </a:endParaRPr>
+          </a:p>
         </p:txBody>
+      </p:sp>
+      <p:sp>
+        <p:nvSpPr>
+          <p:cNvPr id="999805971" name="Rectangle 38344096"/>
+          <p:cNvSpPr/>
+          <p:nvPr/>
+        </p:nvSpPr>
+        <p:spPr bwMode="auto">
+          <a:xfrm flipH="0" flipV="0">
+            <a:off x="6695377" y="8321298"/>
+            <a:ext cx="151434" cy="1474463"/>
+          </a:xfrm>
+          <a:prstGeom prst="rect">
+            <a:avLst/>
+          </a:prstGeom>
+          <a:solidFill>
+            <a:schemeClr val="bg1"/>
+          </a:solidFill>
+          <a:ln w="12700" cap="flat" cmpd="sng" algn="ctr">
+            <a:noFill/>
+            <a:prstDash val="solid"/>
+            <a:miter lim="800000"/>
+          </a:ln>
+        </p:spPr>
+        <p:style>
+          <a:lnRef idx="2">
+            <a:schemeClr val="accent1">
+              <a:shade val="50000"/>
+            </a:schemeClr>
+          </a:lnRef>
+          <a:fillRef idx="1">
+            <a:schemeClr val="accent1"/>
+          </a:fillRef>
+          <a:effectRef idx="0">
+            <a:schemeClr val="accent1"/>
+          </a:effectRef>
+          <a:fontRef idx="minor">
+            <a:schemeClr val="lt1"/>
+          </a:fontRef>
+        </p:style>
       </p:sp>
     </p:spTree>
   </p:cSld>
@@ -17455,7 +16780,7 @@
       </p:grpSpPr>
       <p:cxnSp>
         <p:nvCxnSpPr>
-          <p:cNvPr id="51370687" name="Connecteur droit 266926011"/>
+          <p:cNvPr id="244361793" name="Connecteur droit 266926011"/>
           <p:cNvCxnSpPr/>
           <p:nvPr/>
         </p:nvCxnSpPr>
@@ -17497,7 +16822,7 @@
       </p:cxnSp>
       <p:sp>
         <p:nvSpPr>
-          <p:cNvPr id="2030155601" name="ZoneTexte 1043763612"/>
+          <p:cNvPr id="1213423260" name="ZoneTexte 1043763612"/>
           <p:cNvSpPr txBox="1"/>
           <p:nvPr/>
         </p:nvSpPr>
@@ -17537,7 +16862,7 @@
       </p:sp>
       <p:cxnSp>
         <p:nvCxnSpPr>
-          <p:cNvPr id="655990818" name="Connecteur droit 1586327141"/>
+          <p:cNvPr id="1401344536" name="Connecteur droit 1586327141"/>
           <p:cNvCxnSpPr/>
           <p:nvPr/>
         </p:nvCxnSpPr>
@@ -17580,7 +16905,7 @@
       </p:cxnSp>
       <p:sp>
         <p:nvSpPr>
-          <p:cNvPr id="761148832" name="ZoneTexte 1691387439"/>
+          <p:cNvPr id="1745400006" name="ZoneTexte 1691387439"/>
           <p:cNvSpPr txBox="1"/>
           <p:nvPr/>
         </p:nvSpPr>
@@ -17620,7 +16945,7 @@
       </p:sp>
       <p:cxnSp>
         <p:nvCxnSpPr>
-          <p:cNvPr id="1927788260" name="Connecteur droit 1743707585"/>
+          <p:cNvPr id="2006797067" name="Connecteur droit 1743707585"/>
           <p:cNvCxnSpPr/>
           <p:nvPr/>
         </p:nvCxnSpPr>
@@ -17663,7 +16988,7 @@
       </p:cxnSp>
       <p:sp>
         <p:nvSpPr>
-          <p:cNvPr id="854937027" name="ZoneTexte 1503300725"/>
+          <p:cNvPr id="243615291" name="ZoneTexte 1503300725"/>
           <p:cNvSpPr txBox="1"/>
           <p:nvPr/>
         </p:nvSpPr>
@@ -17745,7 +17070,7 @@
       </p:sp>
       <p:sp>
         <p:nvSpPr>
-          <p:cNvPr id="1394441093" name="Rectangle : avec coins arrondis en haut 1151560973"/>
+          <p:cNvPr id="161109575" name="Rectangle : avec coins arrondis en haut 1151560973"/>
           <p:cNvSpPr/>
           <p:nvPr/>
         </p:nvSpPr>
@@ -17791,7 +17116,7 @@
       </p:sp>
       <p:sp>
         <p:nvSpPr>
-          <p:cNvPr id="1323594208" name="Flèche : pentagone 1610574377"/>
+          <p:cNvPr id="435526717" name="Flèche : pentagone 1610574377"/>
           <p:cNvSpPr/>
           <p:nvPr/>
         </p:nvSpPr>
@@ -17836,7 +17161,7 @@
       </p:sp>
       <p:sp>
         <p:nvSpPr>
-          <p:cNvPr id="700293164" name="Flèche : pentagone 463861063"/>
+          <p:cNvPr id="1583454270" name="Flèche : pentagone 463861063"/>
           <p:cNvSpPr/>
           <p:nvPr/>
         </p:nvSpPr>
@@ -17881,7 +17206,7 @@
       </p:sp>
       <p:sp>
         <p:nvSpPr>
-          <p:cNvPr id="612677833" name="Flèche : pentagone 272004907"/>
+          <p:cNvPr id="347597543" name="Flèche : pentagone 272004907"/>
           <p:cNvSpPr/>
           <p:nvPr/>
         </p:nvSpPr>
@@ -17926,7 +17251,7 @@
       </p:sp>
       <p:sp>
         <p:nvSpPr>
-          <p:cNvPr id="711462972" name="Flèche : pentagone 28174069"/>
+          <p:cNvPr id="1536266135" name="Flèche : pentagone 28174069"/>
           <p:cNvSpPr/>
           <p:nvPr/>
         </p:nvSpPr>
@@ -17971,7 +17296,7 @@
       </p:sp>
       <p:sp>
         <p:nvSpPr>
-          <p:cNvPr id="1244723136" name="Flèche : pentagone 978127220"/>
+          <p:cNvPr id="516152097" name="Flèche : pentagone 978127220"/>
           <p:cNvSpPr/>
           <p:nvPr/>
         </p:nvSpPr>
@@ -18016,7 +17341,7 @@
       </p:sp>
       <p:sp>
         <p:nvSpPr>
-          <p:cNvPr id="360579640" name="ZoneTexte 1693594013"/>
+          <p:cNvPr id="798754539" name="ZoneTexte 1693594013"/>
           <p:cNvSpPr txBox="1"/>
           <p:nvPr/>
         </p:nvSpPr>
@@ -18381,7 +17706,7 @@
       </p:sp>
       <p:sp>
         <p:nvSpPr>
-          <p:cNvPr id="650677522" name="ZoneTexte 1975797288"/>
+          <p:cNvPr id="98862067" name="ZoneTexte 1975797288"/>
           <p:cNvSpPr txBox="1"/>
           <p:nvPr/>
         </p:nvSpPr>
@@ -18421,7 +17746,7 @@
       </p:sp>
       <p:sp>
         <p:nvSpPr>
-          <p:cNvPr id="774654996" name="ZoneTexte 2064865984"/>
+          <p:cNvPr id="1009145032" name="ZoneTexte 2064865984"/>
           <p:cNvSpPr txBox="1"/>
           <p:nvPr/>
         </p:nvSpPr>
@@ -18686,7 +18011,7 @@
       </p:sp>
       <p:sp>
         <p:nvSpPr>
-          <p:cNvPr id="984324018" name="ZoneTexte 1387173154"/>
+          <p:cNvPr id="1723285425" name="ZoneTexte 1387173154"/>
           <p:cNvSpPr txBox="1"/>
           <p:nvPr/>
         </p:nvSpPr>
@@ -19066,7 +18391,7 @@
       </p:sp>
       <p:sp>
         <p:nvSpPr>
-          <p:cNvPr id="1529192805" name="ZoneTexte 523755832"/>
+          <p:cNvPr id="1230780005" name="ZoneTexte 523755832"/>
           <p:cNvSpPr txBox="1"/>
           <p:nvPr/>
         </p:nvSpPr>
@@ -19562,7 +18887,7 @@
       </p:sp>
       <p:cxnSp>
         <p:nvCxnSpPr>
-          <p:cNvPr id="308049474" name="Connecteur droit 2085669542"/>
+          <p:cNvPr id="1474953873" name="Connecteur droit 2085669542"/>
           <p:cNvCxnSpPr/>
           <p:nvPr/>
         </p:nvCxnSpPr>
@@ -19605,7 +18930,7 @@
       </p:cxnSp>
       <p:sp>
         <p:nvSpPr>
-          <p:cNvPr id="1665866136" name="ZoneTexte 34398067"/>
+          <p:cNvPr id="809411242" name="ZoneTexte 34398067"/>
           <p:cNvSpPr txBox="1"/>
           <p:nvPr/>
         </p:nvSpPr>
@@ -19648,7 +18973,7 @@
       </p:sp>
       <p:sp>
         <p:nvSpPr>
-          <p:cNvPr id="861853551" name="ZoneTexte 273581705"/>
+          <p:cNvPr id="1908623244" name="ZoneTexte 273581705"/>
           <p:cNvSpPr txBox="1"/>
           <p:nvPr/>
         </p:nvSpPr>
@@ -19946,7 +19271,7 @@
       </p:sp>
       <p:sp>
         <p:nvSpPr>
-          <p:cNvPr id="940376329" name="ZoneTexte 1727393832"/>
+          <p:cNvPr id="823073506" name="ZoneTexte 1727393832"/>
           <p:cNvSpPr txBox="1"/>
           <p:nvPr/>
         </p:nvSpPr>
@@ -19988,7 +19313,7 @@
       </p:sp>
       <p:sp>
         <p:nvSpPr>
-          <p:cNvPr id="1183379562" name="ZoneTexte 504516740"/>
+          <p:cNvPr id="103051938" name="ZoneTexte 504516740"/>
           <p:cNvSpPr txBox="1"/>
           <p:nvPr/>
         </p:nvSpPr>
@@ -20030,7 +19355,7 @@
       </p:sp>
       <p:sp>
         <p:nvSpPr>
-          <p:cNvPr id="1737963380" name="ZoneTexte 1"/>
+          <p:cNvPr id="973084372" name="ZoneTexte 1"/>
           <p:cNvSpPr txBox="1"/>
           <p:nvPr/>
         </p:nvSpPr>
@@ -21493,7 +20818,7 @@
       </p:sp>
       <p:sp>
         <p:nvSpPr>
-          <p:cNvPr id="1032224572" name="ZoneTexte 2"/>
+          <p:cNvPr id="1888522687" name="ZoneTexte 2"/>
           <p:cNvSpPr txBox="1"/>
           <p:nvPr/>
         </p:nvSpPr>
@@ -22031,7 +21356,7 @@
       </p:sp>
       <p:sp>
         <p:nvSpPr>
-          <p:cNvPr id="2103378489" name=""/>
+          <p:cNvPr id="1646649983" name=""/>
           <p:cNvSpPr/>
           <p:nvPr/>
         </p:nvSpPr>
@@ -22071,7 +21396,7 @@
       </p:sp>
       <p:sp>
         <p:nvSpPr>
-          <p:cNvPr id="690231890" name="Rectangle : avec coins arrondis en haut 1151560973"/>
+          <p:cNvPr id="1304818017" name="Rectangle : avec coins arrondis en haut 1151560973"/>
           <p:cNvSpPr/>
           <p:nvPr/>
         </p:nvSpPr>
@@ -22119,7 +21444,7 @@
       </p:sp>
       <p:sp>
         <p:nvSpPr>
-          <p:cNvPr id="509524490" name=""/>
+          <p:cNvPr id="196159894" name=""/>
           <p:cNvSpPr/>
           <p:nvPr/>
         </p:nvSpPr>
@@ -22159,7 +21484,7 @@
       </p:sp>
       <p:sp>
         <p:nvSpPr>
-          <p:cNvPr id="1604471321" name="Rectangle : avec coins arrondis en haut 1151560973"/>
+          <p:cNvPr id="1490512775" name="Rectangle : avec coins arrondis en haut 1151560973"/>
           <p:cNvSpPr/>
           <p:nvPr/>
         </p:nvSpPr>
@@ -22207,7 +21532,7 @@
       </p:sp>
       <p:sp>
         <p:nvSpPr>
-          <p:cNvPr id="1304013939" name=""/>
+          <p:cNvPr id="1216649628" name=""/>
           <p:cNvSpPr/>
           <p:nvPr/>
         </p:nvSpPr>
@@ -22247,7 +21572,7 @@
       </p:sp>
       <p:sp>
         <p:nvSpPr>
-          <p:cNvPr id="957267439" name="Rectangle : avec coins arrondis en haut 1151560973"/>
+          <p:cNvPr id="36892449" name="Rectangle : avec coins arrondis en haut 1151560973"/>
           <p:cNvSpPr/>
           <p:nvPr/>
         </p:nvSpPr>
@@ -22295,7 +21620,7 @@
       </p:sp>
       <p:sp>
         <p:nvSpPr>
-          <p:cNvPr id="1044241669" name=""/>
+          <p:cNvPr id="1856512423" name=""/>
           <p:cNvSpPr txBox="1"/>
           <p:nvPr/>
         </p:nvSpPr>
@@ -22360,7 +21685,7 @@
       </p:sp>
       <p:sp>
         <p:nvSpPr>
-          <p:cNvPr id="1468565400" name=""/>
+          <p:cNvPr id="1498809153" name=""/>
           <p:cNvSpPr txBox="1"/>
           <p:nvPr/>
         </p:nvSpPr>
@@ -22489,7 +21814,7 @@
       </p:sp>
       <p:sp>
         <p:nvSpPr>
-          <p:cNvPr id="1581871426" name=""/>
+          <p:cNvPr id="801235540" name=""/>
           <p:cNvSpPr/>
           <p:nvPr/>
         </p:nvSpPr>
@@ -22560,7 +21885,7 @@
       </p:sp>
       <p:sp>
         <p:nvSpPr>
-          <p:cNvPr id="697783622" name="Flèche : pentagone 1610574377"/>
+          <p:cNvPr id="2009595527" name="Flèche : pentagone 1610574377"/>
           <p:cNvSpPr/>
           <p:nvPr/>
         </p:nvSpPr>
@@ -22605,7 +21930,7 @@
       </p:sp>
       <p:sp>
         <p:nvSpPr>
-          <p:cNvPr id="1310695694" name="Flèche : pentagone 463861063"/>
+          <p:cNvPr id="838437822" name="Flèche : pentagone 463861063"/>
           <p:cNvSpPr/>
           <p:nvPr/>
         </p:nvSpPr>
@@ -22650,7 +21975,7 @@
       </p:sp>
       <p:sp>
         <p:nvSpPr>
-          <p:cNvPr id="1947802982" name="Flèche : pentagone 272004907"/>
+          <p:cNvPr id="70271975" name="Flèche : pentagone 272004907"/>
           <p:cNvSpPr/>
           <p:nvPr/>
         </p:nvSpPr>
@@ -22728,7 +22053,7 @@
       </p:grpSpPr>
       <p:cxnSp>
         <p:nvCxnSpPr>
-          <p:cNvPr id="1773844373" name="Connecteur droit 1942366049"/>
+          <p:cNvPr id="430382027" name="Connecteur droit 1942366049"/>
           <p:cNvCxnSpPr/>
           <p:nvPr/>
         </p:nvCxnSpPr>
@@ -22771,7 +22096,7 @@
       </p:cxnSp>
       <p:sp>
         <p:nvSpPr>
-          <p:cNvPr id="2069180838" name="ZoneTexte 483029020"/>
+          <p:cNvPr id="174979813" name="ZoneTexte 483029020"/>
           <p:cNvSpPr txBox="1"/>
           <p:nvPr/>
         </p:nvSpPr>
@@ -22811,7 +22136,7 @@
       </p:sp>
       <p:cxnSp>
         <p:nvCxnSpPr>
-          <p:cNvPr id="695932085" name="Connecteur droit 626166318"/>
+          <p:cNvPr id="82712784" name="Connecteur droit 626166318"/>
           <p:cNvCxnSpPr/>
           <p:nvPr/>
         </p:nvCxnSpPr>
@@ -22854,7 +22179,7 @@
       </p:cxnSp>
       <p:sp>
         <p:nvSpPr>
-          <p:cNvPr id="2116808874" name="ZoneTexte 2021489157"/>
+          <p:cNvPr id="799372527" name="ZoneTexte 2021489157"/>
           <p:cNvSpPr txBox="1"/>
           <p:nvPr/>
         </p:nvSpPr>
@@ -22894,7 +22219,7 @@
       </p:sp>
       <p:cxnSp>
         <p:nvCxnSpPr>
-          <p:cNvPr id="729209437" name="Connecteur droit 1991074862"/>
+          <p:cNvPr id="2004872439" name="Connecteur droit 1991074862"/>
           <p:cNvCxnSpPr/>
           <p:nvPr/>
         </p:nvCxnSpPr>
@@ -22937,7 +22262,7 @@
       </p:cxnSp>
       <p:sp>
         <p:nvSpPr>
-          <p:cNvPr id="1438266110" name="ZoneTexte 1094835336"/>
+          <p:cNvPr id="1924485992" name="ZoneTexte 1094835336"/>
           <p:cNvSpPr txBox="1"/>
           <p:nvPr/>
         </p:nvSpPr>
@@ -23019,7 +22344,7 @@
       </p:sp>
       <p:sp>
         <p:nvSpPr>
-          <p:cNvPr id="182263078" name="Rectangle : avec coins arrondis en haut 1574209032"/>
+          <p:cNvPr id="1913014898" name="Rectangle : avec coins arrondis en haut 1574209032"/>
           <p:cNvSpPr/>
           <p:nvPr/>
         </p:nvSpPr>
@@ -23065,7 +22390,7 @@
       </p:sp>
       <p:sp>
         <p:nvSpPr>
-          <p:cNvPr id="1854213721" name="Flèche : pentagone 521086653"/>
+          <p:cNvPr id="673804834" name="Flèche : pentagone 521086653"/>
           <p:cNvSpPr/>
           <p:nvPr/>
         </p:nvSpPr>
@@ -23110,7 +22435,7 @@
       </p:sp>
       <p:sp>
         <p:nvSpPr>
-          <p:cNvPr id="755762214" name="Flèche : pentagone 1507310733"/>
+          <p:cNvPr id="183230507" name="Flèche : pentagone 1507310733"/>
           <p:cNvSpPr/>
           <p:nvPr/>
         </p:nvSpPr>
@@ -23155,7 +22480,7 @@
       </p:sp>
       <p:sp>
         <p:nvSpPr>
-          <p:cNvPr id="980688293" name="Flèche : pentagone 732388424"/>
+          <p:cNvPr id="1800432709" name="Flèche : pentagone 732388424"/>
           <p:cNvSpPr/>
           <p:nvPr/>
         </p:nvSpPr>
@@ -23200,7 +22525,7 @@
       </p:sp>
       <p:sp>
         <p:nvSpPr>
-          <p:cNvPr id="252107384" name="Flèche : pentagone 326874465"/>
+          <p:cNvPr id="272964049" name="Flèche : pentagone 326874465"/>
           <p:cNvSpPr/>
           <p:nvPr/>
         </p:nvSpPr>
@@ -23245,7 +22570,7 @@
       </p:sp>
       <p:sp>
         <p:nvSpPr>
-          <p:cNvPr id="1302093649" name="Flèche : pentagone 2090650957"/>
+          <p:cNvPr id="1259108058" name="Flèche : pentagone 2090650957"/>
           <p:cNvSpPr/>
           <p:nvPr/>
         </p:nvSpPr>
@@ -23290,7 +22615,7 @@
       </p:sp>
       <p:sp>
         <p:nvSpPr>
-          <p:cNvPr id="1015838131" name="ZoneTexte 1374103996"/>
+          <p:cNvPr id="1300586960" name="ZoneTexte 1374103996"/>
           <p:cNvSpPr txBox="1"/>
           <p:nvPr/>
         </p:nvSpPr>
@@ -23577,7 +22902,7 @@
       </p:sp>
       <p:sp>
         <p:nvSpPr>
-          <p:cNvPr id="976290110" name="ZoneTexte 1748705365"/>
+          <p:cNvPr id="416788771" name="ZoneTexte 1748705365"/>
           <p:cNvSpPr txBox="1"/>
           <p:nvPr/>
         </p:nvSpPr>
@@ -23617,7 +22942,7 @@
       </p:sp>
       <p:cxnSp>
         <p:nvCxnSpPr>
-          <p:cNvPr id="274641750" name="Connecteur droit 1556830908"/>
+          <p:cNvPr id="1437050363" name="Connecteur droit 1556830908"/>
           <p:cNvCxnSpPr/>
           <p:nvPr/>
         </p:nvCxnSpPr>
@@ -23660,7 +22985,7 @@
       </p:cxnSp>
       <p:sp>
         <p:nvSpPr>
-          <p:cNvPr id="1149681127" name="ZoneTexte 409639257"/>
+          <p:cNvPr id="1964739457" name="ZoneTexte 409639257"/>
           <p:cNvSpPr txBox="1"/>
           <p:nvPr/>
         </p:nvSpPr>
@@ -23710,7 +23035,7 @@
       </p:sp>
       <p:sp>
         <p:nvSpPr>
-          <p:cNvPr id="1811491143" name="ZoneTexte 1168472887"/>
+          <p:cNvPr id="876834938" name="ZoneTexte 1168472887"/>
           <p:cNvSpPr txBox="1"/>
           <p:nvPr/>
         </p:nvSpPr>
@@ -23995,7 +23320,7 @@
       </p:sp>
       <p:sp>
         <p:nvSpPr>
-          <p:cNvPr id="1942764787" name="ZoneTexte 114796530"/>
+          <p:cNvPr id="1082310704" name="ZoneTexte 114796530"/>
           <p:cNvSpPr txBox="1"/>
           <p:nvPr/>
         </p:nvSpPr>
@@ -24373,7 +23698,7 @@
       </p:sp>
       <p:sp>
         <p:nvSpPr>
-          <p:cNvPr id="504347762" name="ZoneTexte 1085068195"/>
+          <p:cNvPr id="14217906" name="ZoneTexte 1085068195"/>
           <p:cNvSpPr txBox="1"/>
           <p:nvPr/>
         </p:nvSpPr>
@@ -25499,7 +24824,7 @@
       </p:sp>
       <p:sp>
         <p:nvSpPr>
-          <p:cNvPr id="1631813686" name="Étoile : 5 branches 278736380"/>
+          <p:cNvPr id="1671970107" name="Étoile : 5 branches 278736380"/>
           <p:cNvSpPr/>
           <p:nvPr/>
         </p:nvSpPr>
@@ -25546,7 +24871,7 @@
       </p:sp>
       <p:sp>
         <p:nvSpPr>
-          <p:cNvPr id="734927332" name="Étoile : 5 branches 1495350449"/>
+          <p:cNvPr id="528090074" name="Étoile : 5 branches 1495350449"/>
           <p:cNvSpPr/>
           <p:nvPr/>
         </p:nvSpPr>
@@ -25593,7 +24918,7 @@
       </p:sp>
       <p:sp>
         <p:nvSpPr>
-          <p:cNvPr id="156000808" name="Étoile : 5 branches 79046386"/>
+          <p:cNvPr id="345677672" name="Étoile : 5 branches 79046386"/>
           <p:cNvSpPr/>
           <p:nvPr/>
         </p:nvSpPr>
@@ -25640,7 +24965,7 @@
       </p:sp>
       <p:sp>
         <p:nvSpPr>
-          <p:cNvPr id="1327280840" name="Étoile : 5 branches 749256076"/>
+          <p:cNvPr id="1924727752" name="Étoile : 5 branches 749256076"/>
           <p:cNvSpPr/>
           <p:nvPr/>
         </p:nvSpPr>
@@ -25687,7 +25012,7 @@
       </p:sp>
       <p:sp>
         <p:nvSpPr>
-          <p:cNvPr id="706099500" name="Étoile : 5 branches 411245083"/>
+          <p:cNvPr id="1596036746" name="Étoile : 5 branches 411245083"/>
           <p:cNvSpPr/>
           <p:nvPr/>
         </p:nvSpPr>
@@ -25734,7 +25059,7 @@
       </p:sp>
       <p:sp>
         <p:nvSpPr>
-          <p:cNvPr id="313409989" name="ZoneTexte 496444952"/>
+          <p:cNvPr id="897198545" name="ZoneTexte 496444952"/>
           <p:cNvSpPr txBox="1"/>
           <p:nvPr/>
         </p:nvSpPr>
@@ -25776,7 +25101,7 @@
       </p:sp>
       <p:sp>
         <p:nvSpPr>
-          <p:cNvPr id="2073580061" name="ZoneTexte 474433989"/>
+          <p:cNvPr id="1196009927" name="ZoneTexte 474433989"/>
           <p:cNvSpPr txBox="1"/>
           <p:nvPr/>
         </p:nvSpPr>
@@ -25818,14 +25143,14 @@
       </p:sp>
       <p:sp>
         <p:nvSpPr>
-          <p:cNvPr id="1115033643" name="ZoneTexte 1"/>
+          <p:cNvPr id="156511569" name="ZoneTexte 1"/>
           <p:cNvSpPr txBox="1"/>
           <p:nvPr/>
         </p:nvSpPr>
         <p:spPr bwMode="auto">
           <a:xfrm flipH="0" flipV="0">
-            <a:off x="1213" y="480139"/>
-            <a:ext cx="3428865" cy="1600559"/>
+            <a:off x="1212" y="480138"/>
+            <a:ext cx="3429225" cy="1585319"/>
           </a:xfrm>
           <a:prstGeom prst="rect">
             <a:avLst/>
@@ -25883,7 +25208,7 @@
             <a:pPr>
               <a:defRPr/>
             </a:pPr>
-            <a:endParaRPr sz="900" b="0" i="1" u="none" strike="noStrike" cap="none" spc="0">
+            <a:endParaRPr sz="800" b="0" i="1" u="none" strike="noStrike" cap="none" spc="0">
               <a:solidFill>
                 <a:schemeClr val="tx1">
                   <a:lumMod val="50000"/>
@@ -25919,14 +25244,14 @@
       </p:sp>
       <p:sp>
         <p:nvSpPr>
-          <p:cNvPr id="2051111808" name="ZoneTexte 2"/>
+          <p:cNvPr id="730734905" name="ZoneTexte 2"/>
           <p:cNvSpPr txBox="1"/>
           <p:nvPr/>
         </p:nvSpPr>
         <p:spPr bwMode="auto">
           <a:xfrm flipH="0" flipV="0">
-            <a:off x="3374466" y="471205"/>
-            <a:ext cx="3514428" cy="1737719"/>
+            <a:off x="3374465" y="471204"/>
+            <a:ext cx="3515148" cy="1707239"/>
           </a:xfrm>
           <a:prstGeom prst="rect">
             <a:avLst/>
@@ -25970,7 +25295,7 @@
             <a:pPr>
               <a:defRPr/>
             </a:pPr>
-            <a:endParaRPr sz="900" i="1">
+            <a:endParaRPr sz="800" i="1">
               <a:solidFill>
                 <a:schemeClr val="tx1">
                   <a:lumMod val="50000"/>
@@ -26007,7 +25332,7 @@
                 </a:solidFill>
               </a:rPr>
             </a:br>
-            <a:endParaRPr sz="900" i="1">
+            <a:endParaRPr sz="800" i="1">
               <a:solidFill>
                 <a:schemeClr val="tx1">
                   <a:lumMod val="50000"/>
@@ -26037,7 +25362,7 @@
       </p:sp>
       <p:sp>
         <p:nvSpPr>
-          <p:cNvPr id="894147815" name=""/>
+          <p:cNvPr id="104550723" name=""/>
           <p:cNvSpPr/>
           <p:nvPr/>
         </p:nvSpPr>
@@ -26108,7 +25433,7 @@
       </p:sp>
       <p:sp>
         <p:nvSpPr>
-          <p:cNvPr id="57479847" name="Flèche : pentagone 1507310733"/>
+          <p:cNvPr id="363585800" name="Flèche : pentagone 1507310733"/>
           <p:cNvSpPr/>
           <p:nvPr/>
         </p:nvSpPr>
@@ -26153,7 +25478,7 @@
       </p:sp>
       <p:sp>
         <p:nvSpPr>
-          <p:cNvPr id="278150328" name="Flèche : pentagone 732388424"/>
+          <p:cNvPr id="1679626018" name="Flèche : pentagone 732388424"/>
           <p:cNvSpPr/>
           <p:nvPr/>
         </p:nvSpPr>
@@ -26198,7 +25523,7 @@
       </p:sp>
       <p:sp>
         <p:nvSpPr>
-          <p:cNvPr id="2094357770" name="Flèche : pentagone 326874465"/>
+          <p:cNvPr id="2056903797" name="Flèche : pentagone 326874465"/>
           <p:cNvSpPr/>
           <p:nvPr/>
         </p:nvSpPr>
@@ -26276,7 +25601,7 @@
       </p:grpSpPr>
       <p:sp>
         <p:nvSpPr>
-          <p:cNvPr id="2015792959" name="ZoneTexte 273581705"/>
+          <p:cNvPr id="1619566952" name="ZoneTexte 273581705"/>
           <p:cNvSpPr txBox="1"/>
           <p:nvPr/>
         </p:nvSpPr>
@@ -26574,7 +25899,7 @@
       </p:sp>
       <p:cxnSp>
         <p:nvCxnSpPr>
-          <p:cNvPr id="267726942" name="Connecteur droit 1094832104"/>
+          <p:cNvPr id="1755368285" name="Connecteur droit 1094832104"/>
           <p:cNvCxnSpPr/>
           <p:nvPr/>
         </p:nvCxnSpPr>
@@ -26617,7 +25942,7 @@
       </p:cxnSp>
       <p:sp>
         <p:nvSpPr>
-          <p:cNvPr id="456480968" name="ZoneTexte 2078543737"/>
+          <p:cNvPr id="1063117998" name="ZoneTexte 2078543737"/>
           <p:cNvSpPr txBox="1"/>
           <p:nvPr/>
         </p:nvSpPr>
@@ -26657,7 +25982,7 @@
       </p:sp>
       <p:cxnSp>
         <p:nvCxnSpPr>
-          <p:cNvPr id="571152001" name="Connecteur droit 853743145"/>
+          <p:cNvPr id="405169791" name="Connecteur droit 853743145"/>
           <p:cNvCxnSpPr/>
           <p:nvPr/>
         </p:nvCxnSpPr>
@@ -26700,7 +26025,7 @@
       </p:cxnSp>
       <p:sp>
         <p:nvSpPr>
-          <p:cNvPr id="1676109489" name="ZoneTexte 1473119298"/>
+          <p:cNvPr id="598318417" name="ZoneTexte 1473119298"/>
           <p:cNvSpPr txBox="1"/>
           <p:nvPr/>
         </p:nvSpPr>
@@ -26740,7 +26065,7 @@
       </p:sp>
       <p:cxnSp>
         <p:nvCxnSpPr>
-          <p:cNvPr id="1135663496" name="Connecteur droit 1727809509"/>
+          <p:cNvPr id="1966894046" name="Connecteur droit 1727809509"/>
           <p:cNvCxnSpPr/>
           <p:nvPr/>
         </p:nvCxnSpPr>
@@ -26783,7 +26108,7 @@
       </p:cxnSp>
       <p:sp>
         <p:nvSpPr>
-          <p:cNvPr id="219715414" name="ZoneTexte 759238070"/>
+          <p:cNvPr id="1624677059" name="ZoneTexte 759238070"/>
           <p:cNvSpPr txBox="1"/>
           <p:nvPr/>
         </p:nvSpPr>
@@ -26858,7 +26183,7 @@
       </p:sp>
       <p:sp>
         <p:nvSpPr>
-          <p:cNvPr id="929421305" name="Rectangle : avec coins arrondis en haut 965147191"/>
+          <p:cNvPr id="99692570" name="Rectangle : avec coins arrondis en haut 965147191"/>
           <p:cNvSpPr/>
           <p:nvPr/>
         </p:nvSpPr>
@@ -26904,7 +26229,7 @@
       </p:sp>
       <p:sp>
         <p:nvSpPr>
-          <p:cNvPr id="1617622110" name="Flèche : pentagone 2070329900"/>
+          <p:cNvPr id="1988462519" name="Flèche : pentagone 2070329900"/>
           <p:cNvSpPr/>
           <p:nvPr/>
         </p:nvSpPr>
@@ -26949,7 +26274,7 @@
       </p:sp>
       <p:sp>
         <p:nvSpPr>
-          <p:cNvPr id="394459523" name="Flèche : pentagone 1325137089"/>
+          <p:cNvPr id="1215054089" name="Flèche : pentagone 1325137089"/>
           <p:cNvSpPr/>
           <p:nvPr/>
         </p:nvSpPr>
@@ -26994,7 +26319,7 @@
       </p:sp>
       <p:sp>
         <p:nvSpPr>
-          <p:cNvPr id="1640187790" name="Flèche : pentagone 295922856"/>
+          <p:cNvPr id="853385949" name="Flèche : pentagone 295922856"/>
           <p:cNvSpPr/>
           <p:nvPr/>
         </p:nvSpPr>
@@ -27039,7 +26364,7 @@
       </p:sp>
       <p:sp>
         <p:nvSpPr>
-          <p:cNvPr id="1442590686" name="Flèche : pentagone 1961547672"/>
+          <p:cNvPr id="592330365" name="Flèche : pentagone 1961547672"/>
           <p:cNvSpPr/>
           <p:nvPr/>
         </p:nvSpPr>
@@ -27084,7 +26409,7 @@
       </p:sp>
       <p:sp>
         <p:nvSpPr>
-          <p:cNvPr id="1759149447" name="Flèche : pentagone 1305647833"/>
+          <p:cNvPr id="2104440547" name="Flèche : pentagone 1305647833"/>
           <p:cNvSpPr/>
           <p:nvPr/>
         </p:nvSpPr>
@@ -27129,7 +26454,7 @@
       </p:sp>
       <p:sp>
         <p:nvSpPr>
-          <p:cNvPr id="1585755008" name="ZoneTexte 545814566"/>
+          <p:cNvPr id="110162883" name="ZoneTexte 545814566"/>
           <p:cNvSpPr txBox="1"/>
           <p:nvPr/>
         </p:nvSpPr>
@@ -27431,7 +26756,7 @@
       </p:sp>
       <p:sp>
         <p:nvSpPr>
-          <p:cNvPr id="1539595518" name="ZoneTexte 671978155"/>
+          <p:cNvPr id="302053484" name="ZoneTexte 671978155"/>
           <p:cNvSpPr txBox="1"/>
           <p:nvPr/>
         </p:nvSpPr>
@@ -27471,7 +26796,7 @@
       </p:sp>
       <p:cxnSp>
         <p:nvCxnSpPr>
-          <p:cNvPr id="1104828202" name="Connecteur droit 637589304"/>
+          <p:cNvPr id="440044500" name="Connecteur droit 637589304"/>
           <p:cNvCxnSpPr/>
           <p:nvPr/>
         </p:nvCxnSpPr>
@@ -27514,7 +26839,7 @@
       </p:cxnSp>
       <p:sp>
         <p:nvSpPr>
-          <p:cNvPr id="853651187" name="ZoneTexte 172075623"/>
+          <p:cNvPr id="1342353408" name="ZoneTexte 172075623"/>
           <p:cNvSpPr txBox="1"/>
           <p:nvPr/>
         </p:nvSpPr>
@@ -27564,7 +26889,7 @@
       </p:sp>
       <p:sp>
         <p:nvSpPr>
-          <p:cNvPr id="1830772038" name="ZoneTexte 1642812764"/>
+          <p:cNvPr id="627853383" name="ZoneTexte 1642812764"/>
           <p:cNvSpPr txBox="1"/>
           <p:nvPr/>
         </p:nvSpPr>
@@ -27753,7 +27078,7 @@
       </p:sp>
       <p:sp>
         <p:nvSpPr>
-          <p:cNvPr id="1837170297" name="Étoile : 7 branches 1681961038"/>
+          <p:cNvPr id="587345642" name="Étoile : 7 branches 1681961038"/>
           <p:cNvSpPr/>
           <p:nvPr/>
         </p:nvSpPr>
@@ -27800,7 +27125,7 @@
       </p:sp>
       <p:sp>
         <p:nvSpPr>
-          <p:cNvPr id="695635165" name="Étoile : 7 branches 1476951547"/>
+          <p:cNvPr id="2002461301" name="Étoile : 7 branches 1476951547"/>
           <p:cNvSpPr/>
           <p:nvPr/>
         </p:nvSpPr>
@@ -27847,7 +27172,7 @@
       </p:sp>
       <p:sp>
         <p:nvSpPr>
-          <p:cNvPr id="935213571" name="Étoile : 7 branches 1520826925"/>
+          <p:cNvPr id="347159456" name="Étoile : 7 branches 1520826925"/>
           <p:cNvSpPr/>
           <p:nvPr/>
         </p:nvSpPr>
@@ -27894,7 +27219,7 @@
       </p:sp>
       <p:sp>
         <p:nvSpPr>
-          <p:cNvPr id="31504911" name="ZoneTexte 1219899073"/>
+          <p:cNvPr id="1886438639" name="ZoneTexte 1219899073"/>
           <p:cNvSpPr txBox="1"/>
           <p:nvPr/>
         </p:nvSpPr>
@@ -27934,7 +27259,7 @@
       </p:sp>
       <p:sp>
         <p:nvSpPr>
-          <p:cNvPr id="1627549090" name="ZoneTexte 1283574123"/>
+          <p:cNvPr id="179123377" name="ZoneTexte 1283574123"/>
           <p:cNvSpPr txBox="1"/>
           <p:nvPr/>
         </p:nvSpPr>
@@ -28917,7 +28242,7 @@
       </p:sp>
       <p:sp>
         <p:nvSpPr>
-          <p:cNvPr id="1857148213" name="ZoneTexte 790352176"/>
+          <p:cNvPr id="866412808" name="ZoneTexte 790352176"/>
           <p:cNvSpPr txBox="1"/>
           <p:nvPr/>
         </p:nvSpPr>
@@ -28959,7 +28284,7 @@
       </p:sp>
       <p:sp>
         <p:nvSpPr>
-          <p:cNvPr id="1885810782" name="ZoneTexte 2025740189"/>
+          <p:cNvPr id="865375212" name="ZoneTexte 2025740189"/>
           <p:cNvSpPr txBox="1"/>
           <p:nvPr/>
         </p:nvSpPr>
@@ -29016,7 +28341,7 @@
       </p:sp>
       <p:sp>
         <p:nvSpPr>
-          <p:cNvPr id="146392361" name=""/>
+          <p:cNvPr id="1149611499" name=""/>
           <p:cNvSpPr/>
           <p:nvPr/>
         </p:nvSpPr>
@@ -29056,7 +28381,7 @@
       </p:sp>
       <p:sp>
         <p:nvSpPr>
-          <p:cNvPr id="1474734949" name="Rectangle : avec coins arrondis en haut 1151560973"/>
+          <p:cNvPr id="904018832" name="Rectangle : avec coins arrondis en haut 1151560973"/>
           <p:cNvSpPr/>
           <p:nvPr/>
         </p:nvSpPr>
@@ -29104,7 +28429,7 @@
       </p:sp>
       <p:sp>
         <p:nvSpPr>
-          <p:cNvPr id="580373130" name=""/>
+          <p:cNvPr id="196364336" name=""/>
           <p:cNvSpPr/>
           <p:nvPr/>
         </p:nvSpPr>
@@ -29144,7 +28469,7 @@
       </p:sp>
       <p:sp>
         <p:nvSpPr>
-          <p:cNvPr id="1536524895" name="Rectangle : avec coins arrondis en haut 1151560973"/>
+          <p:cNvPr id="796726063" name="Rectangle : avec coins arrondis en haut 1151560973"/>
           <p:cNvSpPr/>
           <p:nvPr/>
         </p:nvSpPr>
@@ -29192,7 +28517,7 @@
       </p:sp>
       <p:sp>
         <p:nvSpPr>
-          <p:cNvPr id="1966548861" name=""/>
+          <p:cNvPr id="375607307" name=""/>
           <p:cNvSpPr/>
           <p:nvPr/>
         </p:nvSpPr>
@@ -29232,7 +28557,7 @@
       </p:sp>
       <p:sp>
         <p:nvSpPr>
-          <p:cNvPr id="1236556843" name="Rectangle : avec coins arrondis en haut 1151560973"/>
+          <p:cNvPr id="216590693" name="Rectangle : avec coins arrondis en haut 1151560973"/>
           <p:cNvSpPr/>
           <p:nvPr/>
         </p:nvSpPr>
@@ -29280,14 +28605,14 @@
       </p:sp>
       <p:sp>
         <p:nvSpPr>
-          <p:cNvPr id="1780714246" name=""/>
+          <p:cNvPr id="892362179" name=""/>
           <p:cNvSpPr txBox="1"/>
           <p:nvPr/>
         </p:nvSpPr>
         <p:spPr bwMode="auto">
           <a:xfrm rot="0" flipH="0" flipV="0">
-            <a:off x="71832" y="545004"/>
-            <a:ext cx="3185389" cy="1768199"/>
+            <a:off x="71831" y="545004"/>
+            <a:ext cx="3186468" cy="1722479"/>
           </a:xfrm>
           <a:prstGeom prst="rect">
             <a:avLst/>
@@ -29367,7 +28692,7 @@
               </a:rPr>
             </a:br>
             <a:br>
-              <a:rPr lang="fr-FR" sz="1000" b="0" i="1" u="none" strike="noStrike" cap="none" spc="0">
+              <a:rPr lang="fr-FR" sz="700" b="0" i="1" u="none" strike="noStrike" cap="none" spc="0">
                 <a:solidFill>
                   <a:schemeClr val="tx1">
                     <a:lumMod val="50000"/>
@@ -29408,14 +28733,14 @@
       </p:sp>
       <p:sp>
         <p:nvSpPr>
-          <p:cNvPr id="1691671122" name=""/>
+          <p:cNvPr id="765230907" name=""/>
           <p:cNvSpPr txBox="1"/>
           <p:nvPr/>
         </p:nvSpPr>
         <p:spPr bwMode="auto">
           <a:xfrm rot="0" flipH="0" flipV="0">
-            <a:off x="3472501" y="545004"/>
-            <a:ext cx="3191508" cy="1768199"/>
+            <a:off x="3472500" y="545004"/>
+            <a:ext cx="3192588" cy="1722479"/>
           </a:xfrm>
           <a:prstGeom prst="rect">
             <a:avLst/>
@@ -29478,6 +28803,44 @@
               </a:spcAft>
               <a:defRPr/>
             </a:pPr>
+            <a:endParaRPr sz="700" b="0" i="1" u="none" strike="noStrike" cap="none" spc="0">
+              <a:solidFill>
+                <a:schemeClr val="tx1">
+                  <a:lumMod val="50000"/>
+                  <a:lumOff val="50000"/>
+                </a:schemeClr>
+              </a:solidFill>
+              <a:latin typeface="Arial"/>
+              <a:cs typeface="Arial"/>
+            </a:endParaRPr>
+          </a:p>
+          <a:p>
+            <a:pPr marL="0" marR="0" indent="0" algn="l">
+              <a:lnSpc>
+                <a:spcPct val="100000"/>
+              </a:lnSpc>
+              <a:spcBef>
+                <a:spcPts val="0"/>
+              </a:spcBef>
+              <a:spcAft>
+                <a:spcPts val="0"/>
+              </a:spcAft>
+              <a:defRPr/>
+            </a:pPr>
+            <a:r>
+              <a:rPr lang="fr-FR" sz="1000" b="0" i="1" u="none" strike="noStrike" cap="none" spc="0">
+                <a:solidFill>
+                  <a:schemeClr val="tx1">
+                    <a:lumMod val="50000"/>
+                    <a:lumOff val="50000"/>
+                  </a:schemeClr>
+                </a:solidFill>
+                <a:latin typeface="Arial"/>
+                <a:ea typeface="Arial"/>
+                <a:cs typeface="Arial"/>
+              </a:rPr>
+              <a:t>Vous ne vieillissez plus et votre corps régénère de ses blessures aisément. Vous éprouvez encore des sensations, des émotions, des désirs et de la douleur. La douleur de ne plus vraiment faire partie du monde des vivants. Elle est sans doute là, votre damnation : vous n’êtes pas tout à fait un monstre. Pas encore.</a:t>
+            </a:r>
             <a:endParaRPr sz="1000" b="0" i="1" u="none" strike="noStrike" cap="none" spc="0">
               <a:solidFill>
                 <a:schemeClr val="tx1">
@@ -29489,49 +28852,11 @@
               <a:cs typeface="Arial"/>
             </a:endParaRPr>
           </a:p>
-          <a:p>
-            <a:pPr marL="0" marR="0" indent="0" algn="l">
-              <a:lnSpc>
-                <a:spcPct val="100000"/>
-              </a:lnSpc>
-              <a:spcBef>
-                <a:spcPts val="0"/>
-              </a:spcBef>
-              <a:spcAft>
-                <a:spcPts val="0"/>
-              </a:spcAft>
-              <a:defRPr/>
-            </a:pPr>
-            <a:r>
-              <a:rPr lang="fr-FR" sz="1000" b="0" i="1" u="none" strike="noStrike" cap="none" spc="0">
-                <a:solidFill>
-                  <a:schemeClr val="tx1">
-                    <a:lumMod val="50000"/>
-                    <a:lumOff val="50000"/>
-                  </a:schemeClr>
-                </a:solidFill>
-                <a:latin typeface="Arial"/>
-                <a:ea typeface="Arial"/>
-                <a:cs typeface="Arial"/>
-              </a:rPr>
-              <a:t>Vous ne vieillissez plus et votre corps régénère de ses blessures aisément. Vous éprouvez encore des sensations, des émotions, des désirs et de la douleur. La douleur de ne plus vraiment faire partie du monde des vivants. Elle est sans doute là, votre damnation : vous n’êtes pas tout à fait un monstre. Pas encore.</a:t>
-            </a:r>
-            <a:endParaRPr sz="1000" b="0" i="1" u="none" strike="noStrike" cap="none" spc="0">
-              <a:solidFill>
-                <a:schemeClr val="tx1">
-                  <a:lumMod val="50000"/>
-                  <a:lumOff val="50000"/>
-                </a:schemeClr>
-              </a:solidFill>
-              <a:latin typeface="Arial"/>
-              <a:cs typeface="Arial"/>
-            </a:endParaRPr>
-          </a:p>
         </p:txBody>
       </p:sp>
       <p:sp>
         <p:nvSpPr>
-          <p:cNvPr id="921040287" name=""/>
+          <p:cNvPr id="1606317002" name=""/>
           <p:cNvSpPr/>
           <p:nvPr/>
         </p:nvSpPr>
@@ -29602,7 +28927,7 @@
       </p:sp>
       <p:sp>
         <p:nvSpPr>
-          <p:cNvPr id="2060426492" name="Flèche : pentagone 1325137089"/>
+          <p:cNvPr id="2094348811" name="Flèche : pentagone 1325137089"/>
           <p:cNvSpPr/>
           <p:nvPr/>
         </p:nvSpPr>
@@ -29647,7 +28972,7 @@
       </p:sp>
       <p:sp>
         <p:nvSpPr>
-          <p:cNvPr id="1485234592" name="Flèche : pentagone 295922856"/>
+          <p:cNvPr id="1275189834" name="Flèche : pentagone 295922856"/>
           <p:cNvSpPr/>
           <p:nvPr/>
         </p:nvSpPr>
@@ -29692,7 +29017,7 @@
       </p:sp>
       <p:sp>
         <p:nvSpPr>
-          <p:cNvPr id="391101897" name="Flèche : pentagone 1961547672"/>
+          <p:cNvPr id="1132646117" name="Flèche : pentagone 1961547672"/>
           <p:cNvSpPr/>
           <p:nvPr/>
         </p:nvSpPr>
@@ -29770,7 +29095,7 @@
       </p:grpSpPr>
       <p:cxnSp>
         <p:nvCxnSpPr>
-          <p:cNvPr id="128653533" name="Connecteur droit 266926011"/>
+          <p:cNvPr id="1462906287" name="Connecteur droit 266926011"/>
           <p:cNvCxnSpPr/>
           <p:nvPr/>
         </p:nvCxnSpPr>
@@ -29813,7 +29138,7 @@
       </p:cxnSp>
       <p:sp>
         <p:nvSpPr>
-          <p:cNvPr id="609950274" name="ZoneTexte 1043763612"/>
+          <p:cNvPr id="999414230" name="ZoneTexte 1043763612"/>
           <p:cNvSpPr txBox="1"/>
           <p:nvPr/>
         </p:nvSpPr>
@@ -29853,7 +29178,7 @@
       </p:sp>
       <p:cxnSp>
         <p:nvCxnSpPr>
-          <p:cNvPr id="1059030073" name="Connecteur droit 1586327141"/>
+          <p:cNvPr id="1320630755" name="Connecteur droit 1586327141"/>
           <p:cNvCxnSpPr/>
           <p:nvPr/>
         </p:nvCxnSpPr>
@@ -29896,7 +29221,7 @@
       </p:cxnSp>
       <p:sp>
         <p:nvSpPr>
-          <p:cNvPr id="906907939" name="ZoneTexte 1691387439"/>
+          <p:cNvPr id="505838213" name="ZoneTexte 1691387439"/>
           <p:cNvSpPr txBox="1"/>
           <p:nvPr/>
         </p:nvSpPr>
@@ -29936,7 +29261,7 @@
       </p:sp>
       <p:cxnSp>
         <p:nvCxnSpPr>
-          <p:cNvPr id="226433105" name="Connecteur droit 1743707585"/>
+          <p:cNvPr id="134331858" name="Connecteur droit 1743707585"/>
           <p:cNvCxnSpPr/>
           <p:nvPr/>
         </p:nvCxnSpPr>
@@ -29979,7 +29304,7 @@
       </p:cxnSp>
       <p:sp>
         <p:nvSpPr>
-          <p:cNvPr id="1323613220" name="ZoneTexte 1503300725"/>
+          <p:cNvPr id="1328024745" name="ZoneTexte 1503300725"/>
           <p:cNvSpPr txBox="1"/>
           <p:nvPr/>
         </p:nvSpPr>
@@ -30061,7 +29386,7 @@
       </p:sp>
       <p:sp>
         <p:nvSpPr>
-          <p:cNvPr id="2006230970" name="Rectangle : avec coins arrondis en haut 1151560973"/>
+          <p:cNvPr id="1545044518" name="Rectangle : avec coins arrondis en haut 1151560973"/>
           <p:cNvSpPr/>
           <p:nvPr/>
         </p:nvSpPr>
@@ -30107,7 +29432,7 @@
       </p:sp>
       <p:sp>
         <p:nvSpPr>
-          <p:cNvPr id="579943258" name="Flèche : pentagone 1610574377"/>
+          <p:cNvPr id="777792133" name="Flèche : pentagone 1610574377"/>
           <p:cNvSpPr/>
           <p:nvPr/>
         </p:nvSpPr>
@@ -30152,7 +29477,7 @@
       </p:sp>
       <p:sp>
         <p:nvSpPr>
-          <p:cNvPr id="1277884246" name="Flèche : pentagone 463861063"/>
+          <p:cNvPr id="1789544897" name="Flèche : pentagone 463861063"/>
           <p:cNvSpPr/>
           <p:nvPr/>
         </p:nvSpPr>
@@ -30197,7 +29522,7 @@
       </p:sp>
       <p:sp>
         <p:nvSpPr>
-          <p:cNvPr id="1730978801" name="Flèche : pentagone 272004907"/>
+          <p:cNvPr id="2061763220" name="Flèche : pentagone 272004907"/>
           <p:cNvSpPr/>
           <p:nvPr/>
         </p:nvSpPr>
@@ -30242,7 +29567,7 @@
       </p:sp>
       <p:sp>
         <p:nvSpPr>
-          <p:cNvPr id="2014325473" name="Flèche : pentagone 28174069"/>
+          <p:cNvPr id="506050948" name="Flèche : pentagone 28174069"/>
           <p:cNvSpPr/>
           <p:nvPr/>
         </p:nvSpPr>
@@ -30287,7 +29612,7 @@
       </p:sp>
       <p:sp>
         <p:nvSpPr>
-          <p:cNvPr id="507204804" name="Flèche : pentagone 978127220"/>
+          <p:cNvPr id="871098605" name="Flèche : pentagone 978127220"/>
           <p:cNvSpPr/>
           <p:nvPr/>
         </p:nvSpPr>
@@ -30332,7 +29657,7 @@
       </p:sp>
       <p:sp>
         <p:nvSpPr>
-          <p:cNvPr id="438511731" name="ZoneTexte 1693594013"/>
+          <p:cNvPr id="1362587567" name="ZoneTexte 1693594013"/>
           <p:cNvSpPr txBox="1"/>
           <p:nvPr/>
         </p:nvSpPr>
@@ -30683,7 +30008,7 @@
       </p:sp>
       <p:sp>
         <p:nvSpPr>
-          <p:cNvPr id="277853717" name="ZoneTexte 1975797288"/>
+          <p:cNvPr id="791594837" name="ZoneTexte 1975797288"/>
           <p:cNvSpPr txBox="1"/>
           <p:nvPr/>
         </p:nvSpPr>
@@ -30723,7 +30048,7 @@
       </p:sp>
       <p:sp>
         <p:nvSpPr>
-          <p:cNvPr id="1672507006" name="ZoneTexte 2064865984"/>
+          <p:cNvPr id="1785441087" name="ZoneTexte 2064865984"/>
           <p:cNvSpPr txBox="1"/>
           <p:nvPr/>
         </p:nvSpPr>
@@ -30945,7 +30270,7 @@
       </p:sp>
       <p:sp>
         <p:nvSpPr>
-          <p:cNvPr id="2056184526" name="ZoneTexte 1387173154"/>
+          <p:cNvPr id="559939833" name="ZoneTexte 1387173154"/>
           <p:cNvSpPr txBox="1"/>
           <p:nvPr/>
         </p:nvSpPr>
@@ -31197,7 +30522,7 @@
       </p:sp>
       <p:sp>
         <p:nvSpPr>
-          <p:cNvPr id="399936893" name="ZoneTexte 523755832"/>
+          <p:cNvPr id="1796623550" name="ZoneTexte 523755832"/>
           <p:cNvSpPr txBox="1"/>
           <p:nvPr/>
         </p:nvSpPr>
@@ -31457,7 +30782,7 @@
       </p:sp>
       <p:cxnSp>
         <p:nvCxnSpPr>
-          <p:cNvPr id="656146341" name="Connecteur droit 2085669542"/>
+          <p:cNvPr id="1865848553" name="Connecteur droit 2085669542"/>
           <p:cNvCxnSpPr/>
           <p:nvPr/>
         </p:nvCxnSpPr>
@@ -31500,7 +30825,7 @@
       </p:cxnSp>
       <p:sp>
         <p:nvSpPr>
-          <p:cNvPr id="776535059" name="ZoneTexte 34398067"/>
+          <p:cNvPr id="1974568478" name="ZoneTexte 34398067"/>
           <p:cNvSpPr txBox="1"/>
           <p:nvPr/>
         </p:nvSpPr>
@@ -31543,7 +30868,7 @@
       </p:sp>
       <p:sp>
         <p:nvSpPr>
-          <p:cNvPr id="886530406" name="ZoneTexte 273581705"/>
+          <p:cNvPr id="1985722282" name="ZoneTexte 273581705"/>
           <p:cNvSpPr txBox="1"/>
           <p:nvPr/>
         </p:nvSpPr>
@@ -31841,7 +31166,7 @@
       </p:sp>
       <p:sp>
         <p:nvSpPr>
-          <p:cNvPr id="1895624333" name="ZoneTexte 1727393832"/>
+          <p:cNvPr id="583906697" name="ZoneTexte 1727393832"/>
           <p:cNvSpPr txBox="1"/>
           <p:nvPr/>
         </p:nvSpPr>
@@ -31883,7 +31208,7 @@
       </p:sp>
       <p:sp>
         <p:nvSpPr>
-          <p:cNvPr id="1515469671" name="ZoneTexte 504516740"/>
+          <p:cNvPr id="756532011" name="ZoneTexte 504516740"/>
           <p:cNvSpPr txBox="1"/>
           <p:nvPr/>
         </p:nvSpPr>
@@ -31925,14 +31250,14 @@
       </p:sp>
       <p:sp>
         <p:nvSpPr>
-          <p:cNvPr id="37124658" name="ZoneTexte 1"/>
+          <p:cNvPr id="719016746" name="ZoneTexte 1"/>
           <p:cNvSpPr txBox="1"/>
           <p:nvPr/>
         </p:nvSpPr>
         <p:spPr bwMode="auto">
           <a:xfrm flipH="0" flipV="0">
-            <a:off x="3449952" y="531373"/>
-            <a:ext cx="3425020" cy="1768199"/>
+            <a:off x="3449952" y="531372"/>
+            <a:ext cx="3426099" cy="1722479"/>
           </a:xfrm>
           <a:prstGeom prst="rect">
             <a:avLst/>
@@ -31992,6 +31317,35 @@
             <a:pPr>
               <a:defRPr/>
             </a:pPr>
+            <a:endParaRPr sz="700" b="0" i="1" u="none" strike="noStrike" cap="none" spc="0">
+              <a:solidFill>
+                <a:schemeClr val="tx1">
+                  <a:lumMod val="50000"/>
+                  <a:lumOff val="50000"/>
+                </a:schemeClr>
+              </a:solidFill>
+              <a:latin typeface="Times New Roman"/>
+              <a:cs typeface="Times New Roman"/>
+            </a:endParaRPr>
+          </a:p>
+          <a:p>
+            <a:pPr>
+              <a:defRPr/>
+            </a:pPr>
+            <a:r>
+              <a:rPr lang="fr-FR" sz="1000" b="0" i="1" u="none" strike="noStrike" cap="none" spc="0">
+                <a:solidFill>
+                  <a:schemeClr val="tx1">
+                    <a:lumMod val="50000"/>
+                    <a:lumOff val="50000"/>
+                  </a:schemeClr>
+                </a:solidFill>
+                <a:latin typeface="Arial"/>
+                <a:ea typeface="Arial"/>
+                <a:cs typeface="Arial"/>
+              </a:rPr>
+              <a:t>Les animaux ne vous craignent plus et vous considèrent même comme une forme de gardien. Vous êtes cependant devenu extrêmement susceptible au feu et vous éloignez de toute flamme dès que possible.</a:t>
+            </a:r>
             <a:endParaRPr sz="1000" b="0" i="1" u="none" strike="noStrike" cap="none" spc="0">
               <a:solidFill>
                 <a:schemeClr val="tx1">
@@ -32003,47 +31357,18 @@
               <a:cs typeface="Times New Roman"/>
             </a:endParaRPr>
           </a:p>
-          <a:p>
-            <a:pPr>
-              <a:defRPr/>
-            </a:pPr>
-            <a:r>
-              <a:rPr lang="fr-FR" sz="1000" b="0" i="1" u="none" strike="noStrike" cap="none" spc="0">
-                <a:solidFill>
-                  <a:schemeClr val="tx1">
-                    <a:lumMod val="50000"/>
-                    <a:lumOff val="50000"/>
-                  </a:schemeClr>
-                </a:solidFill>
-                <a:latin typeface="Arial"/>
-                <a:ea typeface="Arial"/>
-                <a:cs typeface="Arial"/>
-              </a:rPr>
-              <a:t>Les animaux ne vous craignent plus et vous considèrent même comme une forme de gardien. Vous êtes cependant devenu extrêmement susceptible au feu et vous éloignez de toute flamme dès que possible.</a:t>
-            </a:r>
-            <a:endParaRPr sz="1000" b="0" i="1" u="none" strike="noStrike" cap="none" spc="0">
-              <a:solidFill>
-                <a:schemeClr val="tx1">
-                  <a:lumMod val="50000"/>
-                  <a:lumOff val="50000"/>
-                </a:schemeClr>
-              </a:solidFill>
-              <a:latin typeface="Times New Roman"/>
-              <a:cs typeface="Times New Roman"/>
-            </a:endParaRPr>
-          </a:p>
         </p:txBody>
       </p:sp>
       <p:sp>
         <p:nvSpPr>
-          <p:cNvPr id="39806520" name="ZoneTexte 2"/>
+          <p:cNvPr id="673794740" name="ZoneTexte 2"/>
           <p:cNvSpPr txBox="1"/>
           <p:nvPr/>
         </p:nvSpPr>
         <p:spPr bwMode="auto">
           <a:xfrm>
-            <a:off x="-5164" y="533754"/>
-            <a:ext cx="3443914" cy="1615799"/>
+            <a:off x="-5163" y="533754"/>
+            <a:ext cx="3444993" cy="1570079"/>
           </a:xfrm>
           <a:prstGeom prst="rect">
             <a:avLst/>
@@ -32088,7 +31413,7 @@
               </a:rPr>
             </a:br>
             <a:br>
-              <a:rPr lang="fr-FR" sz="1000" b="0" i="1" u="none" strike="noStrike" cap="none" spc="0">
+              <a:rPr lang="fr-FR" sz="700" b="0" i="1" u="none" strike="noStrike" cap="none" spc="0">
                 <a:solidFill>
                   <a:schemeClr val="tx1">
                     <a:lumMod val="50000"/>
@@ -32120,7 +31445,7 @@
       </p:sp>
       <p:sp>
         <p:nvSpPr>
-          <p:cNvPr id="162999035" name=""/>
+          <p:cNvPr id="1755731485" name=""/>
           <p:cNvSpPr/>
           <p:nvPr/>
         </p:nvSpPr>
@@ -32160,7 +31485,7 @@
       </p:sp>
       <p:sp>
         <p:nvSpPr>
-          <p:cNvPr id="24522179" name="Rectangle : avec coins arrondis en haut 1151560973"/>
+          <p:cNvPr id="1880733768" name="Rectangle : avec coins arrondis en haut 1151560973"/>
           <p:cNvSpPr/>
           <p:nvPr/>
         </p:nvSpPr>
@@ -32208,7 +31533,7 @@
       </p:sp>
       <p:sp>
         <p:nvSpPr>
-          <p:cNvPr id="534317182" name=""/>
+          <p:cNvPr id="1224720377" name=""/>
           <p:cNvSpPr/>
           <p:nvPr/>
         </p:nvSpPr>
@@ -32248,7 +31573,7 @@
       </p:sp>
       <p:sp>
         <p:nvSpPr>
-          <p:cNvPr id="196435173" name="Rectangle : avec coins arrondis en haut 1151560973"/>
+          <p:cNvPr id="1865570198" name="Rectangle : avec coins arrondis en haut 1151560973"/>
           <p:cNvSpPr/>
           <p:nvPr/>
         </p:nvSpPr>
@@ -32296,7 +31621,7 @@
       </p:sp>
       <p:sp>
         <p:nvSpPr>
-          <p:cNvPr id="19195748" name=""/>
+          <p:cNvPr id="1967017288" name=""/>
           <p:cNvSpPr/>
           <p:nvPr/>
         </p:nvSpPr>
@@ -32336,7 +31661,7 @@
       </p:sp>
       <p:sp>
         <p:nvSpPr>
-          <p:cNvPr id="1158107643" name="Rectangle : avec coins arrondis en haut 1151560973"/>
+          <p:cNvPr id="523888935" name="Rectangle : avec coins arrondis en haut 1151560973"/>
           <p:cNvSpPr/>
           <p:nvPr/>
         </p:nvSpPr>
@@ -32384,7 +31709,7 @@
       </p:sp>
       <p:sp>
         <p:nvSpPr>
-          <p:cNvPr id="1111378716" name=""/>
+          <p:cNvPr id="1508839608" name=""/>
           <p:cNvSpPr txBox="1"/>
           <p:nvPr/>
         </p:nvSpPr>
@@ -32435,7 +31760,7 @@
       </p:sp>
       <p:sp>
         <p:nvSpPr>
-          <p:cNvPr id="582845223" name=""/>
+          <p:cNvPr id="400021941" name=""/>
           <p:cNvSpPr txBox="1"/>
           <p:nvPr/>
         </p:nvSpPr>
@@ -32533,7 +31858,7 @@
       </p:sp>
       <p:sp>
         <p:nvSpPr>
-          <p:cNvPr id="1180824339" name=""/>
+          <p:cNvPr id="1886535516" name=""/>
           <p:cNvSpPr/>
           <p:nvPr/>
         </p:nvSpPr>
@@ -32604,7 +31929,7 @@
       </p:sp>
       <p:sp>
         <p:nvSpPr>
-          <p:cNvPr id="1616565120" name="Flèche : pentagone 463861063"/>
+          <p:cNvPr id="412315118" name="Flèche : pentagone 463861063"/>
           <p:cNvSpPr/>
           <p:nvPr/>
         </p:nvSpPr>
@@ -32649,7 +31974,7 @@
       </p:sp>
       <p:sp>
         <p:nvSpPr>
-          <p:cNvPr id="1899160042" name="Flèche : pentagone 272004907"/>
+          <p:cNvPr id="307816281" name="Flèche : pentagone 272004907"/>
           <p:cNvSpPr/>
           <p:nvPr/>
         </p:nvSpPr>
@@ -32694,7 +32019,7 @@
       </p:sp>
       <p:sp>
         <p:nvSpPr>
-          <p:cNvPr id="133210494" name="Flèche : pentagone 28174069"/>
+          <p:cNvPr id="561929146" name="Flèche : pentagone 28174069"/>
           <p:cNvSpPr/>
           <p:nvPr/>
         </p:nvSpPr>

--- a/Fiches de personnage.pptx
+++ b/Fiches de personnage.pptx
@@ -139,7 +139,7 @@
       </p:grpSpPr>
       <p:sp>
         <p:nvSpPr>
-          <p:cNvPr id="307224571" name="Espace réservé d'en-tête 1"/>
+          <p:cNvPr id="1524053472" name="Espace réservé d'en-tête 1"/>
           <p:cNvSpPr>
             <a:spLocks noGrp="1"/>
           </p:cNvSpPr>
@@ -173,7 +173,7 @@
       </p:sp>
       <p:sp>
         <p:nvSpPr>
-          <p:cNvPr id="384568661" name="Espace réservé pour la date 2"/>
+          <p:cNvPr id="435121435" name="Espace réservé pour la date 2"/>
           <p:cNvSpPr>
             <a:spLocks noGrp="1"/>
           </p:cNvSpPr>
@@ -211,7 +211,7 @@
       </p:sp>
       <p:sp>
         <p:nvSpPr>
-          <p:cNvPr id="217868565" name="Espace réservé pour l'image de la diapositive 3"/>
+          <p:cNvPr id="138981030" name="Espace réservé pour l'image de la diapositive 3"/>
           <p:cNvSpPr>
             <a:spLocks noChangeAspect="1" noGrp="1" noRot="1"/>
           </p:cNvSpPr>
@@ -247,7 +247,7 @@
       </p:sp>
       <p:sp>
         <p:nvSpPr>
-          <p:cNvPr id="1106613541" name="Remarques Espace réservé 4"/>
+          <p:cNvPr id="1593933100" name="Remarques Espace réservé 4"/>
           <p:cNvSpPr>
             <a:spLocks noGrp="1"/>
           </p:cNvSpPr>
@@ -321,7 +321,7 @@
       </p:sp>
       <p:sp>
         <p:nvSpPr>
-          <p:cNvPr id="952428525" name="Espace réservé du pied de page 5"/>
+          <p:cNvPr id="1133375030" name="Espace réservé du pied de page 5"/>
           <p:cNvSpPr>
             <a:spLocks noGrp="1"/>
           </p:cNvSpPr>
@@ -355,7 +355,7 @@
       </p:sp>
       <p:sp>
         <p:nvSpPr>
-          <p:cNvPr id="1444669330" name="Espace réservé du numéro de diapositive 6"/>
+          <p:cNvPr id="523080392" name="Espace réservé du numéro de diapositive 6"/>
           <p:cNvSpPr>
             <a:spLocks noGrp="1"/>
           </p:cNvSpPr>
@@ -508,7 +508,7 @@
       </p:grpSpPr>
       <p:sp>
         <p:nvSpPr>
-          <p:cNvPr id="527725713" name="Espace réservé pour l'image de la diapositive 1"/>
+          <p:cNvPr id="2083458530" name="Espace réservé pour l'image de la diapositive 1"/>
           <p:cNvSpPr>
             <a:spLocks noChangeAspect="1" noGrp="1" noRot="1"/>
           </p:cNvSpPr>
@@ -525,7 +525,7 @@
       </p:sp>
       <p:sp>
         <p:nvSpPr>
-          <p:cNvPr id="1124721139" name="Remarques Espace réservé 2"/>
+          <p:cNvPr id="596918037" name="Remarques Espace réservé 2"/>
           <p:cNvSpPr>
             <a:spLocks noGrp="1"/>
           </p:cNvSpPr>
@@ -550,7 +550,7 @@
       </p:sp>
       <p:sp>
         <p:nvSpPr>
-          <p:cNvPr id="2036584513" name="Espace réservé pour le numéro de diapositive 3"/>
+          <p:cNvPr id="1522199719" name="Espace réservé pour le numéro de diapositive 3"/>
           <p:cNvSpPr>
             <a:spLocks noGrp="1"/>
           </p:cNvSpPr>
@@ -601,7 +601,7 @@
       </p:grpSpPr>
       <p:sp>
         <p:nvSpPr>
-          <p:cNvPr id="1900771020" name="Espace réservé pour l'image de la diapositive 1"/>
+          <p:cNvPr id="1327457419" name="Espace réservé pour l'image de la diapositive 1"/>
           <p:cNvSpPr>
             <a:spLocks noChangeAspect="1" noGrp="1" noRot="1"/>
           </p:cNvSpPr>
@@ -618,7 +618,7 @@
       </p:sp>
       <p:sp>
         <p:nvSpPr>
-          <p:cNvPr id="645800930" name="Remarques Espace réservé 2"/>
+          <p:cNvPr id="776618428" name="Remarques Espace réservé 2"/>
           <p:cNvSpPr>
             <a:spLocks noGrp="1"/>
           </p:cNvSpPr>
@@ -643,7 +643,7 @@
       </p:sp>
       <p:sp>
         <p:nvSpPr>
-          <p:cNvPr id="325759053" name="Espace réservé pour le numéro de diapositive 3"/>
+          <p:cNvPr id="2120926757" name="Espace réservé pour le numéro de diapositive 3"/>
           <p:cNvSpPr>
             <a:spLocks noGrp="1"/>
           </p:cNvSpPr>
@@ -694,7 +694,7 @@
       </p:grpSpPr>
       <p:sp>
         <p:nvSpPr>
-          <p:cNvPr id="706814360" name="Espace réservé pour l'image de la diapositive 1"/>
+          <p:cNvPr id="414272156" name="Espace réservé pour l'image de la diapositive 1"/>
           <p:cNvSpPr>
             <a:spLocks noChangeAspect="1" noGrp="1" noRot="1"/>
           </p:cNvSpPr>
@@ -711,7 +711,7 @@
       </p:sp>
       <p:sp>
         <p:nvSpPr>
-          <p:cNvPr id="2039373860" name="Remarques Espace réservé 2"/>
+          <p:cNvPr id="449958747" name="Remarques Espace réservé 2"/>
           <p:cNvSpPr>
             <a:spLocks noGrp="1"/>
           </p:cNvSpPr>
@@ -736,7 +736,7 @@
       </p:sp>
       <p:sp>
         <p:nvSpPr>
-          <p:cNvPr id="688191389" name="Espace réservé pour le numéro de diapositive 3"/>
+          <p:cNvPr id="1419703755" name="Espace réservé pour le numéro de diapositive 3"/>
           <p:cNvSpPr>
             <a:spLocks noGrp="1"/>
           </p:cNvSpPr>
@@ -787,7 +787,7 @@
       </p:grpSpPr>
       <p:sp>
         <p:nvSpPr>
-          <p:cNvPr id="147224854" name="Espace réservé pour l'image de la diapositive 1"/>
+          <p:cNvPr id="589770318" name="Espace réservé pour l'image de la diapositive 1"/>
           <p:cNvSpPr>
             <a:spLocks noChangeAspect="1" noGrp="1" noRot="1"/>
           </p:cNvSpPr>
@@ -804,7 +804,7 @@
       </p:sp>
       <p:sp>
         <p:nvSpPr>
-          <p:cNvPr id="455268552" name="Remarques Espace réservé 2"/>
+          <p:cNvPr id="402614777" name="Remarques Espace réservé 2"/>
           <p:cNvSpPr>
             <a:spLocks noGrp="1"/>
           </p:cNvSpPr>
@@ -829,7 +829,7 @@
       </p:sp>
       <p:sp>
         <p:nvSpPr>
-          <p:cNvPr id="200054325" name="Espace réservé pour le numéro de diapositive 3"/>
+          <p:cNvPr id="1800351018" name="Espace réservé pour le numéro de diapositive 3"/>
           <p:cNvSpPr>
             <a:spLocks noGrp="1"/>
           </p:cNvSpPr>
@@ -880,7 +880,7 @@
       </p:grpSpPr>
       <p:sp>
         <p:nvSpPr>
-          <p:cNvPr id="322317679" name="Espace réservé pour l'image de la diapositive 1"/>
+          <p:cNvPr id="758109999" name="Espace réservé pour l'image de la diapositive 1"/>
           <p:cNvSpPr>
             <a:spLocks noChangeAspect="1" noGrp="1" noRot="1"/>
           </p:cNvSpPr>
@@ -897,7 +897,7 @@
       </p:sp>
       <p:sp>
         <p:nvSpPr>
-          <p:cNvPr id="2004817509" name="Remarques Espace réservé 2"/>
+          <p:cNvPr id="1200477376" name="Remarques Espace réservé 2"/>
           <p:cNvSpPr>
             <a:spLocks noGrp="1"/>
           </p:cNvSpPr>
@@ -922,7 +922,7 @@
       </p:sp>
       <p:sp>
         <p:nvSpPr>
-          <p:cNvPr id="1707944167" name="Espace réservé pour le numéro de diapositive 3"/>
+          <p:cNvPr id="1359239459" name="Espace réservé pour le numéro de diapositive 3"/>
           <p:cNvSpPr>
             <a:spLocks noGrp="1"/>
           </p:cNvSpPr>
@@ -973,7 +973,7 @@
       </p:grpSpPr>
       <p:sp>
         <p:nvSpPr>
-          <p:cNvPr id="788029295" name="Espace réservé pour l'image de la diapositive 1"/>
+          <p:cNvPr id="129133477" name="Espace réservé pour l'image de la diapositive 1"/>
           <p:cNvSpPr>
             <a:spLocks noChangeAspect="1" noGrp="1" noRot="1"/>
           </p:cNvSpPr>
@@ -990,7 +990,7 @@
       </p:sp>
       <p:sp>
         <p:nvSpPr>
-          <p:cNvPr id="1955391172" name="Remarques Espace réservé 2"/>
+          <p:cNvPr id="1103178183" name="Remarques Espace réservé 2"/>
           <p:cNvSpPr>
             <a:spLocks noGrp="1"/>
           </p:cNvSpPr>
@@ -1015,7 +1015,7 @@
       </p:sp>
       <p:sp>
         <p:nvSpPr>
-          <p:cNvPr id="776518168" name="Espace réservé pour le numéro de diapositive 3"/>
+          <p:cNvPr id="924254884" name="Espace réservé pour le numéro de diapositive 3"/>
           <p:cNvSpPr>
             <a:spLocks noGrp="1"/>
           </p:cNvSpPr>
@@ -1066,7 +1066,7 @@
       </p:grpSpPr>
       <p:sp>
         <p:nvSpPr>
-          <p:cNvPr id="568112933" name="Titre 1"/>
+          <p:cNvPr id="1111955085" name="Titre 1"/>
           <p:cNvSpPr>
             <a:spLocks noGrp="1"/>
           </p:cNvSpPr>
@@ -1101,7 +1101,7 @@
       </p:sp>
       <p:sp>
         <p:nvSpPr>
-          <p:cNvPr id="424913495" name="Sous-titre 2"/>
+          <p:cNvPr id="551298870" name="Sous-titre 2"/>
           <p:cNvSpPr>
             <a:spLocks noGrp="1"/>
           </p:cNvSpPr>
@@ -1169,7 +1169,7 @@
       </p:sp>
       <p:sp>
         <p:nvSpPr>
-          <p:cNvPr id="1932915738" name="Espace réservé de la date 3"/>
+          <p:cNvPr id="1955126386" name="Espace réservé de la date 3"/>
           <p:cNvSpPr>
             <a:spLocks noGrp="1"/>
           </p:cNvSpPr>
@@ -1195,7 +1195,7 @@
       </p:sp>
       <p:sp>
         <p:nvSpPr>
-          <p:cNvPr id="14932660" name="Espace réservé du pied de page 4"/>
+          <p:cNvPr id="247310803" name="Espace réservé du pied de page 4"/>
           <p:cNvSpPr>
             <a:spLocks noGrp="1"/>
           </p:cNvSpPr>
@@ -1217,7 +1217,7 @@
       </p:sp>
       <p:sp>
         <p:nvSpPr>
-          <p:cNvPr id="1158888155" name="Espace réservé du numéro de diapositive 5"/>
+          <p:cNvPr id="652240188" name="Espace réservé du numéro de diapositive 5"/>
           <p:cNvSpPr>
             <a:spLocks noGrp="1"/>
           </p:cNvSpPr>
@@ -1268,7 +1268,7 @@
       </p:grpSpPr>
       <p:sp>
         <p:nvSpPr>
-          <p:cNvPr id="1877646523" name="Titre 1"/>
+          <p:cNvPr id="1852618487" name="Titre 1"/>
           <p:cNvSpPr>
             <a:spLocks noGrp="1"/>
           </p:cNvSpPr>
@@ -1294,7 +1294,7 @@
       </p:sp>
       <p:sp>
         <p:nvSpPr>
-          <p:cNvPr id="399340270" name="Espace réservé du texte vertical 2"/>
+          <p:cNvPr id="1733049374" name="Espace réservé du texte vertical 2"/>
           <p:cNvSpPr>
             <a:spLocks noGrp="1"/>
           </p:cNvSpPr>
@@ -1360,7 +1360,7 @@
       </p:sp>
       <p:sp>
         <p:nvSpPr>
-          <p:cNvPr id="513729784" name="Espace réservé de la date 3"/>
+          <p:cNvPr id="1331243421" name="Espace réservé de la date 3"/>
           <p:cNvSpPr>
             <a:spLocks noGrp="1"/>
           </p:cNvSpPr>
@@ -1386,7 +1386,7 @@
       </p:sp>
       <p:sp>
         <p:nvSpPr>
-          <p:cNvPr id="1325854908" name="Espace réservé du pied de page 4"/>
+          <p:cNvPr id="1047088515" name="Espace réservé du pied de page 4"/>
           <p:cNvSpPr>
             <a:spLocks noGrp="1"/>
           </p:cNvSpPr>
@@ -1408,7 +1408,7 @@
       </p:sp>
       <p:sp>
         <p:nvSpPr>
-          <p:cNvPr id="1203376687" name="Espace réservé du numéro de diapositive 5"/>
+          <p:cNvPr id="1054569677" name="Espace réservé du numéro de diapositive 5"/>
           <p:cNvSpPr>
             <a:spLocks noGrp="1"/>
           </p:cNvSpPr>
@@ -1459,7 +1459,7 @@
       </p:grpSpPr>
       <p:sp>
         <p:nvSpPr>
-          <p:cNvPr id="232205924" name="Titre vertical 1"/>
+          <p:cNvPr id="2082848965" name="Titre vertical 1"/>
           <p:cNvSpPr>
             <a:spLocks noGrp="1"/>
           </p:cNvSpPr>
@@ -1490,7 +1490,7 @@
       </p:sp>
       <p:sp>
         <p:nvSpPr>
-          <p:cNvPr id="1616876430" name="Espace réservé du texte vertical 2"/>
+          <p:cNvPr id="386636761" name="Espace réservé du texte vertical 2"/>
           <p:cNvSpPr>
             <a:spLocks noGrp="1"/>
           </p:cNvSpPr>
@@ -1561,7 +1561,7 @@
       </p:sp>
       <p:sp>
         <p:nvSpPr>
-          <p:cNvPr id="264923520" name="Espace réservé de la date 3"/>
+          <p:cNvPr id="2099540779" name="Espace réservé de la date 3"/>
           <p:cNvSpPr>
             <a:spLocks noGrp="1"/>
           </p:cNvSpPr>
@@ -1587,7 +1587,7 @@
       </p:sp>
       <p:sp>
         <p:nvSpPr>
-          <p:cNvPr id="1565876742" name="Espace réservé du pied de page 4"/>
+          <p:cNvPr id="1830322542" name="Espace réservé du pied de page 4"/>
           <p:cNvSpPr>
             <a:spLocks noGrp="1"/>
           </p:cNvSpPr>
@@ -1609,7 +1609,7 @@
       </p:sp>
       <p:sp>
         <p:nvSpPr>
-          <p:cNvPr id="152915514" name="Espace réservé du numéro de diapositive 5"/>
+          <p:cNvPr id="1171428154" name="Espace réservé du numéro de diapositive 5"/>
           <p:cNvSpPr>
             <a:spLocks noGrp="1"/>
           </p:cNvSpPr>
@@ -1660,7 +1660,7 @@
       </p:grpSpPr>
       <p:sp>
         <p:nvSpPr>
-          <p:cNvPr id="1259698438" name="Titre 1"/>
+          <p:cNvPr id="492328630" name="Titre 1"/>
           <p:cNvSpPr>
             <a:spLocks noGrp="1"/>
           </p:cNvSpPr>
@@ -1686,7 +1686,7 @@
       </p:sp>
       <p:sp>
         <p:nvSpPr>
-          <p:cNvPr id="909668411" name="Espace réservé du contenu 2"/>
+          <p:cNvPr id="566495090" name="Espace réservé du contenu 2"/>
           <p:cNvSpPr>
             <a:spLocks noGrp="1"/>
           </p:cNvSpPr>
@@ -1752,7 +1752,7 @@
       </p:sp>
       <p:sp>
         <p:nvSpPr>
-          <p:cNvPr id="1105776935" name="Espace réservé de la date 3"/>
+          <p:cNvPr id="904673102" name="Espace réservé de la date 3"/>
           <p:cNvSpPr>
             <a:spLocks noGrp="1"/>
           </p:cNvSpPr>
@@ -1778,7 +1778,7 @@
       </p:sp>
       <p:sp>
         <p:nvSpPr>
-          <p:cNvPr id="437451916" name="Espace réservé du pied de page 4"/>
+          <p:cNvPr id="803669641" name="Espace réservé du pied de page 4"/>
           <p:cNvSpPr>
             <a:spLocks noGrp="1"/>
           </p:cNvSpPr>
@@ -1800,7 +1800,7 @@
       </p:sp>
       <p:sp>
         <p:nvSpPr>
-          <p:cNvPr id="1866766740" name="Espace réservé du numéro de diapositive 5"/>
+          <p:cNvPr id="686312119" name="Espace réservé du numéro de diapositive 5"/>
           <p:cNvSpPr>
             <a:spLocks noGrp="1"/>
           </p:cNvSpPr>
@@ -1851,7 +1851,7 @@
       </p:grpSpPr>
       <p:sp>
         <p:nvSpPr>
-          <p:cNvPr id="249838872" name="Titre 1"/>
+          <p:cNvPr id="681654160" name="Titre 1"/>
           <p:cNvSpPr>
             <a:spLocks noGrp="1"/>
           </p:cNvSpPr>
@@ -1886,7 +1886,7 @@
       </p:sp>
       <p:sp>
         <p:nvSpPr>
-          <p:cNvPr id="225277860" name="Espace réservé du texte 2"/>
+          <p:cNvPr id="334970833" name="Espace réservé du texte 2"/>
           <p:cNvSpPr>
             <a:spLocks noGrp="1"/>
           </p:cNvSpPr>
@@ -2008,7 +2008,7 @@
       </p:sp>
       <p:sp>
         <p:nvSpPr>
-          <p:cNvPr id="351168860" name="Espace réservé de la date 3"/>
+          <p:cNvPr id="686677399" name="Espace réservé de la date 3"/>
           <p:cNvSpPr>
             <a:spLocks noGrp="1"/>
           </p:cNvSpPr>
@@ -2034,7 +2034,7 @@
       </p:sp>
       <p:sp>
         <p:nvSpPr>
-          <p:cNvPr id="1883939087" name="Espace réservé du pied de page 4"/>
+          <p:cNvPr id="1607091024" name="Espace réservé du pied de page 4"/>
           <p:cNvSpPr>
             <a:spLocks noGrp="1"/>
           </p:cNvSpPr>
@@ -2056,7 +2056,7 @@
       </p:sp>
       <p:sp>
         <p:nvSpPr>
-          <p:cNvPr id="296486752" name="Espace réservé du numéro de diapositive 5"/>
+          <p:cNvPr id="101288565" name="Espace réservé du numéro de diapositive 5"/>
           <p:cNvSpPr>
             <a:spLocks noGrp="1"/>
           </p:cNvSpPr>
@@ -2107,7 +2107,7 @@
       </p:grpSpPr>
       <p:sp>
         <p:nvSpPr>
-          <p:cNvPr id="2002090465" name="Titre 1"/>
+          <p:cNvPr id="1523126754" name="Titre 1"/>
           <p:cNvSpPr>
             <a:spLocks noGrp="1"/>
           </p:cNvSpPr>
@@ -2133,7 +2133,7 @@
       </p:sp>
       <p:sp>
         <p:nvSpPr>
-          <p:cNvPr id="1094545470" name="Espace réservé du contenu 2"/>
+          <p:cNvPr id="1160453935" name="Espace réservé du contenu 2"/>
           <p:cNvSpPr>
             <a:spLocks noGrp="1"/>
           </p:cNvSpPr>
@@ -2204,7 +2204,7 @@
       </p:sp>
       <p:sp>
         <p:nvSpPr>
-          <p:cNvPr id="554920468" name="Espace réservé du contenu 3"/>
+          <p:cNvPr id="852913649" name="Espace réservé du contenu 3"/>
           <p:cNvSpPr>
             <a:spLocks noGrp="1"/>
           </p:cNvSpPr>
@@ -2275,7 +2275,7 @@
       </p:sp>
       <p:sp>
         <p:nvSpPr>
-          <p:cNvPr id="1766736489" name="Espace réservé de la date 4"/>
+          <p:cNvPr id="128806063" name="Espace réservé de la date 4"/>
           <p:cNvSpPr>
             <a:spLocks noGrp="1"/>
           </p:cNvSpPr>
@@ -2301,7 +2301,7 @@
       </p:sp>
       <p:sp>
         <p:nvSpPr>
-          <p:cNvPr id="958480532" name="Espace réservé du pied de page 5"/>
+          <p:cNvPr id="454709391" name="Espace réservé du pied de page 5"/>
           <p:cNvSpPr>
             <a:spLocks noGrp="1"/>
           </p:cNvSpPr>
@@ -2323,7 +2323,7 @@
       </p:sp>
       <p:sp>
         <p:nvSpPr>
-          <p:cNvPr id="1492632577" name="Espace réservé du numéro de diapositive 6"/>
+          <p:cNvPr id="835859745" name="Espace réservé du numéro de diapositive 6"/>
           <p:cNvSpPr>
             <a:spLocks noGrp="1"/>
           </p:cNvSpPr>
@@ -2374,7 +2374,7 @@
       </p:grpSpPr>
       <p:sp>
         <p:nvSpPr>
-          <p:cNvPr id="1661619366" name="Titre 1"/>
+          <p:cNvPr id="1196606919" name="Titre 1"/>
           <p:cNvSpPr>
             <a:spLocks noGrp="1"/>
           </p:cNvSpPr>
@@ -2405,7 +2405,7 @@
       </p:sp>
       <p:sp>
         <p:nvSpPr>
-          <p:cNvPr id="358068196" name="Espace réservé du texte 2"/>
+          <p:cNvPr id="1921057878" name="Espace réservé du texte 2"/>
           <p:cNvSpPr>
             <a:spLocks noGrp="1"/>
           </p:cNvSpPr>
@@ -2473,7 +2473,7 @@
       </p:sp>
       <p:sp>
         <p:nvSpPr>
-          <p:cNvPr id="2006182969" name="Espace réservé du contenu 3"/>
+          <p:cNvPr id="132064156" name="Espace réservé du contenu 3"/>
           <p:cNvSpPr>
             <a:spLocks noGrp="1"/>
           </p:cNvSpPr>
@@ -2544,7 +2544,7 @@
       </p:sp>
       <p:sp>
         <p:nvSpPr>
-          <p:cNvPr id="1007762728" name="Espace réservé du texte 4"/>
+          <p:cNvPr id="609390530" name="Espace réservé du texte 4"/>
           <p:cNvSpPr>
             <a:spLocks noGrp="1"/>
           </p:cNvSpPr>
@@ -2612,7 +2612,7 @@
       </p:sp>
       <p:sp>
         <p:nvSpPr>
-          <p:cNvPr id="204160326" name="Espace réservé du contenu 5"/>
+          <p:cNvPr id="340396071" name="Espace réservé du contenu 5"/>
           <p:cNvSpPr>
             <a:spLocks noGrp="1"/>
           </p:cNvSpPr>
@@ -2683,7 +2683,7 @@
       </p:sp>
       <p:sp>
         <p:nvSpPr>
-          <p:cNvPr id="418523583" name="Espace réservé de la date 6"/>
+          <p:cNvPr id="508385240" name="Espace réservé de la date 6"/>
           <p:cNvSpPr>
             <a:spLocks noGrp="1"/>
           </p:cNvSpPr>
@@ -2709,7 +2709,7 @@
       </p:sp>
       <p:sp>
         <p:nvSpPr>
-          <p:cNvPr id="645677258" name="Espace réservé du pied de page 7"/>
+          <p:cNvPr id="1281965444" name="Espace réservé du pied de page 7"/>
           <p:cNvSpPr>
             <a:spLocks noGrp="1"/>
           </p:cNvSpPr>
@@ -2731,7 +2731,7 @@
       </p:sp>
       <p:sp>
         <p:nvSpPr>
-          <p:cNvPr id="1561800505" name="Espace réservé du numéro de diapositive 8"/>
+          <p:cNvPr id="436443957" name="Espace réservé du numéro de diapositive 8"/>
           <p:cNvSpPr>
             <a:spLocks noGrp="1"/>
           </p:cNvSpPr>
@@ -2782,7 +2782,7 @@
       </p:grpSpPr>
       <p:sp>
         <p:nvSpPr>
-          <p:cNvPr id="1142642314" name="Titre 1"/>
+          <p:cNvPr id="61652500" name="Titre 1"/>
           <p:cNvSpPr>
             <a:spLocks noGrp="1"/>
           </p:cNvSpPr>
@@ -2808,7 +2808,7 @@
       </p:sp>
       <p:sp>
         <p:nvSpPr>
-          <p:cNvPr id="1528534677" name="Espace réservé de la date 2"/>
+          <p:cNvPr id="333842678" name="Espace réservé de la date 2"/>
           <p:cNvSpPr>
             <a:spLocks noGrp="1"/>
           </p:cNvSpPr>
@@ -2834,7 +2834,7 @@
       </p:sp>
       <p:sp>
         <p:nvSpPr>
-          <p:cNvPr id="197094135" name="Espace réservé du pied de page 3"/>
+          <p:cNvPr id="20096233" name="Espace réservé du pied de page 3"/>
           <p:cNvSpPr>
             <a:spLocks noGrp="1"/>
           </p:cNvSpPr>
@@ -2856,7 +2856,7 @@
       </p:sp>
       <p:sp>
         <p:nvSpPr>
-          <p:cNvPr id="1206109690" name="Espace réservé du numéro de diapositive 4"/>
+          <p:cNvPr id="35788139" name="Espace réservé du numéro de diapositive 4"/>
           <p:cNvSpPr>
             <a:spLocks noGrp="1"/>
           </p:cNvSpPr>
@@ -2907,7 +2907,7 @@
       </p:grpSpPr>
       <p:sp>
         <p:nvSpPr>
-          <p:cNvPr id="1630564142" name="Espace réservé de la date 1"/>
+          <p:cNvPr id="670438681" name="Espace réservé de la date 1"/>
           <p:cNvSpPr>
             <a:spLocks noGrp="1"/>
           </p:cNvSpPr>
@@ -2933,7 +2933,7 @@
       </p:sp>
       <p:sp>
         <p:nvSpPr>
-          <p:cNvPr id="211839433" name="Espace réservé du pied de page 2"/>
+          <p:cNvPr id="383955478" name="Espace réservé du pied de page 2"/>
           <p:cNvSpPr>
             <a:spLocks noGrp="1"/>
           </p:cNvSpPr>
@@ -2955,7 +2955,7 @@
       </p:sp>
       <p:sp>
         <p:nvSpPr>
-          <p:cNvPr id="263869495" name="Espace réservé du numéro de diapositive 3"/>
+          <p:cNvPr id="953540517" name="Espace réservé du numéro de diapositive 3"/>
           <p:cNvSpPr>
             <a:spLocks noGrp="1"/>
           </p:cNvSpPr>
@@ -3006,7 +3006,7 @@
       </p:grpSpPr>
       <p:sp>
         <p:nvSpPr>
-          <p:cNvPr id="1201331477" name="Titre 1"/>
+          <p:cNvPr id="1258440417" name="Titre 1"/>
           <p:cNvSpPr>
             <a:spLocks noGrp="1"/>
           </p:cNvSpPr>
@@ -3041,7 +3041,7 @@
       </p:sp>
       <p:sp>
         <p:nvSpPr>
-          <p:cNvPr id="1196811967" name="Espace réservé du contenu 2"/>
+          <p:cNvPr id="1385909986" name="Espace réservé du contenu 2"/>
           <p:cNvSpPr>
             <a:spLocks noGrp="1"/>
           </p:cNvSpPr>
@@ -3140,7 +3140,7 @@
       </p:sp>
       <p:sp>
         <p:nvSpPr>
-          <p:cNvPr id="359288057" name="Espace réservé du texte 3"/>
+          <p:cNvPr id="355821592" name="Espace réservé du texte 3"/>
           <p:cNvSpPr>
             <a:spLocks noGrp="1"/>
           </p:cNvSpPr>
@@ -3208,7 +3208,7 @@
       </p:sp>
       <p:sp>
         <p:nvSpPr>
-          <p:cNvPr id="2139961260" name="Espace réservé de la date 4"/>
+          <p:cNvPr id="1207154889" name="Espace réservé de la date 4"/>
           <p:cNvSpPr>
             <a:spLocks noGrp="1"/>
           </p:cNvSpPr>
@@ -3234,7 +3234,7 @@
       </p:sp>
       <p:sp>
         <p:nvSpPr>
-          <p:cNvPr id="682609590" name="Espace réservé du pied de page 5"/>
+          <p:cNvPr id="306727308" name="Espace réservé du pied de page 5"/>
           <p:cNvSpPr>
             <a:spLocks noGrp="1"/>
           </p:cNvSpPr>
@@ -3256,7 +3256,7 @@
       </p:sp>
       <p:sp>
         <p:nvSpPr>
-          <p:cNvPr id="480997060" name="Espace réservé du numéro de diapositive 6"/>
+          <p:cNvPr id="1433843493" name="Espace réservé du numéro de diapositive 6"/>
           <p:cNvSpPr>
             <a:spLocks noGrp="1"/>
           </p:cNvSpPr>
@@ -3307,7 +3307,7 @@
       </p:grpSpPr>
       <p:sp>
         <p:nvSpPr>
-          <p:cNvPr id="325407828" name="Titre 1"/>
+          <p:cNvPr id="1747132969" name="Titre 1"/>
           <p:cNvSpPr>
             <a:spLocks noGrp="1"/>
           </p:cNvSpPr>
@@ -3342,7 +3342,7 @@
       </p:sp>
       <p:sp>
         <p:nvSpPr>
-          <p:cNvPr id="1570816001" name="Espace réservé pour une image 2"/>
+          <p:cNvPr id="777476953" name="Espace réservé pour une image 2"/>
           <p:cNvSpPr>
             <a:spLocks noChangeAspect="1" noGrp="1"/>
           </p:cNvSpPr>
@@ -3410,7 +3410,7 @@
       </p:sp>
       <p:sp>
         <p:nvSpPr>
-          <p:cNvPr id="1745651133" name="Espace réservé du texte 3"/>
+          <p:cNvPr id="1550312753" name="Espace réservé du texte 3"/>
           <p:cNvSpPr>
             <a:spLocks noGrp="1"/>
           </p:cNvSpPr>
@@ -3478,7 +3478,7 @@
       </p:sp>
       <p:sp>
         <p:nvSpPr>
-          <p:cNvPr id="1229654096" name="Espace réservé de la date 4"/>
+          <p:cNvPr id="242067377" name="Espace réservé de la date 4"/>
           <p:cNvSpPr>
             <a:spLocks noGrp="1"/>
           </p:cNvSpPr>
@@ -3504,7 +3504,7 @@
       </p:sp>
       <p:sp>
         <p:nvSpPr>
-          <p:cNvPr id="1523224916" name="Espace réservé du pied de page 5"/>
+          <p:cNvPr id="979421915" name="Espace réservé du pied de page 5"/>
           <p:cNvSpPr>
             <a:spLocks noGrp="1"/>
           </p:cNvSpPr>
@@ -3526,7 +3526,7 @@
       </p:sp>
       <p:sp>
         <p:nvSpPr>
-          <p:cNvPr id="745043059" name="Espace réservé du numéro de diapositive 6"/>
+          <p:cNvPr id="48652726" name="Espace réservé du numéro de diapositive 6"/>
           <p:cNvSpPr>
             <a:spLocks noGrp="1"/>
           </p:cNvSpPr>
@@ -3582,7 +3582,7 @@
       </p:grpSpPr>
       <p:sp>
         <p:nvSpPr>
-          <p:cNvPr id="815786878" name="Espace réservé du titre 1"/>
+          <p:cNvPr id="1214096516" name="Espace réservé du titre 1"/>
           <p:cNvSpPr>
             <a:spLocks noGrp="1"/>
           </p:cNvSpPr>
@@ -3618,7 +3618,7 @@
       </p:sp>
       <p:sp>
         <p:nvSpPr>
-          <p:cNvPr id="673205001" name="Espace réservé du texte 2"/>
+          <p:cNvPr id="1698048808" name="Espace réservé du texte 2"/>
           <p:cNvSpPr>
             <a:spLocks noGrp="1"/>
           </p:cNvSpPr>
@@ -3694,7 +3694,7 @@
       </p:sp>
       <p:sp>
         <p:nvSpPr>
-          <p:cNvPr id="387627483" name="Espace réservé de la date 3"/>
+          <p:cNvPr id="386160425" name="Espace réservé de la date 3"/>
           <p:cNvSpPr>
             <a:spLocks noGrp="1"/>
           </p:cNvSpPr>
@@ -3738,7 +3738,7 @@
       </p:sp>
       <p:sp>
         <p:nvSpPr>
-          <p:cNvPr id="615003185" name="Espace réservé du pied de page 4"/>
+          <p:cNvPr id="703870544" name="Espace réservé du pied de page 4"/>
           <p:cNvSpPr>
             <a:spLocks noGrp="1"/>
           </p:cNvSpPr>
@@ -3778,7 +3778,7 @@
       </p:sp>
       <p:sp>
         <p:nvSpPr>
-          <p:cNvPr id="1085444227" name="Espace réservé du numéro de diapositive 5"/>
+          <p:cNvPr id="54588734" name="Espace réservé du numéro de diapositive 5"/>
           <p:cNvSpPr>
             <a:spLocks noGrp="1"/>
           </p:cNvSpPr>
@@ -4138,7 +4138,7 @@
       </p:grpSpPr>
       <p:cxnSp>
         <p:nvCxnSpPr>
-          <p:cNvPr id="1011535862" name="Connecteur droit 1568760680"/>
+          <p:cNvPr id="1280841212" name="Connecteur droit 1568760680"/>
           <p:cNvCxnSpPr/>
           <p:nvPr/>
         </p:nvCxnSpPr>
@@ -4180,7 +4180,7 @@
       </p:cxnSp>
       <p:sp>
         <p:nvSpPr>
-          <p:cNvPr id="743910822" name="ZoneTexte 1868728971"/>
+          <p:cNvPr id="197060115" name="ZoneTexte 1868728971"/>
           <p:cNvSpPr txBox="1"/>
           <p:nvPr/>
         </p:nvSpPr>
@@ -4220,7 +4220,7 @@
       </p:sp>
       <p:cxnSp>
         <p:nvCxnSpPr>
-          <p:cNvPr id="1808263830" name="Connecteur droit 806540798"/>
+          <p:cNvPr id="1738148526" name="Connecteur droit 806540798"/>
           <p:cNvCxnSpPr/>
           <p:nvPr/>
         </p:nvCxnSpPr>
@@ -4262,14 +4262,14 @@
       </p:cxnSp>
       <p:sp>
         <p:nvSpPr>
-          <p:cNvPr id="78429684" name="ZoneTexte 406616703"/>
+          <p:cNvPr id="68094091" name="ZoneTexte 406616703"/>
           <p:cNvSpPr txBox="1"/>
           <p:nvPr/>
         </p:nvSpPr>
         <p:spPr bwMode="auto">
           <a:xfrm flipH="0" flipV="0">
-            <a:off x="45899" y="1927742"/>
-            <a:ext cx="3360980" cy="366118"/>
+            <a:off x="45898" y="1927741"/>
+            <a:ext cx="3361339" cy="366119"/>
           </a:xfrm>
           <a:prstGeom prst="rect">
             <a:avLst/>
@@ -4294,7 +4294,7 @@
                   </a:schemeClr>
                 </a:solidFill>
               </a:rPr>
-              <a:t>Compétences &amp; Spécialités</a:t>
+              <a:t>Compétences</a:t>
             </a:r>
             <a:endParaRPr/>
           </a:p>
@@ -4302,7 +4302,7 @@
       </p:sp>
       <p:cxnSp>
         <p:nvCxnSpPr>
-          <p:cNvPr id="725984429" name="Connecteur droit 858914340"/>
+          <p:cNvPr id="1830653404" name="Connecteur droit 858914340"/>
           <p:cNvCxnSpPr/>
           <p:nvPr/>
         </p:nvCxnSpPr>
@@ -4344,7 +4344,7 @@
       </p:cxnSp>
       <p:sp>
         <p:nvSpPr>
-          <p:cNvPr id="655687" name="ZoneTexte 2018177722"/>
+          <p:cNvPr id="1253305888" name="ZoneTexte 2018177722"/>
           <p:cNvSpPr txBox="1"/>
           <p:nvPr/>
         </p:nvSpPr>
@@ -4391,7 +4391,7 @@
       </p:sp>
       <p:sp>
         <p:nvSpPr>
-          <p:cNvPr id="1302065422" name="ZoneTexte 519900862"/>
+          <p:cNvPr id="2141627012" name="ZoneTexte 519900862"/>
           <p:cNvSpPr txBox="1"/>
           <p:nvPr/>
         </p:nvSpPr>
@@ -4653,13 +4653,13 @@
       </p:sp>
       <p:sp>
         <p:nvSpPr>
-          <p:cNvPr id="2077066419" name="Rectangle : avec coins arrondis en haut 838565229"/>
+          <p:cNvPr id="2011240572" name="Rectangle : avec coins arrondis en haut 838565229"/>
           <p:cNvSpPr/>
           <p:nvPr/>
         </p:nvSpPr>
         <p:spPr bwMode="auto">
           <a:xfrm rot="5399976">
-            <a:off x="5203791" y="6908636"/>
+            <a:off x="5203791" y="6908635"/>
             <a:ext cx="520473" cy="400050"/>
           </a:xfrm>
           <a:prstGeom prst="round2SameRect">
@@ -4699,7 +4699,7 @@
       </p:sp>
       <p:sp>
         <p:nvSpPr>
-          <p:cNvPr id="445672518" name="ZoneTexte 448541368"/>
+          <p:cNvPr id="680168620" name="ZoneTexte 448541368"/>
           <p:cNvSpPr txBox="1"/>
           <p:nvPr/>
         </p:nvSpPr>
@@ -4780,7 +4780,7 @@
       </p:sp>
       <p:sp>
         <p:nvSpPr>
-          <p:cNvPr id="79406005" name="Rectangle : avec coins arrondis en haut 1165584529"/>
+          <p:cNvPr id="1716630991" name="Rectangle : avec coins arrondis en haut 1165584529"/>
           <p:cNvSpPr/>
           <p:nvPr/>
         </p:nvSpPr>
@@ -4826,7 +4826,7 @@
       </p:sp>
       <p:sp>
         <p:nvSpPr>
-          <p:cNvPr id="626906343" name="Flèche : pentagone 1880610112"/>
+          <p:cNvPr id="1966389629" name="Flèche : pentagone 1880610112"/>
           <p:cNvSpPr/>
           <p:nvPr/>
         </p:nvSpPr>
@@ -4871,7 +4871,7 @@
       </p:sp>
       <p:sp>
         <p:nvSpPr>
-          <p:cNvPr id="54414047" name="Flèche : pentagone 446859139"/>
+          <p:cNvPr id="624760507" name="Flèche : pentagone 446859139"/>
           <p:cNvSpPr/>
           <p:nvPr/>
         </p:nvSpPr>
@@ -4916,13 +4916,13 @@
       </p:sp>
       <p:sp>
         <p:nvSpPr>
-          <p:cNvPr id="535286051" name="Flèche : pentagone 2055848356"/>
+          <p:cNvPr id="661384524" name="Flèche : pentagone 2055848356"/>
           <p:cNvSpPr/>
           <p:nvPr/>
         </p:nvSpPr>
         <p:spPr bwMode="auto">
           <a:xfrm flipH="0" flipV="0">
-            <a:off x="6100141" y="6961816"/>
+            <a:off x="6100140" y="6961816"/>
             <a:ext cx="143169" cy="140443"/>
           </a:xfrm>
           <a:prstGeom prst="homePlate">
@@ -4961,7 +4961,7 @@
       </p:sp>
       <p:sp>
         <p:nvSpPr>
-          <p:cNvPr id="1865730616" name="Flèche : pentagone 1980093981"/>
+          <p:cNvPr id="1211447821" name="Flèche : pentagone 1980093981"/>
           <p:cNvSpPr/>
           <p:nvPr/>
         </p:nvSpPr>
@@ -5006,7 +5006,7 @@
       </p:sp>
       <p:sp>
         <p:nvSpPr>
-          <p:cNvPr id="745685095" name="Flèche : pentagone 905284374"/>
+          <p:cNvPr id="1482528850" name="Flèche : pentagone 905284374"/>
           <p:cNvSpPr/>
           <p:nvPr/>
         </p:nvSpPr>
@@ -5051,7 +5051,7 @@
       </p:sp>
       <p:sp>
         <p:nvSpPr>
-          <p:cNvPr id="1902503090" name="ZoneTexte 880464430"/>
+          <p:cNvPr id="840293990" name="ZoneTexte 880464430"/>
           <p:cNvSpPr txBox="1"/>
           <p:nvPr/>
         </p:nvSpPr>
@@ -5257,7 +5257,7 @@
       </p:sp>
       <p:sp>
         <p:nvSpPr>
-          <p:cNvPr id="653181082" name="ZoneTexte 1302587497"/>
+          <p:cNvPr id="1320172143" name="ZoneTexte 1302587497"/>
           <p:cNvSpPr txBox="1"/>
           <p:nvPr/>
         </p:nvSpPr>
@@ -5555,7 +5555,7 @@
       </p:sp>
       <p:cxnSp>
         <p:nvCxnSpPr>
-          <p:cNvPr id="193026919" name="Connecteur droit 342798987"/>
+          <p:cNvPr id="1584756909" name="Connecteur droit 342798987"/>
           <p:cNvCxnSpPr/>
           <p:nvPr/>
         </p:nvCxnSpPr>
@@ -5597,7 +5597,7 @@
       </p:cxnSp>
       <p:sp>
         <p:nvSpPr>
-          <p:cNvPr id="460564154" name="ZoneTexte 966486802"/>
+          <p:cNvPr id="1024427056" name="ZoneTexte 966486802"/>
           <p:cNvSpPr txBox="1"/>
           <p:nvPr/>
         </p:nvSpPr>
@@ -5637,7 +5637,7 @@
       </p:sp>
       <p:sp>
         <p:nvSpPr>
-          <p:cNvPr id="571043282" name="Rectangle 38344096"/>
+          <p:cNvPr id="591156274" name="Rectangle 38344096"/>
           <p:cNvSpPr/>
           <p:nvPr/>
         </p:nvSpPr>
@@ -5677,7 +5677,7 @@
       </p:sp>
       <p:sp>
         <p:nvSpPr>
-          <p:cNvPr id="1923208512" name="Rectangle 954364527"/>
+          <p:cNvPr id="967203170" name="Rectangle 954364527"/>
           <p:cNvSpPr/>
           <p:nvPr/>
         </p:nvSpPr>
@@ -5717,7 +5717,7 @@
       </p:sp>
       <p:sp>
         <p:nvSpPr>
-          <p:cNvPr id="1886974297" name="ZoneTexte 1527388901"/>
+          <p:cNvPr id="1048528569" name="ZoneTexte 1527388901"/>
           <p:cNvSpPr txBox="1"/>
           <p:nvPr/>
         </p:nvSpPr>
@@ -5939,7 +5939,7 @@
       </p:sp>
       <p:sp>
         <p:nvSpPr>
-          <p:cNvPr id="1367163426" name="ZoneTexte 1440859034"/>
+          <p:cNvPr id="1857330745" name="ZoneTexte 1440859034"/>
           <p:cNvSpPr txBox="1"/>
           <p:nvPr/>
         </p:nvSpPr>
@@ -5990,7 +5990,7 @@
       </p:sp>
       <p:cxnSp>
         <p:nvCxnSpPr>
-          <p:cNvPr id="385179359" name="Connecteur droit 858914340"/>
+          <p:cNvPr id="1546390554" name="Connecteur droit 858914340"/>
           <p:cNvCxnSpPr/>
           <p:nvPr/>
         </p:nvCxnSpPr>
@@ -6032,7 +6032,7 @@
       </p:cxnSp>
       <p:sp>
         <p:nvSpPr>
-          <p:cNvPr id="396243764" name="ZoneTexte 2018177722"/>
+          <p:cNvPr id="1486591388" name="ZoneTexte 2018177722"/>
           <p:cNvSpPr txBox="1"/>
           <p:nvPr/>
         </p:nvSpPr>
@@ -6079,7 +6079,7 @@
       </p:sp>
       <p:sp>
         <p:nvSpPr>
-          <p:cNvPr id="1340444636" name=""/>
+          <p:cNvPr id="2072169120" name=""/>
           <p:cNvSpPr txBox="1"/>
           <p:nvPr/>
         </p:nvSpPr>
@@ -6181,13 +6181,13 @@
       </p:sp>
       <p:cxnSp>
         <p:nvCxnSpPr>
-          <p:cNvPr id="20696715" name="Connecteur droit 858914340"/>
+          <p:cNvPr id="807338718" name="Connecteur droit 858914340"/>
           <p:cNvCxnSpPr/>
           <p:nvPr/>
         </p:nvCxnSpPr>
         <p:spPr bwMode="auto">
           <a:xfrm flipH="0" flipV="1">
-            <a:off x="4547592" y="4985184"/>
+            <a:off x="4547592" y="4985183"/>
             <a:ext cx="2320902" cy="0"/>
           </a:xfrm>
           <a:prstGeom prst="line">
@@ -6223,14 +6223,14 @@
       </p:cxnSp>
       <p:sp>
         <p:nvSpPr>
-          <p:cNvPr id="2144023034" name="ZoneTexte 2018177722"/>
+          <p:cNvPr id="1062640820" name="ZoneTexte 2018177722"/>
           <p:cNvSpPr txBox="1"/>
           <p:nvPr/>
         </p:nvSpPr>
         <p:spPr bwMode="auto">
           <a:xfrm flipH="0" flipV="0">
-            <a:off x="4601547" y="4802122"/>
-            <a:ext cx="1831713" cy="366118"/>
+            <a:off x="4601547" y="4802121"/>
+            <a:ext cx="1832072" cy="366119"/>
           </a:xfrm>
           <a:prstGeom prst="rect">
             <a:avLst/>
@@ -6257,17 +6257,6 @@
               </a:rPr>
               <a:t>Tests</a:t>
             </a:r>
-            <a:r>
-              <a:rPr sz="1800" b="0">
-                <a:solidFill>
-                  <a:schemeClr val="tx1">
-                    <a:lumMod val="75000"/>
-                    <a:lumOff val="25000"/>
-                  </a:schemeClr>
-                </a:solidFill>
-              </a:rPr>
-              <a:t> &amp; d100</a:t>
-            </a:r>
             <a:endParaRPr sz="1800" b="0">
               <a:solidFill>
                 <a:schemeClr val="tx1">
@@ -6281,7 +6270,7 @@
       </p:sp>
       <p:sp>
         <p:nvSpPr>
-          <p:cNvPr id="1410526633" name=""/>
+          <p:cNvPr id="927141961" name=""/>
           <p:cNvSpPr txBox="1"/>
           <p:nvPr/>
         </p:nvSpPr>
@@ -6648,7 +6637,7 @@
       </p:sp>
       <p:sp>
         <p:nvSpPr>
-          <p:cNvPr id="1553755908" name="ZoneTexte 2021443538"/>
+          <p:cNvPr id="293310558" name="ZoneTexte 2021443538"/>
           <p:cNvSpPr txBox="1"/>
           <p:nvPr/>
         </p:nvSpPr>
@@ -6732,7 +6721,7 @@
       </p:sp>
       <p:sp>
         <p:nvSpPr>
-          <p:cNvPr id="1720971382" name="ZoneTexte 1075280509"/>
+          <p:cNvPr id="1961151151" name="ZoneTexte 1075280509"/>
           <p:cNvSpPr txBox="1"/>
           <p:nvPr/>
         </p:nvSpPr>
@@ -6816,7 +6805,7 @@
       </p:sp>
       <p:sp>
         <p:nvSpPr>
-          <p:cNvPr id="2096058637" name="ZoneTexte 824413856"/>
+          <p:cNvPr id="54148778" name="ZoneTexte 824413856"/>
           <p:cNvSpPr txBox="1"/>
           <p:nvPr/>
         </p:nvSpPr>
@@ -6900,7 +6889,7 @@
       </p:sp>
       <p:sp>
         <p:nvSpPr>
-          <p:cNvPr id="911996527" name="ZoneTexte 1036656844"/>
+          <p:cNvPr id="2001522090" name="ZoneTexte 1036656844"/>
           <p:cNvSpPr txBox="1"/>
           <p:nvPr/>
         </p:nvSpPr>
@@ -6984,7 +6973,7 @@
       </p:sp>
       <p:sp>
         <p:nvSpPr>
-          <p:cNvPr id="1833577436" name="ZoneTexte 226284734"/>
+          <p:cNvPr id="2024585880" name="ZoneTexte 226284734"/>
           <p:cNvSpPr txBox="1"/>
           <p:nvPr/>
         </p:nvSpPr>
@@ -7068,7 +7057,7 @@
       </p:sp>
       <p:sp>
         <p:nvSpPr>
-          <p:cNvPr id="1396047921" name="ZoneTexte 162158187"/>
+          <p:cNvPr id="1833410013" name="ZoneTexte 162158187"/>
           <p:cNvSpPr txBox="1"/>
           <p:nvPr/>
         </p:nvSpPr>
@@ -7132,7 +7121,7 @@
       </p:sp>
       <p:sp>
         <p:nvSpPr>
-          <p:cNvPr id="146040611" name="ZoneTexte 1063440096"/>
+          <p:cNvPr id="997751919" name="ZoneTexte 1063440096"/>
           <p:cNvSpPr txBox="1"/>
           <p:nvPr/>
         </p:nvSpPr>
@@ -7216,7 +7205,7 @@
       </p:sp>
       <p:sp>
         <p:nvSpPr>
-          <p:cNvPr id="216133220" name="ZoneTexte 1564072661"/>
+          <p:cNvPr id="217469452" name="ZoneTexte 1564072661"/>
           <p:cNvSpPr txBox="1"/>
           <p:nvPr/>
         </p:nvSpPr>
@@ -7300,7 +7289,7 @@
       </p:sp>
       <p:sp>
         <p:nvSpPr>
-          <p:cNvPr id="510122020" name="ZoneTexte 2102805411"/>
+          <p:cNvPr id="1474959775" name="ZoneTexte 2102805411"/>
           <p:cNvSpPr txBox="1"/>
           <p:nvPr/>
         </p:nvSpPr>
@@ -7384,7 +7373,7 @@
       </p:sp>
       <p:sp>
         <p:nvSpPr>
-          <p:cNvPr id="298112756" name="ZoneTexte 1094420572"/>
+          <p:cNvPr id="1973919884" name="ZoneTexte 1094420572"/>
           <p:cNvSpPr txBox="1"/>
           <p:nvPr/>
         </p:nvSpPr>
@@ -7468,7 +7457,7 @@
       </p:sp>
       <p:sp>
         <p:nvSpPr>
-          <p:cNvPr id="185828047" name="ZoneTexte 1337742717"/>
+          <p:cNvPr id="274090816" name="ZoneTexte 1337742717"/>
           <p:cNvSpPr txBox="1"/>
           <p:nvPr/>
         </p:nvSpPr>
@@ -7532,7 +7521,7 @@
       </p:sp>
       <p:sp>
         <p:nvSpPr>
-          <p:cNvPr id="1760089565" name="ZoneTexte 1188730172"/>
+          <p:cNvPr id="492548911" name="ZoneTexte 1188730172"/>
           <p:cNvSpPr txBox="1"/>
           <p:nvPr/>
         </p:nvSpPr>
@@ -7596,7 +7585,7 @@
       </p:sp>
       <p:sp>
         <p:nvSpPr>
-          <p:cNvPr id="754802527" name="Rectangle : avec coins arrondis en haut 1452601499"/>
+          <p:cNvPr id="1477762013" name="Rectangle : avec coins arrondis en haut 1452601499"/>
           <p:cNvSpPr/>
           <p:nvPr/>
         </p:nvSpPr>
@@ -7642,7 +7631,7 @@
       </p:sp>
       <p:sp>
         <p:nvSpPr>
-          <p:cNvPr id="1757666287" name="Rectangle : avec coins arrondis en haut 1782110635"/>
+          <p:cNvPr id="1849909548" name="Rectangle : avec coins arrondis en haut 1782110635"/>
           <p:cNvSpPr/>
           <p:nvPr/>
         </p:nvSpPr>
@@ -7688,7 +7677,7 @@
       </p:sp>
       <p:sp>
         <p:nvSpPr>
-          <p:cNvPr id="2102014763" name="Rectangle : avec coins arrondis en haut 945118596"/>
+          <p:cNvPr id="849252370" name="Rectangle : avec coins arrondis en haut 945118596"/>
           <p:cNvSpPr/>
           <p:nvPr/>
         </p:nvSpPr>
@@ -7734,7 +7723,7 @@
       </p:sp>
       <p:sp>
         <p:nvSpPr>
-          <p:cNvPr id="855610182" name="Rectangle : avec coins arrondis en haut 500951796"/>
+          <p:cNvPr id="90229905" name="Rectangle : avec coins arrondis en haut 500951796"/>
           <p:cNvSpPr/>
           <p:nvPr/>
         </p:nvSpPr>
@@ -7780,7 +7769,7 @@
       </p:sp>
       <p:sp>
         <p:nvSpPr>
-          <p:cNvPr id="136989505" name="Rectangle : avec coins arrondis en haut 203047490"/>
+          <p:cNvPr id="1309702819" name="Rectangle : avec coins arrondis en haut 203047490"/>
           <p:cNvSpPr/>
           <p:nvPr/>
         </p:nvSpPr>
@@ -7826,7 +7815,7 @@
       </p:sp>
       <p:sp>
         <p:nvSpPr>
-          <p:cNvPr id="1112041954" name="Rectangle : avec coins arrondis en haut 818083012"/>
+          <p:cNvPr id="1193298232" name="Rectangle : avec coins arrondis en haut 818083012"/>
           <p:cNvSpPr/>
           <p:nvPr/>
         </p:nvSpPr>
@@ -7872,7 +7861,7 @@
       </p:sp>
       <p:sp>
         <p:nvSpPr>
-          <p:cNvPr id="53887571" name="Rectangle : avec coins arrondis en haut 310539005"/>
+          <p:cNvPr id="1851470870" name="Rectangle : avec coins arrondis en haut 310539005"/>
           <p:cNvSpPr/>
           <p:nvPr/>
         </p:nvSpPr>
@@ -7918,7 +7907,7 @@
       </p:sp>
       <p:sp>
         <p:nvSpPr>
-          <p:cNvPr id="1551010333" name="Rectangle : avec coins arrondis en haut 844307487"/>
+          <p:cNvPr id="721365017" name="Rectangle : avec coins arrondis en haut 844307487"/>
           <p:cNvSpPr/>
           <p:nvPr/>
         </p:nvSpPr>
@@ -7964,7 +7953,7 @@
       </p:sp>
       <p:sp>
         <p:nvSpPr>
-          <p:cNvPr id="534466157" name="Rectangle : avec coins arrondis en haut 1616510051"/>
+          <p:cNvPr id="1947243144" name="Rectangle : avec coins arrondis en haut 1616510051"/>
           <p:cNvSpPr/>
           <p:nvPr/>
         </p:nvSpPr>
@@ -8010,7 +7999,7 @@
       </p:sp>
       <p:sp>
         <p:nvSpPr>
-          <p:cNvPr id="286711538" name="Rectangle : avec coins arrondis en haut 1451691637"/>
+          <p:cNvPr id="191079304" name="Rectangle : avec coins arrondis en haut 1451691637"/>
           <p:cNvSpPr/>
           <p:nvPr/>
         </p:nvSpPr>
@@ -8056,7 +8045,7 @@
       </p:sp>
       <p:sp>
         <p:nvSpPr>
-          <p:cNvPr id="1078155515" name="Rectangle : avec coins arrondis en haut 260383743"/>
+          <p:cNvPr id="380294715" name="Rectangle : avec coins arrondis en haut 260383743"/>
           <p:cNvSpPr/>
           <p:nvPr/>
         </p:nvSpPr>
@@ -8102,7 +8091,7 @@
       </p:sp>
       <p:sp>
         <p:nvSpPr>
-          <p:cNvPr id="1250594812" name="Rectangle : avec coins arrondis en haut 1280344391"/>
+          <p:cNvPr id="738265065" name="Rectangle : avec coins arrondis en haut 1280344391"/>
           <p:cNvSpPr/>
           <p:nvPr/>
         </p:nvSpPr>
@@ -8148,7 +8137,7 @@
       </p:sp>
       <p:sp>
         <p:nvSpPr>
-          <p:cNvPr id="1475985731" name=""/>
+          <p:cNvPr id="1392288806" name=""/>
           <p:cNvSpPr txBox="1"/>
           <p:nvPr/>
         </p:nvSpPr>
@@ -8272,7 +8261,7 @@
       </p:sp>
       <p:sp>
         <p:nvSpPr>
-          <p:cNvPr id="1618229276" name="ZoneTexte 1527388901"/>
+          <p:cNvPr id="258812061" name="ZoneTexte 1527388901"/>
           <p:cNvSpPr txBox="1"/>
           <p:nvPr/>
         </p:nvSpPr>
@@ -8432,7 +8421,7 @@
       </p:sp>
       <p:sp>
         <p:nvSpPr>
-          <p:cNvPr id="1410954801" name="Rectangle 38344096"/>
+          <p:cNvPr id="175313239" name="Rectangle 38344096"/>
           <p:cNvSpPr/>
           <p:nvPr/>
         </p:nvSpPr>
@@ -8472,7 +8461,7 @@
       </p:sp>
       <p:sp>
         <p:nvSpPr>
-          <p:cNvPr id="1761491966" name=""/>
+          <p:cNvPr id="1430895982" name=""/>
           <p:cNvSpPr/>
           <p:nvPr/>
         </p:nvSpPr>
@@ -8543,7 +8532,7 @@
       </p:sp>
       <p:sp>
         <p:nvSpPr>
-          <p:cNvPr id="1546415770" name="Flèche : pentagone 2055848356"/>
+          <p:cNvPr id="253419862" name="Flèche : pentagone 2055848356"/>
           <p:cNvSpPr/>
           <p:nvPr/>
         </p:nvSpPr>
@@ -8588,7 +8577,7 @@
       </p:sp>
       <p:sp>
         <p:nvSpPr>
-          <p:cNvPr id="532725278" name="Flèche : pentagone 1980093981"/>
+          <p:cNvPr id="2043796407" name="Flèche : pentagone 1980093981"/>
           <p:cNvSpPr/>
           <p:nvPr/>
         </p:nvSpPr>
@@ -8633,7 +8622,7 @@
       </p:sp>
       <p:sp>
         <p:nvSpPr>
-          <p:cNvPr id="1518242702" name="Flèche : pentagone 905284374"/>
+          <p:cNvPr id="712230488" name="Flèche : pentagone 905284374"/>
           <p:cNvSpPr/>
           <p:nvPr/>
         </p:nvSpPr>
@@ -8678,7 +8667,7 @@
       </p:sp>
       <p:sp>
         <p:nvSpPr>
-          <p:cNvPr id="2113391228" name="ZoneTexte 1440859034"/>
+          <p:cNvPr id="628807340" name="ZoneTexte 1440859034"/>
           <p:cNvSpPr txBox="1"/>
           <p:nvPr/>
         </p:nvSpPr>
@@ -8717,7 +8706,7 @@
       </p:sp>
       <p:sp>
         <p:nvSpPr>
-          <p:cNvPr id="457022198" name="Flèche : pentagone 1880610112"/>
+          <p:cNvPr id="321920377" name="Flèche : pentagone 1880610112"/>
           <p:cNvSpPr/>
           <p:nvPr/>
         </p:nvSpPr>
@@ -8762,7 +8751,7 @@
       </p:sp>
       <p:sp>
         <p:nvSpPr>
-          <p:cNvPr id="1718118954" name="Flèche : pentagone 446859139"/>
+          <p:cNvPr id="1976738379" name="Flèche : pentagone 446859139"/>
           <p:cNvSpPr/>
           <p:nvPr/>
         </p:nvSpPr>
@@ -8807,13 +8796,13 @@
       </p:sp>
       <p:sp>
         <p:nvSpPr>
-          <p:cNvPr id="75247757" name="Flèche : pentagone 2055848356"/>
+          <p:cNvPr id="2145038917" name="Flèche : pentagone 2055848356"/>
           <p:cNvSpPr/>
           <p:nvPr/>
         </p:nvSpPr>
         <p:spPr bwMode="auto">
           <a:xfrm flipH="0" flipV="0">
-            <a:off x="6100141" y="7594707"/>
+            <a:off x="6100140" y="7594707"/>
             <a:ext cx="143168" cy="140442"/>
           </a:xfrm>
           <a:prstGeom prst="homePlate">
@@ -8852,7 +8841,7 @@
       </p:sp>
       <p:sp>
         <p:nvSpPr>
-          <p:cNvPr id="757857986" name="Flèche : pentagone 1980093981"/>
+          <p:cNvPr id="1410733745" name="Flèche : pentagone 1980093981"/>
           <p:cNvSpPr/>
           <p:nvPr/>
         </p:nvSpPr>
@@ -8897,7 +8886,7 @@
       </p:sp>
       <p:sp>
         <p:nvSpPr>
-          <p:cNvPr id="886986814" name="Flèche : pentagone 905284374"/>
+          <p:cNvPr id="359990016" name="Flèche : pentagone 905284374"/>
           <p:cNvSpPr/>
           <p:nvPr/>
         </p:nvSpPr>
@@ -8942,7 +8931,7 @@
       </p:sp>
       <p:sp>
         <p:nvSpPr>
-          <p:cNvPr id="1370522460" name="ZoneTexte 1440859034"/>
+          <p:cNvPr id="2030007707" name="ZoneTexte 1440859034"/>
           <p:cNvSpPr txBox="1"/>
           <p:nvPr/>
         </p:nvSpPr>
@@ -8981,7 +8970,7 @@
       </p:sp>
       <p:sp>
         <p:nvSpPr>
-          <p:cNvPr id="922889750" name="Flèche : pentagone 2055848356"/>
+          <p:cNvPr id="367904861" name="Flèche : pentagone 2055848356"/>
           <p:cNvSpPr/>
           <p:nvPr/>
         </p:nvSpPr>
@@ -9026,7 +9015,7 @@
       </p:sp>
       <p:sp>
         <p:nvSpPr>
-          <p:cNvPr id="468910065" name="Flèche : pentagone 1980093981"/>
+          <p:cNvPr id="72364448" name="Flèche : pentagone 1980093981"/>
           <p:cNvSpPr/>
           <p:nvPr/>
         </p:nvSpPr>
@@ -9071,7 +9060,7 @@
       </p:sp>
       <p:sp>
         <p:nvSpPr>
-          <p:cNvPr id="441293241" name="Flèche : pentagone 905284374"/>
+          <p:cNvPr id="2086853794" name="Flèche : pentagone 905284374"/>
           <p:cNvSpPr/>
           <p:nvPr/>
         </p:nvSpPr>
@@ -9116,7 +9105,7 @@
       </p:sp>
       <p:sp>
         <p:nvSpPr>
-          <p:cNvPr id="270225134" name="ZoneTexte 1440859034"/>
+          <p:cNvPr id="2089832259" name="ZoneTexte 1440859034"/>
           <p:cNvSpPr txBox="1"/>
           <p:nvPr/>
         </p:nvSpPr>
@@ -9152,6 +9141,46 @@
             <a:endParaRPr sz="1600"/>
           </a:p>
         </p:txBody>
+      </p:sp>
+      <p:sp>
+        <p:nvSpPr>
+          <p:cNvPr id="1302796067" name="Rectangle 38344096"/>
+          <p:cNvSpPr/>
+          <p:nvPr/>
+        </p:nvSpPr>
+        <p:spPr bwMode="auto">
+          <a:xfrm flipH="0" flipV="0">
+            <a:off x="6675827" y="9233954"/>
+            <a:ext cx="152697" cy="651515"/>
+          </a:xfrm>
+          <a:prstGeom prst="rect">
+            <a:avLst/>
+          </a:prstGeom>
+          <a:solidFill>
+            <a:schemeClr val="bg1"/>
+          </a:solidFill>
+          <a:ln w="12700" cap="flat" cmpd="sng" algn="ctr">
+            <a:noFill/>
+            <a:prstDash val="solid"/>
+            <a:miter lim="800000"/>
+          </a:ln>
+        </p:spPr>
+        <p:style>
+          <a:lnRef idx="2">
+            <a:schemeClr val="accent1">
+              <a:shade val="50000"/>
+            </a:schemeClr>
+          </a:lnRef>
+          <a:fillRef idx="1">
+            <a:schemeClr val="accent1"/>
+          </a:fillRef>
+          <a:effectRef idx="0">
+            <a:schemeClr val="accent1"/>
+          </a:effectRef>
+          <a:fontRef idx="minor">
+            <a:schemeClr val="lt1"/>
+          </a:fontRef>
+        </p:style>
       </p:sp>
     </p:spTree>
   </p:cSld>
@@ -9188,7 +9217,7 @@
       </p:grpSpPr>
       <p:sp>
         <p:nvSpPr>
-          <p:cNvPr id="342584325" name=""/>
+          <p:cNvPr id="144852147" name=""/>
           <p:cNvSpPr/>
           <p:nvPr/>
         </p:nvSpPr>
@@ -9231,7 +9260,7 @@
       </p:sp>
       <p:sp>
         <p:nvSpPr>
-          <p:cNvPr id="1667762641" name=""/>
+          <p:cNvPr id="1396314165" name=""/>
           <p:cNvSpPr txBox="1"/>
           <p:nvPr/>
         </p:nvSpPr>
@@ -9297,7 +9326,7 @@
       </p:sp>
       <p:cxnSp>
         <p:nvCxnSpPr>
-          <p:cNvPr id="1701554271" name="Connecteur droit 1568760680"/>
+          <p:cNvPr id="1978065127" name="Connecteur droit 1568760680"/>
           <p:cNvCxnSpPr/>
           <p:nvPr/>
         </p:nvCxnSpPr>
@@ -9339,7 +9368,7 @@
       </p:cxnSp>
       <p:sp>
         <p:nvSpPr>
-          <p:cNvPr id="1753106823" name="ZoneTexte 1868728971"/>
+          <p:cNvPr id="380149908" name="ZoneTexte 1868728971"/>
           <p:cNvSpPr txBox="1"/>
           <p:nvPr/>
         </p:nvSpPr>
@@ -9379,7 +9408,7 @@
       </p:sp>
       <p:cxnSp>
         <p:nvCxnSpPr>
-          <p:cNvPr id="1874895995" name="Connecteur droit 806540798"/>
+          <p:cNvPr id="1288229739" name="Connecteur droit 806540798"/>
           <p:cNvCxnSpPr/>
           <p:nvPr/>
         </p:nvCxnSpPr>
@@ -9421,7 +9450,7 @@
       </p:cxnSp>
       <p:sp>
         <p:nvSpPr>
-          <p:cNvPr id="1925409996" name="ZoneTexte 406616703"/>
+          <p:cNvPr id="808110890" name="ZoneTexte 406616703"/>
           <p:cNvSpPr txBox="1"/>
           <p:nvPr/>
         </p:nvSpPr>
@@ -9461,7 +9490,7 @@
       </p:sp>
       <p:sp>
         <p:nvSpPr>
-          <p:cNvPr id="1432542250" name="ZoneTexte 1302587497"/>
+          <p:cNvPr id="1031077726" name="ZoneTexte 1302587497"/>
           <p:cNvSpPr txBox="1"/>
           <p:nvPr/>
         </p:nvSpPr>
@@ -9665,7 +9694,7 @@
       </p:sp>
       <p:sp>
         <p:nvSpPr>
-          <p:cNvPr id="984545829" name="Rectangle 38344096"/>
+          <p:cNvPr id="1832265311" name="Rectangle 38344096"/>
           <p:cNvSpPr/>
           <p:nvPr/>
         </p:nvSpPr>
@@ -9705,13 +9734,13 @@
       </p:sp>
       <p:sp>
         <p:nvSpPr>
-          <p:cNvPr id="1598178677" name="ZoneTexte 1075280509"/>
+          <p:cNvPr id="836937717" name="ZoneTexte 1075280509"/>
           <p:cNvSpPr txBox="1"/>
           <p:nvPr/>
         </p:nvSpPr>
         <p:spPr bwMode="auto">
           <a:xfrm flipH="0" flipV="0">
-            <a:off x="4185477" y="1736767"/>
+            <a:off x="4153726" y="1736766"/>
             <a:ext cx="1734955" cy="640440"/>
           </a:xfrm>
           <a:prstGeom prst="rect">
@@ -9778,13 +9807,13 @@
       </p:sp>
       <p:sp>
         <p:nvSpPr>
-          <p:cNvPr id="2007586354" name="ZoneTexte 226284734"/>
+          <p:cNvPr id="1408885209" name="ZoneTexte 226284734"/>
           <p:cNvSpPr txBox="1"/>
           <p:nvPr/>
         </p:nvSpPr>
         <p:spPr bwMode="auto">
           <a:xfrm flipH="0" flipV="0">
-            <a:off x="4186557" y="1100317"/>
+            <a:off x="4154806" y="1100316"/>
             <a:ext cx="1733876" cy="640440"/>
           </a:xfrm>
           <a:prstGeom prst="rect">
@@ -9851,13 +9880,13 @@
       </p:sp>
       <p:sp>
         <p:nvSpPr>
-          <p:cNvPr id="992153186" name="ZoneTexte 162158187"/>
+          <p:cNvPr id="1064598394" name="ZoneTexte 162158187"/>
           <p:cNvSpPr txBox="1"/>
           <p:nvPr/>
         </p:nvSpPr>
         <p:spPr bwMode="auto">
           <a:xfrm flipH="0" flipV="0">
-            <a:off x="4186557" y="457561"/>
+            <a:off x="4154806" y="457560"/>
             <a:ext cx="1734596" cy="640440"/>
           </a:xfrm>
           <a:prstGeom prst="rect">
@@ -9901,13 +9930,13 @@
       </p:sp>
       <p:sp>
         <p:nvSpPr>
-          <p:cNvPr id="117519585" name="Rectangle : avec coins arrondis en haut 1452601499"/>
+          <p:cNvPr id="1744323087" name="Rectangle : avec coins arrondis en haut 1452601499"/>
           <p:cNvSpPr/>
           <p:nvPr/>
         </p:nvSpPr>
         <p:spPr bwMode="auto">
           <a:xfrm rot="5399976">
-            <a:off x="5865210" y="586717"/>
+            <a:off x="5824473" y="586715"/>
             <a:ext cx="522739" cy="400050"/>
           </a:xfrm>
           <a:prstGeom prst="round2SameRect">
@@ -9944,13 +9973,13 @@
       </p:sp>
       <p:sp>
         <p:nvSpPr>
-          <p:cNvPr id="919757012" name="Rectangle : avec coins arrondis en haut 1782110635"/>
+          <p:cNvPr id="506767324" name="Rectangle : avec coins arrondis en haut 1782110635"/>
           <p:cNvSpPr/>
           <p:nvPr/>
         </p:nvSpPr>
         <p:spPr bwMode="auto">
           <a:xfrm rot="5399976" flipH="0" flipV="0">
-            <a:off x="5866343" y="1226026"/>
+            <a:off x="5825606" y="1226025"/>
             <a:ext cx="520473" cy="400050"/>
           </a:xfrm>
           <a:prstGeom prst="round2SameRect">
@@ -9990,13 +10019,13 @@
       </p:sp>
       <p:sp>
         <p:nvSpPr>
-          <p:cNvPr id="86947435" name="Rectangle : avec coins arrondis en haut 945118596"/>
+          <p:cNvPr id="292276443" name="Rectangle : avec coins arrondis en haut 945118596"/>
           <p:cNvSpPr/>
           <p:nvPr/>
         </p:nvSpPr>
         <p:spPr bwMode="auto">
           <a:xfrm rot="5399976">
-            <a:off x="5866344" y="1858636"/>
+            <a:off x="5825607" y="1858634"/>
             <a:ext cx="520473" cy="400050"/>
           </a:xfrm>
           <a:prstGeom prst="round2SameRect">
@@ -10036,13 +10065,13 @@
       </p:sp>
       <p:sp>
         <p:nvSpPr>
-          <p:cNvPr id="569631684" name=""/>
+          <p:cNvPr id="1549811876" name=""/>
           <p:cNvSpPr/>
           <p:nvPr/>
         </p:nvSpPr>
         <p:spPr bwMode="auto">
           <a:xfrm rot="5400000" flipH="0" flipV="0">
-            <a:off x="6393412" y="549085"/>
+            <a:off x="6402397" y="549084"/>
             <a:ext cx="389406" cy="370519"/>
           </a:xfrm>
           <a:prstGeom prst="flowChartDisplay">
@@ -10078,14 +10107,14 @@
       </p:sp>
       <p:sp>
         <p:nvSpPr>
-          <p:cNvPr id="785821794" name=""/>
+          <p:cNvPr id="1475599985" name=""/>
           <p:cNvSpPr txBox="1"/>
           <p:nvPr/>
         </p:nvSpPr>
         <p:spPr bwMode="auto">
           <a:xfrm rot="0" flipH="0" flipV="0">
-            <a:off x="6328407" y="877104"/>
-            <a:ext cx="536377" cy="244199"/>
+            <a:off x="6220933" y="884979"/>
+            <a:ext cx="652401" cy="853799"/>
           </a:xfrm>
           <a:prstGeom prst="rect">
             <a:avLst/>
@@ -10097,7 +10126,7 @@
             <a:spAutoFit/>
           </a:bodyPr>
           <a:p>
-            <a:pPr>
+            <a:pPr algn="r">
               <a:defRPr/>
             </a:pPr>
             <a:r>
@@ -10108,7 +10137,82 @@
               </a:rPr>
               <a:t>NOTE</a:t>
             </a:r>
-            <a:endParaRPr>
+            <a:br>
+              <a:rPr sz="1000">
+                <a:solidFill>
+                  <a:srgbClr val="7F7F7F"/>
+                </a:solidFill>
+              </a:rPr>
+            </a:br>
+            <a:r>
+              <a:rPr sz="800">
+                <a:solidFill>
+                  <a:srgbClr val="7F7F7F"/>
+                </a:solidFill>
+              </a:rPr>
+              <a:t>70-100 : A</a:t>
+            </a:r>
+            <a:br>
+              <a:rPr sz="800">
+                <a:solidFill>
+                  <a:srgbClr val="7F7F7F"/>
+                </a:solidFill>
+              </a:rPr>
+            </a:br>
+            <a:r>
+              <a:rPr sz="800">
+                <a:solidFill>
+                  <a:srgbClr val="7F7F7F"/>
+                </a:solidFill>
+              </a:rPr>
+              <a:t>55-69 : B</a:t>
+            </a:r>
+            <a:br>
+              <a:rPr sz="800">
+                <a:solidFill>
+                  <a:srgbClr val="7F7F7F"/>
+                </a:solidFill>
+              </a:rPr>
+            </a:br>
+            <a:r>
+              <a:rPr sz="800">
+                <a:solidFill>
+                  <a:srgbClr val="7F7F7F"/>
+                </a:solidFill>
+              </a:rPr>
+              <a:t>40-54 : C</a:t>
+            </a:r>
+            <a:br>
+              <a:rPr sz="800">
+                <a:solidFill>
+                  <a:srgbClr val="7F7F7F"/>
+                </a:solidFill>
+              </a:rPr>
+            </a:br>
+            <a:r>
+              <a:rPr sz="800">
+                <a:solidFill>
+                  <a:srgbClr val="7F7F7F"/>
+                </a:solidFill>
+              </a:rPr>
+              <a:t>25-39 : D</a:t>
+            </a:r>
+            <a:br>
+              <a:rPr sz="800">
+                <a:solidFill>
+                  <a:srgbClr val="7F7F7F"/>
+                </a:solidFill>
+              </a:rPr>
+            </a:br>
+            <a:r>
+              <a:rPr sz="800">
+                <a:solidFill>
+                  <a:srgbClr val="7F7F7F"/>
+                </a:solidFill>
+              </a:rPr>
+              <a:t>01-24 : F</a:t>
+            </a:r>
+            <a:endParaRPr sz="1400">
               <a:solidFill>
                 <a:srgbClr val="939393"/>
               </a:solidFill>
@@ -10118,7 +10222,7 @@
       </p:sp>
       <p:sp>
         <p:nvSpPr>
-          <p:cNvPr id="1269411888" name=""/>
+          <p:cNvPr id="1876984882" name=""/>
           <p:cNvSpPr/>
           <p:nvPr/>
         </p:nvSpPr>
@@ -10189,7 +10293,7 @@
       </p:sp>
       <p:sp>
         <p:nvSpPr>
-          <p:cNvPr id="1918023211" name=""/>
+          <p:cNvPr id="1861127766" name=""/>
           <p:cNvSpPr txBox="1"/>
           <p:nvPr/>
         </p:nvSpPr>
@@ -10226,7 +10330,7 @@
       </p:sp>
       <p:sp>
         <p:nvSpPr>
-          <p:cNvPr id="1874579217" name=""/>
+          <p:cNvPr id="1868496659" name=""/>
           <p:cNvSpPr txBox="1"/>
           <p:nvPr/>
         </p:nvSpPr>
@@ -10460,7 +10564,7 @@
       </p:sp>
       <p:sp>
         <p:nvSpPr>
-          <p:cNvPr id="517276006" name=""/>
+          <p:cNvPr id="1618704012" name=""/>
           <p:cNvSpPr txBox="1"/>
           <p:nvPr/>
         </p:nvSpPr>
@@ -10739,7 +10843,7 @@
       </p:sp>
       <p:sp>
         <p:nvSpPr>
-          <p:cNvPr id="1708288660" name=""/>
+          <p:cNvPr id="1245346023" name=""/>
           <p:cNvSpPr txBox="1"/>
           <p:nvPr/>
         </p:nvSpPr>
@@ -11130,7 +11234,7 @@
       </p:sp>
       <p:sp>
         <p:nvSpPr>
-          <p:cNvPr id="526166082" name=""/>
+          <p:cNvPr id="202644404" name=""/>
           <p:cNvSpPr txBox="1"/>
           <p:nvPr/>
         </p:nvSpPr>
@@ -11521,7 +11625,7 @@
       </p:sp>
       <p:sp>
         <p:nvSpPr>
-          <p:cNvPr id="1777298565" name=""/>
+          <p:cNvPr id="553374235" name=""/>
           <p:cNvSpPr txBox="1"/>
           <p:nvPr/>
         </p:nvSpPr>
@@ -11912,7 +12016,7 @@
       </p:sp>
       <p:sp>
         <p:nvSpPr>
-          <p:cNvPr id="1150680621" name=""/>
+          <p:cNvPr id="2010696372" name=""/>
           <p:cNvSpPr txBox="1"/>
           <p:nvPr/>
         </p:nvSpPr>
@@ -12303,7 +12407,7 @@
       </p:sp>
       <p:sp>
         <p:nvSpPr>
-          <p:cNvPr id="90600726" name=""/>
+          <p:cNvPr id="805807892" name=""/>
           <p:cNvSpPr txBox="1"/>
           <p:nvPr/>
         </p:nvSpPr>
@@ -12694,7 +12798,7 @@
       </p:sp>
       <p:sp>
         <p:nvSpPr>
-          <p:cNvPr id="1874014360" name=""/>
+          <p:cNvPr id="1118075163" name=""/>
           <p:cNvSpPr txBox="1"/>
           <p:nvPr/>
         </p:nvSpPr>
@@ -13085,7 +13189,7 @@
       </p:sp>
       <p:sp>
         <p:nvSpPr>
-          <p:cNvPr id="762184310" name=""/>
+          <p:cNvPr id="1400964987" name=""/>
           <p:cNvSpPr txBox="1"/>
           <p:nvPr/>
         </p:nvSpPr>
@@ -13476,7 +13580,7 @@
       </p:sp>
       <p:sp>
         <p:nvSpPr>
-          <p:cNvPr id="1105098064" name=""/>
+          <p:cNvPr id="1215093435" name=""/>
           <p:cNvSpPr txBox="1"/>
           <p:nvPr/>
         </p:nvSpPr>
@@ -13867,7 +13971,7 @@
       </p:sp>
       <p:sp>
         <p:nvSpPr>
-          <p:cNvPr id="1923716044" name=""/>
+          <p:cNvPr id="2117708551" name=""/>
           <p:cNvSpPr txBox="1"/>
           <p:nvPr/>
         </p:nvSpPr>
@@ -14258,7 +14362,7 @@
       </p:sp>
       <p:sp>
         <p:nvSpPr>
-          <p:cNvPr id="925140641" name=""/>
+          <p:cNvPr id="1421267288" name=""/>
           <p:cNvSpPr txBox="1"/>
           <p:nvPr/>
         </p:nvSpPr>
@@ -14649,7 +14753,7 @@
       </p:sp>
       <p:sp>
         <p:nvSpPr>
-          <p:cNvPr id="1414487026" name=""/>
+          <p:cNvPr id="503479870" name=""/>
           <p:cNvSpPr txBox="1"/>
           <p:nvPr/>
         </p:nvSpPr>
@@ -15040,7 +15144,7 @@
       </p:sp>
       <p:sp>
         <p:nvSpPr>
-          <p:cNvPr id="373578126" name=""/>
+          <p:cNvPr id="505188425" name=""/>
           <p:cNvSpPr txBox="1"/>
           <p:nvPr/>
         </p:nvSpPr>
@@ -15431,7 +15535,7 @@
       </p:sp>
       <p:sp>
         <p:nvSpPr>
-          <p:cNvPr id="1131354221" name=""/>
+          <p:cNvPr id="225683675" name=""/>
           <p:cNvSpPr txBox="1"/>
           <p:nvPr/>
         </p:nvSpPr>
@@ -15822,7 +15926,7 @@
       </p:sp>
       <p:sp>
         <p:nvSpPr>
-          <p:cNvPr id="1167344577" name=""/>
+          <p:cNvPr id="1500900397" name=""/>
           <p:cNvSpPr txBox="1"/>
           <p:nvPr/>
         </p:nvSpPr>
@@ -16213,7 +16317,7 @@
       </p:sp>
       <p:sp>
         <p:nvSpPr>
-          <p:cNvPr id="1814871297" name=""/>
+          <p:cNvPr id="729716787" name=""/>
           <p:cNvSpPr txBox="1"/>
           <p:nvPr/>
         </p:nvSpPr>
@@ -16421,7 +16525,7 @@
       </p:sp>
       <p:cxnSp>
         <p:nvCxnSpPr>
-          <p:cNvPr id="210417914" name="Connecteur droit 806540798"/>
+          <p:cNvPr id="792825506" name="Connecteur droit 806540798"/>
           <p:cNvCxnSpPr/>
           <p:nvPr/>
         </p:nvCxnSpPr>
@@ -16463,7 +16567,7 @@
       </p:cxnSp>
       <p:sp>
         <p:nvSpPr>
-          <p:cNvPr id="64960315" name="ZoneTexte 406616703"/>
+          <p:cNvPr id="59716188" name="ZoneTexte 406616703"/>
           <p:cNvSpPr txBox="1"/>
           <p:nvPr/>
         </p:nvSpPr>
@@ -16503,7 +16607,7 @@
       </p:sp>
       <p:sp>
         <p:nvSpPr>
-          <p:cNvPr id="465978417" name="ZoneTexte 1302587497"/>
+          <p:cNvPr id="940976814" name="ZoneTexte 1302587497"/>
           <p:cNvSpPr txBox="1"/>
           <p:nvPr/>
         </p:nvSpPr>
@@ -16707,7 +16811,7 @@
       </p:sp>
       <p:sp>
         <p:nvSpPr>
-          <p:cNvPr id="999805971" name="Rectangle 38344096"/>
+          <p:cNvPr id="225034591" name="Rectangle 38344096"/>
           <p:cNvSpPr/>
           <p:nvPr/>
         </p:nvSpPr>
@@ -16780,7 +16884,7 @@
       </p:grpSpPr>
       <p:cxnSp>
         <p:nvCxnSpPr>
-          <p:cNvPr id="244361793" name="Connecteur droit 266926011"/>
+          <p:cNvPr id="1687003998" name="Connecteur droit 266926011"/>
           <p:cNvCxnSpPr/>
           <p:nvPr/>
         </p:nvCxnSpPr>
@@ -16822,7 +16926,7 @@
       </p:cxnSp>
       <p:sp>
         <p:nvSpPr>
-          <p:cNvPr id="1213423260" name="ZoneTexte 1043763612"/>
+          <p:cNvPr id="2135316110" name="ZoneTexte 1043763612"/>
           <p:cNvSpPr txBox="1"/>
           <p:nvPr/>
         </p:nvSpPr>
@@ -16862,7 +16966,7 @@
       </p:sp>
       <p:cxnSp>
         <p:nvCxnSpPr>
-          <p:cNvPr id="1401344536" name="Connecteur droit 1586327141"/>
+          <p:cNvPr id="1777229489" name="Connecteur droit 1586327141"/>
           <p:cNvCxnSpPr/>
           <p:nvPr/>
         </p:nvCxnSpPr>
@@ -16905,7 +17009,7 @@
       </p:cxnSp>
       <p:sp>
         <p:nvSpPr>
-          <p:cNvPr id="1745400006" name="ZoneTexte 1691387439"/>
+          <p:cNvPr id="763254461" name="ZoneTexte 1691387439"/>
           <p:cNvSpPr txBox="1"/>
           <p:nvPr/>
         </p:nvSpPr>
@@ -16945,7 +17049,7 @@
       </p:sp>
       <p:cxnSp>
         <p:nvCxnSpPr>
-          <p:cNvPr id="2006797067" name="Connecteur droit 1743707585"/>
+          <p:cNvPr id="1354272902" name="Connecteur droit 1743707585"/>
           <p:cNvCxnSpPr/>
           <p:nvPr/>
         </p:nvCxnSpPr>
@@ -16988,7 +17092,7 @@
       </p:cxnSp>
       <p:sp>
         <p:nvSpPr>
-          <p:cNvPr id="243615291" name="ZoneTexte 1503300725"/>
+          <p:cNvPr id="1037530075" name="ZoneTexte 1503300725"/>
           <p:cNvSpPr txBox="1"/>
           <p:nvPr/>
         </p:nvSpPr>
@@ -17070,7 +17174,7 @@
       </p:sp>
       <p:sp>
         <p:nvSpPr>
-          <p:cNvPr id="161109575" name="Rectangle : avec coins arrondis en haut 1151560973"/>
+          <p:cNvPr id="1827205338" name="Rectangle : avec coins arrondis en haut 1151560973"/>
           <p:cNvSpPr/>
           <p:nvPr/>
         </p:nvSpPr>
@@ -17116,7 +17220,7 @@
       </p:sp>
       <p:sp>
         <p:nvSpPr>
-          <p:cNvPr id="435526717" name="Flèche : pentagone 1610574377"/>
+          <p:cNvPr id="150384524" name="Flèche : pentagone 1610574377"/>
           <p:cNvSpPr/>
           <p:nvPr/>
         </p:nvSpPr>
@@ -17161,7 +17265,7 @@
       </p:sp>
       <p:sp>
         <p:nvSpPr>
-          <p:cNvPr id="1583454270" name="Flèche : pentagone 463861063"/>
+          <p:cNvPr id="976365052" name="Flèche : pentagone 463861063"/>
           <p:cNvSpPr/>
           <p:nvPr/>
         </p:nvSpPr>
@@ -17206,7 +17310,7 @@
       </p:sp>
       <p:sp>
         <p:nvSpPr>
-          <p:cNvPr id="347597543" name="Flèche : pentagone 272004907"/>
+          <p:cNvPr id="304393537" name="Flèche : pentagone 272004907"/>
           <p:cNvSpPr/>
           <p:nvPr/>
         </p:nvSpPr>
@@ -17251,7 +17355,7 @@
       </p:sp>
       <p:sp>
         <p:nvSpPr>
-          <p:cNvPr id="1536266135" name="Flèche : pentagone 28174069"/>
+          <p:cNvPr id="2062874014" name="Flèche : pentagone 28174069"/>
           <p:cNvSpPr/>
           <p:nvPr/>
         </p:nvSpPr>
@@ -17296,7 +17400,7 @@
       </p:sp>
       <p:sp>
         <p:nvSpPr>
-          <p:cNvPr id="516152097" name="Flèche : pentagone 978127220"/>
+          <p:cNvPr id="232941230" name="Flèche : pentagone 978127220"/>
           <p:cNvSpPr/>
           <p:nvPr/>
         </p:nvSpPr>
@@ -17341,7 +17445,7 @@
       </p:sp>
       <p:sp>
         <p:nvSpPr>
-          <p:cNvPr id="798754539" name="ZoneTexte 1693594013"/>
+          <p:cNvPr id="1960072083" name="ZoneTexte 1693594013"/>
           <p:cNvSpPr txBox="1"/>
           <p:nvPr/>
         </p:nvSpPr>
@@ -17706,7 +17810,7 @@
       </p:sp>
       <p:sp>
         <p:nvSpPr>
-          <p:cNvPr id="98862067" name="ZoneTexte 1975797288"/>
+          <p:cNvPr id="493289205" name="ZoneTexte 1975797288"/>
           <p:cNvSpPr txBox="1"/>
           <p:nvPr/>
         </p:nvSpPr>
@@ -17746,7 +17850,7 @@
       </p:sp>
       <p:sp>
         <p:nvSpPr>
-          <p:cNvPr id="1009145032" name="ZoneTexte 2064865984"/>
+          <p:cNvPr id="689353438" name="ZoneTexte 2064865984"/>
           <p:cNvSpPr txBox="1"/>
           <p:nvPr/>
         </p:nvSpPr>
@@ -18011,7 +18115,7 @@
       </p:sp>
       <p:sp>
         <p:nvSpPr>
-          <p:cNvPr id="1723285425" name="ZoneTexte 1387173154"/>
+          <p:cNvPr id="696247600" name="ZoneTexte 1387173154"/>
           <p:cNvSpPr txBox="1"/>
           <p:nvPr/>
         </p:nvSpPr>
@@ -18391,7 +18495,7 @@
       </p:sp>
       <p:sp>
         <p:nvSpPr>
-          <p:cNvPr id="1230780005" name="ZoneTexte 523755832"/>
+          <p:cNvPr id="606330411" name="ZoneTexte 523755832"/>
           <p:cNvSpPr txBox="1"/>
           <p:nvPr/>
         </p:nvSpPr>
@@ -18887,7 +18991,7 @@
       </p:sp>
       <p:cxnSp>
         <p:nvCxnSpPr>
-          <p:cNvPr id="1474953873" name="Connecteur droit 2085669542"/>
+          <p:cNvPr id="1988246879" name="Connecteur droit 2085669542"/>
           <p:cNvCxnSpPr/>
           <p:nvPr/>
         </p:nvCxnSpPr>
@@ -18930,7 +19034,7 @@
       </p:cxnSp>
       <p:sp>
         <p:nvSpPr>
-          <p:cNvPr id="809411242" name="ZoneTexte 34398067"/>
+          <p:cNvPr id="1434430285" name="ZoneTexte 34398067"/>
           <p:cNvSpPr txBox="1"/>
           <p:nvPr/>
         </p:nvSpPr>
@@ -18973,7 +19077,7 @@
       </p:sp>
       <p:sp>
         <p:nvSpPr>
-          <p:cNvPr id="1908623244" name="ZoneTexte 273581705"/>
+          <p:cNvPr id="1911340615" name="ZoneTexte 273581705"/>
           <p:cNvSpPr txBox="1"/>
           <p:nvPr/>
         </p:nvSpPr>
@@ -19271,7 +19375,7 @@
       </p:sp>
       <p:sp>
         <p:nvSpPr>
-          <p:cNvPr id="823073506" name="ZoneTexte 1727393832"/>
+          <p:cNvPr id="623220984" name="ZoneTexte 1727393832"/>
           <p:cNvSpPr txBox="1"/>
           <p:nvPr/>
         </p:nvSpPr>
@@ -19313,7 +19417,7 @@
       </p:sp>
       <p:sp>
         <p:nvSpPr>
-          <p:cNvPr id="103051938" name="ZoneTexte 504516740"/>
+          <p:cNvPr id="420382653" name="ZoneTexte 504516740"/>
           <p:cNvSpPr txBox="1"/>
           <p:nvPr/>
         </p:nvSpPr>
@@ -19355,7 +19459,7 @@
       </p:sp>
       <p:sp>
         <p:nvSpPr>
-          <p:cNvPr id="973084372" name="ZoneTexte 1"/>
+          <p:cNvPr id="1063113486" name="ZoneTexte 1"/>
           <p:cNvSpPr txBox="1"/>
           <p:nvPr/>
         </p:nvSpPr>
@@ -20818,7 +20922,7 @@
       </p:sp>
       <p:sp>
         <p:nvSpPr>
-          <p:cNvPr id="1888522687" name="ZoneTexte 2"/>
+          <p:cNvPr id="1557284179" name="ZoneTexte 2"/>
           <p:cNvSpPr txBox="1"/>
           <p:nvPr/>
         </p:nvSpPr>
@@ -21356,7 +21460,7 @@
       </p:sp>
       <p:sp>
         <p:nvSpPr>
-          <p:cNvPr id="1646649983" name=""/>
+          <p:cNvPr id="730182817" name=""/>
           <p:cNvSpPr/>
           <p:nvPr/>
         </p:nvSpPr>
@@ -21396,7 +21500,7 @@
       </p:sp>
       <p:sp>
         <p:nvSpPr>
-          <p:cNvPr id="1304818017" name="Rectangle : avec coins arrondis en haut 1151560973"/>
+          <p:cNvPr id="811805231" name="Rectangle : avec coins arrondis en haut 1151560973"/>
           <p:cNvSpPr/>
           <p:nvPr/>
         </p:nvSpPr>
@@ -21444,7 +21548,7 @@
       </p:sp>
       <p:sp>
         <p:nvSpPr>
-          <p:cNvPr id="196159894" name=""/>
+          <p:cNvPr id="53983420" name=""/>
           <p:cNvSpPr/>
           <p:nvPr/>
         </p:nvSpPr>
@@ -21484,7 +21588,7 @@
       </p:sp>
       <p:sp>
         <p:nvSpPr>
-          <p:cNvPr id="1490512775" name="Rectangle : avec coins arrondis en haut 1151560973"/>
+          <p:cNvPr id="1002960525" name="Rectangle : avec coins arrondis en haut 1151560973"/>
           <p:cNvSpPr/>
           <p:nvPr/>
         </p:nvSpPr>
@@ -21532,7 +21636,7 @@
       </p:sp>
       <p:sp>
         <p:nvSpPr>
-          <p:cNvPr id="1216649628" name=""/>
+          <p:cNvPr id="1132120945" name=""/>
           <p:cNvSpPr/>
           <p:nvPr/>
         </p:nvSpPr>
@@ -21572,7 +21676,7 @@
       </p:sp>
       <p:sp>
         <p:nvSpPr>
-          <p:cNvPr id="36892449" name="Rectangle : avec coins arrondis en haut 1151560973"/>
+          <p:cNvPr id="1519960718" name="Rectangle : avec coins arrondis en haut 1151560973"/>
           <p:cNvSpPr/>
           <p:nvPr/>
         </p:nvSpPr>
@@ -21620,7 +21724,7 @@
       </p:sp>
       <p:sp>
         <p:nvSpPr>
-          <p:cNvPr id="1856512423" name=""/>
+          <p:cNvPr id="76371122" name=""/>
           <p:cNvSpPr txBox="1"/>
           <p:nvPr/>
         </p:nvSpPr>
@@ -21685,7 +21789,7 @@
       </p:sp>
       <p:sp>
         <p:nvSpPr>
-          <p:cNvPr id="1498809153" name=""/>
+          <p:cNvPr id="1003727244" name=""/>
           <p:cNvSpPr txBox="1"/>
           <p:nvPr/>
         </p:nvSpPr>
@@ -21814,7 +21918,7 @@
       </p:sp>
       <p:sp>
         <p:nvSpPr>
-          <p:cNvPr id="801235540" name=""/>
+          <p:cNvPr id="1627793609" name=""/>
           <p:cNvSpPr/>
           <p:nvPr/>
         </p:nvSpPr>
@@ -21885,7 +21989,7 @@
       </p:sp>
       <p:sp>
         <p:nvSpPr>
-          <p:cNvPr id="2009595527" name="Flèche : pentagone 1610574377"/>
+          <p:cNvPr id="1124359758" name="Flèche : pentagone 1610574377"/>
           <p:cNvSpPr/>
           <p:nvPr/>
         </p:nvSpPr>
@@ -21930,7 +22034,7 @@
       </p:sp>
       <p:sp>
         <p:nvSpPr>
-          <p:cNvPr id="838437822" name="Flèche : pentagone 463861063"/>
+          <p:cNvPr id="1081938602" name="Flèche : pentagone 463861063"/>
           <p:cNvSpPr/>
           <p:nvPr/>
         </p:nvSpPr>
@@ -21975,7 +22079,7 @@
       </p:sp>
       <p:sp>
         <p:nvSpPr>
-          <p:cNvPr id="70271975" name="Flèche : pentagone 272004907"/>
+          <p:cNvPr id="2132080416" name="Flèche : pentagone 272004907"/>
           <p:cNvSpPr/>
           <p:nvPr/>
         </p:nvSpPr>
@@ -22053,7 +22157,7 @@
       </p:grpSpPr>
       <p:cxnSp>
         <p:nvCxnSpPr>
-          <p:cNvPr id="430382027" name="Connecteur droit 1942366049"/>
+          <p:cNvPr id="95804984" name="Connecteur droit 1942366049"/>
           <p:cNvCxnSpPr/>
           <p:nvPr/>
         </p:nvCxnSpPr>
@@ -22096,7 +22200,7 @@
       </p:cxnSp>
       <p:sp>
         <p:nvSpPr>
-          <p:cNvPr id="174979813" name="ZoneTexte 483029020"/>
+          <p:cNvPr id="150927969" name="ZoneTexte 483029020"/>
           <p:cNvSpPr txBox="1"/>
           <p:nvPr/>
         </p:nvSpPr>
@@ -22136,7 +22240,7 @@
       </p:sp>
       <p:cxnSp>
         <p:nvCxnSpPr>
-          <p:cNvPr id="82712784" name="Connecteur droit 626166318"/>
+          <p:cNvPr id="198392764" name="Connecteur droit 626166318"/>
           <p:cNvCxnSpPr/>
           <p:nvPr/>
         </p:nvCxnSpPr>
@@ -22179,7 +22283,7 @@
       </p:cxnSp>
       <p:sp>
         <p:nvSpPr>
-          <p:cNvPr id="799372527" name="ZoneTexte 2021489157"/>
+          <p:cNvPr id="357162947" name="ZoneTexte 2021489157"/>
           <p:cNvSpPr txBox="1"/>
           <p:nvPr/>
         </p:nvSpPr>
@@ -22219,7 +22323,7 @@
       </p:sp>
       <p:cxnSp>
         <p:nvCxnSpPr>
-          <p:cNvPr id="2004872439" name="Connecteur droit 1991074862"/>
+          <p:cNvPr id="1532053423" name="Connecteur droit 1991074862"/>
           <p:cNvCxnSpPr/>
           <p:nvPr/>
         </p:nvCxnSpPr>
@@ -22262,7 +22366,7 @@
       </p:cxnSp>
       <p:sp>
         <p:nvSpPr>
-          <p:cNvPr id="1924485992" name="ZoneTexte 1094835336"/>
+          <p:cNvPr id="8208165" name="ZoneTexte 1094835336"/>
           <p:cNvSpPr txBox="1"/>
           <p:nvPr/>
         </p:nvSpPr>
@@ -22344,7 +22448,7 @@
       </p:sp>
       <p:sp>
         <p:nvSpPr>
-          <p:cNvPr id="1913014898" name="Rectangle : avec coins arrondis en haut 1574209032"/>
+          <p:cNvPr id="711139754" name="Rectangle : avec coins arrondis en haut 1574209032"/>
           <p:cNvSpPr/>
           <p:nvPr/>
         </p:nvSpPr>
@@ -22390,7 +22494,7 @@
       </p:sp>
       <p:sp>
         <p:nvSpPr>
-          <p:cNvPr id="673804834" name="Flèche : pentagone 521086653"/>
+          <p:cNvPr id="455469956" name="Flèche : pentagone 521086653"/>
           <p:cNvSpPr/>
           <p:nvPr/>
         </p:nvSpPr>
@@ -22435,7 +22539,7 @@
       </p:sp>
       <p:sp>
         <p:nvSpPr>
-          <p:cNvPr id="183230507" name="Flèche : pentagone 1507310733"/>
+          <p:cNvPr id="565981780" name="Flèche : pentagone 1507310733"/>
           <p:cNvSpPr/>
           <p:nvPr/>
         </p:nvSpPr>
@@ -22480,7 +22584,7 @@
       </p:sp>
       <p:sp>
         <p:nvSpPr>
-          <p:cNvPr id="1800432709" name="Flèche : pentagone 732388424"/>
+          <p:cNvPr id="597259083" name="Flèche : pentagone 732388424"/>
           <p:cNvSpPr/>
           <p:nvPr/>
         </p:nvSpPr>
@@ -22525,7 +22629,7 @@
       </p:sp>
       <p:sp>
         <p:nvSpPr>
-          <p:cNvPr id="272964049" name="Flèche : pentagone 326874465"/>
+          <p:cNvPr id="175324915" name="Flèche : pentagone 326874465"/>
           <p:cNvSpPr/>
           <p:nvPr/>
         </p:nvSpPr>
@@ -22570,7 +22674,7 @@
       </p:sp>
       <p:sp>
         <p:nvSpPr>
-          <p:cNvPr id="1259108058" name="Flèche : pentagone 2090650957"/>
+          <p:cNvPr id="1081311713" name="Flèche : pentagone 2090650957"/>
           <p:cNvSpPr/>
           <p:nvPr/>
         </p:nvSpPr>
@@ -22615,7 +22719,7 @@
       </p:sp>
       <p:sp>
         <p:nvSpPr>
-          <p:cNvPr id="1300586960" name="ZoneTexte 1374103996"/>
+          <p:cNvPr id="1339690917" name="ZoneTexte 1374103996"/>
           <p:cNvSpPr txBox="1"/>
           <p:nvPr/>
         </p:nvSpPr>
@@ -22902,7 +23006,7 @@
       </p:sp>
       <p:sp>
         <p:nvSpPr>
-          <p:cNvPr id="416788771" name="ZoneTexte 1748705365"/>
+          <p:cNvPr id="612633306" name="ZoneTexte 1748705365"/>
           <p:cNvSpPr txBox="1"/>
           <p:nvPr/>
         </p:nvSpPr>
@@ -22942,7 +23046,7 @@
       </p:sp>
       <p:cxnSp>
         <p:nvCxnSpPr>
-          <p:cNvPr id="1437050363" name="Connecteur droit 1556830908"/>
+          <p:cNvPr id="1121885948" name="Connecteur droit 1556830908"/>
           <p:cNvCxnSpPr/>
           <p:nvPr/>
         </p:nvCxnSpPr>
@@ -22985,7 +23089,7 @@
       </p:cxnSp>
       <p:sp>
         <p:nvSpPr>
-          <p:cNvPr id="1964739457" name="ZoneTexte 409639257"/>
+          <p:cNvPr id="32618732" name="ZoneTexte 409639257"/>
           <p:cNvSpPr txBox="1"/>
           <p:nvPr/>
         </p:nvSpPr>
@@ -23035,7 +23139,7 @@
       </p:sp>
       <p:sp>
         <p:nvSpPr>
-          <p:cNvPr id="876834938" name="ZoneTexte 1168472887"/>
+          <p:cNvPr id="930512383" name="ZoneTexte 1168472887"/>
           <p:cNvSpPr txBox="1"/>
           <p:nvPr/>
         </p:nvSpPr>
@@ -23320,7 +23424,7 @@
       </p:sp>
       <p:sp>
         <p:nvSpPr>
-          <p:cNvPr id="1082310704" name="ZoneTexte 114796530"/>
+          <p:cNvPr id="419458295" name="ZoneTexte 114796530"/>
           <p:cNvSpPr txBox="1"/>
           <p:nvPr/>
         </p:nvSpPr>
@@ -23698,7 +23802,7 @@
       </p:sp>
       <p:sp>
         <p:nvSpPr>
-          <p:cNvPr id="14217906" name="ZoneTexte 1085068195"/>
+          <p:cNvPr id="1119647531" name="ZoneTexte 1085068195"/>
           <p:cNvSpPr txBox="1"/>
           <p:nvPr/>
         </p:nvSpPr>
@@ -24824,7 +24928,7 @@
       </p:sp>
       <p:sp>
         <p:nvSpPr>
-          <p:cNvPr id="1671970107" name="Étoile : 5 branches 278736380"/>
+          <p:cNvPr id="730980087" name="Étoile : 5 branches 278736380"/>
           <p:cNvSpPr/>
           <p:nvPr/>
         </p:nvSpPr>
@@ -24871,7 +24975,7 @@
       </p:sp>
       <p:sp>
         <p:nvSpPr>
-          <p:cNvPr id="528090074" name="Étoile : 5 branches 1495350449"/>
+          <p:cNvPr id="143431757" name="Étoile : 5 branches 1495350449"/>
           <p:cNvSpPr/>
           <p:nvPr/>
         </p:nvSpPr>
@@ -24918,7 +25022,7 @@
       </p:sp>
       <p:sp>
         <p:nvSpPr>
-          <p:cNvPr id="345677672" name="Étoile : 5 branches 79046386"/>
+          <p:cNvPr id="718567353" name="Étoile : 5 branches 79046386"/>
           <p:cNvSpPr/>
           <p:nvPr/>
         </p:nvSpPr>
@@ -24965,7 +25069,7 @@
       </p:sp>
       <p:sp>
         <p:nvSpPr>
-          <p:cNvPr id="1924727752" name="Étoile : 5 branches 749256076"/>
+          <p:cNvPr id="1641364473" name="Étoile : 5 branches 749256076"/>
           <p:cNvSpPr/>
           <p:nvPr/>
         </p:nvSpPr>
@@ -25012,7 +25116,7 @@
       </p:sp>
       <p:sp>
         <p:nvSpPr>
-          <p:cNvPr id="1596036746" name="Étoile : 5 branches 411245083"/>
+          <p:cNvPr id="853054570" name="Étoile : 5 branches 411245083"/>
           <p:cNvSpPr/>
           <p:nvPr/>
         </p:nvSpPr>
@@ -25059,7 +25163,7 @@
       </p:sp>
       <p:sp>
         <p:nvSpPr>
-          <p:cNvPr id="897198545" name="ZoneTexte 496444952"/>
+          <p:cNvPr id="1414674204" name="ZoneTexte 496444952"/>
           <p:cNvSpPr txBox="1"/>
           <p:nvPr/>
         </p:nvSpPr>
@@ -25101,7 +25205,7 @@
       </p:sp>
       <p:sp>
         <p:nvSpPr>
-          <p:cNvPr id="1196009927" name="ZoneTexte 474433989"/>
+          <p:cNvPr id="990088676" name="ZoneTexte 474433989"/>
           <p:cNvSpPr txBox="1"/>
           <p:nvPr/>
         </p:nvSpPr>
@@ -25143,7 +25247,7 @@
       </p:sp>
       <p:sp>
         <p:nvSpPr>
-          <p:cNvPr id="156511569" name="ZoneTexte 1"/>
+          <p:cNvPr id="1171674373" name="ZoneTexte 1"/>
           <p:cNvSpPr txBox="1"/>
           <p:nvPr/>
         </p:nvSpPr>
@@ -25244,7 +25348,7 @@
       </p:sp>
       <p:sp>
         <p:nvSpPr>
-          <p:cNvPr id="730734905" name="ZoneTexte 2"/>
+          <p:cNvPr id="1555866858" name="ZoneTexte 2"/>
           <p:cNvSpPr txBox="1"/>
           <p:nvPr/>
         </p:nvSpPr>
@@ -25362,7 +25466,7 @@
       </p:sp>
       <p:sp>
         <p:nvSpPr>
-          <p:cNvPr id="104550723" name=""/>
+          <p:cNvPr id="821257776" name=""/>
           <p:cNvSpPr/>
           <p:nvPr/>
         </p:nvSpPr>
@@ -25433,7 +25537,7 @@
       </p:sp>
       <p:sp>
         <p:nvSpPr>
-          <p:cNvPr id="363585800" name="Flèche : pentagone 1507310733"/>
+          <p:cNvPr id="1747769726" name="Flèche : pentagone 1507310733"/>
           <p:cNvSpPr/>
           <p:nvPr/>
         </p:nvSpPr>
@@ -25478,7 +25582,7 @@
       </p:sp>
       <p:sp>
         <p:nvSpPr>
-          <p:cNvPr id="1679626018" name="Flèche : pentagone 732388424"/>
+          <p:cNvPr id="1686558055" name="Flèche : pentagone 732388424"/>
           <p:cNvSpPr/>
           <p:nvPr/>
         </p:nvSpPr>
@@ -25523,7 +25627,7 @@
       </p:sp>
       <p:sp>
         <p:nvSpPr>
-          <p:cNvPr id="2056903797" name="Flèche : pentagone 326874465"/>
+          <p:cNvPr id="969801268" name="Flèche : pentagone 326874465"/>
           <p:cNvSpPr/>
           <p:nvPr/>
         </p:nvSpPr>
@@ -25601,7 +25705,7 @@
       </p:grpSpPr>
       <p:sp>
         <p:nvSpPr>
-          <p:cNvPr id="1619566952" name="ZoneTexte 273581705"/>
+          <p:cNvPr id="1451923796" name="ZoneTexte 273581705"/>
           <p:cNvSpPr txBox="1"/>
           <p:nvPr/>
         </p:nvSpPr>
@@ -25899,7 +26003,7 @@
       </p:sp>
       <p:cxnSp>
         <p:nvCxnSpPr>
-          <p:cNvPr id="1755368285" name="Connecteur droit 1094832104"/>
+          <p:cNvPr id="574028893" name="Connecteur droit 1094832104"/>
           <p:cNvCxnSpPr/>
           <p:nvPr/>
         </p:nvCxnSpPr>
@@ -25942,7 +26046,7 @@
       </p:cxnSp>
       <p:sp>
         <p:nvSpPr>
-          <p:cNvPr id="1063117998" name="ZoneTexte 2078543737"/>
+          <p:cNvPr id="1987864966" name="ZoneTexte 2078543737"/>
           <p:cNvSpPr txBox="1"/>
           <p:nvPr/>
         </p:nvSpPr>
@@ -25982,7 +26086,7 @@
       </p:sp>
       <p:cxnSp>
         <p:nvCxnSpPr>
-          <p:cNvPr id="405169791" name="Connecteur droit 853743145"/>
+          <p:cNvPr id="1162044449" name="Connecteur droit 853743145"/>
           <p:cNvCxnSpPr/>
           <p:nvPr/>
         </p:nvCxnSpPr>
@@ -26025,7 +26129,7 @@
       </p:cxnSp>
       <p:sp>
         <p:nvSpPr>
-          <p:cNvPr id="598318417" name="ZoneTexte 1473119298"/>
+          <p:cNvPr id="1383574918" name="ZoneTexte 1473119298"/>
           <p:cNvSpPr txBox="1"/>
           <p:nvPr/>
         </p:nvSpPr>
@@ -26065,7 +26169,7 @@
       </p:sp>
       <p:cxnSp>
         <p:nvCxnSpPr>
-          <p:cNvPr id="1966894046" name="Connecteur droit 1727809509"/>
+          <p:cNvPr id="67433809" name="Connecteur droit 1727809509"/>
           <p:cNvCxnSpPr/>
           <p:nvPr/>
         </p:nvCxnSpPr>
@@ -26108,7 +26212,7 @@
       </p:cxnSp>
       <p:sp>
         <p:nvSpPr>
-          <p:cNvPr id="1624677059" name="ZoneTexte 759238070"/>
+          <p:cNvPr id="1401575922" name="ZoneTexte 759238070"/>
           <p:cNvSpPr txBox="1"/>
           <p:nvPr/>
         </p:nvSpPr>
@@ -26183,7 +26287,7 @@
       </p:sp>
       <p:sp>
         <p:nvSpPr>
-          <p:cNvPr id="99692570" name="Rectangle : avec coins arrondis en haut 965147191"/>
+          <p:cNvPr id="1037362012" name="Rectangle : avec coins arrondis en haut 965147191"/>
           <p:cNvSpPr/>
           <p:nvPr/>
         </p:nvSpPr>
@@ -26229,7 +26333,7 @@
       </p:sp>
       <p:sp>
         <p:nvSpPr>
-          <p:cNvPr id="1988462519" name="Flèche : pentagone 2070329900"/>
+          <p:cNvPr id="1650924775" name="Flèche : pentagone 2070329900"/>
           <p:cNvSpPr/>
           <p:nvPr/>
         </p:nvSpPr>
@@ -26274,7 +26378,7 @@
       </p:sp>
       <p:sp>
         <p:nvSpPr>
-          <p:cNvPr id="1215054089" name="Flèche : pentagone 1325137089"/>
+          <p:cNvPr id="619586900" name="Flèche : pentagone 1325137089"/>
           <p:cNvSpPr/>
           <p:nvPr/>
         </p:nvSpPr>
@@ -26319,7 +26423,7 @@
       </p:sp>
       <p:sp>
         <p:nvSpPr>
-          <p:cNvPr id="853385949" name="Flèche : pentagone 295922856"/>
+          <p:cNvPr id="1252195619" name="Flèche : pentagone 295922856"/>
           <p:cNvSpPr/>
           <p:nvPr/>
         </p:nvSpPr>
@@ -26364,7 +26468,7 @@
       </p:sp>
       <p:sp>
         <p:nvSpPr>
-          <p:cNvPr id="592330365" name="Flèche : pentagone 1961547672"/>
+          <p:cNvPr id="2074896887" name="Flèche : pentagone 1961547672"/>
           <p:cNvSpPr/>
           <p:nvPr/>
         </p:nvSpPr>
@@ -26409,7 +26513,7 @@
       </p:sp>
       <p:sp>
         <p:nvSpPr>
-          <p:cNvPr id="2104440547" name="Flèche : pentagone 1305647833"/>
+          <p:cNvPr id="256593749" name="Flèche : pentagone 1305647833"/>
           <p:cNvSpPr/>
           <p:nvPr/>
         </p:nvSpPr>
@@ -26454,7 +26558,7 @@
       </p:sp>
       <p:sp>
         <p:nvSpPr>
-          <p:cNvPr id="110162883" name="ZoneTexte 545814566"/>
+          <p:cNvPr id="1891835713" name="ZoneTexte 545814566"/>
           <p:cNvSpPr txBox="1"/>
           <p:nvPr/>
         </p:nvSpPr>
@@ -26756,7 +26860,7 @@
       </p:sp>
       <p:sp>
         <p:nvSpPr>
-          <p:cNvPr id="302053484" name="ZoneTexte 671978155"/>
+          <p:cNvPr id="2004688683" name="ZoneTexte 671978155"/>
           <p:cNvSpPr txBox="1"/>
           <p:nvPr/>
         </p:nvSpPr>
@@ -26796,7 +26900,7 @@
       </p:sp>
       <p:cxnSp>
         <p:nvCxnSpPr>
-          <p:cNvPr id="440044500" name="Connecteur droit 637589304"/>
+          <p:cNvPr id="499437768" name="Connecteur droit 637589304"/>
           <p:cNvCxnSpPr/>
           <p:nvPr/>
         </p:nvCxnSpPr>
@@ -26839,7 +26943,7 @@
       </p:cxnSp>
       <p:sp>
         <p:nvSpPr>
-          <p:cNvPr id="1342353408" name="ZoneTexte 172075623"/>
+          <p:cNvPr id="1899466328" name="ZoneTexte 172075623"/>
           <p:cNvSpPr txBox="1"/>
           <p:nvPr/>
         </p:nvSpPr>
@@ -26889,7 +26993,7 @@
       </p:sp>
       <p:sp>
         <p:nvSpPr>
-          <p:cNvPr id="627853383" name="ZoneTexte 1642812764"/>
+          <p:cNvPr id="1326682116" name="ZoneTexte 1642812764"/>
           <p:cNvSpPr txBox="1"/>
           <p:nvPr/>
         </p:nvSpPr>
@@ -27078,7 +27182,7 @@
       </p:sp>
       <p:sp>
         <p:nvSpPr>
-          <p:cNvPr id="587345642" name="Étoile : 7 branches 1681961038"/>
+          <p:cNvPr id="1498978133" name="Étoile : 7 branches 1681961038"/>
           <p:cNvSpPr/>
           <p:nvPr/>
         </p:nvSpPr>
@@ -27125,7 +27229,7 @@
       </p:sp>
       <p:sp>
         <p:nvSpPr>
-          <p:cNvPr id="2002461301" name="Étoile : 7 branches 1476951547"/>
+          <p:cNvPr id="1362992294" name="Étoile : 7 branches 1476951547"/>
           <p:cNvSpPr/>
           <p:nvPr/>
         </p:nvSpPr>
@@ -27172,7 +27276,7 @@
       </p:sp>
       <p:sp>
         <p:nvSpPr>
-          <p:cNvPr id="347159456" name="Étoile : 7 branches 1520826925"/>
+          <p:cNvPr id="1859403635" name="Étoile : 7 branches 1520826925"/>
           <p:cNvSpPr/>
           <p:nvPr/>
         </p:nvSpPr>
@@ -27219,7 +27323,7 @@
       </p:sp>
       <p:sp>
         <p:nvSpPr>
-          <p:cNvPr id="1886438639" name="ZoneTexte 1219899073"/>
+          <p:cNvPr id="1451763325" name="ZoneTexte 1219899073"/>
           <p:cNvSpPr txBox="1"/>
           <p:nvPr/>
         </p:nvSpPr>
@@ -27259,7 +27363,7 @@
       </p:sp>
       <p:sp>
         <p:nvSpPr>
-          <p:cNvPr id="179123377" name="ZoneTexte 1283574123"/>
+          <p:cNvPr id="1860200377" name="ZoneTexte 1283574123"/>
           <p:cNvSpPr txBox="1"/>
           <p:nvPr/>
         </p:nvSpPr>
@@ -28242,7 +28346,7 @@
       </p:sp>
       <p:sp>
         <p:nvSpPr>
-          <p:cNvPr id="866412808" name="ZoneTexte 790352176"/>
+          <p:cNvPr id="245711859" name="ZoneTexte 790352176"/>
           <p:cNvSpPr txBox="1"/>
           <p:nvPr/>
         </p:nvSpPr>
@@ -28284,7 +28388,7 @@
       </p:sp>
       <p:sp>
         <p:nvSpPr>
-          <p:cNvPr id="865375212" name="ZoneTexte 2025740189"/>
+          <p:cNvPr id="1962243826" name="ZoneTexte 2025740189"/>
           <p:cNvSpPr txBox="1"/>
           <p:nvPr/>
         </p:nvSpPr>
@@ -28341,7 +28445,7 @@
       </p:sp>
       <p:sp>
         <p:nvSpPr>
-          <p:cNvPr id="1149611499" name=""/>
+          <p:cNvPr id="1095328712" name=""/>
           <p:cNvSpPr/>
           <p:nvPr/>
         </p:nvSpPr>
@@ -28381,7 +28485,7 @@
       </p:sp>
       <p:sp>
         <p:nvSpPr>
-          <p:cNvPr id="904018832" name="Rectangle : avec coins arrondis en haut 1151560973"/>
+          <p:cNvPr id="1768024086" name="Rectangle : avec coins arrondis en haut 1151560973"/>
           <p:cNvSpPr/>
           <p:nvPr/>
         </p:nvSpPr>
@@ -28429,7 +28533,7 @@
       </p:sp>
       <p:sp>
         <p:nvSpPr>
-          <p:cNvPr id="196364336" name=""/>
+          <p:cNvPr id="1129965557" name=""/>
           <p:cNvSpPr/>
           <p:nvPr/>
         </p:nvSpPr>
@@ -28469,7 +28573,7 @@
       </p:sp>
       <p:sp>
         <p:nvSpPr>
-          <p:cNvPr id="796726063" name="Rectangle : avec coins arrondis en haut 1151560973"/>
+          <p:cNvPr id="2075913297" name="Rectangle : avec coins arrondis en haut 1151560973"/>
           <p:cNvSpPr/>
           <p:nvPr/>
         </p:nvSpPr>
@@ -28517,7 +28621,7 @@
       </p:sp>
       <p:sp>
         <p:nvSpPr>
-          <p:cNvPr id="375607307" name=""/>
+          <p:cNvPr id="634387932" name=""/>
           <p:cNvSpPr/>
           <p:nvPr/>
         </p:nvSpPr>
@@ -28557,7 +28661,7 @@
       </p:sp>
       <p:sp>
         <p:nvSpPr>
-          <p:cNvPr id="216590693" name="Rectangle : avec coins arrondis en haut 1151560973"/>
+          <p:cNvPr id="749987179" name="Rectangle : avec coins arrondis en haut 1151560973"/>
           <p:cNvSpPr/>
           <p:nvPr/>
         </p:nvSpPr>
@@ -28605,7 +28709,7 @@
       </p:sp>
       <p:sp>
         <p:nvSpPr>
-          <p:cNvPr id="892362179" name=""/>
+          <p:cNvPr id="1302822572" name=""/>
           <p:cNvSpPr txBox="1"/>
           <p:nvPr/>
         </p:nvSpPr>
@@ -28733,7 +28837,7 @@
       </p:sp>
       <p:sp>
         <p:nvSpPr>
-          <p:cNvPr id="765230907" name=""/>
+          <p:cNvPr id="89460304" name=""/>
           <p:cNvSpPr txBox="1"/>
           <p:nvPr/>
         </p:nvSpPr>
@@ -28856,7 +28960,7 @@
       </p:sp>
       <p:sp>
         <p:nvSpPr>
-          <p:cNvPr id="1606317002" name=""/>
+          <p:cNvPr id="838903772" name=""/>
           <p:cNvSpPr/>
           <p:nvPr/>
         </p:nvSpPr>
@@ -28927,7 +29031,7 @@
       </p:sp>
       <p:sp>
         <p:nvSpPr>
-          <p:cNvPr id="2094348811" name="Flèche : pentagone 1325137089"/>
+          <p:cNvPr id="688203079" name="Flèche : pentagone 1325137089"/>
           <p:cNvSpPr/>
           <p:nvPr/>
         </p:nvSpPr>
@@ -28972,7 +29076,7 @@
       </p:sp>
       <p:sp>
         <p:nvSpPr>
-          <p:cNvPr id="1275189834" name="Flèche : pentagone 295922856"/>
+          <p:cNvPr id="248119760" name="Flèche : pentagone 295922856"/>
           <p:cNvSpPr/>
           <p:nvPr/>
         </p:nvSpPr>
@@ -29017,7 +29121,7 @@
       </p:sp>
       <p:sp>
         <p:nvSpPr>
-          <p:cNvPr id="1132646117" name="Flèche : pentagone 1961547672"/>
+          <p:cNvPr id="921256989" name="Flèche : pentagone 1961547672"/>
           <p:cNvSpPr/>
           <p:nvPr/>
         </p:nvSpPr>
@@ -29095,7 +29199,7 @@
       </p:grpSpPr>
       <p:cxnSp>
         <p:nvCxnSpPr>
-          <p:cNvPr id="1462906287" name="Connecteur droit 266926011"/>
+          <p:cNvPr id="1107451739" name="Connecteur droit 266926011"/>
           <p:cNvCxnSpPr/>
           <p:nvPr/>
         </p:nvCxnSpPr>
@@ -29138,7 +29242,7 @@
       </p:cxnSp>
       <p:sp>
         <p:nvSpPr>
-          <p:cNvPr id="999414230" name="ZoneTexte 1043763612"/>
+          <p:cNvPr id="39711983" name="ZoneTexte 1043763612"/>
           <p:cNvSpPr txBox="1"/>
           <p:nvPr/>
         </p:nvSpPr>
@@ -29178,7 +29282,7 @@
       </p:sp>
       <p:cxnSp>
         <p:nvCxnSpPr>
-          <p:cNvPr id="1320630755" name="Connecteur droit 1586327141"/>
+          <p:cNvPr id="572972557" name="Connecteur droit 1586327141"/>
           <p:cNvCxnSpPr/>
           <p:nvPr/>
         </p:nvCxnSpPr>
@@ -29221,7 +29325,7 @@
       </p:cxnSp>
       <p:sp>
         <p:nvSpPr>
-          <p:cNvPr id="505838213" name="ZoneTexte 1691387439"/>
+          <p:cNvPr id="1899457483" name="ZoneTexte 1691387439"/>
           <p:cNvSpPr txBox="1"/>
           <p:nvPr/>
         </p:nvSpPr>
@@ -29261,7 +29365,7 @@
       </p:sp>
       <p:cxnSp>
         <p:nvCxnSpPr>
-          <p:cNvPr id="134331858" name="Connecteur droit 1743707585"/>
+          <p:cNvPr id="206102866" name="Connecteur droit 1743707585"/>
           <p:cNvCxnSpPr/>
           <p:nvPr/>
         </p:nvCxnSpPr>
@@ -29304,7 +29408,7 @@
       </p:cxnSp>
       <p:sp>
         <p:nvSpPr>
-          <p:cNvPr id="1328024745" name="ZoneTexte 1503300725"/>
+          <p:cNvPr id="1457500196" name="ZoneTexte 1503300725"/>
           <p:cNvSpPr txBox="1"/>
           <p:nvPr/>
         </p:nvSpPr>
@@ -29386,7 +29490,7 @@
       </p:sp>
       <p:sp>
         <p:nvSpPr>
-          <p:cNvPr id="1545044518" name="Rectangle : avec coins arrondis en haut 1151560973"/>
+          <p:cNvPr id="2037496980" name="Rectangle : avec coins arrondis en haut 1151560973"/>
           <p:cNvSpPr/>
           <p:nvPr/>
         </p:nvSpPr>
@@ -29432,7 +29536,7 @@
       </p:sp>
       <p:sp>
         <p:nvSpPr>
-          <p:cNvPr id="777792133" name="Flèche : pentagone 1610574377"/>
+          <p:cNvPr id="1942296537" name="Flèche : pentagone 1610574377"/>
           <p:cNvSpPr/>
           <p:nvPr/>
         </p:nvSpPr>
@@ -29477,7 +29581,7 @@
       </p:sp>
       <p:sp>
         <p:nvSpPr>
-          <p:cNvPr id="1789544897" name="Flèche : pentagone 463861063"/>
+          <p:cNvPr id="1121759136" name="Flèche : pentagone 463861063"/>
           <p:cNvSpPr/>
           <p:nvPr/>
         </p:nvSpPr>
@@ -29522,7 +29626,7 @@
       </p:sp>
       <p:sp>
         <p:nvSpPr>
-          <p:cNvPr id="2061763220" name="Flèche : pentagone 272004907"/>
+          <p:cNvPr id="1689498139" name="Flèche : pentagone 272004907"/>
           <p:cNvSpPr/>
           <p:nvPr/>
         </p:nvSpPr>
@@ -29567,7 +29671,7 @@
       </p:sp>
       <p:sp>
         <p:nvSpPr>
-          <p:cNvPr id="506050948" name="Flèche : pentagone 28174069"/>
+          <p:cNvPr id="2117927727" name="Flèche : pentagone 28174069"/>
           <p:cNvSpPr/>
           <p:nvPr/>
         </p:nvSpPr>
@@ -29612,7 +29716,7 @@
       </p:sp>
       <p:sp>
         <p:nvSpPr>
-          <p:cNvPr id="871098605" name="Flèche : pentagone 978127220"/>
+          <p:cNvPr id="1992879959" name="Flèche : pentagone 978127220"/>
           <p:cNvSpPr/>
           <p:nvPr/>
         </p:nvSpPr>
@@ -29657,7 +29761,7 @@
       </p:sp>
       <p:sp>
         <p:nvSpPr>
-          <p:cNvPr id="1362587567" name="ZoneTexte 1693594013"/>
+          <p:cNvPr id="996890144" name="ZoneTexte 1693594013"/>
           <p:cNvSpPr txBox="1"/>
           <p:nvPr/>
         </p:nvSpPr>
@@ -30008,7 +30112,7 @@
       </p:sp>
       <p:sp>
         <p:nvSpPr>
-          <p:cNvPr id="791594837" name="ZoneTexte 1975797288"/>
+          <p:cNvPr id="1834342420" name="ZoneTexte 1975797288"/>
           <p:cNvSpPr txBox="1"/>
           <p:nvPr/>
         </p:nvSpPr>
@@ -30048,7 +30152,7 @@
       </p:sp>
       <p:sp>
         <p:nvSpPr>
-          <p:cNvPr id="1785441087" name="ZoneTexte 2064865984"/>
+          <p:cNvPr id="1348892442" name="ZoneTexte 2064865984"/>
           <p:cNvSpPr txBox="1"/>
           <p:nvPr/>
         </p:nvSpPr>
@@ -30270,7 +30374,7 @@
       </p:sp>
       <p:sp>
         <p:nvSpPr>
-          <p:cNvPr id="559939833" name="ZoneTexte 1387173154"/>
+          <p:cNvPr id="1127560200" name="ZoneTexte 1387173154"/>
           <p:cNvSpPr txBox="1"/>
           <p:nvPr/>
         </p:nvSpPr>
@@ -30522,7 +30626,7 @@
       </p:sp>
       <p:sp>
         <p:nvSpPr>
-          <p:cNvPr id="1796623550" name="ZoneTexte 523755832"/>
+          <p:cNvPr id="865256640" name="ZoneTexte 523755832"/>
           <p:cNvSpPr txBox="1"/>
           <p:nvPr/>
         </p:nvSpPr>
@@ -30782,7 +30886,7 @@
       </p:sp>
       <p:cxnSp>
         <p:nvCxnSpPr>
-          <p:cNvPr id="1865848553" name="Connecteur droit 2085669542"/>
+          <p:cNvPr id="1400833397" name="Connecteur droit 2085669542"/>
           <p:cNvCxnSpPr/>
           <p:nvPr/>
         </p:nvCxnSpPr>
@@ -30825,7 +30929,7 @@
       </p:cxnSp>
       <p:sp>
         <p:nvSpPr>
-          <p:cNvPr id="1974568478" name="ZoneTexte 34398067"/>
+          <p:cNvPr id="2072586787" name="ZoneTexte 34398067"/>
           <p:cNvSpPr txBox="1"/>
           <p:nvPr/>
         </p:nvSpPr>
@@ -30868,7 +30972,7 @@
       </p:sp>
       <p:sp>
         <p:nvSpPr>
-          <p:cNvPr id="1985722282" name="ZoneTexte 273581705"/>
+          <p:cNvPr id="1815105411" name="ZoneTexte 273581705"/>
           <p:cNvSpPr txBox="1"/>
           <p:nvPr/>
         </p:nvSpPr>
@@ -31166,7 +31270,7 @@
       </p:sp>
       <p:sp>
         <p:nvSpPr>
-          <p:cNvPr id="583906697" name="ZoneTexte 1727393832"/>
+          <p:cNvPr id="1444903832" name="ZoneTexte 1727393832"/>
           <p:cNvSpPr txBox="1"/>
           <p:nvPr/>
         </p:nvSpPr>
@@ -31208,7 +31312,7 @@
       </p:sp>
       <p:sp>
         <p:nvSpPr>
-          <p:cNvPr id="756532011" name="ZoneTexte 504516740"/>
+          <p:cNvPr id="1102876424" name="ZoneTexte 504516740"/>
           <p:cNvSpPr txBox="1"/>
           <p:nvPr/>
         </p:nvSpPr>
@@ -31250,7 +31354,7 @@
       </p:sp>
       <p:sp>
         <p:nvSpPr>
-          <p:cNvPr id="719016746" name="ZoneTexte 1"/>
+          <p:cNvPr id="1801707526" name="ZoneTexte 1"/>
           <p:cNvSpPr txBox="1"/>
           <p:nvPr/>
         </p:nvSpPr>
@@ -31361,7 +31465,7 @@
       </p:sp>
       <p:sp>
         <p:nvSpPr>
-          <p:cNvPr id="673794740" name="ZoneTexte 2"/>
+          <p:cNvPr id="2138140197" name="ZoneTexte 2"/>
           <p:cNvSpPr txBox="1"/>
           <p:nvPr/>
         </p:nvSpPr>
@@ -31445,7 +31549,7 @@
       </p:sp>
       <p:sp>
         <p:nvSpPr>
-          <p:cNvPr id="1755731485" name=""/>
+          <p:cNvPr id="885455867" name=""/>
           <p:cNvSpPr/>
           <p:nvPr/>
         </p:nvSpPr>
@@ -31485,7 +31589,7 @@
       </p:sp>
       <p:sp>
         <p:nvSpPr>
-          <p:cNvPr id="1880733768" name="Rectangle : avec coins arrondis en haut 1151560973"/>
+          <p:cNvPr id="58998078" name="Rectangle : avec coins arrondis en haut 1151560973"/>
           <p:cNvSpPr/>
           <p:nvPr/>
         </p:nvSpPr>
@@ -31533,7 +31637,7 @@
       </p:sp>
       <p:sp>
         <p:nvSpPr>
-          <p:cNvPr id="1224720377" name=""/>
+          <p:cNvPr id="1139299037" name=""/>
           <p:cNvSpPr/>
           <p:nvPr/>
         </p:nvSpPr>
@@ -31573,7 +31677,7 @@
       </p:sp>
       <p:sp>
         <p:nvSpPr>
-          <p:cNvPr id="1865570198" name="Rectangle : avec coins arrondis en haut 1151560973"/>
+          <p:cNvPr id="1434566368" name="Rectangle : avec coins arrondis en haut 1151560973"/>
           <p:cNvSpPr/>
           <p:nvPr/>
         </p:nvSpPr>
@@ -31621,7 +31725,7 @@
       </p:sp>
       <p:sp>
         <p:nvSpPr>
-          <p:cNvPr id="1967017288" name=""/>
+          <p:cNvPr id="1191782225" name=""/>
           <p:cNvSpPr/>
           <p:nvPr/>
         </p:nvSpPr>
@@ -31661,7 +31765,7 @@
       </p:sp>
       <p:sp>
         <p:nvSpPr>
-          <p:cNvPr id="523888935" name="Rectangle : avec coins arrondis en haut 1151560973"/>
+          <p:cNvPr id="1546108779" name="Rectangle : avec coins arrondis en haut 1151560973"/>
           <p:cNvSpPr/>
           <p:nvPr/>
         </p:nvSpPr>
@@ -31709,7 +31813,7 @@
       </p:sp>
       <p:sp>
         <p:nvSpPr>
-          <p:cNvPr id="1508839608" name=""/>
+          <p:cNvPr id="1247249300" name=""/>
           <p:cNvSpPr txBox="1"/>
           <p:nvPr/>
         </p:nvSpPr>
@@ -31760,7 +31864,7 @@
       </p:sp>
       <p:sp>
         <p:nvSpPr>
-          <p:cNvPr id="400021941" name=""/>
+          <p:cNvPr id="838184298" name=""/>
           <p:cNvSpPr txBox="1"/>
           <p:nvPr/>
         </p:nvSpPr>
@@ -31858,7 +31962,7 @@
       </p:sp>
       <p:sp>
         <p:nvSpPr>
-          <p:cNvPr id="1886535516" name=""/>
+          <p:cNvPr id="1069371944" name=""/>
           <p:cNvSpPr/>
           <p:nvPr/>
         </p:nvSpPr>
@@ -31929,7 +32033,7 @@
       </p:sp>
       <p:sp>
         <p:nvSpPr>
-          <p:cNvPr id="412315118" name="Flèche : pentagone 463861063"/>
+          <p:cNvPr id="1410232571" name="Flèche : pentagone 463861063"/>
           <p:cNvSpPr/>
           <p:nvPr/>
         </p:nvSpPr>
@@ -31974,7 +32078,7 @@
       </p:sp>
       <p:sp>
         <p:nvSpPr>
-          <p:cNvPr id="307816281" name="Flèche : pentagone 272004907"/>
+          <p:cNvPr id="602060082" name="Flèche : pentagone 272004907"/>
           <p:cNvSpPr/>
           <p:nvPr/>
         </p:nvSpPr>
@@ -32019,7 +32123,7 @@
       </p:sp>
       <p:sp>
         <p:nvSpPr>
-          <p:cNvPr id="561929146" name="Flèche : pentagone 28174069"/>
+          <p:cNvPr id="63431040" name="Flèche : pentagone 28174069"/>
           <p:cNvSpPr/>
           <p:nvPr/>
         </p:nvSpPr>
